--- a/case-study/deck/GGW_FNOL_Redesign.pptx
+++ b/case-study/deck/GGW_FNOL_Redesign.pptx
@@ -3009,7 +3009,7 @@
                 <a:ea typeface="Arial" pitchFamily="34" charset="-122"/>
                 <a:cs typeface="Arial" pitchFamily="34" charset="-120"/>
               </a:rPr>
-              <a:t>4,370 hours a year × €34.92, the true cost of one handler-hour. It is capacity, not cash. It turns into money only if those hours go to the backlog, or are absorbed by normal staff turnover.</a:t>
+              <a:t>4,370 hours a year × €34.92, the real cost of a handler-hour. This is capacity, not cash. It becomes money only if the hours go to the backlog, or are absorbed by normal staff turnover.</a:t>
             </a:r>
             <a:endParaRPr lang="en-US" sz="850" dirty="0"/>
           </a:p>
@@ -3095,7 +3095,7 @@
                 <a:ea typeface="Arial" pitchFamily="34" charset="-122"/>
                 <a:cs typeface="Arial" pitchFamily="34" charset="-120"/>
               </a:rPr>
-              <a:t>running it costs €27k a year — 18% of the value released, and that already counts the quarter of an engineer who maintains it. So cost is not the decision. Governance is: proving a person reviewed anything that goes against a claimant, and whether handlers trust the drafts.</a:t>
+              <a:t>cost is not what decides this. The AI costs €2,400 a year to run — under 2% of the value it releases. What decides it is governance: proving a person reviewed anything that can go against a claimant, and whether handlers trust the drafts enough to approve them.</a:t>
             </a:r>
             <a:endParaRPr lang="en-US" sz="850" dirty="0"/>
           </a:p>
@@ -11727,7 +11727,7 @@
                 <a:ea typeface="Arial" pitchFamily="34" charset="-122"/>
                 <a:cs typeface="Arial" pitchFamily="34" charset="-120"/>
               </a:rPr>
-              <a:t>AES rulings and underwriting authority are deliberately absent — those decisions are not ours to make, so placing them here would imply a choice we do not have · frequencies from the case study</a:t>
+              <a:t>AES rulings and underwriting authority are deliberately absent — those decisions are not ours to make · frequencies from the case study</a:t>
             </a:r>
             <a:endParaRPr lang="en-US" sz="700" dirty="0"/>
           </a:p>
@@ -11987,7 +11987,7 @@
                 <a:gridCol w="914400"/>
                 <a:gridCol w="914400"/>
               </a:tblGrid>
-              <a:tr h="214884">
+              <a:tr h="205740">
                 <a:tc>
                   <a:txBody>
                     <a:bodyPr/>
@@ -12193,7 +12193,7 @@
                   </a:tcPr>
                 </a:tc>
               </a:tr>
-              <a:tr h="214884">
+              <a:tr h="205740">
                 <a:tc>
                   <a:txBody>
                     <a:bodyPr/>
@@ -12399,7 +12399,7 @@
                   </a:tcPr>
                 </a:tc>
               </a:tr>
-              <a:tr h="214884">
+              <a:tr h="205740">
                 <a:tc>
                   <a:txBody>
                     <a:bodyPr/>
@@ -12605,7 +12605,7 @@
                   </a:tcPr>
                 </a:tc>
               </a:tr>
-              <a:tr h="214884">
+              <a:tr h="205740">
                 <a:tc>
                   <a:txBody>
                     <a:bodyPr/>
@@ -12811,7 +12811,7 @@
                   </a:tcPr>
                 </a:tc>
               </a:tr>
-              <a:tr h="214884">
+              <a:tr h="205740">
                 <a:tc>
                   <a:txBody>
                     <a:bodyPr/>
@@ -13017,7 +13017,7 @@
                   </a:tcPr>
                 </a:tc>
               </a:tr>
-              <a:tr h="214884">
+              <a:tr h="205740">
                 <a:tc>
                   <a:txBody>
                     <a:bodyPr/>
@@ -13223,7 +13223,7 @@
                   </a:tcPr>
                 </a:tc>
               </a:tr>
-              <a:tr h="214884">
+              <a:tr h="205740">
                 <a:tc>
                   <a:txBody>
                     <a:bodyPr/>
@@ -13429,7 +13429,7 @@
                   </a:tcPr>
                 </a:tc>
               </a:tr>
-              <a:tr h="214884">
+              <a:tr h="205740">
                 <a:tc>
                   <a:txBody>
                     <a:bodyPr/>
@@ -13635,7 +13635,7 @@
                   </a:tcPr>
                 </a:tc>
               </a:tr>
-              <a:tr h="214884">
+              <a:tr h="205740">
                 <a:tc>
                   <a:txBody>
                     <a:bodyPr/>
@@ -13841,7 +13841,7 @@
                   </a:tcPr>
                 </a:tc>
               </a:tr>
-              <a:tr h="214884">
+              <a:tr h="205740">
                 <a:tc>
                   <a:txBody>
                     <a:bodyPr/>
@@ -14059,8 +14059,8 @@
         </p:nvSpPr>
         <p:spPr>
           <a:xfrm>
-            <a:off x="365760" y="2962656"/>
-            <a:ext cx="5486400" cy="329184"/>
+            <a:off x="365760" y="2871216"/>
+            <a:ext cx="5486400" cy="292608"/>
           </a:xfrm>
           <a:prstGeom prst="rect">
             <a:avLst/>
@@ -14087,7 +14087,7 @@
                 <a:ea typeface="Arial" pitchFamily="34" charset="-122"/>
                 <a:cs typeface="Arial" pitchFamily="34" charset="-120"/>
               </a:rPr>
-              <a:t>If everything landed, the saving would be 29.9 min. We do not bank that. Three-point estimate used instead: (best 30 + 4 × likely 21 + worst 12) ÷ 6 = 21.0 min, a 52% cut.</a:t>
+              <a:t>The full saving would be 29.9 min. We do not bank that. Three-point estimate instead: (best 30 + 4 × likely 21 + worst 12) ÷ 6 = 21.0 min, a 52% cut.</a:t>
             </a:r>
             <a:endParaRPr lang="en-US" sz="740" dirty="0"/>
           </a:p>
@@ -14101,12 +14101,12 @@
         </p:nvSpPr>
         <p:spPr>
           <a:xfrm>
-            <a:off x="365760" y="3346704"/>
-            <a:ext cx="5486400" cy="640080"/>
+            <a:off x="365760" y="3200400"/>
+            <a:ext cx="5486400" cy="621792"/>
           </a:xfrm>
           <a:prstGeom prst="roundRect">
             <a:avLst>
-              <a:gd name="adj" fmla="val 7143"/>
+              <a:gd name="adj" fmla="val 7353"/>
             </a:avLst>
           </a:prstGeom>
           <a:solidFill>
@@ -14128,8 +14128,8 @@
         </p:nvSpPr>
         <p:spPr>
           <a:xfrm>
-            <a:off x="530352" y="3346704"/>
-            <a:ext cx="5157216" cy="640080"/>
+            <a:off x="530352" y="3200400"/>
+            <a:ext cx="5157216" cy="621792"/>
           </a:xfrm>
           <a:prstGeom prst="rect">
             <a:avLst/>
@@ -14173,7 +14173,7 @@
                 <a:ea typeface="Arial" pitchFamily="34" charset="-122"/>
                 <a:cs typeface="Arial" pitchFamily="34" charset="-120"/>
               </a:rPr>
-              <a:t>40 min × 12,500 claims = 8,333 hours, or 17% of a 30-person team's year. Plausible for the front end of a claims process. Had it come out at 60%, the model would be wrong.</a:t>
+              <a:t>40 min × 12,500 claims = 8,333 hours — 17% of a 30-person team's year. Plausible for the front end of a claims process. Had it come out at 60%, the model would be wrong.</a:t>
             </a:r>
             <a:endParaRPr lang="en-US" sz="820" dirty="0"/>
           </a:p>
@@ -14187,12 +14187,12 @@
         </p:nvSpPr>
         <p:spPr>
           <a:xfrm>
-            <a:off x="365760" y="4059936"/>
-            <a:ext cx="5486400" cy="1938528"/>
+            <a:off x="365760" y="3895344"/>
+            <a:ext cx="5486400" cy="2560320"/>
           </a:xfrm>
           <a:prstGeom prst="roundRect">
             <a:avLst>
-              <a:gd name="adj" fmla="val 2830"/>
+              <a:gd name="adj" fmla="val 2143"/>
             </a:avLst>
           </a:prstGeom>
           <a:solidFill>
@@ -14214,8 +14214,8 @@
         </p:nvSpPr>
         <p:spPr>
           <a:xfrm>
-            <a:off x="548640" y="4169664"/>
-            <a:ext cx="5486400" cy="219456"/>
+            <a:off x="548640" y="4005072"/>
+            <a:ext cx="5120640" cy="219456"/>
           </a:xfrm>
           <a:prstGeom prst="rect">
             <a:avLst/>
@@ -14253,8 +14253,8 @@
         </p:nvSpPr>
         <p:spPr>
           <a:xfrm>
-            <a:off x="548640" y="4443984"/>
-            <a:ext cx="3566160" cy="201168"/>
+            <a:off x="548640" y="4224528"/>
+            <a:ext cx="5120640" cy="182880"/>
           </a:xfrm>
           <a:prstGeom prst="rect">
             <a:avLst/>
@@ -14270,6 +14270,45 @@
               <a:buNone/>
             </a:pPr>
             <a:r>
+              <a:rPr lang="en-US" sz="760" b="1" spc="120" kern="0" dirty="0">
+                <a:solidFill>
+                  <a:srgbClr val="BE185D"/>
+                </a:solidFill>
+                <a:latin typeface="Arial" pitchFamily="34" charset="0"/>
+                <a:ea typeface="Arial" pitchFamily="34" charset="-122"/>
+                <a:cs typeface="Arial" pitchFamily="34" charset="-120"/>
+              </a:rPr>
+              <a:t>EVERY YEAR</a:t>
+            </a:r>
+            <a:endParaRPr lang="en-US" sz="760" dirty="0"/>
+          </a:p>
+        </p:txBody>
+      </p:sp>
+      <p:sp>
+        <p:nvSpPr>
+          <p:cNvPr id="12" name="Text 9"/>
+          <p:cNvSpPr txBox="1"/>
+          <p:nvPr/>
+        </p:nvSpPr>
+        <p:spPr>
+          <a:xfrm>
+            <a:off x="548640" y="4425696"/>
+            <a:ext cx="3520440" cy="192024"/>
+          </a:xfrm>
+          <a:prstGeom prst="rect">
+            <a:avLst/>
+          </a:prstGeom>
+          <a:noFill/>
+          <a:ln/>
+        </p:spPr>
+        <p:txBody>
+          <a:bodyPr wrap="square" lIns="0" tIns="0" rIns="0" bIns="0" rtlCol="0" anchor="ctr"/>
+          <a:lstStyle/>
+          <a:p>
+            <a:pPr indent="0" marL="0">
+              <a:buNone/>
+            </a:pPr>
+            <a:r>
               <a:rPr lang="en-US" sz="840" dirty="0">
                 <a:solidFill>
                   <a:srgbClr val="3A3A3A"/>
@@ -14286,14 +14325,14 @@
       </p:sp>
       <p:sp>
         <p:nvSpPr>
-          <p:cNvPr id="12" name="Text 9"/>
-          <p:cNvSpPr txBox="1"/>
-          <p:nvPr/>
-        </p:nvSpPr>
-        <p:spPr>
-          <a:xfrm>
-            <a:off x="4114800" y="4443984"/>
-            <a:ext cx="1554480" cy="201168"/>
+          <p:cNvPr id="13" name="Text 10"/>
+          <p:cNvSpPr txBox="1"/>
+          <p:nvPr/>
+        </p:nvSpPr>
+        <p:spPr>
+          <a:xfrm>
+            <a:off x="4069080" y="4425696"/>
+            <a:ext cx="1600200" cy="192024"/>
           </a:xfrm>
           <a:prstGeom prst="rect">
             <a:avLst/>
@@ -14317,7 +14356,7 @@
                 <a:ea typeface="Arial" pitchFamily="34" charset="-122"/>
                 <a:cs typeface="Arial" pitchFamily="34" charset="-120"/>
               </a:rPr>
-              <a:t>4,370 h/yr · 2.8 FTE</a:t>
+              <a:t>4,370 h · 2.8 FTE</a:t>
             </a:r>
             <a:endParaRPr lang="en-US" sz="840" dirty="0"/>
           </a:p>
@@ -14325,14 +14364,14 @@
       </p:sp>
       <p:sp>
         <p:nvSpPr>
-          <p:cNvPr id="13" name="Text 10"/>
-          <p:cNvSpPr txBox="1"/>
-          <p:nvPr/>
-        </p:nvSpPr>
-        <p:spPr>
-          <a:xfrm>
-            <a:off x="548640" y="4658868"/>
-            <a:ext cx="3566160" cy="201168"/>
+          <p:cNvPr id="14" name="Text 11"/>
+          <p:cNvSpPr txBox="1"/>
+          <p:nvPr/>
+        </p:nvSpPr>
+        <p:spPr>
+          <a:xfrm>
+            <a:off x="548640" y="4631436"/>
+            <a:ext cx="3520440" cy="192024"/>
           </a:xfrm>
           <a:prstGeom prst="rect">
             <a:avLst/>
@@ -14356,7 +14395,7 @@
                 <a:ea typeface="Arial" pitchFamily="34" charset="-122"/>
                 <a:cs typeface="Arial" pitchFamily="34" charset="-120"/>
               </a:rPr>
-              <a:t>Valued at €34.92 per handler-hour</a:t>
+              <a:t>Worth, at €34.92 per handler-hour</a:t>
             </a:r>
             <a:endParaRPr lang="en-US" sz="840" dirty="0"/>
           </a:p>
@@ -14364,14 +14403,14 @@
       </p:sp>
       <p:sp>
         <p:nvSpPr>
-          <p:cNvPr id="14" name="Text 11"/>
-          <p:cNvSpPr txBox="1"/>
-          <p:nvPr/>
-        </p:nvSpPr>
-        <p:spPr>
-          <a:xfrm>
-            <a:off x="4114800" y="4658868"/>
-            <a:ext cx="1554480" cy="201168"/>
+          <p:cNvPr id="15" name="Text 12"/>
+          <p:cNvSpPr txBox="1"/>
+          <p:nvPr/>
+        </p:nvSpPr>
+        <p:spPr>
+          <a:xfrm>
+            <a:off x="4069080" y="4631436"/>
+            <a:ext cx="1600200" cy="192024"/>
           </a:xfrm>
           <a:prstGeom prst="rect">
             <a:avLst/>
@@ -14403,14 +14442,14 @@
       </p:sp>
       <p:sp>
         <p:nvSpPr>
-          <p:cNvPr id="15" name="Text 12"/>
-          <p:cNvSpPr txBox="1"/>
-          <p:nvPr/>
-        </p:nvSpPr>
-        <p:spPr>
-          <a:xfrm>
-            <a:off x="548640" y="4873752"/>
-            <a:ext cx="3566160" cy="201168"/>
+          <p:cNvPr id="16" name="Text 13"/>
+          <p:cNvSpPr txBox="1"/>
+          <p:nvPr/>
+        </p:nvSpPr>
+        <p:spPr>
+          <a:xfrm>
+            <a:off x="548640" y="4837176"/>
+            <a:ext cx="3520440" cy="192024"/>
           </a:xfrm>
           <a:prstGeom prst="rect">
             <a:avLst/>
@@ -14434,7 +14473,7 @@
                 <a:ea typeface="Arial" pitchFamily="34" charset="-122"/>
                 <a:cs typeface="Arial" pitchFamily="34" charset="-120"/>
               </a:rPr>
-              <a:t>Less AI models and Azure</a:t>
+              <a:t>Cost to run it — AI models and Azure</a:t>
             </a:r>
             <a:endParaRPr lang="en-US" sz="840" dirty="0"/>
           </a:p>
@@ -14442,14 +14481,14 @@
       </p:sp>
       <p:sp>
         <p:nvSpPr>
-          <p:cNvPr id="16" name="Text 13"/>
-          <p:cNvSpPr txBox="1"/>
-          <p:nvPr/>
-        </p:nvSpPr>
-        <p:spPr>
-          <a:xfrm>
-            <a:off x="4114800" y="4873752"/>
-            <a:ext cx="1554480" cy="201168"/>
+          <p:cNvPr id="17" name="Text 14"/>
+          <p:cNvSpPr txBox="1"/>
+          <p:nvPr/>
+        </p:nvSpPr>
+        <p:spPr>
+          <a:xfrm>
+            <a:off x="4069080" y="4837176"/>
+            <a:ext cx="1600200" cy="192024"/>
           </a:xfrm>
           <a:prstGeom prst="rect">
             <a:avLst/>
@@ -14481,14 +14520,14 @@
       </p:sp>
       <p:sp>
         <p:nvSpPr>
-          <p:cNvPr id="17" name="Text 14"/>
-          <p:cNvSpPr txBox="1"/>
-          <p:nvPr/>
-        </p:nvSpPr>
-        <p:spPr>
-          <a:xfrm>
-            <a:off x="548640" y="5088636"/>
-            <a:ext cx="3566160" cy="201168"/>
+          <p:cNvPr id="18" name="Text 15"/>
+          <p:cNvSpPr txBox="1"/>
+          <p:nvPr/>
+        </p:nvSpPr>
+        <p:spPr>
+          <a:xfrm>
+            <a:off x="548640" y="5042916"/>
+            <a:ext cx="3520440" cy="192024"/>
           </a:xfrm>
           <a:prstGeom prst="rect">
             <a:avLst/>
@@ -14512,7 +14551,7 @@
                 <a:ea typeface="Arial" pitchFamily="34" charset="-122"/>
                 <a:cs typeface="Arial" pitchFamily="34" charset="-120"/>
               </a:rPr>
-              <a:t>Less upkeep — 0.25 of an engineer</a:t>
+              <a:t>Ongoing support — 0.25 of an engineer</a:t>
             </a:r>
             <a:endParaRPr lang="en-US" sz="840" dirty="0"/>
           </a:p>
@@ -14520,14 +14559,14 @@
       </p:sp>
       <p:sp>
         <p:nvSpPr>
-          <p:cNvPr id="18" name="Text 15"/>
-          <p:cNvSpPr txBox="1"/>
-          <p:nvPr/>
-        </p:nvSpPr>
-        <p:spPr>
-          <a:xfrm>
-            <a:off x="4114800" y="5088636"/>
-            <a:ext cx="1554480" cy="201168"/>
+          <p:cNvPr id="19" name="Text 16"/>
+          <p:cNvSpPr txBox="1"/>
+          <p:nvPr/>
+        </p:nvSpPr>
+        <p:spPr>
+          <a:xfrm>
+            <a:off x="4069080" y="5042916"/>
+            <a:ext cx="1600200" cy="192024"/>
           </a:xfrm>
           <a:prstGeom prst="rect">
             <a:avLst/>
@@ -14559,14 +14598,14 @@
       </p:sp>
       <p:sp>
         <p:nvSpPr>
-          <p:cNvPr id="19" name="Text 16"/>
-          <p:cNvSpPr txBox="1"/>
-          <p:nvPr/>
-        </p:nvSpPr>
-        <p:spPr>
-          <a:xfrm>
-            <a:off x="548640" y="5303520"/>
-            <a:ext cx="3566160" cy="201168"/>
+          <p:cNvPr id="20" name="Text 17"/>
+          <p:cNvSpPr txBox="1"/>
+          <p:nvPr/>
+        </p:nvSpPr>
+        <p:spPr>
+          <a:xfrm>
+            <a:off x="548640" y="5248656"/>
+            <a:ext cx="3520440" cy="192024"/>
           </a:xfrm>
           <a:prstGeom prst="rect">
             <a:avLst/>
@@ -14598,14 +14637,14 @@
       </p:sp>
       <p:sp>
         <p:nvSpPr>
-          <p:cNvPr id="20" name="Text 17"/>
-          <p:cNvSpPr txBox="1"/>
-          <p:nvPr/>
-        </p:nvSpPr>
-        <p:spPr>
-          <a:xfrm>
-            <a:off x="4114800" y="5303520"/>
-            <a:ext cx="1554480" cy="201168"/>
+          <p:cNvPr id="21" name="Text 18"/>
+          <p:cNvSpPr txBox="1"/>
+          <p:nvPr/>
+        </p:nvSpPr>
+        <p:spPr>
+          <a:xfrm>
+            <a:off x="4069080" y="5248656"/>
+            <a:ext cx="1600200" cy="192024"/>
           </a:xfrm>
           <a:prstGeom prst="rect">
             <a:avLst/>
@@ -14637,14 +14676,34 @@
       </p:sp>
       <p:sp>
         <p:nvSpPr>
-          <p:cNvPr id="21" name="Text 18"/>
-          <p:cNvSpPr txBox="1"/>
-          <p:nvPr/>
-        </p:nvSpPr>
-        <p:spPr>
-          <a:xfrm>
-            <a:off x="548640" y="5518404"/>
-            <a:ext cx="3566160" cy="201168"/>
+          <p:cNvPr id="22" name="Shape 19"/>
+          <p:cNvSpPr/>
+          <p:nvPr/>
+        </p:nvSpPr>
+        <p:spPr>
+          <a:xfrm>
+            <a:off x="548640" y="5486400"/>
+            <a:ext cx="5120640" cy="10973"/>
+          </a:xfrm>
+          <a:prstGeom prst="rect">
+            <a:avLst/>
+          </a:prstGeom>
+          <a:solidFill>
+            <a:srgbClr val="E4E4E0"/>
+          </a:solidFill>
+          <a:ln/>
+        </p:spPr>
+      </p:sp>
+      <p:sp>
+        <p:nvSpPr>
+          <p:cNvPr id="23" name="Text 20"/>
+          <p:cNvSpPr txBox="1"/>
+          <p:nvPr/>
+        </p:nvSpPr>
+        <p:spPr>
+          <a:xfrm>
+            <a:off x="548640" y="5541264"/>
+            <a:ext cx="5120640" cy="182880"/>
           </a:xfrm>
           <a:prstGeom prst="rect">
             <a:avLst/>
@@ -14660,6 +14719,45 @@
               <a:buNone/>
             </a:pPr>
             <a:r>
+              <a:rPr lang="en-US" sz="760" b="1" spc="120" kern="0" dirty="0">
+                <a:solidFill>
+                  <a:srgbClr val="BE185D"/>
+                </a:solidFill>
+                <a:latin typeface="Arial" pitchFamily="34" charset="0"/>
+                <a:ea typeface="Arial" pitchFamily="34" charset="-122"/>
+                <a:cs typeface="Arial" pitchFamily="34" charset="-120"/>
+              </a:rPr>
+              <a:t>ONE-OFF</a:t>
+            </a:r>
+            <a:endParaRPr lang="en-US" sz="760" dirty="0"/>
+          </a:p>
+        </p:txBody>
+      </p:sp>
+      <p:sp>
+        <p:nvSpPr>
+          <p:cNvPr id="24" name="Text 21"/>
+          <p:cNvSpPr txBox="1"/>
+          <p:nvPr/>
+        </p:nvSpPr>
+        <p:spPr>
+          <a:xfrm>
+            <a:off x="548640" y="5742432"/>
+            <a:ext cx="3520440" cy="192024"/>
+          </a:xfrm>
+          <a:prstGeom prst="rect">
+            <a:avLst/>
+          </a:prstGeom>
+          <a:noFill/>
+          <a:ln/>
+        </p:spPr>
+        <p:txBody>
+          <a:bodyPr wrap="square" lIns="0" tIns="0" rIns="0" bIns="0" rtlCol="0" anchor="ctr"/>
+          <a:lstStyle/>
+          <a:p>
+            <a:pPr indent="0" marL="0">
+              <a:buNone/>
+            </a:pPr>
+            <a:r>
               <a:rPr lang="en-US" sz="840" b="1" dirty="0">
                 <a:solidFill>
                   <a:srgbClr val="1B2430"/>
@@ -14668,7 +14766,7 @@
                 <a:ea typeface="Arial" pitchFamily="34" charset="-122"/>
                 <a:cs typeface="Arial" pitchFamily="34" charset="-120"/>
               </a:rPr>
-              <a:t>Build: 3 people × 6 months, fully loaded</a:t>
+              <a:t>Build — 3 people × 6 months, fully loaded</a:t>
             </a:r>
             <a:endParaRPr lang="en-US" sz="840" dirty="0"/>
           </a:p>
@@ -14676,14 +14774,14 @@
       </p:sp>
       <p:sp>
         <p:nvSpPr>
-          <p:cNvPr id="22" name="Text 19"/>
-          <p:cNvSpPr txBox="1"/>
-          <p:nvPr/>
-        </p:nvSpPr>
-        <p:spPr>
-          <a:xfrm>
-            <a:off x="4114800" y="5518404"/>
-            <a:ext cx="1554480" cy="201168"/>
+          <p:cNvPr id="25" name="Text 22"/>
+          <p:cNvSpPr txBox="1"/>
+          <p:nvPr/>
+        </p:nvSpPr>
+        <p:spPr>
+          <a:xfrm>
+            <a:off x="4069080" y="5742432"/>
+            <a:ext cx="1600200" cy="192024"/>
           </a:xfrm>
           <a:prstGeom prst="rect">
             <a:avLst/>
@@ -14715,14 +14813,14 @@
       </p:sp>
       <p:sp>
         <p:nvSpPr>
-          <p:cNvPr id="23" name="Text 20"/>
-          <p:cNvSpPr txBox="1"/>
-          <p:nvPr/>
-        </p:nvSpPr>
-        <p:spPr>
-          <a:xfrm>
-            <a:off x="548640" y="5733288"/>
-            <a:ext cx="3566160" cy="201168"/>
+          <p:cNvPr id="26" name="Text 23"/>
+          <p:cNvSpPr txBox="1"/>
+          <p:nvPr/>
+        </p:nvSpPr>
+        <p:spPr>
+          <a:xfrm>
+            <a:off x="548640" y="5948172"/>
+            <a:ext cx="3520440" cy="192024"/>
           </a:xfrm>
           <a:prstGeom prst="rect">
             <a:avLst/>
@@ -14754,14 +14852,14 @@
       </p:sp>
       <p:sp>
         <p:nvSpPr>
-          <p:cNvPr id="24" name="Text 21"/>
-          <p:cNvSpPr txBox="1"/>
-          <p:nvPr/>
-        </p:nvSpPr>
-        <p:spPr>
-          <a:xfrm>
-            <a:off x="4114800" y="5733288"/>
-            <a:ext cx="1554480" cy="201168"/>
+          <p:cNvPr id="27" name="Text 24"/>
+          <p:cNvSpPr txBox="1"/>
+          <p:nvPr/>
+        </p:nvSpPr>
+        <p:spPr>
+          <a:xfrm>
+            <a:off x="4069080" y="5948172"/>
+            <a:ext cx="1600200" cy="192024"/>
           </a:xfrm>
           <a:prstGeom prst="rect">
             <a:avLst/>
@@ -14793,14 +14891,14 @@
       </p:sp>
       <p:sp>
         <p:nvSpPr>
-          <p:cNvPr id="25" name="Text 22"/>
-          <p:cNvSpPr txBox="1"/>
-          <p:nvPr/>
-        </p:nvSpPr>
-        <p:spPr>
-          <a:xfrm>
-            <a:off x="365760" y="6053328"/>
-            <a:ext cx="5486400" cy="457200"/>
+          <p:cNvPr id="28" name="Text 25"/>
+          <p:cNvSpPr txBox="1"/>
+          <p:nvPr/>
+        </p:nvSpPr>
+        <p:spPr>
+          <a:xfrm>
+            <a:off x="548640" y="6181344"/>
+            <a:ext cx="5120640" cy="256032"/>
           </a:xfrm>
           <a:prstGeom prst="rect">
             <a:avLst/>
@@ -14819,7 +14917,7 @@
               <a:buNone/>
             </a:pPr>
             <a:r>
-              <a:rPr lang="en-US" sz="740" i="1" dirty="0">
+              <a:rPr lang="en-US" sz="720" i="1" dirty="0">
                 <a:solidFill>
                   <a:srgbClr val="6A6A6A"/>
                 </a:solidFill>
@@ -14827,15 +14925,15 @@
                 <a:ea typeface="Arial" pitchFamily="34" charset="-122"/>
                 <a:cs typeface="Arial" pitchFamily="34" charset="-120"/>
               </a:rPr>
-              <a:t>The €146k build is loaded capacity cost, not new cash — the AI team is already funded. It is priced this way so the project can be ranked against everything else on the roadmap. Actual new cash needed: €2,400 a year. A shorter build costs less: 4 months ≈ €98k, 3 months ≈ €73k.</a:t>
-            </a:r>
-            <a:endParaRPr lang="en-US" sz="740" dirty="0"/>
-          </a:p>
-        </p:txBody>
-      </p:sp>
-      <p:sp>
-        <p:nvSpPr>
-          <p:cNvPr id="26" name="Text 23"/>
+              <a:t>The build is loaded team capacity, not new cash — the AI team is already funded. New cash needed: €2,400 a year. A shorter build costs less: 4 months ≈ €98k.</a:t>
+            </a:r>
+            <a:endParaRPr lang="en-US" sz="720" dirty="0"/>
+          </a:p>
+        </p:txBody>
+      </p:sp>
+      <p:sp>
+        <p:nvSpPr>
+          <p:cNvPr id="29" name="Text 26"/>
           <p:cNvSpPr txBox="1"/>
           <p:nvPr/>
         </p:nvSpPr>
@@ -17886,7 +17984,7 @@
       </p:graphicFrame>
       <p:sp>
         <p:nvSpPr>
-          <p:cNvPr id="28" name="Text 24"/>
+          <p:cNvPr id="31" name="Text 27"/>
           <p:cNvSpPr txBox="1"/>
           <p:nvPr/>
         </p:nvSpPr>
@@ -17928,7 +18026,7 @@
       </p:sp>
       <p:sp>
         <p:nvSpPr>
-          <p:cNvPr id="29" name="Text 25"/>
+          <p:cNvPr id="32" name="Text 28"/>
           <p:cNvSpPr txBox="1"/>
           <p:nvPr/>
         </p:nvSpPr>
@@ -18687,7 +18785,7 @@
       </p:graphicFrame>
       <p:sp>
         <p:nvSpPr>
-          <p:cNvPr id="31" name="Text 26"/>
+          <p:cNvPr id="34" name="Text 29"/>
           <p:cNvSpPr txBox="1"/>
           <p:nvPr/>
         </p:nvSpPr>
@@ -18721,7 +18819,7 @@
                 <a:ea typeface="Arial" pitchFamily="34" charset="-122"/>
                 <a:cs typeface="Arial" pitchFamily="34" charset="-120"/>
               </a:rPr>
-              <a:t>Registry, networking, Key Vault and DevOps (≈ €670/yr) already exist, so they are not charged to this project. Azure DevOps covers repos and pipelines, not a managed database — the PostgreSQL line is genuinely new.</a:t>
+              <a:t>Registry, networking, Key Vault and DevOps (≈ €670/yr) already exist, so they are not charged here. Azure DevOps gives repos and pipelines, not a database — PostgreSQL is genuinely new.</a:t>
             </a:r>
             <a:endParaRPr lang="en-US" sz="740" dirty="0"/>
           </a:p>
@@ -18729,7 +18827,7 @@
       </p:sp>
       <p:sp>
         <p:nvSpPr>
-          <p:cNvPr id="32" name="Text 27"/>
+          <p:cNvPr id="35" name="Text 30"/>
           <p:cNvSpPr txBox="1"/>
           <p:nvPr/>
         </p:nvSpPr>
@@ -18768,7 +18866,7 @@
       </p:sp>
       <p:sp>
         <p:nvSpPr>
-          <p:cNvPr id="33" name="Text 28"/>
+          <p:cNvPr id="36" name="Text 31"/>
           <p:cNvSpPr txBox="1"/>
           <p:nvPr/>
         </p:nvSpPr>
@@ -18799,7 +18897,7 @@
                 <a:ea typeface="Arial" pitchFamily="34" charset="-122"/>
                 <a:cs typeface="Arial" pitchFamily="34" charset="-120"/>
               </a:rPr>
-              <a:t>The brief says a support team does intake, not all 30 handlers — so the truth is in the middle rows. This is our first question for GGW.</a:t>
+              <a:t>The brief says a support team does intake, not all 30 handlers — so the truth is in the middle rows. Our first question for GGW.</a:t>
             </a:r>
             <a:endParaRPr lang="en-US" sz="780" dirty="0"/>
           </a:p>
@@ -20209,7 +20307,7 @@
       </p:graphicFrame>
       <p:sp>
         <p:nvSpPr>
-          <p:cNvPr id="35" name="Text 29"/>
+          <p:cNvPr id="38" name="Text 32"/>
           <p:cNvSpPr txBox="1"/>
           <p:nvPr/>
         </p:nvSpPr>
@@ -20248,7 +20346,7 @@
       </p:sp>
       <p:sp>
         <p:nvSpPr>
-          <p:cNvPr id="36" name="Text 30"/>
+          <p:cNvPr id="39" name="Text 33"/>
           <p:cNvSpPr txBox="1"/>
           <p:nvPr/>
         </p:nvSpPr>
@@ -20350,7 +20448,7 @@
                 <a:ea typeface="Cambria" pitchFamily="34" charset="-122"/>
                 <a:cs typeface="Cambria" pitchFamily="34" charset="-120"/>
               </a:rPr>
-              <a:t>What is sourced, and what is our assumption — stated separately on purpose</a:t>
+              <a:t>What is sourced, and what is our assumption — kept separate on purpose</a:t>
             </a:r>
             <a:endParaRPr lang="en-US" sz="1400" dirty="0"/>
           </a:p>
@@ -20403,8 +20501,8 @@
         </p:nvSpPr>
         <p:spPr>
           <a:xfrm>
-            <a:off x="365760" y="585216"/>
-            <a:ext cx="45720" cy="402336"/>
+            <a:off x="365760" y="548640"/>
+            <a:ext cx="45720" cy="310896"/>
           </a:xfrm>
           <a:prstGeom prst="rect">
             <a:avLst/>
@@ -20423,8 +20521,8 @@
         </p:nvSpPr>
         <p:spPr>
           <a:xfrm>
-            <a:off x="530352" y="548640"/>
-            <a:ext cx="1874520" cy="219456"/>
+            <a:off x="530352" y="530352"/>
+            <a:ext cx="1965960" cy="182880"/>
           </a:xfrm>
           <a:prstGeom prst="rect">
             <a:avLst/>
@@ -20440,7 +20538,7 @@
               <a:buNone/>
             </a:pPr>
             <a:r>
-              <a:rPr lang="en-US" sz="880" b="1" dirty="0">
+              <a:rPr lang="en-US" sz="860" b="1" dirty="0">
                 <a:solidFill>
                   <a:srgbClr val="1B2430"/>
                 </a:solidFill>
@@ -20450,7 +20548,7 @@
               </a:rPr>
               <a:t>Wage base</a:t>
             </a:r>
-            <a:endParaRPr lang="en-US" sz="880" dirty="0"/>
+            <a:endParaRPr lang="en-US" sz="860" dirty="0"/>
           </a:p>
         </p:txBody>
       </p:sp>
@@ -20462,8 +20560,8 @@
         </p:nvSpPr>
         <p:spPr>
           <a:xfrm>
-            <a:off x="530352" y="740664"/>
-            <a:ext cx="4846320" cy="237744"/>
+            <a:off x="530352" y="685800"/>
+            <a:ext cx="4937760" cy="182880"/>
           </a:xfrm>
           <a:prstGeom prst="rect">
             <a:avLst/>
@@ -20503,8 +20601,8 @@
         </p:nvSpPr>
         <p:spPr>
           <a:xfrm>
-            <a:off x="5577840" y="603504"/>
-            <a:ext cx="6126480" cy="256032"/>
+            <a:off x="5669280" y="585216"/>
+            <a:ext cx="6035040" cy="219456"/>
           </a:xfrm>
           <a:prstGeom prst="rect">
             <a:avLst/>
@@ -20549,8 +20647,8 @@
         </p:nvSpPr>
         <p:spPr>
           <a:xfrm>
-            <a:off x="365760" y="1019556"/>
-            <a:ext cx="45720" cy="402336"/>
+            <a:off x="365760" y="914400"/>
+            <a:ext cx="45720" cy="310896"/>
           </a:xfrm>
           <a:prstGeom prst="rect">
             <a:avLst/>
@@ -20569,8 +20667,8 @@
         </p:nvSpPr>
         <p:spPr>
           <a:xfrm>
-            <a:off x="530352" y="982980"/>
-            <a:ext cx="1874520" cy="219456"/>
+            <a:off x="530352" y="896112"/>
+            <a:ext cx="1965960" cy="182880"/>
           </a:xfrm>
           <a:prstGeom prst="rect">
             <a:avLst/>
@@ -20586,7 +20684,7 @@
               <a:buNone/>
             </a:pPr>
             <a:r>
-              <a:rPr lang="en-US" sz="880" b="1" dirty="0">
+              <a:rPr lang="en-US" sz="860" b="1" dirty="0">
                 <a:solidFill>
                   <a:srgbClr val="1B2430"/>
                 </a:solidFill>
@@ -20596,7 +20694,7 @@
               </a:rPr>
               <a:t>Employer on-cost</a:t>
             </a:r>
-            <a:endParaRPr lang="en-US" sz="880" dirty="0"/>
+            <a:endParaRPr lang="en-US" sz="860" dirty="0"/>
           </a:p>
         </p:txBody>
       </p:sp>
@@ -20608,8 +20706,8 @@
         </p:nvSpPr>
         <p:spPr>
           <a:xfrm>
-            <a:off x="530352" y="1175004"/>
-            <a:ext cx="4846320" cy="237744"/>
+            <a:off x="530352" y="1051560"/>
+            <a:ext cx="4937760" cy="182880"/>
           </a:xfrm>
           <a:prstGeom prst="rect">
             <a:avLst/>
@@ -20633,7 +20731,7 @@
                 <a:ea typeface="Arial" pitchFamily="34" charset="-122"/>
                 <a:cs typeface="Arial" pitchFamily="34" charset="-120"/>
               </a:rPr>
-              <a:t>≈ €23 per €100 gross (health, pension, unemployment, care)</a:t>
+              <a:t>≈ €23 per €100 gross — health, pension, unemployment, care</a:t>
             </a:r>
             <a:endParaRPr lang="en-US" sz="800" dirty="0"/>
           </a:p>
@@ -20649,8 +20747,8 @@
         </p:nvSpPr>
         <p:spPr>
           <a:xfrm>
-            <a:off x="5577840" y="1037844"/>
-            <a:ext cx="6126480" cy="256032"/>
+            <a:off x="5669280" y="950976"/>
+            <a:ext cx="6035040" cy="219456"/>
           </a:xfrm>
           <a:prstGeom prst="rect">
             <a:avLst/>
@@ -20695,8 +20793,8 @@
         </p:nvSpPr>
         <p:spPr>
           <a:xfrm>
-            <a:off x="365760" y="1453896"/>
-            <a:ext cx="45720" cy="402336"/>
+            <a:off x="365760" y="1280160"/>
+            <a:ext cx="45720" cy="310896"/>
           </a:xfrm>
           <a:prstGeom prst="rect">
             <a:avLst/>
@@ -20715,8 +20813,47 @@
         </p:nvSpPr>
         <p:spPr>
           <a:xfrm>
+            <a:off x="530352" y="1261872"/>
+            <a:ext cx="1965960" cy="182880"/>
+          </a:xfrm>
+          <a:prstGeom prst="rect">
+            <a:avLst/>
+          </a:prstGeom>
+          <a:noFill/>
+          <a:ln/>
+        </p:spPr>
+        <p:txBody>
+          <a:bodyPr wrap="square" lIns="0" tIns="0" rIns="0" bIns="0" rtlCol="0" anchor="ctr"/>
+          <a:lstStyle/>
+          <a:p>
+            <a:pPr indent="0" marL="0">
+              <a:buNone/>
+            </a:pPr>
+            <a:r>
+              <a:rPr lang="en-US" sz="860" b="1" dirty="0">
+                <a:solidFill>
+                  <a:srgbClr val="1B2430"/>
+                </a:solidFill>
+                <a:latin typeface="Arial" pitchFamily="34" charset="0"/>
+                <a:ea typeface="Arial" pitchFamily="34" charset="-122"/>
+                <a:cs typeface="Arial" pitchFamily="34" charset="-120"/>
+              </a:rPr>
+              <a:t>Working time, breaks</a:t>
+            </a:r>
+            <a:endParaRPr lang="en-US" sz="860" dirty="0"/>
+          </a:p>
+        </p:txBody>
+      </p:sp>
+      <p:sp>
+        <p:nvSpPr>
+          <p:cNvPr id="14" name="Text 12"/>
+          <p:cNvSpPr txBox="1"/>
+          <p:nvPr/>
+        </p:nvSpPr>
+        <p:spPr>
+          <a:xfrm>
             <a:off x="530352" y="1417320"/>
-            <a:ext cx="1874520" cy="219456"/>
+            <a:ext cx="4937760" cy="182880"/>
           </a:xfrm>
           <a:prstGeom prst="rect">
             <a:avLst/>
@@ -20732,30 +20869,32 @@
               <a:buNone/>
             </a:pPr>
             <a:r>
-              <a:rPr lang="en-US" sz="880" b="1" dirty="0">
-                <a:solidFill>
-                  <a:srgbClr val="1B2430"/>
-                </a:solidFill>
-                <a:latin typeface="Arial" pitchFamily="34" charset="0"/>
-                <a:ea typeface="Arial" pitchFamily="34" charset="-122"/>
-                <a:cs typeface="Arial" pitchFamily="34" charset="-120"/>
-              </a:rPr>
-              <a:t>Working time &amp; breaks</a:t>
-            </a:r>
-            <a:endParaRPr lang="en-US" sz="880" dirty="0"/>
-          </a:p>
-        </p:txBody>
-      </p:sp>
-      <p:sp>
-        <p:nvSpPr>
-          <p:cNvPr id="14" name="Text 12"/>
-          <p:cNvSpPr txBox="1"/>
-          <p:nvPr/>
-        </p:nvSpPr>
-        <p:spPr>
-          <a:xfrm>
-            <a:off x="530352" y="1609344"/>
-            <a:ext cx="4846320" cy="237744"/>
+              <a:rPr lang="en-US" sz="800" dirty="0">
+                <a:solidFill>
+                  <a:srgbClr val="5A5A5A"/>
+                </a:solidFill>
+                <a:latin typeface="Arial" pitchFamily="34" charset="0"/>
+                <a:ea typeface="Arial" pitchFamily="34" charset="-122"/>
+                <a:cs typeface="Arial" pitchFamily="34" charset="-120"/>
+              </a:rPr>
+              <a:t>38 h tariff week; statutory break rules</a:t>
+            </a:r>
+            <a:endParaRPr lang="en-US" sz="800" dirty="0"/>
+          </a:p>
+        </p:txBody>
+      </p:sp>
+      <p:sp>
+        <p:nvSpPr>
+          <p:cNvPr id="15" name="Text 13">
+            <a:hlinkClick r:id="rId3" tooltip="Arbeitszeitgesetz §4"/>
+          </p:cNvPr>
+          <p:cNvSpPr txBox="1"/>
+          <p:nvPr/>
+        </p:nvSpPr>
+        <p:spPr>
+          <a:xfrm>
+            <a:off x="5669280" y="1316736"/>
+            <a:ext cx="6035040" cy="219456"/>
           </a:xfrm>
           <a:prstGeom prst="rect">
             <a:avLst/>
@@ -20771,47 +20910,6 @@
               <a:buNone/>
             </a:pPr>
             <a:r>
-              <a:rPr lang="en-US" sz="800" dirty="0">
-                <a:solidFill>
-                  <a:srgbClr val="5A5A5A"/>
-                </a:solidFill>
-                <a:latin typeface="Arial" pitchFamily="34" charset="0"/>
-                <a:ea typeface="Arial" pitchFamily="34" charset="-122"/>
-                <a:cs typeface="Arial" pitchFamily="34" charset="-120"/>
-              </a:rPr>
-              <a:t>38 h tariff week; statutory break rules (ArbZG §4)</a:t>
-            </a:r>
-            <a:endParaRPr lang="en-US" sz="800" dirty="0"/>
-          </a:p>
-        </p:txBody>
-      </p:sp>
-      <p:sp>
-        <p:nvSpPr>
-          <p:cNvPr id="15" name="Text 13">
-            <a:hlinkClick r:id="rId3" tooltip="Arbeitszeitgesetz §4, gesetze-im-internet.de"/>
-          </p:cNvPr>
-          <p:cNvSpPr txBox="1"/>
-          <p:nvPr/>
-        </p:nvSpPr>
-        <p:spPr>
-          <a:xfrm>
-            <a:off x="5577840" y="1472184"/>
-            <a:ext cx="6126480" cy="256032"/>
-          </a:xfrm>
-          <a:prstGeom prst="rect">
-            <a:avLst/>
-          </a:prstGeom>
-          <a:noFill/>
-          <a:ln/>
-        </p:spPr>
-        <p:txBody>
-          <a:bodyPr wrap="square" lIns="0" tIns="0" rIns="0" bIns="0" rtlCol="0" anchor="ctr"/>
-          <a:lstStyle/>
-          <a:p>
-            <a:pPr indent="0" marL="0">
-              <a:buNone/>
-            </a:pPr>
-            <a:r>
               <a:rPr lang="en-US" sz="840" u="sng" dirty="0">
                 <a:solidFill>
                   <a:srgbClr val="0B5F8A"/>
@@ -20819,7 +20917,7 @@
                 <a:latin typeface="Arial" pitchFamily="34" charset="0"/>
                 <a:ea typeface="Arial" pitchFamily="34" charset="-122"/>
                 <a:cs typeface="Arial" pitchFamily="34" charset="-120"/>
-                <a:hlinkClick r:id="rId3" invalidUrl="" action="" tgtFrame="" tooltip="Arbeitszeitgesetz §4, gesetze-im-internet.de" history="1" highlightClick="0" endSnd="0">
+                <a:hlinkClick r:id="rId3" invalidUrl="" action="" tgtFrame="" tooltip="Arbeitszeitgesetz §4" history="1" highlightClick="0" endSnd="0">
                   <a:extLst>
                     <a:ext uri="{A12FA001-AC4F-418D-AE19-62706E023703}">
                       <ahyp:hlinkClr xmlns:ahyp="http://schemas.microsoft.com/office/drawing/2018/hyperlinkcolor" val="tx"/>
@@ -20827,7 +20925,7 @@
                   </a:extLst>
                 </a:hlinkClick>
               </a:rPr>
-              <a:t>Arbeitszeitgesetz §4, gesetze-im-internet.de</a:t>
+              <a:t>Arbeitszeitgesetz §4</a:t>
             </a:r>
             <a:endParaRPr lang="en-US" sz="840" dirty="0"/>
           </a:p>
@@ -20841,8 +20939,8 @@
         </p:nvSpPr>
         <p:spPr>
           <a:xfrm>
-            <a:off x="365760" y="1888236"/>
-            <a:ext cx="45720" cy="402336"/>
+            <a:off x="365760" y="1645920"/>
+            <a:ext cx="45720" cy="310896"/>
           </a:xfrm>
           <a:prstGeom prst="rect">
             <a:avLst/>
@@ -20861,8 +20959,8 @@
         </p:nvSpPr>
         <p:spPr>
           <a:xfrm>
-            <a:off x="530352" y="1851660"/>
-            <a:ext cx="1874520" cy="219456"/>
+            <a:off x="530352" y="1627632"/>
+            <a:ext cx="1965960" cy="182880"/>
           </a:xfrm>
           <a:prstGeom prst="rect">
             <a:avLst/>
@@ -20878,7 +20976,7 @@
               <a:buNone/>
             </a:pPr>
             <a:r>
-              <a:rPr lang="en-US" sz="880" b="1" dirty="0">
+              <a:rPr lang="en-US" sz="860" b="1" dirty="0">
                 <a:solidFill>
                   <a:srgbClr val="1B2430"/>
                 </a:solidFill>
@@ -20888,7 +20986,7 @@
               </a:rPr>
               <a:t>Model prices</a:t>
             </a:r>
-            <a:endParaRPr lang="en-US" sz="880" dirty="0"/>
+            <a:endParaRPr lang="en-US" sz="860" dirty="0"/>
           </a:p>
         </p:txBody>
       </p:sp>
@@ -20900,8 +20998,8 @@
         </p:nvSpPr>
         <p:spPr>
           <a:xfrm>
-            <a:off x="530352" y="2043684"/>
-            <a:ext cx="4846320" cy="237744"/>
+            <a:off x="530352" y="1783080"/>
+            <a:ext cx="4937760" cy="182880"/>
           </a:xfrm>
           <a:prstGeom prst="rect">
             <a:avLst/>
@@ -20925,7 +21023,7 @@
                 <a:ea typeface="Arial" pitchFamily="34" charset="-122"/>
                 <a:cs typeface="Arial" pitchFamily="34" charset="-120"/>
               </a:rPr>
-              <a:t>gpt-5.6 terra, $2 / $12 per million tokens in / out</a:t>
+              <a:t>gpt-5.6 terra — $2 in / $12 out per million tokens</a:t>
             </a:r>
             <a:endParaRPr lang="en-US" sz="800" dirty="0"/>
           </a:p>
@@ -20941,8 +21039,8 @@
         </p:nvSpPr>
         <p:spPr>
           <a:xfrm>
-            <a:off x="5577840" y="1906524"/>
-            <a:ext cx="6126480" cy="256032"/>
+            <a:off x="5669280" y="1682496"/>
+            <a:ext cx="6035040" cy="219456"/>
           </a:xfrm>
           <a:prstGeom prst="rect">
             <a:avLst/>
@@ -20987,8 +21085,8 @@
         </p:nvSpPr>
         <p:spPr>
           <a:xfrm>
-            <a:off x="365760" y="2322576"/>
-            <a:ext cx="45720" cy="402336"/>
+            <a:off x="365760" y="2011680"/>
+            <a:ext cx="45720" cy="310896"/>
           </a:xfrm>
           <a:prstGeom prst="rect">
             <a:avLst/>
@@ -21007,8 +21105,8 @@
         </p:nvSpPr>
         <p:spPr>
           <a:xfrm>
-            <a:off x="530352" y="2286000"/>
-            <a:ext cx="1874520" cy="219456"/>
+            <a:off x="530352" y="1993392"/>
+            <a:ext cx="1965960" cy="182880"/>
           </a:xfrm>
           <a:prstGeom prst="rect">
             <a:avLst/>
@@ -21024,7 +21122,7 @@
               <a:buNone/>
             </a:pPr>
             <a:r>
-              <a:rPr lang="en-US" sz="880" b="1" dirty="0">
+              <a:rPr lang="en-US" sz="860" b="1" dirty="0">
                 <a:solidFill>
                   <a:srgbClr val="1B2430"/>
                 </a:solidFill>
@@ -21034,7 +21132,7 @@
               </a:rPr>
               <a:t>Container hosting</a:t>
             </a:r>
-            <a:endParaRPr lang="en-US" sz="880" dirty="0"/>
+            <a:endParaRPr lang="en-US" sz="860" dirty="0"/>
           </a:p>
         </p:txBody>
       </p:sp>
@@ -21046,8 +21144,8 @@
         </p:nvSpPr>
         <p:spPr>
           <a:xfrm>
-            <a:off x="530352" y="2478024"/>
-            <a:ext cx="4846320" cy="237744"/>
+            <a:off x="530352" y="2148840"/>
+            <a:ext cx="4937760" cy="182880"/>
           </a:xfrm>
           <a:prstGeom prst="rect">
             <a:avLst/>
@@ -21087,8 +21185,8 @@
         </p:nvSpPr>
         <p:spPr>
           <a:xfrm>
-            <a:off x="5577840" y="2340864"/>
-            <a:ext cx="6126480" cy="256032"/>
+            <a:off x="5669280" y="2048256"/>
+            <a:ext cx="6035040" cy="219456"/>
           </a:xfrm>
           <a:prstGeom prst="rect">
             <a:avLst/>
@@ -21133,8 +21231,8 @@
         </p:nvSpPr>
         <p:spPr>
           <a:xfrm>
-            <a:off x="365760" y="2756916"/>
-            <a:ext cx="45720" cy="402336"/>
+            <a:off x="365760" y="2377440"/>
+            <a:ext cx="45720" cy="310896"/>
           </a:xfrm>
           <a:prstGeom prst="rect">
             <a:avLst/>
@@ -21153,8 +21251,8 @@
         </p:nvSpPr>
         <p:spPr>
           <a:xfrm>
-            <a:off x="530352" y="2720340"/>
-            <a:ext cx="1874520" cy="219456"/>
+            <a:off x="530352" y="2359152"/>
+            <a:ext cx="1965960" cy="182880"/>
           </a:xfrm>
           <a:prstGeom prst="rect">
             <a:avLst/>
@@ -21170,7 +21268,7 @@
               <a:buNone/>
             </a:pPr>
             <a:r>
-              <a:rPr lang="en-US" sz="880" b="1" dirty="0">
+              <a:rPr lang="en-US" sz="860" b="1" dirty="0">
                 <a:solidFill>
                   <a:srgbClr val="1B2430"/>
                 </a:solidFill>
@@ -21180,7 +21278,7 @@
               </a:rPr>
               <a:t>Database</a:t>
             </a:r>
-            <a:endParaRPr lang="en-US" sz="880" dirty="0"/>
+            <a:endParaRPr lang="en-US" sz="860" dirty="0"/>
           </a:p>
         </p:txBody>
       </p:sp>
@@ -21192,8 +21290,8 @@
         </p:nvSpPr>
         <p:spPr>
           <a:xfrm>
-            <a:off x="530352" y="2912364"/>
-            <a:ext cx="4846320" cy="237744"/>
+            <a:off x="530352" y="2514600"/>
+            <a:ext cx="4937760" cy="182880"/>
           </a:xfrm>
           <a:prstGeom prst="rect">
             <a:avLst/>
@@ -21217,7 +21315,7 @@
                 <a:ea typeface="Arial" pitchFamily="34" charset="-122"/>
                 <a:cs typeface="Arial" pitchFamily="34" charset="-120"/>
               </a:rPr>
-              <a:t>PostgreSQL Flexible Server B2s, 2 vCore / 4 GiB</a:t>
+              <a:t>PostgreSQL Flexible Server B2s — 2 vCore / 4 GiB</a:t>
             </a:r>
             <a:endParaRPr lang="en-US" sz="800" dirty="0"/>
           </a:p>
@@ -21226,15 +21324,15 @@
       <p:sp>
         <p:nvSpPr>
           <p:cNvPr id="27" name="Text 25">
-            <a:hlinkClick r:id="rId6" tooltip="Azure Database for PostgreSQL pricing"/>
+            <a:hlinkClick r:id="rId6" tooltip="Azure Database for PostgreSQL"/>
           </p:cNvPr>
           <p:cNvSpPr txBox="1"/>
           <p:nvPr/>
         </p:nvSpPr>
         <p:spPr>
           <a:xfrm>
-            <a:off x="5577840" y="2775204"/>
-            <a:ext cx="6126480" cy="256032"/>
+            <a:off x="5669280" y="2414016"/>
+            <a:ext cx="6035040" cy="219456"/>
           </a:xfrm>
           <a:prstGeom prst="rect">
             <a:avLst/>
@@ -21257,7 +21355,7 @@
                 <a:latin typeface="Arial" pitchFamily="34" charset="0"/>
                 <a:ea typeface="Arial" pitchFamily="34" charset="-122"/>
                 <a:cs typeface="Arial" pitchFamily="34" charset="-120"/>
-                <a:hlinkClick r:id="rId6" invalidUrl="" action="" tgtFrame="" tooltip="Azure Database for PostgreSQL pricing" history="1" highlightClick="0" endSnd="0">
+                <a:hlinkClick r:id="rId6" invalidUrl="" action="" tgtFrame="" tooltip="Azure Database for PostgreSQL" history="1" highlightClick="0" endSnd="0">
                   <a:extLst>
                     <a:ext uri="{A12FA001-AC4F-418D-AE19-62706E023703}">
                       <ahyp:hlinkClr xmlns:ahyp="http://schemas.microsoft.com/office/drawing/2018/hyperlinkcolor" val="tx"/>
@@ -21265,7 +21363,7 @@
                   </a:extLst>
                 </a:hlinkClick>
               </a:rPr>
-              <a:t>Azure Database for PostgreSQL pricing</a:t>
+              <a:t>Azure Database for PostgreSQL</a:t>
             </a:r>
             <a:endParaRPr lang="en-US" sz="840" dirty="0"/>
           </a:p>
@@ -21279,8 +21377,8 @@
         </p:nvSpPr>
         <p:spPr>
           <a:xfrm>
-            <a:off x="365760" y="3191256"/>
-            <a:ext cx="45720" cy="402336"/>
+            <a:off x="365760" y="2743200"/>
+            <a:ext cx="45720" cy="310896"/>
           </a:xfrm>
           <a:prstGeom prst="rect">
             <a:avLst/>
@@ -21299,8 +21397,8 @@
         </p:nvSpPr>
         <p:spPr>
           <a:xfrm>
-            <a:off x="530352" y="3154680"/>
-            <a:ext cx="1874520" cy="219456"/>
+            <a:off x="530352" y="2724912"/>
+            <a:ext cx="1965960" cy="182880"/>
           </a:xfrm>
           <a:prstGeom prst="rect">
             <a:avLst/>
@@ -21316,7 +21414,7 @@
               <a:buNone/>
             </a:pPr>
             <a:r>
-              <a:rPr lang="en-US" sz="880" b="1" dirty="0">
+              <a:rPr lang="en-US" sz="860" b="1" dirty="0">
                 <a:solidFill>
                   <a:srgbClr val="1B2430"/>
                 </a:solidFill>
@@ -21324,9 +21422,9 @@
                 <a:ea typeface="Arial" pitchFamily="34" charset="-122"/>
                 <a:cs typeface="Arial" pitchFamily="34" charset="-120"/>
               </a:rPr>
-              <a:t>Industry baseline</a:t>
-            </a:r>
-            <a:endParaRPr lang="en-US" sz="880" dirty="0"/>
+              <a:t>Build-team pay</a:t>
+            </a:r>
+            <a:endParaRPr lang="en-US" sz="860" dirty="0"/>
           </a:p>
         </p:txBody>
       </p:sp>
@@ -21338,8 +21436,8 @@
         </p:nvSpPr>
         <p:spPr>
           <a:xfrm>
-            <a:off x="530352" y="3346704"/>
-            <a:ext cx="4846320" cy="237744"/>
+            <a:off x="530352" y="2880360"/>
+            <a:ext cx="4937760" cy="182880"/>
           </a:xfrm>
           <a:prstGeom prst="rect">
             <a:avLst/>
@@ -21363,7 +21461,7 @@
                 <a:ea typeface="Arial" pitchFamily="34" charset="-122"/>
                 <a:cs typeface="Arial" pitchFamily="34" charset="-120"/>
               </a:rPr>
-              <a:t>17 of 20 carriers still manual or workflow-only; none let AI decide alone</a:t>
+              <a:t>Senior ML engineer ≈ €98k; juniors at €70k as briefed</a:t>
             </a:r>
             <a:endParaRPr lang="en-US" sz="800" dirty="0"/>
           </a:p>
@@ -21372,15 +21470,15 @@
       <p:sp>
         <p:nvSpPr>
           <p:cNvPr id="31" name="Text 29">
-            <a:hlinkClick r:id="rId7" tooltip="Decerto, 2026 Claims Decisioning Pulse"/>
+            <a:hlinkClick r:id="rId7" tooltip="Glassdoor, ML Engineer Germany"/>
           </p:cNvPr>
           <p:cNvSpPr txBox="1"/>
           <p:nvPr/>
         </p:nvSpPr>
         <p:spPr>
           <a:xfrm>
-            <a:off x="5577840" y="3209544"/>
-            <a:ext cx="6126480" cy="256032"/>
+            <a:off x="5669280" y="2779776"/>
+            <a:ext cx="6035040" cy="219456"/>
           </a:xfrm>
           <a:prstGeom prst="rect">
             <a:avLst/>
@@ -21403,7 +21501,7 @@
                 <a:latin typeface="Arial" pitchFamily="34" charset="0"/>
                 <a:ea typeface="Arial" pitchFamily="34" charset="-122"/>
                 <a:cs typeface="Arial" pitchFamily="34" charset="-120"/>
-                <a:hlinkClick r:id="rId7" invalidUrl="" action="" tgtFrame="" tooltip="Decerto, 2026 Claims Decisioning Pulse" history="1" highlightClick="0" endSnd="0">
+                <a:hlinkClick r:id="rId7" invalidUrl="" action="" tgtFrame="" tooltip="Glassdoor, ML Engineer Germany" history="1" highlightClick="0" endSnd="0">
                   <a:extLst>
                     <a:ext uri="{A12FA001-AC4F-418D-AE19-62706E023703}">
                       <ahyp:hlinkClr xmlns:ahyp="http://schemas.microsoft.com/office/drawing/2018/hyperlinkcolor" val="tx"/>
@@ -21411,7 +21509,7 @@
                   </a:extLst>
                 </a:hlinkClick>
               </a:rPr>
-              <a:t>Decerto, 2026 Claims Decisioning Pulse</a:t>
+              <a:t>Glassdoor, ML Engineer Germany</a:t>
             </a:r>
             <a:endParaRPr lang="en-US" sz="840" dirty="0"/>
           </a:p>
@@ -21425,8 +21523,8 @@
         </p:nvSpPr>
         <p:spPr>
           <a:xfrm>
-            <a:off x="365760" y="3625596"/>
-            <a:ext cx="45720" cy="402336"/>
+            <a:off x="365760" y="3108960"/>
+            <a:ext cx="45720" cy="310896"/>
           </a:xfrm>
           <a:prstGeom prst="rect">
             <a:avLst/>
@@ -21445,8 +21543,8 @@
         </p:nvSpPr>
         <p:spPr>
           <a:xfrm>
-            <a:off x="530352" y="3589020"/>
-            <a:ext cx="1874520" cy="219456"/>
+            <a:off x="530352" y="3090672"/>
+            <a:ext cx="1965960" cy="182880"/>
           </a:xfrm>
           <a:prstGeom prst="rect">
             <a:avLst/>
@@ -21462,7 +21560,7 @@
               <a:buNone/>
             </a:pPr>
             <a:r>
-              <a:rPr lang="en-US" sz="880" b="1" dirty="0">
+              <a:rPr lang="en-US" sz="860" b="1" dirty="0">
                 <a:solidFill>
                   <a:srgbClr val="1B2430"/>
                 </a:solidFill>
@@ -21470,9 +21568,9 @@
                 <a:ea typeface="Arial" pitchFamily="34" charset="-122"/>
                 <a:cs typeface="Arial" pitchFamily="34" charset="-120"/>
               </a:rPr>
-              <a:t>Where value comes from</a:t>
-            </a:r>
-            <a:endParaRPr lang="en-US" sz="880" dirty="0"/>
+              <a:t>Upkeep after go-live</a:t>
+            </a:r>
+            <a:endParaRPr lang="en-US" sz="860" dirty="0"/>
           </a:p>
         </p:txBody>
       </p:sp>
@@ -21484,8 +21582,8 @@
         </p:nvSpPr>
         <p:spPr>
           <a:xfrm>
-            <a:off x="530352" y="3781044"/>
-            <a:ext cx="4846320" cy="237744"/>
+            <a:off x="530352" y="3246120"/>
+            <a:ext cx="4937760" cy="182880"/>
           </a:xfrm>
           <a:prstGeom prst="rect">
             <a:avLst/>
@@ -21509,7 +21607,7 @@
                 <a:ea typeface="Arial" pitchFamily="34" charset="-122"/>
                 <a:cs typeface="Arial" pitchFamily="34" charset="-120"/>
               </a:rPr>
-              <a:t>The 10-20-70 split between algorithms, technology and people</a:t>
+              <a:t>15–20% of build effort a year — our 0.25 FTE is 17%</a:t>
             </a:r>
             <a:endParaRPr lang="en-US" sz="800" dirty="0"/>
           </a:p>
@@ -21517,16 +21615,153 @@
       </p:sp>
       <p:sp>
         <p:nvSpPr>
-          <p:cNvPr id="35" name="Text 33">
-            <a:hlinkClick r:id="rId8" tooltip="BCG, AI in customer service operations"/>
+          <p:cNvPr id="35" name="Text 33"/>
+          <p:cNvSpPr txBox="1"/>
+          <p:nvPr/>
+        </p:nvSpPr>
+        <p:spPr>
+          <a:xfrm>
+            <a:off x="5669280" y="3145536"/>
+            <a:ext cx="6035040" cy="219456"/>
+          </a:xfrm>
+          <a:prstGeom prst="rect">
+            <a:avLst/>
+          </a:prstGeom>
+          <a:noFill/>
+          <a:ln/>
+        </p:spPr>
+        <p:txBody>
+          <a:bodyPr wrap="square" lIns="0" tIns="0" rIns="0" bIns="0" rtlCol="0" anchor="ctr"/>
+          <a:lstStyle/>
+          <a:p>
+            <a:pPr indent="0" marL="0">
+              <a:buNone/>
+            </a:pPr>
+            <a:r>
+              <a:rPr lang="en-US" sz="840" i="1" dirty="0">
+                <a:solidFill>
+                  <a:srgbClr val="5A5A5A"/>
+                </a:solidFill>
+                <a:latin typeface="Arial" pitchFamily="34" charset="0"/>
+                <a:ea typeface="Arial" pitchFamily="34" charset="-122"/>
+                <a:cs typeface="Arial" pitchFamily="34" charset="-120"/>
+              </a:rPr>
+              <a:t>Software maintenance rule of thumb</a:t>
+            </a:r>
+            <a:endParaRPr lang="en-US" sz="840" dirty="0"/>
+          </a:p>
+        </p:txBody>
+      </p:sp>
+      <p:sp>
+        <p:nvSpPr>
+          <p:cNvPr id="36" name="Shape 34"/>
+          <p:cNvSpPr/>
+          <p:nvPr/>
+        </p:nvSpPr>
+        <p:spPr>
+          <a:xfrm>
+            <a:off x="365760" y="3474720"/>
+            <a:ext cx="45720" cy="310896"/>
+          </a:xfrm>
+          <a:prstGeom prst="rect">
+            <a:avLst/>
+          </a:prstGeom>
+          <a:solidFill>
+            <a:srgbClr val="0891B2"/>
+          </a:solidFill>
+          <a:ln/>
+        </p:spPr>
+      </p:sp>
+      <p:sp>
+        <p:nvSpPr>
+          <p:cNvPr id="37" name="Text 35"/>
+          <p:cNvSpPr txBox="1"/>
+          <p:nvPr/>
+        </p:nvSpPr>
+        <p:spPr>
+          <a:xfrm>
+            <a:off x="530352" y="3456432"/>
+            <a:ext cx="1965960" cy="182880"/>
+          </a:xfrm>
+          <a:prstGeom prst="rect">
+            <a:avLst/>
+          </a:prstGeom>
+          <a:noFill/>
+          <a:ln/>
+        </p:spPr>
+        <p:txBody>
+          <a:bodyPr wrap="square" lIns="0" tIns="0" rIns="0" bIns="0" rtlCol="0" anchor="ctr"/>
+          <a:lstStyle/>
+          <a:p>
+            <a:pPr indent="0" marL="0">
+              <a:buNone/>
+            </a:pPr>
+            <a:r>
+              <a:rPr lang="en-US" sz="860" b="1" dirty="0">
+                <a:solidFill>
+                  <a:srgbClr val="1B2430"/>
+                </a:solidFill>
+                <a:latin typeface="Arial" pitchFamily="34" charset="0"/>
+                <a:ea typeface="Arial" pitchFamily="34" charset="-122"/>
+                <a:cs typeface="Arial" pitchFamily="34" charset="-120"/>
+              </a:rPr>
+              <a:t>Industry baseline</a:t>
+            </a:r>
+            <a:endParaRPr lang="en-US" sz="860" dirty="0"/>
+          </a:p>
+        </p:txBody>
+      </p:sp>
+      <p:sp>
+        <p:nvSpPr>
+          <p:cNvPr id="38" name="Text 36"/>
+          <p:cNvSpPr txBox="1"/>
+          <p:nvPr/>
+        </p:nvSpPr>
+        <p:spPr>
+          <a:xfrm>
+            <a:off x="530352" y="3611880"/>
+            <a:ext cx="4937760" cy="182880"/>
+          </a:xfrm>
+          <a:prstGeom prst="rect">
+            <a:avLst/>
+          </a:prstGeom>
+          <a:noFill/>
+          <a:ln/>
+        </p:spPr>
+        <p:txBody>
+          <a:bodyPr wrap="square" lIns="0" tIns="0" rIns="0" bIns="0" rtlCol="0" anchor="ctr"/>
+          <a:lstStyle/>
+          <a:p>
+            <a:pPr indent="0" marL="0">
+              <a:buNone/>
+            </a:pPr>
+            <a:r>
+              <a:rPr lang="en-US" sz="800" dirty="0">
+                <a:solidFill>
+                  <a:srgbClr val="5A5A5A"/>
+                </a:solidFill>
+                <a:latin typeface="Arial" pitchFamily="34" charset="0"/>
+                <a:ea typeface="Arial" pitchFamily="34" charset="-122"/>
+                <a:cs typeface="Arial" pitchFamily="34" charset="-120"/>
+              </a:rPr>
+              <a:t>17 of 20 carriers still manual; none let AI decide alone</a:t>
+            </a:r>
+            <a:endParaRPr lang="en-US" sz="800" dirty="0"/>
+          </a:p>
+        </p:txBody>
+      </p:sp>
+      <p:sp>
+        <p:nvSpPr>
+          <p:cNvPr id="39" name="Text 37">
+            <a:hlinkClick r:id="rId8" tooltip="Decerto, 2026 Claims Decisioning Pulse"/>
           </p:cNvPr>
           <p:cNvSpPr txBox="1"/>
           <p:nvPr/>
         </p:nvSpPr>
         <p:spPr>
           <a:xfrm>
-            <a:off x="5577840" y="3643884"/>
-            <a:ext cx="6126480" cy="256032"/>
+            <a:off x="5669280" y="3511296"/>
+            <a:ext cx="6035040" cy="219456"/>
           </a:xfrm>
           <a:prstGeom prst="rect">
             <a:avLst/>
@@ -21549,7 +21784,7 @@
                 <a:latin typeface="Arial" pitchFamily="34" charset="0"/>
                 <a:ea typeface="Arial" pitchFamily="34" charset="-122"/>
                 <a:cs typeface="Arial" pitchFamily="34" charset="-120"/>
-                <a:hlinkClick r:id="rId8" invalidUrl="" action="" tgtFrame="" tooltip="BCG, AI in customer service operations" history="1" highlightClick="0" endSnd="0">
+                <a:hlinkClick r:id="rId8" invalidUrl="" action="" tgtFrame="" tooltip="Decerto, 2026 Claims Decisioning Pulse" history="1" highlightClick="0" endSnd="0">
                   <a:extLst>
                     <a:ext uri="{A12FA001-AC4F-418D-AE19-62706E023703}">
                       <ahyp:hlinkClr xmlns:ahyp="http://schemas.microsoft.com/office/drawing/2018/hyperlinkcolor" val="tx"/>
@@ -21557,7 +21792,7 @@
                   </a:extLst>
                 </a:hlinkClick>
               </a:rPr>
-              <a:t>BCG, AI in customer service operations</a:t>
+              <a:t>Decerto, 2026 Claims Decisioning Pulse</a:t>
             </a:r>
             <a:endParaRPr lang="en-US" sz="840" dirty="0"/>
           </a:p>
@@ -21565,14 +21800,14 @@
       </p:sp>
       <p:sp>
         <p:nvSpPr>
-          <p:cNvPr id="36" name="Shape 34"/>
+          <p:cNvPr id="40" name="Shape 38"/>
           <p:cNvSpPr/>
           <p:nvPr/>
         </p:nvSpPr>
         <p:spPr>
           <a:xfrm>
-            <a:off x="365760" y="4059936"/>
-            <a:ext cx="45720" cy="402336"/>
+            <a:off x="365760" y="3840480"/>
+            <a:ext cx="45720" cy="310896"/>
           </a:xfrm>
           <a:prstGeom prst="rect">
             <a:avLst/>
@@ -21585,14 +21820,14 @@
       </p:sp>
       <p:sp>
         <p:nvSpPr>
-          <p:cNvPr id="37" name="Text 35"/>
-          <p:cNvSpPr txBox="1"/>
-          <p:nvPr/>
-        </p:nvSpPr>
-        <p:spPr>
-          <a:xfrm>
-            <a:off x="530352" y="4023360"/>
-            <a:ext cx="1874520" cy="219456"/>
+          <p:cNvPr id="41" name="Text 39"/>
+          <p:cNvSpPr txBox="1"/>
+          <p:nvPr/>
+        </p:nvSpPr>
+        <p:spPr>
+          <a:xfrm>
+            <a:off x="530352" y="3822192"/>
+            <a:ext cx="1965960" cy="182880"/>
           </a:xfrm>
           <a:prstGeom prst="rect">
             <a:avLst/>
@@ -21608,7 +21843,7 @@
               <a:buNone/>
             </a:pPr>
             <a:r>
-              <a:rPr lang="en-US" sz="880" b="1" dirty="0">
+              <a:rPr lang="en-US" sz="860" b="1" dirty="0">
                 <a:solidFill>
                   <a:srgbClr val="1B2430"/>
                 </a:solidFill>
@@ -21616,22 +21851,22 @@
                 <a:ea typeface="Arial" pitchFamily="34" charset="-122"/>
                 <a:cs typeface="Arial" pitchFamily="34" charset="-120"/>
               </a:rPr>
-              <a:t>Build &amp; upkeep pay</a:t>
-            </a:r>
-            <a:endParaRPr lang="en-US" sz="880" dirty="0"/>
-          </a:p>
-        </p:txBody>
-      </p:sp>
-      <p:sp>
-        <p:nvSpPr>
-          <p:cNvPr id="38" name="Text 36"/>
-          <p:cNvSpPr txBox="1"/>
-          <p:nvPr/>
-        </p:nvSpPr>
-        <p:spPr>
-          <a:xfrm>
-            <a:off x="530352" y="4215384"/>
-            <a:ext cx="4846320" cy="237744"/>
+              <a:t>Where value comes from</a:t>
+            </a:r>
+            <a:endParaRPr lang="en-US" sz="860" dirty="0"/>
+          </a:p>
+        </p:txBody>
+      </p:sp>
+      <p:sp>
+        <p:nvSpPr>
+          <p:cNvPr id="42" name="Text 40"/>
+          <p:cNvSpPr txBox="1"/>
+          <p:nvPr/>
+        </p:nvSpPr>
+        <p:spPr>
+          <a:xfrm>
+            <a:off x="530352" y="3977640"/>
+            <a:ext cx="4937760" cy="182880"/>
           </a:xfrm>
           <a:prstGeom prst="rect">
             <a:avLst/>
@@ -21655,7 +21890,7 @@
                 <a:ea typeface="Arial" pitchFamily="34" charset="-122"/>
                 <a:cs typeface="Arial" pitchFamily="34" charset="-120"/>
               </a:rPr>
-              <a:t>Senior ML engineer ≈ €98k; juniors at €70k as briefed</a:t>
+              <a:t>The 10-20-70 split — algorithms, technology, people</a:t>
             </a:r>
             <a:endParaRPr lang="en-US" sz="800" dirty="0"/>
           </a:p>
@@ -21663,16 +21898,16 @@
       </p:sp>
       <p:sp>
         <p:nvSpPr>
-          <p:cNvPr id="39" name="Text 37">
-            <a:hlinkClick r:id="rId9" tooltip="Glassdoor, Senior ML Engineer Germany"/>
+          <p:cNvPr id="43" name="Text 41">
+            <a:hlinkClick r:id="rId9" tooltip="BCG, AI in customer service operations"/>
           </p:cNvPr>
           <p:cNvSpPr txBox="1"/>
           <p:nvPr/>
         </p:nvSpPr>
         <p:spPr>
           <a:xfrm>
-            <a:off x="5577840" y="4078224"/>
-            <a:ext cx="6126480" cy="256032"/>
+            <a:off x="5669280" y="3877056"/>
+            <a:ext cx="6035040" cy="219456"/>
           </a:xfrm>
           <a:prstGeom prst="rect">
             <a:avLst/>
@@ -21695,7 +21930,7 @@
                 <a:latin typeface="Arial" pitchFamily="34" charset="0"/>
                 <a:ea typeface="Arial" pitchFamily="34" charset="-122"/>
                 <a:cs typeface="Arial" pitchFamily="34" charset="-120"/>
-                <a:hlinkClick r:id="rId9" invalidUrl="" action="" tgtFrame="" tooltip="Glassdoor, Senior ML Engineer Germany" history="1" highlightClick="0" endSnd="0">
+                <a:hlinkClick r:id="rId9" invalidUrl="" action="" tgtFrame="" tooltip="BCG, AI in customer service operations" history="1" highlightClick="0" endSnd="0">
                   <a:extLst>
                     <a:ext uri="{A12FA001-AC4F-418D-AE19-62706E023703}">
                       <ahyp:hlinkClr xmlns:ahyp="http://schemas.microsoft.com/office/drawing/2018/hyperlinkcolor" val="tx"/>
@@ -21703,7 +21938,7 @@
                   </a:extLst>
                 </a:hlinkClick>
               </a:rPr>
-              <a:t>Glassdoor, Senior ML Engineer Germany</a:t>
+              <a:t>BCG, AI in customer service operations</a:t>
             </a:r>
             <a:endParaRPr lang="en-US" sz="840" dirty="0"/>
           </a:p>
@@ -21711,14 +21946,14 @@
       </p:sp>
       <p:sp>
         <p:nvSpPr>
-          <p:cNvPr id="40" name="Shape 38"/>
+          <p:cNvPr id="44" name="Shape 42"/>
           <p:cNvSpPr/>
           <p:nvPr/>
         </p:nvSpPr>
         <p:spPr>
           <a:xfrm>
-            <a:off x="365760" y="4494276"/>
-            <a:ext cx="45720" cy="402336"/>
+            <a:off x="365760" y="4206240"/>
+            <a:ext cx="45720" cy="310896"/>
           </a:xfrm>
           <a:prstGeom prst="rect">
             <a:avLst/>
@@ -21731,14 +21966,14 @@
       </p:sp>
       <p:sp>
         <p:nvSpPr>
-          <p:cNvPr id="41" name="Text 39"/>
-          <p:cNvSpPr txBox="1"/>
-          <p:nvPr/>
-        </p:nvSpPr>
-        <p:spPr>
-          <a:xfrm>
-            <a:off x="530352" y="4457700"/>
-            <a:ext cx="1874520" cy="219456"/>
+          <p:cNvPr id="45" name="Text 43"/>
+          <p:cNvSpPr txBox="1"/>
+          <p:nvPr/>
+        </p:nvSpPr>
+        <p:spPr>
+          <a:xfrm>
+            <a:off x="530352" y="4187952"/>
+            <a:ext cx="1965960" cy="182880"/>
           </a:xfrm>
           <a:prstGeom prst="rect">
             <a:avLst/>
@@ -21754,7 +21989,7 @@
               <a:buNone/>
             </a:pPr>
             <a:r>
-              <a:rPr lang="en-US" sz="880" b="1" dirty="0">
+              <a:rPr lang="en-US" sz="860" b="1" dirty="0">
                 <a:solidFill>
                   <a:srgbClr val="1B2430"/>
                 </a:solidFill>
@@ -21762,22 +21997,22 @@
                 <a:ea typeface="Arial" pitchFamily="34" charset="-122"/>
                 <a:cs typeface="Arial" pitchFamily="34" charset="-120"/>
               </a:rPr>
-              <a:t>Import-failure handling</a:t>
-            </a:r>
-            <a:endParaRPr lang="en-US" sz="880" dirty="0"/>
-          </a:p>
-        </p:txBody>
-      </p:sp>
-      <p:sp>
-        <p:nvSpPr>
-          <p:cNvPr id="42" name="Text 40"/>
-          <p:cNvSpPr txBox="1"/>
-          <p:nvPr/>
-        </p:nvSpPr>
-        <p:spPr>
-          <a:xfrm>
-            <a:off x="530352" y="4649724"/>
-            <a:ext cx="4846320" cy="237744"/>
+              <a:t>Fixing import failures</a:t>
+            </a:r>
+            <a:endParaRPr lang="en-US" sz="860" dirty="0"/>
+          </a:p>
+        </p:txBody>
+      </p:sp>
+      <p:sp>
+        <p:nvSpPr>
+          <p:cNvPr id="46" name="Text 44"/>
+          <p:cNvSpPr txBox="1"/>
+          <p:nvPr/>
+        </p:nvSpPr>
+        <p:spPr>
+          <a:xfrm>
+            <a:off x="530352" y="4343400"/>
+            <a:ext cx="4937760" cy="182880"/>
           </a:xfrm>
           <a:prstGeom prst="rect">
             <a:avLst/>
@@ -21809,7 +22044,7 @@
       </p:sp>
       <p:sp>
         <p:nvSpPr>
-          <p:cNvPr id="43" name="Text 41">
+          <p:cNvPr id="47" name="Text 45">
             <a:hlinkClick r:id="rId10" tooltip="Dead-letter queues and poison messages"/>
           </p:cNvPr>
           <p:cNvSpPr txBox="1"/>
@@ -21817,8 +22052,8 @@
         </p:nvSpPr>
         <p:spPr>
           <a:xfrm>
-            <a:off x="5577840" y="4512564"/>
-            <a:ext cx="6126480" cy="256032"/>
+            <a:off x="5669280" y="4242816"/>
+            <a:ext cx="6035040" cy="219456"/>
           </a:xfrm>
           <a:prstGeom prst="rect">
             <a:avLst/>
@@ -21857,14 +22092,14 @@
       </p:sp>
       <p:sp>
         <p:nvSpPr>
-          <p:cNvPr id="44" name="Shape 42"/>
+          <p:cNvPr id="48" name="Shape 46"/>
           <p:cNvSpPr/>
           <p:nvPr/>
         </p:nvSpPr>
         <p:spPr>
           <a:xfrm>
-            <a:off x="365760" y="4928616"/>
-            <a:ext cx="45720" cy="402336"/>
+            <a:off x="365760" y="4572000"/>
+            <a:ext cx="45720" cy="310896"/>
           </a:xfrm>
           <a:prstGeom prst="rect">
             <a:avLst/>
@@ -21877,14 +22112,14 @@
       </p:sp>
       <p:sp>
         <p:nvSpPr>
-          <p:cNvPr id="45" name="Text 43"/>
-          <p:cNvSpPr txBox="1"/>
-          <p:nvPr/>
-        </p:nvSpPr>
-        <p:spPr>
-          <a:xfrm>
-            <a:off x="530352" y="4892040"/>
-            <a:ext cx="1874520" cy="219456"/>
+          <p:cNvPr id="49" name="Text 47"/>
+          <p:cNvSpPr txBox="1"/>
+          <p:nvPr/>
+        </p:nvSpPr>
+        <p:spPr>
+          <a:xfrm>
+            <a:off x="530352" y="4553712"/>
+            <a:ext cx="1965960" cy="182880"/>
           </a:xfrm>
           <a:prstGeom prst="rect">
             <a:avLst/>
@@ -21900,7 +22135,7 @@
               <a:buNone/>
             </a:pPr>
             <a:r>
-              <a:rPr lang="en-US" sz="880" b="1" dirty="0">
+              <a:rPr lang="en-US" sz="860" b="1" dirty="0">
                 <a:solidFill>
                   <a:srgbClr val="1B2430"/>
                 </a:solidFill>
@@ -21910,20 +22145,20 @@
               </a:rPr>
               <a:t>Volumes and shares</a:t>
             </a:r>
-            <a:endParaRPr lang="en-US" sz="880" dirty="0"/>
-          </a:p>
-        </p:txBody>
-      </p:sp>
-      <p:sp>
-        <p:nvSpPr>
-          <p:cNvPr id="46" name="Text 44"/>
-          <p:cNvSpPr txBox="1"/>
-          <p:nvPr/>
-        </p:nvSpPr>
-        <p:spPr>
-          <a:xfrm>
-            <a:off x="530352" y="5084064"/>
-            <a:ext cx="4846320" cy="237744"/>
+            <a:endParaRPr lang="en-US" sz="860" dirty="0"/>
+          </a:p>
+        </p:txBody>
+      </p:sp>
+      <p:sp>
+        <p:nvSpPr>
+          <p:cNvPr id="50" name="Text 48"/>
+          <p:cNvSpPr txBox="1"/>
+          <p:nvPr/>
+        </p:nvSpPr>
+        <p:spPr>
+          <a:xfrm>
+            <a:off x="530352" y="4709160"/>
+            <a:ext cx="4937760" cy="182880"/>
           </a:xfrm>
           <a:prstGeom prst="rect">
             <a:avLst/>
@@ -21947,7 +22182,7 @@
                 <a:ea typeface="Arial" pitchFamily="34" charset="-122"/>
                 <a:cs typeface="Arial" pitchFamily="34" charset="-120"/>
               </a:rPr>
-              <a:t>~50 first reports a day · 65% closed as minor · ~30 handlers</a:t>
+              <a:t>~50 first reports a day · 65% minor · ~30 handlers</a:t>
             </a:r>
             <a:endParaRPr lang="en-US" sz="800" dirty="0"/>
           </a:p>
@@ -21955,14 +22190,14 @@
       </p:sp>
       <p:sp>
         <p:nvSpPr>
-          <p:cNvPr id="47" name="Text 45"/>
-          <p:cNvSpPr txBox="1"/>
-          <p:nvPr/>
-        </p:nvSpPr>
-        <p:spPr>
-          <a:xfrm>
-            <a:off x="5577840" y="4946904"/>
-            <a:ext cx="6126480" cy="256032"/>
+          <p:cNvPr id="51" name="Text 49"/>
+          <p:cNvSpPr txBox="1"/>
+          <p:nvPr/>
+        </p:nvSpPr>
+        <p:spPr>
+          <a:xfrm>
+            <a:off x="5669280" y="4608576"/>
+            <a:ext cx="6035040" cy="219456"/>
           </a:xfrm>
           <a:prstGeom prst="rect">
             <a:avLst/>
@@ -21994,18 +22229,18 @@
       </p:sp>
       <p:sp>
         <p:nvSpPr>
-          <p:cNvPr id="48" name="Shape 46"/>
+          <p:cNvPr id="52" name="Shape 50"/>
           <p:cNvSpPr/>
           <p:nvPr/>
         </p:nvSpPr>
         <p:spPr>
           <a:xfrm>
-            <a:off x="365760" y="4937760"/>
-            <a:ext cx="11365992" cy="1042416"/>
+            <a:off x="365760" y="4956048"/>
+            <a:ext cx="11365992" cy="1097280"/>
           </a:xfrm>
           <a:prstGeom prst="roundRect">
             <a:avLst>
-              <a:gd name="adj" fmla="val 5263"/>
+              <a:gd name="adj" fmla="val 5000"/>
             </a:avLst>
           </a:prstGeom>
           <a:solidFill>
@@ -22021,13 +22256,13 @@
       </p:sp>
       <p:sp>
         <p:nvSpPr>
-          <p:cNvPr id="49" name="Text 47"/>
-          <p:cNvSpPr txBox="1"/>
-          <p:nvPr/>
-        </p:nvSpPr>
-        <p:spPr>
-          <a:xfrm>
-            <a:off x="548640" y="5038344"/>
+          <p:cNvPr id="53" name="Text 51"/>
+          <p:cNvSpPr txBox="1"/>
+          <p:nvPr/>
+        </p:nvSpPr>
+        <p:spPr>
+          <a:xfrm>
+            <a:off x="548640" y="5056632"/>
             <a:ext cx="10972800" cy="219456"/>
           </a:xfrm>
           <a:prstGeom prst="rect">
@@ -22060,14 +22295,14 @@
       </p:sp>
       <p:sp>
         <p:nvSpPr>
-          <p:cNvPr id="50" name="Text 48"/>
-          <p:cNvSpPr txBox="1"/>
-          <p:nvPr/>
-        </p:nvSpPr>
-        <p:spPr>
-          <a:xfrm>
-            <a:off x="548640" y="5248656"/>
-            <a:ext cx="10972800" cy="658368"/>
+          <p:cNvPr id="54" name="Text 52"/>
+          <p:cNvSpPr txBox="1"/>
+          <p:nvPr/>
+        </p:nvSpPr>
+        <p:spPr>
+          <a:xfrm>
+            <a:off x="548640" y="5285232"/>
+            <a:ext cx="10972800" cy="694944"/>
           </a:xfrm>
           <a:prstGeom prst="rect">
             <a:avLst/>
@@ -22094,7 +22329,7 @@
                 <a:ea typeface="Arial" pitchFamily="34" charset="-122"/>
                 <a:cs typeface="Arial" pitchFamily="34" charset="-120"/>
               </a:rPr>
-              <a:t>Every per-step minute on slide 6 · the 30% allowance for breaks and interruptions · how often a CPR is missing (30%) or underwriting is asked (25%) · how often the redesign raises an exception (20%) · the token profile of a typical claim · the €146k build · the 0.25 FTE upkeep, sized two ways that agree (a standing share of the team, and the 15–20%-of-build rule of thumb) · and how many people actually staff intake, which sets the per-person saving.</a:t>
+              <a:t>Every per-step minute on slide 6 · the 30% allowance for breaks and interruptions · how often a CPR is missing (30%) or underwriting is asked (25%) · how often the redesign raises an exception (20%) · the tokens a typical claim needs · the €146k build · the 0.25 FTE upkeep · and how many people staff intake, which sets the per-person saving.</a:t>
             </a:r>
             <a:endParaRPr lang="en-US" sz="840" dirty="0"/>
           </a:p>
@@ -22123,7 +22358,7 @@
                 <a:ea typeface="Arial" pitchFamily="34" charset="-122"/>
                 <a:cs typeface="Arial" pitchFamily="34" charset="-120"/>
               </a:rPr>
-              <a:t>Two weeks of observed intake would replace all of these with measurements. That observation is step one of the plan, not an afterthought.</a:t>
+              <a:t>Two weeks of watching live intake would replace all of these with real measurements. That is step one of the plan, not an afterthought.</a:t>
             </a:r>
             <a:endParaRPr lang="en-US" sz="840" dirty="0"/>
           </a:p>
@@ -22131,13 +22366,13 @@
       </p:sp>
       <p:sp>
         <p:nvSpPr>
-          <p:cNvPr id="51" name="Text 49"/>
-          <p:cNvSpPr txBox="1"/>
-          <p:nvPr/>
-        </p:nvSpPr>
-        <p:spPr>
-          <a:xfrm>
-            <a:off x="365760" y="6071616"/>
+          <p:cNvPr id="55" name="Text 53"/>
+          <p:cNvSpPr txBox="1"/>
+          <p:nvPr/>
+        </p:nvSpPr>
+        <p:spPr>
+          <a:xfrm>
+            <a:off x="365760" y="6126480"/>
             <a:ext cx="11430000" cy="237744"/>
           </a:xfrm>
           <a:prstGeom prst="rect">
@@ -22162,7 +22397,7 @@
                 <a:ea typeface="Arial" pitchFamily="34" charset="-122"/>
                 <a:cs typeface="Arial" pitchFamily="34" charset="-120"/>
               </a:rPr>
-              <a:t>Prices checked September 2026 · US$ converted at €0.92 · all euro figures are fully loaded (gross pay plus employer contributions)</a:t>
+              <a:t>Prices checked September 2026 · US$ converted at €0.92 · every euro figure is fully loaded — gross pay plus employer contributions</a:t>
             </a:r>
             <a:endParaRPr lang="en-US" sz="700" dirty="0"/>
           </a:p>
@@ -22170,7 +22405,7 @@
       </p:sp>
       <p:sp>
         <p:nvSpPr>
-          <p:cNvPr id="52" name="Text 50"/>
+          <p:cNvPr id="56" name="Text 54"/>
           <p:cNvSpPr txBox="1"/>
           <p:nvPr/>
         </p:nvSpPr>
@@ -22209,7 +22444,7 @@
       </p:sp>
       <p:sp>
         <p:nvSpPr>
-          <p:cNvPr id="53" name="Text 51"/>
+          <p:cNvPr id="57" name="Text 55"/>
           <p:cNvSpPr txBox="1"/>
           <p:nvPr/>
         </p:nvSpPr>

--- a/case-study/deck/GGW_FNOL_Redesign.pptx
+++ b/case-study/deck/GGW_FNOL_Redesign.pptx
@@ -1521,7 +1521,7 @@
                 <a:ea typeface="Cambria" pitchFamily="34" charset="-122"/>
                 <a:cs typeface="Cambria" pitchFamily="34" charset="-120"/>
               </a:rPr>
-              <a:t>Redesigning intake releases 17.5 handler-hours a day — the capacity of 2.8 full-time people</a:t>
+              <a:t>Redesigning intake releases 17.5 handler-hours every working day — the capacity of 2.8 full-time people</a:t>
             </a:r>
             <a:endParaRPr lang="en-US" sz="1900" dirty="0"/>
           </a:p>
@@ -1668,7 +1668,7 @@
                 <a:ea typeface="Arial" pitchFamily="34" charset="-122"/>
                 <a:cs typeface="Arial" pitchFamily="34" charset="-120"/>
               </a:rPr>
-              <a:t>What one claim costs a handler today, start to finish</a:t>
+              <a:t>What one claim costs one handler today, start to finish</a:t>
             </a:r>
             <a:endParaRPr lang="en-US" sz="900" dirty="0"/>
           </a:p>
@@ -1721,7 +1721,7 @@
                 <a:ea typeface="Cambria" pitchFamily="34" charset="-122"/>
                 <a:cs typeface="Cambria" pitchFamily="34" charset="-120"/>
               </a:rPr>
-              <a:t>  minutes</a:t>
+              <a:t>  minutes per claim</a:t>
             </a:r>
             <a:endParaRPr lang="en-US" sz="4200" dirty="0"/>
           </a:p>
@@ -1924,7 +1924,7 @@
                 <a:ea typeface="Cambria" pitchFamily="34" charset="-122"/>
                 <a:cs typeface="Cambria" pitchFamily="34" charset="-120"/>
               </a:rPr>
-              <a:t>  minutes</a:t>
+              <a:t>  minutes per claim</a:t>
             </a:r>
             <a:endParaRPr lang="en-US" sz="4200" dirty="0"/>
           </a:p>
@@ -2172,7 +2172,7 @@
                 <a:ea typeface="Arial" pitchFamily="34" charset="-122"/>
                 <a:cs typeface="Arial" pitchFamily="34" charset="-120"/>
               </a:rPr>
-              <a:t>€0.08 a claim</a:t>
+              <a:t>€0.077 a claim</a:t>
             </a:r>
             <a:endParaRPr lang="en-US" sz="820" dirty="0"/>
           </a:p>
@@ -2599,7 +2599,7 @@
                 <a:ea typeface="Arial" pitchFamily="34" charset="-122"/>
                 <a:cs typeface="Arial" pitchFamily="34" charset="-120"/>
               </a:rPr>
-              <a:t>freed every working day</a:t>
+              <a:t>handler-hours freed every working day, across the claims team</a:t>
             </a:r>
             <a:endParaRPr lang="en-US" sz="840" dirty="0"/>
           </a:p>
@@ -2707,7 +2707,7 @@
                 <a:ea typeface="Arial" pitchFamily="34" charset="-122"/>
                 <a:cs typeface="Arial" pitchFamily="34" charset="-120"/>
               </a:rPr>
-              <a:t>the same capacity, as people</a:t>
+              <a:t>the same capacity, expressed as full-time people</a:t>
             </a:r>
             <a:endParaRPr lang="en-US" sz="840" dirty="0"/>
           </a:p>
@@ -2815,7 +2815,7 @@
                 <a:ea typeface="Arial" pitchFamily="34" charset="-122"/>
                 <a:cs typeface="Arial" pitchFamily="34" charset="-120"/>
               </a:rPr>
-              <a:t>that capacity at loaded cost</a:t>
+              <a:t>value of that capacity, per year</a:t>
             </a:r>
             <a:endParaRPr lang="en-US" sz="840" dirty="0"/>
           </a:p>
@@ -2923,7 +2923,7 @@
                 <a:ea typeface="Arial" pitchFamily="34" charset="-122"/>
                 <a:cs typeface="Arial" pitchFamily="34" charset="-120"/>
               </a:rPr>
-              <a:t>payback on a €146k build</a:t>
+              <a:t>to pay back the one-off build of €146k</a:t>
             </a:r>
             <a:endParaRPr lang="en-US" sz="840" dirty="0"/>
           </a:p>
@@ -3009,7 +3009,7 @@
                 <a:ea typeface="Arial" pitchFamily="34" charset="-122"/>
                 <a:cs typeface="Arial" pitchFamily="34" charset="-120"/>
               </a:rPr>
-              <a:t>4,370 hours a year × €34.92, the real cost of a handler-hour. This is capacity, not cash. It becomes money only if the hours go to the backlog, or are absorbed by normal staff turnover.</a:t>
+              <a:t>4,370 handler-hours a year × €34.92, the real cost of one handler-hour. This is capacity, not cash. It becomes money only if the hours go to the backlog, or are absorbed by normal staff turnover.</a:t>
             </a:r>
             <a:endParaRPr lang="en-US" sz="850" dirty="0"/>
           </a:p>
@@ -3134,7 +3134,7 @@
                 <a:ea typeface="Arial" pitchFamily="34" charset="-122"/>
                 <a:cs typeface="Arial" pitchFamily="34" charset="-120"/>
               </a:rPr>
-              <a:t>Conservative throughout: the 21-minute saving is a three-point estimate (best 30 / likely 21 / worst 12), not the design maximum. Build-up on slide 6, sources on slide 7.</a:t>
+              <a:t>Conservative throughout: the 21.0-minutes-per-claim saving is a three-point estimate (best 30 / likely 21 / worst 12), not the design maximum. Build-up on slide 6, sources on slide 7.</a:t>
             </a:r>
             <a:endParaRPr lang="en-US" sz="760" dirty="0"/>
           </a:p>
@@ -11954,7 +11954,7 @@
                 <a:ea typeface="Arial" pitchFamily="34" charset="-122"/>
                 <a:cs typeface="Arial" pitchFamily="34" charset="-120"/>
               </a:rPr>
-              <a:t>A · HANDLER TIME, PER CLAIM  (MINUTES)</a:t>
+              <a:t>A · HANDLER TIME — MINUTES PER CLAIM, PER HANDLER</a:t>
             </a:r>
             <a:endParaRPr lang="en-US" sz="900" dirty="0"/>
           </a:p>
@@ -11983,11 +11983,11 @@
             <a:tbl>
               <a:tblPr/>
               <a:tblGrid>
-                <a:gridCol w="3657600"/>
-                <a:gridCol w="914400"/>
-                <a:gridCol w="914400"/>
+                <a:gridCol w="3566160"/>
+                <a:gridCol w="960120"/>
+                <a:gridCol w="960120"/>
               </a:tblGrid>
-              <a:tr h="205740">
+              <a:tr h="192024">
                 <a:tc>
                   <a:txBody>
                     <a:bodyPr/>
@@ -12073,7 +12073,7 @@
                           <a:ea typeface="Arial" pitchFamily="34" charset="-122"/>
                           <a:cs typeface="Arial" pitchFamily="34" charset="-120"/>
                         </a:rPr>
-                        <a:t>Today</a:t>
+                        <a:t>Today (min)</a:t>
                       </a:r>
                       <a:endParaRPr lang="en-US" sz="780" dirty="0">
                         <a:latin typeface="Arial" charset="0"/>
@@ -12141,7 +12141,7 @@
                           <a:ea typeface="Arial" pitchFamily="34" charset="-122"/>
                           <a:cs typeface="Arial" pitchFamily="34" charset="-120"/>
                         </a:rPr>
-                        <a:t>After</a:t>
+                        <a:t>Redesigned (min)</a:t>
                       </a:r>
                       <a:endParaRPr lang="en-US" sz="780" dirty="0">
                         <a:latin typeface="Arial" charset="0"/>
@@ -12193,7 +12193,7 @@
                   </a:tcPr>
                 </a:tc>
               </a:tr>
-              <a:tr h="205740">
+              <a:tr h="192024">
                 <a:tc>
                   <a:txBody>
                     <a:bodyPr/>
@@ -12347,7 +12347,7 @@
                           <a:ea typeface="Arial" pitchFamily="34" charset="-122"/>
                           <a:cs typeface="Arial" pitchFamily="34" charset="-120"/>
                         </a:rPr>
-                        <a:t>1.0</a:t>
+                        <a:t>0.7</a:t>
                       </a:r>
                       <a:endParaRPr lang="en-US" sz="780" dirty="0">
                         <a:latin typeface="Arial" charset="0"/>
@@ -12399,7 +12399,7 @@
                   </a:tcPr>
                 </a:tc>
               </a:tr>
-              <a:tr h="205740">
+              <a:tr h="192024">
                 <a:tc>
                   <a:txBody>
                     <a:bodyPr/>
@@ -12485,7 +12485,419 @@
                           <a:ea typeface="Arial" pitchFamily="34" charset="-122"/>
                           <a:cs typeface="Arial" pitchFamily="34" charset="-120"/>
                         </a:rPr>
-                        <a:t>7.2</a:t>
+                        <a:t>6.1</a:t>
+                      </a:r>
+                      <a:endParaRPr lang="en-US" sz="780" dirty="0">
+                        <a:latin typeface="Arial" charset="0"/>
+                        <a:ea typeface="Arial" charset="0"/>
+                        <a:cs typeface="Arial" charset="0"/>
+                      </a:endParaRPr>
+                    </a:p>
+                  </a:txBody>
+                  <a:tcPr marL="91440" marR="91440" marT="45720" marB="45720" anchor="ctr">
+                    <a:lnL w="6350" cap="flat" cmpd="sng" algn="ctr">
+                      <a:solidFill>
+                        <a:srgbClr val="E4E4E0"/>
+                      </a:solidFill>
+                      <a:prstDash val="solid"/>
+                      <a:round/>
+                      <a:headEnd type="none" w="med" len="med"/>
+                      <a:tailEnd type="none" w="med" len="med"/>
+                    </a:lnL>
+                    <a:lnR w="6350" cap="flat" cmpd="sng" algn="ctr">
+                      <a:solidFill>
+                        <a:srgbClr val="E4E4E0"/>
+                      </a:solidFill>
+                      <a:prstDash val="solid"/>
+                      <a:round/>
+                      <a:headEnd type="none" w="med" len="med"/>
+                      <a:tailEnd type="none" w="med" len="med"/>
+                    </a:lnR>
+                    <a:lnT w="6350" cap="flat" cmpd="sng" algn="ctr">
+                      <a:solidFill>
+                        <a:srgbClr val="E4E4E0"/>
+                      </a:solidFill>
+                      <a:prstDash val="solid"/>
+                      <a:round/>
+                      <a:headEnd type="none" w="med" len="med"/>
+                      <a:tailEnd type="none" w="med" len="med"/>
+                    </a:lnT>
+                    <a:lnB w="6350" cap="flat" cmpd="sng" algn="ctr">
+                      <a:solidFill>
+                        <a:srgbClr val="E4E4E0"/>
+                      </a:solidFill>
+                      <a:prstDash val="solid"/>
+                      <a:round/>
+                      <a:headEnd type="none" w="med" len="med"/>
+                      <a:tailEnd type="none" w="med" len="med"/>
+                    </a:lnB>
+                    <a:solidFill>
+                      <a:srgbClr val="FFFFFF"/>
+                    </a:solidFill>
+                  </a:tcPr>
+                </a:tc>
+                <a:tc>
+                  <a:txBody>
+                    <a:bodyPr/>
+                    <a:lstStyle/>
+                    <a:p>
+                      <a:pPr algn="l" indent="0" marL="0">
+                        <a:buNone/>
+                      </a:pPr>
+                      <a:r>
+                        <a:rPr lang="en-US" sz="780" dirty="0">
+                          <a:solidFill>
+                            <a:srgbClr val="3A3A3A"/>
+                          </a:solidFill>
+                          <a:latin typeface="Arial" pitchFamily="34" charset="0"/>
+                          <a:ea typeface="Arial" pitchFamily="34" charset="-122"/>
+                          <a:cs typeface="Arial" pitchFamily="34" charset="-120"/>
+                        </a:rPr>
+                        <a:t>2.8</a:t>
+                      </a:r>
+                      <a:endParaRPr lang="en-US" sz="780" dirty="0">
+                        <a:latin typeface="Arial" charset="0"/>
+                        <a:ea typeface="Arial" charset="0"/>
+                        <a:cs typeface="Arial" charset="0"/>
+                      </a:endParaRPr>
+                    </a:p>
+                  </a:txBody>
+                  <a:tcPr marL="91440" marR="91440" marT="45720" marB="45720" anchor="ctr">
+                    <a:lnL w="6350" cap="flat" cmpd="sng" algn="ctr">
+                      <a:solidFill>
+                        <a:srgbClr val="E4E4E0"/>
+                      </a:solidFill>
+                      <a:prstDash val="solid"/>
+                      <a:round/>
+                      <a:headEnd type="none" w="med" len="med"/>
+                      <a:tailEnd type="none" w="med" len="med"/>
+                    </a:lnL>
+                    <a:lnR w="6350" cap="flat" cmpd="sng" algn="ctr">
+                      <a:solidFill>
+                        <a:srgbClr val="E4E4E0"/>
+                      </a:solidFill>
+                      <a:prstDash val="solid"/>
+                      <a:round/>
+                      <a:headEnd type="none" w="med" len="med"/>
+                      <a:tailEnd type="none" w="med" len="med"/>
+                    </a:lnR>
+                    <a:lnT w="6350" cap="flat" cmpd="sng" algn="ctr">
+                      <a:solidFill>
+                        <a:srgbClr val="E4E4E0"/>
+                      </a:solidFill>
+                      <a:prstDash val="solid"/>
+                      <a:round/>
+                      <a:headEnd type="none" w="med" len="med"/>
+                      <a:tailEnd type="none" w="med" len="med"/>
+                    </a:lnT>
+                    <a:lnB w="6350" cap="flat" cmpd="sng" algn="ctr">
+                      <a:solidFill>
+                        <a:srgbClr val="E4E4E0"/>
+                      </a:solidFill>
+                      <a:prstDash val="solid"/>
+                      <a:round/>
+                      <a:headEnd type="none" w="med" len="med"/>
+                      <a:tailEnd type="none" w="med" len="med"/>
+                    </a:lnB>
+                    <a:solidFill>
+                      <a:srgbClr val="FFFFFF"/>
+                    </a:solidFill>
+                  </a:tcPr>
+                </a:tc>
+              </a:tr>
+              <a:tr h="192024">
+                <a:tc>
+                  <a:txBody>
+                    <a:bodyPr/>
+                    <a:lstStyle/>
+                    <a:p>
+                      <a:pPr algn="l" indent="0" marL="0">
+                        <a:buNone/>
+                      </a:pPr>
+                      <a:r>
+                        <a:rPr lang="en-US" sz="780" dirty="0">
+                          <a:solidFill>
+                            <a:srgbClr val="3A3A3A"/>
+                          </a:solidFill>
+                          <a:latin typeface="Arial" pitchFamily="34" charset="0"/>
+                          <a:ea typeface="Arial" pitchFamily="34" charset="-122"/>
+                          <a:cs typeface="Arial" pitchFamily="34" charset="-120"/>
+                        </a:rPr>
+                        <a:t>Attach policy · duplicate check · coverage date</a:t>
+                      </a:r>
+                      <a:endParaRPr lang="en-US" sz="780" dirty="0">
+                        <a:latin typeface="Arial" charset="0"/>
+                        <a:ea typeface="Arial" charset="0"/>
+                        <a:cs typeface="Arial" charset="0"/>
+                      </a:endParaRPr>
+                    </a:p>
+                  </a:txBody>
+                  <a:tcPr marL="91440" marR="91440" marT="45720" marB="45720" anchor="ctr">
+                    <a:lnL w="6350" cap="flat" cmpd="sng" algn="ctr">
+                      <a:solidFill>
+                        <a:srgbClr val="E4E4E0"/>
+                      </a:solidFill>
+                      <a:prstDash val="solid"/>
+                      <a:round/>
+                      <a:headEnd type="none" w="med" len="med"/>
+                      <a:tailEnd type="none" w="med" len="med"/>
+                    </a:lnL>
+                    <a:lnR w="6350" cap="flat" cmpd="sng" algn="ctr">
+                      <a:solidFill>
+                        <a:srgbClr val="E4E4E0"/>
+                      </a:solidFill>
+                      <a:prstDash val="solid"/>
+                      <a:round/>
+                      <a:headEnd type="none" w="med" len="med"/>
+                      <a:tailEnd type="none" w="med" len="med"/>
+                    </a:lnR>
+                    <a:lnT w="6350" cap="flat" cmpd="sng" algn="ctr">
+                      <a:solidFill>
+                        <a:srgbClr val="E4E4E0"/>
+                      </a:solidFill>
+                      <a:prstDash val="solid"/>
+                      <a:round/>
+                      <a:headEnd type="none" w="med" len="med"/>
+                      <a:tailEnd type="none" w="med" len="med"/>
+                    </a:lnT>
+                    <a:lnB w="6350" cap="flat" cmpd="sng" algn="ctr">
+                      <a:solidFill>
+                        <a:srgbClr val="E4E4E0"/>
+                      </a:solidFill>
+                      <a:prstDash val="solid"/>
+                      <a:round/>
+                      <a:headEnd type="none" w="med" len="med"/>
+                      <a:tailEnd type="none" w="med" len="med"/>
+                    </a:lnB>
+                    <a:solidFill>
+                      <a:srgbClr val="FFFFFF"/>
+                    </a:solidFill>
+                  </a:tcPr>
+                </a:tc>
+                <a:tc>
+                  <a:txBody>
+                    <a:bodyPr/>
+                    <a:lstStyle/>
+                    <a:p>
+                      <a:pPr algn="l" indent="0" marL="0">
+                        <a:buNone/>
+                      </a:pPr>
+                      <a:r>
+                        <a:rPr lang="en-US" sz="780" dirty="0">
+                          <a:solidFill>
+                            <a:srgbClr val="3A3A3A"/>
+                          </a:solidFill>
+                          <a:latin typeface="Arial" pitchFamily="34" charset="0"/>
+                          <a:ea typeface="Arial" pitchFamily="34" charset="-122"/>
+                          <a:cs typeface="Arial" pitchFamily="34" charset="-120"/>
+                        </a:rPr>
+                        <a:t>5.0</a:t>
+                      </a:r>
+                      <a:endParaRPr lang="en-US" sz="780" dirty="0">
+                        <a:latin typeface="Arial" charset="0"/>
+                        <a:ea typeface="Arial" charset="0"/>
+                        <a:cs typeface="Arial" charset="0"/>
+                      </a:endParaRPr>
+                    </a:p>
+                  </a:txBody>
+                  <a:tcPr marL="91440" marR="91440" marT="45720" marB="45720" anchor="ctr">
+                    <a:lnL w="6350" cap="flat" cmpd="sng" algn="ctr">
+                      <a:solidFill>
+                        <a:srgbClr val="E4E4E0"/>
+                      </a:solidFill>
+                      <a:prstDash val="solid"/>
+                      <a:round/>
+                      <a:headEnd type="none" w="med" len="med"/>
+                      <a:tailEnd type="none" w="med" len="med"/>
+                    </a:lnL>
+                    <a:lnR w="6350" cap="flat" cmpd="sng" algn="ctr">
+                      <a:solidFill>
+                        <a:srgbClr val="E4E4E0"/>
+                      </a:solidFill>
+                      <a:prstDash val="solid"/>
+                      <a:round/>
+                      <a:headEnd type="none" w="med" len="med"/>
+                      <a:tailEnd type="none" w="med" len="med"/>
+                    </a:lnR>
+                    <a:lnT w="6350" cap="flat" cmpd="sng" algn="ctr">
+                      <a:solidFill>
+                        <a:srgbClr val="E4E4E0"/>
+                      </a:solidFill>
+                      <a:prstDash val="solid"/>
+                      <a:round/>
+                      <a:headEnd type="none" w="med" len="med"/>
+                      <a:tailEnd type="none" w="med" len="med"/>
+                    </a:lnT>
+                    <a:lnB w="6350" cap="flat" cmpd="sng" algn="ctr">
+                      <a:solidFill>
+                        <a:srgbClr val="E4E4E0"/>
+                      </a:solidFill>
+                      <a:prstDash val="solid"/>
+                      <a:round/>
+                      <a:headEnd type="none" w="med" len="med"/>
+                      <a:tailEnd type="none" w="med" len="med"/>
+                    </a:lnB>
+                    <a:solidFill>
+                      <a:srgbClr val="FFFFFF"/>
+                    </a:solidFill>
+                  </a:tcPr>
+                </a:tc>
+                <a:tc>
+                  <a:txBody>
+                    <a:bodyPr/>
+                    <a:lstStyle/>
+                    <a:p>
+                      <a:pPr algn="l" indent="0" marL="0">
+                        <a:buNone/>
+                      </a:pPr>
+                      <a:r>
+                        <a:rPr lang="en-US" sz="780" dirty="0">
+                          <a:solidFill>
+                            <a:srgbClr val="3A3A3A"/>
+                          </a:solidFill>
+                          <a:latin typeface="Arial" pitchFamily="34" charset="0"/>
+                          <a:ea typeface="Arial" pitchFamily="34" charset="-122"/>
+                          <a:cs typeface="Arial" pitchFamily="34" charset="-120"/>
+                        </a:rPr>
+                        <a:t>0.0</a:t>
+                      </a:r>
+                      <a:endParaRPr lang="en-US" sz="780" dirty="0">
+                        <a:latin typeface="Arial" charset="0"/>
+                        <a:ea typeface="Arial" charset="0"/>
+                        <a:cs typeface="Arial" charset="0"/>
+                      </a:endParaRPr>
+                    </a:p>
+                  </a:txBody>
+                  <a:tcPr marL="91440" marR="91440" marT="45720" marB="45720" anchor="ctr">
+                    <a:lnL w="6350" cap="flat" cmpd="sng" algn="ctr">
+                      <a:solidFill>
+                        <a:srgbClr val="E4E4E0"/>
+                      </a:solidFill>
+                      <a:prstDash val="solid"/>
+                      <a:round/>
+                      <a:headEnd type="none" w="med" len="med"/>
+                      <a:tailEnd type="none" w="med" len="med"/>
+                    </a:lnL>
+                    <a:lnR w="6350" cap="flat" cmpd="sng" algn="ctr">
+                      <a:solidFill>
+                        <a:srgbClr val="E4E4E0"/>
+                      </a:solidFill>
+                      <a:prstDash val="solid"/>
+                      <a:round/>
+                      <a:headEnd type="none" w="med" len="med"/>
+                      <a:tailEnd type="none" w="med" len="med"/>
+                    </a:lnR>
+                    <a:lnT w="6350" cap="flat" cmpd="sng" algn="ctr">
+                      <a:solidFill>
+                        <a:srgbClr val="E4E4E0"/>
+                      </a:solidFill>
+                      <a:prstDash val="solid"/>
+                      <a:round/>
+                      <a:headEnd type="none" w="med" len="med"/>
+                      <a:tailEnd type="none" w="med" len="med"/>
+                    </a:lnT>
+                    <a:lnB w="6350" cap="flat" cmpd="sng" algn="ctr">
+                      <a:solidFill>
+                        <a:srgbClr val="E4E4E0"/>
+                      </a:solidFill>
+                      <a:prstDash val="solid"/>
+                      <a:round/>
+                      <a:headEnd type="none" w="med" len="med"/>
+                      <a:tailEnd type="none" w="med" len="med"/>
+                    </a:lnB>
+                    <a:solidFill>
+                      <a:srgbClr val="FFFFFF"/>
+                    </a:solidFill>
+                  </a:tcPr>
+                </a:tc>
+              </a:tr>
+              <a:tr h="192024">
+                <a:tc>
+                  <a:txBody>
+                    <a:bodyPr/>
+                    <a:lstStyle/>
+                    <a:p>
+                      <a:pPr algn="l" indent="0" marL="0">
+                        <a:buNone/>
+                      </a:pPr>
+                      <a:r>
+                        <a:rPr lang="en-US" sz="780" dirty="0">
+                          <a:solidFill>
+                            <a:srgbClr val="3A3A3A"/>
+                          </a:solidFill>
+                          <a:latin typeface="Arial" pitchFamily="34" charset="0"/>
+                          <a:ea typeface="Arial" pitchFamily="34" charset="-122"/>
+                          <a:cs typeface="Arial" pitchFamily="34" charset="-120"/>
+                        </a:rPr>
+                        <a:t>Decide, draft and send / open the full claim</a:t>
+                      </a:r>
+                      <a:endParaRPr lang="en-US" sz="780" dirty="0">
+                        <a:latin typeface="Arial" charset="0"/>
+                        <a:ea typeface="Arial" charset="0"/>
+                        <a:cs typeface="Arial" charset="0"/>
+                      </a:endParaRPr>
+                    </a:p>
+                  </a:txBody>
+                  <a:tcPr marL="91440" marR="91440" marT="45720" marB="45720" anchor="ctr">
+                    <a:lnL w="6350" cap="flat" cmpd="sng" algn="ctr">
+                      <a:solidFill>
+                        <a:srgbClr val="E4E4E0"/>
+                      </a:solidFill>
+                      <a:prstDash val="solid"/>
+                      <a:round/>
+                      <a:headEnd type="none" w="med" len="med"/>
+                      <a:tailEnd type="none" w="med" len="med"/>
+                    </a:lnL>
+                    <a:lnR w="6350" cap="flat" cmpd="sng" algn="ctr">
+                      <a:solidFill>
+                        <a:srgbClr val="E4E4E0"/>
+                      </a:solidFill>
+                      <a:prstDash val="solid"/>
+                      <a:round/>
+                      <a:headEnd type="none" w="med" len="med"/>
+                      <a:tailEnd type="none" w="med" len="med"/>
+                    </a:lnR>
+                    <a:lnT w="6350" cap="flat" cmpd="sng" algn="ctr">
+                      <a:solidFill>
+                        <a:srgbClr val="E4E4E0"/>
+                      </a:solidFill>
+                      <a:prstDash val="solid"/>
+                      <a:round/>
+                      <a:headEnd type="none" w="med" len="med"/>
+                      <a:tailEnd type="none" w="med" len="med"/>
+                    </a:lnT>
+                    <a:lnB w="6350" cap="flat" cmpd="sng" algn="ctr">
+                      <a:solidFill>
+                        <a:srgbClr val="E4E4E0"/>
+                      </a:solidFill>
+                      <a:prstDash val="solid"/>
+                      <a:round/>
+                      <a:headEnd type="none" w="med" len="med"/>
+                      <a:tailEnd type="none" w="med" len="med"/>
+                    </a:lnB>
+                    <a:solidFill>
+                      <a:srgbClr val="FFFFFF"/>
+                    </a:solidFill>
+                  </a:tcPr>
+                </a:tc>
+                <a:tc>
+                  <a:txBody>
+                    <a:bodyPr/>
+                    <a:lstStyle/>
+                    <a:p>
+                      <a:pPr algn="l" indent="0" marL="0">
+                        <a:buNone/>
+                      </a:pPr>
+                      <a:r>
+                        <a:rPr lang="en-US" sz="780" dirty="0">
+                          <a:solidFill>
+                            <a:srgbClr val="3A3A3A"/>
+                          </a:solidFill>
+                          <a:latin typeface="Arial" pitchFamily="34" charset="0"/>
+                          <a:ea typeface="Arial" pitchFamily="34" charset="-122"/>
+                          <a:cs typeface="Arial" pitchFamily="34" charset="-120"/>
+                        </a:rPr>
+                        <a:t>5.5</a:t>
                       </a:r>
                       <a:endParaRPr lang="en-US" sz="780" dirty="0">
                         <a:latin typeface="Arial" charset="0"/>
@@ -12605,7 +13017,7 @@
                   </a:tcPr>
                 </a:tc>
               </a:tr>
-              <a:tr h="205740">
+              <a:tr h="192024">
                 <a:tc>
                   <a:txBody>
                     <a:bodyPr/>
@@ -12623,7 +13035,7 @@
                           <a:ea typeface="Arial" pitchFamily="34" charset="-122"/>
                           <a:cs typeface="Arial" pitchFamily="34" charset="-120"/>
                         </a:rPr>
-                        <a:t>Attach policy · duplicate check · coverage date</a:t>
+                        <a:t>Work an escalation or an underwriting hold</a:t>
                       </a:r>
                       <a:endParaRPr lang="en-US" sz="780" dirty="0">
                         <a:latin typeface="Arial" charset="0"/>
@@ -12691,7 +13103,7 @@
                           <a:ea typeface="Arial" pitchFamily="34" charset="-122"/>
                           <a:cs typeface="Arial" pitchFamily="34" charset="-120"/>
                         </a:rPr>
-                        <a:t>5.5</a:t>
+                        <a:t>1.0</a:t>
                       </a:r>
                       <a:endParaRPr lang="en-US" sz="780" dirty="0">
                         <a:latin typeface="Arial" charset="0"/>
@@ -12759,7 +13171,7 @@
                           <a:ea typeface="Arial" pitchFamily="34" charset="-122"/>
                           <a:cs typeface="Arial" pitchFamily="34" charset="-120"/>
                         </a:rPr>
-                        <a:t>0.0</a:t>
+                        <a:t>0.6</a:t>
                       </a:r>
                       <a:endParaRPr lang="en-US" sz="780" dirty="0">
                         <a:latin typeface="Arial" charset="0"/>
@@ -12811,419 +13223,7 @@
                   </a:tcPr>
                 </a:tc>
               </a:tr>
-              <a:tr h="205740">
-                <a:tc>
-                  <a:txBody>
-                    <a:bodyPr/>
-                    <a:lstStyle/>
-                    <a:p>
-                      <a:pPr algn="l" indent="0" marL="0">
-                        <a:buNone/>
-                      </a:pPr>
-                      <a:r>
-                        <a:rPr lang="en-US" sz="780" dirty="0">
-                          <a:solidFill>
-                            <a:srgbClr val="3A3A3A"/>
-                          </a:solidFill>
-                          <a:latin typeface="Arial" pitchFamily="34" charset="0"/>
-                          <a:ea typeface="Arial" pitchFamily="34" charset="-122"/>
-                          <a:cs typeface="Arial" pitchFamily="34" charset="-120"/>
-                        </a:rPr>
-                        <a:t>Decide, draft and send / open the full claim</a:t>
-                      </a:r>
-                      <a:endParaRPr lang="en-US" sz="780" dirty="0">
-                        <a:latin typeface="Arial" charset="0"/>
-                        <a:ea typeface="Arial" charset="0"/>
-                        <a:cs typeface="Arial" charset="0"/>
-                      </a:endParaRPr>
-                    </a:p>
-                  </a:txBody>
-                  <a:tcPr marL="91440" marR="91440" marT="45720" marB="45720" anchor="ctr">
-                    <a:lnL w="6350" cap="flat" cmpd="sng" algn="ctr">
-                      <a:solidFill>
-                        <a:srgbClr val="E4E4E0"/>
-                      </a:solidFill>
-                      <a:prstDash val="solid"/>
-                      <a:round/>
-                      <a:headEnd type="none" w="med" len="med"/>
-                      <a:tailEnd type="none" w="med" len="med"/>
-                    </a:lnL>
-                    <a:lnR w="6350" cap="flat" cmpd="sng" algn="ctr">
-                      <a:solidFill>
-                        <a:srgbClr val="E4E4E0"/>
-                      </a:solidFill>
-                      <a:prstDash val="solid"/>
-                      <a:round/>
-                      <a:headEnd type="none" w="med" len="med"/>
-                      <a:tailEnd type="none" w="med" len="med"/>
-                    </a:lnR>
-                    <a:lnT w="6350" cap="flat" cmpd="sng" algn="ctr">
-                      <a:solidFill>
-                        <a:srgbClr val="E4E4E0"/>
-                      </a:solidFill>
-                      <a:prstDash val="solid"/>
-                      <a:round/>
-                      <a:headEnd type="none" w="med" len="med"/>
-                      <a:tailEnd type="none" w="med" len="med"/>
-                    </a:lnT>
-                    <a:lnB w="6350" cap="flat" cmpd="sng" algn="ctr">
-                      <a:solidFill>
-                        <a:srgbClr val="E4E4E0"/>
-                      </a:solidFill>
-                      <a:prstDash val="solid"/>
-                      <a:round/>
-                      <a:headEnd type="none" w="med" len="med"/>
-                      <a:tailEnd type="none" w="med" len="med"/>
-                    </a:lnB>
-                    <a:solidFill>
-                      <a:srgbClr val="FFFFFF"/>
-                    </a:solidFill>
-                  </a:tcPr>
-                </a:tc>
-                <a:tc>
-                  <a:txBody>
-                    <a:bodyPr/>
-                    <a:lstStyle/>
-                    <a:p>
-                      <a:pPr algn="l" indent="0" marL="0">
-                        <a:buNone/>
-                      </a:pPr>
-                      <a:r>
-                        <a:rPr lang="en-US" sz="780" dirty="0">
-                          <a:solidFill>
-                            <a:srgbClr val="3A3A3A"/>
-                          </a:solidFill>
-                          <a:latin typeface="Arial" pitchFamily="34" charset="0"/>
-                          <a:ea typeface="Arial" pitchFamily="34" charset="-122"/>
-                          <a:cs typeface="Arial" pitchFamily="34" charset="-120"/>
-                        </a:rPr>
-                        <a:t>5.4</a:t>
-                      </a:r>
-                      <a:endParaRPr lang="en-US" sz="780" dirty="0">
-                        <a:latin typeface="Arial" charset="0"/>
-                        <a:ea typeface="Arial" charset="0"/>
-                        <a:cs typeface="Arial" charset="0"/>
-                      </a:endParaRPr>
-                    </a:p>
-                  </a:txBody>
-                  <a:tcPr marL="91440" marR="91440" marT="45720" marB="45720" anchor="ctr">
-                    <a:lnL w="6350" cap="flat" cmpd="sng" algn="ctr">
-                      <a:solidFill>
-                        <a:srgbClr val="E4E4E0"/>
-                      </a:solidFill>
-                      <a:prstDash val="solid"/>
-                      <a:round/>
-                      <a:headEnd type="none" w="med" len="med"/>
-                      <a:tailEnd type="none" w="med" len="med"/>
-                    </a:lnL>
-                    <a:lnR w="6350" cap="flat" cmpd="sng" algn="ctr">
-                      <a:solidFill>
-                        <a:srgbClr val="E4E4E0"/>
-                      </a:solidFill>
-                      <a:prstDash val="solid"/>
-                      <a:round/>
-                      <a:headEnd type="none" w="med" len="med"/>
-                      <a:tailEnd type="none" w="med" len="med"/>
-                    </a:lnR>
-                    <a:lnT w="6350" cap="flat" cmpd="sng" algn="ctr">
-                      <a:solidFill>
-                        <a:srgbClr val="E4E4E0"/>
-                      </a:solidFill>
-                      <a:prstDash val="solid"/>
-                      <a:round/>
-                      <a:headEnd type="none" w="med" len="med"/>
-                      <a:tailEnd type="none" w="med" len="med"/>
-                    </a:lnT>
-                    <a:lnB w="6350" cap="flat" cmpd="sng" algn="ctr">
-                      <a:solidFill>
-                        <a:srgbClr val="E4E4E0"/>
-                      </a:solidFill>
-                      <a:prstDash val="solid"/>
-                      <a:round/>
-                      <a:headEnd type="none" w="med" len="med"/>
-                      <a:tailEnd type="none" w="med" len="med"/>
-                    </a:lnB>
-                    <a:solidFill>
-                      <a:srgbClr val="FFFFFF"/>
-                    </a:solidFill>
-                  </a:tcPr>
-                </a:tc>
-                <a:tc>
-                  <a:txBody>
-                    <a:bodyPr/>
-                    <a:lstStyle/>
-                    <a:p>
-                      <a:pPr algn="l" indent="0" marL="0">
-                        <a:buNone/>
-                      </a:pPr>
-                      <a:r>
-                        <a:rPr lang="en-US" sz="780" dirty="0">
-                          <a:solidFill>
-                            <a:srgbClr val="3A3A3A"/>
-                          </a:solidFill>
-                          <a:latin typeface="Arial" pitchFamily="34" charset="0"/>
-                          <a:ea typeface="Arial" pitchFamily="34" charset="-122"/>
-                          <a:cs typeface="Arial" pitchFamily="34" charset="-120"/>
-                        </a:rPr>
-                        <a:t>2.4</a:t>
-                      </a:r>
-                      <a:endParaRPr lang="en-US" sz="780" dirty="0">
-                        <a:latin typeface="Arial" charset="0"/>
-                        <a:ea typeface="Arial" charset="0"/>
-                        <a:cs typeface="Arial" charset="0"/>
-                      </a:endParaRPr>
-                    </a:p>
-                  </a:txBody>
-                  <a:tcPr marL="91440" marR="91440" marT="45720" marB="45720" anchor="ctr">
-                    <a:lnL w="6350" cap="flat" cmpd="sng" algn="ctr">
-                      <a:solidFill>
-                        <a:srgbClr val="E4E4E0"/>
-                      </a:solidFill>
-                      <a:prstDash val="solid"/>
-                      <a:round/>
-                      <a:headEnd type="none" w="med" len="med"/>
-                      <a:tailEnd type="none" w="med" len="med"/>
-                    </a:lnL>
-                    <a:lnR w="6350" cap="flat" cmpd="sng" algn="ctr">
-                      <a:solidFill>
-                        <a:srgbClr val="E4E4E0"/>
-                      </a:solidFill>
-                      <a:prstDash val="solid"/>
-                      <a:round/>
-                      <a:headEnd type="none" w="med" len="med"/>
-                      <a:tailEnd type="none" w="med" len="med"/>
-                    </a:lnR>
-                    <a:lnT w="6350" cap="flat" cmpd="sng" algn="ctr">
-                      <a:solidFill>
-                        <a:srgbClr val="E4E4E0"/>
-                      </a:solidFill>
-                      <a:prstDash val="solid"/>
-                      <a:round/>
-                      <a:headEnd type="none" w="med" len="med"/>
-                      <a:tailEnd type="none" w="med" len="med"/>
-                    </a:lnT>
-                    <a:lnB w="6350" cap="flat" cmpd="sng" algn="ctr">
-                      <a:solidFill>
-                        <a:srgbClr val="E4E4E0"/>
-                      </a:solidFill>
-                      <a:prstDash val="solid"/>
-                      <a:round/>
-                      <a:headEnd type="none" w="med" len="med"/>
-                      <a:tailEnd type="none" w="med" len="med"/>
-                    </a:lnB>
-                    <a:solidFill>
-                      <a:srgbClr val="FFFFFF"/>
-                    </a:solidFill>
-                  </a:tcPr>
-                </a:tc>
-              </a:tr>
-              <a:tr h="205740">
-                <a:tc>
-                  <a:txBody>
-                    <a:bodyPr/>
-                    <a:lstStyle/>
-                    <a:p>
-                      <a:pPr algn="l" indent="0" marL="0">
-                        <a:buNone/>
-                      </a:pPr>
-                      <a:r>
-                        <a:rPr lang="en-US" sz="780" dirty="0">
-                          <a:solidFill>
-                            <a:srgbClr val="3A3A3A"/>
-                          </a:solidFill>
-                          <a:latin typeface="Arial" pitchFamily="34" charset="0"/>
-                          <a:ea typeface="Arial" pitchFamily="34" charset="-122"/>
-                          <a:cs typeface="Arial" pitchFamily="34" charset="-120"/>
-                        </a:rPr>
-                        <a:t>Work an escalation when one is raised</a:t>
-                      </a:r>
-                      <a:endParaRPr lang="en-US" sz="780" dirty="0">
-                        <a:latin typeface="Arial" charset="0"/>
-                        <a:ea typeface="Arial" charset="0"/>
-                        <a:cs typeface="Arial" charset="0"/>
-                      </a:endParaRPr>
-                    </a:p>
-                  </a:txBody>
-                  <a:tcPr marL="91440" marR="91440" marT="45720" marB="45720" anchor="ctr">
-                    <a:lnL w="6350" cap="flat" cmpd="sng" algn="ctr">
-                      <a:solidFill>
-                        <a:srgbClr val="E4E4E0"/>
-                      </a:solidFill>
-                      <a:prstDash val="solid"/>
-                      <a:round/>
-                      <a:headEnd type="none" w="med" len="med"/>
-                      <a:tailEnd type="none" w="med" len="med"/>
-                    </a:lnL>
-                    <a:lnR w="6350" cap="flat" cmpd="sng" algn="ctr">
-                      <a:solidFill>
-                        <a:srgbClr val="E4E4E0"/>
-                      </a:solidFill>
-                      <a:prstDash val="solid"/>
-                      <a:round/>
-                      <a:headEnd type="none" w="med" len="med"/>
-                      <a:tailEnd type="none" w="med" len="med"/>
-                    </a:lnR>
-                    <a:lnT w="6350" cap="flat" cmpd="sng" algn="ctr">
-                      <a:solidFill>
-                        <a:srgbClr val="E4E4E0"/>
-                      </a:solidFill>
-                      <a:prstDash val="solid"/>
-                      <a:round/>
-                      <a:headEnd type="none" w="med" len="med"/>
-                      <a:tailEnd type="none" w="med" len="med"/>
-                    </a:lnT>
-                    <a:lnB w="6350" cap="flat" cmpd="sng" algn="ctr">
-                      <a:solidFill>
-                        <a:srgbClr val="E4E4E0"/>
-                      </a:solidFill>
-                      <a:prstDash val="solid"/>
-                      <a:round/>
-                      <a:headEnd type="none" w="med" len="med"/>
-                      <a:tailEnd type="none" w="med" len="med"/>
-                    </a:lnB>
-                    <a:solidFill>
-                      <a:srgbClr val="FFFFFF"/>
-                    </a:solidFill>
-                  </a:tcPr>
-                </a:tc>
-                <a:tc>
-                  <a:txBody>
-                    <a:bodyPr/>
-                    <a:lstStyle/>
-                    <a:p>
-                      <a:pPr algn="l" indent="0" marL="0">
-                        <a:buNone/>
-                      </a:pPr>
-                      <a:r>
-                        <a:rPr lang="en-US" sz="780" dirty="0">
-                          <a:solidFill>
-                            <a:srgbClr val="3A3A3A"/>
-                          </a:solidFill>
-                          <a:latin typeface="Arial" pitchFamily="34" charset="0"/>
-                          <a:ea typeface="Arial" pitchFamily="34" charset="-122"/>
-                          <a:cs typeface="Arial" pitchFamily="34" charset="-120"/>
-                        </a:rPr>
-                        <a:t>2.7</a:t>
-                      </a:r>
-                      <a:endParaRPr lang="en-US" sz="780" dirty="0">
-                        <a:latin typeface="Arial" charset="0"/>
-                        <a:ea typeface="Arial" charset="0"/>
-                        <a:cs typeface="Arial" charset="0"/>
-                      </a:endParaRPr>
-                    </a:p>
-                  </a:txBody>
-                  <a:tcPr marL="91440" marR="91440" marT="45720" marB="45720" anchor="ctr">
-                    <a:lnL w="6350" cap="flat" cmpd="sng" algn="ctr">
-                      <a:solidFill>
-                        <a:srgbClr val="E4E4E0"/>
-                      </a:solidFill>
-                      <a:prstDash val="solid"/>
-                      <a:round/>
-                      <a:headEnd type="none" w="med" len="med"/>
-                      <a:tailEnd type="none" w="med" len="med"/>
-                    </a:lnL>
-                    <a:lnR w="6350" cap="flat" cmpd="sng" algn="ctr">
-                      <a:solidFill>
-                        <a:srgbClr val="E4E4E0"/>
-                      </a:solidFill>
-                      <a:prstDash val="solid"/>
-                      <a:round/>
-                      <a:headEnd type="none" w="med" len="med"/>
-                      <a:tailEnd type="none" w="med" len="med"/>
-                    </a:lnR>
-                    <a:lnT w="6350" cap="flat" cmpd="sng" algn="ctr">
-                      <a:solidFill>
-                        <a:srgbClr val="E4E4E0"/>
-                      </a:solidFill>
-                      <a:prstDash val="solid"/>
-                      <a:round/>
-                      <a:headEnd type="none" w="med" len="med"/>
-                      <a:tailEnd type="none" w="med" len="med"/>
-                    </a:lnT>
-                    <a:lnB w="6350" cap="flat" cmpd="sng" algn="ctr">
-                      <a:solidFill>
-                        <a:srgbClr val="E4E4E0"/>
-                      </a:solidFill>
-                      <a:prstDash val="solid"/>
-                      <a:round/>
-                      <a:headEnd type="none" w="med" len="med"/>
-                      <a:tailEnd type="none" w="med" len="med"/>
-                    </a:lnB>
-                    <a:solidFill>
-                      <a:srgbClr val="FFFFFF"/>
-                    </a:solidFill>
-                  </a:tcPr>
-                </a:tc>
-                <a:tc>
-                  <a:txBody>
-                    <a:bodyPr/>
-                    <a:lstStyle/>
-                    <a:p>
-                      <a:pPr algn="l" indent="0" marL="0">
-                        <a:buNone/>
-                      </a:pPr>
-                      <a:r>
-                        <a:rPr lang="en-US" sz="780" dirty="0">
-                          <a:solidFill>
-                            <a:srgbClr val="3A3A3A"/>
-                          </a:solidFill>
-                          <a:latin typeface="Arial" pitchFamily="34" charset="0"/>
-                          <a:ea typeface="Arial" pitchFamily="34" charset="-122"/>
-                          <a:cs typeface="Arial" pitchFamily="34" charset="-120"/>
-                        </a:rPr>
-                        <a:t>1.4</a:t>
-                      </a:r>
-                      <a:endParaRPr lang="en-US" sz="780" dirty="0">
-                        <a:latin typeface="Arial" charset="0"/>
-                        <a:ea typeface="Arial" charset="0"/>
-                        <a:cs typeface="Arial" charset="0"/>
-                      </a:endParaRPr>
-                    </a:p>
-                  </a:txBody>
-                  <a:tcPr marL="91440" marR="91440" marT="45720" marB="45720" anchor="ctr">
-                    <a:lnL w="6350" cap="flat" cmpd="sng" algn="ctr">
-                      <a:solidFill>
-                        <a:srgbClr val="E4E4E0"/>
-                      </a:solidFill>
-                      <a:prstDash val="solid"/>
-                      <a:round/>
-                      <a:headEnd type="none" w="med" len="med"/>
-                      <a:tailEnd type="none" w="med" len="med"/>
-                    </a:lnL>
-                    <a:lnR w="6350" cap="flat" cmpd="sng" algn="ctr">
-                      <a:solidFill>
-                        <a:srgbClr val="E4E4E0"/>
-                      </a:solidFill>
-                      <a:prstDash val="solid"/>
-                      <a:round/>
-                      <a:headEnd type="none" w="med" len="med"/>
-                      <a:tailEnd type="none" w="med" len="med"/>
-                    </a:lnR>
-                    <a:lnT w="6350" cap="flat" cmpd="sng" algn="ctr">
-                      <a:solidFill>
-                        <a:srgbClr val="E4E4E0"/>
-                      </a:solidFill>
-                      <a:prstDash val="solid"/>
-                      <a:round/>
-                      <a:headEnd type="none" w="med" len="med"/>
-                      <a:tailEnd type="none" w="med" len="med"/>
-                    </a:lnT>
-                    <a:lnB w="6350" cap="flat" cmpd="sng" algn="ctr">
-                      <a:solidFill>
-                        <a:srgbClr val="E4E4E0"/>
-                      </a:solidFill>
-                      <a:prstDash val="solid"/>
-                      <a:round/>
-                      <a:headEnd type="none" w="med" len="med"/>
-                      <a:tailEnd type="none" w="med" len="med"/>
-                    </a:lnB>
-                    <a:solidFill>
-                      <a:srgbClr val="FFFFFF"/>
-                    </a:solidFill>
-                  </a:tcPr>
-                </a:tc>
-              </a:tr>
-              <a:tr h="205740">
+              <a:tr h="192024">
                 <a:tc>
                   <a:txBody>
                     <a:bodyPr/>
@@ -13377,7 +13377,7 @@
                           <a:ea typeface="Arial" pitchFamily="34" charset="-122"/>
                           <a:cs typeface="Arial" pitchFamily="34" charset="-120"/>
                         </a:rPr>
-                        <a:t>0.5</a:t>
+                        <a:t>0.7</a:t>
                       </a:r>
                       <a:endParaRPr lang="en-US" sz="780" dirty="0">
                         <a:latin typeface="Arial" charset="0"/>
@@ -13429,7 +13429,7 @@
                   </a:tcPr>
                 </a:tc>
               </a:tr>
-              <a:tr h="205740">
+              <a:tr h="192024">
                 <a:tc>
                   <a:txBody>
                     <a:bodyPr/>
@@ -13635,7 +13635,7 @@
                   </a:tcPr>
                 </a:tc>
               </a:tr>
-              <a:tr h="205740">
+              <a:tr h="192024">
                 <a:tc>
                   <a:txBody>
                     <a:bodyPr/>
@@ -13841,7 +13841,7 @@
                   </a:tcPr>
                 </a:tc>
               </a:tr>
-              <a:tr h="205740">
+              <a:tr h="192024">
                 <a:tc>
                   <a:txBody>
                     <a:bodyPr/>
@@ -13859,7 +13859,7 @@
                           <a:ea typeface="Arial" pitchFamily="34" charset="-122"/>
                           <a:cs typeface="Arial" pitchFamily="34" charset="-120"/>
                         </a:rPr>
-                        <a:t>Standard time</a:t>
+                        <a:t>Standard time — what the design allows</a:t>
                       </a:r>
                       <a:endParaRPr lang="en-US" sz="780" dirty="0">
                         <a:latin typeface="Arial" charset="0"/>
@@ -14047,6 +14047,212 @@
                   </a:tcPr>
                 </a:tc>
               </a:tr>
+              <a:tr h="192024">
+                <a:tc>
+                  <a:txBody>
+                    <a:bodyPr/>
+                    <a:lstStyle/>
+                    <a:p>
+                      <a:pPr algn="l" indent="0" marL="0">
+                        <a:buNone/>
+                      </a:pPr>
+                      <a:r>
+                        <a:rPr lang="en-US" sz="780" b="1" dirty="0">
+                          <a:solidFill>
+                            <a:srgbClr val="3A3A3A"/>
+                          </a:solidFill>
+                          <a:latin typeface="Arial" pitchFamily="34" charset="0"/>
+                          <a:ea typeface="Arial" pitchFamily="34" charset="-122"/>
+                          <a:cs typeface="Arial" pitchFamily="34" charset="-120"/>
+                        </a:rPr>
+                        <a:t>What the business case actually banks</a:t>
+                      </a:r>
+                      <a:endParaRPr lang="en-US" sz="780" dirty="0">
+                        <a:latin typeface="Arial" charset="0"/>
+                        <a:ea typeface="Arial" charset="0"/>
+                        <a:cs typeface="Arial" charset="0"/>
+                      </a:endParaRPr>
+                    </a:p>
+                  </a:txBody>
+                  <a:tcPr marL="91440" marR="91440" marT="45720" marB="45720" anchor="ctr">
+                    <a:lnL w="6350" cap="flat" cmpd="sng" algn="ctr">
+                      <a:solidFill>
+                        <a:srgbClr val="E4E4E0"/>
+                      </a:solidFill>
+                      <a:prstDash val="solid"/>
+                      <a:round/>
+                      <a:headEnd type="none" w="med" len="med"/>
+                      <a:tailEnd type="none" w="med" len="med"/>
+                    </a:lnL>
+                    <a:lnR w="6350" cap="flat" cmpd="sng" algn="ctr">
+                      <a:solidFill>
+                        <a:srgbClr val="E4E4E0"/>
+                      </a:solidFill>
+                      <a:prstDash val="solid"/>
+                      <a:round/>
+                      <a:headEnd type="none" w="med" len="med"/>
+                      <a:tailEnd type="none" w="med" len="med"/>
+                    </a:lnR>
+                    <a:lnT w="6350" cap="flat" cmpd="sng" algn="ctr">
+                      <a:solidFill>
+                        <a:srgbClr val="E4E4E0"/>
+                      </a:solidFill>
+                      <a:prstDash val="solid"/>
+                      <a:round/>
+                      <a:headEnd type="none" w="med" len="med"/>
+                      <a:tailEnd type="none" w="med" len="med"/>
+                    </a:lnT>
+                    <a:lnB w="6350" cap="flat" cmpd="sng" algn="ctr">
+                      <a:solidFill>
+                        <a:srgbClr val="E4E4E0"/>
+                      </a:solidFill>
+                      <a:prstDash val="solid"/>
+                      <a:round/>
+                      <a:headEnd type="none" w="med" len="med"/>
+                      <a:tailEnd type="none" w="med" len="med"/>
+                    </a:lnB>
+                    <a:solidFill>
+                      <a:srgbClr val="FFFFFF"/>
+                    </a:solidFill>
+                  </a:tcPr>
+                </a:tc>
+                <a:tc>
+                  <a:txBody>
+                    <a:bodyPr/>
+                    <a:lstStyle/>
+                    <a:p>
+                      <a:pPr algn="l" indent="0" marL="0">
+                        <a:buNone/>
+                      </a:pPr>
+                      <a:r>
+                        <a:rPr lang="en-US" sz="780" b="1" dirty="0">
+                          <a:solidFill>
+                            <a:srgbClr val="3A3A3A"/>
+                          </a:solidFill>
+                          <a:latin typeface="Arial" pitchFamily="34" charset="0"/>
+                          <a:ea typeface="Arial" pitchFamily="34" charset="-122"/>
+                          <a:cs typeface="Arial" pitchFamily="34" charset="-120"/>
+                        </a:rPr>
+                        <a:t>40.0</a:t>
+                      </a:r>
+                      <a:endParaRPr lang="en-US" sz="780" dirty="0">
+                        <a:latin typeface="Arial" charset="0"/>
+                        <a:ea typeface="Arial" charset="0"/>
+                        <a:cs typeface="Arial" charset="0"/>
+                      </a:endParaRPr>
+                    </a:p>
+                  </a:txBody>
+                  <a:tcPr marL="91440" marR="91440" marT="45720" marB="45720" anchor="ctr">
+                    <a:lnL w="6350" cap="flat" cmpd="sng" algn="ctr">
+                      <a:solidFill>
+                        <a:srgbClr val="E4E4E0"/>
+                      </a:solidFill>
+                      <a:prstDash val="solid"/>
+                      <a:round/>
+                      <a:headEnd type="none" w="med" len="med"/>
+                      <a:tailEnd type="none" w="med" len="med"/>
+                    </a:lnL>
+                    <a:lnR w="6350" cap="flat" cmpd="sng" algn="ctr">
+                      <a:solidFill>
+                        <a:srgbClr val="E4E4E0"/>
+                      </a:solidFill>
+                      <a:prstDash val="solid"/>
+                      <a:round/>
+                      <a:headEnd type="none" w="med" len="med"/>
+                      <a:tailEnd type="none" w="med" len="med"/>
+                    </a:lnR>
+                    <a:lnT w="6350" cap="flat" cmpd="sng" algn="ctr">
+                      <a:solidFill>
+                        <a:srgbClr val="E4E4E0"/>
+                      </a:solidFill>
+                      <a:prstDash val="solid"/>
+                      <a:round/>
+                      <a:headEnd type="none" w="med" len="med"/>
+                      <a:tailEnd type="none" w="med" len="med"/>
+                    </a:lnT>
+                    <a:lnB w="6350" cap="flat" cmpd="sng" algn="ctr">
+                      <a:solidFill>
+                        <a:srgbClr val="E4E4E0"/>
+                      </a:solidFill>
+                      <a:prstDash val="solid"/>
+                      <a:round/>
+                      <a:headEnd type="none" w="med" len="med"/>
+                      <a:tailEnd type="none" w="med" len="med"/>
+                    </a:lnB>
+                    <a:solidFill>
+                      <a:srgbClr val="FFFFFF"/>
+                    </a:solidFill>
+                  </a:tcPr>
+                </a:tc>
+                <a:tc>
+                  <a:txBody>
+                    <a:bodyPr/>
+                    <a:lstStyle/>
+                    <a:p>
+                      <a:pPr algn="l" indent="0" marL="0">
+                        <a:buNone/>
+                      </a:pPr>
+                      <a:r>
+                        <a:rPr lang="en-US" sz="780" b="1" dirty="0">
+                          <a:solidFill>
+                            <a:srgbClr val="3A3A3A"/>
+                          </a:solidFill>
+                          <a:latin typeface="Arial" pitchFamily="34" charset="0"/>
+                          <a:ea typeface="Arial" pitchFamily="34" charset="-122"/>
+                          <a:cs typeface="Arial" pitchFamily="34" charset="-120"/>
+                        </a:rPr>
+                        <a:t>19.0</a:t>
+                      </a:r>
+                      <a:endParaRPr lang="en-US" sz="780" dirty="0">
+                        <a:latin typeface="Arial" charset="0"/>
+                        <a:ea typeface="Arial" charset="0"/>
+                        <a:cs typeface="Arial" charset="0"/>
+                      </a:endParaRPr>
+                    </a:p>
+                  </a:txBody>
+                  <a:tcPr marL="91440" marR="91440" marT="45720" marB="45720" anchor="ctr">
+                    <a:lnL w="6350" cap="flat" cmpd="sng" algn="ctr">
+                      <a:solidFill>
+                        <a:srgbClr val="E4E4E0"/>
+                      </a:solidFill>
+                      <a:prstDash val="solid"/>
+                      <a:round/>
+                      <a:headEnd type="none" w="med" len="med"/>
+                      <a:tailEnd type="none" w="med" len="med"/>
+                    </a:lnL>
+                    <a:lnR w="6350" cap="flat" cmpd="sng" algn="ctr">
+                      <a:solidFill>
+                        <a:srgbClr val="E4E4E0"/>
+                      </a:solidFill>
+                      <a:prstDash val="solid"/>
+                      <a:round/>
+                      <a:headEnd type="none" w="med" len="med"/>
+                      <a:tailEnd type="none" w="med" len="med"/>
+                    </a:lnR>
+                    <a:lnT w="6350" cap="flat" cmpd="sng" algn="ctr">
+                      <a:solidFill>
+                        <a:srgbClr val="E4E4E0"/>
+                      </a:solidFill>
+                      <a:prstDash val="solid"/>
+                      <a:round/>
+                      <a:headEnd type="none" w="med" len="med"/>
+                      <a:tailEnd type="none" w="med" len="med"/>
+                    </a:lnT>
+                    <a:lnB w="6350" cap="flat" cmpd="sng" algn="ctr">
+                      <a:solidFill>
+                        <a:srgbClr val="E4E4E0"/>
+                      </a:solidFill>
+                      <a:prstDash val="solid"/>
+                      <a:round/>
+                      <a:headEnd type="none" w="med" len="med"/>
+                      <a:tailEnd type="none" w="med" len="med"/>
+                    </a:lnB>
+                    <a:solidFill>
+                      <a:srgbClr val="FFFFFF"/>
+                    </a:solidFill>
+                  </a:tcPr>
+                </a:tc>
+              </a:tr>
             </a:tbl>
           </a:graphicData>
         </a:graphic>
@@ -14059,8 +14265,8 @@
         </p:nvSpPr>
         <p:spPr>
           <a:xfrm>
-            <a:off x="365760" y="2871216"/>
-            <a:ext cx="5486400" cy="292608"/>
+            <a:off x="365760" y="2926080"/>
+            <a:ext cx="5486400" cy="274320"/>
           </a:xfrm>
           <a:prstGeom prst="rect">
             <a:avLst/>
@@ -14087,7 +14293,7 @@
                 <a:ea typeface="Arial" pitchFamily="34" charset="-122"/>
                 <a:cs typeface="Arial" pitchFamily="34" charset="-120"/>
               </a:rPr>
-              <a:t>The full saving would be 29.9 min. We do not bank that. Three-point estimate instead: (best 30 + 4 × likely 21 + worst 12) ÷ 6 = 21.0 min, a 52% cut.</a:t>
+              <a:t>The design allows 10.1 min a claim. We do not bank that. The case uses a three-point estimate — (best 30 + 4 × likely 21 + worst 12) ÷ 6 = 21.0 min saved a claim — which is the 19.0 min above, and the 19 minutes on slide 1.</a:t>
             </a:r>
             <a:endParaRPr lang="en-US" sz="740" dirty="0"/>
           </a:p>
@@ -14101,7 +14307,7 @@
         </p:nvSpPr>
         <p:spPr>
           <a:xfrm>
-            <a:off x="365760" y="3200400"/>
+            <a:off x="365760" y="3218688"/>
             <a:ext cx="5486400" cy="621792"/>
           </a:xfrm>
           <a:prstGeom prst="roundRect">
@@ -14128,7 +14334,7 @@
         </p:nvSpPr>
         <p:spPr>
           <a:xfrm>
-            <a:off x="530352" y="3200400"/>
+            <a:off x="530352" y="3218688"/>
             <a:ext cx="5157216" cy="621792"/>
           </a:xfrm>
           <a:prstGeom prst="rect">
@@ -14173,7 +14379,7 @@
                 <a:ea typeface="Arial" pitchFamily="34" charset="-122"/>
                 <a:cs typeface="Arial" pitchFamily="34" charset="-120"/>
               </a:rPr>
-              <a:t>40 min × 12,500 claims = 8,333 hours — 17% of a 30-person team's year. Plausible for the front end of a claims process. Had it come out at 60%, the model would be wrong.</a:t>
+              <a:t>40 min × 12,500 claims a year = 8,332 handler-hours — 17% of a 30-person team's yearly capacity. Plausible for the front end of a claims process. Had it come out at 60%, the model would be wrong.</a:t>
             </a:r>
             <a:endParaRPr lang="en-US" sz="820" dirty="0"/>
           </a:p>
@@ -14356,7 +14562,7 @@
                 <a:ea typeface="Arial" pitchFamily="34" charset="-122"/>
                 <a:cs typeface="Arial" pitchFamily="34" charset="-120"/>
               </a:rPr>
-              <a:t>4,370 h · 2.8 FTE</a:t>
+              <a:t>4,370 handler-h · 2.8 FTE</a:t>
             </a:r>
             <a:endParaRPr lang="en-US" sz="840" dirty="0"/>
           </a:p>
@@ -14434,7 +14640,7 @@
                 <a:ea typeface="Arial" pitchFamily="34" charset="-122"/>
                 <a:cs typeface="Arial" pitchFamily="34" charset="-120"/>
               </a:rPr>
-              <a:t>€152,600</a:t>
+              <a:t>€152,600 a year</a:t>
             </a:r>
             <a:endParaRPr lang="en-US" sz="840" dirty="0"/>
           </a:p>
@@ -15289,7 +15495,7 @@
                           <a:ea typeface="Arial" pitchFamily="34" charset="-122"/>
                           <a:cs typeface="Arial" pitchFamily="34" charset="-120"/>
                         </a:rPr>
-                        <a:t>US$</a:t>
+                        <a:t>US$ / claim</a:t>
                       </a:r>
                       <a:endParaRPr lang="en-US" sz="780" dirty="0">
                         <a:latin typeface="Arial" charset="0"/>
@@ -19017,7 +19223,7 @@
                           <a:ea typeface="Arial" pitchFamily="34" charset="-122"/>
                           <a:cs typeface="Arial" pitchFamily="34" charset="-120"/>
                         </a:rPr>
-                        <a:t>Claims each/day</a:t>
+                        <a:t>Claims each, per day</a:t>
                       </a:r>
                       <a:endParaRPr lang="en-US" sz="780" dirty="0">
                         <a:latin typeface="Arial" charset="0"/>
@@ -19085,7 +19291,7 @@
                           <a:ea typeface="Arial" pitchFamily="34" charset="-122"/>
                           <a:cs typeface="Arial" pitchFamily="34" charset="-120"/>
                         </a:rPr>
-                        <a:t>Intake work today</a:t>
+                        <a:t>Intake work, per day</a:t>
                       </a:r>
                       <a:endParaRPr lang="en-US" sz="780" dirty="0">
                         <a:latin typeface="Arial" charset="0"/>
@@ -19153,7 +19359,7 @@
                           <a:ea typeface="Arial" pitchFamily="34" charset="-122"/>
                           <a:cs typeface="Arial" pitchFamily="34" charset="-120"/>
                         </a:rPr>
-                        <a:t>Time freed each</a:t>
+                        <a:t>Time freed, per day</a:t>
                       </a:r>
                       <a:endParaRPr lang="en-US" sz="780" dirty="0">
                         <a:latin typeface="Arial" charset="0"/>

--- a/case-study/deck/GGW_FNOL_Redesign.pptx
+++ b/case-study/deck/GGW_FNOL_Redesign.pptx
@@ -1521,7 +1521,7 @@
                 <a:ea typeface="Cambria" pitchFamily="34" charset="-122"/>
                 <a:cs typeface="Cambria" pitchFamily="34" charset="-120"/>
               </a:rPr>
-              <a:t>Redesigning intake releases 17.5 handler-hours every working day — the capacity of 2.8 full-time people</a:t>
+              <a:t>Redesigning intake releases 17.5 handler-hours a day — the capacity of 2.8 full-time people</a:t>
             </a:r>
             <a:endParaRPr lang="en-US" sz="1900" dirty="0"/>
           </a:p>
@@ -2046,7 +2046,7 @@
         </p:nvSpPr>
         <p:spPr>
           <a:xfrm>
-            <a:off x="8065008" y="1783080"/>
+            <a:off x="8065008" y="1746504"/>
             <a:ext cx="50292" cy="530352"/>
           </a:xfrm>
           <a:prstGeom prst="rect">
@@ -2066,7 +2066,7 @@
         </p:nvSpPr>
         <p:spPr>
           <a:xfrm>
-            <a:off x="8193024" y="1746504"/>
+            <a:off x="8193024" y="1709928"/>
             <a:ext cx="658368" cy="274320"/>
           </a:xfrm>
           <a:prstGeom prst="rect">
@@ -2105,7 +2105,7 @@
         </p:nvSpPr>
         <p:spPr>
           <a:xfrm>
-            <a:off x="8887968" y="1737360"/>
+            <a:off x="8887968" y="1700784"/>
             <a:ext cx="2642616" cy="219456"/>
           </a:xfrm>
           <a:prstGeom prst="rect">
@@ -2144,7 +2144,7 @@
         </p:nvSpPr>
         <p:spPr>
           <a:xfrm>
-            <a:off x="8887968" y="1947672"/>
+            <a:off x="8887968" y="1911096"/>
             <a:ext cx="2642616" cy="365760"/>
           </a:xfrm>
           <a:prstGeom prst="rect">
@@ -2186,7 +2186,7 @@
         </p:nvSpPr>
         <p:spPr>
           <a:xfrm>
-            <a:off x="8065008" y="2459736"/>
+            <a:off x="8065008" y="2350008"/>
             <a:ext cx="50292" cy="530352"/>
           </a:xfrm>
           <a:prstGeom prst="rect">
@@ -2206,7 +2206,7 @@
         </p:nvSpPr>
         <p:spPr>
           <a:xfrm>
-            <a:off x="8193024" y="2423160"/>
+            <a:off x="8193024" y="2313432"/>
             <a:ext cx="658368" cy="274320"/>
           </a:xfrm>
           <a:prstGeom prst="rect">
@@ -2245,7 +2245,7 @@
         </p:nvSpPr>
         <p:spPr>
           <a:xfrm>
-            <a:off x="8887968" y="2414016"/>
+            <a:off x="8887968" y="2304288"/>
             <a:ext cx="2642616" cy="219456"/>
           </a:xfrm>
           <a:prstGeom prst="rect">
@@ -2284,7 +2284,7 @@
         </p:nvSpPr>
         <p:spPr>
           <a:xfrm>
-            <a:off x="8887968" y="2624328"/>
+            <a:off x="8887968" y="2514600"/>
             <a:ext cx="2642616" cy="365760"/>
           </a:xfrm>
           <a:prstGeom prst="rect">
@@ -2326,7 +2326,7 @@
         </p:nvSpPr>
         <p:spPr>
           <a:xfrm>
-            <a:off x="8065008" y="3136392"/>
+            <a:off x="8065008" y="2953512"/>
             <a:ext cx="50292" cy="530352"/>
           </a:xfrm>
           <a:prstGeom prst="rect">
@@ -2346,7 +2346,7 @@
         </p:nvSpPr>
         <p:spPr>
           <a:xfrm>
-            <a:off x="8193024" y="3099816"/>
+            <a:off x="8193024" y="2916936"/>
             <a:ext cx="658368" cy="274320"/>
           </a:xfrm>
           <a:prstGeom prst="rect">
@@ -2385,7 +2385,7 @@
         </p:nvSpPr>
         <p:spPr>
           <a:xfrm>
-            <a:off x="8887968" y="3090672"/>
+            <a:off x="8887968" y="2907792"/>
             <a:ext cx="2642616" cy="219456"/>
           </a:xfrm>
           <a:prstGeom prst="rect">
@@ -2424,7 +2424,7 @@
         </p:nvSpPr>
         <p:spPr>
           <a:xfrm>
-            <a:off x="8887968" y="3300984"/>
+            <a:off x="8887968" y="3118104"/>
             <a:ext cx="2642616" cy="365760"/>
           </a:xfrm>
           <a:prstGeom prst="rect">
@@ -2466,7 +2466,7 @@
         </p:nvSpPr>
         <p:spPr>
           <a:xfrm>
-            <a:off x="8065008" y="3520440"/>
+            <a:off x="8065008" y="3557016"/>
             <a:ext cx="3465576" cy="219456"/>
           </a:xfrm>
           <a:prstGeom prst="rect">
@@ -2506,7 +2506,7 @@
         <p:spPr>
           <a:xfrm>
             <a:off x="457200" y="3968496"/>
-            <a:ext cx="2743200" cy="914400"/>
+            <a:ext cx="2627071" cy="914400"/>
           </a:xfrm>
           <a:prstGeom prst="roundRect">
             <a:avLst>
@@ -2533,7 +2533,7 @@
         <p:spPr>
           <a:xfrm>
             <a:off x="621792" y="4032504"/>
-            <a:ext cx="2414016" cy="384048"/>
+            <a:ext cx="2297887" cy="384048"/>
           </a:xfrm>
           <a:prstGeom prst="rect">
             <a:avLst/>
@@ -2572,7 +2572,7 @@
         <p:spPr>
           <a:xfrm>
             <a:off x="621792" y="4416552"/>
-            <a:ext cx="2414016" cy="402336"/>
+            <a:ext cx="2297887" cy="402336"/>
           </a:xfrm>
           <a:prstGeom prst="rect">
             <a:avLst/>
@@ -2613,8 +2613,8 @@
         </p:nvSpPr>
         <p:spPr>
           <a:xfrm>
-            <a:off x="3456432" y="3968496"/>
-            <a:ext cx="2743200" cy="914400"/>
+            <a:off x="3340303" y="3968496"/>
+            <a:ext cx="2627071" cy="914400"/>
           </a:xfrm>
           <a:prstGeom prst="roundRect">
             <a:avLst>
@@ -2640,8 +2640,8 @@
         </p:nvSpPr>
         <p:spPr>
           <a:xfrm>
-            <a:off x="3621024" y="4032504"/>
-            <a:ext cx="2414016" cy="384048"/>
+            <a:off x="3504895" y="4032504"/>
+            <a:ext cx="2297887" cy="384048"/>
           </a:xfrm>
           <a:prstGeom prst="rect">
             <a:avLst/>
@@ -2679,8 +2679,8 @@
         </p:nvSpPr>
         <p:spPr>
           <a:xfrm>
-            <a:off x="3621024" y="4416552"/>
-            <a:ext cx="2414016" cy="402336"/>
+            <a:off x="3504895" y="4416552"/>
+            <a:ext cx="2297887" cy="402336"/>
           </a:xfrm>
           <a:prstGeom prst="rect">
             <a:avLst/>
@@ -2721,8 +2721,8 @@
         </p:nvSpPr>
         <p:spPr>
           <a:xfrm>
-            <a:off x="6455664" y="3968496"/>
-            <a:ext cx="2743200" cy="914400"/>
+            <a:off x="6223406" y="3968496"/>
+            <a:ext cx="2627071" cy="914400"/>
           </a:xfrm>
           <a:prstGeom prst="roundRect">
             <a:avLst>
@@ -2748,8 +2748,8 @@
         </p:nvSpPr>
         <p:spPr>
           <a:xfrm>
-            <a:off x="6620256" y="4032504"/>
-            <a:ext cx="2414016" cy="384048"/>
+            <a:off x="6387998" y="4032504"/>
+            <a:ext cx="2297887" cy="384048"/>
           </a:xfrm>
           <a:prstGeom prst="rect">
             <a:avLst/>
@@ -2787,8 +2787,8 @@
         </p:nvSpPr>
         <p:spPr>
           <a:xfrm>
-            <a:off x="6620256" y="4416552"/>
-            <a:ext cx="2414016" cy="402336"/>
+            <a:off x="6387998" y="4416552"/>
+            <a:ext cx="2297887" cy="402336"/>
           </a:xfrm>
           <a:prstGeom prst="rect">
             <a:avLst/>
@@ -2829,8 +2829,8 @@
         </p:nvSpPr>
         <p:spPr>
           <a:xfrm>
-            <a:off x="9454896" y="3968496"/>
-            <a:ext cx="2743200" cy="914400"/>
+            <a:off x="9106510" y="3968496"/>
+            <a:ext cx="2627071" cy="914400"/>
           </a:xfrm>
           <a:prstGeom prst="roundRect">
             <a:avLst>
@@ -2856,8 +2856,8 @@
         </p:nvSpPr>
         <p:spPr>
           <a:xfrm>
-            <a:off x="9619488" y="4032504"/>
-            <a:ext cx="2414016" cy="384048"/>
+            <a:off x="9271102" y="4032504"/>
+            <a:ext cx="2297887" cy="384048"/>
           </a:xfrm>
           <a:prstGeom prst="rect">
             <a:avLst/>
@@ -2895,8 +2895,8 @@
         </p:nvSpPr>
         <p:spPr>
           <a:xfrm>
-            <a:off x="9619488" y="4416552"/>
-            <a:ext cx="2414016" cy="402336"/>
+            <a:off x="9271102" y="4416552"/>
+            <a:ext cx="2297887" cy="402336"/>
           </a:xfrm>
           <a:prstGeom prst="rect">
             <a:avLst/>
@@ -11987,7 +11987,7 @@
                 <a:gridCol w="960120"/>
                 <a:gridCol w="960120"/>
               </a:tblGrid>
-              <a:tr h="192024">
+              <a:tr h="187452">
                 <a:tc>
                   <a:txBody>
                     <a:bodyPr/>
@@ -12073,7 +12073,7 @@
                           <a:ea typeface="Arial" pitchFamily="34" charset="-122"/>
                           <a:cs typeface="Arial" pitchFamily="34" charset="-120"/>
                         </a:rPr>
-                        <a:t>Today (min)</a:t>
+                        <a:t>Today</a:t>
                       </a:r>
                       <a:endParaRPr lang="en-US" sz="780" dirty="0">
                         <a:latin typeface="Arial" charset="0"/>
@@ -12141,7 +12141,7 @@
                           <a:ea typeface="Arial" pitchFamily="34" charset="-122"/>
                           <a:cs typeface="Arial" pitchFamily="34" charset="-120"/>
                         </a:rPr>
-                        <a:t>Redesigned (min)</a:t>
+                        <a:t>Redesigned</a:t>
                       </a:r>
                       <a:endParaRPr lang="en-US" sz="780" dirty="0">
                         <a:latin typeface="Arial" charset="0"/>
@@ -12193,7 +12193,7 @@
                   </a:tcPr>
                 </a:tc>
               </a:tr>
-              <a:tr h="192024">
+              <a:tr h="187452">
                 <a:tc>
                   <a:txBody>
                     <a:bodyPr/>
@@ -12399,7 +12399,7 @@
                   </a:tcPr>
                 </a:tc>
               </a:tr>
-              <a:tr h="192024">
+              <a:tr h="187452">
                 <a:tc>
                   <a:txBody>
                     <a:bodyPr/>
@@ -12605,7 +12605,7 @@
                   </a:tcPr>
                 </a:tc>
               </a:tr>
-              <a:tr h="192024">
+              <a:tr h="187452">
                 <a:tc>
                   <a:txBody>
                     <a:bodyPr/>
@@ -12811,7 +12811,7 @@
                   </a:tcPr>
                 </a:tc>
               </a:tr>
-              <a:tr h="192024">
+              <a:tr h="187452">
                 <a:tc>
                   <a:txBody>
                     <a:bodyPr/>
@@ -13017,7 +13017,7 @@
                   </a:tcPr>
                 </a:tc>
               </a:tr>
-              <a:tr h="192024">
+              <a:tr h="187452">
                 <a:tc>
                   <a:txBody>
                     <a:bodyPr/>
@@ -13223,7 +13223,7 @@
                   </a:tcPr>
                 </a:tc>
               </a:tr>
-              <a:tr h="192024">
+              <a:tr h="187452">
                 <a:tc>
                   <a:txBody>
                     <a:bodyPr/>
@@ -13429,7 +13429,7 @@
                   </a:tcPr>
                 </a:tc>
               </a:tr>
-              <a:tr h="192024">
+              <a:tr h="187452">
                 <a:tc>
                   <a:txBody>
                     <a:bodyPr/>
@@ -13635,7 +13635,7 @@
                   </a:tcPr>
                 </a:tc>
               </a:tr>
-              <a:tr h="192024">
+              <a:tr h="187452">
                 <a:tc>
                   <a:txBody>
                     <a:bodyPr/>
@@ -13841,7 +13841,7 @@
                   </a:tcPr>
                 </a:tc>
               </a:tr>
-              <a:tr h="192024">
+              <a:tr h="187452">
                 <a:tc>
                   <a:txBody>
                     <a:bodyPr/>
@@ -14047,7 +14047,7 @@
                   </a:tcPr>
                 </a:tc>
               </a:tr>
-              <a:tr h="192024">
+              <a:tr h="187452">
                 <a:tc>
                   <a:txBody>
                     <a:bodyPr/>
@@ -14265,7 +14265,7 @@
         </p:nvSpPr>
         <p:spPr>
           <a:xfrm>
-            <a:off x="365760" y="2926080"/>
+            <a:off x="365760" y="3127248"/>
             <a:ext cx="5486400" cy="274320"/>
           </a:xfrm>
           <a:prstGeom prst="rect">
@@ -14307,12 +14307,12 @@
         </p:nvSpPr>
         <p:spPr>
           <a:xfrm>
-            <a:off x="365760" y="3218688"/>
-            <a:ext cx="5486400" cy="621792"/>
+            <a:off x="365760" y="3438144"/>
+            <a:ext cx="5486400" cy="566928"/>
           </a:xfrm>
           <a:prstGeom prst="roundRect">
             <a:avLst>
-              <a:gd name="adj" fmla="val 7353"/>
+              <a:gd name="adj" fmla="val 8065"/>
             </a:avLst>
           </a:prstGeom>
           <a:solidFill>
@@ -14334,8 +14334,8 @@
         </p:nvSpPr>
         <p:spPr>
           <a:xfrm>
-            <a:off x="530352" y="3218688"/>
-            <a:ext cx="5157216" cy="621792"/>
+            <a:off x="530352" y="3438144"/>
+            <a:ext cx="5157216" cy="566928"/>
           </a:xfrm>
           <a:prstGeom prst="rect">
             <a:avLst/>
@@ -14393,12 +14393,12 @@
         </p:nvSpPr>
         <p:spPr>
           <a:xfrm>
-            <a:off x="365760" y="3895344"/>
-            <a:ext cx="5486400" cy="2560320"/>
+            <a:off x="365760" y="4078224"/>
+            <a:ext cx="5486400" cy="2395728"/>
           </a:xfrm>
           <a:prstGeom prst="roundRect">
             <a:avLst>
-              <a:gd name="adj" fmla="val 2143"/>
+              <a:gd name="adj" fmla="val 2290"/>
             </a:avLst>
           </a:prstGeom>
           <a:solidFill>
@@ -14420,7 +14420,7 @@
         </p:nvSpPr>
         <p:spPr>
           <a:xfrm>
-            <a:off x="548640" y="4005072"/>
+            <a:off x="548640" y="4169664"/>
             <a:ext cx="5120640" cy="219456"/>
           </a:xfrm>
           <a:prstGeom prst="rect">
@@ -14459,7 +14459,7 @@
         </p:nvSpPr>
         <p:spPr>
           <a:xfrm>
-            <a:off x="548640" y="4224528"/>
+            <a:off x="548640" y="4389120"/>
             <a:ext cx="5120640" cy="182880"/>
           </a:xfrm>
           <a:prstGeom prst="rect">
@@ -14498,7 +14498,7 @@
         </p:nvSpPr>
         <p:spPr>
           <a:xfrm>
-            <a:off x="548640" y="4425696"/>
+            <a:off x="548640" y="4572000"/>
             <a:ext cx="3520440" cy="192024"/>
           </a:xfrm>
           <a:prstGeom prst="rect">
@@ -14537,7 +14537,7 @@
         </p:nvSpPr>
         <p:spPr>
           <a:xfrm>
-            <a:off x="4069080" y="4425696"/>
+            <a:off x="4069080" y="4572000"/>
             <a:ext cx="1600200" cy="192024"/>
           </a:xfrm>
           <a:prstGeom prst="rect">
@@ -14576,7 +14576,7 @@
         </p:nvSpPr>
         <p:spPr>
           <a:xfrm>
-            <a:off x="548640" y="4631436"/>
+            <a:off x="548640" y="4768596"/>
             <a:ext cx="3520440" cy="192024"/>
           </a:xfrm>
           <a:prstGeom prst="rect">
@@ -14615,7 +14615,7 @@
         </p:nvSpPr>
         <p:spPr>
           <a:xfrm>
-            <a:off x="4069080" y="4631436"/>
+            <a:off x="4069080" y="4768596"/>
             <a:ext cx="1600200" cy="192024"/>
           </a:xfrm>
           <a:prstGeom prst="rect">
@@ -14654,7 +14654,7 @@
         </p:nvSpPr>
         <p:spPr>
           <a:xfrm>
-            <a:off x="548640" y="4837176"/>
+            <a:off x="548640" y="4965192"/>
             <a:ext cx="3520440" cy="192024"/>
           </a:xfrm>
           <a:prstGeom prst="rect">
@@ -14693,7 +14693,7 @@
         </p:nvSpPr>
         <p:spPr>
           <a:xfrm>
-            <a:off x="4069080" y="4837176"/>
+            <a:off x="4069080" y="4965192"/>
             <a:ext cx="1600200" cy="192024"/>
           </a:xfrm>
           <a:prstGeom prst="rect">
@@ -14732,7 +14732,7 @@
         </p:nvSpPr>
         <p:spPr>
           <a:xfrm>
-            <a:off x="548640" y="5042916"/>
+            <a:off x="548640" y="5161788"/>
             <a:ext cx="3520440" cy="192024"/>
           </a:xfrm>
           <a:prstGeom prst="rect">
@@ -14771,7 +14771,7 @@
         </p:nvSpPr>
         <p:spPr>
           <a:xfrm>
-            <a:off x="4069080" y="5042916"/>
+            <a:off x="4069080" y="5161788"/>
             <a:ext cx="1600200" cy="192024"/>
           </a:xfrm>
           <a:prstGeom prst="rect">
@@ -14810,7 +14810,7 @@
         </p:nvSpPr>
         <p:spPr>
           <a:xfrm>
-            <a:off x="548640" y="5248656"/>
+            <a:off x="548640" y="5358384"/>
             <a:ext cx="3520440" cy="192024"/>
           </a:xfrm>
           <a:prstGeom prst="rect">
@@ -14849,7 +14849,7 @@
         </p:nvSpPr>
         <p:spPr>
           <a:xfrm>
-            <a:off x="4069080" y="5248656"/>
+            <a:off x="4069080" y="5358384"/>
             <a:ext cx="1600200" cy="192024"/>
           </a:xfrm>
           <a:prstGeom prst="rect">
@@ -14888,7 +14888,7 @@
         </p:nvSpPr>
         <p:spPr>
           <a:xfrm>
-            <a:off x="548640" y="5486400"/>
+            <a:off x="548640" y="5577840"/>
             <a:ext cx="5120640" cy="10973"/>
           </a:xfrm>
           <a:prstGeom prst="rect">
@@ -14908,7 +14908,7 @@
         </p:nvSpPr>
         <p:spPr>
           <a:xfrm>
-            <a:off x="548640" y="5541264"/>
+            <a:off x="548640" y="5632704"/>
             <a:ext cx="5120640" cy="182880"/>
           </a:xfrm>
           <a:prstGeom prst="rect">
@@ -14947,7 +14947,7 @@
         </p:nvSpPr>
         <p:spPr>
           <a:xfrm>
-            <a:off x="548640" y="5742432"/>
+            <a:off x="548640" y="5833872"/>
             <a:ext cx="3520440" cy="192024"/>
           </a:xfrm>
           <a:prstGeom prst="rect">
@@ -14986,7 +14986,7 @@
         </p:nvSpPr>
         <p:spPr>
           <a:xfrm>
-            <a:off x="4069080" y="5742432"/>
+            <a:off x="4069080" y="5833872"/>
             <a:ext cx="1600200" cy="192024"/>
           </a:xfrm>
           <a:prstGeom prst="rect">
@@ -15025,7 +15025,7 @@
         </p:nvSpPr>
         <p:spPr>
           <a:xfrm>
-            <a:off x="548640" y="5948172"/>
+            <a:off x="548640" y="6030468"/>
             <a:ext cx="3520440" cy="192024"/>
           </a:xfrm>
           <a:prstGeom prst="rect">
@@ -15064,7 +15064,7 @@
         </p:nvSpPr>
         <p:spPr>
           <a:xfrm>
-            <a:off x="4069080" y="5948172"/>
+            <a:off x="4069080" y="6030468"/>
             <a:ext cx="1600200" cy="192024"/>
           </a:xfrm>
           <a:prstGeom prst="rect">
@@ -15103,8 +15103,8 @@
         </p:nvSpPr>
         <p:spPr>
           <a:xfrm>
-            <a:off x="548640" y="6181344"/>
-            <a:ext cx="5120640" cy="256032"/>
+            <a:off x="548640" y="6236208"/>
+            <a:ext cx="5120640" cy="219456"/>
           </a:xfrm>
           <a:prstGeom prst="rect">
             <a:avLst/>

--- a/case-study/deck/GGW_FNOL_Redesign.pptx
+++ b/case-study/deck/GGW_FNOL_Redesign.pptx
@@ -2172,7 +2172,7 @@
                 <a:ea typeface="Arial" pitchFamily="34" charset="-122"/>
                 <a:cs typeface="Arial" pitchFamily="34" charset="-120"/>
               </a:rPr>
-              <a:t>€0.077 a claim</a:t>
+              <a:t>€0.08 a claim · €2,400 a year</a:t>
             </a:r>
             <a:endParaRPr lang="en-US" sz="820" dirty="0"/>
           </a:p>
@@ -3095,7 +3095,7 @@
                 <a:ea typeface="Arial" pitchFamily="34" charset="-122"/>
                 <a:cs typeface="Arial" pitchFamily="34" charset="-120"/>
               </a:rPr>
-              <a:t>cost is not what decides this. The AI costs €2,400 a year to run — under 2% of the value it releases. What decides it is governance: proving a person reviewed anything that can go against a claimant, and whether handlers trust the drafts enough to approve them.</a:t>
+              <a:t>cost is not what decides this. The AI costs €2,400 a year to run; keeping it healthy takes a quarter of an engineer, €24,400 — so €26,800 a year all in, against €152,600 of capacity released. What decides it is governance: proving a person reviewed anything that can go against a claimant, and whether handlers trust the drafts.</a:t>
             </a:r>
             <a:endParaRPr lang="en-US" sz="850" dirty="0"/>
           </a:p>
@@ -3134,7 +3134,7 @@
                 <a:ea typeface="Arial" pitchFamily="34" charset="-122"/>
                 <a:cs typeface="Arial" pitchFamily="34" charset="-120"/>
               </a:rPr>
-              <a:t>Conservative throughout: the 21.0-minutes-per-claim saving is a three-point estimate (best 30 / likely 21 / worst 12), not the design maximum. Build-up on slide 6, sources on slide 7.</a:t>
+              <a:t>Conservative throughout: the 21-minute-per-claim saving is a three-point estimate (best 30 / likely 21 / worst 12), not the design maximum. Build-up on slide 6, sources on slide 7.</a:t>
             </a:r>
             <a:endParaRPr lang="en-US" sz="760" dirty="0"/>
           </a:p>

--- a/case-study/deck/GGW_FNOL_Redesign.pptx
+++ b/case-study/deck/GGW_FNOL_Redesign.pptx
@@ -3009,7 +3009,7 @@
                 <a:ea typeface="Arial" pitchFamily="34" charset="-122"/>
                 <a:cs typeface="Arial" pitchFamily="34" charset="-120"/>
               </a:rPr>
-              <a:t>4,370 handler-hours a year × €34.92, the real cost of one handler-hour. This is capacity, not cash. It becomes money only if the hours go to the backlog, or are absorbed by normal staff turnover.</a:t>
+              <a:t>4,370 handler-hours a year × €34.92, the real cost of one handler-hour. This is capacity, not cash. It becomes money only if the hours go to the backlog or are absorbed by turnover — and only if intake sits with a small team, not spread thinly across all 30 (slide 6).</a:t>
             </a:r>
             <a:endParaRPr lang="en-US" sz="850" dirty="0"/>
           </a:p>
@@ -14266,7 +14266,7 @@
         <p:spPr>
           <a:xfrm>
             <a:off x="365760" y="3127248"/>
-            <a:ext cx="5486400" cy="274320"/>
+            <a:ext cx="5486400" cy="329184"/>
           </a:xfrm>
           <a:prstGeom prst="rect">
             <a:avLst/>
@@ -14293,7 +14293,7 @@
                 <a:ea typeface="Arial" pitchFamily="34" charset="-122"/>
                 <a:cs typeface="Arial" pitchFamily="34" charset="-120"/>
               </a:rPr>
-              <a:t>The design allows 10.1 min a claim. We do not bank that. The case uses a three-point estimate — (best 30 + 4 × likely 21 + worst 12) ÷ 6 = 21.0 min saved a claim — which is the 19.0 min above, and the 19 minutes on slide 1.</a:t>
+              <a:t>The design allows 10.1 min a claim. We do not bank that. The case uses a three-point estimate — (best 30 + 4 × likely 21 + worst 12) ÷ 6 = 21.0 min saved a claim — which is the 19.0 min above, and the 19 minutes on slide 1. In plain terms: we assume handlers capture 70% of the saving the design allows.</a:t>
             </a:r>
             <a:endParaRPr lang="en-US" sz="740" dirty="0"/>
           </a:p>
@@ -14307,12 +14307,12 @@
         </p:nvSpPr>
         <p:spPr>
           <a:xfrm>
-            <a:off x="365760" y="3438144"/>
-            <a:ext cx="5486400" cy="566928"/>
+            <a:off x="365760" y="3493008"/>
+            <a:ext cx="5486400" cy="548640"/>
           </a:xfrm>
           <a:prstGeom prst="roundRect">
             <a:avLst>
-              <a:gd name="adj" fmla="val 8065"/>
+              <a:gd name="adj" fmla="val 8333"/>
             </a:avLst>
           </a:prstGeom>
           <a:solidFill>
@@ -14334,8 +14334,8 @@
         </p:nvSpPr>
         <p:spPr>
           <a:xfrm>
-            <a:off x="530352" y="3438144"/>
-            <a:ext cx="5157216" cy="566928"/>
+            <a:off x="530352" y="3493008"/>
+            <a:ext cx="5157216" cy="548640"/>
           </a:xfrm>
           <a:prstGeom prst="rect">
             <a:avLst/>
@@ -14393,7 +14393,7 @@
         </p:nvSpPr>
         <p:spPr>
           <a:xfrm>
-            <a:off x="365760" y="4078224"/>
+            <a:off x="365760" y="4114800"/>
             <a:ext cx="5486400" cy="2395728"/>
           </a:xfrm>
           <a:prstGeom prst="roundRect">
@@ -14420,7 +14420,7 @@
         </p:nvSpPr>
         <p:spPr>
           <a:xfrm>
-            <a:off x="548640" y="4169664"/>
+            <a:off x="548640" y="4206240"/>
             <a:ext cx="5120640" cy="219456"/>
           </a:xfrm>
           <a:prstGeom prst="rect">
@@ -14459,7 +14459,7 @@
         </p:nvSpPr>
         <p:spPr>
           <a:xfrm>
-            <a:off x="548640" y="4389120"/>
+            <a:off x="548640" y="4425696"/>
             <a:ext cx="5120640" cy="182880"/>
           </a:xfrm>
           <a:prstGeom prst="rect">
@@ -14498,7 +14498,7 @@
         </p:nvSpPr>
         <p:spPr>
           <a:xfrm>
-            <a:off x="548640" y="4572000"/>
+            <a:off x="548640" y="4608576"/>
             <a:ext cx="3520440" cy="192024"/>
           </a:xfrm>
           <a:prstGeom prst="rect">
@@ -14537,7 +14537,7 @@
         </p:nvSpPr>
         <p:spPr>
           <a:xfrm>
-            <a:off x="4069080" y="4572000"/>
+            <a:off x="4069080" y="4608576"/>
             <a:ext cx="1600200" cy="192024"/>
           </a:xfrm>
           <a:prstGeom prst="rect">
@@ -14576,7 +14576,7 @@
         </p:nvSpPr>
         <p:spPr>
           <a:xfrm>
-            <a:off x="548640" y="4768596"/>
+            <a:off x="548640" y="4805172"/>
             <a:ext cx="3520440" cy="192024"/>
           </a:xfrm>
           <a:prstGeom prst="rect">
@@ -14615,7 +14615,7 @@
         </p:nvSpPr>
         <p:spPr>
           <a:xfrm>
-            <a:off x="4069080" y="4768596"/>
+            <a:off x="4069080" y="4805172"/>
             <a:ext cx="1600200" cy="192024"/>
           </a:xfrm>
           <a:prstGeom prst="rect">
@@ -14654,7 +14654,7 @@
         </p:nvSpPr>
         <p:spPr>
           <a:xfrm>
-            <a:off x="548640" y="4965192"/>
+            <a:off x="548640" y="5001768"/>
             <a:ext cx="3520440" cy="192024"/>
           </a:xfrm>
           <a:prstGeom prst="rect">
@@ -14693,7 +14693,7 @@
         </p:nvSpPr>
         <p:spPr>
           <a:xfrm>
-            <a:off x="4069080" y="4965192"/>
+            <a:off x="4069080" y="5001768"/>
             <a:ext cx="1600200" cy="192024"/>
           </a:xfrm>
           <a:prstGeom prst="rect">
@@ -14732,7 +14732,7 @@
         </p:nvSpPr>
         <p:spPr>
           <a:xfrm>
-            <a:off x="548640" y="5161788"/>
+            <a:off x="548640" y="5198364"/>
             <a:ext cx="3520440" cy="192024"/>
           </a:xfrm>
           <a:prstGeom prst="rect">
@@ -14771,7 +14771,7 @@
         </p:nvSpPr>
         <p:spPr>
           <a:xfrm>
-            <a:off x="4069080" y="5161788"/>
+            <a:off x="4069080" y="5198364"/>
             <a:ext cx="1600200" cy="192024"/>
           </a:xfrm>
           <a:prstGeom prst="rect">
@@ -14810,7 +14810,7 @@
         </p:nvSpPr>
         <p:spPr>
           <a:xfrm>
-            <a:off x="548640" y="5358384"/>
+            <a:off x="548640" y="5394960"/>
             <a:ext cx="3520440" cy="192024"/>
           </a:xfrm>
           <a:prstGeom prst="rect">
@@ -14849,7 +14849,7 @@
         </p:nvSpPr>
         <p:spPr>
           <a:xfrm>
-            <a:off x="4069080" y="5358384"/>
+            <a:off x="4069080" y="5394960"/>
             <a:ext cx="1600200" cy="192024"/>
           </a:xfrm>
           <a:prstGeom prst="rect">
@@ -14888,7 +14888,7 @@
         </p:nvSpPr>
         <p:spPr>
           <a:xfrm>
-            <a:off x="548640" y="5577840"/>
+            <a:off x="548640" y="5614416"/>
             <a:ext cx="5120640" cy="10973"/>
           </a:xfrm>
           <a:prstGeom prst="rect">
@@ -14908,7 +14908,7 @@
         </p:nvSpPr>
         <p:spPr>
           <a:xfrm>
-            <a:off x="548640" y="5632704"/>
+            <a:off x="548640" y="5669280"/>
             <a:ext cx="5120640" cy="182880"/>
           </a:xfrm>
           <a:prstGeom prst="rect">
@@ -14947,7 +14947,7 @@
         </p:nvSpPr>
         <p:spPr>
           <a:xfrm>
-            <a:off x="548640" y="5833872"/>
+            <a:off x="548640" y="5870448"/>
             <a:ext cx="3520440" cy="192024"/>
           </a:xfrm>
           <a:prstGeom prst="rect">
@@ -14986,7 +14986,7 @@
         </p:nvSpPr>
         <p:spPr>
           <a:xfrm>
-            <a:off x="4069080" y="5833872"/>
+            <a:off x="4069080" y="5870448"/>
             <a:ext cx="1600200" cy="192024"/>
           </a:xfrm>
           <a:prstGeom prst="rect">
@@ -15025,7 +15025,7 @@
         </p:nvSpPr>
         <p:spPr>
           <a:xfrm>
-            <a:off x="548640" y="6030468"/>
+            <a:off x="548640" y="6067044"/>
             <a:ext cx="3520440" cy="192024"/>
           </a:xfrm>
           <a:prstGeom prst="rect">
@@ -15064,7 +15064,7 @@
         </p:nvSpPr>
         <p:spPr>
           <a:xfrm>
-            <a:off x="4069080" y="6030468"/>
+            <a:off x="4069080" y="6067044"/>
             <a:ext cx="1600200" cy="192024"/>
           </a:xfrm>
           <a:prstGeom prst="rect">
@@ -15103,7 +15103,7 @@
         </p:nvSpPr>
         <p:spPr>
           <a:xfrm>
-            <a:off x="548640" y="6236208"/>
+            <a:off x="548640" y="6272784"/>
             <a:ext cx="5120640" cy="219456"/>
           </a:xfrm>
           <a:prstGeom prst="rect">

--- a/case-study/deck/GGW_FNOL_Redesign.pptx
+++ b/case-study/deck/GGW_FNOL_Redesign.pptx
@@ -12,9 +12,11 @@
     <p:sldId id="260" r:id="rId6"/>
     <p:sldId id="261" r:id="rId7"/>
     <p:sldId id="262" r:id="rId8"/>
+    <p:sldId id="263" r:id="rId9"/>
+    <p:sldId id="264" r:id="rId10"/>
   </p:sldIdLst>
   <p:notesMasterIdLst>
-    <p:notesMasterId r:id="rId9"/>
+    <p:notesMasterId r:id="rId11"/>
   </p:notesMasterIdLst>
   <p:sldSz cx="12192000" cy="6858000"/>
   <p:notesSz cx="6858000" cy="12192000"/>
@@ -1060,6 +1062,182 @@
             <a:fld id="{F7021451-1387-4CA6-816F-3879F97B5CBC}" type="slidenum">
               <a:rPr lang="en-US"/>
               <a:t>7</a:t>
+            </a:fld>
+            <a:endParaRPr lang="en-US"/>
+          </a:p>
+        </p:txBody>
+      </p:sp>
+    </p:spTree>
+    <p:extLst>
+      <p:ext uri="{BB962C8B-B14F-4D97-AF65-F5344CB8AC3E}">
+        <p14:creationId xmlns:p14="http://schemas.microsoft.com/office/powerpoint/2010/main" val="1024086991"/>
+      </p:ext>
+    </p:extLst>
+  </p:cSld>
+  <p:clrMapOvr>
+    <a:masterClrMapping/>
+  </p:clrMapOvr>
+</p:notes>
+</file>
+
+<file path=ppt/notesSlides/notesSlide8.xml><?xml version="1.0" encoding="utf-8"?>
+<p:notes xmlns:a="http://schemas.openxmlformats.org/drawingml/2006/main" xmlns:r="http://schemas.openxmlformats.org/officeDocument/2006/relationships" xmlns:p="http://schemas.openxmlformats.org/presentationml/2006/main">
+  <p:cSld>
+    <p:spTree>
+      <p:nvGrpSpPr>
+        <p:cNvPr id="1" name=""/>
+        <p:cNvGrpSpPr/>
+        <p:nvPr/>
+      </p:nvGrpSpPr>
+      <p:grpSpPr>
+        <a:xfrm>
+          <a:off x="0" y="0"/>
+          <a:ext cx="0" cy="0"/>
+          <a:chOff x="0" y="0"/>
+          <a:chExt cx="0" cy="0"/>
+        </a:xfrm>
+      </p:grpSpPr>
+      <p:sp>
+        <p:nvSpPr>
+          <p:cNvPr id="2" name="Slide Image Placeholder 1"/>
+          <p:cNvSpPr>
+            <a:spLocks noGrp="1" noRot="1" noChangeAspect="1"/>
+          </p:cNvSpPr>
+          <p:nvPr>
+            <p:ph type="sldImg"/>
+          </p:nvPr>
+        </p:nvSpPr>
+        <p:spPr/>
+      </p:sp>
+      <p:sp>
+        <p:nvSpPr>
+          <p:cNvPr id="3" name="Notes Placeholder 2"/>
+          <p:cNvSpPr>
+            <a:spLocks noGrp="1"/>
+          </p:cNvSpPr>
+          <p:nvPr>
+            <p:ph type="body" idx="1"/>
+          </p:nvPr>
+        </p:nvSpPr>
+        <p:spPr/>
+        <p:txBody>
+          <a:bodyPr/>
+          <a:lstStyle/>
+          <a:p>
+            <a:r>
+              <a:rPr lang="en-US" dirty="0"/>
+              <a:t/>
+            </a:r>
+            <a:endParaRPr lang="en-US" dirty="0"/>
+          </a:p>
+        </p:txBody>
+      </p:sp>
+      <p:sp>
+        <p:nvSpPr>
+          <p:cNvPr id="4" name="Slide Number Placeholder 3"/>
+          <p:cNvSpPr>
+            <a:spLocks noGrp="1"/>
+          </p:cNvSpPr>
+          <p:nvPr>
+            <p:ph type="sldNum" sz="quarter" idx="10"/>
+          </p:nvPr>
+        </p:nvSpPr>
+        <p:spPr/>
+        <p:txBody>
+          <a:bodyPr/>
+          <a:lstStyle/>
+          <a:p>
+            <a:fld id="{F7021451-1387-4CA6-816F-3879F97B5CBC}" type="slidenum">
+              <a:rPr lang="en-US"/>
+              <a:t>8</a:t>
+            </a:fld>
+            <a:endParaRPr lang="en-US"/>
+          </a:p>
+        </p:txBody>
+      </p:sp>
+    </p:spTree>
+    <p:extLst>
+      <p:ext uri="{BB962C8B-B14F-4D97-AF65-F5344CB8AC3E}">
+        <p14:creationId xmlns:p14="http://schemas.microsoft.com/office/powerpoint/2010/main" val="1024086991"/>
+      </p:ext>
+    </p:extLst>
+  </p:cSld>
+  <p:clrMapOvr>
+    <a:masterClrMapping/>
+  </p:clrMapOvr>
+</p:notes>
+</file>
+
+<file path=ppt/notesSlides/notesSlide9.xml><?xml version="1.0" encoding="utf-8"?>
+<p:notes xmlns:a="http://schemas.openxmlformats.org/drawingml/2006/main" xmlns:r="http://schemas.openxmlformats.org/officeDocument/2006/relationships" xmlns:p="http://schemas.openxmlformats.org/presentationml/2006/main">
+  <p:cSld>
+    <p:spTree>
+      <p:nvGrpSpPr>
+        <p:cNvPr id="1" name=""/>
+        <p:cNvGrpSpPr/>
+        <p:nvPr/>
+      </p:nvGrpSpPr>
+      <p:grpSpPr>
+        <a:xfrm>
+          <a:off x="0" y="0"/>
+          <a:ext cx="0" cy="0"/>
+          <a:chOff x="0" y="0"/>
+          <a:chExt cx="0" cy="0"/>
+        </a:xfrm>
+      </p:grpSpPr>
+      <p:sp>
+        <p:nvSpPr>
+          <p:cNvPr id="2" name="Slide Image Placeholder 1"/>
+          <p:cNvSpPr>
+            <a:spLocks noGrp="1" noRot="1" noChangeAspect="1"/>
+          </p:cNvSpPr>
+          <p:nvPr>
+            <p:ph type="sldImg"/>
+          </p:nvPr>
+        </p:nvSpPr>
+        <p:spPr/>
+      </p:sp>
+      <p:sp>
+        <p:nvSpPr>
+          <p:cNvPr id="3" name="Notes Placeholder 2"/>
+          <p:cNvSpPr>
+            <a:spLocks noGrp="1"/>
+          </p:cNvSpPr>
+          <p:nvPr>
+            <p:ph type="body" idx="1"/>
+          </p:nvPr>
+        </p:nvSpPr>
+        <p:spPr/>
+        <p:txBody>
+          <a:bodyPr/>
+          <a:lstStyle/>
+          <a:p>
+            <a:r>
+              <a:rPr lang="en-US" dirty="0"/>
+              <a:t/>
+            </a:r>
+            <a:endParaRPr lang="en-US" dirty="0"/>
+          </a:p>
+        </p:txBody>
+      </p:sp>
+      <p:sp>
+        <p:nvSpPr>
+          <p:cNvPr id="4" name="Slide Number Placeholder 3"/>
+          <p:cNvSpPr>
+            <a:spLocks noGrp="1"/>
+          </p:cNvSpPr>
+          <p:nvPr>
+            <p:ph type="sldNum" sz="quarter" idx="10"/>
+          </p:nvPr>
+        </p:nvSpPr>
+        <p:spPr/>
+        <p:txBody>
+          <a:bodyPr/>
+          <a:lstStyle/>
+          <a:p>
+            <a:fld id="{F7021451-1387-4CA6-816F-3879F97B5CBC}" type="slidenum">
+              <a:rPr lang="en-US"/>
+              <a:t>9</a:t>
             </a:fld>
             <a:endParaRPr lang="en-US"/>
           </a:p>
@@ -1871,7 +2049,7 @@
                 <a:ea typeface="Arial" pitchFamily="34" charset="-122"/>
                 <a:cs typeface="Arial" pitchFamily="34" charset="-120"/>
               </a:rPr>
-              <a:t>The same checks and the same exits — reordered, some reassigned</a:t>
+              <a:t>The same checks and the same exits, reordered</a:t>
             </a:r>
             <a:endParaRPr lang="en-US" sz="900" dirty="0"/>
           </a:p>
@@ -3212,7 +3390,7 @@
                 <a:ea typeface="Arial" pitchFamily="34" charset="-122"/>
                 <a:cs typeface="Arial" pitchFamily="34" charset="-120"/>
               </a:rPr>
-              <a:t>1 / 7</a:t>
+              <a:t>1 / 9</a:t>
             </a:r>
             <a:endParaRPr lang="en-US" sz="800" dirty="0"/>
           </a:p>
@@ -4016,7 +4194,7 @@
                 <a:ea typeface="Arial" pitchFamily="34" charset="-122"/>
                 <a:cs typeface="Arial" pitchFamily="34" charset="-120"/>
               </a:rPr>
-              <a:t>2 / 7</a:t>
+              <a:t>2 / 9</a:t>
             </a:r>
             <a:endParaRPr lang="en-US" sz="800" dirty="0"/>
           </a:p>
@@ -6267,7 +6445,7 @@
                 <a:ea typeface="Arial" pitchFamily="34" charset="-122"/>
                 <a:cs typeface="Arial" pitchFamily="34" charset="-120"/>
               </a:rPr>
-              <a:t>3 / 7</a:t>
+              <a:t>3 / 9</a:t>
             </a:r>
             <a:endParaRPr lang="en-US" sz="800" dirty="0"/>
           </a:p>
@@ -8700,7 +8878,7 @@
                 <a:ea typeface="Arial" pitchFamily="34" charset="-122"/>
                 <a:cs typeface="Arial" pitchFamily="34" charset="-120"/>
               </a:rPr>
-              <a:t>4 / 7</a:t>
+              <a:t>4 / 9</a:t>
             </a:r>
             <a:endParaRPr lang="en-US" sz="800" dirty="0"/>
           </a:p>
@@ -10067,7 +10245,7 @@
                 <a:ea typeface="Cambria" pitchFamily="34" charset="-122"/>
                 <a:cs typeface="Cambria" pitchFamily="34" charset="-120"/>
               </a:rPr>
-              <a:t>Start where a mistake is cheap — that is what earns the trust the bigger wins depend on</a:t>
+              <a:t>Coverage Check stops being a second investigation — the evidence is already in the claim</a:t>
             </a:r>
             <a:endParaRPr lang="en-US" sz="1400" dirty="0"/>
           </a:p>
@@ -10081,8 +10259,8 @@
         </p:nvSpPr>
         <p:spPr>
           <a:xfrm>
-            <a:off x="9509760" y="146304"/>
-            <a:ext cx="2313432" cy="274320"/>
+            <a:off x="8229600" y="146304"/>
+            <a:ext cx="3593592" cy="274320"/>
           </a:xfrm>
           <a:prstGeom prst="rect">
             <a:avLst/>
@@ -10106,7 +10284,7 @@
                 <a:ea typeface="Arial" pitchFamily="34" charset="-122"/>
                 <a:cs typeface="Arial" pitchFamily="34" charset="-120"/>
               </a:rPr>
-              <a:t>SEQUENCING</a:t>
+              <a:t>COVERAGE CHECK &amp; HANDOFF</a:t>
             </a:r>
             <a:endParaRPr lang="en-US" sz="950" dirty="0"/>
           </a:p>
@@ -10121,7 +10299,7 @@
         <p:spPr>
           <a:xfrm>
             <a:off x="365760" y="457200"/>
-            <a:ext cx="11430000" cy="237744"/>
+            <a:ext cx="7589520" cy="219456"/>
           </a:xfrm>
           <a:prstGeom prst="rect">
             <a:avLst/>
@@ -10145,494 +10323,1980 @@
                 <a:ea typeface="Arial" pitchFamily="34" charset="-122"/>
                 <a:cs typeface="Arial" pitchFamily="34" charset="-120"/>
               </a:rPr>
-              <a:t>“Hard” means build effort and regulatory exposure together, not just weeks of work</a:t>
+              <a:t>Every reason a claim can fail the coverage test, and where each one should be settled</a:t>
             </a:r>
             <a:endParaRPr lang="en-US" sz="950" dirty="0"/>
           </a:p>
         </p:txBody>
       </p:sp>
-      <p:sp>
-        <p:nvSpPr>
-          <p:cNvPr id="5" name="Text 3"/>
-          <p:cNvSpPr txBox="1"/>
-          <p:nvPr/>
-        </p:nvSpPr>
-        <p:spPr>
-          <a:xfrm rot="16200000">
-            <a:off x="18288" y="3072384"/>
-            <a:ext cx="1600200" cy="256032"/>
-          </a:xfrm>
-          <a:prstGeom prst="rect">
-            <a:avLst/>
-          </a:prstGeom>
-          <a:noFill/>
-          <a:ln/>
-        </p:spPr>
-        <p:txBody>
-          <a:bodyPr wrap="square" lIns="0" tIns="0" rIns="0" bIns="0" rtlCol="0" anchor="ctr"/>
-          <a:lstStyle/>
-          <a:p>
-            <a:pPr algn="ctr" indent="0" marL="0">
-              <a:buNone/>
-            </a:pPr>
-            <a:r>
-              <a:rPr lang="en-US" sz="800" b="1" dirty="0">
-                <a:solidFill>
-                  <a:srgbClr val="5B6472"/>
-                </a:solidFill>
-                <a:latin typeface="Arial" pitchFamily="34" charset="0"/>
-                <a:ea typeface="Arial" pitchFamily="34" charset="-122"/>
-                <a:cs typeface="Arial" pitchFamily="34" charset="-120"/>
-              </a:rPr>
-              <a:t>HOW OFTEN IT HAPPENS  →</a:t>
-            </a:r>
-            <a:endParaRPr lang="en-US" sz="800" dirty="0"/>
-          </a:p>
-        </p:txBody>
-      </p:sp>
-      <p:sp>
-        <p:nvSpPr>
-          <p:cNvPr id="6" name="Text 4"/>
-          <p:cNvSpPr txBox="1"/>
-          <p:nvPr/>
-        </p:nvSpPr>
-        <p:spPr>
-          <a:xfrm>
-            <a:off x="1051560" y="5577840"/>
-            <a:ext cx="7863840" cy="219456"/>
-          </a:xfrm>
-          <a:prstGeom prst="rect">
-            <a:avLst/>
-          </a:prstGeom>
-          <a:noFill/>
-          <a:ln/>
-        </p:spPr>
-        <p:txBody>
-          <a:bodyPr wrap="square" lIns="0" tIns="0" rIns="0" bIns="0" rtlCol="0" anchor="ctr"/>
-          <a:lstStyle/>
-          <a:p>
-            <a:pPr algn="ctr" indent="0" marL="0">
-              <a:buNone/>
-            </a:pPr>
-            <a:r>
-              <a:rPr lang="en-US" sz="800" b="1" dirty="0">
-                <a:solidFill>
-                  <a:srgbClr val="5B6472"/>
-                </a:solidFill>
-                <a:latin typeface="Arial" pitchFamily="34" charset="0"/>
-                <a:ea typeface="Arial" pitchFamily="34" charset="-122"/>
-                <a:cs typeface="Arial" pitchFamily="34" charset="-120"/>
-              </a:rPr>
-              <a:t>HOW HARD AND HOW RISKY IT IS  →</a:t>
-            </a:r>
-            <a:endParaRPr lang="en-US" sz="800" dirty="0"/>
-          </a:p>
-        </p:txBody>
-      </p:sp>
-      <p:sp>
-        <p:nvSpPr>
-          <p:cNvPr id="7" name="Shape 5"/>
+      <p:graphicFrame>
+        <p:nvGraphicFramePr>
+          <p:cNvPr id="6" name="Table 0"/>
+          <p:cNvGraphicFramePr>
+            <a:graphicFrameLocks noGrp="1"/>
+          </p:cNvGraphicFramePr>
+          <p:nvPr>
+            <p:extLst>
+              <p:ext uri="{D42A27DB-BD31-4B8C-83A1-F6EECF244321}">
+                <p14:modId xmlns:p14="http://schemas.microsoft.com/office/powerpoint/2010/main" val="1579011935"/>
+              </p:ext>
+            </p:extLst>
+          </p:nvPr>
+        </p:nvGraphicFramePr>
+        <p:xfrm>
+          <a:off x="365760" y="786384"/>
+          <a:ext cx="7589520" cy="914400"/>
+        </p:xfrm>
+        <a:graphic>
+          <a:graphicData uri="http://schemas.openxmlformats.org/drawingml/2006/table">
+            <a:tbl>
+              <a:tblPr/>
+              <a:tblGrid>
+                <a:gridCol w="2331720"/>
+                <a:gridCol w="1508760"/>
+                <a:gridCol w="2514600"/>
+                <a:gridCol w="1234440"/>
+              </a:tblGrid>
+              <a:tr h="310896">
+                <a:tc>
+                  <a:txBody>
+                    <a:bodyPr/>
+                    <a:lstStyle/>
+                    <a:p>
+                      <a:pPr algn="l" indent="0" marL="0">
+                        <a:buNone/>
+                      </a:pPr>
+                      <a:r>
+                        <a:rPr lang="en-US" sz="800" b="1" dirty="0">
+                          <a:solidFill>
+                            <a:srgbClr val="3A3A3A"/>
+                          </a:solidFill>
+                          <a:latin typeface="Arial" pitchFamily="34" charset="0"/>
+                          <a:ea typeface="Arial" pitchFamily="34" charset="-122"/>
+                          <a:cs typeface="Arial" pitchFamily="34" charset="-120"/>
+                        </a:rPr>
+                        <a:t>Why coverage looks missing</a:t>
+                      </a:r>
+                      <a:endParaRPr lang="en-US" sz="800" dirty="0">
+                        <a:latin typeface="Arial" charset="0"/>
+                        <a:ea typeface="Arial" charset="0"/>
+                        <a:cs typeface="Arial" charset="0"/>
+                      </a:endParaRPr>
+                    </a:p>
+                  </a:txBody>
+                  <a:tcPr marL="91440" marR="91440" marT="45720" marB="45720" anchor="ctr">
+                    <a:lnL w="6350" cap="flat" cmpd="sng" algn="ctr">
+                      <a:solidFill>
+                        <a:srgbClr val="E4E4E0"/>
+                      </a:solidFill>
+                      <a:prstDash val="solid"/>
+                      <a:round/>
+                      <a:headEnd type="none" w="med" len="med"/>
+                      <a:tailEnd type="none" w="med" len="med"/>
+                    </a:lnL>
+                    <a:lnR w="6350" cap="flat" cmpd="sng" algn="ctr">
+                      <a:solidFill>
+                        <a:srgbClr val="E4E4E0"/>
+                      </a:solidFill>
+                      <a:prstDash val="solid"/>
+                      <a:round/>
+                      <a:headEnd type="none" w="med" len="med"/>
+                      <a:tailEnd type="none" w="med" len="med"/>
+                    </a:lnR>
+                    <a:lnT w="6350" cap="flat" cmpd="sng" algn="ctr">
+                      <a:solidFill>
+                        <a:srgbClr val="E4E4E0"/>
+                      </a:solidFill>
+                      <a:prstDash val="solid"/>
+                      <a:round/>
+                      <a:headEnd type="none" w="med" len="med"/>
+                      <a:tailEnd type="none" w="med" len="med"/>
+                    </a:lnT>
+                    <a:lnB w="6350" cap="flat" cmpd="sng" algn="ctr">
+                      <a:solidFill>
+                        <a:srgbClr val="E4E4E0"/>
+                      </a:solidFill>
+                      <a:prstDash val="solid"/>
+                      <a:round/>
+                      <a:headEnd type="none" w="med" len="med"/>
+                      <a:tailEnd type="none" w="med" len="med"/>
+                    </a:lnB>
+                    <a:solidFill>
+                      <a:srgbClr val="FFFFFF"/>
+                    </a:solidFill>
+                  </a:tcPr>
+                </a:tc>
+                <a:tc>
+                  <a:txBody>
+                    <a:bodyPr/>
+                    <a:lstStyle/>
+                    <a:p>
+                      <a:pPr algn="l" indent="0" marL="0">
+                        <a:buNone/>
+                      </a:pPr>
+                      <a:r>
+                        <a:rPr lang="en-US" sz="800" b="1" dirty="0">
+                          <a:solidFill>
+                            <a:srgbClr val="3A3A3A"/>
+                          </a:solidFill>
+                          <a:latin typeface="Arial" pitchFamily="34" charset="0"/>
+                          <a:ea typeface="Arial" pitchFamily="34" charset="-122"/>
+                          <a:cs typeface="Arial" pitchFamily="34" charset="-120"/>
+                        </a:rPr>
+                        <a:t>Today</a:t>
+                      </a:r>
+                      <a:endParaRPr lang="en-US" sz="800" dirty="0">
+                        <a:latin typeface="Arial" charset="0"/>
+                        <a:ea typeface="Arial" charset="0"/>
+                        <a:cs typeface="Arial" charset="0"/>
+                      </a:endParaRPr>
+                    </a:p>
+                  </a:txBody>
+                  <a:tcPr marL="91440" marR="91440" marT="45720" marB="45720" anchor="ctr">
+                    <a:lnL w="6350" cap="flat" cmpd="sng" algn="ctr">
+                      <a:solidFill>
+                        <a:srgbClr val="E4E4E0"/>
+                      </a:solidFill>
+                      <a:prstDash val="solid"/>
+                      <a:round/>
+                      <a:headEnd type="none" w="med" len="med"/>
+                      <a:tailEnd type="none" w="med" len="med"/>
+                    </a:lnL>
+                    <a:lnR w="6350" cap="flat" cmpd="sng" algn="ctr">
+                      <a:solidFill>
+                        <a:srgbClr val="E4E4E0"/>
+                      </a:solidFill>
+                      <a:prstDash val="solid"/>
+                      <a:round/>
+                      <a:headEnd type="none" w="med" len="med"/>
+                      <a:tailEnd type="none" w="med" len="med"/>
+                    </a:lnR>
+                    <a:lnT w="6350" cap="flat" cmpd="sng" algn="ctr">
+                      <a:solidFill>
+                        <a:srgbClr val="E4E4E0"/>
+                      </a:solidFill>
+                      <a:prstDash val="solid"/>
+                      <a:round/>
+                      <a:headEnd type="none" w="med" len="med"/>
+                      <a:tailEnd type="none" w="med" len="med"/>
+                    </a:lnT>
+                    <a:lnB w="6350" cap="flat" cmpd="sng" algn="ctr">
+                      <a:solidFill>
+                        <a:srgbClr val="E4E4E0"/>
+                      </a:solidFill>
+                      <a:prstDash val="solid"/>
+                      <a:round/>
+                      <a:headEnd type="none" w="med" len="med"/>
+                      <a:tailEnd type="none" w="med" len="med"/>
+                    </a:lnB>
+                    <a:solidFill>
+                      <a:srgbClr val="FFFFFF"/>
+                    </a:solidFill>
+                  </a:tcPr>
+                </a:tc>
+                <a:tc>
+                  <a:txBody>
+                    <a:bodyPr/>
+                    <a:lstStyle/>
+                    <a:p>
+                      <a:pPr algn="l" indent="0" marL="0">
+                        <a:buNone/>
+                      </a:pPr>
+                      <a:r>
+                        <a:rPr lang="en-US" sz="800" b="1" dirty="0">
+                          <a:solidFill>
+                            <a:srgbClr val="3A3A3A"/>
+                          </a:solidFill>
+                          <a:latin typeface="Arial" pitchFamily="34" charset="0"/>
+                          <a:ea typeface="Arial" pitchFamily="34" charset="-122"/>
+                          <a:cs typeface="Arial" pitchFamily="34" charset="-120"/>
+                        </a:rPr>
+                        <a:t>Redesigned</a:t>
+                      </a:r>
+                      <a:endParaRPr lang="en-US" sz="800" dirty="0">
+                        <a:latin typeface="Arial" charset="0"/>
+                        <a:ea typeface="Arial" charset="0"/>
+                        <a:cs typeface="Arial" charset="0"/>
+                      </a:endParaRPr>
+                    </a:p>
+                  </a:txBody>
+                  <a:tcPr marL="91440" marR="91440" marT="45720" marB="45720" anchor="ctr">
+                    <a:lnL w="6350" cap="flat" cmpd="sng" algn="ctr">
+                      <a:solidFill>
+                        <a:srgbClr val="E4E4E0"/>
+                      </a:solidFill>
+                      <a:prstDash val="solid"/>
+                      <a:round/>
+                      <a:headEnd type="none" w="med" len="med"/>
+                      <a:tailEnd type="none" w="med" len="med"/>
+                    </a:lnL>
+                    <a:lnR w="6350" cap="flat" cmpd="sng" algn="ctr">
+                      <a:solidFill>
+                        <a:srgbClr val="E4E4E0"/>
+                      </a:solidFill>
+                      <a:prstDash val="solid"/>
+                      <a:round/>
+                      <a:headEnd type="none" w="med" len="med"/>
+                      <a:tailEnd type="none" w="med" len="med"/>
+                    </a:lnR>
+                    <a:lnT w="6350" cap="flat" cmpd="sng" algn="ctr">
+                      <a:solidFill>
+                        <a:srgbClr val="E4E4E0"/>
+                      </a:solidFill>
+                      <a:prstDash val="solid"/>
+                      <a:round/>
+                      <a:headEnd type="none" w="med" len="med"/>
+                      <a:tailEnd type="none" w="med" len="med"/>
+                    </a:lnT>
+                    <a:lnB w="6350" cap="flat" cmpd="sng" algn="ctr">
+                      <a:solidFill>
+                        <a:srgbClr val="E4E4E0"/>
+                      </a:solidFill>
+                      <a:prstDash val="solid"/>
+                      <a:round/>
+                      <a:headEnd type="none" w="med" len="med"/>
+                      <a:tailEnd type="none" w="med" len="med"/>
+                    </a:lnB>
+                    <a:solidFill>
+                      <a:srgbClr val="FFFFFF"/>
+                    </a:solidFill>
+                  </a:tcPr>
+                </a:tc>
+                <a:tc>
+                  <a:txBody>
+                    <a:bodyPr/>
+                    <a:lstStyle/>
+                    <a:p>
+                      <a:pPr algn="l" indent="0" marL="0">
+                        <a:buNone/>
+                      </a:pPr>
+                      <a:r>
+                        <a:rPr lang="en-US" sz="800" b="1" dirty="0">
+                          <a:solidFill>
+                            <a:srgbClr val="3A3A3A"/>
+                          </a:solidFill>
+                          <a:latin typeface="Arial" pitchFamily="34" charset="0"/>
+                          <a:ea typeface="Arial" pitchFamily="34" charset="-122"/>
+                          <a:cs typeface="Arial" pitchFamily="34" charset="-120"/>
+                        </a:rPr>
+                        <a:t>Who decides</a:t>
+                      </a:r>
+                      <a:endParaRPr lang="en-US" sz="800" dirty="0">
+                        <a:latin typeface="Arial" charset="0"/>
+                        <a:ea typeface="Arial" charset="0"/>
+                        <a:cs typeface="Arial" charset="0"/>
+                      </a:endParaRPr>
+                    </a:p>
+                  </a:txBody>
+                  <a:tcPr marL="91440" marR="91440" marT="45720" marB="45720" anchor="ctr">
+                    <a:lnL w="6350" cap="flat" cmpd="sng" algn="ctr">
+                      <a:solidFill>
+                        <a:srgbClr val="E4E4E0"/>
+                      </a:solidFill>
+                      <a:prstDash val="solid"/>
+                      <a:round/>
+                      <a:headEnd type="none" w="med" len="med"/>
+                      <a:tailEnd type="none" w="med" len="med"/>
+                    </a:lnL>
+                    <a:lnR w="6350" cap="flat" cmpd="sng" algn="ctr">
+                      <a:solidFill>
+                        <a:srgbClr val="E4E4E0"/>
+                      </a:solidFill>
+                      <a:prstDash val="solid"/>
+                      <a:round/>
+                      <a:headEnd type="none" w="med" len="med"/>
+                      <a:tailEnd type="none" w="med" len="med"/>
+                    </a:lnR>
+                    <a:lnT w="6350" cap="flat" cmpd="sng" algn="ctr">
+                      <a:solidFill>
+                        <a:srgbClr val="E4E4E0"/>
+                      </a:solidFill>
+                      <a:prstDash val="solid"/>
+                      <a:round/>
+                      <a:headEnd type="none" w="med" len="med"/>
+                      <a:tailEnd type="none" w="med" len="med"/>
+                    </a:lnT>
+                    <a:lnB w="6350" cap="flat" cmpd="sng" algn="ctr">
+                      <a:solidFill>
+                        <a:srgbClr val="E4E4E0"/>
+                      </a:solidFill>
+                      <a:prstDash val="solid"/>
+                      <a:round/>
+                      <a:headEnd type="none" w="med" len="med"/>
+                      <a:tailEnd type="none" w="med" len="med"/>
+                    </a:lnB>
+                    <a:solidFill>
+                      <a:srgbClr val="FFFFFF"/>
+                    </a:solidFill>
+                  </a:tcPr>
+                </a:tc>
+              </a:tr>
+              <a:tr h="310896">
+                <a:tc>
+                  <a:txBody>
+                    <a:bodyPr/>
+                    <a:lstStyle/>
+                    <a:p>
+                      <a:pPr algn="l" indent="0" marL="0">
+                        <a:buNone/>
+                      </a:pPr>
+                      <a:r>
+                        <a:rPr lang="en-US" sz="800" dirty="0">
+                          <a:solidFill>
+                            <a:srgbClr val="3A3A3A"/>
+                          </a:solidFill>
+                          <a:latin typeface="Arial" pitchFamily="34" charset="0"/>
+                          <a:ea typeface="Arial" pitchFamily="34" charset="-122"/>
+                          <a:cs typeface="Arial" pitchFamily="34" charset="-120"/>
+                        </a:rPr>
+                        <a:t>Date sits inside a valid policy — no warning</a:t>
+                      </a:r>
+                      <a:endParaRPr lang="en-US" sz="800" dirty="0">
+                        <a:latin typeface="Arial" charset="0"/>
+                        <a:ea typeface="Arial" charset="0"/>
+                        <a:cs typeface="Arial" charset="0"/>
+                      </a:endParaRPr>
+                    </a:p>
+                  </a:txBody>
+                  <a:tcPr marL="91440" marR="91440" marT="45720" marB="45720" anchor="ctr">
+                    <a:lnL w="6350" cap="flat" cmpd="sng" algn="ctr">
+                      <a:solidFill>
+                        <a:srgbClr val="E4E4E0"/>
+                      </a:solidFill>
+                      <a:prstDash val="solid"/>
+                      <a:round/>
+                      <a:headEnd type="none" w="med" len="med"/>
+                      <a:tailEnd type="none" w="med" len="med"/>
+                    </a:lnL>
+                    <a:lnR w="6350" cap="flat" cmpd="sng" algn="ctr">
+                      <a:solidFill>
+                        <a:srgbClr val="E4E4E0"/>
+                      </a:solidFill>
+                      <a:prstDash val="solid"/>
+                      <a:round/>
+                      <a:headEnd type="none" w="med" len="med"/>
+                      <a:tailEnd type="none" w="med" len="med"/>
+                    </a:lnR>
+                    <a:lnT w="6350" cap="flat" cmpd="sng" algn="ctr">
+                      <a:solidFill>
+                        <a:srgbClr val="E4E4E0"/>
+                      </a:solidFill>
+                      <a:prstDash val="solid"/>
+                      <a:round/>
+                      <a:headEnd type="none" w="med" len="med"/>
+                      <a:tailEnd type="none" w="med" len="med"/>
+                    </a:lnT>
+                    <a:lnB w="6350" cap="flat" cmpd="sng" algn="ctr">
+                      <a:solidFill>
+                        <a:srgbClr val="E4E4E0"/>
+                      </a:solidFill>
+                      <a:prstDash val="solid"/>
+                      <a:round/>
+                      <a:headEnd type="none" w="med" len="med"/>
+                      <a:tailEnd type="none" w="med" len="med"/>
+                    </a:lnB>
+                    <a:solidFill>
+                      <a:srgbClr val="FFFFFF"/>
+                    </a:solidFill>
+                  </a:tcPr>
+                </a:tc>
+                <a:tc>
+                  <a:txBody>
+                    <a:bodyPr/>
+                    <a:lstStyle/>
+                    <a:p>
+                      <a:pPr algn="l" indent="0" marL="0">
+                        <a:buNone/>
+                      </a:pPr>
+                      <a:r>
+                        <a:rPr lang="en-US" sz="800" dirty="0">
+                          <a:solidFill>
+                            <a:srgbClr val="3A3A3A"/>
+                          </a:solidFill>
+                          <a:latin typeface="Arial" pitchFamily="34" charset="0"/>
+                          <a:ea typeface="Arial" pitchFamily="34" charset="-122"/>
+                          <a:cs typeface="Arial" pitchFamily="34" charset="-120"/>
+                        </a:rPr>
+                        <a:t>quick manual check</a:t>
+                      </a:r>
+                      <a:endParaRPr lang="en-US" sz="800" dirty="0">
+                        <a:latin typeface="Arial" charset="0"/>
+                        <a:ea typeface="Arial" charset="0"/>
+                        <a:cs typeface="Arial" charset="0"/>
+                      </a:endParaRPr>
+                    </a:p>
+                  </a:txBody>
+                  <a:tcPr marL="91440" marR="91440" marT="45720" marB="45720" anchor="ctr">
+                    <a:lnL w="6350" cap="flat" cmpd="sng" algn="ctr">
+                      <a:solidFill>
+                        <a:srgbClr val="E4E4E0"/>
+                      </a:solidFill>
+                      <a:prstDash val="solid"/>
+                      <a:round/>
+                      <a:headEnd type="none" w="med" len="med"/>
+                      <a:tailEnd type="none" w="med" len="med"/>
+                    </a:lnL>
+                    <a:lnR w="6350" cap="flat" cmpd="sng" algn="ctr">
+                      <a:solidFill>
+                        <a:srgbClr val="E4E4E0"/>
+                      </a:solidFill>
+                      <a:prstDash val="solid"/>
+                      <a:round/>
+                      <a:headEnd type="none" w="med" len="med"/>
+                      <a:tailEnd type="none" w="med" len="med"/>
+                    </a:lnR>
+                    <a:lnT w="6350" cap="flat" cmpd="sng" algn="ctr">
+                      <a:solidFill>
+                        <a:srgbClr val="E4E4E0"/>
+                      </a:solidFill>
+                      <a:prstDash val="solid"/>
+                      <a:round/>
+                      <a:headEnd type="none" w="med" len="med"/>
+                      <a:tailEnd type="none" w="med" len="med"/>
+                    </a:lnT>
+                    <a:lnB w="6350" cap="flat" cmpd="sng" algn="ctr">
+                      <a:solidFill>
+                        <a:srgbClr val="E4E4E0"/>
+                      </a:solidFill>
+                      <a:prstDash val="solid"/>
+                      <a:round/>
+                      <a:headEnd type="none" w="med" len="med"/>
+                      <a:tailEnd type="none" w="med" len="med"/>
+                    </a:lnB>
+                    <a:solidFill>
+                      <a:srgbClr val="FFFFFF"/>
+                    </a:solidFill>
+                  </a:tcPr>
+                </a:tc>
+                <a:tc>
+                  <a:txBody>
+                    <a:bodyPr/>
+                    <a:lstStyle/>
+                    <a:p>
+                      <a:pPr algn="l" indent="0" marL="0">
+                        <a:buNone/>
+                      </a:pPr>
+                      <a:r>
+                        <a:rPr lang="en-US" sz="800" dirty="0">
+                          <a:solidFill>
+                            <a:srgbClr val="3A3A3A"/>
+                          </a:solidFill>
+                          <a:latin typeface="Arial" pitchFamily="34" charset="0"/>
+                          <a:ea typeface="Arial" pitchFamily="34" charset="-122"/>
+                          <a:cs typeface="Arial" pitchFamily="34" charset="-120"/>
+                        </a:rPr>
+                        <a:t>rules, no model call</a:t>
+                      </a:r>
+                      <a:endParaRPr lang="en-US" sz="800" dirty="0">
+                        <a:latin typeface="Arial" charset="0"/>
+                        <a:ea typeface="Arial" charset="0"/>
+                        <a:cs typeface="Arial" charset="0"/>
+                      </a:endParaRPr>
+                    </a:p>
+                  </a:txBody>
+                  <a:tcPr marL="91440" marR="91440" marT="45720" marB="45720" anchor="ctr">
+                    <a:lnL w="6350" cap="flat" cmpd="sng" algn="ctr">
+                      <a:solidFill>
+                        <a:srgbClr val="E4E4E0"/>
+                      </a:solidFill>
+                      <a:prstDash val="solid"/>
+                      <a:round/>
+                      <a:headEnd type="none" w="med" len="med"/>
+                      <a:tailEnd type="none" w="med" len="med"/>
+                    </a:lnL>
+                    <a:lnR w="6350" cap="flat" cmpd="sng" algn="ctr">
+                      <a:solidFill>
+                        <a:srgbClr val="E4E4E0"/>
+                      </a:solidFill>
+                      <a:prstDash val="solid"/>
+                      <a:round/>
+                      <a:headEnd type="none" w="med" len="med"/>
+                      <a:tailEnd type="none" w="med" len="med"/>
+                    </a:lnR>
+                    <a:lnT w="6350" cap="flat" cmpd="sng" algn="ctr">
+                      <a:solidFill>
+                        <a:srgbClr val="E4E4E0"/>
+                      </a:solidFill>
+                      <a:prstDash val="solid"/>
+                      <a:round/>
+                      <a:headEnd type="none" w="med" len="med"/>
+                      <a:tailEnd type="none" w="med" len="med"/>
+                    </a:lnT>
+                    <a:lnB w="6350" cap="flat" cmpd="sng" algn="ctr">
+                      <a:solidFill>
+                        <a:srgbClr val="E4E4E0"/>
+                      </a:solidFill>
+                      <a:prstDash val="solid"/>
+                      <a:round/>
+                      <a:headEnd type="none" w="med" len="med"/>
+                      <a:tailEnd type="none" w="med" len="med"/>
+                    </a:lnB>
+                    <a:solidFill>
+                      <a:srgbClr val="FFFFFF"/>
+                    </a:solidFill>
+                  </a:tcPr>
+                </a:tc>
+                <a:tc>
+                  <a:txBody>
+                    <a:bodyPr/>
+                    <a:lstStyle/>
+                    <a:p>
+                      <a:pPr algn="l" indent="0" marL="0">
+                        <a:buNone/>
+                      </a:pPr>
+                      <a:r>
+                        <a:rPr lang="en-US" sz="800" dirty="0">
+                          <a:solidFill>
+                            <a:srgbClr val="3A3A3A"/>
+                          </a:solidFill>
+                          <a:latin typeface="Arial" pitchFamily="34" charset="0"/>
+                          <a:ea typeface="Arial" pitchFamily="34" charset="-122"/>
+                          <a:cs typeface="Arial" pitchFamily="34" charset="-120"/>
+                        </a:rPr>
+                        <a:t>system</a:t>
+                      </a:r>
+                      <a:endParaRPr lang="en-US" sz="800" dirty="0">
+                        <a:latin typeface="Arial" charset="0"/>
+                        <a:ea typeface="Arial" charset="0"/>
+                        <a:cs typeface="Arial" charset="0"/>
+                      </a:endParaRPr>
+                    </a:p>
+                  </a:txBody>
+                  <a:tcPr marL="91440" marR="91440" marT="45720" marB="45720" anchor="ctr">
+                    <a:lnL w="6350" cap="flat" cmpd="sng" algn="ctr">
+                      <a:solidFill>
+                        <a:srgbClr val="E4E4E0"/>
+                      </a:solidFill>
+                      <a:prstDash val="solid"/>
+                      <a:round/>
+                      <a:headEnd type="none" w="med" len="med"/>
+                      <a:tailEnd type="none" w="med" len="med"/>
+                    </a:lnL>
+                    <a:lnR w="6350" cap="flat" cmpd="sng" algn="ctr">
+                      <a:solidFill>
+                        <a:srgbClr val="E4E4E0"/>
+                      </a:solidFill>
+                      <a:prstDash val="solid"/>
+                      <a:round/>
+                      <a:headEnd type="none" w="med" len="med"/>
+                      <a:tailEnd type="none" w="med" len="med"/>
+                    </a:lnR>
+                    <a:lnT w="6350" cap="flat" cmpd="sng" algn="ctr">
+                      <a:solidFill>
+                        <a:srgbClr val="E4E4E0"/>
+                      </a:solidFill>
+                      <a:prstDash val="solid"/>
+                      <a:round/>
+                      <a:headEnd type="none" w="med" len="med"/>
+                      <a:tailEnd type="none" w="med" len="med"/>
+                    </a:lnT>
+                    <a:lnB w="6350" cap="flat" cmpd="sng" algn="ctr">
+                      <a:solidFill>
+                        <a:srgbClr val="E4E4E0"/>
+                      </a:solidFill>
+                      <a:prstDash val="solid"/>
+                      <a:round/>
+                      <a:headEnd type="none" w="med" len="med"/>
+                      <a:tailEnd type="none" w="med" len="med"/>
+                    </a:lnB>
+                    <a:solidFill>
+                      <a:srgbClr val="FFFFFF"/>
+                    </a:solidFill>
+                  </a:tcPr>
+                </a:tc>
+              </a:tr>
+              <a:tr h="310896">
+                <a:tc>
+                  <a:txBody>
+                    <a:bodyPr/>
+                    <a:lstStyle/>
+                    <a:p>
+                      <a:pPr algn="l" indent="0" marL="0">
+                        <a:buNone/>
+                      </a:pPr>
+                      <a:r>
+                        <a:rPr lang="en-US" sz="800" dirty="0">
+                          <a:solidFill>
+                            <a:srgbClr val="3A3A3A"/>
+                          </a:solidFill>
+                          <a:latin typeface="Arial" pitchFamily="34" charset="0"/>
+                          <a:ea typeface="Arial" pitchFamily="34" charset="-122"/>
+                          <a:cs typeface="Arial" pitchFamily="34" charset="-120"/>
+                        </a:rPr>
+                        <a:t>A valid follow-up policy exists</a:t>
+                      </a:r>
+                      <a:endParaRPr lang="en-US" sz="800" dirty="0">
+                        <a:latin typeface="Arial" charset="0"/>
+                        <a:ea typeface="Arial" charset="0"/>
+                        <a:cs typeface="Arial" charset="0"/>
+                      </a:endParaRPr>
+                    </a:p>
+                  </a:txBody>
+                  <a:tcPr marL="91440" marR="91440" marT="45720" marB="45720" anchor="ctr">
+                    <a:lnL w="6350" cap="flat" cmpd="sng" algn="ctr">
+                      <a:solidFill>
+                        <a:srgbClr val="E4E4E0"/>
+                      </a:solidFill>
+                      <a:prstDash val="solid"/>
+                      <a:round/>
+                      <a:headEnd type="none" w="med" len="med"/>
+                      <a:tailEnd type="none" w="med" len="med"/>
+                    </a:lnL>
+                    <a:lnR w="6350" cap="flat" cmpd="sng" algn="ctr">
+                      <a:solidFill>
+                        <a:srgbClr val="E4E4E0"/>
+                      </a:solidFill>
+                      <a:prstDash val="solid"/>
+                      <a:round/>
+                      <a:headEnd type="none" w="med" len="med"/>
+                      <a:tailEnd type="none" w="med" len="med"/>
+                    </a:lnR>
+                    <a:lnT w="6350" cap="flat" cmpd="sng" algn="ctr">
+                      <a:solidFill>
+                        <a:srgbClr val="E4E4E0"/>
+                      </a:solidFill>
+                      <a:prstDash val="solid"/>
+                      <a:round/>
+                      <a:headEnd type="none" w="med" len="med"/>
+                      <a:tailEnd type="none" w="med" len="med"/>
+                    </a:lnT>
+                    <a:lnB w="6350" cap="flat" cmpd="sng" algn="ctr">
+                      <a:solidFill>
+                        <a:srgbClr val="E4E4E0"/>
+                      </a:solidFill>
+                      <a:prstDash val="solid"/>
+                      <a:round/>
+                      <a:headEnd type="none" w="med" len="med"/>
+                      <a:tailEnd type="none" w="med" len="med"/>
+                    </a:lnB>
+                    <a:solidFill>
+                      <a:srgbClr val="FFFFFF"/>
+                    </a:solidFill>
+                  </a:tcPr>
+                </a:tc>
+                <a:tc>
+                  <a:txBody>
+                    <a:bodyPr/>
+                    <a:lstStyle/>
+                    <a:p>
+                      <a:pPr algn="l" indent="0" marL="0">
+                        <a:buNone/>
+                      </a:pPr>
+                      <a:r>
+                        <a:rPr lang="en-US" sz="800" dirty="0">
+                          <a:solidFill>
+                            <a:srgbClr val="3A3A3A"/>
+                          </a:solidFill>
+                          <a:latin typeface="Arial" pitchFamily="34" charset="0"/>
+                          <a:ea typeface="Arial" pitchFamily="34" charset="-122"/>
+                          <a:cs typeface="Arial" pitchFamily="34" charset="-120"/>
+                        </a:rPr>
+                        <a:t>find it, reattach</a:t>
+                      </a:r>
+                      <a:endParaRPr lang="en-US" sz="800" dirty="0">
+                        <a:latin typeface="Arial" charset="0"/>
+                        <a:ea typeface="Arial" charset="0"/>
+                        <a:cs typeface="Arial" charset="0"/>
+                      </a:endParaRPr>
+                    </a:p>
+                  </a:txBody>
+                  <a:tcPr marL="91440" marR="91440" marT="45720" marB="45720" anchor="ctr">
+                    <a:lnL w="6350" cap="flat" cmpd="sng" algn="ctr">
+                      <a:solidFill>
+                        <a:srgbClr val="E4E4E0"/>
+                      </a:solidFill>
+                      <a:prstDash val="solid"/>
+                      <a:round/>
+                      <a:headEnd type="none" w="med" len="med"/>
+                      <a:tailEnd type="none" w="med" len="med"/>
+                    </a:lnL>
+                    <a:lnR w="6350" cap="flat" cmpd="sng" algn="ctr">
+                      <a:solidFill>
+                        <a:srgbClr val="E4E4E0"/>
+                      </a:solidFill>
+                      <a:prstDash val="solid"/>
+                      <a:round/>
+                      <a:headEnd type="none" w="med" len="med"/>
+                      <a:tailEnd type="none" w="med" len="med"/>
+                    </a:lnR>
+                    <a:lnT w="6350" cap="flat" cmpd="sng" algn="ctr">
+                      <a:solidFill>
+                        <a:srgbClr val="E4E4E0"/>
+                      </a:solidFill>
+                      <a:prstDash val="solid"/>
+                      <a:round/>
+                      <a:headEnd type="none" w="med" len="med"/>
+                      <a:tailEnd type="none" w="med" len="med"/>
+                    </a:lnT>
+                    <a:lnB w="6350" cap="flat" cmpd="sng" algn="ctr">
+                      <a:solidFill>
+                        <a:srgbClr val="E4E4E0"/>
+                      </a:solidFill>
+                      <a:prstDash val="solid"/>
+                      <a:round/>
+                      <a:headEnd type="none" w="med" len="med"/>
+                      <a:tailEnd type="none" w="med" len="med"/>
+                    </a:lnB>
+                    <a:solidFill>
+                      <a:srgbClr val="FFFFFF"/>
+                    </a:solidFill>
+                  </a:tcPr>
+                </a:tc>
+                <a:tc>
+                  <a:txBody>
+                    <a:bodyPr/>
+                    <a:lstStyle/>
+                    <a:p>
+                      <a:pPr algn="l" indent="0" marL="0">
+                        <a:buNone/>
+                      </a:pPr>
+                      <a:r>
+                        <a:rPr lang="en-US" sz="800" dirty="0">
+                          <a:solidFill>
+                            <a:srgbClr val="3A3A3A"/>
+                          </a:solidFill>
+                          <a:latin typeface="Arial" pitchFamily="34" charset="0"/>
+                          <a:ea typeface="Arial" pitchFamily="34" charset="-122"/>
+                          <a:cs typeface="Arial" pitchFamily="34" charset="-120"/>
+                        </a:rPr>
+                        <a:t>registry lookup, reattach drafted</a:t>
+                      </a:r>
+                      <a:endParaRPr lang="en-US" sz="800" dirty="0">
+                        <a:latin typeface="Arial" charset="0"/>
+                        <a:ea typeface="Arial" charset="0"/>
+                        <a:cs typeface="Arial" charset="0"/>
+                      </a:endParaRPr>
+                    </a:p>
+                  </a:txBody>
+                  <a:tcPr marL="91440" marR="91440" marT="45720" marB="45720" anchor="ctr">
+                    <a:lnL w="6350" cap="flat" cmpd="sng" algn="ctr">
+                      <a:solidFill>
+                        <a:srgbClr val="E4E4E0"/>
+                      </a:solidFill>
+                      <a:prstDash val="solid"/>
+                      <a:round/>
+                      <a:headEnd type="none" w="med" len="med"/>
+                      <a:tailEnd type="none" w="med" len="med"/>
+                    </a:lnL>
+                    <a:lnR w="6350" cap="flat" cmpd="sng" algn="ctr">
+                      <a:solidFill>
+                        <a:srgbClr val="E4E4E0"/>
+                      </a:solidFill>
+                      <a:prstDash val="solid"/>
+                      <a:round/>
+                      <a:headEnd type="none" w="med" len="med"/>
+                      <a:tailEnd type="none" w="med" len="med"/>
+                    </a:lnR>
+                    <a:lnT w="6350" cap="flat" cmpd="sng" algn="ctr">
+                      <a:solidFill>
+                        <a:srgbClr val="E4E4E0"/>
+                      </a:solidFill>
+                      <a:prstDash val="solid"/>
+                      <a:round/>
+                      <a:headEnd type="none" w="med" len="med"/>
+                      <a:tailEnd type="none" w="med" len="med"/>
+                    </a:lnT>
+                    <a:lnB w="6350" cap="flat" cmpd="sng" algn="ctr">
+                      <a:solidFill>
+                        <a:srgbClr val="E4E4E0"/>
+                      </a:solidFill>
+                      <a:prstDash val="solid"/>
+                      <a:round/>
+                      <a:headEnd type="none" w="med" len="med"/>
+                      <a:tailEnd type="none" w="med" len="med"/>
+                    </a:lnB>
+                    <a:solidFill>
+                      <a:srgbClr val="FFFFFF"/>
+                    </a:solidFill>
+                  </a:tcPr>
+                </a:tc>
+                <a:tc>
+                  <a:txBody>
+                    <a:bodyPr/>
+                    <a:lstStyle/>
+                    <a:p>
+                      <a:pPr algn="l" indent="0" marL="0">
+                        <a:buNone/>
+                      </a:pPr>
+                      <a:r>
+                        <a:rPr lang="en-US" sz="800" dirty="0">
+                          <a:solidFill>
+                            <a:srgbClr val="3A3A3A"/>
+                          </a:solidFill>
+                          <a:latin typeface="Arial" pitchFamily="34" charset="0"/>
+                          <a:ea typeface="Arial" pitchFamily="34" charset="-122"/>
+                          <a:cs typeface="Arial" pitchFamily="34" charset="-120"/>
+                        </a:rPr>
+                        <a:t>handler</a:t>
+                      </a:r>
+                      <a:endParaRPr lang="en-US" sz="800" dirty="0">
+                        <a:latin typeface="Arial" charset="0"/>
+                        <a:ea typeface="Arial" charset="0"/>
+                        <a:cs typeface="Arial" charset="0"/>
+                      </a:endParaRPr>
+                    </a:p>
+                  </a:txBody>
+                  <a:tcPr marL="91440" marR="91440" marT="45720" marB="45720" anchor="ctr">
+                    <a:lnL w="6350" cap="flat" cmpd="sng" algn="ctr">
+                      <a:solidFill>
+                        <a:srgbClr val="E4E4E0"/>
+                      </a:solidFill>
+                      <a:prstDash val="solid"/>
+                      <a:round/>
+                      <a:headEnd type="none" w="med" len="med"/>
+                      <a:tailEnd type="none" w="med" len="med"/>
+                    </a:lnL>
+                    <a:lnR w="6350" cap="flat" cmpd="sng" algn="ctr">
+                      <a:solidFill>
+                        <a:srgbClr val="E4E4E0"/>
+                      </a:solidFill>
+                      <a:prstDash val="solid"/>
+                      <a:round/>
+                      <a:headEnd type="none" w="med" len="med"/>
+                      <a:tailEnd type="none" w="med" len="med"/>
+                    </a:lnR>
+                    <a:lnT w="6350" cap="flat" cmpd="sng" algn="ctr">
+                      <a:solidFill>
+                        <a:srgbClr val="E4E4E0"/>
+                      </a:solidFill>
+                      <a:prstDash val="solid"/>
+                      <a:round/>
+                      <a:headEnd type="none" w="med" len="med"/>
+                      <a:tailEnd type="none" w="med" len="med"/>
+                    </a:lnT>
+                    <a:lnB w="6350" cap="flat" cmpd="sng" algn="ctr">
+                      <a:solidFill>
+                        <a:srgbClr val="E4E4E0"/>
+                      </a:solidFill>
+                      <a:prstDash val="solid"/>
+                      <a:round/>
+                      <a:headEnd type="none" w="med" len="med"/>
+                      <a:tailEnd type="none" w="med" len="med"/>
+                    </a:lnB>
+                    <a:solidFill>
+                      <a:srgbClr val="FFFFFF"/>
+                    </a:solidFill>
+                  </a:tcPr>
+                </a:tc>
+              </a:tr>
+              <a:tr h="310896">
+                <a:tc>
+                  <a:txBody>
+                    <a:bodyPr/>
+                    <a:lstStyle/>
+                    <a:p>
+                      <a:pPr algn="l" indent="0" marL="0">
+                        <a:buNone/>
+                      </a:pPr>
+                      <a:r>
+                        <a:rPr lang="en-US" sz="800" dirty="0">
+                          <a:solidFill>
+                            <a:srgbClr val="3A3A3A"/>
+                          </a:solidFill>
+                          <a:latin typeface="Arial" pitchFamily="34" charset="0"/>
+                          <a:ea typeface="Arial" pitchFamily="34" charset="-122"/>
+                          <a:cs typeface="Arial" pitchFamily="34" charset="-120"/>
+                        </a:rPr>
+                        <a:t>Self-employed, voluntary cover</a:t>
+                      </a:r>
+                      <a:endParaRPr lang="en-US" sz="800" dirty="0">
+                        <a:latin typeface="Arial" charset="0"/>
+                        <a:ea typeface="Arial" charset="0"/>
+                        <a:cs typeface="Arial" charset="0"/>
+                      </a:endParaRPr>
+                    </a:p>
+                  </a:txBody>
+                  <a:tcPr marL="91440" marR="91440" marT="45720" marB="45720" anchor="ctr">
+                    <a:lnL w="6350" cap="flat" cmpd="sng" algn="ctr">
+                      <a:solidFill>
+                        <a:srgbClr val="E4E4E0"/>
+                      </a:solidFill>
+                      <a:prstDash val="solid"/>
+                      <a:round/>
+                      <a:headEnd type="none" w="med" len="med"/>
+                      <a:tailEnd type="none" w="med" len="med"/>
+                    </a:lnL>
+                    <a:lnR w="6350" cap="flat" cmpd="sng" algn="ctr">
+                      <a:solidFill>
+                        <a:srgbClr val="E4E4E0"/>
+                      </a:solidFill>
+                      <a:prstDash val="solid"/>
+                      <a:round/>
+                      <a:headEnd type="none" w="med" len="med"/>
+                      <a:tailEnd type="none" w="med" len="med"/>
+                    </a:lnR>
+                    <a:lnT w="6350" cap="flat" cmpd="sng" algn="ctr">
+                      <a:solidFill>
+                        <a:srgbClr val="E4E4E0"/>
+                      </a:solidFill>
+                      <a:prstDash val="solid"/>
+                      <a:round/>
+                      <a:headEnd type="none" w="med" len="med"/>
+                      <a:tailEnd type="none" w="med" len="med"/>
+                    </a:lnT>
+                    <a:lnB w="6350" cap="flat" cmpd="sng" algn="ctr">
+                      <a:solidFill>
+                        <a:srgbClr val="E4E4E0"/>
+                      </a:solidFill>
+                      <a:prstDash val="solid"/>
+                      <a:round/>
+                      <a:headEnd type="none" w="med" len="med"/>
+                      <a:tailEnd type="none" w="med" len="med"/>
+                    </a:lnB>
+                    <a:solidFill>
+                      <a:srgbClr val="FFFFFF"/>
+                    </a:solidFill>
+                  </a:tcPr>
+                </a:tc>
+                <a:tc>
+                  <a:txBody>
+                    <a:bodyPr/>
+                    <a:lstStyle/>
+                    <a:p>
+                      <a:pPr algn="l" indent="0" marL="0">
+                        <a:buNone/>
+                      </a:pPr>
+                      <a:r>
+                        <a:rPr lang="en-US" sz="800" dirty="0">
+                          <a:solidFill>
+                            <a:srgbClr val="3A3A3A"/>
+                          </a:solidFill>
+                          <a:latin typeface="Arial" pitchFamily="34" charset="0"/>
+                          <a:ea typeface="Arial" pitchFamily="34" charset="-122"/>
+                          <a:cs typeface="Arial" pitchFamily="34" charset="-120"/>
+                        </a:rPr>
+                        <a:t>manual self-check</a:t>
+                      </a:r>
+                      <a:endParaRPr lang="en-US" sz="800" dirty="0">
+                        <a:latin typeface="Arial" charset="0"/>
+                        <a:ea typeface="Arial" charset="0"/>
+                        <a:cs typeface="Arial" charset="0"/>
+                      </a:endParaRPr>
+                    </a:p>
+                  </a:txBody>
+                  <a:tcPr marL="91440" marR="91440" marT="45720" marB="45720" anchor="ctr">
+                    <a:lnL w="6350" cap="flat" cmpd="sng" algn="ctr">
+                      <a:solidFill>
+                        <a:srgbClr val="E4E4E0"/>
+                      </a:solidFill>
+                      <a:prstDash val="solid"/>
+                      <a:round/>
+                      <a:headEnd type="none" w="med" len="med"/>
+                      <a:tailEnd type="none" w="med" len="med"/>
+                    </a:lnL>
+                    <a:lnR w="6350" cap="flat" cmpd="sng" algn="ctr">
+                      <a:solidFill>
+                        <a:srgbClr val="E4E4E0"/>
+                      </a:solidFill>
+                      <a:prstDash val="solid"/>
+                      <a:round/>
+                      <a:headEnd type="none" w="med" len="med"/>
+                      <a:tailEnd type="none" w="med" len="med"/>
+                    </a:lnR>
+                    <a:lnT w="6350" cap="flat" cmpd="sng" algn="ctr">
+                      <a:solidFill>
+                        <a:srgbClr val="E4E4E0"/>
+                      </a:solidFill>
+                      <a:prstDash val="solid"/>
+                      <a:round/>
+                      <a:headEnd type="none" w="med" len="med"/>
+                      <a:tailEnd type="none" w="med" len="med"/>
+                    </a:lnT>
+                    <a:lnB w="6350" cap="flat" cmpd="sng" algn="ctr">
+                      <a:solidFill>
+                        <a:srgbClr val="E4E4E0"/>
+                      </a:solidFill>
+                      <a:prstDash val="solid"/>
+                      <a:round/>
+                      <a:headEnd type="none" w="med" len="med"/>
+                      <a:tailEnd type="none" w="med" len="med"/>
+                    </a:lnB>
+                    <a:solidFill>
+                      <a:srgbClr val="FFFFFF"/>
+                    </a:solidFill>
+                  </a:tcPr>
+                </a:tc>
+                <a:tc>
+                  <a:txBody>
+                    <a:bodyPr/>
+                    <a:lstStyle/>
+                    <a:p>
+                      <a:pPr algn="l" indent="0" marL="0">
+                        <a:buNone/>
+                      </a:pPr>
+                      <a:r>
+                        <a:rPr lang="en-US" sz="800" dirty="0">
+                          <a:solidFill>
+                            <a:srgbClr val="3A3A3A"/>
+                          </a:solidFill>
+                          <a:latin typeface="Arial" pitchFamily="34" charset="0"/>
+                          <a:ea typeface="Arial" pitchFamily="34" charset="-122"/>
+                          <a:cs typeface="Arial" pitchFamily="34" charset="-120"/>
+                        </a:rPr>
+                        <a:t>registry lookup, rules</a:t>
+                      </a:r>
+                      <a:endParaRPr lang="en-US" sz="800" dirty="0">
+                        <a:latin typeface="Arial" charset="0"/>
+                        <a:ea typeface="Arial" charset="0"/>
+                        <a:cs typeface="Arial" charset="0"/>
+                      </a:endParaRPr>
+                    </a:p>
+                  </a:txBody>
+                  <a:tcPr marL="91440" marR="91440" marT="45720" marB="45720" anchor="ctr">
+                    <a:lnL w="6350" cap="flat" cmpd="sng" algn="ctr">
+                      <a:solidFill>
+                        <a:srgbClr val="E4E4E0"/>
+                      </a:solidFill>
+                      <a:prstDash val="solid"/>
+                      <a:round/>
+                      <a:headEnd type="none" w="med" len="med"/>
+                      <a:tailEnd type="none" w="med" len="med"/>
+                    </a:lnL>
+                    <a:lnR w="6350" cap="flat" cmpd="sng" algn="ctr">
+                      <a:solidFill>
+                        <a:srgbClr val="E4E4E0"/>
+                      </a:solidFill>
+                      <a:prstDash val="solid"/>
+                      <a:round/>
+                      <a:headEnd type="none" w="med" len="med"/>
+                      <a:tailEnd type="none" w="med" len="med"/>
+                    </a:lnR>
+                    <a:lnT w="6350" cap="flat" cmpd="sng" algn="ctr">
+                      <a:solidFill>
+                        <a:srgbClr val="E4E4E0"/>
+                      </a:solidFill>
+                      <a:prstDash val="solid"/>
+                      <a:round/>
+                      <a:headEnd type="none" w="med" len="med"/>
+                      <a:tailEnd type="none" w="med" len="med"/>
+                    </a:lnT>
+                    <a:lnB w="6350" cap="flat" cmpd="sng" algn="ctr">
+                      <a:solidFill>
+                        <a:srgbClr val="E4E4E0"/>
+                      </a:solidFill>
+                      <a:prstDash val="solid"/>
+                      <a:round/>
+                      <a:headEnd type="none" w="med" len="med"/>
+                      <a:tailEnd type="none" w="med" len="med"/>
+                    </a:lnB>
+                    <a:solidFill>
+                      <a:srgbClr val="FFFFFF"/>
+                    </a:solidFill>
+                  </a:tcPr>
+                </a:tc>
+                <a:tc>
+                  <a:txBody>
+                    <a:bodyPr/>
+                    <a:lstStyle/>
+                    <a:p>
+                      <a:pPr algn="l" indent="0" marL="0">
+                        <a:buNone/>
+                      </a:pPr>
+                      <a:r>
+                        <a:rPr lang="en-US" sz="800" dirty="0">
+                          <a:solidFill>
+                            <a:srgbClr val="3A3A3A"/>
+                          </a:solidFill>
+                          <a:latin typeface="Arial" pitchFamily="34" charset="0"/>
+                          <a:ea typeface="Arial" pitchFamily="34" charset="-122"/>
+                          <a:cs typeface="Arial" pitchFamily="34" charset="-120"/>
+                        </a:rPr>
+                        <a:t>handler</a:t>
+                      </a:r>
+                      <a:endParaRPr lang="en-US" sz="800" dirty="0">
+                        <a:latin typeface="Arial" charset="0"/>
+                        <a:ea typeface="Arial" charset="0"/>
+                        <a:cs typeface="Arial" charset="0"/>
+                      </a:endParaRPr>
+                    </a:p>
+                  </a:txBody>
+                  <a:tcPr marL="91440" marR="91440" marT="45720" marB="45720" anchor="ctr">
+                    <a:lnL w="6350" cap="flat" cmpd="sng" algn="ctr">
+                      <a:solidFill>
+                        <a:srgbClr val="E4E4E0"/>
+                      </a:solidFill>
+                      <a:prstDash val="solid"/>
+                      <a:round/>
+                      <a:headEnd type="none" w="med" len="med"/>
+                      <a:tailEnd type="none" w="med" len="med"/>
+                    </a:lnL>
+                    <a:lnR w="6350" cap="flat" cmpd="sng" algn="ctr">
+                      <a:solidFill>
+                        <a:srgbClr val="E4E4E0"/>
+                      </a:solidFill>
+                      <a:prstDash val="solid"/>
+                      <a:round/>
+                      <a:headEnd type="none" w="med" len="med"/>
+                      <a:tailEnd type="none" w="med" len="med"/>
+                    </a:lnR>
+                    <a:lnT w="6350" cap="flat" cmpd="sng" algn="ctr">
+                      <a:solidFill>
+                        <a:srgbClr val="E4E4E0"/>
+                      </a:solidFill>
+                      <a:prstDash val="solid"/>
+                      <a:round/>
+                      <a:headEnd type="none" w="med" len="med"/>
+                      <a:tailEnd type="none" w="med" len="med"/>
+                    </a:lnT>
+                    <a:lnB w="6350" cap="flat" cmpd="sng" algn="ctr">
+                      <a:solidFill>
+                        <a:srgbClr val="E4E4E0"/>
+                      </a:solidFill>
+                      <a:prstDash val="solid"/>
+                      <a:round/>
+                      <a:headEnd type="none" w="med" len="med"/>
+                      <a:tailEnd type="none" w="med" len="med"/>
+                    </a:lnB>
+                    <a:solidFill>
+                      <a:srgbClr val="FFFFFF"/>
+                    </a:solidFill>
+                  </a:tcPr>
+                </a:tc>
+              </a:tr>
+              <a:tr h="310896">
+                <a:tc>
+                  <a:txBody>
+                    <a:bodyPr/>
+                    <a:lstStyle/>
+                    <a:p>
+                      <a:pPr algn="l" indent="0" marL="0">
+                        <a:buNone/>
+                      </a:pPr>
+                      <a:r>
+                        <a:rPr lang="en-US" sz="800" dirty="0">
+                          <a:solidFill>
+                            <a:srgbClr val="3A3A3A"/>
+                          </a:solidFill>
+                          <a:latin typeface="Arial" pitchFamily="34" charset="0"/>
+                          <a:ea typeface="Arial" pitchFamily="34" charset="-122"/>
+                          <a:cs typeface="Arial" pitchFamily="34" charset="-120"/>
+                        </a:rPr>
+                        <a:t>Group or branch policy not surfaced</a:t>
+                      </a:r>
+                      <a:endParaRPr lang="en-US" sz="800" dirty="0">
+                        <a:latin typeface="Arial" charset="0"/>
+                        <a:ea typeface="Arial" charset="0"/>
+                        <a:cs typeface="Arial" charset="0"/>
+                      </a:endParaRPr>
+                    </a:p>
+                  </a:txBody>
+                  <a:tcPr marL="91440" marR="91440" marT="45720" marB="45720" anchor="ctr">
+                    <a:lnL w="6350" cap="flat" cmpd="sng" algn="ctr">
+                      <a:solidFill>
+                        <a:srgbClr val="E4E4E0"/>
+                      </a:solidFill>
+                      <a:prstDash val="solid"/>
+                      <a:round/>
+                      <a:headEnd type="none" w="med" len="med"/>
+                      <a:tailEnd type="none" w="med" len="med"/>
+                    </a:lnL>
+                    <a:lnR w="6350" cap="flat" cmpd="sng" algn="ctr">
+                      <a:solidFill>
+                        <a:srgbClr val="E4E4E0"/>
+                      </a:solidFill>
+                      <a:prstDash val="solid"/>
+                      <a:round/>
+                      <a:headEnd type="none" w="med" len="med"/>
+                      <a:tailEnd type="none" w="med" len="med"/>
+                    </a:lnR>
+                    <a:lnT w="6350" cap="flat" cmpd="sng" algn="ctr">
+                      <a:solidFill>
+                        <a:srgbClr val="E4E4E0"/>
+                      </a:solidFill>
+                      <a:prstDash val="solid"/>
+                      <a:round/>
+                      <a:headEnd type="none" w="med" len="med"/>
+                      <a:tailEnd type="none" w="med" len="med"/>
+                    </a:lnT>
+                    <a:lnB w="6350" cap="flat" cmpd="sng" algn="ctr">
+                      <a:solidFill>
+                        <a:srgbClr val="E4E4E0"/>
+                      </a:solidFill>
+                      <a:prstDash val="solid"/>
+                      <a:round/>
+                      <a:headEnd type="none" w="med" len="med"/>
+                      <a:tailEnd type="none" w="med" len="med"/>
+                    </a:lnB>
+                    <a:solidFill>
+                      <a:srgbClr val="FFFFFF"/>
+                    </a:solidFill>
+                  </a:tcPr>
+                </a:tc>
+                <a:tc>
+                  <a:txBody>
+                    <a:bodyPr/>
+                    <a:lstStyle/>
+                    <a:p>
+                      <a:pPr algn="l" indent="0" marL="0">
+                        <a:buNone/>
+                      </a:pPr>
+                      <a:r>
+                        <a:rPr lang="en-US" sz="800" dirty="0">
+                          <a:solidFill>
+                            <a:srgbClr val="3A3A3A"/>
+                          </a:solidFill>
+                          <a:latin typeface="Arial" pitchFamily="34" charset="0"/>
+                          <a:ea typeface="Arial" pitchFamily="34" charset="-122"/>
+                          <a:cs typeface="Arial" pitchFamily="34" charset="-120"/>
+                        </a:rPr>
+                        <a:t>ask underwriting</a:t>
+                      </a:r>
+                      <a:endParaRPr lang="en-US" sz="800" dirty="0">
+                        <a:latin typeface="Arial" charset="0"/>
+                        <a:ea typeface="Arial" charset="0"/>
+                        <a:cs typeface="Arial" charset="0"/>
+                      </a:endParaRPr>
+                    </a:p>
+                  </a:txBody>
+                  <a:tcPr marL="91440" marR="91440" marT="45720" marB="45720" anchor="ctr">
+                    <a:lnL w="6350" cap="flat" cmpd="sng" algn="ctr">
+                      <a:solidFill>
+                        <a:srgbClr val="E4E4E0"/>
+                      </a:solidFill>
+                      <a:prstDash val="solid"/>
+                      <a:round/>
+                      <a:headEnd type="none" w="med" len="med"/>
+                      <a:tailEnd type="none" w="med" len="med"/>
+                    </a:lnL>
+                    <a:lnR w="6350" cap="flat" cmpd="sng" algn="ctr">
+                      <a:solidFill>
+                        <a:srgbClr val="E4E4E0"/>
+                      </a:solidFill>
+                      <a:prstDash val="solid"/>
+                      <a:round/>
+                      <a:headEnd type="none" w="med" len="med"/>
+                      <a:tailEnd type="none" w="med" len="med"/>
+                    </a:lnR>
+                    <a:lnT w="6350" cap="flat" cmpd="sng" algn="ctr">
+                      <a:solidFill>
+                        <a:srgbClr val="E4E4E0"/>
+                      </a:solidFill>
+                      <a:prstDash val="solid"/>
+                      <a:round/>
+                      <a:headEnd type="none" w="med" len="med"/>
+                      <a:tailEnd type="none" w="med" len="med"/>
+                    </a:lnT>
+                    <a:lnB w="6350" cap="flat" cmpd="sng" algn="ctr">
+                      <a:solidFill>
+                        <a:srgbClr val="E4E4E0"/>
+                      </a:solidFill>
+                      <a:prstDash val="solid"/>
+                      <a:round/>
+                      <a:headEnd type="none" w="med" len="med"/>
+                      <a:tailEnd type="none" w="med" len="med"/>
+                    </a:lnB>
+                    <a:solidFill>
+                      <a:srgbClr val="FFFFFF"/>
+                    </a:solidFill>
+                  </a:tcPr>
+                </a:tc>
+                <a:tc>
+                  <a:txBody>
+                    <a:bodyPr/>
+                    <a:lstStyle/>
+                    <a:p>
+                      <a:pPr algn="l" indent="0" marL="0">
+                        <a:buNone/>
+                      </a:pPr>
+                      <a:r>
+                        <a:rPr lang="en-US" sz="800" dirty="0">
+                          <a:solidFill>
+                            <a:srgbClr val="3A3A3A"/>
+                          </a:solidFill>
+                          <a:latin typeface="Arial" pitchFamily="34" charset="0"/>
+                          <a:ea typeface="Arial" pitchFamily="34" charset="-122"/>
+                          <a:cs typeface="Arial" pitchFamily="34" charset="-120"/>
+                        </a:rPr>
+                        <a:t>agent gathers the evidence, drafts the question</a:t>
+                      </a:r>
+                      <a:endParaRPr lang="en-US" sz="800" dirty="0">
+                        <a:latin typeface="Arial" charset="0"/>
+                        <a:ea typeface="Arial" charset="0"/>
+                        <a:cs typeface="Arial" charset="0"/>
+                      </a:endParaRPr>
+                    </a:p>
+                  </a:txBody>
+                  <a:tcPr marL="91440" marR="91440" marT="45720" marB="45720" anchor="ctr">
+                    <a:lnL w="6350" cap="flat" cmpd="sng" algn="ctr">
+                      <a:solidFill>
+                        <a:srgbClr val="E4E4E0"/>
+                      </a:solidFill>
+                      <a:prstDash val="solid"/>
+                      <a:round/>
+                      <a:headEnd type="none" w="med" len="med"/>
+                      <a:tailEnd type="none" w="med" len="med"/>
+                    </a:lnL>
+                    <a:lnR w="6350" cap="flat" cmpd="sng" algn="ctr">
+                      <a:solidFill>
+                        <a:srgbClr val="E4E4E0"/>
+                      </a:solidFill>
+                      <a:prstDash val="solid"/>
+                      <a:round/>
+                      <a:headEnd type="none" w="med" len="med"/>
+                      <a:tailEnd type="none" w="med" len="med"/>
+                    </a:lnR>
+                    <a:lnT w="6350" cap="flat" cmpd="sng" algn="ctr">
+                      <a:solidFill>
+                        <a:srgbClr val="E4E4E0"/>
+                      </a:solidFill>
+                      <a:prstDash val="solid"/>
+                      <a:round/>
+                      <a:headEnd type="none" w="med" len="med"/>
+                      <a:tailEnd type="none" w="med" len="med"/>
+                    </a:lnT>
+                    <a:lnB w="6350" cap="flat" cmpd="sng" algn="ctr">
+                      <a:solidFill>
+                        <a:srgbClr val="E4E4E0"/>
+                      </a:solidFill>
+                      <a:prstDash val="solid"/>
+                      <a:round/>
+                      <a:headEnd type="none" w="med" len="med"/>
+                      <a:tailEnd type="none" w="med" len="med"/>
+                    </a:lnB>
+                    <a:solidFill>
+                      <a:srgbClr val="FFFFFF"/>
+                    </a:solidFill>
+                  </a:tcPr>
+                </a:tc>
+                <a:tc>
+                  <a:txBody>
+                    <a:bodyPr/>
+                    <a:lstStyle/>
+                    <a:p>
+                      <a:pPr algn="l" indent="0" marL="0">
+                        <a:buNone/>
+                      </a:pPr>
+                      <a:r>
+                        <a:rPr lang="en-US" sz="800" dirty="0">
+                          <a:solidFill>
+                            <a:srgbClr val="3A3A3A"/>
+                          </a:solidFill>
+                          <a:latin typeface="Arial" pitchFamily="34" charset="0"/>
+                          <a:ea typeface="Arial" pitchFamily="34" charset="-122"/>
+                          <a:cs typeface="Arial" pitchFamily="34" charset="-120"/>
+                        </a:rPr>
+                        <a:t>underwriting</a:t>
+                      </a:r>
+                      <a:endParaRPr lang="en-US" sz="800" dirty="0">
+                        <a:latin typeface="Arial" charset="0"/>
+                        <a:ea typeface="Arial" charset="0"/>
+                        <a:cs typeface="Arial" charset="0"/>
+                      </a:endParaRPr>
+                    </a:p>
+                  </a:txBody>
+                  <a:tcPr marL="91440" marR="91440" marT="45720" marB="45720" anchor="ctr">
+                    <a:lnL w="6350" cap="flat" cmpd="sng" algn="ctr">
+                      <a:solidFill>
+                        <a:srgbClr val="E4E4E0"/>
+                      </a:solidFill>
+                      <a:prstDash val="solid"/>
+                      <a:round/>
+                      <a:headEnd type="none" w="med" len="med"/>
+                      <a:tailEnd type="none" w="med" len="med"/>
+                    </a:lnL>
+                    <a:lnR w="6350" cap="flat" cmpd="sng" algn="ctr">
+                      <a:solidFill>
+                        <a:srgbClr val="E4E4E0"/>
+                      </a:solidFill>
+                      <a:prstDash val="solid"/>
+                      <a:round/>
+                      <a:headEnd type="none" w="med" len="med"/>
+                      <a:tailEnd type="none" w="med" len="med"/>
+                    </a:lnR>
+                    <a:lnT w="6350" cap="flat" cmpd="sng" algn="ctr">
+                      <a:solidFill>
+                        <a:srgbClr val="E4E4E0"/>
+                      </a:solidFill>
+                      <a:prstDash val="solid"/>
+                      <a:round/>
+                      <a:headEnd type="none" w="med" len="med"/>
+                      <a:tailEnd type="none" w="med" len="med"/>
+                    </a:lnT>
+                    <a:lnB w="6350" cap="flat" cmpd="sng" algn="ctr">
+                      <a:solidFill>
+                        <a:srgbClr val="E4E4E0"/>
+                      </a:solidFill>
+                      <a:prstDash val="solid"/>
+                      <a:round/>
+                      <a:headEnd type="none" w="med" len="med"/>
+                      <a:tailEnd type="none" w="med" len="med"/>
+                    </a:lnB>
+                    <a:solidFill>
+                      <a:srgbClr val="FFFFFF"/>
+                    </a:solidFill>
+                  </a:tcPr>
+                </a:tc>
+              </a:tr>
+              <a:tr h="310896">
+                <a:tc>
+                  <a:txBody>
+                    <a:bodyPr/>
+                    <a:lstStyle/>
+                    <a:p>
+                      <a:pPr algn="l" indent="0" marL="0">
+                        <a:buNone/>
+                      </a:pPr>
+                      <a:r>
+                        <a:rPr lang="en-US" sz="800" dirty="0">
+                          <a:solidFill>
+                            <a:srgbClr val="3A3A3A"/>
+                          </a:solidFill>
+                          <a:latin typeface="Arial" pitchFamily="34" charset="0"/>
+                          <a:ea typeface="Arial" pitchFamily="34" charset="-122"/>
+                          <a:cs typeface="Arial" pitchFamily="34" charset="-120"/>
+                        </a:rPr>
+                        <a:t>Company-name mismatch</a:t>
+                      </a:r>
+                      <a:endParaRPr lang="en-US" sz="800" dirty="0">
+                        <a:latin typeface="Arial" charset="0"/>
+                        <a:ea typeface="Arial" charset="0"/>
+                        <a:cs typeface="Arial" charset="0"/>
+                      </a:endParaRPr>
+                    </a:p>
+                  </a:txBody>
+                  <a:tcPr marL="91440" marR="91440" marT="45720" marB="45720" anchor="ctr">
+                    <a:lnL w="6350" cap="flat" cmpd="sng" algn="ctr">
+                      <a:solidFill>
+                        <a:srgbClr val="E4E4E0"/>
+                      </a:solidFill>
+                      <a:prstDash val="solid"/>
+                      <a:round/>
+                      <a:headEnd type="none" w="med" len="med"/>
+                      <a:tailEnd type="none" w="med" len="med"/>
+                    </a:lnL>
+                    <a:lnR w="6350" cap="flat" cmpd="sng" algn="ctr">
+                      <a:solidFill>
+                        <a:srgbClr val="E4E4E0"/>
+                      </a:solidFill>
+                      <a:prstDash val="solid"/>
+                      <a:round/>
+                      <a:headEnd type="none" w="med" len="med"/>
+                      <a:tailEnd type="none" w="med" len="med"/>
+                    </a:lnR>
+                    <a:lnT w="6350" cap="flat" cmpd="sng" algn="ctr">
+                      <a:solidFill>
+                        <a:srgbClr val="E4E4E0"/>
+                      </a:solidFill>
+                      <a:prstDash val="solid"/>
+                      <a:round/>
+                      <a:headEnd type="none" w="med" len="med"/>
+                      <a:tailEnd type="none" w="med" len="med"/>
+                    </a:lnT>
+                    <a:lnB w="6350" cap="flat" cmpd="sng" algn="ctr">
+                      <a:solidFill>
+                        <a:srgbClr val="E4E4E0"/>
+                      </a:solidFill>
+                      <a:prstDash val="solid"/>
+                      <a:round/>
+                      <a:headEnd type="none" w="med" len="med"/>
+                      <a:tailEnd type="none" w="med" len="med"/>
+                    </a:lnB>
+                    <a:solidFill>
+                      <a:srgbClr val="FFFFFF"/>
+                    </a:solidFill>
+                  </a:tcPr>
+                </a:tc>
+                <a:tc>
+                  <a:txBody>
+                    <a:bodyPr/>
+                    <a:lstStyle/>
+                    <a:p>
+                      <a:pPr algn="l" indent="0" marL="0">
+                        <a:buNone/>
+                      </a:pPr>
+                      <a:r>
+                        <a:rPr lang="en-US" sz="800" dirty="0">
+                          <a:solidFill>
+                            <a:srgbClr val="3A3A3A"/>
+                          </a:solidFill>
+                          <a:latin typeface="Arial" pitchFamily="34" charset="0"/>
+                          <a:ea typeface="Arial" pitchFamily="34" charset="-122"/>
+                          <a:cs typeface="Arial" pitchFamily="34" charset="-120"/>
+                        </a:rPr>
+                        <a:t>ask underwriting</a:t>
+                      </a:r>
+                      <a:endParaRPr lang="en-US" sz="800" dirty="0">
+                        <a:latin typeface="Arial" charset="0"/>
+                        <a:ea typeface="Arial" charset="0"/>
+                        <a:cs typeface="Arial" charset="0"/>
+                      </a:endParaRPr>
+                    </a:p>
+                  </a:txBody>
+                  <a:tcPr marL="91440" marR="91440" marT="45720" marB="45720" anchor="ctr">
+                    <a:lnL w="6350" cap="flat" cmpd="sng" algn="ctr">
+                      <a:solidFill>
+                        <a:srgbClr val="E4E4E0"/>
+                      </a:solidFill>
+                      <a:prstDash val="solid"/>
+                      <a:round/>
+                      <a:headEnd type="none" w="med" len="med"/>
+                      <a:tailEnd type="none" w="med" len="med"/>
+                    </a:lnL>
+                    <a:lnR w="6350" cap="flat" cmpd="sng" algn="ctr">
+                      <a:solidFill>
+                        <a:srgbClr val="E4E4E0"/>
+                      </a:solidFill>
+                      <a:prstDash val="solid"/>
+                      <a:round/>
+                      <a:headEnd type="none" w="med" len="med"/>
+                      <a:tailEnd type="none" w="med" len="med"/>
+                    </a:lnR>
+                    <a:lnT w="6350" cap="flat" cmpd="sng" algn="ctr">
+                      <a:solidFill>
+                        <a:srgbClr val="E4E4E0"/>
+                      </a:solidFill>
+                      <a:prstDash val="solid"/>
+                      <a:round/>
+                      <a:headEnd type="none" w="med" len="med"/>
+                      <a:tailEnd type="none" w="med" len="med"/>
+                    </a:lnT>
+                    <a:lnB w="6350" cap="flat" cmpd="sng" algn="ctr">
+                      <a:solidFill>
+                        <a:srgbClr val="E4E4E0"/>
+                      </a:solidFill>
+                      <a:prstDash val="solid"/>
+                      <a:round/>
+                      <a:headEnd type="none" w="med" len="med"/>
+                      <a:tailEnd type="none" w="med" len="med"/>
+                    </a:lnB>
+                    <a:solidFill>
+                      <a:srgbClr val="FFFFFF"/>
+                    </a:solidFill>
+                  </a:tcPr>
+                </a:tc>
+                <a:tc>
+                  <a:txBody>
+                    <a:bodyPr/>
+                    <a:lstStyle/>
+                    <a:p>
+                      <a:pPr algn="l" indent="0" marL="0">
+                        <a:buNone/>
+                      </a:pPr>
+                      <a:r>
+                        <a:rPr lang="en-US" sz="800" dirty="0">
+                          <a:solidFill>
+                            <a:srgbClr val="3A3A3A"/>
+                          </a:solidFill>
+                          <a:latin typeface="Arial" pitchFamily="34" charset="0"/>
+                          <a:ea typeface="Arial" pitchFamily="34" charset="-122"/>
+                          <a:cs typeface="Arial" pitchFamily="34" charset="-120"/>
+                        </a:rPr>
+                        <a:t>agent fuzzy-matches CVR, drafts the question</a:t>
+                      </a:r>
+                      <a:endParaRPr lang="en-US" sz="800" dirty="0">
+                        <a:latin typeface="Arial" charset="0"/>
+                        <a:ea typeface="Arial" charset="0"/>
+                        <a:cs typeface="Arial" charset="0"/>
+                      </a:endParaRPr>
+                    </a:p>
+                  </a:txBody>
+                  <a:tcPr marL="91440" marR="91440" marT="45720" marB="45720" anchor="ctr">
+                    <a:lnL w="6350" cap="flat" cmpd="sng" algn="ctr">
+                      <a:solidFill>
+                        <a:srgbClr val="E4E4E0"/>
+                      </a:solidFill>
+                      <a:prstDash val="solid"/>
+                      <a:round/>
+                      <a:headEnd type="none" w="med" len="med"/>
+                      <a:tailEnd type="none" w="med" len="med"/>
+                    </a:lnL>
+                    <a:lnR w="6350" cap="flat" cmpd="sng" algn="ctr">
+                      <a:solidFill>
+                        <a:srgbClr val="E4E4E0"/>
+                      </a:solidFill>
+                      <a:prstDash val="solid"/>
+                      <a:round/>
+                      <a:headEnd type="none" w="med" len="med"/>
+                      <a:tailEnd type="none" w="med" len="med"/>
+                    </a:lnR>
+                    <a:lnT w="6350" cap="flat" cmpd="sng" algn="ctr">
+                      <a:solidFill>
+                        <a:srgbClr val="E4E4E0"/>
+                      </a:solidFill>
+                      <a:prstDash val="solid"/>
+                      <a:round/>
+                      <a:headEnd type="none" w="med" len="med"/>
+                      <a:tailEnd type="none" w="med" len="med"/>
+                    </a:lnT>
+                    <a:lnB w="6350" cap="flat" cmpd="sng" algn="ctr">
+                      <a:solidFill>
+                        <a:srgbClr val="E4E4E0"/>
+                      </a:solidFill>
+                      <a:prstDash val="solid"/>
+                      <a:round/>
+                      <a:headEnd type="none" w="med" len="med"/>
+                      <a:tailEnd type="none" w="med" len="med"/>
+                    </a:lnB>
+                    <a:solidFill>
+                      <a:srgbClr val="FFFFFF"/>
+                    </a:solidFill>
+                  </a:tcPr>
+                </a:tc>
+                <a:tc>
+                  <a:txBody>
+                    <a:bodyPr/>
+                    <a:lstStyle/>
+                    <a:p>
+                      <a:pPr algn="l" indent="0" marL="0">
+                        <a:buNone/>
+                      </a:pPr>
+                      <a:r>
+                        <a:rPr lang="en-US" sz="800" dirty="0">
+                          <a:solidFill>
+                            <a:srgbClr val="3A3A3A"/>
+                          </a:solidFill>
+                          <a:latin typeface="Arial" pitchFamily="34" charset="0"/>
+                          <a:ea typeface="Arial" pitchFamily="34" charset="-122"/>
+                          <a:cs typeface="Arial" pitchFamily="34" charset="-120"/>
+                        </a:rPr>
+                        <a:t>underwriting</a:t>
+                      </a:r>
+                      <a:endParaRPr lang="en-US" sz="800" dirty="0">
+                        <a:latin typeface="Arial" charset="0"/>
+                        <a:ea typeface="Arial" charset="0"/>
+                        <a:cs typeface="Arial" charset="0"/>
+                      </a:endParaRPr>
+                    </a:p>
+                  </a:txBody>
+                  <a:tcPr marL="91440" marR="91440" marT="45720" marB="45720" anchor="ctr">
+                    <a:lnL w="6350" cap="flat" cmpd="sng" algn="ctr">
+                      <a:solidFill>
+                        <a:srgbClr val="E4E4E0"/>
+                      </a:solidFill>
+                      <a:prstDash val="solid"/>
+                      <a:round/>
+                      <a:headEnd type="none" w="med" len="med"/>
+                      <a:tailEnd type="none" w="med" len="med"/>
+                    </a:lnL>
+                    <a:lnR w="6350" cap="flat" cmpd="sng" algn="ctr">
+                      <a:solidFill>
+                        <a:srgbClr val="E4E4E0"/>
+                      </a:solidFill>
+                      <a:prstDash val="solid"/>
+                      <a:round/>
+                      <a:headEnd type="none" w="med" len="med"/>
+                      <a:tailEnd type="none" w="med" len="med"/>
+                    </a:lnR>
+                    <a:lnT w="6350" cap="flat" cmpd="sng" algn="ctr">
+                      <a:solidFill>
+                        <a:srgbClr val="E4E4E0"/>
+                      </a:solidFill>
+                      <a:prstDash val="solid"/>
+                      <a:round/>
+                      <a:headEnd type="none" w="med" len="med"/>
+                      <a:tailEnd type="none" w="med" len="med"/>
+                    </a:lnT>
+                    <a:lnB w="6350" cap="flat" cmpd="sng" algn="ctr">
+                      <a:solidFill>
+                        <a:srgbClr val="E4E4E0"/>
+                      </a:solidFill>
+                      <a:prstDash val="solid"/>
+                      <a:round/>
+                      <a:headEnd type="none" w="med" len="med"/>
+                      <a:tailEnd type="none" w="med" len="med"/>
+                    </a:lnB>
+                    <a:solidFill>
+                      <a:srgbClr val="FFFFFF"/>
+                    </a:solidFill>
+                  </a:tcPr>
+                </a:tc>
+              </a:tr>
+              <a:tr h="310896">
+                <a:tc>
+                  <a:txBody>
+                    <a:bodyPr/>
+                    <a:lstStyle/>
+                    <a:p>
+                      <a:pPr algn="l" indent="0" marL="0">
+                        <a:buNone/>
+                      </a:pPr>
+                      <a:r>
+                        <a:rPr lang="en-US" sz="800" dirty="0">
+                          <a:solidFill>
+                            <a:srgbClr val="3A3A3A"/>
+                          </a:solidFill>
+                          <a:latin typeface="Arial" pitchFamily="34" charset="0"/>
+                          <a:ea typeface="Arial" pitchFamily="34" charset="-122"/>
+                          <a:cs typeface="Arial" pitchFamily="34" charset="-120"/>
+                        </a:rPr>
+                        <a:t>Wrong, expired, or no policy at all</a:t>
+                      </a:r>
+                      <a:endParaRPr lang="en-US" sz="800" dirty="0">
+                        <a:latin typeface="Arial" charset="0"/>
+                        <a:ea typeface="Arial" charset="0"/>
+                        <a:cs typeface="Arial" charset="0"/>
+                      </a:endParaRPr>
+                    </a:p>
+                  </a:txBody>
+                  <a:tcPr marL="91440" marR="91440" marT="45720" marB="45720" anchor="ctr">
+                    <a:lnL w="6350" cap="flat" cmpd="sng" algn="ctr">
+                      <a:solidFill>
+                        <a:srgbClr val="E4E4E0"/>
+                      </a:solidFill>
+                      <a:prstDash val="solid"/>
+                      <a:round/>
+                      <a:headEnd type="none" w="med" len="med"/>
+                      <a:tailEnd type="none" w="med" len="med"/>
+                    </a:lnL>
+                    <a:lnR w="6350" cap="flat" cmpd="sng" algn="ctr">
+                      <a:solidFill>
+                        <a:srgbClr val="E4E4E0"/>
+                      </a:solidFill>
+                      <a:prstDash val="solid"/>
+                      <a:round/>
+                      <a:headEnd type="none" w="med" len="med"/>
+                      <a:tailEnd type="none" w="med" len="med"/>
+                    </a:lnR>
+                    <a:lnT w="6350" cap="flat" cmpd="sng" algn="ctr">
+                      <a:solidFill>
+                        <a:srgbClr val="E4E4E0"/>
+                      </a:solidFill>
+                      <a:prstDash val="solid"/>
+                      <a:round/>
+                      <a:headEnd type="none" w="med" len="med"/>
+                      <a:tailEnd type="none" w="med" len="med"/>
+                    </a:lnT>
+                    <a:lnB w="6350" cap="flat" cmpd="sng" algn="ctr">
+                      <a:solidFill>
+                        <a:srgbClr val="E4E4E0"/>
+                      </a:solidFill>
+                      <a:prstDash val="solid"/>
+                      <a:round/>
+                      <a:headEnd type="none" w="med" len="med"/>
+                      <a:tailEnd type="none" w="med" len="med"/>
+                    </a:lnB>
+                    <a:solidFill>
+                      <a:srgbClr val="FFFFFF"/>
+                    </a:solidFill>
+                  </a:tcPr>
+                </a:tc>
+                <a:tc>
+                  <a:txBody>
+                    <a:bodyPr/>
+                    <a:lstStyle/>
+                    <a:p>
+                      <a:pPr algn="l" indent="0" marL="0">
+                        <a:buNone/>
+                      </a:pPr>
+                      <a:r>
+                        <a:rPr lang="en-US" sz="800" dirty="0">
+                          <a:solidFill>
+                            <a:srgbClr val="3A3A3A"/>
+                          </a:solidFill>
+                          <a:latin typeface="Arial" pitchFamily="34" charset="0"/>
+                          <a:ea typeface="Arial" pitchFamily="34" charset="-122"/>
+                          <a:cs typeface="Arial" pitchFamily="34" charset="-120"/>
+                        </a:rPr>
+                        <a:t>back to employer</a:t>
+                      </a:r>
+                      <a:endParaRPr lang="en-US" sz="800" dirty="0">
+                        <a:latin typeface="Arial" charset="0"/>
+                        <a:ea typeface="Arial" charset="0"/>
+                        <a:cs typeface="Arial" charset="0"/>
+                      </a:endParaRPr>
+                    </a:p>
+                  </a:txBody>
+                  <a:tcPr marL="91440" marR="91440" marT="45720" marB="45720" anchor="ctr">
+                    <a:lnL w="6350" cap="flat" cmpd="sng" algn="ctr">
+                      <a:solidFill>
+                        <a:srgbClr val="E4E4E0"/>
+                      </a:solidFill>
+                      <a:prstDash val="solid"/>
+                      <a:round/>
+                      <a:headEnd type="none" w="med" len="med"/>
+                      <a:tailEnd type="none" w="med" len="med"/>
+                    </a:lnL>
+                    <a:lnR w="6350" cap="flat" cmpd="sng" algn="ctr">
+                      <a:solidFill>
+                        <a:srgbClr val="E4E4E0"/>
+                      </a:solidFill>
+                      <a:prstDash val="solid"/>
+                      <a:round/>
+                      <a:headEnd type="none" w="med" len="med"/>
+                      <a:tailEnd type="none" w="med" len="med"/>
+                    </a:lnR>
+                    <a:lnT w="6350" cap="flat" cmpd="sng" algn="ctr">
+                      <a:solidFill>
+                        <a:srgbClr val="E4E4E0"/>
+                      </a:solidFill>
+                      <a:prstDash val="solid"/>
+                      <a:round/>
+                      <a:headEnd type="none" w="med" len="med"/>
+                      <a:tailEnd type="none" w="med" len="med"/>
+                    </a:lnT>
+                    <a:lnB w="6350" cap="flat" cmpd="sng" algn="ctr">
+                      <a:solidFill>
+                        <a:srgbClr val="E4E4E0"/>
+                      </a:solidFill>
+                      <a:prstDash val="solid"/>
+                      <a:round/>
+                      <a:headEnd type="none" w="med" len="med"/>
+                      <a:tailEnd type="none" w="med" len="med"/>
+                    </a:lnB>
+                    <a:solidFill>
+                      <a:srgbClr val="FFFFFF"/>
+                    </a:solidFill>
+                  </a:tcPr>
+                </a:tc>
+                <a:tc>
+                  <a:txBody>
+                    <a:bodyPr/>
+                    <a:lstStyle/>
+                    <a:p>
+                      <a:pPr algn="l" indent="0" marL="0">
+                        <a:buNone/>
+                      </a:pPr>
+                      <a:r>
+                        <a:rPr lang="en-US" sz="800" dirty="0">
+                          <a:solidFill>
+                            <a:srgbClr val="3A3A3A"/>
+                          </a:solidFill>
+                          <a:latin typeface="Arial" pitchFamily="34" charset="0"/>
+                          <a:ea typeface="Arial" pitchFamily="34" charset="-122"/>
+                          <a:cs typeface="Arial" pitchFamily="34" charset="-120"/>
+                        </a:rPr>
+                        <a:t>letter drafted, never sent unread</a:t>
+                      </a:r>
+                      <a:endParaRPr lang="en-US" sz="800" dirty="0">
+                        <a:latin typeface="Arial" charset="0"/>
+                        <a:ea typeface="Arial" charset="0"/>
+                        <a:cs typeface="Arial" charset="0"/>
+                      </a:endParaRPr>
+                    </a:p>
+                  </a:txBody>
+                  <a:tcPr marL="91440" marR="91440" marT="45720" marB="45720" anchor="ctr">
+                    <a:lnL w="6350" cap="flat" cmpd="sng" algn="ctr">
+                      <a:solidFill>
+                        <a:srgbClr val="E4E4E0"/>
+                      </a:solidFill>
+                      <a:prstDash val="solid"/>
+                      <a:round/>
+                      <a:headEnd type="none" w="med" len="med"/>
+                      <a:tailEnd type="none" w="med" len="med"/>
+                    </a:lnL>
+                    <a:lnR w="6350" cap="flat" cmpd="sng" algn="ctr">
+                      <a:solidFill>
+                        <a:srgbClr val="E4E4E0"/>
+                      </a:solidFill>
+                      <a:prstDash val="solid"/>
+                      <a:round/>
+                      <a:headEnd type="none" w="med" len="med"/>
+                      <a:tailEnd type="none" w="med" len="med"/>
+                    </a:lnR>
+                    <a:lnT w="6350" cap="flat" cmpd="sng" algn="ctr">
+                      <a:solidFill>
+                        <a:srgbClr val="E4E4E0"/>
+                      </a:solidFill>
+                      <a:prstDash val="solid"/>
+                      <a:round/>
+                      <a:headEnd type="none" w="med" len="med"/>
+                      <a:tailEnd type="none" w="med" len="med"/>
+                    </a:lnT>
+                    <a:lnB w="6350" cap="flat" cmpd="sng" algn="ctr">
+                      <a:solidFill>
+                        <a:srgbClr val="E4E4E0"/>
+                      </a:solidFill>
+                      <a:prstDash val="solid"/>
+                      <a:round/>
+                      <a:headEnd type="none" w="med" len="med"/>
+                      <a:tailEnd type="none" w="med" len="med"/>
+                    </a:lnB>
+                    <a:solidFill>
+                      <a:srgbClr val="FFFFFF"/>
+                    </a:solidFill>
+                  </a:tcPr>
+                </a:tc>
+                <a:tc>
+                  <a:txBody>
+                    <a:bodyPr/>
+                    <a:lstStyle/>
+                    <a:p>
+                      <a:pPr algn="l" indent="0" marL="0">
+                        <a:buNone/>
+                      </a:pPr>
+                      <a:r>
+                        <a:rPr lang="en-US" sz="800" dirty="0">
+                          <a:solidFill>
+                            <a:srgbClr val="3A3A3A"/>
+                          </a:solidFill>
+                          <a:latin typeface="Arial" pitchFamily="34" charset="0"/>
+                          <a:ea typeface="Arial" pitchFamily="34" charset="-122"/>
+                          <a:cs typeface="Arial" pitchFamily="34" charset="-120"/>
+                        </a:rPr>
+                        <a:t>handler</a:t>
+                      </a:r>
+                      <a:endParaRPr lang="en-US" sz="800" dirty="0">
+                        <a:latin typeface="Arial" charset="0"/>
+                        <a:ea typeface="Arial" charset="0"/>
+                        <a:cs typeface="Arial" charset="0"/>
+                      </a:endParaRPr>
+                    </a:p>
+                  </a:txBody>
+                  <a:tcPr marL="91440" marR="91440" marT="45720" marB="45720" anchor="ctr">
+                    <a:lnL w="6350" cap="flat" cmpd="sng" algn="ctr">
+                      <a:solidFill>
+                        <a:srgbClr val="E4E4E0"/>
+                      </a:solidFill>
+                      <a:prstDash val="solid"/>
+                      <a:round/>
+                      <a:headEnd type="none" w="med" len="med"/>
+                      <a:tailEnd type="none" w="med" len="med"/>
+                    </a:lnL>
+                    <a:lnR w="6350" cap="flat" cmpd="sng" algn="ctr">
+                      <a:solidFill>
+                        <a:srgbClr val="E4E4E0"/>
+                      </a:solidFill>
+                      <a:prstDash val="solid"/>
+                      <a:round/>
+                      <a:headEnd type="none" w="med" len="med"/>
+                      <a:tailEnd type="none" w="med" len="med"/>
+                    </a:lnR>
+                    <a:lnT w="6350" cap="flat" cmpd="sng" algn="ctr">
+                      <a:solidFill>
+                        <a:srgbClr val="E4E4E0"/>
+                      </a:solidFill>
+                      <a:prstDash val="solid"/>
+                      <a:round/>
+                      <a:headEnd type="none" w="med" len="med"/>
+                      <a:tailEnd type="none" w="med" len="med"/>
+                    </a:lnT>
+                    <a:lnB w="6350" cap="flat" cmpd="sng" algn="ctr">
+                      <a:solidFill>
+                        <a:srgbClr val="E4E4E0"/>
+                      </a:solidFill>
+                      <a:prstDash val="solid"/>
+                      <a:round/>
+                      <a:headEnd type="none" w="med" len="med"/>
+                      <a:tailEnd type="none" w="med" len="med"/>
+                    </a:lnB>
+                    <a:solidFill>
+                      <a:srgbClr val="FFFFFF"/>
+                    </a:solidFill>
+                  </a:tcPr>
+                </a:tc>
+              </a:tr>
+            </a:tbl>
+          </a:graphicData>
+        </a:graphic>
+      </p:graphicFrame>
+      <p:sp>
+        <p:nvSpPr>
+          <p:cNvPr id="6" name="Shape 3"/>
           <p:cNvSpPr/>
           <p:nvPr/>
         </p:nvSpPr>
         <p:spPr>
           <a:xfrm>
-            <a:off x="1051560" y="914400"/>
-            <a:ext cx="3931920" cy="2286000"/>
-          </a:xfrm>
-          <a:prstGeom prst="rect">
-            <a:avLst/>
-          </a:prstGeom>
-          <a:solidFill>
-            <a:srgbClr val="FDF3E3"/>
-          </a:solidFill>
-          <a:ln w="31750">
-            <a:solidFill>
-              <a:srgbClr val="FFFFFF"/>
-            </a:solidFill>
-            <a:prstDash val="solid"/>
-          </a:ln>
-        </p:spPr>
-      </p:sp>
-      <p:sp>
-        <p:nvSpPr>
-          <p:cNvPr id="8" name="Text 6"/>
-          <p:cNvSpPr txBox="1"/>
-          <p:nvPr/>
-        </p:nvSpPr>
-        <p:spPr>
-          <a:xfrm>
-            <a:off x="1234440" y="1060704"/>
-            <a:ext cx="3566160" cy="237744"/>
-          </a:xfrm>
-          <a:prstGeom prst="rect">
-            <a:avLst/>
-          </a:prstGeom>
-          <a:noFill/>
-          <a:ln/>
-        </p:spPr>
-        <p:txBody>
-          <a:bodyPr wrap="square" lIns="0" tIns="0" rIns="0" bIns="0" rtlCol="0" anchor="ctr"/>
-          <a:lstStyle/>
-          <a:p>
-            <a:pPr indent="0" marL="0">
-              <a:buNone/>
-            </a:pPr>
-            <a:r>
-              <a:rPr lang="en-US" sz="1000" b="1" spc="80" kern="0" dirty="0">
-                <a:solidFill>
-                  <a:srgbClr val="D97706"/>
-                </a:solidFill>
-                <a:latin typeface="Arial" pitchFamily="34" charset="0"/>
-                <a:ea typeface="Arial" pitchFamily="34" charset="-122"/>
-                <a:cs typeface="Arial" pitchFamily="34" charset="-120"/>
-              </a:rPr>
-              <a:t>WAVE 1 — START HERE</a:t>
-            </a:r>
-            <a:endParaRPr lang="en-US" sz="1000" dirty="0"/>
-          </a:p>
-        </p:txBody>
-      </p:sp>
-      <p:sp>
-        <p:nvSpPr>
-          <p:cNvPr id="9" name="Text 7"/>
-          <p:cNvSpPr txBox="1"/>
-          <p:nvPr/>
-        </p:nvSpPr>
-        <p:spPr>
-          <a:xfrm>
-            <a:off x="1234440" y="1298448"/>
-            <a:ext cx="3566160" cy="219456"/>
-          </a:xfrm>
-          <a:prstGeom prst="rect">
-            <a:avLst/>
-          </a:prstGeom>
-          <a:noFill/>
-          <a:ln/>
-        </p:spPr>
-        <p:txBody>
-          <a:bodyPr wrap="square" lIns="0" tIns="0" rIns="0" bIns="0" rtlCol="0" anchor="ctr"/>
-          <a:lstStyle/>
-          <a:p>
-            <a:pPr indent="0" marL="0">
-              <a:buNone/>
-            </a:pPr>
-            <a:r>
-              <a:rPr lang="en-US" sz="800" i="1" dirty="0">
-                <a:solidFill>
-                  <a:srgbClr val="5B6472"/>
-                </a:solidFill>
-                <a:latin typeface="Arial" pitchFamily="34" charset="0"/>
-                <a:ea typeface="Arial" pitchFamily="34" charset="-122"/>
-                <a:cs typeface="Arial" pitchFamily="34" charset="-120"/>
-              </a:rPr>
-              <a:t>cheap to get wrong, happens constantly</a:t>
-            </a:r>
-            <a:endParaRPr lang="en-US" sz="800" dirty="0"/>
-          </a:p>
-        </p:txBody>
-      </p:sp>
-      <p:sp>
-        <p:nvSpPr>
-          <p:cNvPr id="10" name="Shape 8"/>
-          <p:cNvSpPr/>
-          <p:nvPr/>
-        </p:nvSpPr>
-        <p:spPr>
-          <a:xfrm>
-            <a:off x="1280160" y="1627632"/>
-            <a:ext cx="3474720" cy="566928"/>
+            <a:off x="365760" y="3310128"/>
+            <a:ext cx="7589520" cy="841248"/>
           </a:xfrm>
           <a:prstGeom prst="roundRect">
             <a:avLst>
-              <a:gd name="adj" fmla="val 8065"/>
+              <a:gd name="adj" fmla="val 6522"/>
             </a:avLst>
-          </a:prstGeom>
-          <a:solidFill>
-            <a:srgbClr val="FFFFFF"/>
-          </a:solidFill>
-          <a:ln w="15240">
-            <a:solidFill>
-              <a:srgbClr val="D97706"/>
-            </a:solidFill>
-            <a:prstDash val="solid"/>
-          </a:ln>
-        </p:spPr>
-      </p:sp>
-      <p:sp>
-        <p:nvSpPr>
-          <p:cNvPr id="11" name="Text 9"/>
-          <p:cNvSpPr txBox="1"/>
-          <p:nvPr/>
-        </p:nvSpPr>
-        <p:spPr>
-          <a:xfrm>
-            <a:off x="1417320" y="1627632"/>
-            <a:ext cx="3200400" cy="566928"/>
-          </a:xfrm>
-          <a:prstGeom prst="rect">
-            <a:avLst/>
-          </a:prstGeom>
-          <a:noFill/>
-          <a:ln/>
-        </p:spPr>
-        <p:txBody>
-          <a:bodyPr wrap="square" lIns="0" tIns="0" rIns="0" bIns="0" rtlCol="0" anchor="ctr"/>
-          <a:lstStyle/>
-          <a:p>
-            <a:pPr indent="0" marL="0">
-              <a:lnSpc>
-                <a:spcPct val="115000"/>
-              </a:lnSpc>
-              <a:buNone/>
-            </a:pPr>
-            <a:r>
-              <a:rPr lang="en-US" sz="920" b="1" dirty="0">
-                <a:solidFill>
-                  <a:srgbClr val="1B2430"/>
-                </a:solidFill>
-                <a:latin typeface="Arial" pitchFamily="34" charset="0"/>
-                <a:ea typeface="Arial" pitchFamily="34" charset="-122"/>
-                <a:cs typeface="Arial" pitchFamily="34" charset="-120"/>
-              </a:rPr>
-              <a:t>Read the claim and classify it
-</a:t>
-            </a:r>
-            <a:endParaRPr lang="en-US" sz="920" dirty="0"/>
-          </a:p>
-          <a:p>
-            <a:pPr indent="0" marL="0">
-              <a:lnSpc>
-                <a:spcPct val="115000"/>
-              </a:lnSpc>
-              <a:buNone/>
-            </a:pPr>
-            <a:r>
-              <a:rPr lang="en-US" sz="800" dirty="0">
-                <a:solidFill>
-                  <a:srgbClr val="5B6472"/>
-                </a:solidFill>
-                <a:latin typeface="Arial" pitchFamily="34" charset="0"/>
-                <a:ea typeface="Arial" pitchFamily="34" charset="-122"/>
-                <a:cs typeface="Arial" pitchFamily="34" charset="-120"/>
-              </a:rPr>
-              <a:t>ends the one-person dependency on teeth claims</a:t>
-            </a:r>
-            <a:endParaRPr lang="en-US" sz="920" dirty="0"/>
-          </a:p>
-        </p:txBody>
-      </p:sp>
-      <p:sp>
-        <p:nvSpPr>
-          <p:cNvPr id="12" name="Shape 10"/>
-          <p:cNvSpPr/>
-          <p:nvPr/>
-        </p:nvSpPr>
-        <p:spPr>
-          <a:xfrm>
-            <a:off x="1280160" y="2322576"/>
-            <a:ext cx="3474720" cy="566928"/>
-          </a:xfrm>
-          <a:prstGeom prst="roundRect">
-            <a:avLst>
-              <a:gd name="adj" fmla="val 8065"/>
-            </a:avLst>
-          </a:prstGeom>
-          <a:solidFill>
-            <a:srgbClr val="FFFFFF"/>
-          </a:solidFill>
-          <a:ln w="15240">
-            <a:solidFill>
-              <a:srgbClr val="D97706"/>
-            </a:solidFill>
-            <a:prstDash val="solid"/>
-          </a:ln>
-        </p:spPr>
-      </p:sp>
-      <p:sp>
-        <p:nvSpPr>
-          <p:cNvPr id="13" name="Text 11"/>
-          <p:cNvSpPr txBox="1"/>
-          <p:nvPr/>
-        </p:nvSpPr>
-        <p:spPr>
-          <a:xfrm>
-            <a:off x="1417320" y="2322576"/>
-            <a:ext cx="3200400" cy="566928"/>
-          </a:xfrm>
-          <a:prstGeom prst="rect">
-            <a:avLst/>
-          </a:prstGeom>
-          <a:noFill/>
-          <a:ln/>
-        </p:spPr>
-        <p:txBody>
-          <a:bodyPr wrap="square" lIns="0" tIns="0" rIns="0" bIns="0" rtlCol="0" anchor="ctr"/>
-          <a:lstStyle/>
-          <a:p>
-            <a:pPr indent="0" marL="0">
-              <a:lnSpc>
-                <a:spcPct val="115000"/>
-              </a:lnSpc>
-              <a:buNone/>
-            </a:pPr>
-            <a:r>
-              <a:rPr lang="en-US" sz="920" b="1" dirty="0">
-                <a:solidFill>
-                  <a:srgbClr val="1B2430"/>
-                </a:solidFill>
-                <a:latin typeface="Arial" pitchFamily="34" charset="0"/>
-                <a:ea typeface="Arial" pitchFamily="34" charset="-122"/>
-                <a:cs typeface="Arial" pitchFamily="34" charset="-120"/>
-              </a:rPr>
-              <a:t>Check CPR, policy and duplicates
-</a:t>
-            </a:r>
-            <a:endParaRPr lang="en-US" sz="920" dirty="0"/>
-          </a:p>
-          <a:p>
-            <a:pPr indent="0" marL="0">
-              <a:lnSpc>
-                <a:spcPct val="115000"/>
-              </a:lnSpc>
-              <a:buNone/>
-            </a:pPr>
-            <a:r>
-              <a:rPr lang="en-US" sz="800" dirty="0">
-                <a:solidFill>
-                  <a:srgbClr val="5B6472"/>
-                </a:solidFill>
-                <a:latin typeface="Arial" pitchFamily="34" charset="0"/>
-                <a:ea typeface="Arial" pitchFamily="34" charset="-122"/>
-                <a:cs typeface="Arial" pitchFamily="34" charset="-120"/>
-              </a:rPr>
-              <a:t>plain rules, no AI model</a:t>
-            </a:r>
-            <a:endParaRPr lang="en-US" sz="920" dirty="0"/>
-          </a:p>
-        </p:txBody>
-      </p:sp>
-      <p:sp>
-        <p:nvSpPr>
-          <p:cNvPr id="14" name="Shape 12"/>
-          <p:cNvSpPr/>
-          <p:nvPr/>
-        </p:nvSpPr>
-        <p:spPr>
-          <a:xfrm>
-            <a:off x="4983480" y="914400"/>
-            <a:ext cx="3931920" cy="2286000"/>
-          </a:xfrm>
-          <a:prstGeom prst="rect">
-            <a:avLst/>
           </a:prstGeom>
           <a:solidFill>
             <a:srgbClr val="E4F4F8"/>
-          </a:solidFill>
-          <a:ln w="31750">
-            <a:solidFill>
-              <a:srgbClr val="FFFFFF"/>
-            </a:solidFill>
-            <a:prstDash val="solid"/>
-          </a:ln>
-        </p:spPr>
-      </p:sp>
-      <p:sp>
-        <p:nvSpPr>
-          <p:cNvPr id="15" name="Text 13"/>
-          <p:cNvSpPr txBox="1"/>
-          <p:nvPr/>
-        </p:nvSpPr>
-        <p:spPr>
-          <a:xfrm>
-            <a:off x="5166360" y="1060704"/>
-            <a:ext cx="3566160" cy="237744"/>
-          </a:xfrm>
-          <a:prstGeom prst="rect">
-            <a:avLst/>
-          </a:prstGeom>
-          <a:noFill/>
-          <a:ln/>
-        </p:spPr>
-        <p:txBody>
-          <a:bodyPr wrap="square" lIns="0" tIns="0" rIns="0" bIns="0" rtlCol="0" anchor="ctr"/>
-          <a:lstStyle/>
-          <a:p>
-            <a:pPr indent="0" marL="0">
-              <a:buNone/>
-            </a:pPr>
-            <a:r>
-              <a:rPr lang="en-US" sz="1000" b="1" spc="80" kern="0" dirty="0">
-                <a:solidFill>
-                  <a:srgbClr val="0891B2"/>
-                </a:solidFill>
-                <a:latin typeface="Arial" pitchFamily="34" charset="0"/>
-                <a:ea typeface="Arial" pitchFamily="34" charset="-122"/>
-                <a:cs typeface="Arial" pitchFamily="34" charset="-120"/>
-              </a:rPr>
-              <a:t>WAVE 2 — ONCE TRUSTED</a:t>
-            </a:r>
-            <a:endParaRPr lang="en-US" sz="1000" dirty="0"/>
-          </a:p>
-        </p:txBody>
-      </p:sp>
-      <p:sp>
-        <p:nvSpPr>
-          <p:cNvPr id="16" name="Text 14"/>
-          <p:cNvSpPr txBox="1"/>
-          <p:nvPr/>
-        </p:nvSpPr>
-        <p:spPr>
-          <a:xfrm>
-            <a:off x="5166360" y="1298448"/>
-            <a:ext cx="3566160" cy="219456"/>
-          </a:xfrm>
-          <a:prstGeom prst="rect">
-            <a:avLst/>
-          </a:prstGeom>
-          <a:noFill/>
-          <a:ln/>
-        </p:spPr>
-        <p:txBody>
-          <a:bodyPr wrap="square" lIns="0" tIns="0" rIns="0" bIns="0" rtlCol="0" anchor="ctr"/>
-          <a:lstStyle/>
-          <a:p>
-            <a:pPr indent="0" marL="0">
-              <a:buNone/>
-            </a:pPr>
-            <a:r>
-              <a:rPr lang="en-US" sz="800" i="1" dirty="0">
-                <a:solidFill>
-                  <a:srgbClr val="5B6472"/>
-                </a:solidFill>
-                <a:latin typeface="Arial" pitchFamily="34" charset="0"/>
-                <a:ea typeface="Arial" pitchFamily="34" charset="-122"/>
-                <a:cs typeface="Arial" pitchFamily="34" charset="-120"/>
-              </a:rPr>
-              <a:t>the real prize, but needs the audit trail live</a:t>
-            </a:r>
-            <a:endParaRPr lang="en-US" sz="800" dirty="0"/>
-          </a:p>
-        </p:txBody>
-      </p:sp>
-      <p:sp>
-        <p:nvSpPr>
-          <p:cNvPr id="17" name="Shape 15"/>
-          <p:cNvSpPr/>
-          <p:nvPr/>
-        </p:nvSpPr>
-        <p:spPr>
-          <a:xfrm>
-            <a:off x="5212080" y="1627632"/>
-            <a:ext cx="3474720" cy="566928"/>
-          </a:xfrm>
-          <a:prstGeom prst="roundRect">
-            <a:avLst>
-              <a:gd name="adj" fmla="val 8065"/>
-            </a:avLst>
-          </a:prstGeom>
-          <a:solidFill>
-            <a:srgbClr val="FFFFFF"/>
           </a:solidFill>
           <a:ln w="15240">
             <a:solidFill>
@@ -10644,14 +12308,201 @@
       </p:sp>
       <p:sp>
         <p:nvSpPr>
-          <p:cNvPr id="18" name="Text 16"/>
-          <p:cNvSpPr txBox="1"/>
-          <p:nvPr/>
-        </p:nvSpPr>
-        <p:spPr>
-          <a:xfrm>
-            <a:off x="5349240" y="1627632"/>
-            <a:ext cx="3200400" cy="566928"/>
+          <p:cNvPr id="7" name="Text 4"/>
+          <p:cNvSpPr txBox="1"/>
+          <p:nvPr/>
+        </p:nvSpPr>
+        <p:spPr>
+          <a:xfrm>
+            <a:off x="530352" y="3310128"/>
+            <a:ext cx="7260336" cy="841248"/>
+          </a:xfrm>
+          <a:prstGeom prst="rect">
+            <a:avLst/>
+          </a:prstGeom>
+          <a:noFill/>
+          <a:ln/>
+        </p:spPr>
+        <p:txBody>
+          <a:bodyPr wrap="square" lIns="0" tIns="0" rIns="0" bIns="0" rtlCol="0" anchor="ctr"/>
+          <a:lstStyle/>
+          <a:p>
+            <a:pPr indent="0" marL="0">
+              <a:lnSpc>
+                <a:spcPct val="120000"/>
+              </a:lnSpc>
+              <a:buNone/>
+            </a:pPr>
+            <a:r>
+              <a:rPr lang="en-US" sz="860" b="1" dirty="0">
+                <a:solidFill>
+                  <a:srgbClr val="0B5A66"/>
+                </a:solidFill>
+                <a:latin typeface="Arial" pitchFamily="34" charset="0"/>
+                <a:ea typeface="Arial" pitchFamily="34" charset="-122"/>
+                <a:cs typeface="Arial" pitchFamily="34" charset="-120"/>
+              </a:rPr>
+              <a:t>Only two rows change hands.  </a:t>
+            </a:r>
+            <a:pPr indent="0" marL="0">
+              <a:lnSpc>
+                <a:spcPct val="120000"/>
+              </a:lnSpc>
+              <a:buNone/>
+            </a:pPr>
+            <a:r>
+              <a:rPr lang="en-US" sz="860" dirty="0">
+                <a:solidFill>
+                  <a:srgbClr val="34474A"/>
+                </a:solidFill>
+                <a:latin typeface="Arial" pitchFamily="34" charset="0"/>
+                <a:ea typeface="Arial" pitchFamily="34" charset="-122"/>
+                <a:cs typeface="Arial" pitchFamily="34" charset="-120"/>
+              </a:rPr>
+              <a:t>Four of the six are lookups against a register the insurer already queries — those become rules with no model call at all. The two that genuinely need judgement still go to underwriting, because that authority is not ours to take. The AI's job there is to arrive with the evidence assembled, not to answer the question.</a:t>
+            </a:r>
+            <a:endParaRPr lang="en-US" sz="860" dirty="0"/>
+          </a:p>
+        </p:txBody>
+      </p:sp>
+      <p:sp>
+        <p:nvSpPr>
+          <p:cNvPr id="8" name="Shape 5"/>
+          <p:cNvSpPr/>
+          <p:nvPr/>
+        </p:nvSpPr>
+        <p:spPr>
+          <a:xfrm>
+            <a:off x="365760" y="4261104"/>
+            <a:ext cx="7589520" cy="1700784"/>
+          </a:xfrm>
+          <a:prstGeom prst="roundRect">
+            <a:avLst>
+              <a:gd name="adj" fmla="val 3226"/>
+            </a:avLst>
+          </a:prstGeom>
+          <a:solidFill>
+            <a:srgbClr val="FFFFFF"/>
+          </a:solidFill>
+          <a:ln w="12700">
+            <a:solidFill>
+              <a:srgbClr val="D7DCE2"/>
+            </a:solidFill>
+            <a:prstDash val="solid"/>
+          </a:ln>
+        </p:spPr>
+      </p:sp>
+      <p:sp>
+        <p:nvSpPr>
+          <p:cNvPr id="9" name="Text 6"/>
+          <p:cNvSpPr txBox="1"/>
+          <p:nvPr/>
+        </p:nvSpPr>
+        <p:spPr>
+          <a:xfrm>
+            <a:off x="548640" y="4370832"/>
+            <a:ext cx="7223760" cy="201168"/>
+          </a:xfrm>
+          <a:prstGeom prst="rect">
+            <a:avLst/>
+          </a:prstGeom>
+          <a:noFill/>
+          <a:ln/>
+        </p:spPr>
+        <p:txBody>
+          <a:bodyPr wrap="square" lIns="0" tIns="0" rIns="0" bIns="0" rtlCol="0" anchor="ctr"/>
+          <a:lstStyle/>
+          <a:p>
+            <a:pPr indent="0" marL="0">
+              <a:buNone/>
+            </a:pPr>
+            <a:r>
+              <a:rPr lang="en-US" sz="900" b="1" spc="80" kern="0" dirty="0">
+                <a:solidFill>
+                  <a:srgbClr val="D97706"/>
+                </a:solidFill>
+                <a:latin typeface="Arial" pitchFamily="34" charset="0"/>
+                <a:ea typeface="Arial" pitchFamily="34" charset="-122"/>
+                <a:cs typeface="Arial" pitchFamily="34" charset="-120"/>
+              </a:rPr>
+              <a:t>WHAT THIS REMOVES</a:t>
+            </a:r>
+            <a:endParaRPr lang="en-US" sz="900" dirty="0"/>
+          </a:p>
+        </p:txBody>
+      </p:sp>
+      <p:sp>
+        <p:nvSpPr>
+          <p:cNvPr id="10" name="Shape 7"/>
+          <p:cNvSpPr/>
+          <p:nvPr/>
+        </p:nvSpPr>
+        <p:spPr>
+          <a:xfrm>
+            <a:off x="548640" y="4645152"/>
+            <a:ext cx="36576" cy="347472"/>
+          </a:xfrm>
+          <a:prstGeom prst="rect">
+            <a:avLst/>
+          </a:prstGeom>
+          <a:solidFill>
+            <a:srgbClr val="D97706"/>
+          </a:solidFill>
+          <a:ln/>
+        </p:spPr>
+      </p:sp>
+      <p:sp>
+        <p:nvSpPr>
+          <p:cNvPr id="11" name="Text 8"/>
+          <p:cNvSpPr txBox="1"/>
+          <p:nvPr/>
+        </p:nvSpPr>
+        <p:spPr>
+          <a:xfrm>
+            <a:off x="676656" y="4626864"/>
+            <a:ext cx="2468880" cy="365760"/>
+          </a:xfrm>
+          <a:prstGeom prst="rect">
+            <a:avLst/>
+          </a:prstGeom>
+          <a:noFill/>
+          <a:ln/>
+        </p:spPr>
+        <p:txBody>
+          <a:bodyPr wrap="square" lIns="0" tIns="0" rIns="0" bIns="0" rtlCol="0" anchor="ctr"/>
+          <a:lstStyle/>
+          <a:p>
+            <a:pPr indent="0" marL="0">
+              <a:lnSpc>
+                <a:spcPct val="110000"/>
+              </a:lnSpc>
+              <a:buNone/>
+            </a:pPr>
+            <a:r>
+              <a:rPr lang="en-US" sz="840" b="1" dirty="0">
+                <a:solidFill>
+                  <a:srgbClr val="1B2430"/>
+                </a:solidFill>
+                <a:latin typeface="Arial" pitchFamily="34" charset="0"/>
+                <a:ea typeface="Arial" pitchFamily="34" charset="-122"/>
+                <a:cs typeface="Arial" pitchFamily="34" charset="-120"/>
+              </a:rPr>
+              <a:t>The second look at the policy</a:t>
+            </a:r>
+            <a:endParaRPr lang="en-US" sz="840" dirty="0"/>
+          </a:p>
+        </p:txBody>
+      </p:sp>
+      <p:sp>
+        <p:nvSpPr>
+          <p:cNvPr id="12" name="Text 9"/>
+          <p:cNvSpPr txBox="1"/>
+          <p:nvPr/>
+        </p:nvSpPr>
+        <p:spPr>
+          <a:xfrm>
+            <a:off x="3200400" y="4626864"/>
+            <a:ext cx="4572000" cy="365760"/>
           </a:xfrm>
           <a:prstGeom prst="rect">
             <a:avLst/>
@@ -10670,7 +12521,69 @@
               <a:buNone/>
             </a:pPr>
             <a:r>
-              <a:rPr lang="en-US" sz="920" b="1" dirty="0">
+              <a:rPr lang="en-US" sz="800" dirty="0">
+                <a:solidFill>
+                  <a:srgbClr val="5A5A5A"/>
+                </a:solidFill>
+                <a:latin typeface="Arial" pitchFamily="34" charset="0"/>
+                <a:ea typeface="Arial" pitchFamily="34" charset="-122"/>
+                <a:cs typeface="Arial" pitchFamily="34" charset="-120"/>
+              </a:rPr>
+              <a:t>FNOL already asked “is a valid policy attached?”. Coverage Check asks it again, from the same documents.</a:t>
+            </a:r>
+            <a:endParaRPr lang="en-US" sz="800" dirty="0"/>
+          </a:p>
+        </p:txBody>
+      </p:sp>
+      <p:sp>
+        <p:nvSpPr>
+          <p:cNvPr id="13" name="Shape 10"/>
+          <p:cNvSpPr/>
+          <p:nvPr/>
+        </p:nvSpPr>
+        <p:spPr>
+          <a:xfrm>
+            <a:off x="548640" y="5065776"/>
+            <a:ext cx="36576" cy="347472"/>
+          </a:xfrm>
+          <a:prstGeom prst="rect">
+            <a:avLst/>
+          </a:prstGeom>
+          <a:solidFill>
+            <a:srgbClr val="D97706"/>
+          </a:solidFill>
+          <a:ln/>
+        </p:spPr>
+      </p:sp>
+      <p:sp>
+        <p:nvSpPr>
+          <p:cNvPr id="14" name="Text 11"/>
+          <p:cNvSpPr txBox="1"/>
+          <p:nvPr/>
+        </p:nvSpPr>
+        <p:spPr>
+          <a:xfrm>
+            <a:off x="676656" y="5047488"/>
+            <a:ext cx="2468880" cy="365760"/>
+          </a:xfrm>
+          <a:prstGeom prst="rect">
+            <a:avLst/>
+          </a:prstGeom>
+          <a:noFill/>
+          <a:ln/>
+        </p:spPr>
+        <p:txBody>
+          <a:bodyPr wrap="square" lIns="0" tIns="0" rIns="0" bIns="0" rtlCol="0" anchor="ctr"/>
+          <a:lstStyle/>
+          <a:p>
+            <a:pPr indent="0" marL="0">
+              <a:lnSpc>
+                <a:spcPct val="110000"/>
+              </a:lnSpc>
+              <a:buNone/>
+            </a:pPr>
+            <a:r>
+              <a:rPr lang="en-US" sz="840" b="1" dirty="0">
                 <a:solidFill>
                   <a:srgbClr val="1B2430"/>
                 </a:solidFill>
@@ -10678,11 +12591,32 @@
                 <a:ea typeface="Arial" pitchFamily="34" charset="-122"/>
                 <a:cs typeface="Arial" pitchFamily="34" charset="-120"/>
               </a:rPr>
-              <a:t>Draft the close-out letter
-</a:t>
-            </a:r>
-            <a:endParaRPr lang="en-US" sz="920" dirty="0"/>
-          </a:p>
+              <a:t>The wait between the two</a:t>
+            </a:r>
+            <a:endParaRPr lang="en-US" sz="840" dirty="0"/>
+          </a:p>
+        </p:txBody>
+      </p:sp>
+      <p:sp>
+        <p:nvSpPr>
+          <p:cNvPr id="15" name="Text 12"/>
+          <p:cNvSpPr txBox="1"/>
+          <p:nvPr/>
+        </p:nvSpPr>
+        <p:spPr>
+          <a:xfrm>
+            <a:off x="3200400" y="5047488"/>
+            <a:ext cx="4572000" cy="365760"/>
+          </a:xfrm>
+          <a:prstGeom prst="rect">
+            <a:avLst/>
+          </a:prstGeom>
+          <a:noFill/>
+          <a:ln/>
+        </p:spPr>
+        <p:txBody>
+          <a:bodyPr wrap="square" lIns="0" tIns="0" rIns="0" bIns="0" rtlCol="0" anchor="ctr"/>
+          <a:lstStyle/>
           <a:p>
             <a:pPr indent="0" marL="0">
               <a:lnSpc>
@@ -10693,55 +12627,90 @@
             <a:r>
               <a:rPr lang="en-US" sz="800" dirty="0">
                 <a:solidFill>
-                  <a:srgbClr val="5B6472"/>
-                </a:solidFill>
-                <a:latin typeface="Arial" pitchFamily="34" charset="0"/>
-                <a:ea typeface="Arial" pitchFamily="34" charset="-122"/>
-                <a:cs typeface="Arial" pitchFamily="34" charset="-120"/>
-              </a:rPr>
-              <a:t>~65% of claims · a handler still approves</a:t>
-            </a:r>
-            <a:endParaRPr lang="en-US" sz="920" dirty="0"/>
-          </a:p>
-        </p:txBody>
-      </p:sp>
-      <p:sp>
-        <p:nvSpPr>
-          <p:cNvPr id="19" name="Shape 17"/>
+                  <a:srgbClr val="5A5A5A"/>
+                </a:solidFill>
+                <a:latin typeface="Arial" pitchFamily="34" charset="0"/>
+                <a:ea typeface="Arial" pitchFamily="34" charset="-122"/>
+                <a:cs typeface="Arial" pitchFamily="34" charset="-120"/>
+              </a:rPr>
+              <a:t>Today the claim sits in IDB until someone picks up the coverage step. It now runs beside claim creation, not after it.</a:t>
+            </a:r>
+            <a:endParaRPr lang="en-US" sz="800" dirty="0"/>
+          </a:p>
+        </p:txBody>
+      </p:sp>
+      <p:sp>
+        <p:nvSpPr>
+          <p:cNvPr id="16" name="Shape 13"/>
           <p:cNvSpPr/>
           <p:nvPr/>
         </p:nvSpPr>
         <p:spPr>
           <a:xfrm>
-            <a:off x="5212080" y="2322576"/>
-            <a:ext cx="3474720" cy="566928"/>
-          </a:xfrm>
-          <a:prstGeom prst="roundRect">
-            <a:avLst>
-              <a:gd name="adj" fmla="val 8065"/>
-            </a:avLst>
+            <a:off x="548640" y="5486400"/>
+            <a:ext cx="36576" cy="347472"/>
+          </a:xfrm>
+          <a:prstGeom prst="rect">
+            <a:avLst/>
           </a:prstGeom>
           <a:solidFill>
-            <a:srgbClr val="FFFFFF"/>
+            <a:srgbClr val="D97706"/>
           </a:solidFill>
-          <a:ln w="15240">
-            <a:solidFill>
-              <a:srgbClr val="0891B2"/>
-            </a:solidFill>
-            <a:prstDash val="solid"/>
-          </a:ln>
-        </p:spPr>
-      </p:sp>
-      <p:sp>
-        <p:nvSpPr>
-          <p:cNvPr id="20" name="Text 18"/>
-          <p:cNvSpPr txBox="1"/>
-          <p:nvPr/>
-        </p:nvSpPr>
-        <p:spPr>
-          <a:xfrm>
-            <a:off x="5349240" y="2322576"/>
-            <a:ext cx="3200400" cy="566928"/>
+          <a:ln/>
+        </p:spPr>
+      </p:sp>
+      <p:sp>
+        <p:nvSpPr>
+          <p:cNvPr id="17" name="Text 14"/>
+          <p:cNvSpPr txBox="1"/>
+          <p:nvPr/>
+        </p:nvSpPr>
+        <p:spPr>
+          <a:xfrm>
+            <a:off x="676656" y="5468112"/>
+            <a:ext cx="2468880" cy="365760"/>
+          </a:xfrm>
+          <a:prstGeom prst="rect">
+            <a:avLst/>
+          </a:prstGeom>
+          <a:noFill/>
+          <a:ln/>
+        </p:spPr>
+        <p:txBody>
+          <a:bodyPr wrap="square" lIns="0" tIns="0" rIns="0" bIns="0" rtlCol="0" anchor="ctr"/>
+          <a:lstStyle/>
+          <a:p>
+            <a:pPr indent="0" marL="0">
+              <a:lnSpc>
+                <a:spcPct val="110000"/>
+              </a:lnSpc>
+              <a:buNone/>
+            </a:pPr>
+            <a:r>
+              <a:rPr lang="en-US" sz="840" b="1" dirty="0">
+                <a:solidFill>
+                  <a:srgbClr val="1B2430"/>
+                </a:solidFill>
+                <a:latin typeface="Arial" pitchFamily="34" charset="0"/>
+                <a:ea typeface="Arial" pitchFamily="34" charset="-122"/>
+                <a:cs typeface="Arial" pitchFamily="34" charset="-120"/>
+              </a:rPr>
+              <a:t>Re-reading the file to ask underwriting</a:t>
+            </a:r>
+            <a:endParaRPr lang="en-US" sz="840" dirty="0"/>
+          </a:p>
+        </p:txBody>
+      </p:sp>
+      <p:sp>
+        <p:nvSpPr>
+          <p:cNvPr id="18" name="Text 15"/>
+          <p:cNvSpPr txBox="1"/>
+          <p:nvPr/>
+        </p:nvSpPr>
+        <p:spPr>
+          <a:xfrm>
+            <a:off x="3200400" y="5468112"/>
+            <a:ext cx="4572000" cy="365760"/>
           </a:xfrm>
           <a:prstGeom prst="rect">
             <a:avLst/>
@@ -10760,441 +12729,34 @@
               <a:buNone/>
             </a:pPr>
             <a:r>
-              <a:rPr lang="en-US" sz="920" b="1" dirty="0">
-                <a:solidFill>
-                  <a:srgbClr val="1B2430"/>
-                </a:solidFill>
-                <a:latin typeface="Arial" pitchFamily="34" charset="0"/>
-                <a:ea typeface="Arial" pitchFamily="34" charset="-122"/>
-                <a:cs typeface="Arial" pitchFamily="34" charset="-120"/>
-              </a:rPr>
-              <a:t>Read AES secure mail
-</a:t>
-            </a:r>
-            <a:endParaRPr lang="en-US" sz="920" dirty="0"/>
-          </a:p>
-          <a:p>
-            <a:pPr indent="0" marL="0">
-              <a:lnSpc>
-                <a:spcPct val="115000"/>
-              </a:lnSpc>
-              <a:buNone/>
-            </a:pPr>
-            <a:r>
               <a:rPr lang="en-US" sz="800" dirty="0">
                 <a:solidFill>
-                  <a:srgbClr val="5B6472"/>
-                </a:solidFill>
-                <a:latin typeface="Arial" pitchFamily="34" charset="0"/>
-                <a:ea typeface="Arial" pitchFamily="34" charset="-122"/>
-                <a:cs typeface="Arial" pitchFamily="34" charset="-120"/>
-              </a:rPr>
-              <a:t>the only channel with no automation today</a:t>
-            </a:r>
-            <a:endParaRPr lang="en-US" sz="920" dirty="0"/>
-          </a:p>
-        </p:txBody>
-      </p:sp>
-      <p:sp>
-        <p:nvSpPr>
-          <p:cNvPr id="21" name="Shape 19"/>
+                  <a:srgbClr val="5A5A5A"/>
+                </a:solidFill>
+                <a:latin typeface="Arial" pitchFamily="34" charset="0"/>
+                <a:ea typeface="Arial" pitchFamily="34" charset="-122"/>
+                <a:cs typeface="Arial" pitchFamily="34" charset="-120"/>
+              </a:rPr>
+              <a:t>The question arrives with the policy history, the CVR match and the dates already attached.</a:t>
+            </a:r>
+            <a:endParaRPr lang="en-US" sz="800" dirty="0"/>
+          </a:p>
+        </p:txBody>
+      </p:sp>
+      <p:sp>
+        <p:nvSpPr>
+          <p:cNvPr id="19" name="Shape 16"/>
           <p:cNvSpPr/>
           <p:nvPr/>
         </p:nvSpPr>
         <p:spPr>
           <a:xfrm>
-            <a:off x="1051560" y="3200400"/>
-            <a:ext cx="3931920" cy="2286000"/>
-          </a:xfrm>
-          <a:prstGeom prst="rect">
-            <a:avLst/>
-          </a:prstGeom>
-          <a:solidFill>
-            <a:srgbClr val="EDECFB"/>
-          </a:solidFill>
-          <a:ln w="31750">
-            <a:solidFill>
-              <a:srgbClr val="FFFFFF"/>
-            </a:solidFill>
-            <a:prstDash val="solid"/>
-          </a:ln>
-        </p:spPr>
-      </p:sp>
-      <p:sp>
-        <p:nvSpPr>
-          <p:cNvPr id="22" name="Text 20"/>
-          <p:cNvSpPr txBox="1"/>
-          <p:nvPr/>
-        </p:nvSpPr>
-        <p:spPr>
-          <a:xfrm>
-            <a:off x="1234440" y="3346704"/>
-            <a:ext cx="3566160" cy="237744"/>
-          </a:xfrm>
-          <a:prstGeom prst="rect">
-            <a:avLst/>
-          </a:prstGeom>
-          <a:noFill/>
-          <a:ln/>
-        </p:spPr>
-        <p:txBody>
-          <a:bodyPr wrap="square" lIns="0" tIns="0" rIns="0" bIns="0" rtlCol="0" anchor="ctr"/>
-          <a:lstStyle/>
-          <a:p>
-            <a:pPr indent="0" marL="0">
-              <a:buNone/>
-            </a:pPr>
-            <a:r>
-              <a:rPr lang="en-US" sz="1000" b="1" spc="80" kern="0" dirty="0">
-                <a:solidFill>
-                  <a:srgbClr val="4338CA"/>
-                </a:solidFill>
-                <a:latin typeface="Arial" pitchFamily="34" charset="0"/>
-                <a:ea typeface="Arial" pitchFamily="34" charset="-122"/>
-                <a:cs typeface="Arial" pitchFamily="34" charset="-120"/>
-              </a:rPr>
-              <a:t>FIX WHEN CONVENIENT</a:t>
-            </a:r>
-            <a:endParaRPr lang="en-US" sz="1000" dirty="0"/>
-          </a:p>
-        </p:txBody>
-      </p:sp>
-      <p:sp>
-        <p:nvSpPr>
-          <p:cNvPr id="23" name="Text 21"/>
-          <p:cNvSpPr txBox="1"/>
-          <p:nvPr/>
-        </p:nvSpPr>
-        <p:spPr>
-          <a:xfrm>
-            <a:off x="1234440" y="3584448"/>
-            <a:ext cx="3566160" cy="219456"/>
-          </a:xfrm>
-          <a:prstGeom prst="rect">
-            <a:avLst/>
-          </a:prstGeom>
-          <a:noFill/>
-          <a:ln/>
-        </p:spPr>
-        <p:txBody>
-          <a:bodyPr wrap="square" lIns="0" tIns="0" rIns="0" bIns="0" rtlCol="0" anchor="ctr"/>
-          <a:lstStyle/>
-          <a:p>
-            <a:pPr indent="0" marL="0">
-              <a:buNone/>
-            </a:pPr>
-            <a:r>
-              <a:rPr lang="en-US" sz="800" i="1" dirty="0">
-                <a:solidFill>
-                  <a:srgbClr val="5B6472"/>
-                </a:solidFill>
-                <a:latin typeface="Arial" pitchFamily="34" charset="0"/>
-                <a:ea typeface="Arial" pitchFamily="34" charset="-122"/>
-                <a:cs typeface="Arial" pitchFamily="34" charset="-120"/>
-              </a:rPr>
-              <a:t>worth doing, but it is an IT defect</a:t>
-            </a:r>
-            <a:endParaRPr lang="en-US" sz="800" dirty="0"/>
-          </a:p>
-        </p:txBody>
-      </p:sp>
-      <p:sp>
-        <p:nvSpPr>
-          <p:cNvPr id="24" name="Shape 22"/>
-          <p:cNvSpPr/>
-          <p:nvPr/>
-        </p:nvSpPr>
-        <p:spPr>
-          <a:xfrm>
-            <a:off x="1280160" y="3913632"/>
-            <a:ext cx="3474720" cy="566928"/>
+            <a:off x="8138160" y="786384"/>
+            <a:ext cx="3685032" cy="5175504"/>
           </a:xfrm>
           <a:prstGeom prst="roundRect">
             <a:avLst>
-              <a:gd name="adj" fmla="val 8065"/>
-            </a:avLst>
-          </a:prstGeom>
-          <a:solidFill>
-            <a:srgbClr val="FFFFFF"/>
-          </a:solidFill>
-          <a:ln w="15240">
-            <a:solidFill>
-              <a:srgbClr val="4338CA"/>
-            </a:solidFill>
-            <a:prstDash val="solid"/>
-          </a:ln>
-        </p:spPr>
-      </p:sp>
-      <p:sp>
-        <p:nvSpPr>
-          <p:cNvPr id="25" name="Text 23"/>
-          <p:cNvSpPr txBox="1"/>
-          <p:nvPr/>
-        </p:nvSpPr>
-        <p:spPr>
-          <a:xfrm>
-            <a:off x="1417320" y="3913632"/>
-            <a:ext cx="3200400" cy="566928"/>
-          </a:xfrm>
-          <a:prstGeom prst="rect">
-            <a:avLst/>
-          </a:prstGeom>
-          <a:noFill/>
-          <a:ln/>
-        </p:spPr>
-        <p:txBody>
-          <a:bodyPr wrap="square" lIns="0" tIns="0" rIns="0" bIns="0" rtlCol="0" anchor="ctr"/>
-          <a:lstStyle/>
-          <a:p>
-            <a:pPr indent="0" marL="0">
-              <a:lnSpc>
-                <a:spcPct val="115000"/>
-              </a:lnSpc>
-              <a:buNone/>
-            </a:pPr>
-            <a:r>
-              <a:rPr lang="en-US" sz="920" b="1" dirty="0">
-                <a:solidFill>
-                  <a:srgbClr val="1B2430"/>
-                </a:solidFill>
-                <a:latin typeface="Arial" pitchFamily="34" charset="0"/>
-                <a:ea typeface="Arial" pitchFamily="34" charset="-122"/>
-                <a:cs typeface="Arial" pitchFamily="34" charset="-120"/>
-              </a:rPr>
-              <a:t>EASY → IDB import retries
-</a:t>
-            </a:r>
-            <a:endParaRPr lang="en-US" sz="920" dirty="0"/>
-          </a:p>
-          <a:p>
-            <a:pPr indent="0" marL="0">
-              <a:lnSpc>
-                <a:spcPct val="115000"/>
-              </a:lnSpc>
-              <a:buNone/>
-            </a:pPr>
-            <a:r>
-              <a:rPr lang="en-US" sz="800" dirty="0">
-                <a:solidFill>
-                  <a:srgbClr val="5B6472"/>
-                </a:solidFill>
-                <a:latin typeface="Arial" pitchFamily="34" charset="0"/>
-                <a:ea typeface="Arial" pitchFamily="34" charset="-122"/>
-                <a:cs typeface="Arial" pitchFamily="34" charset="-120"/>
-              </a:rPr>
-              <a:t>an integration bug, not an AI job</a:t>
-            </a:r>
-            <a:endParaRPr lang="en-US" sz="920" dirty="0"/>
-          </a:p>
-        </p:txBody>
-      </p:sp>
-      <p:sp>
-        <p:nvSpPr>
-          <p:cNvPr id="26" name="Shape 24"/>
-          <p:cNvSpPr/>
-          <p:nvPr/>
-        </p:nvSpPr>
-        <p:spPr>
-          <a:xfrm>
-            <a:off x="4983480" y="3200400"/>
-            <a:ext cx="3931920" cy="2286000"/>
-          </a:xfrm>
-          <a:prstGeom prst="rect">
-            <a:avLst/>
-          </a:prstGeom>
-          <a:solidFill>
-            <a:srgbClr val="FBE9F1"/>
-          </a:solidFill>
-          <a:ln w="31750">
-            <a:solidFill>
-              <a:srgbClr val="FFFFFF"/>
-            </a:solidFill>
-            <a:prstDash val="solid"/>
-          </a:ln>
-        </p:spPr>
-      </p:sp>
-      <p:sp>
-        <p:nvSpPr>
-          <p:cNvPr id="27" name="Text 25"/>
-          <p:cNvSpPr txBox="1"/>
-          <p:nvPr/>
-        </p:nvSpPr>
-        <p:spPr>
-          <a:xfrm>
-            <a:off x="5166360" y="3346704"/>
-            <a:ext cx="3566160" cy="237744"/>
-          </a:xfrm>
-          <a:prstGeom prst="rect">
-            <a:avLst/>
-          </a:prstGeom>
-          <a:noFill/>
-          <a:ln/>
-        </p:spPr>
-        <p:txBody>
-          <a:bodyPr wrap="square" lIns="0" tIns="0" rIns="0" bIns="0" rtlCol="0" anchor="ctr"/>
-          <a:lstStyle/>
-          <a:p>
-            <a:pPr indent="0" marL="0">
-              <a:buNone/>
-            </a:pPr>
-            <a:r>
-              <a:rPr lang="en-US" sz="1000" b="1" spc="80" kern="0" dirty="0">
-                <a:solidFill>
-                  <a:srgbClr val="BE185D"/>
-                </a:solidFill>
-                <a:latin typeface="Arial" pitchFamily="34" charset="0"/>
-                <a:ea typeface="Arial" pitchFamily="34" charset="-122"/>
-                <a:cs typeface="Arial" pitchFamily="34" charset="-120"/>
-              </a:rPr>
-              <a:t>LEAVE MANUAL</a:t>
-            </a:r>
-            <a:endParaRPr lang="en-US" sz="1000" dirty="0"/>
-          </a:p>
-        </p:txBody>
-      </p:sp>
-      <p:sp>
-        <p:nvSpPr>
-          <p:cNvPr id="28" name="Text 26"/>
-          <p:cNvSpPr txBox="1"/>
-          <p:nvPr/>
-        </p:nvSpPr>
-        <p:spPr>
-          <a:xfrm>
-            <a:off x="5166360" y="3584448"/>
-            <a:ext cx="3566160" cy="219456"/>
-          </a:xfrm>
-          <a:prstGeom prst="rect">
-            <a:avLst/>
-          </a:prstGeom>
-          <a:noFill/>
-          <a:ln/>
-        </p:spPr>
-        <p:txBody>
-          <a:bodyPr wrap="square" lIns="0" tIns="0" rIns="0" bIns="0" rtlCol="0" anchor="ctr"/>
-          <a:lstStyle/>
-          <a:p>
-            <a:pPr indent="0" marL="0">
-              <a:buNone/>
-            </a:pPr>
-            <a:r>
-              <a:rPr lang="en-US" sz="800" i="1" dirty="0">
-                <a:solidFill>
-                  <a:srgbClr val="5B6472"/>
-                </a:solidFill>
-                <a:latin typeface="Arial" pitchFamily="34" charset="0"/>
-                <a:ea typeface="Arial" pitchFamily="34" charset="-122"/>
-                <a:cs typeface="Arial" pitchFamily="34" charset="-120"/>
-              </a:rPr>
-              <a:t>too rare to earn the effort</a:t>
-            </a:r>
-            <a:endParaRPr lang="en-US" sz="800" dirty="0"/>
-          </a:p>
-        </p:txBody>
-      </p:sp>
-      <p:sp>
-        <p:nvSpPr>
-          <p:cNvPr id="29" name="Shape 27"/>
-          <p:cNvSpPr/>
-          <p:nvPr/>
-        </p:nvSpPr>
-        <p:spPr>
-          <a:xfrm>
-            <a:off x="5212080" y="3913632"/>
-            <a:ext cx="3474720" cy="566928"/>
-          </a:xfrm>
-          <a:prstGeom prst="roundRect">
-            <a:avLst>
-              <a:gd name="adj" fmla="val 8065"/>
-            </a:avLst>
-          </a:prstGeom>
-          <a:solidFill>
-            <a:srgbClr val="FFFFFF"/>
-          </a:solidFill>
-          <a:ln w="15240">
-            <a:solidFill>
-              <a:srgbClr val="BE185D"/>
-            </a:solidFill>
-            <a:prstDash val="solid"/>
-          </a:ln>
-        </p:spPr>
-      </p:sp>
-      <p:sp>
-        <p:nvSpPr>
-          <p:cNvPr id="30" name="Text 28"/>
-          <p:cNvSpPr txBox="1"/>
-          <p:nvPr/>
-        </p:nvSpPr>
-        <p:spPr>
-          <a:xfrm>
-            <a:off x="5349240" y="3913632"/>
-            <a:ext cx="3200400" cy="566928"/>
-          </a:xfrm>
-          <a:prstGeom prst="rect">
-            <a:avLst/>
-          </a:prstGeom>
-          <a:noFill/>
-          <a:ln/>
-        </p:spPr>
-        <p:txBody>
-          <a:bodyPr wrap="square" lIns="0" tIns="0" rIns="0" bIns="0" rtlCol="0" anchor="ctr"/>
-          <a:lstStyle/>
-          <a:p>
-            <a:pPr indent="0" marL="0">
-              <a:lnSpc>
-                <a:spcPct val="115000"/>
-              </a:lnSpc>
-              <a:buNone/>
-            </a:pPr>
-            <a:r>
-              <a:rPr lang="en-US" sz="920" b="1" dirty="0">
-                <a:solidFill>
-                  <a:srgbClr val="1B2430"/>
-                </a:solidFill>
-                <a:latin typeface="Arial" pitchFamily="34" charset="0"/>
-                <a:ea typeface="Arial" pitchFamily="34" charset="-122"/>
-                <a:cs typeface="Arial" pitchFamily="34" charset="-120"/>
-              </a:rPr>
-              <a:t>"Violence cover" entitlement letter
-</a:t>
-            </a:r>
-            <a:endParaRPr lang="en-US" sz="920" dirty="0"/>
-          </a:p>
-          <a:p>
-            <a:pPr indent="0" marL="0">
-              <a:lnSpc>
-                <a:spcPct val="115000"/>
-              </a:lnSpc>
-              <a:buNone/>
-            </a:pPr>
-            <a:r>
-              <a:rPr lang="en-US" sz="800" dirty="0">
-                <a:solidFill>
-                  <a:srgbClr val="5B6472"/>
-                </a:solidFill>
-                <a:latin typeface="Arial" pitchFamily="34" charset="0"/>
-                <a:ea typeface="Arial" pitchFamily="34" charset="-122"/>
-                <a:cs typeface="Arial" pitchFamily="34" charset="-120"/>
-              </a:rPr>
-              <a:t>~2 claims ever · a checklist beats a model</a:t>
-            </a:r>
-            <a:endParaRPr lang="en-US" sz="920" dirty="0"/>
-          </a:p>
-        </p:txBody>
-      </p:sp>
-      <p:sp>
-        <p:nvSpPr>
-          <p:cNvPr id="31" name="Shape 29"/>
-          <p:cNvSpPr/>
-          <p:nvPr/>
-        </p:nvSpPr>
-        <p:spPr>
-          <a:xfrm>
-            <a:off x="9189720" y="914400"/>
-            <a:ext cx="2633472" cy="4572000"/>
-          </a:xfrm>
-          <a:prstGeom prst="roundRect">
-            <a:avLst>
-              <a:gd name="adj" fmla="val 2083"/>
+              <a:gd name="adj" fmla="val 1489"/>
             </a:avLst>
           </a:prstGeom>
           <a:solidFill>
@@ -11210,14 +12772,14 @@
       </p:sp>
       <p:sp>
         <p:nvSpPr>
-          <p:cNvPr id="32" name="Text 30"/>
-          <p:cNvSpPr txBox="1"/>
-          <p:nvPr/>
-        </p:nvSpPr>
-        <p:spPr>
-          <a:xfrm>
-            <a:off x="9390888" y="1060704"/>
-            <a:ext cx="2231136" cy="219456"/>
+          <p:cNvPr id="20" name="Text 17"/>
+          <p:cNvSpPr txBox="1"/>
+          <p:nvPr/>
+        </p:nvSpPr>
+        <p:spPr>
+          <a:xfrm>
+            <a:off x="8339328" y="914400"/>
+            <a:ext cx="3282696" cy="219456"/>
           </a:xfrm>
           <a:prstGeom prst="rect">
             <a:avLst/>
@@ -11233,7 +12795,7 @@
               <a:buNone/>
             </a:pPr>
             <a:r>
-              <a:rPr lang="en-US" sz="900" b="1" spc="70" kern="0" dirty="0">
+              <a:rPr lang="en-US" sz="1000" b="1" spc="90" kern="0" dirty="0">
                 <a:solidFill>
                   <a:srgbClr val="4338CA"/>
                 </a:solidFill>
@@ -11241,22 +12803,22 @@
                 <a:ea typeface="Arial" pitchFamily="34" charset="-122"/>
                 <a:cs typeface="Arial" pitchFamily="34" charset="-120"/>
               </a:rPr>
-              <a:t>FIXING THE IMPORT FAILURES</a:t>
-            </a:r>
-            <a:endParaRPr lang="en-US" sz="900" dirty="0"/>
-          </a:p>
-        </p:txBody>
-      </p:sp>
-      <p:sp>
-        <p:nvSpPr>
-          <p:cNvPr id="33" name="Text 31"/>
-          <p:cNvSpPr txBox="1"/>
-          <p:nvPr/>
-        </p:nvSpPr>
-        <p:spPr>
-          <a:xfrm>
-            <a:off x="9390888" y="1298448"/>
-            <a:ext cx="2231136" cy="329184"/>
+              <a:t>THE HANDOFF</a:t>
+            </a:r>
+            <a:endParaRPr lang="en-US" sz="1000" dirty="0"/>
+          </a:p>
+        </p:txBody>
+      </p:sp>
+      <p:sp>
+        <p:nvSpPr>
+          <p:cNvPr id="21" name="Text 18"/>
+          <p:cNvSpPr txBox="1"/>
+          <p:nvPr/>
+        </p:nvSpPr>
+        <p:spPr>
+          <a:xfrm>
+            <a:off x="8339328" y="1152144"/>
+            <a:ext cx="3282696" cy="475488"/>
           </a:xfrm>
           <a:prstGeom prst="rect">
             <a:avLst/>
@@ -11275,30 +12837,30 @@
               <a:buNone/>
             </a:pPr>
             <a:r>
-              <a:rPr lang="en-US" sz="800" i="1" dirty="0">
-                <a:solidFill>
-                  <a:srgbClr val="4A4A5E"/>
-                </a:solidFill>
-                <a:latin typeface="Arial" pitchFamily="34" charset="0"/>
-                <a:ea typeface="Arial" pitchFamily="34" charset="-122"/>
-                <a:cs typeface="Arial" pitchFamily="34" charset="-120"/>
-              </a:rPr>
-              <a:t>The one item that is not an AI problem. How it is actually fixed:</a:t>
-            </a:r>
-            <a:endParaRPr lang="en-US" sz="800" dirty="0"/>
-          </a:p>
-        </p:txBody>
-      </p:sp>
-      <p:sp>
-        <p:nvSpPr>
-          <p:cNvPr id="34" name="Text 32"/>
-          <p:cNvSpPr txBox="1"/>
-          <p:nvPr/>
-        </p:nvSpPr>
-        <p:spPr>
-          <a:xfrm>
-            <a:off x="9390888" y="1755648"/>
-            <a:ext cx="2231136" cy="182880"/>
+              <a:rPr lang="en-US" sz="820" i="1" dirty="0">
+                <a:solidFill>
+                  <a:srgbClr val="3A3A5E"/>
+                </a:solidFill>
+                <a:latin typeface="Arial" pitchFamily="34" charset="0"/>
+                <a:ea typeface="Arial" pitchFamily="34" charset="-122"/>
+                <a:cs typeface="Arial" pitchFamily="34" charset="-120"/>
+              </a:rPr>
+              <a:t>The brief asks about the join between the two workflows. Today it is a queue. In the redesign there is nothing to hand over.</a:t>
+            </a:r>
+            <a:endParaRPr lang="en-US" sz="820" dirty="0"/>
+          </a:p>
+        </p:txBody>
+      </p:sp>
+      <p:sp>
+        <p:nvSpPr>
+          <p:cNvPr id="22" name="Text 19"/>
+          <p:cNvSpPr txBox="1"/>
+          <p:nvPr/>
+        </p:nvSpPr>
+        <p:spPr>
+          <a:xfrm>
+            <a:off x="8339328" y="1700784"/>
+            <a:ext cx="3282696" cy="182880"/>
           </a:xfrm>
           <a:prstGeom prst="rect">
             <a:avLst/>
@@ -11314,15 +12876,15 @@
               <a:buNone/>
             </a:pPr>
             <a:r>
-              <a:rPr lang="en-US" sz="840" b="1" dirty="0">
-                <a:solidFill>
-                  <a:srgbClr val="2A2A3E"/>
-                </a:solidFill>
-                <a:latin typeface="Arial" pitchFamily="34" charset="0"/>
-                <a:ea typeface="Arial" pitchFamily="34" charset="-122"/>
-                <a:cs typeface="Arial" pitchFamily="34" charset="-120"/>
-              </a:rPr>
-              <a:t>Sort the failure first</a:t>
+              <a:rPr lang="en-US" sz="840" b="1" spc="100" kern="0" dirty="0">
+                <a:solidFill>
+                  <a:srgbClr val="6A6A7E"/>
+                </a:solidFill>
+                <a:latin typeface="Arial" pitchFamily="34" charset="0"/>
+                <a:ea typeface="Arial" pitchFamily="34" charset="-122"/>
+                <a:cs typeface="Arial" pitchFamily="34" charset="-120"/>
+              </a:rPr>
+              <a:t>TODAY</a:t>
             </a:r>
             <a:endParaRPr lang="en-US" sz="840" dirty="0"/>
           </a:p>
@@ -11330,14 +12892,14 @@
       </p:sp>
       <p:sp>
         <p:nvSpPr>
-          <p:cNvPr id="35" name="Text 33"/>
-          <p:cNvSpPr txBox="1"/>
-          <p:nvPr/>
-        </p:nvSpPr>
-        <p:spPr>
-          <a:xfrm>
-            <a:off x="9390888" y="1929384"/>
-            <a:ext cx="2231136" cy="512064"/>
+          <p:cNvPr id="23" name="Text 20"/>
+          <p:cNvSpPr txBox="1"/>
+          <p:nvPr/>
+        </p:nvSpPr>
+        <p:spPr>
+          <a:xfrm>
+            <a:off x="8339328" y="1920240"/>
+            <a:ext cx="3282696" cy="292608"/>
           </a:xfrm>
           <a:prstGeom prst="rect">
             <a:avLst/>
@@ -11356,7 +12918,7 @@
               <a:buNone/>
             </a:pPr>
             <a:r>
-              <a:rPr lang="en-US" sz="760" dirty="0">
+              <a:rPr lang="en-US" sz="820" dirty="0">
                 <a:solidFill>
                   <a:srgbClr val="4A4A5E"/>
                 </a:solidFill>
@@ -11364,61 +12926,22 @@
                 <a:ea typeface="Arial" pitchFamily="34" charset="-122"/>
                 <a:cs typeface="Arial" pitchFamily="34" charset="-120"/>
               </a:rPr>
-              <a:t>A timeout is worth retrying. A missing field never is — retrying it just fails again.</a:t>
-            </a:r>
-            <a:endParaRPr lang="en-US" sz="760" dirty="0"/>
-          </a:p>
-        </p:txBody>
-      </p:sp>
-      <p:sp>
-        <p:nvSpPr>
-          <p:cNvPr id="36" name="Text 34"/>
-          <p:cNvSpPr txBox="1"/>
-          <p:nvPr/>
-        </p:nvSpPr>
-        <p:spPr>
-          <a:xfrm>
-            <a:off x="9390888" y="2478024"/>
-            <a:ext cx="2231136" cy="182880"/>
-          </a:xfrm>
-          <a:prstGeom prst="rect">
-            <a:avLst/>
-          </a:prstGeom>
-          <a:noFill/>
-          <a:ln/>
-        </p:spPr>
-        <p:txBody>
-          <a:bodyPr wrap="square" lIns="0" tIns="0" rIns="0" bIns="0" rtlCol="0" anchor="ctr"/>
-          <a:lstStyle/>
-          <a:p>
-            <a:pPr indent="0" marL="0">
-              <a:buNone/>
-            </a:pPr>
-            <a:r>
-              <a:rPr lang="en-US" sz="840" b="1" dirty="0">
-                <a:solidFill>
-                  <a:srgbClr val="2A2A3E"/>
-                </a:solidFill>
-                <a:latin typeface="Arial" pitchFamily="34" charset="0"/>
-                <a:ea typeface="Arial" pitchFamily="34" charset="-122"/>
-                <a:cs typeface="Arial" pitchFamily="34" charset="-120"/>
-              </a:rPr>
-              <a:t>Retry with growing gaps</a:t>
-            </a:r>
-            <a:endParaRPr lang="en-US" sz="840" dirty="0"/>
-          </a:p>
-        </p:txBody>
-      </p:sp>
-      <p:sp>
-        <p:nvSpPr>
-          <p:cNvPr id="37" name="Text 35"/>
-          <p:cNvSpPr txBox="1"/>
-          <p:nvPr/>
-        </p:nvSpPr>
-        <p:spPr>
-          <a:xfrm>
-            <a:off x="9390888" y="2651760"/>
-            <a:ext cx="2231136" cy="512064"/>
+              <a:t>•  FNOL closes. The claim is written to IDB.</a:t>
+            </a:r>
+            <a:endParaRPr lang="en-US" sz="820" dirty="0"/>
+          </a:p>
+        </p:txBody>
+      </p:sp>
+      <p:sp>
+        <p:nvSpPr>
+          <p:cNvPr id="24" name="Text 21"/>
+          <p:cNvSpPr txBox="1"/>
+          <p:nvPr/>
+        </p:nvSpPr>
+        <p:spPr>
+          <a:xfrm>
+            <a:off x="8339328" y="2231136"/>
+            <a:ext cx="3282696" cy="292608"/>
           </a:xfrm>
           <a:prstGeom prst="rect">
             <a:avLst/>
@@ -11437,7 +12960,7 @@
               <a:buNone/>
             </a:pPr>
             <a:r>
-              <a:rPr lang="en-US" sz="760" dirty="0">
+              <a:rPr lang="en-US" sz="820" dirty="0">
                 <a:solidFill>
                   <a:srgbClr val="4A4A5E"/>
                 </a:solidFill>
@@ -11445,61 +12968,22 @@
                 <a:ea typeface="Arial" pitchFamily="34" charset="-122"/>
                 <a:cs typeface="Arial" pitchFamily="34" charset="-120"/>
               </a:rPr>
-              <a:t>1s, 2s, 4s, plus a random offset, so 50 stuck claims do not all retry at once.</a:t>
-            </a:r>
-            <a:endParaRPr lang="en-US" sz="760" dirty="0"/>
-          </a:p>
-        </p:txBody>
-      </p:sp>
-      <p:sp>
-        <p:nvSpPr>
-          <p:cNvPr id="38" name="Text 36"/>
-          <p:cNvSpPr txBox="1"/>
-          <p:nvPr/>
-        </p:nvSpPr>
-        <p:spPr>
-          <a:xfrm>
-            <a:off x="9390888" y="3200400"/>
-            <a:ext cx="2231136" cy="182880"/>
-          </a:xfrm>
-          <a:prstGeom prst="rect">
-            <a:avLst/>
-          </a:prstGeom>
-          <a:noFill/>
-          <a:ln/>
-        </p:spPr>
-        <p:txBody>
-          <a:bodyPr wrap="square" lIns="0" tIns="0" rIns="0" bIns="0" rtlCol="0" anchor="ctr"/>
-          <a:lstStyle/>
-          <a:p>
-            <a:pPr indent="0" marL="0">
-              <a:buNone/>
-            </a:pPr>
-            <a:r>
-              <a:rPr lang="en-US" sz="840" b="1" dirty="0">
-                <a:solidFill>
-                  <a:srgbClr val="2A2A3E"/>
-                </a:solidFill>
-                <a:latin typeface="Arial" pitchFamily="34" charset="0"/>
-                <a:ea typeface="Arial" pitchFamily="34" charset="-122"/>
-                <a:cs typeface="Arial" pitchFamily="34" charset="-120"/>
-              </a:rPr>
-              <a:t>One reference per claim</a:t>
-            </a:r>
-            <a:endParaRPr lang="en-US" sz="840" dirty="0"/>
-          </a:p>
-        </p:txBody>
-      </p:sp>
-      <p:sp>
-        <p:nvSpPr>
-          <p:cNvPr id="39" name="Text 37"/>
-          <p:cNvSpPr txBox="1"/>
-          <p:nvPr/>
-        </p:nvSpPr>
-        <p:spPr>
-          <a:xfrm>
-            <a:off x="9390888" y="3374136"/>
-            <a:ext cx="2231136" cy="512064"/>
+              <a:t>•  It waits in a queue for the coverage step.</a:t>
+            </a:r>
+            <a:endParaRPr lang="en-US" sz="820" dirty="0"/>
+          </a:p>
+        </p:txBody>
+      </p:sp>
+      <p:sp>
+        <p:nvSpPr>
+          <p:cNvPr id="25" name="Text 22"/>
+          <p:cNvSpPr txBox="1"/>
+          <p:nvPr/>
+        </p:nvSpPr>
+        <p:spPr>
+          <a:xfrm>
+            <a:off x="8339328" y="2542032"/>
+            <a:ext cx="3282696" cy="292608"/>
           </a:xfrm>
           <a:prstGeom prst="rect">
             <a:avLst/>
@@ -11518,7 +13002,7 @@
               <a:buNone/>
             </a:pPr>
             <a:r>
-              <a:rPr lang="en-US" sz="760" dirty="0">
+              <a:rPr lang="en-US" sz="820" dirty="0">
                 <a:solidFill>
                   <a:srgbClr val="4A4A5E"/>
                 </a:solidFill>
@@ -11526,61 +13010,22 @@
                 <a:ea typeface="Arial" pitchFamily="34" charset="-122"/>
                 <a:cs typeface="Arial" pitchFamily="34" charset="-120"/>
               </a:rPr>
-              <a:t>The same key on every attempt, so a replay cannot create the claim twice.</a:t>
-            </a:r>
-            <a:endParaRPr lang="en-US" sz="760" dirty="0"/>
-          </a:p>
-        </p:txBody>
-      </p:sp>
-      <p:sp>
-        <p:nvSpPr>
-          <p:cNvPr id="40" name="Text 38"/>
-          <p:cNvSpPr txBox="1"/>
-          <p:nvPr/>
-        </p:nvSpPr>
-        <p:spPr>
-          <a:xfrm>
-            <a:off x="9390888" y="3922776"/>
-            <a:ext cx="2231136" cy="182880"/>
-          </a:xfrm>
-          <a:prstGeom prst="rect">
-            <a:avLst/>
-          </a:prstGeom>
-          <a:noFill/>
-          <a:ln/>
-        </p:spPr>
-        <p:txBody>
-          <a:bodyPr wrap="square" lIns="0" tIns="0" rIns="0" bIns="0" rtlCol="0" anchor="ctr"/>
-          <a:lstStyle/>
-          <a:p>
-            <a:pPr indent="0" marL="0">
-              <a:buNone/>
-            </a:pPr>
-            <a:r>
-              <a:rPr lang="en-US" sz="840" b="1" dirty="0">
-                <a:solidFill>
-                  <a:srgbClr val="2A2A3E"/>
-                </a:solidFill>
-                <a:latin typeface="Arial" pitchFamily="34" charset="0"/>
-                <a:ea typeface="Arial" pitchFamily="34" charset="-122"/>
-                <a:cs typeface="Arial" pitchFamily="34" charset="-120"/>
-              </a:rPr>
-              <a:t>Park failures, never drop them</a:t>
-            </a:r>
-            <a:endParaRPr lang="en-US" sz="840" dirty="0"/>
-          </a:p>
-        </p:txBody>
-      </p:sp>
-      <p:sp>
-        <p:nvSpPr>
-          <p:cNvPr id="41" name="Text 39"/>
-          <p:cNvSpPr txBox="1"/>
-          <p:nvPr/>
-        </p:nvSpPr>
-        <p:spPr>
-          <a:xfrm>
-            <a:off x="9390888" y="4096512"/>
-            <a:ext cx="2231136" cy="512064"/>
+              <a:t>•  A second person opens the same documents.</a:t>
+            </a:r>
+            <a:endParaRPr lang="en-US" sz="820" dirty="0"/>
+          </a:p>
+        </p:txBody>
+      </p:sp>
+      <p:sp>
+        <p:nvSpPr>
+          <p:cNvPr id="26" name="Text 23"/>
+          <p:cNvSpPr txBox="1"/>
+          <p:nvPr/>
+        </p:nvSpPr>
+        <p:spPr>
+          <a:xfrm>
+            <a:off x="8339328" y="2852928"/>
+            <a:ext cx="3282696" cy="292608"/>
           </a:xfrm>
           <a:prstGeom prst="rect">
             <a:avLst/>
@@ -11599,7 +13044,7 @@
               <a:buNone/>
             </a:pPr>
             <a:r>
-              <a:rPr lang="en-US" sz="760" dirty="0">
+              <a:rPr lang="en-US" sz="820" dirty="0">
                 <a:solidFill>
                   <a:srgbClr val="4A4A5E"/>
                 </a:solidFill>
@@ -11607,22 +13052,22 @@
                 <a:ea typeface="Arial" pitchFamily="34" charset="-122"/>
                 <a:cs typeface="Arial" pitchFamily="34" charset="-120"/>
               </a:rPr>
-              <a:t>They go to a holding queue with the error, so someone can fix and replay.</a:t>
-            </a:r>
-            <a:endParaRPr lang="en-US" sz="760" dirty="0"/>
-          </a:p>
-        </p:txBody>
-      </p:sp>
-      <p:sp>
-        <p:nvSpPr>
-          <p:cNvPr id="42" name="Text 40"/>
-          <p:cNvSpPr txBox="1"/>
-          <p:nvPr/>
-        </p:nvSpPr>
-        <p:spPr>
-          <a:xfrm>
-            <a:off x="9390888" y="4645152"/>
-            <a:ext cx="2231136" cy="182880"/>
+              <a:t>•  They re-ask a question FNOL already asked.</a:t>
+            </a:r>
+            <a:endParaRPr lang="en-US" sz="820" dirty="0"/>
+          </a:p>
+        </p:txBody>
+      </p:sp>
+      <p:sp>
+        <p:nvSpPr>
+          <p:cNvPr id="27" name="Text 24"/>
+          <p:cNvSpPr txBox="1"/>
+          <p:nvPr/>
+        </p:nvSpPr>
+        <p:spPr>
+          <a:xfrm>
+            <a:off x="8339328" y="3291840"/>
+            <a:ext cx="3282696" cy="182880"/>
           </a:xfrm>
           <a:prstGeom prst="rect">
             <a:avLst/>
@@ -11638,15 +13083,15 @@
               <a:buNone/>
             </a:pPr>
             <a:r>
-              <a:rPr lang="en-US" sz="840" b="1" dirty="0">
-                <a:solidFill>
-                  <a:srgbClr val="2A2A3E"/>
-                </a:solidFill>
-                <a:latin typeface="Arial" pitchFamily="34" charset="0"/>
-                <a:ea typeface="Arial" pitchFamily="34" charset="-122"/>
-                <a:cs typeface="Arial" pitchFamily="34" charset="-120"/>
-              </a:rPr>
-              <a:t>Alert on the rate, not the count</a:t>
+              <a:rPr lang="en-US" sz="840" b="1" spc="100" kern="0" dirty="0">
+                <a:solidFill>
+                  <a:srgbClr val="4338CA"/>
+                </a:solidFill>
+                <a:latin typeface="Arial" pitchFamily="34" charset="0"/>
+                <a:ea typeface="Arial" pitchFamily="34" charset="-122"/>
+                <a:cs typeface="Arial" pitchFamily="34" charset="-120"/>
+              </a:rPr>
+              <a:t>REDESIGNED</a:t>
             </a:r>
             <a:endParaRPr lang="en-US" sz="840" dirty="0"/>
           </a:p>
@@ -11654,14 +13099,14 @@
       </p:sp>
       <p:sp>
         <p:nvSpPr>
-          <p:cNvPr id="43" name="Text 41"/>
-          <p:cNvSpPr txBox="1"/>
-          <p:nvPr/>
-        </p:nvSpPr>
-        <p:spPr>
-          <a:xfrm>
-            <a:off x="9390888" y="4818888"/>
-            <a:ext cx="2231136" cy="512064"/>
+          <p:cNvPr id="28" name="Text 25"/>
+          <p:cNvSpPr txBox="1"/>
+          <p:nvPr/>
+        </p:nvSpPr>
+        <p:spPr>
+          <a:xfrm>
+            <a:off x="8339328" y="3511296"/>
+            <a:ext cx="3282696" cy="402336"/>
           </a:xfrm>
           <a:prstGeom prst="rect">
             <a:avLst/>
@@ -11680,30 +13125,30 @@
               <a:buNone/>
             </a:pPr>
             <a:r>
-              <a:rPr lang="en-US" sz="760" dirty="0">
-                <a:solidFill>
-                  <a:srgbClr val="4A4A5E"/>
-                </a:solidFill>
-                <a:latin typeface="Arial" pitchFamily="34" charset="0"/>
-                <a:ea typeface="Arial" pitchFamily="34" charset="-122"/>
-                <a:cs typeface="Arial" pitchFamily="34" charset="-120"/>
-              </a:rPr>
-              <a:t>One stuck claim is normal. Twenty in an hour means something broke.</a:t>
-            </a:r>
-            <a:endParaRPr lang="en-US" sz="760" dirty="0"/>
-          </a:p>
-        </p:txBody>
-      </p:sp>
-      <p:sp>
-        <p:nvSpPr>
-          <p:cNvPr id="44" name="Text 42"/>
-          <p:cNvSpPr txBox="1"/>
-          <p:nvPr/>
-        </p:nvSpPr>
-        <p:spPr>
-          <a:xfrm>
-            <a:off x="365760" y="6035040"/>
-            <a:ext cx="11430000" cy="256032"/>
+              <a:rPr lang="en-US" sz="820" dirty="0">
+                <a:solidFill>
+                  <a:srgbClr val="2A2A3E"/>
+                </a:solidFill>
+                <a:latin typeface="Arial" pitchFamily="34" charset="0"/>
+                <a:ea typeface="Arial" pitchFamily="34" charset="-122"/>
+                <a:cs typeface="Arial" pitchFamily="34" charset="-120"/>
+              </a:rPr>
+              <a:t>•  One state graph spans both workflows.</a:t>
+            </a:r>
+            <a:endParaRPr lang="en-US" sz="820" dirty="0"/>
+          </a:p>
+        </p:txBody>
+      </p:sp>
+      <p:sp>
+        <p:nvSpPr>
+          <p:cNvPr id="29" name="Text 26"/>
+          <p:cNvSpPr txBox="1"/>
+          <p:nvPr/>
+        </p:nvSpPr>
+        <p:spPr>
+          <a:xfrm>
+            <a:off x="8339328" y="3895344"/>
+            <a:ext cx="3282696" cy="402336"/>
           </a:xfrm>
           <a:prstGeom prst="rect">
             <a:avLst/>
@@ -11716,6 +13161,240 @@
           <a:lstStyle/>
           <a:p>
             <a:pPr indent="0" marL="0">
+              <a:lnSpc>
+                <a:spcPct val="115000"/>
+              </a:lnSpc>
+              <a:buNone/>
+            </a:pPr>
+            <a:r>
+              <a:rPr lang="en-US" sz="820" dirty="0">
+                <a:solidFill>
+                  <a:srgbClr val="2A2A3E"/>
+                </a:solidFill>
+                <a:latin typeface="Arial" pitchFamily="34" charset="0"/>
+                <a:ea typeface="Arial" pitchFamily="34" charset="-122"/>
+                <a:cs typeface="Arial" pitchFamily="34" charset="-120"/>
+              </a:rPr>
+              <a:t>•  Extraction captures policy, dates, CVR and employment status once.</a:t>
+            </a:r>
+            <a:endParaRPr lang="en-US" sz="820" dirty="0"/>
+          </a:p>
+        </p:txBody>
+      </p:sp>
+      <p:sp>
+        <p:nvSpPr>
+          <p:cNvPr id="30" name="Text 27"/>
+          <p:cNvSpPr txBox="1"/>
+          <p:nvPr/>
+        </p:nvSpPr>
+        <p:spPr>
+          <a:xfrm>
+            <a:off x="8339328" y="4279392"/>
+            <a:ext cx="3282696" cy="402336"/>
+          </a:xfrm>
+          <a:prstGeom prst="rect">
+            <a:avLst/>
+          </a:prstGeom>
+          <a:noFill/>
+          <a:ln/>
+        </p:spPr>
+        <p:txBody>
+          <a:bodyPr wrap="square" lIns="0" tIns="0" rIns="0" bIns="0" rtlCol="0" anchor="ctr"/>
+          <a:lstStyle/>
+          <a:p>
+            <a:pPr indent="0" marL="0">
+              <a:lnSpc>
+                <a:spcPct val="115000"/>
+              </a:lnSpc>
+              <a:buNone/>
+            </a:pPr>
+            <a:r>
+              <a:rPr lang="en-US" sz="820" dirty="0">
+                <a:solidFill>
+                  <a:srgbClr val="2A2A3E"/>
+                </a:solidFill>
+                <a:latin typeface="Arial" pitchFamily="34" charset="0"/>
+                <a:ea typeface="Arial" pitchFamily="34" charset="-122"/>
+                <a:cs typeface="Arial" pitchFamily="34" charset="-120"/>
+              </a:rPr>
+              <a:t>•  Coverage is a rules pass over state that already exists.</a:t>
+            </a:r>
+            <a:endParaRPr lang="en-US" sz="820" dirty="0"/>
+          </a:p>
+        </p:txBody>
+      </p:sp>
+      <p:sp>
+        <p:nvSpPr>
+          <p:cNvPr id="31" name="Text 28"/>
+          <p:cNvSpPr txBox="1"/>
+          <p:nvPr/>
+        </p:nvSpPr>
+        <p:spPr>
+          <a:xfrm>
+            <a:off x="8339328" y="4663440"/>
+            <a:ext cx="3282696" cy="402336"/>
+          </a:xfrm>
+          <a:prstGeom prst="rect">
+            <a:avLst/>
+          </a:prstGeom>
+          <a:noFill/>
+          <a:ln/>
+        </p:spPr>
+        <p:txBody>
+          <a:bodyPr wrap="square" lIns="0" tIns="0" rIns="0" bIns="0" rtlCol="0" anchor="ctr"/>
+          <a:lstStyle/>
+          <a:p>
+            <a:pPr indent="0" marL="0">
+              <a:lnSpc>
+                <a:spcPct val="115000"/>
+              </a:lnSpc>
+              <a:buNone/>
+            </a:pPr>
+            <a:r>
+              <a:rPr lang="en-US" sz="820" dirty="0">
+                <a:solidFill>
+                  <a:srgbClr val="2A2A3E"/>
+                </a:solidFill>
+                <a:latin typeface="Arial" pitchFamily="34" charset="0"/>
+                <a:ea typeface="Arial" pitchFamily="34" charset="-122"/>
+                <a:cs typeface="Arial" pitchFamily="34" charset="-120"/>
+              </a:rPr>
+              <a:t>•  It runs beside claim creation, not after it.</a:t>
+            </a:r>
+            <a:endParaRPr lang="en-US" sz="820" dirty="0"/>
+          </a:p>
+        </p:txBody>
+      </p:sp>
+      <p:sp>
+        <p:nvSpPr>
+          <p:cNvPr id="32" name="Text 29"/>
+          <p:cNvSpPr txBox="1"/>
+          <p:nvPr/>
+        </p:nvSpPr>
+        <p:spPr>
+          <a:xfrm>
+            <a:off x="8339328" y="5047488"/>
+            <a:ext cx="3282696" cy="402336"/>
+          </a:xfrm>
+          <a:prstGeom prst="rect">
+            <a:avLst/>
+          </a:prstGeom>
+          <a:noFill/>
+          <a:ln/>
+        </p:spPr>
+        <p:txBody>
+          <a:bodyPr wrap="square" lIns="0" tIns="0" rIns="0" bIns="0" rtlCol="0" anchor="ctr"/>
+          <a:lstStyle/>
+          <a:p>
+            <a:pPr indent="0" marL="0">
+              <a:lnSpc>
+                <a:spcPct val="115000"/>
+              </a:lnSpc>
+              <a:buNone/>
+            </a:pPr>
+            <a:r>
+              <a:rPr lang="en-US" sz="820" dirty="0">
+                <a:solidFill>
+                  <a:srgbClr val="2A2A3E"/>
+                </a:solidFill>
+                <a:latin typeface="Arial" pitchFamily="34" charset="0"/>
+                <a:ea typeface="Arial" pitchFamily="34" charset="-122"/>
+                <a:cs typeface="Arial" pitchFamily="34" charset="-120"/>
+              </a:rPr>
+              <a:t>•  Only the exceptions become anyone's work.</a:t>
+            </a:r>
+            <a:endParaRPr lang="en-US" sz="820" dirty="0"/>
+          </a:p>
+        </p:txBody>
+      </p:sp>
+      <p:sp>
+        <p:nvSpPr>
+          <p:cNvPr id="33" name="Shape 30"/>
+          <p:cNvSpPr/>
+          <p:nvPr/>
+        </p:nvSpPr>
+        <p:spPr>
+          <a:xfrm>
+            <a:off x="8339328" y="5431536"/>
+            <a:ext cx="3282696" cy="402336"/>
+          </a:xfrm>
+          <a:prstGeom prst="roundRect">
+            <a:avLst>
+              <a:gd name="adj" fmla="val 11364"/>
+            </a:avLst>
+          </a:prstGeom>
+          <a:solidFill>
+            <a:srgbClr val="FFFFFF"/>
+          </a:solidFill>
+          <a:ln w="12700">
+            <a:solidFill>
+              <a:srgbClr val="4338CA"/>
+            </a:solidFill>
+            <a:prstDash val="solid"/>
+          </a:ln>
+        </p:spPr>
+      </p:sp>
+      <p:sp>
+        <p:nvSpPr>
+          <p:cNvPr id="34" name="Text 31"/>
+          <p:cNvSpPr txBox="1"/>
+          <p:nvPr/>
+        </p:nvSpPr>
+        <p:spPr>
+          <a:xfrm>
+            <a:off x="8430768" y="5431536"/>
+            <a:ext cx="3099816" cy="402336"/>
+          </a:xfrm>
+          <a:prstGeom prst="rect">
+            <a:avLst/>
+          </a:prstGeom>
+          <a:noFill/>
+          <a:ln/>
+        </p:spPr>
+        <p:txBody>
+          <a:bodyPr wrap="square" lIns="0" tIns="0" rIns="0" bIns="0" rtlCol="0" anchor="ctr"/>
+          <a:lstStyle/>
+          <a:p>
+            <a:pPr algn="ctr" indent="0" marL="0">
+              <a:buNone/>
+            </a:pPr>
+            <a:r>
+              <a:rPr lang="en-US" sz="820" b="1" dirty="0">
+                <a:solidFill>
+                  <a:srgbClr val="4338CA"/>
+                </a:solidFill>
+                <a:latin typeface="Arial" pitchFamily="34" charset="0"/>
+                <a:ea typeface="Arial" pitchFamily="34" charset="-122"/>
+                <a:cs typeface="Arial" pitchFamily="34" charset="-120"/>
+              </a:rPr>
+              <a:t>A handoff you delete cannot be the thing that breaks.</a:t>
+            </a:r>
+            <a:endParaRPr lang="en-US" sz="820" dirty="0"/>
+          </a:p>
+        </p:txBody>
+      </p:sp>
+      <p:sp>
+        <p:nvSpPr>
+          <p:cNvPr id="35" name="Text 32"/>
+          <p:cNvSpPr txBox="1"/>
+          <p:nvPr/>
+        </p:nvSpPr>
+        <p:spPr>
+          <a:xfrm>
+            <a:off x="365760" y="6053328"/>
+            <a:ext cx="11430000" cy="237744"/>
+          </a:xfrm>
+          <a:prstGeom prst="rect">
+            <a:avLst/>
+          </a:prstGeom>
+          <a:noFill/>
+          <a:ln/>
+        </p:spPr>
+        <p:txBody>
+          <a:bodyPr wrap="square" lIns="0" tIns="0" rIns="0" bIns="0" rtlCol="0" anchor="ctr"/>
+          <a:lstStyle/>
+          <a:p>
+            <a:pPr indent="0" marL="0">
               <a:buNone/>
             </a:pPr>
             <a:r>
@@ -11727,7 +13406,7 @@
                 <a:ea typeface="Arial" pitchFamily="34" charset="-122"/>
                 <a:cs typeface="Arial" pitchFamily="34" charset="-120"/>
               </a:rPr>
-              <a:t>AES rulings and underwriting authority are deliberately absent — those decisions are not ours to make · frequencies from the case study</a:t>
+              <a:t>Causes and their handling are taken from Diagram 2 of the brief · “who decides” is the design choice, not an observation</a:t>
             </a:r>
             <a:endParaRPr lang="en-US" sz="700" dirty="0"/>
           </a:p>
@@ -11735,7 +13414,7 @@
       </p:sp>
       <p:sp>
         <p:nvSpPr>
-          <p:cNvPr id="45" name="Text 43"/>
+          <p:cNvPr id="36" name="Text 33"/>
           <p:cNvSpPr txBox="1"/>
           <p:nvPr/>
         </p:nvSpPr>
@@ -11774,7 +13453,7 @@
       </p:sp>
       <p:sp>
         <p:nvSpPr>
-          <p:cNvPr id="46" name="Text 44"/>
+          <p:cNvPr id="37" name="Text 34"/>
           <p:cNvSpPr txBox="1"/>
           <p:nvPr/>
         </p:nvSpPr>
@@ -11805,7 +13484,7 @@
                 <a:ea typeface="Arial" pitchFamily="34" charset="-122"/>
                 <a:cs typeface="Arial" pitchFamily="34" charset="-120"/>
               </a:rPr>
-              <a:t>5 / 7</a:t>
+              <a:t>5 / 9</a:t>
             </a:r>
             <a:endParaRPr lang="en-US" sz="800" dirty="0"/>
           </a:p>
@@ -11876,6 +13555,3832 @@
                 <a:ea typeface="Cambria" pitchFamily="34" charset="-122"/>
                 <a:cs typeface="Cambria" pitchFamily="34" charset="-120"/>
               </a:rPr>
+              <a:t>Start where a mistake is cheap — that is what earns the trust the bigger wins depend on</a:t>
+            </a:r>
+            <a:endParaRPr lang="en-US" sz="1400" dirty="0"/>
+          </a:p>
+        </p:txBody>
+      </p:sp>
+      <p:sp>
+        <p:nvSpPr>
+          <p:cNvPr id="3" name="Text 1"/>
+          <p:cNvSpPr txBox="1"/>
+          <p:nvPr/>
+        </p:nvSpPr>
+        <p:spPr>
+          <a:xfrm>
+            <a:off x="9509760" y="146304"/>
+            <a:ext cx="2313432" cy="274320"/>
+          </a:xfrm>
+          <a:prstGeom prst="rect">
+            <a:avLst/>
+          </a:prstGeom>
+          <a:noFill/>
+          <a:ln/>
+        </p:spPr>
+        <p:txBody>
+          <a:bodyPr wrap="square" lIns="0" tIns="0" rIns="0" bIns="0" rtlCol="0" anchor="ctr"/>
+          <a:lstStyle/>
+          <a:p>
+            <a:pPr algn="r" indent="0" marL="0">
+              <a:buNone/>
+            </a:pPr>
+            <a:r>
+              <a:rPr lang="en-US" sz="950" b="1" spc="140" kern="0" dirty="0">
+                <a:solidFill>
+                  <a:srgbClr val="5B6472"/>
+                </a:solidFill>
+                <a:latin typeface="Arial" pitchFamily="34" charset="0"/>
+                <a:ea typeface="Arial" pitchFamily="34" charset="-122"/>
+                <a:cs typeface="Arial" pitchFamily="34" charset="-120"/>
+              </a:rPr>
+              <a:t>SEQUENCING</a:t>
+            </a:r>
+            <a:endParaRPr lang="en-US" sz="950" dirty="0"/>
+          </a:p>
+        </p:txBody>
+      </p:sp>
+      <p:sp>
+        <p:nvSpPr>
+          <p:cNvPr id="4" name="Text 2"/>
+          <p:cNvSpPr txBox="1"/>
+          <p:nvPr/>
+        </p:nvSpPr>
+        <p:spPr>
+          <a:xfrm>
+            <a:off x="365760" y="457200"/>
+            <a:ext cx="11430000" cy="237744"/>
+          </a:xfrm>
+          <a:prstGeom prst="rect">
+            <a:avLst/>
+          </a:prstGeom>
+          <a:noFill/>
+          <a:ln/>
+        </p:spPr>
+        <p:txBody>
+          <a:bodyPr wrap="square" lIns="0" tIns="0" rIns="0" bIns="0" rtlCol="0" anchor="ctr"/>
+          <a:lstStyle/>
+          <a:p>
+            <a:pPr indent="0" marL="0">
+              <a:buNone/>
+            </a:pPr>
+            <a:r>
+              <a:rPr lang="en-US" sz="950" dirty="0">
+                <a:solidFill>
+                  <a:srgbClr val="5B6472"/>
+                </a:solidFill>
+                <a:latin typeface="Arial" pitchFamily="34" charset="0"/>
+                <a:ea typeface="Arial" pitchFamily="34" charset="-122"/>
+                <a:cs typeface="Arial" pitchFamily="34" charset="-120"/>
+              </a:rPr>
+              <a:t>“Hard” means build effort and regulatory exposure together, not just weeks of work</a:t>
+            </a:r>
+            <a:endParaRPr lang="en-US" sz="950" dirty="0"/>
+          </a:p>
+        </p:txBody>
+      </p:sp>
+      <p:sp>
+        <p:nvSpPr>
+          <p:cNvPr id="5" name="Text 3"/>
+          <p:cNvSpPr txBox="1"/>
+          <p:nvPr/>
+        </p:nvSpPr>
+        <p:spPr>
+          <a:xfrm rot="16200000">
+            <a:off x="18288" y="3072384"/>
+            <a:ext cx="1600200" cy="256032"/>
+          </a:xfrm>
+          <a:prstGeom prst="rect">
+            <a:avLst/>
+          </a:prstGeom>
+          <a:noFill/>
+          <a:ln/>
+        </p:spPr>
+        <p:txBody>
+          <a:bodyPr wrap="square" lIns="0" tIns="0" rIns="0" bIns="0" rtlCol="0" anchor="ctr"/>
+          <a:lstStyle/>
+          <a:p>
+            <a:pPr algn="ctr" indent="0" marL="0">
+              <a:buNone/>
+            </a:pPr>
+            <a:r>
+              <a:rPr lang="en-US" sz="800" b="1" dirty="0">
+                <a:solidFill>
+                  <a:srgbClr val="5B6472"/>
+                </a:solidFill>
+                <a:latin typeface="Arial" pitchFamily="34" charset="0"/>
+                <a:ea typeface="Arial" pitchFamily="34" charset="-122"/>
+                <a:cs typeface="Arial" pitchFamily="34" charset="-120"/>
+              </a:rPr>
+              <a:t>HOW OFTEN IT HAPPENS  →</a:t>
+            </a:r>
+            <a:endParaRPr lang="en-US" sz="800" dirty="0"/>
+          </a:p>
+        </p:txBody>
+      </p:sp>
+      <p:sp>
+        <p:nvSpPr>
+          <p:cNvPr id="6" name="Text 4"/>
+          <p:cNvSpPr txBox="1"/>
+          <p:nvPr/>
+        </p:nvSpPr>
+        <p:spPr>
+          <a:xfrm>
+            <a:off x="1051560" y="5577840"/>
+            <a:ext cx="7863840" cy="219456"/>
+          </a:xfrm>
+          <a:prstGeom prst="rect">
+            <a:avLst/>
+          </a:prstGeom>
+          <a:noFill/>
+          <a:ln/>
+        </p:spPr>
+        <p:txBody>
+          <a:bodyPr wrap="square" lIns="0" tIns="0" rIns="0" bIns="0" rtlCol="0" anchor="ctr"/>
+          <a:lstStyle/>
+          <a:p>
+            <a:pPr algn="ctr" indent="0" marL="0">
+              <a:buNone/>
+            </a:pPr>
+            <a:r>
+              <a:rPr lang="en-US" sz="800" b="1" dirty="0">
+                <a:solidFill>
+                  <a:srgbClr val="5B6472"/>
+                </a:solidFill>
+                <a:latin typeface="Arial" pitchFamily="34" charset="0"/>
+                <a:ea typeface="Arial" pitchFamily="34" charset="-122"/>
+                <a:cs typeface="Arial" pitchFamily="34" charset="-120"/>
+              </a:rPr>
+              <a:t>HOW HARD AND HOW RISKY IT IS  →</a:t>
+            </a:r>
+            <a:endParaRPr lang="en-US" sz="800" dirty="0"/>
+          </a:p>
+        </p:txBody>
+      </p:sp>
+      <p:sp>
+        <p:nvSpPr>
+          <p:cNvPr id="7" name="Shape 5"/>
+          <p:cNvSpPr/>
+          <p:nvPr/>
+        </p:nvSpPr>
+        <p:spPr>
+          <a:xfrm>
+            <a:off x="1051560" y="914400"/>
+            <a:ext cx="3931920" cy="2286000"/>
+          </a:xfrm>
+          <a:prstGeom prst="rect">
+            <a:avLst/>
+          </a:prstGeom>
+          <a:solidFill>
+            <a:srgbClr val="FDF3E3"/>
+          </a:solidFill>
+          <a:ln w="31750">
+            <a:solidFill>
+              <a:srgbClr val="FFFFFF"/>
+            </a:solidFill>
+            <a:prstDash val="solid"/>
+          </a:ln>
+        </p:spPr>
+      </p:sp>
+      <p:sp>
+        <p:nvSpPr>
+          <p:cNvPr id="8" name="Text 6"/>
+          <p:cNvSpPr txBox="1"/>
+          <p:nvPr/>
+        </p:nvSpPr>
+        <p:spPr>
+          <a:xfrm>
+            <a:off x="1234440" y="1060704"/>
+            <a:ext cx="3566160" cy="237744"/>
+          </a:xfrm>
+          <a:prstGeom prst="rect">
+            <a:avLst/>
+          </a:prstGeom>
+          <a:noFill/>
+          <a:ln/>
+        </p:spPr>
+        <p:txBody>
+          <a:bodyPr wrap="square" lIns="0" tIns="0" rIns="0" bIns="0" rtlCol="0" anchor="ctr"/>
+          <a:lstStyle/>
+          <a:p>
+            <a:pPr indent="0" marL="0">
+              <a:buNone/>
+            </a:pPr>
+            <a:r>
+              <a:rPr lang="en-US" sz="1000" b="1" spc="80" kern="0" dirty="0">
+                <a:solidFill>
+                  <a:srgbClr val="D97706"/>
+                </a:solidFill>
+                <a:latin typeface="Arial" pitchFamily="34" charset="0"/>
+                <a:ea typeface="Arial" pitchFamily="34" charset="-122"/>
+                <a:cs typeface="Arial" pitchFamily="34" charset="-120"/>
+              </a:rPr>
+              <a:t>WAVE 1 — START HERE</a:t>
+            </a:r>
+            <a:endParaRPr lang="en-US" sz="1000" dirty="0"/>
+          </a:p>
+        </p:txBody>
+      </p:sp>
+      <p:sp>
+        <p:nvSpPr>
+          <p:cNvPr id="9" name="Text 7"/>
+          <p:cNvSpPr txBox="1"/>
+          <p:nvPr/>
+        </p:nvSpPr>
+        <p:spPr>
+          <a:xfrm>
+            <a:off x="1234440" y="1298448"/>
+            <a:ext cx="3566160" cy="219456"/>
+          </a:xfrm>
+          <a:prstGeom prst="rect">
+            <a:avLst/>
+          </a:prstGeom>
+          <a:noFill/>
+          <a:ln/>
+        </p:spPr>
+        <p:txBody>
+          <a:bodyPr wrap="square" lIns="0" tIns="0" rIns="0" bIns="0" rtlCol="0" anchor="ctr"/>
+          <a:lstStyle/>
+          <a:p>
+            <a:pPr indent="0" marL="0">
+              <a:buNone/>
+            </a:pPr>
+            <a:r>
+              <a:rPr lang="en-US" sz="800" i="1" dirty="0">
+                <a:solidFill>
+                  <a:srgbClr val="5B6472"/>
+                </a:solidFill>
+                <a:latin typeface="Arial" pitchFamily="34" charset="0"/>
+                <a:ea typeface="Arial" pitchFamily="34" charset="-122"/>
+                <a:cs typeface="Arial" pitchFamily="34" charset="-120"/>
+              </a:rPr>
+              <a:t>cheap to get wrong, happens constantly</a:t>
+            </a:r>
+            <a:endParaRPr lang="en-US" sz="800" dirty="0"/>
+          </a:p>
+        </p:txBody>
+      </p:sp>
+      <p:sp>
+        <p:nvSpPr>
+          <p:cNvPr id="10" name="Shape 8"/>
+          <p:cNvSpPr/>
+          <p:nvPr/>
+        </p:nvSpPr>
+        <p:spPr>
+          <a:xfrm>
+            <a:off x="1280160" y="1627632"/>
+            <a:ext cx="3474720" cy="566928"/>
+          </a:xfrm>
+          <a:prstGeom prst="roundRect">
+            <a:avLst>
+              <a:gd name="adj" fmla="val 8065"/>
+            </a:avLst>
+          </a:prstGeom>
+          <a:solidFill>
+            <a:srgbClr val="FFFFFF"/>
+          </a:solidFill>
+          <a:ln w="15240">
+            <a:solidFill>
+              <a:srgbClr val="D97706"/>
+            </a:solidFill>
+            <a:prstDash val="solid"/>
+          </a:ln>
+        </p:spPr>
+      </p:sp>
+      <p:sp>
+        <p:nvSpPr>
+          <p:cNvPr id="11" name="Text 9"/>
+          <p:cNvSpPr txBox="1"/>
+          <p:nvPr/>
+        </p:nvSpPr>
+        <p:spPr>
+          <a:xfrm>
+            <a:off x="1417320" y="1627632"/>
+            <a:ext cx="3200400" cy="566928"/>
+          </a:xfrm>
+          <a:prstGeom prst="rect">
+            <a:avLst/>
+          </a:prstGeom>
+          <a:noFill/>
+          <a:ln/>
+        </p:spPr>
+        <p:txBody>
+          <a:bodyPr wrap="square" lIns="0" tIns="0" rIns="0" bIns="0" rtlCol="0" anchor="ctr"/>
+          <a:lstStyle/>
+          <a:p>
+            <a:pPr indent="0" marL="0">
+              <a:lnSpc>
+                <a:spcPct val="115000"/>
+              </a:lnSpc>
+              <a:buNone/>
+            </a:pPr>
+            <a:r>
+              <a:rPr lang="en-US" sz="920" b="1" dirty="0">
+                <a:solidFill>
+                  <a:srgbClr val="1B2430"/>
+                </a:solidFill>
+                <a:latin typeface="Arial" pitchFamily="34" charset="0"/>
+                <a:ea typeface="Arial" pitchFamily="34" charset="-122"/>
+                <a:cs typeface="Arial" pitchFamily="34" charset="-120"/>
+              </a:rPr>
+              <a:t>Read the claim and classify it
+</a:t>
+            </a:r>
+            <a:endParaRPr lang="en-US" sz="920" dirty="0"/>
+          </a:p>
+          <a:p>
+            <a:pPr indent="0" marL="0">
+              <a:lnSpc>
+                <a:spcPct val="115000"/>
+              </a:lnSpc>
+              <a:buNone/>
+            </a:pPr>
+            <a:r>
+              <a:rPr lang="en-US" sz="800" dirty="0">
+                <a:solidFill>
+                  <a:srgbClr val="5B6472"/>
+                </a:solidFill>
+                <a:latin typeface="Arial" pitchFamily="34" charset="0"/>
+                <a:ea typeface="Arial" pitchFamily="34" charset="-122"/>
+                <a:cs typeface="Arial" pitchFamily="34" charset="-120"/>
+              </a:rPr>
+              <a:t>ends the one-person dependency on teeth claims</a:t>
+            </a:r>
+            <a:endParaRPr lang="en-US" sz="920" dirty="0"/>
+          </a:p>
+        </p:txBody>
+      </p:sp>
+      <p:sp>
+        <p:nvSpPr>
+          <p:cNvPr id="12" name="Shape 10"/>
+          <p:cNvSpPr/>
+          <p:nvPr/>
+        </p:nvSpPr>
+        <p:spPr>
+          <a:xfrm>
+            <a:off x="1280160" y="2322576"/>
+            <a:ext cx="3474720" cy="566928"/>
+          </a:xfrm>
+          <a:prstGeom prst="roundRect">
+            <a:avLst>
+              <a:gd name="adj" fmla="val 8065"/>
+            </a:avLst>
+          </a:prstGeom>
+          <a:solidFill>
+            <a:srgbClr val="FFFFFF"/>
+          </a:solidFill>
+          <a:ln w="15240">
+            <a:solidFill>
+              <a:srgbClr val="D97706"/>
+            </a:solidFill>
+            <a:prstDash val="solid"/>
+          </a:ln>
+        </p:spPr>
+      </p:sp>
+      <p:sp>
+        <p:nvSpPr>
+          <p:cNvPr id="13" name="Text 11"/>
+          <p:cNvSpPr txBox="1"/>
+          <p:nvPr/>
+        </p:nvSpPr>
+        <p:spPr>
+          <a:xfrm>
+            <a:off x="1417320" y="2322576"/>
+            <a:ext cx="3200400" cy="566928"/>
+          </a:xfrm>
+          <a:prstGeom prst="rect">
+            <a:avLst/>
+          </a:prstGeom>
+          <a:noFill/>
+          <a:ln/>
+        </p:spPr>
+        <p:txBody>
+          <a:bodyPr wrap="square" lIns="0" tIns="0" rIns="0" bIns="0" rtlCol="0" anchor="ctr"/>
+          <a:lstStyle/>
+          <a:p>
+            <a:pPr indent="0" marL="0">
+              <a:lnSpc>
+                <a:spcPct val="115000"/>
+              </a:lnSpc>
+              <a:buNone/>
+            </a:pPr>
+            <a:r>
+              <a:rPr lang="en-US" sz="920" b="1" dirty="0">
+                <a:solidFill>
+                  <a:srgbClr val="1B2430"/>
+                </a:solidFill>
+                <a:latin typeface="Arial" pitchFamily="34" charset="0"/>
+                <a:ea typeface="Arial" pitchFamily="34" charset="-122"/>
+                <a:cs typeface="Arial" pitchFamily="34" charset="-120"/>
+              </a:rPr>
+              <a:t>Check CPR, policy and duplicates
+</a:t>
+            </a:r>
+            <a:endParaRPr lang="en-US" sz="920" dirty="0"/>
+          </a:p>
+          <a:p>
+            <a:pPr indent="0" marL="0">
+              <a:lnSpc>
+                <a:spcPct val="115000"/>
+              </a:lnSpc>
+              <a:buNone/>
+            </a:pPr>
+            <a:r>
+              <a:rPr lang="en-US" sz="800" dirty="0">
+                <a:solidFill>
+                  <a:srgbClr val="5B6472"/>
+                </a:solidFill>
+                <a:latin typeface="Arial" pitchFamily="34" charset="0"/>
+                <a:ea typeface="Arial" pitchFamily="34" charset="-122"/>
+                <a:cs typeface="Arial" pitchFamily="34" charset="-120"/>
+              </a:rPr>
+              <a:t>plain rules, no AI model</a:t>
+            </a:r>
+            <a:endParaRPr lang="en-US" sz="920" dirty="0"/>
+          </a:p>
+        </p:txBody>
+      </p:sp>
+      <p:sp>
+        <p:nvSpPr>
+          <p:cNvPr id="14" name="Shape 12"/>
+          <p:cNvSpPr/>
+          <p:nvPr/>
+        </p:nvSpPr>
+        <p:spPr>
+          <a:xfrm>
+            <a:off x="4983480" y="914400"/>
+            <a:ext cx="3931920" cy="2286000"/>
+          </a:xfrm>
+          <a:prstGeom prst="rect">
+            <a:avLst/>
+          </a:prstGeom>
+          <a:solidFill>
+            <a:srgbClr val="E4F4F8"/>
+          </a:solidFill>
+          <a:ln w="31750">
+            <a:solidFill>
+              <a:srgbClr val="FFFFFF"/>
+            </a:solidFill>
+            <a:prstDash val="solid"/>
+          </a:ln>
+        </p:spPr>
+      </p:sp>
+      <p:sp>
+        <p:nvSpPr>
+          <p:cNvPr id="15" name="Text 13"/>
+          <p:cNvSpPr txBox="1"/>
+          <p:nvPr/>
+        </p:nvSpPr>
+        <p:spPr>
+          <a:xfrm>
+            <a:off x="5166360" y="1060704"/>
+            <a:ext cx="3566160" cy="237744"/>
+          </a:xfrm>
+          <a:prstGeom prst="rect">
+            <a:avLst/>
+          </a:prstGeom>
+          <a:noFill/>
+          <a:ln/>
+        </p:spPr>
+        <p:txBody>
+          <a:bodyPr wrap="square" lIns="0" tIns="0" rIns="0" bIns="0" rtlCol="0" anchor="ctr"/>
+          <a:lstStyle/>
+          <a:p>
+            <a:pPr indent="0" marL="0">
+              <a:buNone/>
+            </a:pPr>
+            <a:r>
+              <a:rPr lang="en-US" sz="1000" b="1" spc="80" kern="0" dirty="0">
+                <a:solidFill>
+                  <a:srgbClr val="0891B2"/>
+                </a:solidFill>
+                <a:latin typeface="Arial" pitchFamily="34" charset="0"/>
+                <a:ea typeface="Arial" pitchFamily="34" charset="-122"/>
+                <a:cs typeface="Arial" pitchFamily="34" charset="-120"/>
+              </a:rPr>
+              <a:t>WAVE 2 — ONCE TRUSTED</a:t>
+            </a:r>
+            <a:endParaRPr lang="en-US" sz="1000" dirty="0"/>
+          </a:p>
+        </p:txBody>
+      </p:sp>
+      <p:sp>
+        <p:nvSpPr>
+          <p:cNvPr id="16" name="Text 14"/>
+          <p:cNvSpPr txBox="1"/>
+          <p:nvPr/>
+        </p:nvSpPr>
+        <p:spPr>
+          <a:xfrm>
+            <a:off x="5166360" y="1298448"/>
+            <a:ext cx="3566160" cy="219456"/>
+          </a:xfrm>
+          <a:prstGeom prst="rect">
+            <a:avLst/>
+          </a:prstGeom>
+          <a:noFill/>
+          <a:ln/>
+        </p:spPr>
+        <p:txBody>
+          <a:bodyPr wrap="square" lIns="0" tIns="0" rIns="0" bIns="0" rtlCol="0" anchor="ctr"/>
+          <a:lstStyle/>
+          <a:p>
+            <a:pPr indent="0" marL="0">
+              <a:buNone/>
+            </a:pPr>
+            <a:r>
+              <a:rPr lang="en-US" sz="800" i="1" dirty="0">
+                <a:solidFill>
+                  <a:srgbClr val="5B6472"/>
+                </a:solidFill>
+                <a:latin typeface="Arial" pitchFamily="34" charset="0"/>
+                <a:ea typeface="Arial" pitchFamily="34" charset="-122"/>
+                <a:cs typeface="Arial" pitchFamily="34" charset="-120"/>
+              </a:rPr>
+              <a:t>the real prize, but needs the audit trail live</a:t>
+            </a:r>
+            <a:endParaRPr lang="en-US" sz="800" dirty="0"/>
+          </a:p>
+        </p:txBody>
+      </p:sp>
+      <p:sp>
+        <p:nvSpPr>
+          <p:cNvPr id="17" name="Shape 15"/>
+          <p:cNvSpPr/>
+          <p:nvPr/>
+        </p:nvSpPr>
+        <p:spPr>
+          <a:xfrm>
+            <a:off x="5212080" y="1627632"/>
+            <a:ext cx="3474720" cy="566928"/>
+          </a:xfrm>
+          <a:prstGeom prst="roundRect">
+            <a:avLst>
+              <a:gd name="adj" fmla="val 8065"/>
+            </a:avLst>
+          </a:prstGeom>
+          <a:solidFill>
+            <a:srgbClr val="FFFFFF"/>
+          </a:solidFill>
+          <a:ln w="15240">
+            <a:solidFill>
+              <a:srgbClr val="0891B2"/>
+            </a:solidFill>
+            <a:prstDash val="solid"/>
+          </a:ln>
+        </p:spPr>
+      </p:sp>
+      <p:sp>
+        <p:nvSpPr>
+          <p:cNvPr id="18" name="Text 16"/>
+          <p:cNvSpPr txBox="1"/>
+          <p:nvPr/>
+        </p:nvSpPr>
+        <p:spPr>
+          <a:xfrm>
+            <a:off x="5349240" y="1627632"/>
+            <a:ext cx="3200400" cy="566928"/>
+          </a:xfrm>
+          <a:prstGeom prst="rect">
+            <a:avLst/>
+          </a:prstGeom>
+          <a:noFill/>
+          <a:ln/>
+        </p:spPr>
+        <p:txBody>
+          <a:bodyPr wrap="square" lIns="0" tIns="0" rIns="0" bIns="0" rtlCol="0" anchor="ctr"/>
+          <a:lstStyle/>
+          <a:p>
+            <a:pPr indent="0" marL="0">
+              <a:lnSpc>
+                <a:spcPct val="115000"/>
+              </a:lnSpc>
+              <a:buNone/>
+            </a:pPr>
+            <a:r>
+              <a:rPr lang="en-US" sz="920" b="1" dirty="0">
+                <a:solidFill>
+                  <a:srgbClr val="1B2430"/>
+                </a:solidFill>
+                <a:latin typeface="Arial" pitchFamily="34" charset="0"/>
+                <a:ea typeface="Arial" pitchFamily="34" charset="-122"/>
+                <a:cs typeface="Arial" pitchFamily="34" charset="-120"/>
+              </a:rPr>
+              <a:t>Draft the close-out letter
+</a:t>
+            </a:r>
+            <a:endParaRPr lang="en-US" sz="920" dirty="0"/>
+          </a:p>
+          <a:p>
+            <a:pPr indent="0" marL="0">
+              <a:lnSpc>
+                <a:spcPct val="115000"/>
+              </a:lnSpc>
+              <a:buNone/>
+            </a:pPr>
+            <a:r>
+              <a:rPr lang="en-US" sz="800" dirty="0">
+                <a:solidFill>
+                  <a:srgbClr val="5B6472"/>
+                </a:solidFill>
+                <a:latin typeface="Arial" pitchFamily="34" charset="0"/>
+                <a:ea typeface="Arial" pitchFamily="34" charset="-122"/>
+                <a:cs typeface="Arial" pitchFamily="34" charset="-120"/>
+              </a:rPr>
+              <a:t>~65% of claims · a handler still approves</a:t>
+            </a:r>
+            <a:endParaRPr lang="en-US" sz="920" dirty="0"/>
+          </a:p>
+        </p:txBody>
+      </p:sp>
+      <p:sp>
+        <p:nvSpPr>
+          <p:cNvPr id="19" name="Shape 17"/>
+          <p:cNvSpPr/>
+          <p:nvPr/>
+        </p:nvSpPr>
+        <p:spPr>
+          <a:xfrm>
+            <a:off x="5212080" y="2322576"/>
+            <a:ext cx="3474720" cy="566928"/>
+          </a:xfrm>
+          <a:prstGeom prst="roundRect">
+            <a:avLst>
+              <a:gd name="adj" fmla="val 8065"/>
+            </a:avLst>
+          </a:prstGeom>
+          <a:solidFill>
+            <a:srgbClr val="FFFFFF"/>
+          </a:solidFill>
+          <a:ln w="15240">
+            <a:solidFill>
+              <a:srgbClr val="0891B2"/>
+            </a:solidFill>
+            <a:prstDash val="solid"/>
+          </a:ln>
+        </p:spPr>
+      </p:sp>
+      <p:sp>
+        <p:nvSpPr>
+          <p:cNvPr id="20" name="Text 18"/>
+          <p:cNvSpPr txBox="1"/>
+          <p:nvPr/>
+        </p:nvSpPr>
+        <p:spPr>
+          <a:xfrm>
+            <a:off x="5349240" y="2322576"/>
+            <a:ext cx="3200400" cy="566928"/>
+          </a:xfrm>
+          <a:prstGeom prst="rect">
+            <a:avLst/>
+          </a:prstGeom>
+          <a:noFill/>
+          <a:ln/>
+        </p:spPr>
+        <p:txBody>
+          <a:bodyPr wrap="square" lIns="0" tIns="0" rIns="0" bIns="0" rtlCol="0" anchor="ctr"/>
+          <a:lstStyle/>
+          <a:p>
+            <a:pPr indent="0" marL="0">
+              <a:lnSpc>
+                <a:spcPct val="115000"/>
+              </a:lnSpc>
+              <a:buNone/>
+            </a:pPr>
+            <a:r>
+              <a:rPr lang="en-US" sz="920" b="1" dirty="0">
+                <a:solidFill>
+                  <a:srgbClr val="1B2430"/>
+                </a:solidFill>
+                <a:latin typeface="Arial" pitchFamily="34" charset="0"/>
+                <a:ea typeface="Arial" pitchFamily="34" charset="-122"/>
+                <a:cs typeface="Arial" pitchFamily="34" charset="-120"/>
+              </a:rPr>
+              <a:t>Read AES secure mail
+</a:t>
+            </a:r>
+            <a:endParaRPr lang="en-US" sz="920" dirty="0"/>
+          </a:p>
+          <a:p>
+            <a:pPr indent="0" marL="0">
+              <a:lnSpc>
+                <a:spcPct val="115000"/>
+              </a:lnSpc>
+              <a:buNone/>
+            </a:pPr>
+            <a:r>
+              <a:rPr lang="en-US" sz="800" dirty="0">
+                <a:solidFill>
+                  <a:srgbClr val="5B6472"/>
+                </a:solidFill>
+                <a:latin typeface="Arial" pitchFamily="34" charset="0"/>
+                <a:ea typeface="Arial" pitchFamily="34" charset="-122"/>
+                <a:cs typeface="Arial" pitchFamily="34" charset="-120"/>
+              </a:rPr>
+              <a:t>the only channel with no automation today</a:t>
+            </a:r>
+            <a:endParaRPr lang="en-US" sz="920" dirty="0"/>
+          </a:p>
+        </p:txBody>
+      </p:sp>
+      <p:sp>
+        <p:nvSpPr>
+          <p:cNvPr id="21" name="Shape 19"/>
+          <p:cNvSpPr/>
+          <p:nvPr/>
+        </p:nvSpPr>
+        <p:spPr>
+          <a:xfrm>
+            <a:off x="1051560" y="3200400"/>
+            <a:ext cx="3931920" cy="2286000"/>
+          </a:xfrm>
+          <a:prstGeom prst="rect">
+            <a:avLst/>
+          </a:prstGeom>
+          <a:solidFill>
+            <a:srgbClr val="EDECFB"/>
+          </a:solidFill>
+          <a:ln w="31750">
+            <a:solidFill>
+              <a:srgbClr val="FFFFFF"/>
+            </a:solidFill>
+            <a:prstDash val="solid"/>
+          </a:ln>
+        </p:spPr>
+      </p:sp>
+      <p:sp>
+        <p:nvSpPr>
+          <p:cNvPr id="22" name="Text 20"/>
+          <p:cNvSpPr txBox="1"/>
+          <p:nvPr/>
+        </p:nvSpPr>
+        <p:spPr>
+          <a:xfrm>
+            <a:off x="1234440" y="3346704"/>
+            <a:ext cx="3566160" cy="237744"/>
+          </a:xfrm>
+          <a:prstGeom prst="rect">
+            <a:avLst/>
+          </a:prstGeom>
+          <a:noFill/>
+          <a:ln/>
+        </p:spPr>
+        <p:txBody>
+          <a:bodyPr wrap="square" lIns="0" tIns="0" rIns="0" bIns="0" rtlCol="0" anchor="ctr"/>
+          <a:lstStyle/>
+          <a:p>
+            <a:pPr indent="0" marL="0">
+              <a:buNone/>
+            </a:pPr>
+            <a:r>
+              <a:rPr lang="en-US" sz="1000" b="1" spc="80" kern="0" dirty="0">
+                <a:solidFill>
+                  <a:srgbClr val="4338CA"/>
+                </a:solidFill>
+                <a:latin typeface="Arial" pitchFamily="34" charset="0"/>
+                <a:ea typeface="Arial" pitchFamily="34" charset="-122"/>
+                <a:cs typeface="Arial" pitchFamily="34" charset="-120"/>
+              </a:rPr>
+              <a:t>FIX WHEN CONVENIENT</a:t>
+            </a:r>
+            <a:endParaRPr lang="en-US" sz="1000" dirty="0"/>
+          </a:p>
+        </p:txBody>
+      </p:sp>
+      <p:sp>
+        <p:nvSpPr>
+          <p:cNvPr id="23" name="Text 21"/>
+          <p:cNvSpPr txBox="1"/>
+          <p:nvPr/>
+        </p:nvSpPr>
+        <p:spPr>
+          <a:xfrm>
+            <a:off x="1234440" y="3584448"/>
+            <a:ext cx="3566160" cy="219456"/>
+          </a:xfrm>
+          <a:prstGeom prst="rect">
+            <a:avLst/>
+          </a:prstGeom>
+          <a:noFill/>
+          <a:ln/>
+        </p:spPr>
+        <p:txBody>
+          <a:bodyPr wrap="square" lIns="0" tIns="0" rIns="0" bIns="0" rtlCol="0" anchor="ctr"/>
+          <a:lstStyle/>
+          <a:p>
+            <a:pPr indent="0" marL="0">
+              <a:buNone/>
+            </a:pPr>
+            <a:r>
+              <a:rPr lang="en-US" sz="800" i="1" dirty="0">
+                <a:solidFill>
+                  <a:srgbClr val="5B6472"/>
+                </a:solidFill>
+                <a:latin typeface="Arial" pitchFamily="34" charset="0"/>
+                <a:ea typeface="Arial" pitchFamily="34" charset="-122"/>
+                <a:cs typeface="Arial" pitchFamily="34" charset="-120"/>
+              </a:rPr>
+              <a:t>worth doing, but it is an IT defect</a:t>
+            </a:r>
+            <a:endParaRPr lang="en-US" sz="800" dirty="0"/>
+          </a:p>
+        </p:txBody>
+      </p:sp>
+      <p:sp>
+        <p:nvSpPr>
+          <p:cNvPr id="24" name="Shape 22"/>
+          <p:cNvSpPr/>
+          <p:nvPr/>
+        </p:nvSpPr>
+        <p:spPr>
+          <a:xfrm>
+            <a:off x="1280160" y="3913632"/>
+            <a:ext cx="3474720" cy="566928"/>
+          </a:xfrm>
+          <a:prstGeom prst="roundRect">
+            <a:avLst>
+              <a:gd name="adj" fmla="val 8065"/>
+            </a:avLst>
+          </a:prstGeom>
+          <a:solidFill>
+            <a:srgbClr val="FFFFFF"/>
+          </a:solidFill>
+          <a:ln w="15240">
+            <a:solidFill>
+              <a:srgbClr val="4338CA"/>
+            </a:solidFill>
+            <a:prstDash val="solid"/>
+          </a:ln>
+        </p:spPr>
+      </p:sp>
+      <p:sp>
+        <p:nvSpPr>
+          <p:cNvPr id="25" name="Text 23"/>
+          <p:cNvSpPr txBox="1"/>
+          <p:nvPr/>
+        </p:nvSpPr>
+        <p:spPr>
+          <a:xfrm>
+            <a:off x="1417320" y="3913632"/>
+            <a:ext cx="3200400" cy="566928"/>
+          </a:xfrm>
+          <a:prstGeom prst="rect">
+            <a:avLst/>
+          </a:prstGeom>
+          <a:noFill/>
+          <a:ln/>
+        </p:spPr>
+        <p:txBody>
+          <a:bodyPr wrap="square" lIns="0" tIns="0" rIns="0" bIns="0" rtlCol="0" anchor="ctr"/>
+          <a:lstStyle/>
+          <a:p>
+            <a:pPr indent="0" marL="0">
+              <a:lnSpc>
+                <a:spcPct val="115000"/>
+              </a:lnSpc>
+              <a:buNone/>
+            </a:pPr>
+            <a:r>
+              <a:rPr lang="en-US" sz="920" b="1" dirty="0">
+                <a:solidFill>
+                  <a:srgbClr val="1B2430"/>
+                </a:solidFill>
+                <a:latin typeface="Arial" pitchFamily="34" charset="0"/>
+                <a:ea typeface="Arial" pitchFamily="34" charset="-122"/>
+                <a:cs typeface="Arial" pitchFamily="34" charset="-120"/>
+              </a:rPr>
+              <a:t>EASY → IDB import retries
+</a:t>
+            </a:r>
+            <a:endParaRPr lang="en-US" sz="920" dirty="0"/>
+          </a:p>
+          <a:p>
+            <a:pPr indent="0" marL="0">
+              <a:lnSpc>
+                <a:spcPct val="115000"/>
+              </a:lnSpc>
+              <a:buNone/>
+            </a:pPr>
+            <a:r>
+              <a:rPr lang="en-US" sz="800" dirty="0">
+                <a:solidFill>
+                  <a:srgbClr val="5B6472"/>
+                </a:solidFill>
+                <a:latin typeface="Arial" pitchFamily="34" charset="0"/>
+                <a:ea typeface="Arial" pitchFamily="34" charset="-122"/>
+                <a:cs typeface="Arial" pitchFamily="34" charset="-120"/>
+              </a:rPr>
+              <a:t>an integration bug, not an AI job</a:t>
+            </a:r>
+            <a:endParaRPr lang="en-US" sz="920" dirty="0"/>
+          </a:p>
+        </p:txBody>
+      </p:sp>
+      <p:sp>
+        <p:nvSpPr>
+          <p:cNvPr id="26" name="Shape 24"/>
+          <p:cNvSpPr/>
+          <p:nvPr/>
+        </p:nvSpPr>
+        <p:spPr>
+          <a:xfrm>
+            <a:off x="4983480" y="3200400"/>
+            <a:ext cx="3931920" cy="2286000"/>
+          </a:xfrm>
+          <a:prstGeom prst="rect">
+            <a:avLst/>
+          </a:prstGeom>
+          <a:solidFill>
+            <a:srgbClr val="FBE9F1"/>
+          </a:solidFill>
+          <a:ln w="31750">
+            <a:solidFill>
+              <a:srgbClr val="FFFFFF"/>
+            </a:solidFill>
+            <a:prstDash val="solid"/>
+          </a:ln>
+        </p:spPr>
+      </p:sp>
+      <p:sp>
+        <p:nvSpPr>
+          <p:cNvPr id="27" name="Text 25"/>
+          <p:cNvSpPr txBox="1"/>
+          <p:nvPr/>
+        </p:nvSpPr>
+        <p:spPr>
+          <a:xfrm>
+            <a:off x="5166360" y="3346704"/>
+            <a:ext cx="3566160" cy="237744"/>
+          </a:xfrm>
+          <a:prstGeom prst="rect">
+            <a:avLst/>
+          </a:prstGeom>
+          <a:noFill/>
+          <a:ln/>
+        </p:spPr>
+        <p:txBody>
+          <a:bodyPr wrap="square" lIns="0" tIns="0" rIns="0" bIns="0" rtlCol="0" anchor="ctr"/>
+          <a:lstStyle/>
+          <a:p>
+            <a:pPr indent="0" marL="0">
+              <a:buNone/>
+            </a:pPr>
+            <a:r>
+              <a:rPr lang="en-US" sz="1000" b="1" spc="80" kern="0" dirty="0">
+                <a:solidFill>
+                  <a:srgbClr val="BE185D"/>
+                </a:solidFill>
+                <a:latin typeface="Arial" pitchFamily="34" charset="0"/>
+                <a:ea typeface="Arial" pitchFamily="34" charset="-122"/>
+                <a:cs typeface="Arial" pitchFamily="34" charset="-120"/>
+              </a:rPr>
+              <a:t>LEAVE MANUAL</a:t>
+            </a:r>
+            <a:endParaRPr lang="en-US" sz="1000" dirty="0"/>
+          </a:p>
+        </p:txBody>
+      </p:sp>
+      <p:sp>
+        <p:nvSpPr>
+          <p:cNvPr id="28" name="Text 26"/>
+          <p:cNvSpPr txBox="1"/>
+          <p:nvPr/>
+        </p:nvSpPr>
+        <p:spPr>
+          <a:xfrm>
+            <a:off x="5166360" y="3584448"/>
+            <a:ext cx="3566160" cy="219456"/>
+          </a:xfrm>
+          <a:prstGeom prst="rect">
+            <a:avLst/>
+          </a:prstGeom>
+          <a:noFill/>
+          <a:ln/>
+        </p:spPr>
+        <p:txBody>
+          <a:bodyPr wrap="square" lIns="0" tIns="0" rIns="0" bIns="0" rtlCol="0" anchor="ctr"/>
+          <a:lstStyle/>
+          <a:p>
+            <a:pPr indent="0" marL="0">
+              <a:buNone/>
+            </a:pPr>
+            <a:r>
+              <a:rPr lang="en-US" sz="800" i="1" dirty="0">
+                <a:solidFill>
+                  <a:srgbClr val="5B6472"/>
+                </a:solidFill>
+                <a:latin typeface="Arial" pitchFamily="34" charset="0"/>
+                <a:ea typeface="Arial" pitchFamily="34" charset="-122"/>
+                <a:cs typeface="Arial" pitchFamily="34" charset="-120"/>
+              </a:rPr>
+              <a:t>too rare to earn the effort</a:t>
+            </a:r>
+            <a:endParaRPr lang="en-US" sz="800" dirty="0"/>
+          </a:p>
+        </p:txBody>
+      </p:sp>
+      <p:sp>
+        <p:nvSpPr>
+          <p:cNvPr id="29" name="Shape 27"/>
+          <p:cNvSpPr/>
+          <p:nvPr/>
+        </p:nvSpPr>
+        <p:spPr>
+          <a:xfrm>
+            <a:off x="5212080" y="3913632"/>
+            <a:ext cx="3474720" cy="566928"/>
+          </a:xfrm>
+          <a:prstGeom prst="roundRect">
+            <a:avLst>
+              <a:gd name="adj" fmla="val 8065"/>
+            </a:avLst>
+          </a:prstGeom>
+          <a:solidFill>
+            <a:srgbClr val="FFFFFF"/>
+          </a:solidFill>
+          <a:ln w="15240">
+            <a:solidFill>
+              <a:srgbClr val="BE185D"/>
+            </a:solidFill>
+            <a:prstDash val="solid"/>
+          </a:ln>
+        </p:spPr>
+      </p:sp>
+      <p:sp>
+        <p:nvSpPr>
+          <p:cNvPr id="30" name="Text 28"/>
+          <p:cNvSpPr txBox="1"/>
+          <p:nvPr/>
+        </p:nvSpPr>
+        <p:spPr>
+          <a:xfrm>
+            <a:off x="5349240" y="3913632"/>
+            <a:ext cx="3200400" cy="566928"/>
+          </a:xfrm>
+          <a:prstGeom prst="rect">
+            <a:avLst/>
+          </a:prstGeom>
+          <a:noFill/>
+          <a:ln/>
+        </p:spPr>
+        <p:txBody>
+          <a:bodyPr wrap="square" lIns="0" tIns="0" rIns="0" bIns="0" rtlCol="0" anchor="ctr"/>
+          <a:lstStyle/>
+          <a:p>
+            <a:pPr indent="0" marL="0">
+              <a:lnSpc>
+                <a:spcPct val="115000"/>
+              </a:lnSpc>
+              <a:buNone/>
+            </a:pPr>
+            <a:r>
+              <a:rPr lang="en-US" sz="920" b="1" dirty="0">
+                <a:solidFill>
+                  <a:srgbClr val="1B2430"/>
+                </a:solidFill>
+                <a:latin typeface="Arial" pitchFamily="34" charset="0"/>
+                <a:ea typeface="Arial" pitchFamily="34" charset="-122"/>
+                <a:cs typeface="Arial" pitchFamily="34" charset="-120"/>
+              </a:rPr>
+              <a:t>"Violence cover" entitlement letter
+</a:t>
+            </a:r>
+            <a:endParaRPr lang="en-US" sz="920" dirty="0"/>
+          </a:p>
+          <a:p>
+            <a:pPr indent="0" marL="0">
+              <a:lnSpc>
+                <a:spcPct val="115000"/>
+              </a:lnSpc>
+              <a:buNone/>
+            </a:pPr>
+            <a:r>
+              <a:rPr lang="en-US" sz="800" dirty="0">
+                <a:solidFill>
+                  <a:srgbClr val="5B6472"/>
+                </a:solidFill>
+                <a:latin typeface="Arial" pitchFamily="34" charset="0"/>
+                <a:ea typeface="Arial" pitchFamily="34" charset="-122"/>
+                <a:cs typeface="Arial" pitchFamily="34" charset="-120"/>
+              </a:rPr>
+              <a:t>~2 claims ever · a checklist beats a model</a:t>
+            </a:r>
+            <a:endParaRPr lang="en-US" sz="920" dirty="0"/>
+          </a:p>
+        </p:txBody>
+      </p:sp>
+      <p:sp>
+        <p:nvSpPr>
+          <p:cNvPr id="31" name="Shape 29"/>
+          <p:cNvSpPr/>
+          <p:nvPr/>
+        </p:nvSpPr>
+        <p:spPr>
+          <a:xfrm>
+            <a:off x="9189720" y="914400"/>
+            <a:ext cx="2633472" cy="4572000"/>
+          </a:xfrm>
+          <a:prstGeom prst="roundRect">
+            <a:avLst>
+              <a:gd name="adj" fmla="val 2083"/>
+            </a:avLst>
+          </a:prstGeom>
+          <a:solidFill>
+            <a:srgbClr val="EDECFB"/>
+          </a:solidFill>
+          <a:ln w="16510">
+            <a:solidFill>
+              <a:srgbClr val="4338CA"/>
+            </a:solidFill>
+            <a:prstDash val="solid"/>
+          </a:ln>
+        </p:spPr>
+      </p:sp>
+      <p:sp>
+        <p:nvSpPr>
+          <p:cNvPr id="32" name="Text 30"/>
+          <p:cNvSpPr txBox="1"/>
+          <p:nvPr/>
+        </p:nvSpPr>
+        <p:spPr>
+          <a:xfrm>
+            <a:off x="9390888" y="1060704"/>
+            <a:ext cx="2231136" cy="219456"/>
+          </a:xfrm>
+          <a:prstGeom prst="rect">
+            <a:avLst/>
+          </a:prstGeom>
+          <a:noFill/>
+          <a:ln/>
+        </p:spPr>
+        <p:txBody>
+          <a:bodyPr wrap="square" lIns="0" tIns="0" rIns="0" bIns="0" rtlCol="0" anchor="ctr"/>
+          <a:lstStyle/>
+          <a:p>
+            <a:pPr indent="0" marL="0">
+              <a:buNone/>
+            </a:pPr>
+            <a:r>
+              <a:rPr lang="en-US" sz="900" b="1" spc="70" kern="0" dirty="0">
+                <a:solidFill>
+                  <a:srgbClr val="4338CA"/>
+                </a:solidFill>
+                <a:latin typeface="Arial" pitchFamily="34" charset="0"/>
+                <a:ea typeface="Arial" pitchFamily="34" charset="-122"/>
+                <a:cs typeface="Arial" pitchFamily="34" charset="-120"/>
+              </a:rPr>
+              <a:t>FIXING THE IMPORT FAILURES</a:t>
+            </a:r>
+            <a:endParaRPr lang="en-US" sz="900" dirty="0"/>
+          </a:p>
+        </p:txBody>
+      </p:sp>
+      <p:sp>
+        <p:nvSpPr>
+          <p:cNvPr id="33" name="Text 31"/>
+          <p:cNvSpPr txBox="1"/>
+          <p:nvPr/>
+        </p:nvSpPr>
+        <p:spPr>
+          <a:xfrm>
+            <a:off x="9390888" y="1298448"/>
+            <a:ext cx="2231136" cy="329184"/>
+          </a:xfrm>
+          <a:prstGeom prst="rect">
+            <a:avLst/>
+          </a:prstGeom>
+          <a:noFill/>
+          <a:ln/>
+        </p:spPr>
+        <p:txBody>
+          <a:bodyPr wrap="square" lIns="0" tIns="0" rIns="0" bIns="0" rtlCol="0" anchor="ctr"/>
+          <a:lstStyle/>
+          <a:p>
+            <a:pPr indent="0" marL="0">
+              <a:lnSpc>
+                <a:spcPct val="115000"/>
+              </a:lnSpc>
+              <a:buNone/>
+            </a:pPr>
+            <a:r>
+              <a:rPr lang="en-US" sz="800" i="1" dirty="0">
+                <a:solidFill>
+                  <a:srgbClr val="4A4A5E"/>
+                </a:solidFill>
+                <a:latin typeface="Arial" pitchFamily="34" charset="0"/>
+                <a:ea typeface="Arial" pitchFamily="34" charset="-122"/>
+                <a:cs typeface="Arial" pitchFamily="34" charset="-120"/>
+              </a:rPr>
+              <a:t>The one item that is not an AI problem. How it is actually fixed:</a:t>
+            </a:r>
+            <a:endParaRPr lang="en-US" sz="800" dirty="0"/>
+          </a:p>
+        </p:txBody>
+      </p:sp>
+      <p:sp>
+        <p:nvSpPr>
+          <p:cNvPr id="34" name="Text 32"/>
+          <p:cNvSpPr txBox="1"/>
+          <p:nvPr/>
+        </p:nvSpPr>
+        <p:spPr>
+          <a:xfrm>
+            <a:off x="9390888" y="1755648"/>
+            <a:ext cx="2231136" cy="182880"/>
+          </a:xfrm>
+          <a:prstGeom prst="rect">
+            <a:avLst/>
+          </a:prstGeom>
+          <a:noFill/>
+          <a:ln/>
+        </p:spPr>
+        <p:txBody>
+          <a:bodyPr wrap="square" lIns="0" tIns="0" rIns="0" bIns="0" rtlCol="0" anchor="ctr"/>
+          <a:lstStyle/>
+          <a:p>
+            <a:pPr indent="0" marL="0">
+              <a:buNone/>
+            </a:pPr>
+            <a:r>
+              <a:rPr lang="en-US" sz="840" b="1" dirty="0">
+                <a:solidFill>
+                  <a:srgbClr val="2A2A3E"/>
+                </a:solidFill>
+                <a:latin typeface="Arial" pitchFamily="34" charset="0"/>
+                <a:ea typeface="Arial" pitchFamily="34" charset="-122"/>
+                <a:cs typeface="Arial" pitchFamily="34" charset="-120"/>
+              </a:rPr>
+              <a:t>Sort the failure first</a:t>
+            </a:r>
+            <a:endParaRPr lang="en-US" sz="840" dirty="0"/>
+          </a:p>
+        </p:txBody>
+      </p:sp>
+      <p:sp>
+        <p:nvSpPr>
+          <p:cNvPr id="35" name="Text 33"/>
+          <p:cNvSpPr txBox="1"/>
+          <p:nvPr/>
+        </p:nvSpPr>
+        <p:spPr>
+          <a:xfrm>
+            <a:off x="9390888" y="1929384"/>
+            <a:ext cx="2231136" cy="512064"/>
+          </a:xfrm>
+          <a:prstGeom prst="rect">
+            <a:avLst/>
+          </a:prstGeom>
+          <a:noFill/>
+          <a:ln/>
+        </p:spPr>
+        <p:txBody>
+          <a:bodyPr wrap="square" lIns="0" tIns="0" rIns="0" bIns="0" rtlCol="0" anchor="ctr"/>
+          <a:lstStyle/>
+          <a:p>
+            <a:pPr indent="0" marL="0">
+              <a:lnSpc>
+                <a:spcPct val="115000"/>
+              </a:lnSpc>
+              <a:buNone/>
+            </a:pPr>
+            <a:r>
+              <a:rPr lang="en-US" sz="760" dirty="0">
+                <a:solidFill>
+                  <a:srgbClr val="4A4A5E"/>
+                </a:solidFill>
+                <a:latin typeface="Arial" pitchFamily="34" charset="0"/>
+                <a:ea typeface="Arial" pitchFamily="34" charset="-122"/>
+                <a:cs typeface="Arial" pitchFamily="34" charset="-120"/>
+              </a:rPr>
+              <a:t>A timeout is worth retrying. A missing field never is — retrying it just fails again.</a:t>
+            </a:r>
+            <a:endParaRPr lang="en-US" sz="760" dirty="0"/>
+          </a:p>
+        </p:txBody>
+      </p:sp>
+      <p:sp>
+        <p:nvSpPr>
+          <p:cNvPr id="36" name="Text 34"/>
+          <p:cNvSpPr txBox="1"/>
+          <p:nvPr/>
+        </p:nvSpPr>
+        <p:spPr>
+          <a:xfrm>
+            <a:off x="9390888" y="2478024"/>
+            <a:ext cx="2231136" cy="182880"/>
+          </a:xfrm>
+          <a:prstGeom prst="rect">
+            <a:avLst/>
+          </a:prstGeom>
+          <a:noFill/>
+          <a:ln/>
+        </p:spPr>
+        <p:txBody>
+          <a:bodyPr wrap="square" lIns="0" tIns="0" rIns="0" bIns="0" rtlCol="0" anchor="ctr"/>
+          <a:lstStyle/>
+          <a:p>
+            <a:pPr indent="0" marL="0">
+              <a:buNone/>
+            </a:pPr>
+            <a:r>
+              <a:rPr lang="en-US" sz="840" b="1" dirty="0">
+                <a:solidFill>
+                  <a:srgbClr val="2A2A3E"/>
+                </a:solidFill>
+                <a:latin typeface="Arial" pitchFamily="34" charset="0"/>
+                <a:ea typeface="Arial" pitchFamily="34" charset="-122"/>
+                <a:cs typeface="Arial" pitchFamily="34" charset="-120"/>
+              </a:rPr>
+              <a:t>Retry with growing gaps</a:t>
+            </a:r>
+            <a:endParaRPr lang="en-US" sz="840" dirty="0"/>
+          </a:p>
+        </p:txBody>
+      </p:sp>
+      <p:sp>
+        <p:nvSpPr>
+          <p:cNvPr id="37" name="Text 35"/>
+          <p:cNvSpPr txBox="1"/>
+          <p:nvPr/>
+        </p:nvSpPr>
+        <p:spPr>
+          <a:xfrm>
+            <a:off x="9390888" y="2651760"/>
+            <a:ext cx="2231136" cy="512064"/>
+          </a:xfrm>
+          <a:prstGeom prst="rect">
+            <a:avLst/>
+          </a:prstGeom>
+          <a:noFill/>
+          <a:ln/>
+        </p:spPr>
+        <p:txBody>
+          <a:bodyPr wrap="square" lIns="0" tIns="0" rIns="0" bIns="0" rtlCol="0" anchor="ctr"/>
+          <a:lstStyle/>
+          <a:p>
+            <a:pPr indent="0" marL="0">
+              <a:lnSpc>
+                <a:spcPct val="115000"/>
+              </a:lnSpc>
+              <a:buNone/>
+            </a:pPr>
+            <a:r>
+              <a:rPr lang="en-US" sz="760" dirty="0">
+                <a:solidFill>
+                  <a:srgbClr val="4A4A5E"/>
+                </a:solidFill>
+                <a:latin typeface="Arial" pitchFamily="34" charset="0"/>
+                <a:ea typeface="Arial" pitchFamily="34" charset="-122"/>
+                <a:cs typeface="Arial" pitchFamily="34" charset="-120"/>
+              </a:rPr>
+              <a:t>1s, 2s, 4s, plus a random offset, so 50 stuck claims do not all retry at once.</a:t>
+            </a:r>
+            <a:endParaRPr lang="en-US" sz="760" dirty="0"/>
+          </a:p>
+        </p:txBody>
+      </p:sp>
+      <p:sp>
+        <p:nvSpPr>
+          <p:cNvPr id="38" name="Text 36"/>
+          <p:cNvSpPr txBox="1"/>
+          <p:nvPr/>
+        </p:nvSpPr>
+        <p:spPr>
+          <a:xfrm>
+            <a:off x="9390888" y="3200400"/>
+            <a:ext cx="2231136" cy="182880"/>
+          </a:xfrm>
+          <a:prstGeom prst="rect">
+            <a:avLst/>
+          </a:prstGeom>
+          <a:noFill/>
+          <a:ln/>
+        </p:spPr>
+        <p:txBody>
+          <a:bodyPr wrap="square" lIns="0" tIns="0" rIns="0" bIns="0" rtlCol="0" anchor="ctr"/>
+          <a:lstStyle/>
+          <a:p>
+            <a:pPr indent="0" marL="0">
+              <a:buNone/>
+            </a:pPr>
+            <a:r>
+              <a:rPr lang="en-US" sz="840" b="1" dirty="0">
+                <a:solidFill>
+                  <a:srgbClr val="2A2A3E"/>
+                </a:solidFill>
+                <a:latin typeface="Arial" pitchFamily="34" charset="0"/>
+                <a:ea typeface="Arial" pitchFamily="34" charset="-122"/>
+                <a:cs typeface="Arial" pitchFamily="34" charset="-120"/>
+              </a:rPr>
+              <a:t>One reference per claim</a:t>
+            </a:r>
+            <a:endParaRPr lang="en-US" sz="840" dirty="0"/>
+          </a:p>
+        </p:txBody>
+      </p:sp>
+      <p:sp>
+        <p:nvSpPr>
+          <p:cNvPr id="39" name="Text 37"/>
+          <p:cNvSpPr txBox="1"/>
+          <p:nvPr/>
+        </p:nvSpPr>
+        <p:spPr>
+          <a:xfrm>
+            <a:off x="9390888" y="3374136"/>
+            <a:ext cx="2231136" cy="512064"/>
+          </a:xfrm>
+          <a:prstGeom prst="rect">
+            <a:avLst/>
+          </a:prstGeom>
+          <a:noFill/>
+          <a:ln/>
+        </p:spPr>
+        <p:txBody>
+          <a:bodyPr wrap="square" lIns="0" tIns="0" rIns="0" bIns="0" rtlCol="0" anchor="ctr"/>
+          <a:lstStyle/>
+          <a:p>
+            <a:pPr indent="0" marL="0">
+              <a:lnSpc>
+                <a:spcPct val="115000"/>
+              </a:lnSpc>
+              <a:buNone/>
+            </a:pPr>
+            <a:r>
+              <a:rPr lang="en-US" sz="760" dirty="0">
+                <a:solidFill>
+                  <a:srgbClr val="4A4A5E"/>
+                </a:solidFill>
+                <a:latin typeface="Arial" pitchFamily="34" charset="0"/>
+                <a:ea typeface="Arial" pitchFamily="34" charset="-122"/>
+                <a:cs typeface="Arial" pitchFamily="34" charset="-120"/>
+              </a:rPr>
+              <a:t>The same key on every attempt, so a replay cannot create the claim twice.</a:t>
+            </a:r>
+            <a:endParaRPr lang="en-US" sz="760" dirty="0"/>
+          </a:p>
+        </p:txBody>
+      </p:sp>
+      <p:sp>
+        <p:nvSpPr>
+          <p:cNvPr id="40" name="Text 38"/>
+          <p:cNvSpPr txBox="1"/>
+          <p:nvPr/>
+        </p:nvSpPr>
+        <p:spPr>
+          <a:xfrm>
+            <a:off x="9390888" y="3922776"/>
+            <a:ext cx="2231136" cy="182880"/>
+          </a:xfrm>
+          <a:prstGeom prst="rect">
+            <a:avLst/>
+          </a:prstGeom>
+          <a:noFill/>
+          <a:ln/>
+        </p:spPr>
+        <p:txBody>
+          <a:bodyPr wrap="square" lIns="0" tIns="0" rIns="0" bIns="0" rtlCol="0" anchor="ctr"/>
+          <a:lstStyle/>
+          <a:p>
+            <a:pPr indent="0" marL="0">
+              <a:buNone/>
+            </a:pPr>
+            <a:r>
+              <a:rPr lang="en-US" sz="840" b="1" dirty="0">
+                <a:solidFill>
+                  <a:srgbClr val="2A2A3E"/>
+                </a:solidFill>
+                <a:latin typeface="Arial" pitchFamily="34" charset="0"/>
+                <a:ea typeface="Arial" pitchFamily="34" charset="-122"/>
+                <a:cs typeface="Arial" pitchFamily="34" charset="-120"/>
+              </a:rPr>
+              <a:t>Park failures, never drop them</a:t>
+            </a:r>
+            <a:endParaRPr lang="en-US" sz="840" dirty="0"/>
+          </a:p>
+        </p:txBody>
+      </p:sp>
+      <p:sp>
+        <p:nvSpPr>
+          <p:cNvPr id="41" name="Text 39"/>
+          <p:cNvSpPr txBox="1"/>
+          <p:nvPr/>
+        </p:nvSpPr>
+        <p:spPr>
+          <a:xfrm>
+            <a:off x="9390888" y="4096512"/>
+            <a:ext cx="2231136" cy="512064"/>
+          </a:xfrm>
+          <a:prstGeom prst="rect">
+            <a:avLst/>
+          </a:prstGeom>
+          <a:noFill/>
+          <a:ln/>
+        </p:spPr>
+        <p:txBody>
+          <a:bodyPr wrap="square" lIns="0" tIns="0" rIns="0" bIns="0" rtlCol="0" anchor="ctr"/>
+          <a:lstStyle/>
+          <a:p>
+            <a:pPr indent="0" marL="0">
+              <a:lnSpc>
+                <a:spcPct val="115000"/>
+              </a:lnSpc>
+              <a:buNone/>
+            </a:pPr>
+            <a:r>
+              <a:rPr lang="en-US" sz="760" dirty="0">
+                <a:solidFill>
+                  <a:srgbClr val="4A4A5E"/>
+                </a:solidFill>
+                <a:latin typeface="Arial" pitchFamily="34" charset="0"/>
+                <a:ea typeface="Arial" pitchFamily="34" charset="-122"/>
+                <a:cs typeface="Arial" pitchFamily="34" charset="-120"/>
+              </a:rPr>
+              <a:t>They go to a holding queue with the error, so someone can fix and replay.</a:t>
+            </a:r>
+            <a:endParaRPr lang="en-US" sz="760" dirty="0"/>
+          </a:p>
+        </p:txBody>
+      </p:sp>
+      <p:sp>
+        <p:nvSpPr>
+          <p:cNvPr id="42" name="Text 40"/>
+          <p:cNvSpPr txBox="1"/>
+          <p:nvPr/>
+        </p:nvSpPr>
+        <p:spPr>
+          <a:xfrm>
+            <a:off x="9390888" y="4645152"/>
+            <a:ext cx="2231136" cy="182880"/>
+          </a:xfrm>
+          <a:prstGeom prst="rect">
+            <a:avLst/>
+          </a:prstGeom>
+          <a:noFill/>
+          <a:ln/>
+        </p:spPr>
+        <p:txBody>
+          <a:bodyPr wrap="square" lIns="0" tIns="0" rIns="0" bIns="0" rtlCol="0" anchor="ctr"/>
+          <a:lstStyle/>
+          <a:p>
+            <a:pPr indent="0" marL="0">
+              <a:buNone/>
+            </a:pPr>
+            <a:r>
+              <a:rPr lang="en-US" sz="840" b="1" dirty="0">
+                <a:solidFill>
+                  <a:srgbClr val="2A2A3E"/>
+                </a:solidFill>
+                <a:latin typeface="Arial" pitchFamily="34" charset="0"/>
+                <a:ea typeface="Arial" pitchFamily="34" charset="-122"/>
+                <a:cs typeface="Arial" pitchFamily="34" charset="-120"/>
+              </a:rPr>
+              <a:t>Alert on the rate, not the count</a:t>
+            </a:r>
+            <a:endParaRPr lang="en-US" sz="840" dirty="0"/>
+          </a:p>
+        </p:txBody>
+      </p:sp>
+      <p:sp>
+        <p:nvSpPr>
+          <p:cNvPr id="43" name="Text 41"/>
+          <p:cNvSpPr txBox="1"/>
+          <p:nvPr/>
+        </p:nvSpPr>
+        <p:spPr>
+          <a:xfrm>
+            <a:off x="9390888" y="4818888"/>
+            <a:ext cx="2231136" cy="512064"/>
+          </a:xfrm>
+          <a:prstGeom prst="rect">
+            <a:avLst/>
+          </a:prstGeom>
+          <a:noFill/>
+          <a:ln/>
+        </p:spPr>
+        <p:txBody>
+          <a:bodyPr wrap="square" lIns="0" tIns="0" rIns="0" bIns="0" rtlCol="0" anchor="ctr"/>
+          <a:lstStyle/>
+          <a:p>
+            <a:pPr indent="0" marL="0">
+              <a:lnSpc>
+                <a:spcPct val="115000"/>
+              </a:lnSpc>
+              <a:buNone/>
+            </a:pPr>
+            <a:r>
+              <a:rPr lang="en-US" sz="760" dirty="0">
+                <a:solidFill>
+                  <a:srgbClr val="4A4A5E"/>
+                </a:solidFill>
+                <a:latin typeface="Arial" pitchFamily="34" charset="0"/>
+                <a:ea typeface="Arial" pitchFamily="34" charset="-122"/>
+                <a:cs typeface="Arial" pitchFamily="34" charset="-120"/>
+              </a:rPr>
+              <a:t>One stuck claim is normal. Twenty in an hour means something broke.</a:t>
+            </a:r>
+            <a:endParaRPr lang="en-US" sz="760" dirty="0"/>
+          </a:p>
+        </p:txBody>
+      </p:sp>
+      <p:sp>
+        <p:nvSpPr>
+          <p:cNvPr id="44" name="Text 42"/>
+          <p:cNvSpPr txBox="1"/>
+          <p:nvPr/>
+        </p:nvSpPr>
+        <p:spPr>
+          <a:xfrm>
+            <a:off x="365760" y="6035040"/>
+            <a:ext cx="11430000" cy="256032"/>
+          </a:xfrm>
+          <a:prstGeom prst="rect">
+            <a:avLst/>
+          </a:prstGeom>
+          <a:noFill/>
+          <a:ln/>
+        </p:spPr>
+        <p:txBody>
+          <a:bodyPr wrap="square" lIns="0" tIns="0" rIns="0" bIns="0" rtlCol="0" anchor="ctr"/>
+          <a:lstStyle/>
+          <a:p>
+            <a:pPr indent="0" marL="0">
+              <a:buNone/>
+            </a:pPr>
+            <a:r>
+              <a:rPr lang="en-US" sz="700" dirty="0">
+                <a:solidFill>
+                  <a:srgbClr val="5B6472"/>
+                </a:solidFill>
+                <a:latin typeface="Arial" pitchFamily="34" charset="0"/>
+                <a:ea typeface="Arial" pitchFamily="34" charset="-122"/>
+                <a:cs typeface="Arial" pitchFamily="34" charset="-120"/>
+              </a:rPr>
+              <a:t>AES rulings and underwriting authority are deliberately absent — those decisions are not ours to make · frequencies from the case study</a:t>
+            </a:r>
+            <a:endParaRPr lang="en-US" sz="700" dirty="0"/>
+          </a:p>
+        </p:txBody>
+      </p:sp>
+      <p:sp>
+        <p:nvSpPr>
+          <p:cNvPr id="45" name="Text 43"/>
+          <p:cNvSpPr txBox="1"/>
+          <p:nvPr/>
+        </p:nvSpPr>
+        <p:spPr>
+          <a:xfrm>
+            <a:off x="365760" y="6601968"/>
+            <a:ext cx="5486400" cy="219456"/>
+          </a:xfrm>
+          <a:prstGeom prst="rect">
+            <a:avLst/>
+          </a:prstGeom>
+          <a:noFill/>
+          <a:ln/>
+        </p:spPr>
+        <p:txBody>
+          <a:bodyPr wrap="square" lIns="0" tIns="0" rIns="0" bIns="0" rtlCol="0" anchor="ctr"/>
+          <a:lstStyle/>
+          <a:p>
+            <a:pPr indent="0" marL="0">
+              <a:buNone/>
+            </a:pPr>
+            <a:r>
+              <a:rPr lang="en-US" sz="800" dirty="0">
+                <a:solidFill>
+                  <a:srgbClr val="5B6472"/>
+                </a:solidFill>
+                <a:latin typeface="Arial" pitchFamily="34" charset="0"/>
+                <a:ea typeface="Arial" pitchFamily="34" charset="-122"/>
+                <a:cs typeface="Arial" pitchFamily="34" charset="-120"/>
+              </a:rPr>
+              <a:t>GGW Claims Workflow Redesign · FNOL</a:t>
+            </a:r>
+            <a:endParaRPr lang="en-US" sz="800" dirty="0"/>
+          </a:p>
+        </p:txBody>
+      </p:sp>
+      <p:sp>
+        <p:nvSpPr>
+          <p:cNvPr id="46" name="Text 44"/>
+          <p:cNvSpPr txBox="1"/>
+          <p:nvPr/>
+        </p:nvSpPr>
+        <p:spPr>
+          <a:xfrm>
+            <a:off x="11247120" y="6601968"/>
+            <a:ext cx="594360" cy="219456"/>
+          </a:xfrm>
+          <a:prstGeom prst="rect">
+            <a:avLst/>
+          </a:prstGeom>
+          <a:noFill/>
+          <a:ln/>
+        </p:spPr>
+        <p:txBody>
+          <a:bodyPr wrap="square" lIns="0" tIns="0" rIns="0" bIns="0" rtlCol="0" anchor="ctr"/>
+          <a:lstStyle/>
+          <a:p>
+            <a:pPr algn="r" indent="0" marL="0">
+              <a:buNone/>
+            </a:pPr>
+            <a:r>
+              <a:rPr lang="en-US" sz="800" dirty="0">
+                <a:solidFill>
+                  <a:srgbClr val="5B6472"/>
+                </a:solidFill>
+                <a:latin typeface="Arial" pitchFamily="34" charset="0"/>
+                <a:ea typeface="Arial" pitchFamily="34" charset="-122"/>
+                <a:cs typeface="Arial" pitchFamily="34" charset="-120"/>
+              </a:rPr>
+              <a:t>6 / 9</a:t>
+            </a:r>
+            <a:endParaRPr lang="en-US" sz="800" dirty="0"/>
+          </a:p>
+        </p:txBody>
+      </p:sp>
+    </p:spTree>
+  </p:cSld>
+  <p:clrMapOvr>
+    <a:masterClrMapping/>
+  </p:clrMapOvr>
+</p:sld>
+</file>
+
+<file path=ppt/slides/slide7.xml><?xml version="1.0" encoding="utf-8"?>
+<p:sld xmlns:a="http://schemas.openxmlformats.org/drawingml/2006/main" xmlns:r="http://schemas.openxmlformats.org/officeDocument/2006/relationships" xmlns:p="http://schemas.openxmlformats.org/presentationml/2006/main">
+  <p:cSld name="Slide 7">
+    <p:bg>
+      <p:bgPr>
+        <a:solidFill>
+          <a:srgbClr val="FAFAF8"/>
+        </a:solidFill>
+      </p:bgPr>
+    </p:bg>
+    <p:spTree>
+      <p:nvGrpSpPr>
+        <p:cNvPr id="1" name=""/>
+        <p:cNvGrpSpPr/>
+        <p:nvPr/>
+      </p:nvGrpSpPr>
+      <p:grpSpPr>
+        <a:xfrm>
+          <a:off x="0" y="0"/>
+          <a:ext cx="0" cy="0"/>
+          <a:chOff x="0" y="0"/>
+          <a:chExt cx="0" cy="0"/>
+        </a:xfrm>
+      </p:grpSpPr>
+      <p:sp>
+        <p:nvSpPr>
+          <p:cNvPr id="2" name="Text 0"/>
+          <p:cNvSpPr txBox="1"/>
+          <p:nvPr/>
+        </p:nvSpPr>
+        <p:spPr>
+          <a:xfrm>
+            <a:off x="365760" y="118872"/>
+            <a:ext cx="9326880" cy="310896"/>
+          </a:xfrm>
+          <a:prstGeom prst="rect">
+            <a:avLst/>
+          </a:prstGeom>
+          <a:noFill/>
+          <a:ln/>
+        </p:spPr>
+        <p:txBody>
+          <a:bodyPr wrap="square" lIns="0" tIns="0" rIns="0" bIns="0" rtlCol="0" anchor="ctr"/>
+          <a:lstStyle/>
+          <a:p>
+            <a:pPr indent="0" marL="0">
+              <a:buNone/>
+            </a:pPr>
+            <a:r>
+              <a:rPr lang="en-US" sz="1400" b="1" dirty="0">
+                <a:solidFill>
+                  <a:srgbClr val="1B2430"/>
+                </a:solidFill>
+                <a:latin typeface="Cambria" pitchFamily="34" charset="0"/>
+                <a:ea typeface="Cambria" pitchFamily="34" charset="-122"/>
+                <a:cs typeface="Cambria" pitchFamily="34" charset="-120"/>
+              </a:rPr>
+              <a:t>Nothing goes live decided — it goes live watched, then suggesting, then trusted</a:t>
+            </a:r>
+            <a:endParaRPr lang="en-US" sz="1400" dirty="0"/>
+          </a:p>
+        </p:txBody>
+      </p:sp>
+      <p:sp>
+        <p:nvSpPr>
+          <p:cNvPr id="3" name="Text 1"/>
+          <p:cNvSpPr txBox="1"/>
+          <p:nvPr/>
+        </p:nvSpPr>
+        <p:spPr>
+          <a:xfrm>
+            <a:off x="8229600" y="146304"/>
+            <a:ext cx="3593592" cy="274320"/>
+          </a:xfrm>
+          <a:prstGeom prst="rect">
+            <a:avLst/>
+          </a:prstGeom>
+          <a:noFill/>
+          <a:ln/>
+        </p:spPr>
+        <p:txBody>
+          <a:bodyPr wrap="square" lIns="0" tIns="0" rIns="0" bIns="0" rtlCol="0" anchor="ctr"/>
+          <a:lstStyle/>
+          <a:p>
+            <a:pPr algn="r" indent="0" marL="0">
+              <a:buNone/>
+            </a:pPr>
+            <a:r>
+              <a:rPr lang="en-US" sz="950" b="1" spc="140" kern="0" dirty="0">
+                <a:solidFill>
+                  <a:srgbClr val="5B6472"/>
+                </a:solidFill>
+                <a:latin typeface="Arial" pitchFamily="34" charset="0"/>
+                <a:ea typeface="Arial" pitchFamily="34" charset="-122"/>
+                <a:cs typeface="Arial" pitchFamily="34" charset="-120"/>
+              </a:rPr>
+              <a:t>RUNNING IT IN PRODUCTION</a:t>
+            </a:r>
+            <a:endParaRPr lang="en-US" sz="950" dirty="0"/>
+          </a:p>
+        </p:txBody>
+      </p:sp>
+      <p:sp>
+        <p:nvSpPr>
+          <p:cNvPr id="4" name="Shape 2"/>
+          <p:cNvSpPr/>
+          <p:nvPr/>
+        </p:nvSpPr>
+        <p:spPr>
+          <a:xfrm>
+            <a:off x="365760" y="566928"/>
+            <a:ext cx="2697023" cy="2139696"/>
+          </a:xfrm>
+          <a:prstGeom prst="roundRect">
+            <a:avLst>
+              <a:gd name="adj" fmla="val 2564"/>
+            </a:avLst>
+          </a:prstGeom>
+          <a:solidFill>
+            <a:srgbClr val="FDF3E3"/>
+          </a:solidFill>
+          <a:ln w="16510">
+            <a:solidFill>
+              <a:srgbClr val="D97706"/>
+            </a:solidFill>
+            <a:prstDash val="solid"/>
+          </a:ln>
+        </p:spPr>
+      </p:sp>
+      <p:sp>
+        <p:nvSpPr>
+          <p:cNvPr id="5" name="Text 3"/>
+          <p:cNvSpPr txBox="1"/>
+          <p:nvPr/>
+        </p:nvSpPr>
+        <p:spPr>
+          <a:xfrm>
+            <a:off x="530352" y="676656"/>
+            <a:ext cx="2367839" cy="219456"/>
+          </a:xfrm>
+          <a:prstGeom prst="rect">
+            <a:avLst/>
+          </a:prstGeom>
+          <a:noFill/>
+          <a:ln/>
+        </p:spPr>
+        <p:txBody>
+          <a:bodyPr wrap="square" lIns="0" tIns="0" rIns="0" bIns="0" rtlCol="0" anchor="ctr"/>
+          <a:lstStyle/>
+          <a:p>
+            <a:pPr indent="0" marL="0">
+              <a:buNone/>
+            </a:pPr>
+            <a:r>
+              <a:rPr lang="en-US" sz="960" b="1" spc="80" kern="0" dirty="0">
+                <a:solidFill>
+                  <a:srgbClr val="D97706"/>
+                </a:solidFill>
+                <a:latin typeface="Arial" pitchFamily="34" charset="0"/>
+                <a:ea typeface="Arial" pitchFamily="34" charset="-122"/>
+                <a:cs typeface="Arial" pitchFamily="34" charset="-120"/>
+              </a:rPr>
+              <a:t>1 · SHADOW</a:t>
+            </a:r>
+            <a:endParaRPr lang="en-US" sz="960" dirty="0"/>
+          </a:p>
+        </p:txBody>
+      </p:sp>
+      <p:sp>
+        <p:nvSpPr>
+          <p:cNvPr id="6" name="Text 4"/>
+          <p:cNvSpPr txBox="1"/>
+          <p:nvPr/>
+        </p:nvSpPr>
+        <p:spPr>
+          <a:xfrm>
+            <a:off x="530352" y="896112"/>
+            <a:ext cx="2367839" cy="182880"/>
+          </a:xfrm>
+          <a:prstGeom prst="rect">
+            <a:avLst/>
+          </a:prstGeom>
+          <a:noFill/>
+          <a:ln/>
+        </p:spPr>
+        <p:txBody>
+          <a:bodyPr wrap="square" lIns="0" tIns="0" rIns="0" bIns="0" rtlCol="0" anchor="ctr"/>
+          <a:lstStyle/>
+          <a:p>
+            <a:pPr indent="0" marL="0">
+              <a:buNone/>
+            </a:pPr>
+            <a:r>
+              <a:rPr lang="en-US" sz="800" i="1" dirty="0">
+                <a:solidFill>
+                  <a:srgbClr val="5B6472"/>
+                </a:solidFill>
+                <a:latin typeface="Arial" pitchFamily="34" charset="0"/>
+                <a:ea typeface="Arial" pitchFamily="34" charset="-122"/>
+                <a:cs typeface="Arial" pitchFamily="34" charset="-120"/>
+              </a:rPr>
+              <a:t>wks 1–8</a:t>
+            </a:r>
+            <a:endParaRPr lang="en-US" sz="800" dirty="0"/>
+          </a:p>
+        </p:txBody>
+      </p:sp>
+      <p:sp>
+        <p:nvSpPr>
+          <p:cNvPr id="7" name="Text 5"/>
+          <p:cNvSpPr txBox="1"/>
+          <p:nvPr/>
+        </p:nvSpPr>
+        <p:spPr>
+          <a:xfrm>
+            <a:off x="530352" y="1133856"/>
+            <a:ext cx="2367839" cy="786384"/>
+          </a:xfrm>
+          <a:prstGeom prst="rect">
+            <a:avLst/>
+          </a:prstGeom>
+          <a:noFill/>
+          <a:ln/>
+        </p:spPr>
+        <p:txBody>
+          <a:bodyPr wrap="square" lIns="0" tIns="0" rIns="0" bIns="0" rtlCol="0" anchor="ctr"/>
+          <a:lstStyle/>
+          <a:p>
+            <a:pPr indent="0" marL="0">
+              <a:lnSpc>
+                <a:spcPct val="118000"/>
+              </a:lnSpc>
+              <a:buNone/>
+            </a:pPr>
+            <a:r>
+              <a:rPr lang="en-US" sz="840" dirty="0">
+                <a:solidFill>
+                  <a:srgbClr val="3A3A3A"/>
+                </a:solidFill>
+                <a:latin typeface="Arial" pitchFamily="34" charset="0"/>
+                <a:ea typeface="Arial" pitchFamily="34" charset="-122"/>
+                <a:cs typeface="Arial" pitchFamily="34" charset="-120"/>
+              </a:rPr>
+              <a:t>Agents run on live claims. Output is stored and compared with what the handler did. Nobody sees it.</a:t>
+            </a:r>
+            <a:endParaRPr lang="en-US" sz="840" dirty="0"/>
+          </a:p>
+        </p:txBody>
+      </p:sp>
+      <p:sp>
+        <p:nvSpPr>
+          <p:cNvPr id="8" name="Shape 6"/>
+          <p:cNvSpPr/>
+          <p:nvPr/>
+        </p:nvSpPr>
+        <p:spPr>
+          <a:xfrm>
+            <a:off x="530352" y="1956816"/>
+            <a:ext cx="2367839" cy="10973"/>
+          </a:xfrm>
+          <a:prstGeom prst="rect">
+            <a:avLst/>
+          </a:prstGeom>
+          <a:solidFill>
+            <a:srgbClr val="D97706"/>
+          </a:solidFill>
+          <a:ln/>
+        </p:spPr>
+      </p:sp>
+      <p:sp>
+        <p:nvSpPr>
+          <p:cNvPr id="9" name="Text 7"/>
+          <p:cNvSpPr txBox="1"/>
+          <p:nvPr/>
+        </p:nvSpPr>
+        <p:spPr>
+          <a:xfrm>
+            <a:off x="530352" y="2011680"/>
+            <a:ext cx="2367839" cy="585216"/>
+          </a:xfrm>
+          <a:prstGeom prst="rect">
+            <a:avLst/>
+          </a:prstGeom>
+          <a:noFill/>
+          <a:ln/>
+        </p:spPr>
+        <p:txBody>
+          <a:bodyPr wrap="square" lIns="0" tIns="0" rIns="0" bIns="0" rtlCol="0" anchor="ctr"/>
+          <a:lstStyle/>
+          <a:p>
+            <a:pPr indent="0" marL="0">
+              <a:lnSpc>
+                <a:spcPct val="115000"/>
+              </a:lnSpc>
+              <a:buNone/>
+            </a:pPr>
+            <a:r>
+              <a:rPr lang="en-US" sz="800" i="1" dirty="0">
+                <a:solidFill>
+                  <a:srgbClr val="4A4A4A"/>
+                </a:solidFill>
+                <a:latin typeface="Arial" pitchFamily="34" charset="0"/>
+                <a:ea typeface="Arial" pitchFamily="34" charset="-122"/>
+                <a:cs typeface="Arial" pitchFamily="34" charset="-120"/>
+              </a:rPr>
+              <a:t>Exit when extraction agrees with the handler on 95% of fields.</a:t>
+            </a:r>
+            <a:endParaRPr lang="en-US" sz="800" dirty="0"/>
+          </a:p>
+        </p:txBody>
+      </p:sp>
+      <p:sp>
+        <p:nvSpPr>
+          <p:cNvPr id="10" name="Shape 8"/>
+          <p:cNvSpPr/>
+          <p:nvPr/>
+        </p:nvSpPr>
+        <p:spPr>
+          <a:xfrm>
+            <a:off x="3286811" y="566928"/>
+            <a:ext cx="2697023" cy="2139696"/>
+          </a:xfrm>
+          <a:prstGeom prst="roundRect">
+            <a:avLst>
+              <a:gd name="adj" fmla="val 2564"/>
+            </a:avLst>
+          </a:prstGeom>
+          <a:solidFill>
+            <a:srgbClr val="E4F4F8"/>
+          </a:solidFill>
+          <a:ln w="16510">
+            <a:solidFill>
+              <a:srgbClr val="0891B2"/>
+            </a:solidFill>
+            <a:prstDash val="solid"/>
+          </a:ln>
+        </p:spPr>
+      </p:sp>
+      <p:sp>
+        <p:nvSpPr>
+          <p:cNvPr id="11" name="Text 9"/>
+          <p:cNvSpPr txBox="1"/>
+          <p:nvPr/>
+        </p:nvSpPr>
+        <p:spPr>
+          <a:xfrm>
+            <a:off x="3451403" y="676656"/>
+            <a:ext cx="2367839" cy="219456"/>
+          </a:xfrm>
+          <a:prstGeom prst="rect">
+            <a:avLst/>
+          </a:prstGeom>
+          <a:noFill/>
+          <a:ln/>
+        </p:spPr>
+        <p:txBody>
+          <a:bodyPr wrap="square" lIns="0" tIns="0" rIns="0" bIns="0" rtlCol="0" anchor="ctr"/>
+          <a:lstStyle/>
+          <a:p>
+            <a:pPr indent="0" marL="0">
+              <a:buNone/>
+            </a:pPr>
+            <a:r>
+              <a:rPr lang="en-US" sz="960" b="1" spc="80" kern="0" dirty="0">
+                <a:solidFill>
+                  <a:srgbClr val="0891B2"/>
+                </a:solidFill>
+                <a:latin typeface="Arial" pitchFamily="34" charset="0"/>
+                <a:ea typeface="Arial" pitchFamily="34" charset="-122"/>
+                <a:cs typeface="Arial" pitchFamily="34" charset="-120"/>
+              </a:rPr>
+              <a:t>2 · SUGGEST</a:t>
+            </a:r>
+            <a:endParaRPr lang="en-US" sz="960" dirty="0"/>
+          </a:p>
+        </p:txBody>
+      </p:sp>
+      <p:sp>
+        <p:nvSpPr>
+          <p:cNvPr id="12" name="Text 10"/>
+          <p:cNvSpPr txBox="1"/>
+          <p:nvPr/>
+        </p:nvSpPr>
+        <p:spPr>
+          <a:xfrm>
+            <a:off x="3451403" y="896112"/>
+            <a:ext cx="2367839" cy="182880"/>
+          </a:xfrm>
+          <a:prstGeom prst="rect">
+            <a:avLst/>
+          </a:prstGeom>
+          <a:noFill/>
+          <a:ln/>
+        </p:spPr>
+        <p:txBody>
+          <a:bodyPr wrap="square" lIns="0" tIns="0" rIns="0" bIns="0" rtlCol="0" anchor="ctr"/>
+          <a:lstStyle/>
+          <a:p>
+            <a:pPr indent="0" marL="0">
+              <a:buNone/>
+            </a:pPr>
+            <a:r>
+              <a:rPr lang="en-US" sz="800" i="1" dirty="0">
+                <a:solidFill>
+                  <a:srgbClr val="5B6472"/>
+                </a:solidFill>
+                <a:latin typeface="Arial" pitchFamily="34" charset="0"/>
+                <a:ea typeface="Arial" pitchFamily="34" charset="-122"/>
+                <a:cs typeface="Arial" pitchFamily="34" charset="-120"/>
+              </a:rPr>
+              <a:t>wks 9–16</a:t>
+            </a:r>
+            <a:endParaRPr lang="en-US" sz="800" dirty="0"/>
+          </a:p>
+        </p:txBody>
+      </p:sp>
+      <p:sp>
+        <p:nvSpPr>
+          <p:cNvPr id="13" name="Text 11"/>
+          <p:cNvSpPr txBox="1"/>
+          <p:nvPr/>
+        </p:nvSpPr>
+        <p:spPr>
+          <a:xfrm>
+            <a:off x="3451403" y="1133856"/>
+            <a:ext cx="2367839" cy="786384"/>
+          </a:xfrm>
+          <a:prstGeom prst="rect">
+            <a:avLst/>
+          </a:prstGeom>
+          <a:noFill/>
+          <a:ln/>
+        </p:spPr>
+        <p:txBody>
+          <a:bodyPr wrap="square" lIns="0" tIns="0" rIns="0" bIns="0" rtlCol="0" anchor="ctr"/>
+          <a:lstStyle/>
+          <a:p>
+            <a:pPr indent="0" marL="0">
+              <a:lnSpc>
+                <a:spcPct val="118000"/>
+              </a:lnSpc>
+              <a:buNone/>
+            </a:pPr>
+            <a:r>
+              <a:rPr lang="en-US" sz="840" dirty="0">
+                <a:solidFill>
+                  <a:srgbClr val="3A3A3A"/>
+                </a:solidFill>
+                <a:latin typeface="Arial" pitchFamily="34" charset="0"/>
+                <a:ea typeface="Arial" pitchFamily="34" charset="-122"/>
+                <a:cs typeface="Arial" pitchFamily="34" charset="-120"/>
+              </a:rPr>
+              <a:t>The handler sees the draft and must edit or approve it. Nothing sends itself.</a:t>
+            </a:r>
+            <a:endParaRPr lang="en-US" sz="840" dirty="0"/>
+          </a:p>
+        </p:txBody>
+      </p:sp>
+      <p:sp>
+        <p:nvSpPr>
+          <p:cNvPr id="14" name="Shape 12"/>
+          <p:cNvSpPr/>
+          <p:nvPr/>
+        </p:nvSpPr>
+        <p:spPr>
+          <a:xfrm>
+            <a:off x="3451403" y="1956816"/>
+            <a:ext cx="2367839" cy="10973"/>
+          </a:xfrm>
+          <a:prstGeom prst="rect">
+            <a:avLst/>
+          </a:prstGeom>
+          <a:solidFill>
+            <a:srgbClr val="0891B2"/>
+          </a:solidFill>
+          <a:ln/>
+        </p:spPr>
+      </p:sp>
+      <p:sp>
+        <p:nvSpPr>
+          <p:cNvPr id="15" name="Text 13"/>
+          <p:cNvSpPr txBox="1"/>
+          <p:nvPr/>
+        </p:nvSpPr>
+        <p:spPr>
+          <a:xfrm>
+            <a:off x="3451403" y="2011680"/>
+            <a:ext cx="2367839" cy="585216"/>
+          </a:xfrm>
+          <a:prstGeom prst="rect">
+            <a:avLst/>
+          </a:prstGeom>
+          <a:noFill/>
+          <a:ln/>
+        </p:spPr>
+        <p:txBody>
+          <a:bodyPr wrap="square" lIns="0" tIns="0" rIns="0" bIns="0" rtlCol="0" anchor="ctr"/>
+          <a:lstStyle/>
+          <a:p>
+            <a:pPr indent="0" marL="0">
+              <a:lnSpc>
+                <a:spcPct val="115000"/>
+              </a:lnSpc>
+              <a:buNone/>
+            </a:pPr>
+            <a:r>
+              <a:rPr lang="en-US" sz="800" i="1" dirty="0">
+                <a:solidFill>
+                  <a:srgbClr val="4A4A4A"/>
+                </a:solidFill>
+                <a:latin typeface="Arial" pitchFamily="34" charset="0"/>
+                <a:ea typeface="Arial" pitchFamily="34" charset="-122"/>
+                <a:cs typeface="Arial" pitchFamily="34" charset="-120"/>
+              </a:rPr>
+              <a:t>Exit when the edit rate on minor claims settles below 20%.</a:t>
+            </a:r>
+            <a:endParaRPr lang="en-US" sz="800" dirty="0"/>
+          </a:p>
+        </p:txBody>
+      </p:sp>
+      <p:sp>
+        <p:nvSpPr>
+          <p:cNvPr id="16" name="Shape 14"/>
+          <p:cNvSpPr/>
+          <p:nvPr/>
+        </p:nvSpPr>
+        <p:spPr>
+          <a:xfrm>
+            <a:off x="6207862" y="566928"/>
+            <a:ext cx="2697023" cy="2139696"/>
+          </a:xfrm>
+          <a:prstGeom prst="roundRect">
+            <a:avLst>
+              <a:gd name="adj" fmla="val 2564"/>
+            </a:avLst>
+          </a:prstGeom>
+          <a:solidFill>
+            <a:srgbClr val="EDECFB"/>
+          </a:solidFill>
+          <a:ln w="16510">
+            <a:solidFill>
+              <a:srgbClr val="4338CA"/>
+            </a:solidFill>
+            <a:prstDash val="solid"/>
+          </a:ln>
+        </p:spPr>
+      </p:sp>
+      <p:sp>
+        <p:nvSpPr>
+          <p:cNvPr id="17" name="Text 15"/>
+          <p:cNvSpPr txBox="1"/>
+          <p:nvPr/>
+        </p:nvSpPr>
+        <p:spPr>
+          <a:xfrm>
+            <a:off x="6372454" y="676656"/>
+            <a:ext cx="2367839" cy="219456"/>
+          </a:xfrm>
+          <a:prstGeom prst="rect">
+            <a:avLst/>
+          </a:prstGeom>
+          <a:noFill/>
+          <a:ln/>
+        </p:spPr>
+        <p:txBody>
+          <a:bodyPr wrap="square" lIns="0" tIns="0" rIns="0" bIns="0" rtlCol="0" anchor="ctr"/>
+          <a:lstStyle/>
+          <a:p>
+            <a:pPr indent="0" marL="0">
+              <a:buNone/>
+            </a:pPr>
+            <a:r>
+              <a:rPr lang="en-US" sz="960" b="1" spc="80" kern="0" dirty="0">
+                <a:solidFill>
+                  <a:srgbClr val="4338CA"/>
+                </a:solidFill>
+                <a:latin typeface="Arial" pitchFamily="34" charset="0"/>
+                <a:ea typeface="Arial" pitchFamily="34" charset="-122"/>
+                <a:cs typeface="Arial" pitchFamily="34" charset="-120"/>
+              </a:rPr>
+              <a:t>3 · APPROVE</a:t>
+            </a:r>
+            <a:endParaRPr lang="en-US" sz="960" dirty="0"/>
+          </a:p>
+        </p:txBody>
+      </p:sp>
+      <p:sp>
+        <p:nvSpPr>
+          <p:cNvPr id="18" name="Text 16"/>
+          <p:cNvSpPr txBox="1"/>
+          <p:nvPr/>
+        </p:nvSpPr>
+        <p:spPr>
+          <a:xfrm>
+            <a:off x="6372454" y="896112"/>
+            <a:ext cx="2367839" cy="182880"/>
+          </a:xfrm>
+          <a:prstGeom prst="rect">
+            <a:avLst/>
+          </a:prstGeom>
+          <a:noFill/>
+          <a:ln/>
+        </p:spPr>
+        <p:txBody>
+          <a:bodyPr wrap="square" lIns="0" tIns="0" rIns="0" bIns="0" rtlCol="0" anchor="ctr"/>
+          <a:lstStyle/>
+          <a:p>
+            <a:pPr indent="0" marL="0">
+              <a:buNone/>
+            </a:pPr>
+            <a:r>
+              <a:rPr lang="en-US" sz="800" i="1" dirty="0">
+                <a:solidFill>
+                  <a:srgbClr val="5B6472"/>
+                </a:solidFill>
+                <a:latin typeface="Arial" pitchFamily="34" charset="0"/>
+                <a:ea typeface="Arial" pitchFamily="34" charset="-122"/>
+                <a:cs typeface="Arial" pitchFamily="34" charset="-120"/>
+              </a:rPr>
+              <a:t>mths 5–6</a:t>
+            </a:r>
+            <a:endParaRPr lang="en-US" sz="800" dirty="0"/>
+          </a:p>
+        </p:txBody>
+      </p:sp>
+      <p:sp>
+        <p:nvSpPr>
+          <p:cNvPr id="19" name="Text 17"/>
+          <p:cNvSpPr txBox="1"/>
+          <p:nvPr/>
+        </p:nvSpPr>
+        <p:spPr>
+          <a:xfrm>
+            <a:off x="6372454" y="1133856"/>
+            <a:ext cx="2367839" cy="786384"/>
+          </a:xfrm>
+          <a:prstGeom prst="rect">
+            <a:avLst/>
+          </a:prstGeom>
+          <a:noFill/>
+          <a:ln/>
+        </p:spPr>
+        <p:txBody>
+          <a:bodyPr wrap="square" lIns="0" tIns="0" rIns="0" bIns="0" rtlCol="0" anchor="ctr"/>
+          <a:lstStyle/>
+          <a:p>
+            <a:pPr indent="0" marL="0">
+              <a:lnSpc>
+                <a:spcPct val="118000"/>
+              </a:lnSpc>
+              <a:buNone/>
+            </a:pPr>
+            <a:r>
+              <a:rPr lang="en-US" sz="840" dirty="0">
+                <a:solidFill>
+                  <a:srgbClr val="3A3A3A"/>
+                </a:solidFill>
+                <a:latin typeface="Arial" pitchFamily="34" charset="0"/>
+                <a:ea typeface="Arial" pitchFamily="34" charset="-122"/>
+                <a:cs typeface="Arial" pitchFamily="34" charset="-120"/>
+              </a:rPr>
+              <a:t>Minor claims arrive pre-filled. One click accepts. Everything else still drafted only.</a:t>
+            </a:r>
+            <a:endParaRPr lang="en-US" sz="840" dirty="0"/>
+          </a:p>
+        </p:txBody>
+      </p:sp>
+      <p:sp>
+        <p:nvSpPr>
+          <p:cNvPr id="20" name="Shape 18"/>
+          <p:cNvSpPr/>
+          <p:nvPr/>
+        </p:nvSpPr>
+        <p:spPr>
+          <a:xfrm>
+            <a:off x="6372454" y="1956816"/>
+            <a:ext cx="2367839" cy="10973"/>
+          </a:xfrm>
+          <a:prstGeom prst="rect">
+            <a:avLst/>
+          </a:prstGeom>
+          <a:solidFill>
+            <a:srgbClr val="4338CA"/>
+          </a:solidFill>
+          <a:ln/>
+        </p:spPr>
+      </p:sp>
+      <p:sp>
+        <p:nvSpPr>
+          <p:cNvPr id="21" name="Text 19"/>
+          <p:cNvSpPr txBox="1"/>
+          <p:nvPr/>
+        </p:nvSpPr>
+        <p:spPr>
+          <a:xfrm>
+            <a:off x="6372454" y="2011680"/>
+            <a:ext cx="2367839" cy="585216"/>
+          </a:xfrm>
+          <a:prstGeom prst="rect">
+            <a:avLst/>
+          </a:prstGeom>
+          <a:noFill/>
+          <a:ln/>
+        </p:spPr>
+        <p:txBody>
+          <a:bodyPr wrap="square" lIns="0" tIns="0" rIns="0" bIns="0" rtlCol="0" anchor="ctr"/>
+          <a:lstStyle/>
+          <a:p>
+            <a:pPr indent="0" marL="0">
+              <a:lnSpc>
+                <a:spcPct val="115000"/>
+              </a:lnSpc>
+              <a:buNone/>
+            </a:pPr>
+            <a:r>
+              <a:rPr lang="en-US" sz="800" i="1" dirty="0">
+                <a:solidFill>
+                  <a:srgbClr val="4A4A4A"/>
+                </a:solidFill>
+                <a:latin typeface="Arial" pitchFamily="34" charset="0"/>
+                <a:ea typeface="Arial" pitchFamily="34" charset="-122"/>
+                <a:cs typeface="Arial" pitchFamily="34" charset="-120"/>
+              </a:rPr>
+              <a:t>Exit criteria reviewed monthly with the claims lead.</a:t>
+            </a:r>
+            <a:endParaRPr lang="en-US" sz="800" dirty="0"/>
+          </a:p>
+        </p:txBody>
+      </p:sp>
+      <p:sp>
+        <p:nvSpPr>
+          <p:cNvPr id="22" name="Shape 20"/>
+          <p:cNvSpPr/>
+          <p:nvPr/>
+        </p:nvSpPr>
+        <p:spPr>
+          <a:xfrm>
+            <a:off x="9128912" y="566928"/>
+            <a:ext cx="2697023" cy="2139696"/>
+          </a:xfrm>
+          <a:prstGeom prst="roundRect">
+            <a:avLst>
+              <a:gd name="adj" fmla="val 2564"/>
+            </a:avLst>
+          </a:prstGeom>
+          <a:solidFill>
+            <a:srgbClr val="FBE9F1"/>
+          </a:solidFill>
+          <a:ln w="16510">
+            <a:solidFill>
+              <a:srgbClr val="BE185D"/>
+            </a:solidFill>
+            <a:prstDash val="solid"/>
+          </a:ln>
+        </p:spPr>
+      </p:sp>
+      <p:sp>
+        <p:nvSpPr>
+          <p:cNvPr id="23" name="Text 21"/>
+          <p:cNvSpPr txBox="1"/>
+          <p:nvPr/>
+        </p:nvSpPr>
+        <p:spPr>
+          <a:xfrm>
+            <a:off x="9293504" y="676656"/>
+            <a:ext cx="2367839" cy="219456"/>
+          </a:xfrm>
+          <a:prstGeom prst="rect">
+            <a:avLst/>
+          </a:prstGeom>
+          <a:noFill/>
+          <a:ln/>
+        </p:spPr>
+        <p:txBody>
+          <a:bodyPr wrap="square" lIns="0" tIns="0" rIns="0" bIns="0" rtlCol="0" anchor="ctr"/>
+          <a:lstStyle/>
+          <a:p>
+            <a:pPr indent="0" marL="0">
+              <a:buNone/>
+            </a:pPr>
+            <a:r>
+              <a:rPr lang="en-US" sz="960" b="1" spc="80" kern="0" dirty="0">
+                <a:solidFill>
+                  <a:srgbClr val="BE185D"/>
+                </a:solidFill>
+                <a:latin typeface="Arial" pitchFamily="34" charset="0"/>
+                <a:ea typeface="Arial" pitchFamily="34" charset="-122"/>
+                <a:cs typeface="Arial" pitchFamily="34" charset="-120"/>
+              </a:rPr>
+              <a:t>NEVER</a:t>
+            </a:r>
+            <a:endParaRPr lang="en-US" sz="960" dirty="0"/>
+          </a:p>
+        </p:txBody>
+      </p:sp>
+      <p:sp>
+        <p:nvSpPr>
+          <p:cNvPr id="24" name="Text 22"/>
+          <p:cNvSpPr txBox="1"/>
+          <p:nvPr/>
+        </p:nvSpPr>
+        <p:spPr>
+          <a:xfrm>
+            <a:off x="9293504" y="896112"/>
+            <a:ext cx="2367839" cy="182880"/>
+          </a:xfrm>
+          <a:prstGeom prst="rect">
+            <a:avLst/>
+          </a:prstGeom>
+          <a:noFill/>
+          <a:ln/>
+        </p:spPr>
+        <p:txBody>
+          <a:bodyPr wrap="square" lIns="0" tIns="0" rIns="0" bIns="0" rtlCol="0" anchor="ctr"/>
+          <a:lstStyle/>
+          <a:p>
+            <a:pPr indent="0" marL="0">
+              <a:buNone/>
+            </a:pPr>
+            <a:r>
+              <a:rPr lang="en-US" sz="800" i="1" dirty="0">
+                <a:solidFill>
+                  <a:srgbClr val="5B6472"/>
+                </a:solidFill>
+                <a:latin typeface="Arial" pitchFamily="34" charset="0"/>
+                <a:ea typeface="Arial" pitchFamily="34" charset="-122"/>
+                <a:cs typeface="Arial" pitchFamily="34" charset="-120"/>
+              </a:rPr>
+              <a:t>—</a:t>
+            </a:r>
+            <a:endParaRPr lang="en-US" sz="800" dirty="0"/>
+          </a:p>
+        </p:txBody>
+      </p:sp>
+      <p:sp>
+        <p:nvSpPr>
+          <p:cNvPr id="25" name="Text 23"/>
+          <p:cNvSpPr txBox="1"/>
+          <p:nvPr/>
+        </p:nvSpPr>
+        <p:spPr>
+          <a:xfrm>
+            <a:off x="9293504" y="1133856"/>
+            <a:ext cx="2367839" cy="786384"/>
+          </a:xfrm>
+          <a:prstGeom prst="rect">
+            <a:avLst/>
+          </a:prstGeom>
+          <a:noFill/>
+          <a:ln/>
+        </p:spPr>
+        <p:txBody>
+          <a:bodyPr wrap="square" lIns="0" tIns="0" rIns="0" bIns="0" rtlCol="0" anchor="ctr"/>
+          <a:lstStyle/>
+          <a:p>
+            <a:pPr indent="0" marL="0">
+              <a:lnSpc>
+                <a:spcPct val="118000"/>
+              </a:lnSpc>
+              <a:buNone/>
+            </a:pPr>
+            <a:r>
+              <a:rPr lang="en-US" sz="840" dirty="0">
+                <a:solidFill>
+                  <a:srgbClr val="3A3A3A"/>
+                </a:solidFill>
+                <a:latin typeface="Arial" pitchFamily="34" charset="0"/>
+                <a:ea typeface="Arial" pitchFamily="34" charset="-122"/>
+                <a:cs typeface="Arial" pitchFamily="34" charset="-120"/>
+              </a:rPr>
+              <a:t>No automatic decision on anything adverse to a claimant, on an AES ruling, or on underwriting authority.</a:t>
+            </a:r>
+            <a:endParaRPr lang="en-US" sz="840" dirty="0"/>
+          </a:p>
+        </p:txBody>
+      </p:sp>
+      <p:sp>
+        <p:nvSpPr>
+          <p:cNvPr id="26" name="Shape 24"/>
+          <p:cNvSpPr/>
+          <p:nvPr/>
+        </p:nvSpPr>
+        <p:spPr>
+          <a:xfrm>
+            <a:off x="9293504" y="1956816"/>
+            <a:ext cx="2367839" cy="10973"/>
+          </a:xfrm>
+          <a:prstGeom prst="rect">
+            <a:avLst/>
+          </a:prstGeom>
+          <a:solidFill>
+            <a:srgbClr val="BE185D"/>
+          </a:solidFill>
+          <a:ln/>
+        </p:spPr>
+      </p:sp>
+      <p:sp>
+        <p:nvSpPr>
+          <p:cNvPr id="27" name="Text 25"/>
+          <p:cNvSpPr txBox="1"/>
+          <p:nvPr/>
+        </p:nvSpPr>
+        <p:spPr>
+          <a:xfrm>
+            <a:off x="9293504" y="2011680"/>
+            <a:ext cx="2367839" cy="585216"/>
+          </a:xfrm>
+          <a:prstGeom prst="rect">
+            <a:avLst/>
+          </a:prstGeom>
+          <a:noFill/>
+          <a:ln/>
+        </p:spPr>
+        <p:txBody>
+          <a:bodyPr wrap="square" lIns="0" tIns="0" rIns="0" bIns="0" rtlCol="0" anchor="ctr"/>
+          <a:lstStyle/>
+          <a:p>
+            <a:pPr indent="0" marL="0">
+              <a:lnSpc>
+                <a:spcPct val="115000"/>
+              </a:lnSpc>
+              <a:buNone/>
+            </a:pPr>
+            <a:r>
+              <a:rPr lang="en-US" sz="800" i="1" dirty="0">
+                <a:solidFill>
+                  <a:srgbClr val="6A1F42"/>
+                </a:solidFill>
+                <a:latin typeface="Arial" pitchFamily="34" charset="0"/>
+                <a:ea typeface="Arial" pitchFamily="34" charset="-122"/>
+                <a:cs typeface="Arial" pitchFamily="34" charset="-120"/>
+              </a:rPr>
+              <a:t>This is a design boundary, not a phase.</a:t>
+            </a:r>
+            <a:endParaRPr lang="en-US" sz="800" dirty="0"/>
+          </a:p>
+        </p:txBody>
+      </p:sp>
+      <p:sp>
+        <p:nvSpPr>
+          <p:cNvPr id="28" name="Shape 26"/>
+          <p:cNvSpPr/>
+          <p:nvPr/>
+        </p:nvSpPr>
+        <p:spPr>
+          <a:xfrm>
+            <a:off x="365760" y="2889504"/>
+            <a:ext cx="5751576" cy="2889504"/>
+          </a:xfrm>
+          <a:prstGeom prst="roundRect">
+            <a:avLst>
+              <a:gd name="adj" fmla="val 1899"/>
+            </a:avLst>
+          </a:prstGeom>
+          <a:solidFill>
+            <a:srgbClr val="FFFFFF"/>
+          </a:solidFill>
+          <a:ln w="12700">
+            <a:solidFill>
+              <a:srgbClr val="D7DCE2"/>
+            </a:solidFill>
+            <a:prstDash val="solid"/>
+          </a:ln>
+        </p:spPr>
+      </p:sp>
+      <p:sp>
+        <p:nvSpPr>
+          <p:cNvPr id="29" name="Text 27"/>
+          <p:cNvSpPr txBox="1"/>
+          <p:nvPr/>
+        </p:nvSpPr>
+        <p:spPr>
+          <a:xfrm>
+            <a:off x="548640" y="3017520"/>
+            <a:ext cx="5385816" cy="219456"/>
+          </a:xfrm>
+          <a:prstGeom prst="rect">
+            <a:avLst/>
+          </a:prstGeom>
+          <a:noFill/>
+          <a:ln/>
+        </p:spPr>
+        <p:txBody>
+          <a:bodyPr wrap="square" lIns="0" tIns="0" rIns="0" bIns="0" rtlCol="0" anchor="ctr"/>
+          <a:lstStyle/>
+          <a:p>
+            <a:pPr indent="0" marL="0">
+              <a:buNone/>
+            </a:pPr>
+            <a:r>
+              <a:rPr lang="en-US" sz="900" b="1" spc="80" kern="0" dirty="0">
+                <a:solidFill>
+                  <a:srgbClr val="0891B2"/>
+                </a:solidFill>
+                <a:latin typeface="Arial" pitchFamily="34" charset="0"/>
+                <a:ea typeface="Arial" pitchFamily="34" charset="-122"/>
+                <a:cs typeface="Arial" pitchFamily="34" charset="-120"/>
+              </a:rPr>
+              <a:t>WHAT WE WATCH — AND WHY THAT METRIC</a:t>
+            </a:r>
+            <a:endParaRPr lang="en-US" sz="900" dirty="0"/>
+          </a:p>
+        </p:txBody>
+      </p:sp>
+      <p:sp>
+        <p:nvSpPr>
+          <p:cNvPr id="30" name="Text 28"/>
+          <p:cNvSpPr txBox="1"/>
+          <p:nvPr/>
+        </p:nvSpPr>
+        <p:spPr>
+          <a:xfrm>
+            <a:off x="548640" y="3273552"/>
+            <a:ext cx="2286000" cy="420624"/>
+          </a:xfrm>
+          <a:prstGeom prst="rect">
+            <a:avLst/>
+          </a:prstGeom>
+          <a:noFill/>
+          <a:ln/>
+        </p:spPr>
+        <p:txBody>
+          <a:bodyPr wrap="square" lIns="0" tIns="0" rIns="0" bIns="0" rtlCol="0" anchor="ctr"/>
+          <a:lstStyle/>
+          <a:p>
+            <a:pPr indent="0" marL="0">
+              <a:lnSpc>
+                <a:spcPct val="110000"/>
+              </a:lnSpc>
+              <a:buNone/>
+            </a:pPr>
+            <a:r>
+              <a:rPr lang="en-US" sz="840" b="1" dirty="0">
+                <a:solidFill>
+                  <a:srgbClr val="1B2430"/>
+                </a:solidFill>
+                <a:latin typeface="Arial" pitchFamily="34" charset="0"/>
+                <a:ea typeface="Arial" pitchFamily="34" charset="-122"/>
+                <a:cs typeface="Arial" pitchFamily="34" charset="-120"/>
+              </a:rPr>
+              <a:t>Edit rate on drafts</a:t>
+            </a:r>
+            <a:endParaRPr lang="en-US" sz="840" dirty="0"/>
+          </a:p>
+        </p:txBody>
+      </p:sp>
+      <p:sp>
+        <p:nvSpPr>
+          <p:cNvPr id="31" name="Text 29"/>
+          <p:cNvSpPr txBox="1"/>
+          <p:nvPr/>
+        </p:nvSpPr>
+        <p:spPr>
+          <a:xfrm>
+            <a:off x="2907792" y="3273552"/>
+            <a:ext cx="3026664" cy="420624"/>
+          </a:xfrm>
+          <a:prstGeom prst="rect">
+            <a:avLst/>
+          </a:prstGeom>
+          <a:noFill/>
+          <a:ln/>
+        </p:spPr>
+        <p:txBody>
+          <a:bodyPr wrap="square" lIns="0" tIns="0" rIns="0" bIns="0" rtlCol="0" anchor="ctr"/>
+          <a:lstStyle/>
+          <a:p>
+            <a:pPr indent="0" marL="0">
+              <a:lnSpc>
+                <a:spcPct val="115000"/>
+              </a:lnSpc>
+              <a:buNone/>
+            </a:pPr>
+            <a:r>
+              <a:rPr lang="en-US" sz="800" dirty="0">
+                <a:solidFill>
+                  <a:srgbClr val="5A5A5A"/>
+                </a:solidFill>
+                <a:latin typeface="Arial" pitchFamily="34" charset="0"/>
+                <a:ea typeface="Arial" pitchFamily="34" charset="-122"/>
+                <a:cs typeface="Arial" pitchFamily="34" charset="-120"/>
+              </a:rPr>
+              <a:t>The trust signal. A model can be accurate and still not be used.</a:t>
+            </a:r>
+            <a:endParaRPr lang="en-US" sz="800" dirty="0"/>
+          </a:p>
+        </p:txBody>
+      </p:sp>
+      <p:sp>
+        <p:nvSpPr>
+          <p:cNvPr id="32" name="Text 30"/>
+          <p:cNvSpPr txBox="1"/>
+          <p:nvPr/>
+        </p:nvSpPr>
+        <p:spPr>
+          <a:xfrm>
+            <a:off x="548640" y="3712464"/>
+            <a:ext cx="2286000" cy="420624"/>
+          </a:xfrm>
+          <a:prstGeom prst="rect">
+            <a:avLst/>
+          </a:prstGeom>
+          <a:noFill/>
+          <a:ln/>
+        </p:spPr>
+        <p:txBody>
+          <a:bodyPr wrap="square" lIns="0" tIns="0" rIns="0" bIns="0" rtlCol="0" anchor="ctr"/>
+          <a:lstStyle/>
+          <a:p>
+            <a:pPr indent="0" marL="0">
+              <a:lnSpc>
+                <a:spcPct val="110000"/>
+              </a:lnSpc>
+              <a:buNone/>
+            </a:pPr>
+            <a:r>
+              <a:rPr lang="en-US" sz="840" b="1" dirty="0">
+                <a:solidFill>
+                  <a:srgbClr val="1B2430"/>
+                </a:solidFill>
+                <a:latin typeface="Arial" pitchFamily="34" charset="0"/>
+                <a:ea typeface="Arial" pitchFamily="34" charset="-122"/>
+                <a:cs typeface="Arial" pitchFamily="34" charset="-120"/>
+              </a:rPr>
+              <a:t>Field-level extraction precision</a:t>
+            </a:r>
+            <a:endParaRPr lang="en-US" sz="840" dirty="0"/>
+          </a:p>
+        </p:txBody>
+      </p:sp>
+      <p:sp>
+        <p:nvSpPr>
+          <p:cNvPr id="33" name="Text 31"/>
+          <p:cNvSpPr txBox="1"/>
+          <p:nvPr/>
+        </p:nvSpPr>
+        <p:spPr>
+          <a:xfrm>
+            <a:off x="2907792" y="3712464"/>
+            <a:ext cx="3026664" cy="420624"/>
+          </a:xfrm>
+          <a:prstGeom prst="rect">
+            <a:avLst/>
+          </a:prstGeom>
+          <a:noFill/>
+          <a:ln/>
+        </p:spPr>
+        <p:txBody>
+          <a:bodyPr wrap="square" lIns="0" tIns="0" rIns="0" bIns="0" rtlCol="0" anchor="ctr"/>
+          <a:lstStyle/>
+          <a:p>
+            <a:pPr indent="0" marL="0">
+              <a:lnSpc>
+                <a:spcPct val="115000"/>
+              </a:lnSpc>
+              <a:buNone/>
+            </a:pPr>
+            <a:r>
+              <a:rPr lang="en-US" sz="800" dirty="0">
+                <a:solidFill>
+                  <a:srgbClr val="5A5A5A"/>
+                </a:solidFill>
+                <a:latin typeface="Arial" pitchFamily="34" charset="0"/>
+                <a:ea typeface="Arial" pitchFamily="34" charset="-122"/>
+                <a:cs typeface="Arial" pitchFamily="34" charset="-120"/>
+              </a:rPr>
+              <a:t>Checked against the source document, per field, not per claim.</a:t>
+            </a:r>
+            <a:endParaRPr lang="en-US" sz="800" dirty="0"/>
+          </a:p>
+        </p:txBody>
+      </p:sp>
+      <p:sp>
+        <p:nvSpPr>
+          <p:cNvPr id="34" name="Text 32"/>
+          <p:cNvSpPr txBox="1"/>
+          <p:nvPr/>
+        </p:nvSpPr>
+        <p:spPr>
+          <a:xfrm>
+            <a:off x="548640" y="4151376"/>
+            <a:ext cx="2286000" cy="420624"/>
+          </a:xfrm>
+          <a:prstGeom prst="rect">
+            <a:avLst/>
+          </a:prstGeom>
+          <a:noFill/>
+          <a:ln/>
+        </p:spPr>
+        <p:txBody>
+          <a:bodyPr wrap="square" lIns="0" tIns="0" rIns="0" bIns="0" rtlCol="0" anchor="ctr"/>
+          <a:lstStyle/>
+          <a:p>
+            <a:pPr indent="0" marL="0">
+              <a:lnSpc>
+                <a:spcPct val="110000"/>
+              </a:lnSpc>
+              <a:buNone/>
+            </a:pPr>
+            <a:r>
+              <a:rPr lang="en-US" sz="840" b="1" dirty="0">
+                <a:solidFill>
+                  <a:srgbClr val="1B2430"/>
+                </a:solidFill>
+                <a:latin typeface="Arial" pitchFamily="34" charset="0"/>
+                <a:ea typeface="Arial" pitchFamily="34" charset="-122"/>
+                <a:cs typeface="Arial" pitchFamily="34" charset="-120"/>
+              </a:rPr>
+              <a:t>Exception rate, by node</a:t>
+            </a:r>
+            <a:endParaRPr lang="en-US" sz="840" dirty="0"/>
+          </a:p>
+        </p:txBody>
+      </p:sp>
+      <p:sp>
+        <p:nvSpPr>
+          <p:cNvPr id="35" name="Text 33"/>
+          <p:cNvSpPr txBox="1"/>
+          <p:nvPr/>
+        </p:nvSpPr>
+        <p:spPr>
+          <a:xfrm>
+            <a:off x="2907792" y="4151376"/>
+            <a:ext cx="3026664" cy="420624"/>
+          </a:xfrm>
+          <a:prstGeom prst="rect">
+            <a:avLst/>
+          </a:prstGeom>
+          <a:noFill/>
+          <a:ln/>
+        </p:spPr>
+        <p:txBody>
+          <a:bodyPr wrap="square" lIns="0" tIns="0" rIns="0" bIns="0" rtlCol="0" anchor="ctr"/>
+          <a:lstStyle/>
+          <a:p>
+            <a:pPr indent="0" marL="0">
+              <a:lnSpc>
+                <a:spcPct val="115000"/>
+              </a:lnSpc>
+              <a:buNone/>
+            </a:pPr>
+            <a:r>
+              <a:rPr lang="en-US" sz="800" dirty="0">
+                <a:solidFill>
+                  <a:srgbClr val="5A5A5A"/>
+                </a:solidFill>
+                <a:latin typeface="Arial" pitchFamily="34" charset="0"/>
+                <a:ea typeface="Arial" pitchFamily="34" charset="-122"/>
+                <a:cs typeface="Arial" pitchFamily="34" charset="-120"/>
+              </a:rPr>
+              <a:t>Says which step is actually struggling, not that “the AI” is.</a:t>
+            </a:r>
+            <a:endParaRPr lang="en-US" sz="800" dirty="0"/>
+          </a:p>
+        </p:txBody>
+      </p:sp>
+      <p:sp>
+        <p:nvSpPr>
+          <p:cNvPr id="36" name="Text 34"/>
+          <p:cNvSpPr txBox="1"/>
+          <p:nvPr/>
+        </p:nvSpPr>
+        <p:spPr>
+          <a:xfrm>
+            <a:off x="548640" y="4590288"/>
+            <a:ext cx="2286000" cy="420624"/>
+          </a:xfrm>
+          <a:prstGeom prst="rect">
+            <a:avLst/>
+          </a:prstGeom>
+          <a:noFill/>
+          <a:ln/>
+        </p:spPr>
+        <p:txBody>
+          <a:bodyPr wrap="square" lIns="0" tIns="0" rIns="0" bIns="0" rtlCol="0" anchor="ctr"/>
+          <a:lstStyle/>
+          <a:p>
+            <a:pPr indent="0" marL="0">
+              <a:lnSpc>
+                <a:spcPct val="110000"/>
+              </a:lnSpc>
+              <a:buNone/>
+            </a:pPr>
+            <a:r>
+              <a:rPr lang="en-US" sz="840" b="1" dirty="0">
+                <a:solidFill>
+                  <a:srgbClr val="1B2430"/>
+                </a:solidFill>
+                <a:latin typeface="Arial" pitchFamily="34" charset="0"/>
+                <a:ea typeface="Arial" pitchFamily="34" charset="-122"/>
+                <a:cs typeface="Arial" pitchFamily="34" charset="-120"/>
+              </a:rPr>
+              <a:t>Override rate by claim type</a:t>
+            </a:r>
+            <a:endParaRPr lang="en-US" sz="840" dirty="0"/>
+          </a:p>
+        </p:txBody>
+      </p:sp>
+      <p:sp>
+        <p:nvSpPr>
+          <p:cNvPr id="37" name="Text 35"/>
+          <p:cNvSpPr txBox="1"/>
+          <p:nvPr/>
+        </p:nvSpPr>
+        <p:spPr>
+          <a:xfrm>
+            <a:off x="2907792" y="4590288"/>
+            <a:ext cx="3026664" cy="420624"/>
+          </a:xfrm>
+          <a:prstGeom prst="rect">
+            <a:avLst/>
+          </a:prstGeom>
+          <a:noFill/>
+          <a:ln/>
+        </p:spPr>
+        <p:txBody>
+          <a:bodyPr wrap="square" lIns="0" tIns="0" rIns="0" bIns="0" rtlCol="0" anchor="ctr"/>
+          <a:lstStyle/>
+          <a:p>
+            <a:pPr indent="0" marL="0">
+              <a:lnSpc>
+                <a:spcPct val="115000"/>
+              </a:lnSpc>
+              <a:buNone/>
+            </a:pPr>
+            <a:r>
+              <a:rPr lang="en-US" sz="800" dirty="0">
+                <a:solidFill>
+                  <a:srgbClr val="5A5A5A"/>
+                </a:solidFill>
+                <a:latin typeface="Arial" pitchFamily="34" charset="0"/>
+                <a:ea typeface="Arial" pitchFamily="34" charset="-122"/>
+                <a:cs typeface="Arial" pitchFamily="34" charset="-120"/>
+              </a:rPr>
+              <a:t>Feeds the confidence threshold. Teeth claims will differ from the rest.</a:t>
+            </a:r>
+            <a:endParaRPr lang="en-US" sz="800" dirty="0"/>
+          </a:p>
+        </p:txBody>
+      </p:sp>
+      <p:sp>
+        <p:nvSpPr>
+          <p:cNvPr id="38" name="Text 36"/>
+          <p:cNvSpPr txBox="1"/>
+          <p:nvPr/>
+        </p:nvSpPr>
+        <p:spPr>
+          <a:xfrm>
+            <a:off x="548640" y="5029200"/>
+            <a:ext cx="2286000" cy="420624"/>
+          </a:xfrm>
+          <a:prstGeom prst="rect">
+            <a:avLst/>
+          </a:prstGeom>
+          <a:noFill/>
+          <a:ln/>
+        </p:spPr>
+        <p:txBody>
+          <a:bodyPr wrap="square" lIns="0" tIns="0" rIns="0" bIns="0" rtlCol="0" anchor="ctr"/>
+          <a:lstStyle/>
+          <a:p>
+            <a:pPr indent="0" marL="0">
+              <a:lnSpc>
+                <a:spcPct val="110000"/>
+              </a:lnSpc>
+              <a:buNone/>
+            </a:pPr>
+            <a:r>
+              <a:rPr lang="en-US" sz="840" b="1" dirty="0">
+                <a:solidFill>
+                  <a:srgbClr val="1B2430"/>
+                </a:solidFill>
+                <a:latin typeface="Arial" pitchFamily="34" charset="0"/>
+                <a:ea typeface="Arial" pitchFamily="34" charset="-122"/>
+                <a:cs typeface="Arial" pitchFamily="34" charset="-120"/>
+              </a:rPr>
+              <a:t>First report to linked claim</a:t>
+            </a:r>
+            <a:endParaRPr lang="en-US" sz="840" dirty="0"/>
+          </a:p>
+        </p:txBody>
+      </p:sp>
+      <p:sp>
+        <p:nvSpPr>
+          <p:cNvPr id="39" name="Text 37"/>
+          <p:cNvSpPr txBox="1"/>
+          <p:nvPr/>
+        </p:nvSpPr>
+        <p:spPr>
+          <a:xfrm>
+            <a:off x="2907792" y="5029200"/>
+            <a:ext cx="3026664" cy="420624"/>
+          </a:xfrm>
+          <a:prstGeom prst="rect">
+            <a:avLst/>
+          </a:prstGeom>
+          <a:noFill/>
+          <a:ln/>
+        </p:spPr>
+        <p:txBody>
+          <a:bodyPr wrap="square" lIns="0" tIns="0" rIns="0" bIns="0" rtlCol="0" anchor="ctr"/>
+          <a:lstStyle/>
+          <a:p>
+            <a:pPr indent="0" marL="0">
+              <a:lnSpc>
+                <a:spcPct val="115000"/>
+              </a:lnSpc>
+              <a:buNone/>
+            </a:pPr>
+            <a:r>
+              <a:rPr lang="en-US" sz="800" dirty="0">
+                <a:solidFill>
+                  <a:srgbClr val="5A5A5A"/>
+                </a:solidFill>
+                <a:latin typeface="Arial" pitchFamily="34" charset="0"/>
+                <a:ea typeface="Arial" pitchFamily="34" charset="-122"/>
+                <a:cs typeface="Arial" pitchFamily="34" charset="-120"/>
+              </a:rPr>
+              <a:t>The only number the business asked for. Everything else is diagnostic.</a:t>
+            </a:r>
+            <a:endParaRPr lang="en-US" sz="800" dirty="0"/>
+          </a:p>
+        </p:txBody>
+      </p:sp>
+      <p:sp>
+        <p:nvSpPr>
+          <p:cNvPr id="40" name="Text 38"/>
+          <p:cNvSpPr txBox="1"/>
+          <p:nvPr/>
+        </p:nvSpPr>
+        <p:spPr>
+          <a:xfrm>
+            <a:off x="548640" y="5504688"/>
+            <a:ext cx="5385816" cy="182880"/>
+          </a:xfrm>
+          <a:prstGeom prst="rect">
+            <a:avLst/>
+          </a:prstGeom>
+          <a:noFill/>
+          <a:ln/>
+        </p:spPr>
+        <p:txBody>
+          <a:bodyPr wrap="square" lIns="0" tIns="0" rIns="0" bIns="0" rtlCol="0" anchor="ctr"/>
+          <a:lstStyle/>
+          <a:p>
+            <a:pPr indent="0" marL="0">
+              <a:buNone/>
+            </a:pPr>
+            <a:r>
+              <a:rPr lang="en-US" sz="780" i="1" dirty="0">
+                <a:solidFill>
+                  <a:srgbClr val="0891B2"/>
+                </a:solidFill>
+                <a:latin typeface="Arial" pitchFamily="34" charset="0"/>
+                <a:ea typeface="Arial" pitchFamily="34" charset="-122"/>
+                <a:cs typeface="Arial" pitchFamily="34" charset="-120"/>
+              </a:rPr>
+              <a:t>Alert on the rate, not the count — one stuck claim is normal, twenty in an hour is not.</a:t>
+            </a:r>
+            <a:endParaRPr lang="en-US" sz="780" dirty="0"/>
+          </a:p>
+        </p:txBody>
+      </p:sp>
+      <p:sp>
+        <p:nvSpPr>
+          <p:cNvPr id="41" name="Shape 39"/>
+          <p:cNvSpPr/>
+          <p:nvPr/>
+        </p:nvSpPr>
+        <p:spPr>
+          <a:xfrm>
+            <a:off x="6300216" y="2889504"/>
+            <a:ext cx="5522976" cy="2889504"/>
+          </a:xfrm>
+          <a:prstGeom prst="roundRect">
+            <a:avLst>
+              <a:gd name="adj" fmla="val 1899"/>
+            </a:avLst>
+          </a:prstGeom>
+          <a:solidFill>
+            <a:srgbClr val="FFFFFF"/>
+          </a:solidFill>
+          <a:ln w="15240">
+            <a:solidFill>
+              <a:srgbClr val="BE185D"/>
+            </a:solidFill>
+            <a:prstDash val="solid"/>
+          </a:ln>
+        </p:spPr>
+      </p:sp>
+      <p:sp>
+        <p:nvSpPr>
+          <p:cNvPr id="42" name="Text 40"/>
+          <p:cNvSpPr txBox="1"/>
+          <p:nvPr/>
+        </p:nvSpPr>
+        <p:spPr>
+          <a:xfrm>
+            <a:off x="6483096" y="3017520"/>
+            <a:ext cx="5157216" cy="219456"/>
+          </a:xfrm>
+          <a:prstGeom prst="rect">
+            <a:avLst/>
+          </a:prstGeom>
+          <a:noFill/>
+          <a:ln/>
+        </p:spPr>
+        <p:txBody>
+          <a:bodyPr wrap="square" lIns="0" tIns="0" rIns="0" bIns="0" rtlCol="0" anchor="ctr"/>
+          <a:lstStyle/>
+          <a:p>
+            <a:pPr indent="0" marL="0">
+              <a:buNone/>
+            </a:pPr>
+            <a:r>
+              <a:rPr lang="en-US" sz="900" b="1" spc="80" kern="0" dirty="0">
+                <a:solidFill>
+                  <a:srgbClr val="BE185D"/>
+                </a:solidFill>
+                <a:latin typeface="Arial" pitchFamily="34" charset="0"/>
+                <a:ea typeface="Arial" pitchFamily="34" charset="-122"/>
+                <a:cs typeface="Arial" pitchFamily="34" charset="-120"/>
+              </a:rPr>
+              <a:t>WHEN IT BREAKS</a:t>
+            </a:r>
+            <a:endParaRPr lang="en-US" sz="900" dirty="0"/>
+          </a:p>
+        </p:txBody>
+      </p:sp>
+      <p:sp>
+        <p:nvSpPr>
+          <p:cNvPr id="43" name="Text 41"/>
+          <p:cNvSpPr txBox="1"/>
+          <p:nvPr/>
+        </p:nvSpPr>
+        <p:spPr>
+          <a:xfrm>
+            <a:off x="6483096" y="3273552"/>
+            <a:ext cx="5157216" cy="182880"/>
+          </a:xfrm>
+          <a:prstGeom prst="rect">
+            <a:avLst/>
+          </a:prstGeom>
+          <a:noFill/>
+          <a:ln/>
+        </p:spPr>
+        <p:txBody>
+          <a:bodyPr wrap="square" lIns="0" tIns="0" rIns="0" bIns="0" rtlCol="0" anchor="ctr"/>
+          <a:lstStyle/>
+          <a:p>
+            <a:pPr indent="0" marL="0">
+              <a:buNone/>
+            </a:pPr>
+            <a:r>
+              <a:rPr lang="en-US" sz="840" b="1" dirty="0">
+                <a:solidFill>
+                  <a:srgbClr val="6A1F42"/>
+                </a:solidFill>
+                <a:latin typeface="Arial" pitchFamily="34" charset="0"/>
+                <a:ea typeface="Arial" pitchFamily="34" charset="-122"/>
+                <a:cs typeface="Arial" pitchFamily="34" charset="-120"/>
+              </a:rPr>
+              <a:t>An agent fails, or confidence is low</a:t>
+            </a:r>
+            <a:endParaRPr lang="en-US" sz="840" dirty="0"/>
+          </a:p>
+        </p:txBody>
+      </p:sp>
+      <p:sp>
+        <p:nvSpPr>
+          <p:cNvPr id="44" name="Text 42"/>
+          <p:cNvSpPr txBox="1"/>
+          <p:nvPr/>
+        </p:nvSpPr>
+        <p:spPr>
+          <a:xfrm>
+            <a:off x="6483096" y="3447288"/>
+            <a:ext cx="5157216" cy="384048"/>
+          </a:xfrm>
+          <a:prstGeom prst="rect">
+            <a:avLst/>
+          </a:prstGeom>
+          <a:noFill/>
+          <a:ln/>
+        </p:spPr>
+        <p:txBody>
+          <a:bodyPr wrap="square" lIns="0" tIns="0" rIns="0" bIns="0" rtlCol="0" anchor="ctr"/>
+          <a:lstStyle/>
+          <a:p>
+            <a:pPr indent="0" marL="0">
+              <a:lnSpc>
+                <a:spcPct val="115000"/>
+              </a:lnSpc>
+              <a:buNone/>
+            </a:pPr>
+            <a:r>
+              <a:rPr lang="en-US" sz="800" dirty="0">
+                <a:solidFill>
+                  <a:srgbClr val="5A5A5A"/>
+                </a:solidFill>
+                <a:latin typeface="Arial" pitchFamily="34" charset="0"/>
+                <a:ea typeface="Arial" pitchFamily="34" charset="-122"/>
+                <a:cs typeface="Arial" pitchFamily="34" charset="-120"/>
+              </a:rPr>
+              <a:t>The claim drops into today's manual queue. The old path is never removed, so the failure mode is a slower claim, never a wrong one.</a:t>
+            </a:r>
+            <a:endParaRPr lang="en-US" sz="800" dirty="0"/>
+          </a:p>
+        </p:txBody>
+      </p:sp>
+      <p:sp>
+        <p:nvSpPr>
+          <p:cNvPr id="45" name="Text 43"/>
+          <p:cNvSpPr txBox="1"/>
+          <p:nvPr/>
+        </p:nvSpPr>
+        <p:spPr>
+          <a:xfrm>
+            <a:off x="6483096" y="3840480"/>
+            <a:ext cx="5157216" cy="182880"/>
+          </a:xfrm>
+          <a:prstGeom prst="rect">
+            <a:avLst/>
+          </a:prstGeom>
+          <a:noFill/>
+          <a:ln/>
+        </p:spPr>
+        <p:txBody>
+          <a:bodyPr wrap="square" lIns="0" tIns="0" rIns="0" bIns="0" rtlCol="0" anchor="ctr"/>
+          <a:lstStyle/>
+          <a:p>
+            <a:pPr indent="0" marL="0">
+              <a:buNone/>
+            </a:pPr>
+            <a:r>
+              <a:rPr lang="en-US" sz="840" b="1" dirty="0">
+                <a:solidFill>
+                  <a:srgbClr val="6A1F42"/>
+                </a:solidFill>
+                <a:latin typeface="Arial" pitchFamily="34" charset="0"/>
+                <a:ea typeface="Arial" pitchFamily="34" charset="-122"/>
+                <a:cs typeface="Arial" pitchFamily="34" charset="-120"/>
+              </a:rPr>
+              <a:t>A prompt or model version changes</a:t>
+            </a:r>
+            <a:endParaRPr lang="en-US" sz="840" dirty="0"/>
+          </a:p>
+        </p:txBody>
+      </p:sp>
+      <p:sp>
+        <p:nvSpPr>
+          <p:cNvPr id="46" name="Text 44"/>
+          <p:cNvSpPr txBox="1"/>
+          <p:nvPr/>
+        </p:nvSpPr>
+        <p:spPr>
+          <a:xfrm>
+            <a:off x="6483096" y="4014216"/>
+            <a:ext cx="5157216" cy="384048"/>
+          </a:xfrm>
+          <a:prstGeom prst="rect">
+            <a:avLst/>
+          </a:prstGeom>
+          <a:noFill/>
+          <a:ln/>
+        </p:spPr>
+        <p:txBody>
+          <a:bodyPr wrap="square" lIns="0" tIns="0" rIns="0" bIns="0" rtlCol="0" anchor="ctr"/>
+          <a:lstStyle/>
+          <a:p>
+            <a:pPr indent="0" marL="0">
+              <a:lnSpc>
+                <a:spcPct val="115000"/>
+              </a:lnSpc>
+              <a:buNone/>
+            </a:pPr>
+            <a:r>
+              <a:rPr lang="en-US" sz="800" dirty="0">
+                <a:solidFill>
+                  <a:srgbClr val="5A5A5A"/>
+                </a:solidFill>
+                <a:latin typeface="Arial" pitchFamily="34" charset="0"/>
+                <a:ea typeface="Arial" pitchFamily="34" charset="-122"/>
+                <a:cs typeface="Arial" pitchFamily="34" charset="-120"/>
+              </a:rPr>
+              <a:t>200 historical claims are replayed first. A regression against the recorded outcome blocks the deploy.</a:t>
+            </a:r>
+            <a:endParaRPr lang="en-US" sz="800" dirty="0"/>
+          </a:p>
+        </p:txBody>
+      </p:sp>
+      <p:sp>
+        <p:nvSpPr>
+          <p:cNvPr id="47" name="Text 45"/>
+          <p:cNvSpPr txBox="1"/>
+          <p:nvPr/>
+        </p:nvSpPr>
+        <p:spPr>
+          <a:xfrm>
+            <a:off x="6483096" y="4407408"/>
+            <a:ext cx="5157216" cy="182880"/>
+          </a:xfrm>
+          <a:prstGeom prst="rect">
+            <a:avLst/>
+          </a:prstGeom>
+          <a:noFill/>
+          <a:ln/>
+        </p:spPr>
+        <p:txBody>
+          <a:bodyPr wrap="square" lIns="0" tIns="0" rIns="0" bIns="0" rtlCol="0" anchor="ctr"/>
+          <a:lstStyle/>
+          <a:p>
+            <a:pPr indent="0" marL="0">
+              <a:buNone/>
+            </a:pPr>
+            <a:r>
+              <a:rPr lang="en-US" sz="840" b="1" dirty="0">
+                <a:solidFill>
+                  <a:srgbClr val="6A1F42"/>
+                </a:solidFill>
+                <a:latin typeface="Arial" pitchFamily="34" charset="0"/>
+                <a:ea typeface="Arial" pitchFamily="34" charset="-122"/>
+                <a:cs typeface="Arial" pitchFamily="34" charset="-120"/>
+              </a:rPr>
+              <a:t>One agent misbehaves in the wild</a:t>
+            </a:r>
+            <a:endParaRPr lang="en-US" sz="840" dirty="0"/>
+          </a:p>
+        </p:txBody>
+      </p:sp>
+      <p:sp>
+        <p:nvSpPr>
+          <p:cNvPr id="48" name="Text 46"/>
+          <p:cNvSpPr txBox="1"/>
+          <p:nvPr/>
+        </p:nvSpPr>
+        <p:spPr>
+          <a:xfrm>
+            <a:off x="6483096" y="4581144"/>
+            <a:ext cx="5157216" cy="384048"/>
+          </a:xfrm>
+          <a:prstGeom prst="rect">
+            <a:avLst/>
+          </a:prstGeom>
+          <a:noFill/>
+          <a:ln/>
+        </p:spPr>
+        <p:txBody>
+          <a:bodyPr wrap="square" lIns="0" tIns="0" rIns="0" bIns="0" rtlCol="0" anchor="ctr"/>
+          <a:lstStyle/>
+          <a:p>
+            <a:pPr indent="0" marL="0">
+              <a:lnSpc>
+                <a:spcPct val="115000"/>
+              </a:lnSpc>
+              <a:buNone/>
+            </a:pPr>
+            <a:r>
+              <a:rPr lang="en-US" sz="800" dirty="0">
+                <a:solidFill>
+                  <a:srgbClr val="5A5A5A"/>
+                </a:solidFill>
+                <a:latin typeface="Arial" pitchFamily="34" charset="0"/>
+                <a:ea typeface="Arial" pitchFamily="34" charset="-122"/>
+                <a:cs typeface="Arial" pitchFamily="34" charset="-120"/>
+              </a:rPr>
+              <a:t>Each is behind its own switch. Turn off drafting and extraction keeps running.</a:t>
+            </a:r>
+            <a:endParaRPr lang="en-US" sz="800" dirty="0"/>
+          </a:p>
+        </p:txBody>
+      </p:sp>
+      <p:sp>
+        <p:nvSpPr>
+          <p:cNvPr id="49" name="Text 47"/>
+          <p:cNvSpPr txBox="1"/>
+          <p:nvPr/>
+        </p:nvSpPr>
+        <p:spPr>
+          <a:xfrm>
+            <a:off x="6483096" y="4974336"/>
+            <a:ext cx="5157216" cy="182880"/>
+          </a:xfrm>
+          <a:prstGeom prst="rect">
+            <a:avLst/>
+          </a:prstGeom>
+          <a:noFill/>
+          <a:ln/>
+        </p:spPr>
+        <p:txBody>
+          <a:bodyPr wrap="square" lIns="0" tIns="0" rIns="0" bIns="0" rtlCol="0" anchor="ctr"/>
+          <a:lstStyle/>
+          <a:p>
+            <a:pPr indent="0" marL="0">
+              <a:buNone/>
+            </a:pPr>
+            <a:r>
+              <a:rPr lang="en-US" sz="840" b="1" dirty="0">
+                <a:solidFill>
+                  <a:srgbClr val="6A1F42"/>
+                </a:solidFill>
+                <a:latin typeface="Arial" pitchFamily="34" charset="0"/>
+                <a:ea typeface="Arial" pitchFamily="34" charset="-122"/>
+                <a:cs typeface="Arial" pitchFamily="34" charset="-120"/>
+              </a:rPr>
+              <a:t>The run dies half way</a:t>
+            </a:r>
+            <a:endParaRPr lang="en-US" sz="840" dirty="0"/>
+          </a:p>
+        </p:txBody>
+      </p:sp>
+      <p:sp>
+        <p:nvSpPr>
+          <p:cNvPr id="50" name="Text 48"/>
+          <p:cNvSpPr txBox="1"/>
+          <p:nvPr/>
+        </p:nvSpPr>
+        <p:spPr>
+          <a:xfrm>
+            <a:off x="6483096" y="5148072"/>
+            <a:ext cx="5157216" cy="384048"/>
+          </a:xfrm>
+          <a:prstGeom prst="rect">
+            <a:avLst/>
+          </a:prstGeom>
+          <a:noFill/>
+          <a:ln/>
+        </p:spPr>
+        <p:txBody>
+          <a:bodyPr wrap="square" lIns="0" tIns="0" rIns="0" bIns="0" rtlCol="0" anchor="ctr"/>
+          <a:lstStyle/>
+          <a:p>
+            <a:pPr indent="0" marL="0">
+              <a:lnSpc>
+                <a:spcPct val="115000"/>
+              </a:lnSpc>
+              <a:buNone/>
+            </a:pPr>
+            <a:r>
+              <a:rPr lang="en-US" sz="800" dirty="0">
+                <a:solidFill>
+                  <a:srgbClr val="5A5A5A"/>
+                </a:solidFill>
+                <a:latin typeface="Arial" pitchFamily="34" charset="0"/>
+                <a:ea typeface="Arial" pitchFamily="34" charset="-122"/>
+                <a:cs typeface="Arial" pitchFamily="34" charset="-120"/>
+              </a:rPr>
+              <a:t>Graph state is checkpointed, so the claim resumes at the last good node instead of starting again.</a:t>
+            </a:r>
+            <a:endParaRPr lang="en-US" sz="800" dirty="0"/>
+          </a:p>
+        </p:txBody>
+      </p:sp>
+      <p:sp>
+        <p:nvSpPr>
+          <p:cNvPr id="51" name="Text 49"/>
+          <p:cNvSpPr txBox="1"/>
+          <p:nvPr/>
+        </p:nvSpPr>
+        <p:spPr>
+          <a:xfrm>
+            <a:off x="6483096" y="5559552"/>
+            <a:ext cx="5157216" cy="182880"/>
+          </a:xfrm>
+          <a:prstGeom prst="rect">
+            <a:avLst/>
+          </a:prstGeom>
+          <a:noFill/>
+          <a:ln/>
+        </p:spPr>
+        <p:txBody>
+          <a:bodyPr wrap="square" lIns="0" tIns="0" rIns="0" bIns="0" rtlCol="0" anchor="ctr"/>
+          <a:lstStyle/>
+          <a:p>
+            <a:pPr indent="0" marL="0">
+              <a:buNone/>
+            </a:pPr>
+            <a:r>
+              <a:rPr lang="en-US" sz="780" i="1" dirty="0">
+                <a:solidFill>
+                  <a:srgbClr val="BE185D"/>
+                </a:solidFill>
+                <a:latin typeface="Arial" pitchFamily="34" charset="0"/>
+                <a:ea typeface="Arial" pitchFamily="34" charset="-122"/>
+                <a:cs typeface="Arial" pitchFamily="34" charset="-120"/>
+              </a:rPr>
+              <a:t>Every decision, its inputs and its confidence are written to the audit log — that is what makes an adverse outcome defensible later.</a:t>
+            </a:r>
+            <a:endParaRPr lang="en-US" sz="780" dirty="0"/>
+          </a:p>
+        </p:txBody>
+      </p:sp>
+      <p:sp>
+        <p:nvSpPr>
+          <p:cNvPr id="52" name="Text 50"/>
+          <p:cNvSpPr txBox="1"/>
+          <p:nvPr/>
+        </p:nvSpPr>
+        <p:spPr>
+          <a:xfrm>
+            <a:off x="365760" y="6053328"/>
+            <a:ext cx="11430000" cy="237744"/>
+          </a:xfrm>
+          <a:prstGeom prst="rect">
+            <a:avLst/>
+          </a:prstGeom>
+          <a:noFill/>
+          <a:ln/>
+        </p:spPr>
+        <p:txBody>
+          <a:bodyPr wrap="square" lIns="0" tIns="0" rIns="0" bIns="0" rtlCol="0" anchor="ctr"/>
+          <a:lstStyle/>
+          <a:p>
+            <a:pPr indent="0" marL="0">
+              <a:buNone/>
+            </a:pPr>
+            <a:r>
+              <a:rPr lang="en-US" sz="700" dirty="0">
+                <a:solidFill>
+                  <a:srgbClr val="5B6472"/>
+                </a:solidFill>
+                <a:latin typeface="Arial" pitchFamily="34" charset="0"/>
+                <a:ea typeface="Arial" pitchFamily="34" charset="-122"/>
+                <a:cs typeface="Arial" pitchFamily="34" charset="-120"/>
+              </a:rPr>
+              <a:t>Thresholds shown are the ones we would propose and then argue about with the claims lead — they are starting points, not findings</a:t>
+            </a:r>
+            <a:endParaRPr lang="en-US" sz="700" dirty="0"/>
+          </a:p>
+        </p:txBody>
+      </p:sp>
+      <p:sp>
+        <p:nvSpPr>
+          <p:cNvPr id="53" name="Text 51"/>
+          <p:cNvSpPr txBox="1"/>
+          <p:nvPr/>
+        </p:nvSpPr>
+        <p:spPr>
+          <a:xfrm>
+            <a:off x="365760" y="6601968"/>
+            <a:ext cx="5486400" cy="219456"/>
+          </a:xfrm>
+          <a:prstGeom prst="rect">
+            <a:avLst/>
+          </a:prstGeom>
+          <a:noFill/>
+          <a:ln/>
+        </p:spPr>
+        <p:txBody>
+          <a:bodyPr wrap="square" lIns="0" tIns="0" rIns="0" bIns="0" rtlCol="0" anchor="ctr"/>
+          <a:lstStyle/>
+          <a:p>
+            <a:pPr indent="0" marL="0">
+              <a:buNone/>
+            </a:pPr>
+            <a:r>
+              <a:rPr lang="en-US" sz="800" dirty="0">
+                <a:solidFill>
+                  <a:srgbClr val="5B6472"/>
+                </a:solidFill>
+                <a:latin typeface="Arial" pitchFamily="34" charset="0"/>
+                <a:ea typeface="Arial" pitchFamily="34" charset="-122"/>
+                <a:cs typeface="Arial" pitchFamily="34" charset="-120"/>
+              </a:rPr>
+              <a:t>GGW Claims Workflow Redesign · FNOL</a:t>
+            </a:r>
+            <a:endParaRPr lang="en-US" sz="800" dirty="0"/>
+          </a:p>
+        </p:txBody>
+      </p:sp>
+      <p:sp>
+        <p:nvSpPr>
+          <p:cNvPr id="54" name="Text 52"/>
+          <p:cNvSpPr txBox="1"/>
+          <p:nvPr/>
+        </p:nvSpPr>
+        <p:spPr>
+          <a:xfrm>
+            <a:off x="11247120" y="6601968"/>
+            <a:ext cx="594360" cy="219456"/>
+          </a:xfrm>
+          <a:prstGeom prst="rect">
+            <a:avLst/>
+          </a:prstGeom>
+          <a:noFill/>
+          <a:ln/>
+        </p:spPr>
+        <p:txBody>
+          <a:bodyPr wrap="square" lIns="0" tIns="0" rIns="0" bIns="0" rtlCol="0" anchor="ctr"/>
+          <a:lstStyle/>
+          <a:p>
+            <a:pPr algn="r" indent="0" marL="0">
+              <a:buNone/>
+            </a:pPr>
+            <a:r>
+              <a:rPr lang="en-US" sz="800" dirty="0">
+                <a:solidFill>
+                  <a:srgbClr val="5B6472"/>
+                </a:solidFill>
+                <a:latin typeface="Arial" pitchFamily="34" charset="0"/>
+                <a:ea typeface="Arial" pitchFamily="34" charset="-122"/>
+                <a:cs typeface="Arial" pitchFamily="34" charset="-120"/>
+              </a:rPr>
+              <a:t>7 / 9</a:t>
+            </a:r>
+            <a:endParaRPr lang="en-US" sz="800" dirty="0"/>
+          </a:p>
+        </p:txBody>
+      </p:sp>
+    </p:spTree>
+  </p:cSld>
+  <p:clrMapOvr>
+    <a:masterClrMapping/>
+  </p:clrMapOvr>
+</p:sld>
+</file>
+
+<file path=ppt/slides/slide8.xml><?xml version="1.0" encoding="utf-8"?>
+<p:sld xmlns:a="http://schemas.openxmlformats.org/drawingml/2006/main" xmlns:r="http://schemas.openxmlformats.org/officeDocument/2006/relationships" xmlns:p="http://schemas.openxmlformats.org/presentationml/2006/main">
+  <p:cSld name="Slide 8">
+    <p:bg>
+      <p:bgPr>
+        <a:solidFill>
+          <a:srgbClr val="FAFAF8"/>
+        </a:solidFill>
+      </p:bgPr>
+    </p:bg>
+    <p:spTree>
+      <p:nvGrpSpPr>
+        <p:cNvPr id="1" name=""/>
+        <p:cNvGrpSpPr/>
+        <p:nvPr/>
+      </p:nvGrpSpPr>
+      <p:grpSpPr>
+        <a:xfrm>
+          <a:off x="0" y="0"/>
+          <a:ext cx="0" cy="0"/>
+          <a:chOff x="0" y="0"/>
+          <a:chExt cx="0" cy="0"/>
+        </a:xfrm>
+      </p:grpSpPr>
+      <p:sp>
+        <p:nvSpPr>
+          <p:cNvPr id="2" name="Text 0"/>
+          <p:cNvSpPr txBox="1"/>
+          <p:nvPr/>
+        </p:nvSpPr>
+        <p:spPr>
+          <a:xfrm>
+            <a:off x="365760" y="118872"/>
+            <a:ext cx="9326880" cy="310896"/>
+          </a:xfrm>
+          <a:prstGeom prst="rect">
+            <a:avLst/>
+          </a:prstGeom>
+          <a:noFill/>
+          <a:ln/>
+        </p:spPr>
+        <p:txBody>
+          <a:bodyPr wrap="square" lIns="0" tIns="0" rIns="0" bIns="0" rtlCol="0" anchor="ctr"/>
+          <a:lstStyle/>
+          <a:p>
+            <a:pPr indent="0" marL="0">
+              <a:buNone/>
+            </a:pPr>
+            <a:r>
+              <a:rPr lang="en-US" sz="1400" b="1" dirty="0">
+                <a:solidFill>
+                  <a:srgbClr val="1B2430"/>
+                </a:solidFill>
+                <a:latin typeface="Cambria" pitchFamily="34" charset="0"/>
+                <a:ea typeface="Cambria" pitchFamily="34" charset="-122"/>
+                <a:cs typeface="Cambria" pitchFamily="34" charset="-120"/>
+              </a:rPr>
               <a:t>Every figure is built from observed steps and list prices — none of it is a best case</a:t>
             </a:r>
             <a:endParaRPr lang="en-US" sz="1400" dirty="0"/>
@@ -11962,7 +17467,7 @@
       </p:sp>
       <p:graphicFrame>
         <p:nvGraphicFramePr>
-          <p:cNvPr id="7" name="Table 0"/>
+          <p:cNvPr id="9" name="Table 0"/>
           <p:cNvGraphicFramePr>
             <a:graphicFrameLocks noGrp="1"/>
           </p:cNvGraphicFramePr>
@@ -15178,7 +20683,7 @@
       </p:sp>
       <p:graphicFrame>
         <p:nvGraphicFramePr>
-          <p:cNvPr id="13" name="Table 1"/>
+          <p:cNvPr id="17" name="Table 1"/>
           <p:cNvGraphicFramePr>
             <a:graphicFrameLocks noGrp="1"/>
           </p:cNvGraphicFramePr>
@@ -18271,7 +23776,7 @@
       </p:sp>
       <p:graphicFrame>
         <p:nvGraphicFramePr>
-          <p:cNvPr id="19" name="Table 2"/>
+          <p:cNvPr id="25" name="Table 2"/>
           <p:cNvGraphicFramePr>
             <a:graphicFrameLocks noGrp="1"/>
           </p:cNvGraphicFramePr>
@@ -19111,7 +24616,7 @@
       </p:sp>
       <p:graphicFrame>
         <p:nvGraphicFramePr>
-          <p:cNvPr id="25" name="Table 3"/>
+          <p:cNvPr id="33" name="Table 3"/>
           <p:cNvGraphicFramePr>
             <a:graphicFrameLocks noGrp="1"/>
           </p:cNvGraphicFramePr>
@@ -20583,7 +26088,7 @@
                 <a:ea typeface="Arial" pitchFamily="34" charset="-122"/>
                 <a:cs typeface="Arial" pitchFamily="34" charset="-120"/>
               </a:rPr>
-              <a:t>6 / 7</a:t>
+              <a:t>8 / 9</a:t>
             </a:r>
             <a:endParaRPr lang="en-US" sz="800" dirty="0"/>
           </a:p>
@@ -20597,9 +26102,9 @@
 </p:sld>
 </file>
 
-<file path=ppt/slides/slide7.xml><?xml version="1.0" encoding="utf-8"?>
+<file path=ppt/slides/slide9.xml><?xml version="1.0" encoding="utf-8"?>
 <p:sld xmlns:a="http://schemas.openxmlformats.org/drawingml/2006/main" xmlns:r="http://schemas.openxmlformats.org/officeDocument/2006/relationships" xmlns:p="http://schemas.openxmlformats.org/presentationml/2006/main">
-  <p:cSld name="Slide 7">
+  <p:cSld name="Slide 9">
     <p:bg>
       <p:bgPr>
         <a:solidFill>
@@ -22681,7 +28186,7 @@
                 <a:ea typeface="Arial" pitchFamily="34" charset="-122"/>
                 <a:cs typeface="Arial" pitchFamily="34" charset="-120"/>
               </a:rPr>
-              <a:t>7 / 7</a:t>
+              <a:t>9 / 9</a:t>
             </a:r>
             <a:endParaRPr lang="en-US" sz="800" dirty="0"/>
           </a:p>

--- a/case-study/deck/GGW_FNOL_Redesign.pptx
+++ b/case-study/deck/GGW_FNOL_Redesign.pptx
@@ -14,9 +14,10 @@
     <p:sldId id="262" r:id="rId8"/>
     <p:sldId id="263" r:id="rId9"/>
     <p:sldId id="264" r:id="rId10"/>
+    <p:sldId id="265" r:id="rId11"/>
   </p:sldIdLst>
   <p:notesMasterIdLst>
-    <p:notesMasterId r:id="rId11"/>
+    <p:notesMasterId r:id="rId12"/>
   </p:notesMasterIdLst>
   <p:sldSz cx="12192000" cy="6858000"/>
   <p:notesSz cx="6858000" cy="12192000"/>
@@ -534,6 +535,94 @@
             <a:fld id="{F7021451-1387-4CA6-816F-3879F97B5CBC}" type="slidenum">
               <a:rPr lang="en-US"/>
               <a:t>1</a:t>
+            </a:fld>
+            <a:endParaRPr lang="en-US"/>
+          </a:p>
+        </p:txBody>
+      </p:sp>
+    </p:spTree>
+    <p:extLst>
+      <p:ext uri="{BB962C8B-B14F-4D97-AF65-F5344CB8AC3E}">
+        <p14:creationId xmlns:p14="http://schemas.microsoft.com/office/powerpoint/2010/main" val="1024086991"/>
+      </p:ext>
+    </p:extLst>
+  </p:cSld>
+  <p:clrMapOvr>
+    <a:masterClrMapping/>
+  </p:clrMapOvr>
+</p:notes>
+</file>
+
+<file path=ppt/notesSlides/notesSlide10.xml><?xml version="1.0" encoding="utf-8"?>
+<p:notes xmlns:a="http://schemas.openxmlformats.org/drawingml/2006/main" xmlns:r="http://schemas.openxmlformats.org/officeDocument/2006/relationships" xmlns:p="http://schemas.openxmlformats.org/presentationml/2006/main">
+  <p:cSld>
+    <p:spTree>
+      <p:nvGrpSpPr>
+        <p:cNvPr id="1" name=""/>
+        <p:cNvGrpSpPr/>
+        <p:nvPr/>
+      </p:nvGrpSpPr>
+      <p:grpSpPr>
+        <a:xfrm>
+          <a:off x="0" y="0"/>
+          <a:ext cx="0" cy="0"/>
+          <a:chOff x="0" y="0"/>
+          <a:chExt cx="0" cy="0"/>
+        </a:xfrm>
+      </p:grpSpPr>
+      <p:sp>
+        <p:nvSpPr>
+          <p:cNvPr id="2" name="Slide Image Placeholder 1"/>
+          <p:cNvSpPr>
+            <a:spLocks noGrp="1" noRot="1" noChangeAspect="1"/>
+          </p:cNvSpPr>
+          <p:nvPr>
+            <p:ph type="sldImg"/>
+          </p:nvPr>
+        </p:nvSpPr>
+        <p:spPr/>
+      </p:sp>
+      <p:sp>
+        <p:nvSpPr>
+          <p:cNvPr id="3" name="Notes Placeholder 2"/>
+          <p:cNvSpPr>
+            <a:spLocks noGrp="1"/>
+          </p:cNvSpPr>
+          <p:nvPr>
+            <p:ph type="body" idx="1"/>
+          </p:nvPr>
+        </p:nvSpPr>
+        <p:spPr/>
+        <p:txBody>
+          <a:bodyPr/>
+          <a:lstStyle/>
+          <a:p>
+            <a:r>
+              <a:rPr lang="en-US" dirty="0"/>
+              <a:t/>
+            </a:r>
+            <a:endParaRPr lang="en-US" dirty="0"/>
+          </a:p>
+        </p:txBody>
+      </p:sp>
+      <p:sp>
+        <p:nvSpPr>
+          <p:cNvPr id="4" name="Slide Number Placeholder 3"/>
+          <p:cNvSpPr>
+            <a:spLocks noGrp="1"/>
+          </p:cNvSpPr>
+          <p:nvPr>
+            <p:ph type="sldNum" sz="quarter" idx="10"/>
+          </p:nvPr>
+        </p:nvSpPr>
+        <p:spPr/>
+        <p:txBody>
+          <a:bodyPr/>
+          <a:lstStyle/>
+          <a:p>
+            <a:fld id="{F7021451-1387-4CA6-816F-3879F97B5CBC}" type="slidenum">
+              <a:rPr lang="en-US"/>
+              <a:t>10</a:t>
             </a:fld>
             <a:endParaRPr lang="en-US"/>
           </a:p>
@@ -1699,7 +1788,7 @@
                 <a:ea typeface="Cambria" pitchFamily="34" charset="-122"/>
                 <a:cs typeface="Cambria" pitchFamily="34" charset="-120"/>
               </a:rPr>
-              <a:t>Redesigning intake releases 17.5 handler-hours a day — the capacity of 2.8 full-time people</a:t>
+              <a:t>Redesigning intake gives the 10-person support team back 1.75 hours each, every day</a:t>
             </a:r>
             <a:endParaRPr lang="en-US" sz="1900" dirty="0"/>
           </a:p>
@@ -1738,7 +1827,7 @@
                 <a:ea typeface="Arial" pitchFamily="34" charset="-122"/>
                 <a:cs typeface="Arial" pitchFamily="34" charset="-120"/>
               </a:rPr>
-              <a:t>Two thirds of that work goes to claims that were always going to close quietly · a person still decides anything that can go against a claimant</a:t>
+              <a:t>17.5 hours a day across the team — 2.8 full-time people · two thirds of that work goes to claims that were always going to close quietly · a person still decides anything adverse</a:t>
             </a:r>
             <a:endParaRPr lang="en-US" sz="1050" dirty="0"/>
           </a:p>
@@ -1846,7 +1935,7 @@
                 <a:ea typeface="Arial" pitchFamily="34" charset="-122"/>
                 <a:cs typeface="Arial" pitchFamily="34" charset="-120"/>
               </a:rPr>
-              <a:t>What one claim costs one handler today, start to finish</a:t>
+              <a:t>What one claim costs a support-team member</a:t>
             </a:r>
             <a:endParaRPr lang="en-US" sz="900" dirty="0"/>
           </a:p>
@@ -2735,7 +2824,7 @@
                 <a:ea typeface="Cambria" pitchFamily="34" charset="-122"/>
                 <a:cs typeface="Cambria" pitchFamily="34" charset="-120"/>
               </a:rPr>
-              <a:t>17.5 h</a:t>
+              <a:t>1.75 h</a:t>
             </a:r>
             <a:endParaRPr lang="en-US" sz="2000" dirty="0"/>
           </a:p>
@@ -2777,7 +2866,7 @@
                 <a:ea typeface="Arial" pitchFamily="34" charset="-122"/>
                 <a:cs typeface="Arial" pitchFamily="34" charset="-120"/>
               </a:rPr>
-              <a:t>handler-hours freed every working day, across the claims team</a:t>
+              <a:t>freed per support-team member, every working day (of 6.4 productive hours)</a:t>
             </a:r>
             <a:endParaRPr lang="en-US" sz="840" dirty="0"/>
           </a:p>
@@ -2843,7 +2932,7 @@
                 <a:ea typeface="Cambria" pitchFamily="34" charset="-122"/>
                 <a:cs typeface="Cambria" pitchFamily="34" charset="-120"/>
               </a:rPr>
-              <a:t>2.8 FTE</a:t>
+              <a:t>17.5 h</a:t>
             </a:r>
             <a:endParaRPr lang="en-US" sz="2000" dirty="0"/>
           </a:p>
@@ -2885,7 +2974,7 @@
                 <a:ea typeface="Arial" pitchFamily="34" charset="-122"/>
                 <a:cs typeface="Arial" pitchFamily="34" charset="-120"/>
               </a:rPr>
-              <a:t>the same capacity, expressed as full-time people</a:t>
+              <a:t>across the 10-person support team — 2.8 full-time people</a:t>
             </a:r>
             <a:endParaRPr lang="en-US" sz="840" dirty="0"/>
           </a:p>
@@ -2951,7 +3040,7 @@
                 <a:ea typeface="Cambria" pitchFamily="34" charset="-122"/>
                 <a:cs typeface="Cambria" pitchFamily="34" charset="-120"/>
               </a:rPr>
-              <a:t>€153k</a:t>
+              <a:t>€139k</a:t>
             </a:r>
             <a:endParaRPr lang="en-US" sz="2000" dirty="0"/>
           </a:p>
@@ -3059,7 +3148,7 @@
                 <a:ea typeface="Cambria" pitchFamily="34" charset="-122"/>
                 <a:cs typeface="Cambria" pitchFamily="34" charset="-120"/>
               </a:rPr>
-              <a:t>14 mths</a:t>
+              <a:t>16 mths</a:t>
             </a:r>
             <a:endParaRPr lang="en-US" sz="2000" dirty="0"/>
           </a:p>
@@ -3170,7 +3259,7 @@
                 <a:ea typeface="Arial" pitchFamily="34" charset="-122"/>
                 <a:cs typeface="Arial" pitchFamily="34" charset="-120"/>
               </a:rPr>
-              <a:t>What “€153k” means:  </a:t>
+              <a:t>What “€139k” means:  </a:t>
             </a:r>
             <a:pPr indent="0" marL="0">
               <a:lnSpc>
@@ -3187,7 +3276,7 @@
                 <a:ea typeface="Arial" pitchFamily="34" charset="-122"/>
                 <a:cs typeface="Arial" pitchFamily="34" charset="-120"/>
               </a:rPr>
-              <a:t>4,370 handler-hours a year × €34.92, the real cost of one handler-hour. This is capacity, not cash. It becomes money only if the hours go to the backlog or are absorbed by turnover — and only if intake sits with a small team, not spread thinly across all 30 (slide 6).</a:t>
+              <a:t>4,370 support-team hours a year × €31.83, the loaded cost of one of those hours. Valued at support pay (€41,100 gross), not claims-handler pay, because these are the hours actually freed. Capacity, not cash — it becomes money only if the hours go to the backlog or are absorbed by turnover.</a:t>
             </a:r>
             <a:endParaRPr lang="en-US" sz="850" dirty="0"/>
           </a:p>
@@ -3273,7 +3362,7 @@
                 <a:ea typeface="Arial" pitchFamily="34" charset="-122"/>
                 <a:cs typeface="Arial" pitchFamily="34" charset="-120"/>
               </a:rPr>
-              <a:t>cost is not what decides this. The AI costs €2,400 a year to run; keeping it healthy takes a quarter of an engineer, €24,400 — so €26,800 a year all in, against €152,600 of capacity released. What decides it is governance: proving a person reviewed anything that can go against a claimant, and whether handlers trust the drafts.</a:t>
+              <a:t>cost is not what decides this. The AI costs €2,400 a year to run; keeping it healthy takes a quarter of an engineer, €24,400 — so €26,800 a year all in, against €139,100 of capacity released. What decides it is governance: proving a person reviewed anything that can go against a claimant, and whether handlers trust the drafts.</a:t>
             </a:r>
             <a:endParaRPr lang="en-US" sz="850" dirty="0"/>
           </a:p>
@@ -3312,7 +3401,7 @@
                 <a:ea typeface="Arial" pitchFamily="34" charset="-122"/>
                 <a:cs typeface="Arial" pitchFamily="34" charset="-120"/>
               </a:rPr>
-              <a:t>Conservative throughout: the 21-minute-per-claim saving is a three-point estimate (best 30 / likely 21 / worst 12), not the design maximum. Build-up on slide 6, sources on slide 7.</a:t>
+              <a:t>Conservative throughout: the 21-minute-per-claim saving is a three-point estimate (best 30 / likely 21 / worst 12), not the design maximum. Build-up on slide 9, sources on slide 10.</a:t>
             </a:r>
             <a:endParaRPr lang="en-US" sz="760" dirty="0"/>
           </a:p>
@@ -3390,7 +3479,2497 @@
                 <a:ea typeface="Arial" pitchFamily="34" charset="-122"/>
                 <a:cs typeface="Arial" pitchFamily="34" charset="-120"/>
               </a:rPr>
-              <a:t>1 / 9</a:t>
+              <a:t>1 / 10</a:t>
+            </a:r>
+            <a:endParaRPr lang="en-US" sz="800" dirty="0"/>
+          </a:p>
+        </p:txBody>
+      </p:sp>
+    </p:spTree>
+  </p:cSld>
+  <p:clrMapOvr>
+    <a:masterClrMapping/>
+  </p:clrMapOvr>
+</p:sld>
+</file>
+
+<file path=ppt/slides/slide10.xml><?xml version="1.0" encoding="utf-8"?>
+<p:sld xmlns:a="http://schemas.openxmlformats.org/drawingml/2006/main" xmlns:r="http://schemas.openxmlformats.org/officeDocument/2006/relationships" xmlns:p="http://schemas.openxmlformats.org/presentationml/2006/main">
+  <p:cSld name="Slide 10">
+    <p:bg>
+      <p:bgPr>
+        <a:solidFill>
+          <a:srgbClr val="FAFAF8"/>
+        </a:solidFill>
+      </p:bgPr>
+    </p:bg>
+    <p:spTree>
+      <p:nvGrpSpPr>
+        <p:cNvPr id="1" name=""/>
+        <p:cNvGrpSpPr/>
+        <p:nvPr/>
+      </p:nvGrpSpPr>
+      <p:grpSpPr>
+        <a:xfrm>
+          <a:off x="0" y="0"/>
+          <a:ext cx="0" cy="0"/>
+          <a:chOff x="0" y="0"/>
+          <a:chExt cx="0" cy="0"/>
+        </a:xfrm>
+      </p:grpSpPr>
+      <p:sp>
+        <p:nvSpPr>
+          <p:cNvPr id="2" name="Text 0"/>
+          <p:cNvSpPr txBox="1"/>
+          <p:nvPr/>
+        </p:nvSpPr>
+        <p:spPr>
+          <a:xfrm>
+            <a:off x="365760" y="118872"/>
+            <a:ext cx="9326880" cy="310896"/>
+          </a:xfrm>
+          <a:prstGeom prst="rect">
+            <a:avLst/>
+          </a:prstGeom>
+          <a:noFill/>
+          <a:ln/>
+        </p:spPr>
+        <p:txBody>
+          <a:bodyPr wrap="square" lIns="0" tIns="0" rIns="0" bIns="0" rtlCol="0" anchor="ctr"/>
+          <a:lstStyle/>
+          <a:p>
+            <a:pPr indent="0" marL="0">
+              <a:buNone/>
+            </a:pPr>
+            <a:r>
+              <a:rPr lang="en-US" sz="1400" b="1" dirty="0">
+                <a:solidFill>
+                  <a:srgbClr val="1B2430"/>
+                </a:solidFill>
+                <a:latin typeface="Cambria" pitchFamily="34" charset="0"/>
+                <a:ea typeface="Cambria" pitchFamily="34" charset="-122"/>
+                <a:cs typeface="Cambria" pitchFamily="34" charset="-120"/>
+              </a:rPr>
+              <a:t>What is sourced, what GGW confirmed, and what is still our assumption</a:t>
+            </a:r>
+            <a:endParaRPr lang="en-US" sz="1400" dirty="0"/>
+          </a:p>
+        </p:txBody>
+      </p:sp>
+      <p:sp>
+        <p:nvSpPr>
+          <p:cNvPr id="3" name="Text 1"/>
+          <p:cNvSpPr txBox="1"/>
+          <p:nvPr/>
+        </p:nvSpPr>
+        <p:spPr>
+          <a:xfrm>
+            <a:off x="7680960" y="146304"/>
+            <a:ext cx="4142232" cy="274320"/>
+          </a:xfrm>
+          <a:prstGeom prst="rect">
+            <a:avLst/>
+          </a:prstGeom>
+          <a:noFill/>
+          <a:ln/>
+        </p:spPr>
+        <p:txBody>
+          <a:bodyPr wrap="square" lIns="0" tIns="0" rIns="0" bIns="0" rtlCol="0" anchor="ctr"/>
+          <a:lstStyle/>
+          <a:p>
+            <a:pPr algn="r" indent="0" marL="0">
+              <a:buNone/>
+            </a:pPr>
+            <a:r>
+              <a:rPr lang="en-US" sz="950" b="1" spc="140" kern="0" dirty="0">
+                <a:solidFill>
+                  <a:srgbClr val="5B6472"/>
+                </a:solidFill>
+                <a:latin typeface="Arial" pitchFamily="34" charset="0"/>
+                <a:ea typeface="Arial" pitchFamily="34" charset="-122"/>
+                <a:cs typeface="Arial" pitchFamily="34" charset="-120"/>
+              </a:rPr>
+              <a:t>APPENDIX · SOURCES &amp; ASSUMPTIONS</a:t>
+            </a:r>
+            <a:endParaRPr lang="en-US" sz="950" dirty="0"/>
+          </a:p>
+        </p:txBody>
+      </p:sp>
+      <p:sp>
+        <p:nvSpPr>
+          <p:cNvPr id="4" name="Shape 2"/>
+          <p:cNvSpPr/>
+          <p:nvPr/>
+        </p:nvSpPr>
+        <p:spPr>
+          <a:xfrm>
+            <a:off x="365760" y="566928"/>
+            <a:ext cx="45720" cy="402336"/>
+          </a:xfrm>
+          <a:prstGeom prst="rect">
+            <a:avLst/>
+          </a:prstGeom>
+          <a:solidFill>
+            <a:srgbClr val="BE185D"/>
+          </a:solidFill>
+          <a:ln/>
+        </p:spPr>
+      </p:sp>
+      <p:sp>
+        <p:nvSpPr>
+          <p:cNvPr id="5" name="Text 3"/>
+          <p:cNvSpPr txBox="1"/>
+          <p:nvPr/>
+        </p:nvSpPr>
+        <p:spPr>
+          <a:xfrm>
+            <a:off x="530352" y="548640"/>
+            <a:ext cx="5486400" cy="173736"/>
+          </a:xfrm>
+          <a:prstGeom prst="rect">
+            <a:avLst/>
+          </a:prstGeom>
+          <a:noFill/>
+          <a:ln/>
+        </p:spPr>
+        <p:txBody>
+          <a:bodyPr wrap="square" lIns="0" tIns="0" rIns="0" bIns="0" rtlCol="0" anchor="ctr"/>
+          <a:lstStyle/>
+          <a:p>
+            <a:pPr indent="0" marL="0">
+              <a:buNone/>
+            </a:pPr>
+            <a:r>
+              <a:rPr lang="en-US" sz="860" b="1" dirty="0">
+                <a:solidFill>
+                  <a:srgbClr val="1B2430"/>
+                </a:solidFill>
+                <a:latin typeface="Arial" pitchFamily="34" charset="0"/>
+                <a:ea typeface="Arial" pitchFamily="34" charset="-122"/>
+                <a:cs typeface="Arial" pitchFamily="34" charset="-120"/>
+              </a:rPr>
+              <a:t>Who does intake</a:t>
+            </a:r>
+            <a:endParaRPr lang="en-US" sz="860" dirty="0"/>
+          </a:p>
+        </p:txBody>
+      </p:sp>
+      <p:sp>
+        <p:nvSpPr>
+          <p:cNvPr id="6" name="Text 4"/>
+          <p:cNvSpPr txBox="1"/>
+          <p:nvPr/>
+        </p:nvSpPr>
+        <p:spPr>
+          <a:xfrm>
+            <a:off x="530352" y="704088"/>
+            <a:ext cx="5486400" cy="173736"/>
+          </a:xfrm>
+          <a:prstGeom prst="rect">
+            <a:avLst/>
+          </a:prstGeom>
+          <a:noFill/>
+          <a:ln/>
+        </p:spPr>
+        <p:txBody>
+          <a:bodyPr wrap="square" lIns="0" tIns="0" rIns="0" bIns="0" rtlCol="0" anchor="ctr"/>
+          <a:lstStyle/>
+          <a:p>
+            <a:pPr indent="0" marL="0">
+              <a:buNone/>
+            </a:pPr>
+            <a:r>
+              <a:rPr lang="en-US" sz="780" dirty="0">
+                <a:solidFill>
+                  <a:srgbClr val="5A5A5A"/>
+                </a:solidFill>
+                <a:latin typeface="Arial" pitchFamily="34" charset="0"/>
+                <a:ea typeface="Arial" pitchFamily="34" charset="-122"/>
+                <a:cs typeface="Arial" pitchFamily="34" charset="-120"/>
+              </a:rPr>
+              <a:t>20 claim handlers, 10 support staff — FNOL sits with support</a:t>
+            </a:r>
+            <a:endParaRPr lang="en-US" sz="780" dirty="0"/>
+          </a:p>
+        </p:txBody>
+      </p:sp>
+      <p:sp>
+        <p:nvSpPr>
+          <p:cNvPr id="7" name="Text 5"/>
+          <p:cNvSpPr txBox="1"/>
+          <p:nvPr/>
+        </p:nvSpPr>
+        <p:spPr>
+          <a:xfrm>
+            <a:off x="530352" y="850392"/>
+            <a:ext cx="5486400" cy="173736"/>
+          </a:xfrm>
+          <a:prstGeom prst="rect">
+            <a:avLst/>
+          </a:prstGeom>
+          <a:noFill/>
+          <a:ln/>
+        </p:spPr>
+        <p:txBody>
+          <a:bodyPr wrap="square" lIns="0" tIns="0" rIns="0" bIns="0" rtlCol="0" anchor="ctr"/>
+          <a:lstStyle/>
+          <a:p>
+            <a:pPr indent="0" marL="0">
+              <a:buNone/>
+            </a:pPr>
+            <a:r>
+              <a:rPr lang="en-US" sz="780" i="1" dirty="0">
+                <a:solidFill>
+                  <a:srgbClr val="6A1F42"/>
+                </a:solidFill>
+                <a:latin typeface="Arial" pitchFamily="34" charset="0"/>
+                <a:ea typeface="Arial" pitchFamily="34" charset="-122"/>
+                <a:cs typeface="Arial" pitchFamily="34" charset="-120"/>
+              </a:rPr>
+              <a:t>GGW (P. Gossmann), 8 Sep 2026</a:t>
+            </a:r>
+            <a:endParaRPr lang="en-US" sz="780" dirty="0"/>
+          </a:p>
+        </p:txBody>
+      </p:sp>
+      <p:sp>
+        <p:nvSpPr>
+          <p:cNvPr id="8" name="Shape 6"/>
+          <p:cNvSpPr/>
+          <p:nvPr/>
+        </p:nvSpPr>
+        <p:spPr>
+          <a:xfrm>
+            <a:off x="365760" y="1042416"/>
+            <a:ext cx="45720" cy="402336"/>
+          </a:xfrm>
+          <a:prstGeom prst="rect">
+            <a:avLst/>
+          </a:prstGeom>
+          <a:solidFill>
+            <a:srgbClr val="BE185D"/>
+          </a:solidFill>
+          <a:ln/>
+        </p:spPr>
+      </p:sp>
+      <p:sp>
+        <p:nvSpPr>
+          <p:cNvPr id="9" name="Text 7"/>
+          <p:cNvSpPr txBox="1"/>
+          <p:nvPr/>
+        </p:nvSpPr>
+        <p:spPr>
+          <a:xfrm>
+            <a:off x="530352" y="1024128"/>
+            <a:ext cx="5486400" cy="173736"/>
+          </a:xfrm>
+          <a:prstGeom prst="rect">
+            <a:avLst/>
+          </a:prstGeom>
+          <a:noFill/>
+          <a:ln/>
+        </p:spPr>
+        <p:txBody>
+          <a:bodyPr wrap="square" lIns="0" tIns="0" rIns="0" bIns="0" rtlCol="0" anchor="ctr"/>
+          <a:lstStyle/>
+          <a:p>
+            <a:pPr indent="0" marL="0">
+              <a:buNone/>
+            </a:pPr>
+            <a:r>
+              <a:rPr lang="en-US" sz="860" b="1" dirty="0">
+                <a:solidFill>
+                  <a:srgbClr val="1B2430"/>
+                </a:solidFill>
+                <a:latin typeface="Arial" pitchFamily="34" charset="0"/>
+                <a:ea typeface="Arial" pitchFamily="34" charset="-122"/>
+                <a:cs typeface="Arial" pitchFamily="34" charset="-120"/>
+              </a:rPr>
+              <a:t>Failed EASY imports</a:t>
+            </a:r>
+            <a:endParaRPr lang="en-US" sz="860" dirty="0"/>
+          </a:p>
+        </p:txBody>
+      </p:sp>
+      <p:sp>
+        <p:nvSpPr>
+          <p:cNvPr id="10" name="Text 8"/>
+          <p:cNvSpPr txBox="1"/>
+          <p:nvPr/>
+        </p:nvSpPr>
+        <p:spPr>
+          <a:xfrm>
+            <a:off x="530352" y="1179576"/>
+            <a:ext cx="5486400" cy="173736"/>
+          </a:xfrm>
+          <a:prstGeom prst="rect">
+            <a:avLst/>
+          </a:prstGeom>
+          <a:noFill/>
+          <a:ln/>
+        </p:spPr>
+        <p:txBody>
+          <a:bodyPr wrap="square" lIns="0" tIns="0" rIns="0" bIns="0" rtlCol="0" anchor="ctr"/>
+          <a:lstStyle/>
+          <a:p>
+            <a:pPr indent="0" marL="0">
+              <a:buNone/>
+            </a:pPr>
+            <a:r>
+              <a:rPr lang="en-US" sz="780" dirty="0">
+                <a:solidFill>
+                  <a:srgbClr val="5A5A5A"/>
+                </a:solidFill>
+                <a:latin typeface="Arial" pitchFamily="34" charset="0"/>
+                <a:ea typeface="Arial" pitchFamily="34" charset="-122"/>
+                <a:cs typeface="Arial" pitchFamily="34" charset="-120"/>
+              </a:rPr>
+              <a:t>Not noticed today — so detection comes before retries</a:t>
+            </a:r>
+            <a:endParaRPr lang="en-US" sz="780" dirty="0"/>
+          </a:p>
+        </p:txBody>
+      </p:sp>
+      <p:sp>
+        <p:nvSpPr>
+          <p:cNvPr id="11" name="Text 9"/>
+          <p:cNvSpPr txBox="1"/>
+          <p:nvPr/>
+        </p:nvSpPr>
+        <p:spPr>
+          <a:xfrm>
+            <a:off x="530352" y="1325880"/>
+            <a:ext cx="5486400" cy="173736"/>
+          </a:xfrm>
+          <a:prstGeom prst="rect">
+            <a:avLst/>
+          </a:prstGeom>
+          <a:noFill/>
+          <a:ln/>
+        </p:spPr>
+        <p:txBody>
+          <a:bodyPr wrap="square" lIns="0" tIns="0" rIns="0" bIns="0" rtlCol="0" anchor="ctr"/>
+          <a:lstStyle/>
+          <a:p>
+            <a:pPr indent="0" marL="0">
+              <a:buNone/>
+            </a:pPr>
+            <a:r>
+              <a:rPr lang="en-US" sz="780" i="1" dirty="0">
+                <a:solidFill>
+                  <a:srgbClr val="6A1F42"/>
+                </a:solidFill>
+                <a:latin typeface="Arial" pitchFamily="34" charset="0"/>
+                <a:ea typeface="Arial" pitchFamily="34" charset="-122"/>
+                <a:cs typeface="Arial" pitchFamily="34" charset="-120"/>
+              </a:rPr>
+              <a:t>GGW (P. Gossmann), 8 Sep 2026</a:t>
+            </a:r>
+            <a:endParaRPr lang="en-US" sz="780" dirty="0"/>
+          </a:p>
+        </p:txBody>
+      </p:sp>
+      <p:sp>
+        <p:nvSpPr>
+          <p:cNvPr id="12" name="Shape 10"/>
+          <p:cNvSpPr/>
+          <p:nvPr/>
+        </p:nvSpPr>
+        <p:spPr>
+          <a:xfrm>
+            <a:off x="365760" y="1517904"/>
+            <a:ext cx="45720" cy="402336"/>
+          </a:xfrm>
+          <a:prstGeom prst="rect">
+            <a:avLst/>
+          </a:prstGeom>
+          <a:solidFill>
+            <a:srgbClr val="BE185D"/>
+          </a:solidFill>
+          <a:ln/>
+        </p:spPr>
+      </p:sp>
+      <p:sp>
+        <p:nvSpPr>
+          <p:cNvPr id="13" name="Text 11"/>
+          <p:cNvSpPr txBox="1"/>
+          <p:nvPr/>
+        </p:nvSpPr>
+        <p:spPr>
+          <a:xfrm>
+            <a:off x="530352" y="1499616"/>
+            <a:ext cx="5486400" cy="173736"/>
+          </a:xfrm>
+          <a:prstGeom prst="rect">
+            <a:avLst/>
+          </a:prstGeom>
+          <a:noFill/>
+          <a:ln/>
+        </p:spPr>
+        <p:txBody>
+          <a:bodyPr wrap="square" lIns="0" tIns="0" rIns="0" bIns="0" rtlCol="0" anchor="ctr"/>
+          <a:lstStyle/>
+          <a:p>
+            <a:pPr indent="0" marL="0">
+              <a:buNone/>
+            </a:pPr>
+            <a:r>
+              <a:rPr lang="en-US" sz="860" b="1" dirty="0">
+                <a:solidFill>
+                  <a:srgbClr val="1B2430"/>
+                </a:solidFill>
+                <a:latin typeface="Arial" pitchFamily="34" charset="0"/>
+                <a:ea typeface="Arial" pitchFamily="34" charset="-122"/>
+                <a:cs typeface="Arial" pitchFamily="34" charset="-120"/>
+              </a:rPr>
+              <a:t>Volumes and shares</a:t>
+            </a:r>
+            <a:endParaRPr lang="en-US" sz="860" dirty="0"/>
+          </a:p>
+        </p:txBody>
+      </p:sp>
+      <p:sp>
+        <p:nvSpPr>
+          <p:cNvPr id="14" name="Text 12"/>
+          <p:cNvSpPr txBox="1"/>
+          <p:nvPr/>
+        </p:nvSpPr>
+        <p:spPr>
+          <a:xfrm>
+            <a:off x="530352" y="1655064"/>
+            <a:ext cx="5486400" cy="173736"/>
+          </a:xfrm>
+          <a:prstGeom prst="rect">
+            <a:avLst/>
+          </a:prstGeom>
+          <a:noFill/>
+          <a:ln/>
+        </p:spPr>
+        <p:txBody>
+          <a:bodyPr wrap="square" lIns="0" tIns="0" rIns="0" bIns="0" rtlCol="0" anchor="ctr"/>
+          <a:lstStyle/>
+          <a:p>
+            <a:pPr indent="0" marL="0">
+              <a:buNone/>
+            </a:pPr>
+            <a:r>
+              <a:rPr lang="en-US" sz="780" dirty="0">
+                <a:solidFill>
+                  <a:srgbClr val="5A5A5A"/>
+                </a:solidFill>
+                <a:latin typeface="Arial" pitchFamily="34" charset="0"/>
+                <a:ea typeface="Arial" pitchFamily="34" charset="-122"/>
+                <a:cs typeface="Arial" pitchFamily="34" charset="-120"/>
+              </a:rPr>
+              <a:t>~50 first reports a day · 65% minor · ~30 in the team</a:t>
+            </a:r>
+            <a:endParaRPr lang="en-US" sz="780" dirty="0"/>
+          </a:p>
+        </p:txBody>
+      </p:sp>
+      <p:sp>
+        <p:nvSpPr>
+          <p:cNvPr id="15" name="Text 13"/>
+          <p:cNvSpPr txBox="1"/>
+          <p:nvPr/>
+        </p:nvSpPr>
+        <p:spPr>
+          <a:xfrm>
+            <a:off x="530352" y="1801368"/>
+            <a:ext cx="5486400" cy="173736"/>
+          </a:xfrm>
+          <a:prstGeom prst="rect">
+            <a:avLst/>
+          </a:prstGeom>
+          <a:noFill/>
+          <a:ln/>
+        </p:spPr>
+        <p:txBody>
+          <a:bodyPr wrap="square" lIns="0" tIns="0" rIns="0" bIns="0" rtlCol="0" anchor="ctr"/>
+          <a:lstStyle/>
+          <a:p>
+            <a:pPr indent="0" marL="0">
+              <a:buNone/>
+            </a:pPr>
+            <a:r>
+              <a:rPr lang="en-US" sz="780" i="1" dirty="0">
+                <a:solidFill>
+                  <a:srgbClr val="6A1F42"/>
+                </a:solidFill>
+                <a:latin typeface="Arial" pitchFamily="34" charset="0"/>
+                <a:ea typeface="Arial" pitchFamily="34" charset="-122"/>
+                <a:cs typeface="Arial" pitchFamily="34" charset="-120"/>
+              </a:rPr>
+              <a:t>GGW case study brief</a:t>
+            </a:r>
+            <a:endParaRPr lang="en-US" sz="780" dirty="0"/>
+          </a:p>
+        </p:txBody>
+      </p:sp>
+      <p:sp>
+        <p:nvSpPr>
+          <p:cNvPr id="16" name="Shape 14"/>
+          <p:cNvSpPr/>
+          <p:nvPr/>
+        </p:nvSpPr>
+        <p:spPr>
+          <a:xfrm>
+            <a:off x="365760" y="1993392"/>
+            <a:ext cx="45720" cy="402336"/>
+          </a:xfrm>
+          <a:prstGeom prst="rect">
+            <a:avLst/>
+          </a:prstGeom>
+          <a:solidFill>
+            <a:srgbClr val="0891B2"/>
+          </a:solidFill>
+          <a:ln/>
+        </p:spPr>
+      </p:sp>
+      <p:sp>
+        <p:nvSpPr>
+          <p:cNvPr id="17" name="Text 15"/>
+          <p:cNvSpPr txBox="1"/>
+          <p:nvPr/>
+        </p:nvSpPr>
+        <p:spPr>
+          <a:xfrm>
+            <a:off x="530352" y="1975104"/>
+            <a:ext cx="5486400" cy="173736"/>
+          </a:xfrm>
+          <a:prstGeom prst="rect">
+            <a:avLst/>
+          </a:prstGeom>
+          <a:noFill/>
+          <a:ln/>
+        </p:spPr>
+        <p:txBody>
+          <a:bodyPr wrap="square" lIns="0" tIns="0" rIns="0" bIns="0" rtlCol="0" anchor="ctr"/>
+          <a:lstStyle/>
+          <a:p>
+            <a:pPr indent="0" marL="0">
+              <a:buNone/>
+            </a:pPr>
+            <a:r>
+              <a:rPr lang="en-US" sz="860" b="1" dirty="0">
+                <a:solidFill>
+                  <a:srgbClr val="1B2430"/>
+                </a:solidFill>
+                <a:latin typeface="Arial" pitchFamily="34" charset="0"/>
+                <a:ea typeface="Arial" pitchFamily="34" charset="-122"/>
+                <a:cs typeface="Arial" pitchFamily="34" charset="-120"/>
+              </a:rPr>
+              <a:t>Wage base — intake</a:t>
+            </a:r>
+            <a:endParaRPr lang="en-US" sz="860" dirty="0"/>
+          </a:p>
+        </p:txBody>
+      </p:sp>
+      <p:sp>
+        <p:nvSpPr>
+          <p:cNvPr id="18" name="Text 16"/>
+          <p:cNvSpPr txBox="1"/>
+          <p:nvPr/>
+        </p:nvSpPr>
+        <p:spPr>
+          <a:xfrm>
+            <a:off x="530352" y="2130552"/>
+            <a:ext cx="5486400" cy="173736"/>
+          </a:xfrm>
+          <a:prstGeom prst="rect">
+            <a:avLst/>
+          </a:prstGeom>
+          <a:noFill/>
+          <a:ln/>
+        </p:spPr>
+        <p:txBody>
+          <a:bodyPr wrap="square" lIns="0" tIns="0" rIns="0" bIns="0" rtlCol="0" anchor="ctr"/>
+          <a:lstStyle/>
+          <a:p>
+            <a:pPr indent="0" marL="0">
+              <a:buNone/>
+            </a:pPr>
+            <a:r>
+              <a:rPr lang="en-US" sz="780" dirty="0">
+                <a:solidFill>
+                  <a:srgbClr val="5A5A5A"/>
+                </a:solidFill>
+                <a:latin typeface="Arial" pitchFamily="34" charset="0"/>
+                <a:ea typeface="Arial" pitchFamily="34" charset="-122"/>
+                <a:cs typeface="Arial" pitchFamily="34" charset="-120"/>
+              </a:rPr>
+              <a:t>Sachbearbeiter/in Versicherung, €41,100 gross</a:t>
+            </a:r>
+            <a:endParaRPr lang="en-US" sz="780" dirty="0"/>
+          </a:p>
+        </p:txBody>
+      </p:sp>
+      <p:sp>
+        <p:nvSpPr>
+          <p:cNvPr id="19" name="Text 17">
+            <a:hlinkClick r:id="rId1" tooltip="StepStone Gehaltsreport"/>
+          </p:cNvPr>
+          <p:cNvSpPr txBox="1"/>
+          <p:nvPr/>
+        </p:nvSpPr>
+        <p:spPr>
+          <a:xfrm>
+            <a:off x="530352" y="2276856"/>
+            <a:ext cx="5486400" cy="173736"/>
+          </a:xfrm>
+          <a:prstGeom prst="rect">
+            <a:avLst/>
+          </a:prstGeom>
+          <a:noFill/>
+          <a:ln/>
+        </p:spPr>
+        <p:txBody>
+          <a:bodyPr wrap="square" lIns="0" tIns="0" rIns="0" bIns="0" rtlCol="0" anchor="ctr"/>
+          <a:lstStyle/>
+          <a:p>
+            <a:pPr indent="0" marL="0">
+              <a:buNone/>
+            </a:pPr>
+            <a:r>
+              <a:rPr lang="en-US" sz="780" u="sng" dirty="0">
+                <a:solidFill>
+                  <a:srgbClr val="0B5F8A"/>
+                </a:solidFill>
+                <a:latin typeface="Arial" pitchFamily="34" charset="0"/>
+                <a:ea typeface="Arial" pitchFamily="34" charset="-122"/>
+                <a:cs typeface="Arial" pitchFamily="34" charset="-120"/>
+                <a:hlinkClick r:id="rId1" invalidUrl="" action="" tgtFrame="" tooltip="StepStone Gehaltsreport" history="1" highlightClick="0" endSnd="0">
+                  <a:extLst>
+                    <a:ext uri="{A12FA001-AC4F-418D-AE19-62706E023703}">
+                      <ahyp:hlinkClr xmlns:ahyp="http://schemas.microsoft.com/office/drawing/2018/hyperlinkcolor" val="tx"/>
+                    </a:ext>
+                  </a:extLst>
+                </a:hlinkClick>
+              </a:rPr>
+              <a:t>StepStone Gehaltsreport</a:t>
+            </a:r>
+            <a:endParaRPr lang="en-US" sz="780" dirty="0"/>
+          </a:p>
+        </p:txBody>
+      </p:sp>
+      <p:sp>
+        <p:nvSpPr>
+          <p:cNvPr id="20" name="Shape 18"/>
+          <p:cNvSpPr/>
+          <p:nvPr/>
+        </p:nvSpPr>
+        <p:spPr>
+          <a:xfrm>
+            <a:off x="365760" y="2468880"/>
+            <a:ext cx="45720" cy="402336"/>
+          </a:xfrm>
+          <a:prstGeom prst="rect">
+            <a:avLst/>
+          </a:prstGeom>
+          <a:solidFill>
+            <a:srgbClr val="0891B2"/>
+          </a:solidFill>
+          <a:ln/>
+        </p:spPr>
+      </p:sp>
+      <p:sp>
+        <p:nvSpPr>
+          <p:cNvPr id="21" name="Text 19"/>
+          <p:cNvSpPr txBox="1"/>
+          <p:nvPr/>
+        </p:nvSpPr>
+        <p:spPr>
+          <a:xfrm>
+            <a:off x="530352" y="2450592"/>
+            <a:ext cx="5486400" cy="173736"/>
+          </a:xfrm>
+          <a:prstGeom prst="rect">
+            <a:avLst/>
+          </a:prstGeom>
+          <a:noFill/>
+          <a:ln/>
+        </p:spPr>
+        <p:txBody>
+          <a:bodyPr wrap="square" lIns="0" tIns="0" rIns="0" bIns="0" rtlCol="0" anchor="ctr"/>
+          <a:lstStyle/>
+          <a:p>
+            <a:pPr indent="0" marL="0">
+              <a:buNone/>
+            </a:pPr>
+            <a:r>
+              <a:rPr lang="en-US" sz="860" b="1" dirty="0">
+                <a:solidFill>
+                  <a:srgbClr val="1B2430"/>
+                </a:solidFill>
+                <a:latin typeface="Arial" pitchFamily="34" charset="0"/>
+                <a:ea typeface="Arial" pitchFamily="34" charset="-122"/>
+                <a:cs typeface="Arial" pitchFamily="34" charset="-120"/>
+              </a:rPr>
+              <a:t>Employer on-cost</a:t>
+            </a:r>
+            <a:endParaRPr lang="en-US" sz="860" dirty="0"/>
+          </a:p>
+        </p:txBody>
+      </p:sp>
+      <p:sp>
+        <p:nvSpPr>
+          <p:cNvPr id="22" name="Text 20"/>
+          <p:cNvSpPr txBox="1"/>
+          <p:nvPr/>
+        </p:nvSpPr>
+        <p:spPr>
+          <a:xfrm>
+            <a:off x="530352" y="2606040"/>
+            <a:ext cx="5486400" cy="173736"/>
+          </a:xfrm>
+          <a:prstGeom prst="rect">
+            <a:avLst/>
+          </a:prstGeom>
+          <a:noFill/>
+          <a:ln/>
+        </p:spPr>
+        <p:txBody>
+          <a:bodyPr wrap="square" lIns="0" tIns="0" rIns="0" bIns="0" rtlCol="0" anchor="ctr"/>
+          <a:lstStyle/>
+          <a:p>
+            <a:pPr indent="0" marL="0">
+              <a:buNone/>
+            </a:pPr>
+            <a:r>
+              <a:rPr lang="en-US" sz="780" dirty="0">
+                <a:solidFill>
+                  <a:srgbClr val="5A5A5A"/>
+                </a:solidFill>
+                <a:latin typeface="Arial" pitchFamily="34" charset="0"/>
+                <a:ea typeface="Arial" pitchFamily="34" charset="-122"/>
+                <a:cs typeface="Arial" pitchFamily="34" charset="-120"/>
+              </a:rPr>
+              <a:t>≈ €23 per €100 gross — health, pension, care</a:t>
+            </a:r>
+            <a:endParaRPr lang="en-US" sz="780" dirty="0"/>
+          </a:p>
+        </p:txBody>
+      </p:sp>
+      <p:sp>
+        <p:nvSpPr>
+          <p:cNvPr id="23" name="Text 21">
+            <a:hlinkClick r:id="rId2" tooltip="Lohnnebenkosten 2026, sevdesk"/>
+          </p:cNvPr>
+          <p:cNvSpPr txBox="1"/>
+          <p:nvPr/>
+        </p:nvSpPr>
+        <p:spPr>
+          <a:xfrm>
+            <a:off x="530352" y="2752344"/>
+            <a:ext cx="5486400" cy="173736"/>
+          </a:xfrm>
+          <a:prstGeom prst="rect">
+            <a:avLst/>
+          </a:prstGeom>
+          <a:noFill/>
+          <a:ln/>
+        </p:spPr>
+        <p:txBody>
+          <a:bodyPr wrap="square" lIns="0" tIns="0" rIns="0" bIns="0" rtlCol="0" anchor="ctr"/>
+          <a:lstStyle/>
+          <a:p>
+            <a:pPr indent="0" marL="0">
+              <a:buNone/>
+            </a:pPr>
+            <a:r>
+              <a:rPr lang="en-US" sz="780" u="sng" dirty="0">
+                <a:solidFill>
+                  <a:srgbClr val="0B5F8A"/>
+                </a:solidFill>
+                <a:latin typeface="Arial" pitchFamily="34" charset="0"/>
+                <a:ea typeface="Arial" pitchFamily="34" charset="-122"/>
+                <a:cs typeface="Arial" pitchFamily="34" charset="-120"/>
+                <a:hlinkClick r:id="rId2" invalidUrl="" action="" tgtFrame="" tooltip="Lohnnebenkosten 2026, sevdesk" history="1" highlightClick="0" endSnd="0">
+                  <a:extLst>
+                    <a:ext uri="{A12FA001-AC4F-418D-AE19-62706E023703}">
+                      <ahyp:hlinkClr xmlns:ahyp="http://schemas.microsoft.com/office/drawing/2018/hyperlinkcolor" val="tx"/>
+                    </a:ext>
+                  </a:extLst>
+                </a:hlinkClick>
+              </a:rPr>
+              <a:t>Lohnnebenkosten 2026, sevdesk</a:t>
+            </a:r>
+            <a:endParaRPr lang="en-US" sz="780" dirty="0"/>
+          </a:p>
+        </p:txBody>
+      </p:sp>
+      <p:sp>
+        <p:nvSpPr>
+          <p:cNvPr id="24" name="Shape 22"/>
+          <p:cNvSpPr/>
+          <p:nvPr/>
+        </p:nvSpPr>
+        <p:spPr>
+          <a:xfrm>
+            <a:off x="365760" y="2944368"/>
+            <a:ext cx="45720" cy="402336"/>
+          </a:xfrm>
+          <a:prstGeom prst="rect">
+            <a:avLst/>
+          </a:prstGeom>
+          <a:solidFill>
+            <a:srgbClr val="0891B2"/>
+          </a:solidFill>
+          <a:ln/>
+        </p:spPr>
+      </p:sp>
+      <p:sp>
+        <p:nvSpPr>
+          <p:cNvPr id="25" name="Text 23"/>
+          <p:cNvSpPr txBox="1"/>
+          <p:nvPr/>
+        </p:nvSpPr>
+        <p:spPr>
+          <a:xfrm>
+            <a:off x="530352" y="2926080"/>
+            <a:ext cx="5486400" cy="173736"/>
+          </a:xfrm>
+          <a:prstGeom prst="rect">
+            <a:avLst/>
+          </a:prstGeom>
+          <a:noFill/>
+          <a:ln/>
+        </p:spPr>
+        <p:txBody>
+          <a:bodyPr wrap="square" lIns="0" tIns="0" rIns="0" bIns="0" rtlCol="0" anchor="ctr"/>
+          <a:lstStyle/>
+          <a:p>
+            <a:pPr indent="0" marL="0">
+              <a:buNone/>
+            </a:pPr>
+            <a:r>
+              <a:rPr lang="en-US" sz="860" b="1" dirty="0">
+                <a:solidFill>
+                  <a:srgbClr val="1B2430"/>
+                </a:solidFill>
+                <a:latin typeface="Arial" pitchFamily="34" charset="0"/>
+                <a:ea typeface="Arial" pitchFamily="34" charset="-122"/>
+                <a:cs typeface="Arial" pitchFamily="34" charset="-120"/>
+              </a:rPr>
+              <a:t>Working time, breaks</a:t>
+            </a:r>
+            <a:endParaRPr lang="en-US" sz="860" dirty="0"/>
+          </a:p>
+        </p:txBody>
+      </p:sp>
+      <p:sp>
+        <p:nvSpPr>
+          <p:cNvPr id="26" name="Text 24"/>
+          <p:cNvSpPr txBox="1"/>
+          <p:nvPr/>
+        </p:nvSpPr>
+        <p:spPr>
+          <a:xfrm>
+            <a:off x="530352" y="3081528"/>
+            <a:ext cx="5486400" cy="173736"/>
+          </a:xfrm>
+          <a:prstGeom prst="rect">
+            <a:avLst/>
+          </a:prstGeom>
+          <a:noFill/>
+          <a:ln/>
+        </p:spPr>
+        <p:txBody>
+          <a:bodyPr wrap="square" lIns="0" tIns="0" rIns="0" bIns="0" rtlCol="0" anchor="ctr"/>
+          <a:lstStyle/>
+          <a:p>
+            <a:pPr indent="0" marL="0">
+              <a:buNone/>
+            </a:pPr>
+            <a:r>
+              <a:rPr lang="en-US" sz="780" dirty="0">
+                <a:solidFill>
+                  <a:srgbClr val="5A5A5A"/>
+                </a:solidFill>
+                <a:latin typeface="Arial" pitchFamily="34" charset="0"/>
+                <a:ea typeface="Arial" pitchFamily="34" charset="-122"/>
+                <a:cs typeface="Arial" pitchFamily="34" charset="-120"/>
+              </a:rPr>
+              <a:t>38 h tariff week; statutory break rules</a:t>
+            </a:r>
+            <a:endParaRPr lang="en-US" sz="780" dirty="0"/>
+          </a:p>
+        </p:txBody>
+      </p:sp>
+      <p:sp>
+        <p:nvSpPr>
+          <p:cNvPr id="27" name="Text 25">
+            <a:hlinkClick r:id="rId3" tooltip="Arbeitszeitgesetz §4"/>
+          </p:cNvPr>
+          <p:cNvSpPr txBox="1"/>
+          <p:nvPr/>
+        </p:nvSpPr>
+        <p:spPr>
+          <a:xfrm>
+            <a:off x="530352" y="3227832"/>
+            <a:ext cx="5486400" cy="173736"/>
+          </a:xfrm>
+          <a:prstGeom prst="rect">
+            <a:avLst/>
+          </a:prstGeom>
+          <a:noFill/>
+          <a:ln/>
+        </p:spPr>
+        <p:txBody>
+          <a:bodyPr wrap="square" lIns="0" tIns="0" rIns="0" bIns="0" rtlCol="0" anchor="ctr"/>
+          <a:lstStyle/>
+          <a:p>
+            <a:pPr indent="0" marL="0">
+              <a:buNone/>
+            </a:pPr>
+            <a:r>
+              <a:rPr lang="en-US" sz="780" u="sng" dirty="0">
+                <a:solidFill>
+                  <a:srgbClr val="0B5F8A"/>
+                </a:solidFill>
+                <a:latin typeface="Arial" pitchFamily="34" charset="0"/>
+                <a:ea typeface="Arial" pitchFamily="34" charset="-122"/>
+                <a:cs typeface="Arial" pitchFamily="34" charset="-120"/>
+                <a:hlinkClick r:id="rId3" invalidUrl="" action="" tgtFrame="" tooltip="Arbeitszeitgesetz §4" history="1" highlightClick="0" endSnd="0">
+                  <a:extLst>
+                    <a:ext uri="{A12FA001-AC4F-418D-AE19-62706E023703}">
+                      <ahyp:hlinkClr xmlns:ahyp="http://schemas.microsoft.com/office/drawing/2018/hyperlinkcolor" val="tx"/>
+                    </a:ext>
+                  </a:extLst>
+                </a:hlinkClick>
+              </a:rPr>
+              <a:t>Arbeitszeitgesetz §4</a:t>
+            </a:r>
+            <a:endParaRPr lang="en-US" sz="780" dirty="0"/>
+          </a:p>
+        </p:txBody>
+      </p:sp>
+      <p:sp>
+        <p:nvSpPr>
+          <p:cNvPr id="28" name="Shape 26"/>
+          <p:cNvSpPr/>
+          <p:nvPr/>
+        </p:nvSpPr>
+        <p:spPr>
+          <a:xfrm>
+            <a:off x="365760" y="3419856"/>
+            <a:ext cx="45720" cy="402336"/>
+          </a:xfrm>
+          <a:prstGeom prst="rect">
+            <a:avLst/>
+          </a:prstGeom>
+          <a:solidFill>
+            <a:srgbClr val="0891B2"/>
+          </a:solidFill>
+          <a:ln/>
+        </p:spPr>
+      </p:sp>
+      <p:sp>
+        <p:nvSpPr>
+          <p:cNvPr id="29" name="Text 27"/>
+          <p:cNvSpPr txBox="1"/>
+          <p:nvPr/>
+        </p:nvSpPr>
+        <p:spPr>
+          <a:xfrm>
+            <a:off x="530352" y="3401568"/>
+            <a:ext cx="5486400" cy="173736"/>
+          </a:xfrm>
+          <a:prstGeom prst="rect">
+            <a:avLst/>
+          </a:prstGeom>
+          <a:noFill/>
+          <a:ln/>
+        </p:spPr>
+        <p:txBody>
+          <a:bodyPr wrap="square" lIns="0" tIns="0" rIns="0" bIns="0" rtlCol="0" anchor="ctr"/>
+          <a:lstStyle/>
+          <a:p>
+            <a:pPr indent="0" marL="0">
+              <a:buNone/>
+            </a:pPr>
+            <a:r>
+              <a:rPr lang="en-US" sz="860" b="1" dirty="0">
+                <a:solidFill>
+                  <a:srgbClr val="1B2430"/>
+                </a:solidFill>
+                <a:latin typeface="Arial" pitchFamily="34" charset="0"/>
+                <a:ea typeface="Arial" pitchFamily="34" charset="-122"/>
+                <a:cs typeface="Arial" pitchFamily="34" charset="-120"/>
+              </a:rPr>
+              <a:t>Build &amp; upkeep pay</a:t>
+            </a:r>
+            <a:endParaRPr lang="en-US" sz="860" dirty="0"/>
+          </a:p>
+        </p:txBody>
+      </p:sp>
+      <p:sp>
+        <p:nvSpPr>
+          <p:cNvPr id="30" name="Text 28"/>
+          <p:cNvSpPr txBox="1"/>
+          <p:nvPr/>
+        </p:nvSpPr>
+        <p:spPr>
+          <a:xfrm>
+            <a:off x="530352" y="3557016"/>
+            <a:ext cx="5486400" cy="173736"/>
+          </a:xfrm>
+          <a:prstGeom prst="rect">
+            <a:avLst/>
+          </a:prstGeom>
+          <a:noFill/>
+          <a:ln/>
+        </p:spPr>
+        <p:txBody>
+          <a:bodyPr wrap="square" lIns="0" tIns="0" rIns="0" bIns="0" rtlCol="0" anchor="ctr"/>
+          <a:lstStyle/>
+          <a:p>
+            <a:pPr indent="0" marL="0">
+              <a:buNone/>
+            </a:pPr>
+            <a:r>
+              <a:rPr lang="en-US" sz="780" dirty="0">
+                <a:solidFill>
+                  <a:srgbClr val="5A5A5A"/>
+                </a:solidFill>
+                <a:latin typeface="Arial" pitchFamily="34" charset="0"/>
+                <a:ea typeface="Arial" pitchFamily="34" charset="-122"/>
+                <a:cs typeface="Arial" pitchFamily="34" charset="-120"/>
+              </a:rPr>
+              <a:t>Senior ML engineer ≈ €98k; juniors at €70k as briefed</a:t>
+            </a:r>
+            <a:endParaRPr lang="en-US" sz="780" dirty="0"/>
+          </a:p>
+        </p:txBody>
+      </p:sp>
+      <p:sp>
+        <p:nvSpPr>
+          <p:cNvPr id="31" name="Text 29">
+            <a:hlinkClick r:id="rId4" tooltip="Glassdoor, ML Engineer Germany"/>
+          </p:cNvPr>
+          <p:cNvSpPr txBox="1"/>
+          <p:nvPr/>
+        </p:nvSpPr>
+        <p:spPr>
+          <a:xfrm>
+            <a:off x="530352" y="3703320"/>
+            <a:ext cx="5486400" cy="173736"/>
+          </a:xfrm>
+          <a:prstGeom prst="rect">
+            <a:avLst/>
+          </a:prstGeom>
+          <a:noFill/>
+          <a:ln/>
+        </p:spPr>
+        <p:txBody>
+          <a:bodyPr wrap="square" lIns="0" tIns="0" rIns="0" bIns="0" rtlCol="0" anchor="ctr"/>
+          <a:lstStyle/>
+          <a:p>
+            <a:pPr indent="0" marL="0">
+              <a:buNone/>
+            </a:pPr>
+            <a:r>
+              <a:rPr lang="en-US" sz="780" u="sng" dirty="0">
+                <a:solidFill>
+                  <a:srgbClr val="0B5F8A"/>
+                </a:solidFill>
+                <a:latin typeface="Arial" pitchFamily="34" charset="0"/>
+                <a:ea typeface="Arial" pitchFamily="34" charset="-122"/>
+                <a:cs typeface="Arial" pitchFamily="34" charset="-120"/>
+                <a:hlinkClick r:id="rId4" invalidUrl="" action="" tgtFrame="" tooltip="Glassdoor, ML Engineer Germany" history="1" highlightClick="0" endSnd="0">
+                  <a:extLst>
+                    <a:ext uri="{A12FA001-AC4F-418D-AE19-62706E023703}">
+                      <ahyp:hlinkClr xmlns:ahyp="http://schemas.microsoft.com/office/drawing/2018/hyperlinkcolor" val="tx"/>
+                    </a:ext>
+                  </a:extLst>
+                </a:hlinkClick>
+              </a:rPr>
+              <a:t>Glassdoor, ML Engineer Germany</a:t>
+            </a:r>
+            <a:endParaRPr lang="en-US" sz="780" dirty="0"/>
+          </a:p>
+        </p:txBody>
+      </p:sp>
+      <p:sp>
+        <p:nvSpPr>
+          <p:cNvPr id="32" name="Shape 30"/>
+          <p:cNvSpPr/>
+          <p:nvPr/>
+        </p:nvSpPr>
+        <p:spPr>
+          <a:xfrm>
+            <a:off x="6172200" y="566928"/>
+            <a:ext cx="45720" cy="402336"/>
+          </a:xfrm>
+          <a:prstGeom prst="rect">
+            <a:avLst/>
+          </a:prstGeom>
+          <a:solidFill>
+            <a:srgbClr val="0891B2"/>
+          </a:solidFill>
+          <a:ln/>
+        </p:spPr>
+      </p:sp>
+      <p:sp>
+        <p:nvSpPr>
+          <p:cNvPr id="33" name="Text 31"/>
+          <p:cNvSpPr txBox="1"/>
+          <p:nvPr/>
+        </p:nvSpPr>
+        <p:spPr>
+          <a:xfrm>
+            <a:off x="6336792" y="548640"/>
+            <a:ext cx="5486400" cy="173736"/>
+          </a:xfrm>
+          <a:prstGeom prst="rect">
+            <a:avLst/>
+          </a:prstGeom>
+          <a:noFill/>
+          <a:ln/>
+        </p:spPr>
+        <p:txBody>
+          <a:bodyPr wrap="square" lIns="0" tIns="0" rIns="0" bIns="0" rtlCol="0" anchor="ctr"/>
+          <a:lstStyle/>
+          <a:p>
+            <a:pPr indent="0" marL="0">
+              <a:buNone/>
+            </a:pPr>
+            <a:r>
+              <a:rPr lang="en-US" sz="860" b="1" dirty="0">
+                <a:solidFill>
+                  <a:srgbClr val="1B2430"/>
+                </a:solidFill>
+                <a:latin typeface="Arial" pitchFamily="34" charset="0"/>
+                <a:ea typeface="Arial" pitchFamily="34" charset="-122"/>
+                <a:cs typeface="Arial" pitchFamily="34" charset="-120"/>
+              </a:rPr>
+              <a:t>Model prices</a:t>
+            </a:r>
+            <a:endParaRPr lang="en-US" sz="860" dirty="0"/>
+          </a:p>
+        </p:txBody>
+      </p:sp>
+      <p:sp>
+        <p:nvSpPr>
+          <p:cNvPr id="34" name="Text 32"/>
+          <p:cNvSpPr txBox="1"/>
+          <p:nvPr/>
+        </p:nvSpPr>
+        <p:spPr>
+          <a:xfrm>
+            <a:off x="6336792" y="704088"/>
+            <a:ext cx="5486400" cy="173736"/>
+          </a:xfrm>
+          <a:prstGeom prst="rect">
+            <a:avLst/>
+          </a:prstGeom>
+          <a:noFill/>
+          <a:ln/>
+        </p:spPr>
+        <p:txBody>
+          <a:bodyPr wrap="square" lIns="0" tIns="0" rIns="0" bIns="0" rtlCol="0" anchor="ctr"/>
+          <a:lstStyle/>
+          <a:p>
+            <a:pPr indent="0" marL="0">
+              <a:buNone/>
+            </a:pPr>
+            <a:r>
+              <a:rPr lang="en-US" sz="780" dirty="0">
+                <a:solidFill>
+                  <a:srgbClr val="5A5A5A"/>
+                </a:solidFill>
+                <a:latin typeface="Arial" pitchFamily="34" charset="0"/>
+                <a:ea typeface="Arial" pitchFamily="34" charset="-122"/>
+                <a:cs typeface="Arial" pitchFamily="34" charset="-120"/>
+              </a:rPr>
+              <a:t>gpt-5.6 terra — $2 in / $12 out per million tokens</a:t>
+            </a:r>
+            <a:endParaRPr lang="en-US" sz="780" dirty="0"/>
+          </a:p>
+        </p:txBody>
+      </p:sp>
+      <p:sp>
+        <p:nvSpPr>
+          <p:cNvPr id="35" name="Text 33">
+            <a:hlinkClick r:id="rId5" tooltip="OpenAI API pricing"/>
+          </p:cNvPr>
+          <p:cNvSpPr txBox="1"/>
+          <p:nvPr/>
+        </p:nvSpPr>
+        <p:spPr>
+          <a:xfrm>
+            <a:off x="6336792" y="850392"/>
+            <a:ext cx="5486400" cy="173736"/>
+          </a:xfrm>
+          <a:prstGeom prst="rect">
+            <a:avLst/>
+          </a:prstGeom>
+          <a:noFill/>
+          <a:ln/>
+        </p:spPr>
+        <p:txBody>
+          <a:bodyPr wrap="square" lIns="0" tIns="0" rIns="0" bIns="0" rtlCol="0" anchor="ctr"/>
+          <a:lstStyle/>
+          <a:p>
+            <a:pPr indent="0" marL="0">
+              <a:buNone/>
+            </a:pPr>
+            <a:r>
+              <a:rPr lang="en-US" sz="780" u="sng" dirty="0">
+                <a:solidFill>
+                  <a:srgbClr val="0B5F8A"/>
+                </a:solidFill>
+                <a:latin typeface="Arial" pitchFamily="34" charset="0"/>
+                <a:ea typeface="Arial" pitchFamily="34" charset="-122"/>
+                <a:cs typeface="Arial" pitchFamily="34" charset="-120"/>
+                <a:hlinkClick r:id="rId5" invalidUrl="" action="" tgtFrame="" tooltip="OpenAI API pricing" history="1" highlightClick="0" endSnd="0">
+                  <a:extLst>
+                    <a:ext uri="{A12FA001-AC4F-418D-AE19-62706E023703}">
+                      <ahyp:hlinkClr xmlns:ahyp="http://schemas.microsoft.com/office/drawing/2018/hyperlinkcolor" val="tx"/>
+                    </a:ext>
+                  </a:extLst>
+                </a:hlinkClick>
+              </a:rPr>
+              <a:t>OpenAI API pricing</a:t>
+            </a:r>
+            <a:endParaRPr lang="en-US" sz="780" dirty="0"/>
+          </a:p>
+        </p:txBody>
+      </p:sp>
+      <p:sp>
+        <p:nvSpPr>
+          <p:cNvPr id="36" name="Shape 34"/>
+          <p:cNvSpPr/>
+          <p:nvPr/>
+        </p:nvSpPr>
+        <p:spPr>
+          <a:xfrm>
+            <a:off x="6172200" y="1042416"/>
+            <a:ext cx="45720" cy="402336"/>
+          </a:xfrm>
+          <a:prstGeom prst="rect">
+            <a:avLst/>
+          </a:prstGeom>
+          <a:solidFill>
+            <a:srgbClr val="0891B2"/>
+          </a:solidFill>
+          <a:ln/>
+        </p:spPr>
+      </p:sp>
+      <p:sp>
+        <p:nvSpPr>
+          <p:cNvPr id="37" name="Text 35"/>
+          <p:cNvSpPr txBox="1"/>
+          <p:nvPr/>
+        </p:nvSpPr>
+        <p:spPr>
+          <a:xfrm>
+            <a:off x="6336792" y="1024128"/>
+            <a:ext cx="5486400" cy="173736"/>
+          </a:xfrm>
+          <a:prstGeom prst="rect">
+            <a:avLst/>
+          </a:prstGeom>
+          <a:noFill/>
+          <a:ln/>
+        </p:spPr>
+        <p:txBody>
+          <a:bodyPr wrap="square" lIns="0" tIns="0" rIns="0" bIns="0" rtlCol="0" anchor="ctr"/>
+          <a:lstStyle/>
+          <a:p>
+            <a:pPr indent="0" marL="0">
+              <a:buNone/>
+            </a:pPr>
+            <a:r>
+              <a:rPr lang="en-US" sz="860" b="1" dirty="0">
+                <a:solidFill>
+                  <a:srgbClr val="1B2430"/>
+                </a:solidFill>
+                <a:latin typeface="Arial" pitchFamily="34" charset="0"/>
+                <a:ea typeface="Arial" pitchFamily="34" charset="-122"/>
+                <a:cs typeface="Arial" pitchFamily="34" charset="-120"/>
+              </a:rPr>
+              <a:t>Container hosting</a:t>
+            </a:r>
+            <a:endParaRPr lang="en-US" sz="860" dirty="0"/>
+          </a:p>
+        </p:txBody>
+      </p:sp>
+      <p:sp>
+        <p:nvSpPr>
+          <p:cNvPr id="38" name="Text 36"/>
+          <p:cNvSpPr txBox="1"/>
+          <p:nvPr/>
+        </p:nvSpPr>
+        <p:spPr>
+          <a:xfrm>
+            <a:off x="6336792" y="1179576"/>
+            <a:ext cx="5486400" cy="173736"/>
+          </a:xfrm>
+          <a:prstGeom prst="rect">
+            <a:avLst/>
+          </a:prstGeom>
+          <a:noFill/>
+          <a:ln/>
+        </p:spPr>
+        <p:txBody>
+          <a:bodyPr wrap="square" lIns="0" tIns="0" rIns="0" bIns="0" rtlCol="0" anchor="ctr"/>
+          <a:lstStyle/>
+          <a:p>
+            <a:pPr indent="0" marL="0">
+              <a:buNone/>
+            </a:pPr>
+            <a:r>
+              <a:rPr lang="en-US" sz="780" dirty="0">
+                <a:solidFill>
+                  <a:srgbClr val="5A5A5A"/>
+                </a:solidFill>
+                <a:latin typeface="Arial" pitchFamily="34" charset="0"/>
+                <a:ea typeface="Arial" pitchFamily="34" charset="-122"/>
+                <a:cs typeface="Arial" pitchFamily="34" charset="-120"/>
+              </a:rPr>
+              <a:t>Consumption plan rates and the monthly free grant</a:t>
+            </a:r>
+            <a:endParaRPr lang="en-US" sz="780" dirty="0"/>
+          </a:p>
+        </p:txBody>
+      </p:sp>
+      <p:sp>
+        <p:nvSpPr>
+          <p:cNvPr id="39" name="Text 37">
+            <a:hlinkClick r:id="rId6" tooltip="Azure Container Apps pricing"/>
+          </p:cNvPr>
+          <p:cNvSpPr txBox="1"/>
+          <p:nvPr/>
+        </p:nvSpPr>
+        <p:spPr>
+          <a:xfrm>
+            <a:off x="6336792" y="1325880"/>
+            <a:ext cx="5486400" cy="173736"/>
+          </a:xfrm>
+          <a:prstGeom prst="rect">
+            <a:avLst/>
+          </a:prstGeom>
+          <a:noFill/>
+          <a:ln/>
+        </p:spPr>
+        <p:txBody>
+          <a:bodyPr wrap="square" lIns="0" tIns="0" rIns="0" bIns="0" rtlCol="0" anchor="ctr"/>
+          <a:lstStyle/>
+          <a:p>
+            <a:pPr indent="0" marL="0">
+              <a:buNone/>
+            </a:pPr>
+            <a:r>
+              <a:rPr lang="en-US" sz="780" u="sng" dirty="0">
+                <a:solidFill>
+                  <a:srgbClr val="0B5F8A"/>
+                </a:solidFill>
+                <a:latin typeface="Arial" pitchFamily="34" charset="0"/>
+                <a:ea typeface="Arial" pitchFamily="34" charset="-122"/>
+                <a:cs typeface="Arial" pitchFamily="34" charset="-120"/>
+                <a:hlinkClick r:id="rId6" invalidUrl="" action="" tgtFrame="" tooltip="Azure Container Apps pricing" history="1" highlightClick="0" endSnd="0">
+                  <a:extLst>
+                    <a:ext uri="{A12FA001-AC4F-418D-AE19-62706E023703}">
+                      <ahyp:hlinkClr xmlns:ahyp="http://schemas.microsoft.com/office/drawing/2018/hyperlinkcolor" val="tx"/>
+                    </a:ext>
+                  </a:extLst>
+                </a:hlinkClick>
+              </a:rPr>
+              <a:t>Azure Container Apps pricing</a:t>
+            </a:r>
+            <a:endParaRPr lang="en-US" sz="780" dirty="0"/>
+          </a:p>
+        </p:txBody>
+      </p:sp>
+      <p:sp>
+        <p:nvSpPr>
+          <p:cNvPr id="40" name="Shape 38"/>
+          <p:cNvSpPr/>
+          <p:nvPr/>
+        </p:nvSpPr>
+        <p:spPr>
+          <a:xfrm>
+            <a:off x="6172200" y="1517904"/>
+            <a:ext cx="45720" cy="402336"/>
+          </a:xfrm>
+          <a:prstGeom prst="rect">
+            <a:avLst/>
+          </a:prstGeom>
+          <a:solidFill>
+            <a:srgbClr val="0891B2"/>
+          </a:solidFill>
+          <a:ln/>
+        </p:spPr>
+      </p:sp>
+      <p:sp>
+        <p:nvSpPr>
+          <p:cNvPr id="41" name="Text 39"/>
+          <p:cNvSpPr txBox="1"/>
+          <p:nvPr/>
+        </p:nvSpPr>
+        <p:spPr>
+          <a:xfrm>
+            <a:off x="6336792" y="1499616"/>
+            <a:ext cx="5486400" cy="173736"/>
+          </a:xfrm>
+          <a:prstGeom prst="rect">
+            <a:avLst/>
+          </a:prstGeom>
+          <a:noFill/>
+          <a:ln/>
+        </p:spPr>
+        <p:txBody>
+          <a:bodyPr wrap="square" lIns="0" tIns="0" rIns="0" bIns="0" rtlCol="0" anchor="ctr"/>
+          <a:lstStyle/>
+          <a:p>
+            <a:pPr indent="0" marL="0">
+              <a:buNone/>
+            </a:pPr>
+            <a:r>
+              <a:rPr lang="en-US" sz="860" b="1" dirty="0">
+                <a:solidFill>
+                  <a:srgbClr val="1B2430"/>
+                </a:solidFill>
+                <a:latin typeface="Arial" pitchFamily="34" charset="0"/>
+                <a:ea typeface="Arial" pitchFamily="34" charset="-122"/>
+                <a:cs typeface="Arial" pitchFamily="34" charset="-120"/>
+              </a:rPr>
+              <a:t>Database</a:t>
+            </a:r>
+            <a:endParaRPr lang="en-US" sz="860" dirty="0"/>
+          </a:p>
+        </p:txBody>
+      </p:sp>
+      <p:sp>
+        <p:nvSpPr>
+          <p:cNvPr id="42" name="Text 40"/>
+          <p:cNvSpPr txBox="1"/>
+          <p:nvPr/>
+        </p:nvSpPr>
+        <p:spPr>
+          <a:xfrm>
+            <a:off x="6336792" y="1655064"/>
+            <a:ext cx="5486400" cy="173736"/>
+          </a:xfrm>
+          <a:prstGeom prst="rect">
+            <a:avLst/>
+          </a:prstGeom>
+          <a:noFill/>
+          <a:ln/>
+        </p:spPr>
+        <p:txBody>
+          <a:bodyPr wrap="square" lIns="0" tIns="0" rIns="0" bIns="0" rtlCol="0" anchor="ctr"/>
+          <a:lstStyle/>
+          <a:p>
+            <a:pPr indent="0" marL="0">
+              <a:buNone/>
+            </a:pPr>
+            <a:r>
+              <a:rPr lang="en-US" sz="780" dirty="0">
+                <a:solidFill>
+                  <a:srgbClr val="5A5A5A"/>
+                </a:solidFill>
+                <a:latin typeface="Arial" pitchFamily="34" charset="0"/>
+                <a:ea typeface="Arial" pitchFamily="34" charset="-122"/>
+                <a:cs typeface="Arial" pitchFamily="34" charset="-120"/>
+              </a:rPr>
+              <a:t>PostgreSQL Flexible Server B2s — 2 vCore / 4 GiB</a:t>
+            </a:r>
+            <a:endParaRPr lang="en-US" sz="780" dirty="0"/>
+          </a:p>
+        </p:txBody>
+      </p:sp>
+      <p:sp>
+        <p:nvSpPr>
+          <p:cNvPr id="43" name="Text 41">
+            <a:hlinkClick r:id="rId7" tooltip="Azure Database for PostgreSQL"/>
+          </p:cNvPr>
+          <p:cNvSpPr txBox="1"/>
+          <p:nvPr/>
+        </p:nvSpPr>
+        <p:spPr>
+          <a:xfrm>
+            <a:off x="6336792" y="1801368"/>
+            <a:ext cx="5486400" cy="173736"/>
+          </a:xfrm>
+          <a:prstGeom prst="rect">
+            <a:avLst/>
+          </a:prstGeom>
+          <a:noFill/>
+          <a:ln/>
+        </p:spPr>
+        <p:txBody>
+          <a:bodyPr wrap="square" lIns="0" tIns="0" rIns="0" bIns="0" rtlCol="0" anchor="ctr"/>
+          <a:lstStyle/>
+          <a:p>
+            <a:pPr indent="0" marL="0">
+              <a:buNone/>
+            </a:pPr>
+            <a:r>
+              <a:rPr lang="en-US" sz="780" u="sng" dirty="0">
+                <a:solidFill>
+                  <a:srgbClr val="0B5F8A"/>
+                </a:solidFill>
+                <a:latin typeface="Arial" pitchFamily="34" charset="0"/>
+                <a:ea typeface="Arial" pitchFamily="34" charset="-122"/>
+                <a:cs typeface="Arial" pitchFamily="34" charset="-120"/>
+                <a:hlinkClick r:id="rId7" invalidUrl="" action="" tgtFrame="" tooltip="Azure Database for PostgreSQL" history="1" highlightClick="0" endSnd="0">
+                  <a:extLst>
+                    <a:ext uri="{A12FA001-AC4F-418D-AE19-62706E023703}">
+                      <ahyp:hlinkClr xmlns:ahyp="http://schemas.microsoft.com/office/drawing/2018/hyperlinkcolor" val="tx"/>
+                    </a:ext>
+                  </a:extLst>
+                </a:hlinkClick>
+              </a:rPr>
+              <a:t>Azure Database for PostgreSQL</a:t>
+            </a:r>
+            <a:endParaRPr lang="en-US" sz="780" dirty="0"/>
+          </a:p>
+        </p:txBody>
+      </p:sp>
+      <p:sp>
+        <p:nvSpPr>
+          <p:cNvPr id="44" name="Shape 42"/>
+          <p:cNvSpPr/>
+          <p:nvPr/>
+        </p:nvSpPr>
+        <p:spPr>
+          <a:xfrm>
+            <a:off x="6172200" y="1993392"/>
+            <a:ext cx="45720" cy="402336"/>
+          </a:xfrm>
+          <a:prstGeom prst="rect">
+            <a:avLst/>
+          </a:prstGeom>
+          <a:solidFill>
+            <a:srgbClr val="0891B2"/>
+          </a:solidFill>
+          <a:ln/>
+        </p:spPr>
+      </p:sp>
+      <p:sp>
+        <p:nvSpPr>
+          <p:cNvPr id="45" name="Text 43"/>
+          <p:cNvSpPr txBox="1"/>
+          <p:nvPr/>
+        </p:nvSpPr>
+        <p:spPr>
+          <a:xfrm>
+            <a:off x="6336792" y="1975104"/>
+            <a:ext cx="5486400" cy="173736"/>
+          </a:xfrm>
+          <a:prstGeom prst="rect">
+            <a:avLst/>
+          </a:prstGeom>
+          <a:noFill/>
+          <a:ln/>
+        </p:spPr>
+        <p:txBody>
+          <a:bodyPr wrap="square" lIns="0" tIns="0" rIns="0" bIns="0" rtlCol="0" anchor="ctr"/>
+          <a:lstStyle/>
+          <a:p>
+            <a:pPr indent="0" marL="0">
+              <a:buNone/>
+            </a:pPr>
+            <a:r>
+              <a:rPr lang="en-US" sz="860" b="1" dirty="0">
+                <a:solidFill>
+                  <a:srgbClr val="1B2430"/>
+                </a:solidFill>
+                <a:latin typeface="Arial" pitchFamily="34" charset="0"/>
+                <a:ea typeface="Arial" pitchFamily="34" charset="-122"/>
+                <a:cs typeface="Arial" pitchFamily="34" charset="-120"/>
+              </a:rPr>
+              <a:t>Upkeep after go-live</a:t>
+            </a:r>
+            <a:endParaRPr lang="en-US" sz="860" dirty="0"/>
+          </a:p>
+        </p:txBody>
+      </p:sp>
+      <p:sp>
+        <p:nvSpPr>
+          <p:cNvPr id="46" name="Text 44"/>
+          <p:cNvSpPr txBox="1"/>
+          <p:nvPr/>
+        </p:nvSpPr>
+        <p:spPr>
+          <a:xfrm>
+            <a:off x="6336792" y="2130552"/>
+            <a:ext cx="5486400" cy="173736"/>
+          </a:xfrm>
+          <a:prstGeom prst="rect">
+            <a:avLst/>
+          </a:prstGeom>
+          <a:noFill/>
+          <a:ln/>
+        </p:spPr>
+        <p:txBody>
+          <a:bodyPr wrap="square" lIns="0" tIns="0" rIns="0" bIns="0" rtlCol="0" anchor="ctr"/>
+          <a:lstStyle/>
+          <a:p>
+            <a:pPr indent="0" marL="0">
+              <a:buNone/>
+            </a:pPr>
+            <a:r>
+              <a:rPr lang="en-US" sz="780" dirty="0">
+                <a:solidFill>
+                  <a:srgbClr val="5A5A5A"/>
+                </a:solidFill>
+                <a:latin typeface="Arial" pitchFamily="34" charset="0"/>
+                <a:ea typeface="Arial" pitchFamily="34" charset="-122"/>
+                <a:cs typeface="Arial" pitchFamily="34" charset="-120"/>
+              </a:rPr>
+              <a:t>15–20% of build effort a year — our 0.25 FTE is 17%</a:t>
+            </a:r>
+            <a:endParaRPr lang="en-US" sz="780" dirty="0"/>
+          </a:p>
+        </p:txBody>
+      </p:sp>
+      <p:sp>
+        <p:nvSpPr>
+          <p:cNvPr id="47" name="Text 45"/>
+          <p:cNvSpPr txBox="1"/>
+          <p:nvPr/>
+        </p:nvSpPr>
+        <p:spPr>
+          <a:xfrm>
+            <a:off x="6336792" y="2276856"/>
+            <a:ext cx="5486400" cy="173736"/>
+          </a:xfrm>
+          <a:prstGeom prst="rect">
+            <a:avLst/>
+          </a:prstGeom>
+          <a:noFill/>
+          <a:ln/>
+        </p:spPr>
+        <p:txBody>
+          <a:bodyPr wrap="square" lIns="0" tIns="0" rIns="0" bIns="0" rtlCol="0" anchor="ctr"/>
+          <a:lstStyle/>
+          <a:p>
+            <a:pPr indent="0" marL="0">
+              <a:buNone/>
+            </a:pPr>
+            <a:r>
+              <a:rPr lang="en-US" sz="780" i="1" dirty="0">
+                <a:solidFill>
+                  <a:srgbClr val="5A5A5A"/>
+                </a:solidFill>
+                <a:latin typeface="Arial" pitchFamily="34" charset="0"/>
+                <a:ea typeface="Arial" pitchFamily="34" charset="-122"/>
+                <a:cs typeface="Arial" pitchFamily="34" charset="-120"/>
+              </a:rPr>
+              <a:t>Software maintenance rule of thumb</a:t>
+            </a:r>
+            <a:endParaRPr lang="en-US" sz="780" dirty="0"/>
+          </a:p>
+        </p:txBody>
+      </p:sp>
+      <p:sp>
+        <p:nvSpPr>
+          <p:cNvPr id="48" name="Shape 46"/>
+          <p:cNvSpPr/>
+          <p:nvPr/>
+        </p:nvSpPr>
+        <p:spPr>
+          <a:xfrm>
+            <a:off x="6172200" y="2468880"/>
+            <a:ext cx="45720" cy="402336"/>
+          </a:xfrm>
+          <a:prstGeom prst="rect">
+            <a:avLst/>
+          </a:prstGeom>
+          <a:solidFill>
+            <a:srgbClr val="0891B2"/>
+          </a:solidFill>
+          <a:ln/>
+        </p:spPr>
+      </p:sp>
+      <p:sp>
+        <p:nvSpPr>
+          <p:cNvPr id="49" name="Text 47"/>
+          <p:cNvSpPr txBox="1"/>
+          <p:nvPr/>
+        </p:nvSpPr>
+        <p:spPr>
+          <a:xfrm>
+            <a:off x="6336792" y="2450592"/>
+            <a:ext cx="5486400" cy="173736"/>
+          </a:xfrm>
+          <a:prstGeom prst="rect">
+            <a:avLst/>
+          </a:prstGeom>
+          <a:noFill/>
+          <a:ln/>
+        </p:spPr>
+        <p:txBody>
+          <a:bodyPr wrap="square" lIns="0" tIns="0" rIns="0" bIns="0" rtlCol="0" anchor="ctr"/>
+          <a:lstStyle/>
+          <a:p>
+            <a:pPr indent="0" marL="0">
+              <a:buNone/>
+            </a:pPr>
+            <a:r>
+              <a:rPr lang="en-US" sz="860" b="1" dirty="0">
+                <a:solidFill>
+                  <a:srgbClr val="1B2430"/>
+                </a:solidFill>
+                <a:latin typeface="Arial" pitchFamily="34" charset="0"/>
+                <a:ea typeface="Arial" pitchFamily="34" charset="-122"/>
+                <a:cs typeface="Arial" pitchFamily="34" charset="-120"/>
+              </a:rPr>
+              <a:t>Industry baseline</a:t>
+            </a:r>
+            <a:endParaRPr lang="en-US" sz="860" dirty="0"/>
+          </a:p>
+        </p:txBody>
+      </p:sp>
+      <p:sp>
+        <p:nvSpPr>
+          <p:cNvPr id="50" name="Text 48"/>
+          <p:cNvSpPr txBox="1"/>
+          <p:nvPr/>
+        </p:nvSpPr>
+        <p:spPr>
+          <a:xfrm>
+            <a:off x="6336792" y="2606040"/>
+            <a:ext cx="5486400" cy="173736"/>
+          </a:xfrm>
+          <a:prstGeom prst="rect">
+            <a:avLst/>
+          </a:prstGeom>
+          <a:noFill/>
+          <a:ln/>
+        </p:spPr>
+        <p:txBody>
+          <a:bodyPr wrap="square" lIns="0" tIns="0" rIns="0" bIns="0" rtlCol="0" anchor="ctr"/>
+          <a:lstStyle/>
+          <a:p>
+            <a:pPr indent="0" marL="0">
+              <a:buNone/>
+            </a:pPr>
+            <a:r>
+              <a:rPr lang="en-US" sz="780" dirty="0">
+                <a:solidFill>
+                  <a:srgbClr val="5A5A5A"/>
+                </a:solidFill>
+                <a:latin typeface="Arial" pitchFamily="34" charset="0"/>
+                <a:ea typeface="Arial" pitchFamily="34" charset="-122"/>
+                <a:cs typeface="Arial" pitchFamily="34" charset="-120"/>
+              </a:rPr>
+              <a:t>17 of 20 carriers still manual; none let AI decide alone</a:t>
+            </a:r>
+            <a:endParaRPr lang="en-US" sz="780" dirty="0"/>
+          </a:p>
+        </p:txBody>
+      </p:sp>
+      <p:sp>
+        <p:nvSpPr>
+          <p:cNvPr id="51" name="Text 49">
+            <a:hlinkClick r:id="rId8" tooltip="Decerto, 2026 Claims Decisioning Pulse"/>
+          </p:cNvPr>
+          <p:cNvSpPr txBox="1"/>
+          <p:nvPr/>
+        </p:nvSpPr>
+        <p:spPr>
+          <a:xfrm>
+            <a:off x="6336792" y="2752344"/>
+            <a:ext cx="5486400" cy="173736"/>
+          </a:xfrm>
+          <a:prstGeom prst="rect">
+            <a:avLst/>
+          </a:prstGeom>
+          <a:noFill/>
+          <a:ln/>
+        </p:spPr>
+        <p:txBody>
+          <a:bodyPr wrap="square" lIns="0" tIns="0" rIns="0" bIns="0" rtlCol="0" anchor="ctr"/>
+          <a:lstStyle/>
+          <a:p>
+            <a:pPr indent="0" marL="0">
+              <a:buNone/>
+            </a:pPr>
+            <a:r>
+              <a:rPr lang="en-US" sz="780" u="sng" dirty="0">
+                <a:solidFill>
+                  <a:srgbClr val="0B5F8A"/>
+                </a:solidFill>
+                <a:latin typeface="Arial" pitchFamily="34" charset="0"/>
+                <a:ea typeface="Arial" pitchFamily="34" charset="-122"/>
+                <a:cs typeface="Arial" pitchFamily="34" charset="-120"/>
+                <a:hlinkClick r:id="rId8" invalidUrl="" action="" tgtFrame="" tooltip="Decerto, 2026 Claims Decisioning Pulse" history="1" highlightClick="0" endSnd="0">
+                  <a:extLst>
+                    <a:ext uri="{A12FA001-AC4F-418D-AE19-62706E023703}">
+                      <ahyp:hlinkClr xmlns:ahyp="http://schemas.microsoft.com/office/drawing/2018/hyperlinkcolor" val="tx"/>
+                    </a:ext>
+                  </a:extLst>
+                </a:hlinkClick>
+              </a:rPr>
+              <a:t>Decerto, 2026 Claims Decisioning Pulse</a:t>
+            </a:r>
+            <a:endParaRPr lang="en-US" sz="780" dirty="0"/>
+          </a:p>
+        </p:txBody>
+      </p:sp>
+      <p:sp>
+        <p:nvSpPr>
+          <p:cNvPr id="52" name="Shape 50"/>
+          <p:cNvSpPr/>
+          <p:nvPr/>
+        </p:nvSpPr>
+        <p:spPr>
+          <a:xfrm>
+            <a:off x="6172200" y="2944368"/>
+            <a:ext cx="45720" cy="402336"/>
+          </a:xfrm>
+          <a:prstGeom prst="rect">
+            <a:avLst/>
+          </a:prstGeom>
+          <a:solidFill>
+            <a:srgbClr val="0891B2"/>
+          </a:solidFill>
+          <a:ln/>
+        </p:spPr>
+      </p:sp>
+      <p:sp>
+        <p:nvSpPr>
+          <p:cNvPr id="53" name="Text 51"/>
+          <p:cNvSpPr txBox="1"/>
+          <p:nvPr/>
+        </p:nvSpPr>
+        <p:spPr>
+          <a:xfrm>
+            <a:off x="6336792" y="2926080"/>
+            <a:ext cx="5486400" cy="173736"/>
+          </a:xfrm>
+          <a:prstGeom prst="rect">
+            <a:avLst/>
+          </a:prstGeom>
+          <a:noFill/>
+          <a:ln/>
+        </p:spPr>
+        <p:txBody>
+          <a:bodyPr wrap="square" lIns="0" tIns="0" rIns="0" bIns="0" rtlCol="0" anchor="ctr"/>
+          <a:lstStyle/>
+          <a:p>
+            <a:pPr indent="0" marL="0">
+              <a:buNone/>
+            </a:pPr>
+            <a:r>
+              <a:rPr lang="en-US" sz="860" b="1" dirty="0">
+                <a:solidFill>
+                  <a:srgbClr val="1B2430"/>
+                </a:solidFill>
+                <a:latin typeface="Arial" pitchFamily="34" charset="0"/>
+                <a:ea typeface="Arial" pitchFamily="34" charset="-122"/>
+                <a:cs typeface="Arial" pitchFamily="34" charset="-120"/>
+              </a:rPr>
+              <a:t>Where value comes from</a:t>
+            </a:r>
+            <a:endParaRPr lang="en-US" sz="860" dirty="0"/>
+          </a:p>
+        </p:txBody>
+      </p:sp>
+      <p:sp>
+        <p:nvSpPr>
+          <p:cNvPr id="54" name="Text 52"/>
+          <p:cNvSpPr txBox="1"/>
+          <p:nvPr/>
+        </p:nvSpPr>
+        <p:spPr>
+          <a:xfrm>
+            <a:off x="6336792" y="3081528"/>
+            <a:ext cx="5486400" cy="173736"/>
+          </a:xfrm>
+          <a:prstGeom prst="rect">
+            <a:avLst/>
+          </a:prstGeom>
+          <a:noFill/>
+          <a:ln/>
+        </p:spPr>
+        <p:txBody>
+          <a:bodyPr wrap="square" lIns="0" tIns="0" rIns="0" bIns="0" rtlCol="0" anchor="ctr"/>
+          <a:lstStyle/>
+          <a:p>
+            <a:pPr indent="0" marL="0">
+              <a:buNone/>
+            </a:pPr>
+            <a:r>
+              <a:rPr lang="en-US" sz="780" dirty="0">
+                <a:solidFill>
+                  <a:srgbClr val="5A5A5A"/>
+                </a:solidFill>
+                <a:latin typeface="Arial" pitchFamily="34" charset="0"/>
+                <a:ea typeface="Arial" pitchFamily="34" charset="-122"/>
+                <a:cs typeface="Arial" pitchFamily="34" charset="-120"/>
+              </a:rPr>
+              <a:t>The 10-20-70 split — algorithms, technology, people</a:t>
+            </a:r>
+            <a:endParaRPr lang="en-US" sz="780" dirty="0"/>
+          </a:p>
+        </p:txBody>
+      </p:sp>
+      <p:sp>
+        <p:nvSpPr>
+          <p:cNvPr id="55" name="Text 53">
+            <a:hlinkClick r:id="rId9" tooltip="BCG, AI in customer service operations"/>
+          </p:cNvPr>
+          <p:cNvSpPr txBox="1"/>
+          <p:nvPr/>
+        </p:nvSpPr>
+        <p:spPr>
+          <a:xfrm>
+            <a:off x="6336792" y="3227832"/>
+            <a:ext cx="5486400" cy="173736"/>
+          </a:xfrm>
+          <a:prstGeom prst="rect">
+            <a:avLst/>
+          </a:prstGeom>
+          <a:noFill/>
+          <a:ln/>
+        </p:spPr>
+        <p:txBody>
+          <a:bodyPr wrap="square" lIns="0" tIns="0" rIns="0" bIns="0" rtlCol="0" anchor="ctr"/>
+          <a:lstStyle/>
+          <a:p>
+            <a:pPr indent="0" marL="0">
+              <a:buNone/>
+            </a:pPr>
+            <a:r>
+              <a:rPr lang="en-US" sz="780" u="sng" dirty="0">
+                <a:solidFill>
+                  <a:srgbClr val="0B5F8A"/>
+                </a:solidFill>
+                <a:latin typeface="Arial" pitchFamily="34" charset="0"/>
+                <a:ea typeface="Arial" pitchFamily="34" charset="-122"/>
+                <a:cs typeface="Arial" pitchFamily="34" charset="-120"/>
+                <a:hlinkClick r:id="rId9" invalidUrl="" action="" tgtFrame="" tooltip="BCG, AI in customer service operations" history="1" highlightClick="0" endSnd="0">
+                  <a:extLst>
+                    <a:ext uri="{A12FA001-AC4F-418D-AE19-62706E023703}">
+                      <ahyp:hlinkClr xmlns:ahyp="http://schemas.microsoft.com/office/drawing/2018/hyperlinkcolor" val="tx"/>
+                    </a:ext>
+                  </a:extLst>
+                </a:hlinkClick>
+              </a:rPr>
+              <a:t>BCG, AI in customer service operations</a:t>
+            </a:r>
+            <a:endParaRPr lang="en-US" sz="780" dirty="0"/>
+          </a:p>
+        </p:txBody>
+      </p:sp>
+      <p:sp>
+        <p:nvSpPr>
+          <p:cNvPr id="56" name="Shape 54"/>
+          <p:cNvSpPr/>
+          <p:nvPr/>
+        </p:nvSpPr>
+        <p:spPr>
+          <a:xfrm>
+            <a:off x="6172200" y="3419856"/>
+            <a:ext cx="45720" cy="402336"/>
+          </a:xfrm>
+          <a:prstGeom prst="rect">
+            <a:avLst/>
+          </a:prstGeom>
+          <a:solidFill>
+            <a:srgbClr val="0891B2"/>
+          </a:solidFill>
+          <a:ln/>
+        </p:spPr>
+      </p:sp>
+      <p:sp>
+        <p:nvSpPr>
+          <p:cNvPr id="57" name="Text 55"/>
+          <p:cNvSpPr txBox="1"/>
+          <p:nvPr/>
+        </p:nvSpPr>
+        <p:spPr>
+          <a:xfrm>
+            <a:off x="6336792" y="3401568"/>
+            <a:ext cx="5486400" cy="173736"/>
+          </a:xfrm>
+          <a:prstGeom prst="rect">
+            <a:avLst/>
+          </a:prstGeom>
+          <a:noFill/>
+          <a:ln/>
+        </p:spPr>
+        <p:txBody>
+          <a:bodyPr wrap="square" lIns="0" tIns="0" rIns="0" bIns="0" rtlCol="0" anchor="ctr"/>
+          <a:lstStyle/>
+          <a:p>
+            <a:pPr indent="0" marL="0">
+              <a:buNone/>
+            </a:pPr>
+            <a:r>
+              <a:rPr lang="en-US" sz="860" b="1" dirty="0">
+                <a:solidFill>
+                  <a:srgbClr val="1B2430"/>
+                </a:solidFill>
+                <a:latin typeface="Arial" pitchFamily="34" charset="0"/>
+                <a:ea typeface="Arial" pitchFamily="34" charset="-122"/>
+                <a:cs typeface="Arial" pitchFamily="34" charset="-120"/>
+              </a:rPr>
+              <a:t>Fixing import failures</a:t>
+            </a:r>
+            <a:endParaRPr lang="en-US" sz="860" dirty="0"/>
+          </a:p>
+        </p:txBody>
+      </p:sp>
+      <p:sp>
+        <p:nvSpPr>
+          <p:cNvPr id="58" name="Text 56"/>
+          <p:cNvSpPr txBox="1"/>
+          <p:nvPr/>
+        </p:nvSpPr>
+        <p:spPr>
+          <a:xfrm>
+            <a:off x="6336792" y="3557016"/>
+            <a:ext cx="5486400" cy="173736"/>
+          </a:xfrm>
+          <a:prstGeom prst="rect">
+            <a:avLst/>
+          </a:prstGeom>
+          <a:noFill/>
+          <a:ln/>
+        </p:spPr>
+        <p:txBody>
+          <a:bodyPr wrap="square" lIns="0" tIns="0" rIns="0" bIns="0" rtlCol="0" anchor="ctr"/>
+          <a:lstStyle/>
+          <a:p>
+            <a:pPr indent="0" marL="0">
+              <a:buNone/>
+            </a:pPr>
+            <a:r>
+              <a:rPr lang="en-US" sz="780" dirty="0">
+                <a:solidFill>
+                  <a:srgbClr val="5A5A5A"/>
+                </a:solidFill>
+                <a:latin typeface="Arial" pitchFamily="34" charset="0"/>
+                <a:ea typeface="Arial" pitchFamily="34" charset="-122"/>
+                <a:cs typeface="Arial" pitchFamily="34" charset="-120"/>
+              </a:rPr>
+              <a:t>Retry vs. dead-letter, idempotency keys, alert on rate</a:t>
+            </a:r>
+            <a:endParaRPr lang="en-US" sz="780" dirty="0"/>
+          </a:p>
+        </p:txBody>
+      </p:sp>
+      <p:sp>
+        <p:nvSpPr>
+          <p:cNvPr id="59" name="Text 57">
+            <a:hlinkClick r:id="rId10" tooltip="Dead-letter queues and poison messages"/>
+          </p:cNvPr>
+          <p:cNvSpPr txBox="1"/>
+          <p:nvPr/>
+        </p:nvSpPr>
+        <p:spPr>
+          <a:xfrm>
+            <a:off x="6336792" y="3703320"/>
+            <a:ext cx="5486400" cy="173736"/>
+          </a:xfrm>
+          <a:prstGeom prst="rect">
+            <a:avLst/>
+          </a:prstGeom>
+          <a:noFill/>
+          <a:ln/>
+        </p:spPr>
+        <p:txBody>
+          <a:bodyPr wrap="square" lIns="0" tIns="0" rIns="0" bIns="0" rtlCol="0" anchor="ctr"/>
+          <a:lstStyle/>
+          <a:p>
+            <a:pPr indent="0" marL="0">
+              <a:buNone/>
+            </a:pPr>
+            <a:r>
+              <a:rPr lang="en-US" sz="780" u="sng" dirty="0">
+                <a:solidFill>
+                  <a:srgbClr val="0B5F8A"/>
+                </a:solidFill>
+                <a:latin typeface="Arial" pitchFamily="34" charset="0"/>
+                <a:ea typeface="Arial" pitchFamily="34" charset="-122"/>
+                <a:cs typeface="Arial" pitchFamily="34" charset="-120"/>
+                <a:hlinkClick r:id="rId10" invalidUrl="" action="" tgtFrame="" tooltip="Dead-letter queues and poison messages" history="1" highlightClick="0" endSnd="0">
+                  <a:extLst>
+                    <a:ext uri="{A12FA001-AC4F-418D-AE19-62706E023703}">
+                      <ahyp:hlinkClr xmlns:ahyp="http://schemas.microsoft.com/office/drawing/2018/hyperlinkcolor" val="tx"/>
+                    </a:ext>
+                  </a:extLst>
+                </a:hlinkClick>
+              </a:rPr>
+              <a:t>Dead-letter queues and poison messages</a:t>
+            </a:r>
+            <a:endParaRPr lang="en-US" sz="780" dirty="0"/>
+          </a:p>
+        </p:txBody>
+      </p:sp>
+      <p:sp>
+        <p:nvSpPr>
+          <p:cNvPr id="60" name="Shape 58"/>
+          <p:cNvSpPr/>
+          <p:nvPr/>
+        </p:nvSpPr>
+        <p:spPr>
+          <a:xfrm>
+            <a:off x="365760" y="3986784"/>
+            <a:ext cx="11457432" cy="1152144"/>
+          </a:xfrm>
+          <a:prstGeom prst="roundRect">
+            <a:avLst>
+              <a:gd name="adj" fmla="val 4762"/>
+            </a:avLst>
+          </a:prstGeom>
+          <a:solidFill>
+            <a:srgbClr val="FDF3E3"/>
+          </a:solidFill>
+          <a:ln w="15240">
+            <a:solidFill>
+              <a:srgbClr val="D97706"/>
+            </a:solidFill>
+            <a:prstDash val="solid"/>
+          </a:ln>
+        </p:spPr>
+      </p:sp>
+      <p:sp>
+        <p:nvSpPr>
+          <p:cNvPr id="61" name="Text 59"/>
+          <p:cNvSpPr txBox="1"/>
+          <p:nvPr/>
+        </p:nvSpPr>
+        <p:spPr>
+          <a:xfrm>
+            <a:off x="548640" y="4087368"/>
+            <a:ext cx="11064240" cy="219456"/>
+          </a:xfrm>
+          <a:prstGeom prst="rect">
+            <a:avLst/>
+          </a:prstGeom>
+          <a:noFill/>
+          <a:ln/>
+        </p:spPr>
+        <p:txBody>
+          <a:bodyPr wrap="square" lIns="0" tIns="0" rIns="0" bIns="0" rtlCol="0" anchor="ctr"/>
+          <a:lstStyle/>
+          <a:p>
+            <a:pPr indent="0" marL="0">
+              <a:buNone/>
+            </a:pPr>
+            <a:r>
+              <a:rPr lang="en-US" sz="860" b="1" spc="60" kern="0" dirty="0">
+                <a:solidFill>
+                  <a:srgbClr val="9A5A0A"/>
+                </a:solidFill>
+                <a:latin typeface="Arial" pitchFamily="34" charset="0"/>
+                <a:ea typeface="Arial" pitchFamily="34" charset="-122"/>
+                <a:cs typeface="Arial" pitchFamily="34" charset="-120"/>
+              </a:rPr>
+              <a:t>STILL OUR ASSUMPTIONS — AND THE FIRST THING WE WOULD TEST</a:t>
+            </a:r>
+            <a:endParaRPr lang="en-US" sz="860" dirty="0"/>
+          </a:p>
+        </p:txBody>
+      </p:sp>
+      <p:sp>
+        <p:nvSpPr>
+          <p:cNvPr id="62" name="Text 60"/>
+          <p:cNvSpPr txBox="1"/>
+          <p:nvPr/>
+        </p:nvSpPr>
+        <p:spPr>
+          <a:xfrm>
+            <a:off x="548640" y="4315968"/>
+            <a:ext cx="11064240" cy="749808"/>
+          </a:xfrm>
+          <a:prstGeom prst="rect">
+            <a:avLst/>
+          </a:prstGeom>
+          <a:noFill/>
+          <a:ln/>
+        </p:spPr>
+        <p:txBody>
+          <a:bodyPr wrap="square" lIns="0" tIns="0" rIns="0" bIns="0" rtlCol="0" anchor="ctr"/>
+          <a:lstStyle/>
+          <a:p>
+            <a:pPr indent="0" marL="0">
+              <a:lnSpc>
+                <a:spcPct val="120000"/>
+              </a:lnSpc>
+              <a:buNone/>
+            </a:pPr>
+            <a:r>
+              <a:rPr lang="en-US" sz="840" dirty="0">
+                <a:solidFill>
+                  <a:srgbClr val="44403A"/>
+                </a:solidFill>
+                <a:latin typeface="Arial" pitchFamily="34" charset="0"/>
+                <a:ea typeface="Arial" pitchFamily="34" charset="-122"/>
+                <a:cs typeface="Arial" pitchFamily="34" charset="-120"/>
+              </a:rPr>
+              <a:t>Every per-step minute on slide 9 · the 30% allowance for breaks and interruptions · how often a CPR is missing (30%) or underwriting is asked (25%) · how often the redesign raises an exception (20%) · the tokens a typical claim needs · the €146k build · the 0.25 FTE upkeep.</a:t>
+            </a:r>
+            <a:endParaRPr lang="en-US" sz="840" dirty="0"/>
+          </a:p>
+          <a:p>
+            <a:pPr indent="0" marL="0">
+              <a:lnSpc>
+                <a:spcPct val="120000"/>
+              </a:lnSpc>
+              <a:buNone/>
+            </a:pPr>
+            <a:endParaRPr lang="en-US" sz="840" dirty="0"/>
+          </a:p>
+          <a:p>
+            <a:pPr indent="0" marL="0">
+              <a:lnSpc>
+                <a:spcPct val="120000"/>
+              </a:lnSpc>
+              <a:buNone/>
+            </a:pPr>
+            <a:r>
+              <a:rPr lang="en-US" sz="840" dirty="0">
+                <a:solidFill>
+                  <a:srgbClr val="44403A"/>
+                </a:solidFill>
+                <a:latin typeface="Arial" pitchFamily="34" charset="0"/>
+                <a:ea typeface="Arial" pitchFamily="34" charset="-122"/>
+                <a:cs typeface="Arial" pitchFamily="34" charset="-120"/>
+              </a:rPr>
+              <a:t>Who does intake is no longer among them — GGW answered it, and every per-person figure in this deck is rebuilt on that answer. Two weeks of watching live intake would replace the rest with measurements.</a:t>
+            </a:r>
+            <a:endParaRPr lang="en-US" sz="840" dirty="0"/>
+          </a:p>
+        </p:txBody>
+      </p:sp>
+      <p:sp>
+        <p:nvSpPr>
+          <p:cNvPr id="63" name="Shape 61"/>
+          <p:cNvSpPr/>
+          <p:nvPr/>
+        </p:nvSpPr>
+        <p:spPr>
+          <a:xfrm>
+            <a:off x="365760" y="5303520"/>
+            <a:ext cx="45720" cy="182880"/>
+          </a:xfrm>
+          <a:prstGeom prst="rect">
+            <a:avLst/>
+          </a:prstGeom>
+          <a:solidFill>
+            <a:srgbClr val="BE185D"/>
+          </a:solidFill>
+          <a:ln/>
+        </p:spPr>
+      </p:sp>
+      <p:sp>
+        <p:nvSpPr>
+          <p:cNvPr id="64" name="Text 62"/>
+          <p:cNvSpPr txBox="1"/>
+          <p:nvPr/>
+        </p:nvSpPr>
+        <p:spPr>
+          <a:xfrm>
+            <a:off x="530352" y="5285232"/>
+            <a:ext cx="2926080" cy="219456"/>
+          </a:xfrm>
+          <a:prstGeom prst="rect">
+            <a:avLst/>
+          </a:prstGeom>
+          <a:noFill/>
+          <a:ln/>
+        </p:spPr>
+        <p:txBody>
+          <a:bodyPr wrap="square" lIns="0" tIns="0" rIns="0" bIns="0" rtlCol="0" anchor="ctr"/>
+          <a:lstStyle/>
+          <a:p>
+            <a:pPr indent="0" marL="0">
+              <a:buNone/>
+            </a:pPr>
+            <a:r>
+              <a:rPr lang="en-US" sz="760" dirty="0">
+                <a:solidFill>
+                  <a:srgbClr val="BE185D"/>
+                </a:solidFill>
+                <a:latin typeface="Arial" pitchFamily="34" charset="0"/>
+                <a:ea typeface="Arial" pitchFamily="34" charset="-122"/>
+                <a:cs typeface="Arial" pitchFamily="34" charset="-120"/>
+              </a:rPr>
+              <a:t>confirmed by GGW or stated in the brief</a:t>
+            </a:r>
+            <a:endParaRPr lang="en-US" sz="760" dirty="0"/>
+          </a:p>
+        </p:txBody>
+      </p:sp>
+      <p:sp>
+        <p:nvSpPr>
+          <p:cNvPr id="65" name="Shape 63"/>
+          <p:cNvSpPr/>
+          <p:nvPr/>
+        </p:nvSpPr>
+        <p:spPr>
+          <a:xfrm>
+            <a:off x="3657600" y="5303520"/>
+            <a:ext cx="45720" cy="182880"/>
+          </a:xfrm>
+          <a:prstGeom prst="rect">
+            <a:avLst/>
+          </a:prstGeom>
+          <a:solidFill>
+            <a:srgbClr val="0891B2"/>
+          </a:solidFill>
+          <a:ln/>
+        </p:spPr>
+      </p:sp>
+      <p:sp>
+        <p:nvSpPr>
+          <p:cNvPr id="66" name="Text 64"/>
+          <p:cNvSpPr txBox="1"/>
+          <p:nvPr/>
+        </p:nvSpPr>
+        <p:spPr>
+          <a:xfrm>
+            <a:off x="3822192" y="5285232"/>
+            <a:ext cx="2926080" cy="219456"/>
+          </a:xfrm>
+          <a:prstGeom prst="rect">
+            <a:avLst/>
+          </a:prstGeom>
+          <a:noFill/>
+          <a:ln/>
+        </p:spPr>
+        <p:txBody>
+          <a:bodyPr wrap="square" lIns="0" tIns="0" rIns="0" bIns="0" rtlCol="0" anchor="ctr"/>
+          <a:lstStyle/>
+          <a:p>
+            <a:pPr indent="0" marL="0">
+              <a:buNone/>
+            </a:pPr>
+            <a:r>
+              <a:rPr lang="en-US" sz="760" dirty="0">
+                <a:solidFill>
+                  <a:srgbClr val="0891B2"/>
+                </a:solidFill>
+                <a:latin typeface="Arial" pitchFamily="34" charset="0"/>
+                <a:ea typeface="Arial" pitchFamily="34" charset="-122"/>
+                <a:cs typeface="Arial" pitchFamily="34" charset="-120"/>
+              </a:rPr>
+              <a:t>published source, linked</a:t>
+            </a:r>
+            <a:endParaRPr lang="en-US" sz="760" dirty="0"/>
+          </a:p>
+        </p:txBody>
+      </p:sp>
+      <p:sp>
+        <p:nvSpPr>
+          <p:cNvPr id="67" name="Text 65"/>
+          <p:cNvSpPr txBox="1"/>
+          <p:nvPr/>
+        </p:nvSpPr>
+        <p:spPr>
+          <a:xfrm>
+            <a:off x="365760" y="5650992"/>
+            <a:ext cx="11430000" cy="237744"/>
+          </a:xfrm>
+          <a:prstGeom prst="rect">
+            <a:avLst/>
+          </a:prstGeom>
+          <a:noFill/>
+          <a:ln/>
+        </p:spPr>
+        <p:txBody>
+          <a:bodyPr wrap="square" lIns="0" tIns="0" rIns="0" bIns="0" rtlCol="0" anchor="ctr"/>
+          <a:lstStyle/>
+          <a:p>
+            <a:pPr indent="0" marL="0">
+              <a:buNone/>
+            </a:pPr>
+            <a:r>
+              <a:rPr lang="en-US" sz="700" dirty="0">
+                <a:solidFill>
+                  <a:srgbClr val="5B6472"/>
+                </a:solidFill>
+                <a:latin typeface="Arial" pitchFamily="34" charset="0"/>
+                <a:ea typeface="Arial" pitchFamily="34" charset="-122"/>
+                <a:cs typeface="Arial" pitchFamily="34" charset="-120"/>
+              </a:rPr>
+              <a:t>Prices checked September 2026 · US$ converted at €0.92 · every euro figure is fully loaded — gross pay plus employer contributions</a:t>
+            </a:r>
+            <a:endParaRPr lang="en-US" sz="700" dirty="0"/>
+          </a:p>
+        </p:txBody>
+      </p:sp>
+      <p:sp>
+        <p:nvSpPr>
+          <p:cNvPr id="68" name="Text 66"/>
+          <p:cNvSpPr txBox="1"/>
+          <p:nvPr/>
+        </p:nvSpPr>
+        <p:spPr>
+          <a:xfrm>
+            <a:off x="365760" y="6601968"/>
+            <a:ext cx="5486400" cy="219456"/>
+          </a:xfrm>
+          <a:prstGeom prst="rect">
+            <a:avLst/>
+          </a:prstGeom>
+          <a:noFill/>
+          <a:ln/>
+        </p:spPr>
+        <p:txBody>
+          <a:bodyPr wrap="square" lIns="0" tIns="0" rIns="0" bIns="0" rtlCol="0" anchor="ctr"/>
+          <a:lstStyle/>
+          <a:p>
+            <a:pPr indent="0" marL="0">
+              <a:buNone/>
+            </a:pPr>
+            <a:r>
+              <a:rPr lang="en-US" sz="800" dirty="0">
+                <a:solidFill>
+                  <a:srgbClr val="5B6472"/>
+                </a:solidFill>
+                <a:latin typeface="Arial" pitchFamily="34" charset="0"/>
+                <a:ea typeface="Arial" pitchFamily="34" charset="-122"/>
+                <a:cs typeface="Arial" pitchFamily="34" charset="-120"/>
+              </a:rPr>
+              <a:t>GGW Claims Workflow Redesign · FNOL</a:t>
+            </a:r>
+            <a:endParaRPr lang="en-US" sz="800" dirty="0"/>
+          </a:p>
+        </p:txBody>
+      </p:sp>
+      <p:sp>
+        <p:nvSpPr>
+          <p:cNvPr id="69" name="Text 67"/>
+          <p:cNvSpPr txBox="1"/>
+          <p:nvPr/>
+        </p:nvSpPr>
+        <p:spPr>
+          <a:xfrm>
+            <a:off x="11247120" y="6601968"/>
+            <a:ext cx="594360" cy="219456"/>
+          </a:xfrm>
+          <a:prstGeom prst="rect">
+            <a:avLst/>
+          </a:prstGeom>
+          <a:noFill/>
+          <a:ln/>
+        </p:spPr>
+        <p:txBody>
+          <a:bodyPr wrap="square" lIns="0" tIns="0" rIns="0" bIns="0" rtlCol="0" anchor="ctr"/>
+          <a:lstStyle/>
+          <a:p>
+            <a:pPr algn="r" indent="0" marL="0">
+              <a:buNone/>
+            </a:pPr>
+            <a:r>
+              <a:rPr lang="en-US" sz="800" dirty="0">
+                <a:solidFill>
+                  <a:srgbClr val="5B6472"/>
+                </a:solidFill>
+                <a:latin typeface="Arial" pitchFamily="34" charset="0"/>
+                <a:ea typeface="Arial" pitchFamily="34" charset="-122"/>
+                <a:cs typeface="Arial" pitchFamily="34" charset="-120"/>
+              </a:rPr>
+              <a:t>10 / 10</a:t>
             </a:r>
             <a:endParaRPr lang="en-US" sz="800" dirty="0"/>
           </a:p>
@@ -4194,7 +6773,7 @@
                 <a:ea typeface="Arial" pitchFamily="34" charset="-122"/>
                 <a:cs typeface="Arial" pitchFamily="34" charset="-120"/>
               </a:rPr>
-              <a:t>2 / 9</a:t>
+              <a:t>2 / 10</a:t>
             </a:r>
             <a:endParaRPr lang="en-US" sz="800" dirty="0"/>
           </a:p>
@@ -6445,7 +9024,7 @@
                 <a:ea typeface="Arial" pitchFamily="34" charset="-122"/>
                 <a:cs typeface="Arial" pitchFamily="34" charset="-120"/>
               </a:rPr>
-              <a:t>3 / 9</a:t>
+              <a:t>3 / 10</a:t>
             </a:r>
             <a:endParaRPr lang="en-US" sz="800" dirty="0"/>
           </a:p>
@@ -8878,7 +11457,7 @@
                 <a:ea typeface="Arial" pitchFamily="34" charset="-122"/>
                 <a:cs typeface="Arial" pitchFamily="34" charset="-120"/>
               </a:rPr>
-              <a:t>4 / 9</a:t>
+              <a:t>4 / 10</a:t>
             </a:r>
             <a:endParaRPr lang="en-US" sz="800" dirty="0"/>
           </a:p>
@@ -13484,7 +16063,7 @@
                 <a:ea typeface="Arial" pitchFamily="34" charset="-122"/>
                 <a:cs typeface="Arial" pitchFamily="34" charset="-120"/>
               </a:rPr>
-              <a:t>5 / 9</a:t>
+              <a:t>5 / 10</a:t>
             </a:r>
             <a:endParaRPr lang="en-US" sz="800" dirty="0"/>
           </a:p>
@@ -13883,7 +16462,7 @@
                 <a:ea typeface="Arial" pitchFamily="34" charset="-122"/>
                 <a:cs typeface="Arial" pitchFamily="34" charset="-120"/>
               </a:rPr>
-              <a:t>Read the claim and classify it
+              <a:t>Detect failed EASY → IDB imports
 </a:t>
             </a:r>
             <a:endParaRPr lang="en-US" sz="920" dirty="0"/>
@@ -13904,7 +16483,7 @@
                 <a:ea typeface="Arial" pitchFamily="34" charset="-122"/>
                 <a:cs typeface="Arial" pitchFamily="34" charset="-120"/>
               </a:rPr>
-              <a:t>ends the one-person dependency on teeth claims</a:t>
+              <a:t>nobody is alerted today — a claim can go missing unseen</a:t>
             </a:r>
             <a:endParaRPr lang="en-US" sz="920" dirty="0"/>
           </a:p>
@@ -13973,7 +16552,7 @@
                 <a:ea typeface="Arial" pitchFamily="34" charset="-122"/>
                 <a:cs typeface="Arial" pitchFamily="34" charset="-120"/>
               </a:rPr>
-              <a:t>Check CPR, policy and duplicates
+              <a:t>Read, classify, check CPR and policy
 </a:t>
             </a:r>
             <a:endParaRPr lang="en-US" sz="920" dirty="0"/>
@@ -13994,7 +16573,7 @@
                 <a:ea typeface="Arial" pitchFamily="34" charset="-122"/>
                 <a:cs typeface="Arial" pitchFamily="34" charset="-120"/>
               </a:rPr>
-              <a:t>plain rules, no AI model</a:t>
+              <a:t>one agent plus plain rules — ends the teeth dependency</a:t>
             </a:r>
             <a:endParaRPr lang="en-US" sz="920" dirty="0"/>
           </a:p>
@@ -14341,7 +16920,7 @@
                 <a:ea typeface="Arial" pitchFamily="34" charset="-122"/>
                 <a:cs typeface="Arial" pitchFamily="34" charset="-120"/>
               </a:rPr>
-              <a:t>FIX WHEN CONVENIENT</a:t>
+              <a:t>THEN FIX THE IMPORT ITSELF</a:t>
             </a:r>
             <a:endParaRPr lang="en-US" sz="1000" dirty="0"/>
           </a:p>
@@ -14380,7 +16959,7 @@
                 <a:ea typeface="Arial" pitchFamily="34" charset="-122"/>
                 <a:cs typeface="Arial" pitchFamily="34" charset="-120"/>
               </a:rPr>
-              <a:t>worth doing, but it is an IT defect</a:t>
+              <a:t>an IT defect, once you can see it</a:t>
             </a:r>
             <a:endParaRPr lang="en-US" sz="800" dirty="0"/>
           </a:p>
@@ -14449,7 +17028,7 @@
                 <a:ea typeface="Arial" pitchFamily="34" charset="-122"/>
                 <a:cs typeface="Arial" pitchFamily="34" charset="-120"/>
               </a:rPr>
-              <a:t>EASY → IDB import retries
+              <a:t>Retry, park and replay
 </a:t>
             </a:r>
             <a:endParaRPr lang="en-US" sz="920" dirty="0"/>
@@ -14470,7 +17049,7 @@
                 <a:ea typeface="Arial" pitchFamily="34" charset="-122"/>
                 <a:cs typeface="Arial" pitchFamily="34" charset="-120"/>
               </a:rPr>
-              <a:t>an integration bug, not an AI job</a:t>
+              <a:t>detection first — you cannot fix what nobody reports</a:t>
             </a:r>
             <a:endParaRPr lang="en-US" sz="920" dirty="0"/>
           </a:p>
@@ -14729,7 +17308,7 @@
                 <a:ea typeface="Arial" pitchFamily="34" charset="-122"/>
                 <a:cs typeface="Arial" pitchFamily="34" charset="-120"/>
               </a:rPr>
-              <a:t>FIXING THE IMPORT FAILURES</a:t>
+              <a:t>THE IMPORT FAILURES</a:t>
             </a:r>
             <a:endParaRPr lang="en-US" sz="900" dirty="0"/>
           </a:p>
@@ -14744,7 +17323,7 @@
         <p:spPr>
           <a:xfrm>
             <a:off x="9390888" y="1298448"/>
-            <a:ext cx="2231136" cy="329184"/>
+            <a:ext cx="2231136" cy="365760"/>
           </a:xfrm>
           <a:prstGeom prst="rect">
             <a:avLst/>
@@ -14771,7 +17350,7 @@
                 <a:ea typeface="Arial" pitchFamily="34" charset="-122"/>
                 <a:cs typeface="Arial" pitchFamily="34" charset="-120"/>
               </a:rPr>
-              <a:t>The one item that is not an AI problem. How it is actually fixed:</a:t>
+              <a:t>GGW confirm these are not noticed today. That makes detection the first fix, not retries:</a:t>
             </a:r>
             <a:endParaRPr lang="en-US" sz="800" dirty="0"/>
           </a:p>
@@ -14785,7 +17364,7 @@
         </p:nvSpPr>
         <p:spPr>
           <a:xfrm>
-            <a:off x="9390888" y="1755648"/>
+            <a:off x="9390888" y="1719072"/>
             <a:ext cx="2231136" cy="182880"/>
           </a:xfrm>
           <a:prstGeom prst="rect">
@@ -14810,7 +17389,7 @@
                 <a:ea typeface="Arial" pitchFamily="34" charset="-122"/>
                 <a:cs typeface="Arial" pitchFamily="34" charset="-120"/>
               </a:rPr>
-              <a:t>Sort the failure first</a:t>
+              <a:t>Count what should have arrived</a:t>
             </a:r>
             <a:endParaRPr lang="en-US" sz="840" dirty="0"/>
           </a:p>
@@ -14824,8 +17403,8 @@
         </p:nvSpPr>
         <p:spPr>
           <a:xfrm>
-            <a:off x="9390888" y="1929384"/>
-            <a:ext cx="2231136" cy="512064"/>
+            <a:off x="9390888" y="1883664"/>
+            <a:ext cx="2231136" cy="420624"/>
           </a:xfrm>
           <a:prstGeom prst="rect">
             <a:avLst/>
@@ -14852,7 +17431,7 @@
                 <a:ea typeface="Arial" pitchFamily="34" charset="-122"/>
                 <a:cs typeface="Arial" pitchFamily="34" charset="-120"/>
               </a:rPr>
-              <a:t>A timeout is worth retrying. A missing field never is — retrying it just fails again.</a:t>
+              <a:t>Reconcile EASY sends against IDB claims daily. A gap is a lost claim nobody sees.</a:t>
             </a:r>
             <a:endParaRPr lang="en-US" sz="760" dirty="0"/>
           </a:p>
@@ -14866,7 +17445,7 @@
         </p:nvSpPr>
         <p:spPr>
           <a:xfrm>
-            <a:off x="9390888" y="2478024"/>
+            <a:off x="9390888" y="2322576"/>
             <a:ext cx="2231136" cy="182880"/>
           </a:xfrm>
           <a:prstGeom prst="rect">
@@ -14891,7 +17470,7 @@
                 <a:ea typeface="Arial" pitchFamily="34" charset="-122"/>
                 <a:cs typeface="Arial" pitchFamily="34" charset="-120"/>
               </a:rPr>
-              <a:t>Retry with growing gaps</a:t>
+              <a:t>Sort the failure</a:t>
             </a:r>
             <a:endParaRPr lang="en-US" sz="840" dirty="0"/>
           </a:p>
@@ -14905,8 +17484,8 @@
         </p:nvSpPr>
         <p:spPr>
           <a:xfrm>
-            <a:off x="9390888" y="2651760"/>
-            <a:ext cx="2231136" cy="512064"/>
+            <a:off x="9390888" y="2487168"/>
+            <a:ext cx="2231136" cy="420624"/>
           </a:xfrm>
           <a:prstGeom prst="rect">
             <a:avLst/>
@@ -14933,7 +17512,7 @@
                 <a:ea typeface="Arial" pitchFamily="34" charset="-122"/>
                 <a:cs typeface="Arial" pitchFamily="34" charset="-120"/>
               </a:rPr>
-              <a:t>1s, 2s, 4s, plus a random offset, so 50 stuck claims do not all retry at once.</a:t>
+              <a:t>A timeout is worth retrying. A missing field never is — it just fails again.</a:t>
             </a:r>
             <a:endParaRPr lang="en-US" sz="760" dirty="0"/>
           </a:p>
@@ -14947,7 +17526,7 @@
         </p:nvSpPr>
         <p:spPr>
           <a:xfrm>
-            <a:off x="9390888" y="3200400"/>
+            <a:off x="9390888" y="2926080"/>
             <a:ext cx="2231136" cy="182880"/>
           </a:xfrm>
           <a:prstGeom prst="rect">
@@ -14972,7 +17551,7 @@
                 <a:ea typeface="Arial" pitchFamily="34" charset="-122"/>
                 <a:cs typeface="Arial" pitchFamily="34" charset="-120"/>
               </a:rPr>
-              <a:t>One reference per claim</a:t>
+              <a:t>Retry with growing gaps</a:t>
             </a:r>
             <a:endParaRPr lang="en-US" sz="840" dirty="0"/>
           </a:p>
@@ -14986,8 +17565,8 @@
         </p:nvSpPr>
         <p:spPr>
           <a:xfrm>
-            <a:off x="9390888" y="3374136"/>
-            <a:ext cx="2231136" cy="512064"/>
+            <a:off x="9390888" y="3090672"/>
+            <a:ext cx="2231136" cy="420624"/>
           </a:xfrm>
           <a:prstGeom prst="rect">
             <a:avLst/>
@@ -15014,7 +17593,7 @@
                 <a:ea typeface="Arial" pitchFamily="34" charset="-122"/>
                 <a:cs typeface="Arial" pitchFamily="34" charset="-120"/>
               </a:rPr>
-              <a:t>The same key on every attempt, so a replay cannot create the claim twice.</a:t>
+              <a:t>1s, 2s, 4s, plus a random offset, so stuck claims do not all retry at once.</a:t>
             </a:r>
             <a:endParaRPr lang="en-US" sz="760" dirty="0"/>
           </a:p>
@@ -15028,7 +17607,7 @@
         </p:nvSpPr>
         <p:spPr>
           <a:xfrm>
-            <a:off x="9390888" y="3922776"/>
+            <a:off x="9390888" y="3529584"/>
             <a:ext cx="2231136" cy="182880"/>
           </a:xfrm>
           <a:prstGeom prst="rect">
@@ -15053,7 +17632,7 @@
                 <a:ea typeface="Arial" pitchFamily="34" charset="-122"/>
                 <a:cs typeface="Arial" pitchFamily="34" charset="-120"/>
               </a:rPr>
-              <a:t>Park failures, never drop them</a:t>
+              <a:t>One reference per claim</a:t>
             </a:r>
             <a:endParaRPr lang="en-US" sz="840" dirty="0"/>
           </a:p>
@@ -15067,8 +17646,8 @@
         </p:nvSpPr>
         <p:spPr>
           <a:xfrm>
-            <a:off x="9390888" y="4096512"/>
-            <a:ext cx="2231136" cy="512064"/>
+            <a:off x="9390888" y="3694176"/>
+            <a:ext cx="2231136" cy="420624"/>
           </a:xfrm>
           <a:prstGeom prst="rect">
             <a:avLst/>
@@ -15095,7 +17674,7 @@
                 <a:ea typeface="Arial" pitchFamily="34" charset="-122"/>
                 <a:cs typeface="Arial" pitchFamily="34" charset="-120"/>
               </a:rPr>
-              <a:t>They go to a holding queue with the error, so someone can fix and replay.</a:t>
+              <a:t>The same key every attempt, so a replay cannot create the claim twice.</a:t>
             </a:r>
             <a:endParaRPr lang="en-US" sz="760" dirty="0"/>
           </a:p>
@@ -15109,7 +17688,7 @@
         </p:nvSpPr>
         <p:spPr>
           <a:xfrm>
-            <a:off x="9390888" y="4645152"/>
+            <a:off x="9390888" y="4133088"/>
             <a:ext cx="2231136" cy="182880"/>
           </a:xfrm>
           <a:prstGeom prst="rect">
@@ -15134,7 +17713,7 @@
                 <a:ea typeface="Arial" pitchFamily="34" charset="-122"/>
                 <a:cs typeface="Arial" pitchFamily="34" charset="-120"/>
               </a:rPr>
-              <a:t>Alert on the rate, not the count</a:t>
+              <a:t>Park failures, never drop them</a:t>
             </a:r>
             <a:endParaRPr lang="en-US" sz="840" dirty="0"/>
           </a:p>
@@ -15148,8 +17727,8 @@
         </p:nvSpPr>
         <p:spPr>
           <a:xfrm>
-            <a:off x="9390888" y="4818888"/>
-            <a:ext cx="2231136" cy="512064"/>
+            <a:off x="9390888" y="4297680"/>
+            <a:ext cx="2231136" cy="420624"/>
           </a:xfrm>
           <a:prstGeom prst="rect">
             <a:avLst/>
@@ -15176,7 +17755,7 @@
                 <a:ea typeface="Arial" pitchFamily="34" charset="-122"/>
                 <a:cs typeface="Arial" pitchFamily="34" charset="-120"/>
               </a:rPr>
-              <a:t>One stuck claim is normal. Twenty in an hour means something broke.</a:t>
+              <a:t>A holding queue with the error, so someone can fix and replay.</a:t>
             </a:r>
             <a:endParaRPr lang="en-US" sz="760" dirty="0"/>
           </a:p>
@@ -15185,6 +17764,87 @@
       <p:sp>
         <p:nvSpPr>
           <p:cNvPr id="44" name="Text 42"/>
+          <p:cNvSpPr txBox="1"/>
+          <p:nvPr/>
+        </p:nvSpPr>
+        <p:spPr>
+          <a:xfrm>
+            <a:off x="9390888" y="4736592"/>
+            <a:ext cx="2231136" cy="182880"/>
+          </a:xfrm>
+          <a:prstGeom prst="rect">
+            <a:avLst/>
+          </a:prstGeom>
+          <a:noFill/>
+          <a:ln/>
+        </p:spPr>
+        <p:txBody>
+          <a:bodyPr wrap="square" lIns="0" tIns="0" rIns="0" bIns="0" rtlCol="0" anchor="ctr"/>
+          <a:lstStyle/>
+          <a:p>
+            <a:pPr indent="0" marL="0">
+              <a:buNone/>
+            </a:pPr>
+            <a:r>
+              <a:rPr lang="en-US" sz="840" b="1" dirty="0">
+                <a:solidFill>
+                  <a:srgbClr val="2A2A3E"/>
+                </a:solidFill>
+                <a:latin typeface="Arial" pitchFamily="34" charset="0"/>
+                <a:ea typeface="Arial" pitchFamily="34" charset="-122"/>
+                <a:cs typeface="Arial" pitchFamily="34" charset="-120"/>
+              </a:rPr>
+              <a:t>Alert on the rate, not the count</a:t>
+            </a:r>
+            <a:endParaRPr lang="en-US" sz="840" dirty="0"/>
+          </a:p>
+        </p:txBody>
+      </p:sp>
+      <p:sp>
+        <p:nvSpPr>
+          <p:cNvPr id="45" name="Text 43"/>
+          <p:cNvSpPr txBox="1"/>
+          <p:nvPr/>
+        </p:nvSpPr>
+        <p:spPr>
+          <a:xfrm>
+            <a:off x="9390888" y="4901184"/>
+            <a:ext cx="2231136" cy="420624"/>
+          </a:xfrm>
+          <a:prstGeom prst="rect">
+            <a:avLst/>
+          </a:prstGeom>
+          <a:noFill/>
+          <a:ln/>
+        </p:spPr>
+        <p:txBody>
+          <a:bodyPr wrap="square" lIns="0" tIns="0" rIns="0" bIns="0" rtlCol="0" anchor="ctr"/>
+          <a:lstStyle/>
+          <a:p>
+            <a:pPr indent="0" marL="0">
+              <a:lnSpc>
+                <a:spcPct val="115000"/>
+              </a:lnSpc>
+              <a:buNone/>
+            </a:pPr>
+            <a:r>
+              <a:rPr lang="en-US" sz="760" dirty="0">
+                <a:solidFill>
+                  <a:srgbClr val="4A4A5E"/>
+                </a:solidFill>
+                <a:latin typeface="Arial" pitchFamily="34" charset="0"/>
+                <a:ea typeface="Arial" pitchFamily="34" charset="-122"/>
+                <a:cs typeface="Arial" pitchFamily="34" charset="-120"/>
+              </a:rPr>
+              <a:t>One stuck claim is normal. Twenty in an hour is not.</a:t>
+            </a:r>
+            <a:endParaRPr lang="en-US" sz="760" dirty="0"/>
+          </a:p>
+        </p:txBody>
+      </p:sp>
+      <p:sp>
+        <p:nvSpPr>
+          <p:cNvPr id="46" name="Text 44"/>
           <p:cNvSpPr txBox="1"/>
           <p:nvPr/>
         </p:nvSpPr>
@@ -15223,7 +17883,7 @@
       </p:sp>
       <p:sp>
         <p:nvSpPr>
-          <p:cNvPr id="45" name="Text 43"/>
+          <p:cNvPr id="47" name="Text 45"/>
           <p:cNvSpPr txBox="1"/>
           <p:nvPr/>
         </p:nvSpPr>
@@ -15262,7 +17922,7 @@
       </p:sp>
       <p:sp>
         <p:nvSpPr>
-          <p:cNvPr id="46" name="Text 44"/>
+          <p:cNvPr id="48" name="Text 46"/>
           <p:cNvSpPr txBox="1"/>
           <p:nvPr/>
         </p:nvSpPr>
@@ -15293,7 +17953,7 @@
                 <a:ea typeface="Arial" pitchFamily="34" charset="-122"/>
                 <a:cs typeface="Arial" pitchFamily="34" charset="-120"/>
               </a:rPr>
-              <a:t>6 / 9</a:t>
+              <a:t>6 / 10</a:t>
             </a:r>
             <a:endParaRPr lang="en-US" sz="800" dirty="0"/>
           </a:p>
@@ -17310,7 +19970,7 @@
                 <a:ea typeface="Arial" pitchFamily="34" charset="-122"/>
                 <a:cs typeface="Arial" pitchFamily="34" charset="-120"/>
               </a:rPr>
-              <a:t>7 / 9</a:t>
+              <a:t>7 / 10</a:t>
             </a:r>
             <a:endParaRPr lang="en-US" sz="800" dirty="0"/>
           </a:p>
@@ -17381,6 +20041,2194 @@
                 <a:ea typeface="Cambria" pitchFamily="34" charset="-122"/>
                 <a:cs typeface="Cambria" pitchFamily="34" charset="-120"/>
               </a:rPr>
+              <a:t>One typed state object moves through the graph — every node reads it, writes to it, and signs its work</a:t>
+            </a:r>
+            <a:endParaRPr lang="en-US" sz="1400" dirty="0"/>
+          </a:p>
+        </p:txBody>
+      </p:sp>
+      <p:sp>
+        <p:nvSpPr>
+          <p:cNvPr id="3" name="Text 1"/>
+          <p:cNvSpPr txBox="1"/>
+          <p:nvPr/>
+        </p:nvSpPr>
+        <p:spPr>
+          <a:xfrm>
+            <a:off x="8229600" y="146304"/>
+            <a:ext cx="3593592" cy="274320"/>
+          </a:xfrm>
+          <a:prstGeom prst="rect">
+            <a:avLst/>
+          </a:prstGeom>
+          <a:noFill/>
+          <a:ln/>
+        </p:spPr>
+        <p:txBody>
+          <a:bodyPr wrap="square" lIns="0" tIns="0" rIns="0" bIns="0" rtlCol="0" anchor="ctr"/>
+          <a:lstStyle/>
+          <a:p>
+            <a:pPr algn="r" indent="0" marL="0">
+              <a:buNone/>
+            </a:pPr>
+            <a:r>
+              <a:rPr lang="en-US" sz="950" b="1" spc="140" kern="0" dirty="0">
+                <a:solidFill>
+                  <a:srgbClr val="5B6472"/>
+                </a:solidFill>
+                <a:latin typeface="Arial" pitchFamily="34" charset="0"/>
+                <a:ea typeface="Arial" pitchFamily="34" charset="-122"/>
+                <a:cs typeface="Arial" pitchFamily="34" charset="-120"/>
+              </a:rPr>
+              <a:t>TECHNICAL IMPLEMENTATION</a:t>
+            </a:r>
+            <a:endParaRPr lang="en-US" sz="950" dirty="0"/>
+          </a:p>
+        </p:txBody>
+      </p:sp>
+      <p:sp>
+        <p:nvSpPr>
+          <p:cNvPr id="4" name="Text 2"/>
+          <p:cNvSpPr txBox="1"/>
+          <p:nvPr/>
+        </p:nvSpPr>
+        <p:spPr>
+          <a:xfrm>
+            <a:off x="365760" y="512064"/>
+            <a:ext cx="3840480" cy="219456"/>
+          </a:xfrm>
+          <a:prstGeom prst="rect">
+            <a:avLst/>
+          </a:prstGeom>
+          <a:noFill/>
+          <a:ln/>
+        </p:spPr>
+        <p:txBody>
+          <a:bodyPr wrap="square" lIns="0" tIns="0" rIns="0" bIns="0" rtlCol="0" anchor="ctr"/>
+          <a:lstStyle/>
+          <a:p>
+            <a:pPr indent="0" marL="0">
+              <a:buNone/>
+            </a:pPr>
+            <a:r>
+              <a:rPr lang="en-US" sz="900" b="1" spc="80" kern="0" dirty="0">
+                <a:solidFill>
+                  <a:srgbClr val="D97706"/>
+                </a:solidFill>
+                <a:latin typeface="Arial" pitchFamily="34" charset="0"/>
+                <a:ea typeface="Arial" pitchFamily="34" charset="-122"/>
+                <a:cs typeface="Arial" pitchFamily="34" charset="-120"/>
+              </a:rPr>
+              <a:t>A · THE CLAIM STATE — WHAT EVERY NODE SHARES</a:t>
+            </a:r>
+            <a:endParaRPr lang="en-US" sz="900" dirty="0"/>
+          </a:p>
+        </p:txBody>
+      </p:sp>
+      <p:sp>
+        <p:nvSpPr>
+          <p:cNvPr id="5" name="Shape 3"/>
+          <p:cNvSpPr/>
+          <p:nvPr/>
+        </p:nvSpPr>
+        <p:spPr>
+          <a:xfrm>
+            <a:off x="365760" y="768096"/>
+            <a:ext cx="3840480" cy="2395728"/>
+          </a:xfrm>
+          <a:prstGeom prst="roundRect">
+            <a:avLst>
+              <a:gd name="adj" fmla="val 1908"/>
+            </a:avLst>
+          </a:prstGeom>
+          <a:solidFill>
+            <a:srgbClr val="F2F1ED"/>
+          </a:solidFill>
+          <a:ln w="12700">
+            <a:solidFill>
+              <a:srgbClr val="D9D7D0"/>
+            </a:solidFill>
+            <a:prstDash val="solid"/>
+          </a:ln>
+        </p:spPr>
+      </p:sp>
+      <p:sp>
+        <p:nvSpPr>
+          <p:cNvPr id="6" name="Text 4"/>
+          <p:cNvSpPr txBox="1"/>
+          <p:nvPr/>
+        </p:nvSpPr>
+        <p:spPr>
+          <a:xfrm>
+            <a:off x="530352" y="859536"/>
+            <a:ext cx="3511296" cy="2231136"/>
+          </a:xfrm>
+          <a:prstGeom prst="rect">
+            <a:avLst/>
+          </a:prstGeom>
+          <a:noFill/>
+          <a:ln/>
+        </p:spPr>
+        <p:txBody>
+          <a:bodyPr wrap="square" lIns="0" tIns="0" rIns="0" bIns="0" rtlCol="0" anchor="ctr"/>
+          <a:lstStyle/>
+          <a:p>
+            <a:pPr indent="0" marL="0">
+              <a:lnSpc>
+                <a:spcPct val="118000"/>
+              </a:lnSpc>
+              <a:buNone/>
+            </a:pPr>
+            <a:r>
+              <a:rPr lang="en-US" sz="760" b="1" dirty="0">
+                <a:solidFill>
+                  <a:srgbClr val="1B2430"/>
+                </a:solidFill>
+                <a:latin typeface="Courier New" pitchFamily="34" charset="0"/>
+                <a:ea typeface="Courier New" pitchFamily="34" charset="-122"/>
+                <a:cs typeface="Courier New" pitchFamily="34" charset="-120"/>
+              </a:rPr>
+              <a:t>class ClaimState(BaseModel):
+</a:t>
+            </a:r>
+            <a:pPr indent="0" marL="0">
+              <a:lnSpc>
+                <a:spcPct val="118000"/>
+              </a:lnSpc>
+              <a:buNone/>
+            </a:pPr>
+            <a:r>
+              <a:rPr lang="en-US" sz="760" dirty="0">
+                <a:solidFill>
+                  <a:srgbClr val="3A4250"/>
+                </a:solidFill>
+                <a:latin typeface="Courier New" pitchFamily="34" charset="0"/>
+                <a:ea typeface="Courier New" pitchFamily="34" charset="-122"/>
+                <a:cs typeface="Courier New" pitchFamily="34" charset="-120"/>
+              </a:rPr>
+              <a:t>    claim_id: str
+    source: Literal["easy","aes","email"]
+    documents: list[BlobRef]
+</a:t>
+            </a:r>
+            <a:pPr indent="0" marL="0">
+              <a:lnSpc>
+                <a:spcPct val="118000"/>
+              </a:lnSpc>
+              <a:buNone/>
+            </a:pPr>
+            <a:r>
+              <a:rPr lang="en-US" sz="760" dirty="0">
+                <a:solidFill>
+                  <a:srgbClr val="3A4250"/>
+                </a:solidFill>
+                <a:latin typeface="Courier New" pitchFamily="34" charset="0"/>
+                <a:ea typeface="Courier New" pitchFamily="34" charset="-122"/>
+                <a:cs typeface="Courier New" pitchFamily="34" charset="-120"/>
+              </a:rPr>
+              <a:t>    fields: ExtractedFields          # typed, per-field
+    confidence: dict[str, float]   # per field
+</a:t>
+            </a:r>
+            <a:pPr indent="0" marL="0">
+              <a:lnSpc>
+                <a:spcPct val="118000"/>
+              </a:lnSpc>
+              <a:buNone/>
+            </a:pPr>
+            <a:r>
+              <a:rPr lang="en-US" sz="760" dirty="0">
+                <a:solidFill>
+                  <a:srgbClr val="3A4250"/>
+                </a:solidFill>
+                <a:latin typeface="Courier New" pitchFamily="34" charset="0"/>
+                <a:ea typeface="Courier New" pitchFamily="34" charset="-122"/>
+                <a:cs typeface="Courier New" pitchFamily="34" charset="-120"/>
+              </a:rPr>
+              <a:t>    claim_type: Literal["standard","teeth",
+                        "glasses","violence"]
+</a:t>
+            </a:r>
+            <a:pPr indent="0" marL="0">
+              <a:lnSpc>
+                <a:spcPct val="118000"/>
+              </a:lnSpc>
+              <a:buNone/>
+            </a:pPr>
+            <a:r>
+              <a:rPr lang="en-US" sz="760" dirty="0">
+                <a:solidFill>
+                  <a:srgbClr val="3A4250"/>
+                </a:solidFill>
+                <a:latin typeface="Courier New" pitchFamily="34" charset="0"/>
+                <a:ea typeface="Courier New" pitchFamily="34" charset="-122"/>
+                <a:cs typeface="Courier New" pitchFamily="34" charset="-120"/>
+              </a:rPr>
+              <a:t>    coverage: CoverageResult | None
+    exceptions: list[Exception]
+    drafts: list[Draft]
+</a:t>
+            </a:r>
+            <a:pPr indent="0" marL="0">
+              <a:lnSpc>
+                <a:spcPct val="118000"/>
+              </a:lnSpc>
+              <a:buNone/>
+            </a:pPr>
+            <a:r>
+              <a:rPr lang="en-US" sz="760" dirty="0">
+                <a:solidFill>
+                  <a:srgbClr val="6B4A10"/>
+                </a:solidFill>
+                <a:latin typeface="Courier New" pitchFamily="34" charset="0"/>
+                <a:ea typeface="Courier New" pitchFamily="34" charset="-122"/>
+                <a:cs typeface="Courier New" pitchFamily="34" charset="-120"/>
+              </a:rPr>
+              <a:t>    audit: list[NodeRun]             # who did what, when
+</a:t>
+            </a:r>
+            <a:endParaRPr lang="en-US" sz="760" dirty="0"/>
+          </a:p>
+        </p:txBody>
+      </p:sp>
+      <p:sp>
+        <p:nvSpPr>
+          <p:cNvPr id="7" name="Text 5"/>
+          <p:cNvSpPr txBox="1"/>
+          <p:nvPr/>
+        </p:nvSpPr>
+        <p:spPr>
+          <a:xfrm>
+            <a:off x="365760" y="3218688"/>
+            <a:ext cx="3840480" cy="365760"/>
+          </a:xfrm>
+          <a:prstGeom prst="rect">
+            <a:avLst/>
+          </a:prstGeom>
+          <a:noFill/>
+          <a:ln/>
+        </p:spPr>
+        <p:txBody>
+          <a:bodyPr wrap="square" lIns="0" tIns="0" rIns="0" bIns="0" rtlCol="0" anchor="ctr"/>
+          <a:lstStyle/>
+          <a:p>
+            <a:pPr indent="0" marL="0">
+              <a:lnSpc>
+                <a:spcPct val="115000"/>
+              </a:lnSpc>
+              <a:buNone/>
+            </a:pPr>
+            <a:r>
+              <a:rPr lang="en-US" sz="760" i="1" dirty="0">
+                <a:solidFill>
+                  <a:srgbClr val="6A6A6A"/>
+                </a:solidFill>
+                <a:latin typeface="Arial" pitchFamily="34" charset="0"/>
+                <a:ea typeface="Arial" pitchFamily="34" charset="-122"/>
+                <a:cs typeface="Arial" pitchFamily="34" charset="-120"/>
+              </a:rPr>
+              <a:t>Pydantic types are the contract, and confidence is held per field rather than per claim. A node that cannot produce a valid field returns null plus a reason — it never guesses to satisfy a schema.</a:t>
+            </a:r>
+            <a:endParaRPr lang="en-US" sz="760" dirty="0"/>
+          </a:p>
+        </p:txBody>
+      </p:sp>
+      <p:sp>
+        <p:nvSpPr>
+          <p:cNvPr id="8" name="Text 6"/>
+          <p:cNvSpPr txBox="1"/>
+          <p:nvPr/>
+        </p:nvSpPr>
+        <p:spPr>
+          <a:xfrm>
+            <a:off x="4389120" y="512064"/>
+            <a:ext cx="3657600" cy="219456"/>
+          </a:xfrm>
+          <a:prstGeom prst="rect">
+            <a:avLst/>
+          </a:prstGeom>
+          <a:noFill/>
+          <a:ln/>
+        </p:spPr>
+        <p:txBody>
+          <a:bodyPr wrap="square" lIns="0" tIns="0" rIns="0" bIns="0" rtlCol="0" anchor="ctr"/>
+          <a:lstStyle/>
+          <a:p>
+            <a:pPr indent="0" marL="0">
+              <a:buNone/>
+            </a:pPr>
+            <a:r>
+              <a:rPr lang="en-US" sz="900" b="1" spc="80" kern="0" dirty="0">
+                <a:solidFill>
+                  <a:srgbClr val="0891B2"/>
+                </a:solidFill>
+                <a:latin typeface="Arial" pitchFamily="34" charset="0"/>
+                <a:ea typeface="Arial" pitchFamily="34" charset="-122"/>
+                <a:cs typeface="Arial" pitchFamily="34" charset="-120"/>
+              </a:rPr>
+              <a:t>B · THE STACK, AND WHY EACH PIECE</a:t>
+            </a:r>
+            <a:endParaRPr lang="en-US" sz="900" dirty="0"/>
+          </a:p>
+        </p:txBody>
+      </p:sp>
+      <p:sp>
+        <p:nvSpPr>
+          <p:cNvPr id="9" name="Shape 7"/>
+          <p:cNvSpPr/>
+          <p:nvPr/>
+        </p:nvSpPr>
+        <p:spPr>
+          <a:xfrm>
+            <a:off x="4389120" y="804672"/>
+            <a:ext cx="36576" cy="347472"/>
+          </a:xfrm>
+          <a:prstGeom prst="rect">
+            <a:avLst/>
+          </a:prstGeom>
+          <a:solidFill>
+            <a:srgbClr val="0891B2"/>
+          </a:solidFill>
+          <a:ln/>
+        </p:spPr>
+      </p:sp>
+      <p:sp>
+        <p:nvSpPr>
+          <p:cNvPr id="10" name="Text 8"/>
+          <p:cNvSpPr txBox="1"/>
+          <p:nvPr/>
+        </p:nvSpPr>
+        <p:spPr>
+          <a:xfrm>
+            <a:off x="4517136" y="786384"/>
+            <a:ext cx="3529584" cy="164592"/>
+          </a:xfrm>
+          <a:prstGeom prst="rect">
+            <a:avLst/>
+          </a:prstGeom>
+          <a:noFill/>
+          <a:ln/>
+        </p:spPr>
+        <p:txBody>
+          <a:bodyPr wrap="square" lIns="0" tIns="0" rIns="0" bIns="0" rtlCol="0" anchor="ctr"/>
+          <a:lstStyle/>
+          <a:p>
+            <a:pPr indent="0" marL="0">
+              <a:buNone/>
+            </a:pPr>
+            <a:r>
+              <a:rPr lang="en-US" sz="840" b="1" dirty="0">
+                <a:solidFill>
+                  <a:srgbClr val="1B2430"/>
+                </a:solidFill>
+                <a:latin typeface="Arial" pitchFamily="34" charset="0"/>
+                <a:ea typeface="Arial" pitchFamily="34" charset="-122"/>
+                <a:cs typeface="Arial" pitchFamily="34" charset="-120"/>
+              </a:rPr>
+              <a:t>LangGraph  ·  Python</a:t>
+            </a:r>
+            <a:endParaRPr lang="en-US" sz="840" dirty="0"/>
+          </a:p>
+        </p:txBody>
+      </p:sp>
+      <p:sp>
+        <p:nvSpPr>
+          <p:cNvPr id="11" name="Text 9"/>
+          <p:cNvSpPr txBox="1"/>
+          <p:nvPr/>
+        </p:nvSpPr>
+        <p:spPr>
+          <a:xfrm>
+            <a:off x="4517136" y="941832"/>
+            <a:ext cx="3529584" cy="310896"/>
+          </a:xfrm>
+          <a:prstGeom prst="rect">
+            <a:avLst/>
+          </a:prstGeom>
+          <a:noFill/>
+          <a:ln/>
+        </p:spPr>
+        <p:txBody>
+          <a:bodyPr wrap="square" lIns="0" tIns="0" rIns="0" bIns="0" rtlCol="0" anchor="ctr"/>
+          <a:lstStyle/>
+          <a:p>
+            <a:pPr indent="0" marL="0">
+              <a:lnSpc>
+                <a:spcPct val="112000"/>
+              </a:lnSpc>
+              <a:buNone/>
+            </a:pPr>
+            <a:r>
+              <a:rPr lang="en-US" sz="760" dirty="0">
+                <a:solidFill>
+                  <a:srgbClr val="5A5A5A"/>
+                </a:solidFill>
+                <a:latin typeface="Arial" pitchFamily="34" charset="0"/>
+                <a:ea typeface="Arial" pitchFamily="34" charset="-122"/>
+                <a:cs typeface="Arial" pitchFamily="34" charset="-120"/>
+              </a:rPr>
+              <a:t>Nodes are the agents, conditional edges are the decision diamonds on slides 2–4. The diagram is the code.</a:t>
+            </a:r>
+            <a:endParaRPr lang="en-US" sz="760" dirty="0"/>
+          </a:p>
+        </p:txBody>
+      </p:sp>
+      <p:sp>
+        <p:nvSpPr>
+          <p:cNvPr id="12" name="Shape 10"/>
+          <p:cNvSpPr/>
+          <p:nvPr/>
+        </p:nvSpPr>
+        <p:spPr>
+          <a:xfrm>
+            <a:off x="4389120" y="1293876"/>
+            <a:ext cx="36576" cy="347472"/>
+          </a:xfrm>
+          <a:prstGeom prst="rect">
+            <a:avLst/>
+          </a:prstGeom>
+          <a:solidFill>
+            <a:srgbClr val="0891B2"/>
+          </a:solidFill>
+          <a:ln/>
+        </p:spPr>
+      </p:sp>
+      <p:sp>
+        <p:nvSpPr>
+          <p:cNvPr id="13" name="Text 11"/>
+          <p:cNvSpPr txBox="1"/>
+          <p:nvPr/>
+        </p:nvSpPr>
+        <p:spPr>
+          <a:xfrm>
+            <a:off x="4517136" y="1275588"/>
+            <a:ext cx="3529584" cy="164592"/>
+          </a:xfrm>
+          <a:prstGeom prst="rect">
+            <a:avLst/>
+          </a:prstGeom>
+          <a:noFill/>
+          <a:ln/>
+        </p:spPr>
+        <p:txBody>
+          <a:bodyPr wrap="square" lIns="0" tIns="0" rIns="0" bIns="0" rtlCol="0" anchor="ctr"/>
+          <a:lstStyle/>
+          <a:p>
+            <a:pPr indent="0" marL="0">
+              <a:buNone/>
+            </a:pPr>
+            <a:r>
+              <a:rPr lang="en-US" sz="840" b="1" dirty="0">
+                <a:solidFill>
+                  <a:srgbClr val="1B2430"/>
+                </a:solidFill>
+                <a:latin typeface="Arial" pitchFamily="34" charset="0"/>
+                <a:ea typeface="Arial" pitchFamily="34" charset="-122"/>
+                <a:cs typeface="Arial" pitchFamily="34" charset="-120"/>
+              </a:rPr>
+              <a:t>Pydantic</a:t>
+            </a:r>
+            <a:endParaRPr lang="en-US" sz="840" dirty="0"/>
+          </a:p>
+        </p:txBody>
+      </p:sp>
+      <p:sp>
+        <p:nvSpPr>
+          <p:cNvPr id="14" name="Text 12"/>
+          <p:cNvSpPr txBox="1"/>
+          <p:nvPr/>
+        </p:nvSpPr>
+        <p:spPr>
+          <a:xfrm>
+            <a:off x="4517136" y="1431036"/>
+            <a:ext cx="3529584" cy="310896"/>
+          </a:xfrm>
+          <a:prstGeom prst="rect">
+            <a:avLst/>
+          </a:prstGeom>
+          <a:noFill/>
+          <a:ln/>
+        </p:spPr>
+        <p:txBody>
+          <a:bodyPr wrap="square" lIns="0" tIns="0" rIns="0" bIns="0" rtlCol="0" anchor="ctr"/>
+          <a:lstStyle/>
+          <a:p>
+            <a:pPr indent="0" marL="0">
+              <a:lnSpc>
+                <a:spcPct val="112000"/>
+              </a:lnSpc>
+              <a:buNone/>
+            </a:pPr>
+            <a:r>
+              <a:rPr lang="en-US" sz="760" dirty="0">
+                <a:solidFill>
+                  <a:srgbClr val="5A5A5A"/>
+                </a:solidFill>
+                <a:latin typeface="Arial" pitchFamily="34" charset="0"/>
+                <a:ea typeface="Arial" pitchFamily="34" charset="-122"/>
+                <a:cs typeface="Arial" pitchFamily="34" charset="-120"/>
+              </a:rPr>
+              <a:t>Typed state. Schema violations fail loudly at the node, not silently downstream.</a:t>
+            </a:r>
+            <a:endParaRPr lang="en-US" sz="760" dirty="0"/>
+          </a:p>
+        </p:txBody>
+      </p:sp>
+      <p:sp>
+        <p:nvSpPr>
+          <p:cNvPr id="15" name="Shape 13"/>
+          <p:cNvSpPr/>
+          <p:nvPr/>
+        </p:nvSpPr>
+        <p:spPr>
+          <a:xfrm>
+            <a:off x="4389120" y="1783080"/>
+            <a:ext cx="36576" cy="347472"/>
+          </a:xfrm>
+          <a:prstGeom prst="rect">
+            <a:avLst/>
+          </a:prstGeom>
+          <a:solidFill>
+            <a:srgbClr val="0891B2"/>
+          </a:solidFill>
+          <a:ln/>
+        </p:spPr>
+      </p:sp>
+      <p:sp>
+        <p:nvSpPr>
+          <p:cNvPr id="16" name="Text 14"/>
+          <p:cNvSpPr txBox="1"/>
+          <p:nvPr/>
+        </p:nvSpPr>
+        <p:spPr>
+          <a:xfrm>
+            <a:off x="4517136" y="1764792"/>
+            <a:ext cx="3529584" cy="164592"/>
+          </a:xfrm>
+          <a:prstGeom prst="rect">
+            <a:avLst/>
+          </a:prstGeom>
+          <a:noFill/>
+          <a:ln/>
+        </p:spPr>
+        <p:txBody>
+          <a:bodyPr wrap="square" lIns="0" tIns="0" rIns="0" bIns="0" rtlCol="0" anchor="ctr"/>
+          <a:lstStyle/>
+          <a:p>
+            <a:pPr indent="0" marL="0">
+              <a:buNone/>
+            </a:pPr>
+            <a:r>
+              <a:rPr lang="en-US" sz="840" b="1" dirty="0">
+                <a:solidFill>
+                  <a:srgbClr val="1B2430"/>
+                </a:solidFill>
+                <a:latin typeface="Arial" pitchFamily="34" charset="0"/>
+                <a:ea typeface="Arial" pitchFamily="34" charset="-122"/>
+                <a:cs typeface="Arial" pitchFamily="34" charset="-120"/>
+              </a:rPr>
+              <a:t>PostgreSQL</a:t>
+            </a:r>
+            <a:endParaRPr lang="en-US" sz="840" dirty="0"/>
+          </a:p>
+        </p:txBody>
+      </p:sp>
+      <p:sp>
+        <p:nvSpPr>
+          <p:cNvPr id="17" name="Text 15"/>
+          <p:cNvSpPr txBox="1"/>
+          <p:nvPr/>
+        </p:nvSpPr>
+        <p:spPr>
+          <a:xfrm>
+            <a:off x="4517136" y="1920240"/>
+            <a:ext cx="3529584" cy="310896"/>
+          </a:xfrm>
+          <a:prstGeom prst="rect">
+            <a:avLst/>
+          </a:prstGeom>
+          <a:noFill/>
+          <a:ln/>
+        </p:spPr>
+        <p:txBody>
+          <a:bodyPr wrap="square" lIns="0" tIns="0" rIns="0" bIns="0" rtlCol="0" anchor="ctr"/>
+          <a:lstStyle/>
+          <a:p>
+            <a:pPr indent="0" marL="0">
+              <a:lnSpc>
+                <a:spcPct val="112000"/>
+              </a:lnSpc>
+              <a:buNone/>
+            </a:pPr>
+            <a:r>
+              <a:rPr lang="en-US" sz="760" dirty="0">
+                <a:solidFill>
+                  <a:srgbClr val="5A5A5A"/>
+                </a:solidFill>
+                <a:latin typeface="Arial" pitchFamily="34" charset="0"/>
+                <a:ea typeface="Arial" pitchFamily="34" charset="-122"/>
+                <a:cs typeface="Arial" pitchFamily="34" charset="-120"/>
+              </a:rPr>
+              <a:t>LangGraph checkpointer plus the audit log. One store, so a claim's history and its state cannot drift apart.</a:t>
+            </a:r>
+            <a:endParaRPr lang="en-US" sz="760" dirty="0"/>
+          </a:p>
+        </p:txBody>
+      </p:sp>
+      <p:sp>
+        <p:nvSpPr>
+          <p:cNvPr id="18" name="Shape 16"/>
+          <p:cNvSpPr/>
+          <p:nvPr/>
+        </p:nvSpPr>
+        <p:spPr>
+          <a:xfrm>
+            <a:off x="4389120" y="2272284"/>
+            <a:ext cx="36576" cy="347472"/>
+          </a:xfrm>
+          <a:prstGeom prst="rect">
+            <a:avLst/>
+          </a:prstGeom>
+          <a:solidFill>
+            <a:srgbClr val="0891B2"/>
+          </a:solidFill>
+          <a:ln/>
+        </p:spPr>
+      </p:sp>
+      <p:sp>
+        <p:nvSpPr>
+          <p:cNvPr id="19" name="Text 17"/>
+          <p:cNvSpPr txBox="1"/>
+          <p:nvPr/>
+        </p:nvSpPr>
+        <p:spPr>
+          <a:xfrm>
+            <a:off x="4517136" y="2253996"/>
+            <a:ext cx="3529584" cy="164592"/>
+          </a:xfrm>
+          <a:prstGeom prst="rect">
+            <a:avLst/>
+          </a:prstGeom>
+          <a:noFill/>
+          <a:ln/>
+        </p:spPr>
+        <p:txBody>
+          <a:bodyPr wrap="square" lIns="0" tIns="0" rIns="0" bIns="0" rtlCol="0" anchor="ctr"/>
+          <a:lstStyle/>
+          <a:p>
+            <a:pPr indent="0" marL="0">
+              <a:buNone/>
+            </a:pPr>
+            <a:r>
+              <a:rPr lang="en-US" sz="840" b="1" dirty="0">
+                <a:solidFill>
+                  <a:srgbClr val="1B2430"/>
+                </a:solidFill>
+                <a:latin typeface="Arial" pitchFamily="34" charset="0"/>
+                <a:ea typeface="Arial" pitchFamily="34" charset="-122"/>
+                <a:cs typeface="Arial" pitchFamily="34" charset="-120"/>
+              </a:rPr>
+              <a:t>Azure Container Apps</a:t>
+            </a:r>
+            <a:endParaRPr lang="en-US" sz="840" dirty="0"/>
+          </a:p>
+        </p:txBody>
+      </p:sp>
+      <p:sp>
+        <p:nvSpPr>
+          <p:cNvPr id="20" name="Text 18"/>
+          <p:cNvSpPr txBox="1"/>
+          <p:nvPr/>
+        </p:nvSpPr>
+        <p:spPr>
+          <a:xfrm>
+            <a:off x="4517136" y="2409444"/>
+            <a:ext cx="3529584" cy="310896"/>
+          </a:xfrm>
+          <a:prstGeom prst="rect">
+            <a:avLst/>
+          </a:prstGeom>
+          <a:noFill/>
+          <a:ln/>
+        </p:spPr>
+        <p:txBody>
+          <a:bodyPr wrap="square" lIns="0" tIns="0" rIns="0" bIns="0" rtlCol="0" anchor="ctr"/>
+          <a:lstStyle/>
+          <a:p>
+            <a:pPr indent="0" marL="0">
+              <a:lnSpc>
+                <a:spcPct val="112000"/>
+              </a:lnSpc>
+              <a:buNone/>
+            </a:pPr>
+            <a:r>
+              <a:rPr lang="en-US" sz="760" dirty="0">
+                <a:solidFill>
+                  <a:srgbClr val="5A5A5A"/>
+                </a:solidFill>
+                <a:latin typeface="Arial" pitchFamily="34" charset="0"/>
+                <a:ea typeface="Arial" pitchFamily="34" charset="-122"/>
+                <a:cs typeface="Arial" pitchFamily="34" charset="-120"/>
+              </a:rPr>
+              <a:t>Two always-on for the API and worker, two scale-to-zero for burst. Cloud, as GGW deploy today.</a:t>
+            </a:r>
+            <a:endParaRPr lang="en-US" sz="760" dirty="0"/>
+          </a:p>
+        </p:txBody>
+      </p:sp>
+      <p:sp>
+        <p:nvSpPr>
+          <p:cNvPr id="21" name="Shape 19"/>
+          <p:cNvSpPr/>
+          <p:nvPr/>
+        </p:nvSpPr>
+        <p:spPr>
+          <a:xfrm>
+            <a:off x="4389120" y="2761488"/>
+            <a:ext cx="36576" cy="347472"/>
+          </a:xfrm>
+          <a:prstGeom prst="rect">
+            <a:avLst/>
+          </a:prstGeom>
+          <a:solidFill>
+            <a:srgbClr val="0891B2"/>
+          </a:solidFill>
+          <a:ln/>
+        </p:spPr>
+      </p:sp>
+      <p:sp>
+        <p:nvSpPr>
+          <p:cNvPr id="22" name="Text 20"/>
+          <p:cNvSpPr txBox="1"/>
+          <p:nvPr/>
+        </p:nvSpPr>
+        <p:spPr>
+          <a:xfrm>
+            <a:off x="4517136" y="2743200"/>
+            <a:ext cx="3529584" cy="164592"/>
+          </a:xfrm>
+          <a:prstGeom prst="rect">
+            <a:avLst/>
+          </a:prstGeom>
+          <a:noFill/>
+          <a:ln/>
+        </p:spPr>
+        <p:txBody>
+          <a:bodyPr wrap="square" lIns="0" tIns="0" rIns="0" bIns="0" rtlCol="0" anchor="ctr"/>
+          <a:lstStyle/>
+          <a:p>
+            <a:pPr indent="0" marL="0">
+              <a:buNone/>
+            </a:pPr>
+            <a:r>
+              <a:rPr lang="en-US" sz="840" b="1" dirty="0">
+                <a:solidFill>
+                  <a:srgbClr val="1B2430"/>
+                </a:solidFill>
+                <a:latin typeface="Arial" pitchFamily="34" charset="0"/>
+                <a:ea typeface="Arial" pitchFamily="34" charset="-122"/>
+                <a:cs typeface="Arial" pitchFamily="34" charset="-120"/>
+              </a:rPr>
+              <a:t>Azure Blob  ·  Key Vault</a:t>
+            </a:r>
+            <a:endParaRPr lang="en-US" sz="840" dirty="0"/>
+          </a:p>
+        </p:txBody>
+      </p:sp>
+      <p:sp>
+        <p:nvSpPr>
+          <p:cNvPr id="23" name="Text 21"/>
+          <p:cNvSpPr txBox="1"/>
+          <p:nvPr/>
+        </p:nvSpPr>
+        <p:spPr>
+          <a:xfrm>
+            <a:off x="4517136" y="2898648"/>
+            <a:ext cx="3529584" cy="310896"/>
+          </a:xfrm>
+          <a:prstGeom prst="rect">
+            <a:avLst/>
+          </a:prstGeom>
+          <a:noFill/>
+          <a:ln/>
+        </p:spPr>
+        <p:txBody>
+          <a:bodyPr wrap="square" lIns="0" tIns="0" rIns="0" bIns="0" rtlCol="0" anchor="ctr"/>
+          <a:lstStyle/>
+          <a:p>
+            <a:pPr indent="0" marL="0">
+              <a:lnSpc>
+                <a:spcPct val="112000"/>
+              </a:lnSpc>
+              <a:buNone/>
+            </a:pPr>
+            <a:r>
+              <a:rPr lang="en-US" sz="760" dirty="0">
+                <a:solidFill>
+                  <a:srgbClr val="5A5A5A"/>
+                </a:solidFill>
+                <a:latin typeface="Arial" pitchFamily="34" charset="0"/>
+                <a:ea typeface="Arial" pitchFamily="34" charset="-122"/>
+                <a:cs typeface="Arial" pitchFamily="34" charset="-120"/>
+              </a:rPr>
+              <a:t>Claim documents and secrets. Documents never enter a prompt as raw bytes — only extracted text.</a:t>
+            </a:r>
+            <a:endParaRPr lang="en-US" sz="760" dirty="0"/>
+          </a:p>
+        </p:txBody>
+      </p:sp>
+      <p:sp>
+        <p:nvSpPr>
+          <p:cNvPr id="24" name="Shape 22"/>
+          <p:cNvSpPr/>
+          <p:nvPr/>
+        </p:nvSpPr>
+        <p:spPr>
+          <a:xfrm>
+            <a:off x="4389120" y="3250692"/>
+            <a:ext cx="36576" cy="347472"/>
+          </a:xfrm>
+          <a:prstGeom prst="rect">
+            <a:avLst/>
+          </a:prstGeom>
+          <a:solidFill>
+            <a:srgbClr val="0891B2"/>
+          </a:solidFill>
+          <a:ln/>
+        </p:spPr>
+      </p:sp>
+      <p:sp>
+        <p:nvSpPr>
+          <p:cNvPr id="25" name="Text 23"/>
+          <p:cNvSpPr txBox="1"/>
+          <p:nvPr/>
+        </p:nvSpPr>
+        <p:spPr>
+          <a:xfrm>
+            <a:off x="4517136" y="3232404"/>
+            <a:ext cx="3529584" cy="164592"/>
+          </a:xfrm>
+          <a:prstGeom prst="rect">
+            <a:avLst/>
+          </a:prstGeom>
+          <a:noFill/>
+          <a:ln/>
+        </p:spPr>
+        <p:txBody>
+          <a:bodyPr wrap="square" lIns="0" tIns="0" rIns="0" bIns="0" rtlCol="0" anchor="ctr"/>
+          <a:lstStyle/>
+          <a:p>
+            <a:pPr indent="0" marL="0">
+              <a:buNone/>
+            </a:pPr>
+            <a:r>
+              <a:rPr lang="en-US" sz="840" b="1" dirty="0">
+                <a:solidFill>
+                  <a:srgbClr val="1B2430"/>
+                </a:solidFill>
+                <a:latin typeface="Arial" pitchFamily="34" charset="0"/>
+                <a:ea typeface="Arial" pitchFamily="34" charset="-122"/>
+                <a:cs typeface="Arial" pitchFamily="34" charset="-120"/>
+              </a:rPr>
+              <a:t>Azure OpenAI</a:t>
+            </a:r>
+            <a:endParaRPr lang="en-US" sz="840" dirty="0"/>
+          </a:p>
+        </p:txBody>
+      </p:sp>
+      <p:sp>
+        <p:nvSpPr>
+          <p:cNvPr id="26" name="Text 24"/>
+          <p:cNvSpPr txBox="1"/>
+          <p:nvPr/>
+        </p:nvSpPr>
+        <p:spPr>
+          <a:xfrm>
+            <a:off x="4517136" y="3387852"/>
+            <a:ext cx="3529584" cy="310896"/>
+          </a:xfrm>
+          <a:prstGeom prst="rect">
+            <a:avLst/>
+          </a:prstGeom>
+          <a:noFill/>
+          <a:ln/>
+        </p:spPr>
+        <p:txBody>
+          <a:bodyPr wrap="square" lIns="0" tIns="0" rIns="0" bIns="0" rtlCol="0" anchor="ctr"/>
+          <a:lstStyle/>
+          <a:p>
+            <a:pPr indent="0" marL="0">
+              <a:lnSpc>
+                <a:spcPct val="112000"/>
+              </a:lnSpc>
+              <a:buNone/>
+            </a:pPr>
+            <a:r>
+              <a:rPr lang="en-US" sz="760" dirty="0">
+                <a:solidFill>
+                  <a:srgbClr val="5A5A5A"/>
+                </a:solidFill>
+                <a:latin typeface="Arial" pitchFamily="34" charset="0"/>
+                <a:ea typeface="Arial" pitchFamily="34" charset="-122"/>
+                <a:cs typeface="Arial" pitchFamily="34" charset="-120"/>
+              </a:rPr>
+              <a:t>Same model tier throughout, pinned by version. EU region keeps claim data in-region.</a:t>
+            </a:r>
+            <a:endParaRPr lang="en-US" sz="760" dirty="0"/>
+          </a:p>
+        </p:txBody>
+      </p:sp>
+      <p:sp>
+        <p:nvSpPr>
+          <p:cNvPr id="27" name="Text 25"/>
+          <p:cNvSpPr txBox="1"/>
+          <p:nvPr/>
+        </p:nvSpPr>
+        <p:spPr>
+          <a:xfrm>
+            <a:off x="8229600" y="512064"/>
+            <a:ext cx="3593592" cy="219456"/>
+          </a:xfrm>
+          <a:prstGeom prst="rect">
+            <a:avLst/>
+          </a:prstGeom>
+          <a:noFill/>
+          <a:ln/>
+        </p:spPr>
+        <p:txBody>
+          <a:bodyPr wrap="square" lIns="0" tIns="0" rIns="0" bIns="0" rtlCol="0" anchor="ctr"/>
+          <a:lstStyle/>
+          <a:p>
+            <a:pPr indent="0" marL="0">
+              <a:buNone/>
+            </a:pPr>
+            <a:r>
+              <a:rPr lang="en-US" sz="840" b="1" spc="60" kern="0" dirty="0">
+                <a:solidFill>
+                  <a:srgbClr val="4338CA"/>
+                </a:solidFill>
+                <a:latin typeface="Arial" pitchFamily="34" charset="0"/>
+                <a:ea typeface="Arial" pitchFamily="34" charset="-122"/>
+                <a:cs typeface="Arial" pitchFamily="34" charset="-120"/>
+              </a:rPr>
+              <a:t>C · INTEGRATIONS — WHAT DECIDES THE TIMELINE</a:t>
+            </a:r>
+            <a:endParaRPr lang="en-US" sz="840" dirty="0"/>
+          </a:p>
+        </p:txBody>
+      </p:sp>
+      <p:sp>
+        <p:nvSpPr>
+          <p:cNvPr id="28" name="Text 26"/>
+          <p:cNvSpPr txBox="1"/>
+          <p:nvPr/>
+        </p:nvSpPr>
+        <p:spPr>
+          <a:xfrm>
+            <a:off x="8229600" y="786384"/>
+            <a:ext cx="3593592" cy="164592"/>
+          </a:xfrm>
+          <a:prstGeom prst="rect">
+            <a:avLst/>
+          </a:prstGeom>
+          <a:noFill/>
+          <a:ln/>
+        </p:spPr>
+        <p:txBody>
+          <a:bodyPr wrap="square" lIns="0" tIns="0" rIns="0" bIns="0" rtlCol="0" anchor="ctr"/>
+          <a:lstStyle/>
+          <a:p>
+            <a:pPr indent="0" marL="0">
+              <a:buNone/>
+            </a:pPr>
+            <a:r>
+              <a:rPr lang="en-US" sz="840" b="1" dirty="0">
+                <a:solidFill>
+                  <a:srgbClr val="1B2430"/>
+                </a:solidFill>
+                <a:latin typeface="Arial" pitchFamily="34" charset="0"/>
+                <a:ea typeface="Arial" pitchFamily="34" charset="-122"/>
+                <a:cs typeface="Arial" pitchFamily="34" charset="-120"/>
+              </a:rPr>
+              <a:t>EASY  </a:t>
+            </a:r>
+            <a:pPr indent="0" marL="0">
+              <a:buNone/>
+            </a:pPr>
+            <a:r>
+              <a:rPr lang="en-US" sz="700" b="1" dirty="0">
+                <a:solidFill>
+                  <a:srgbClr val="4338CA"/>
+                </a:solidFill>
+                <a:latin typeface="Arial" pitchFamily="34" charset="0"/>
+                <a:ea typeface="Arial" pitchFamily="34" charset="-122"/>
+                <a:cs typeface="Arial" pitchFamily="34" charset="-120"/>
+              </a:rPr>
+              <a:t>IN</a:t>
+            </a:r>
+            <a:endParaRPr lang="en-US" sz="840" dirty="0"/>
+          </a:p>
+        </p:txBody>
+      </p:sp>
+      <p:sp>
+        <p:nvSpPr>
+          <p:cNvPr id="29" name="Text 27"/>
+          <p:cNvSpPr txBox="1"/>
+          <p:nvPr/>
+        </p:nvSpPr>
+        <p:spPr>
+          <a:xfrm>
+            <a:off x="8229600" y="941832"/>
+            <a:ext cx="3593592" cy="384048"/>
+          </a:xfrm>
+          <a:prstGeom prst="rect">
+            <a:avLst/>
+          </a:prstGeom>
+          <a:noFill/>
+          <a:ln/>
+        </p:spPr>
+        <p:txBody>
+          <a:bodyPr wrap="square" lIns="0" tIns="0" rIns="0" bIns="0" rtlCol="0" anchor="ctr"/>
+          <a:lstStyle/>
+          <a:p>
+            <a:pPr indent="0" marL="0">
+              <a:lnSpc>
+                <a:spcPct val="112000"/>
+              </a:lnSpc>
+              <a:buNone/>
+            </a:pPr>
+            <a:r>
+              <a:rPr lang="en-US" sz="760" dirty="0">
+                <a:solidFill>
+                  <a:srgbClr val="5A5A5A"/>
+                </a:solidFill>
+                <a:latin typeface="Arial" pitchFamily="34" charset="0"/>
+                <a:ea typeface="Arial" pitchFamily="34" charset="-122"/>
+                <a:cs typeface="Arial" pitchFamily="34" charset="-120"/>
+              </a:rPr>
+              <a:t>Reuse the existing auto-import. We add the reconciliation that tells you when it failed.</a:t>
+            </a:r>
+            <a:endParaRPr lang="en-US" sz="760" dirty="0"/>
+          </a:p>
+        </p:txBody>
+      </p:sp>
+      <p:sp>
+        <p:nvSpPr>
+          <p:cNvPr id="30" name="Text 28"/>
+          <p:cNvSpPr txBox="1"/>
+          <p:nvPr/>
+        </p:nvSpPr>
+        <p:spPr>
+          <a:xfrm>
+            <a:off x="8229600" y="1362456"/>
+            <a:ext cx="3593592" cy="164592"/>
+          </a:xfrm>
+          <a:prstGeom prst="rect">
+            <a:avLst/>
+          </a:prstGeom>
+          <a:noFill/>
+          <a:ln/>
+        </p:spPr>
+        <p:txBody>
+          <a:bodyPr wrap="square" lIns="0" tIns="0" rIns="0" bIns="0" rtlCol="0" anchor="ctr"/>
+          <a:lstStyle/>
+          <a:p>
+            <a:pPr indent="0" marL="0">
+              <a:buNone/>
+            </a:pPr>
+            <a:r>
+              <a:rPr lang="en-US" sz="840" b="1" dirty="0">
+                <a:solidFill>
+                  <a:srgbClr val="1B2430"/>
+                </a:solidFill>
+                <a:latin typeface="Arial" pitchFamily="34" charset="0"/>
+                <a:ea typeface="Arial" pitchFamily="34" charset="-122"/>
+                <a:cs typeface="Arial" pitchFamily="34" charset="-120"/>
+              </a:rPr>
+              <a:t>AES secure mail  </a:t>
+            </a:r>
+            <a:pPr indent="0" marL="0">
+              <a:buNone/>
+            </a:pPr>
+            <a:r>
+              <a:rPr lang="en-US" sz="700" b="1" dirty="0">
+                <a:solidFill>
+                  <a:srgbClr val="4338CA"/>
+                </a:solidFill>
+                <a:latin typeface="Arial" pitchFamily="34" charset="0"/>
+                <a:ea typeface="Arial" pitchFamily="34" charset="-122"/>
+                <a:cs typeface="Arial" pitchFamily="34" charset="-120"/>
+              </a:rPr>
+              <a:t>IN</a:t>
+            </a:r>
+            <a:endParaRPr lang="en-US" sz="840" dirty="0"/>
+          </a:p>
+        </p:txBody>
+      </p:sp>
+      <p:sp>
+        <p:nvSpPr>
+          <p:cNvPr id="31" name="Text 29"/>
+          <p:cNvSpPr txBox="1"/>
+          <p:nvPr/>
+        </p:nvSpPr>
+        <p:spPr>
+          <a:xfrm>
+            <a:off x="8229600" y="1517904"/>
+            <a:ext cx="3593592" cy="384048"/>
+          </a:xfrm>
+          <a:prstGeom prst="rect">
+            <a:avLst/>
+          </a:prstGeom>
+          <a:noFill/>
+          <a:ln/>
+        </p:spPr>
+        <p:txBody>
+          <a:bodyPr wrap="square" lIns="0" tIns="0" rIns="0" bIns="0" rtlCol="0" anchor="ctr"/>
+          <a:lstStyle/>
+          <a:p>
+            <a:pPr indent="0" marL="0">
+              <a:lnSpc>
+                <a:spcPct val="112000"/>
+              </a:lnSpc>
+              <a:buNone/>
+            </a:pPr>
+            <a:r>
+              <a:rPr lang="en-US" sz="760" dirty="0">
+                <a:solidFill>
+                  <a:srgbClr val="5A5A5A"/>
+                </a:solidFill>
+                <a:latin typeface="Arial" pitchFamily="34" charset="0"/>
+                <a:ea typeface="Arial" pitchFamily="34" charset="-122"/>
+                <a:cs typeface="Arial" pitchFamily="34" charset="-120"/>
+              </a:rPr>
+              <a:t>Fully manual today. A mailbox reader is the single biggest unlock on the intake side.</a:t>
+            </a:r>
+            <a:endParaRPr lang="en-US" sz="760" dirty="0"/>
+          </a:p>
+        </p:txBody>
+      </p:sp>
+      <p:sp>
+        <p:nvSpPr>
+          <p:cNvPr id="32" name="Text 30"/>
+          <p:cNvSpPr txBox="1"/>
+          <p:nvPr/>
+        </p:nvSpPr>
+        <p:spPr>
+          <a:xfrm>
+            <a:off x="8229600" y="1938528"/>
+            <a:ext cx="3593592" cy="164592"/>
+          </a:xfrm>
+          <a:prstGeom prst="rect">
+            <a:avLst/>
+          </a:prstGeom>
+          <a:noFill/>
+          <a:ln/>
+        </p:spPr>
+        <p:txBody>
+          <a:bodyPr wrap="square" lIns="0" tIns="0" rIns="0" bIns="0" rtlCol="0" anchor="ctr"/>
+          <a:lstStyle/>
+          <a:p>
+            <a:pPr indent="0" marL="0">
+              <a:buNone/>
+            </a:pPr>
+            <a:r>
+              <a:rPr lang="en-US" sz="840" b="1" dirty="0">
+                <a:solidFill>
+                  <a:srgbClr val="1B2430"/>
+                </a:solidFill>
+                <a:latin typeface="Arial" pitchFamily="34" charset="0"/>
+                <a:ea typeface="Arial" pitchFamily="34" charset="-122"/>
+                <a:cs typeface="Arial" pitchFamily="34" charset="-120"/>
+              </a:rPr>
+              <a:t>E-mail  </a:t>
+            </a:r>
+            <a:pPr indent="0" marL="0">
+              <a:buNone/>
+            </a:pPr>
+            <a:r>
+              <a:rPr lang="en-US" sz="700" b="1" dirty="0">
+                <a:solidFill>
+                  <a:srgbClr val="4338CA"/>
+                </a:solidFill>
+                <a:latin typeface="Arial" pitchFamily="34" charset="0"/>
+                <a:ea typeface="Arial" pitchFamily="34" charset="-122"/>
+                <a:cs typeface="Arial" pitchFamily="34" charset="-120"/>
+              </a:rPr>
+              <a:t>IN</a:t>
+            </a:r>
+            <a:endParaRPr lang="en-US" sz="840" dirty="0"/>
+          </a:p>
+        </p:txBody>
+      </p:sp>
+      <p:sp>
+        <p:nvSpPr>
+          <p:cNvPr id="33" name="Text 31"/>
+          <p:cNvSpPr txBox="1"/>
+          <p:nvPr/>
+        </p:nvSpPr>
+        <p:spPr>
+          <a:xfrm>
+            <a:off x="8229600" y="2093976"/>
+            <a:ext cx="3593592" cy="384048"/>
+          </a:xfrm>
+          <a:prstGeom prst="rect">
+            <a:avLst/>
+          </a:prstGeom>
+          <a:noFill/>
+          <a:ln/>
+        </p:spPr>
+        <p:txBody>
+          <a:bodyPr wrap="square" lIns="0" tIns="0" rIns="0" bIns="0" rtlCol="0" anchor="ctr"/>
+          <a:lstStyle/>
+          <a:p>
+            <a:pPr indent="0" marL="0">
+              <a:lnSpc>
+                <a:spcPct val="112000"/>
+              </a:lnSpc>
+              <a:buNone/>
+            </a:pPr>
+            <a:r>
+              <a:rPr lang="en-US" sz="760" dirty="0">
+                <a:solidFill>
+                  <a:srgbClr val="5A5A5A"/>
+                </a:solidFill>
+                <a:latin typeface="Arial" pitchFamily="34" charset="0"/>
+                <a:ea typeface="Arial" pitchFamily="34" charset="-122"/>
+                <a:cs typeface="Arial" pitchFamily="34" charset="-120"/>
+              </a:rPr>
+              <a:t>Same reader, different folder. Attachments to Blob, text to extraction.</a:t>
+            </a:r>
+            <a:endParaRPr lang="en-US" sz="760" dirty="0"/>
+          </a:p>
+        </p:txBody>
+      </p:sp>
+      <p:sp>
+        <p:nvSpPr>
+          <p:cNvPr id="34" name="Text 32"/>
+          <p:cNvSpPr txBox="1"/>
+          <p:nvPr/>
+        </p:nvSpPr>
+        <p:spPr>
+          <a:xfrm>
+            <a:off x="8229600" y="2514600"/>
+            <a:ext cx="3593592" cy="164592"/>
+          </a:xfrm>
+          <a:prstGeom prst="rect">
+            <a:avLst/>
+          </a:prstGeom>
+          <a:noFill/>
+          <a:ln/>
+        </p:spPr>
+        <p:txBody>
+          <a:bodyPr wrap="square" lIns="0" tIns="0" rIns="0" bIns="0" rtlCol="0" anchor="ctr"/>
+          <a:lstStyle/>
+          <a:p>
+            <a:pPr indent="0" marL="0">
+              <a:buNone/>
+            </a:pPr>
+            <a:r>
+              <a:rPr lang="en-US" sz="840" b="1" dirty="0">
+                <a:solidFill>
+                  <a:srgbClr val="1B2430"/>
+                </a:solidFill>
+                <a:latin typeface="Arial" pitchFamily="34" charset="0"/>
+                <a:ea typeface="Arial" pitchFamily="34" charset="-122"/>
+                <a:cs typeface="Arial" pitchFamily="34" charset="-120"/>
+              </a:rPr>
+              <a:t>IDB  </a:t>
+            </a:r>
+            <a:pPr indent="0" marL="0">
+              <a:buNone/>
+            </a:pPr>
+            <a:r>
+              <a:rPr lang="en-US" sz="700" b="1" dirty="0">
+                <a:solidFill>
+                  <a:srgbClr val="BE185D"/>
+                </a:solidFill>
+                <a:latin typeface="Arial" pitchFamily="34" charset="0"/>
+                <a:ea typeface="Arial" pitchFamily="34" charset="-122"/>
+                <a:cs typeface="Arial" pitchFamily="34" charset="-120"/>
+              </a:rPr>
+              <a:t>OUT</a:t>
+            </a:r>
+            <a:endParaRPr lang="en-US" sz="840" dirty="0"/>
+          </a:p>
+        </p:txBody>
+      </p:sp>
+      <p:sp>
+        <p:nvSpPr>
+          <p:cNvPr id="35" name="Text 33"/>
+          <p:cNvSpPr txBox="1"/>
+          <p:nvPr/>
+        </p:nvSpPr>
+        <p:spPr>
+          <a:xfrm>
+            <a:off x="8229600" y="2670048"/>
+            <a:ext cx="3593592" cy="384048"/>
+          </a:xfrm>
+          <a:prstGeom prst="rect">
+            <a:avLst/>
+          </a:prstGeom>
+          <a:noFill/>
+          <a:ln/>
+        </p:spPr>
+        <p:txBody>
+          <a:bodyPr wrap="square" lIns="0" tIns="0" rIns="0" bIns="0" rtlCol="0" anchor="ctr"/>
+          <a:lstStyle/>
+          <a:p>
+            <a:pPr indent="0" marL="0">
+              <a:lnSpc>
+                <a:spcPct val="112000"/>
+              </a:lnSpc>
+              <a:buNone/>
+            </a:pPr>
+            <a:r>
+              <a:rPr lang="en-US" sz="760" dirty="0">
+                <a:solidFill>
+                  <a:srgbClr val="5A5A5A"/>
+                </a:solidFill>
+                <a:latin typeface="Arial" pitchFamily="34" charset="0"/>
+                <a:ea typeface="Arial" pitchFamily="34" charset="-122"/>
+                <a:cs typeface="Arial" pitchFamily="34" charset="-120"/>
+              </a:rPr>
+              <a:t>Write the claim, attach the policy, open the task. If there is no API, this is the long pole — not the AI.</a:t>
+            </a:r>
+            <a:endParaRPr lang="en-US" sz="760" dirty="0"/>
+          </a:p>
+        </p:txBody>
+      </p:sp>
+      <p:sp>
+        <p:nvSpPr>
+          <p:cNvPr id="36" name="Text 34"/>
+          <p:cNvSpPr txBox="1"/>
+          <p:nvPr/>
+        </p:nvSpPr>
+        <p:spPr>
+          <a:xfrm>
+            <a:off x="8229600" y="3090672"/>
+            <a:ext cx="3593592" cy="164592"/>
+          </a:xfrm>
+          <a:prstGeom prst="rect">
+            <a:avLst/>
+          </a:prstGeom>
+          <a:noFill/>
+          <a:ln/>
+        </p:spPr>
+        <p:txBody>
+          <a:bodyPr wrap="square" lIns="0" tIns="0" rIns="0" bIns="0" rtlCol="0" anchor="ctr"/>
+          <a:lstStyle/>
+          <a:p>
+            <a:pPr indent="0" marL="0">
+              <a:buNone/>
+            </a:pPr>
+            <a:r>
+              <a:rPr lang="en-US" sz="840" b="1" dirty="0">
+                <a:solidFill>
+                  <a:srgbClr val="1B2430"/>
+                </a:solidFill>
+                <a:latin typeface="Arial" pitchFamily="34" charset="0"/>
+                <a:ea typeface="Arial" pitchFamily="34" charset="-122"/>
+                <a:cs typeface="Arial" pitchFamily="34" charset="-120"/>
+              </a:rPr>
+              <a:t>CPR / CVR registers  </a:t>
+            </a:r>
+            <a:pPr indent="0" marL="0">
+              <a:buNone/>
+            </a:pPr>
+            <a:r>
+              <a:rPr lang="en-US" sz="700" b="1" dirty="0">
+                <a:solidFill>
+                  <a:srgbClr val="D97706"/>
+                </a:solidFill>
+                <a:latin typeface="Arial" pitchFamily="34" charset="0"/>
+                <a:ea typeface="Arial" pitchFamily="34" charset="-122"/>
+                <a:cs typeface="Arial" pitchFamily="34" charset="-120"/>
+              </a:rPr>
+              <a:t>BOTH</a:t>
+            </a:r>
+            <a:endParaRPr lang="en-US" sz="840" dirty="0"/>
+          </a:p>
+        </p:txBody>
+      </p:sp>
+      <p:sp>
+        <p:nvSpPr>
+          <p:cNvPr id="37" name="Text 35"/>
+          <p:cNvSpPr txBox="1"/>
+          <p:nvPr/>
+        </p:nvSpPr>
+        <p:spPr>
+          <a:xfrm>
+            <a:off x="8229600" y="3246120"/>
+            <a:ext cx="3593592" cy="384048"/>
+          </a:xfrm>
+          <a:prstGeom prst="rect">
+            <a:avLst/>
+          </a:prstGeom>
+          <a:noFill/>
+          <a:ln/>
+        </p:spPr>
+        <p:txBody>
+          <a:bodyPr wrap="square" lIns="0" tIns="0" rIns="0" bIns="0" rtlCol="0" anchor="ctr"/>
+          <a:lstStyle/>
+          <a:p>
+            <a:pPr indent="0" marL="0">
+              <a:lnSpc>
+                <a:spcPct val="112000"/>
+              </a:lnSpc>
+              <a:buNone/>
+            </a:pPr>
+            <a:r>
+              <a:rPr lang="en-US" sz="760" dirty="0">
+                <a:solidFill>
+                  <a:srgbClr val="5A5A5A"/>
+                </a:solidFill>
+                <a:latin typeface="Arial" pitchFamily="34" charset="0"/>
+                <a:ea typeface="Arial" pitchFamily="34" charset="-122"/>
+                <a:cs typeface="Arial" pitchFamily="34" charset="-120"/>
+              </a:rPr>
+              <a:t>Already queried by hand. Wrapped as tools the agents call, with results cached on the claim.</a:t>
+            </a:r>
+            <a:endParaRPr lang="en-US" sz="760" dirty="0"/>
+          </a:p>
+        </p:txBody>
+      </p:sp>
+      <p:sp>
+        <p:nvSpPr>
+          <p:cNvPr id="38" name="Shape 36"/>
+          <p:cNvSpPr/>
+          <p:nvPr/>
+        </p:nvSpPr>
+        <p:spPr>
+          <a:xfrm>
+            <a:off x="8229600" y="3712464"/>
+            <a:ext cx="3593592" cy="566928"/>
+          </a:xfrm>
+          <a:prstGeom prst="roundRect">
+            <a:avLst>
+              <a:gd name="adj" fmla="val 8065"/>
+            </a:avLst>
+          </a:prstGeom>
+          <a:solidFill>
+            <a:srgbClr val="FBE9F1"/>
+          </a:solidFill>
+          <a:ln w="12700">
+            <a:solidFill>
+              <a:srgbClr val="BE185D"/>
+            </a:solidFill>
+            <a:prstDash val="solid"/>
+          </a:ln>
+        </p:spPr>
+      </p:sp>
+      <p:sp>
+        <p:nvSpPr>
+          <p:cNvPr id="39" name="Text 37"/>
+          <p:cNvSpPr txBox="1"/>
+          <p:nvPr/>
+        </p:nvSpPr>
+        <p:spPr>
+          <a:xfrm>
+            <a:off x="8357616" y="3712464"/>
+            <a:ext cx="3337560" cy="566928"/>
+          </a:xfrm>
+          <a:prstGeom prst="rect">
+            <a:avLst/>
+          </a:prstGeom>
+          <a:noFill/>
+          <a:ln/>
+        </p:spPr>
+        <p:txBody>
+          <a:bodyPr wrap="square" lIns="0" tIns="0" rIns="0" bIns="0" rtlCol="0" anchor="ctr"/>
+          <a:lstStyle/>
+          <a:p>
+            <a:pPr indent="0" marL="0">
+              <a:lnSpc>
+                <a:spcPct val="115000"/>
+              </a:lnSpc>
+              <a:buNone/>
+            </a:pPr>
+            <a:r>
+              <a:rPr lang="en-US" sz="780" b="1" dirty="0">
+                <a:solidFill>
+                  <a:srgbClr val="6A1F42"/>
+                </a:solidFill>
+                <a:latin typeface="Arial" pitchFamily="34" charset="0"/>
+                <a:ea typeface="Arial" pitchFamily="34" charset="-122"/>
+                <a:cs typeface="Arial" pitchFamily="34" charset="-120"/>
+              </a:rPr>
+              <a:t>The models are the easy part. Whether IDB can be written to programmatically is the question that moves the date.</a:t>
+            </a:r>
+            <a:endParaRPr lang="en-US" sz="780" dirty="0"/>
+          </a:p>
+        </p:txBody>
+      </p:sp>
+      <p:sp>
+        <p:nvSpPr>
+          <p:cNvPr id="40" name="Shape 38"/>
+          <p:cNvSpPr/>
+          <p:nvPr/>
+        </p:nvSpPr>
+        <p:spPr>
+          <a:xfrm>
+            <a:off x="365760" y="3712464"/>
+            <a:ext cx="7680960" cy="2194560"/>
+          </a:xfrm>
+          <a:prstGeom prst="roundRect">
+            <a:avLst>
+              <a:gd name="adj" fmla="val 2500"/>
+            </a:avLst>
+          </a:prstGeom>
+          <a:solidFill>
+            <a:srgbClr val="FFFFFF"/>
+          </a:solidFill>
+          <a:ln w="12700">
+            <a:solidFill>
+              <a:srgbClr val="D7DCE2"/>
+            </a:solidFill>
+            <a:prstDash val="solid"/>
+          </a:ln>
+        </p:spPr>
+      </p:sp>
+      <p:sp>
+        <p:nvSpPr>
+          <p:cNvPr id="41" name="Text 39"/>
+          <p:cNvSpPr txBox="1"/>
+          <p:nvPr/>
+        </p:nvSpPr>
+        <p:spPr>
+          <a:xfrm>
+            <a:off x="548640" y="3822192"/>
+            <a:ext cx="7315200" cy="219456"/>
+          </a:xfrm>
+          <a:prstGeom prst="rect">
+            <a:avLst/>
+          </a:prstGeom>
+          <a:noFill/>
+          <a:ln/>
+        </p:spPr>
+        <p:txBody>
+          <a:bodyPr wrap="square" lIns="0" tIns="0" rIns="0" bIns="0" rtlCol="0" anchor="ctr"/>
+          <a:lstStyle/>
+          <a:p>
+            <a:pPr indent="0" marL="0">
+              <a:buNone/>
+            </a:pPr>
+            <a:r>
+              <a:rPr lang="en-US" sz="900" b="1" spc="80" kern="0" dirty="0">
+                <a:solidFill>
+                  <a:srgbClr val="4338CA"/>
+                </a:solidFill>
+                <a:latin typeface="Arial" pitchFamily="34" charset="0"/>
+                <a:ea typeface="Arial" pitchFamily="34" charset="-122"/>
+                <a:cs typeface="Arial" pitchFamily="34" charset="-120"/>
+              </a:rPr>
+              <a:t>D · HOW IT SHIPS AND KEEPS RUNNING</a:t>
+            </a:r>
+            <a:endParaRPr lang="en-US" sz="900" dirty="0"/>
+          </a:p>
+        </p:txBody>
+      </p:sp>
+      <p:sp>
+        <p:nvSpPr>
+          <p:cNvPr id="42" name="Text 40"/>
+          <p:cNvSpPr txBox="1"/>
+          <p:nvPr/>
+        </p:nvSpPr>
+        <p:spPr>
+          <a:xfrm>
+            <a:off x="548640" y="4096512"/>
+            <a:ext cx="2286000" cy="329184"/>
+          </a:xfrm>
+          <a:prstGeom prst="rect">
+            <a:avLst/>
+          </a:prstGeom>
+          <a:noFill/>
+          <a:ln/>
+        </p:spPr>
+        <p:txBody>
+          <a:bodyPr wrap="square" lIns="0" tIns="0" rIns="0" bIns="0" rtlCol="0" anchor="ctr"/>
+          <a:lstStyle/>
+          <a:p>
+            <a:pPr indent="0" marL="0">
+              <a:lnSpc>
+                <a:spcPct val="110000"/>
+              </a:lnSpc>
+              <a:buNone/>
+            </a:pPr>
+            <a:r>
+              <a:rPr lang="en-US" sz="820" b="1" dirty="0">
+                <a:solidFill>
+                  <a:srgbClr val="1B2430"/>
+                </a:solidFill>
+                <a:latin typeface="Arial" pitchFamily="34" charset="0"/>
+                <a:ea typeface="Arial" pitchFamily="34" charset="-122"/>
+                <a:cs typeface="Arial" pitchFamily="34" charset="-120"/>
+              </a:rPr>
+              <a:t>Infrastructure as code</a:t>
+            </a:r>
+            <a:endParaRPr lang="en-US" sz="820" dirty="0"/>
+          </a:p>
+        </p:txBody>
+      </p:sp>
+      <p:sp>
+        <p:nvSpPr>
+          <p:cNvPr id="43" name="Text 41"/>
+          <p:cNvSpPr txBox="1"/>
+          <p:nvPr/>
+        </p:nvSpPr>
+        <p:spPr>
+          <a:xfrm>
+            <a:off x="2907792" y="4096512"/>
+            <a:ext cx="4956048" cy="329184"/>
+          </a:xfrm>
+          <a:prstGeom prst="rect">
+            <a:avLst/>
+          </a:prstGeom>
+          <a:noFill/>
+          <a:ln/>
+        </p:spPr>
+        <p:txBody>
+          <a:bodyPr wrap="square" lIns="0" tIns="0" rIns="0" bIns="0" rtlCol="0" anchor="ctr"/>
+          <a:lstStyle/>
+          <a:p>
+            <a:pPr indent="0" marL="0">
+              <a:lnSpc>
+                <a:spcPct val="112000"/>
+              </a:lnSpc>
+              <a:buNone/>
+            </a:pPr>
+            <a:r>
+              <a:rPr lang="en-US" sz="780" dirty="0">
+                <a:solidFill>
+                  <a:srgbClr val="5A5A5A"/>
+                </a:solidFill>
+                <a:latin typeface="Arial" pitchFamily="34" charset="0"/>
+                <a:ea typeface="Arial" pitchFamily="34" charset="-122"/>
+                <a:cs typeface="Arial" pitchFamily="34" charset="-120"/>
+              </a:rPr>
+              <a:t>Bicep or Terraform. Nothing clicked into the portal, so the test environment is the production one minus data.</a:t>
+            </a:r>
+            <a:endParaRPr lang="en-US" sz="780" dirty="0"/>
+          </a:p>
+        </p:txBody>
+      </p:sp>
+      <p:sp>
+        <p:nvSpPr>
+          <p:cNvPr id="44" name="Text 42"/>
+          <p:cNvSpPr txBox="1"/>
+          <p:nvPr/>
+        </p:nvSpPr>
+        <p:spPr>
+          <a:xfrm>
+            <a:off x="548640" y="4448556"/>
+            <a:ext cx="2286000" cy="329184"/>
+          </a:xfrm>
+          <a:prstGeom prst="rect">
+            <a:avLst/>
+          </a:prstGeom>
+          <a:noFill/>
+          <a:ln/>
+        </p:spPr>
+        <p:txBody>
+          <a:bodyPr wrap="square" lIns="0" tIns="0" rIns="0" bIns="0" rtlCol="0" anchor="ctr"/>
+          <a:lstStyle/>
+          <a:p>
+            <a:pPr indent="0" marL="0">
+              <a:lnSpc>
+                <a:spcPct val="110000"/>
+              </a:lnSpc>
+              <a:buNone/>
+            </a:pPr>
+            <a:r>
+              <a:rPr lang="en-US" sz="820" b="1" dirty="0">
+                <a:solidFill>
+                  <a:srgbClr val="1B2430"/>
+                </a:solidFill>
+                <a:latin typeface="Arial" pitchFamily="34" charset="0"/>
+                <a:ea typeface="Arial" pitchFamily="34" charset="-122"/>
+                <a:cs typeface="Arial" pitchFamily="34" charset="-120"/>
+              </a:rPr>
+              <a:t>Azure DevOps pipelines</a:t>
+            </a:r>
+            <a:endParaRPr lang="en-US" sz="820" dirty="0"/>
+          </a:p>
+        </p:txBody>
+      </p:sp>
+      <p:sp>
+        <p:nvSpPr>
+          <p:cNvPr id="45" name="Text 43"/>
+          <p:cNvSpPr txBox="1"/>
+          <p:nvPr/>
+        </p:nvSpPr>
+        <p:spPr>
+          <a:xfrm>
+            <a:off x="2907792" y="4448556"/>
+            <a:ext cx="4956048" cy="329184"/>
+          </a:xfrm>
+          <a:prstGeom prst="rect">
+            <a:avLst/>
+          </a:prstGeom>
+          <a:noFill/>
+          <a:ln/>
+        </p:spPr>
+        <p:txBody>
+          <a:bodyPr wrap="square" lIns="0" tIns="0" rIns="0" bIns="0" rtlCol="0" anchor="ctr"/>
+          <a:lstStyle/>
+          <a:p>
+            <a:pPr indent="0" marL="0">
+              <a:lnSpc>
+                <a:spcPct val="112000"/>
+              </a:lnSpc>
+              <a:buNone/>
+            </a:pPr>
+            <a:r>
+              <a:rPr lang="en-US" sz="780" dirty="0">
+                <a:solidFill>
+                  <a:srgbClr val="5A5A5A"/>
+                </a:solidFill>
+                <a:latin typeface="Arial" pitchFamily="34" charset="0"/>
+                <a:ea typeface="Arial" pitchFamily="34" charset="-122"/>
+                <a:cs typeface="Arial" pitchFamily="34" charset="-120"/>
+              </a:rPr>
+              <a:t>Already licensed. Lint, type-check, unit tests, then the replay set on every merge.</a:t>
+            </a:r>
+            <a:endParaRPr lang="en-US" sz="780" dirty="0"/>
+          </a:p>
+        </p:txBody>
+      </p:sp>
+      <p:sp>
+        <p:nvSpPr>
+          <p:cNvPr id="46" name="Text 44"/>
+          <p:cNvSpPr txBox="1"/>
+          <p:nvPr/>
+        </p:nvSpPr>
+        <p:spPr>
+          <a:xfrm>
+            <a:off x="548640" y="4800600"/>
+            <a:ext cx="2286000" cy="329184"/>
+          </a:xfrm>
+          <a:prstGeom prst="rect">
+            <a:avLst/>
+          </a:prstGeom>
+          <a:noFill/>
+          <a:ln/>
+        </p:spPr>
+        <p:txBody>
+          <a:bodyPr wrap="square" lIns="0" tIns="0" rIns="0" bIns="0" rtlCol="0" anchor="ctr"/>
+          <a:lstStyle/>
+          <a:p>
+            <a:pPr indent="0" marL="0">
+              <a:lnSpc>
+                <a:spcPct val="110000"/>
+              </a:lnSpc>
+              <a:buNone/>
+            </a:pPr>
+            <a:r>
+              <a:rPr lang="en-US" sz="820" b="1" dirty="0">
+                <a:solidFill>
+                  <a:srgbClr val="1B2430"/>
+                </a:solidFill>
+                <a:latin typeface="Arial" pitchFamily="34" charset="0"/>
+                <a:ea typeface="Arial" pitchFamily="34" charset="-122"/>
+                <a:cs typeface="Arial" pitchFamily="34" charset="-120"/>
+              </a:rPr>
+              <a:t>A flag per agent</a:t>
+            </a:r>
+            <a:endParaRPr lang="en-US" sz="820" dirty="0"/>
+          </a:p>
+        </p:txBody>
+      </p:sp>
+      <p:sp>
+        <p:nvSpPr>
+          <p:cNvPr id="47" name="Text 45"/>
+          <p:cNvSpPr txBox="1"/>
+          <p:nvPr/>
+        </p:nvSpPr>
+        <p:spPr>
+          <a:xfrm>
+            <a:off x="2907792" y="4800600"/>
+            <a:ext cx="4956048" cy="329184"/>
+          </a:xfrm>
+          <a:prstGeom prst="rect">
+            <a:avLst/>
+          </a:prstGeom>
+          <a:noFill/>
+          <a:ln/>
+        </p:spPr>
+        <p:txBody>
+          <a:bodyPr wrap="square" lIns="0" tIns="0" rIns="0" bIns="0" rtlCol="0" anchor="ctr"/>
+          <a:lstStyle/>
+          <a:p>
+            <a:pPr indent="0" marL="0">
+              <a:lnSpc>
+                <a:spcPct val="112000"/>
+              </a:lnSpc>
+              <a:buNone/>
+            </a:pPr>
+            <a:r>
+              <a:rPr lang="en-US" sz="780" dirty="0">
+                <a:solidFill>
+                  <a:srgbClr val="5A5A5A"/>
+                </a:solidFill>
+                <a:latin typeface="Arial" pitchFamily="34" charset="0"/>
+                <a:ea typeface="Arial" pitchFamily="34" charset="-122"/>
+                <a:cs typeface="Arial" pitchFamily="34" charset="-120"/>
+              </a:rPr>
+              <a:t>Extraction, classification, research and drafting each toggle independently, per claim type.</a:t>
+            </a:r>
+            <a:endParaRPr lang="en-US" sz="780" dirty="0"/>
+          </a:p>
+        </p:txBody>
+      </p:sp>
+      <p:sp>
+        <p:nvSpPr>
+          <p:cNvPr id="48" name="Text 46"/>
+          <p:cNvSpPr txBox="1"/>
+          <p:nvPr/>
+        </p:nvSpPr>
+        <p:spPr>
+          <a:xfrm>
+            <a:off x="548640" y="5152644"/>
+            <a:ext cx="2286000" cy="329184"/>
+          </a:xfrm>
+          <a:prstGeom prst="rect">
+            <a:avLst/>
+          </a:prstGeom>
+          <a:noFill/>
+          <a:ln/>
+        </p:spPr>
+        <p:txBody>
+          <a:bodyPr wrap="square" lIns="0" tIns="0" rIns="0" bIns="0" rtlCol="0" anchor="ctr"/>
+          <a:lstStyle/>
+          <a:p>
+            <a:pPr indent="0" marL="0">
+              <a:lnSpc>
+                <a:spcPct val="110000"/>
+              </a:lnSpc>
+              <a:buNone/>
+            </a:pPr>
+            <a:r>
+              <a:rPr lang="en-US" sz="820" b="1" dirty="0">
+                <a:solidFill>
+                  <a:srgbClr val="1B2430"/>
+                </a:solidFill>
+                <a:latin typeface="Arial" pitchFamily="34" charset="0"/>
+                <a:ea typeface="Arial" pitchFamily="34" charset="-122"/>
+                <a:cs typeface="Arial" pitchFamily="34" charset="-120"/>
+              </a:rPr>
+              <a:t>Blue/green on the workers</a:t>
+            </a:r>
+            <a:endParaRPr lang="en-US" sz="820" dirty="0"/>
+          </a:p>
+        </p:txBody>
+      </p:sp>
+      <p:sp>
+        <p:nvSpPr>
+          <p:cNvPr id="49" name="Text 47"/>
+          <p:cNvSpPr txBox="1"/>
+          <p:nvPr/>
+        </p:nvSpPr>
+        <p:spPr>
+          <a:xfrm>
+            <a:off x="2907792" y="5152644"/>
+            <a:ext cx="4956048" cy="329184"/>
+          </a:xfrm>
+          <a:prstGeom prst="rect">
+            <a:avLst/>
+          </a:prstGeom>
+          <a:noFill/>
+          <a:ln/>
+        </p:spPr>
+        <p:txBody>
+          <a:bodyPr wrap="square" lIns="0" tIns="0" rIns="0" bIns="0" rtlCol="0" anchor="ctr"/>
+          <a:lstStyle/>
+          <a:p>
+            <a:pPr indent="0" marL="0">
+              <a:lnSpc>
+                <a:spcPct val="112000"/>
+              </a:lnSpc>
+              <a:buNone/>
+            </a:pPr>
+            <a:r>
+              <a:rPr lang="en-US" sz="780" dirty="0">
+                <a:solidFill>
+                  <a:srgbClr val="5A5A5A"/>
+                </a:solidFill>
+                <a:latin typeface="Arial" pitchFamily="34" charset="0"/>
+                <a:ea typeface="Arial" pitchFamily="34" charset="-122"/>
+                <a:cs typeface="Arial" pitchFamily="34" charset="-120"/>
+              </a:rPr>
+              <a:t>A bad release drains rather than cuts. In-flight claims finish on the old version.</a:t>
+            </a:r>
+            <a:endParaRPr lang="en-US" sz="780" dirty="0"/>
+          </a:p>
+        </p:txBody>
+      </p:sp>
+      <p:sp>
+        <p:nvSpPr>
+          <p:cNvPr id="50" name="Text 48"/>
+          <p:cNvSpPr txBox="1"/>
+          <p:nvPr/>
+        </p:nvSpPr>
+        <p:spPr>
+          <a:xfrm>
+            <a:off x="548640" y="5504688"/>
+            <a:ext cx="2286000" cy="329184"/>
+          </a:xfrm>
+          <a:prstGeom prst="rect">
+            <a:avLst/>
+          </a:prstGeom>
+          <a:noFill/>
+          <a:ln/>
+        </p:spPr>
+        <p:txBody>
+          <a:bodyPr wrap="square" lIns="0" tIns="0" rIns="0" bIns="0" rtlCol="0" anchor="ctr"/>
+          <a:lstStyle/>
+          <a:p>
+            <a:pPr indent="0" marL="0">
+              <a:lnSpc>
+                <a:spcPct val="110000"/>
+              </a:lnSpc>
+              <a:buNone/>
+            </a:pPr>
+            <a:r>
+              <a:rPr lang="en-US" sz="820" b="1" dirty="0">
+                <a:solidFill>
+                  <a:srgbClr val="1B2430"/>
+                </a:solidFill>
+                <a:latin typeface="Arial" pitchFamily="34" charset="0"/>
+                <a:ea typeface="Arial" pitchFamily="34" charset="-122"/>
+                <a:cs typeface="Arial" pitchFamily="34" charset="-120"/>
+              </a:rPr>
+              <a:t>Model version pinned</a:t>
+            </a:r>
+            <a:endParaRPr lang="en-US" sz="820" dirty="0"/>
+          </a:p>
+        </p:txBody>
+      </p:sp>
+      <p:sp>
+        <p:nvSpPr>
+          <p:cNvPr id="51" name="Text 49"/>
+          <p:cNvSpPr txBox="1"/>
+          <p:nvPr/>
+        </p:nvSpPr>
+        <p:spPr>
+          <a:xfrm>
+            <a:off x="2907792" y="5504688"/>
+            <a:ext cx="4956048" cy="329184"/>
+          </a:xfrm>
+          <a:prstGeom prst="rect">
+            <a:avLst/>
+          </a:prstGeom>
+          <a:noFill/>
+          <a:ln/>
+        </p:spPr>
+        <p:txBody>
+          <a:bodyPr wrap="square" lIns="0" tIns="0" rIns="0" bIns="0" rtlCol="0" anchor="ctr"/>
+          <a:lstStyle/>
+          <a:p>
+            <a:pPr indent="0" marL="0">
+              <a:lnSpc>
+                <a:spcPct val="112000"/>
+              </a:lnSpc>
+              <a:buNone/>
+            </a:pPr>
+            <a:r>
+              <a:rPr lang="en-US" sz="780" dirty="0">
+                <a:solidFill>
+                  <a:srgbClr val="5A5A5A"/>
+                </a:solidFill>
+                <a:latin typeface="Arial" pitchFamily="34" charset="0"/>
+                <a:ea typeface="Arial" pitchFamily="34" charset="-122"/>
+                <a:cs typeface="Arial" pitchFamily="34" charset="-120"/>
+              </a:rPr>
+              <a:t>An upgrade is a deliberate change that re-runs the replay set — never a silent one.</a:t>
+            </a:r>
+            <a:endParaRPr lang="en-US" sz="780" dirty="0"/>
+          </a:p>
+        </p:txBody>
+      </p:sp>
+      <p:sp>
+        <p:nvSpPr>
+          <p:cNvPr id="52" name="Text 50"/>
+          <p:cNvSpPr txBox="1"/>
+          <p:nvPr/>
+        </p:nvSpPr>
+        <p:spPr>
+          <a:xfrm>
+            <a:off x="365760" y="6053328"/>
+            <a:ext cx="11430000" cy="237744"/>
+          </a:xfrm>
+          <a:prstGeom prst="rect">
+            <a:avLst/>
+          </a:prstGeom>
+          <a:noFill/>
+          <a:ln/>
+        </p:spPr>
+        <p:txBody>
+          <a:bodyPr wrap="square" lIns="0" tIns="0" rIns="0" bIns="0" rtlCol="0" anchor="ctr"/>
+          <a:lstStyle/>
+          <a:p>
+            <a:pPr indent="0" marL="0">
+              <a:buNone/>
+            </a:pPr>
+            <a:r>
+              <a:rPr lang="en-US" sz="700" dirty="0">
+                <a:solidFill>
+                  <a:srgbClr val="5B6472"/>
+                </a:solidFill>
+                <a:latin typeface="Arial" pitchFamily="34" charset="0"/>
+                <a:ea typeface="Arial" pitchFamily="34" charset="-122"/>
+                <a:cs typeface="Arial" pitchFamily="34" charset="-120"/>
+              </a:rPr>
+              <a:t>Runs on the cloud GGW already deploy to · costs for exactly this shape are on slide 9 · the rollout that puts it in front of a handler is on slide 7</a:t>
+            </a:r>
+            <a:endParaRPr lang="en-US" sz="700" dirty="0"/>
+          </a:p>
+        </p:txBody>
+      </p:sp>
+      <p:sp>
+        <p:nvSpPr>
+          <p:cNvPr id="53" name="Text 51"/>
+          <p:cNvSpPr txBox="1"/>
+          <p:nvPr/>
+        </p:nvSpPr>
+        <p:spPr>
+          <a:xfrm>
+            <a:off x="365760" y="6601968"/>
+            <a:ext cx="5486400" cy="219456"/>
+          </a:xfrm>
+          <a:prstGeom prst="rect">
+            <a:avLst/>
+          </a:prstGeom>
+          <a:noFill/>
+          <a:ln/>
+        </p:spPr>
+        <p:txBody>
+          <a:bodyPr wrap="square" lIns="0" tIns="0" rIns="0" bIns="0" rtlCol="0" anchor="ctr"/>
+          <a:lstStyle/>
+          <a:p>
+            <a:pPr indent="0" marL="0">
+              <a:buNone/>
+            </a:pPr>
+            <a:r>
+              <a:rPr lang="en-US" sz="800" dirty="0">
+                <a:solidFill>
+                  <a:srgbClr val="5B6472"/>
+                </a:solidFill>
+                <a:latin typeface="Arial" pitchFamily="34" charset="0"/>
+                <a:ea typeface="Arial" pitchFamily="34" charset="-122"/>
+                <a:cs typeface="Arial" pitchFamily="34" charset="-120"/>
+              </a:rPr>
+              <a:t>GGW Claims Workflow Redesign · FNOL</a:t>
+            </a:r>
+            <a:endParaRPr lang="en-US" sz="800" dirty="0"/>
+          </a:p>
+        </p:txBody>
+      </p:sp>
+      <p:sp>
+        <p:nvSpPr>
+          <p:cNvPr id="54" name="Text 52"/>
+          <p:cNvSpPr txBox="1"/>
+          <p:nvPr/>
+        </p:nvSpPr>
+        <p:spPr>
+          <a:xfrm>
+            <a:off x="11247120" y="6601968"/>
+            <a:ext cx="594360" cy="219456"/>
+          </a:xfrm>
+          <a:prstGeom prst="rect">
+            <a:avLst/>
+          </a:prstGeom>
+          <a:noFill/>
+          <a:ln/>
+        </p:spPr>
+        <p:txBody>
+          <a:bodyPr wrap="square" lIns="0" tIns="0" rIns="0" bIns="0" rtlCol="0" anchor="ctr"/>
+          <a:lstStyle/>
+          <a:p>
+            <a:pPr algn="r" indent="0" marL="0">
+              <a:buNone/>
+            </a:pPr>
+            <a:r>
+              <a:rPr lang="en-US" sz="800" dirty="0">
+                <a:solidFill>
+                  <a:srgbClr val="5B6472"/>
+                </a:solidFill>
+                <a:latin typeface="Arial" pitchFamily="34" charset="0"/>
+                <a:ea typeface="Arial" pitchFamily="34" charset="-122"/>
+                <a:cs typeface="Arial" pitchFamily="34" charset="-120"/>
+              </a:rPr>
+              <a:t>8 / 10</a:t>
+            </a:r>
+            <a:endParaRPr lang="en-US" sz="800" dirty="0"/>
+          </a:p>
+        </p:txBody>
+      </p:sp>
+    </p:spTree>
+  </p:cSld>
+  <p:clrMapOvr>
+    <a:masterClrMapping/>
+  </p:clrMapOvr>
+</p:sld>
+</file>
+
+<file path=ppt/slides/slide9.xml><?xml version="1.0" encoding="utf-8"?>
+<p:sld xmlns:a="http://schemas.openxmlformats.org/drawingml/2006/main" xmlns:r="http://schemas.openxmlformats.org/officeDocument/2006/relationships" xmlns:p="http://schemas.openxmlformats.org/presentationml/2006/main">
+  <p:cSld name="Slide 9">
+    <p:bg>
+      <p:bgPr>
+        <a:solidFill>
+          <a:srgbClr val="FAFAF8"/>
+        </a:solidFill>
+      </p:bgPr>
+    </p:bg>
+    <p:spTree>
+      <p:nvGrpSpPr>
+        <p:cNvPr id="1" name=""/>
+        <p:cNvGrpSpPr/>
+        <p:nvPr/>
+      </p:nvGrpSpPr>
+      <p:grpSpPr>
+        <a:xfrm>
+          <a:off x="0" y="0"/>
+          <a:ext cx="0" cy="0"/>
+          <a:chOff x="0" y="0"/>
+          <a:chExt cx="0" cy="0"/>
+        </a:xfrm>
+      </p:grpSpPr>
+      <p:sp>
+        <p:nvSpPr>
+          <p:cNvPr id="2" name="Text 0"/>
+          <p:cNvSpPr txBox="1"/>
+          <p:nvPr/>
+        </p:nvSpPr>
+        <p:spPr>
+          <a:xfrm>
+            <a:off x="365760" y="118872"/>
+            <a:ext cx="9326880" cy="310896"/>
+          </a:xfrm>
+          <a:prstGeom prst="rect">
+            <a:avLst/>
+          </a:prstGeom>
+          <a:noFill/>
+          <a:ln/>
+        </p:spPr>
+        <p:txBody>
+          <a:bodyPr wrap="square" lIns="0" tIns="0" rIns="0" bIns="0" rtlCol="0" anchor="ctr"/>
+          <a:lstStyle/>
+          <a:p>
+            <a:pPr indent="0" marL="0">
+              <a:buNone/>
+            </a:pPr>
+            <a:r>
+              <a:rPr lang="en-US" sz="1400" b="1" dirty="0">
+                <a:solidFill>
+                  <a:srgbClr val="1B2430"/>
+                </a:solidFill>
+                <a:latin typeface="Cambria" pitchFamily="34" charset="0"/>
+                <a:ea typeface="Cambria" pitchFamily="34" charset="-122"/>
+                <a:cs typeface="Cambria" pitchFamily="34" charset="-120"/>
+              </a:rPr>
               <a:t>Every figure is built from observed steps and list prices — none of it is a best case</a:t>
             </a:r>
             <a:endParaRPr lang="en-US" sz="1400" dirty="0"/>
@@ -17395,8 +22243,8 @@
         </p:nvSpPr>
         <p:spPr>
           <a:xfrm>
-            <a:off x="8138160" y="146304"/>
-            <a:ext cx="3685032" cy="274320"/>
+            <a:off x="7315200" y="146304"/>
+            <a:ext cx="4507992" cy="274320"/>
           </a:xfrm>
           <a:prstGeom prst="rect">
             <a:avLst/>
@@ -17420,7 +22268,7 @@
                 <a:ea typeface="Arial" pitchFamily="34" charset="-122"/>
                 <a:cs typeface="Arial" pitchFamily="34" charset="-120"/>
               </a:rPr>
-              <a:t>HOW THE NUMBERS ARE BUILT</a:t>
+              <a:t>APPENDIX · HOW THE NUMBERS ARE BUILT</a:t>
             </a:r>
             <a:endParaRPr lang="en-US" sz="950" dirty="0"/>
           </a:p>
@@ -17459,7 +22307,7 @@
                 <a:ea typeface="Arial" pitchFamily="34" charset="-122"/>
                 <a:cs typeface="Arial" pitchFamily="34" charset="-120"/>
               </a:rPr>
-              <a:t>A · HANDLER TIME — MINUTES PER CLAIM, PER HANDLER</a:t>
+              <a:t>A · INTAKE TIME — MINUTES PER CLAIM, PER PERSON</a:t>
             </a:r>
             <a:endParaRPr lang="en-US" sz="900" dirty="0"/>
           </a:p>
@@ -17467,7 +22315,7 @@
       </p:sp>
       <p:graphicFrame>
         <p:nvGraphicFramePr>
-          <p:cNvPr id="9" name="Table 0"/>
+          <p:cNvPr id="10" name="Table 0"/>
           <p:cNvGraphicFramePr>
             <a:graphicFrameLocks noGrp="1"/>
           </p:cNvGraphicFramePr>
@@ -19884,7 +24732,7 @@
                 <a:ea typeface="Arial" pitchFamily="34" charset="-122"/>
                 <a:cs typeface="Arial" pitchFamily="34" charset="-120"/>
               </a:rPr>
-              <a:t>40 min × 12,500 claims a year = 8,332 handler-hours — 17% of a 30-person team's yearly capacity. Plausible for the front end of a claims process. Had it come out at 60%, the model would be wrong.</a:t>
+              <a:t>40 min × 12,500 claims a year = 8,332 hours — 52% of the 10-person support team's year, 17% of all 30. Per person: 5 claims a day at 40 min is 3.3 of a 6.4-hour day. Intake is half of what the support team does.</a:t>
             </a:r>
             <a:endParaRPr lang="en-US" sz="820" dirty="0"/>
           </a:p>
@@ -20067,7 +24915,7 @@
                 <a:ea typeface="Arial" pitchFamily="34" charset="-122"/>
                 <a:cs typeface="Arial" pitchFamily="34" charset="-120"/>
               </a:rPr>
-              <a:t>4,370 handler-h · 2.8 FTE</a:t>
+              <a:t>4,370 support-h · 2.8 FTE</a:t>
             </a:r>
             <a:endParaRPr lang="en-US" sz="840" dirty="0"/>
           </a:p>
@@ -20106,7 +24954,7 @@
                 <a:ea typeface="Arial" pitchFamily="34" charset="-122"/>
                 <a:cs typeface="Arial" pitchFamily="34" charset="-120"/>
               </a:rPr>
-              <a:t>Worth, at €34.92 per handler-hour</a:t>
+              <a:t>Worth, at €31.83 per support-team hour</a:t>
             </a:r>
             <a:endParaRPr lang="en-US" sz="840" dirty="0"/>
           </a:p>
@@ -20145,7 +24993,7 @@
                 <a:ea typeface="Arial" pitchFamily="34" charset="-122"/>
                 <a:cs typeface="Arial" pitchFamily="34" charset="-120"/>
               </a:rPr>
-              <a:t>€152,600 a year</a:t>
+              <a:t>€139,100 a year</a:t>
             </a:r>
             <a:endParaRPr lang="en-US" sz="840" dirty="0"/>
           </a:p>
@@ -20379,7 +25227,7 @@
                 <a:ea typeface="Arial" pitchFamily="34" charset="-122"/>
                 <a:cs typeface="Arial" pitchFamily="34" charset="-120"/>
               </a:rPr>
-              <a:t>€125,800</a:t>
+              <a:t>€112,200</a:t>
             </a:r>
             <a:endParaRPr lang="en-US" sz="840" dirty="0"/>
           </a:p>
@@ -20594,7 +25442,7 @@
                 <a:ea typeface="Arial" pitchFamily="34" charset="-122"/>
                 <a:cs typeface="Arial" pitchFamily="34" charset="-120"/>
               </a:rPr>
-              <a:t>14 months</a:t>
+              <a:t>16 months</a:t>
             </a:r>
             <a:endParaRPr lang="en-US" sz="840" dirty="0"/>
           </a:p>
@@ -20683,7 +25531,7 @@
       </p:sp>
       <p:graphicFrame>
         <p:nvGraphicFramePr>
-          <p:cNvPr id="17" name="Table 1"/>
+          <p:cNvPr id="19" name="Table 1"/>
           <p:cNvGraphicFramePr>
             <a:graphicFrameLocks noGrp="1"/>
           </p:cNvGraphicFramePr>
@@ -23776,7 +28624,7 @@
       </p:sp>
       <p:graphicFrame>
         <p:nvGraphicFramePr>
-          <p:cNvPr id="25" name="Table 2"/>
+          <p:cNvPr id="28" name="Table 2"/>
           <p:cNvGraphicFramePr>
             <a:graphicFrameLocks noGrp="1"/>
           </p:cNvGraphicFramePr>
@@ -24569,7 +29417,7 @@
                 <a:ea typeface="Arial" pitchFamily="34" charset="-122"/>
                 <a:cs typeface="Arial" pitchFamily="34" charset="-120"/>
               </a:rPr>
-              <a:t>E · WHO ACTUALLY GETS THE TIME BACK</a:t>
+              <a:t>E · WHO GETS THE TIME BACK — CONFIRMED BY GGW</a:t>
             </a:r>
             <a:endParaRPr lang="en-US" sz="900" dirty="0"/>
           </a:p>
@@ -24608,7 +29456,7 @@
                 <a:ea typeface="Arial" pitchFamily="34" charset="-122"/>
                 <a:cs typeface="Arial" pitchFamily="34" charset="-120"/>
               </a:rPr>
-              <a:t>The brief says a support team does intake, not all 30 handlers — so the truth is in the middle rows. Our first question for GGW.</a:t>
+              <a:t>20 claim handlers and 10 support staff (GGW, 8 Sep). The brief puts FNOL with the support team, so every freed hour is theirs.</a:t>
             </a:r>
             <a:endParaRPr lang="en-US" sz="780" dirty="0"/>
           </a:p>
@@ -24616,7 +29464,7 @@
       </p:sp>
       <p:graphicFrame>
         <p:nvGraphicFramePr>
-          <p:cNvPr id="33" name="Table 3"/>
+          <p:cNvPr id="37" name="Table 3"/>
           <p:cNvGraphicFramePr>
             <a:graphicFrameLocks noGrp="1"/>
           </p:cNvGraphicFramePr>
@@ -24660,7 +29508,7 @@
                           <a:ea typeface="Arial" pitchFamily="34" charset="-122"/>
                           <a:cs typeface="Arial" pitchFamily="34" charset="-120"/>
                         </a:rPr>
-                        <a:t>Intake handled by…</a:t>
+                        <a:t>Per support-team member</a:t>
                       </a:r>
                       <a:endParaRPr lang="en-US" sz="780" dirty="0">
                         <a:latin typeface="Arial" charset="0"/>
@@ -24728,7 +29576,7 @@
                           <a:ea typeface="Arial" pitchFamily="34" charset="-122"/>
                           <a:cs typeface="Arial" pitchFamily="34" charset="-120"/>
                         </a:rPr>
-                        <a:t>Claims each, per day</a:t>
+                        <a:t>Today</a:t>
                       </a:r>
                       <a:endParaRPr lang="en-US" sz="780" dirty="0">
                         <a:latin typeface="Arial" charset="0"/>
@@ -24796,7 +29644,7 @@
                           <a:ea typeface="Arial" pitchFamily="34" charset="-122"/>
                           <a:cs typeface="Arial" pitchFamily="34" charset="-120"/>
                         </a:rPr>
-                        <a:t>Intake work, per day</a:t>
+                        <a:t>Redesigned</a:t>
                       </a:r>
                       <a:endParaRPr lang="en-US" sz="780" dirty="0">
                         <a:latin typeface="Arial" charset="0"/>
@@ -24864,7 +29712,7 @@
                           <a:ea typeface="Arial" pitchFamily="34" charset="-122"/>
                           <a:cs typeface="Arial" pitchFamily="34" charset="-120"/>
                         </a:rPr>
-                        <a:t>Time freed, per day</a:t>
+                        <a:t>Difference</a:t>
                       </a:r>
                       <a:endParaRPr lang="en-US" sz="780" dirty="0">
                         <a:latin typeface="Arial" charset="0"/>
@@ -24934,7 +29782,7 @@
                           <a:ea typeface="Arial" pitchFamily="34" charset="-122"/>
                           <a:cs typeface="Arial" pitchFamily="34" charset="-120"/>
                         </a:rPr>
-                        <a:t>all 30 claims handlers</a:t>
+                        <a:t>Claims taken in, per day</a:t>
                       </a:r>
                       <a:endParaRPr lang="en-US" sz="780" dirty="0">
                         <a:latin typeface="Arial" charset="0"/>
@@ -25002,7 +29850,7 @@
                           <a:ea typeface="Arial" pitchFamily="34" charset="-122"/>
                           <a:cs typeface="Arial" pitchFamily="34" charset="-120"/>
                         </a:rPr>
-                        <a:t>1.7</a:t>
+                        <a:t>5</a:t>
                       </a:r>
                       <a:endParaRPr lang="en-US" sz="780" dirty="0">
                         <a:latin typeface="Arial" charset="0"/>
@@ -25070,7 +29918,7 @@
                           <a:ea typeface="Arial" pitchFamily="34" charset="-122"/>
                           <a:cs typeface="Arial" pitchFamily="34" charset="-120"/>
                         </a:rPr>
-                        <a:t>1.1 h</a:t>
+                        <a:t>5</a:t>
                       </a:r>
                       <a:endParaRPr lang="en-US" sz="780" dirty="0">
                         <a:latin typeface="Arial" charset="0"/>
@@ -25138,7 +29986,7 @@
                           <a:ea typeface="Arial" pitchFamily="34" charset="-122"/>
                           <a:cs typeface="Arial" pitchFamily="34" charset="-120"/>
                         </a:rPr>
-                        <a:t>35 min</a:t>
+                        <a:t>—</a:t>
                       </a:r>
                       <a:endParaRPr lang="en-US" sz="780" dirty="0">
                         <a:latin typeface="Arial" charset="0"/>
@@ -25208,7 +30056,7 @@
                           <a:ea typeface="Arial" pitchFamily="34" charset="-122"/>
                           <a:cs typeface="Arial" pitchFamily="34" charset="-120"/>
                         </a:rPr>
-                        <a:t>a support team of 12</a:t>
+                        <a:t>Time on intake, per day</a:t>
                       </a:r>
                       <a:endParaRPr lang="en-US" sz="780" dirty="0">
                         <a:latin typeface="Arial" charset="0"/>
@@ -25276,7 +30124,7 @@
                           <a:ea typeface="Arial" pitchFamily="34" charset="-122"/>
                           <a:cs typeface="Arial" pitchFamily="34" charset="-120"/>
                         </a:rPr>
-                        <a:t>4.2</a:t>
+                        <a:t>3.3 h</a:t>
                       </a:r>
                       <a:endParaRPr lang="en-US" sz="780" dirty="0">
                         <a:latin typeface="Arial" charset="0"/>
@@ -25344,7 +30192,7 @@
                           <a:ea typeface="Arial" pitchFamily="34" charset="-122"/>
                           <a:cs typeface="Arial" pitchFamily="34" charset="-120"/>
                         </a:rPr>
-                        <a:t>2.8 h</a:t>
+                        <a:t>1.6 h</a:t>
                       </a:r>
                       <a:endParaRPr lang="en-US" sz="780" dirty="0">
                         <a:latin typeface="Arial" charset="0"/>
@@ -25412,7 +30260,7 @@
                           <a:ea typeface="Arial" pitchFamily="34" charset="-122"/>
                           <a:cs typeface="Arial" pitchFamily="34" charset="-120"/>
                         </a:rPr>
-                        <a:t>88 min</a:t>
+                        <a:t>− 1.75 h</a:t>
                       </a:r>
                       <a:endParaRPr lang="en-US" sz="780" dirty="0">
                         <a:latin typeface="Arial" charset="0"/>
@@ -25482,7 +30330,7 @@
                           <a:ea typeface="Arial" pitchFamily="34" charset="-122"/>
                           <a:cs typeface="Arial" pitchFamily="34" charset="-120"/>
                         </a:rPr>
-                        <a:t>a support team of 8</a:t>
+                        <a:t>Share of a productive day</a:t>
                       </a:r>
                       <a:endParaRPr lang="en-US" sz="780" dirty="0">
                         <a:latin typeface="Arial" charset="0"/>
@@ -25550,7 +30398,7 @@
                           <a:ea typeface="Arial" pitchFamily="34" charset="-122"/>
                           <a:cs typeface="Arial" pitchFamily="34" charset="-120"/>
                         </a:rPr>
-                        <a:t>6.2</a:t>
+                        <a:t>52%</a:t>
                       </a:r>
                       <a:endParaRPr lang="en-US" sz="780" dirty="0">
                         <a:latin typeface="Arial" charset="0"/>
@@ -25618,7 +30466,7 @@
                           <a:ea typeface="Arial" pitchFamily="34" charset="-122"/>
                           <a:cs typeface="Arial" pitchFamily="34" charset="-120"/>
                         </a:rPr>
-                        <a:t>4.2 h</a:t>
+                        <a:t>25%</a:t>
                       </a:r>
                       <a:endParaRPr lang="en-US" sz="780" dirty="0">
                         <a:latin typeface="Arial" charset="0"/>
@@ -25686,7 +30534,7 @@
                           <a:ea typeface="Arial" pitchFamily="34" charset="-122"/>
                           <a:cs typeface="Arial" pitchFamily="34" charset="-120"/>
                         </a:rPr>
-                        <a:t>2.2 h</a:t>
+                        <a:t>− 27 pts</a:t>
                       </a:r>
                       <a:endParaRPr lang="en-US" sz="780" dirty="0">
                         <a:latin typeface="Arial" charset="0"/>
@@ -25748,7 +30596,7 @@
                         <a:buNone/>
                       </a:pPr>
                       <a:r>
-                        <a:rPr lang="en-US" sz="780" dirty="0">
+                        <a:rPr lang="en-US" sz="780" b="1" dirty="0">
                           <a:solidFill>
                             <a:srgbClr val="3A3A3A"/>
                           </a:solidFill>
@@ -25756,8 +30604,122 @@
                           <a:ea typeface="Arial" pitchFamily="34" charset="-122"/>
                           <a:cs typeface="Arial" pitchFamily="34" charset="-120"/>
                         </a:rPr>
-                        <a:t>a support team of 6</a:t>
+                        <a:t>Hours back, each, per day</a:t>
                       </a:r>
+                      <a:endParaRPr lang="en-US" sz="780" dirty="0">
+                        <a:latin typeface="Arial" charset="0"/>
+                        <a:ea typeface="Arial" charset="0"/>
+                        <a:cs typeface="Arial" charset="0"/>
+                      </a:endParaRPr>
+                    </a:p>
+                  </a:txBody>
+                  <a:tcPr marL="91440" marR="91440" marT="45720" marB="45720" anchor="ctr">
+                    <a:lnL w="6350" cap="flat" cmpd="sng" algn="ctr">
+                      <a:solidFill>
+                        <a:srgbClr val="E4E4E0"/>
+                      </a:solidFill>
+                      <a:prstDash val="solid"/>
+                      <a:round/>
+                      <a:headEnd type="none" w="med" len="med"/>
+                      <a:tailEnd type="none" w="med" len="med"/>
+                    </a:lnL>
+                    <a:lnR w="6350" cap="flat" cmpd="sng" algn="ctr">
+                      <a:solidFill>
+                        <a:srgbClr val="E4E4E0"/>
+                      </a:solidFill>
+                      <a:prstDash val="solid"/>
+                      <a:round/>
+                      <a:headEnd type="none" w="med" len="med"/>
+                      <a:tailEnd type="none" w="med" len="med"/>
+                    </a:lnR>
+                    <a:lnT w="6350" cap="flat" cmpd="sng" algn="ctr">
+                      <a:solidFill>
+                        <a:srgbClr val="E4E4E0"/>
+                      </a:solidFill>
+                      <a:prstDash val="solid"/>
+                      <a:round/>
+                      <a:headEnd type="none" w="med" len="med"/>
+                      <a:tailEnd type="none" w="med" len="med"/>
+                    </a:lnT>
+                    <a:lnB w="6350" cap="flat" cmpd="sng" algn="ctr">
+                      <a:solidFill>
+                        <a:srgbClr val="E4E4E0"/>
+                      </a:solidFill>
+                      <a:prstDash val="solid"/>
+                      <a:round/>
+                      <a:headEnd type="none" w="med" len="med"/>
+                      <a:tailEnd type="none" w="med" len="med"/>
+                    </a:lnB>
+                    <a:solidFill>
+                      <a:srgbClr val="FFFFFF"/>
+                    </a:solidFill>
+                  </a:tcPr>
+                </a:tc>
+                <a:tc>
+                  <a:txBody>
+                    <a:bodyPr/>
+                    <a:lstStyle/>
+                    <a:p>
+                      <a:pPr algn="l" indent="0" marL="0">
+                        <a:buNone/>
+                      </a:pPr>
+                      <a:endParaRPr lang="en-US" sz="780" dirty="0">
+                        <a:latin typeface="Arial" charset="0"/>
+                        <a:ea typeface="Arial" charset="0"/>
+                        <a:cs typeface="Arial" charset="0"/>
+                      </a:endParaRPr>
+                    </a:p>
+                  </a:txBody>
+                  <a:tcPr marL="91440" marR="91440" marT="45720" marB="45720" anchor="ctr">
+                    <a:lnL w="6350" cap="flat" cmpd="sng" algn="ctr">
+                      <a:solidFill>
+                        <a:srgbClr val="E4E4E0"/>
+                      </a:solidFill>
+                      <a:prstDash val="solid"/>
+                      <a:round/>
+                      <a:headEnd type="none" w="med" len="med"/>
+                      <a:tailEnd type="none" w="med" len="med"/>
+                    </a:lnL>
+                    <a:lnR w="6350" cap="flat" cmpd="sng" algn="ctr">
+                      <a:solidFill>
+                        <a:srgbClr val="E4E4E0"/>
+                      </a:solidFill>
+                      <a:prstDash val="solid"/>
+                      <a:round/>
+                      <a:headEnd type="none" w="med" len="med"/>
+                      <a:tailEnd type="none" w="med" len="med"/>
+                    </a:lnR>
+                    <a:lnT w="6350" cap="flat" cmpd="sng" algn="ctr">
+                      <a:solidFill>
+                        <a:srgbClr val="E4E4E0"/>
+                      </a:solidFill>
+                      <a:prstDash val="solid"/>
+                      <a:round/>
+                      <a:headEnd type="none" w="med" len="med"/>
+                      <a:tailEnd type="none" w="med" len="med"/>
+                    </a:lnT>
+                    <a:lnB w="6350" cap="flat" cmpd="sng" algn="ctr">
+                      <a:solidFill>
+                        <a:srgbClr val="E4E4E0"/>
+                      </a:solidFill>
+                      <a:prstDash val="solid"/>
+                      <a:round/>
+                      <a:headEnd type="none" w="med" len="med"/>
+                      <a:tailEnd type="none" w="med" len="med"/>
+                    </a:lnB>
+                    <a:solidFill>
+                      <a:srgbClr val="FFFFFF"/>
+                    </a:solidFill>
+                  </a:tcPr>
+                </a:tc>
+                <a:tc>
+                  <a:txBody>
+                    <a:bodyPr/>
+                    <a:lstStyle/>
+                    <a:p>
+                      <a:pPr algn="l" indent="0" marL="0">
+                        <a:buNone/>
+                      </a:pPr>
                       <a:endParaRPr lang="en-US" sz="780" dirty="0">
                         <a:latin typeface="Arial" charset="0"/>
                         <a:ea typeface="Arial" charset="0"/>
@@ -25816,7 +30778,7 @@
                         <a:buNone/>
                       </a:pPr>
                       <a:r>
-                        <a:rPr lang="en-US" sz="780" dirty="0">
+                        <a:rPr lang="en-US" sz="780" b="1" dirty="0">
                           <a:solidFill>
                             <a:srgbClr val="3A3A3A"/>
                           </a:solidFill>
@@ -25824,143 +30786,7 @@
                           <a:ea typeface="Arial" pitchFamily="34" charset="-122"/>
                           <a:cs typeface="Arial" pitchFamily="34" charset="-120"/>
                         </a:rPr>
-                        <a:t>8.3</a:t>
-                      </a:r>
-                      <a:endParaRPr lang="en-US" sz="780" dirty="0">
-                        <a:latin typeface="Arial" charset="0"/>
-                        <a:ea typeface="Arial" charset="0"/>
-                        <a:cs typeface="Arial" charset="0"/>
-                      </a:endParaRPr>
-                    </a:p>
-                  </a:txBody>
-                  <a:tcPr marL="91440" marR="91440" marT="45720" marB="45720" anchor="ctr">
-                    <a:lnL w="6350" cap="flat" cmpd="sng" algn="ctr">
-                      <a:solidFill>
-                        <a:srgbClr val="E4E4E0"/>
-                      </a:solidFill>
-                      <a:prstDash val="solid"/>
-                      <a:round/>
-                      <a:headEnd type="none" w="med" len="med"/>
-                      <a:tailEnd type="none" w="med" len="med"/>
-                    </a:lnL>
-                    <a:lnR w="6350" cap="flat" cmpd="sng" algn="ctr">
-                      <a:solidFill>
-                        <a:srgbClr val="E4E4E0"/>
-                      </a:solidFill>
-                      <a:prstDash val="solid"/>
-                      <a:round/>
-                      <a:headEnd type="none" w="med" len="med"/>
-                      <a:tailEnd type="none" w="med" len="med"/>
-                    </a:lnR>
-                    <a:lnT w="6350" cap="flat" cmpd="sng" algn="ctr">
-                      <a:solidFill>
-                        <a:srgbClr val="E4E4E0"/>
-                      </a:solidFill>
-                      <a:prstDash val="solid"/>
-                      <a:round/>
-                      <a:headEnd type="none" w="med" len="med"/>
-                      <a:tailEnd type="none" w="med" len="med"/>
-                    </a:lnT>
-                    <a:lnB w="6350" cap="flat" cmpd="sng" algn="ctr">
-                      <a:solidFill>
-                        <a:srgbClr val="E4E4E0"/>
-                      </a:solidFill>
-                      <a:prstDash val="solid"/>
-                      <a:round/>
-                      <a:headEnd type="none" w="med" len="med"/>
-                      <a:tailEnd type="none" w="med" len="med"/>
-                    </a:lnB>
-                    <a:solidFill>
-                      <a:srgbClr val="FFFFFF"/>
-                    </a:solidFill>
-                  </a:tcPr>
-                </a:tc>
-                <a:tc>
-                  <a:txBody>
-                    <a:bodyPr/>
-                    <a:lstStyle/>
-                    <a:p>
-                      <a:pPr algn="l" indent="0" marL="0">
-                        <a:buNone/>
-                      </a:pPr>
-                      <a:r>
-                        <a:rPr lang="en-US" sz="780" dirty="0">
-                          <a:solidFill>
-                            <a:srgbClr val="3A3A3A"/>
-                          </a:solidFill>
-                          <a:latin typeface="Arial" pitchFamily="34" charset="0"/>
-                          <a:ea typeface="Arial" pitchFamily="34" charset="-122"/>
-                          <a:cs typeface="Arial" pitchFamily="34" charset="-120"/>
-                        </a:rPr>
-                        <a:t>5.6 h</a:t>
-                      </a:r>
-                      <a:endParaRPr lang="en-US" sz="780" dirty="0">
-                        <a:latin typeface="Arial" charset="0"/>
-                        <a:ea typeface="Arial" charset="0"/>
-                        <a:cs typeface="Arial" charset="0"/>
-                      </a:endParaRPr>
-                    </a:p>
-                  </a:txBody>
-                  <a:tcPr marL="91440" marR="91440" marT="45720" marB="45720" anchor="ctr">
-                    <a:lnL w="6350" cap="flat" cmpd="sng" algn="ctr">
-                      <a:solidFill>
-                        <a:srgbClr val="E4E4E0"/>
-                      </a:solidFill>
-                      <a:prstDash val="solid"/>
-                      <a:round/>
-                      <a:headEnd type="none" w="med" len="med"/>
-                      <a:tailEnd type="none" w="med" len="med"/>
-                    </a:lnL>
-                    <a:lnR w="6350" cap="flat" cmpd="sng" algn="ctr">
-                      <a:solidFill>
-                        <a:srgbClr val="E4E4E0"/>
-                      </a:solidFill>
-                      <a:prstDash val="solid"/>
-                      <a:round/>
-                      <a:headEnd type="none" w="med" len="med"/>
-                      <a:tailEnd type="none" w="med" len="med"/>
-                    </a:lnR>
-                    <a:lnT w="6350" cap="flat" cmpd="sng" algn="ctr">
-                      <a:solidFill>
-                        <a:srgbClr val="E4E4E0"/>
-                      </a:solidFill>
-                      <a:prstDash val="solid"/>
-                      <a:round/>
-                      <a:headEnd type="none" w="med" len="med"/>
-                      <a:tailEnd type="none" w="med" len="med"/>
-                    </a:lnT>
-                    <a:lnB w="6350" cap="flat" cmpd="sng" algn="ctr">
-                      <a:solidFill>
-                        <a:srgbClr val="E4E4E0"/>
-                      </a:solidFill>
-                      <a:prstDash val="solid"/>
-                      <a:round/>
-                      <a:headEnd type="none" w="med" len="med"/>
-                      <a:tailEnd type="none" w="med" len="med"/>
-                    </a:lnB>
-                    <a:solidFill>
-                      <a:srgbClr val="FFFFFF"/>
-                    </a:solidFill>
-                  </a:tcPr>
-                </a:tc>
-                <a:tc>
-                  <a:txBody>
-                    <a:bodyPr/>
-                    <a:lstStyle/>
-                    <a:p>
-                      <a:pPr algn="l" indent="0" marL="0">
-                        <a:buNone/>
-                      </a:pPr>
-                      <a:r>
-                        <a:rPr lang="en-US" sz="780" dirty="0">
-                          <a:solidFill>
-                            <a:srgbClr val="3A3A3A"/>
-                          </a:solidFill>
-                          <a:latin typeface="Arial" pitchFamily="34" charset="0"/>
-                          <a:ea typeface="Arial" pitchFamily="34" charset="-122"/>
-                          <a:cs typeface="Arial" pitchFamily="34" charset="-120"/>
-                        </a:rPr>
-                        <a:t>2.9 h</a:t>
+                        <a:t>1.75 h</a:t>
                       </a:r>
                       <a:endParaRPr lang="en-US" sz="780" dirty="0">
                         <a:latin typeface="Arial" charset="0"/>
@@ -26088,2105 +30914,7 @@
                 <a:ea typeface="Arial" pitchFamily="34" charset="-122"/>
                 <a:cs typeface="Arial" pitchFamily="34" charset="-120"/>
               </a:rPr>
-              <a:t>8 / 9</a:t>
-            </a:r>
-            <a:endParaRPr lang="en-US" sz="800" dirty="0"/>
-          </a:p>
-        </p:txBody>
-      </p:sp>
-    </p:spTree>
-  </p:cSld>
-  <p:clrMapOvr>
-    <a:masterClrMapping/>
-  </p:clrMapOvr>
-</p:sld>
-</file>
-
-<file path=ppt/slides/slide9.xml><?xml version="1.0" encoding="utf-8"?>
-<p:sld xmlns:a="http://schemas.openxmlformats.org/drawingml/2006/main" xmlns:r="http://schemas.openxmlformats.org/officeDocument/2006/relationships" xmlns:p="http://schemas.openxmlformats.org/presentationml/2006/main">
-  <p:cSld name="Slide 9">
-    <p:bg>
-      <p:bgPr>
-        <a:solidFill>
-          <a:srgbClr val="FAFAF8"/>
-        </a:solidFill>
-      </p:bgPr>
-    </p:bg>
-    <p:spTree>
-      <p:nvGrpSpPr>
-        <p:cNvPr id="1" name=""/>
-        <p:cNvGrpSpPr/>
-        <p:nvPr/>
-      </p:nvGrpSpPr>
-      <p:grpSpPr>
-        <a:xfrm>
-          <a:off x="0" y="0"/>
-          <a:ext cx="0" cy="0"/>
-          <a:chOff x="0" y="0"/>
-          <a:chExt cx="0" cy="0"/>
-        </a:xfrm>
-      </p:grpSpPr>
-      <p:sp>
-        <p:nvSpPr>
-          <p:cNvPr id="2" name="Text 0"/>
-          <p:cNvSpPr txBox="1"/>
-          <p:nvPr/>
-        </p:nvSpPr>
-        <p:spPr>
-          <a:xfrm>
-            <a:off x="365760" y="118872"/>
-            <a:ext cx="9326880" cy="310896"/>
-          </a:xfrm>
-          <a:prstGeom prst="rect">
-            <a:avLst/>
-          </a:prstGeom>
-          <a:noFill/>
-          <a:ln/>
-        </p:spPr>
-        <p:txBody>
-          <a:bodyPr wrap="square" lIns="0" tIns="0" rIns="0" bIns="0" rtlCol="0" anchor="ctr"/>
-          <a:lstStyle/>
-          <a:p>
-            <a:pPr indent="0" marL="0">
-              <a:buNone/>
-            </a:pPr>
-            <a:r>
-              <a:rPr lang="en-US" sz="1400" b="1" dirty="0">
-                <a:solidFill>
-                  <a:srgbClr val="1B2430"/>
-                </a:solidFill>
-                <a:latin typeface="Cambria" pitchFamily="34" charset="0"/>
-                <a:ea typeface="Cambria" pitchFamily="34" charset="-122"/>
-                <a:cs typeface="Cambria" pitchFamily="34" charset="-120"/>
-              </a:rPr>
-              <a:t>What is sourced, and what is our assumption — kept separate on purpose</a:t>
-            </a:r>
-            <a:endParaRPr lang="en-US" sz="1400" dirty="0"/>
-          </a:p>
-        </p:txBody>
-      </p:sp>
-      <p:sp>
-        <p:nvSpPr>
-          <p:cNvPr id="3" name="Text 1"/>
-          <p:cNvSpPr txBox="1"/>
-          <p:nvPr/>
-        </p:nvSpPr>
-        <p:spPr>
-          <a:xfrm>
-            <a:off x="8595360" y="146304"/>
-            <a:ext cx="3227832" cy="274320"/>
-          </a:xfrm>
-          <a:prstGeom prst="rect">
-            <a:avLst/>
-          </a:prstGeom>
-          <a:noFill/>
-          <a:ln/>
-        </p:spPr>
-        <p:txBody>
-          <a:bodyPr wrap="square" lIns="0" tIns="0" rIns="0" bIns="0" rtlCol="0" anchor="ctr"/>
-          <a:lstStyle/>
-          <a:p>
-            <a:pPr algn="r" indent="0" marL="0">
-              <a:buNone/>
-            </a:pPr>
-            <a:r>
-              <a:rPr lang="en-US" sz="950" b="1" spc="140" kern="0" dirty="0">
-                <a:solidFill>
-                  <a:srgbClr val="5B6472"/>
-                </a:solidFill>
-                <a:latin typeface="Arial" pitchFamily="34" charset="0"/>
-                <a:ea typeface="Arial" pitchFamily="34" charset="-122"/>
-                <a:cs typeface="Arial" pitchFamily="34" charset="-120"/>
-              </a:rPr>
-              <a:t>SOURCES &amp; ASSUMPTIONS</a:t>
-            </a:r>
-            <a:endParaRPr lang="en-US" sz="950" dirty="0"/>
-          </a:p>
-        </p:txBody>
-      </p:sp>
-      <p:sp>
-        <p:nvSpPr>
-          <p:cNvPr id="4" name="Shape 2"/>
-          <p:cNvSpPr/>
-          <p:nvPr/>
-        </p:nvSpPr>
-        <p:spPr>
-          <a:xfrm>
-            <a:off x="365760" y="548640"/>
-            <a:ext cx="45720" cy="310896"/>
-          </a:xfrm>
-          <a:prstGeom prst="rect">
-            <a:avLst/>
-          </a:prstGeom>
-          <a:solidFill>
-            <a:srgbClr val="0891B2"/>
-          </a:solidFill>
-          <a:ln/>
-        </p:spPr>
-      </p:sp>
-      <p:sp>
-        <p:nvSpPr>
-          <p:cNvPr id="5" name="Text 3"/>
-          <p:cNvSpPr txBox="1"/>
-          <p:nvPr/>
-        </p:nvSpPr>
-        <p:spPr>
-          <a:xfrm>
-            <a:off x="530352" y="530352"/>
-            <a:ext cx="1965960" cy="182880"/>
-          </a:xfrm>
-          <a:prstGeom prst="rect">
-            <a:avLst/>
-          </a:prstGeom>
-          <a:noFill/>
-          <a:ln/>
-        </p:spPr>
-        <p:txBody>
-          <a:bodyPr wrap="square" lIns="0" tIns="0" rIns="0" bIns="0" rtlCol="0" anchor="ctr"/>
-          <a:lstStyle/>
-          <a:p>
-            <a:pPr indent="0" marL="0">
-              <a:buNone/>
-            </a:pPr>
-            <a:r>
-              <a:rPr lang="en-US" sz="860" b="1" dirty="0">
-                <a:solidFill>
-                  <a:srgbClr val="1B2430"/>
-                </a:solidFill>
-                <a:latin typeface="Arial" pitchFamily="34" charset="0"/>
-                <a:ea typeface="Arial" pitchFamily="34" charset="-122"/>
-                <a:cs typeface="Arial" pitchFamily="34" charset="-120"/>
-              </a:rPr>
-              <a:t>Wage base</a:t>
-            </a:r>
-            <a:endParaRPr lang="en-US" sz="860" dirty="0"/>
-          </a:p>
-        </p:txBody>
-      </p:sp>
-      <p:sp>
-        <p:nvSpPr>
-          <p:cNvPr id="6" name="Text 4"/>
-          <p:cNvSpPr txBox="1"/>
-          <p:nvPr/>
-        </p:nvSpPr>
-        <p:spPr>
-          <a:xfrm>
-            <a:off x="530352" y="685800"/>
-            <a:ext cx="4937760" cy="182880"/>
-          </a:xfrm>
-          <a:prstGeom prst="rect">
-            <a:avLst/>
-          </a:prstGeom>
-          <a:noFill/>
-          <a:ln/>
-        </p:spPr>
-        <p:txBody>
-          <a:bodyPr wrap="square" lIns="0" tIns="0" rIns="0" bIns="0" rtlCol="0" anchor="ctr"/>
-          <a:lstStyle/>
-          <a:p>
-            <a:pPr indent="0" marL="0">
-              <a:buNone/>
-            </a:pPr>
-            <a:r>
-              <a:rPr lang="en-US" sz="800" dirty="0">
-                <a:solidFill>
-                  <a:srgbClr val="5A5A5A"/>
-                </a:solidFill>
-                <a:latin typeface="Arial" pitchFamily="34" charset="0"/>
-                <a:ea typeface="Arial" pitchFamily="34" charset="-122"/>
-                <a:cs typeface="Arial" pitchFamily="34" charset="-120"/>
-              </a:rPr>
-              <a:t>Sachbearbeiter Schadenregulierung, €45,100 gross</a:t>
-            </a:r>
-            <a:endParaRPr lang="en-US" sz="800" dirty="0"/>
-          </a:p>
-        </p:txBody>
-      </p:sp>
-      <p:sp>
-        <p:nvSpPr>
-          <p:cNvPr id="7" name="Text 5">
-            <a:hlinkClick r:id="rId1" tooltip="StepStone Gehaltsreport"/>
-          </p:cNvPr>
-          <p:cNvSpPr txBox="1"/>
-          <p:nvPr/>
-        </p:nvSpPr>
-        <p:spPr>
-          <a:xfrm>
-            <a:off x="5669280" y="585216"/>
-            <a:ext cx="6035040" cy="219456"/>
-          </a:xfrm>
-          <a:prstGeom prst="rect">
-            <a:avLst/>
-          </a:prstGeom>
-          <a:noFill/>
-          <a:ln/>
-        </p:spPr>
-        <p:txBody>
-          <a:bodyPr wrap="square" lIns="0" tIns="0" rIns="0" bIns="0" rtlCol="0" anchor="ctr"/>
-          <a:lstStyle/>
-          <a:p>
-            <a:pPr indent="0" marL="0">
-              <a:buNone/>
-            </a:pPr>
-            <a:r>
-              <a:rPr lang="en-US" sz="840" u="sng" dirty="0">
-                <a:solidFill>
-                  <a:srgbClr val="0B5F8A"/>
-                </a:solidFill>
-                <a:latin typeface="Arial" pitchFamily="34" charset="0"/>
-                <a:ea typeface="Arial" pitchFamily="34" charset="-122"/>
-                <a:cs typeface="Arial" pitchFamily="34" charset="-120"/>
-                <a:hlinkClick r:id="rId1" invalidUrl="" action="" tgtFrame="" tooltip="StepStone Gehaltsreport" history="1" highlightClick="0" endSnd="0">
-                  <a:extLst>
-                    <a:ext uri="{A12FA001-AC4F-418D-AE19-62706E023703}">
-                      <ahyp:hlinkClr xmlns:ahyp="http://schemas.microsoft.com/office/drawing/2018/hyperlinkcolor" val="tx"/>
-                    </a:ext>
-                  </a:extLst>
-                </a:hlinkClick>
-              </a:rPr>
-              <a:t>StepStone Gehaltsreport</a:t>
-            </a:r>
-            <a:endParaRPr lang="en-US" sz="840" dirty="0"/>
-          </a:p>
-        </p:txBody>
-      </p:sp>
-      <p:sp>
-        <p:nvSpPr>
-          <p:cNvPr id="8" name="Shape 6"/>
-          <p:cNvSpPr/>
-          <p:nvPr/>
-        </p:nvSpPr>
-        <p:spPr>
-          <a:xfrm>
-            <a:off x="365760" y="914400"/>
-            <a:ext cx="45720" cy="310896"/>
-          </a:xfrm>
-          <a:prstGeom prst="rect">
-            <a:avLst/>
-          </a:prstGeom>
-          <a:solidFill>
-            <a:srgbClr val="0891B2"/>
-          </a:solidFill>
-          <a:ln/>
-        </p:spPr>
-      </p:sp>
-      <p:sp>
-        <p:nvSpPr>
-          <p:cNvPr id="9" name="Text 7"/>
-          <p:cNvSpPr txBox="1"/>
-          <p:nvPr/>
-        </p:nvSpPr>
-        <p:spPr>
-          <a:xfrm>
-            <a:off x="530352" y="896112"/>
-            <a:ext cx="1965960" cy="182880"/>
-          </a:xfrm>
-          <a:prstGeom prst="rect">
-            <a:avLst/>
-          </a:prstGeom>
-          <a:noFill/>
-          <a:ln/>
-        </p:spPr>
-        <p:txBody>
-          <a:bodyPr wrap="square" lIns="0" tIns="0" rIns="0" bIns="0" rtlCol="0" anchor="ctr"/>
-          <a:lstStyle/>
-          <a:p>
-            <a:pPr indent="0" marL="0">
-              <a:buNone/>
-            </a:pPr>
-            <a:r>
-              <a:rPr lang="en-US" sz="860" b="1" dirty="0">
-                <a:solidFill>
-                  <a:srgbClr val="1B2430"/>
-                </a:solidFill>
-                <a:latin typeface="Arial" pitchFamily="34" charset="0"/>
-                <a:ea typeface="Arial" pitchFamily="34" charset="-122"/>
-                <a:cs typeface="Arial" pitchFamily="34" charset="-120"/>
-              </a:rPr>
-              <a:t>Employer on-cost</a:t>
-            </a:r>
-            <a:endParaRPr lang="en-US" sz="860" dirty="0"/>
-          </a:p>
-        </p:txBody>
-      </p:sp>
-      <p:sp>
-        <p:nvSpPr>
-          <p:cNvPr id="10" name="Text 8"/>
-          <p:cNvSpPr txBox="1"/>
-          <p:nvPr/>
-        </p:nvSpPr>
-        <p:spPr>
-          <a:xfrm>
-            <a:off x="530352" y="1051560"/>
-            <a:ext cx="4937760" cy="182880"/>
-          </a:xfrm>
-          <a:prstGeom prst="rect">
-            <a:avLst/>
-          </a:prstGeom>
-          <a:noFill/>
-          <a:ln/>
-        </p:spPr>
-        <p:txBody>
-          <a:bodyPr wrap="square" lIns="0" tIns="0" rIns="0" bIns="0" rtlCol="0" anchor="ctr"/>
-          <a:lstStyle/>
-          <a:p>
-            <a:pPr indent="0" marL="0">
-              <a:buNone/>
-            </a:pPr>
-            <a:r>
-              <a:rPr lang="en-US" sz="800" dirty="0">
-                <a:solidFill>
-                  <a:srgbClr val="5A5A5A"/>
-                </a:solidFill>
-                <a:latin typeface="Arial" pitchFamily="34" charset="0"/>
-                <a:ea typeface="Arial" pitchFamily="34" charset="-122"/>
-                <a:cs typeface="Arial" pitchFamily="34" charset="-120"/>
-              </a:rPr>
-              <a:t>≈ €23 per €100 gross — health, pension, unemployment, care</a:t>
-            </a:r>
-            <a:endParaRPr lang="en-US" sz="800" dirty="0"/>
-          </a:p>
-        </p:txBody>
-      </p:sp>
-      <p:sp>
-        <p:nvSpPr>
-          <p:cNvPr id="11" name="Text 9">
-            <a:hlinkClick r:id="rId2" tooltip="Lohnnebenkosten 2026, sevdesk"/>
-          </p:cNvPr>
-          <p:cNvSpPr txBox="1"/>
-          <p:nvPr/>
-        </p:nvSpPr>
-        <p:spPr>
-          <a:xfrm>
-            <a:off x="5669280" y="950976"/>
-            <a:ext cx="6035040" cy="219456"/>
-          </a:xfrm>
-          <a:prstGeom prst="rect">
-            <a:avLst/>
-          </a:prstGeom>
-          <a:noFill/>
-          <a:ln/>
-        </p:spPr>
-        <p:txBody>
-          <a:bodyPr wrap="square" lIns="0" tIns="0" rIns="0" bIns="0" rtlCol="0" anchor="ctr"/>
-          <a:lstStyle/>
-          <a:p>
-            <a:pPr indent="0" marL="0">
-              <a:buNone/>
-            </a:pPr>
-            <a:r>
-              <a:rPr lang="en-US" sz="840" u="sng" dirty="0">
-                <a:solidFill>
-                  <a:srgbClr val="0B5F8A"/>
-                </a:solidFill>
-                <a:latin typeface="Arial" pitchFamily="34" charset="0"/>
-                <a:ea typeface="Arial" pitchFamily="34" charset="-122"/>
-                <a:cs typeface="Arial" pitchFamily="34" charset="-120"/>
-                <a:hlinkClick r:id="rId2" invalidUrl="" action="" tgtFrame="" tooltip="Lohnnebenkosten 2026, sevdesk" history="1" highlightClick="0" endSnd="0">
-                  <a:extLst>
-                    <a:ext uri="{A12FA001-AC4F-418D-AE19-62706E023703}">
-                      <ahyp:hlinkClr xmlns:ahyp="http://schemas.microsoft.com/office/drawing/2018/hyperlinkcolor" val="tx"/>
-                    </a:ext>
-                  </a:extLst>
-                </a:hlinkClick>
-              </a:rPr>
-              <a:t>Lohnnebenkosten 2026, sevdesk</a:t>
-            </a:r>
-            <a:endParaRPr lang="en-US" sz="840" dirty="0"/>
-          </a:p>
-        </p:txBody>
-      </p:sp>
-      <p:sp>
-        <p:nvSpPr>
-          <p:cNvPr id="12" name="Shape 10"/>
-          <p:cNvSpPr/>
-          <p:nvPr/>
-        </p:nvSpPr>
-        <p:spPr>
-          <a:xfrm>
-            <a:off x="365760" y="1280160"/>
-            <a:ext cx="45720" cy="310896"/>
-          </a:xfrm>
-          <a:prstGeom prst="rect">
-            <a:avLst/>
-          </a:prstGeom>
-          <a:solidFill>
-            <a:srgbClr val="0891B2"/>
-          </a:solidFill>
-          <a:ln/>
-        </p:spPr>
-      </p:sp>
-      <p:sp>
-        <p:nvSpPr>
-          <p:cNvPr id="13" name="Text 11"/>
-          <p:cNvSpPr txBox="1"/>
-          <p:nvPr/>
-        </p:nvSpPr>
-        <p:spPr>
-          <a:xfrm>
-            <a:off x="530352" y="1261872"/>
-            <a:ext cx="1965960" cy="182880"/>
-          </a:xfrm>
-          <a:prstGeom prst="rect">
-            <a:avLst/>
-          </a:prstGeom>
-          <a:noFill/>
-          <a:ln/>
-        </p:spPr>
-        <p:txBody>
-          <a:bodyPr wrap="square" lIns="0" tIns="0" rIns="0" bIns="0" rtlCol="0" anchor="ctr"/>
-          <a:lstStyle/>
-          <a:p>
-            <a:pPr indent="0" marL="0">
-              <a:buNone/>
-            </a:pPr>
-            <a:r>
-              <a:rPr lang="en-US" sz="860" b="1" dirty="0">
-                <a:solidFill>
-                  <a:srgbClr val="1B2430"/>
-                </a:solidFill>
-                <a:latin typeface="Arial" pitchFamily="34" charset="0"/>
-                <a:ea typeface="Arial" pitchFamily="34" charset="-122"/>
-                <a:cs typeface="Arial" pitchFamily="34" charset="-120"/>
-              </a:rPr>
-              <a:t>Working time, breaks</a:t>
-            </a:r>
-            <a:endParaRPr lang="en-US" sz="860" dirty="0"/>
-          </a:p>
-        </p:txBody>
-      </p:sp>
-      <p:sp>
-        <p:nvSpPr>
-          <p:cNvPr id="14" name="Text 12"/>
-          <p:cNvSpPr txBox="1"/>
-          <p:nvPr/>
-        </p:nvSpPr>
-        <p:spPr>
-          <a:xfrm>
-            <a:off x="530352" y="1417320"/>
-            <a:ext cx="4937760" cy="182880"/>
-          </a:xfrm>
-          <a:prstGeom prst="rect">
-            <a:avLst/>
-          </a:prstGeom>
-          <a:noFill/>
-          <a:ln/>
-        </p:spPr>
-        <p:txBody>
-          <a:bodyPr wrap="square" lIns="0" tIns="0" rIns="0" bIns="0" rtlCol="0" anchor="ctr"/>
-          <a:lstStyle/>
-          <a:p>
-            <a:pPr indent="0" marL="0">
-              <a:buNone/>
-            </a:pPr>
-            <a:r>
-              <a:rPr lang="en-US" sz="800" dirty="0">
-                <a:solidFill>
-                  <a:srgbClr val="5A5A5A"/>
-                </a:solidFill>
-                <a:latin typeface="Arial" pitchFamily="34" charset="0"/>
-                <a:ea typeface="Arial" pitchFamily="34" charset="-122"/>
-                <a:cs typeface="Arial" pitchFamily="34" charset="-120"/>
-              </a:rPr>
-              <a:t>38 h tariff week; statutory break rules</a:t>
-            </a:r>
-            <a:endParaRPr lang="en-US" sz="800" dirty="0"/>
-          </a:p>
-        </p:txBody>
-      </p:sp>
-      <p:sp>
-        <p:nvSpPr>
-          <p:cNvPr id="15" name="Text 13">
-            <a:hlinkClick r:id="rId3" tooltip="Arbeitszeitgesetz §4"/>
-          </p:cNvPr>
-          <p:cNvSpPr txBox="1"/>
-          <p:nvPr/>
-        </p:nvSpPr>
-        <p:spPr>
-          <a:xfrm>
-            <a:off x="5669280" y="1316736"/>
-            <a:ext cx="6035040" cy="219456"/>
-          </a:xfrm>
-          <a:prstGeom prst="rect">
-            <a:avLst/>
-          </a:prstGeom>
-          <a:noFill/>
-          <a:ln/>
-        </p:spPr>
-        <p:txBody>
-          <a:bodyPr wrap="square" lIns="0" tIns="0" rIns="0" bIns="0" rtlCol="0" anchor="ctr"/>
-          <a:lstStyle/>
-          <a:p>
-            <a:pPr indent="0" marL="0">
-              <a:buNone/>
-            </a:pPr>
-            <a:r>
-              <a:rPr lang="en-US" sz="840" u="sng" dirty="0">
-                <a:solidFill>
-                  <a:srgbClr val="0B5F8A"/>
-                </a:solidFill>
-                <a:latin typeface="Arial" pitchFamily="34" charset="0"/>
-                <a:ea typeface="Arial" pitchFamily="34" charset="-122"/>
-                <a:cs typeface="Arial" pitchFamily="34" charset="-120"/>
-                <a:hlinkClick r:id="rId3" invalidUrl="" action="" tgtFrame="" tooltip="Arbeitszeitgesetz §4" history="1" highlightClick="0" endSnd="0">
-                  <a:extLst>
-                    <a:ext uri="{A12FA001-AC4F-418D-AE19-62706E023703}">
-                      <ahyp:hlinkClr xmlns:ahyp="http://schemas.microsoft.com/office/drawing/2018/hyperlinkcolor" val="tx"/>
-                    </a:ext>
-                  </a:extLst>
-                </a:hlinkClick>
-              </a:rPr>
-              <a:t>Arbeitszeitgesetz §4</a:t>
-            </a:r>
-            <a:endParaRPr lang="en-US" sz="840" dirty="0"/>
-          </a:p>
-        </p:txBody>
-      </p:sp>
-      <p:sp>
-        <p:nvSpPr>
-          <p:cNvPr id="16" name="Shape 14"/>
-          <p:cNvSpPr/>
-          <p:nvPr/>
-        </p:nvSpPr>
-        <p:spPr>
-          <a:xfrm>
-            <a:off x="365760" y="1645920"/>
-            <a:ext cx="45720" cy="310896"/>
-          </a:xfrm>
-          <a:prstGeom prst="rect">
-            <a:avLst/>
-          </a:prstGeom>
-          <a:solidFill>
-            <a:srgbClr val="0891B2"/>
-          </a:solidFill>
-          <a:ln/>
-        </p:spPr>
-      </p:sp>
-      <p:sp>
-        <p:nvSpPr>
-          <p:cNvPr id="17" name="Text 15"/>
-          <p:cNvSpPr txBox="1"/>
-          <p:nvPr/>
-        </p:nvSpPr>
-        <p:spPr>
-          <a:xfrm>
-            <a:off x="530352" y="1627632"/>
-            <a:ext cx="1965960" cy="182880"/>
-          </a:xfrm>
-          <a:prstGeom prst="rect">
-            <a:avLst/>
-          </a:prstGeom>
-          <a:noFill/>
-          <a:ln/>
-        </p:spPr>
-        <p:txBody>
-          <a:bodyPr wrap="square" lIns="0" tIns="0" rIns="0" bIns="0" rtlCol="0" anchor="ctr"/>
-          <a:lstStyle/>
-          <a:p>
-            <a:pPr indent="0" marL="0">
-              <a:buNone/>
-            </a:pPr>
-            <a:r>
-              <a:rPr lang="en-US" sz="860" b="1" dirty="0">
-                <a:solidFill>
-                  <a:srgbClr val="1B2430"/>
-                </a:solidFill>
-                <a:latin typeface="Arial" pitchFamily="34" charset="0"/>
-                <a:ea typeface="Arial" pitchFamily="34" charset="-122"/>
-                <a:cs typeface="Arial" pitchFamily="34" charset="-120"/>
-              </a:rPr>
-              <a:t>Model prices</a:t>
-            </a:r>
-            <a:endParaRPr lang="en-US" sz="860" dirty="0"/>
-          </a:p>
-        </p:txBody>
-      </p:sp>
-      <p:sp>
-        <p:nvSpPr>
-          <p:cNvPr id="18" name="Text 16"/>
-          <p:cNvSpPr txBox="1"/>
-          <p:nvPr/>
-        </p:nvSpPr>
-        <p:spPr>
-          <a:xfrm>
-            <a:off x="530352" y="1783080"/>
-            <a:ext cx="4937760" cy="182880"/>
-          </a:xfrm>
-          <a:prstGeom prst="rect">
-            <a:avLst/>
-          </a:prstGeom>
-          <a:noFill/>
-          <a:ln/>
-        </p:spPr>
-        <p:txBody>
-          <a:bodyPr wrap="square" lIns="0" tIns="0" rIns="0" bIns="0" rtlCol="0" anchor="ctr"/>
-          <a:lstStyle/>
-          <a:p>
-            <a:pPr indent="0" marL="0">
-              <a:buNone/>
-            </a:pPr>
-            <a:r>
-              <a:rPr lang="en-US" sz="800" dirty="0">
-                <a:solidFill>
-                  <a:srgbClr val="5A5A5A"/>
-                </a:solidFill>
-                <a:latin typeface="Arial" pitchFamily="34" charset="0"/>
-                <a:ea typeface="Arial" pitchFamily="34" charset="-122"/>
-                <a:cs typeface="Arial" pitchFamily="34" charset="-120"/>
-              </a:rPr>
-              <a:t>gpt-5.6 terra — $2 in / $12 out per million tokens</a:t>
-            </a:r>
-            <a:endParaRPr lang="en-US" sz="800" dirty="0"/>
-          </a:p>
-        </p:txBody>
-      </p:sp>
-      <p:sp>
-        <p:nvSpPr>
-          <p:cNvPr id="19" name="Text 17">
-            <a:hlinkClick r:id="rId4" tooltip="OpenAI API pricing"/>
-          </p:cNvPr>
-          <p:cNvSpPr txBox="1"/>
-          <p:nvPr/>
-        </p:nvSpPr>
-        <p:spPr>
-          <a:xfrm>
-            <a:off x="5669280" y="1682496"/>
-            <a:ext cx="6035040" cy="219456"/>
-          </a:xfrm>
-          <a:prstGeom prst="rect">
-            <a:avLst/>
-          </a:prstGeom>
-          <a:noFill/>
-          <a:ln/>
-        </p:spPr>
-        <p:txBody>
-          <a:bodyPr wrap="square" lIns="0" tIns="0" rIns="0" bIns="0" rtlCol="0" anchor="ctr"/>
-          <a:lstStyle/>
-          <a:p>
-            <a:pPr indent="0" marL="0">
-              <a:buNone/>
-            </a:pPr>
-            <a:r>
-              <a:rPr lang="en-US" sz="840" u="sng" dirty="0">
-                <a:solidFill>
-                  <a:srgbClr val="0B5F8A"/>
-                </a:solidFill>
-                <a:latin typeface="Arial" pitchFamily="34" charset="0"/>
-                <a:ea typeface="Arial" pitchFamily="34" charset="-122"/>
-                <a:cs typeface="Arial" pitchFamily="34" charset="-120"/>
-                <a:hlinkClick r:id="rId4" invalidUrl="" action="" tgtFrame="" tooltip="OpenAI API pricing" history="1" highlightClick="0" endSnd="0">
-                  <a:extLst>
-                    <a:ext uri="{A12FA001-AC4F-418D-AE19-62706E023703}">
-                      <ahyp:hlinkClr xmlns:ahyp="http://schemas.microsoft.com/office/drawing/2018/hyperlinkcolor" val="tx"/>
-                    </a:ext>
-                  </a:extLst>
-                </a:hlinkClick>
-              </a:rPr>
-              <a:t>OpenAI API pricing</a:t>
-            </a:r>
-            <a:endParaRPr lang="en-US" sz="840" dirty="0"/>
-          </a:p>
-        </p:txBody>
-      </p:sp>
-      <p:sp>
-        <p:nvSpPr>
-          <p:cNvPr id="20" name="Shape 18"/>
-          <p:cNvSpPr/>
-          <p:nvPr/>
-        </p:nvSpPr>
-        <p:spPr>
-          <a:xfrm>
-            <a:off x="365760" y="2011680"/>
-            <a:ext cx="45720" cy="310896"/>
-          </a:xfrm>
-          <a:prstGeom prst="rect">
-            <a:avLst/>
-          </a:prstGeom>
-          <a:solidFill>
-            <a:srgbClr val="0891B2"/>
-          </a:solidFill>
-          <a:ln/>
-        </p:spPr>
-      </p:sp>
-      <p:sp>
-        <p:nvSpPr>
-          <p:cNvPr id="21" name="Text 19"/>
-          <p:cNvSpPr txBox="1"/>
-          <p:nvPr/>
-        </p:nvSpPr>
-        <p:spPr>
-          <a:xfrm>
-            <a:off x="530352" y="1993392"/>
-            <a:ext cx="1965960" cy="182880"/>
-          </a:xfrm>
-          <a:prstGeom prst="rect">
-            <a:avLst/>
-          </a:prstGeom>
-          <a:noFill/>
-          <a:ln/>
-        </p:spPr>
-        <p:txBody>
-          <a:bodyPr wrap="square" lIns="0" tIns="0" rIns="0" bIns="0" rtlCol="0" anchor="ctr"/>
-          <a:lstStyle/>
-          <a:p>
-            <a:pPr indent="0" marL="0">
-              <a:buNone/>
-            </a:pPr>
-            <a:r>
-              <a:rPr lang="en-US" sz="860" b="1" dirty="0">
-                <a:solidFill>
-                  <a:srgbClr val="1B2430"/>
-                </a:solidFill>
-                <a:latin typeface="Arial" pitchFamily="34" charset="0"/>
-                <a:ea typeface="Arial" pitchFamily="34" charset="-122"/>
-                <a:cs typeface="Arial" pitchFamily="34" charset="-120"/>
-              </a:rPr>
-              <a:t>Container hosting</a:t>
-            </a:r>
-            <a:endParaRPr lang="en-US" sz="860" dirty="0"/>
-          </a:p>
-        </p:txBody>
-      </p:sp>
-      <p:sp>
-        <p:nvSpPr>
-          <p:cNvPr id="22" name="Text 20"/>
-          <p:cNvSpPr txBox="1"/>
-          <p:nvPr/>
-        </p:nvSpPr>
-        <p:spPr>
-          <a:xfrm>
-            <a:off x="530352" y="2148840"/>
-            <a:ext cx="4937760" cy="182880"/>
-          </a:xfrm>
-          <a:prstGeom prst="rect">
-            <a:avLst/>
-          </a:prstGeom>
-          <a:noFill/>
-          <a:ln/>
-        </p:spPr>
-        <p:txBody>
-          <a:bodyPr wrap="square" lIns="0" tIns="0" rIns="0" bIns="0" rtlCol="0" anchor="ctr"/>
-          <a:lstStyle/>
-          <a:p>
-            <a:pPr indent="0" marL="0">
-              <a:buNone/>
-            </a:pPr>
-            <a:r>
-              <a:rPr lang="en-US" sz="800" dirty="0">
-                <a:solidFill>
-                  <a:srgbClr val="5A5A5A"/>
-                </a:solidFill>
-                <a:latin typeface="Arial" pitchFamily="34" charset="0"/>
-                <a:ea typeface="Arial" pitchFamily="34" charset="-122"/>
-                <a:cs typeface="Arial" pitchFamily="34" charset="-120"/>
-              </a:rPr>
-              <a:t>Consumption plan rates and the monthly free grant</a:t>
-            </a:r>
-            <a:endParaRPr lang="en-US" sz="800" dirty="0"/>
-          </a:p>
-        </p:txBody>
-      </p:sp>
-      <p:sp>
-        <p:nvSpPr>
-          <p:cNvPr id="23" name="Text 21">
-            <a:hlinkClick r:id="rId5" tooltip="Azure Container Apps pricing"/>
-          </p:cNvPr>
-          <p:cNvSpPr txBox="1"/>
-          <p:nvPr/>
-        </p:nvSpPr>
-        <p:spPr>
-          <a:xfrm>
-            <a:off x="5669280" y="2048256"/>
-            <a:ext cx="6035040" cy="219456"/>
-          </a:xfrm>
-          <a:prstGeom prst="rect">
-            <a:avLst/>
-          </a:prstGeom>
-          <a:noFill/>
-          <a:ln/>
-        </p:spPr>
-        <p:txBody>
-          <a:bodyPr wrap="square" lIns="0" tIns="0" rIns="0" bIns="0" rtlCol="0" anchor="ctr"/>
-          <a:lstStyle/>
-          <a:p>
-            <a:pPr indent="0" marL="0">
-              <a:buNone/>
-            </a:pPr>
-            <a:r>
-              <a:rPr lang="en-US" sz="840" u="sng" dirty="0">
-                <a:solidFill>
-                  <a:srgbClr val="0B5F8A"/>
-                </a:solidFill>
-                <a:latin typeface="Arial" pitchFamily="34" charset="0"/>
-                <a:ea typeface="Arial" pitchFamily="34" charset="-122"/>
-                <a:cs typeface="Arial" pitchFamily="34" charset="-120"/>
-                <a:hlinkClick r:id="rId5" invalidUrl="" action="" tgtFrame="" tooltip="Azure Container Apps pricing" history="1" highlightClick="0" endSnd="0">
-                  <a:extLst>
-                    <a:ext uri="{A12FA001-AC4F-418D-AE19-62706E023703}">
-                      <ahyp:hlinkClr xmlns:ahyp="http://schemas.microsoft.com/office/drawing/2018/hyperlinkcolor" val="tx"/>
-                    </a:ext>
-                  </a:extLst>
-                </a:hlinkClick>
-              </a:rPr>
-              <a:t>Azure Container Apps pricing</a:t>
-            </a:r>
-            <a:endParaRPr lang="en-US" sz="840" dirty="0"/>
-          </a:p>
-        </p:txBody>
-      </p:sp>
-      <p:sp>
-        <p:nvSpPr>
-          <p:cNvPr id="24" name="Shape 22"/>
-          <p:cNvSpPr/>
-          <p:nvPr/>
-        </p:nvSpPr>
-        <p:spPr>
-          <a:xfrm>
-            <a:off x="365760" y="2377440"/>
-            <a:ext cx="45720" cy="310896"/>
-          </a:xfrm>
-          <a:prstGeom prst="rect">
-            <a:avLst/>
-          </a:prstGeom>
-          <a:solidFill>
-            <a:srgbClr val="0891B2"/>
-          </a:solidFill>
-          <a:ln/>
-        </p:spPr>
-      </p:sp>
-      <p:sp>
-        <p:nvSpPr>
-          <p:cNvPr id="25" name="Text 23"/>
-          <p:cNvSpPr txBox="1"/>
-          <p:nvPr/>
-        </p:nvSpPr>
-        <p:spPr>
-          <a:xfrm>
-            <a:off x="530352" y="2359152"/>
-            <a:ext cx="1965960" cy="182880"/>
-          </a:xfrm>
-          <a:prstGeom prst="rect">
-            <a:avLst/>
-          </a:prstGeom>
-          <a:noFill/>
-          <a:ln/>
-        </p:spPr>
-        <p:txBody>
-          <a:bodyPr wrap="square" lIns="0" tIns="0" rIns="0" bIns="0" rtlCol="0" anchor="ctr"/>
-          <a:lstStyle/>
-          <a:p>
-            <a:pPr indent="0" marL="0">
-              <a:buNone/>
-            </a:pPr>
-            <a:r>
-              <a:rPr lang="en-US" sz="860" b="1" dirty="0">
-                <a:solidFill>
-                  <a:srgbClr val="1B2430"/>
-                </a:solidFill>
-                <a:latin typeface="Arial" pitchFamily="34" charset="0"/>
-                <a:ea typeface="Arial" pitchFamily="34" charset="-122"/>
-                <a:cs typeface="Arial" pitchFamily="34" charset="-120"/>
-              </a:rPr>
-              <a:t>Database</a:t>
-            </a:r>
-            <a:endParaRPr lang="en-US" sz="860" dirty="0"/>
-          </a:p>
-        </p:txBody>
-      </p:sp>
-      <p:sp>
-        <p:nvSpPr>
-          <p:cNvPr id="26" name="Text 24"/>
-          <p:cNvSpPr txBox="1"/>
-          <p:nvPr/>
-        </p:nvSpPr>
-        <p:spPr>
-          <a:xfrm>
-            <a:off x="530352" y="2514600"/>
-            <a:ext cx="4937760" cy="182880"/>
-          </a:xfrm>
-          <a:prstGeom prst="rect">
-            <a:avLst/>
-          </a:prstGeom>
-          <a:noFill/>
-          <a:ln/>
-        </p:spPr>
-        <p:txBody>
-          <a:bodyPr wrap="square" lIns="0" tIns="0" rIns="0" bIns="0" rtlCol="0" anchor="ctr"/>
-          <a:lstStyle/>
-          <a:p>
-            <a:pPr indent="0" marL="0">
-              <a:buNone/>
-            </a:pPr>
-            <a:r>
-              <a:rPr lang="en-US" sz="800" dirty="0">
-                <a:solidFill>
-                  <a:srgbClr val="5A5A5A"/>
-                </a:solidFill>
-                <a:latin typeface="Arial" pitchFamily="34" charset="0"/>
-                <a:ea typeface="Arial" pitchFamily="34" charset="-122"/>
-                <a:cs typeface="Arial" pitchFamily="34" charset="-120"/>
-              </a:rPr>
-              <a:t>PostgreSQL Flexible Server B2s — 2 vCore / 4 GiB</a:t>
-            </a:r>
-            <a:endParaRPr lang="en-US" sz="800" dirty="0"/>
-          </a:p>
-        </p:txBody>
-      </p:sp>
-      <p:sp>
-        <p:nvSpPr>
-          <p:cNvPr id="27" name="Text 25">
-            <a:hlinkClick r:id="rId6" tooltip="Azure Database for PostgreSQL"/>
-          </p:cNvPr>
-          <p:cNvSpPr txBox="1"/>
-          <p:nvPr/>
-        </p:nvSpPr>
-        <p:spPr>
-          <a:xfrm>
-            <a:off x="5669280" y="2414016"/>
-            <a:ext cx="6035040" cy="219456"/>
-          </a:xfrm>
-          <a:prstGeom prst="rect">
-            <a:avLst/>
-          </a:prstGeom>
-          <a:noFill/>
-          <a:ln/>
-        </p:spPr>
-        <p:txBody>
-          <a:bodyPr wrap="square" lIns="0" tIns="0" rIns="0" bIns="0" rtlCol="0" anchor="ctr"/>
-          <a:lstStyle/>
-          <a:p>
-            <a:pPr indent="0" marL="0">
-              <a:buNone/>
-            </a:pPr>
-            <a:r>
-              <a:rPr lang="en-US" sz="840" u="sng" dirty="0">
-                <a:solidFill>
-                  <a:srgbClr val="0B5F8A"/>
-                </a:solidFill>
-                <a:latin typeface="Arial" pitchFamily="34" charset="0"/>
-                <a:ea typeface="Arial" pitchFamily="34" charset="-122"/>
-                <a:cs typeface="Arial" pitchFamily="34" charset="-120"/>
-                <a:hlinkClick r:id="rId6" invalidUrl="" action="" tgtFrame="" tooltip="Azure Database for PostgreSQL" history="1" highlightClick="0" endSnd="0">
-                  <a:extLst>
-                    <a:ext uri="{A12FA001-AC4F-418D-AE19-62706E023703}">
-                      <ahyp:hlinkClr xmlns:ahyp="http://schemas.microsoft.com/office/drawing/2018/hyperlinkcolor" val="tx"/>
-                    </a:ext>
-                  </a:extLst>
-                </a:hlinkClick>
-              </a:rPr>
-              <a:t>Azure Database for PostgreSQL</a:t>
-            </a:r>
-            <a:endParaRPr lang="en-US" sz="840" dirty="0"/>
-          </a:p>
-        </p:txBody>
-      </p:sp>
-      <p:sp>
-        <p:nvSpPr>
-          <p:cNvPr id="28" name="Shape 26"/>
-          <p:cNvSpPr/>
-          <p:nvPr/>
-        </p:nvSpPr>
-        <p:spPr>
-          <a:xfrm>
-            <a:off x="365760" y="2743200"/>
-            <a:ext cx="45720" cy="310896"/>
-          </a:xfrm>
-          <a:prstGeom prst="rect">
-            <a:avLst/>
-          </a:prstGeom>
-          <a:solidFill>
-            <a:srgbClr val="0891B2"/>
-          </a:solidFill>
-          <a:ln/>
-        </p:spPr>
-      </p:sp>
-      <p:sp>
-        <p:nvSpPr>
-          <p:cNvPr id="29" name="Text 27"/>
-          <p:cNvSpPr txBox="1"/>
-          <p:nvPr/>
-        </p:nvSpPr>
-        <p:spPr>
-          <a:xfrm>
-            <a:off x="530352" y="2724912"/>
-            <a:ext cx="1965960" cy="182880"/>
-          </a:xfrm>
-          <a:prstGeom prst="rect">
-            <a:avLst/>
-          </a:prstGeom>
-          <a:noFill/>
-          <a:ln/>
-        </p:spPr>
-        <p:txBody>
-          <a:bodyPr wrap="square" lIns="0" tIns="0" rIns="0" bIns="0" rtlCol="0" anchor="ctr"/>
-          <a:lstStyle/>
-          <a:p>
-            <a:pPr indent="0" marL="0">
-              <a:buNone/>
-            </a:pPr>
-            <a:r>
-              <a:rPr lang="en-US" sz="860" b="1" dirty="0">
-                <a:solidFill>
-                  <a:srgbClr val="1B2430"/>
-                </a:solidFill>
-                <a:latin typeface="Arial" pitchFamily="34" charset="0"/>
-                <a:ea typeface="Arial" pitchFamily="34" charset="-122"/>
-                <a:cs typeface="Arial" pitchFamily="34" charset="-120"/>
-              </a:rPr>
-              <a:t>Build-team pay</a:t>
-            </a:r>
-            <a:endParaRPr lang="en-US" sz="860" dirty="0"/>
-          </a:p>
-        </p:txBody>
-      </p:sp>
-      <p:sp>
-        <p:nvSpPr>
-          <p:cNvPr id="30" name="Text 28"/>
-          <p:cNvSpPr txBox="1"/>
-          <p:nvPr/>
-        </p:nvSpPr>
-        <p:spPr>
-          <a:xfrm>
-            <a:off x="530352" y="2880360"/>
-            <a:ext cx="4937760" cy="182880"/>
-          </a:xfrm>
-          <a:prstGeom prst="rect">
-            <a:avLst/>
-          </a:prstGeom>
-          <a:noFill/>
-          <a:ln/>
-        </p:spPr>
-        <p:txBody>
-          <a:bodyPr wrap="square" lIns="0" tIns="0" rIns="0" bIns="0" rtlCol="0" anchor="ctr"/>
-          <a:lstStyle/>
-          <a:p>
-            <a:pPr indent="0" marL="0">
-              <a:buNone/>
-            </a:pPr>
-            <a:r>
-              <a:rPr lang="en-US" sz="800" dirty="0">
-                <a:solidFill>
-                  <a:srgbClr val="5A5A5A"/>
-                </a:solidFill>
-                <a:latin typeface="Arial" pitchFamily="34" charset="0"/>
-                <a:ea typeface="Arial" pitchFamily="34" charset="-122"/>
-                <a:cs typeface="Arial" pitchFamily="34" charset="-120"/>
-              </a:rPr>
-              <a:t>Senior ML engineer ≈ €98k; juniors at €70k as briefed</a:t>
-            </a:r>
-            <a:endParaRPr lang="en-US" sz="800" dirty="0"/>
-          </a:p>
-        </p:txBody>
-      </p:sp>
-      <p:sp>
-        <p:nvSpPr>
-          <p:cNvPr id="31" name="Text 29">
-            <a:hlinkClick r:id="rId7" tooltip="Glassdoor, ML Engineer Germany"/>
-          </p:cNvPr>
-          <p:cNvSpPr txBox="1"/>
-          <p:nvPr/>
-        </p:nvSpPr>
-        <p:spPr>
-          <a:xfrm>
-            <a:off x="5669280" y="2779776"/>
-            <a:ext cx="6035040" cy="219456"/>
-          </a:xfrm>
-          <a:prstGeom prst="rect">
-            <a:avLst/>
-          </a:prstGeom>
-          <a:noFill/>
-          <a:ln/>
-        </p:spPr>
-        <p:txBody>
-          <a:bodyPr wrap="square" lIns="0" tIns="0" rIns="0" bIns="0" rtlCol="0" anchor="ctr"/>
-          <a:lstStyle/>
-          <a:p>
-            <a:pPr indent="0" marL="0">
-              <a:buNone/>
-            </a:pPr>
-            <a:r>
-              <a:rPr lang="en-US" sz="840" u="sng" dirty="0">
-                <a:solidFill>
-                  <a:srgbClr val="0B5F8A"/>
-                </a:solidFill>
-                <a:latin typeface="Arial" pitchFamily="34" charset="0"/>
-                <a:ea typeface="Arial" pitchFamily="34" charset="-122"/>
-                <a:cs typeface="Arial" pitchFamily="34" charset="-120"/>
-                <a:hlinkClick r:id="rId7" invalidUrl="" action="" tgtFrame="" tooltip="Glassdoor, ML Engineer Germany" history="1" highlightClick="0" endSnd="0">
-                  <a:extLst>
-                    <a:ext uri="{A12FA001-AC4F-418D-AE19-62706E023703}">
-                      <ahyp:hlinkClr xmlns:ahyp="http://schemas.microsoft.com/office/drawing/2018/hyperlinkcolor" val="tx"/>
-                    </a:ext>
-                  </a:extLst>
-                </a:hlinkClick>
-              </a:rPr>
-              <a:t>Glassdoor, ML Engineer Germany</a:t>
-            </a:r>
-            <a:endParaRPr lang="en-US" sz="840" dirty="0"/>
-          </a:p>
-        </p:txBody>
-      </p:sp>
-      <p:sp>
-        <p:nvSpPr>
-          <p:cNvPr id="32" name="Shape 30"/>
-          <p:cNvSpPr/>
-          <p:nvPr/>
-        </p:nvSpPr>
-        <p:spPr>
-          <a:xfrm>
-            <a:off x="365760" y="3108960"/>
-            <a:ext cx="45720" cy="310896"/>
-          </a:xfrm>
-          <a:prstGeom prst="rect">
-            <a:avLst/>
-          </a:prstGeom>
-          <a:solidFill>
-            <a:srgbClr val="0891B2"/>
-          </a:solidFill>
-          <a:ln/>
-        </p:spPr>
-      </p:sp>
-      <p:sp>
-        <p:nvSpPr>
-          <p:cNvPr id="33" name="Text 31"/>
-          <p:cNvSpPr txBox="1"/>
-          <p:nvPr/>
-        </p:nvSpPr>
-        <p:spPr>
-          <a:xfrm>
-            <a:off x="530352" y="3090672"/>
-            <a:ext cx="1965960" cy="182880"/>
-          </a:xfrm>
-          <a:prstGeom prst="rect">
-            <a:avLst/>
-          </a:prstGeom>
-          <a:noFill/>
-          <a:ln/>
-        </p:spPr>
-        <p:txBody>
-          <a:bodyPr wrap="square" lIns="0" tIns="0" rIns="0" bIns="0" rtlCol="0" anchor="ctr"/>
-          <a:lstStyle/>
-          <a:p>
-            <a:pPr indent="0" marL="0">
-              <a:buNone/>
-            </a:pPr>
-            <a:r>
-              <a:rPr lang="en-US" sz="860" b="1" dirty="0">
-                <a:solidFill>
-                  <a:srgbClr val="1B2430"/>
-                </a:solidFill>
-                <a:latin typeface="Arial" pitchFamily="34" charset="0"/>
-                <a:ea typeface="Arial" pitchFamily="34" charset="-122"/>
-                <a:cs typeface="Arial" pitchFamily="34" charset="-120"/>
-              </a:rPr>
-              <a:t>Upkeep after go-live</a:t>
-            </a:r>
-            <a:endParaRPr lang="en-US" sz="860" dirty="0"/>
-          </a:p>
-        </p:txBody>
-      </p:sp>
-      <p:sp>
-        <p:nvSpPr>
-          <p:cNvPr id="34" name="Text 32"/>
-          <p:cNvSpPr txBox="1"/>
-          <p:nvPr/>
-        </p:nvSpPr>
-        <p:spPr>
-          <a:xfrm>
-            <a:off x="530352" y="3246120"/>
-            <a:ext cx="4937760" cy="182880"/>
-          </a:xfrm>
-          <a:prstGeom prst="rect">
-            <a:avLst/>
-          </a:prstGeom>
-          <a:noFill/>
-          <a:ln/>
-        </p:spPr>
-        <p:txBody>
-          <a:bodyPr wrap="square" lIns="0" tIns="0" rIns="0" bIns="0" rtlCol="0" anchor="ctr"/>
-          <a:lstStyle/>
-          <a:p>
-            <a:pPr indent="0" marL="0">
-              <a:buNone/>
-            </a:pPr>
-            <a:r>
-              <a:rPr lang="en-US" sz="800" dirty="0">
-                <a:solidFill>
-                  <a:srgbClr val="5A5A5A"/>
-                </a:solidFill>
-                <a:latin typeface="Arial" pitchFamily="34" charset="0"/>
-                <a:ea typeface="Arial" pitchFamily="34" charset="-122"/>
-                <a:cs typeface="Arial" pitchFamily="34" charset="-120"/>
-              </a:rPr>
-              <a:t>15–20% of build effort a year — our 0.25 FTE is 17%</a:t>
-            </a:r>
-            <a:endParaRPr lang="en-US" sz="800" dirty="0"/>
-          </a:p>
-        </p:txBody>
-      </p:sp>
-      <p:sp>
-        <p:nvSpPr>
-          <p:cNvPr id="35" name="Text 33"/>
-          <p:cNvSpPr txBox="1"/>
-          <p:nvPr/>
-        </p:nvSpPr>
-        <p:spPr>
-          <a:xfrm>
-            <a:off x="5669280" y="3145536"/>
-            <a:ext cx="6035040" cy="219456"/>
-          </a:xfrm>
-          <a:prstGeom prst="rect">
-            <a:avLst/>
-          </a:prstGeom>
-          <a:noFill/>
-          <a:ln/>
-        </p:spPr>
-        <p:txBody>
-          <a:bodyPr wrap="square" lIns="0" tIns="0" rIns="0" bIns="0" rtlCol="0" anchor="ctr"/>
-          <a:lstStyle/>
-          <a:p>
-            <a:pPr indent="0" marL="0">
-              <a:buNone/>
-            </a:pPr>
-            <a:r>
-              <a:rPr lang="en-US" sz="840" i="1" dirty="0">
-                <a:solidFill>
-                  <a:srgbClr val="5A5A5A"/>
-                </a:solidFill>
-                <a:latin typeface="Arial" pitchFamily="34" charset="0"/>
-                <a:ea typeface="Arial" pitchFamily="34" charset="-122"/>
-                <a:cs typeface="Arial" pitchFamily="34" charset="-120"/>
-              </a:rPr>
-              <a:t>Software maintenance rule of thumb</a:t>
-            </a:r>
-            <a:endParaRPr lang="en-US" sz="840" dirty="0"/>
-          </a:p>
-        </p:txBody>
-      </p:sp>
-      <p:sp>
-        <p:nvSpPr>
-          <p:cNvPr id="36" name="Shape 34"/>
-          <p:cNvSpPr/>
-          <p:nvPr/>
-        </p:nvSpPr>
-        <p:spPr>
-          <a:xfrm>
-            <a:off x="365760" y="3474720"/>
-            <a:ext cx="45720" cy="310896"/>
-          </a:xfrm>
-          <a:prstGeom prst="rect">
-            <a:avLst/>
-          </a:prstGeom>
-          <a:solidFill>
-            <a:srgbClr val="0891B2"/>
-          </a:solidFill>
-          <a:ln/>
-        </p:spPr>
-      </p:sp>
-      <p:sp>
-        <p:nvSpPr>
-          <p:cNvPr id="37" name="Text 35"/>
-          <p:cNvSpPr txBox="1"/>
-          <p:nvPr/>
-        </p:nvSpPr>
-        <p:spPr>
-          <a:xfrm>
-            <a:off x="530352" y="3456432"/>
-            <a:ext cx="1965960" cy="182880"/>
-          </a:xfrm>
-          <a:prstGeom prst="rect">
-            <a:avLst/>
-          </a:prstGeom>
-          <a:noFill/>
-          <a:ln/>
-        </p:spPr>
-        <p:txBody>
-          <a:bodyPr wrap="square" lIns="0" tIns="0" rIns="0" bIns="0" rtlCol="0" anchor="ctr"/>
-          <a:lstStyle/>
-          <a:p>
-            <a:pPr indent="0" marL="0">
-              <a:buNone/>
-            </a:pPr>
-            <a:r>
-              <a:rPr lang="en-US" sz="860" b="1" dirty="0">
-                <a:solidFill>
-                  <a:srgbClr val="1B2430"/>
-                </a:solidFill>
-                <a:latin typeface="Arial" pitchFamily="34" charset="0"/>
-                <a:ea typeface="Arial" pitchFamily="34" charset="-122"/>
-                <a:cs typeface="Arial" pitchFamily="34" charset="-120"/>
-              </a:rPr>
-              <a:t>Industry baseline</a:t>
-            </a:r>
-            <a:endParaRPr lang="en-US" sz="860" dirty="0"/>
-          </a:p>
-        </p:txBody>
-      </p:sp>
-      <p:sp>
-        <p:nvSpPr>
-          <p:cNvPr id="38" name="Text 36"/>
-          <p:cNvSpPr txBox="1"/>
-          <p:nvPr/>
-        </p:nvSpPr>
-        <p:spPr>
-          <a:xfrm>
-            <a:off x="530352" y="3611880"/>
-            <a:ext cx="4937760" cy="182880"/>
-          </a:xfrm>
-          <a:prstGeom prst="rect">
-            <a:avLst/>
-          </a:prstGeom>
-          <a:noFill/>
-          <a:ln/>
-        </p:spPr>
-        <p:txBody>
-          <a:bodyPr wrap="square" lIns="0" tIns="0" rIns="0" bIns="0" rtlCol="0" anchor="ctr"/>
-          <a:lstStyle/>
-          <a:p>
-            <a:pPr indent="0" marL="0">
-              <a:buNone/>
-            </a:pPr>
-            <a:r>
-              <a:rPr lang="en-US" sz="800" dirty="0">
-                <a:solidFill>
-                  <a:srgbClr val="5A5A5A"/>
-                </a:solidFill>
-                <a:latin typeface="Arial" pitchFamily="34" charset="0"/>
-                <a:ea typeface="Arial" pitchFamily="34" charset="-122"/>
-                <a:cs typeface="Arial" pitchFamily="34" charset="-120"/>
-              </a:rPr>
-              <a:t>17 of 20 carriers still manual; none let AI decide alone</a:t>
-            </a:r>
-            <a:endParaRPr lang="en-US" sz="800" dirty="0"/>
-          </a:p>
-        </p:txBody>
-      </p:sp>
-      <p:sp>
-        <p:nvSpPr>
-          <p:cNvPr id="39" name="Text 37">
-            <a:hlinkClick r:id="rId8" tooltip="Decerto, 2026 Claims Decisioning Pulse"/>
-          </p:cNvPr>
-          <p:cNvSpPr txBox="1"/>
-          <p:nvPr/>
-        </p:nvSpPr>
-        <p:spPr>
-          <a:xfrm>
-            <a:off x="5669280" y="3511296"/>
-            <a:ext cx="6035040" cy="219456"/>
-          </a:xfrm>
-          <a:prstGeom prst="rect">
-            <a:avLst/>
-          </a:prstGeom>
-          <a:noFill/>
-          <a:ln/>
-        </p:spPr>
-        <p:txBody>
-          <a:bodyPr wrap="square" lIns="0" tIns="0" rIns="0" bIns="0" rtlCol="0" anchor="ctr"/>
-          <a:lstStyle/>
-          <a:p>
-            <a:pPr indent="0" marL="0">
-              <a:buNone/>
-            </a:pPr>
-            <a:r>
-              <a:rPr lang="en-US" sz="840" u="sng" dirty="0">
-                <a:solidFill>
-                  <a:srgbClr val="0B5F8A"/>
-                </a:solidFill>
-                <a:latin typeface="Arial" pitchFamily="34" charset="0"/>
-                <a:ea typeface="Arial" pitchFamily="34" charset="-122"/>
-                <a:cs typeface="Arial" pitchFamily="34" charset="-120"/>
-                <a:hlinkClick r:id="rId8" invalidUrl="" action="" tgtFrame="" tooltip="Decerto, 2026 Claims Decisioning Pulse" history="1" highlightClick="0" endSnd="0">
-                  <a:extLst>
-                    <a:ext uri="{A12FA001-AC4F-418D-AE19-62706E023703}">
-                      <ahyp:hlinkClr xmlns:ahyp="http://schemas.microsoft.com/office/drawing/2018/hyperlinkcolor" val="tx"/>
-                    </a:ext>
-                  </a:extLst>
-                </a:hlinkClick>
-              </a:rPr>
-              <a:t>Decerto, 2026 Claims Decisioning Pulse</a:t>
-            </a:r>
-            <a:endParaRPr lang="en-US" sz="840" dirty="0"/>
-          </a:p>
-        </p:txBody>
-      </p:sp>
-      <p:sp>
-        <p:nvSpPr>
-          <p:cNvPr id="40" name="Shape 38"/>
-          <p:cNvSpPr/>
-          <p:nvPr/>
-        </p:nvSpPr>
-        <p:spPr>
-          <a:xfrm>
-            <a:off x="365760" y="3840480"/>
-            <a:ext cx="45720" cy="310896"/>
-          </a:xfrm>
-          <a:prstGeom prst="rect">
-            <a:avLst/>
-          </a:prstGeom>
-          <a:solidFill>
-            <a:srgbClr val="0891B2"/>
-          </a:solidFill>
-          <a:ln/>
-        </p:spPr>
-      </p:sp>
-      <p:sp>
-        <p:nvSpPr>
-          <p:cNvPr id="41" name="Text 39"/>
-          <p:cNvSpPr txBox="1"/>
-          <p:nvPr/>
-        </p:nvSpPr>
-        <p:spPr>
-          <a:xfrm>
-            <a:off x="530352" y="3822192"/>
-            <a:ext cx="1965960" cy="182880"/>
-          </a:xfrm>
-          <a:prstGeom prst="rect">
-            <a:avLst/>
-          </a:prstGeom>
-          <a:noFill/>
-          <a:ln/>
-        </p:spPr>
-        <p:txBody>
-          <a:bodyPr wrap="square" lIns="0" tIns="0" rIns="0" bIns="0" rtlCol="0" anchor="ctr"/>
-          <a:lstStyle/>
-          <a:p>
-            <a:pPr indent="0" marL="0">
-              <a:buNone/>
-            </a:pPr>
-            <a:r>
-              <a:rPr lang="en-US" sz="860" b="1" dirty="0">
-                <a:solidFill>
-                  <a:srgbClr val="1B2430"/>
-                </a:solidFill>
-                <a:latin typeface="Arial" pitchFamily="34" charset="0"/>
-                <a:ea typeface="Arial" pitchFamily="34" charset="-122"/>
-                <a:cs typeface="Arial" pitchFamily="34" charset="-120"/>
-              </a:rPr>
-              <a:t>Where value comes from</a:t>
-            </a:r>
-            <a:endParaRPr lang="en-US" sz="860" dirty="0"/>
-          </a:p>
-        </p:txBody>
-      </p:sp>
-      <p:sp>
-        <p:nvSpPr>
-          <p:cNvPr id="42" name="Text 40"/>
-          <p:cNvSpPr txBox="1"/>
-          <p:nvPr/>
-        </p:nvSpPr>
-        <p:spPr>
-          <a:xfrm>
-            <a:off x="530352" y="3977640"/>
-            <a:ext cx="4937760" cy="182880"/>
-          </a:xfrm>
-          <a:prstGeom prst="rect">
-            <a:avLst/>
-          </a:prstGeom>
-          <a:noFill/>
-          <a:ln/>
-        </p:spPr>
-        <p:txBody>
-          <a:bodyPr wrap="square" lIns="0" tIns="0" rIns="0" bIns="0" rtlCol="0" anchor="ctr"/>
-          <a:lstStyle/>
-          <a:p>
-            <a:pPr indent="0" marL="0">
-              <a:buNone/>
-            </a:pPr>
-            <a:r>
-              <a:rPr lang="en-US" sz="800" dirty="0">
-                <a:solidFill>
-                  <a:srgbClr val="5A5A5A"/>
-                </a:solidFill>
-                <a:latin typeface="Arial" pitchFamily="34" charset="0"/>
-                <a:ea typeface="Arial" pitchFamily="34" charset="-122"/>
-                <a:cs typeface="Arial" pitchFamily="34" charset="-120"/>
-              </a:rPr>
-              <a:t>The 10-20-70 split — algorithms, technology, people</a:t>
-            </a:r>
-            <a:endParaRPr lang="en-US" sz="800" dirty="0"/>
-          </a:p>
-        </p:txBody>
-      </p:sp>
-      <p:sp>
-        <p:nvSpPr>
-          <p:cNvPr id="43" name="Text 41">
-            <a:hlinkClick r:id="rId9" tooltip="BCG, AI in customer service operations"/>
-          </p:cNvPr>
-          <p:cNvSpPr txBox="1"/>
-          <p:nvPr/>
-        </p:nvSpPr>
-        <p:spPr>
-          <a:xfrm>
-            <a:off x="5669280" y="3877056"/>
-            <a:ext cx="6035040" cy="219456"/>
-          </a:xfrm>
-          <a:prstGeom prst="rect">
-            <a:avLst/>
-          </a:prstGeom>
-          <a:noFill/>
-          <a:ln/>
-        </p:spPr>
-        <p:txBody>
-          <a:bodyPr wrap="square" lIns="0" tIns="0" rIns="0" bIns="0" rtlCol="0" anchor="ctr"/>
-          <a:lstStyle/>
-          <a:p>
-            <a:pPr indent="0" marL="0">
-              <a:buNone/>
-            </a:pPr>
-            <a:r>
-              <a:rPr lang="en-US" sz="840" u="sng" dirty="0">
-                <a:solidFill>
-                  <a:srgbClr val="0B5F8A"/>
-                </a:solidFill>
-                <a:latin typeface="Arial" pitchFamily="34" charset="0"/>
-                <a:ea typeface="Arial" pitchFamily="34" charset="-122"/>
-                <a:cs typeface="Arial" pitchFamily="34" charset="-120"/>
-                <a:hlinkClick r:id="rId9" invalidUrl="" action="" tgtFrame="" tooltip="BCG, AI in customer service operations" history="1" highlightClick="0" endSnd="0">
-                  <a:extLst>
-                    <a:ext uri="{A12FA001-AC4F-418D-AE19-62706E023703}">
-                      <ahyp:hlinkClr xmlns:ahyp="http://schemas.microsoft.com/office/drawing/2018/hyperlinkcolor" val="tx"/>
-                    </a:ext>
-                  </a:extLst>
-                </a:hlinkClick>
-              </a:rPr>
-              <a:t>BCG, AI in customer service operations</a:t>
-            </a:r>
-            <a:endParaRPr lang="en-US" sz="840" dirty="0"/>
-          </a:p>
-        </p:txBody>
-      </p:sp>
-      <p:sp>
-        <p:nvSpPr>
-          <p:cNvPr id="44" name="Shape 42"/>
-          <p:cNvSpPr/>
-          <p:nvPr/>
-        </p:nvSpPr>
-        <p:spPr>
-          <a:xfrm>
-            <a:off x="365760" y="4206240"/>
-            <a:ext cx="45720" cy="310896"/>
-          </a:xfrm>
-          <a:prstGeom prst="rect">
-            <a:avLst/>
-          </a:prstGeom>
-          <a:solidFill>
-            <a:srgbClr val="0891B2"/>
-          </a:solidFill>
-          <a:ln/>
-        </p:spPr>
-      </p:sp>
-      <p:sp>
-        <p:nvSpPr>
-          <p:cNvPr id="45" name="Text 43"/>
-          <p:cNvSpPr txBox="1"/>
-          <p:nvPr/>
-        </p:nvSpPr>
-        <p:spPr>
-          <a:xfrm>
-            <a:off x="530352" y="4187952"/>
-            <a:ext cx="1965960" cy="182880"/>
-          </a:xfrm>
-          <a:prstGeom prst="rect">
-            <a:avLst/>
-          </a:prstGeom>
-          <a:noFill/>
-          <a:ln/>
-        </p:spPr>
-        <p:txBody>
-          <a:bodyPr wrap="square" lIns="0" tIns="0" rIns="0" bIns="0" rtlCol="0" anchor="ctr"/>
-          <a:lstStyle/>
-          <a:p>
-            <a:pPr indent="0" marL="0">
-              <a:buNone/>
-            </a:pPr>
-            <a:r>
-              <a:rPr lang="en-US" sz="860" b="1" dirty="0">
-                <a:solidFill>
-                  <a:srgbClr val="1B2430"/>
-                </a:solidFill>
-                <a:latin typeface="Arial" pitchFamily="34" charset="0"/>
-                <a:ea typeface="Arial" pitchFamily="34" charset="-122"/>
-                <a:cs typeface="Arial" pitchFamily="34" charset="-120"/>
-              </a:rPr>
-              <a:t>Fixing import failures</a:t>
-            </a:r>
-            <a:endParaRPr lang="en-US" sz="860" dirty="0"/>
-          </a:p>
-        </p:txBody>
-      </p:sp>
-      <p:sp>
-        <p:nvSpPr>
-          <p:cNvPr id="46" name="Text 44"/>
-          <p:cNvSpPr txBox="1"/>
-          <p:nvPr/>
-        </p:nvSpPr>
-        <p:spPr>
-          <a:xfrm>
-            <a:off x="530352" y="4343400"/>
-            <a:ext cx="4937760" cy="182880"/>
-          </a:xfrm>
-          <a:prstGeom prst="rect">
-            <a:avLst/>
-          </a:prstGeom>
-          <a:noFill/>
-          <a:ln/>
-        </p:spPr>
-        <p:txBody>
-          <a:bodyPr wrap="square" lIns="0" tIns="0" rIns="0" bIns="0" rtlCol="0" anchor="ctr"/>
-          <a:lstStyle/>
-          <a:p>
-            <a:pPr indent="0" marL="0">
-              <a:buNone/>
-            </a:pPr>
-            <a:r>
-              <a:rPr lang="en-US" sz="800" dirty="0">
-                <a:solidFill>
-                  <a:srgbClr val="5A5A5A"/>
-                </a:solidFill>
-                <a:latin typeface="Arial" pitchFamily="34" charset="0"/>
-                <a:ea typeface="Arial" pitchFamily="34" charset="-122"/>
-                <a:cs typeface="Arial" pitchFamily="34" charset="-120"/>
-              </a:rPr>
-              <a:t>Retry vs. dead-letter, idempotency keys, alert on rate</a:t>
-            </a:r>
-            <a:endParaRPr lang="en-US" sz="800" dirty="0"/>
-          </a:p>
-        </p:txBody>
-      </p:sp>
-      <p:sp>
-        <p:nvSpPr>
-          <p:cNvPr id="47" name="Text 45">
-            <a:hlinkClick r:id="rId10" tooltip="Dead-letter queues and poison messages"/>
-          </p:cNvPr>
-          <p:cNvSpPr txBox="1"/>
-          <p:nvPr/>
-        </p:nvSpPr>
-        <p:spPr>
-          <a:xfrm>
-            <a:off x="5669280" y="4242816"/>
-            <a:ext cx="6035040" cy="219456"/>
-          </a:xfrm>
-          <a:prstGeom prst="rect">
-            <a:avLst/>
-          </a:prstGeom>
-          <a:noFill/>
-          <a:ln/>
-        </p:spPr>
-        <p:txBody>
-          <a:bodyPr wrap="square" lIns="0" tIns="0" rIns="0" bIns="0" rtlCol="0" anchor="ctr"/>
-          <a:lstStyle/>
-          <a:p>
-            <a:pPr indent="0" marL="0">
-              <a:buNone/>
-            </a:pPr>
-            <a:r>
-              <a:rPr lang="en-US" sz="840" u="sng" dirty="0">
-                <a:solidFill>
-                  <a:srgbClr val="0B5F8A"/>
-                </a:solidFill>
-                <a:latin typeface="Arial" pitchFamily="34" charset="0"/>
-                <a:ea typeface="Arial" pitchFamily="34" charset="-122"/>
-                <a:cs typeface="Arial" pitchFamily="34" charset="-120"/>
-                <a:hlinkClick r:id="rId10" invalidUrl="" action="" tgtFrame="" tooltip="Dead-letter queues and poison messages" history="1" highlightClick="0" endSnd="0">
-                  <a:extLst>
-                    <a:ext uri="{A12FA001-AC4F-418D-AE19-62706E023703}">
-                      <ahyp:hlinkClr xmlns:ahyp="http://schemas.microsoft.com/office/drawing/2018/hyperlinkcolor" val="tx"/>
-                    </a:ext>
-                  </a:extLst>
-                </a:hlinkClick>
-              </a:rPr>
-              <a:t>Dead-letter queues and poison messages</a:t>
-            </a:r>
-            <a:endParaRPr lang="en-US" sz="840" dirty="0"/>
-          </a:p>
-        </p:txBody>
-      </p:sp>
-      <p:sp>
-        <p:nvSpPr>
-          <p:cNvPr id="48" name="Shape 46"/>
-          <p:cNvSpPr/>
-          <p:nvPr/>
-        </p:nvSpPr>
-        <p:spPr>
-          <a:xfrm>
-            <a:off x="365760" y="4572000"/>
-            <a:ext cx="45720" cy="310896"/>
-          </a:xfrm>
-          <a:prstGeom prst="rect">
-            <a:avLst/>
-          </a:prstGeom>
-          <a:solidFill>
-            <a:srgbClr val="0891B2"/>
-          </a:solidFill>
-          <a:ln/>
-        </p:spPr>
-      </p:sp>
-      <p:sp>
-        <p:nvSpPr>
-          <p:cNvPr id="49" name="Text 47"/>
-          <p:cNvSpPr txBox="1"/>
-          <p:nvPr/>
-        </p:nvSpPr>
-        <p:spPr>
-          <a:xfrm>
-            <a:off x="530352" y="4553712"/>
-            <a:ext cx="1965960" cy="182880"/>
-          </a:xfrm>
-          <a:prstGeom prst="rect">
-            <a:avLst/>
-          </a:prstGeom>
-          <a:noFill/>
-          <a:ln/>
-        </p:spPr>
-        <p:txBody>
-          <a:bodyPr wrap="square" lIns="0" tIns="0" rIns="0" bIns="0" rtlCol="0" anchor="ctr"/>
-          <a:lstStyle/>
-          <a:p>
-            <a:pPr indent="0" marL="0">
-              <a:buNone/>
-            </a:pPr>
-            <a:r>
-              <a:rPr lang="en-US" sz="860" b="1" dirty="0">
-                <a:solidFill>
-                  <a:srgbClr val="1B2430"/>
-                </a:solidFill>
-                <a:latin typeface="Arial" pitchFamily="34" charset="0"/>
-                <a:ea typeface="Arial" pitchFamily="34" charset="-122"/>
-                <a:cs typeface="Arial" pitchFamily="34" charset="-120"/>
-              </a:rPr>
-              <a:t>Volumes and shares</a:t>
-            </a:r>
-            <a:endParaRPr lang="en-US" sz="860" dirty="0"/>
-          </a:p>
-        </p:txBody>
-      </p:sp>
-      <p:sp>
-        <p:nvSpPr>
-          <p:cNvPr id="50" name="Text 48"/>
-          <p:cNvSpPr txBox="1"/>
-          <p:nvPr/>
-        </p:nvSpPr>
-        <p:spPr>
-          <a:xfrm>
-            <a:off x="530352" y="4709160"/>
-            <a:ext cx="4937760" cy="182880"/>
-          </a:xfrm>
-          <a:prstGeom prst="rect">
-            <a:avLst/>
-          </a:prstGeom>
-          <a:noFill/>
-          <a:ln/>
-        </p:spPr>
-        <p:txBody>
-          <a:bodyPr wrap="square" lIns="0" tIns="0" rIns="0" bIns="0" rtlCol="0" anchor="ctr"/>
-          <a:lstStyle/>
-          <a:p>
-            <a:pPr indent="0" marL="0">
-              <a:buNone/>
-            </a:pPr>
-            <a:r>
-              <a:rPr lang="en-US" sz="800" dirty="0">
-                <a:solidFill>
-                  <a:srgbClr val="5A5A5A"/>
-                </a:solidFill>
-                <a:latin typeface="Arial" pitchFamily="34" charset="0"/>
-                <a:ea typeface="Arial" pitchFamily="34" charset="-122"/>
-                <a:cs typeface="Arial" pitchFamily="34" charset="-120"/>
-              </a:rPr>
-              <a:t>~50 first reports a day · 65% minor · ~30 handlers</a:t>
-            </a:r>
-            <a:endParaRPr lang="en-US" sz="800" dirty="0"/>
-          </a:p>
-        </p:txBody>
-      </p:sp>
-      <p:sp>
-        <p:nvSpPr>
-          <p:cNvPr id="51" name="Text 49"/>
-          <p:cNvSpPr txBox="1"/>
-          <p:nvPr/>
-        </p:nvSpPr>
-        <p:spPr>
-          <a:xfrm>
-            <a:off x="5669280" y="4608576"/>
-            <a:ext cx="6035040" cy="219456"/>
-          </a:xfrm>
-          <a:prstGeom prst="rect">
-            <a:avLst/>
-          </a:prstGeom>
-          <a:noFill/>
-          <a:ln/>
-        </p:spPr>
-        <p:txBody>
-          <a:bodyPr wrap="square" lIns="0" tIns="0" rIns="0" bIns="0" rtlCol="0" anchor="ctr"/>
-          <a:lstStyle/>
-          <a:p>
-            <a:pPr indent="0" marL="0">
-              <a:buNone/>
-            </a:pPr>
-            <a:r>
-              <a:rPr lang="en-US" sz="840" i="1" dirty="0">
-                <a:solidFill>
-                  <a:srgbClr val="5A5A5A"/>
-                </a:solidFill>
-                <a:latin typeface="Arial" pitchFamily="34" charset="0"/>
-                <a:ea typeface="Arial" pitchFamily="34" charset="-122"/>
-                <a:cs typeface="Arial" pitchFamily="34" charset="-120"/>
-              </a:rPr>
-              <a:t>GGW case study brief</a:t>
-            </a:r>
-            <a:endParaRPr lang="en-US" sz="840" dirty="0"/>
-          </a:p>
-        </p:txBody>
-      </p:sp>
-      <p:sp>
-        <p:nvSpPr>
-          <p:cNvPr id="52" name="Shape 50"/>
-          <p:cNvSpPr/>
-          <p:nvPr/>
-        </p:nvSpPr>
-        <p:spPr>
-          <a:xfrm>
-            <a:off x="365760" y="4956048"/>
-            <a:ext cx="11365992" cy="1097280"/>
-          </a:xfrm>
-          <a:prstGeom prst="roundRect">
-            <a:avLst>
-              <a:gd name="adj" fmla="val 5000"/>
-            </a:avLst>
-          </a:prstGeom>
-          <a:solidFill>
-            <a:srgbClr val="FDF3E3"/>
-          </a:solidFill>
-          <a:ln w="15240">
-            <a:solidFill>
-              <a:srgbClr val="D97706"/>
-            </a:solidFill>
-            <a:prstDash val="solid"/>
-          </a:ln>
-        </p:spPr>
-      </p:sp>
-      <p:sp>
-        <p:nvSpPr>
-          <p:cNvPr id="53" name="Text 51"/>
-          <p:cNvSpPr txBox="1"/>
-          <p:nvPr/>
-        </p:nvSpPr>
-        <p:spPr>
-          <a:xfrm>
-            <a:off x="548640" y="5056632"/>
-            <a:ext cx="10972800" cy="219456"/>
-          </a:xfrm>
-          <a:prstGeom prst="rect">
-            <a:avLst/>
-          </a:prstGeom>
-          <a:noFill/>
-          <a:ln/>
-        </p:spPr>
-        <p:txBody>
-          <a:bodyPr wrap="square" lIns="0" tIns="0" rIns="0" bIns="0" rtlCol="0" anchor="ctr"/>
-          <a:lstStyle/>
-          <a:p>
-            <a:pPr indent="0" marL="0">
-              <a:buNone/>
-            </a:pPr>
-            <a:r>
-              <a:rPr lang="en-US" sz="860" b="1" spc="60" kern="0" dirty="0">
-                <a:solidFill>
-                  <a:srgbClr val="9A5A0A"/>
-                </a:solidFill>
-                <a:latin typeface="Arial" pitchFamily="34" charset="0"/>
-                <a:ea typeface="Arial" pitchFamily="34" charset="-122"/>
-                <a:cs typeface="Arial" pitchFamily="34" charset="-120"/>
-              </a:rPr>
-              <a:t>OUR ASSUMPTIONS — NOT SOURCED, AND THE FIRST THING WE WOULD TEST</a:t>
-            </a:r>
-            <a:endParaRPr lang="en-US" sz="860" dirty="0"/>
-          </a:p>
-        </p:txBody>
-      </p:sp>
-      <p:sp>
-        <p:nvSpPr>
-          <p:cNvPr id="54" name="Text 52"/>
-          <p:cNvSpPr txBox="1"/>
-          <p:nvPr/>
-        </p:nvSpPr>
-        <p:spPr>
-          <a:xfrm>
-            <a:off x="548640" y="5285232"/>
-            <a:ext cx="10972800" cy="694944"/>
-          </a:xfrm>
-          <a:prstGeom prst="rect">
-            <a:avLst/>
-          </a:prstGeom>
-          <a:noFill/>
-          <a:ln/>
-        </p:spPr>
-        <p:txBody>
-          <a:bodyPr wrap="square" lIns="0" tIns="0" rIns="0" bIns="0" rtlCol="0" anchor="ctr"/>
-          <a:lstStyle/>
-          <a:p>
-            <a:pPr indent="0" marL="0">
-              <a:lnSpc>
-                <a:spcPct val="120000"/>
-              </a:lnSpc>
-              <a:buNone/>
-            </a:pPr>
-            <a:r>
-              <a:rPr lang="en-US" sz="840" dirty="0">
-                <a:solidFill>
-                  <a:srgbClr val="44403A"/>
-                </a:solidFill>
-                <a:latin typeface="Arial" pitchFamily="34" charset="0"/>
-                <a:ea typeface="Arial" pitchFamily="34" charset="-122"/>
-                <a:cs typeface="Arial" pitchFamily="34" charset="-120"/>
-              </a:rPr>
-              <a:t>Every per-step minute on slide 6 · the 30% allowance for breaks and interruptions · how often a CPR is missing (30%) or underwriting is asked (25%) · how often the redesign raises an exception (20%) · the tokens a typical claim needs · the €146k build · the 0.25 FTE upkeep · and how many people staff intake, which sets the per-person saving.</a:t>
-            </a:r>
-            <a:endParaRPr lang="en-US" sz="840" dirty="0"/>
-          </a:p>
-          <a:p>
-            <a:pPr indent="0" marL="0">
-              <a:lnSpc>
-                <a:spcPct val="120000"/>
-              </a:lnSpc>
-              <a:buNone/>
-            </a:pPr>
-            <a:endParaRPr lang="en-US" sz="840" dirty="0"/>
-          </a:p>
-          <a:p>
-            <a:pPr indent="0" marL="0">
-              <a:lnSpc>
-                <a:spcPct val="120000"/>
-              </a:lnSpc>
-              <a:buNone/>
-            </a:pPr>
-            <a:r>
-              <a:rPr lang="en-US" sz="840" dirty="0">
-                <a:solidFill>
-                  <a:srgbClr val="44403A"/>
-                </a:solidFill>
-                <a:latin typeface="Arial" pitchFamily="34" charset="0"/>
-                <a:ea typeface="Arial" pitchFamily="34" charset="-122"/>
-                <a:cs typeface="Arial" pitchFamily="34" charset="-120"/>
-              </a:rPr>
-              <a:t>Two weeks of watching live intake would replace all of these with real measurements. That is step one of the plan, not an afterthought.</a:t>
-            </a:r>
-            <a:endParaRPr lang="en-US" sz="840" dirty="0"/>
-          </a:p>
-        </p:txBody>
-      </p:sp>
-      <p:sp>
-        <p:nvSpPr>
-          <p:cNvPr id="55" name="Text 53"/>
-          <p:cNvSpPr txBox="1"/>
-          <p:nvPr/>
-        </p:nvSpPr>
-        <p:spPr>
-          <a:xfrm>
-            <a:off x="365760" y="6126480"/>
-            <a:ext cx="11430000" cy="237744"/>
-          </a:xfrm>
-          <a:prstGeom prst="rect">
-            <a:avLst/>
-          </a:prstGeom>
-          <a:noFill/>
-          <a:ln/>
-        </p:spPr>
-        <p:txBody>
-          <a:bodyPr wrap="square" lIns="0" tIns="0" rIns="0" bIns="0" rtlCol="0" anchor="ctr"/>
-          <a:lstStyle/>
-          <a:p>
-            <a:pPr indent="0" marL="0">
-              <a:buNone/>
-            </a:pPr>
-            <a:r>
-              <a:rPr lang="en-US" sz="700" dirty="0">
-                <a:solidFill>
-                  <a:srgbClr val="5B6472"/>
-                </a:solidFill>
-                <a:latin typeface="Arial" pitchFamily="34" charset="0"/>
-                <a:ea typeface="Arial" pitchFamily="34" charset="-122"/>
-                <a:cs typeface="Arial" pitchFamily="34" charset="-120"/>
-              </a:rPr>
-              <a:t>Prices checked September 2026 · US$ converted at €0.92 · every euro figure is fully loaded — gross pay plus employer contributions</a:t>
-            </a:r>
-            <a:endParaRPr lang="en-US" sz="700" dirty="0"/>
-          </a:p>
-        </p:txBody>
-      </p:sp>
-      <p:sp>
-        <p:nvSpPr>
-          <p:cNvPr id="56" name="Text 54"/>
-          <p:cNvSpPr txBox="1"/>
-          <p:nvPr/>
-        </p:nvSpPr>
-        <p:spPr>
-          <a:xfrm>
-            <a:off x="365760" y="6601968"/>
-            <a:ext cx="5486400" cy="219456"/>
-          </a:xfrm>
-          <a:prstGeom prst="rect">
-            <a:avLst/>
-          </a:prstGeom>
-          <a:noFill/>
-          <a:ln/>
-        </p:spPr>
-        <p:txBody>
-          <a:bodyPr wrap="square" lIns="0" tIns="0" rIns="0" bIns="0" rtlCol="0" anchor="ctr"/>
-          <a:lstStyle/>
-          <a:p>
-            <a:pPr indent="0" marL="0">
-              <a:buNone/>
-            </a:pPr>
-            <a:r>
-              <a:rPr lang="en-US" sz="800" dirty="0">
-                <a:solidFill>
-                  <a:srgbClr val="5B6472"/>
-                </a:solidFill>
-                <a:latin typeface="Arial" pitchFamily="34" charset="0"/>
-                <a:ea typeface="Arial" pitchFamily="34" charset="-122"/>
-                <a:cs typeface="Arial" pitchFamily="34" charset="-120"/>
-              </a:rPr>
-              <a:t>GGW Claims Workflow Redesign · FNOL</a:t>
-            </a:r>
-            <a:endParaRPr lang="en-US" sz="800" dirty="0"/>
-          </a:p>
-        </p:txBody>
-      </p:sp>
-      <p:sp>
-        <p:nvSpPr>
-          <p:cNvPr id="57" name="Text 55"/>
-          <p:cNvSpPr txBox="1"/>
-          <p:nvPr/>
-        </p:nvSpPr>
-        <p:spPr>
-          <a:xfrm>
-            <a:off x="11247120" y="6601968"/>
-            <a:ext cx="594360" cy="219456"/>
-          </a:xfrm>
-          <a:prstGeom prst="rect">
-            <a:avLst/>
-          </a:prstGeom>
-          <a:noFill/>
-          <a:ln/>
-        </p:spPr>
-        <p:txBody>
-          <a:bodyPr wrap="square" lIns="0" tIns="0" rIns="0" bIns="0" rtlCol="0" anchor="ctr"/>
-          <a:lstStyle/>
-          <a:p>
-            <a:pPr algn="r" indent="0" marL="0">
-              <a:buNone/>
-            </a:pPr>
-            <a:r>
-              <a:rPr lang="en-US" sz="800" dirty="0">
-                <a:solidFill>
-                  <a:srgbClr val="5B6472"/>
-                </a:solidFill>
-                <a:latin typeface="Arial" pitchFamily="34" charset="0"/>
-                <a:ea typeface="Arial" pitchFamily="34" charset="-122"/>
-                <a:cs typeface="Arial" pitchFamily="34" charset="-120"/>
-              </a:rPr>
-              <a:t>9 / 9</a:t>
+              <a:t>9 / 10</a:t>
             </a:r>
             <a:endParaRPr lang="en-US" sz="800" dirty="0"/>
           </a:p>

--- a/case-study/deck/GGW_FNOL_Redesign.pptx
+++ b/case-study/deck/GGW_FNOL_Redesign.pptx
@@ -1610,7 +1610,7 @@
                 <a:ea typeface="Cambria" pitchFamily="34" charset="-122"/>
                 <a:cs typeface="Cambria" pitchFamily="34" charset="-120"/>
               </a:rPr>
-              <a:t>Redesigning intake gives the 10-person support team back 1.75 hours each, every day</a:t>
+              <a:t>Redesigning intake gives each of the 20 claim handlers back 52 minutes a day</a:t>
             </a:r>
             <a:endParaRPr lang="en-US" sz="1900" dirty="0"/>
           </a:p>
@@ -1649,7 +1649,7 @@
                 <a:ea typeface="Arial" pitchFamily="34" charset="-122"/>
                 <a:cs typeface="Arial" pitchFamily="34" charset="-120"/>
               </a:rPr>
-              <a:t>17.5 hours a day across the team — 2.8 full-time people · two thirds of that work goes to claims that were always going to close quietly · a person still decides anything adverse</a:t>
+              <a:t>17.5 hours a day across the 20 of them — 2.8 full-time people · two thirds of that work goes to claims that were always going to close quietly · a person still decides anything adverse</a:t>
             </a:r>
             <a:endParaRPr lang="en-US" sz="1050" dirty="0"/>
           </a:p>
@@ -1757,7 +1757,7 @@
                 <a:ea typeface="Arial" pitchFamily="34" charset="-122"/>
                 <a:cs typeface="Arial" pitchFamily="34" charset="-120"/>
               </a:rPr>
-              <a:t>What one claim costs a support-team member</a:t>
+              <a:t>What one claim costs one claim handler</a:t>
             </a:r>
             <a:endParaRPr lang="en-US" sz="900" dirty="0"/>
           </a:p>
@@ -2646,7 +2646,7 @@
                 <a:ea typeface="Cambria" pitchFamily="34" charset="-122"/>
                 <a:cs typeface="Cambria" pitchFamily="34" charset="-120"/>
               </a:rPr>
-              <a:t>1.75 h</a:t>
+              <a:t>52 min</a:t>
             </a:r>
             <a:endParaRPr lang="en-US" sz="2000" dirty="0"/>
           </a:p>
@@ -2688,7 +2688,7 @@
                 <a:ea typeface="Arial" pitchFamily="34" charset="-122"/>
                 <a:cs typeface="Arial" pitchFamily="34" charset="-120"/>
               </a:rPr>
-              <a:t>freed per support-team member, every working day (of 6.4 productive hours)</a:t>
+              <a:t>freed per claim handler, every working day (of 6.4 productive hours)</a:t>
             </a:r>
             <a:endParaRPr lang="en-US" sz="840" dirty="0"/>
           </a:p>
@@ -2796,7 +2796,7 @@
                 <a:ea typeface="Arial" pitchFamily="34" charset="-122"/>
                 <a:cs typeface="Arial" pitchFamily="34" charset="-120"/>
               </a:rPr>
-              <a:t>across the 10-person support team — 2.8 full-time people</a:t>
+              <a:t>across the 20 claim handlers — 2.8 full-time people</a:t>
             </a:r>
             <a:endParaRPr lang="en-US" sz="840" dirty="0"/>
           </a:p>
@@ -2862,7 +2862,7 @@
                 <a:ea typeface="Cambria" pitchFamily="34" charset="-122"/>
                 <a:cs typeface="Cambria" pitchFamily="34" charset="-120"/>
               </a:rPr>
-              <a:t>€139k</a:t>
+              <a:t>€153k</a:t>
             </a:r>
             <a:endParaRPr lang="en-US" sz="2000" dirty="0"/>
           </a:p>
@@ -2970,7 +2970,7 @@
                 <a:ea typeface="Cambria" pitchFamily="34" charset="-122"/>
                 <a:cs typeface="Cambria" pitchFamily="34" charset="-120"/>
               </a:rPr>
-              <a:t>16 mths</a:t>
+              <a:t>14 mths</a:t>
             </a:r>
             <a:endParaRPr lang="en-US" sz="2000" dirty="0"/>
           </a:p>
@@ -3081,7 +3081,7 @@
                 <a:ea typeface="Arial" pitchFamily="34" charset="-122"/>
                 <a:cs typeface="Arial" pitchFamily="34" charset="-120"/>
               </a:rPr>
-              <a:t>What “€139k” means:  </a:t>
+              <a:t>What “€153k” means:  </a:t>
             </a:r>
             <a:pPr indent="0" marL="0">
               <a:lnSpc>
@@ -3098,7 +3098,7 @@
                 <a:ea typeface="Arial" pitchFamily="34" charset="-122"/>
                 <a:cs typeface="Arial" pitchFamily="34" charset="-120"/>
               </a:rPr>
-              <a:t>4,370 support-team hours a year × €31.83, the loaded cost of one of those hours. Valued at support pay (€41,100 gross), not claims-handler pay, because these are the hours actually freed. Capacity, not cash — it becomes money only if the hours go to the backlog or are absorbed by turnover.</a:t>
+              <a:t>4,370 handler-hours a year × €34.92, the loaded cost of one handler-hour (€45,100 gross plus employer contributions, over actual working hours). Capacity, not cash — it becomes money only if the hours go to the backlog or are absorbed by normal staff turnover.</a:t>
             </a:r>
             <a:endParaRPr lang="en-US" sz="850" dirty="0"/>
           </a:p>
@@ -3184,7 +3184,7 @@
                 <a:ea typeface="Arial" pitchFamily="34" charset="-122"/>
                 <a:cs typeface="Arial" pitchFamily="34" charset="-120"/>
               </a:rPr>
-              <a:t>cost is not what decides this. The AI costs €2,400 a year to run; keeping it healthy takes a quarter of an engineer, €24,400 — so €26,800 a year all in, against €139,100 of capacity released. What decides it is governance: proving a person reviewed anything that can go against a claimant, and whether handlers trust the drafts.</a:t>
+              <a:t>cost is not what decides this. The AI costs €2,400 a year to run; keeping it healthy takes a quarter of an engineer, €24,400 — so €26,800 a year all in, against €152,600 of capacity released. What decides it is governance: proving a person reviewed anything that can go against a claimant, and whether handlers trust the drafts.</a:t>
             </a:r>
             <a:endParaRPr lang="en-US" sz="850" dirty="0"/>
           </a:p>
@@ -17174,7 +17174,7 @@
                 <a:ea typeface="Arial" pitchFamily="34" charset="-122"/>
                 <a:cs typeface="Arial" pitchFamily="34" charset="-120"/>
               </a:rPr>
-              <a:t>40 min × 12,500 claims a year = 8,332 hours — 52% of the 10-person support team's year, 17% of all 30. Per person: 5 claims a day at 40 min is 3.3 of a 6.4-hour day. Intake is half of what the support team does.</a:t>
+              <a:t>40 min × 12,500 claims a year = 8,332 handler-hours — 26% of the 20 handlers' year, 17% of all 30. Per handler: 2.5 claims a day at 40 min is 1.7 of a 6.4-hour day.</a:t>
             </a:r>
             <a:endParaRPr lang="en-US" sz="820" dirty="0"/>
           </a:p>
@@ -17357,7 +17357,7 @@
                 <a:ea typeface="Arial" pitchFamily="34" charset="-122"/>
                 <a:cs typeface="Arial" pitchFamily="34" charset="-120"/>
               </a:rPr>
-              <a:t>4,370 support-h · 2.8 FTE</a:t>
+              <a:t>4,370 handler-h · 2.8 FTE</a:t>
             </a:r>
             <a:endParaRPr lang="en-US" sz="840" dirty="0"/>
           </a:p>
@@ -17396,7 +17396,7 @@
                 <a:ea typeface="Arial" pitchFamily="34" charset="-122"/>
                 <a:cs typeface="Arial" pitchFamily="34" charset="-120"/>
               </a:rPr>
-              <a:t>Worth, at €31.83 per support-team hour</a:t>
+              <a:t>Worth, at €34.92 per handler-hour</a:t>
             </a:r>
             <a:endParaRPr lang="en-US" sz="840" dirty="0"/>
           </a:p>
@@ -17435,7 +17435,7 @@
                 <a:ea typeface="Arial" pitchFamily="34" charset="-122"/>
                 <a:cs typeface="Arial" pitchFamily="34" charset="-120"/>
               </a:rPr>
-              <a:t>€139,100 a year</a:t>
+              <a:t>€152,600 a year</a:t>
             </a:r>
             <a:endParaRPr lang="en-US" sz="840" dirty="0"/>
           </a:p>
@@ -17669,7 +17669,7 @@
                 <a:ea typeface="Arial" pitchFamily="34" charset="-122"/>
                 <a:cs typeface="Arial" pitchFamily="34" charset="-120"/>
               </a:rPr>
-              <a:t>€112,200</a:t>
+              <a:t>€125,800</a:t>
             </a:r>
             <a:endParaRPr lang="en-US" sz="840" dirty="0"/>
           </a:p>
@@ -17884,7 +17884,7 @@
                 <a:ea typeface="Arial" pitchFamily="34" charset="-122"/>
                 <a:cs typeface="Arial" pitchFamily="34" charset="-120"/>
               </a:rPr>
-              <a:t>16 months</a:t>
+              <a:t>14 months</a:t>
             </a:r>
             <a:endParaRPr lang="en-US" sz="840" dirty="0"/>
           </a:p>
@@ -21898,7 +21898,7 @@
                 <a:ea typeface="Arial" pitchFamily="34" charset="-122"/>
                 <a:cs typeface="Arial" pitchFamily="34" charset="-120"/>
               </a:rPr>
-              <a:t>20 claim handlers and 10 support staff (GGW, 8 Sep). The brief puts FNOL with the support team, so every freed hour is theirs.</a:t>
+              <a:t>20 claim handlers, 10 support staff (GGW, 8 Sep) · 52.4 min each × 20 = 17.5 h a day</a:t>
             </a:r>
             <a:endParaRPr lang="en-US" sz="780" dirty="0"/>
           </a:p>
@@ -21950,7 +21950,7 @@
                           <a:ea typeface="Arial" pitchFamily="34" charset="-122"/>
                           <a:cs typeface="Arial" pitchFamily="34" charset="-120"/>
                         </a:rPr>
-                        <a:t>Per support-team member</a:t>
+                        <a:t>Per claim handler</a:t>
                       </a:r>
                       <a:endParaRPr lang="en-US" sz="780" dirty="0">
                         <a:latin typeface="Arial" charset="0"/>
@@ -22292,7 +22292,7 @@
                           <a:ea typeface="Arial" pitchFamily="34" charset="-122"/>
                           <a:cs typeface="Arial" pitchFamily="34" charset="-120"/>
                         </a:rPr>
-                        <a:t>5</a:t>
+                        <a:t>2.5</a:t>
                       </a:r>
                       <a:endParaRPr lang="en-US" sz="780" dirty="0">
                         <a:latin typeface="Arial" charset="0"/>
@@ -22360,7 +22360,7 @@
                           <a:ea typeface="Arial" pitchFamily="34" charset="-122"/>
                           <a:cs typeface="Arial" pitchFamily="34" charset="-120"/>
                         </a:rPr>
-                        <a:t>5</a:t>
+                        <a:t>2.5</a:t>
                       </a:r>
                       <a:endParaRPr lang="en-US" sz="780" dirty="0">
                         <a:latin typeface="Arial" charset="0"/>
@@ -22566,7 +22566,7 @@
                           <a:ea typeface="Arial" pitchFamily="34" charset="-122"/>
                           <a:cs typeface="Arial" pitchFamily="34" charset="-120"/>
                         </a:rPr>
-                        <a:t>3.3 h</a:t>
+                        <a:t>100 min</a:t>
                       </a:r>
                       <a:endParaRPr lang="en-US" sz="780" dirty="0">
                         <a:latin typeface="Arial" charset="0"/>
@@ -22634,7 +22634,7 @@
                           <a:ea typeface="Arial" pitchFamily="34" charset="-122"/>
                           <a:cs typeface="Arial" pitchFamily="34" charset="-120"/>
                         </a:rPr>
-                        <a:t>1.6 h</a:t>
+                        <a:t>48 min</a:t>
                       </a:r>
                       <a:endParaRPr lang="en-US" sz="780" dirty="0">
                         <a:latin typeface="Arial" charset="0"/>
@@ -22702,7 +22702,7 @@
                           <a:ea typeface="Arial" pitchFamily="34" charset="-122"/>
                           <a:cs typeface="Arial" pitchFamily="34" charset="-120"/>
                         </a:rPr>
-                        <a:t>− 1.75 h</a:t>
+                        <a:t>− 52 min</a:t>
                       </a:r>
                       <a:endParaRPr lang="en-US" sz="780" dirty="0">
                         <a:latin typeface="Arial" charset="0"/>
@@ -22840,7 +22840,7 @@
                           <a:ea typeface="Arial" pitchFamily="34" charset="-122"/>
                           <a:cs typeface="Arial" pitchFamily="34" charset="-120"/>
                         </a:rPr>
-                        <a:t>52%</a:t>
+                        <a:t>26%</a:t>
                       </a:r>
                       <a:endParaRPr lang="en-US" sz="780" dirty="0">
                         <a:latin typeface="Arial" charset="0"/>
@@ -22908,7 +22908,7 @@
                           <a:ea typeface="Arial" pitchFamily="34" charset="-122"/>
                           <a:cs typeface="Arial" pitchFamily="34" charset="-120"/>
                         </a:rPr>
-                        <a:t>25%</a:t>
+                        <a:t>12%</a:t>
                       </a:r>
                       <a:endParaRPr lang="en-US" sz="780" dirty="0">
                         <a:latin typeface="Arial" charset="0"/>
@@ -22976,7 +22976,7 @@
                           <a:ea typeface="Arial" pitchFamily="34" charset="-122"/>
                           <a:cs typeface="Arial" pitchFamily="34" charset="-120"/>
                         </a:rPr>
-                        <a:t>− 27 pts</a:t>
+                        <a:t>− 14 pts</a:t>
                       </a:r>
                       <a:endParaRPr lang="en-US" sz="780" dirty="0">
                         <a:latin typeface="Arial" charset="0"/>
@@ -23046,7 +23046,7 @@
                           <a:ea typeface="Arial" pitchFamily="34" charset="-122"/>
                           <a:cs typeface="Arial" pitchFamily="34" charset="-120"/>
                         </a:rPr>
-                        <a:t>Hours back, each, per day</a:t>
+                        <a:t>Time back, each, per day</a:t>
                       </a:r>
                       <a:endParaRPr lang="en-US" sz="780" dirty="0">
                         <a:latin typeface="Arial" charset="0"/>
@@ -23228,7 +23228,7 @@
                           <a:ea typeface="Arial" pitchFamily="34" charset="-122"/>
                           <a:cs typeface="Arial" pitchFamily="34" charset="-120"/>
                         </a:rPr>
-                        <a:t>1.75 h</a:t>
+                        <a:t>52 min</a:t>
                       </a:r>
                       <a:endParaRPr lang="en-US" sz="780" dirty="0">
                         <a:latin typeface="Arial" charset="0"/>
@@ -23564,7 +23564,7 @@
                 <a:ea typeface="Arial" pitchFamily="34" charset="-122"/>
                 <a:cs typeface="Arial" pitchFamily="34" charset="-120"/>
               </a:rPr>
-              <a:t>20 claim handlers, 10 support staff — FNOL sits with support</a:t>
+              <a:t>20 claim handlers process claims; 10 support staff besides</a:t>
             </a:r>
             <a:endParaRPr lang="en-US" sz="780" dirty="0"/>
           </a:p>
@@ -23936,7 +23936,7 @@
                 <a:ea typeface="Arial" pitchFamily="34" charset="-122"/>
                 <a:cs typeface="Arial" pitchFamily="34" charset="-120"/>
               </a:rPr>
-              <a:t>Wage base — intake</a:t>
+              <a:t>Wage base — handlers</a:t>
             </a:r>
             <a:endParaRPr lang="en-US" sz="860" dirty="0"/>
           </a:p>
@@ -23975,7 +23975,7 @@
                 <a:ea typeface="Arial" pitchFamily="34" charset="-122"/>
                 <a:cs typeface="Arial" pitchFamily="34" charset="-120"/>
               </a:rPr>
-              <a:t>Sachbearbeiter/in Versicherung, €41,100 gross</a:t>
+              <a:t>Schadenregulierer/in, €45,100 gross — the role doing intake</a:t>
             </a:r>
             <a:endParaRPr lang="en-US" sz="780" dirty="0"/>
           </a:p>

--- a/case-study/deck/GGW_FNOL_Redesign.pptx
+++ b/case-study/deck/GGW_FNOL_Redesign.pptx
@@ -1818,14 +1818,34 @@
       </p:sp>
       <p:sp>
         <p:nvSpPr>
-          <p:cNvPr id="11" name="Text 9"/>
-          <p:cNvSpPr txBox="1"/>
-          <p:nvPr/>
-        </p:nvSpPr>
-        <p:spPr>
-          <a:xfrm>
-            <a:off x="658368" y="2697480"/>
-            <a:ext cx="3026664" cy="987552"/>
+          <p:cNvPr id="11" name="Shape 9"/>
+          <p:cNvSpPr/>
+          <p:nvPr/>
+        </p:nvSpPr>
+        <p:spPr>
+          <a:xfrm>
+            <a:off x="658368" y="2752344"/>
+            <a:ext cx="54864" cy="54864"/>
+          </a:xfrm>
+          <a:prstGeom prst="ellipse">
+            <a:avLst/>
+          </a:prstGeom>
+          <a:solidFill>
+            <a:srgbClr val="D97706"/>
+          </a:solidFill>
+          <a:ln/>
+        </p:spPr>
+      </p:sp>
+      <p:sp>
+        <p:nvSpPr>
+          <p:cNvPr id="12" name="Text 10"/>
+          <p:cNvSpPr txBox="1"/>
+          <p:nvPr/>
+        </p:nvSpPr>
+        <p:spPr>
+          <a:xfrm>
+            <a:off x="804672" y="2697480"/>
+            <a:ext cx="2880360" cy="182880"/>
           </a:xfrm>
           <a:prstGeom prst="rect">
             <a:avLst/>
@@ -1838,29 +1858,203 @@
           <a:lstStyle/>
           <a:p>
             <a:pPr indent="0" marL="0">
-              <a:lnSpc>
-                <a:spcPct val="118000"/>
-              </a:lnSpc>
-              <a:buNone/>
-            </a:pPr>
-            <a:r>
-              <a:rPr lang="en-US" sz="840" dirty="0">
-                <a:solidFill>
-                  <a:srgbClr val="44403A"/>
-                </a:solidFill>
-                <a:latin typeface="Arial" pitchFamily="34" charset="0"/>
-                <a:ea typeface="Arial" pitchFamily="34" charset="-122"/>
-                <a:cs typeface="Arial" pitchFamily="34" charset="-120"/>
-              </a:rPr>
-              <a:t>Reading and re-reading the report, opening attachments, chasing a missing CPR, switching between EASY, IDB, e-mail and paper. Plus 30% for breaks and interruptions.</a:t>
-            </a:r>
-            <a:endParaRPr lang="en-US" sz="840" dirty="0"/>
-          </a:p>
-        </p:txBody>
-      </p:sp>
-      <p:sp>
-        <p:nvSpPr>
-          <p:cNvPr id="12" name="Shape 10"/>
+              <a:buNone/>
+            </a:pPr>
+            <a:r>
+              <a:rPr lang="en-US" sz="860" dirty="0">
+                <a:solidFill>
+                  <a:srgbClr val="3A3A3A"/>
+                </a:solidFill>
+                <a:latin typeface="Arial" pitchFamily="34" charset="0"/>
+                <a:ea typeface="Arial" pitchFamily="34" charset="-122"/>
+                <a:cs typeface="Arial" pitchFamily="34" charset="-120"/>
+              </a:rPr>
+              <a:t>Re-reads the report, opens attachments</a:t>
+            </a:r>
+            <a:endParaRPr lang="en-US" sz="860" dirty="0"/>
+          </a:p>
+        </p:txBody>
+      </p:sp>
+      <p:sp>
+        <p:nvSpPr>
+          <p:cNvPr id="13" name="Shape 11"/>
+          <p:cNvSpPr/>
+          <p:nvPr/>
+        </p:nvSpPr>
+        <p:spPr>
+          <a:xfrm>
+            <a:off x="658368" y="2985516"/>
+            <a:ext cx="54864" cy="54864"/>
+          </a:xfrm>
+          <a:prstGeom prst="ellipse">
+            <a:avLst/>
+          </a:prstGeom>
+          <a:solidFill>
+            <a:srgbClr val="D97706"/>
+          </a:solidFill>
+          <a:ln/>
+        </p:spPr>
+      </p:sp>
+      <p:sp>
+        <p:nvSpPr>
+          <p:cNvPr id="14" name="Text 12"/>
+          <p:cNvSpPr txBox="1"/>
+          <p:nvPr/>
+        </p:nvSpPr>
+        <p:spPr>
+          <a:xfrm>
+            <a:off x="804672" y="2930652"/>
+            <a:ext cx="2880360" cy="182880"/>
+          </a:xfrm>
+          <a:prstGeom prst="rect">
+            <a:avLst/>
+          </a:prstGeom>
+          <a:noFill/>
+          <a:ln/>
+        </p:spPr>
+        <p:txBody>
+          <a:bodyPr wrap="square" lIns="0" tIns="0" rIns="0" bIns="0" rtlCol="0" anchor="ctr"/>
+          <a:lstStyle/>
+          <a:p>
+            <a:pPr indent="0" marL="0">
+              <a:buNone/>
+            </a:pPr>
+            <a:r>
+              <a:rPr lang="en-US" sz="860" dirty="0">
+                <a:solidFill>
+                  <a:srgbClr val="3A3A3A"/>
+                </a:solidFill>
+                <a:latin typeface="Arial" pitchFamily="34" charset="0"/>
+                <a:ea typeface="Arial" pitchFamily="34" charset="-122"/>
+                <a:cs typeface="Arial" pitchFamily="34" charset="-120"/>
+              </a:rPr>
+              <a:t>Chases a missing CPR</a:t>
+            </a:r>
+            <a:endParaRPr lang="en-US" sz="860" dirty="0"/>
+          </a:p>
+        </p:txBody>
+      </p:sp>
+      <p:sp>
+        <p:nvSpPr>
+          <p:cNvPr id="15" name="Shape 13"/>
+          <p:cNvSpPr/>
+          <p:nvPr/>
+        </p:nvSpPr>
+        <p:spPr>
+          <a:xfrm>
+            <a:off x="658368" y="3218688"/>
+            <a:ext cx="54864" cy="54864"/>
+          </a:xfrm>
+          <a:prstGeom prst="ellipse">
+            <a:avLst/>
+          </a:prstGeom>
+          <a:solidFill>
+            <a:srgbClr val="D97706"/>
+          </a:solidFill>
+          <a:ln/>
+        </p:spPr>
+      </p:sp>
+      <p:sp>
+        <p:nvSpPr>
+          <p:cNvPr id="16" name="Text 14"/>
+          <p:cNvSpPr txBox="1"/>
+          <p:nvPr/>
+        </p:nvSpPr>
+        <p:spPr>
+          <a:xfrm>
+            <a:off x="804672" y="3163824"/>
+            <a:ext cx="2880360" cy="182880"/>
+          </a:xfrm>
+          <a:prstGeom prst="rect">
+            <a:avLst/>
+          </a:prstGeom>
+          <a:noFill/>
+          <a:ln/>
+        </p:spPr>
+        <p:txBody>
+          <a:bodyPr wrap="square" lIns="0" tIns="0" rIns="0" bIns="0" rtlCol="0" anchor="ctr"/>
+          <a:lstStyle/>
+          <a:p>
+            <a:pPr indent="0" marL="0">
+              <a:buNone/>
+            </a:pPr>
+            <a:r>
+              <a:rPr lang="en-US" sz="860" dirty="0">
+                <a:solidFill>
+                  <a:srgbClr val="3A3A3A"/>
+                </a:solidFill>
+                <a:latin typeface="Arial" pitchFamily="34" charset="0"/>
+                <a:ea typeface="Arial" pitchFamily="34" charset="-122"/>
+                <a:cs typeface="Arial" pitchFamily="34" charset="-120"/>
+              </a:rPr>
+              <a:t>Switches EASY · IDB · e-mail · paper</a:t>
+            </a:r>
+            <a:endParaRPr lang="en-US" sz="860" dirty="0"/>
+          </a:p>
+        </p:txBody>
+      </p:sp>
+      <p:sp>
+        <p:nvSpPr>
+          <p:cNvPr id="17" name="Shape 15"/>
+          <p:cNvSpPr/>
+          <p:nvPr/>
+        </p:nvSpPr>
+        <p:spPr>
+          <a:xfrm>
+            <a:off x="658368" y="3451860"/>
+            <a:ext cx="54864" cy="54864"/>
+          </a:xfrm>
+          <a:prstGeom prst="ellipse">
+            <a:avLst/>
+          </a:prstGeom>
+          <a:solidFill>
+            <a:srgbClr val="D97706"/>
+          </a:solidFill>
+          <a:ln/>
+        </p:spPr>
+      </p:sp>
+      <p:sp>
+        <p:nvSpPr>
+          <p:cNvPr id="18" name="Text 16"/>
+          <p:cNvSpPr txBox="1"/>
+          <p:nvPr/>
+        </p:nvSpPr>
+        <p:spPr>
+          <a:xfrm>
+            <a:off x="804672" y="3396996"/>
+            <a:ext cx="2880360" cy="182880"/>
+          </a:xfrm>
+          <a:prstGeom prst="rect">
+            <a:avLst/>
+          </a:prstGeom>
+          <a:noFill/>
+          <a:ln/>
+        </p:spPr>
+        <p:txBody>
+          <a:bodyPr wrap="square" lIns="0" tIns="0" rIns="0" bIns="0" rtlCol="0" anchor="ctr"/>
+          <a:lstStyle/>
+          <a:p>
+            <a:pPr indent="0" marL="0">
+              <a:buNone/>
+            </a:pPr>
+            <a:r>
+              <a:rPr lang="en-US" sz="860" dirty="0">
+                <a:solidFill>
+                  <a:srgbClr val="3A3A3A"/>
+                </a:solidFill>
+                <a:latin typeface="Arial" pitchFamily="34" charset="0"/>
+                <a:ea typeface="Arial" pitchFamily="34" charset="-122"/>
+                <a:cs typeface="Arial" pitchFamily="34" charset="-120"/>
+              </a:rPr>
+              <a:t>+30% for breaks and interruptions</a:t>
+            </a:r>
+            <a:endParaRPr lang="en-US" sz="860" dirty="0"/>
+          </a:p>
+        </p:txBody>
+      </p:sp>
+      <p:sp>
+        <p:nvSpPr>
+          <p:cNvPr id="19" name="Shape 17"/>
           <p:cNvSpPr/>
           <p:nvPr/>
         </p:nvSpPr>
@@ -1887,7 +2081,7 @@
       </p:sp>
       <p:sp>
         <p:nvSpPr>
-          <p:cNvPr id="13" name="Text 11"/>
+          <p:cNvPr id="20" name="Text 18"/>
           <p:cNvSpPr txBox="1"/>
           <p:nvPr/>
         </p:nvSpPr>
@@ -1926,7 +2120,7 @@
       </p:sp>
       <p:sp>
         <p:nvSpPr>
-          <p:cNvPr id="14" name="Text 12"/>
+          <p:cNvPr id="21" name="Text 19"/>
           <p:cNvSpPr txBox="1"/>
           <p:nvPr/>
         </p:nvSpPr>
@@ -1968,7 +2162,7 @@
       </p:sp>
       <p:sp>
         <p:nvSpPr>
-          <p:cNvPr id="15" name="Text 13"/>
+          <p:cNvPr id="22" name="Text 20"/>
           <p:cNvSpPr txBox="1"/>
           <p:nvPr/>
         </p:nvSpPr>
@@ -2021,14 +2215,34 @@
       </p:sp>
       <p:sp>
         <p:nvSpPr>
-          <p:cNvPr id="16" name="Text 14"/>
-          <p:cNvSpPr txBox="1"/>
-          <p:nvPr/>
-        </p:nvSpPr>
-        <p:spPr>
-          <a:xfrm>
-            <a:off x="4361688" y="2697480"/>
-            <a:ext cx="3026664" cy="987552"/>
+          <p:cNvPr id="23" name="Shape 21"/>
+          <p:cNvSpPr/>
+          <p:nvPr/>
+        </p:nvSpPr>
+        <p:spPr>
+          <a:xfrm>
+            <a:off x="4361688" y="2752344"/>
+            <a:ext cx="54864" cy="54864"/>
+          </a:xfrm>
+          <a:prstGeom prst="ellipse">
+            <a:avLst/>
+          </a:prstGeom>
+          <a:solidFill>
+            <a:srgbClr val="0891B2"/>
+          </a:solidFill>
+          <a:ln/>
+        </p:spPr>
+      </p:sp>
+      <p:sp>
+        <p:nvSpPr>
+          <p:cNvPr id="24" name="Text 22"/>
+          <p:cNvSpPr txBox="1"/>
+          <p:nvPr/>
+        </p:nvSpPr>
+        <p:spPr>
+          <a:xfrm>
+            <a:off x="4507992" y="2697480"/>
+            <a:ext cx="2880360" cy="182880"/>
           </a:xfrm>
           <a:prstGeom prst="rect">
             <a:avLst/>
@@ -2041,29 +2255,203 @@
           <a:lstStyle/>
           <a:p>
             <a:pPr indent="0" marL="0">
-              <a:lnSpc>
-                <a:spcPct val="118000"/>
-              </a:lnSpc>
-              <a:buNone/>
-            </a:pPr>
-            <a:r>
-              <a:rPr lang="en-US" sz="840" dirty="0">
-                <a:solidFill>
-                  <a:srgbClr val="34474A"/>
-                </a:solidFill>
-                <a:latin typeface="Arial" pitchFamily="34" charset="0"/>
-                <a:ea typeface="Arial" pitchFamily="34" charset="-122"/>
-                <a:cs typeface="Arial" pitchFamily="34" charset="-120"/>
-              </a:rPr>
-              <a:t>A 52% cut, not the 75% the design allows: handlers will re-check drafts before they trust them. Four AI agents, one rules-only step, two human checkpoints.</a:t>
-            </a:r>
-            <a:endParaRPr lang="en-US" sz="840" dirty="0"/>
-          </a:p>
-        </p:txBody>
-      </p:sp>
-      <p:sp>
-        <p:nvSpPr>
-          <p:cNvPr id="17" name="Shape 15"/>
+              <a:buNone/>
+            </a:pPr>
+            <a:r>
+              <a:rPr lang="en-US" sz="860" dirty="0">
+                <a:solidFill>
+                  <a:srgbClr val="3A3A3A"/>
+                </a:solidFill>
+                <a:latin typeface="Arial" pitchFamily="34" charset="0"/>
+                <a:ea typeface="Arial" pitchFamily="34" charset="-122"/>
+                <a:cs typeface="Arial" pitchFamily="34" charset="-120"/>
+              </a:rPr>
+              <a:t>52% cut, not the 75% max</a:t>
+            </a:r>
+            <a:endParaRPr lang="en-US" sz="860" dirty="0"/>
+          </a:p>
+        </p:txBody>
+      </p:sp>
+      <p:sp>
+        <p:nvSpPr>
+          <p:cNvPr id="25" name="Shape 23"/>
+          <p:cNvSpPr/>
+          <p:nvPr/>
+        </p:nvSpPr>
+        <p:spPr>
+          <a:xfrm>
+            <a:off x="4361688" y="2985516"/>
+            <a:ext cx="54864" cy="54864"/>
+          </a:xfrm>
+          <a:prstGeom prst="ellipse">
+            <a:avLst/>
+          </a:prstGeom>
+          <a:solidFill>
+            <a:srgbClr val="0891B2"/>
+          </a:solidFill>
+          <a:ln/>
+        </p:spPr>
+      </p:sp>
+      <p:sp>
+        <p:nvSpPr>
+          <p:cNvPr id="26" name="Text 24"/>
+          <p:cNvSpPr txBox="1"/>
+          <p:nvPr/>
+        </p:nvSpPr>
+        <p:spPr>
+          <a:xfrm>
+            <a:off x="4507992" y="2930652"/>
+            <a:ext cx="2880360" cy="182880"/>
+          </a:xfrm>
+          <a:prstGeom prst="rect">
+            <a:avLst/>
+          </a:prstGeom>
+          <a:noFill/>
+          <a:ln/>
+        </p:spPr>
+        <p:txBody>
+          <a:bodyPr wrap="square" lIns="0" tIns="0" rIns="0" bIns="0" rtlCol="0" anchor="ctr"/>
+          <a:lstStyle/>
+          <a:p>
+            <a:pPr indent="0" marL="0">
+              <a:buNone/>
+            </a:pPr>
+            <a:r>
+              <a:rPr lang="en-US" sz="860" dirty="0">
+                <a:solidFill>
+                  <a:srgbClr val="3A3A3A"/>
+                </a:solidFill>
+                <a:latin typeface="Arial" pitchFamily="34" charset="0"/>
+                <a:ea typeface="Arial" pitchFamily="34" charset="-122"/>
+                <a:cs typeface="Arial" pitchFamily="34" charset="-120"/>
+              </a:rPr>
+              <a:t>4 AI agents, 1 rules-only step</a:t>
+            </a:r>
+            <a:endParaRPr lang="en-US" sz="860" dirty="0"/>
+          </a:p>
+        </p:txBody>
+      </p:sp>
+      <p:sp>
+        <p:nvSpPr>
+          <p:cNvPr id="27" name="Shape 25"/>
+          <p:cNvSpPr/>
+          <p:nvPr/>
+        </p:nvSpPr>
+        <p:spPr>
+          <a:xfrm>
+            <a:off x="4361688" y="3218688"/>
+            <a:ext cx="54864" cy="54864"/>
+          </a:xfrm>
+          <a:prstGeom prst="ellipse">
+            <a:avLst/>
+          </a:prstGeom>
+          <a:solidFill>
+            <a:srgbClr val="0891B2"/>
+          </a:solidFill>
+          <a:ln/>
+        </p:spPr>
+      </p:sp>
+      <p:sp>
+        <p:nvSpPr>
+          <p:cNvPr id="28" name="Text 26"/>
+          <p:cNvSpPr txBox="1"/>
+          <p:nvPr/>
+        </p:nvSpPr>
+        <p:spPr>
+          <a:xfrm>
+            <a:off x="4507992" y="3163824"/>
+            <a:ext cx="2880360" cy="182880"/>
+          </a:xfrm>
+          <a:prstGeom prst="rect">
+            <a:avLst/>
+          </a:prstGeom>
+          <a:noFill/>
+          <a:ln/>
+        </p:spPr>
+        <p:txBody>
+          <a:bodyPr wrap="square" lIns="0" tIns="0" rIns="0" bIns="0" rtlCol="0" anchor="ctr"/>
+          <a:lstStyle/>
+          <a:p>
+            <a:pPr indent="0" marL="0">
+              <a:buNone/>
+            </a:pPr>
+            <a:r>
+              <a:rPr lang="en-US" sz="860" dirty="0">
+                <a:solidFill>
+                  <a:srgbClr val="3A3A3A"/>
+                </a:solidFill>
+                <a:latin typeface="Arial" pitchFamily="34" charset="0"/>
+                <a:ea typeface="Arial" pitchFamily="34" charset="-122"/>
+                <a:cs typeface="Arial" pitchFamily="34" charset="-120"/>
+              </a:rPr>
+              <a:t>2 human checkpoints kept</a:t>
+            </a:r>
+            <a:endParaRPr lang="en-US" sz="860" dirty="0"/>
+          </a:p>
+        </p:txBody>
+      </p:sp>
+      <p:sp>
+        <p:nvSpPr>
+          <p:cNvPr id="29" name="Shape 27"/>
+          <p:cNvSpPr/>
+          <p:nvPr/>
+        </p:nvSpPr>
+        <p:spPr>
+          <a:xfrm>
+            <a:off x="4361688" y="3451860"/>
+            <a:ext cx="54864" cy="54864"/>
+          </a:xfrm>
+          <a:prstGeom prst="ellipse">
+            <a:avLst/>
+          </a:prstGeom>
+          <a:solidFill>
+            <a:srgbClr val="0891B2"/>
+          </a:solidFill>
+          <a:ln/>
+        </p:spPr>
+      </p:sp>
+      <p:sp>
+        <p:nvSpPr>
+          <p:cNvPr id="30" name="Text 28"/>
+          <p:cNvSpPr txBox="1"/>
+          <p:nvPr/>
+        </p:nvSpPr>
+        <p:spPr>
+          <a:xfrm>
+            <a:off x="4507992" y="3396996"/>
+            <a:ext cx="2880360" cy="182880"/>
+          </a:xfrm>
+          <a:prstGeom prst="rect">
+            <a:avLst/>
+          </a:prstGeom>
+          <a:noFill/>
+          <a:ln/>
+        </p:spPr>
+        <p:txBody>
+          <a:bodyPr wrap="square" lIns="0" tIns="0" rIns="0" bIns="0" rtlCol="0" anchor="ctr"/>
+          <a:lstStyle/>
+          <a:p>
+            <a:pPr indent="0" marL="0">
+              <a:buNone/>
+            </a:pPr>
+            <a:r>
+              <a:rPr lang="en-US" sz="860" dirty="0">
+                <a:solidFill>
+                  <a:srgbClr val="3A3A3A"/>
+                </a:solidFill>
+                <a:latin typeface="Arial" pitchFamily="34" charset="0"/>
+                <a:ea typeface="Arial" pitchFamily="34" charset="-122"/>
+                <a:cs typeface="Arial" pitchFamily="34" charset="-120"/>
+              </a:rPr>
+              <a:t>Handlers re-check before they trust it</a:t>
+            </a:r>
+            <a:endParaRPr lang="en-US" sz="860" dirty="0"/>
+          </a:p>
+        </p:txBody>
+      </p:sp>
+      <p:sp>
+        <p:nvSpPr>
+          <p:cNvPr id="31" name="Shape 29"/>
           <p:cNvSpPr/>
           <p:nvPr/>
         </p:nvSpPr>
@@ -2090,7 +2478,7 @@
       </p:sp>
       <p:sp>
         <p:nvSpPr>
-          <p:cNvPr id="18" name="Text 16"/>
+          <p:cNvPr id="32" name="Text 30"/>
           <p:cNvSpPr txBox="1"/>
           <p:nvPr/>
         </p:nvSpPr>
@@ -2129,7 +2517,7 @@
       </p:sp>
       <p:sp>
         <p:nvSpPr>
-          <p:cNvPr id="19" name="Shape 17"/>
+          <p:cNvPr id="33" name="Shape 31"/>
           <p:cNvSpPr/>
           <p:nvPr/>
         </p:nvSpPr>
@@ -2149,7 +2537,7 @@
       </p:sp>
       <p:sp>
         <p:nvSpPr>
-          <p:cNvPr id="20" name="Text 18"/>
+          <p:cNvPr id="34" name="Text 32"/>
           <p:cNvSpPr txBox="1"/>
           <p:nvPr/>
         </p:nvSpPr>
@@ -2188,7 +2576,7 @@
       </p:sp>
       <p:sp>
         <p:nvSpPr>
-          <p:cNvPr id="21" name="Text 19"/>
+          <p:cNvPr id="35" name="Text 33"/>
           <p:cNvSpPr txBox="1"/>
           <p:nvPr/>
         </p:nvSpPr>
@@ -2227,7 +2615,7 @@
       </p:sp>
       <p:sp>
         <p:nvSpPr>
-          <p:cNvPr id="22" name="Text 20"/>
+          <p:cNvPr id="36" name="Text 34"/>
           <p:cNvSpPr txBox="1"/>
           <p:nvPr/>
         </p:nvSpPr>
@@ -2269,7 +2657,7 @@
       </p:sp>
       <p:sp>
         <p:nvSpPr>
-          <p:cNvPr id="23" name="Shape 21"/>
+          <p:cNvPr id="37" name="Shape 35"/>
           <p:cNvSpPr/>
           <p:nvPr/>
         </p:nvSpPr>
@@ -2289,7 +2677,7 @@
       </p:sp>
       <p:sp>
         <p:nvSpPr>
-          <p:cNvPr id="24" name="Text 22"/>
+          <p:cNvPr id="38" name="Text 36"/>
           <p:cNvSpPr txBox="1"/>
           <p:nvPr/>
         </p:nvSpPr>
@@ -2328,7 +2716,7 @@
       </p:sp>
       <p:sp>
         <p:nvSpPr>
-          <p:cNvPr id="25" name="Text 23"/>
+          <p:cNvPr id="39" name="Text 37"/>
           <p:cNvSpPr txBox="1"/>
           <p:nvPr/>
         </p:nvSpPr>
@@ -2367,7 +2755,7 @@
       </p:sp>
       <p:sp>
         <p:nvSpPr>
-          <p:cNvPr id="26" name="Text 24"/>
+          <p:cNvPr id="40" name="Text 38"/>
           <p:cNvSpPr txBox="1"/>
           <p:nvPr/>
         </p:nvSpPr>
@@ -2409,7 +2797,7 @@
       </p:sp>
       <p:sp>
         <p:nvSpPr>
-          <p:cNvPr id="27" name="Shape 25"/>
+          <p:cNvPr id="41" name="Shape 39"/>
           <p:cNvSpPr/>
           <p:nvPr/>
         </p:nvSpPr>
@@ -2429,7 +2817,7 @@
       </p:sp>
       <p:sp>
         <p:nvSpPr>
-          <p:cNvPr id="28" name="Text 26"/>
+          <p:cNvPr id="42" name="Text 40"/>
           <p:cNvSpPr txBox="1"/>
           <p:nvPr/>
         </p:nvSpPr>
@@ -2468,7 +2856,7 @@
       </p:sp>
       <p:sp>
         <p:nvSpPr>
-          <p:cNvPr id="29" name="Text 27"/>
+          <p:cNvPr id="43" name="Text 41"/>
           <p:cNvSpPr txBox="1"/>
           <p:nvPr/>
         </p:nvSpPr>
@@ -2507,7 +2895,7 @@
       </p:sp>
       <p:sp>
         <p:nvSpPr>
-          <p:cNvPr id="30" name="Text 28"/>
+          <p:cNvPr id="44" name="Text 42"/>
           <p:cNvSpPr txBox="1"/>
           <p:nvPr/>
         </p:nvSpPr>
@@ -2549,7 +2937,7 @@
       </p:sp>
       <p:sp>
         <p:nvSpPr>
-          <p:cNvPr id="31" name="Text 29"/>
+          <p:cNvPr id="45" name="Text 43"/>
           <p:cNvSpPr txBox="1"/>
           <p:nvPr/>
         </p:nvSpPr>
@@ -2588,7 +2976,7 @@
       </p:sp>
       <p:sp>
         <p:nvSpPr>
-          <p:cNvPr id="32" name="Shape 30"/>
+          <p:cNvPr id="46" name="Shape 44"/>
           <p:cNvSpPr/>
           <p:nvPr/>
         </p:nvSpPr>
@@ -2615,7 +3003,7 @@
       </p:sp>
       <p:sp>
         <p:nvSpPr>
-          <p:cNvPr id="33" name="Text 31"/>
+          <p:cNvPr id="47" name="Text 45"/>
           <p:cNvSpPr txBox="1"/>
           <p:nvPr/>
         </p:nvSpPr>
@@ -2654,7 +3042,7 @@
       </p:sp>
       <p:sp>
         <p:nvSpPr>
-          <p:cNvPr id="34" name="Text 32"/>
+          <p:cNvPr id="48" name="Text 46"/>
           <p:cNvSpPr txBox="1"/>
           <p:nvPr/>
         </p:nvSpPr>
@@ -2696,7 +3084,7 @@
       </p:sp>
       <p:sp>
         <p:nvSpPr>
-          <p:cNvPr id="35" name="Shape 33"/>
+          <p:cNvPr id="49" name="Shape 47"/>
           <p:cNvSpPr/>
           <p:nvPr/>
         </p:nvSpPr>
@@ -2723,7 +3111,7 @@
       </p:sp>
       <p:sp>
         <p:nvSpPr>
-          <p:cNvPr id="36" name="Text 34"/>
+          <p:cNvPr id="50" name="Text 48"/>
           <p:cNvSpPr txBox="1"/>
           <p:nvPr/>
         </p:nvSpPr>
@@ -2762,7 +3150,7 @@
       </p:sp>
       <p:sp>
         <p:nvSpPr>
-          <p:cNvPr id="37" name="Text 35"/>
+          <p:cNvPr id="51" name="Text 49"/>
           <p:cNvSpPr txBox="1"/>
           <p:nvPr/>
         </p:nvSpPr>
@@ -2804,7 +3192,7 @@
       </p:sp>
       <p:sp>
         <p:nvSpPr>
-          <p:cNvPr id="38" name="Shape 36"/>
+          <p:cNvPr id="52" name="Shape 50"/>
           <p:cNvSpPr/>
           <p:nvPr/>
         </p:nvSpPr>
@@ -2831,7 +3219,7 @@
       </p:sp>
       <p:sp>
         <p:nvSpPr>
-          <p:cNvPr id="39" name="Text 37"/>
+          <p:cNvPr id="53" name="Text 51"/>
           <p:cNvSpPr txBox="1"/>
           <p:nvPr/>
         </p:nvSpPr>
@@ -2870,7 +3258,7 @@
       </p:sp>
       <p:sp>
         <p:nvSpPr>
-          <p:cNvPr id="40" name="Text 38"/>
+          <p:cNvPr id="54" name="Text 52"/>
           <p:cNvSpPr txBox="1"/>
           <p:nvPr/>
         </p:nvSpPr>
@@ -2912,7 +3300,7 @@
       </p:sp>
       <p:sp>
         <p:nvSpPr>
-          <p:cNvPr id="41" name="Shape 39"/>
+          <p:cNvPr id="55" name="Shape 53"/>
           <p:cNvSpPr/>
           <p:nvPr/>
         </p:nvSpPr>
@@ -2939,7 +3327,7 @@
       </p:sp>
       <p:sp>
         <p:nvSpPr>
-          <p:cNvPr id="42" name="Text 40"/>
+          <p:cNvPr id="56" name="Text 54"/>
           <p:cNvSpPr txBox="1"/>
           <p:nvPr/>
         </p:nvSpPr>
@@ -2978,7 +3366,7 @@
       </p:sp>
       <p:sp>
         <p:nvSpPr>
-          <p:cNvPr id="43" name="Text 41"/>
+          <p:cNvPr id="57" name="Text 55"/>
           <p:cNvSpPr txBox="1"/>
           <p:nvPr/>
         </p:nvSpPr>
@@ -3020,7 +3408,7 @@
       </p:sp>
       <p:sp>
         <p:nvSpPr>
-          <p:cNvPr id="44" name="Shape 42"/>
+          <p:cNvPr id="58" name="Shape 56"/>
           <p:cNvSpPr/>
           <p:nvPr/>
         </p:nvSpPr>
@@ -3047,7 +3435,7 @@
       </p:sp>
       <p:sp>
         <p:nvSpPr>
-          <p:cNvPr id="45" name="Text 43"/>
+          <p:cNvPr id="59" name="Text 57"/>
           <p:cNvSpPr txBox="1"/>
           <p:nvPr/>
         </p:nvSpPr>
@@ -3106,7 +3494,7 @@
       </p:sp>
       <p:sp>
         <p:nvSpPr>
-          <p:cNvPr id="46" name="Shape 44"/>
+          <p:cNvPr id="60" name="Shape 58"/>
           <p:cNvSpPr/>
           <p:nvPr/>
         </p:nvSpPr>
@@ -3133,7 +3521,7 @@
       </p:sp>
       <p:sp>
         <p:nvSpPr>
-          <p:cNvPr id="47" name="Text 45"/>
+          <p:cNvPr id="61" name="Text 59"/>
           <p:cNvSpPr txBox="1"/>
           <p:nvPr/>
         </p:nvSpPr>
@@ -3192,7 +3580,7 @@
       </p:sp>
       <p:sp>
         <p:nvSpPr>
-          <p:cNvPr id="48" name="Text 46"/>
+          <p:cNvPr id="62" name="Text 60"/>
           <p:cNvSpPr txBox="1"/>
           <p:nvPr/>
         </p:nvSpPr>
@@ -3231,7 +3619,7 @@
       </p:sp>
       <p:sp>
         <p:nvSpPr>
-          <p:cNvPr id="49" name="Text 47"/>
+          <p:cNvPr id="63" name="Text 61"/>
           <p:cNvSpPr txBox="1"/>
           <p:nvPr/>
         </p:nvSpPr>
@@ -3270,7 +3658,7 @@
       </p:sp>
       <p:sp>
         <p:nvSpPr>
-          <p:cNvPr id="50" name="Text 48"/>
+          <p:cNvPr id="64" name="Text 62"/>
           <p:cNvSpPr txBox="1"/>
           <p:nvPr/>
         </p:nvSpPr>
@@ -11365,7 +11753,7 @@
         <p:spPr>
           <a:xfrm>
             <a:off x="9390888" y="1298448"/>
-            <a:ext cx="2231136" cy="365760"/>
+            <a:ext cx="2231136" cy="310896"/>
           </a:xfrm>
           <a:prstGeom prst="rect">
             <a:avLst/>
@@ -11384,7 +11772,7 @@
               <a:buNone/>
             </a:pPr>
             <a:r>
-              <a:rPr lang="en-US" sz="800" i="1" dirty="0">
+              <a:rPr lang="en-US" sz="780" i="1" dirty="0">
                 <a:solidFill>
                   <a:srgbClr val="4A4A5E"/>
                 </a:solidFill>
@@ -11392,22 +11780,81 @@
                 <a:ea typeface="Arial" pitchFamily="34" charset="-122"/>
                 <a:cs typeface="Arial" pitchFamily="34" charset="-120"/>
               </a:rPr>
-              <a:t>GGW confirm these are not noticed today. That makes detection the first fix, not retries:</a:t>
-            </a:r>
-            <a:endParaRPr lang="en-US" sz="800" dirty="0"/>
-          </a:p>
-        </p:txBody>
-      </p:sp>
-      <p:sp>
-        <p:nvSpPr>
-          <p:cNvPr id="34" name="Text 32"/>
-          <p:cNvSpPr txBox="1"/>
-          <p:nvPr/>
-        </p:nvSpPr>
-        <p:spPr>
-          <a:xfrm>
-            <a:off x="9390888" y="1719072"/>
-            <a:ext cx="2231136" cy="182880"/>
+              <a:t>Not noticed today (GGW) — so detection comes before retries:</a:t>
+            </a:r>
+            <a:endParaRPr lang="en-US" sz="780" dirty="0"/>
+          </a:p>
+        </p:txBody>
+      </p:sp>
+      <p:sp>
+        <p:nvSpPr>
+          <p:cNvPr id="34" name="Shape 32"/>
+          <p:cNvSpPr/>
+          <p:nvPr/>
+        </p:nvSpPr>
+        <p:spPr>
+          <a:xfrm>
+            <a:off x="9390888" y="1700784"/>
+            <a:ext cx="274320" cy="274320"/>
+          </a:xfrm>
+          <a:prstGeom prst="ellipse">
+            <a:avLst/>
+          </a:prstGeom>
+          <a:solidFill>
+            <a:srgbClr val="4338CA"/>
+          </a:solidFill>
+          <a:ln/>
+        </p:spPr>
+      </p:sp>
+      <p:sp>
+        <p:nvSpPr>
+          <p:cNvPr id="35" name="Text 33"/>
+          <p:cNvSpPr txBox="1"/>
+          <p:nvPr/>
+        </p:nvSpPr>
+        <p:spPr>
+          <a:xfrm>
+            <a:off x="9390888" y="1700784"/>
+            <a:ext cx="274320" cy="274320"/>
+          </a:xfrm>
+          <a:prstGeom prst="rect">
+            <a:avLst/>
+          </a:prstGeom>
+          <a:noFill/>
+          <a:ln/>
+        </p:spPr>
+        <p:txBody>
+          <a:bodyPr wrap="square" lIns="0" tIns="0" rIns="0" bIns="0" rtlCol="0" anchor="ctr"/>
+          <a:lstStyle/>
+          <a:p>
+            <a:pPr algn="ctr" indent="0" marL="0">
+              <a:buNone/>
+            </a:pPr>
+            <a:r>
+              <a:rPr lang="en-US" sz="950" b="1" dirty="0">
+                <a:solidFill>
+                  <a:srgbClr val="FFFFFF"/>
+                </a:solidFill>
+                <a:latin typeface="Arial" pitchFamily="34" charset="0"/>
+                <a:ea typeface="Arial" pitchFamily="34" charset="-122"/>
+                <a:cs typeface="Arial" pitchFamily="34" charset="-120"/>
+              </a:rPr>
+              <a:t>1</a:t>
+            </a:r>
+            <a:endParaRPr lang="en-US" sz="950" dirty="0"/>
+          </a:p>
+        </p:txBody>
+      </p:sp>
+      <p:sp>
+        <p:nvSpPr>
+          <p:cNvPr id="36" name="Text 34"/>
+          <p:cNvSpPr txBox="1"/>
+          <p:nvPr/>
+        </p:nvSpPr>
+        <p:spPr>
+          <a:xfrm>
+            <a:off x="9738360" y="1682496"/>
+            <a:ext cx="1883664" cy="173736"/>
           </a:xfrm>
           <a:prstGeom prst="rect">
             <a:avLst/>
@@ -11423,7 +11870,7 @@
               <a:buNone/>
             </a:pPr>
             <a:r>
-              <a:rPr lang="en-US" sz="840" b="1" dirty="0">
+              <a:rPr lang="en-US" sz="880" b="1" dirty="0">
                 <a:solidFill>
                   <a:srgbClr val="2A2A3E"/>
                 </a:solidFill>
@@ -11431,22 +11878,22 @@
                 <a:ea typeface="Arial" pitchFamily="34" charset="-122"/>
                 <a:cs typeface="Arial" pitchFamily="34" charset="-120"/>
               </a:rPr>
-              <a:t>Count what should have arrived</a:t>
-            </a:r>
-            <a:endParaRPr lang="en-US" sz="840" dirty="0"/>
-          </a:p>
-        </p:txBody>
-      </p:sp>
-      <p:sp>
-        <p:nvSpPr>
-          <p:cNvPr id="35" name="Text 33"/>
-          <p:cNvSpPr txBox="1"/>
-          <p:nvPr/>
-        </p:nvSpPr>
-        <p:spPr>
-          <a:xfrm>
-            <a:off x="9390888" y="1883664"/>
-            <a:ext cx="2231136" cy="420624"/>
+              <a:t>Count what should arrive</a:t>
+            </a:r>
+            <a:endParaRPr lang="en-US" sz="880" dirty="0"/>
+          </a:p>
+        </p:txBody>
+      </p:sp>
+      <p:sp>
+        <p:nvSpPr>
+          <p:cNvPr id="37" name="Text 35"/>
+          <p:cNvSpPr txBox="1"/>
+          <p:nvPr/>
+        </p:nvSpPr>
+        <p:spPr>
+          <a:xfrm>
+            <a:off x="9738360" y="1847088"/>
+            <a:ext cx="1883664" cy="164592"/>
           </a:xfrm>
           <a:prstGeom prst="rect">
             <a:avLst/>
@@ -11459,21 +11906,18 @@
           <a:lstStyle/>
           <a:p>
             <a:pPr indent="0" marL="0">
-              <a:lnSpc>
-                <a:spcPct val="115000"/>
-              </a:lnSpc>
               <a:buNone/>
             </a:pPr>
             <a:r>
               <a:rPr lang="en-US" sz="760" dirty="0">
                 <a:solidFill>
-                  <a:srgbClr val="4A4A5E"/>
-                </a:solidFill>
-                <a:latin typeface="Arial" pitchFamily="34" charset="0"/>
-                <a:ea typeface="Arial" pitchFamily="34" charset="-122"/>
-                <a:cs typeface="Arial" pitchFamily="34" charset="-120"/>
-              </a:rPr>
-              <a:t>Reconcile EASY sends against IDB claims daily. A gap is a lost claim nobody sees.</a:t>
+                  <a:srgbClr val="6A6A7E"/>
+                </a:solidFill>
+                <a:latin typeface="Arial" pitchFamily="34" charset="0"/>
+                <a:ea typeface="Arial" pitchFamily="34" charset="-122"/>
+                <a:cs typeface="Arial" pitchFamily="34" charset="-120"/>
+              </a:rPr>
+              <a:t>daily reconciliation catches gaps</a:t>
             </a:r>
             <a:endParaRPr lang="en-US" sz="760" dirty="0"/>
           </a:p>
@@ -11481,14 +11925,73 @@
       </p:sp>
       <p:sp>
         <p:nvSpPr>
-          <p:cNvPr id="36" name="Text 34"/>
-          <p:cNvSpPr txBox="1"/>
-          <p:nvPr/>
-        </p:nvSpPr>
-        <p:spPr>
-          <a:xfrm>
-            <a:off x="9390888" y="2322576"/>
-            <a:ext cx="2231136" cy="182880"/>
+          <p:cNvPr id="38" name="Shape 36"/>
+          <p:cNvSpPr/>
+          <p:nvPr/>
+        </p:nvSpPr>
+        <p:spPr>
+          <a:xfrm>
+            <a:off x="9390888" y="2189988"/>
+            <a:ext cx="274320" cy="274320"/>
+          </a:xfrm>
+          <a:prstGeom prst="ellipse">
+            <a:avLst/>
+          </a:prstGeom>
+          <a:solidFill>
+            <a:srgbClr val="4338CA"/>
+          </a:solidFill>
+          <a:ln/>
+        </p:spPr>
+      </p:sp>
+      <p:sp>
+        <p:nvSpPr>
+          <p:cNvPr id="39" name="Text 37"/>
+          <p:cNvSpPr txBox="1"/>
+          <p:nvPr/>
+        </p:nvSpPr>
+        <p:spPr>
+          <a:xfrm>
+            <a:off x="9390888" y="2189988"/>
+            <a:ext cx="274320" cy="274320"/>
+          </a:xfrm>
+          <a:prstGeom prst="rect">
+            <a:avLst/>
+          </a:prstGeom>
+          <a:noFill/>
+          <a:ln/>
+        </p:spPr>
+        <p:txBody>
+          <a:bodyPr wrap="square" lIns="0" tIns="0" rIns="0" bIns="0" rtlCol="0" anchor="ctr"/>
+          <a:lstStyle/>
+          <a:p>
+            <a:pPr algn="ctr" indent="0" marL="0">
+              <a:buNone/>
+            </a:pPr>
+            <a:r>
+              <a:rPr lang="en-US" sz="950" b="1" dirty="0">
+                <a:solidFill>
+                  <a:srgbClr val="FFFFFF"/>
+                </a:solidFill>
+                <a:latin typeface="Arial" pitchFamily="34" charset="0"/>
+                <a:ea typeface="Arial" pitchFamily="34" charset="-122"/>
+                <a:cs typeface="Arial" pitchFamily="34" charset="-120"/>
+              </a:rPr>
+              <a:t>2</a:t>
+            </a:r>
+            <a:endParaRPr lang="en-US" sz="950" dirty="0"/>
+          </a:p>
+        </p:txBody>
+      </p:sp>
+      <p:sp>
+        <p:nvSpPr>
+          <p:cNvPr id="40" name="Text 38"/>
+          <p:cNvSpPr txBox="1"/>
+          <p:nvPr/>
+        </p:nvSpPr>
+        <p:spPr>
+          <a:xfrm>
+            <a:off x="9738360" y="2171700"/>
+            <a:ext cx="1883664" cy="173736"/>
           </a:xfrm>
           <a:prstGeom prst="rect">
             <a:avLst/>
@@ -11504,7 +12007,7 @@
               <a:buNone/>
             </a:pPr>
             <a:r>
-              <a:rPr lang="en-US" sz="840" b="1" dirty="0">
+              <a:rPr lang="en-US" sz="880" b="1" dirty="0">
                 <a:solidFill>
                   <a:srgbClr val="2A2A3E"/>
                 </a:solidFill>
@@ -11514,20 +12017,20 @@
               </a:rPr>
               <a:t>Sort the failure</a:t>
             </a:r>
-            <a:endParaRPr lang="en-US" sz="840" dirty="0"/>
-          </a:p>
-        </p:txBody>
-      </p:sp>
-      <p:sp>
-        <p:nvSpPr>
-          <p:cNvPr id="37" name="Text 35"/>
-          <p:cNvSpPr txBox="1"/>
-          <p:nvPr/>
-        </p:nvSpPr>
-        <p:spPr>
-          <a:xfrm>
-            <a:off x="9390888" y="2487168"/>
-            <a:ext cx="2231136" cy="420624"/>
+            <a:endParaRPr lang="en-US" sz="880" dirty="0"/>
+          </a:p>
+        </p:txBody>
+      </p:sp>
+      <p:sp>
+        <p:nvSpPr>
+          <p:cNvPr id="41" name="Text 39"/>
+          <p:cNvSpPr txBox="1"/>
+          <p:nvPr/>
+        </p:nvSpPr>
+        <p:spPr>
+          <a:xfrm>
+            <a:off x="9738360" y="2336292"/>
+            <a:ext cx="1883664" cy="164592"/>
           </a:xfrm>
           <a:prstGeom prst="rect">
             <a:avLst/>
@@ -11540,21 +12043,18 @@
           <a:lstStyle/>
           <a:p>
             <a:pPr indent="0" marL="0">
-              <a:lnSpc>
-                <a:spcPct val="115000"/>
-              </a:lnSpc>
               <a:buNone/>
             </a:pPr>
             <a:r>
               <a:rPr lang="en-US" sz="760" dirty="0">
                 <a:solidFill>
-                  <a:srgbClr val="4A4A5E"/>
-                </a:solidFill>
-                <a:latin typeface="Arial" pitchFamily="34" charset="0"/>
-                <a:ea typeface="Arial" pitchFamily="34" charset="-122"/>
-                <a:cs typeface="Arial" pitchFamily="34" charset="-120"/>
-              </a:rPr>
-              <a:t>A timeout is worth retrying. A missing field never is — it just fails again.</a:t>
+                  <a:srgbClr val="6A6A7E"/>
+                </a:solidFill>
+                <a:latin typeface="Arial" pitchFamily="34" charset="0"/>
+                <a:ea typeface="Arial" pitchFamily="34" charset="-122"/>
+                <a:cs typeface="Arial" pitchFamily="34" charset="-120"/>
+              </a:rPr>
+              <a:t>timeout vs. missing field</a:t>
             </a:r>
             <a:endParaRPr lang="en-US" sz="760" dirty="0"/>
           </a:p>
@@ -11562,14 +12062,73 @@
       </p:sp>
       <p:sp>
         <p:nvSpPr>
-          <p:cNvPr id="38" name="Text 36"/>
-          <p:cNvSpPr txBox="1"/>
-          <p:nvPr/>
-        </p:nvSpPr>
-        <p:spPr>
-          <a:xfrm>
-            <a:off x="9390888" y="2926080"/>
-            <a:ext cx="2231136" cy="182880"/>
+          <p:cNvPr id="42" name="Shape 40"/>
+          <p:cNvSpPr/>
+          <p:nvPr/>
+        </p:nvSpPr>
+        <p:spPr>
+          <a:xfrm>
+            <a:off x="9390888" y="2679192"/>
+            <a:ext cx="274320" cy="274320"/>
+          </a:xfrm>
+          <a:prstGeom prst="ellipse">
+            <a:avLst/>
+          </a:prstGeom>
+          <a:solidFill>
+            <a:srgbClr val="4338CA"/>
+          </a:solidFill>
+          <a:ln/>
+        </p:spPr>
+      </p:sp>
+      <p:sp>
+        <p:nvSpPr>
+          <p:cNvPr id="43" name="Text 41"/>
+          <p:cNvSpPr txBox="1"/>
+          <p:nvPr/>
+        </p:nvSpPr>
+        <p:spPr>
+          <a:xfrm>
+            <a:off x="9390888" y="2679192"/>
+            <a:ext cx="274320" cy="274320"/>
+          </a:xfrm>
+          <a:prstGeom prst="rect">
+            <a:avLst/>
+          </a:prstGeom>
+          <a:noFill/>
+          <a:ln/>
+        </p:spPr>
+        <p:txBody>
+          <a:bodyPr wrap="square" lIns="0" tIns="0" rIns="0" bIns="0" rtlCol="0" anchor="ctr"/>
+          <a:lstStyle/>
+          <a:p>
+            <a:pPr algn="ctr" indent="0" marL="0">
+              <a:buNone/>
+            </a:pPr>
+            <a:r>
+              <a:rPr lang="en-US" sz="950" b="1" dirty="0">
+                <a:solidFill>
+                  <a:srgbClr val="FFFFFF"/>
+                </a:solidFill>
+                <a:latin typeface="Arial" pitchFamily="34" charset="0"/>
+                <a:ea typeface="Arial" pitchFamily="34" charset="-122"/>
+                <a:cs typeface="Arial" pitchFamily="34" charset="-120"/>
+              </a:rPr>
+              <a:t>3</a:t>
+            </a:r>
+            <a:endParaRPr lang="en-US" sz="950" dirty="0"/>
+          </a:p>
+        </p:txBody>
+      </p:sp>
+      <p:sp>
+        <p:nvSpPr>
+          <p:cNvPr id="44" name="Text 42"/>
+          <p:cNvSpPr txBox="1"/>
+          <p:nvPr/>
+        </p:nvSpPr>
+        <p:spPr>
+          <a:xfrm>
+            <a:off x="9738360" y="2660904"/>
+            <a:ext cx="1883664" cy="173736"/>
           </a:xfrm>
           <a:prstGeom prst="rect">
             <a:avLst/>
@@ -11585,7 +12144,7 @@
               <a:buNone/>
             </a:pPr>
             <a:r>
-              <a:rPr lang="en-US" sz="840" b="1" dirty="0">
+              <a:rPr lang="en-US" sz="880" b="1" dirty="0">
                 <a:solidFill>
                   <a:srgbClr val="2A2A3E"/>
                 </a:solidFill>
@@ -11593,22 +12152,22 @@
                 <a:ea typeface="Arial" pitchFamily="34" charset="-122"/>
                 <a:cs typeface="Arial" pitchFamily="34" charset="-120"/>
               </a:rPr>
-              <a:t>Retry with growing gaps</a:t>
-            </a:r>
-            <a:endParaRPr lang="en-US" sz="840" dirty="0"/>
-          </a:p>
-        </p:txBody>
-      </p:sp>
-      <p:sp>
-        <p:nvSpPr>
-          <p:cNvPr id="39" name="Text 37"/>
-          <p:cNvSpPr txBox="1"/>
-          <p:nvPr/>
-        </p:nvSpPr>
-        <p:spPr>
-          <a:xfrm>
-            <a:off x="9390888" y="3090672"/>
-            <a:ext cx="2231136" cy="420624"/>
+              <a:t>Retry with backoff</a:t>
+            </a:r>
+            <a:endParaRPr lang="en-US" sz="880" dirty="0"/>
+          </a:p>
+        </p:txBody>
+      </p:sp>
+      <p:sp>
+        <p:nvSpPr>
+          <p:cNvPr id="45" name="Text 43"/>
+          <p:cNvSpPr txBox="1"/>
+          <p:nvPr/>
+        </p:nvSpPr>
+        <p:spPr>
+          <a:xfrm>
+            <a:off x="9738360" y="2825496"/>
+            <a:ext cx="1883664" cy="164592"/>
           </a:xfrm>
           <a:prstGeom prst="rect">
             <a:avLst/>
@@ -11621,21 +12180,18 @@
           <a:lstStyle/>
           <a:p>
             <a:pPr indent="0" marL="0">
-              <a:lnSpc>
-                <a:spcPct val="115000"/>
-              </a:lnSpc>
               <a:buNone/>
             </a:pPr>
             <a:r>
               <a:rPr lang="en-US" sz="760" dirty="0">
                 <a:solidFill>
-                  <a:srgbClr val="4A4A5E"/>
-                </a:solidFill>
-                <a:latin typeface="Arial" pitchFamily="34" charset="0"/>
-                <a:ea typeface="Arial" pitchFamily="34" charset="-122"/>
-                <a:cs typeface="Arial" pitchFamily="34" charset="-120"/>
-              </a:rPr>
-              <a:t>1s, 2s, 4s, plus a random offset, so stuck claims do not all retry at once.</a:t>
+                  <a:srgbClr val="6A6A7E"/>
+                </a:solidFill>
+                <a:latin typeface="Arial" pitchFamily="34" charset="0"/>
+                <a:ea typeface="Arial" pitchFamily="34" charset="-122"/>
+                <a:cs typeface="Arial" pitchFamily="34" charset="-120"/>
+              </a:rPr>
+              <a:t>1s, 2s, 4s + jitter</a:t>
             </a:r>
             <a:endParaRPr lang="en-US" sz="760" dirty="0"/>
           </a:p>
@@ -11643,14 +12199,73 @@
       </p:sp>
       <p:sp>
         <p:nvSpPr>
-          <p:cNvPr id="40" name="Text 38"/>
-          <p:cNvSpPr txBox="1"/>
-          <p:nvPr/>
-        </p:nvSpPr>
-        <p:spPr>
-          <a:xfrm>
-            <a:off x="9390888" y="3529584"/>
-            <a:ext cx="2231136" cy="182880"/>
+          <p:cNvPr id="46" name="Shape 44"/>
+          <p:cNvSpPr/>
+          <p:nvPr/>
+        </p:nvSpPr>
+        <p:spPr>
+          <a:xfrm>
+            <a:off x="9390888" y="3168396"/>
+            <a:ext cx="274320" cy="274320"/>
+          </a:xfrm>
+          <a:prstGeom prst="ellipse">
+            <a:avLst/>
+          </a:prstGeom>
+          <a:solidFill>
+            <a:srgbClr val="4338CA"/>
+          </a:solidFill>
+          <a:ln/>
+        </p:spPr>
+      </p:sp>
+      <p:sp>
+        <p:nvSpPr>
+          <p:cNvPr id="47" name="Text 45"/>
+          <p:cNvSpPr txBox="1"/>
+          <p:nvPr/>
+        </p:nvSpPr>
+        <p:spPr>
+          <a:xfrm>
+            <a:off x="9390888" y="3168396"/>
+            <a:ext cx="274320" cy="274320"/>
+          </a:xfrm>
+          <a:prstGeom prst="rect">
+            <a:avLst/>
+          </a:prstGeom>
+          <a:noFill/>
+          <a:ln/>
+        </p:spPr>
+        <p:txBody>
+          <a:bodyPr wrap="square" lIns="0" tIns="0" rIns="0" bIns="0" rtlCol="0" anchor="ctr"/>
+          <a:lstStyle/>
+          <a:p>
+            <a:pPr algn="ctr" indent="0" marL="0">
+              <a:buNone/>
+            </a:pPr>
+            <a:r>
+              <a:rPr lang="en-US" sz="950" b="1" dirty="0">
+                <a:solidFill>
+                  <a:srgbClr val="FFFFFF"/>
+                </a:solidFill>
+                <a:latin typeface="Arial" pitchFamily="34" charset="0"/>
+                <a:ea typeface="Arial" pitchFamily="34" charset="-122"/>
+                <a:cs typeface="Arial" pitchFamily="34" charset="-120"/>
+              </a:rPr>
+              <a:t>4</a:t>
+            </a:r>
+            <a:endParaRPr lang="en-US" sz="950" dirty="0"/>
+          </a:p>
+        </p:txBody>
+      </p:sp>
+      <p:sp>
+        <p:nvSpPr>
+          <p:cNvPr id="48" name="Text 46"/>
+          <p:cNvSpPr txBox="1"/>
+          <p:nvPr/>
+        </p:nvSpPr>
+        <p:spPr>
+          <a:xfrm>
+            <a:off x="9738360" y="3150108"/>
+            <a:ext cx="1883664" cy="173736"/>
           </a:xfrm>
           <a:prstGeom prst="rect">
             <a:avLst/>
@@ -11666,7 +12281,7 @@
               <a:buNone/>
             </a:pPr>
             <a:r>
-              <a:rPr lang="en-US" sz="840" b="1" dirty="0">
+              <a:rPr lang="en-US" sz="880" b="1" dirty="0">
                 <a:solidFill>
                   <a:srgbClr val="2A2A3E"/>
                 </a:solidFill>
@@ -11674,22 +12289,22 @@
                 <a:ea typeface="Arial" pitchFamily="34" charset="-122"/>
                 <a:cs typeface="Arial" pitchFamily="34" charset="-120"/>
               </a:rPr>
-              <a:t>One reference per claim</a:t>
-            </a:r>
-            <a:endParaRPr lang="en-US" sz="840" dirty="0"/>
-          </a:p>
-        </p:txBody>
-      </p:sp>
-      <p:sp>
-        <p:nvSpPr>
-          <p:cNvPr id="41" name="Text 39"/>
-          <p:cNvSpPr txBox="1"/>
-          <p:nvPr/>
-        </p:nvSpPr>
-        <p:spPr>
-          <a:xfrm>
-            <a:off x="9390888" y="3694176"/>
-            <a:ext cx="2231136" cy="420624"/>
+              <a:t>One key per claim</a:t>
+            </a:r>
+            <a:endParaRPr lang="en-US" sz="880" dirty="0"/>
+          </a:p>
+        </p:txBody>
+      </p:sp>
+      <p:sp>
+        <p:nvSpPr>
+          <p:cNvPr id="49" name="Text 47"/>
+          <p:cNvSpPr txBox="1"/>
+          <p:nvPr/>
+        </p:nvSpPr>
+        <p:spPr>
+          <a:xfrm>
+            <a:off x="9738360" y="3314700"/>
+            <a:ext cx="1883664" cy="164592"/>
           </a:xfrm>
           <a:prstGeom prst="rect">
             <a:avLst/>
@@ -11702,21 +12317,18 @@
           <a:lstStyle/>
           <a:p>
             <a:pPr indent="0" marL="0">
-              <a:lnSpc>
-                <a:spcPct val="115000"/>
-              </a:lnSpc>
               <a:buNone/>
             </a:pPr>
             <a:r>
               <a:rPr lang="en-US" sz="760" dirty="0">
                 <a:solidFill>
-                  <a:srgbClr val="4A4A5E"/>
-                </a:solidFill>
-                <a:latin typeface="Arial" pitchFamily="34" charset="0"/>
-                <a:ea typeface="Arial" pitchFamily="34" charset="-122"/>
-                <a:cs typeface="Arial" pitchFamily="34" charset="-120"/>
-              </a:rPr>
-              <a:t>The same key every attempt, so a replay cannot create the claim twice.</a:t>
+                  <a:srgbClr val="6A6A7E"/>
+                </a:solidFill>
+                <a:latin typeface="Arial" pitchFamily="34" charset="0"/>
+                <a:ea typeface="Arial" pitchFamily="34" charset="-122"/>
+                <a:cs typeface="Arial" pitchFamily="34" charset="-120"/>
+              </a:rPr>
+              <a:t>no duplicate replays</a:t>
             </a:r>
             <a:endParaRPr lang="en-US" sz="760" dirty="0"/>
           </a:p>
@@ -11724,14 +12336,73 @@
       </p:sp>
       <p:sp>
         <p:nvSpPr>
-          <p:cNvPr id="42" name="Text 40"/>
-          <p:cNvSpPr txBox="1"/>
-          <p:nvPr/>
-        </p:nvSpPr>
-        <p:spPr>
-          <a:xfrm>
-            <a:off x="9390888" y="4133088"/>
-            <a:ext cx="2231136" cy="182880"/>
+          <p:cNvPr id="50" name="Shape 48"/>
+          <p:cNvSpPr/>
+          <p:nvPr/>
+        </p:nvSpPr>
+        <p:spPr>
+          <a:xfrm>
+            <a:off x="9390888" y="3657600"/>
+            <a:ext cx="274320" cy="274320"/>
+          </a:xfrm>
+          <a:prstGeom prst="ellipse">
+            <a:avLst/>
+          </a:prstGeom>
+          <a:solidFill>
+            <a:srgbClr val="4338CA"/>
+          </a:solidFill>
+          <a:ln/>
+        </p:spPr>
+      </p:sp>
+      <p:sp>
+        <p:nvSpPr>
+          <p:cNvPr id="51" name="Text 49"/>
+          <p:cNvSpPr txBox="1"/>
+          <p:nvPr/>
+        </p:nvSpPr>
+        <p:spPr>
+          <a:xfrm>
+            <a:off x="9390888" y="3657600"/>
+            <a:ext cx="274320" cy="274320"/>
+          </a:xfrm>
+          <a:prstGeom prst="rect">
+            <a:avLst/>
+          </a:prstGeom>
+          <a:noFill/>
+          <a:ln/>
+        </p:spPr>
+        <p:txBody>
+          <a:bodyPr wrap="square" lIns="0" tIns="0" rIns="0" bIns="0" rtlCol="0" anchor="ctr"/>
+          <a:lstStyle/>
+          <a:p>
+            <a:pPr algn="ctr" indent="0" marL="0">
+              <a:buNone/>
+            </a:pPr>
+            <a:r>
+              <a:rPr lang="en-US" sz="950" b="1" dirty="0">
+                <a:solidFill>
+                  <a:srgbClr val="FFFFFF"/>
+                </a:solidFill>
+                <a:latin typeface="Arial" pitchFamily="34" charset="0"/>
+                <a:ea typeface="Arial" pitchFamily="34" charset="-122"/>
+                <a:cs typeface="Arial" pitchFamily="34" charset="-120"/>
+              </a:rPr>
+              <a:t>5</a:t>
+            </a:r>
+            <a:endParaRPr lang="en-US" sz="950" dirty="0"/>
+          </a:p>
+        </p:txBody>
+      </p:sp>
+      <p:sp>
+        <p:nvSpPr>
+          <p:cNvPr id="52" name="Text 50"/>
+          <p:cNvSpPr txBox="1"/>
+          <p:nvPr/>
+        </p:nvSpPr>
+        <p:spPr>
+          <a:xfrm>
+            <a:off x="9738360" y="3639312"/>
+            <a:ext cx="1883664" cy="173736"/>
           </a:xfrm>
           <a:prstGeom prst="rect">
             <a:avLst/>
@@ -11747,7 +12418,7 @@
               <a:buNone/>
             </a:pPr>
             <a:r>
-              <a:rPr lang="en-US" sz="840" b="1" dirty="0">
+              <a:rPr lang="en-US" sz="880" b="1" dirty="0">
                 <a:solidFill>
                   <a:srgbClr val="2A2A3E"/>
                 </a:solidFill>
@@ -11755,22 +12426,22 @@
                 <a:ea typeface="Arial" pitchFamily="34" charset="-122"/>
                 <a:cs typeface="Arial" pitchFamily="34" charset="-120"/>
               </a:rPr>
-              <a:t>Park failures, never drop them</a:t>
-            </a:r>
-            <a:endParaRPr lang="en-US" sz="840" dirty="0"/>
-          </a:p>
-        </p:txBody>
-      </p:sp>
-      <p:sp>
-        <p:nvSpPr>
-          <p:cNvPr id="43" name="Text 41"/>
-          <p:cNvSpPr txBox="1"/>
-          <p:nvPr/>
-        </p:nvSpPr>
-        <p:spPr>
-          <a:xfrm>
-            <a:off x="9390888" y="4297680"/>
-            <a:ext cx="2231136" cy="420624"/>
+              <a:t>Park, don't drop</a:t>
+            </a:r>
+            <a:endParaRPr lang="en-US" sz="880" dirty="0"/>
+          </a:p>
+        </p:txBody>
+      </p:sp>
+      <p:sp>
+        <p:nvSpPr>
+          <p:cNvPr id="53" name="Text 51"/>
+          <p:cNvSpPr txBox="1"/>
+          <p:nvPr/>
+        </p:nvSpPr>
+        <p:spPr>
+          <a:xfrm>
+            <a:off x="9738360" y="3803904"/>
+            <a:ext cx="1883664" cy="164592"/>
           </a:xfrm>
           <a:prstGeom prst="rect">
             <a:avLst/>
@@ -11783,21 +12454,18 @@
           <a:lstStyle/>
           <a:p>
             <a:pPr indent="0" marL="0">
-              <a:lnSpc>
-                <a:spcPct val="115000"/>
-              </a:lnSpc>
               <a:buNone/>
             </a:pPr>
             <a:r>
               <a:rPr lang="en-US" sz="760" dirty="0">
                 <a:solidFill>
-                  <a:srgbClr val="4A4A5E"/>
-                </a:solidFill>
-                <a:latin typeface="Arial" pitchFamily="34" charset="0"/>
-                <a:ea typeface="Arial" pitchFamily="34" charset="-122"/>
-                <a:cs typeface="Arial" pitchFamily="34" charset="-120"/>
-              </a:rPr>
-              <a:t>A holding queue with the error, so someone can fix and replay.</a:t>
+                  <a:srgbClr val="6A6A7E"/>
+                </a:solidFill>
+                <a:latin typeface="Arial" pitchFamily="34" charset="0"/>
+                <a:ea typeface="Arial" pitchFamily="34" charset="-122"/>
+                <a:cs typeface="Arial" pitchFamily="34" charset="-120"/>
+              </a:rPr>
+              <a:t>holding queue for review</a:t>
             </a:r>
             <a:endParaRPr lang="en-US" sz="760" dirty="0"/>
           </a:p>
@@ -11805,14 +12473,73 @@
       </p:sp>
       <p:sp>
         <p:nvSpPr>
-          <p:cNvPr id="44" name="Text 42"/>
-          <p:cNvSpPr txBox="1"/>
-          <p:nvPr/>
-        </p:nvSpPr>
-        <p:spPr>
-          <a:xfrm>
-            <a:off x="9390888" y="4736592"/>
-            <a:ext cx="2231136" cy="182880"/>
+          <p:cNvPr id="54" name="Shape 52"/>
+          <p:cNvSpPr/>
+          <p:nvPr/>
+        </p:nvSpPr>
+        <p:spPr>
+          <a:xfrm>
+            <a:off x="9390888" y="4146804"/>
+            <a:ext cx="274320" cy="274320"/>
+          </a:xfrm>
+          <a:prstGeom prst="ellipse">
+            <a:avLst/>
+          </a:prstGeom>
+          <a:solidFill>
+            <a:srgbClr val="4338CA"/>
+          </a:solidFill>
+          <a:ln/>
+        </p:spPr>
+      </p:sp>
+      <p:sp>
+        <p:nvSpPr>
+          <p:cNvPr id="55" name="Text 53"/>
+          <p:cNvSpPr txBox="1"/>
+          <p:nvPr/>
+        </p:nvSpPr>
+        <p:spPr>
+          <a:xfrm>
+            <a:off x="9390888" y="4146804"/>
+            <a:ext cx="274320" cy="274320"/>
+          </a:xfrm>
+          <a:prstGeom prst="rect">
+            <a:avLst/>
+          </a:prstGeom>
+          <a:noFill/>
+          <a:ln/>
+        </p:spPr>
+        <p:txBody>
+          <a:bodyPr wrap="square" lIns="0" tIns="0" rIns="0" bIns="0" rtlCol="0" anchor="ctr"/>
+          <a:lstStyle/>
+          <a:p>
+            <a:pPr algn="ctr" indent="0" marL="0">
+              <a:buNone/>
+            </a:pPr>
+            <a:r>
+              <a:rPr lang="en-US" sz="950" b="1" dirty="0">
+                <a:solidFill>
+                  <a:srgbClr val="FFFFFF"/>
+                </a:solidFill>
+                <a:latin typeface="Arial" pitchFamily="34" charset="0"/>
+                <a:ea typeface="Arial" pitchFamily="34" charset="-122"/>
+                <a:cs typeface="Arial" pitchFamily="34" charset="-120"/>
+              </a:rPr>
+              <a:t>6</a:t>
+            </a:r>
+            <a:endParaRPr lang="en-US" sz="950" dirty="0"/>
+          </a:p>
+        </p:txBody>
+      </p:sp>
+      <p:sp>
+        <p:nvSpPr>
+          <p:cNvPr id="56" name="Text 54"/>
+          <p:cNvSpPr txBox="1"/>
+          <p:nvPr/>
+        </p:nvSpPr>
+        <p:spPr>
+          <a:xfrm>
+            <a:off x="9738360" y="4128516"/>
+            <a:ext cx="1883664" cy="173736"/>
           </a:xfrm>
           <a:prstGeom prst="rect">
             <a:avLst/>
@@ -11828,7 +12555,7 @@
               <a:buNone/>
             </a:pPr>
             <a:r>
-              <a:rPr lang="en-US" sz="840" b="1" dirty="0">
+              <a:rPr lang="en-US" sz="880" b="1" dirty="0">
                 <a:solidFill>
                   <a:srgbClr val="2A2A3E"/>
                 </a:solidFill>
@@ -11836,22 +12563,22 @@
                 <a:ea typeface="Arial" pitchFamily="34" charset="-122"/>
                 <a:cs typeface="Arial" pitchFamily="34" charset="-120"/>
               </a:rPr>
-              <a:t>Alert on the rate, not the count</a:t>
-            </a:r>
-            <a:endParaRPr lang="en-US" sz="840" dirty="0"/>
-          </a:p>
-        </p:txBody>
-      </p:sp>
-      <p:sp>
-        <p:nvSpPr>
-          <p:cNvPr id="45" name="Text 43"/>
-          <p:cNvSpPr txBox="1"/>
-          <p:nvPr/>
-        </p:nvSpPr>
-        <p:spPr>
-          <a:xfrm>
-            <a:off x="9390888" y="4901184"/>
-            <a:ext cx="2231136" cy="420624"/>
+              <a:t>Alert on the rate</a:t>
+            </a:r>
+            <a:endParaRPr lang="en-US" sz="880" dirty="0"/>
+          </a:p>
+        </p:txBody>
+      </p:sp>
+      <p:sp>
+        <p:nvSpPr>
+          <p:cNvPr id="57" name="Text 55"/>
+          <p:cNvSpPr txBox="1"/>
+          <p:nvPr/>
+        </p:nvSpPr>
+        <p:spPr>
+          <a:xfrm>
+            <a:off x="9738360" y="4293108"/>
+            <a:ext cx="1883664" cy="164592"/>
           </a:xfrm>
           <a:prstGeom prst="rect">
             <a:avLst/>
@@ -11864,21 +12591,18 @@
           <a:lstStyle/>
           <a:p>
             <a:pPr indent="0" marL="0">
-              <a:lnSpc>
-                <a:spcPct val="115000"/>
-              </a:lnSpc>
               <a:buNone/>
             </a:pPr>
             <a:r>
               <a:rPr lang="en-US" sz="760" dirty="0">
                 <a:solidFill>
-                  <a:srgbClr val="4A4A5E"/>
-                </a:solidFill>
-                <a:latin typeface="Arial" pitchFamily="34" charset="0"/>
-                <a:ea typeface="Arial" pitchFamily="34" charset="-122"/>
-                <a:cs typeface="Arial" pitchFamily="34" charset="-120"/>
-              </a:rPr>
-              <a:t>One stuck claim is normal. Twenty in an hour is not.</a:t>
+                  <a:srgbClr val="6A6A7E"/>
+                </a:solidFill>
+                <a:latin typeface="Arial" pitchFamily="34" charset="0"/>
+                <a:ea typeface="Arial" pitchFamily="34" charset="-122"/>
+                <a:cs typeface="Arial" pitchFamily="34" charset="-120"/>
+              </a:rPr>
+              <a:t>20/hour ≠ 1/day</a:t>
             </a:r>
             <a:endParaRPr lang="en-US" sz="760" dirty="0"/>
           </a:p>
@@ -11886,7 +12610,7 @@
       </p:sp>
       <p:sp>
         <p:nvSpPr>
-          <p:cNvPr id="46" name="Text 44"/>
+          <p:cNvPr id="58" name="Text 56"/>
           <p:cNvSpPr txBox="1"/>
           <p:nvPr/>
         </p:nvSpPr>
@@ -11925,7 +12649,7 @@
       </p:sp>
       <p:sp>
         <p:nvSpPr>
-          <p:cNvPr id="47" name="Text 45"/>
+          <p:cNvPr id="59" name="Text 57"/>
           <p:cNvSpPr txBox="1"/>
           <p:nvPr/>
         </p:nvSpPr>
@@ -11964,7 +12688,7 @@
       </p:sp>
       <p:sp>
         <p:nvSpPr>
-          <p:cNvPr id="48" name="Text 46"/>
+          <p:cNvPr id="60" name="Text 58"/>
           <p:cNvSpPr txBox="1"/>
           <p:nvPr/>
         </p:nvSpPr>

--- a/case-study/deck/GGW_FNOL_Redesign.pptx
+++ b/case-study/deck/GGW_FNOL_Redesign.pptx
@@ -3486,7 +3486,7 @@
                 <a:ea typeface="Arial" pitchFamily="34" charset="-122"/>
                 <a:cs typeface="Arial" pitchFamily="34" charset="-120"/>
               </a:rPr>
-              <a:t>4,370 handler-hours a year × €34.92, the loaded cost of one handler-hour (€45,100 gross plus employer contributions, over actual working hours). Capacity, not cash — it becomes money only if the hours go to the backlog or are absorbed by normal staff turnover.</a:t>
+              <a:t>4,370 handler-hours a year, at the loaded cost of a handler-hour. Capacity, not cash — it becomes money only if the hours go to the backlog or are absorbed by normal staff turnover. Full build-up on slide 7.</a:t>
             </a:r>
             <a:endParaRPr lang="en-US" sz="850" dirty="0"/>
           </a:p>
@@ -3572,7 +3572,7 @@
                 <a:ea typeface="Arial" pitchFamily="34" charset="-122"/>
                 <a:cs typeface="Arial" pitchFamily="34" charset="-120"/>
               </a:rPr>
-              <a:t>cost is not what decides this. The AI costs €2,400 a year to run; keeping it healthy takes a quarter of an engineer, €24,400 — so €26,800 a year all in, against €152,600 of capacity released. What decides it is governance: proving a person reviewed anything that can go against a claimant, and whether handlers trust the drafts.</a:t>
+              <a:t>cost is not what decides this — the value released covers running and maintaining it 5.7 times over. What decides it is governance: proving a person reviewed anything that can go against a claimant, and whether handlers trust the drafts.</a:t>
             </a:r>
             <a:endParaRPr lang="en-US" sz="850" dirty="0"/>
           </a:p>

--- a/case-study/deck/GGW_FNOL_Redesign.pptx
+++ b/case-study/deck/GGW_FNOL_Redesign.pptx
@@ -13695,12 +13695,12 @@
         </p:nvSpPr>
         <p:spPr>
           <a:xfrm>
-            <a:off x="365760" y="2907792"/>
-            <a:ext cx="1723644" cy="420624"/>
+            <a:off x="365760" y="2852928"/>
+            <a:ext cx="1723644" cy="347472"/>
           </a:xfrm>
           <a:prstGeom prst="roundRect">
             <a:avLst>
-              <a:gd name="adj" fmla="val 10870"/>
+              <a:gd name="adj" fmla="val 13158"/>
             </a:avLst>
           </a:prstGeom>
           <a:solidFill>
@@ -13722,8 +13722,8 @@
         </p:nvSpPr>
         <p:spPr>
           <a:xfrm>
-            <a:off x="420624" y="2907792"/>
-            <a:ext cx="1613916" cy="420624"/>
+            <a:off x="420624" y="2852928"/>
+            <a:ext cx="1613916" cy="347472"/>
           </a:xfrm>
           <a:prstGeom prst="rect">
             <a:avLst/>
@@ -13784,12 +13784,12 @@
         </p:nvSpPr>
         <p:spPr>
           <a:xfrm>
-            <a:off x="2308860" y="2907792"/>
-            <a:ext cx="9496044" cy="420624"/>
+            <a:off x="2308860" y="2852928"/>
+            <a:ext cx="9496044" cy="347472"/>
           </a:xfrm>
           <a:prstGeom prst="roundRect">
             <a:avLst>
-              <a:gd name="adj" fmla="val 10870"/>
+              <a:gd name="adj" fmla="val 13158"/>
             </a:avLst>
           </a:prstGeom>
           <a:solidFill>
@@ -13811,8 +13811,8 @@
         </p:nvSpPr>
         <p:spPr>
           <a:xfrm>
-            <a:off x="2308860" y="2907792"/>
-            <a:ext cx="9496044" cy="420624"/>
+            <a:off x="2308860" y="2852928"/>
+            <a:ext cx="9496044" cy="347472"/>
           </a:xfrm>
           <a:prstGeom prst="rect">
             <a:avLst/>
@@ -13850,8 +13850,8 @@
         </p:nvSpPr>
         <p:spPr>
           <a:xfrm>
-            <a:off x="365760" y="3657600"/>
-            <a:ext cx="2743200" cy="201168"/>
+            <a:off x="365760" y="3291840"/>
+            <a:ext cx="5486400" cy="182880"/>
           </a:xfrm>
           <a:prstGeom prst="rect">
             <a:avLst/>
@@ -13867,15 +13867,15 @@
               <a:buNone/>
             </a:pPr>
             <a:r>
-              <a:rPr lang="en-US" sz="900" b="1" spc="90" kern="0" dirty="0">
-                <a:solidFill>
-                  <a:srgbClr val="0891B2"/>
-                </a:solidFill>
-                <a:latin typeface="Arial" pitchFamily="34" charset="0"/>
-                <a:ea typeface="Arial" pitchFamily="34" charset="-122"/>
-                <a:cs typeface="Arial" pitchFamily="34" charset="-120"/>
-              </a:rPr>
-              <a:t>THE STACK</a:t>
+              <a:rPr lang="en-US" sz="900" b="1" spc="80" kern="0" dirty="0">
+                <a:solidFill>
+                  <a:srgbClr val="4338CA"/>
+                </a:solidFill>
+                <a:latin typeface="Arial" pitchFamily="34" charset="0"/>
+                <a:ea typeface="Arial" pitchFamily="34" charset="-122"/>
+                <a:cs typeface="Arial" pitchFamily="34" charset="-120"/>
+              </a:rPr>
+              <a:t>OPERATING MODEL — WHO OWNS WHAT</a:t>
             </a:r>
             <a:endParaRPr lang="en-US" sz="900" dirty="0"/>
           </a:p>
@@ -13889,12 +13889,414 @@
         </p:nvSpPr>
         <p:spPr>
           <a:xfrm>
-            <a:off x="365760" y="3913632"/>
-            <a:ext cx="1143000" cy="384048"/>
+            <a:off x="365760" y="3493008"/>
+            <a:ext cx="3697224" cy="384048"/>
           </a:xfrm>
           <a:prstGeom prst="roundRect">
             <a:avLst>
               <a:gd name="adj" fmla="val 11905"/>
+            </a:avLst>
+          </a:prstGeom>
+          <a:solidFill>
+            <a:srgbClr val="E3EDF6"/>
+          </a:solidFill>
+          <a:ln w="15240">
+            <a:solidFill>
+              <a:srgbClr val="3B6FA0"/>
+            </a:solidFill>
+            <a:prstDash val="solid"/>
+          </a:ln>
+        </p:spPr>
+      </p:sp>
+      <p:sp>
+        <p:nvSpPr>
+          <p:cNvPr id="35" name="Text 33"/>
+          <p:cNvSpPr txBox="1"/>
+          <p:nvPr/>
+        </p:nvSpPr>
+        <p:spPr>
+          <a:xfrm>
+            <a:off x="493776" y="3493008"/>
+            <a:ext cx="1554480" cy="384048"/>
+          </a:xfrm>
+          <a:prstGeom prst="rect">
+            <a:avLst/>
+          </a:prstGeom>
+          <a:noFill/>
+          <a:ln/>
+        </p:spPr>
+        <p:txBody>
+          <a:bodyPr wrap="square" lIns="0" tIns="0" rIns="0" bIns="0" rtlCol="0" anchor="ctr"/>
+          <a:lstStyle/>
+          <a:p>
+            <a:pPr indent="0" marL="0">
+              <a:buNone/>
+            </a:pPr>
+            <a:r>
+              <a:rPr lang="en-US" sz="900" b="1" dirty="0">
+                <a:solidFill>
+                  <a:srgbClr val="1B2430"/>
+                </a:solidFill>
+                <a:latin typeface="Arial" pitchFamily="34" charset="0"/>
+                <a:ea typeface="Arial" pitchFamily="34" charset="-122"/>
+                <a:cs typeface="Arial" pitchFamily="34" charset="-120"/>
+              </a:rPr>
+              <a:t>AI agents</a:t>
+            </a:r>
+            <a:endParaRPr lang="en-US" sz="900" dirty="0"/>
+          </a:p>
+        </p:txBody>
+      </p:sp>
+      <p:sp>
+        <p:nvSpPr>
+          <p:cNvPr id="36" name="Text 34"/>
+          <p:cNvSpPr txBox="1"/>
+          <p:nvPr/>
+        </p:nvSpPr>
+        <p:spPr>
+          <a:xfrm>
+            <a:off x="2057400" y="3493008"/>
+            <a:ext cx="1914144" cy="384048"/>
+          </a:xfrm>
+          <a:prstGeom prst="rect">
+            <a:avLst/>
+          </a:prstGeom>
+          <a:noFill/>
+          <a:ln/>
+        </p:spPr>
+        <p:txBody>
+          <a:bodyPr wrap="square" lIns="0" tIns="0" rIns="0" bIns="0" rtlCol="0" anchor="ctr"/>
+          <a:lstStyle/>
+          <a:p>
+            <a:pPr indent="0" marL="0">
+              <a:lnSpc>
+                <a:spcPct val="105000"/>
+              </a:lnSpc>
+              <a:buNone/>
+            </a:pPr>
+            <a:r>
+              <a:rPr lang="en-US" sz="780" dirty="0">
+                <a:solidFill>
+                  <a:srgbClr val="1B2430"/>
+                </a:solidFill>
+                <a:latin typeface="Arial" pitchFamily="34" charset="0"/>
+                <a:ea typeface="Arial" pitchFamily="34" charset="-122"/>
+                <a:cs typeface="Arial" pitchFamily="34" charset="-120"/>
+              </a:rPr>
+              <a:t>draft, classify, extract — never decide</a:t>
+            </a:r>
+            <a:endParaRPr lang="en-US" sz="780" dirty="0"/>
+          </a:p>
+        </p:txBody>
+      </p:sp>
+      <p:sp>
+        <p:nvSpPr>
+          <p:cNvPr id="37" name="Shape 35"/>
+          <p:cNvSpPr/>
+          <p:nvPr/>
+        </p:nvSpPr>
+        <p:spPr>
+          <a:xfrm>
+            <a:off x="4245864" y="3493008"/>
+            <a:ext cx="3697224" cy="384048"/>
+          </a:xfrm>
+          <a:prstGeom prst="roundRect">
+            <a:avLst>
+              <a:gd name="adj" fmla="val 11905"/>
+            </a:avLst>
+          </a:prstGeom>
+          <a:solidFill>
+            <a:srgbClr val="ECEFF3"/>
+          </a:solidFill>
+          <a:ln w="15240">
+            <a:solidFill>
+              <a:srgbClr val="6B7787"/>
+            </a:solidFill>
+            <a:prstDash val="solid"/>
+          </a:ln>
+        </p:spPr>
+      </p:sp>
+      <p:sp>
+        <p:nvSpPr>
+          <p:cNvPr id="38" name="Text 36"/>
+          <p:cNvSpPr txBox="1"/>
+          <p:nvPr/>
+        </p:nvSpPr>
+        <p:spPr>
+          <a:xfrm>
+            <a:off x="4373880" y="3493008"/>
+            <a:ext cx="1554480" cy="384048"/>
+          </a:xfrm>
+          <a:prstGeom prst="rect">
+            <a:avLst/>
+          </a:prstGeom>
+          <a:noFill/>
+          <a:ln/>
+        </p:spPr>
+        <p:txBody>
+          <a:bodyPr wrap="square" lIns="0" tIns="0" rIns="0" bIns="0" rtlCol="0" anchor="ctr"/>
+          <a:lstStyle/>
+          <a:p>
+            <a:pPr indent="0" marL="0">
+              <a:buNone/>
+            </a:pPr>
+            <a:r>
+              <a:rPr lang="en-US" sz="900" b="1" dirty="0">
+                <a:solidFill>
+                  <a:srgbClr val="2A3340"/>
+                </a:solidFill>
+                <a:latin typeface="Arial" pitchFamily="34" charset="0"/>
+                <a:ea typeface="Arial" pitchFamily="34" charset="-122"/>
+                <a:cs typeface="Arial" pitchFamily="34" charset="-120"/>
+              </a:rPr>
+              <a:t>Rules, no model</a:t>
+            </a:r>
+            <a:endParaRPr lang="en-US" sz="900" dirty="0"/>
+          </a:p>
+        </p:txBody>
+      </p:sp>
+      <p:sp>
+        <p:nvSpPr>
+          <p:cNvPr id="39" name="Text 37"/>
+          <p:cNvSpPr txBox="1"/>
+          <p:nvPr/>
+        </p:nvSpPr>
+        <p:spPr>
+          <a:xfrm>
+            <a:off x="5937504" y="3493008"/>
+            <a:ext cx="1914144" cy="384048"/>
+          </a:xfrm>
+          <a:prstGeom prst="rect">
+            <a:avLst/>
+          </a:prstGeom>
+          <a:noFill/>
+          <a:ln/>
+        </p:spPr>
+        <p:txBody>
+          <a:bodyPr wrap="square" lIns="0" tIns="0" rIns="0" bIns="0" rtlCol="0" anchor="ctr"/>
+          <a:lstStyle/>
+          <a:p>
+            <a:pPr indent="0" marL="0">
+              <a:lnSpc>
+                <a:spcPct val="105000"/>
+              </a:lnSpc>
+              <a:buNone/>
+            </a:pPr>
+            <a:r>
+              <a:rPr lang="en-US" sz="780" dirty="0">
+                <a:solidFill>
+                  <a:srgbClr val="2A3340"/>
+                </a:solidFill>
+                <a:latin typeface="Arial" pitchFamily="34" charset="0"/>
+                <a:ea typeface="Arial" pitchFamily="34" charset="-122"/>
+                <a:cs typeface="Arial" pitchFamily="34" charset="-120"/>
+              </a:rPr>
+              <a:t>check the record — pass or fail, nothing in between</a:t>
+            </a:r>
+            <a:endParaRPr lang="en-US" sz="780" dirty="0"/>
+          </a:p>
+        </p:txBody>
+      </p:sp>
+      <p:sp>
+        <p:nvSpPr>
+          <p:cNvPr id="40" name="Shape 38"/>
+          <p:cNvSpPr/>
+          <p:nvPr/>
+        </p:nvSpPr>
+        <p:spPr>
+          <a:xfrm>
+            <a:off x="8125968" y="3493008"/>
+            <a:ext cx="3697224" cy="384048"/>
+          </a:xfrm>
+          <a:prstGeom prst="roundRect">
+            <a:avLst>
+              <a:gd name="adj" fmla="val 11905"/>
+            </a:avLst>
+          </a:prstGeom>
+          <a:solidFill>
+            <a:srgbClr val="F1E6ED"/>
+          </a:solidFill>
+          <a:ln w="15240">
+            <a:solidFill>
+              <a:srgbClr val="7A4A66"/>
+            </a:solidFill>
+            <a:prstDash val="solid"/>
+          </a:ln>
+        </p:spPr>
+      </p:sp>
+      <p:sp>
+        <p:nvSpPr>
+          <p:cNvPr id="41" name="Text 39"/>
+          <p:cNvSpPr txBox="1"/>
+          <p:nvPr/>
+        </p:nvSpPr>
+        <p:spPr>
+          <a:xfrm>
+            <a:off x="8253984" y="3493008"/>
+            <a:ext cx="1554480" cy="384048"/>
+          </a:xfrm>
+          <a:prstGeom prst="rect">
+            <a:avLst/>
+          </a:prstGeom>
+          <a:noFill/>
+          <a:ln/>
+        </p:spPr>
+        <p:txBody>
+          <a:bodyPr wrap="square" lIns="0" tIns="0" rIns="0" bIns="0" rtlCol="0" anchor="ctr"/>
+          <a:lstStyle/>
+          <a:p>
+            <a:pPr indent="0" marL="0">
+              <a:buNone/>
+            </a:pPr>
+            <a:r>
+              <a:rPr lang="en-US" sz="900" b="1" dirty="0">
+                <a:solidFill>
+                  <a:srgbClr val="4A2C3B"/>
+                </a:solidFill>
+                <a:latin typeface="Arial" pitchFamily="34" charset="0"/>
+                <a:ea typeface="Arial" pitchFamily="34" charset="-122"/>
+                <a:cs typeface="Arial" pitchFamily="34" charset="-120"/>
+              </a:rPr>
+              <a:t>A person</a:t>
+            </a:r>
+            <a:endParaRPr lang="en-US" sz="900" dirty="0"/>
+          </a:p>
+        </p:txBody>
+      </p:sp>
+      <p:sp>
+        <p:nvSpPr>
+          <p:cNvPr id="42" name="Text 40"/>
+          <p:cNvSpPr txBox="1"/>
+          <p:nvPr/>
+        </p:nvSpPr>
+        <p:spPr>
+          <a:xfrm>
+            <a:off x="9817608" y="3493008"/>
+            <a:ext cx="1914144" cy="384048"/>
+          </a:xfrm>
+          <a:prstGeom prst="rect">
+            <a:avLst/>
+          </a:prstGeom>
+          <a:noFill/>
+          <a:ln/>
+        </p:spPr>
+        <p:txBody>
+          <a:bodyPr wrap="square" lIns="0" tIns="0" rIns="0" bIns="0" rtlCol="0" anchor="ctr"/>
+          <a:lstStyle/>
+          <a:p>
+            <a:pPr indent="0" marL="0">
+              <a:lnSpc>
+                <a:spcPct val="105000"/>
+              </a:lnSpc>
+              <a:buNone/>
+            </a:pPr>
+            <a:r>
+              <a:rPr lang="en-US" sz="780" dirty="0">
+                <a:solidFill>
+                  <a:srgbClr val="4A2C3B"/>
+                </a:solidFill>
+                <a:latin typeface="Arial" pitchFamily="34" charset="0"/>
+                <a:ea typeface="Arial" pitchFamily="34" charset="-122"/>
+                <a:cs typeface="Arial" pitchFamily="34" charset="-120"/>
+              </a:rPr>
+              <a:t>approves before anything can go against a claimant</a:t>
+            </a:r>
+            <a:endParaRPr lang="en-US" sz="780" dirty="0"/>
+          </a:p>
+        </p:txBody>
+      </p:sp>
+      <p:sp>
+        <p:nvSpPr>
+          <p:cNvPr id="43" name="Text 41"/>
+          <p:cNvSpPr txBox="1"/>
+          <p:nvPr/>
+        </p:nvSpPr>
+        <p:spPr>
+          <a:xfrm>
+            <a:off x="365760" y="3913632"/>
+            <a:ext cx="11457432" cy="182880"/>
+          </a:xfrm>
+          <a:prstGeom prst="rect">
+            <a:avLst/>
+          </a:prstGeom>
+          <a:noFill/>
+          <a:ln/>
+        </p:spPr>
+        <p:txBody>
+          <a:bodyPr wrap="square" lIns="0" tIns="0" rIns="0" bIns="0" rtlCol="0" anchor="ctr"/>
+          <a:lstStyle/>
+          <a:p>
+            <a:pPr indent="0" marL="0">
+              <a:buNone/>
+            </a:pPr>
+            <a:r>
+              <a:rPr lang="en-US" sz="800" b="1" i="1" dirty="0">
+                <a:solidFill>
+                  <a:srgbClr val="2A2A3E"/>
+                </a:solidFill>
+                <a:latin typeface="Arial" pitchFamily="34" charset="0"/>
+                <a:ea typeface="Arial" pitchFamily="34" charset="-122"/>
+                <a:cs typeface="Arial" pitchFamily="34" charset="-120"/>
+              </a:rPr>
+              <a:t>AI owns the drafting. Rules own the facts. A person owns every call that can go against a claimant.</a:t>
+            </a:r>
+            <a:endParaRPr lang="en-US" sz="800" dirty="0"/>
+          </a:p>
+        </p:txBody>
+      </p:sp>
+      <p:sp>
+        <p:nvSpPr>
+          <p:cNvPr id="44" name="Text 42"/>
+          <p:cNvSpPr txBox="1"/>
+          <p:nvPr/>
+        </p:nvSpPr>
+        <p:spPr>
+          <a:xfrm>
+            <a:off x="365760" y="4206240"/>
+            <a:ext cx="2743200" cy="182880"/>
+          </a:xfrm>
+          <a:prstGeom prst="rect">
+            <a:avLst/>
+          </a:prstGeom>
+          <a:noFill/>
+          <a:ln/>
+        </p:spPr>
+        <p:txBody>
+          <a:bodyPr wrap="square" lIns="0" tIns="0" rIns="0" bIns="0" rtlCol="0" anchor="ctr"/>
+          <a:lstStyle/>
+          <a:p>
+            <a:pPr indent="0" marL="0">
+              <a:buNone/>
+            </a:pPr>
+            <a:r>
+              <a:rPr lang="en-US" sz="900" b="1" spc="90" kern="0" dirty="0">
+                <a:solidFill>
+                  <a:srgbClr val="0891B2"/>
+                </a:solidFill>
+                <a:latin typeface="Arial" pitchFamily="34" charset="0"/>
+                <a:ea typeface="Arial" pitchFamily="34" charset="-122"/>
+                <a:cs typeface="Arial" pitchFamily="34" charset="-120"/>
+              </a:rPr>
+              <a:t>THE STACK</a:t>
+            </a:r>
+            <a:endParaRPr lang="en-US" sz="900" dirty="0"/>
+          </a:p>
+        </p:txBody>
+      </p:sp>
+      <p:sp>
+        <p:nvSpPr>
+          <p:cNvPr id="45" name="Shape 43"/>
+          <p:cNvSpPr/>
+          <p:nvPr/>
+        </p:nvSpPr>
+        <p:spPr>
+          <a:xfrm>
+            <a:off x="365760" y="4407408"/>
+            <a:ext cx="1143000" cy="347472"/>
+          </a:xfrm>
+          <a:prstGeom prst="roundRect">
+            <a:avLst>
+              <a:gd name="adj" fmla="val 13158"/>
             </a:avLst>
           </a:prstGeom>
           <a:solidFill>
@@ -13910,14 +14312,14 @@
       </p:sp>
       <p:sp>
         <p:nvSpPr>
-          <p:cNvPr id="35" name="Text 33"/>
-          <p:cNvSpPr txBox="1"/>
-          <p:nvPr/>
-        </p:nvSpPr>
-        <p:spPr>
-          <a:xfrm>
-            <a:off x="402336" y="3913632"/>
-            <a:ext cx="1069848" cy="384048"/>
+          <p:cNvPr id="46" name="Text 44"/>
+          <p:cNvSpPr txBox="1"/>
+          <p:nvPr/>
+        </p:nvSpPr>
+        <p:spPr>
+          <a:xfrm>
+            <a:off x="402336" y="4407408"/>
+            <a:ext cx="1069848" cy="347472"/>
           </a:xfrm>
           <a:prstGeom prst="rect">
             <a:avLst/>
@@ -13933,7 +14335,7 @@
               <a:buNone/>
             </a:pPr>
             <a:r>
-              <a:rPr lang="en-US" sz="800" b="1" dirty="0">
+              <a:rPr lang="en-US" sz="780" b="1" dirty="0">
                 <a:solidFill>
                   <a:srgbClr val="0B5A66"/>
                 </a:solidFill>
@@ -13943,24 +14345,24 @@
               </a:rPr>
               <a:t>FastAPI</a:t>
             </a:r>
-            <a:endParaRPr lang="en-US" sz="800" dirty="0"/>
-          </a:p>
-        </p:txBody>
-      </p:sp>
-      <p:sp>
-        <p:nvSpPr>
-          <p:cNvPr id="36" name="Shape 34"/>
+            <a:endParaRPr lang="en-US" sz="780" dirty="0"/>
+          </a:p>
+        </p:txBody>
+      </p:sp>
+      <p:sp>
+        <p:nvSpPr>
+          <p:cNvPr id="47" name="Shape 45"/>
           <p:cNvSpPr/>
           <p:nvPr/>
         </p:nvSpPr>
         <p:spPr>
           <a:xfrm>
-            <a:off x="1655064" y="3913632"/>
-            <a:ext cx="1143000" cy="384048"/>
+            <a:off x="1655064" y="4407408"/>
+            <a:ext cx="1143000" cy="347472"/>
           </a:xfrm>
           <a:prstGeom prst="roundRect">
             <a:avLst>
-              <a:gd name="adj" fmla="val 11905"/>
+              <a:gd name="adj" fmla="val 13158"/>
             </a:avLst>
           </a:prstGeom>
           <a:solidFill>
@@ -13976,14 +14378,14 @@
       </p:sp>
       <p:sp>
         <p:nvSpPr>
-          <p:cNvPr id="37" name="Text 35"/>
-          <p:cNvSpPr txBox="1"/>
-          <p:nvPr/>
-        </p:nvSpPr>
-        <p:spPr>
-          <a:xfrm>
-            <a:off x="1691640" y="3913632"/>
-            <a:ext cx="1069848" cy="384048"/>
+          <p:cNvPr id="48" name="Text 46"/>
+          <p:cNvSpPr txBox="1"/>
+          <p:nvPr/>
+        </p:nvSpPr>
+        <p:spPr>
+          <a:xfrm>
+            <a:off x="1691640" y="4407408"/>
+            <a:ext cx="1069848" cy="347472"/>
           </a:xfrm>
           <a:prstGeom prst="rect">
             <a:avLst/>
@@ -13999,7 +14401,7 @@
               <a:buNone/>
             </a:pPr>
             <a:r>
-              <a:rPr lang="en-US" sz="800" b="1" dirty="0">
+              <a:rPr lang="en-US" sz="780" b="1" dirty="0">
                 <a:solidFill>
                   <a:srgbClr val="0B5A66"/>
                 </a:solidFill>
@@ -14009,24 +14411,24 @@
               </a:rPr>
               <a:t>LangGraph</a:t>
             </a:r>
-            <a:endParaRPr lang="en-US" sz="800" dirty="0"/>
-          </a:p>
-        </p:txBody>
-      </p:sp>
-      <p:sp>
-        <p:nvSpPr>
-          <p:cNvPr id="38" name="Shape 36"/>
+            <a:endParaRPr lang="en-US" sz="780" dirty="0"/>
+          </a:p>
+        </p:txBody>
+      </p:sp>
+      <p:sp>
+        <p:nvSpPr>
+          <p:cNvPr id="49" name="Shape 47"/>
           <p:cNvSpPr/>
           <p:nvPr/>
         </p:nvSpPr>
         <p:spPr>
           <a:xfrm>
-            <a:off x="2944368" y="3913632"/>
-            <a:ext cx="1143000" cy="384048"/>
+            <a:off x="2944368" y="4407408"/>
+            <a:ext cx="1143000" cy="347472"/>
           </a:xfrm>
           <a:prstGeom prst="roundRect">
             <a:avLst>
-              <a:gd name="adj" fmla="val 11905"/>
+              <a:gd name="adj" fmla="val 13158"/>
             </a:avLst>
           </a:prstGeom>
           <a:solidFill>
@@ -14042,14 +14444,14 @@
       </p:sp>
       <p:sp>
         <p:nvSpPr>
-          <p:cNvPr id="39" name="Text 37"/>
-          <p:cNvSpPr txBox="1"/>
-          <p:nvPr/>
-        </p:nvSpPr>
-        <p:spPr>
-          <a:xfrm>
-            <a:off x="2980944" y="3913632"/>
-            <a:ext cx="1069848" cy="384048"/>
+          <p:cNvPr id="50" name="Text 48"/>
+          <p:cNvSpPr txBox="1"/>
+          <p:nvPr/>
+        </p:nvSpPr>
+        <p:spPr>
+          <a:xfrm>
+            <a:off x="2980944" y="4407408"/>
+            <a:ext cx="1069848" cy="347472"/>
           </a:xfrm>
           <a:prstGeom prst="rect">
             <a:avLst/>
@@ -14065,7 +14467,7 @@
               <a:buNone/>
             </a:pPr>
             <a:r>
-              <a:rPr lang="en-US" sz="800" b="1" dirty="0">
+              <a:rPr lang="en-US" sz="780" b="1" dirty="0">
                 <a:solidFill>
                   <a:srgbClr val="0B5A66"/>
                 </a:solidFill>
@@ -14075,24 +14477,24 @@
               </a:rPr>
               <a:t>Pydantic</a:t>
             </a:r>
-            <a:endParaRPr lang="en-US" sz="800" dirty="0"/>
-          </a:p>
-        </p:txBody>
-      </p:sp>
-      <p:sp>
-        <p:nvSpPr>
-          <p:cNvPr id="40" name="Shape 38"/>
+            <a:endParaRPr lang="en-US" sz="780" dirty="0"/>
+          </a:p>
+        </p:txBody>
+      </p:sp>
+      <p:sp>
+        <p:nvSpPr>
+          <p:cNvPr id="51" name="Shape 49"/>
           <p:cNvSpPr/>
           <p:nvPr/>
         </p:nvSpPr>
         <p:spPr>
           <a:xfrm>
-            <a:off x="4233672" y="3913632"/>
-            <a:ext cx="1143000" cy="384048"/>
+            <a:off x="4233672" y="4407408"/>
+            <a:ext cx="1143000" cy="347472"/>
           </a:xfrm>
           <a:prstGeom prst="roundRect">
             <a:avLst>
-              <a:gd name="adj" fmla="val 11905"/>
+              <a:gd name="adj" fmla="val 13158"/>
             </a:avLst>
           </a:prstGeom>
           <a:solidFill>
@@ -14108,14 +14510,14 @@
       </p:sp>
       <p:sp>
         <p:nvSpPr>
-          <p:cNvPr id="41" name="Text 39"/>
-          <p:cNvSpPr txBox="1"/>
-          <p:nvPr/>
-        </p:nvSpPr>
-        <p:spPr>
-          <a:xfrm>
-            <a:off x="4270248" y="3913632"/>
-            <a:ext cx="1069848" cy="384048"/>
+          <p:cNvPr id="52" name="Text 50"/>
+          <p:cNvSpPr txBox="1"/>
+          <p:nvPr/>
+        </p:nvSpPr>
+        <p:spPr>
+          <a:xfrm>
+            <a:off x="4270248" y="4407408"/>
+            <a:ext cx="1069848" cy="347472"/>
           </a:xfrm>
           <a:prstGeom prst="rect">
             <a:avLst/>
@@ -14131,7 +14533,7 @@
               <a:buNone/>
             </a:pPr>
             <a:r>
-              <a:rPr lang="en-US" sz="800" b="1" dirty="0">
+              <a:rPr lang="en-US" sz="780" b="1" dirty="0">
                 <a:solidFill>
                   <a:srgbClr val="0B5A66"/>
                 </a:solidFill>
@@ -14141,24 +14543,24 @@
               </a:rPr>
               <a:t>PostgreSQL</a:t>
             </a:r>
-            <a:endParaRPr lang="en-US" sz="800" dirty="0"/>
-          </a:p>
-        </p:txBody>
-      </p:sp>
-      <p:sp>
-        <p:nvSpPr>
-          <p:cNvPr id="42" name="Shape 40"/>
+            <a:endParaRPr lang="en-US" sz="780" dirty="0"/>
+          </a:p>
+        </p:txBody>
+      </p:sp>
+      <p:sp>
+        <p:nvSpPr>
+          <p:cNvPr id="53" name="Shape 51"/>
           <p:cNvSpPr/>
           <p:nvPr/>
         </p:nvSpPr>
         <p:spPr>
           <a:xfrm>
-            <a:off x="5522976" y="3913632"/>
-            <a:ext cx="1143000" cy="384048"/>
+            <a:off x="5522976" y="4407408"/>
+            <a:ext cx="1143000" cy="347472"/>
           </a:xfrm>
           <a:prstGeom prst="roundRect">
             <a:avLst>
-              <a:gd name="adj" fmla="val 11905"/>
+              <a:gd name="adj" fmla="val 13158"/>
             </a:avLst>
           </a:prstGeom>
           <a:solidFill>
@@ -14174,14 +14576,14 @@
       </p:sp>
       <p:sp>
         <p:nvSpPr>
-          <p:cNvPr id="43" name="Text 41"/>
-          <p:cNvSpPr txBox="1"/>
-          <p:nvPr/>
-        </p:nvSpPr>
-        <p:spPr>
-          <a:xfrm>
-            <a:off x="5559552" y="3913632"/>
-            <a:ext cx="1069848" cy="384048"/>
+          <p:cNvPr id="54" name="Text 52"/>
+          <p:cNvSpPr txBox="1"/>
+          <p:nvPr/>
+        </p:nvSpPr>
+        <p:spPr>
+          <a:xfrm>
+            <a:off x="5559552" y="4407408"/>
+            <a:ext cx="1069848" cy="347472"/>
           </a:xfrm>
           <a:prstGeom prst="rect">
             <a:avLst/>
@@ -14197,7 +14599,7 @@
               <a:buNone/>
             </a:pPr>
             <a:r>
-              <a:rPr lang="en-US" sz="800" b="1" dirty="0">
+              <a:rPr lang="en-US" sz="780" b="1" dirty="0">
                 <a:solidFill>
                   <a:srgbClr val="0B5A66"/>
                 </a:solidFill>
@@ -14207,24 +14609,24 @@
               </a:rPr>
               <a:t>Service Bus</a:t>
             </a:r>
-            <a:endParaRPr lang="en-US" sz="800" dirty="0"/>
-          </a:p>
-        </p:txBody>
-      </p:sp>
-      <p:sp>
-        <p:nvSpPr>
-          <p:cNvPr id="44" name="Shape 42"/>
+            <a:endParaRPr lang="en-US" sz="780" dirty="0"/>
+          </a:p>
+        </p:txBody>
+      </p:sp>
+      <p:sp>
+        <p:nvSpPr>
+          <p:cNvPr id="55" name="Shape 53"/>
           <p:cNvSpPr/>
           <p:nvPr/>
         </p:nvSpPr>
         <p:spPr>
           <a:xfrm>
-            <a:off x="6812280" y="3913632"/>
-            <a:ext cx="1143000" cy="384048"/>
+            <a:off x="6812280" y="4407408"/>
+            <a:ext cx="1143000" cy="347472"/>
           </a:xfrm>
           <a:prstGeom prst="roundRect">
             <a:avLst>
-              <a:gd name="adj" fmla="val 11905"/>
+              <a:gd name="adj" fmla="val 13158"/>
             </a:avLst>
           </a:prstGeom>
           <a:solidFill>
@@ -14240,14 +14642,14 @@
       </p:sp>
       <p:sp>
         <p:nvSpPr>
-          <p:cNvPr id="45" name="Text 43"/>
-          <p:cNvSpPr txBox="1"/>
-          <p:nvPr/>
-        </p:nvSpPr>
-        <p:spPr>
-          <a:xfrm>
-            <a:off x="6848856" y="3913632"/>
-            <a:ext cx="1069848" cy="384048"/>
+          <p:cNvPr id="56" name="Text 54"/>
+          <p:cNvSpPr txBox="1"/>
+          <p:nvPr/>
+        </p:nvSpPr>
+        <p:spPr>
+          <a:xfrm>
+            <a:off x="6848856" y="4407408"/>
+            <a:ext cx="1069848" cy="347472"/>
           </a:xfrm>
           <a:prstGeom prst="rect">
             <a:avLst/>
@@ -14263,7 +14665,7 @@
               <a:buNone/>
             </a:pPr>
             <a:r>
-              <a:rPr lang="en-US" sz="800" b="1" dirty="0">
+              <a:rPr lang="en-US" sz="780" b="1" dirty="0">
                 <a:solidFill>
                   <a:srgbClr val="0B5A66"/>
                 </a:solidFill>
@@ -14273,24 +14675,24 @@
               </a:rPr>
               <a:t>Container Apps</a:t>
             </a:r>
-            <a:endParaRPr lang="en-US" sz="800" dirty="0"/>
-          </a:p>
-        </p:txBody>
-      </p:sp>
-      <p:sp>
-        <p:nvSpPr>
-          <p:cNvPr id="46" name="Shape 44"/>
+            <a:endParaRPr lang="en-US" sz="780" dirty="0"/>
+          </a:p>
+        </p:txBody>
+      </p:sp>
+      <p:sp>
+        <p:nvSpPr>
+          <p:cNvPr id="57" name="Shape 55"/>
           <p:cNvSpPr/>
           <p:nvPr/>
         </p:nvSpPr>
         <p:spPr>
           <a:xfrm>
-            <a:off x="8101584" y="3913632"/>
-            <a:ext cx="1143000" cy="384048"/>
+            <a:off x="8101584" y="4407408"/>
+            <a:ext cx="1143000" cy="347472"/>
           </a:xfrm>
           <a:prstGeom prst="roundRect">
             <a:avLst>
-              <a:gd name="adj" fmla="val 11905"/>
+              <a:gd name="adj" fmla="val 13158"/>
             </a:avLst>
           </a:prstGeom>
           <a:solidFill>
@@ -14306,14 +14708,14 @@
       </p:sp>
       <p:sp>
         <p:nvSpPr>
-          <p:cNvPr id="47" name="Text 45"/>
-          <p:cNvSpPr txBox="1"/>
-          <p:nvPr/>
-        </p:nvSpPr>
-        <p:spPr>
-          <a:xfrm>
-            <a:off x="8138160" y="3913632"/>
-            <a:ext cx="1069848" cy="384048"/>
+          <p:cNvPr id="58" name="Text 56"/>
+          <p:cNvSpPr txBox="1"/>
+          <p:nvPr/>
+        </p:nvSpPr>
+        <p:spPr>
+          <a:xfrm>
+            <a:off x="8138160" y="4407408"/>
+            <a:ext cx="1069848" cy="347472"/>
           </a:xfrm>
           <a:prstGeom prst="rect">
             <a:avLst/>
@@ -14329,7 +14731,7 @@
               <a:buNone/>
             </a:pPr>
             <a:r>
-              <a:rPr lang="en-US" sz="800" b="1" dirty="0">
+              <a:rPr lang="en-US" sz="780" b="1" dirty="0">
                 <a:solidFill>
                   <a:srgbClr val="0B5A66"/>
                 </a:solidFill>
@@ -14339,24 +14741,24 @@
               </a:rPr>
               <a:t>Blob + Key Vault</a:t>
             </a:r>
-            <a:endParaRPr lang="en-US" sz="800" dirty="0"/>
-          </a:p>
-        </p:txBody>
-      </p:sp>
-      <p:sp>
-        <p:nvSpPr>
-          <p:cNvPr id="48" name="Shape 46"/>
+            <a:endParaRPr lang="en-US" sz="780" dirty="0"/>
+          </a:p>
+        </p:txBody>
+      </p:sp>
+      <p:sp>
+        <p:nvSpPr>
+          <p:cNvPr id="59" name="Shape 57"/>
           <p:cNvSpPr/>
           <p:nvPr/>
         </p:nvSpPr>
         <p:spPr>
           <a:xfrm>
-            <a:off x="9390888" y="3913632"/>
-            <a:ext cx="1143000" cy="384048"/>
+            <a:off x="9390888" y="4407408"/>
+            <a:ext cx="1143000" cy="347472"/>
           </a:xfrm>
           <a:prstGeom prst="roundRect">
             <a:avLst>
-              <a:gd name="adj" fmla="val 11905"/>
+              <a:gd name="adj" fmla="val 13158"/>
             </a:avLst>
           </a:prstGeom>
           <a:solidFill>
@@ -14372,14 +14774,14 @@
       </p:sp>
       <p:sp>
         <p:nvSpPr>
-          <p:cNvPr id="49" name="Text 47"/>
-          <p:cNvSpPr txBox="1"/>
-          <p:nvPr/>
-        </p:nvSpPr>
-        <p:spPr>
-          <a:xfrm>
-            <a:off x="9427464" y="3913632"/>
-            <a:ext cx="1069848" cy="384048"/>
+          <p:cNvPr id="60" name="Text 58"/>
+          <p:cNvSpPr txBox="1"/>
+          <p:nvPr/>
+        </p:nvSpPr>
+        <p:spPr>
+          <a:xfrm>
+            <a:off x="9427464" y="4407408"/>
+            <a:ext cx="1069848" cy="347472"/>
           </a:xfrm>
           <a:prstGeom prst="rect">
             <a:avLst/>
@@ -14395,7 +14797,7 @@
               <a:buNone/>
             </a:pPr>
             <a:r>
-              <a:rPr lang="en-US" sz="800" b="1" dirty="0">
+              <a:rPr lang="en-US" sz="780" b="1" dirty="0">
                 <a:solidFill>
                   <a:srgbClr val="0B5A66"/>
                 </a:solidFill>
@@ -14405,24 +14807,24 @@
               </a:rPr>
               <a:t>Azure OpenAI</a:t>
             </a:r>
-            <a:endParaRPr lang="en-US" sz="800" dirty="0"/>
-          </a:p>
-        </p:txBody>
-      </p:sp>
-      <p:sp>
-        <p:nvSpPr>
-          <p:cNvPr id="50" name="Shape 48"/>
+            <a:endParaRPr lang="en-US" sz="780" dirty="0"/>
+          </a:p>
+        </p:txBody>
+      </p:sp>
+      <p:sp>
+        <p:nvSpPr>
+          <p:cNvPr id="61" name="Shape 59"/>
           <p:cNvSpPr/>
           <p:nvPr/>
         </p:nvSpPr>
         <p:spPr>
           <a:xfrm>
-            <a:off x="10680192" y="3913632"/>
-            <a:ext cx="1143000" cy="384048"/>
+            <a:off x="10680192" y="4407408"/>
+            <a:ext cx="1143000" cy="347472"/>
           </a:xfrm>
           <a:prstGeom prst="roundRect">
             <a:avLst>
-              <a:gd name="adj" fmla="val 11905"/>
+              <a:gd name="adj" fmla="val 13158"/>
             </a:avLst>
           </a:prstGeom>
           <a:solidFill>
@@ -14438,14 +14840,14 @@
       </p:sp>
       <p:sp>
         <p:nvSpPr>
-          <p:cNvPr id="51" name="Text 49"/>
-          <p:cNvSpPr txBox="1"/>
-          <p:nvPr/>
-        </p:nvSpPr>
-        <p:spPr>
-          <a:xfrm>
-            <a:off x="10716768" y="3913632"/>
-            <a:ext cx="1069848" cy="384048"/>
+          <p:cNvPr id="62" name="Text 60"/>
+          <p:cNvSpPr txBox="1"/>
+          <p:nvPr/>
+        </p:nvSpPr>
+        <p:spPr>
+          <a:xfrm>
+            <a:off x="10716768" y="4407408"/>
+            <a:ext cx="1069848" cy="347472"/>
           </a:xfrm>
           <a:prstGeom prst="rect">
             <a:avLst/>
@@ -14461,7 +14863,7 @@
               <a:buNone/>
             </a:pPr>
             <a:r>
-              <a:rPr lang="en-US" sz="800" b="1" dirty="0">
+              <a:rPr lang="en-US" sz="780" b="1" dirty="0">
                 <a:solidFill>
                   <a:srgbClr val="0B5A66"/>
                 </a:solidFill>
@@ -14471,20 +14873,20 @@
               </a:rPr>
               <a:t>Azure DevOps</a:t>
             </a:r>
-            <a:endParaRPr lang="en-US" sz="800" dirty="0"/>
-          </a:p>
-        </p:txBody>
-      </p:sp>
-      <p:sp>
-        <p:nvSpPr>
-          <p:cNvPr id="52" name="Text 50"/>
-          <p:cNvSpPr txBox="1"/>
-          <p:nvPr/>
-        </p:nvSpPr>
-        <p:spPr>
-          <a:xfrm>
-            <a:off x="365760" y="4370832"/>
-            <a:ext cx="11457432" cy="201168"/>
+            <a:endParaRPr lang="en-US" sz="780" dirty="0"/>
+          </a:p>
+        </p:txBody>
+      </p:sp>
+      <p:sp>
+        <p:nvSpPr>
+          <p:cNvPr id="63" name="Text 61"/>
+          <p:cNvSpPr txBox="1"/>
+          <p:nvPr/>
+        </p:nvSpPr>
+        <p:spPr>
+          <a:xfrm>
+            <a:off x="365760" y="4809744"/>
+            <a:ext cx="11457432" cy="182880"/>
           </a:xfrm>
           <a:prstGeom prst="rect">
             <a:avLst/>
@@ -14500,7 +14902,7 @@
               <a:buNone/>
             </a:pPr>
             <a:r>
-              <a:rPr lang="en-US" sz="780" i="1" dirty="0">
+              <a:rPr lang="en-US" sz="760" i="1" dirty="0">
                 <a:solidFill>
                   <a:srgbClr val="5B6472"/>
                 </a:solidFill>
@@ -14510,20 +14912,20 @@
               </a:rPr>
               <a:t>Deployed to the cloud GGW already use · infrastructure as code · one on/off switch per agent · model version pinned</a:t>
             </a:r>
-            <a:endParaRPr lang="en-US" sz="780" dirty="0"/>
-          </a:p>
-        </p:txBody>
-      </p:sp>
-      <p:sp>
-        <p:nvSpPr>
-          <p:cNvPr id="53" name="Text 51"/>
-          <p:cNvSpPr txBox="1"/>
-          <p:nvPr/>
-        </p:nvSpPr>
-        <p:spPr>
-          <a:xfrm>
-            <a:off x="365760" y="4791456"/>
-            <a:ext cx="2743200" cy="201168"/>
+            <a:endParaRPr lang="en-US" sz="760" dirty="0"/>
+          </a:p>
+        </p:txBody>
+      </p:sp>
+      <p:sp>
+        <p:nvSpPr>
+          <p:cNvPr id="64" name="Text 62"/>
+          <p:cNvSpPr txBox="1"/>
+          <p:nvPr/>
+        </p:nvSpPr>
+        <p:spPr>
+          <a:xfrm>
+            <a:off x="365760" y="5102352"/>
+            <a:ext cx="2743200" cy="182880"/>
           </a:xfrm>
           <a:prstGeom prst="rect">
             <a:avLst/>
@@ -14555,18 +14957,18 @@
       </p:sp>
       <p:sp>
         <p:nvSpPr>
-          <p:cNvPr id="54" name="Shape 52"/>
+          <p:cNvPr id="65" name="Shape 63"/>
           <p:cNvSpPr/>
           <p:nvPr/>
         </p:nvSpPr>
         <p:spPr>
           <a:xfrm>
-            <a:off x="365760" y="5047488"/>
-            <a:ext cx="2699766" cy="786384"/>
+            <a:off x="365760" y="5303520"/>
+            <a:ext cx="2699766" cy="640080"/>
           </a:xfrm>
           <a:prstGeom prst="roundRect">
             <a:avLst>
-              <a:gd name="adj" fmla="val 6977"/>
+              <a:gd name="adj" fmla="val 8571"/>
             </a:avLst>
           </a:prstGeom>
           <a:solidFill>
@@ -14582,14 +14984,14 @@
       </p:sp>
       <p:sp>
         <p:nvSpPr>
-          <p:cNvPr id="55" name="Text 53"/>
-          <p:cNvSpPr txBox="1"/>
-          <p:nvPr/>
-        </p:nvSpPr>
-        <p:spPr>
-          <a:xfrm>
-            <a:off x="512064" y="5129784"/>
-            <a:ext cx="2407158" cy="201168"/>
+          <p:cNvPr id="66" name="Text 64"/>
+          <p:cNvSpPr txBox="1"/>
+          <p:nvPr/>
+        </p:nvSpPr>
+        <p:spPr>
+          <a:xfrm>
+            <a:off x="512064" y="5376672"/>
+            <a:ext cx="2407158" cy="182880"/>
           </a:xfrm>
           <a:prstGeom prst="rect">
             <a:avLst/>
@@ -14605,7 +15007,7 @@
               <a:buNone/>
             </a:pPr>
             <a:r>
-              <a:rPr lang="en-US" sz="1000" b="1" dirty="0">
+              <a:rPr lang="en-US" sz="960" b="1" dirty="0">
                 <a:solidFill>
                   <a:srgbClr val="D97706"/>
                 </a:solidFill>
@@ -14615,20 +15017,20 @@
               </a:rPr>
               <a:t>Shadow</a:t>
             </a:r>
-            <a:endParaRPr lang="en-US" sz="1000" dirty="0"/>
-          </a:p>
-        </p:txBody>
-      </p:sp>
-      <p:sp>
-        <p:nvSpPr>
-          <p:cNvPr id="56" name="Text 54"/>
-          <p:cNvSpPr txBox="1"/>
-          <p:nvPr/>
-        </p:nvSpPr>
-        <p:spPr>
-          <a:xfrm>
-            <a:off x="512064" y="5129784"/>
-            <a:ext cx="2407158" cy="201168"/>
+            <a:endParaRPr lang="en-US" sz="960" dirty="0"/>
+          </a:p>
+        </p:txBody>
+      </p:sp>
+      <p:sp>
+        <p:nvSpPr>
+          <p:cNvPr id="67" name="Text 65"/>
+          <p:cNvSpPr txBox="1"/>
+          <p:nvPr/>
+        </p:nvSpPr>
+        <p:spPr>
+          <a:xfrm>
+            <a:off x="512064" y="5376672"/>
+            <a:ext cx="2407158" cy="182880"/>
           </a:xfrm>
           <a:prstGeom prst="rect">
             <a:avLst/>
@@ -14644,7 +15046,7 @@
               <a:buNone/>
             </a:pPr>
             <a:r>
-              <a:rPr lang="en-US" sz="760" i="1" dirty="0">
+              <a:rPr lang="en-US" sz="740" i="1" dirty="0">
                 <a:solidFill>
                   <a:srgbClr val="5B6472"/>
                 </a:solidFill>
@@ -14654,20 +15056,20 @@
               </a:rPr>
               <a:t>weeks 1–8</a:t>
             </a:r>
-            <a:endParaRPr lang="en-US" sz="760" dirty="0"/>
-          </a:p>
-        </p:txBody>
-      </p:sp>
-      <p:sp>
-        <p:nvSpPr>
-          <p:cNvPr id="57" name="Text 55"/>
-          <p:cNvSpPr txBox="1"/>
-          <p:nvPr/>
-        </p:nvSpPr>
-        <p:spPr>
-          <a:xfrm>
-            <a:off x="512064" y="5358384"/>
-            <a:ext cx="2407158" cy="402336"/>
+            <a:endParaRPr lang="en-US" sz="740" dirty="0"/>
+          </a:p>
+        </p:txBody>
+      </p:sp>
+      <p:sp>
+        <p:nvSpPr>
+          <p:cNvPr id="68" name="Text 66"/>
+          <p:cNvSpPr txBox="1"/>
+          <p:nvPr/>
+        </p:nvSpPr>
+        <p:spPr>
+          <a:xfrm>
+            <a:off x="512064" y="5559552"/>
+            <a:ext cx="2407158" cy="329184"/>
           </a:xfrm>
           <a:prstGeom prst="rect">
             <a:avLst/>
@@ -14681,12 +15083,12 @@
           <a:p>
             <a:pPr indent="0" marL="0">
               <a:lnSpc>
-                <a:spcPct val="112000"/>
+                <a:spcPct val="110000"/>
               </a:lnSpc>
               <a:buNone/>
             </a:pPr>
             <a:r>
-              <a:rPr lang="en-US" sz="800" dirty="0">
+              <a:rPr lang="en-US" sz="760" dirty="0">
                 <a:solidFill>
                   <a:srgbClr val="3A3A3A"/>
                 </a:solidFill>
@@ -14696,19 +15098,19 @@
               </a:rPr>
               <a:t>Runs on live claims. Nobody sees the output.</a:t>
             </a:r>
-            <a:endParaRPr lang="en-US" sz="800" dirty="0"/>
-          </a:p>
-        </p:txBody>
-      </p:sp>
-      <p:sp>
-        <p:nvSpPr>
-          <p:cNvPr id="58" name="Shape 56"/>
+            <a:endParaRPr lang="en-US" sz="760" dirty="0"/>
+          </a:p>
+        </p:txBody>
+      </p:sp>
+      <p:sp>
+        <p:nvSpPr>
+          <p:cNvPr id="69" name="Shape 67"/>
           <p:cNvSpPr/>
           <p:nvPr/>
         </p:nvSpPr>
         <p:spPr>
           <a:xfrm>
-            <a:off x="3092958" y="5440680"/>
+            <a:off x="3092958" y="5623560"/>
             <a:ext cx="164592" cy="0"/>
           </a:xfrm>
           <a:prstGeom prst="line">
@@ -14726,18 +15128,18 @@
       </p:sp>
       <p:sp>
         <p:nvSpPr>
-          <p:cNvPr id="59" name="Shape 57"/>
+          <p:cNvPr id="70" name="Shape 68"/>
           <p:cNvSpPr/>
           <p:nvPr/>
         </p:nvSpPr>
         <p:spPr>
           <a:xfrm>
-            <a:off x="3284982" y="5047488"/>
-            <a:ext cx="2699766" cy="786384"/>
+            <a:off x="3284982" y="5303520"/>
+            <a:ext cx="2699766" cy="640080"/>
           </a:xfrm>
           <a:prstGeom prst="roundRect">
             <a:avLst>
-              <a:gd name="adj" fmla="val 6977"/>
+              <a:gd name="adj" fmla="val 8571"/>
             </a:avLst>
           </a:prstGeom>
           <a:solidFill>
@@ -14753,14 +15155,14 @@
       </p:sp>
       <p:sp>
         <p:nvSpPr>
-          <p:cNvPr id="60" name="Text 58"/>
-          <p:cNvSpPr txBox="1"/>
-          <p:nvPr/>
-        </p:nvSpPr>
-        <p:spPr>
-          <a:xfrm>
-            <a:off x="3431286" y="5129784"/>
-            <a:ext cx="2407158" cy="201168"/>
+          <p:cNvPr id="71" name="Text 69"/>
+          <p:cNvSpPr txBox="1"/>
+          <p:nvPr/>
+        </p:nvSpPr>
+        <p:spPr>
+          <a:xfrm>
+            <a:off x="3431286" y="5376672"/>
+            <a:ext cx="2407158" cy="182880"/>
           </a:xfrm>
           <a:prstGeom prst="rect">
             <a:avLst/>
@@ -14776,7 +15178,7 @@
               <a:buNone/>
             </a:pPr>
             <a:r>
-              <a:rPr lang="en-US" sz="1000" b="1" dirty="0">
+              <a:rPr lang="en-US" sz="960" b="1" dirty="0">
                 <a:solidFill>
                   <a:srgbClr val="0891B2"/>
                 </a:solidFill>
@@ -14786,20 +15188,20 @@
               </a:rPr>
               <a:t>Suggest</a:t>
             </a:r>
-            <a:endParaRPr lang="en-US" sz="1000" dirty="0"/>
-          </a:p>
-        </p:txBody>
-      </p:sp>
-      <p:sp>
-        <p:nvSpPr>
-          <p:cNvPr id="61" name="Text 59"/>
-          <p:cNvSpPr txBox="1"/>
-          <p:nvPr/>
-        </p:nvSpPr>
-        <p:spPr>
-          <a:xfrm>
-            <a:off x="3431286" y="5129784"/>
-            <a:ext cx="2407158" cy="201168"/>
+            <a:endParaRPr lang="en-US" sz="960" dirty="0"/>
+          </a:p>
+        </p:txBody>
+      </p:sp>
+      <p:sp>
+        <p:nvSpPr>
+          <p:cNvPr id="72" name="Text 70"/>
+          <p:cNvSpPr txBox="1"/>
+          <p:nvPr/>
+        </p:nvSpPr>
+        <p:spPr>
+          <a:xfrm>
+            <a:off x="3431286" y="5376672"/>
+            <a:ext cx="2407158" cy="182880"/>
           </a:xfrm>
           <a:prstGeom prst="rect">
             <a:avLst/>
@@ -14815,7 +15217,7 @@
               <a:buNone/>
             </a:pPr>
             <a:r>
-              <a:rPr lang="en-US" sz="760" i="1" dirty="0">
+              <a:rPr lang="en-US" sz="740" i="1" dirty="0">
                 <a:solidFill>
                   <a:srgbClr val="5B6472"/>
                 </a:solidFill>
@@ -14825,20 +15227,20 @@
               </a:rPr>
               <a:t>weeks 9–16</a:t>
             </a:r>
-            <a:endParaRPr lang="en-US" sz="760" dirty="0"/>
-          </a:p>
-        </p:txBody>
-      </p:sp>
-      <p:sp>
-        <p:nvSpPr>
-          <p:cNvPr id="62" name="Text 60"/>
-          <p:cNvSpPr txBox="1"/>
-          <p:nvPr/>
-        </p:nvSpPr>
-        <p:spPr>
-          <a:xfrm>
-            <a:off x="3431286" y="5358384"/>
-            <a:ext cx="2407158" cy="402336"/>
+            <a:endParaRPr lang="en-US" sz="740" dirty="0"/>
+          </a:p>
+        </p:txBody>
+      </p:sp>
+      <p:sp>
+        <p:nvSpPr>
+          <p:cNvPr id="73" name="Text 71"/>
+          <p:cNvSpPr txBox="1"/>
+          <p:nvPr/>
+        </p:nvSpPr>
+        <p:spPr>
+          <a:xfrm>
+            <a:off x="3431286" y="5559552"/>
+            <a:ext cx="2407158" cy="329184"/>
           </a:xfrm>
           <a:prstGeom prst="rect">
             <a:avLst/>
@@ -14852,12 +15254,12 @@
           <a:p>
             <a:pPr indent="0" marL="0">
               <a:lnSpc>
-                <a:spcPct val="112000"/>
+                <a:spcPct val="110000"/>
               </a:lnSpc>
               <a:buNone/>
             </a:pPr>
             <a:r>
-              <a:rPr lang="en-US" sz="800" dirty="0">
+              <a:rPr lang="en-US" sz="760" dirty="0">
                 <a:solidFill>
                   <a:srgbClr val="3A3A3A"/>
                 </a:solidFill>
@@ -14867,19 +15269,19 @@
               </a:rPr>
               <a:t>The handler must edit or approve. Nothing sends itself.</a:t>
             </a:r>
-            <a:endParaRPr lang="en-US" sz="800" dirty="0"/>
-          </a:p>
-        </p:txBody>
-      </p:sp>
-      <p:sp>
-        <p:nvSpPr>
-          <p:cNvPr id="63" name="Shape 61"/>
+            <a:endParaRPr lang="en-US" sz="760" dirty="0"/>
+          </a:p>
+        </p:txBody>
+      </p:sp>
+      <p:sp>
+        <p:nvSpPr>
+          <p:cNvPr id="74" name="Shape 72"/>
           <p:cNvSpPr/>
           <p:nvPr/>
         </p:nvSpPr>
         <p:spPr>
           <a:xfrm>
-            <a:off x="6012180" y="5440680"/>
+            <a:off x="6012180" y="5623560"/>
             <a:ext cx="164592" cy="0"/>
           </a:xfrm>
           <a:prstGeom prst="line">
@@ -14897,18 +15299,18 @@
       </p:sp>
       <p:sp>
         <p:nvSpPr>
-          <p:cNvPr id="64" name="Shape 62"/>
+          <p:cNvPr id="75" name="Shape 73"/>
           <p:cNvSpPr/>
           <p:nvPr/>
         </p:nvSpPr>
         <p:spPr>
           <a:xfrm>
-            <a:off x="6204204" y="5047488"/>
-            <a:ext cx="2699766" cy="786384"/>
+            <a:off x="6204204" y="5303520"/>
+            <a:ext cx="2699766" cy="640080"/>
           </a:xfrm>
           <a:prstGeom prst="roundRect">
             <a:avLst>
-              <a:gd name="adj" fmla="val 6977"/>
+              <a:gd name="adj" fmla="val 8571"/>
             </a:avLst>
           </a:prstGeom>
           <a:solidFill>
@@ -14924,14 +15326,14 @@
       </p:sp>
       <p:sp>
         <p:nvSpPr>
-          <p:cNvPr id="65" name="Text 63"/>
-          <p:cNvSpPr txBox="1"/>
-          <p:nvPr/>
-        </p:nvSpPr>
-        <p:spPr>
-          <a:xfrm>
-            <a:off x="6350508" y="5129784"/>
-            <a:ext cx="2407158" cy="201168"/>
+          <p:cNvPr id="76" name="Text 74"/>
+          <p:cNvSpPr txBox="1"/>
+          <p:nvPr/>
+        </p:nvSpPr>
+        <p:spPr>
+          <a:xfrm>
+            <a:off x="6350508" y="5376672"/>
+            <a:ext cx="2407158" cy="182880"/>
           </a:xfrm>
           <a:prstGeom prst="rect">
             <a:avLst/>
@@ -14947,7 +15349,7 @@
               <a:buNone/>
             </a:pPr>
             <a:r>
-              <a:rPr lang="en-US" sz="1000" b="1" dirty="0">
+              <a:rPr lang="en-US" sz="960" b="1" dirty="0">
                 <a:solidFill>
                   <a:srgbClr val="4338CA"/>
                 </a:solidFill>
@@ -14957,20 +15359,20 @@
               </a:rPr>
               <a:t>Approve</a:t>
             </a:r>
-            <a:endParaRPr lang="en-US" sz="1000" dirty="0"/>
-          </a:p>
-        </p:txBody>
-      </p:sp>
-      <p:sp>
-        <p:nvSpPr>
-          <p:cNvPr id="66" name="Text 64"/>
-          <p:cNvSpPr txBox="1"/>
-          <p:nvPr/>
-        </p:nvSpPr>
-        <p:spPr>
-          <a:xfrm>
-            <a:off x="6350508" y="5129784"/>
-            <a:ext cx="2407158" cy="201168"/>
+            <a:endParaRPr lang="en-US" sz="960" dirty="0"/>
+          </a:p>
+        </p:txBody>
+      </p:sp>
+      <p:sp>
+        <p:nvSpPr>
+          <p:cNvPr id="77" name="Text 75"/>
+          <p:cNvSpPr txBox="1"/>
+          <p:nvPr/>
+        </p:nvSpPr>
+        <p:spPr>
+          <a:xfrm>
+            <a:off x="6350508" y="5376672"/>
+            <a:ext cx="2407158" cy="182880"/>
           </a:xfrm>
           <a:prstGeom prst="rect">
             <a:avLst/>
@@ -14986,7 +15388,7 @@
               <a:buNone/>
             </a:pPr>
             <a:r>
-              <a:rPr lang="en-US" sz="760" i="1" dirty="0">
+              <a:rPr lang="en-US" sz="740" i="1" dirty="0">
                 <a:solidFill>
                   <a:srgbClr val="5B6472"/>
                 </a:solidFill>
@@ -14996,20 +15398,20 @@
               </a:rPr>
               <a:t>months 5–6</a:t>
             </a:r>
-            <a:endParaRPr lang="en-US" sz="760" dirty="0"/>
-          </a:p>
-        </p:txBody>
-      </p:sp>
-      <p:sp>
-        <p:nvSpPr>
-          <p:cNvPr id="67" name="Text 65"/>
-          <p:cNvSpPr txBox="1"/>
-          <p:nvPr/>
-        </p:nvSpPr>
-        <p:spPr>
-          <a:xfrm>
-            <a:off x="6350508" y="5358384"/>
-            <a:ext cx="2407158" cy="402336"/>
+            <a:endParaRPr lang="en-US" sz="740" dirty="0"/>
+          </a:p>
+        </p:txBody>
+      </p:sp>
+      <p:sp>
+        <p:nvSpPr>
+          <p:cNvPr id="78" name="Text 76"/>
+          <p:cNvSpPr txBox="1"/>
+          <p:nvPr/>
+        </p:nvSpPr>
+        <p:spPr>
+          <a:xfrm>
+            <a:off x="6350508" y="5559552"/>
+            <a:ext cx="2407158" cy="329184"/>
           </a:xfrm>
           <a:prstGeom prst="rect">
             <a:avLst/>
@@ -15023,12 +15425,12 @@
           <a:p>
             <a:pPr indent="0" marL="0">
               <a:lnSpc>
-                <a:spcPct val="112000"/>
+                <a:spcPct val="110000"/>
               </a:lnSpc>
               <a:buNone/>
             </a:pPr>
             <a:r>
-              <a:rPr lang="en-US" sz="800" dirty="0">
+              <a:rPr lang="en-US" sz="760" dirty="0">
                 <a:solidFill>
                   <a:srgbClr val="3A3A3A"/>
                 </a:solidFill>
@@ -15038,19 +15440,19 @@
               </a:rPr>
               <a:t>Minor claims pre-filled. One click accepts.</a:t>
             </a:r>
-            <a:endParaRPr lang="en-US" sz="800" dirty="0"/>
-          </a:p>
-        </p:txBody>
-      </p:sp>
-      <p:sp>
-        <p:nvSpPr>
-          <p:cNvPr id="68" name="Shape 66"/>
+            <a:endParaRPr lang="en-US" sz="760" dirty="0"/>
+          </a:p>
+        </p:txBody>
+      </p:sp>
+      <p:sp>
+        <p:nvSpPr>
+          <p:cNvPr id="79" name="Shape 77"/>
           <p:cNvSpPr/>
           <p:nvPr/>
         </p:nvSpPr>
         <p:spPr>
           <a:xfrm>
-            <a:off x="8931402" y="5440680"/>
+            <a:off x="8931402" y="5623560"/>
             <a:ext cx="164592" cy="0"/>
           </a:xfrm>
           <a:prstGeom prst="line">
@@ -15068,18 +15470,18 @@
       </p:sp>
       <p:sp>
         <p:nvSpPr>
-          <p:cNvPr id="69" name="Shape 67"/>
+          <p:cNvPr id="80" name="Shape 78"/>
           <p:cNvSpPr/>
           <p:nvPr/>
         </p:nvSpPr>
         <p:spPr>
           <a:xfrm>
-            <a:off x="9123426" y="5047488"/>
-            <a:ext cx="2699766" cy="786384"/>
+            <a:off x="9123426" y="5303520"/>
+            <a:ext cx="2699766" cy="640080"/>
           </a:xfrm>
           <a:prstGeom prst="roundRect">
             <a:avLst>
-              <a:gd name="adj" fmla="val 6977"/>
+              <a:gd name="adj" fmla="val 8571"/>
             </a:avLst>
           </a:prstGeom>
           <a:solidFill>
@@ -15095,14 +15497,14 @@
       </p:sp>
       <p:sp>
         <p:nvSpPr>
-          <p:cNvPr id="70" name="Text 68"/>
-          <p:cNvSpPr txBox="1"/>
-          <p:nvPr/>
-        </p:nvSpPr>
-        <p:spPr>
-          <a:xfrm>
-            <a:off x="9269730" y="5129784"/>
-            <a:ext cx="2407158" cy="201168"/>
+          <p:cNvPr id="81" name="Text 79"/>
+          <p:cNvSpPr txBox="1"/>
+          <p:nvPr/>
+        </p:nvSpPr>
+        <p:spPr>
+          <a:xfrm>
+            <a:off x="9269730" y="5376672"/>
+            <a:ext cx="2407158" cy="182880"/>
           </a:xfrm>
           <a:prstGeom prst="rect">
             <a:avLst/>
@@ -15118,7 +15520,7 @@
               <a:buNone/>
             </a:pPr>
             <a:r>
-              <a:rPr lang="en-US" sz="1000" b="1" dirty="0">
+              <a:rPr lang="en-US" sz="960" b="1" dirty="0">
                 <a:solidFill>
                   <a:srgbClr val="BE185D"/>
                 </a:solidFill>
@@ -15128,20 +15530,20 @@
               </a:rPr>
               <a:t>Never</a:t>
             </a:r>
-            <a:endParaRPr lang="en-US" sz="1000" dirty="0"/>
-          </a:p>
-        </p:txBody>
-      </p:sp>
-      <p:sp>
-        <p:nvSpPr>
-          <p:cNvPr id="71" name="Text 69"/>
-          <p:cNvSpPr txBox="1"/>
-          <p:nvPr/>
-        </p:nvSpPr>
-        <p:spPr>
-          <a:xfrm>
-            <a:off x="9269730" y="5129784"/>
-            <a:ext cx="2407158" cy="201168"/>
+            <a:endParaRPr lang="en-US" sz="960" dirty="0"/>
+          </a:p>
+        </p:txBody>
+      </p:sp>
+      <p:sp>
+        <p:nvSpPr>
+          <p:cNvPr id="82" name="Text 80"/>
+          <p:cNvSpPr txBox="1"/>
+          <p:nvPr/>
+        </p:nvSpPr>
+        <p:spPr>
+          <a:xfrm>
+            <a:off x="9269730" y="5376672"/>
+            <a:ext cx="2407158" cy="182880"/>
           </a:xfrm>
           <a:prstGeom prst="rect">
             <a:avLst/>
@@ -15157,7 +15559,7 @@
               <a:buNone/>
             </a:pPr>
             <a:r>
-              <a:rPr lang="en-US" sz="760" i="1" dirty="0">
+              <a:rPr lang="en-US" sz="740" i="1" dirty="0">
                 <a:solidFill>
                   <a:srgbClr val="5B6472"/>
                 </a:solidFill>
@@ -15167,20 +15569,20 @@
               </a:rPr>
               <a:t>by design</a:t>
             </a:r>
-            <a:endParaRPr lang="en-US" sz="760" dirty="0"/>
-          </a:p>
-        </p:txBody>
-      </p:sp>
-      <p:sp>
-        <p:nvSpPr>
-          <p:cNvPr id="72" name="Text 70"/>
-          <p:cNvSpPr txBox="1"/>
-          <p:nvPr/>
-        </p:nvSpPr>
-        <p:spPr>
-          <a:xfrm>
-            <a:off x="9269730" y="5358384"/>
-            <a:ext cx="2407158" cy="402336"/>
+            <a:endParaRPr lang="en-US" sz="740" dirty="0"/>
+          </a:p>
+        </p:txBody>
+      </p:sp>
+      <p:sp>
+        <p:nvSpPr>
+          <p:cNvPr id="83" name="Text 81"/>
+          <p:cNvSpPr txBox="1"/>
+          <p:nvPr/>
+        </p:nvSpPr>
+        <p:spPr>
+          <a:xfrm>
+            <a:off x="9269730" y="5559552"/>
+            <a:ext cx="2407158" cy="329184"/>
           </a:xfrm>
           <a:prstGeom prst="rect">
             <a:avLst/>
@@ -15194,12 +15596,12 @@
           <a:p>
             <a:pPr indent="0" marL="0">
               <a:lnSpc>
-                <a:spcPct val="112000"/>
+                <a:spcPct val="110000"/>
               </a:lnSpc>
               <a:buNone/>
             </a:pPr>
             <a:r>
-              <a:rPr lang="en-US" sz="800" dirty="0">
+              <a:rPr lang="en-US" sz="760" dirty="0">
                 <a:solidFill>
                   <a:srgbClr val="3A3A3A"/>
                 </a:solidFill>
@@ -15209,20 +15611,20 @@
               </a:rPr>
               <a:t>Nothing adverse to a claimant is ever automatic.</a:t>
             </a:r>
-            <a:endParaRPr lang="en-US" sz="800" dirty="0"/>
-          </a:p>
-        </p:txBody>
-      </p:sp>
-      <p:sp>
-        <p:nvSpPr>
-          <p:cNvPr id="73" name="Text 71"/>
-          <p:cNvSpPr txBox="1"/>
-          <p:nvPr/>
-        </p:nvSpPr>
-        <p:spPr>
-          <a:xfrm>
-            <a:off x="365760" y="5998464"/>
-            <a:ext cx="11430000" cy="237744"/>
+            <a:endParaRPr lang="en-US" sz="760" dirty="0"/>
+          </a:p>
+        </p:txBody>
+      </p:sp>
+      <p:sp>
+        <p:nvSpPr>
+          <p:cNvPr id="84" name="Text 82"/>
+          <p:cNvSpPr txBox="1"/>
+          <p:nvPr/>
+        </p:nvSpPr>
+        <p:spPr>
+          <a:xfrm>
+            <a:off x="365760" y="6035040"/>
+            <a:ext cx="11430000" cy="219456"/>
           </a:xfrm>
           <a:prstGeom prst="rect">
             <a:avLst/>
@@ -15254,7 +15656,7 @@
       </p:sp>
       <p:sp>
         <p:nvSpPr>
-          <p:cNvPr id="74" name="Text 72"/>
+          <p:cNvPr id="85" name="Text 83"/>
           <p:cNvSpPr txBox="1"/>
           <p:nvPr/>
         </p:nvSpPr>
@@ -15293,7 +15695,7 @@
       </p:sp>
       <p:sp>
         <p:nvSpPr>
-          <p:cNvPr id="75" name="Text 73"/>
+          <p:cNvPr id="86" name="Text 84"/>
           <p:cNvSpPr txBox="1"/>
           <p:nvPr/>
         </p:nvSpPr>

--- a/case-study/deck/GGW_FNOL_Redesign.pptx
+++ b/case-study/deck/GGW_FNOL_Redesign.pptx
@@ -13,9 +13,10 @@
     <p:sldId id="261" r:id="rId7"/>
     <p:sldId id="262" r:id="rId8"/>
     <p:sldId id="263" r:id="rId9"/>
+    <p:sldId id="264" r:id="rId10"/>
   </p:sldIdLst>
   <p:notesMasterIdLst>
-    <p:notesMasterId r:id="rId10"/>
+    <p:notesMasterId r:id="rId11"/>
   </p:notesMasterIdLst>
   <p:sldSz cx="12192000" cy="6858000"/>
   <p:notesSz cx="6858000" cy="12192000"/>
@@ -1149,6 +1150,94 @@
             <a:fld id="{F7021451-1387-4CA6-816F-3879F97B5CBC}" type="slidenum">
               <a:rPr lang="en-US"/>
               <a:t>8</a:t>
+            </a:fld>
+            <a:endParaRPr lang="en-US"/>
+          </a:p>
+        </p:txBody>
+      </p:sp>
+    </p:spTree>
+    <p:extLst>
+      <p:ext uri="{BB962C8B-B14F-4D97-AF65-F5344CB8AC3E}">
+        <p14:creationId xmlns:p14="http://schemas.microsoft.com/office/powerpoint/2010/main" val="1024086991"/>
+      </p:ext>
+    </p:extLst>
+  </p:cSld>
+  <p:clrMapOvr>
+    <a:masterClrMapping/>
+  </p:clrMapOvr>
+</p:notes>
+</file>
+
+<file path=ppt/notesSlides/notesSlide9.xml><?xml version="1.0" encoding="utf-8"?>
+<p:notes xmlns:a="http://schemas.openxmlformats.org/drawingml/2006/main" xmlns:r="http://schemas.openxmlformats.org/officeDocument/2006/relationships" xmlns:p="http://schemas.openxmlformats.org/presentationml/2006/main">
+  <p:cSld>
+    <p:spTree>
+      <p:nvGrpSpPr>
+        <p:cNvPr id="1" name=""/>
+        <p:cNvGrpSpPr/>
+        <p:nvPr/>
+      </p:nvGrpSpPr>
+      <p:grpSpPr>
+        <a:xfrm>
+          <a:off x="0" y="0"/>
+          <a:ext cx="0" cy="0"/>
+          <a:chOff x="0" y="0"/>
+          <a:chExt cx="0" cy="0"/>
+        </a:xfrm>
+      </p:grpSpPr>
+      <p:sp>
+        <p:nvSpPr>
+          <p:cNvPr id="2" name="Slide Image Placeholder 1"/>
+          <p:cNvSpPr>
+            <a:spLocks noGrp="1" noRot="1" noChangeAspect="1"/>
+          </p:cNvSpPr>
+          <p:nvPr>
+            <p:ph type="sldImg"/>
+          </p:nvPr>
+        </p:nvSpPr>
+        <p:spPr/>
+      </p:sp>
+      <p:sp>
+        <p:nvSpPr>
+          <p:cNvPr id="3" name="Notes Placeholder 2"/>
+          <p:cNvSpPr>
+            <a:spLocks noGrp="1"/>
+          </p:cNvSpPr>
+          <p:nvPr>
+            <p:ph type="body" idx="1"/>
+          </p:nvPr>
+        </p:nvSpPr>
+        <p:spPr/>
+        <p:txBody>
+          <a:bodyPr/>
+          <a:lstStyle/>
+          <a:p>
+            <a:r>
+              <a:rPr lang="en-US" dirty="0"/>
+              <a:t/>
+            </a:r>
+            <a:endParaRPr lang="en-US" dirty="0"/>
+          </a:p>
+        </p:txBody>
+      </p:sp>
+      <p:sp>
+        <p:nvSpPr>
+          <p:cNvPr id="4" name="Slide Number Placeholder 3"/>
+          <p:cNvSpPr>
+            <a:spLocks noGrp="1"/>
+          </p:cNvSpPr>
+          <p:nvPr>
+            <p:ph type="sldNum" sz="quarter" idx="10"/>
+          </p:nvPr>
+        </p:nvSpPr>
+        <p:spPr/>
+        <p:txBody>
+          <a:bodyPr/>
+          <a:lstStyle/>
+          <a:p>
+            <a:fld id="{F7021451-1387-4CA6-816F-3879F97B5CBC}" type="slidenum">
+              <a:rPr lang="en-US"/>
+              <a:t>9</a:t>
             </a:fld>
             <a:endParaRPr lang="en-US"/>
           </a:p>
@@ -3486,7 +3575,7 @@
                 <a:ea typeface="Arial" pitchFamily="34" charset="-122"/>
                 <a:cs typeface="Arial" pitchFamily="34" charset="-120"/>
               </a:rPr>
-              <a:t>4,370 handler-hours a year, at the loaded cost of a handler-hour. Capacity, not cash — it becomes money only if the hours go to the backlog or are absorbed by normal staff turnover. Full build-up on slide 7.</a:t>
+              <a:t>4,370 handler-hours a year, at the loaded cost of a handler-hour. Capacity, not cash — it becomes money only if the hours go to the backlog or are absorbed by normal staff turnover. Full build-up on slide 8.</a:t>
             </a:r>
             <a:endParaRPr lang="en-US" sz="850" dirty="0"/>
           </a:p>
@@ -3611,7 +3700,7 @@
                 <a:ea typeface="Arial" pitchFamily="34" charset="-122"/>
                 <a:cs typeface="Arial" pitchFamily="34" charset="-120"/>
               </a:rPr>
-              <a:t>Conservative throughout: the 21-minute-per-claim saving is a three-point estimate (best 30 / likely 21 / worst 12), not the design maximum. Build-up on slide 7, sources on slide 8.</a:t>
+              <a:t>Conservative throughout: the 21-minute-per-claim saving is a three-point estimate (best 30 / likely 21 / worst 12), not the design maximum. Build-up on slide 8, sources on slide 9.</a:t>
             </a:r>
             <a:endParaRPr lang="en-US" sz="760" dirty="0"/>
           </a:p>
@@ -3689,7 +3778,7 @@
                 <a:ea typeface="Arial" pitchFamily="34" charset="-122"/>
                 <a:cs typeface="Arial" pitchFamily="34" charset="-120"/>
               </a:rPr>
-              <a:t>1 / 8</a:t>
+              <a:t>1 / 9</a:t>
             </a:r>
             <a:endParaRPr lang="en-US" sz="800" dirty="0"/>
           </a:p>
@@ -4493,7 +4582,7 @@
                 <a:ea typeface="Arial" pitchFamily="34" charset="-122"/>
                 <a:cs typeface="Arial" pitchFamily="34" charset="-120"/>
               </a:rPr>
-              <a:t>2 / 8</a:t>
+              <a:t>2 / 9</a:t>
             </a:r>
             <a:endParaRPr lang="en-US" sz="800" dirty="0"/>
           </a:p>
@@ -6744,7 +6833,7 @@
                 <a:ea typeface="Arial" pitchFamily="34" charset="-122"/>
                 <a:cs typeface="Arial" pitchFamily="34" charset="-120"/>
               </a:rPr>
-              <a:t>3 / 8</a:t>
+              <a:t>3 / 9</a:t>
             </a:r>
             <a:endParaRPr lang="en-US" sz="800" dirty="0"/>
           </a:p>
@@ -9177,7 +9266,7 @@
                 <a:ea typeface="Arial" pitchFamily="34" charset="-122"/>
                 <a:cs typeface="Arial" pitchFamily="34" charset="-120"/>
               </a:rPr>
-              <a:t>4 / 8</a:t>
+              <a:t>4 / 9</a:t>
             </a:r>
             <a:endParaRPr lang="en-US" sz="800" dirty="0"/>
           </a:p>
@@ -12719,7 +12808,7 @@
                 <a:ea typeface="Arial" pitchFamily="34" charset="-122"/>
                 <a:cs typeface="Arial" pitchFamily="34" charset="-120"/>
               </a:rPr>
-              <a:t>5 / 8</a:t>
+              <a:t>5 / 9</a:t>
             </a:r>
             <a:endParaRPr lang="en-US" sz="800" dirty="0"/>
           </a:p>
@@ -12766,7 +12855,7 @@
         <p:spPr>
           <a:xfrm>
             <a:off x="365760" y="118872"/>
-            <a:ext cx="9326880" cy="310896"/>
+            <a:ext cx="8778240" cy="274320"/>
           </a:xfrm>
           <a:prstGeom prst="rect">
             <a:avLst/>
@@ -12790,7 +12879,7 @@
                 <a:ea typeface="Cambria" pitchFamily="34" charset="-122"/>
                 <a:cs typeface="Cambria" pitchFamily="34" charset="-120"/>
               </a:rPr>
-              <a:t>One graph, one typed state object, and a person before anything leaves the building</a:t>
+              <a:t>System at a glance — four lanes, seven stations, one shared claim state</a:t>
             </a:r>
             <a:endParaRPr lang="en-US" sz="1400" dirty="0"/>
           </a:p>
@@ -12805,7 +12894,7 @@
         <p:spPr>
           <a:xfrm>
             <a:off x="8229600" y="146304"/>
-            <a:ext cx="3593592" cy="274320"/>
+            <a:ext cx="3593592" cy="237744"/>
           </a:xfrm>
           <a:prstGeom prst="rect">
             <a:avLst/>
@@ -12829,7 +12918,7 @@
                 <a:ea typeface="Arial" pitchFamily="34" charset="-122"/>
                 <a:cs typeface="Arial" pitchFamily="34" charset="-120"/>
               </a:rPr>
-              <a:t>TECHNICAL IMPLEMENTATION</a:t>
+              <a:t>SYSTEM AT A GLANCE</a:t>
             </a:r>
             <a:endParaRPr lang="en-US" sz="950" dirty="0"/>
           </a:p>
@@ -12843,16 +12932,82 @@
         </p:nvSpPr>
         <p:spPr>
           <a:xfrm>
-            <a:off x="2308860" y="1042416"/>
-            <a:ext cx="7552944" cy="402336"/>
+            <a:off x="365760" y="512064"/>
+            <a:ext cx="137160" cy="137160"/>
           </a:xfrm>
           <a:prstGeom prst="roundRect">
             <a:avLst>
-              <a:gd name="adj" fmla="val 11364"/>
+              <a:gd name="adj" fmla="val 13333"/>
             </a:avLst>
           </a:prstGeom>
           <a:solidFill>
-            <a:srgbClr val="EEF3F8"/>
+            <a:srgbClr val="E6F8F7"/>
+          </a:solidFill>
+          <a:ln w="12700">
+            <a:solidFill>
+              <a:srgbClr val="007A82"/>
+            </a:solidFill>
+            <a:prstDash val="solid"/>
+          </a:ln>
+        </p:spPr>
+      </p:sp>
+      <p:sp>
+        <p:nvSpPr>
+          <p:cNvPr id="5" name="Text 3"/>
+          <p:cNvSpPr txBox="1"/>
+          <p:nvPr/>
+        </p:nvSpPr>
+        <p:spPr>
+          <a:xfrm>
+            <a:off x="566928" y="466344"/>
+            <a:ext cx="1325880" cy="228600"/>
+          </a:xfrm>
+          <a:prstGeom prst="rect">
+            <a:avLst/>
+          </a:prstGeom>
+          <a:noFill/>
+          <a:ln/>
+        </p:spPr>
+        <p:txBody>
+          <a:bodyPr wrap="square" lIns="0" tIns="0" rIns="0" bIns="0" rtlCol="0" anchor="ctr"/>
+          <a:lstStyle/>
+          <a:p>
+            <a:pPr indent="0" marL="0">
+              <a:buNone/>
+            </a:pPr>
+            <a:r>
+              <a:rPr lang="en-US" sz="800" dirty="0">
+                <a:solidFill>
+                  <a:srgbClr val="5B6472"/>
+                </a:solidFill>
+                <a:latin typeface="Arial" pitchFamily="34" charset="0"/>
+                <a:ea typeface="Arial" pitchFamily="34" charset="-122"/>
+                <a:cs typeface="Arial" pitchFamily="34" charset="-120"/>
+              </a:rPr>
+              <a:t>Input / trigger</a:t>
+            </a:r>
+            <a:endParaRPr lang="en-US" sz="800" dirty="0"/>
+          </a:p>
+        </p:txBody>
+      </p:sp>
+      <p:sp>
+        <p:nvSpPr>
+          <p:cNvPr id="6" name="Shape 4"/>
+          <p:cNvSpPr/>
+          <p:nvPr/>
+        </p:nvSpPr>
+        <p:spPr>
+          <a:xfrm>
+            <a:off x="1965960" y="512064"/>
+            <a:ext cx="137160" cy="137160"/>
+          </a:xfrm>
+          <a:prstGeom prst="roundRect">
+            <a:avLst>
+              <a:gd name="adj" fmla="val 13333"/>
+            </a:avLst>
+          </a:prstGeom>
+          <a:solidFill>
+            <a:srgbClr val="E3EDF6"/>
           </a:solidFill>
           <a:ln w="12700">
             <a:solidFill>
@@ -12864,57 +13019,576 @@
       </p:sp>
       <p:sp>
         <p:nvSpPr>
-          <p:cNvPr id="5" name="Text 3"/>
-          <p:cNvSpPr txBox="1"/>
-          <p:nvPr/>
-        </p:nvSpPr>
-        <p:spPr>
-          <a:xfrm>
-            <a:off x="2308860" y="1042416"/>
-            <a:ext cx="7552944" cy="402336"/>
-          </a:xfrm>
-          <a:prstGeom prst="rect">
-            <a:avLst/>
-          </a:prstGeom>
-          <a:noFill/>
-          <a:ln/>
-        </p:spPr>
-        <p:txBody>
-          <a:bodyPr wrap="square" lIns="0" tIns="0" rIns="0" bIns="0" rtlCol="0" anchor="ctr"/>
-          <a:lstStyle/>
-          <a:p>
-            <a:pPr algn="ctr" indent="0" marL="0">
-              <a:buNone/>
-            </a:pPr>
-            <a:r>
-              <a:rPr lang="en-US" sz="860" b="1" dirty="0">
-                <a:solidFill>
-                  <a:srgbClr val="3B6FA0"/>
-                </a:solidFill>
-                <a:latin typeface="Arial" pitchFamily="34" charset="0"/>
-                <a:ea typeface="Arial" pitchFamily="34" charset="-122"/>
-                <a:cs typeface="Arial" pitchFamily="34" charset="-120"/>
-              </a:rPr>
-              <a:t>LangGraph state graph  ·  one ClaimState carries fields, confidence and the audit trail</a:t>
-            </a:r>
-            <a:endParaRPr lang="en-US" sz="860" dirty="0"/>
-          </a:p>
-        </p:txBody>
-      </p:sp>
-      <p:sp>
-        <p:nvSpPr>
-          <p:cNvPr id="6" name="Shape 4"/>
+          <p:cNvPr id="7" name="Text 5"/>
+          <p:cNvSpPr txBox="1"/>
+          <p:nvPr/>
+        </p:nvSpPr>
+        <p:spPr>
+          <a:xfrm>
+            <a:off x="2167128" y="466344"/>
+            <a:ext cx="1325880" cy="228600"/>
+          </a:xfrm>
+          <a:prstGeom prst="rect">
+            <a:avLst/>
+          </a:prstGeom>
+          <a:noFill/>
+          <a:ln/>
+        </p:spPr>
+        <p:txBody>
+          <a:bodyPr wrap="square" lIns="0" tIns="0" rIns="0" bIns="0" rtlCol="0" anchor="ctr"/>
+          <a:lstStyle/>
+          <a:p>
+            <a:pPr indent="0" marL="0">
+              <a:buNone/>
+            </a:pPr>
+            <a:r>
+              <a:rPr lang="en-US" sz="800" dirty="0">
+                <a:solidFill>
+                  <a:srgbClr val="5B6472"/>
+                </a:solidFill>
+                <a:latin typeface="Arial" pitchFamily="34" charset="0"/>
+                <a:ea typeface="Arial" pitchFamily="34" charset="-122"/>
+                <a:cs typeface="Arial" pitchFamily="34" charset="-120"/>
+              </a:rPr>
+              <a:t>AI agent (LLM call)</a:t>
+            </a:r>
+            <a:endParaRPr lang="en-US" sz="800" dirty="0"/>
+          </a:p>
+        </p:txBody>
+      </p:sp>
+      <p:sp>
+        <p:nvSpPr>
+          <p:cNvPr id="8" name="Shape 6"/>
           <p:cNvSpPr/>
           <p:nvPr/>
         </p:nvSpPr>
         <p:spPr>
           <a:xfrm>
-            <a:off x="365760" y="1627632"/>
-            <a:ext cx="1723644" cy="1133856"/>
+            <a:off x="4160520" y="512064"/>
+            <a:ext cx="137160" cy="137160"/>
           </a:xfrm>
           <a:prstGeom prst="roundRect">
             <a:avLst>
-              <a:gd name="adj" fmla="val 4839"/>
+              <a:gd name="adj" fmla="val 13333"/>
+            </a:avLst>
+          </a:prstGeom>
+          <a:solidFill>
+            <a:srgbClr val="ECEFF3"/>
+          </a:solidFill>
+          <a:ln w="12700">
+            <a:solidFill>
+              <a:srgbClr val="6B7787"/>
+            </a:solidFill>
+            <a:prstDash val="solid"/>
+          </a:ln>
+        </p:spPr>
+      </p:sp>
+      <p:sp>
+        <p:nvSpPr>
+          <p:cNvPr id="9" name="Text 7"/>
+          <p:cNvSpPr txBox="1"/>
+          <p:nvPr/>
+        </p:nvSpPr>
+        <p:spPr>
+          <a:xfrm>
+            <a:off x="4361688" y="466344"/>
+            <a:ext cx="1325880" cy="228600"/>
+          </a:xfrm>
+          <a:prstGeom prst="rect">
+            <a:avLst/>
+          </a:prstGeom>
+          <a:noFill/>
+          <a:ln/>
+        </p:spPr>
+        <p:txBody>
+          <a:bodyPr wrap="square" lIns="0" tIns="0" rIns="0" bIns="0" rtlCol="0" anchor="ctr"/>
+          <a:lstStyle/>
+          <a:p>
+            <a:pPr indent="0" marL="0">
+              <a:buNone/>
+            </a:pPr>
+            <a:r>
+              <a:rPr lang="en-US" sz="800" dirty="0">
+                <a:solidFill>
+                  <a:srgbClr val="5B6472"/>
+                </a:solidFill>
+                <a:latin typeface="Arial" pitchFamily="34" charset="0"/>
+                <a:ea typeface="Arial" pitchFamily="34" charset="-122"/>
+                <a:cs typeface="Arial" pitchFamily="34" charset="-120"/>
+              </a:rPr>
+              <a:t>Rules only, no model</a:t>
+            </a:r>
+            <a:endParaRPr lang="en-US" sz="800" dirty="0"/>
+          </a:p>
+        </p:txBody>
+      </p:sp>
+      <p:sp>
+        <p:nvSpPr>
+          <p:cNvPr id="10" name="Shape 8"/>
+          <p:cNvSpPr/>
+          <p:nvPr/>
+        </p:nvSpPr>
+        <p:spPr>
+          <a:xfrm>
+            <a:off x="6537960" y="512064"/>
+            <a:ext cx="137160" cy="137160"/>
+          </a:xfrm>
+          <a:prstGeom prst="roundRect">
+            <a:avLst>
+              <a:gd name="adj" fmla="val 13333"/>
+            </a:avLst>
+          </a:prstGeom>
+          <a:solidFill>
+            <a:srgbClr val="F1E6ED"/>
+          </a:solidFill>
+          <a:ln w="12700">
+            <a:solidFill>
+              <a:srgbClr val="7A4A66"/>
+            </a:solidFill>
+            <a:prstDash val="solid"/>
+          </a:ln>
+        </p:spPr>
+      </p:sp>
+      <p:sp>
+        <p:nvSpPr>
+          <p:cNvPr id="11" name="Text 9"/>
+          <p:cNvSpPr txBox="1"/>
+          <p:nvPr/>
+        </p:nvSpPr>
+        <p:spPr>
+          <a:xfrm>
+            <a:off x="6739128" y="466344"/>
+            <a:ext cx="1325880" cy="228600"/>
+          </a:xfrm>
+          <a:prstGeom prst="rect">
+            <a:avLst/>
+          </a:prstGeom>
+          <a:noFill/>
+          <a:ln/>
+        </p:spPr>
+        <p:txBody>
+          <a:bodyPr wrap="square" lIns="0" tIns="0" rIns="0" bIns="0" rtlCol="0" anchor="ctr"/>
+          <a:lstStyle/>
+          <a:p>
+            <a:pPr indent="0" marL="0">
+              <a:buNone/>
+            </a:pPr>
+            <a:r>
+              <a:rPr lang="en-US" sz="800" dirty="0">
+                <a:solidFill>
+                  <a:srgbClr val="5B6472"/>
+                </a:solidFill>
+                <a:latin typeface="Arial" pitchFamily="34" charset="0"/>
+                <a:ea typeface="Arial" pitchFamily="34" charset="-122"/>
+                <a:cs typeface="Arial" pitchFamily="34" charset="-120"/>
+              </a:rPr>
+              <a:t>Human checkpoint</a:t>
+            </a:r>
+            <a:endParaRPr lang="en-US" sz="800" dirty="0"/>
+          </a:p>
+        </p:txBody>
+      </p:sp>
+      <p:sp>
+        <p:nvSpPr>
+          <p:cNvPr id="12" name="Shape 10"/>
+          <p:cNvSpPr/>
+          <p:nvPr/>
+        </p:nvSpPr>
+        <p:spPr>
+          <a:xfrm>
+            <a:off x="8732520" y="576072"/>
+            <a:ext cx="320040" cy="0"/>
+          </a:xfrm>
+          <a:prstGeom prst="line">
+            <a:avLst/>
+          </a:prstGeom>
+          <a:noFill/>
+          <a:ln w="12700">
+            <a:solidFill>
+              <a:srgbClr val="5B7D80"/>
+            </a:solidFill>
+            <a:prstDash val="dash"/>
+            <a:tailEnd type="triangle"/>
+          </a:ln>
+        </p:spPr>
+      </p:sp>
+      <p:sp>
+        <p:nvSpPr>
+          <p:cNvPr id="13" name="Text 11"/>
+          <p:cNvSpPr txBox="1"/>
+          <p:nvPr/>
+        </p:nvSpPr>
+        <p:spPr>
+          <a:xfrm>
+            <a:off x="9098280" y="457200"/>
+            <a:ext cx="2724912" cy="237744"/>
+          </a:xfrm>
+          <a:prstGeom prst="rect">
+            <a:avLst/>
+          </a:prstGeom>
+          <a:noFill/>
+          <a:ln/>
+        </p:spPr>
+        <p:txBody>
+          <a:bodyPr wrap="square" lIns="0" tIns="0" rIns="0" bIns="0" rtlCol="0" anchor="ctr"/>
+          <a:lstStyle/>
+          <a:p>
+            <a:pPr indent="0" marL="0">
+              <a:buNone/>
+            </a:pPr>
+            <a:r>
+              <a:rPr lang="en-US" sz="800" dirty="0">
+                <a:solidFill>
+                  <a:srgbClr val="5B6472"/>
+                </a:solidFill>
+                <a:latin typeface="Arial" pitchFamily="34" charset="0"/>
+                <a:ea typeface="Arial" pitchFamily="34" charset="-122"/>
+                <a:cs typeface="Arial" pitchFamily="34" charset="-120"/>
+              </a:rPr>
+              <a:t>conditional path (~20% of claims)</a:t>
+            </a:r>
+            <a:endParaRPr lang="en-US" sz="800" dirty="0"/>
+          </a:p>
+        </p:txBody>
+      </p:sp>
+      <p:sp>
+        <p:nvSpPr>
+          <p:cNvPr id="14" name="Shape 12"/>
+          <p:cNvSpPr/>
+          <p:nvPr/>
+        </p:nvSpPr>
+        <p:spPr>
+          <a:xfrm>
+            <a:off x="365760" y="859536"/>
+            <a:ext cx="11457432" cy="1005840"/>
+          </a:xfrm>
+          <a:prstGeom prst="roundRect">
+            <a:avLst>
+              <a:gd name="adj" fmla="val 3636"/>
+            </a:avLst>
+          </a:prstGeom>
+          <a:solidFill>
+            <a:srgbClr val="F2FAF9"/>
+          </a:solidFill>
+          <a:ln/>
+        </p:spPr>
+      </p:sp>
+      <p:sp>
+        <p:nvSpPr>
+          <p:cNvPr id="15" name="Shape 13"/>
+          <p:cNvSpPr/>
+          <p:nvPr/>
+        </p:nvSpPr>
+        <p:spPr>
+          <a:xfrm>
+            <a:off x="365760" y="859536"/>
+            <a:ext cx="54864" cy="1005840"/>
+          </a:xfrm>
+          <a:prstGeom prst="rect">
+            <a:avLst/>
+          </a:prstGeom>
+          <a:solidFill>
+            <a:srgbClr val="007A82"/>
+          </a:solidFill>
+          <a:ln/>
+        </p:spPr>
+      </p:sp>
+      <p:sp>
+        <p:nvSpPr>
+          <p:cNvPr id="16" name="Text 14"/>
+          <p:cNvSpPr txBox="1"/>
+          <p:nvPr/>
+        </p:nvSpPr>
+        <p:spPr>
+          <a:xfrm>
+            <a:off x="512064" y="914400"/>
+            <a:ext cx="2194560" cy="164592"/>
+          </a:xfrm>
+          <a:prstGeom prst="rect">
+            <a:avLst/>
+          </a:prstGeom>
+          <a:noFill/>
+          <a:ln/>
+        </p:spPr>
+        <p:txBody>
+          <a:bodyPr wrap="square" lIns="0" tIns="0" rIns="0" bIns="0" rtlCol="0" anchor="ctr"/>
+          <a:lstStyle/>
+          <a:p>
+            <a:pPr indent="0" marL="0">
+              <a:buNone/>
+            </a:pPr>
+            <a:r>
+              <a:rPr lang="en-US" sz="800" b="1" spc="80" kern="0" dirty="0">
+                <a:solidFill>
+                  <a:srgbClr val="007A82"/>
+                </a:solidFill>
+                <a:latin typeface="Arial" pitchFamily="34" charset="0"/>
+                <a:ea typeface="Arial" pitchFamily="34" charset="-122"/>
+                <a:cs typeface="Arial" pitchFamily="34" charset="-120"/>
+              </a:rPr>
+              <a:t>INPUT</a:t>
+            </a:r>
+            <a:endParaRPr lang="en-US" sz="800" dirty="0"/>
+          </a:p>
+        </p:txBody>
+      </p:sp>
+      <p:sp>
+        <p:nvSpPr>
+          <p:cNvPr id="17" name="Shape 15"/>
+          <p:cNvSpPr/>
+          <p:nvPr/>
+        </p:nvSpPr>
+        <p:spPr>
+          <a:xfrm>
+            <a:off x="365760" y="1993392"/>
+            <a:ext cx="11457432" cy="1005840"/>
+          </a:xfrm>
+          <a:prstGeom prst="roundRect">
+            <a:avLst>
+              <a:gd name="adj" fmla="val 3636"/>
+            </a:avLst>
+          </a:prstGeom>
+          <a:solidFill>
+            <a:srgbClr val="F4F5F6"/>
+          </a:solidFill>
+          <a:ln/>
+        </p:spPr>
+      </p:sp>
+      <p:sp>
+        <p:nvSpPr>
+          <p:cNvPr id="18" name="Shape 16"/>
+          <p:cNvSpPr/>
+          <p:nvPr/>
+        </p:nvSpPr>
+        <p:spPr>
+          <a:xfrm>
+            <a:off x="365760" y="1993392"/>
+            <a:ext cx="54864" cy="1005840"/>
+          </a:xfrm>
+          <a:prstGeom prst="rect">
+            <a:avLst/>
+          </a:prstGeom>
+          <a:solidFill>
+            <a:srgbClr val="6B7787"/>
+          </a:solidFill>
+          <a:ln/>
+        </p:spPr>
+      </p:sp>
+      <p:sp>
+        <p:nvSpPr>
+          <p:cNvPr id="19" name="Text 17"/>
+          <p:cNvSpPr txBox="1"/>
+          <p:nvPr/>
+        </p:nvSpPr>
+        <p:spPr>
+          <a:xfrm>
+            <a:off x="3840480" y="2048256"/>
+            <a:ext cx="2194560" cy="164592"/>
+          </a:xfrm>
+          <a:prstGeom prst="rect">
+            <a:avLst/>
+          </a:prstGeom>
+          <a:noFill/>
+          <a:ln/>
+        </p:spPr>
+        <p:txBody>
+          <a:bodyPr wrap="square" lIns="0" tIns="0" rIns="0" bIns="0" rtlCol="0" anchor="ctr"/>
+          <a:lstStyle/>
+          <a:p>
+            <a:pPr indent="0" marL="0">
+              <a:buNone/>
+            </a:pPr>
+            <a:r>
+              <a:rPr lang="en-US" sz="800" b="1" spc="80" kern="0" dirty="0">
+                <a:solidFill>
+                  <a:srgbClr val="6B7787"/>
+                </a:solidFill>
+                <a:latin typeface="Arial" pitchFamily="34" charset="0"/>
+                <a:ea typeface="Arial" pitchFamily="34" charset="-122"/>
+                <a:cs typeface="Arial" pitchFamily="34" charset="-120"/>
+              </a:rPr>
+              <a:t>DETERMINISTIC — NO MODEL</a:t>
+            </a:r>
+            <a:endParaRPr lang="en-US" sz="800" dirty="0"/>
+          </a:p>
+        </p:txBody>
+      </p:sp>
+      <p:sp>
+        <p:nvSpPr>
+          <p:cNvPr id="20" name="Shape 18"/>
+          <p:cNvSpPr/>
+          <p:nvPr/>
+        </p:nvSpPr>
+        <p:spPr>
+          <a:xfrm>
+            <a:off x="365760" y="3127248"/>
+            <a:ext cx="11457432" cy="1005840"/>
+          </a:xfrm>
+          <a:prstGeom prst="roundRect">
+            <a:avLst>
+              <a:gd name="adj" fmla="val 3636"/>
+            </a:avLst>
+          </a:prstGeom>
+          <a:solidFill>
+            <a:srgbClr val="F1F5FA"/>
+          </a:solidFill>
+          <a:ln/>
+        </p:spPr>
+      </p:sp>
+      <p:sp>
+        <p:nvSpPr>
+          <p:cNvPr id="21" name="Shape 19"/>
+          <p:cNvSpPr/>
+          <p:nvPr/>
+        </p:nvSpPr>
+        <p:spPr>
+          <a:xfrm>
+            <a:off x="365760" y="3127248"/>
+            <a:ext cx="54864" cy="1005840"/>
+          </a:xfrm>
+          <a:prstGeom prst="rect">
+            <a:avLst/>
+          </a:prstGeom>
+          <a:solidFill>
+            <a:srgbClr val="3B6FA0"/>
+          </a:solidFill>
+          <a:ln/>
+        </p:spPr>
+      </p:sp>
+      <p:sp>
+        <p:nvSpPr>
+          <p:cNvPr id="22" name="Text 20"/>
+          <p:cNvSpPr txBox="1"/>
+          <p:nvPr/>
+        </p:nvSpPr>
+        <p:spPr>
+          <a:xfrm>
+            <a:off x="512064" y="3182112"/>
+            <a:ext cx="2194560" cy="164592"/>
+          </a:xfrm>
+          <a:prstGeom prst="rect">
+            <a:avLst/>
+          </a:prstGeom>
+          <a:noFill/>
+          <a:ln/>
+        </p:spPr>
+        <p:txBody>
+          <a:bodyPr wrap="square" lIns="0" tIns="0" rIns="0" bIns="0" rtlCol="0" anchor="ctr"/>
+          <a:lstStyle/>
+          <a:p>
+            <a:pPr indent="0" marL="0">
+              <a:buNone/>
+            </a:pPr>
+            <a:r>
+              <a:rPr lang="en-US" sz="800" b="1" spc="80" kern="0" dirty="0">
+                <a:solidFill>
+                  <a:srgbClr val="3B6FA0"/>
+                </a:solidFill>
+                <a:latin typeface="Arial" pitchFamily="34" charset="0"/>
+                <a:ea typeface="Arial" pitchFamily="34" charset="-122"/>
+                <a:cs typeface="Arial" pitchFamily="34" charset="-120"/>
+              </a:rPr>
+              <a:t>AI AGENTS</a:t>
+            </a:r>
+            <a:endParaRPr lang="en-US" sz="800" dirty="0"/>
+          </a:p>
+        </p:txBody>
+      </p:sp>
+      <p:sp>
+        <p:nvSpPr>
+          <p:cNvPr id="23" name="Shape 21"/>
+          <p:cNvSpPr/>
+          <p:nvPr/>
+        </p:nvSpPr>
+        <p:spPr>
+          <a:xfrm>
+            <a:off x="365760" y="4261104"/>
+            <a:ext cx="11457432" cy="1005840"/>
+          </a:xfrm>
+          <a:prstGeom prst="roundRect">
+            <a:avLst>
+              <a:gd name="adj" fmla="val 3636"/>
+            </a:avLst>
+          </a:prstGeom>
+          <a:solidFill>
+            <a:srgbClr val="FAF3F6"/>
+          </a:solidFill>
+          <a:ln/>
+        </p:spPr>
+      </p:sp>
+      <p:sp>
+        <p:nvSpPr>
+          <p:cNvPr id="24" name="Shape 22"/>
+          <p:cNvSpPr/>
+          <p:nvPr/>
+        </p:nvSpPr>
+        <p:spPr>
+          <a:xfrm>
+            <a:off x="365760" y="4261104"/>
+            <a:ext cx="54864" cy="1005840"/>
+          </a:xfrm>
+          <a:prstGeom prst="rect">
+            <a:avLst/>
+          </a:prstGeom>
+          <a:solidFill>
+            <a:srgbClr val="7A4A66"/>
+          </a:solidFill>
+          <a:ln/>
+        </p:spPr>
+      </p:sp>
+      <p:sp>
+        <p:nvSpPr>
+          <p:cNvPr id="25" name="Text 23"/>
+          <p:cNvSpPr txBox="1"/>
+          <p:nvPr/>
+        </p:nvSpPr>
+        <p:spPr>
+          <a:xfrm>
+            <a:off x="512064" y="4315968"/>
+            <a:ext cx="2194560" cy="164592"/>
+          </a:xfrm>
+          <a:prstGeom prst="rect">
+            <a:avLst/>
+          </a:prstGeom>
+          <a:noFill/>
+          <a:ln/>
+        </p:spPr>
+        <p:txBody>
+          <a:bodyPr wrap="square" lIns="0" tIns="0" rIns="0" bIns="0" rtlCol="0" anchor="ctr"/>
+          <a:lstStyle/>
+          <a:p>
+            <a:pPr indent="0" marL="0">
+              <a:buNone/>
+            </a:pPr>
+            <a:r>
+              <a:rPr lang="en-US" sz="800" b="1" spc="80" kern="0" dirty="0">
+                <a:solidFill>
+                  <a:srgbClr val="7A4A66"/>
+                </a:solidFill>
+                <a:latin typeface="Arial" pitchFamily="34" charset="0"/>
+                <a:ea typeface="Arial" pitchFamily="34" charset="-122"/>
+                <a:cs typeface="Arial" pitchFamily="34" charset="-120"/>
+              </a:rPr>
+              <a:t>A PERSON DECIDES</a:t>
+            </a:r>
+            <a:endParaRPr lang="en-US" sz="800" dirty="0"/>
+          </a:p>
+        </p:txBody>
+      </p:sp>
+      <p:sp>
+        <p:nvSpPr>
+          <p:cNvPr id="26" name="Shape 24"/>
+          <p:cNvSpPr/>
+          <p:nvPr/>
+        </p:nvSpPr>
+        <p:spPr>
+          <a:xfrm>
+            <a:off x="365760" y="1170432"/>
+            <a:ext cx="1723644" cy="621792"/>
+          </a:xfrm>
+          <a:prstGeom prst="roundRect">
+            <a:avLst>
+              <a:gd name="adj" fmla="val 8824"/>
             </a:avLst>
           </a:prstGeom>
           <a:solidFill>
@@ -12930,14 +13604,14 @@
       </p:sp>
       <p:sp>
         <p:nvSpPr>
-          <p:cNvPr id="7" name="Text 5"/>
-          <p:cNvSpPr txBox="1"/>
-          <p:nvPr/>
-        </p:nvSpPr>
-        <p:spPr>
-          <a:xfrm>
-            <a:off x="457200" y="1865376"/>
-            <a:ext cx="1540764" cy="384048"/>
+          <p:cNvPr id="27" name="Text 25"/>
+          <p:cNvSpPr txBox="1"/>
+          <p:nvPr/>
+        </p:nvSpPr>
+        <p:spPr>
+          <a:xfrm>
+            <a:off x="438912" y="1243584"/>
+            <a:ext cx="1577340" cy="256032"/>
           </a:xfrm>
           <a:prstGeom prst="rect">
             <a:avLst/>
@@ -12951,12 +13625,12 @@
           <a:p>
             <a:pPr algn="ctr" indent="0" marL="0">
               <a:lnSpc>
-                <a:spcPct val="110000"/>
+                <a:spcPct val="100000"/>
               </a:lnSpc>
               <a:buNone/>
             </a:pPr>
             <a:r>
-              <a:rPr lang="en-US" sz="1000" b="1" dirty="0">
+              <a:rPr lang="en-US" sz="960" b="1" dirty="0">
                 <a:solidFill>
                   <a:srgbClr val="00373A"/>
                 </a:solidFill>
@@ -12966,20 +13640,20 @@
               </a:rPr>
               <a:t>Claim arrives</a:t>
             </a:r>
-            <a:endParaRPr lang="en-US" sz="1000" dirty="0"/>
-          </a:p>
-        </p:txBody>
-      </p:sp>
-      <p:sp>
-        <p:nvSpPr>
-          <p:cNvPr id="8" name="Text 6"/>
-          <p:cNvSpPr txBox="1"/>
-          <p:nvPr/>
-        </p:nvSpPr>
-        <p:spPr>
-          <a:xfrm>
-            <a:off x="457200" y="2286000"/>
-            <a:ext cx="1540764" cy="329184"/>
+            <a:endParaRPr lang="en-US" sz="960" dirty="0"/>
+          </a:p>
+        </p:txBody>
+      </p:sp>
+      <p:sp>
+        <p:nvSpPr>
+          <p:cNvPr id="28" name="Text 26"/>
+          <p:cNvSpPr txBox="1"/>
+          <p:nvPr/>
+        </p:nvSpPr>
+        <p:spPr>
+          <a:xfrm>
+            <a:off x="438912" y="1499616"/>
+            <a:ext cx="1577340" cy="274320"/>
           </a:xfrm>
           <a:prstGeom prst="rect">
             <a:avLst/>
@@ -12993,12 +13667,12 @@
           <a:p>
             <a:pPr algn="ctr" indent="0" marL="0">
               <a:lnSpc>
-                <a:spcPct val="110000"/>
+                <a:spcPct val="102000"/>
               </a:lnSpc>
               <a:buNone/>
             </a:pPr>
             <a:r>
-              <a:rPr lang="en-US" sz="780" dirty="0">
+              <a:rPr lang="en-US" sz="740" dirty="0">
                 <a:solidFill>
                   <a:srgbClr val="5B6472"/>
                 </a:solidFill>
@@ -13008,48 +13682,24 @@
               </a:rPr>
               <a:t>EASY · AES mail · e-mail</a:t>
             </a:r>
-            <a:endParaRPr lang="en-US" sz="780" dirty="0"/>
-          </a:p>
-        </p:txBody>
-      </p:sp>
-      <p:sp>
-        <p:nvSpPr>
-          <p:cNvPr id="9" name="Shape 7"/>
+            <a:endParaRPr lang="en-US" sz="740" dirty="0"/>
+          </a:p>
+        </p:txBody>
+      </p:sp>
+      <p:sp>
+        <p:nvSpPr>
+          <p:cNvPr id="29" name="Shape 27"/>
           <p:cNvSpPr/>
           <p:nvPr/>
         </p:nvSpPr>
         <p:spPr>
           <a:xfrm>
-            <a:off x="2116836" y="2194560"/>
-            <a:ext cx="164592" cy="0"/>
-          </a:xfrm>
-          <a:prstGeom prst="line">
-            <a:avLst/>
-          </a:prstGeom>
-          <a:noFill/>
-          <a:ln w="12700">
-            <a:solidFill>
-              <a:srgbClr val="5B7D80"/>
-            </a:solidFill>
-            <a:prstDash val="solid"/>
-            <a:tailEnd type="triangle"/>
-          </a:ln>
-        </p:spPr>
-      </p:sp>
-      <p:sp>
-        <p:nvSpPr>
-          <p:cNvPr id="10" name="Shape 8"/>
-          <p:cNvSpPr/>
-          <p:nvPr/>
-        </p:nvSpPr>
-        <p:spPr>
-          <a:xfrm>
-            <a:off x="2308860" y="1627632"/>
-            <a:ext cx="1723644" cy="1133856"/>
+            <a:off x="2308860" y="3438144"/>
+            <a:ext cx="1723644" cy="621792"/>
           </a:xfrm>
           <a:prstGeom prst="roundRect">
             <a:avLst>
-              <a:gd name="adj" fmla="val 4839"/>
+              <a:gd name="adj" fmla="val 8824"/>
             </a:avLst>
           </a:prstGeom>
           <a:solidFill>
@@ -13065,14 +13715,14 @@
       </p:sp>
       <p:sp>
         <p:nvSpPr>
-          <p:cNvPr id="11" name="Text 9"/>
-          <p:cNvSpPr txBox="1"/>
-          <p:nvPr/>
-        </p:nvSpPr>
-        <p:spPr>
-          <a:xfrm>
-            <a:off x="2400300" y="1865376"/>
-            <a:ext cx="1540764" cy="384048"/>
+          <p:cNvPr id="30" name="Text 28"/>
+          <p:cNvSpPr txBox="1"/>
+          <p:nvPr/>
+        </p:nvSpPr>
+        <p:spPr>
+          <a:xfrm>
+            <a:off x="2382012" y="3511296"/>
+            <a:ext cx="1577340" cy="256032"/>
           </a:xfrm>
           <a:prstGeom prst="rect">
             <a:avLst/>
@@ -13086,12 +13736,12 @@
           <a:p>
             <a:pPr algn="ctr" indent="0" marL="0">
               <a:lnSpc>
-                <a:spcPct val="110000"/>
+                <a:spcPct val="100000"/>
               </a:lnSpc>
               <a:buNone/>
             </a:pPr>
             <a:r>
-              <a:rPr lang="en-US" sz="1000" b="1" dirty="0">
+              <a:rPr lang="en-US" sz="960" b="1" dirty="0">
                 <a:solidFill>
                   <a:srgbClr val="1B2430"/>
                 </a:solidFill>
@@ -13099,22 +13749,22 @@
                 <a:ea typeface="Arial" pitchFamily="34" charset="-122"/>
                 <a:cs typeface="Arial" pitchFamily="34" charset="-120"/>
               </a:rPr>
-              <a:t>Read it</a:t>
-            </a:r>
-            <a:endParaRPr lang="en-US" sz="1000" dirty="0"/>
-          </a:p>
-        </p:txBody>
-      </p:sp>
-      <p:sp>
-        <p:nvSpPr>
-          <p:cNvPr id="12" name="Text 10"/>
-          <p:cNvSpPr txBox="1"/>
-          <p:nvPr/>
-        </p:nvSpPr>
-        <p:spPr>
-          <a:xfrm>
-            <a:off x="2400300" y="2286000"/>
-            <a:ext cx="1540764" cy="329184"/>
+              <a:t>Extraction Agent</a:t>
+            </a:r>
+            <a:endParaRPr lang="en-US" sz="960" dirty="0"/>
+          </a:p>
+        </p:txBody>
+      </p:sp>
+      <p:sp>
+        <p:nvSpPr>
+          <p:cNvPr id="31" name="Text 29"/>
+          <p:cNvSpPr txBox="1"/>
+          <p:nvPr/>
+        </p:nvSpPr>
+        <p:spPr>
+          <a:xfrm>
+            <a:off x="2382012" y="3767328"/>
+            <a:ext cx="1577340" cy="274320"/>
           </a:xfrm>
           <a:prstGeom prst="rect">
             <a:avLst/>
@@ -13128,12 +13778,12 @@
           <a:p>
             <a:pPr algn="ctr" indent="0" marL="0">
               <a:lnSpc>
-                <a:spcPct val="110000"/>
+                <a:spcPct val="102000"/>
               </a:lnSpc>
               <a:buNone/>
             </a:pPr>
             <a:r>
-              <a:rPr lang="en-US" sz="780" dirty="0">
+              <a:rPr lang="en-US" sz="740" dirty="0">
                 <a:solidFill>
                   <a:srgbClr val="5B6472"/>
                 </a:solidFill>
@@ -13141,50 +13791,26 @@
                 <a:ea typeface="Arial" pitchFamily="34" charset="-122"/>
                 <a:cs typeface="Arial" pitchFamily="34" charset="-120"/>
               </a:rPr>
-              <a:t>Extraction agent</a:t>
-            </a:r>
-            <a:endParaRPr lang="en-US" sz="780" dirty="0"/>
-          </a:p>
-        </p:txBody>
-      </p:sp>
-      <p:sp>
-        <p:nvSpPr>
-          <p:cNvPr id="13" name="Shape 11"/>
+              <a:t>any format → structured fields</a:t>
+            </a:r>
+            <a:endParaRPr lang="en-US" sz="740" dirty="0"/>
+          </a:p>
+        </p:txBody>
+      </p:sp>
+      <p:sp>
+        <p:nvSpPr>
+          <p:cNvPr id="32" name="Shape 30"/>
           <p:cNvSpPr/>
           <p:nvPr/>
         </p:nvSpPr>
         <p:spPr>
           <a:xfrm>
-            <a:off x="4059936" y="2194560"/>
-            <a:ext cx="164592" cy="0"/>
-          </a:xfrm>
-          <a:prstGeom prst="line">
-            <a:avLst/>
-          </a:prstGeom>
-          <a:noFill/>
-          <a:ln w="12700">
-            <a:solidFill>
-              <a:srgbClr val="5B7D80"/>
-            </a:solidFill>
-            <a:prstDash val="solid"/>
-            <a:tailEnd type="triangle"/>
-          </a:ln>
-        </p:spPr>
-      </p:sp>
-      <p:sp>
-        <p:nvSpPr>
-          <p:cNvPr id="14" name="Shape 12"/>
-          <p:cNvSpPr/>
-          <p:nvPr/>
-        </p:nvSpPr>
-        <p:spPr>
-          <a:xfrm>
-            <a:off x="4251960" y="1627632"/>
-            <a:ext cx="1723644" cy="1133856"/>
+            <a:off x="4251960" y="3438144"/>
+            <a:ext cx="1723644" cy="621792"/>
           </a:xfrm>
           <a:prstGeom prst="roundRect">
             <a:avLst>
-              <a:gd name="adj" fmla="val 4839"/>
+              <a:gd name="adj" fmla="val 8824"/>
             </a:avLst>
           </a:prstGeom>
           <a:solidFill>
@@ -13200,14 +13826,14 @@
       </p:sp>
       <p:sp>
         <p:nvSpPr>
-          <p:cNvPr id="15" name="Text 13"/>
-          <p:cNvSpPr txBox="1"/>
-          <p:nvPr/>
-        </p:nvSpPr>
-        <p:spPr>
-          <a:xfrm>
-            <a:off x="4343400" y="1865376"/>
-            <a:ext cx="1540764" cy="384048"/>
+          <p:cNvPr id="33" name="Text 31"/>
+          <p:cNvSpPr txBox="1"/>
+          <p:nvPr/>
+        </p:nvSpPr>
+        <p:spPr>
+          <a:xfrm>
+            <a:off x="4325112" y="3511296"/>
+            <a:ext cx="1577340" cy="256032"/>
           </a:xfrm>
           <a:prstGeom prst="rect">
             <a:avLst/>
@@ -13221,12 +13847,12 @@
           <a:p>
             <a:pPr algn="ctr" indent="0" marL="0">
               <a:lnSpc>
-                <a:spcPct val="110000"/>
+                <a:spcPct val="100000"/>
               </a:lnSpc>
               <a:buNone/>
             </a:pPr>
             <a:r>
-              <a:rPr lang="en-US" sz="1000" b="1" dirty="0">
+              <a:rPr lang="en-US" sz="960" b="1" dirty="0">
                 <a:solidFill>
                   <a:srgbClr val="1B2430"/>
                 </a:solidFill>
@@ -13234,22 +13860,22 @@
                 <a:ea typeface="Arial" pitchFamily="34" charset="-122"/>
                 <a:cs typeface="Arial" pitchFamily="34" charset="-120"/>
               </a:rPr>
-              <a:t>Sort it</a:t>
-            </a:r>
-            <a:endParaRPr lang="en-US" sz="1000" dirty="0"/>
-          </a:p>
-        </p:txBody>
-      </p:sp>
-      <p:sp>
-        <p:nvSpPr>
-          <p:cNvPr id="16" name="Text 14"/>
-          <p:cNvSpPr txBox="1"/>
-          <p:nvPr/>
-        </p:nvSpPr>
-        <p:spPr>
-          <a:xfrm>
-            <a:off x="4343400" y="2286000"/>
-            <a:ext cx="1540764" cy="329184"/>
+              <a:t>Classification Agent</a:t>
+            </a:r>
+            <a:endParaRPr lang="en-US" sz="960" dirty="0"/>
+          </a:p>
+        </p:txBody>
+      </p:sp>
+      <p:sp>
+        <p:nvSpPr>
+          <p:cNvPr id="34" name="Text 32"/>
+          <p:cNvSpPr txBox="1"/>
+          <p:nvPr/>
+        </p:nvSpPr>
+        <p:spPr>
+          <a:xfrm>
+            <a:off x="4325112" y="3767328"/>
+            <a:ext cx="1577340" cy="274320"/>
           </a:xfrm>
           <a:prstGeom prst="rect">
             <a:avLst/>
@@ -13263,12 +13889,12 @@
           <a:p>
             <a:pPr algn="ctr" indent="0" marL="0">
               <a:lnSpc>
-                <a:spcPct val="110000"/>
+                <a:spcPct val="102000"/>
               </a:lnSpc>
               <a:buNone/>
             </a:pPr>
             <a:r>
-              <a:rPr lang="en-US" sz="780" dirty="0">
+              <a:rPr lang="en-US" sz="740" dirty="0">
                 <a:solidFill>
                   <a:srgbClr val="5B6472"/>
                 </a:solidFill>
@@ -13276,50 +13902,26 @@
                 <a:ea typeface="Arial" pitchFamily="34" charset="-122"/>
                 <a:cs typeface="Arial" pitchFamily="34" charset="-120"/>
               </a:rPr>
-              <a:t>Classification agent</a:t>
-            </a:r>
-            <a:endParaRPr lang="en-US" sz="780" dirty="0"/>
-          </a:p>
-        </p:txBody>
-      </p:sp>
-      <p:sp>
-        <p:nvSpPr>
-          <p:cNvPr id="17" name="Shape 15"/>
+              <a:t>claim type + confidence score</a:t>
+            </a:r>
+            <a:endParaRPr lang="en-US" sz="740" dirty="0"/>
+          </a:p>
+        </p:txBody>
+      </p:sp>
+      <p:sp>
+        <p:nvSpPr>
+          <p:cNvPr id="35" name="Shape 33"/>
           <p:cNvSpPr/>
           <p:nvPr/>
         </p:nvSpPr>
         <p:spPr>
           <a:xfrm>
-            <a:off x="6003036" y="2194560"/>
-            <a:ext cx="164592" cy="0"/>
-          </a:xfrm>
-          <a:prstGeom prst="line">
-            <a:avLst/>
-          </a:prstGeom>
-          <a:noFill/>
-          <a:ln w="12700">
-            <a:solidFill>
-              <a:srgbClr val="5B7D80"/>
-            </a:solidFill>
-            <a:prstDash val="solid"/>
-            <a:tailEnd type="triangle"/>
-          </a:ln>
-        </p:spPr>
-      </p:sp>
-      <p:sp>
-        <p:nvSpPr>
-          <p:cNvPr id="18" name="Shape 16"/>
-          <p:cNvSpPr/>
-          <p:nvPr/>
-        </p:nvSpPr>
-        <p:spPr>
-          <a:xfrm>
-            <a:off x="6195060" y="1627632"/>
-            <a:ext cx="1723644" cy="1133856"/>
+            <a:off x="6195060" y="2304288"/>
+            <a:ext cx="1723644" cy="621792"/>
           </a:xfrm>
           <a:prstGeom prst="roundRect">
             <a:avLst>
-              <a:gd name="adj" fmla="val 4839"/>
+              <a:gd name="adj" fmla="val 8824"/>
             </a:avLst>
           </a:prstGeom>
           <a:solidFill>
@@ -13335,14 +13937,14 @@
       </p:sp>
       <p:sp>
         <p:nvSpPr>
-          <p:cNvPr id="19" name="Text 17"/>
-          <p:cNvSpPr txBox="1"/>
-          <p:nvPr/>
-        </p:nvSpPr>
-        <p:spPr>
-          <a:xfrm>
-            <a:off x="6286500" y="1865376"/>
-            <a:ext cx="1540764" cy="384048"/>
+          <p:cNvPr id="36" name="Text 34"/>
+          <p:cNvSpPr txBox="1"/>
+          <p:nvPr/>
+        </p:nvSpPr>
+        <p:spPr>
+          <a:xfrm>
+            <a:off x="6268212" y="2377440"/>
+            <a:ext cx="1577340" cy="256032"/>
           </a:xfrm>
           <a:prstGeom prst="rect">
             <a:avLst/>
@@ -13356,12 +13958,12 @@
           <a:p>
             <a:pPr algn="ctr" indent="0" marL="0">
               <a:lnSpc>
-                <a:spcPct val="110000"/>
+                <a:spcPct val="100000"/>
               </a:lnSpc>
               <a:buNone/>
             </a:pPr>
             <a:r>
-              <a:rPr lang="en-US" sz="1000" b="1" dirty="0">
+              <a:rPr lang="en-US" sz="960" b="1" dirty="0">
                 <a:solidFill>
                   <a:srgbClr val="2A3340"/>
                 </a:solidFill>
@@ -13369,22 +13971,22 @@
                 <a:ea typeface="Arial" pitchFamily="34" charset="-122"/>
                 <a:cs typeface="Arial" pitchFamily="34" charset="-120"/>
               </a:rPr>
-              <a:t>Check it</a:t>
-            </a:r>
-            <a:endParaRPr lang="en-US" sz="1000" dirty="0"/>
-          </a:p>
-        </p:txBody>
-      </p:sp>
-      <p:sp>
-        <p:nvSpPr>
-          <p:cNvPr id="20" name="Text 18"/>
-          <p:cNvSpPr txBox="1"/>
-          <p:nvPr/>
-        </p:nvSpPr>
-        <p:spPr>
-          <a:xfrm>
-            <a:off x="6286500" y="2286000"/>
-            <a:ext cx="1540764" cy="329184"/>
+              <a:t>Validation</a:t>
+            </a:r>
+            <a:endParaRPr lang="en-US" sz="960" dirty="0"/>
+          </a:p>
+        </p:txBody>
+      </p:sp>
+      <p:sp>
+        <p:nvSpPr>
+          <p:cNvPr id="37" name="Text 35"/>
+          <p:cNvSpPr txBox="1"/>
+          <p:nvPr/>
+        </p:nvSpPr>
+        <p:spPr>
+          <a:xfrm>
+            <a:off x="6268212" y="2633472"/>
+            <a:ext cx="1577340" cy="274320"/>
           </a:xfrm>
           <a:prstGeom prst="rect">
             <a:avLst/>
@@ -13398,12 +14000,12 @@
           <a:p>
             <a:pPr algn="ctr" indent="0" marL="0">
               <a:lnSpc>
-                <a:spcPct val="110000"/>
+                <a:spcPct val="102000"/>
               </a:lnSpc>
               <a:buNone/>
             </a:pPr>
             <a:r>
-              <a:rPr lang="en-US" sz="780" dirty="0">
+              <a:rPr lang="en-US" sz="740" dirty="0">
                 <a:solidFill>
                   <a:srgbClr val="5B6472"/>
                 </a:solidFill>
@@ -13411,50 +14013,137 @@
                 <a:ea typeface="Arial" pitchFamily="34" charset="-122"/>
                 <a:cs typeface="Arial" pitchFamily="34" charset="-120"/>
               </a:rPr>
-              <a:t>Rules only — no model</a:t>
-            </a:r>
-            <a:endParaRPr lang="en-US" sz="780" dirty="0"/>
-          </a:p>
-        </p:txBody>
-      </p:sp>
-      <p:sp>
-        <p:nvSpPr>
-          <p:cNvPr id="21" name="Shape 19"/>
+              <a:t>CPR · policy · duplicates</a:t>
+            </a:r>
+            <a:endParaRPr lang="en-US" sz="740" dirty="0"/>
+          </a:p>
+        </p:txBody>
+      </p:sp>
+      <p:sp>
+        <p:nvSpPr>
+          <p:cNvPr id="38" name="Shape 36"/>
           <p:cNvSpPr/>
           <p:nvPr/>
         </p:nvSpPr>
         <p:spPr>
           <a:xfrm>
-            <a:off x="7946136" y="2194560"/>
-            <a:ext cx="164592" cy="0"/>
-          </a:xfrm>
-          <a:prstGeom prst="line">
-            <a:avLst/>
-          </a:prstGeom>
-          <a:noFill/>
-          <a:ln w="12700">
-            <a:solidFill>
-              <a:srgbClr val="5B7D80"/>
-            </a:solidFill>
-            <a:prstDash val="solid"/>
-            <a:tailEnd type="triangle"/>
-          </a:ln>
-        </p:spPr>
-      </p:sp>
-      <p:sp>
-        <p:nvSpPr>
-          <p:cNvPr id="22" name="Shape 20"/>
-          <p:cNvSpPr/>
-          <p:nvPr/>
-        </p:nvSpPr>
-        <p:spPr>
-          <a:xfrm>
-            <a:off x="8138160" y="1627632"/>
-            <a:ext cx="1723644" cy="1133856"/>
+            <a:off x="6195060" y="3438144"/>
+            <a:ext cx="1723644" cy="621792"/>
           </a:xfrm>
           <a:prstGeom prst="roundRect">
             <a:avLst>
-              <a:gd name="adj" fmla="val 4839"/>
+              <a:gd name="adj" fmla="val 8824"/>
+            </a:avLst>
+          </a:prstGeom>
+          <a:solidFill>
+            <a:srgbClr val="FCEFD6"/>
+          </a:solidFill>
+          <a:ln w="13970">
+            <a:solidFill>
+              <a:srgbClr val="EF9F27"/>
+            </a:solidFill>
+            <a:prstDash val="dash"/>
+          </a:ln>
+        </p:spPr>
+      </p:sp>
+      <p:sp>
+        <p:nvSpPr>
+          <p:cNvPr id="39" name="Text 37"/>
+          <p:cNvSpPr txBox="1"/>
+          <p:nvPr/>
+        </p:nvSpPr>
+        <p:spPr>
+          <a:xfrm>
+            <a:off x="6268212" y="3511296"/>
+            <a:ext cx="1577340" cy="256032"/>
+          </a:xfrm>
+          <a:prstGeom prst="rect">
+            <a:avLst/>
+          </a:prstGeom>
+          <a:noFill/>
+          <a:ln/>
+        </p:spPr>
+        <p:txBody>
+          <a:bodyPr wrap="square" lIns="0" tIns="0" rIns="0" bIns="0" rtlCol="0" anchor="ctr"/>
+          <a:lstStyle/>
+          <a:p>
+            <a:pPr algn="ctr" indent="0" marL="0">
+              <a:lnSpc>
+                <a:spcPct val="100000"/>
+              </a:lnSpc>
+              <a:buNone/>
+            </a:pPr>
+            <a:r>
+              <a:rPr lang="en-US" sz="960" b="1" dirty="0">
+                <a:solidFill>
+                  <a:srgbClr val="6B4A10"/>
+                </a:solidFill>
+                <a:latin typeface="Arial" pitchFamily="34" charset="0"/>
+                <a:ea typeface="Arial" pitchFamily="34" charset="-122"/>
+                <a:cs typeface="Arial" pitchFamily="34" charset="-120"/>
+              </a:rPr>
+              <a:t>Exception Research</a:t>
+            </a:r>
+            <a:endParaRPr lang="en-US" sz="960" dirty="0"/>
+          </a:p>
+        </p:txBody>
+      </p:sp>
+      <p:sp>
+        <p:nvSpPr>
+          <p:cNvPr id="40" name="Text 38"/>
+          <p:cNvSpPr txBox="1"/>
+          <p:nvPr/>
+        </p:nvSpPr>
+        <p:spPr>
+          <a:xfrm>
+            <a:off x="6268212" y="3767328"/>
+            <a:ext cx="1577340" cy="274320"/>
+          </a:xfrm>
+          <a:prstGeom prst="rect">
+            <a:avLst/>
+          </a:prstGeom>
+          <a:noFill/>
+          <a:ln/>
+        </p:spPr>
+        <p:txBody>
+          <a:bodyPr wrap="square" lIns="0" tIns="0" rIns="0" bIns="0" rtlCol="0" anchor="ctr"/>
+          <a:lstStyle/>
+          <a:p>
+            <a:pPr algn="ctr" indent="0" marL="0">
+              <a:lnSpc>
+                <a:spcPct val="102000"/>
+              </a:lnSpc>
+              <a:buNone/>
+            </a:pPr>
+            <a:r>
+              <a:rPr lang="en-US" sz="740" dirty="0">
+                <a:solidFill>
+                  <a:srgbClr val="5B6472"/>
+                </a:solidFill>
+                <a:latin typeface="Arial" pitchFamily="34" charset="0"/>
+                <a:ea typeface="Arial" pitchFamily="34" charset="-122"/>
+                <a:cs typeface="Arial" pitchFamily="34" charset="-120"/>
+              </a:rPr>
+              <a:t>gathers evidence · ~20% of claims</a:t>
+            </a:r>
+            <a:endParaRPr lang="en-US" sz="740" dirty="0"/>
+          </a:p>
+        </p:txBody>
+      </p:sp>
+      <p:sp>
+        <p:nvSpPr>
+          <p:cNvPr id="41" name="Shape 39"/>
+          <p:cNvSpPr/>
+          <p:nvPr/>
+        </p:nvSpPr>
+        <p:spPr>
+          <a:xfrm>
+            <a:off x="8138160" y="3438144"/>
+            <a:ext cx="1723644" cy="621792"/>
+          </a:xfrm>
+          <a:prstGeom prst="roundRect">
+            <a:avLst>
+              <a:gd name="adj" fmla="val 8824"/>
             </a:avLst>
           </a:prstGeom>
           <a:solidFill>
@@ -13470,14 +14159,14 @@
       </p:sp>
       <p:sp>
         <p:nvSpPr>
-          <p:cNvPr id="23" name="Text 21"/>
-          <p:cNvSpPr txBox="1"/>
-          <p:nvPr/>
-        </p:nvSpPr>
-        <p:spPr>
-          <a:xfrm>
-            <a:off x="8229600" y="1865376"/>
-            <a:ext cx="1540764" cy="384048"/>
+          <p:cNvPr id="42" name="Text 40"/>
+          <p:cNvSpPr txBox="1"/>
+          <p:nvPr/>
+        </p:nvSpPr>
+        <p:spPr>
+          <a:xfrm>
+            <a:off x="8211312" y="3511296"/>
+            <a:ext cx="1577340" cy="256032"/>
           </a:xfrm>
           <a:prstGeom prst="rect">
             <a:avLst/>
@@ -13491,12 +14180,12 @@
           <a:p>
             <a:pPr algn="ctr" indent="0" marL="0">
               <a:lnSpc>
-                <a:spcPct val="110000"/>
+                <a:spcPct val="100000"/>
               </a:lnSpc>
               <a:buNone/>
             </a:pPr>
             <a:r>
-              <a:rPr lang="en-US" sz="1000" b="1" dirty="0">
+              <a:rPr lang="en-US" sz="960" b="1" dirty="0">
                 <a:solidFill>
                   <a:srgbClr val="1B2430"/>
                 </a:solidFill>
@@ -13504,22 +14193,22 @@
                 <a:ea typeface="Arial" pitchFamily="34" charset="-122"/>
                 <a:cs typeface="Arial" pitchFamily="34" charset="-120"/>
               </a:rPr>
-              <a:t>Draft the outcome</a:t>
-            </a:r>
-            <a:endParaRPr lang="en-US" sz="1000" dirty="0"/>
-          </a:p>
-        </p:txBody>
-      </p:sp>
-      <p:sp>
-        <p:nvSpPr>
-          <p:cNvPr id="24" name="Text 22"/>
-          <p:cNvSpPr txBox="1"/>
-          <p:nvPr/>
-        </p:nvSpPr>
-        <p:spPr>
-          <a:xfrm>
-            <a:off x="8229600" y="2286000"/>
-            <a:ext cx="1540764" cy="329184"/>
+              <a:t>Drafting Agent</a:t>
+            </a:r>
+            <a:endParaRPr lang="en-US" sz="960" dirty="0"/>
+          </a:p>
+        </p:txBody>
+      </p:sp>
+      <p:sp>
+        <p:nvSpPr>
+          <p:cNvPr id="43" name="Text 41"/>
+          <p:cNvSpPr txBox="1"/>
+          <p:nvPr/>
+        </p:nvSpPr>
+        <p:spPr>
+          <a:xfrm>
+            <a:off x="8211312" y="3767328"/>
+            <a:ext cx="1577340" cy="274320"/>
           </a:xfrm>
           <a:prstGeom prst="rect">
             <a:avLst/>
@@ -13533,12 +14222,12 @@
           <a:p>
             <a:pPr algn="ctr" indent="0" marL="0">
               <a:lnSpc>
-                <a:spcPct val="110000"/>
+                <a:spcPct val="102000"/>
               </a:lnSpc>
               <a:buNone/>
             </a:pPr>
             <a:r>
-              <a:rPr lang="en-US" sz="780" dirty="0">
+              <a:rPr lang="en-US" sz="740" dirty="0">
                 <a:solidFill>
                   <a:srgbClr val="5B6472"/>
                 </a:solidFill>
@@ -13546,50 +14235,26 @@
                 <a:ea typeface="Arial" pitchFamily="34" charset="-122"/>
                 <a:cs typeface="Arial" pitchFamily="34" charset="-120"/>
               </a:rPr>
-              <a:t>Drafting agent</a:t>
-            </a:r>
-            <a:endParaRPr lang="en-US" sz="780" dirty="0"/>
-          </a:p>
-        </p:txBody>
-      </p:sp>
-      <p:sp>
-        <p:nvSpPr>
-          <p:cNvPr id="25" name="Shape 23"/>
+              <a:t>writes the letter, cites its reasoning</a:t>
+            </a:r>
+            <a:endParaRPr lang="en-US" sz="740" dirty="0"/>
+          </a:p>
+        </p:txBody>
+      </p:sp>
+      <p:sp>
+        <p:nvSpPr>
+          <p:cNvPr id="44" name="Shape 42"/>
           <p:cNvSpPr/>
           <p:nvPr/>
         </p:nvSpPr>
         <p:spPr>
           <a:xfrm>
-            <a:off x="9889236" y="2194560"/>
-            <a:ext cx="164592" cy="0"/>
-          </a:xfrm>
-          <a:prstGeom prst="line">
-            <a:avLst/>
-          </a:prstGeom>
-          <a:noFill/>
-          <a:ln w="12700">
-            <a:solidFill>
-              <a:srgbClr val="5B7D80"/>
-            </a:solidFill>
-            <a:prstDash val="solid"/>
-            <a:tailEnd type="triangle"/>
-          </a:ln>
-        </p:spPr>
-      </p:sp>
-      <p:sp>
-        <p:nvSpPr>
-          <p:cNvPr id="26" name="Shape 24"/>
-          <p:cNvSpPr/>
-          <p:nvPr/>
-        </p:nvSpPr>
-        <p:spPr>
-          <a:xfrm>
-            <a:off x="10081260" y="1627632"/>
-            <a:ext cx="1723644" cy="1133856"/>
+            <a:off x="10081260" y="4572000"/>
+            <a:ext cx="1723644" cy="621792"/>
           </a:xfrm>
           <a:prstGeom prst="roundRect">
             <a:avLst>
-              <a:gd name="adj" fmla="val 4839"/>
+              <a:gd name="adj" fmla="val 8824"/>
             </a:avLst>
           </a:prstGeom>
           <a:solidFill>
@@ -13605,14 +14270,14 @@
       </p:sp>
       <p:sp>
         <p:nvSpPr>
-          <p:cNvPr id="27" name="Text 25"/>
-          <p:cNvSpPr txBox="1"/>
-          <p:nvPr/>
-        </p:nvSpPr>
-        <p:spPr>
-          <a:xfrm>
-            <a:off x="10172700" y="1865376"/>
-            <a:ext cx="1540764" cy="384048"/>
+          <p:cNvPr id="45" name="Text 43"/>
+          <p:cNvSpPr txBox="1"/>
+          <p:nvPr/>
+        </p:nvSpPr>
+        <p:spPr>
+          <a:xfrm>
+            <a:off x="10154412" y="4645152"/>
+            <a:ext cx="1577340" cy="256032"/>
           </a:xfrm>
           <a:prstGeom prst="rect">
             <a:avLst/>
@@ -13626,12 +14291,12 @@
           <a:p>
             <a:pPr algn="ctr" indent="0" marL="0">
               <a:lnSpc>
-                <a:spcPct val="110000"/>
+                <a:spcPct val="100000"/>
               </a:lnSpc>
               <a:buNone/>
             </a:pPr>
             <a:r>
-              <a:rPr lang="en-US" sz="1000" b="1" dirty="0">
+              <a:rPr lang="en-US" sz="960" b="1" dirty="0">
                 <a:solidFill>
                   <a:srgbClr val="4A2C3B"/>
                 </a:solidFill>
@@ -13639,22 +14304,22 @@
                 <a:ea typeface="Arial" pitchFamily="34" charset="-122"/>
                 <a:cs typeface="Arial" pitchFamily="34" charset="-120"/>
               </a:rPr>
-              <a:t>A person approves</a:t>
-            </a:r>
-            <a:endParaRPr lang="en-US" sz="1000" dirty="0"/>
-          </a:p>
-        </p:txBody>
-      </p:sp>
-      <p:sp>
-        <p:nvSpPr>
-          <p:cNvPr id="28" name="Text 26"/>
-          <p:cNvSpPr txBox="1"/>
-          <p:nvPr/>
-        </p:nvSpPr>
-        <p:spPr>
-          <a:xfrm>
-            <a:off x="10172700" y="2286000"/>
-            <a:ext cx="1540764" cy="329184"/>
+              <a:t>Handler approves</a:t>
+            </a:r>
+            <a:endParaRPr lang="en-US" sz="960" dirty="0"/>
+          </a:p>
+        </p:txBody>
+      </p:sp>
+      <p:sp>
+        <p:nvSpPr>
+          <p:cNvPr id="46" name="Text 44"/>
+          <p:cNvSpPr txBox="1"/>
+          <p:nvPr/>
+        </p:nvSpPr>
+        <p:spPr>
+          <a:xfrm>
+            <a:off x="10154412" y="4901184"/>
+            <a:ext cx="1577340" cy="274320"/>
           </a:xfrm>
           <a:prstGeom prst="rect">
             <a:avLst/>
@@ -13668,12 +14333,12 @@
           <a:p>
             <a:pPr algn="ctr" indent="0" marL="0">
               <a:lnSpc>
-                <a:spcPct val="110000"/>
+                <a:spcPct val="102000"/>
               </a:lnSpc>
               <a:buNone/>
             </a:pPr>
             <a:r>
-              <a:rPr lang="en-US" sz="780" dirty="0">
+              <a:rPr lang="en-US" sz="740" dirty="0">
                 <a:solidFill>
                   <a:srgbClr val="5B6472"/>
                 </a:solidFill>
@@ -13681,671 +14346,9 @@
                 <a:ea typeface="Arial" pitchFamily="34" charset="-122"/>
                 <a:cs typeface="Arial" pitchFamily="34" charset="-120"/>
               </a:rPr>
-              <a:t>then written to IDB</a:t>
-            </a:r>
-            <a:endParaRPr lang="en-US" sz="780" dirty="0"/>
-          </a:p>
-        </p:txBody>
-      </p:sp>
-      <p:sp>
-        <p:nvSpPr>
-          <p:cNvPr id="29" name="Shape 27"/>
-          <p:cNvSpPr/>
-          <p:nvPr/>
-        </p:nvSpPr>
-        <p:spPr>
-          <a:xfrm>
-            <a:off x="365760" y="2852928"/>
-            <a:ext cx="1723644" cy="347472"/>
-          </a:xfrm>
-          <a:prstGeom prst="roundRect">
-            <a:avLst>
-              <a:gd name="adj" fmla="val 13158"/>
-            </a:avLst>
-          </a:prstGeom>
-          <a:solidFill>
-            <a:srgbClr val="FDF3E3"/>
-          </a:solidFill>
-          <a:ln w="12700">
-            <a:solidFill>
-              <a:srgbClr val="D97706"/>
-            </a:solidFill>
-            <a:prstDash val="solid"/>
-          </a:ln>
-        </p:spPr>
-      </p:sp>
-      <p:sp>
-        <p:nvSpPr>
-          <p:cNvPr id="30" name="Text 28"/>
-          <p:cNvSpPr txBox="1"/>
-          <p:nvPr/>
-        </p:nvSpPr>
-        <p:spPr>
-          <a:xfrm>
-            <a:off x="420624" y="2852928"/>
-            <a:ext cx="1613916" cy="347472"/>
-          </a:xfrm>
-          <a:prstGeom prst="rect">
-            <a:avLst/>
-          </a:prstGeom>
-          <a:noFill/>
-          <a:ln/>
-        </p:spPr>
-        <p:txBody>
-          <a:bodyPr wrap="square" lIns="0" tIns="0" rIns="0" bIns="0" rtlCol="0" anchor="ctr"/>
-          <a:lstStyle/>
-          <a:p>
-            <a:pPr algn="ctr" indent="0" marL="0">
-              <a:lnSpc>
-                <a:spcPct val="105000"/>
-              </a:lnSpc>
-              <a:buNone/>
-            </a:pPr>
-            <a:r>
-              <a:rPr lang="en-US" sz="740" b="1" dirty="0">
-                <a:solidFill>
-                  <a:srgbClr val="9A5A0A"/>
-                </a:solidFill>
-                <a:latin typeface="Arial" pitchFamily="34" charset="0"/>
-                <a:ea typeface="Arial" pitchFamily="34" charset="-122"/>
-                <a:cs typeface="Arial" pitchFamily="34" charset="-120"/>
-              </a:rPr>
-              <a:t>Service Bus</a:t>
+              <a:t>before anything sends</a:t>
             </a:r>
             <a:endParaRPr lang="en-US" sz="740" dirty="0"/>
-          </a:p>
-          <a:p>
-            <a:pPr algn="ctr" indent="0" marL="0">
-              <a:lnSpc>
-                <a:spcPct val="105000"/>
-              </a:lnSpc>
-              <a:buNone/>
-            </a:pPr>
-            <a:r>
-              <a:rPr lang="en-US" sz="740" b="1" dirty="0">
-                <a:solidFill>
-                  <a:srgbClr val="9A5A0A"/>
-                </a:solidFill>
-                <a:latin typeface="Arial" pitchFamily="34" charset="0"/>
-                <a:ea typeface="Arial" pitchFamily="34" charset="-122"/>
-                <a:cs typeface="Arial" pitchFamily="34" charset="-120"/>
-              </a:rPr>
-              <a:t>failures park, nothing is lost</a:t>
-            </a:r>
-            <a:endParaRPr lang="en-US" sz="740" dirty="0"/>
-          </a:p>
-        </p:txBody>
-      </p:sp>
-      <p:sp>
-        <p:nvSpPr>
-          <p:cNvPr id="31" name="Shape 29"/>
-          <p:cNvSpPr/>
-          <p:nvPr/>
-        </p:nvSpPr>
-        <p:spPr>
-          <a:xfrm>
-            <a:off x="2308860" y="2852928"/>
-            <a:ext cx="9496044" cy="347472"/>
-          </a:xfrm>
-          <a:prstGeom prst="roundRect">
-            <a:avLst>
-              <a:gd name="adj" fmla="val 13158"/>
-            </a:avLst>
-          </a:prstGeom>
-          <a:solidFill>
-            <a:srgbClr val="ECEFF3"/>
-          </a:solidFill>
-          <a:ln w="12700">
-            <a:solidFill>
-              <a:srgbClr val="6B7787"/>
-            </a:solidFill>
-            <a:prstDash val="solid"/>
-          </a:ln>
-        </p:spPr>
-      </p:sp>
-      <p:sp>
-        <p:nvSpPr>
-          <p:cNvPr id="32" name="Text 30"/>
-          <p:cNvSpPr txBox="1"/>
-          <p:nvPr/>
-        </p:nvSpPr>
-        <p:spPr>
-          <a:xfrm>
-            <a:off x="2308860" y="2852928"/>
-            <a:ext cx="9496044" cy="347472"/>
-          </a:xfrm>
-          <a:prstGeom prst="rect">
-            <a:avLst/>
-          </a:prstGeom>
-          <a:noFill/>
-          <a:ln/>
-        </p:spPr>
-        <p:txBody>
-          <a:bodyPr wrap="square" lIns="0" tIns="0" rIns="0" bIns="0" rtlCol="0" anchor="ctr"/>
-          <a:lstStyle/>
-          <a:p>
-            <a:pPr algn="ctr" indent="0" marL="0">
-              <a:buNone/>
-            </a:pPr>
-            <a:r>
-              <a:rPr lang="en-US" sz="800" b="1" dirty="0">
-                <a:solidFill>
-                  <a:srgbClr val="2A3340"/>
-                </a:solidFill>
-                <a:latin typeface="Arial" pitchFamily="34" charset="0"/>
-                <a:ea typeface="Arial" pitchFamily="34" charset="-122"/>
-                <a:cs typeface="Arial" pitchFamily="34" charset="-120"/>
-              </a:rPr>
-              <a:t>PostgreSQL  ·  graph checkpoint and audit log in one place — every decision, its inputs and its confidence</a:t>
-            </a:r>
-            <a:endParaRPr lang="en-US" sz="800" dirty="0"/>
-          </a:p>
-        </p:txBody>
-      </p:sp>
-      <p:sp>
-        <p:nvSpPr>
-          <p:cNvPr id="33" name="Text 31"/>
-          <p:cNvSpPr txBox="1"/>
-          <p:nvPr/>
-        </p:nvSpPr>
-        <p:spPr>
-          <a:xfrm>
-            <a:off x="365760" y="3291840"/>
-            <a:ext cx="5486400" cy="182880"/>
-          </a:xfrm>
-          <a:prstGeom prst="rect">
-            <a:avLst/>
-          </a:prstGeom>
-          <a:noFill/>
-          <a:ln/>
-        </p:spPr>
-        <p:txBody>
-          <a:bodyPr wrap="square" lIns="0" tIns="0" rIns="0" bIns="0" rtlCol="0" anchor="ctr"/>
-          <a:lstStyle/>
-          <a:p>
-            <a:pPr indent="0" marL="0">
-              <a:buNone/>
-            </a:pPr>
-            <a:r>
-              <a:rPr lang="en-US" sz="900" b="1" spc="80" kern="0" dirty="0">
-                <a:solidFill>
-                  <a:srgbClr val="4338CA"/>
-                </a:solidFill>
-                <a:latin typeface="Arial" pitchFamily="34" charset="0"/>
-                <a:ea typeface="Arial" pitchFamily="34" charset="-122"/>
-                <a:cs typeface="Arial" pitchFamily="34" charset="-120"/>
-              </a:rPr>
-              <a:t>OPERATING MODEL — WHO OWNS WHAT</a:t>
-            </a:r>
-            <a:endParaRPr lang="en-US" sz="900" dirty="0"/>
-          </a:p>
-        </p:txBody>
-      </p:sp>
-      <p:sp>
-        <p:nvSpPr>
-          <p:cNvPr id="34" name="Shape 32"/>
-          <p:cNvSpPr/>
-          <p:nvPr/>
-        </p:nvSpPr>
-        <p:spPr>
-          <a:xfrm>
-            <a:off x="365760" y="3493008"/>
-            <a:ext cx="3697224" cy="384048"/>
-          </a:xfrm>
-          <a:prstGeom prst="roundRect">
-            <a:avLst>
-              <a:gd name="adj" fmla="val 11905"/>
-            </a:avLst>
-          </a:prstGeom>
-          <a:solidFill>
-            <a:srgbClr val="E3EDF6"/>
-          </a:solidFill>
-          <a:ln w="15240">
-            <a:solidFill>
-              <a:srgbClr val="3B6FA0"/>
-            </a:solidFill>
-            <a:prstDash val="solid"/>
-          </a:ln>
-        </p:spPr>
-      </p:sp>
-      <p:sp>
-        <p:nvSpPr>
-          <p:cNvPr id="35" name="Text 33"/>
-          <p:cNvSpPr txBox="1"/>
-          <p:nvPr/>
-        </p:nvSpPr>
-        <p:spPr>
-          <a:xfrm>
-            <a:off x="493776" y="3493008"/>
-            <a:ext cx="1554480" cy="384048"/>
-          </a:xfrm>
-          <a:prstGeom prst="rect">
-            <a:avLst/>
-          </a:prstGeom>
-          <a:noFill/>
-          <a:ln/>
-        </p:spPr>
-        <p:txBody>
-          <a:bodyPr wrap="square" lIns="0" tIns="0" rIns="0" bIns="0" rtlCol="0" anchor="ctr"/>
-          <a:lstStyle/>
-          <a:p>
-            <a:pPr indent="0" marL="0">
-              <a:buNone/>
-            </a:pPr>
-            <a:r>
-              <a:rPr lang="en-US" sz="900" b="1" dirty="0">
-                <a:solidFill>
-                  <a:srgbClr val="1B2430"/>
-                </a:solidFill>
-                <a:latin typeface="Arial" pitchFamily="34" charset="0"/>
-                <a:ea typeface="Arial" pitchFamily="34" charset="-122"/>
-                <a:cs typeface="Arial" pitchFamily="34" charset="-120"/>
-              </a:rPr>
-              <a:t>AI agents</a:t>
-            </a:r>
-            <a:endParaRPr lang="en-US" sz="900" dirty="0"/>
-          </a:p>
-        </p:txBody>
-      </p:sp>
-      <p:sp>
-        <p:nvSpPr>
-          <p:cNvPr id="36" name="Text 34"/>
-          <p:cNvSpPr txBox="1"/>
-          <p:nvPr/>
-        </p:nvSpPr>
-        <p:spPr>
-          <a:xfrm>
-            <a:off x="2057400" y="3493008"/>
-            <a:ext cx="1914144" cy="384048"/>
-          </a:xfrm>
-          <a:prstGeom prst="rect">
-            <a:avLst/>
-          </a:prstGeom>
-          <a:noFill/>
-          <a:ln/>
-        </p:spPr>
-        <p:txBody>
-          <a:bodyPr wrap="square" lIns="0" tIns="0" rIns="0" bIns="0" rtlCol="0" anchor="ctr"/>
-          <a:lstStyle/>
-          <a:p>
-            <a:pPr indent="0" marL="0">
-              <a:lnSpc>
-                <a:spcPct val="105000"/>
-              </a:lnSpc>
-              <a:buNone/>
-            </a:pPr>
-            <a:r>
-              <a:rPr lang="en-US" sz="780" dirty="0">
-                <a:solidFill>
-                  <a:srgbClr val="1B2430"/>
-                </a:solidFill>
-                <a:latin typeface="Arial" pitchFamily="34" charset="0"/>
-                <a:ea typeface="Arial" pitchFamily="34" charset="-122"/>
-                <a:cs typeface="Arial" pitchFamily="34" charset="-120"/>
-              </a:rPr>
-              <a:t>draft, classify, extract — never decide</a:t>
-            </a:r>
-            <a:endParaRPr lang="en-US" sz="780" dirty="0"/>
-          </a:p>
-        </p:txBody>
-      </p:sp>
-      <p:sp>
-        <p:nvSpPr>
-          <p:cNvPr id="37" name="Shape 35"/>
-          <p:cNvSpPr/>
-          <p:nvPr/>
-        </p:nvSpPr>
-        <p:spPr>
-          <a:xfrm>
-            <a:off x="4245864" y="3493008"/>
-            <a:ext cx="3697224" cy="384048"/>
-          </a:xfrm>
-          <a:prstGeom prst="roundRect">
-            <a:avLst>
-              <a:gd name="adj" fmla="val 11905"/>
-            </a:avLst>
-          </a:prstGeom>
-          <a:solidFill>
-            <a:srgbClr val="ECEFF3"/>
-          </a:solidFill>
-          <a:ln w="15240">
-            <a:solidFill>
-              <a:srgbClr val="6B7787"/>
-            </a:solidFill>
-            <a:prstDash val="solid"/>
-          </a:ln>
-        </p:spPr>
-      </p:sp>
-      <p:sp>
-        <p:nvSpPr>
-          <p:cNvPr id="38" name="Text 36"/>
-          <p:cNvSpPr txBox="1"/>
-          <p:nvPr/>
-        </p:nvSpPr>
-        <p:spPr>
-          <a:xfrm>
-            <a:off x="4373880" y="3493008"/>
-            <a:ext cx="1554480" cy="384048"/>
-          </a:xfrm>
-          <a:prstGeom prst="rect">
-            <a:avLst/>
-          </a:prstGeom>
-          <a:noFill/>
-          <a:ln/>
-        </p:spPr>
-        <p:txBody>
-          <a:bodyPr wrap="square" lIns="0" tIns="0" rIns="0" bIns="0" rtlCol="0" anchor="ctr"/>
-          <a:lstStyle/>
-          <a:p>
-            <a:pPr indent="0" marL="0">
-              <a:buNone/>
-            </a:pPr>
-            <a:r>
-              <a:rPr lang="en-US" sz="900" b="1" dirty="0">
-                <a:solidFill>
-                  <a:srgbClr val="2A3340"/>
-                </a:solidFill>
-                <a:latin typeface="Arial" pitchFamily="34" charset="0"/>
-                <a:ea typeface="Arial" pitchFamily="34" charset="-122"/>
-                <a:cs typeface="Arial" pitchFamily="34" charset="-120"/>
-              </a:rPr>
-              <a:t>Rules, no model</a:t>
-            </a:r>
-            <a:endParaRPr lang="en-US" sz="900" dirty="0"/>
-          </a:p>
-        </p:txBody>
-      </p:sp>
-      <p:sp>
-        <p:nvSpPr>
-          <p:cNvPr id="39" name="Text 37"/>
-          <p:cNvSpPr txBox="1"/>
-          <p:nvPr/>
-        </p:nvSpPr>
-        <p:spPr>
-          <a:xfrm>
-            <a:off x="5937504" y="3493008"/>
-            <a:ext cx="1914144" cy="384048"/>
-          </a:xfrm>
-          <a:prstGeom prst="rect">
-            <a:avLst/>
-          </a:prstGeom>
-          <a:noFill/>
-          <a:ln/>
-        </p:spPr>
-        <p:txBody>
-          <a:bodyPr wrap="square" lIns="0" tIns="0" rIns="0" bIns="0" rtlCol="0" anchor="ctr"/>
-          <a:lstStyle/>
-          <a:p>
-            <a:pPr indent="0" marL="0">
-              <a:lnSpc>
-                <a:spcPct val="105000"/>
-              </a:lnSpc>
-              <a:buNone/>
-            </a:pPr>
-            <a:r>
-              <a:rPr lang="en-US" sz="780" dirty="0">
-                <a:solidFill>
-                  <a:srgbClr val="2A3340"/>
-                </a:solidFill>
-                <a:latin typeface="Arial" pitchFamily="34" charset="0"/>
-                <a:ea typeface="Arial" pitchFamily="34" charset="-122"/>
-                <a:cs typeface="Arial" pitchFamily="34" charset="-120"/>
-              </a:rPr>
-              <a:t>check the record — pass or fail, nothing in between</a:t>
-            </a:r>
-            <a:endParaRPr lang="en-US" sz="780" dirty="0"/>
-          </a:p>
-        </p:txBody>
-      </p:sp>
-      <p:sp>
-        <p:nvSpPr>
-          <p:cNvPr id="40" name="Shape 38"/>
-          <p:cNvSpPr/>
-          <p:nvPr/>
-        </p:nvSpPr>
-        <p:spPr>
-          <a:xfrm>
-            <a:off x="8125968" y="3493008"/>
-            <a:ext cx="3697224" cy="384048"/>
-          </a:xfrm>
-          <a:prstGeom prst="roundRect">
-            <a:avLst>
-              <a:gd name="adj" fmla="val 11905"/>
-            </a:avLst>
-          </a:prstGeom>
-          <a:solidFill>
-            <a:srgbClr val="F1E6ED"/>
-          </a:solidFill>
-          <a:ln w="15240">
-            <a:solidFill>
-              <a:srgbClr val="7A4A66"/>
-            </a:solidFill>
-            <a:prstDash val="solid"/>
-          </a:ln>
-        </p:spPr>
-      </p:sp>
-      <p:sp>
-        <p:nvSpPr>
-          <p:cNvPr id="41" name="Text 39"/>
-          <p:cNvSpPr txBox="1"/>
-          <p:nvPr/>
-        </p:nvSpPr>
-        <p:spPr>
-          <a:xfrm>
-            <a:off x="8253984" y="3493008"/>
-            <a:ext cx="1554480" cy="384048"/>
-          </a:xfrm>
-          <a:prstGeom prst="rect">
-            <a:avLst/>
-          </a:prstGeom>
-          <a:noFill/>
-          <a:ln/>
-        </p:spPr>
-        <p:txBody>
-          <a:bodyPr wrap="square" lIns="0" tIns="0" rIns="0" bIns="0" rtlCol="0" anchor="ctr"/>
-          <a:lstStyle/>
-          <a:p>
-            <a:pPr indent="0" marL="0">
-              <a:buNone/>
-            </a:pPr>
-            <a:r>
-              <a:rPr lang="en-US" sz="900" b="1" dirty="0">
-                <a:solidFill>
-                  <a:srgbClr val="4A2C3B"/>
-                </a:solidFill>
-                <a:latin typeface="Arial" pitchFamily="34" charset="0"/>
-                <a:ea typeface="Arial" pitchFamily="34" charset="-122"/>
-                <a:cs typeface="Arial" pitchFamily="34" charset="-120"/>
-              </a:rPr>
-              <a:t>A person</a:t>
-            </a:r>
-            <a:endParaRPr lang="en-US" sz="900" dirty="0"/>
-          </a:p>
-        </p:txBody>
-      </p:sp>
-      <p:sp>
-        <p:nvSpPr>
-          <p:cNvPr id="42" name="Text 40"/>
-          <p:cNvSpPr txBox="1"/>
-          <p:nvPr/>
-        </p:nvSpPr>
-        <p:spPr>
-          <a:xfrm>
-            <a:off x="9817608" y="3493008"/>
-            <a:ext cx="1914144" cy="384048"/>
-          </a:xfrm>
-          <a:prstGeom prst="rect">
-            <a:avLst/>
-          </a:prstGeom>
-          <a:noFill/>
-          <a:ln/>
-        </p:spPr>
-        <p:txBody>
-          <a:bodyPr wrap="square" lIns="0" tIns="0" rIns="0" bIns="0" rtlCol="0" anchor="ctr"/>
-          <a:lstStyle/>
-          <a:p>
-            <a:pPr indent="0" marL="0">
-              <a:lnSpc>
-                <a:spcPct val="105000"/>
-              </a:lnSpc>
-              <a:buNone/>
-            </a:pPr>
-            <a:r>
-              <a:rPr lang="en-US" sz="780" dirty="0">
-                <a:solidFill>
-                  <a:srgbClr val="4A2C3B"/>
-                </a:solidFill>
-                <a:latin typeface="Arial" pitchFamily="34" charset="0"/>
-                <a:ea typeface="Arial" pitchFamily="34" charset="-122"/>
-                <a:cs typeface="Arial" pitchFamily="34" charset="-120"/>
-              </a:rPr>
-              <a:t>approves before anything can go against a claimant</a:t>
-            </a:r>
-            <a:endParaRPr lang="en-US" sz="780" dirty="0"/>
-          </a:p>
-        </p:txBody>
-      </p:sp>
-      <p:sp>
-        <p:nvSpPr>
-          <p:cNvPr id="43" name="Text 41"/>
-          <p:cNvSpPr txBox="1"/>
-          <p:nvPr/>
-        </p:nvSpPr>
-        <p:spPr>
-          <a:xfrm>
-            <a:off x="365760" y="3913632"/>
-            <a:ext cx="11457432" cy="182880"/>
-          </a:xfrm>
-          <a:prstGeom prst="rect">
-            <a:avLst/>
-          </a:prstGeom>
-          <a:noFill/>
-          <a:ln/>
-        </p:spPr>
-        <p:txBody>
-          <a:bodyPr wrap="square" lIns="0" tIns="0" rIns="0" bIns="0" rtlCol="0" anchor="ctr"/>
-          <a:lstStyle/>
-          <a:p>
-            <a:pPr indent="0" marL="0">
-              <a:buNone/>
-            </a:pPr>
-            <a:r>
-              <a:rPr lang="en-US" sz="800" b="1" i="1" dirty="0">
-                <a:solidFill>
-                  <a:srgbClr val="2A2A3E"/>
-                </a:solidFill>
-                <a:latin typeface="Arial" pitchFamily="34" charset="0"/>
-                <a:ea typeface="Arial" pitchFamily="34" charset="-122"/>
-                <a:cs typeface="Arial" pitchFamily="34" charset="-120"/>
-              </a:rPr>
-              <a:t>AI owns the drafting. Rules own the facts. A person owns every call that can go against a claimant.</a:t>
-            </a:r>
-            <a:endParaRPr lang="en-US" sz="800" dirty="0"/>
-          </a:p>
-        </p:txBody>
-      </p:sp>
-      <p:sp>
-        <p:nvSpPr>
-          <p:cNvPr id="44" name="Text 42"/>
-          <p:cNvSpPr txBox="1"/>
-          <p:nvPr/>
-        </p:nvSpPr>
-        <p:spPr>
-          <a:xfrm>
-            <a:off x="365760" y="4206240"/>
-            <a:ext cx="2743200" cy="182880"/>
-          </a:xfrm>
-          <a:prstGeom prst="rect">
-            <a:avLst/>
-          </a:prstGeom>
-          <a:noFill/>
-          <a:ln/>
-        </p:spPr>
-        <p:txBody>
-          <a:bodyPr wrap="square" lIns="0" tIns="0" rIns="0" bIns="0" rtlCol="0" anchor="ctr"/>
-          <a:lstStyle/>
-          <a:p>
-            <a:pPr indent="0" marL="0">
-              <a:buNone/>
-            </a:pPr>
-            <a:r>
-              <a:rPr lang="en-US" sz="900" b="1" spc="90" kern="0" dirty="0">
-                <a:solidFill>
-                  <a:srgbClr val="0891B2"/>
-                </a:solidFill>
-                <a:latin typeface="Arial" pitchFamily="34" charset="0"/>
-                <a:ea typeface="Arial" pitchFamily="34" charset="-122"/>
-                <a:cs typeface="Arial" pitchFamily="34" charset="-120"/>
-              </a:rPr>
-              <a:t>THE STACK</a:t>
-            </a:r>
-            <a:endParaRPr lang="en-US" sz="900" dirty="0"/>
-          </a:p>
-        </p:txBody>
-      </p:sp>
-      <p:sp>
-        <p:nvSpPr>
-          <p:cNvPr id="45" name="Shape 43"/>
-          <p:cNvSpPr/>
-          <p:nvPr/>
-        </p:nvSpPr>
-        <p:spPr>
-          <a:xfrm>
-            <a:off x="365760" y="4407408"/>
-            <a:ext cx="1143000" cy="347472"/>
-          </a:xfrm>
-          <a:prstGeom prst="roundRect">
-            <a:avLst>
-              <a:gd name="adj" fmla="val 13158"/>
-            </a:avLst>
-          </a:prstGeom>
-          <a:solidFill>
-            <a:srgbClr val="FFFFFF"/>
-          </a:solidFill>
-          <a:ln w="13970">
-            <a:solidFill>
-              <a:srgbClr val="0891B2"/>
-            </a:solidFill>
-            <a:prstDash val="solid"/>
-          </a:ln>
-        </p:spPr>
-      </p:sp>
-      <p:sp>
-        <p:nvSpPr>
-          <p:cNvPr id="46" name="Text 44"/>
-          <p:cNvSpPr txBox="1"/>
-          <p:nvPr/>
-        </p:nvSpPr>
-        <p:spPr>
-          <a:xfrm>
-            <a:off x="402336" y="4407408"/>
-            <a:ext cx="1069848" cy="347472"/>
-          </a:xfrm>
-          <a:prstGeom prst="rect">
-            <a:avLst/>
-          </a:prstGeom>
-          <a:noFill/>
-          <a:ln/>
-        </p:spPr>
-        <p:txBody>
-          <a:bodyPr wrap="square" lIns="0" tIns="0" rIns="0" bIns="0" rtlCol="0" anchor="ctr"/>
-          <a:lstStyle/>
-          <a:p>
-            <a:pPr algn="ctr" indent="0" marL="0">
-              <a:buNone/>
-            </a:pPr>
-            <a:r>
-              <a:rPr lang="en-US" sz="780" b="1" dirty="0">
-                <a:solidFill>
-                  <a:srgbClr val="0B5A66"/>
-                </a:solidFill>
-                <a:latin typeface="Arial" pitchFamily="34" charset="0"/>
-                <a:ea typeface="Arial" pitchFamily="34" charset="-122"/>
-                <a:cs typeface="Arial" pitchFamily="34" charset="-120"/>
-              </a:rPr>
-              <a:t>FastAPI</a:t>
-            </a:r>
-            <a:endParaRPr lang="en-US" sz="780" dirty="0"/>
           </a:p>
         </p:txBody>
       </p:sp>
@@ -14357,23 +14360,16 @@
         </p:nvSpPr>
         <p:spPr>
           <a:xfrm>
-            <a:off x="1655064" y="4407408"/>
-            <a:ext cx="1143000" cy="347472"/>
-          </a:xfrm>
-          <a:prstGeom prst="roundRect">
-            <a:avLst>
-              <a:gd name="adj" fmla="val 13158"/>
-            </a:avLst>
+            <a:off x="411480" y="1216152"/>
+            <a:ext cx="164592" cy="164592"/>
+          </a:xfrm>
+          <a:prstGeom prst="ellipse">
+            <a:avLst/>
           </a:prstGeom>
           <a:solidFill>
-            <a:srgbClr val="FFFFFF"/>
+            <a:srgbClr val="1B2430"/>
           </a:solidFill>
-          <a:ln w="13970">
-            <a:solidFill>
-              <a:srgbClr val="0891B2"/>
-            </a:solidFill>
-            <a:prstDash val="solid"/>
-          </a:ln>
+          <a:ln/>
         </p:spPr>
       </p:sp>
       <p:sp>
@@ -14384,8 +14380,8 @@
         </p:nvSpPr>
         <p:spPr>
           <a:xfrm>
-            <a:off x="1691640" y="4407408"/>
-            <a:ext cx="1069848" cy="347472"/>
+            <a:off x="411480" y="1216152"/>
+            <a:ext cx="164592" cy="164592"/>
           </a:xfrm>
           <a:prstGeom prst="rect">
             <a:avLst/>
@@ -14401,17 +14397,17 @@
               <a:buNone/>
             </a:pPr>
             <a:r>
-              <a:rPr lang="en-US" sz="780" b="1" dirty="0">
-                <a:solidFill>
-                  <a:srgbClr val="0B5A66"/>
-                </a:solidFill>
-                <a:latin typeface="Arial" pitchFamily="34" charset="0"/>
-                <a:ea typeface="Arial" pitchFamily="34" charset="-122"/>
-                <a:cs typeface="Arial" pitchFamily="34" charset="-120"/>
-              </a:rPr>
-              <a:t>LangGraph</a:t>
-            </a:r>
-            <a:endParaRPr lang="en-US" sz="780" dirty="0"/>
+              <a:rPr lang="en-US" sz="740" b="1" dirty="0">
+                <a:solidFill>
+                  <a:srgbClr val="FFFFFF"/>
+                </a:solidFill>
+                <a:latin typeface="Arial" pitchFamily="34" charset="0"/>
+                <a:ea typeface="Arial" pitchFamily="34" charset="-122"/>
+                <a:cs typeface="Arial" pitchFamily="34" charset="-120"/>
+              </a:rPr>
+              <a:t>1</a:t>
+            </a:r>
+            <a:endParaRPr lang="en-US" sz="740" dirty="0"/>
           </a:p>
         </p:txBody>
       </p:sp>
@@ -14423,23 +14419,16 @@
         </p:nvSpPr>
         <p:spPr>
           <a:xfrm>
-            <a:off x="2944368" y="4407408"/>
-            <a:ext cx="1143000" cy="347472"/>
-          </a:xfrm>
-          <a:prstGeom prst="roundRect">
-            <a:avLst>
-              <a:gd name="adj" fmla="val 13158"/>
-            </a:avLst>
+            <a:off x="2354580" y="3483864"/>
+            <a:ext cx="164592" cy="164592"/>
+          </a:xfrm>
+          <a:prstGeom prst="ellipse">
+            <a:avLst/>
           </a:prstGeom>
           <a:solidFill>
-            <a:srgbClr val="FFFFFF"/>
+            <a:srgbClr val="1B2430"/>
           </a:solidFill>
-          <a:ln w="13970">
-            <a:solidFill>
-              <a:srgbClr val="0891B2"/>
-            </a:solidFill>
-            <a:prstDash val="solid"/>
-          </a:ln>
+          <a:ln/>
         </p:spPr>
       </p:sp>
       <p:sp>
@@ -14450,8 +14439,8 @@
         </p:nvSpPr>
         <p:spPr>
           <a:xfrm>
-            <a:off x="2980944" y="4407408"/>
-            <a:ext cx="1069848" cy="347472"/>
+            <a:off x="2354580" y="3483864"/>
+            <a:ext cx="164592" cy="164592"/>
           </a:xfrm>
           <a:prstGeom prst="rect">
             <a:avLst/>
@@ -14467,17 +14456,17 @@
               <a:buNone/>
             </a:pPr>
             <a:r>
-              <a:rPr lang="en-US" sz="780" b="1" dirty="0">
-                <a:solidFill>
-                  <a:srgbClr val="0B5A66"/>
-                </a:solidFill>
-                <a:latin typeface="Arial" pitchFamily="34" charset="0"/>
-                <a:ea typeface="Arial" pitchFamily="34" charset="-122"/>
-                <a:cs typeface="Arial" pitchFamily="34" charset="-120"/>
-              </a:rPr>
-              <a:t>Pydantic</a:t>
-            </a:r>
-            <a:endParaRPr lang="en-US" sz="780" dirty="0"/>
+              <a:rPr lang="en-US" sz="740" b="1" dirty="0">
+                <a:solidFill>
+                  <a:srgbClr val="FFFFFF"/>
+                </a:solidFill>
+                <a:latin typeface="Arial" pitchFamily="34" charset="0"/>
+                <a:ea typeface="Arial" pitchFamily="34" charset="-122"/>
+                <a:cs typeface="Arial" pitchFamily="34" charset="-120"/>
+              </a:rPr>
+              <a:t>2</a:t>
+            </a:r>
+            <a:endParaRPr lang="en-US" sz="740" dirty="0"/>
           </a:p>
         </p:txBody>
       </p:sp>
@@ -14489,23 +14478,16 @@
         </p:nvSpPr>
         <p:spPr>
           <a:xfrm>
-            <a:off x="4233672" y="4407408"/>
-            <a:ext cx="1143000" cy="347472"/>
-          </a:xfrm>
-          <a:prstGeom prst="roundRect">
-            <a:avLst>
-              <a:gd name="adj" fmla="val 13158"/>
-            </a:avLst>
+            <a:off x="4297680" y="3483864"/>
+            <a:ext cx="164592" cy="164592"/>
+          </a:xfrm>
+          <a:prstGeom prst="ellipse">
+            <a:avLst/>
           </a:prstGeom>
           <a:solidFill>
-            <a:srgbClr val="FFFFFF"/>
+            <a:srgbClr val="1B2430"/>
           </a:solidFill>
-          <a:ln w="13970">
-            <a:solidFill>
-              <a:srgbClr val="0891B2"/>
-            </a:solidFill>
-            <a:prstDash val="solid"/>
-          </a:ln>
+          <a:ln/>
         </p:spPr>
       </p:sp>
       <p:sp>
@@ -14516,8 +14498,8 @@
         </p:nvSpPr>
         <p:spPr>
           <a:xfrm>
-            <a:off x="4270248" y="4407408"/>
-            <a:ext cx="1069848" cy="347472"/>
+            <a:off x="4297680" y="3483864"/>
+            <a:ext cx="164592" cy="164592"/>
           </a:xfrm>
           <a:prstGeom prst="rect">
             <a:avLst/>
@@ -14533,17 +14515,17 @@
               <a:buNone/>
             </a:pPr>
             <a:r>
-              <a:rPr lang="en-US" sz="780" b="1" dirty="0">
-                <a:solidFill>
-                  <a:srgbClr val="0B5A66"/>
-                </a:solidFill>
-                <a:latin typeface="Arial" pitchFamily="34" charset="0"/>
-                <a:ea typeface="Arial" pitchFamily="34" charset="-122"/>
-                <a:cs typeface="Arial" pitchFamily="34" charset="-120"/>
-              </a:rPr>
-              <a:t>PostgreSQL</a:t>
-            </a:r>
-            <a:endParaRPr lang="en-US" sz="780" dirty="0"/>
+              <a:rPr lang="en-US" sz="740" b="1" dirty="0">
+                <a:solidFill>
+                  <a:srgbClr val="FFFFFF"/>
+                </a:solidFill>
+                <a:latin typeface="Arial" pitchFamily="34" charset="0"/>
+                <a:ea typeface="Arial" pitchFamily="34" charset="-122"/>
+                <a:cs typeface="Arial" pitchFamily="34" charset="-120"/>
+              </a:rPr>
+              <a:t>3</a:t>
+            </a:r>
+            <a:endParaRPr lang="en-US" sz="740" dirty="0"/>
           </a:p>
         </p:txBody>
       </p:sp>
@@ -14555,23 +14537,16 @@
         </p:nvSpPr>
         <p:spPr>
           <a:xfrm>
-            <a:off x="5522976" y="4407408"/>
-            <a:ext cx="1143000" cy="347472"/>
-          </a:xfrm>
-          <a:prstGeom prst="roundRect">
-            <a:avLst>
-              <a:gd name="adj" fmla="val 13158"/>
-            </a:avLst>
+            <a:off x="6240780" y="2350008"/>
+            <a:ext cx="164592" cy="164592"/>
+          </a:xfrm>
+          <a:prstGeom prst="ellipse">
+            <a:avLst/>
           </a:prstGeom>
           <a:solidFill>
-            <a:srgbClr val="FFFFFF"/>
+            <a:srgbClr val="1B2430"/>
           </a:solidFill>
-          <a:ln w="13970">
-            <a:solidFill>
-              <a:srgbClr val="0891B2"/>
-            </a:solidFill>
-            <a:prstDash val="solid"/>
-          </a:ln>
+          <a:ln/>
         </p:spPr>
       </p:sp>
       <p:sp>
@@ -14582,8 +14557,8 @@
         </p:nvSpPr>
         <p:spPr>
           <a:xfrm>
-            <a:off x="5559552" y="4407408"/>
-            <a:ext cx="1069848" cy="347472"/>
+            <a:off x="6240780" y="2350008"/>
+            <a:ext cx="164592" cy="164592"/>
           </a:xfrm>
           <a:prstGeom prst="rect">
             <a:avLst/>
@@ -14599,17 +14574,17 @@
               <a:buNone/>
             </a:pPr>
             <a:r>
-              <a:rPr lang="en-US" sz="780" b="1" dirty="0">
-                <a:solidFill>
-                  <a:srgbClr val="0B5A66"/>
-                </a:solidFill>
-                <a:latin typeface="Arial" pitchFamily="34" charset="0"/>
-                <a:ea typeface="Arial" pitchFamily="34" charset="-122"/>
-                <a:cs typeface="Arial" pitchFamily="34" charset="-120"/>
-              </a:rPr>
-              <a:t>Service Bus</a:t>
-            </a:r>
-            <a:endParaRPr lang="en-US" sz="780" dirty="0"/>
+              <a:rPr lang="en-US" sz="740" b="1" dirty="0">
+                <a:solidFill>
+                  <a:srgbClr val="FFFFFF"/>
+                </a:solidFill>
+                <a:latin typeface="Arial" pitchFamily="34" charset="0"/>
+                <a:ea typeface="Arial" pitchFamily="34" charset="-122"/>
+                <a:cs typeface="Arial" pitchFamily="34" charset="-120"/>
+              </a:rPr>
+              <a:t>4</a:t>
+            </a:r>
+            <a:endParaRPr lang="en-US" sz="740" dirty="0"/>
           </a:p>
         </p:txBody>
       </p:sp>
@@ -14621,23 +14596,16 @@
         </p:nvSpPr>
         <p:spPr>
           <a:xfrm>
-            <a:off x="6812280" y="4407408"/>
-            <a:ext cx="1143000" cy="347472"/>
-          </a:xfrm>
-          <a:prstGeom prst="roundRect">
-            <a:avLst>
-              <a:gd name="adj" fmla="val 13158"/>
-            </a:avLst>
+            <a:off x="8183880" y="3483864"/>
+            <a:ext cx="164592" cy="164592"/>
+          </a:xfrm>
+          <a:prstGeom prst="ellipse">
+            <a:avLst/>
           </a:prstGeom>
           <a:solidFill>
-            <a:srgbClr val="FFFFFF"/>
+            <a:srgbClr val="1B2430"/>
           </a:solidFill>
-          <a:ln w="13970">
-            <a:solidFill>
-              <a:srgbClr val="0891B2"/>
-            </a:solidFill>
-            <a:prstDash val="solid"/>
-          </a:ln>
+          <a:ln/>
         </p:spPr>
       </p:sp>
       <p:sp>
@@ -14648,8 +14616,8 @@
         </p:nvSpPr>
         <p:spPr>
           <a:xfrm>
-            <a:off x="6848856" y="4407408"/>
-            <a:ext cx="1069848" cy="347472"/>
+            <a:off x="8183880" y="3483864"/>
+            <a:ext cx="164592" cy="164592"/>
           </a:xfrm>
           <a:prstGeom prst="rect">
             <a:avLst/>
@@ -14665,17 +14633,17 @@
               <a:buNone/>
             </a:pPr>
             <a:r>
-              <a:rPr lang="en-US" sz="780" b="1" dirty="0">
-                <a:solidFill>
-                  <a:srgbClr val="0B5A66"/>
-                </a:solidFill>
-                <a:latin typeface="Arial" pitchFamily="34" charset="0"/>
-                <a:ea typeface="Arial" pitchFamily="34" charset="-122"/>
-                <a:cs typeface="Arial" pitchFamily="34" charset="-120"/>
-              </a:rPr>
-              <a:t>Container Apps</a:t>
-            </a:r>
-            <a:endParaRPr lang="en-US" sz="780" dirty="0"/>
+              <a:rPr lang="en-US" sz="740" b="1" dirty="0">
+                <a:solidFill>
+                  <a:srgbClr val="FFFFFF"/>
+                </a:solidFill>
+                <a:latin typeface="Arial" pitchFamily="34" charset="0"/>
+                <a:ea typeface="Arial" pitchFamily="34" charset="-122"/>
+                <a:cs typeface="Arial" pitchFamily="34" charset="-120"/>
+              </a:rPr>
+              <a:t>5</a:t>
+            </a:r>
+            <a:endParaRPr lang="en-US" sz="740" dirty="0"/>
           </a:p>
         </p:txBody>
       </p:sp>
@@ -14687,23 +14655,16 @@
         </p:nvSpPr>
         <p:spPr>
           <a:xfrm>
-            <a:off x="8101584" y="4407408"/>
-            <a:ext cx="1143000" cy="347472"/>
-          </a:xfrm>
-          <a:prstGeom prst="roundRect">
-            <a:avLst>
-              <a:gd name="adj" fmla="val 13158"/>
-            </a:avLst>
+            <a:off x="10126980" y="4617720"/>
+            <a:ext cx="164592" cy="164592"/>
+          </a:xfrm>
+          <a:prstGeom prst="ellipse">
+            <a:avLst/>
           </a:prstGeom>
           <a:solidFill>
-            <a:srgbClr val="FFFFFF"/>
+            <a:srgbClr val="1B2430"/>
           </a:solidFill>
-          <a:ln w="13970">
-            <a:solidFill>
-              <a:srgbClr val="0891B2"/>
-            </a:solidFill>
-            <a:prstDash val="solid"/>
-          </a:ln>
+          <a:ln/>
         </p:spPr>
       </p:sp>
       <p:sp>
@@ -14714,8 +14675,8 @@
         </p:nvSpPr>
         <p:spPr>
           <a:xfrm>
-            <a:off x="8138160" y="4407408"/>
-            <a:ext cx="1069848" cy="347472"/>
+            <a:off x="10126980" y="4617720"/>
+            <a:ext cx="164592" cy="164592"/>
           </a:xfrm>
           <a:prstGeom prst="rect">
             <a:avLst/>
@@ -14731,17 +14692,17 @@
               <a:buNone/>
             </a:pPr>
             <a:r>
-              <a:rPr lang="en-US" sz="780" b="1" dirty="0">
-                <a:solidFill>
-                  <a:srgbClr val="0B5A66"/>
-                </a:solidFill>
-                <a:latin typeface="Arial" pitchFamily="34" charset="0"/>
-                <a:ea typeface="Arial" pitchFamily="34" charset="-122"/>
-                <a:cs typeface="Arial" pitchFamily="34" charset="-120"/>
-              </a:rPr>
-              <a:t>Blob + Key Vault</a:t>
-            </a:r>
-            <a:endParaRPr lang="en-US" sz="780" dirty="0"/>
+              <a:rPr lang="en-US" sz="740" b="1" dirty="0">
+                <a:solidFill>
+                  <a:srgbClr val="FFFFFF"/>
+                </a:solidFill>
+                <a:latin typeface="Arial" pitchFamily="34" charset="0"/>
+                <a:ea typeface="Arial" pitchFamily="34" charset="-122"/>
+                <a:cs typeface="Arial" pitchFamily="34" charset="-120"/>
+              </a:rPr>
+              <a:t>6</a:t>
+            </a:r>
+            <a:endParaRPr lang="en-US" sz="740" dirty="0"/>
           </a:p>
         </p:txBody>
       </p:sp>
@@ -14753,365 +14714,8 @@
         </p:nvSpPr>
         <p:spPr>
           <a:xfrm>
-            <a:off x="9390888" y="4407408"/>
-            <a:ext cx="1143000" cy="347472"/>
-          </a:xfrm>
-          <a:prstGeom prst="roundRect">
-            <a:avLst>
-              <a:gd name="adj" fmla="val 13158"/>
-            </a:avLst>
-          </a:prstGeom>
-          <a:solidFill>
-            <a:srgbClr val="FFFFFF"/>
-          </a:solidFill>
-          <a:ln w="13970">
-            <a:solidFill>
-              <a:srgbClr val="0891B2"/>
-            </a:solidFill>
-            <a:prstDash val="solid"/>
-          </a:ln>
-        </p:spPr>
-      </p:sp>
-      <p:sp>
-        <p:nvSpPr>
-          <p:cNvPr id="60" name="Text 58"/>
-          <p:cNvSpPr txBox="1"/>
-          <p:nvPr/>
-        </p:nvSpPr>
-        <p:spPr>
-          <a:xfrm>
-            <a:off x="9427464" y="4407408"/>
-            <a:ext cx="1069848" cy="347472"/>
-          </a:xfrm>
-          <a:prstGeom prst="rect">
-            <a:avLst/>
-          </a:prstGeom>
-          <a:noFill/>
-          <a:ln/>
-        </p:spPr>
-        <p:txBody>
-          <a:bodyPr wrap="square" lIns="0" tIns="0" rIns="0" bIns="0" rtlCol="0" anchor="ctr"/>
-          <a:lstStyle/>
-          <a:p>
-            <a:pPr algn="ctr" indent="0" marL="0">
-              <a:buNone/>
-            </a:pPr>
-            <a:r>
-              <a:rPr lang="en-US" sz="780" b="1" dirty="0">
-                <a:solidFill>
-                  <a:srgbClr val="0B5A66"/>
-                </a:solidFill>
-                <a:latin typeface="Arial" pitchFamily="34" charset="0"/>
-                <a:ea typeface="Arial" pitchFamily="34" charset="-122"/>
-                <a:cs typeface="Arial" pitchFamily="34" charset="-120"/>
-              </a:rPr>
-              <a:t>Azure OpenAI</a:t>
-            </a:r>
-            <a:endParaRPr lang="en-US" sz="780" dirty="0"/>
-          </a:p>
-        </p:txBody>
-      </p:sp>
-      <p:sp>
-        <p:nvSpPr>
-          <p:cNvPr id="61" name="Shape 59"/>
-          <p:cNvSpPr/>
-          <p:nvPr/>
-        </p:nvSpPr>
-        <p:spPr>
-          <a:xfrm>
-            <a:off x="10680192" y="4407408"/>
-            <a:ext cx="1143000" cy="347472"/>
-          </a:xfrm>
-          <a:prstGeom prst="roundRect">
-            <a:avLst>
-              <a:gd name="adj" fmla="val 13158"/>
-            </a:avLst>
-          </a:prstGeom>
-          <a:solidFill>
-            <a:srgbClr val="FFFFFF"/>
-          </a:solidFill>
-          <a:ln w="13970">
-            <a:solidFill>
-              <a:srgbClr val="0891B2"/>
-            </a:solidFill>
-            <a:prstDash val="solid"/>
-          </a:ln>
-        </p:spPr>
-      </p:sp>
-      <p:sp>
-        <p:nvSpPr>
-          <p:cNvPr id="62" name="Text 60"/>
-          <p:cNvSpPr txBox="1"/>
-          <p:nvPr/>
-        </p:nvSpPr>
-        <p:spPr>
-          <a:xfrm>
-            <a:off x="10716768" y="4407408"/>
-            <a:ext cx="1069848" cy="347472"/>
-          </a:xfrm>
-          <a:prstGeom prst="rect">
-            <a:avLst/>
-          </a:prstGeom>
-          <a:noFill/>
-          <a:ln/>
-        </p:spPr>
-        <p:txBody>
-          <a:bodyPr wrap="square" lIns="0" tIns="0" rIns="0" bIns="0" rtlCol="0" anchor="ctr"/>
-          <a:lstStyle/>
-          <a:p>
-            <a:pPr algn="ctr" indent="0" marL="0">
-              <a:buNone/>
-            </a:pPr>
-            <a:r>
-              <a:rPr lang="en-US" sz="780" b="1" dirty="0">
-                <a:solidFill>
-                  <a:srgbClr val="0B5A66"/>
-                </a:solidFill>
-                <a:latin typeface="Arial" pitchFamily="34" charset="0"/>
-                <a:ea typeface="Arial" pitchFamily="34" charset="-122"/>
-                <a:cs typeface="Arial" pitchFamily="34" charset="-120"/>
-              </a:rPr>
-              <a:t>Azure DevOps</a:t>
-            </a:r>
-            <a:endParaRPr lang="en-US" sz="780" dirty="0"/>
-          </a:p>
-        </p:txBody>
-      </p:sp>
-      <p:sp>
-        <p:nvSpPr>
-          <p:cNvPr id="63" name="Text 61"/>
-          <p:cNvSpPr txBox="1"/>
-          <p:nvPr/>
-        </p:nvSpPr>
-        <p:spPr>
-          <a:xfrm>
-            <a:off x="365760" y="4809744"/>
-            <a:ext cx="11457432" cy="182880"/>
-          </a:xfrm>
-          <a:prstGeom prst="rect">
-            <a:avLst/>
-          </a:prstGeom>
-          <a:noFill/>
-          <a:ln/>
-        </p:spPr>
-        <p:txBody>
-          <a:bodyPr wrap="square" lIns="0" tIns="0" rIns="0" bIns="0" rtlCol="0" anchor="ctr"/>
-          <a:lstStyle/>
-          <a:p>
-            <a:pPr indent="0" marL="0">
-              <a:buNone/>
-            </a:pPr>
-            <a:r>
-              <a:rPr lang="en-US" sz="760" i="1" dirty="0">
-                <a:solidFill>
-                  <a:srgbClr val="5B6472"/>
-                </a:solidFill>
-                <a:latin typeface="Arial" pitchFamily="34" charset="0"/>
-                <a:ea typeface="Arial" pitchFamily="34" charset="-122"/>
-                <a:cs typeface="Arial" pitchFamily="34" charset="-120"/>
-              </a:rPr>
-              <a:t>Deployed to the cloud GGW already use · infrastructure as code · one on/off switch per agent · model version pinned</a:t>
-            </a:r>
-            <a:endParaRPr lang="en-US" sz="760" dirty="0"/>
-          </a:p>
-        </p:txBody>
-      </p:sp>
-      <p:sp>
-        <p:nvSpPr>
-          <p:cNvPr id="64" name="Text 62"/>
-          <p:cNvSpPr txBox="1"/>
-          <p:nvPr/>
-        </p:nvSpPr>
-        <p:spPr>
-          <a:xfrm>
-            <a:off x="365760" y="5102352"/>
-            <a:ext cx="2743200" cy="182880"/>
-          </a:xfrm>
-          <a:prstGeom prst="rect">
-            <a:avLst/>
-          </a:prstGeom>
-          <a:noFill/>
-          <a:ln/>
-        </p:spPr>
-        <p:txBody>
-          <a:bodyPr wrap="square" lIns="0" tIns="0" rIns="0" bIns="0" rtlCol="0" anchor="ctr"/>
-          <a:lstStyle/>
-          <a:p>
-            <a:pPr indent="0" marL="0">
-              <a:buNone/>
-            </a:pPr>
-            <a:r>
-              <a:rPr lang="en-US" sz="900" b="1" spc="90" kern="0" dirty="0">
-                <a:solidFill>
-                  <a:srgbClr val="BE185D"/>
-                </a:solidFill>
-                <a:latin typeface="Arial" pitchFamily="34" charset="0"/>
-                <a:ea typeface="Arial" pitchFamily="34" charset="-122"/>
-                <a:cs typeface="Arial" pitchFamily="34" charset="-120"/>
-              </a:rPr>
-              <a:t>HOW IT GOES LIVE</a:t>
-            </a:r>
-            <a:endParaRPr lang="en-US" sz="900" dirty="0"/>
-          </a:p>
-        </p:txBody>
-      </p:sp>
-      <p:sp>
-        <p:nvSpPr>
-          <p:cNvPr id="65" name="Shape 63"/>
-          <p:cNvSpPr/>
-          <p:nvPr/>
-        </p:nvSpPr>
-        <p:spPr>
-          <a:xfrm>
-            <a:off x="365760" y="5303520"/>
-            <a:ext cx="2699766" cy="640080"/>
-          </a:xfrm>
-          <a:prstGeom prst="roundRect">
-            <a:avLst>
-              <a:gd name="adj" fmla="val 8571"/>
-            </a:avLst>
-          </a:prstGeom>
-          <a:solidFill>
-            <a:srgbClr val="FDF3E3"/>
-          </a:solidFill>
-          <a:ln w="15240">
-            <a:solidFill>
-              <a:srgbClr val="D97706"/>
-            </a:solidFill>
-            <a:prstDash val="solid"/>
-          </a:ln>
-        </p:spPr>
-      </p:sp>
-      <p:sp>
-        <p:nvSpPr>
-          <p:cNvPr id="66" name="Text 64"/>
-          <p:cNvSpPr txBox="1"/>
-          <p:nvPr/>
-        </p:nvSpPr>
-        <p:spPr>
-          <a:xfrm>
-            <a:off x="512064" y="5376672"/>
-            <a:ext cx="2407158" cy="182880"/>
-          </a:xfrm>
-          <a:prstGeom prst="rect">
-            <a:avLst/>
-          </a:prstGeom>
-          <a:noFill/>
-          <a:ln/>
-        </p:spPr>
-        <p:txBody>
-          <a:bodyPr wrap="square" lIns="0" tIns="0" rIns="0" bIns="0" rtlCol="0" anchor="ctr"/>
-          <a:lstStyle/>
-          <a:p>
-            <a:pPr indent="0" marL="0">
-              <a:buNone/>
-            </a:pPr>
-            <a:r>
-              <a:rPr lang="en-US" sz="960" b="1" dirty="0">
-                <a:solidFill>
-                  <a:srgbClr val="D97706"/>
-                </a:solidFill>
-                <a:latin typeface="Arial" pitchFamily="34" charset="0"/>
-                <a:ea typeface="Arial" pitchFamily="34" charset="-122"/>
-                <a:cs typeface="Arial" pitchFamily="34" charset="-120"/>
-              </a:rPr>
-              <a:t>Shadow</a:t>
-            </a:r>
-            <a:endParaRPr lang="en-US" sz="960" dirty="0"/>
-          </a:p>
-        </p:txBody>
-      </p:sp>
-      <p:sp>
-        <p:nvSpPr>
-          <p:cNvPr id="67" name="Text 65"/>
-          <p:cNvSpPr txBox="1"/>
-          <p:nvPr/>
-        </p:nvSpPr>
-        <p:spPr>
-          <a:xfrm>
-            <a:off x="512064" y="5376672"/>
-            <a:ext cx="2407158" cy="182880"/>
-          </a:xfrm>
-          <a:prstGeom prst="rect">
-            <a:avLst/>
-          </a:prstGeom>
-          <a:noFill/>
-          <a:ln/>
-        </p:spPr>
-        <p:txBody>
-          <a:bodyPr wrap="square" lIns="0" tIns="0" rIns="0" bIns="0" rtlCol="0" anchor="ctr"/>
-          <a:lstStyle/>
-          <a:p>
-            <a:pPr algn="r" indent="0" marL="0">
-              <a:buNone/>
-            </a:pPr>
-            <a:r>
-              <a:rPr lang="en-US" sz="740" i="1" dirty="0">
-                <a:solidFill>
-                  <a:srgbClr val="5B6472"/>
-                </a:solidFill>
-                <a:latin typeface="Arial" pitchFamily="34" charset="0"/>
-                <a:ea typeface="Arial" pitchFamily="34" charset="-122"/>
-                <a:cs typeface="Arial" pitchFamily="34" charset="-120"/>
-              </a:rPr>
-              <a:t>weeks 1–8</a:t>
-            </a:r>
-            <a:endParaRPr lang="en-US" sz="740" dirty="0"/>
-          </a:p>
-        </p:txBody>
-      </p:sp>
-      <p:sp>
-        <p:nvSpPr>
-          <p:cNvPr id="68" name="Text 66"/>
-          <p:cNvSpPr txBox="1"/>
-          <p:nvPr/>
-        </p:nvSpPr>
-        <p:spPr>
-          <a:xfrm>
-            <a:off x="512064" y="5559552"/>
-            <a:ext cx="2407158" cy="329184"/>
-          </a:xfrm>
-          <a:prstGeom prst="rect">
-            <a:avLst/>
-          </a:prstGeom>
-          <a:noFill/>
-          <a:ln/>
-        </p:spPr>
-        <p:txBody>
-          <a:bodyPr wrap="square" lIns="0" tIns="0" rIns="0" bIns="0" rtlCol="0" anchor="ctr"/>
-          <a:lstStyle/>
-          <a:p>
-            <a:pPr indent="0" marL="0">
-              <a:lnSpc>
-                <a:spcPct val="110000"/>
-              </a:lnSpc>
-              <a:buNone/>
-            </a:pPr>
-            <a:r>
-              <a:rPr lang="en-US" sz="760" dirty="0">
-                <a:solidFill>
-                  <a:srgbClr val="3A3A3A"/>
-                </a:solidFill>
-                <a:latin typeface="Arial" pitchFamily="34" charset="0"/>
-                <a:ea typeface="Arial" pitchFamily="34" charset="-122"/>
-                <a:cs typeface="Arial" pitchFamily="34" charset="-120"/>
-              </a:rPr>
-              <a:t>Runs on live claims. Nobody sees the output.</a:t>
-            </a:r>
-            <a:endParaRPr lang="en-US" sz="760" dirty="0"/>
-          </a:p>
-        </p:txBody>
-      </p:sp>
-      <p:sp>
-        <p:nvSpPr>
-          <p:cNvPr id="69" name="Shape 67"/>
-          <p:cNvSpPr/>
-          <p:nvPr/>
-        </p:nvSpPr>
-        <p:spPr>
-          <a:xfrm>
-            <a:off x="3092958" y="5623560"/>
-            <a:ext cx="164592" cy="0"/>
+            <a:off x="1227582" y="1792224"/>
+            <a:ext cx="1943100" cy="1645920"/>
           </a:xfrm>
           <a:prstGeom prst="line">
             <a:avLst/>
@@ -15128,161 +14732,14 @@
       </p:sp>
       <p:sp>
         <p:nvSpPr>
-          <p:cNvPr id="70" name="Shape 68"/>
+          <p:cNvPr id="60" name="Shape 58"/>
           <p:cNvSpPr/>
           <p:nvPr/>
         </p:nvSpPr>
         <p:spPr>
           <a:xfrm>
-            <a:off x="3284982" y="5303520"/>
-            <a:ext cx="2699766" cy="640080"/>
-          </a:xfrm>
-          <a:prstGeom prst="roundRect">
-            <a:avLst>
-              <a:gd name="adj" fmla="val 8571"/>
-            </a:avLst>
-          </a:prstGeom>
-          <a:solidFill>
-            <a:srgbClr val="E4F4F8"/>
-          </a:solidFill>
-          <a:ln w="15240">
-            <a:solidFill>
-              <a:srgbClr val="0891B2"/>
-            </a:solidFill>
-            <a:prstDash val="solid"/>
-          </a:ln>
-        </p:spPr>
-      </p:sp>
-      <p:sp>
-        <p:nvSpPr>
-          <p:cNvPr id="71" name="Text 69"/>
-          <p:cNvSpPr txBox="1"/>
-          <p:nvPr/>
-        </p:nvSpPr>
-        <p:spPr>
-          <a:xfrm>
-            <a:off x="3431286" y="5376672"/>
-            <a:ext cx="2407158" cy="182880"/>
-          </a:xfrm>
-          <a:prstGeom prst="rect">
-            <a:avLst/>
-          </a:prstGeom>
-          <a:noFill/>
-          <a:ln/>
-        </p:spPr>
-        <p:txBody>
-          <a:bodyPr wrap="square" lIns="0" tIns="0" rIns="0" bIns="0" rtlCol="0" anchor="ctr"/>
-          <a:lstStyle/>
-          <a:p>
-            <a:pPr indent="0" marL="0">
-              <a:buNone/>
-            </a:pPr>
-            <a:r>
-              <a:rPr lang="en-US" sz="960" b="1" dirty="0">
-                <a:solidFill>
-                  <a:srgbClr val="0891B2"/>
-                </a:solidFill>
-                <a:latin typeface="Arial" pitchFamily="34" charset="0"/>
-                <a:ea typeface="Arial" pitchFamily="34" charset="-122"/>
-                <a:cs typeface="Arial" pitchFamily="34" charset="-120"/>
-              </a:rPr>
-              <a:t>Suggest</a:t>
-            </a:r>
-            <a:endParaRPr lang="en-US" sz="960" dirty="0"/>
-          </a:p>
-        </p:txBody>
-      </p:sp>
-      <p:sp>
-        <p:nvSpPr>
-          <p:cNvPr id="72" name="Text 70"/>
-          <p:cNvSpPr txBox="1"/>
-          <p:nvPr/>
-        </p:nvSpPr>
-        <p:spPr>
-          <a:xfrm>
-            <a:off x="3431286" y="5376672"/>
-            <a:ext cx="2407158" cy="182880"/>
-          </a:xfrm>
-          <a:prstGeom prst="rect">
-            <a:avLst/>
-          </a:prstGeom>
-          <a:noFill/>
-          <a:ln/>
-        </p:spPr>
-        <p:txBody>
-          <a:bodyPr wrap="square" lIns="0" tIns="0" rIns="0" bIns="0" rtlCol="0" anchor="ctr"/>
-          <a:lstStyle/>
-          <a:p>
-            <a:pPr algn="r" indent="0" marL="0">
-              <a:buNone/>
-            </a:pPr>
-            <a:r>
-              <a:rPr lang="en-US" sz="740" i="1" dirty="0">
-                <a:solidFill>
-                  <a:srgbClr val="5B6472"/>
-                </a:solidFill>
-                <a:latin typeface="Arial" pitchFamily="34" charset="0"/>
-                <a:ea typeface="Arial" pitchFamily="34" charset="-122"/>
-                <a:cs typeface="Arial" pitchFamily="34" charset="-120"/>
-              </a:rPr>
-              <a:t>weeks 9–16</a:t>
-            </a:r>
-            <a:endParaRPr lang="en-US" sz="740" dirty="0"/>
-          </a:p>
-        </p:txBody>
-      </p:sp>
-      <p:sp>
-        <p:nvSpPr>
-          <p:cNvPr id="73" name="Text 71"/>
-          <p:cNvSpPr txBox="1"/>
-          <p:nvPr/>
-        </p:nvSpPr>
-        <p:spPr>
-          <a:xfrm>
-            <a:off x="3431286" y="5559552"/>
-            <a:ext cx="2407158" cy="329184"/>
-          </a:xfrm>
-          <a:prstGeom prst="rect">
-            <a:avLst/>
-          </a:prstGeom>
-          <a:noFill/>
-          <a:ln/>
-        </p:spPr>
-        <p:txBody>
-          <a:bodyPr wrap="square" lIns="0" tIns="0" rIns="0" bIns="0" rtlCol="0" anchor="ctr"/>
-          <a:lstStyle/>
-          <a:p>
-            <a:pPr indent="0" marL="0">
-              <a:lnSpc>
-                <a:spcPct val="110000"/>
-              </a:lnSpc>
-              <a:buNone/>
-            </a:pPr>
-            <a:r>
-              <a:rPr lang="en-US" sz="760" dirty="0">
-                <a:solidFill>
-                  <a:srgbClr val="3A3A3A"/>
-                </a:solidFill>
-                <a:latin typeface="Arial" pitchFamily="34" charset="0"/>
-                <a:ea typeface="Arial" pitchFamily="34" charset="-122"/>
-                <a:cs typeface="Arial" pitchFamily="34" charset="-120"/>
-              </a:rPr>
-              <a:t>The handler must edit or approve. Nothing sends itself.</a:t>
-            </a:r>
-            <a:endParaRPr lang="en-US" sz="760" dirty="0"/>
-          </a:p>
-        </p:txBody>
-      </p:sp>
-      <p:sp>
-        <p:nvSpPr>
-          <p:cNvPr id="74" name="Shape 72"/>
-          <p:cNvSpPr/>
-          <p:nvPr/>
-        </p:nvSpPr>
-        <p:spPr>
-          <a:xfrm>
-            <a:off x="6012180" y="5623560"/>
-            <a:ext cx="164592" cy="0"/>
+            <a:off x="4032504" y="3749040"/>
+            <a:ext cx="219456" cy="0"/>
           </a:xfrm>
           <a:prstGeom prst="line">
             <a:avLst/>
@@ -15299,161 +14756,14 @@
       </p:sp>
       <p:sp>
         <p:nvSpPr>
-          <p:cNvPr id="75" name="Shape 73"/>
+          <p:cNvPr id="61" name="Shape 59"/>
           <p:cNvSpPr/>
           <p:nvPr/>
         </p:nvSpPr>
         <p:spPr>
-          <a:xfrm>
-            <a:off x="6204204" y="5303520"/>
-            <a:ext cx="2699766" cy="640080"/>
-          </a:xfrm>
-          <a:prstGeom prst="roundRect">
-            <a:avLst>
-              <a:gd name="adj" fmla="val 8571"/>
-            </a:avLst>
-          </a:prstGeom>
-          <a:solidFill>
-            <a:srgbClr val="EDECFB"/>
-          </a:solidFill>
-          <a:ln w="15240">
-            <a:solidFill>
-              <a:srgbClr val="4338CA"/>
-            </a:solidFill>
-            <a:prstDash val="solid"/>
-          </a:ln>
-        </p:spPr>
-      </p:sp>
-      <p:sp>
-        <p:nvSpPr>
-          <p:cNvPr id="76" name="Text 74"/>
-          <p:cNvSpPr txBox="1"/>
-          <p:nvPr/>
-        </p:nvSpPr>
-        <p:spPr>
-          <a:xfrm>
-            <a:off x="6350508" y="5376672"/>
-            <a:ext cx="2407158" cy="182880"/>
-          </a:xfrm>
-          <a:prstGeom prst="rect">
-            <a:avLst/>
-          </a:prstGeom>
-          <a:noFill/>
-          <a:ln/>
-        </p:spPr>
-        <p:txBody>
-          <a:bodyPr wrap="square" lIns="0" tIns="0" rIns="0" bIns="0" rtlCol="0" anchor="ctr"/>
-          <a:lstStyle/>
-          <a:p>
-            <a:pPr indent="0" marL="0">
-              <a:buNone/>
-            </a:pPr>
-            <a:r>
-              <a:rPr lang="en-US" sz="960" b="1" dirty="0">
-                <a:solidFill>
-                  <a:srgbClr val="4338CA"/>
-                </a:solidFill>
-                <a:latin typeface="Arial" pitchFamily="34" charset="0"/>
-                <a:ea typeface="Arial" pitchFamily="34" charset="-122"/>
-                <a:cs typeface="Arial" pitchFamily="34" charset="-120"/>
-              </a:rPr>
-              <a:t>Approve</a:t>
-            </a:r>
-            <a:endParaRPr lang="en-US" sz="960" dirty="0"/>
-          </a:p>
-        </p:txBody>
-      </p:sp>
-      <p:sp>
-        <p:nvSpPr>
-          <p:cNvPr id="77" name="Text 75"/>
-          <p:cNvSpPr txBox="1"/>
-          <p:nvPr/>
-        </p:nvSpPr>
-        <p:spPr>
-          <a:xfrm>
-            <a:off x="6350508" y="5376672"/>
-            <a:ext cx="2407158" cy="182880"/>
-          </a:xfrm>
-          <a:prstGeom prst="rect">
-            <a:avLst/>
-          </a:prstGeom>
-          <a:noFill/>
-          <a:ln/>
-        </p:spPr>
-        <p:txBody>
-          <a:bodyPr wrap="square" lIns="0" tIns="0" rIns="0" bIns="0" rtlCol="0" anchor="ctr"/>
-          <a:lstStyle/>
-          <a:p>
-            <a:pPr algn="r" indent="0" marL="0">
-              <a:buNone/>
-            </a:pPr>
-            <a:r>
-              <a:rPr lang="en-US" sz="740" i="1" dirty="0">
-                <a:solidFill>
-                  <a:srgbClr val="5B6472"/>
-                </a:solidFill>
-                <a:latin typeface="Arial" pitchFamily="34" charset="0"/>
-                <a:ea typeface="Arial" pitchFamily="34" charset="-122"/>
-                <a:cs typeface="Arial" pitchFamily="34" charset="-120"/>
-              </a:rPr>
-              <a:t>months 5–6</a:t>
-            </a:r>
-            <a:endParaRPr lang="en-US" sz="740" dirty="0"/>
-          </a:p>
-        </p:txBody>
-      </p:sp>
-      <p:sp>
-        <p:nvSpPr>
-          <p:cNvPr id="78" name="Text 76"/>
-          <p:cNvSpPr txBox="1"/>
-          <p:nvPr/>
-        </p:nvSpPr>
-        <p:spPr>
-          <a:xfrm>
-            <a:off x="6350508" y="5559552"/>
-            <a:ext cx="2407158" cy="329184"/>
-          </a:xfrm>
-          <a:prstGeom prst="rect">
-            <a:avLst/>
-          </a:prstGeom>
-          <a:noFill/>
-          <a:ln/>
-        </p:spPr>
-        <p:txBody>
-          <a:bodyPr wrap="square" lIns="0" tIns="0" rIns="0" bIns="0" rtlCol="0" anchor="ctr"/>
-          <a:lstStyle/>
-          <a:p>
-            <a:pPr indent="0" marL="0">
-              <a:lnSpc>
-                <a:spcPct val="110000"/>
-              </a:lnSpc>
-              <a:buNone/>
-            </a:pPr>
-            <a:r>
-              <a:rPr lang="en-US" sz="760" dirty="0">
-                <a:solidFill>
-                  <a:srgbClr val="3A3A3A"/>
-                </a:solidFill>
-                <a:latin typeface="Arial" pitchFamily="34" charset="0"/>
-                <a:ea typeface="Arial" pitchFamily="34" charset="-122"/>
-                <a:cs typeface="Arial" pitchFamily="34" charset="-120"/>
-              </a:rPr>
-              <a:t>Minor claims pre-filled. One click accepts.</a:t>
-            </a:r>
-            <a:endParaRPr lang="en-US" sz="760" dirty="0"/>
-          </a:p>
-        </p:txBody>
-      </p:sp>
-      <p:sp>
-        <p:nvSpPr>
-          <p:cNvPr id="79" name="Shape 77"/>
-          <p:cNvSpPr/>
-          <p:nvPr/>
-        </p:nvSpPr>
-        <p:spPr>
-          <a:xfrm>
-            <a:off x="8931402" y="5623560"/>
-            <a:ext cx="164592" cy="0"/>
+          <a:xfrm flipV="1">
+            <a:off x="5113782" y="2926080"/>
+            <a:ext cx="1943100" cy="512064"/>
           </a:xfrm>
           <a:prstGeom prst="line">
             <a:avLst/>
@@ -15470,41 +14780,110 @@
       </p:sp>
       <p:sp>
         <p:nvSpPr>
-          <p:cNvPr id="80" name="Shape 78"/>
+          <p:cNvPr id="62" name="Shape 60"/>
           <p:cNvSpPr/>
           <p:nvPr/>
         </p:nvSpPr>
         <p:spPr>
           <a:xfrm>
-            <a:off x="9123426" y="5303520"/>
-            <a:ext cx="2699766" cy="640080"/>
-          </a:xfrm>
-          <a:prstGeom prst="roundRect">
-            <a:avLst>
-              <a:gd name="adj" fmla="val 8571"/>
-            </a:avLst>
-          </a:prstGeom>
-          <a:solidFill>
-            <a:srgbClr val="FBE9F1"/>
-          </a:solidFill>
-          <a:ln w="15240">
+            <a:off x="7056882" y="2926080"/>
+            <a:ext cx="1943100" cy="512064"/>
+          </a:xfrm>
+          <a:prstGeom prst="line">
+            <a:avLst/>
+          </a:prstGeom>
+          <a:noFill/>
+          <a:ln w="12700">
             <a:solidFill>
-              <a:srgbClr val="BE185D"/>
+              <a:srgbClr val="5B7D80"/>
             </a:solidFill>
             <a:prstDash val="solid"/>
+            <a:tailEnd type="triangle"/>
           </a:ln>
         </p:spPr>
       </p:sp>
       <p:sp>
         <p:nvSpPr>
-          <p:cNvPr id="81" name="Text 79"/>
-          <p:cNvSpPr txBox="1"/>
-          <p:nvPr/>
-        </p:nvSpPr>
-        <p:spPr>
-          <a:xfrm>
-            <a:off x="9269730" y="5376672"/>
-            <a:ext cx="2407158" cy="182880"/>
+          <p:cNvPr id="63" name="Shape 61"/>
+          <p:cNvSpPr/>
+          <p:nvPr/>
+        </p:nvSpPr>
+        <p:spPr>
+          <a:xfrm>
+            <a:off x="7056882" y="2926080"/>
+            <a:ext cx="0" cy="512064"/>
+          </a:xfrm>
+          <a:prstGeom prst="line">
+            <a:avLst/>
+          </a:prstGeom>
+          <a:noFill/>
+          <a:ln w="12700">
+            <a:solidFill>
+              <a:srgbClr val="5B7D80"/>
+            </a:solidFill>
+            <a:prstDash val="dash"/>
+            <a:tailEnd type="triangle"/>
+          </a:ln>
+        </p:spPr>
+      </p:sp>
+      <p:sp>
+        <p:nvSpPr>
+          <p:cNvPr id="64" name="Shape 62"/>
+          <p:cNvSpPr/>
+          <p:nvPr/>
+        </p:nvSpPr>
+        <p:spPr>
+          <a:xfrm>
+            <a:off x="7918704" y="3749040"/>
+            <a:ext cx="219456" cy="0"/>
+          </a:xfrm>
+          <a:prstGeom prst="line">
+            <a:avLst/>
+          </a:prstGeom>
+          <a:noFill/>
+          <a:ln w="12700">
+            <a:solidFill>
+              <a:srgbClr val="5B7D80"/>
+            </a:solidFill>
+            <a:prstDash val="dash"/>
+            <a:tailEnd type="triangle"/>
+          </a:ln>
+        </p:spPr>
+      </p:sp>
+      <p:sp>
+        <p:nvSpPr>
+          <p:cNvPr id="65" name="Shape 63"/>
+          <p:cNvSpPr/>
+          <p:nvPr/>
+        </p:nvSpPr>
+        <p:spPr>
+          <a:xfrm>
+            <a:off x="8999982" y="4059936"/>
+            <a:ext cx="1943100" cy="512064"/>
+          </a:xfrm>
+          <a:prstGeom prst="line">
+            <a:avLst/>
+          </a:prstGeom>
+          <a:noFill/>
+          <a:ln w="12700">
+            <a:solidFill>
+              <a:srgbClr val="5B7D80"/>
+            </a:solidFill>
+            <a:prstDash val="solid"/>
+            <a:tailEnd type="triangle"/>
+          </a:ln>
+        </p:spPr>
+      </p:sp>
+      <p:sp>
+        <p:nvSpPr>
+          <p:cNvPr id="66" name="Text 64"/>
+          <p:cNvSpPr txBox="1"/>
+          <p:nvPr/>
+        </p:nvSpPr>
+        <p:spPr>
+          <a:xfrm>
+            <a:off x="365760" y="5413248"/>
+            <a:ext cx="11457432" cy="201168"/>
           </a:xfrm>
           <a:prstGeom prst="rect">
             <a:avLst/>
@@ -15520,46 +14899,46 @@
               <a:buNone/>
             </a:pPr>
             <a:r>
-              <a:rPr lang="en-US" sz="960" b="1" dirty="0">
-                <a:solidFill>
-                  <a:srgbClr val="BE185D"/>
-                </a:solidFill>
-                <a:latin typeface="Arial" pitchFamily="34" charset="0"/>
-                <a:ea typeface="Arial" pitchFamily="34" charset="-122"/>
-                <a:cs typeface="Arial" pitchFamily="34" charset="-120"/>
-              </a:rPr>
-              <a:t>Never</a:t>
-            </a:r>
-            <a:endParaRPr lang="en-US" sz="960" dirty="0"/>
-          </a:p>
-        </p:txBody>
-      </p:sp>
-      <p:sp>
-        <p:nvSpPr>
-          <p:cNvPr id="82" name="Text 80"/>
-          <p:cNvSpPr txBox="1"/>
-          <p:nvPr/>
-        </p:nvSpPr>
-        <p:spPr>
-          <a:xfrm>
-            <a:off x="9269730" y="5376672"/>
-            <a:ext cx="2407158" cy="182880"/>
-          </a:xfrm>
-          <a:prstGeom prst="rect">
-            <a:avLst/>
-          </a:prstGeom>
-          <a:noFill/>
-          <a:ln/>
-        </p:spPr>
-        <p:txBody>
-          <a:bodyPr wrap="square" lIns="0" tIns="0" rIns="0" bIns="0" rtlCol="0" anchor="ctr"/>
-          <a:lstStyle/>
-          <a:p>
-            <a:pPr algn="r" indent="0" marL="0">
-              <a:buNone/>
-            </a:pPr>
-            <a:r>
-              <a:rPr lang="en-US" sz="740" i="1" dirty="0">
+              <a:rPr lang="en-US" sz="840" b="1" i="1" dirty="0">
+                <a:solidFill>
+                  <a:srgbClr val="2A2A3E"/>
+                </a:solidFill>
+                <a:latin typeface="Arial" pitchFamily="34" charset="0"/>
+                <a:ea typeface="Arial" pitchFamily="34" charset="-122"/>
+                <a:cs typeface="Arial" pitchFamily="34" charset="-120"/>
+              </a:rPr>
+              <a:t>AI owns the drafting. Rules own the facts. A person owns every call that can go against a claimant.</a:t>
+            </a:r>
+            <a:endParaRPr lang="en-US" sz="840" dirty="0"/>
+          </a:p>
+        </p:txBody>
+      </p:sp>
+      <p:sp>
+        <p:nvSpPr>
+          <p:cNvPr id="67" name="Text 65"/>
+          <p:cNvSpPr txBox="1"/>
+          <p:nvPr/>
+        </p:nvSpPr>
+        <p:spPr>
+          <a:xfrm>
+            <a:off x="365760" y="5632704"/>
+            <a:ext cx="11457432" cy="201168"/>
+          </a:xfrm>
+          <a:prstGeom prst="rect">
+            <a:avLst/>
+          </a:prstGeom>
+          <a:noFill/>
+          <a:ln/>
+        </p:spPr>
+        <p:txBody>
+          <a:bodyPr wrap="square" lIns="0" tIns="0" rIns="0" bIns="0" rtlCol="0" anchor="ctr"/>
+          <a:lstStyle/>
+          <a:p>
+            <a:pPr indent="0" marL="0">
+              <a:buNone/>
+            </a:pPr>
+            <a:r>
+              <a:rPr lang="en-US" sz="760" dirty="0">
                 <a:solidFill>
                   <a:srgbClr val="5B6472"/>
                 </a:solidFill>
@@ -15567,22 +14946,22 @@
                 <a:ea typeface="Arial" pitchFamily="34" charset="-122"/>
                 <a:cs typeface="Arial" pitchFamily="34" charset="-120"/>
               </a:rPr>
-              <a:t>by design</a:t>
-            </a:r>
-            <a:endParaRPr lang="en-US" sz="740" dirty="0"/>
-          </a:p>
-        </p:txBody>
-      </p:sp>
-      <p:sp>
-        <p:nvSpPr>
-          <p:cNvPr id="83" name="Text 81"/>
-          <p:cNvSpPr txBox="1"/>
-          <p:nvPr/>
-        </p:nvSpPr>
-        <p:spPr>
-          <a:xfrm>
-            <a:off x="9269730" y="5559552"/>
-            <a:ext cx="2407158" cy="329184"/>
+              <a:t>One typed ClaimState carries fields, confidence and the audit trail through every station · LangGraph checkpoints it in PostgreSQL, so a failed run resumes rather than restarts</a:t>
+            </a:r>
+            <a:endParaRPr lang="en-US" sz="760" dirty="0"/>
+          </a:p>
+        </p:txBody>
+      </p:sp>
+      <p:sp>
+        <p:nvSpPr>
+          <p:cNvPr id="68" name="Text 66"/>
+          <p:cNvSpPr txBox="1"/>
+          <p:nvPr/>
+        </p:nvSpPr>
+        <p:spPr>
+          <a:xfrm>
+            <a:off x="365760" y="5852160"/>
+            <a:ext cx="11457432" cy="201168"/>
           </a:xfrm>
           <a:prstGeom prst="rect">
             <a:avLst/>
@@ -15595,21 +14974,18 @@
           <a:lstStyle/>
           <a:p>
             <a:pPr indent="0" marL="0">
-              <a:lnSpc>
-                <a:spcPct val="110000"/>
-              </a:lnSpc>
-              <a:buNone/>
-            </a:pPr>
-            <a:r>
-              <a:rPr lang="en-US" sz="760" dirty="0">
-                <a:solidFill>
-                  <a:srgbClr val="3A3A3A"/>
-                </a:solidFill>
-                <a:latin typeface="Arial" pitchFamily="34" charset="0"/>
-                <a:ea typeface="Arial" pitchFamily="34" charset="-122"/>
-                <a:cs typeface="Arial" pitchFamily="34" charset="-120"/>
-              </a:rPr>
-              <a:t>Nothing adverse to a claimant is ever automatic.</a:t>
+              <a:buNone/>
+            </a:pPr>
+            <a:r>
+              <a:rPr lang="en-US" sz="760" i="1" dirty="0">
+                <a:solidFill>
+                  <a:srgbClr val="5B6472"/>
+                </a:solidFill>
+                <a:latin typeface="Arial" pitchFamily="34" charset="0"/>
+                <a:ea typeface="Arial" pitchFamily="34" charset="-122"/>
+                <a:cs typeface="Arial" pitchFamily="34" charset="-120"/>
+              </a:rPr>
+              <a:t>The stack, hosting and rollout gates are on the next slide</a:t>
             </a:r>
             <a:endParaRPr lang="en-US" sz="760" dirty="0"/>
           </a:p>
@@ -15617,46 +14993,7 @@
       </p:sp>
       <p:sp>
         <p:nvSpPr>
-          <p:cNvPr id="84" name="Text 82"/>
-          <p:cNvSpPr txBox="1"/>
-          <p:nvPr/>
-        </p:nvSpPr>
-        <p:spPr>
-          <a:xfrm>
-            <a:off x="365760" y="6035040"/>
-            <a:ext cx="11430000" cy="219456"/>
-          </a:xfrm>
-          <a:prstGeom prst="rect">
-            <a:avLst/>
-          </a:prstGeom>
-          <a:noFill/>
-          <a:ln/>
-        </p:spPr>
-        <p:txBody>
-          <a:bodyPr wrap="square" lIns="0" tIns="0" rIns="0" bIns="0" rtlCol="0" anchor="ctr"/>
-          <a:lstStyle/>
-          <a:p>
-            <a:pPr indent="0" marL="0">
-              <a:buNone/>
-            </a:pPr>
-            <a:r>
-              <a:rPr lang="en-US" sz="700" dirty="0">
-                <a:solidFill>
-                  <a:srgbClr val="5B6472"/>
-                </a:solidFill>
-                <a:latin typeface="Arial" pitchFamily="34" charset="0"/>
-                <a:ea typeface="Arial" pitchFamily="34" charset="-122"/>
-                <a:cs typeface="Arial" pitchFamily="34" charset="-120"/>
-              </a:rPr>
-              <a:t>If an agent fails or is unsure, the claim drops into today's manual queue — slower, never wrong · what it costs is on slide 7</a:t>
-            </a:r>
-            <a:endParaRPr lang="en-US" sz="700" dirty="0"/>
-          </a:p>
-        </p:txBody>
-      </p:sp>
-      <p:sp>
-        <p:nvSpPr>
-          <p:cNvPr id="85" name="Text 83"/>
+          <p:cNvPr id="69" name="Text 67"/>
           <p:cNvSpPr txBox="1"/>
           <p:nvPr/>
         </p:nvSpPr>
@@ -15695,7 +15032,7 @@
       </p:sp>
       <p:sp>
         <p:nvSpPr>
-          <p:cNvPr id="86" name="Text 84"/>
+          <p:cNvPr id="70" name="Text 68"/>
           <p:cNvSpPr txBox="1"/>
           <p:nvPr/>
         </p:nvSpPr>
@@ -15726,7 +15063,7 @@
                 <a:ea typeface="Arial" pitchFamily="34" charset="-122"/>
                 <a:cs typeface="Arial" pitchFamily="34" charset="-120"/>
               </a:rPr>
-              <a:t>6 / 8</a:t>
+              <a:t>6 / 9</a:t>
             </a:r>
             <a:endParaRPr lang="en-US" sz="800" dirty="0"/>
           </a:p>
@@ -15797,6 +15134,2397 @@
                 <a:ea typeface="Cambria" pitchFamily="34" charset="-122"/>
                 <a:cs typeface="Cambria" pitchFamily="34" charset="-120"/>
               </a:rPr>
+              <a:t>Deployed on the cloud GGW already run, released in three gated steps, never blind</a:t>
+            </a:r>
+            <a:endParaRPr lang="en-US" sz="1400" dirty="0"/>
+          </a:p>
+        </p:txBody>
+      </p:sp>
+      <p:sp>
+        <p:nvSpPr>
+          <p:cNvPr id="3" name="Text 1"/>
+          <p:cNvSpPr txBox="1"/>
+          <p:nvPr/>
+        </p:nvSpPr>
+        <p:spPr>
+          <a:xfrm>
+            <a:off x="8595360" y="146304"/>
+            <a:ext cx="3227832" cy="274320"/>
+          </a:xfrm>
+          <a:prstGeom prst="rect">
+            <a:avLst/>
+          </a:prstGeom>
+          <a:noFill/>
+          <a:ln/>
+        </p:spPr>
+        <p:txBody>
+          <a:bodyPr wrap="square" lIns="0" tIns="0" rIns="0" bIns="0" rtlCol="0" anchor="ctr"/>
+          <a:lstStyle/>
+          <a:p>
+            <a:pPr algn="r" indent="0" marL="0">
+              <a:buNone/>
+            </a:pPr>
+            <a:r>
+              <a:rPr lang="en-US" sz="950" b="1" spc="140" kern="0" dirty="0">
+                <a:solidFill>
+                  <a:srgbClr val="5B6472"/>
+                </a:solidFill>
+                <a:latin typeface="Arial" pitchFamily="34" charset="0"/>
+                <a:ea typeface="Arial" pitchFamily="34" charset="-122"/>
+                <a:cs typeface="Arial" pitchFamily="34" charset="-120"/>
+              </a:rPr>
+              <a:t>STACK &amp; ROLLOUT</a:t>
+            </a:r>
+            <a:endParaRPr lang="en-US" sz="950" dirty="0"/>
+          </a:p>
+        </p:txBody>
+      </p:sp>
+      <p:sp>
+        <p:nvSpPr>
+          <p:cNvPr id="4" name="Shape 2"/>
+          <p:cNvSpPr/>
+          <p:nvPr/>
+        </p:nvSpPr>
+        <p:spPr>
+          <a:xfrm>
+            <a:off x="365760" y="640080"/>
+            <a:ext cx="1723644" cy="475488"/>
+          </a:xfrm>
+          <a:prstGeom prst="roundRect">
+            <a:avLst>
+              <a:gd name="adj" fmla="val 9615"/>
+            </a:avLst>
+          </a:prstGeom>
+          <a:solidFill>
+            <a:srgbClr val="FDF3E3"/>
+          </a:solidFill>
+          <a:ln w="12700">
+            <a:solidFill>
+              <a:srgbClr val="D97706"/>
+            </a:solidFill>
+            <a:prstDash val="solid"/>
+          </a:ln>
+        </p:spPr>
+      </p:sp>
+      <p:sp>
+        <p:nvSpPr>
+          <p:cNvPr id="5" name="Text 3"/>
+          <p:cNvSpPr txBox="1"/>
+          <p:nvPr/>
+        </p:nvSpPr>
+        <p:spPr>
+          <a:xfrm>
+            <a:off x="438912" y="640080"/>
+            <a:ext cx="1577340" cy="475488"/>
+          </a:xfrm>
+          <a:prstGeom prst="rect">
+            <a:avLst/>
+          </a:prstGeom>
+          <a:noFill/>
+          <a:ln/>
+        </p:spPr>
+        <p:txBody>
+          <a:bodyPr wrap="square" lIns="0" tIns="0" rIns="0" bIns="0" rtlCol="0" anchor="ctr"/>
+          <a:lstStyle/>
+          <a:p>
+            <a:pPr algn="ctr" indent="0" marL="0">
+              <a:lnSpc>
+                <a:spcPct val="108000"/>
+              </a:lnSpc>
+              <a:buNone/>
+            </a:pPr>
+            <a:r>
+              <a:rPr lang="en-US" sz="800" b="1" dirty="0">
+                <a:solidFill>
+                  <a:srgbClr val="9A5A0A"/>
+                </a:solidFill>
+                <a:latin typeface="Arial" pitchFamily="34" charset="0"/>
+                <a:ea typeface="Arial" pitchFamily="34" charset="-122"/>
+                <a:cs typeface="Arial" pitchFamily="34" charset="-120"/>
+              </a:rPr>
+              <a:t>Service Bus</a:t>
+            </a:r>
+            <a:endParaRPr lang="en-US" sz="800" dirty="0"/>
+          </a:p>
+          <a:p>
+            <a:pPr algn="ctr" indent="0" marL="0">
+              <a:lnSpc>
+                <a:spcPct val="108000"/>
+              </a:lnSpc>
+              <a:buNone/>
+            </a:pPr>
+            <a:r>
+              <a:rPr lang="en-US" sz="800" b="1" dirty="0">
+                <a:solidFill>
+                  <a:srgbClr val="9A5A0A"/>
+                </a:solidFill>
+                <a:latin typeface="Arial" pitchFamily="34" charset="0"/>
+                <a:ea typeface="Arial" pitchFamily="34" charset="-122"/>
+                <a:cs typeface="Arial" pitchFamily="34" charset="-120"/>
+              </a:rPr>
+              <a:t>failures park, nothing is lost</a:t>
+            </a:r>
+            <a:endParaRPr lang="en-US" sz="800" dirty="0"/>
+          </a:p>
+        </p:txBody>
+      </p:sp>
+      <p:sp>
+        <p:nvSpPr>
+          <p:cNvPr id="6" name="Shape 4"/>
+          <p:cNvSpPr/>
+          <p:nvPr/>
+        </p:nvSpPr>
+        <p:spPr>
+          <a:xfrm>
+            <a:off x="2308860" y="640080"/>
+            <a:ext cx="9185148" cy="475488"/>
+          </a:xfrm>
+          <a:prstGeom prst="roundRect">
+            <a:avLst>
+              <a:gd name="adj" fmla="val 9615"/>
+            </a:avLst>
+          </a:prstGeom>
+          <a:solidFill>
+            <a:srgbClr val="ECEFF3"/>
+          </a:solidFill>
+          <a:ln w="12700">
+            <a:solidFill>
+              <a:srgbClr val="6B7787"/>
+            </a:solidFill>
+            <a:prstDash val="solid"/>
+          </a:ln>
+        </p:spPr>
+      </p:sp>
+      <p:sp>
+        <p:nvSpPr>
+          <p:cNvPr id="7" name="Text 5"/>
+          <p:cNvSpPr txBox="1"/>
+          <p:nvPr/>
+        </p:nvSpPr>
+        <p:spPr>
+          <a:xfrm>
+            <a:off x="2308860" y="640080"/>
+            <a:ext cx="9185148" cy="475488"/>
+          </a:xfrm>
+          <a:prstGeom prst="rect">
+            <a:avLst/>
+          </a:prstGeom>
+          <a:noFill/>
+          <a:ln/>
+        </p:spPr>
+        <p:txBody>
+          <a:bodyPr wrap="square" lIns="0" tIns="0" rIns="0" bIns="0" rtlCol="0" anchor="ctr"/>
+          <a:lstStyle/>
+          <a:p>
+            <a:pPr algn="ctr" indent="0" marL="0">
+              <a:buNone/>
+            </a:pPr>
+            <a:r>
+              <a:rPr lang="en-US" sz="900" b="1" dirty="0">
+                <a:solidFill>
+                  <a:srgbClr val="2A3340"/>
+                </a:solidFill>
+                <a:latin typeface="Arial" pitchFamily="34" charset="0"/>
+                <a:ea typeface="Arial" pitchFamily="34" charset="-122"/>
+                <a:cs typeface="Arial" pitchFamily="34" charset="-120"/>
+              </a:rPr>
+              <a:t>PostgreSQL  ·  graph checkpoint and audit log in one place — every decision, its inputs and its confidence</a:t>
+            </a:r>
+            <a:endParaRPr lang="en-US" sz="900" dirty="0"/>
+          </a:p>
+        </p:txBody>
+      </p:sp>
+      <p:sp>
+        <p:nvSpPr>
+          <p:cNvPr id="8" name="Text 6"/>
+          <p:cNvSpPr txBox="1"/>
+          <p:nvPr/>
+        </p:nvSpPr>
+        <p:spPr>
+          <a:xfrm>
+            <a:off x="365760" y="1408176"/>
+            <a:ext cx="2743200" cy="201168"/>
+          </a:xfrm>
+          <a:prstGeom prst="rect">
+            <a:avLst/>
+          </a:prstGeom>
+          <a:noFill/>
+          <a:ln/>
+        </p:spPr>
+        <p:txBody>
+          <a:bodyPr wrap="square" lIns="0" tIns="0" rIns="0" bIns="0" rtlCol="0" anchor="ctr"/>
+          <a:lstStyle/>
+          <a:p>
+            <a:pPr indent="0" marL="0">
+              <a:buNone/>
+            </a:pPr>
+            <a:r>
+              <a:rPr lang="en-US" sz="950" b="1" spc="90" kern="0" dirty="0">
+                <a:solidFill>
+                  <a:srgbClr val="0891B2"/>
+                </a:solidFill>
+                <a:latin typeface="Arial" pitchFamily="34" charset="0"/>
+                <a:ea typeface="Arial" pitchFamily="34" charset="-122"/>
+                <a:cs typeface="Arial" pitchFamily="34" charset="-120"/>
+              </a:rPr>
+              <a:t>THE STACK</a:t>
+            </a:r>
+            <a:endParaRPr lang="en-US" sz="950" dirty="0"/>
+          </a:p>
+        </p:txBody>
+      </p:sp>
+      <p:sp>
+        <p:nvSpPr>
+          <p:cNvPr id="9" name="Shape 7"/>
+          <p:cNvSpPr/>
+          <p:nvPr/>
+        </p:nvSpPr>
+        <p:spPr>
+          <a:xfrm>
+            <a:off x="365760" y="1682496"/>
+            <a:ext cx="1126744" cy="457200"/>
+          </a:xfrm>
+          <a:prstGeom prst="roundRect">
+            <a:avLst>
+              <a:gd name="adj" fmla="val 12000"/>
+            </a:avLst>
+          </a:prstGeom>
+          <a:solidFill>
+            <a:srgbClr val="FFFFFF"/>
+          </a:solidFill>
+          <a:ln w="15240">
+            <a:solidFill>
+              <a:srgbClr val="0891B2"/>
+            </a:solidFill>
+            <a:prstDash val="solid"/>
+          </a:ln>
+        </p:spPr>
+      </p:sp>
+      <p:sp>
+        <p:nvSpPr>
+          <p:cNvPr id="10" name="Text 8"/>
+          <p:cNvSpPr txBox="1"/>
+          <p:nvPr/>
+        </p:nvSpPr>
+        <p:spPr>
+          <a:xfrm>
+            <a:off x="402336" y="1682496"/>
+            <a:ext cx="1053592" cy="457200"/>
+          </a:xfrm>
+          <a:prstGeom prst="rect">
+            <a:avLst/>
+          </a:prstGeom>
+          <a:noFill/>
+          <a:ln/>
+        </p:spPr>
+        <p:txBody>
+          <a:bodyPr wrap="square" lIns="0" tIns="0" rIns="0" bIns="0" rtlCol="0" anchor="ctr"/>
+          <a:lstStyle/>
+          <a:p>
+            <a:pPr algn="ctr" indent="0" marL="0">
+              <a:lnSpc>
+                <a:spcPct val="100000"/>
+              </a:lnSpc>
+              <a:buNone/>
+            </a:pPr>
+            <a:r>
+              <a:rPr lang="en-US" sz="860" b="1" dirty="0">
+                <a:solidFill>
+                  <a:srgbClr val="0B5A66"/>
+                </a:solidFill>
+                <a:latin typeface="Arial" pitchFamily="34" charset="0"/>
+                <a:ea typeface="Arial" pitchFamily="34" charset="-122"/>
+                <a:cs typeface="Arial" pitchFamily="34" charset="-120"/>
+              </a:rPr>
+              <a:t>FastAPI</a:t>
+            </a:r>
+            <a:endParaRPr lang="en-US" sz="860" dirty="0"/>
+          </a:p>
+        </p:txBody>
+      </p:sp>
+      <p:sp>
+        <p:nvSpPr>
+          <p:cNvPr id="11" name="Shape 9"/>
+          <p:cNvSpPr/>
+          <p:nvPr/>
+        </p:nvSpPr>
+        <p:spPr>
+          <a:xfrm>
+            <a:off x="1657096" y="1682496"/>
+            <a:ext cx="1126744" cy="457200"/>
+          </a:xfrm>
+          <a:prstGeom prst="roundRect">
+            <a:avLst>
+              <a:gd name="adj" fmla="val 12000"/>
+            </a:avLst>
+          </a:prstGeom>
+          <a:solidFill>
+            <a:srgbClr val="FFFFFF"/>
+          </a:solidFill>
+          <a:ln w="15240">
+            <a:solidFill>
+              <a:srgbClr val="0891B2"/>
+            </a:solidFill>
+            <a:prstDash val="solid"/>
+          </a:ln>
+        </p:spPr>
+      </p:sp>
+      <p:sp>
+        <p:nvSpPr>
+          <p:cNvPr id="12" name="Text 10"/>
+          <p:cNvSpPr txBox="1"/>
+          <p:nvPr/>
+        </p:nvSpPr>
+        <p:spPr>
+          <a:xfrm>
+            <a:off x="1693672" y="1682496"/>
+            <a:ext cx="1053592" cy="457200"/>
+          </a:xfrm>
+          <a:prstGeom prst="rect">
+            <a:avLst/>
+          </a:prstGeom>
+          <a:noFill/>
+          <a:ln/>
+        </p:spPr>
+        <p:txBody>
+          <a:bodyPr wrap="square" lIns="0" tIns="0" rIns="0" bIns="0" rtlCol="0" anchor="ctr"/>
+          <a:lstStyle/>
+          <a:p>
+            <a:pPr algn="ctr" indent="0" marL="0">
+              <a:lnSpc>
+                <a:spcPct val="100000"/>
+              </a:lnSpc>
+              <a:buNone/>
+            </a:pPr>
+            <a:r>
+              <a:rPr lang="en-US" sz="860" b="1" dirty="0">
+                <a:solidFill>
+                  <a:srgbClr val="0B5A66"/>
+                </a:solidFill>
+                <a:latin typeface="Arial" pitchFamily="34" charset="0"/>
+                <a:ea typeface="Arial" pitchFamily="34" charset="-122"/>
+                <a:cs typeface="Arial" pitchFamily="34" charset="-120"/>
+              </a:rPr>
+              <a:t>LangGraph</a:t>
+            </a:r>
+            <a:endParaRPr lang="en-US" sz="860" dirty="0"/>
+          </a:p>
+        </p:txBody>
+      </p:sp>
+      <p:sp>
+        <p:nvSpPr>
+          <p:cNvPr id="13" name="Shape 11"/>
+          <p:cNvSpPr/>
+          <p:nvPr/>
+        </p:nvSpPr>
+        <p:spPr>
+          <a:xfrm>
+            <a:off x="2948432" y="1682496"/>
+            <a:ext cx="1126744" cy="457200"/>
+          </a:xfrm>
+          <a:prstGeom prst="roundRect">
+            <a:avLst>
+              <a:gd name="adj" fmla="val 12000"/>
+            </a:avLst>
+          </a:prstGeom>
+          <a:solidFill>
+            <a:srgbClr val="FFFFFF"/>
+          </a:solidFill>
+          <a:ln w="15240">
+            <a:solidFill>
+              <a:srgbClr val="0891B2"/>
+            </a:solidFill>
+            <a:prstDash val="solid"/>
+          </a:ln>
+        </p:spPr>
+      </p:sp>
+      <p:sp>
+        <p:nvSpPr>
+          <p:cNvPr id="14" name="Text 12"/>
+          <p:cNvSpPr txBox="1"/>
+          <p:nvPr/>
+        </p:nvSpPr>
+        <p:spPr>
+          <a:xfrm>
+            <a:off x="2985008" y="1682496"/>
+            <a:ext cx="1053592" cy="457200"/>
+          </a:xfrm>
+          <a:prstGeom prst="rect">
+            <a:avLst/>
+          </a:prstGeom>
+          <a:noFill/>
+          <a:ln/>
+        </p:spPr>
+        <p:txBody>
+          <a:bodyPr wrap="square" lIns="0" tIns="0" rIns="0" bIns="0" rtlCol="0" anchor="ctr"/>
+          <a:lstStyle/>
+          <a:p>
+            <a:pPr algn="ctr" indent="0" marL="0">
+              <a:lnSpc>
+                <a:spcPct val="100000"/>
+              </a:lnSpc>
+              <a:buNone/>
+            </a:pPr>
+            <a:r>
+              <a:rPr lang="en-US" sz="860" b="1" dirty="0">
+                <a:solidFill>
+                  <a:srgbClr val="0B5A66"/>
+                </a:solidFill>
+                <a:latin typeface="Arial" pitchFamily="34" charset="0"/>
+                <a:ea typeface="Arial" pitchFamily="34" charset="-122"/>
+                <a:cs typeface="Arial" pitchFamily="34" charset="-120"/>
+              </a:rPr>
+              <a:t>Pydantic</a:t>
+            </a:r>
+            <a:endParaRPr lang="en-US" sz="860" dirty="0"/>
+          </a:p>
+        </p:txBody>
+      </p:sp>
+      <p:sp>
+        <p:nvSpPr>
+          <p:cNvPr id="15" name="Shape 13"/>
+          <p:cNvSpPr/>
+          <p:nvPr/>
+        </p:nvSpPr>
+        <p:spPr>
+          <a:xfrm>
+            <a:off x="4239768" y="1682496"/>
+            <a:ext cx="1126744" cy="457200"/>
+          </a:xfrm>
+          <a:prstGeom prst="roundRect">
+            <a:avLst>
+              <a:gd name="adj" fmla="val 12000"/>
+            </a:avLst>
+          </a:prstGeom>
+          <a:solidFill>
+            <a:srgbClr val="FFFFFF"/>
+          </a:solidFill>
+          <a:ln w="15240">
+            <a:solidFill>
+              <a:srgbClr val="0891B2"/>
+            </a:solidFill>
+            <a:prstDash val="solid"/>
+          </a:ln>
+        </p:spPr>
+      </p:sp>
+      <p:sp>
+        <p:nvSpPr>
+          <p:cNvPr id="16" name="Text 14"/>
+          <p:cNvSpPr txBox="1"/>
+          <p:nvPr/>
+        </p:nvSpPr>
+        <p:spPr>
+          <a:xfrm>
+            <a:off x="4276344" y="1682496"/>
+            <a:ext cx="1053592" cy="457200"/>
+          </a:xfrm>
+          <a:prstGeom prst="rect">
+            <a:avLst/>
+          </a:prstGeom>
+          <a:noFill/>
+          <a:ln/>
+        </p:spPr>
+        <p:txBody>
+          <a:bodyPr wrap="square" lIns="0" tIns="0" rIns="0" bIns="0" rtlCol="0" anchor="ctr"/>
+          <a:lstStyle/>
+          <a:p>
+            <a:pPr algn="ctr" indent="0" marL="0">
+              <a:lnSpc>
+                <a:spcPct val="100000"/>
+              </a:lnSpc>
+              <a:buNone/>
+            </a:pPr>
+            <a:r>
+              <a:rPr lang="en-US" sz="860" b="1" dirty="0">
+                <a:solidFill>
+                  <a:srgbClr val="0B5A66"/>
+                </a:solidFill>
+                <a:latin typeface="Arial" pitchFamily="34" charset="0"/>
+                <a:ea typeface="Arial" pitchFamily="34" charset="-122"/>
+                <a:cs typeface="Arial" pitchFamily="34" charset="-120"/>
+              </a:rPr>
+              <a:t>PostgreSQL</a:t>
+            </a:r>
+            <a:endParaRPr lang="en-US" sz="860" dirty="0"/>
+          </a:p>
+        </p:txBody>
+      </p:sp>
+      <p:sp>
+        <p:nvSpPr>
+          <p:cNvPr id="17" name="Shape 15"/>
+          <p:cNvSpPr/>
+          <p:nvPr/>
+        </p:nvSpPr>
+        <p:spPr>
+          <a:xfrm>
+            <a:off x="5531104" y="1682496"/>
+            <a:ext cx="1126744" cy="457200"/>
+          </a:xfrm>
+          <a:prstGeom prst="roundRect">
+            <a:avLst>
+              <a:gd name="adj" fmla="val 12000"/>
+            </a:avLst>
+          </a:prstGeom>
+          <a:solidFill>
+            <a:srgbClr val="FFFFFF"/>
+          </a:solidFill>
+          <a:ln w="15240">
+            <a:solidFill>
+              <a:srgbClr val="0891B2"/>
+            </a:solidFill>
+            <a:prstDash val="solid"/>
+          </a:ln>
+        </p:spPr>
+      </p:sp>
+      <p:sp>
+        <p:nvSpPr>
+          <p:cNvPr id="18" name="Text 16"/>
+          <p:cNvSpPr txBox="1"/>
+          <p:nvPr/>
+        </p:nvSpPr>
+        <p:spPr>
+          <a:xfrm>
+            <a:off x="5567680" y="1682496"/>
+            <a:ext cx="1053592" cy="457200"/>
+          </a:xfrm>
+          <a:prstGeom prst="rect">
+            <a:avLst/>
+          </a:prstGeom>
+          <a:noFill/>
+          <a:ln/>
+        </p:spPr>
+        <p:txBody>
+          <a:bodyPr wrap="square" lIns="0" tIns="0" rIns="0" bIns="0" rtlCol="0" anchor="ctr"/>
+          <a:lstStyle/>
+          <a:p>
+            <a:pPr algn="ctr" indent="0" marL="0">
+              <a:lnSpc>
+                <a:spcPct val="100000"/>
+              </a:lnSpc>
+              <a:buNone/>
+            </a:pPr>
+            <a:r>
+              <a:rPr lang="en-US" sz="860" b="1" dirty="0">
+                <a:solidFill>
+                  <a:srgbClr val="0B5A66"/>
+                </a:solidFill>
+                <a:latin typeface="Arial" pitchFamily="34" charset="0"/>
+                <a:ea typeface="Arial" pitchFamily="34" charset="-122"/>
+                <a:cs typeface="Arial" pitchFamily="34" charset="-120"/>
+              </a:rPr>
+              <a:t>Service Bus</a:t>
+            </a:r>
+            <a:endParaRPr lang="en-US" sz="860" dirty="0"/>
+          </a:p>
+        </p:txBody>
+      </p:sp>
+      <p:sp>
+        <p:nvSpPr>
+          <p:cNvPr id="19" name="Shape 17"/>
+          <p:cNvSpPr/>
+          <p:nvPr/>
+        </p:nvSpPr>
+        <p:spPr>
+          <a:xfrm>
+            <a:off x="6822440" y="1682496"/>
+            <a:ext cx="1126744" cy="457200"/>
+          </a:xfrm>
+          <a:prstGeom prst="roundRect">
+            <a:avLst>
+              <a:gd name="adj" fmla="val 12000"/>
+            </a:avLst>
+          </a:prstGeom>
+          <a:solidFill>
+            <a:srgbClr val="FFFFFF"/>
+          </a:solidFill>
+          <a:ln w="15240">
+            <a:solidFill>
+              <a:srgbClr val="0891B2"/>
+            </a:solidFill>
+            <a:prstDash val="solid"/>
+          </a:ln>
+        </p:spPr>
+      </p:sp>
+      <p:sp>
+        <p:nvSpPr>
+          <p:cNvPr id="20" name="Text 18"/>
+          <p:cNvSpPr txBox="1"/>
+          <p:nvPr/>
+        </p:nvSpPr>
+        <p:spPr>
+          <a:xfrm>
+            <a:off x="6859016" y="1682496"/>
+            <a:ext cx="1053592" cy="457200"/>
+          </a:xfrm>
+          <a:prstGeom prst="rect">
+            <a:avLst/>
+          </a:prstGeom>
+          <a:noFill/>
+          <a:ln/>
+        </p:spPr>
+        <p:txBody>
+          <a:bodyPr wrap="square" lIns="0" tIns="0" rIns="0" bIns="0" rtlCol="0" anchor="ctr"/>
+          <a:lstStyle/>
+          <a:p>
+            <a:pPr algn="ctr" indent="0" marL="0">
+              <a:lnSpc>
+                <a:spcPct val="100000"/>
+              </a:lnSpc>
+              <a:buNone/>
+            </a:pPr>
+            <a:r>
+              <a:rPr lang="en-US" sz="860" b="1" dirty="0">
+                <a:solidFill>
+                  <a:srgbClr val="0B5A66"/>
+                </a:solidFill>
+                <a:latin typeface="Arial" pitchFamily="34" charset="0"/>
+                <a:ea typeface="Arial" pitchFamily="34" charset="-122"/>
+                <a:cs typeface="Arial" pitchFamily="34" charset="-120"/>
+              </a:rPr>
+              <a:t>Container Apps</a:t>
+            </a:r>
+            <a:endParaRPr lang="en-US" sz="860" dirty="0"/>
+          </a:p>
+        </p:txBody>
+      </p:sp>
+      <p:sp>
+        <p:nvSpPr>
+          <p:cNvPr id="21" name="Shape 19"/>
+          <p:cNvSpPr/>
+          <p:nvPr/>
+        </p:nvSpPr>
+        <p:spPr>
+          <a:xfrm>
+            <a:off x="8113776" y="1682496"/>
+            <a:ext cx="1126744" cy="457200"/>
+          </a:xfrm>
+          <a:prstGeom prst="roundRect">
+            <a:avLst>
+              <a:gd name="adj" fmla="val 12000"/>
+            </a:avLst>
+          </a:prstGeom>
+          <a:solidFill>
+            <a:srgbClr val="FFFFFF"/>
+          </a:solidFill>
+          <a:ln w="15240">
+            <a:solidFill>
+              <a:srgbClr val="0891B2"/>
+            </a:solidFill>
+            <a:prstDash val="solid"/>
+          </a:ln>
+        </p:spPr>
+      </p:sp>
+      <p:sp>
+        <p:nvSpPr>
+          <p:cNvPr id="22" name="Text 20"/>
+          <p:cNvSpPr txBox="1"/>
+          <p:nvPr/>
+        </p:nvSpPr>
+        <p:spPr>
+          <a:xfrm>
+            <a:off x="8150352" y="1682496"/>
+            <a:ext cx="1053592" cy="457200"/>
+          </a:xfrm>
+          <a:prstGeom prst="rect">
+            <a:avLst/>
+          </a:prstGeom>
+          <a:noFill/>
+          <a:ln/>
+        </p:spPr>
+        <p:txBody>
+          <a:bodyPr wrap="square" lIns="0" tIns="0" rIns="0" bIns="0" rtlCol="0" anchor="ctr"/>
+          <a:lstStyle/>
+          <a:p>
+            <a:pPr algn="ctr" indent="0" marL="0">
+              <a:lnSpc>
+                <a:spcPct val="100000"/>
+              </a:lnSpc>
+              <a:buNone/>
+            </a:pPr>
+            <a:r>
+              <a:rPr lang="en-US" sz="860" b="1" dirty="0">
+                <a:solidFill>
+                  <a:srgbClr val="0B5A66"/>
+                </a:solidFill>
+                <a:latin typeface="Arial" pitchFamily="34" charset="0"/>
+                <a:ea typeface="Arial" pitchFamily="34" charset="-122"/>
+                <a:cs typeface="Arial" pitchFamily="34" charset="-120"/>
+              </a:rPr>
+              <a:t>Blob + Key Vault</a:t>
+            </a:r>
+            <a:endParaRPr lang="en-US" sz="860" dirty="0"/>
+          </a:p>
+        </p:txBody>
+      </p:sp>
+      <p:sp>
+        <p:nvSpPr>
+          <p:cNvPr id="23" name="Shape 21"/>
+          <p:cNvSpPr/>
+          <p:nvPr/>
+        </p:nvSpPr>
+        <p:spPr>
+          <a:xfrm>
+            <a:off x="9405112" y="1682496"/>
+            <a:ext cx="1126744" cy="457200"/>
+          </a:xfrm>
+          <a:prstGeom prst="roundRect">
+            <a:avLst>
+              <a:gd name="adj" fmla="val 12000"/>
+            </a:avLst>
+          </a:prstGeom>
+          <a:solidFill>
+            <a:srgbClr val="FFFFFF"/>
+          </a:solidFill>
+          <a:ln w="15240">
+            <a:solidFill>
+              <a:srgbClr val="0891B2"/>
+            </a:solidFill>
+            <a:prstDash val="solid"/>
+          </a:ln>
+        </p:spPr>
+      </p:sp>
+      <p:sp>
+        <p:nvSpPr>
+          <p:cNvPr id="24" name="Text 22"/>
+          <p:cNvSpPr txBox="1"/>
+          <p:nvPr/>
+        </p:nvSpPr>
+        <p:spPr>
+          <a:xfrm>
+            <a:off x="9441688" y="1682496"/>
+            <a:ext cx="1053592" cy="457200"/>
+          </a:xfrm>
+          <a:prstGeom prst="rect">
+            <a:avLst/>
+          </a:prstGeom>
+          <a:noFill/>
+          <a:ln/>
+        </p:spPr>
+        <p:txBody>
+          <a:bodyPr wrap="square" lIns="0" tIns="0" rIns="0" bIns="0" rtlCol="0" anchor="ctr"/>
+          <a:lstStyle/>
+          <a:p>
+            <a:pPr algn="ctr" indent="0" marL="0">
+              <a:lnSpc>
+                <a:spcPct val="100000"/>
+              </a:lnSpc>
+              <a:buNone/>
+            </a:pPr>
+            <a:r>
+              <a:rPr lang="en-US" sz="860" b="1" dirty="0">
+                <a:solidFill>
+                  <a:srgbClr val="0B5A66"/>
+                </a:solidFill>
+                <a:latin typeface="Arial" pitchFamily="34" charset="0"/>
+                <a:ea typeface="Arial" pitchFamily="34" charset="-122"/>
+                <a:cs typeface="Arial" pitchFamily="34" charset="-120"/>
+              </a:rPr>
+              <a:t>Azure OpenAI</a:t>
+            </a:r>
+            <a:endParaRPr lang="en-US" sz="860" dirty="0"/>
+          </a:p>
+        </p:txBody>
+      </p:sp>
+      <p:sp>
+        <p:nvSpPr>
+          <p:cNvPr id="25" name="Shape 23"/>
+          <p:cNvSpPr/>
+          <p:nvPr/>
+        </p:nvSpPr>
+        <p:spPr>
+          <a:xfrm>
+            <a:off x="10696448" y="1682496"/>
+            <a:ext cx="1126744" cy="457200"/>
+          </a:xfrm>
+          <a:prstGeom prst="roundRect">
+            <a:avLst>
+              <a:gd name="adj" fmla="val 12000"/>
+            </a:avLst>
+          </a:prstGeom>
+          <a:solidFill>
+            <a:srgbClr val="FFFFFF"/>
+          </a:solidFill>
+          <a:ln w="15240">
+            <a:solidFill>
+              <a:srgbClr val="0891B2"/>
+            </a:solidFill>
+            <a:prstDash val="solid"/>
+          </a:ln>
+        </p:spPr>
+      </p:sp>
+      <p:sp>
+        <p:nvSpPr>
+          <p:cNvPr id="26" name="Text 24"/>
+          <p:cNvSpPr txBox="1"/>
+          <p:nvPr/>
+        </p:nvSpPr>
+        <p:spPr>
+          <a:xfrm>
+            <a:off x="10733024" y="1682496"/>
+            <a:ext cx="1053592" cy="457200"/>
+          </a:xfrm>
+          <a:prstGeom prst="rect">
+            <a:avLst/>
+          </a:prstGeom>
+          <a:noFill/>
+          <a:ln/>
+        </p:spPr>
+        <p:txBody>
+          <a:bodyPr wrap="square" lIns="0" tIns="0" rIns="0" bIns="0" rtlCol="0" anchor="ctr"/>
+          <a:lstStyle/>
+          <a:p>
+            <a:pPr algn="ctr" indent="0" marL="0">
+              <a:lnSpc>
+                <a:spcPct val="100000"/>
+              </a:lnSpc>
+              <a:buNone/>
+            </a:pPr>
+            <a:r>
+              <a:rPr lang="en-US" sz="860" b="1" dirty="0">
+                <a:solidFill>
+                  <a:srgbClr val="0B5A66"/>
+                </a:solidFill>
+                <a:latin typeface="Arial" pitchFamily="34" charset="0"/>
+                <a:ea typeface="Arial" pitchFamily="34" charset="-122"/>
+                <a:cs typeface="Arial" pitchFamily="34" charset="-120"/>
+              </a:rPr>
+              <a:t>Azure DevOps</a:t>
+            </a:r>
+            <a:endParaRPr lang="en-US" sz="860" dirty="0"/>
+          </a:p>
+        </p:txBody>
+      </p:sp>
+      <p:sp>
+        <p:nvSpPr>
+          <p:cNvPr id="27" name="Text 25"/>
+          <p:cNvSpPr txBox="1"/>
+          <p:nvPr/>
+        </p:nvSpPr>
+        <p:spPr>
+          <a:xfrm>
+            <a:off x="365760" y="2249424"/>
+            <a:ext cx="11457432" cy="219456"/>
+          </a:xfrm>
+          <a:prstGeom prst="rect">
+            <a:avLst/>
+          </a:prstGeom>
+          <a:noFill/>
+          <a:ln/>
+        </p:spPr>
+        <p:txBody>
+          <a:bodyPr wrap="square" lIns="0" tIns="0" rIns="0" bIns="0" rtlCol="0" anchor="ctr"/>
+          <a:lstStyle/>
+          <a:p>
+            <a:pPr indent="0" marL="0">
+              <a:buNone/>
+            </a:pPr>
+            <a:r>
+              <a:rPr lang="en-US" sz="820" i="1" dirty="0">
+                <a:solidFill>
+                  <a:srgbClr val="5B6472"/>
+                </a:solidFill>
+                <a:latin typeface="Arial" pitchFamily="34" charset="0"/>
+                <a:ea typeface="Arial" pitchFamily="34" charset="-122"/>
+                <a:cs typeface="Arial" pitchFamily="34" charset="-120"/>
+              </a:rPr>
+              <a:t>Deployed to the cloud GGW already use · infrastructure as code · one on/off switch per agent · model version pinned</a:t>
+            </a:r>
+            <a:endParaRPr lang="en-US" sz="820" dirty="0"/>
+          </a:p>
+        </p:txBody>
+      </p:sp>
+      <p:sp>
+        <p:nvSpPr>
+          <p:cNvPr id="28" name="Text 26"/>
+          <p:cNvSpPr txBox="1"/>
+          <p:nvPr/>
+        </p:nvSpPr>
+        <p:spPr>
+          <a:xfrm>
+            <a:off x="365760" y="2688336"/>
+            <a:ext cx="3657600" cy="201168"/>
+          </a:xfrm>
+          <a:prstGeom prst="rect">
+            <a:avLst/>
+          </a:prstGeom>
+          <a:noFill/>
+          <a:ln/>
+        </p:spPr>
+        <p:txBody>
+          <a:bodyPr wrap="square" lIns="0" tIns="0" rIns="0" bIns="0" rtlCol="0" anchor="ctr"/>
+          <a:lstStyle/>
+          <a:p>
+            <a:pPr indent="0" marL="0">
+              <a:buNone/>
+            </a:pPr>
+            <a:r>
+              <a:rPr lang="en-US" sz="950" b="1" spc="90" kern="0" dirty="0">
+                <a:solidFill>
+                  <a:srgbClr val="4338CA"/>
+                </a:solidFill>
+                <a:latin typeface="Arial" pitchFamily="34" charset="0"/>
+                <a:ea typeface="Arial" pitchFamily="34" charset="-122"/>
+                <a:cs typeface="Arial" pitchFamily="34" charset="-120"/>
+              </a:rPr>
+              <a:t>OPERATING MODEL</a:t>
+            </a:r>
+            <a:endParaRPr lang="en-US" sz="950" dirty="0"/>
+          </a:p>
+        </p:txBody>
+      </p:sp>
+      <p:sp>
+        <p:nvSpPr>
+          <p:cNvPr id="29" name="Shape 27"/>
+          <p:cNvSpPr/>
+          <p:nvPr/>
+        </p:nvSpPr>
+        <p:spPr>
+          <a:xfrm>
+            <a:off x="365760" y="2962656"/>
+            <a:ext cx="3697224" cy="420624"/>
+          </a:xfrm>
+          <a:prstGeom prst="roundRect">
+            <a:avLst>
+              <a:gd name="adj" fmla="val 10870"/>
+            </a:avLst>
+          </a:prstGeom>
+          <a:solidFill>
+            <a:srgbClr val="E3EDF6"/>
+          </a:solidFill>
+          <a:ln w="15240">
+            <a:solidFill>
+              <a:srgbClr val="3B6FA0"/>
+            </a:solidFill>
+            <a:prstDash val="solid"/>
+          </a:ln>
+        </p:spPr>
+      </p:sp>
+      <p:sp>
+        <p:nvSpPr>
+          <p:cNvPr id="30" name="Text 28"/>
+          <p:cNvSpPr txBox="1"/>
+          <p:nvPr/>
+        </p:nvSpPr>
+        <p:spPr>
+          <a:xfrm>
+            <a:off x="493776" y="2962656"/>
+            <a:ext cx="1554480" cy="420624"/>
+          </a:xfrm>
+          <a:prstGeom prst="rect">
+            <a:avLst/>
+          </a:prstGeom>
+          <a:noFill/>
+          <a:ln/>
+        </p:spPr>
+        <p:txBody>
+          <a:bodyPr wrap="square" lIns="0" tIns="0" rIns="0" bIns="0" rtlCol="0" anchor="ctr"/>
+          <a:lstStyle/>
+          <a:p>
+            <a:pPr indent="0" marL="0">
+              <a:buNone/>
+            </a:pPr>
+            <a:r>
+              <a:rPr lang="en-US" sz="920" b="1" dirty="0">
+                <a:solidFill>
+                  <a:srgbClr val="1B2430"/>
+                </a:solidFill>
+                <a:latin typeface="Arial" pitchFamily="34" charset="0"/>
+                <a:ea typeface="Arial" pitchFamily="34" charset="-122"/>
+                <a:cs typeface="Arial" pitchFamily="34" charset="-120"/>
+              </a:rPr>
+              <a:t>AI agents</a:t>
+            </a:r>
+            <a:endParaRPr lang="en-US" sz="920" dirty="0"/>
+          </a:p>
+        </p:txBody>
+      </p:sp>
+      <p:sp>
+        <p:nvSpPr>
+          <p:cNvPr id="31" name="Text 29"/>
+          <p:cNvSpPr txBox="1"/>
+          <p:nvPr/>
+        </p:nvSpPr>
+        <p:spPr>
+          <a:xfrm>
+            <a:off x="2057400" y="2962656"/>
+            <a:ext cx="1914144" cy="420624"/>
+          </a:xfrm>
+          <a:prstGeom prst="rect">
+            <a:avLst/>
+          </a:prstGeom>
+          <a:noFill/>
+          <a:ln/>
+        </p:spPr>
+        <p:txBody>
+          <a:bodyPr wrap="square" lIns="0" tIns="0" rIns="0" bIns="0" rtlCol="0" anchor="ctr"/>
+          <a:lstStyle/>
+          <a:p>
+            <a:pPr indent="0" marL="0">
+              <a:lnSpc>
+                <a:spcPct val="105000"/>
+              </a:lnSpc>
+              <a:buNone/>
+            </a:pPr>
+            <a:r>
+              <a:rPr lang="en-US" sz="800" dirty="0">
+                <a:solidFill>
+                  <a:srgbClr val="1B2430"/>
+                </a:solidFill>
+                <a:latin typeface="Arial" pitchFamily="34" charset="0"/>
+                <a:ea typeface="Arial" pitchFamily="34" charset="-122"/>
+                <a:cs typeface="Arial" pitchFamily="34" charset="-120"/>
+              </a:rPr>
+              <a:t>draft, classify, extract — never decide</a:t>
+            </a:r>
+            <a:endParaRPr lang="en-US" sz="800" dirty="0"/>
+          </a:p>
+        </p:txBody>
+      </p:sp>
+      <p:sp>
+        <p:nvSpPr>
+          <p:cNvPr id="32" name="Shape 30"/>
+          <p:cNvSpPr/>
+          <p:nvPr/>
+        </p:nvSpPr>
+        <p:spPr>
+          <a:xfrm>
+            <a:off x="4245864" y="2962656"/>
+            <a:ext cx="3697224" cy="420624"/>
+          </a:xfrm>
+          <a:prstGeom prst="roundRect">
+            <a:avLst>
+              <a:gd name="adj" fmla="val 10870"/>
+            </a:avLst>
+          </a:prstGeom>
+          <a:solidFill>
+            <a:srgbClr val="ECEFF3"/>
+          </a:solidFill>
+          <a:ln w="15240">
+            <a:solidFill>
+              <a:srgbClr val="6B7787"/>
+            </a:solidFill>
+            <a:prstDash val="solid"/>
+          </a:ln>
+        </p:spPr>
+      </p:sp>
+      <p:sp>
+        <p:nvSpPr>
+          <p:cNvPr id="33" name="Text 31"/>
+          <p:cNvSpPr txBox="1"/>
+          <p:nvPr/>
+        </p:nvSpPr>
+        <p:spPr>
+          <a:xfrm>
+            <a:off x="4373880" y="2962656"/>
+            <a:ext cx="1554480" cy="420624"/>
+          </a:xfrm>
+          <a:prstGeom prst="rect">
+            <a:avLst/>
+          </a:prstGeom>
+          <a:noFill/>
+          <a:ln/>
+        </p:spPr>
+        <p:txBody>
+          <a:bodyPr wrap="square" lIns="0" tIns="0" rIns="0" bIns="0" rtlCol="0" anchor="ctr"/>
+          <a:lstStyle/>
+          <a:p>
+            <a:pPr indent="0" marL="0">
+              <a:buNone/>
+            </a:pPr>
+            <a:r>
+              <a:rPr lang="en-US" sz="920" b="1" dirty="0">
+                <a:solidFill>
+                  <a:srgbClr val="2A3340"/>
+                </a:solidFill>
+                <a:latin typeface="Arial" pitchFamily="34" charset="0"/>
+                <a:ea typeface="Arial" pitchFamily="34" charset="-122"/>
+                <a:cs typeface="Arial" pitchFamily="34" charset="-120"/>
+              </a:rPr>
+              <a:t>Rules, no model</a:t>
+            </a:r>
+            <a:endParaRPr lang="en-US" sz="920" dirty="0"/>
+          </a:p>
+        </p:txBody>
+      </p:sp>
+      <p:sp>
+        <p:nvSpPr>
+          <p:cNvPr id="34" name="Text 32"/>
+          <p:cNvSpPr txBox="1"/>
+          <p:nvPr/>
+        </p:nvSpPr>
+        <p:spPr>
+          <a:xfrm>
+            <a:off x="5937504" y="2962656"/>
+            <a:ext cx="1914144" cy="420624"/>
+          </a:xfrm>
+          <a:prstGeom prst="rect">
+            <a:avLst/>
+          </a:prstGeom>
+          <a:noFill/>
+          <a:ln/>
+        </p:spPr>
+        <p:txBody>
+          <a:bodyPr wrap="square" lIns="0" tIns="0" rIns="0" bIns="0" rtlCol="0" anchor="ctr"/>
+          <a:lstStyle/>
+          <a:p>
+            <a:pPr indent="0" marL="0">
+              <a:lnSpc>
+                <a:spcPct val="105000"/>
+              </a:lnSpc>
+              <a:buNone/>
+            </a:pPr>
+            <a:r>
+              <a:rPr lang="en-US" sz="800" dirty="0">
+                <a:solidFill>
+                  <a:srgbClr val="2A3340"/>
+                </a:solidFill>
+                <a:latin typeface="Arial" pitchFamily="34" charset="0"/>
+                <a:ea typeface="Arial" pitchFamily="34" charset="-122"/>
+                <a:cs typeface="Arial" pitchFamily="34" charset="-120"/>
+              </a:rPr>
+              <a:t>check the record — pass or fail, nothing in between</a:t>
+            </a:r>
+            <a:endParaRPr lang="en-US" sz="800" dirty="0"/>
+          </a:p>
+        </p:txBody>
+      </p:sp>
+      <p:sp>
+        <p:nvSpPr>
+          <p:cNvPr id="35" name="Shape 33"/>
+          <p:cNvSpPr/>
+          <p:nvPr/>
+        </p:nvSpPr>
+        <p:spPr>
+          <a:xfrm>
+            <a:off x="8125968" y="2962656"/>
+            <a:ext cx="3697224" cy="420624"/>
+          </a:xfrm>
+          <a:prstGeom prst="roundRect">
+            <a:avLst>
+              <a:gd name="adj" fmla="val 10870"/>
+            </a:avLst>
+          </a:prstGeom>
+          <a:solidFill>
+            <a:srgbClr val="F1E6ED"/>
+          </a:solidFill>
+          <a:ln w="15240">
+            <a:solidFill>
+              <a:srgbClr val="7A4A66"/>
+            </a:solidFill>
+            <a:prstDash val="solid"/>
+          </a:ln>
+        </p:spPr>
+      </p:sp>
+      <p:sp>
+        <p:nvSpPr>
+          <p:cNvPr id="36" name="Text 34"/>
+          <p:cNvSpPr txBox="1"/>
+          <p:nvPr/>
+        </p:nvSpPr>
+        <p:spPr>
+          <a:xfrm>
+            <a:off x="8253984" y="2962656"/>
+            <a:ext cx="1554480" cy="420624"/>
+          </a:xfrm>
+          <a:prstGeom prst="rect">
+            <a:avLst/>
+          </a:prstGeom>
+          <a:noFill/>
+          <a:ln/>
+        </p:spPr>
+        <p:txBody>
+          <a:bodyPr wrap="square" lIns="0" tIns="0" rIns="0" bIns="0" rtlCol="0" anchor="ctr"/>
+          <a:lstStyle/>
+          <a:p>
+            <a:pPr indent="0" marL="0">
+              <a:buNone/>
+            </a:pPr>
+            <a:r>
+              <a:rPr lang="en-US" sz="920" b="1" dirty="0">
+                <a:solidFill>
+                  <a:srgbClr val="4A2C3B"/>
+                </a:solidFill>
+                <a:latin typeface="Arial" pitchFamily="34" charset="0"/>
+                <a:ea typeface="Arial" pitchFamily="34" charset="-122"/>
+                <a:cs typeface="Arial" pitchFamily="34" charset="-120"/>
+              </a:rPr>
+              <a:t>A person</a:t>
+            </a:r>
+            <a:endParaRPr lang="en-US" sz="920" dirty="0"/>
+          </a:p>
+        </p:txBody>
+      </p:sp>
+      <p:sp>
+        <p:nvSpPr>
+          <p:cNvPr id="37" name="Text 35"/>
+          <p:cNvSpPr txBox="1"/>
+          <p:nvPr/>
+        </p:nvSpPr>
+        <p:spPr>
+          <a:xfrm>
+            <a:off x="9817608" y="2962656"/>
+            <a:ext cx="1914144" cy="420624"/>
+          </a:xfrm>
+          <a:prstGeom prst="rect">
+            <a:avLst/>
+          </a:prstGeom>
+          <a:noFill/>
+          <a:ln/>
+        </p:spPr>
+        <p:txBody>
+          <a:bodyPr wrap="square" lIns="0" tIns="0" rIns="0" bIns="0" rtlCol="0" anchor="ctr"/>
+          <a:lstStyle/>
+          <a:p>
+            <a:pPr indent="0" marL="0">
+              <a:lnSpc>
+                <a:spcPct val="105000"/>
+              </a:lnSpc>
+              <a:buNone/>
+            </a:pPr>
+            <a:r>
+              <a:rPr lang="en-US" sz="800" dirty="0">
+                <a:solidFill>
+                  <a:srgbClr val="4A2C3B"/>
+                </a:solidFill>
+                <a:latin typeface="Arial" pitchFamily="34" charset="0"/>
+                <a:ea typeface="Arial" pitchFamily="34" charset="-122"/>
+                <a:cs typeface="Arial" pitchFamily="34" charset="-120"/>
+              </a:rPr>
+              <a:t>approves before anything can go against a claimant</a:t>
+            </a:r>
+            <a:endParaRPr lang="en-US" sz="800" dirty="0"/>
+          </a:p>
+        </p:txBody>
+      </p:sp>
+      <p:sp>
+        <p:nvSpPr>
+          <p:cNvPr id="38" name="Text 36"/>
+          <p:cNvSpPr txBox="1"/>
+          <p:nvPr/>
+        </p:nvSpPr>
+        <p:spPr>
+          <a:xfrm>
+            <a:off x="365760" y="3639312"/>
+            <a:ext cx="2743200" cy="201168"/>
+          </a:xfrm>
+          <a:prstGeom prst="rect">
+            <a:avLst/>
+          </a:prstGeom>
+          <a:noFill/>
+          <a:ln/>
+        </p:spPr>
+        <p:txBody>
+          <a:bodyPr wrap="square" lIns="0" tIns="0" rIns="0" bIns="0" rtlCol="0" anchor="ctr"/>
+          <a:lstStyle/>
+          <a:p>
+            <a:pPr indent="0" marL="0">
+              <a:buNone/>
+            </a:pPr>
+            <a:r>
+              <a:rPr lang="en-US" sz="950" b="1" spc="90" kern="0" dirty="0">
+                <a:solidFill>
+                  <a:srgbClr val="BE185D"/>
+                </a:solidFill>
+                <a:latin typeface="Arial" pitchFamily="34" charset="0"/>
+                <a:ea typeface="Arial" pitchFamily="34" charset="-122"/>
+                <a:cs typeface="Arial" pitchFamily="34" charset="-120"/>
+              </a:rPr>
+              <a:t>HOW IT GOES LIVE</a:t>
+            </a:r>
+            <a:endParaRPr lang="en-US" sz="950" dirty="0"/>
+          </a:p>
+        </p:txBody>
+      </p:sp>
+      <p:sp>
+        <p:nvSpPr>
+          <p:cNvPr id="39" name="Shape 37"/>
+          <p:cNvSpPr/>
+          <p:nvPr/>
+        </p:nvSpPr>
+        <p:spPr>
+          <a:xfrm>
+            <a:off x="365760" y="3877056"/>
+            <a:ext cx="2699766" cy="841248"/>
+          </a:xfrm>
+          <a:prstGeom prst="roundRect">
+            <a:avLst>
+              <a:gd name="adj" fmla="val 6522"/>
+            </a:avLst>
+          </a:prstGeom>
+          <a:solidFill>
+            <a:srgbClr val="FDF3E3"/>
+          </a:solidFill>
+          <a:ln w="15240">
+            <a:solidFill>
+              <a:srgbClr val="D97706"/>
+            </a:solidFill>
+            <a:prstDash val="solid"/>
+          </a:ln>
+        </p:spPr>
+      </p:sp>
+      <p:sp>
+        <p:nvSpPr>
+          <p:cNvPr id="40" name="Text 38"/>
+          <p:cNvSpPr txBox="1"/>
+          <p:nvPr/>
+        </p:nvSpPr>
+        <p:spPr>
+          <a:xfrm>
+            <a:off x="512064" y="3968496"/>
+            <a:ext cx="2407158" cy="201168"/>
+          </a:xfrm>
+          <a:prstGeom prst="rect">
+            <a:avLst/>
+          </a:prstGeom>
+          <a:noFill/>
+          <a:ln/>
+        </p:spPr>
+        <p:txBody>
+          <a:bodyPr wrap="square" lIns="0" tIns="0" rIns="0" bIns="0" rtlCol="0" anchor="ctr"/>
+          <a:lstStyle/>
+          <a:p>
+            <a:pPr indent="0" marL="0">
+              <a:buNone/>
+            </a:pPr>
+            <a:r>
+              <a:rPr lang="en-US" sz="1050" b="1" dirty="0">
+                <a:solidFill>
+                  <a:srgbClr val="D97706"/>
+                </a:solidFill>
+                <a:latin typeface="Arial" pitchFamily="34" charset="0"/>
+                <a:ea typeface="Arial" pitchFamily="34" charset="-122"/>
+                <a:cs typeface="Arial" pitchFamily="34" charset="-120"/>
+              </a:rPr>
+              <a:t>Shadow</a:t>
+            </a:r>
+            <a:endParaRPr lang="en-US" sz="1050" dirty="0"/>
+          </a:p>
+        </p:txBody>
+      </p:sp>
+      <p:sp>
+        <p:nvSpPr>
+          <p:cNvPr id="41" name="Text 39"/>
+          <p:cNvSpPr txBox="1"/>
+          <p:nvPr/>
+        </p:nvSpPr>
+        <p:spPr>
+          <a:xfrm>
+            <a:off x="512064" y="3968496"/>
+            <a:ext cx="2407158" cy="201168"/>
+          </a:xfrm>
+          <a:prstGeom prst="rect">
+            <a:avLst/>
+          </a:prstGeom>
+          <a:noFill/>
+          <a:ln/>
+        </p:spPr>
+        <p:txBody>
+          <a:bodyPr wrap="square" lIns="0" tIns="0" rIns="0" bIns="0" rtlCol="0" anchor="ctr"/>
+          <a:lstStyle/>
+          <a:p>
+            <a:pPr algn="r" indent="0" marL="0">
+              <a:buNone/>
+            </a:pPr>
+            <a:r>
+              <a:rPr lang="en-US" sz="780" i="1" dirty="0">
+                <a:solidFill>
+                  <a:srgbClr val="5B6472"/>
+                </a:solidFill>
+                <a:latin typeface="Arial" pitchFamily="34" charset="0"/>
+                <a:ea typeface="Arial" pitchFamily="34" charset="-122"/>
+                <a:cs typeface="Arial" pitchFamily="34" charset="-120"/>
+              </a:rPr>
+              <a:t>weeks 1–8</a:t>
+            </a:r>
+            <a:endParaRPr lang="en-US" sz="780" dirty="0"/>
+          </a:p>
+        </p:txBody>
+      </p:sp>
+      <p:sp>
+        <p:nvSpPr>
+          <p:cNvPr id="42" name="Text 40"/>
+          <p:cNvSpPr txBox="1"/>
+          <p:nvPr/>
+        </p:nvSpPr>
+        <p:spPr>
+          <a:xfrm>
+            <a:off x="512064" y="4187952"/>
+            <a:ext cx="2407158" cy="256032"/>
+          </a:xfrm>
+          <a:prstGeom prst="rect">
+            <a:avLst/>
+          </a:prstGeom>
+          <a:noFill/>
+          <a:ln/>
+        </p:spPr>
+        <p:txBody>
+          <a:bodyPr wrap="square" lIns="0" tIns="0" rIns="0" bIns="0" rtlCol="0" anchor="ctr"/>
+          <a:lstStyle/>
+          <a:p>
+            <a:pPr indent="0" marL="0">
+              <a:lnSpc>
+                <a:spcPct val="112000"/>
+              </a:lnSpc>
+              <a:buNone/>
+            </a:pPr>
+            <a:r>
+              <a:rPr lang="en-US" sz="820" dirty="0">
+                <a:solidFill>
+                  <a:srgbClr val="3A3A3A"/>
+                </a:solidFill>
+                <a:latin typeface="Arial" pitchFamily="34" charset="0"/>
+                <a:ea typeface="Arial" pitchFamily="34" charset="-122"/>
+                <a:cs typeface="Arial" pitchFamily="34" charset="-120"/>
+              </a:rPr>
+              <a:t>Runs on live claims. Nobody sees the output.</a:t>
+            </a:r>
+            <a:endParaRPr lang="en-US" sz="820" dirty="0"/>
+          </a:p>
+        </p:txBody>
+      </p:sp>
+      <p:sp>
+        <p:nvSpPr>
+          <p:cNvPr id="43" name="Shape 41"/>
+          <p:cNvSpPr/>
+          <p:nvPr/>
+        </p:nvSpPr>
+        <p:spPr>
+          <a:xfrm>
+            <a:off x="512064" y="4480560"/>
+            <a:ext cx="2407158" cy="9144"/>
+          </a:xfrm>
+          <a:prstGeom prst="rect">
+            <a:avLst/>
+          </a:prstGeom>
+          <a:solidFill>
+            <a:srgbClr val="D97706"/>
+          </a:solidFill>
+          <a:ln/>
+        </p:spPr>
+      </p:sp>
+      <p:sp>
+        <p:nvSpPr>
+          <p:cNvPr id="44" name="Text 42"/>
+          <p:cNvSpPr txBox="1"/>
+          <p:nvPr/>
+        </p:nvSpPr>
+        <p:spPr>
+          <a:xfrm>
+            <a:off x="512064" y="4517136"/>
+            <a:ext cx="2407158" cy="182880"/>
+          </a:xfrm>
+          <a:prstGeom prst="rect">
+            <a:avLst/>
+          </a:prstGeom>
+          <a:noFill/>
+          <a:ln/>
+        </p:spPr>
+        <p:txBody>
+          <a:bodyPr wrap="square" lIns="0" tIns="0" rIns="0" bIns="0" rtlCol="0" anchor="ctr"/>
+          <a:lstStyle/>
+          <a:p>
+            <a:pPr indent="0" marL="0">
+              <a:lnSpc>
+                <a:spcPct val="105000"/>
+              </a:lnSpc>
+              <a:buNone/>
+            </a:pPr>
+            <a:r>
+              <a:rPr lang="en-US" sz="720" i="1" dirty="0">
+                <a:solidFill>
+                  <a:srgbClr val="4A4A4A"/>
+                </a:solidFill>
+                <a:latin typeface="Arial" pitchFamily="34" charset="0"/>
+                <a:ea typeface="Arial" pitchFamily="34" charset="-122"/>
+                <a:cs typeface="Arial" pitchFamily="34" charset="-120"/>
+              </a:rPr>
+              <a:t>Exit: extraction agrees with the handler on 95% of fields.</a:t>
+            </a:r>
+            <a:endParaRPr lang="en-US" sz="720" dirty="0"/>
+          </a:p>
+        </p:txBody>
+      </p:sp>
+      <p:sp>
+        <p:nvSpPr>
+          <p:cNvPr id="45" name="Shape 43"/>
+          <p:cNvSpPr/>
+          <p:nvPr/>
+        </p:nvSpPr>
+        <p:spPr>
+          <a:xfrm>
+            <a:off x="3092958" y="4297680"/>
+            <a:ext cx="164592" cy="0"/>
+          </a:xfrm>
+          <a:prstGeom prst="line">
+            <a:avLst/>
+          </a:prstGeom>
+          <a:noFill/>
+          <a:ln w="12700">
+            <a:solidFill>
+              <a:srgbClr val="5B7D80"/>
+            </a:solidFill>
+            <a:prstDash val="solid"/>
+            <a:tailEnd type="triangle"/>
+          </a:ln>
+        </p:spPr>
+      </p:sp>
+      <p:sp>
+        <p:nvSpPr>
+          <p:cNvPr id="46" name="Shape 44"/>
+          <p:cNvSpPr/>
+          <p:nvPr/>
+        </p:nvSpPr>
+        <p:spPr>
+          <a:xfrm>
+            <a:off x="3284982" y="3877056"/>
+            <a:ext cx="2699766" cy="841248"/>
+          </a:xfrm>
+          <a:prstGeom prst="roundRect">
+            <a:avLst>
+              <a:gd name="adj" fmla="val 6522"/>
+            </a:avLst>
+          </a:prstGeom>
+          <a:solidFill>
+            <a:srgbClr val="E4F4F8"/>
+          </a:solidFill>
+          <a:ln w="15240">
+            <a:solidFill>
+              <a:srgbClr val="0891B2"/>
+            </a:solidFill>
+            <a:prstDash val="solid"/>
+          </a:ln>
+        </p:spPr>
+      </p:sp>
+      <p:sp>
+        <p:nvSpPr>
+          <p:cNvPr id="47" name="Text 45"/>
+          <p:cNvSpPr txBox="1"/>
+          <p:nvPr/>
+        </p:nvSpPr>
+        <p:spPr>
+          <a:xfrm>
+            <a:off x="3431286" y="3968496"/>
+            <a:ext cx="2407158" cy="201168"/>
+          </a:xfrm>
+          <a:prstGeom prst="rect">
+            <a:avLst/>
+          </a:prstGeom>
+          <a:noFill/>
+          <a:ln/>
+        </p:spPr>
+        <p:txBody>
+          <a:bodyPr wrap="square" lIns="0" tIns="0" rIns="0" bIns="0" rtlCol="0" anchor="ctr"/>
+          <a:lstStyle/>
+          <a:p>
+            <a:pPr indent="0" marL="0">
+              <a:buNone/>
+            </a:pPr>
+            <a:r>
+              <a:rPr lang="en-US" sz="1050" b="1" dirty="0">
+                <a:solidFill>
+                  <a:srgbClr val="0891B2"/>
+                </a:solidFill>
+                <a:latin typeface="Arial" pitchFamily="34" charset="0"/>
+                <a:ea typeface="Arial" pitchFamily="34" charset="-122"/>
+                <a:cs typeface="Arial" pitchFamily="34" charset="-120"/>
+              </a:rPr>
+              <a:t>Suggest</a:t>
+            </a:r>
+            <a:endParaRPr lang="en-US" sz="1050" dirty="0"/>
+          </a:p>
+        </p:txBody>
+      </p:sp>
+      <p:sp>
+        <p:nvSpPr>
+          <p:cNvPr id="48" name="Text 46"/>
+          <p:cNvSpPr txBox="1"/>
+          <p:nvPr/>
+        </p:nvSpPr>
+        <p:spPr>
+          <a:xfrm>
+            <a:off x="3431286" y="3968496"/>
+            <a:ext cx="2407158" cy="201168"/>
+          </a:xfrm>
+          <a:prstGeom prst="rect">
+            <a:avLst/>
+          </a:prstGeom>
+          <a:noFill/>
+          <a:ln/>
+        </p:spPr>
+        <p:txBody>
+          <a:bodyPr wrap="square" lIns="0" tIns="0" rIns="0" bIns="0" rtlCol="0" anchor="ctr"/>
+          <a:lstStyle/>
+          <a:p>
+            <a:pPr algn="r" indent="0" marL="0">
+              <a:buNone/>
+            </a:pPr>
+            <a:r>
+              <a:rPr lang="en-US" sz="780" i="1" dirty="0">
+                <a:solidFill>
+                  <a:srgbClr val="5B6472"/>
+                </a:solidFill>
+                <a:latin typeface="Arial" pitchFamily="34" charset="0"/>
+                <a:ea typeface="Arial" pitchFamily="34" charset="-122"/>
+                <a:cs typeface="Arial" pitchFamily="34" charset="-120"/>
+              </a:rPr>
+              <a:t>weeks 9–16</a:t>
+            </a:r>
+            <a:endParaRPr lang="en-US" sz="780" dirty="0"/>
+          </a:p>
+        </p:txBody>
+      </p:sp>
+      <p:sp>
+        <p:nvSpPr>
+          <p:cNvPr id="49" name="Text 47"/>
+          <p:cNvSpPr txBox="1"/>
+          <p:nvPr/>
+        </p:nvSpPr>
+        <p:spPr>
+          <a:xfrm>
+            <a:off x="3431286" y="4187952"/>
+            <a:ext cx="2407158" cy="256032"/>
+          </a:xfrm>
+          <a:prstGeom prst="rect">
+            <a:avLst/>
+          </a:prstGeom>
+          <a:noFill/>
+          <a:ln/>
+        </p:spPr>
+        <p:txBody>
+          <a:bodyPr wrap="square" lIns="0" tIns="0" rIns="0" bIns="0" rtlCol="0" anchor="ctr"/>
+          <a:lstStyle/>
+          <a:p>
+            <a:pPr indent="0" marL="0">
+              <a:lnSpc>
+                <a:spcPct val="112000"/>
+              </a:lnSpc>
+              <a:buNone/>
+            </a:pPr>
+            <a:r>
+              <a:rPr lang="en-US" sz="820" dirty="0">
+                <a:solidFill>
+                  <a:srgbClr val="3A3A3A"/>
+                </a:solidFill>
+                <a:latin typeface="Arial" pitchFamily="34" charset="0"/>
+                <a:ea typeface="Arial" pitchFamily="34" charset="-122"/>
+                <a:cs typeface="Arial" pitchFamily="34" charset="-120"/>
+              </a:rPr>
+              <a:t>The handler must edit or approve. Nothing sends itself.</a:t>
+            </a:r>
+            <a:endParaRPr lang="en-US" sz="820" dirty="0"/>
+          </a:p>
+        </p:txBody>
+      </p:sp>
+      <p:sp>
+        <p:nvSpPr>
+          <p:cNvPr id="50" name="Shape 48"/>
+          <p:cNvSpPr/>
+          <p:nvPr/>
+        </p:nvSpPr>
+        <p:spPr>
+          <a:xfrm>
+            <a:off x="3431286" y="4480560"/>
+            <a:ext cx="2407158" cy="9144"/>
+          </a:xfrm>
+          <a:prstGeom prst="rect">
+            <a:avLst/>
+          </a:prstGeom>
+          <a:solidFill>
+            <a:srgbClr val="0891B2"/>
+          </a:solidFill>
+          <a:ln/>
+        </p:spPr>
+      </p:sp>
+      <p:sp>
+        <p:nvSpPr>
+          <p:cNvPr id="51" name="Text 49"/>
+          <p:cNvSpPr txBox="1"/>
+          <p:nvPr/>
+        </p:nvSpPr>
+        <p:spPr>
+          <a:xfrm>
+            <a:off x="3431286" y="4517136"/>
+            <a:ext cx="2407158" cy="182880"/>
+          </a:xfrm>
+          <a:prstGeom prst="rect">
+            <a:avLst/>
+          </a:prstGeom>
+          <a:noFill/>
+          <a:ln/>
+        </p:spPr>
+        <p:txBody>
+          <a:bodyPr wrap="square" lIns="0" tIns="0" rIns="0" bIns="0" rtlCol="0" anchor="ctr"/>
+          <a:lstStyle/>
+          <a:p>
+            <a:pPr indent="0" marL="0">
+              <a:lnSpc>
+                <a:spcPct val="105000"/>
+              </a:lnSpc>
+              <a:buNone/>
+            </a:pPr>
+            <a:r>
+              <a:rPr lang="en-US" sz="720" i="1" dirty="0">
+                <a:solidFill>
+                  <a:srgbClr val="4A4A4A"/>
+                </a:solidFill>
+                <a:latin typeface="Arial" pitchFamily="34" charset="0"/>
+                <a:ea typeface="Arial" pitchFamily="34" charset="-122"/>
+                <a:cs typeface="Arial" pitchFamily="34" charset="-120"/>
+              </a:rPr>
+              <a:t>Exit: edit rate on minor claims settles below 20%.</a:t>
+            </a:r>
+            <a:endParaRPr lang="en-US" sz="720" dirty="0"/>
+          </a:p>
+        </p:txBody>
+      </p:sp>
+      <p:sp>
+        <p:nvSpPr>
+          <p:cNvPr id="52" name="Shape 50"/>
+          <p:cNvSpPr/>
+          <p:nvPr/>
+        </p:nvSpPr>
+        <p:spPr>
+          <a:xfrm>
+            <a:off x="6012180" y="4297680"/>
+            <a:ext cx="164592" cy="0"/>
+          </a:xfrm>
+          <a:prstGeom prst="line">
+            <a:avLst/>
+          </a:prstGeom>
+          <a:noFill/>
+          <a:ln w="12700">
+            <a:solidFill>
+              <a:srgbClr val="5B7D80"/>
+            </a:solidFill>
+            <a:prstDash val="solid"/>
+            <a:tailEnd type="triangle"/>
+          </a:ln>
+        </p:spPr>
+      </p:sp>
+      <p:sp>
+        <p:nvSpPr>
+          <p:cNvPr id="53" name="Shape 51"/>
+          <p:cNvSpPr/>
+          <p:nvPr/>
+        </p:nvSpPr>
+        <p:spPr>
+          <a:xfrm>
+            <a:off x="6204204" y="3877056"/>
+            <a:ext cx="2699766" cy="841248"/>
+          </a:xfrm>
+          <a:prstGeom prst="roundRect">
+            <a:avLst>
+              <a:gd name="adj" fmla="val 6522"/>
+            </a:avLst>
+          </a:prstGeom>
+          <a:solidFill>
+            <a:srgbClr val="EDECFB"/>
+          </a:solidFill>
+          <a:ln w="15240">
+            <a:solidFill>
+              <a:srgbClr val="4338CA"/>
+            </a:solidFill>
+            <a:prstDash val="solid"/>
+          </a:ln>
+        </p:spPr>
+      </p:sp>
+      <p:sp>
+        <p:nvSpPr>
+          <p:cNvPr id="54" name="Text 52"/>
+          <p:cNvSpPr txBox="1"/>
+          <p:nvPr/>
+        </p:nvSpPr>
+        <p:spPr>
+          <a:xfrm>
+            <a:off x="6350508" y="3968496"/>
+            <a:ext cx="2407158" cy="201168"/>
+          </a:xfrm>
+          <a:prstGeom prst="rect">
+            <a:avLst/>
+          </a:prstGeom>
+          <a:noFill/>
+          <a:ln/>
+        </p:spPr>
+        <p:txBody>
+          <a:bodyPr wrap="square" lIns="0" tIns="0" rIns="0" bIns="0" rtlCol="0" anchor="ctr"/>
+          <a:lstStyle/>
+          <a:p>
+            <a:pPr indent="0" marL="0">
+              <a:buNone/>
+            </a:pPr>
+            <a:r>
+              <a:rPr lang="en-US" sz="1050" b="1" dirty="0">
+                <a:solidFill>
+                  <a:srgbClr val="4338CA"/>
+                </a:solidFill>
+                <a:latin typeface="Arial" pitchFamily="34" charset="0"/>
+                <a:ea typeface="Arial" pitchFamily="34" charset="-122"/>
+                <a:cs typeface="Arial" pitchFamily="34" charset="-120"/>
+              </a:rPr>
+              <a:t>Approve</a:t>
+            </a:r>
+            <a:endParaRPr lang="en-US" sz="1050" dirty="0"/>
+          </a:p>
+        </p:txBody>
+      </p:sp>
+      <p:sp>
+        <p:nvSpPr>
+          <p:cNvPr id="55" name="Text 53"/>
+          <p:cNvSpPr txBox="1"/>
+          <p:nvPr/>
+        </p:nvSpPr>
+        <p:spPr>
+          <a:xfrm>
+            <a:off x="6350508" y="3968496"/>
+            <a:ext cx="2407158" cy="201168"/>
+          </a:xfrm>
+          <a:prstGeom prst="rect">
+            <a:avLst/>
+          </a:prstGeom>
+          <a:noFill/>
+          <a:ln/>
+        </p:spPr>
+        <p:txBody>
+          <a:bodyPr wrap="square" lIns="0" tIns="0" rIns="0" bIns="0" rtlCol="0" anchor="ctr"/>
+          <a:lstStyle/>
+          <a:p>
+            <a:pPr algn="r" indent="0" marL="0">
+              <a:buNone/>
+            </a:pPr>
+            <a:r>
+              <a:rPr lang="en-US" sz="780" i="1" dirty="0">
+                <a:solidFill>
+                  <a:srgbClr val="5B6472"/>
+                </a:solidFill>
+                <a:latin typeface="Arial" pitchFamily="34" charset="0"/>
+                <a:ea typeface="Arial" pitchFamily="34" charset="-122"/>
+                <a:cs typeface="Arial" pitchFamily="34" charset="-120"/>
+              </a:rPr>
+              <a:t>months 5–6</a:t>
+            </a:r>
+            <a:endParaRPr lang="en-US" sz="780" dirty="0"/>
+          </a:p>
+        </p:txBody>
+      </p:sp>
+      <p:sp>
+        <p:nvSpPr>
+          <p:cNvPr id="56" name="Text 54"/>
+          <p:cNvSpPr txBox="1"/>
+          <p:nvPr/>
+        </p:nvSpPr>
+        <p:spPr>
+          <a:xfrm>
+            <a:off x="6350508" y="4187952"/>
+            <a:ext cx="2407158" cy="256032"/>
+          </a:xfrm>
+          <a:prstGeom prst="rect">
+            <a:avLst/>
+          </a:prstGeom>
+          <a:noFill/>
+          <a:ln/>
+        </p:spPr>
+        <p:txBody>
+          <a:bodyPr wrap="square" lIns="0" tIns="0" rIns="0" bIns="0" rtlCol="0" anchor="ctr"/>
+          <a:lstStyle/>
+          <a:p>
+            <a:pPr indent="0" marL="0">
+              <a:lnSpc>
+                <a:spcPct val="112000"/>
+              </a:lnSpc>
+              <a:buNone/>
+            </a:pPr>
+            <a:r>
+              <a:rPr lang="en-US" sz="820" dirty="0">
+                <a:solidFill>
+                  <a:srgbClr val="3A3A3A"/>
+                </a:solidFill>
+                <a:latin typeface="Arial" pitchFamily="34" charset="0"/>
+                <a:ea typeface="Arial" pitchFamily="34" charset="-122"/>
+                <a:cs typeface="Arial" pitchFamily="34" charset="-120"/>
+              </a:rPr>
+              <a:t>Minor claims pre-filled. One click accepts.</a:t>
+            </a:r>
+            <a:endParaRPr lang="en-US" sz="820" dirty="0"/>
+          </a:p>
+        </p:txBody>
+      </p:sp>
+      <p:sp>
+        <p:nvSpPr>
+          <p:cNvPr id="57" name="Shape 55"/>
+          <p:cNvSpPr/>
+          <p:nvPr/>
+        </p:nvSpPr>
+        <p:spPr>
+          <a:xfrm>
+            <a:off x="6350508" y="4480560"/>
+            <a:ext cx="2407158" cy="9144"/>
+          </a:xfrm>
+          <a:prstGeom prst="rect">
+            <a:avLst/>
+          </a:prstGeom>
+          <a:solidFill>
+            <a:srgbClr val="4338CA"/>
+          </a:solidFill>
+          <a:ln/>
+        </p:spPr>
+      </p:sp>
+      <p:sp>
+        <p:nvSpPr>
+          <p:cNvPr id="58" name="Text 56"/>
+          <p:cNvSpPr txBox="1"/>
+          <p:nvPr/>
+        </p:nvSpPr>
+        <p:spPr>
+          <a:xfrm>
+            <a:off x="6350508" y="4517136"/>
+            <a:ext cx="2407158" cy="182880"/>
+          </a:xfrm>
+          <a:prstGeom prst="rect">
+            <a:avLst/>
+          </a:prstGeom>
+          <a:noFill/>
+          <a:ln/>
+        </p:spPr>
+        <p:txBody>
+          <a:bodyPr wrap="square" lIns="0" tIns="0" rIns="0" bIns="0" rtlCol="0" anchor="ctr"/>
+          <a:lstStyle/>
+          <a:p>
+            <a:pPr indent="0" marL="0">
+              <a:lnSpc>
+                <a:spcPct val="105000"/>
+              </a:lnSpc>
+              <a:buNone/>
+            </a:pPr>
+            <a:r>
+              <a:rPr lang="en-US" sz="720" i="1" dirty="0">
+                <a:solidFill>
+                  <a:srgbClr val="4A4A4A"/>
+                </a:solidFill>
+                <a:latin typeface="Arial" pitchFamily="34" charset="0"/>
+                <a:ea typeface="Arial" pitchFamily="34" charset="-122"/>
+                <a:cs typeface="Arial" pitchFamily="34" charset="-120"/>
+              </a:rPr>
+              <a:t>Exit criteria reviewed monthly with the claims lead.</a:t>
+            </a:r>
+            <a:endParaRPr lang="en-US" sz="720" dirty="0"/>
+          </a:p>
+        </p:txBody>
+      </p:sp>
+      <p:sp>
+        <p:nvSpPr>
+          <p:cNvPr id="59" name="Shape 57"/>
+          <p:cNvSpPr/>
+          <p:nvPr/>
+        </p:nvSpPr>
+        <p:spPr>
+          <a:xfrm>
+            <a:off x="8931402" y="4297680"/>
+            <a:ext cx="164592" cy="0"/>
+          </a:xfrm>
+          <a:prstGeom prst="line">
+            <a:avLst/>
+          </a:prstGeom>
+          <a:noFill/>
+          <a:ln w="12700">
+            <a:solidFill>
+              <a:srgbClr val="5B7D80"/>
+            </a:solidFill>
+            <a:prstDash val="solid"/>
+            <a:tailEnd type="triangle"/>
+          </a:ln>
+        </p:spPr>
+      </p:sp>
+      <p:sp>
+        <p:nvSpPr>
+          <p:cNvPr id="60" name="Shape 58"/>
+          <p:cNvSpPr/>
+          <p:nvPr/>
+        </p:nvSpPr>
+        <p:spPr>
+          <a:xfrm>
+            <a:off x="9123426" y="3877056"/>
+            <a:ext cx="2699766" cy="841248"/>
+          </a:xfrm>
+          <a:prstGeom prst="roundRect">
+            <a:avLst>
+              <a:gd name="adj" fmla="val 6522"/>
+            </a:avLst>
+          </a:prstGeom>
+          <a:solidFill>
+            <a:srgbClr val="FBE9F1"/>
+          </a:solidFill>
+          <a:ln w="15240">
+            <a:solidFill>
+              <a:srgbClr val="BE185D"/>
+            </a:solidFill>
+            <a:prstDash val="solid"/>
+          </a:ln>
+        </p:spPr>
+      </p:sp>
+      <p:sp>
+        <p:nvSpPr>
+          <p:cNvPr id="61" name="Text 59"/>
+          <p:cNvSpPr txBox="1"/>
+          <p:nvPr/>
+        </p:nvSpPr>
+        <p:spPr>
+          <a:xfrm>
+            <a:off x="9269730" y="3968496"/>
+            <a:ext cx="2407158" cy="201168"/>
+          </a:xfrm>
+          <a:prstGeom prst="rect">
+            <a:avLst/>
+          </a:prstGeom>
+          <a:noFill/>
+          <a:ln/>
+        </p:spPr>
+        <p:txBody>
+          <a:bodyPr wrap="square" lIns="0" tIns="0" rIns="0" bIns="0" rtlCol="0" anchor="ctr"/>
+          <a:lstStyle/>
+          <a:p>
+            <a:pPr indent="0" marL="0">
+              <a:buNone/>
+            </a:pPr>
+            <a:r>
+              <a:rPr lang="en-US" sz="1050" b="1" dirty="0">
+                <a:solidFill>
+                  <a:srgbClr val="BE185D"/>
+                </a:solidFill>
+                <a:latin typeface="Arial" pitchFamily="34" charset="0"/>
+                <a:ea typeface="Arial" pitchFamily="34" charset="-122"/>
+                <a:cs typeface="Arial" pitchFamily="34" charset="-120"/>
+              </a:rPr>
+              <a:t>Never</a:t>
+            </a:r>
+            <a:endParaRPr lang="en-US" sz="1050" dirty="0"/>
+          </a:p>
+        </p:txBody>
+      </p:sp>
+      <p:sp>
+        <p:nvSpPr>
+          <p:cNvPr id="62" name="Text 60"/>
+          <p:cNvSpPr txBox="1"/>
+          <p:nvPr/>
+        </p:nvSpPr>
+        <p:spPr>
+          <a:xfrm>
+            <a:off x="9269730" y="3968496"/>
+            <a:ext cx="2407158" cy="201168"/>
+          </a:xfrm>
+          <a:prstGeom prst="rect">
+            <a:avLst/>
+          </a:prstGeom>
+          <a:noFill/>
+          <a:ln/>
+        </p:spPr>
+        <p:txBody>
+          <a:bodyPr wrap="square" lIns="0" tIns="0" rIns="0" bIns="0" rtlCol="0" anchor="ctr"/>
+          <a:lstStyle/>
+          <a:p>
+            <a:pPr algn="r" indent="0" marL="0">
+              <a:buNone/>
+            </a:pPr>
+            <a:r>
+              <a:rPr lang="en-US" sz="780" i="1" dirty="0">
+                <a:solidFill>
+                  <a:srgbClr val="5B6472"/>
+                </a:solidFill>
+                <a:latin typeface="Arial" pitchFamily="34" charset="0"/>
+                <a:ea typeface="Arial" pitchFamily="34" charset="-122"/>
+                <a:cs typeface="Arial" pitchFamily="34" charset="-120"/>
+              </a:rPr>
+              <a:t>by design</a:t>
+            </a:r>
+            <a:endParaRPr lang="en-US" sz="780" dirty="0"/>
+          </a:p>
+        </p:txBody>
+      </p:sp>
+      <p:sp>
+        <p:nvSpPr>
+          <p:cNvPr id="63" name="Text 61"/>
+          <p:cNvSpPr txBox="1"/>
+          <p:nvPr/>
+        </p:nvSpPr>
+        <p:spPr>
+          <a:xfrm>
+            <a:off x="9269730" y="4187952"/>
+            <a:ext cx="2407158" cy="256032"/>
+          </a:xfrm>
+          <a:prstGeom prst="rect">
+            <a:avLst/>
+          </a:prstGeom>
+          <a:noFill/>
+          <a:ln/>
+        </p:spPr>
+        <p:txBody>
+          <a:bodyPr wrap="square" lIns="0" tIns="0" rIns="0" bIns="0" rtlCol="0" anchor="ctr"/>
+          <a:lstStyle/>
+          <a:p>
+            <a:pPr indent="0" marL="0">
+              <a:lnSpc>
+                <a:spcPct val="112000"/>
+              </a:lnSpc>
+              <a:buNone/>
+            </a:pPr>
+            <a:r>
+              <a:rPr lang="en-US" sz="820" dirty="0">
+                <a:solidFill>
+                  <a:srgbClr val="3A3A3A"/>
+                </a:solidFill>
+                <a:latin typeface="Arial" pitchFamily="34" charset="0"/>
+                <a:ea typeface="Arial" pitchFamily="34" charset="-122"/>
+                <a:cs typeface="Arial" pitchFamily="34" charset="-120"/>
+              </a:rPr>
+              <a:t>Nothing adverse to a claimant is ever automatic.</a:t>
+            </a:r>
+            <a:endParaRPr lang="en-US" sz="820" dirty="0"/>
+          </a:p>
+        </p:txBody>
+      </p:sp>
+      <p:sp>
+        <p:nvSpPr>
+          <p:cNvPr id="64" name="Shape 62"/>
+          <p:cNvSpPr/>
+          <p:nvPr/>
+        </p:nvSpPr>
+        <p:spPr>
+          <a:xfrm>
+            <a:off x="9269730" y="4480560"/>
+            <a:ext cx="2407158" cy="9144"/>
+          </a:xfrm>
+          <a:prstGeom prst="rect">
+            <a:avLst/>
+          </a:prstGeom>
+          <a:solidFill>
+            <a:srgbClr val="BE185D"/>
+          </a:solidFill>
+          <a:ln/>
+        </p:spPr>
+      </p:sp>
+      <p:sp>
+        <p:nvSpPr>
+          <p:cNvPr id="65" name="Text 63"/>
+          <p:cNvSpPr txBox="1"/>
+          <p:nvPr/>
+        </p:nvSpPr>
+        <p:spPr>
+          <a:xfrm>
+            <a:off x="9269730" y="4517136"/>
+            <a:ext cx="2407158" cy="182880"/>
+          </a:xfrm>
+          <a:prstGeom prst="rect">
+            <a:avLst/>
+          </a:prstGeom>
+          <a:noFill/>
+          <a:ln/>
+        </p:spPr>
+        <p:txBody>
+          <a:bodyPr wrap="square" lIns="0" tIns="0" rIns="0" bIns="0" rtlCol="0" anchor="ctr"/>
+          <a:lstStyle/>
+          <a:p>
+            <a:pPr indent="0" marL="0">
+              <a:lnSpc>
+                <a:spcPct val="105000"/>
+              </a:lnSpc>
+              <a:buNone/>
+            </a:pPr>
+            <a:r>
+              <a:rPr lang="en-US" sz="720" i="1" dirty="0">
+                <a:solidFill>
+                  <a:srgbClr val="6A1F42"/>
+                </a:solidFill>
+                <a:latin typeface="Arial" pitchFamily="34" charset="0"/>
+                <a:ea typeface="Arial" pitchFamily="34" charset="-122"/>
+                <a:cs typeface="Arial" pitchFamily="34" charset="-120"/>
+              </a:rPr>
+              <a:t>This is a boundary, not a phase.</a:t>
+            </a:r>
+            <a:endParaRPr lang="en-US" sz="720" dirty="0"/>
+          </a:p>
+        </p:txBody>
+      </p:sp>
+      <p:sp>
+        <p:nvSpPr>
+          <p:cNvPr id="66" name="Text 64"/>
+          <p:cNvSpPr txBox="1"/>
+          <p:nvPr/>
+        </p:nvSpPr>
+        <p:spPr>
+          <a:xfrm>
+            <a:off x="365760" y="4846320"/>
+            <a:ext cx="11430000" cy="237744"/>
+          </a:xfrm>
+          <a:prstGeom prst="rect">
+            <a:avLst/>
+          </a:prstGeom>
+          <a:noFill/>
+          <a:ln/>
+        </p:spPr>
+        <p:txBody>
+          <a:bodyPr wrap="square" lIns="0" tIns="0" rIns="0" bIns="0" rtlCol="0" anchor="ctr"/>
+          <a:lstStyle/>
+          <a:p>
+            <a:pPr indent="0" marL="0">
+              <a:buNone/>
+            </a:pPr>
+            <a:r>
+              <a:rPr lang="en-US" sz="740" dirty="0">
+                <a:solidFill>
+                  <a:srgbClr val="5B6472"/>
+                </a:solidFill>
+                <a:latin typeface="Arial" pitchFamily="34" charset="0"/>
+                <a:ea typeface="Arial" pitchFamily="34" charset="-122"/>
+                <a:cs typeface="Arial" pitchFamily="34" charset="-120"/>
+              </a:rPr>
+              <a:t>If an agent fails or is unsure, the claim drops into today's manual queue — slower, never wrong · a model or prompt change re-runs 200 historical claims before it can deploy · what it costs is on slide 8</a:t>
+            </a:r>
+            <a:endParaRPr lang="en-US" sz="740" dirty="0"/>
+          </a:p>
+        </p:txBody>
+      </p:sp>
+      <p:sp>
+        <p:nvSpPr>
+          <p:cNvPr id="67" name="Text 65"/>
+          <p:cNvSpPr txBox="1"/>
+          <p:nvPr/>
+        </p:nvSpPr>
+        <p:spPr>
+          <a:xfrm>
+            <a:off x="365760" y="6601968"/>
+            <a:ext cx="5486400" cy="219456"/>
+          </a:xfrm>
+          <a:prstGeom prst="rect">
+            <a:avLst/>
+          </a:prstGeom>
+          <a:noFill/>
+          <a:ln/>
+        </p:spPr>
+        <p:txBody>
+          <a:bodyPr wrap="square" lIns="0" tIns="0" rIns="0" bIns="0" rtlCol="0" anchor="ctr"/>
+          <a:lstStyle/>
+          <a:p>
+            <a:pPr indent="0" marL="0">
+              <a:buNone/>
+            </a:pPr>
+            <a:r>
+              <a:rPr lang="en-US" sz="800" dirty="0">
+                <a:solidFill>
+                  <a:srgbClr val="5B6472"/>
+                </a:solidFill>
+                <a:latin typeface="Arial" pitchFamily="34" charset="0"/>
+                <a:ea typeface="Arial" pitchFamily="34" charset="-122"/>
+                <a:cs typeface="Arial" pitchFamily="34" charset="-120"/>
+              </a:rPr>
+              <a:t>GGW Claims Workflow Redesign · FNOL</a:t>
+            </a:r>
+            <a:endParaRPr lang="en-US" sz="800" dirty="0"/>
+          </a:p>
+        </p:txBody>
+      </p:sp>
+      <p:sp>
+        <p:nvSpPr>
+          <p:cNvPr id="68" name="Text 66"/>
+          <p:cNvSpPr txBox="1"/>
+          <p:nvPr/>
+        </p:nvSpPr>
+        <p:spPr>
+          <a:xfrm>
+            <a:off x="11247120" y="6601968"/>
+            <a:ext cx="594360" cy="219456"/>
+          </a:xfrm>
+          <a:prstGeom prst="rect">
+            <a:avLst/>
+          </a:prstGeom>
+          <a:noFill/>
+          <a:ln/>
+        </p:spPr>
+        <p:txBody>
+          <a:bodyPr wrap="square" lIns="0" tIns="0" rIns="0" bIns="0" rtlCol="0" anchor="ctr"/>
+          <a:lstStyle/>
+          <a:p>
+            <a:pPr algn="r" indent="0" marL="0">
+              <a:buNone/>
+            </a:pPr>
+            <a:r>
+              <a:rPr lang="en-US" sz="800" dirty="0">
+                <a:solidFill>
+                  <a:srgbClr val="5B6472"/>
+                </a:solidFill>
+                <a:latin typeface="Arial" pitchFamily="34" charset="0"/>
+                <a:ea typeface="Arial" pitchFamily="34" charset="-122"/>
+                <a:cs typeface="Arial" pitchFamily="34" charset="-120"/>
+              </a:rPr>
+              <a:t>7 / 9</a:t>
+            </a:r>
+            <a:endParaRPr lang="en-US" sz="800" dirty="0"/>
+          </a:p>
+        </p:txBody>
+      </p:sp>
+    </p:spTree>
+  </p:cSld>
+  <p:clrMapOvr>
+    <a:masterClrMapping/>
+  </p:clrMapOvr>
+</p:sld>
+</file>
+
+<file path=ppt/slides/slide8.xml><?xml version="1.0" encoding="utf-8"?>
+<p:sld xmlns:a="http://schemas.openxmlformats.org/drawingml/2006/main" xmlns:r="http://schemas.openxmlformats.org/officeDocument/2006/relationships" xmlns:p="http://schemas.openxmlformats.org/presentationml/2006/main">
+  <p:cSld name="Slide 8">
+    <p:bg>
+      <p:bgPr>
+        <a:solidFill>
+          <a:srgbClr val="FAFAF8"/>
+        </a:solidFill>
+      </p:bgPr>
+    </p:bg>
+    <p:spTree>
+      <p:nvGrpSpPr>
+        <p:cNvPr id="1" name=""/>
+        <p:cNvGrpSpPr/>
+        <p:nvPr/>
+      </p:nvGrpSpPr>
+      <p:grpSpPr>
+        <a:xfrm>
+          <a:off x="0" y="0"/>
+          <a:ext cx="0" cy="0"/>
+          <a:chOff x="0" y="0"/>
+          <a:chExt cx="0" cy="0"/>
+        </a:xfrm>
+      </p:grpSpPr>
+      <p:sp>
+        <p:nvSpPr>
+          <p:cNvPr id="2" name="Text 0"/>
+          <p:cNvSpPr txBox="1"/>
+          <p:nvPr/>
+        </p:nvSpPr>
+        <p:spPr>
+          <a:xfrm>
+            <a:off x="365760" y="118872"/>
+            <a:ext cx="9326880" cy="310896"/>
+          </a:xfrm>
+          <a:prstGeom prst="rect">
+            <a:avLst/>
+          </a:prstGeom>
+          <a:noFill/>
+          <a:ln/>
+        </p:spPr>
+        <p:txBody>
+          <a:bodyPr wrap="square" lIns="0" tIns="0" rIns="0" bIns="0" rtlCol="0" anchor="ctr"/>
+          <a:lstStyle/>
+          <a:p>
+            <a:pPr indent="0" marL="0">
+              <a:buNone/>
+            </a:pPr>
+            <a:r>
+              <a:rPr lang="en-US" sz="1400" b="1" dirty="0">
+                <a:solidFill>
+                  <a:srgbClr val="1B2430"/>
+                </a:solidFill>
+                <a:latin typeface="Cambria" pitchFamily="34" charset="0"/>
+                <a:ea typeface="Cambria" pitchFamily="34" charset="-122"/>
+                <a:cs typeface="Cambria" pitchFamily="34" charset="-120"/>
+              </a:rPr>
               <a:t>Every figure is built from observed steps and list prices — none of it is a best case</a:t>
             </a:r>
             <a:endParaRPr lang="en-US" sz="1400" dirty="0"/>
@@ -15883,7 +17611,7 @@
       </p:sp>
       <p:graphicFrame>
         <p:nvGraphicFramePr>
-          <p:cNvPr id="8" name="Table 0"/>
+          <p:cNvPr id="9" name="Table 0"/>
           <p:cNvGraphicFramePr>
             <a:graphicFrameLocks noGrp="1"/>
           </p:cNvGraphicFramePr>
@@ -19099,7 +20827,7 @@
       </p:sp>
       <p:graphicFrame>
         <p:nvGraphicFramePr>
-          <p:cNvPr id="15" name="Table 1"/>
+          <p:cNvPr id="17" name="Table 1"/>
           <p:cNvGraphicFramePr>
             <a:graphicFrameLocks noGrp="1"/>
           </p:cNvGraphicFramePr>
@@ -22192,7 +23920,7 @@
       </p:sp>
       <p:graphicFrame>
         <p:nvGraphicFramePr>
-          <p:cNvPr id="22" name="Table 2"/>
+          <p:cNvPr id="25" name="Table 2"/>
           <p:cNvGraphicFramePr>
             <a:graphicFrameLocks noGrp="1"/>
           </p:cNvGraphicFramePr>
@@ -23032,7 +24760,7 @@
       </p:sp>
       <p:graphicFrame>
         <p:nvGraphicFramePr>
-          <p:cNvPr id="29" name="Table 3"/>
+          <p:cNvPr id="33" name="Table 3"/>
           <p:cNvGraphicFramePr>
             <a:graphicFrameLocks noGrp="1"/>
           </p:cNvGraphicFramePr>
@@ -24482,7 +26210,7 @@
                 <a:ea typeface="Arial" pitchFamily="34" charset="-122"/>
                 <a:cs typeface="Arial" pitchFamily="34" charset="-120"/>
               </a:rPr>
-              <a:t>7 / 8</a:t>
+              <a:t>8 / 9</a:t>
             </a:r>
             <a:endParaRPr lang="en-US" sz="800" dirty="0"/>
           </a:p>
@@ -24496,9 +26224,9 @@
 </p:sld>
 </file>
 
-<file path=ppt/slides/slide8.xml><?xml version="1.0" encoding="utf-8"?>
+<file path=ppt/slides/slide9.xml><?xml version="1.0" encoding="utf-8"?>
 <p:sld xmlns:a="http://schemas.openxmlformats.org/drawingml/2006/main" xmlns:r="http://schemas.openxmlformats.org/officeDocument/2006/relationships" xmlns:p="http://schemas.openxmlformats.org/presentationml/2006/main">
-  <p:cSld name="Slide 8">
+  <p:cSld name="Slide 9">
     <p:bg>
       <p:bgPr>
         <a:solidFill>
@@ -26708,7 +28436,7 @@
                 <a:ea typeface="Arial" pitchFamily="34" charset="-122"/>
                 <a:cs typeface="Arial" pitchFamily="34" charset="-120"/>
               </a:rPr>
-              <a:t>Every per-step minute on slide 7 · the 30% allowance for breaks and interruptions · how often a CPR is missing (30%) or underwriting is asked (25%) · how often the redesign raises an exception (20%) · the tokens a typical claim needs · the €146k build · the 0.25 FTE upkeep.</a:t>
+              <a:t>Every per-step minute on slide 8 · the 30% allowance for breaks and interruptions · how often a CPR is missing (30%) or underwriting is asked (25%) · how often the redesign raises an exception (20%) · the tokens a typical claim needs · the €146k build · the 0.25 FTE upkeep.</a:t>
             </a:r>
             <a:endParaRPr lang="en-US" sz="840" dirty="0"/>
           </a:p>
@@ -26972,7 +28700,7 @@
                 <a:ea typeface="Arial" pitchFamily="34" charset="-122"/>
                 <a:cs typeface="Arial" pitchFamily="34" charset="-120"/>
               </a:rPr>
-              <a:t>8 / 8</a:t>
+              <a:t>9 / 9</a:t>
             </a:r>
             <a:endParaRPr lang="en-US" sz="800" dirty="0"/>
           </a:p>

--- a/case-study/deck/GGW_FNOL_Redesign.pptx
+++ b/case-study/deck/GGW_FNOL_Redesign.pptx
@@ -1738,7 +1738,7 @@
                 <a:ea typeface="Arial" pitchFamily="34" charset="-122"/>
                 <a:cs typeface="Arial" pitchFamily="34" charset="-120"/>
               </a:rPr>
-              <a:t>17.5 hours a day across the 20 of them — 2.8 full-time people · two thirds of that work goes to claims that were always going to close quietly · a person still decides anything adverse</a:t>
+              <a:t>17.5 hours a day across the 20 of them, or 2.8 full-time people. Two thirds of that work goes to claims that were always going to close quietly.</a:t>
             </a:r>
             <a:endParaRPr lang="en-US" sz="1050" dirty="0"/>
           </a:p>
@@ -3273,7 +3273,7 @@
                 <a:ea typeface="Arial" pitchFamily="34" charset="-122"/>
                 <a:cs typeface="Arial" pitchFamily="34" charset="-120"/>
               </a:rPr>
-              <a:t>across the 20 claim handlers — 2.8 full-time people</a:t>
+              <a:t>across the 20 claim handlers, or 2.8 full-time people</a:t>
             </a:r>
             <a:endParaRPr lang="en-US" sz="840" dirty="0"/>
           </a:p>
@@ -3661,7 +3661,7 @@
                 <a:ea typeface="Arial" pitchFamily="34" charset="-122"/>
                 <a:cs typeface="Arial" pitchFamily="34" charset="-120"/>
               </a:rPr>
-              <a:t>cost isn't the decision — value covers it several times over. Governance is: a person reviews every call that can go against a claimant.</a:t>
+              <a:t>cost isn't the decision. Value covers it several times over. Governance is: a person reviews every call that can go against a claimant.</a:t>
             </a:r>
             <a:endParaRPr lang="en-US" sz="850" dirty="0"/>
           </a:p>
@@ -3670,45 +3670,6 @@
       <p:sp>
         <p:nvSpPr>
           <p:cNvPr id="62" name="Text 60"/>
-          <p:cNvSpPr txBox="1"/>
-          <p:nvPr/>
-        </p:nvSpPr>
-        <p:spPr>
-          <a:xfrm>
-            <a:off x="457200" y="6053328"/>
-            <a:ext cx="11274552" cy="256032"/>
-          </a:xfrm>
-          <a:prstGeom prst="rect">
-            <a:avLst/>
-          </a:prstGeom>
-          <a:noFill/>
-          <a:ln/>
-        </p:spPr>
-        <p:txBody>
-          <a:bodyPr wrap="square" lIns="0" tIns="0" rIns="0" bIns="0" rtlCol="0" anchor="ctr"/>
-          <a:lstStyle/>
-          <a:p>
-            <a:pPr indent="0" marL="0">
-              <a:buNone/>
-            </a:pPr>
-            <a:r>
-              <a:rPr lang="en-US" sz="760" i="1" dirty="0">
-                <a:solidFill>
-                  <a:srgbClr val="6A6A6A"/>
-                </a:solidFill>
-                <a:latin typeface="Arial" pitchFamily="34" charset="0"/>
-                <a:ea typeface="Arial" pitchFamily="34" charset="-122"/>
-                <a:cs typeface="Arial" pitchFamily="34" charset="-120"/>
-              </a:rPr>
-              <a:t>A conservative estimate throughout — not the best case. Build-up and sources: slides 8–9.</a:t>
-            </a:r>
-            <a:endParaRPr lang="en-US" sz="760" dirty="0"/>
-          </a:p>
-        </p:txBody>
-      </p:sp>
-      <p:sp>
-        <p:nvSpPr>
-          <p:cNvPr id="63" name="Text 61"/>
           <p:cNvSpPr txBox="1"/>
           <p:nvPr/>
         </p:nvSpPr>
@@ -3747,7 +3708,7 @@
       </p:sp>
       <p:sp>
         <p:nvSpPr>
-          <p:cNvPr id="64" name="Text 62"/>
+          <p:cNvPr id="63" name="Text 61"/>
           <p:cNvSpPr txBox="1"/>
           <p:nvPr/>
         </p:nvSpPr>
@@ -3849,7 +3810,7 @@
                 <a:ea typeface="Cambria" pitchFamily="34" charset="-122"/>
                 <a:cs typeface="Cambria" pitchFamily="34" charset="-120"/>
               </a:rPr>
-              <a:t>Six stations share one claim record — no handoffs, and nothing is read twice</a:t>
+              <a:t>Seven stations share one claim record, so nothing is handed off or read twice</a:t>
             </a:r>
             <a:endParaRPr lang="en-US" sz="1400" dirty="0"/>
           </a:p>
@@ -5108,6 +5069,117 @@
         </p:nvSpPr>
         <p:spPr>
           <a:xfrm>
+            <a:off x="8138160" y="2304288"/>
+            <a:ext cx="1723644" cy="621792"/>
+          </a:xfrm>
+          <a:prstGeom prst="roundRect">
+            <a:avLst>
+              <a:gd name="adj" fmla="val 8824"/>
+            </a:avLst>
+          </a:prstGeom>
+          <a:solidFill>
+            <a:srgbClr val="ECEFF3"/>
+          </a:solidFill>
+          <a:ln w="17780">
+            <a:solidFill>
+              <a:srgbClr val="6B7787"/>
+            </a:solidFill>
+            <a:prstDash val="solid"/>
+          </a:ln>
+        </p:spPr>
+      </p:sp>
+      <p:sp>
+        <p:nvSpPr>
+          <p:cNvPr id="42" name="Text 40"/>
+          <p:cNvSpPr txBox="1"/>
+          <p:nvPr/>
+        </p:nvSpPr>
+        <p:spPr>
+          <a:xfrm>
+            <a:off x="8211312" y="2377440"/>
+            <a:ext cx="1577340" cy="256032"/>
+          </a:xfrm>
+          <a:prstGeom prst="rect">
+            <a:avLst/>
+          </a:prstGeom>
+          <a:noFill/>
+          <a:ln/>
+        </p:spPr>
+        <p:txBody>
+          <a:bodyPr wrap="square" lIns="0" tIns="0" rIns="0" bIns="0" rtlCol="0" anchor="ctr"/>
+          <a:lstStyle/>
+          <a:p>
+            <a:pPr algn="ctr" indent="0" marL="0">
+              <a:lnSpc>
+                <a:spcPct val="100000"/>
+              </a:lnSpc>
+              <a:buNone/>
+            </a:pPr>
+            <a:r>
+              <a:rPr lang="en-US" sz="960" b="1" dirty="0">
+                <a:solidFill>
+                  <a:srgbClr val="2A3340"/>
+                </a:solidFill>
+                <a:latin typeface="Arial" pitchFamily="34" charset="0"/>
+                <a:ea typeface="Arial" pitchFamily="34" charset="-122"/>
+                <a:cs typeface="Arial" pitchFamily="34" charset="-120"/>
+              </a:rPr>
+              <a:t>Coverage Check</a:t>
+            </a:r>
+            <a:endParaRPr lang="en-US" sz="960" dirty="0"/>
+          </a:p>
+        </p:txBody>
+      </p:sp>
+      <p:sp>
+        <p:nvSpPr>
+          <p:cNvPr id="43" name="Text 41"/>
+          <p:cNvSpPr txBox="1"/>
+          <p:nvPr/>
+        </p:nvSpPr>
+        <p:spPr>
+          <a:xfrm>
+            <a:off x="8211312" y="2633472"/>
+            <a:ext cx="1577340" cy="274320"/>
+          </a:xfrm>
+          <a:prstGeom prst="rect">
+            <a:avLst/>
+          </a:prstGeom>
+          <a:noFill/>
+          <a:ln/>
+        </p:spPr>
+        <p:txBody>
+          <a:bodyPr wrap="square" lIns="0" tIns="0" rIns="0" bIns="0" rtlCol="0" anchor="ctr"/>
+          <a:lstStyle/>
+          <a:p>
+            <a:pPr algn="ctr" indent="0" marL="0">
+              <a:lnSpc>
+                <a:spcPct val="102000"/>
+              </a:lnSpc>
+              <a:buNone/>
+            </a:pPr>
+            <a:r>
+              <a:rPr lang="en-US" sz="740" dirty="0">
+                <a:solidFill>
+                  <a:srgbClr val="5B6472"/>
+                </a:solidFill>
+                <a:latin typeface="Arial" pitchFamily="34" charset="0"/>
+                <a:ea typeface="Arial" pitchFamily="34" charset="-122"/>
+                <a:cs typeface="Arial" pitchFamily="34" charset="-120"/>
+              </a:rPr>
+              <a:t>cover, dates, sums · same record</a:t>
+            </a:r>
+            <a:endParaRPr lang="en-US" sz="740" dirty="0"/>
+          </a:p>
+        </p:txBody>
+      </p:sp>
+      <p:sp>
+        <p:nvSpPr>
+          <p:cNvPr id="44" name="Shape 42"/>
+          <p:cNvSpPr/>
+          <p:nvPr/>
+        </p:nvSpPr>
+        <p:spPr>
+          <a:xfrm>
             <a:off x="8138160" y="3438144"/>
             <a:ext cx="1723644" cy="621792"/>
           </a:xfrm>
@@ -5129,7 +5201,7 @@
       </p:sp>
       <p:sp>
         <p:nvSpPr>
-          <p:cNvPr id="42" name="Text 40"/>
+          <p:cNvPr id="45" name="Text 43"/>
           <p:cNvSpPr txBox="1"/>
           <p:nvPr/>
         </p:nvSpPr>
@@ -5171,7 +5243,7 @@
       </p:sp>
       <p:sp>
         <p:nvSpPr>
-          <p:cNvPr id="43" name="Text 41"/>
+          <p:cNvPr id="46" name="Text 44"/>
           <p:cNvSpPr txBox="1"/>
           <p:nvPr/>
         </p:nvSpPr>
@@ -5213,7 +5285,7 @@
       </p:sp>
       <p:sp>
         <p:nvSpPr>
-          <p:cNvPr id="44" name="Shape 42"/>
+          <p:cNvPr id="47" name="Shape 45"/>
           <p:cNvSpPr/>
           <p:nvPr/>
         </p:nvSpPr>
@@ -5240,7 +5312,7 @@
       </p:sp>
       <p:sp>
         <p:nvSpPr>
-          <p:cNvPr id="45" name="Text 43"/>
+          <p:cNvPr id="48" name="Text 46"/>
           <p:cNvSpPr txBox="1"/>
           <p:nvPr/>
         </p:nvSpPr>
@@ -5282,7 +5354,7 @@
       </p:sp>
       <p:sp>
         <p:nvSpPr>
-          <p:cNvPr id="46" name="Text 44"/>
+          <p:cNvPr id="49" name="Text 47"/>
           <p:cNvSpPr txBox="1"/>
           <p:nvPr/>
         </p:nvSpPr>
@@ -5324,7 +5396,7 @@
       </p:sp>
       <p:sp>
         <p:nvSpPr>
-          <p:cNvPr id="47" name="Shape 45"/>
+          <p:cNvPr id="50" name="Shape 48"/>
           <p:cNvSpPr/>
           <p:nvPr/>
         </p:nvSpPr>
@@ -5344,7 +5416,7 @@
       </p:sp>
       <p:sp>
         <p:nvSpPr>
-          <p:cNvPr id="48" name="Text 46"/>
+          <p:cNvPr id="51" name="Text 49"/>
           <p:cNvSpPr txBox="1"/>
           <p:nvPr/>
         </p:nvSpPr>
@@ -5383,7 +5455,7 @@
       </p:sp>
       <p:sp>
         <p:nvSpPr>
-          <p:cNvPr id="49" name="Shape 47"/>
+          <p:cNvPr id="52" name="Shape 50"/>
           <p:cNvSpPr/>
           <p:nvPr/>
         </p:nvSpPr>
@@ -5403,7 +5475,7 @@
       </p:sp>
       <p:sp>
         <p:nvSpPr>
-          <p:cNvPr id="50" name="Text 48"/>
+          <p:cNvPr id="53" name="Text 51"/>
           <p:cNvSpPr txBox="1"/>
           <p:nvPr/>
         </p:nvSpPr>
@@ -5442,7 +5514,7 @@
       </p:sp>
       <p:sp>
         <p:nvSpPr>
-          <p:cNvPr id="51" name="Shape 49"/>
+          <p:cNvPr id="54" name="Shape 52"/>
           <p:cNvSpPr/>
           <p:nvPr/>
         </p:nvSpPr>
@@ -5462,7 +5534,7 @@
       </p:sp>
       <p:sp>
         <p:nvSpPr>
-          <p:cNvPr id="52" name="Text 50"/>
+          <p:cNvPr id="55" name="Text 53"/>
           <p:cNvSpPr txBox="1"/>
           <p:nvPr/>
         </p:nvSpPr>
@@ -5501,7 +5573,7 @@
       </p:sp>
       <p:sp>
         <p:nvSpPr>
-          <p:cNvPr id="53" name="Shape 51"/>
+          <p:cNvPr id="56" name="Shape 54"/>
           <p:cNvSpPr/>
           <p:nvPr/>
         </p:nvSpPr>
@@ -5521,7 +5593,7 @@
       </p:sp>
       <p:sp>
         <p:nvSpPr>
-          <p:cNvPr id="54" name="Text 52"/>
+          <p:cNvPr id="57" name="Text 55"/>
           <p:cNvSpPr txBox="1"/>
           <p:nvPr/>
         </p:nvSpPr>
@@ -5560,13 +5632,13 @@
       </p:sp>
       <p:sp>
         <p:nvSpPr>
-          <p:cNvPr id="55" name="Shape 53"/>
+          <p:cNvPr id="58" name="Shape 56"/>
           <p:cNvSpPr/>
           <p:nvPr/>
         </p:nvSpPr>
         <p:spPr>
           <a:xfrm>
-            <a:off x="8183880" y="3483864"/>
+            <a:off x="8183880" y="2350008"/>
             <a:ext cx="164592" cy="164592"/>
           </a:xfrm>
           <a:prstGeom prst="ellipse">
@@ -5580,52 +5652,52 @@
       </p:sp>
       <p:sp>
         <p:nvSpPr>
-          <p:cNvPr id="56" name="Text 54"/>
-          <p:cNvSpPr txBox="1"/>
+          <p:cNvPr id="59" name="Text 57"/>
+          <p:cNvSpPr txBox="1"/>
+          <p:nvPr/>
+        </p:nvSpPr>
+        <p:spPr>
+          <a:xfrm>
+            <a:off x="8183880" y="2350008"/>
+            <a:ext cx="164592" cy="164592"/>
+          </a:xfrm>
+          <a:prstGeom prst="rect">
+            <a:avLst/>
+          </a:prstGeom>
+          <a:noFill/>
+          <a:ln/>
+        </p:spPr>
+        <p:txBody>
+          <a:bodyPr wrap="square" lIns="0" tIns="0" rIns="0" bIns="0" rtlCol="0" anchor="ctr"/>
+          <a:lstStyle/>
+          <a:p>
+            <a:pPr algn="ctr" indent="0" marL="0">
+              <a:buNone/>
+            </a:pPr>
+            <a:r>
+              <a:rPr lang="en-US" sz="740" b="1" dirty="0">
+                <a:solidFill>
+                  <a:srgbClr val="FFFFFF"/>
+                </a:solidFill>
+                <a:latin typeface="Arial" pitchFamily="34" charset="0"/>
+                <a:ea typeface="Arial" pitchFamily="34" charset="-122"/>
+                <a:cs typeface="Arial" pitchFamily="34" charset="-120"/>
+              </a:rPr>
+              <a:t>5</a:t>
+            </a:r>
+            <a:endParaRPr lang="en-US" sz="740" dirty="0"/>
+          </a:p>
+        </p:txBody>
+      </p:sp>
+      <p:sp>
+        <p:nvSpPr>
+          <p:cNvPr id="60" name="Shape 58"/>
+          <p:cNvSpPr/>
           <p:nvPr/>
         </p:nvSpPr>
         <p:spPr>
           <a:xfrm>
             <a:off x="8183880" y="3483864"/>
-            <a:ext cx="164592" cy="164592"/>
-          </a:xfrm>
-          <a:prstGeom prst="rect">
-            <a:avLst/>
-          </a:prstGeom>
-          <a:noFill/>
-          <a:ln/>
-        </p:spPr>
-        <p:txBody>
-          <a:bodyPr wrap="square" lIns="0" tIns="0" rIns="0" bIns="0" rtlCol="0" anchor="ctr"/>
-          <a:lstStyle/>
-          <a:p>
-            <a:pPr algn="ctr" indent="0" marL="0">
-              <a:buNone/>
-            </a:pPr>
-            <a:r>
-              <a:rPr lang="en-US" sz="740" b="1" dirty="0">
-                <a:solidFill>
-                  <a:srgbClr val="FFFFFF"/>
-                </a:solidFill>
-                <a:latin typeface="Arial" pitchFamily="34" charset="0"/>
-                <a:ea typeface="Arial" pitchFamily="34" charset="-122"/>
-                <a:cs typeface="Arial" pitchFamily="34" charset="-120"/>
-              </a:rPr>
-              <a:t>5</a:t>
-            </a:r>
-            <a:endParaRPr lang="en-US" sz="740" dirty="0"/>
-          </a:p>
-        </p:txBody>
-      </p:sp>
-      <p:sp>
-        <p:nvSpPr>
-          <p:cNvPr id="57" name="Shape 55"/>
-          <p:cNvSpPr/>
-          <p:nvPr/>
-        </p:nvSpPr>
-        <p:spPr>
-          <a:xfrm>
-            <a:off x="10126980" y="4617720"/>
             <a:ext cx="164592" cy="164592"/>
           </a:xfrm>
           <a:prstGeom prst="ellipse">
@@ -5639,8 +5711,47 @@
       </p:sp>
       <p:sp>
         <p:nvSpPr>
-          <p:cNvPr id="58" name="Text 56"/>
-          <p:cNvSpPr txBox="1"/>
+          <p:cNvPr id="61" name="Text 59"/>
+          <p:cNvSpPr txBox="1"/>
+          <p:nvPr/>
+        </p:nvSpPr>
+        <p:spPr>
+          <a:xfrm>
+            <a:off x="8183880" y="3483864"/>
+            <a:ext cx="164592" cy="164592"/>
+          </a:xfrm>
+          <a:prstGeom prst="rect">
+            <a:avLst/>
+          </a:prstGeom>
+          <a:noFill/>
+          <a:ln/>
+        </p:spPr>
+        <p:txBody>
+          <a:bodyPr wrap="square" lIns="0" tIns="0" rIns="0" bIns="0" rtlCol="0" anchor="ctr"/>
+          <a:lstStyle/>
+          <a:p>
+            <a:pPr algn="ctr" indent="0" marL="0">
+              <a:buNone/>
+            </a:pPr>
+            <a:r>
+              <a:rPr lang="en-US" sz="740" b="1" dirty="0">
+                <a:solidFill>
+                  <a:srgbClr val="FFFFFF"/>
+                </a:solidFill>
+                <a:latin typeface="Arial" pitchFamily="34" charset="0"/>
+                <a:ea typeface="Arial" pitchFamily="34" charset="-122"/>
+                <a:cs typeface="Arial" pitchFamily="34" charset="-120"/>
+              </a:rPr>
+              <a:t>6</a:t>
+            </a:r>
+            <a:endParaRPr lang="en-US" sz="740" dirty="0"/>
+          </a:p>
+        </p:txBody>
+      </p:sp>
+      <p:sp>
+        <p:nvSpPr>
+          <p:cNvPr id="62" name="Shape 60"/>
+          <p:cNvSpPr/>
           <p:nvPr/>
         </p:nvSpPr>
         <p:spPr>
@@ -5648,6 +5759,26 @@
             <a:off x="10126980" y="4617720"/>
             <a:ext cx="164592" cy="164592"/>
           </a:xfrm>
+          <a:prstGeom prst="ellipse">
+            <a:avLst/>
+          </a:prstGeom>
+          <a:solidFill>
+            <a:srgbClr val="1B2430"/>
+          </a:solidFill>
+          <a:ln/>
+        </p:spPr>
+      </p:sp>
+      <p:sp>
+        <p:nvSpPr>
+          <p:cNvPr id="63" name="Text 61"/>
+          <p:cNvSpPr txBox="1"/>
+          <p:nvPr/>
+        </p:nvSpPr>
+        <p:spPr>
+          <a:xfrm>
+            <a:off x="10126980" y="4617720"/>
+            <a:ext cx="164592" cy="164592"/>
+          </a:xfrm>
           <a:prstGeom prst="rect">
             <a:avLst/>
           </a:prstGeom>
@@ -5670,7 +5801,7 @@
                 <a:ea typeface="Arial" pitchFamily="34" charset="-122"/>
                 <a:cs typeface="Arial" pitchFamily="34" charset="-120"/>
               </a:rPr>
-              <a:t>6</a:t>
+              <a:t>7</a:t>
             </a:r>
             <a:endParaRPr lang="en-US" sz="740" dirty="0"/>
           </a:p>
@@ -5678,7 +5809,7 @@
       </p:sp>
       <p:sp>
         <p:nvSpPr>
-          <p:cNvPr id="59" name="Shape 57"/>
+          <p:cNvPr id="64" name="Shape 62"/>
           <p:cNvSpPr/>
           <p:nvPr/>
         </p:nvSpPr>
@@ -5702,7 +5833,7 @@
       </p:sp>
       <p:sp>
         <p:nvSpPr>
-          <p:cNvPr id="60" name="Shape 58"/>
+          <p:cNvPr id="65" name="Shape 63"/>
           <p:cNvSpPr/>
           <p:nvPr/>
         </p:nvSpPr>
@@ -5726,7 +5857,7 @@
       </p:sp>
       <p:sp>
         <p:nvSpPr>
-          <p:cNvPr id="61" name="Shape 59"/>
+          <p:cNvPr id="66" name="Shape 64"/>
           <p:cNvSpPr/>
           <p:nvPr/>
         </p:nvSpPr>
@@ -5750,14 +5881,14 @@
       </p:sp>
       <p:sp>
         <p:nvSpPr>
-          <p:cNvPr id="62" name="Shape 60"/>
+          <p:cNvPr id="67" name="Shape 65"/>
           <p:cNvSpPr/>
           <p:nvPr/>
         </p:nvSpPr>
         <p:spPr>
           <a:xfrm>
-            <a:off x="7056882" y="2926080"/>
-            <a:ext cx="1943100" cy="512064"/>
+            <a:off x="7918704" y="2615184"/>
+            <a:ext cx="219456" cy="0"/>
           </a:xfrm>
           <a:prstGeom prst="line">
             <a:avLst/>
@@ -5774,7 +5905,31 @@
       </p:sp>
       <p:sp>
         <p:nvSpPr>
-          <p:cNvPr id="63" name="Shape 61"/>
+          <p:cNvPr id="68" name="Shape 66"/>
+          <p:cNvSpPr/>
+          <p:nvPr/>
+        </p:nvSpPr>
+        <p:spPr>
+          <a:xfrm>
+            <a:off x="8999982" y="2926080"/>
+            <a:ext cx="0" cy="512064"/>
+          </a:xfrm>
+          <a:prstGeom prst="line">
+            <a:avLst/>
+          </a:prstGeom>
+          <a:noFill/>
+          <a:ln w="12700">
+            <a:solidFill>
+              <a:srgbClr val="5B7D80"/>
+            </a:solidFill>
+            <a:prstDash val="solid"/>
+            <a:tailEnd type="triangle"/>
+          </a:ln>
+        </p:spPr>
+      </p:sp>
+      <p:sp>
+        <p:nvSpPr>
+          <p:cNvPr id="69" name="Shape 67"/>
           <p:cNvSpPr/>
           <p:nvPr/>
         </p:nvSpPr>
@@ -5798,7 +5953,7 @@
       </p:sp>
       <p:sp>
         <p:nvSpPr>
-          <p:cNvPr id="64" name="Shape 62"/>
+          <p:cNvPr id="70" name="Shape 68"/>
           <p:cNvSpPr/>
           <p:nvPr/>
         </p:nvSpPr>
@@ -5822,7 +5977,7 @@
       </p:sp>
       <p:sp>
         <p:nvSpPr>
-          <p:cNvPr id="65" name="Shape 63"/>
+          <p:cNvPr id="71" name="Shape 69"/>
           <p:cNvSpPr/>
           <p:nvPr/>
         </p:nvSpPr>
@@ -5846,13 +6001,13 @@
       </p:sp>
       <p:sp>
         <p:nvSpPr>
-          <p:cNvPr id="66" name="Text 64"/>
-          <p:cNvSpPr txBox="1"/>
-          <p:nvPr/>
-        </p:nvSpPr>
-        <p:spPr>
-          <a:xfrm>
-            <a:off x="365760" y="5413248"/>
+          <p:cNvPr id="72" name="Text 70"/>
+          <p:cNvSpPr txBox="1"/>
+          <p:nvPr/>
+        </p:nvSpPr>
+        <p:spPr>
+          <a:xfrm>
+            <a:off x="365760" y="5449824"/>
             <a:ext cx="11457432" cy="201168"/>
           </a:xfrm>
           <a:prstGeom prst="rect">
@@ -5869,7 +6024,7 @@
               <a:buNone/>
             </a:pPr>
             <a:r>
-              <a:rPr lang="en-US" sz="840" b="1" i="1" dirty="0">
+              <a:rPr lang="en-US" sz="860" b="1" i="1" dirty="0">
                 <a:solidFill>
                   <a:srgbClr val="2A2A3E"/>
                 </a:solidFill>
@@ -5877,54 +6032,15 @@
                 <a:ea typeface="Arial" pitchFamily="34" charset="-122"/>
                 <a:cs typeface="Arial" pitchFamily="34" charset="-120"/>
               </a:rPr>
-              <a:t>AI owns the drafting. Rules own the facts. A person owns every call that can go against a claimant.</a:t>
-            </a:r>
-            <a:endParaRPr lang="en-US" sz="840" dirty="0"/>
-          </a:p>
-        </p:txBody>
-      </p:sp>
-      <p:sp>
-        <p:nvSpPr>
-          <p:cNvPr id="67" name="Text 65"/>
-          <p:cNvSpPr txBox="1"/>
-          <p:nvPr/>
-        </p:nvSpPr>
-        <p:spPr>
-          <a:xfrm>
-            <a:off x="365760" y="5632704"/>
-            <a:ext cx="11457432" cy="201168"/>
-          </a:xfrm>
-          <a:prstGeom prst="rect">
-            <a:avLst/>
-          </a:prstGeom>
-          <a:noFill/>
-          <a:ln/>
-        </p:spPr>
-        <p:txBody>
-          <a:bodyPr wrap="square" lIns="0" tIns="0" rIns="0" bIns="0" rtlCol="0" anchor="ctr"/>
-          <a:lstStyle/>
-          <a:p>
-            <a:pPr indent="0" marL="0">
-              <a:buNone/>
-            </a:pPr>
-            <a:r>
-              <a:rPr lang="en-US" sz="760" dirty="0">
-                <a:solidFill>
-                  <a:srgbClr val="5B6472"/>
-                </a:solidFill>
-                <a:latin typeface="Arial" pitchFamily="34" charset="0"/>
-                <a:ea typeface="Arial" pitchFamily="34" charset="-122"/>
-                <a:cs typeface="Arial" pitchFamily="34" charset="-120"/>
-              </a:rPr>
-              <a:t>One shared claim record carries every field and decision through the whole run, so a failed step resumes rather than restarts.</a:t>
-            </a:r>
-            <a:endParaRPr lang="en-US" sz="760" dirty="0"/>
-          </a:p>
-        </p:txBody>
-      </p:sp>
-      <p:sp>
-        <p:nvSpPr>
-          <p:cNvPr id="68" name="Text 66"/>
+              <a:t>AI drafts. Rules check. A person decides anything that can go against a claimant.</a:t>
+            </a:r>
+            <a:endParaRPr lang="en-US" sz="860" dirty="0"/>
+          </a:p>
+        </p:txBody>
+      </p:sp>
+      <p:sp>
+        <p:nvSpPr>
+          <p:cNvPr id="73" name="Text 71"/>
           <p:cNvSpPr txBox="1"/>
           <p:nvPr/>
         </p:nvSpPr>
@@ -5963,7 +6079,7 @@
       </p:sp>
       <p:sp>
         <p:nvSpPr>
-          <p:cNvPr id="69" name="Text 67"/>
+          <p:cNvPr id="74" name="Text 72"/>
           <p:cNvSpPr txBox="1"/>
           <p:nvPr/>
         </p:nvSpPr>
@@ -6104,7 +6220,7 @@
                 <a:ea typeface="Arial" pitchFamily="34" charset="-122"/>
                 <a:cs typeface="Arial" pitchFamily="34" charset="-120"/>
               </a:rPr>
-              <a:t>FNOL as it runs today (left) against the redesign (right) · first report to an opened, policy-linked claim</a:t>
+              <a:t>Today on the left, the redesign on the right</a:t>
             </a:r>
             <a:endParaRPr lang="en-US" sz="950" dirty="0"/>
           </a:p>
@@ -6720,7 +6836,7 @@
                 <a:ea typeface="Arial" pitchFamily="34" charset="-122"/>
                 <a:cs typeface="Arial" pitchFamily="34" charset="-120"/>
               </a:rPr>
-              <a:t>— one LangGraph state graph · shared claim state carries the audit trail</a:t>
+              <a:t>one shared claim record, one audit trail</a:t>
             </a:r>
             <a:endParaRPr lang="en-US" sz="1150" dirty="0"/>
           </a:p>
@@ -6869,7 +6985,7 @@
                 <a:ea typeface="Arial" pitchFamily="34" charset="-122"/>
                 <a:cs typeface="Arial" pitchFamily="34" charset="-120"/>
               </a:rPr>
-              <a:t>(employer almost always; sometimes union or injured)</a:t>
+              <a:t>(usually the employer)</a:t>
             </a:r>
             <a:endParaRPr lang="en-US" sz="950" dirty="0"/>
           </a:p>
@@ -7055,7 +7171,27 @@
                 <a:ea typeface="Arial" pitchFamily="34" charset="-122"/>
                 <a:cs typeface="Arial" pitchFamily="34" charset="-120"/>
               </a:rPr>
-              <a:t>AES already gathered the info — insurer only re-checks coverage</a:t>
+              <a:t>AES already gathered it;</a:t>
+            </a:r>
+            <a:endParaRPr lang="en-US" sz="760" dirty="0"/>
+          </a:p>
+          <a:p>
+            <a:pPr algn="ctr" indent="0" marL="0">
+              <a:lnSpc>
+                <a:spcPct val="108000"/>
+              </a:lnSpc>
+              <a:buNone/>
+            </a:pPr>
+            <a:r>
+              <a:rPr lang="en-US" sz="760" dirty="0">
+                <a:solidFill>
+                  <a:srgbClr val="33480A"/>
+                </a:solidFill>
+                <a:latin typeface="Arial" pitchFamily="34" charset="0"/>
+                <a:ea typeface="Arial" pitchFamily="34" charset="-122"/>
+                <a:cs typeface="Arial" pitchFamily="34" charset="-120"/>
+              </a:rPr>
+              <a:t>insurer only re-checks coverage</a:t>
             </a:r>
             <a:endParaRPr lang="en-US" sz="760" dirty="0"/>
           </a:p>
@@ -7169,7 +7305,27 @@
                 <a:ea typeface="Arial" pitchFamily="34" charset="-122"/>
                 <a:cs typeface="Arial" pitchFamily="34" charset="-120"/>
               </a:rPr>
-              <a:t>Side track — not PD/LOEC, see 1.1</a:t>
+              <a:t>Side track (not PD/LOEC)</a:t>
+            </a:r>
+            <a:endParaRPr lang="en-US" sz="780" dirty="0"/>
+          </a:p>
+          <a:p>
+            <a:pPr algn="ctr" indent="0" marL="0">
+              <a:lnSpc>
+                <a:spcPct val="108000"/>
+              </a:lnSpc>
+              <a:buNone/>
+            </a:pPr>
+            <a:r>
+              <a:rPr lang="en-US" sz="780" dirty="0">
+                <a:solidFill>
+                  <a:srgbClr val="6B4A10"/>
+                </a:solidFill>
+                <a:latin typeface="Arial" pitchFamily="34" charset="0"/>
+                <a:ea typeface="Arial" pitchFamily="34" charset="-122"/>
+                <a:cs typeface="Arial" pitchFamily="34" charset="-120"/>
+              </a:rPr>
+              <a:t>see 1.1</a:t>
             </a:r>
             <a:endParaRPr lang="en-US" sz="780" dirty="0"/>
           </a:p>
@@ -7639,7 +7795,7 @@
                 <a:ea typeface="Arial" pitchFamily="34" charset="-122"/>
                 <a:cs typeface="Arial" pitchFamily="34" charset="-120"/>
               </a:rPr>
-              <a:t>Claim arrives — any channel, any format (EASY, AES secure mail, email)</a:t>
+              <a:t>Claim arrives: EASY, AES secure mail, or email</a:t>
             </a:r>
             <a:endParaRPr lang="en-US" sz="950" dirty="0"/>
           </a:p>
@@ -7678,11 +7834,11 @@
         <p:spPr>
           <a:xfrm>
             <a:off x="6583680" y="2148840"/>
-            <a:ext cx="4937760" cy="538734"/>
+            <a:ext cx="4937760" cy="392684"/>
           </a:xfrm>
           <a:prstGeom prst="roundRect">
             <a:avLst>
-              <a:gd name="adj" fmla="val 6789"/>
+              <a:gd name="adj" fmla="val 9314"/>
             </a:avLst>
           </a:prstGeom>
           <a:solidFill>
@@ -7734,7 +7890,7 @@
                 <a:ea typeface="Arial" pitchFamily="34" charset="-122"/>
                 <a:cs typeface="Arial" pitchFamily="34" charset="-120"/>
               </a:rPr>
-              <a:t>reads any channel/format · extracts structured fields · matches CPR / CVR</a:t>
+              <a:t>any format in, structured fields out</a:t>
             </a:r>
             <a:endParaRPr lang="en-US" sz="1000" dirty="0"/>
           </a:p>
@@ -7748,8 +7904,8 @@
         </p:nvSpPr>
         <p:spPr>
           <a:xfrm>
-            <a:off x="9052560" y="2687574"/>
-            <a:ext cx="0" cy="182880"/>
+            <a:off x="9052560" y="2541524"/>
+            <a:ext cx="0" cy="320040"/>
           </a:xfrm>
           <a:prstGeom prst="line">
             <a:avLst/>
@@ -7772,12 +7928,12 @@
         </p:nvSpPr>
         <p:spPr>
           <a:xfrm>
-            <a:off x="6583680" y="2870454"/>
-            <a:ext cx="4937760" cy="538734"/>
+            <a:off x="6583680" y="2861564"/>
+            <a:ext cx="4937760" cy="392684"/>
           </a:xfrm>
           <a:prstGeom prst="roundRect">
             <a:avLst>
-              <a:gd name="adj" fmla="val 6789"/>
+              <a:gd name="adj" fmla="val 9314"/>
             </a:avLst>
           </a:prstGeom>
           <a:solidFill>
@@ -7829,7 +7985,7 @@
                 <a:ea typeface="Arial" pitchFamily="34" charset="-122"/>
                 <a:cs typeface="Arial" pitchFamily="34" charset="-120"/>
               </a:rPr>
-              <a:t>labels claim type (standard, teeth, glasses, violence-cover) with a confidence score</a:t>
+              <a:t>claim type + confidence score</a:t>
             </a:r>
             <a:endParaRPr lang="en-US" sz="1000" dirty="0"/>
           </a:p>
@@ -7843,7 +7999,7 @@
         </p:nvSpPr>
         <p:spPr>
           <a:xfrm>
-            <a:off x="9052560" y="3409188"/>
+            <a:off x="9052560" y="3254248"/>
             <a:ext cx="0" cy="320040"/>
           </a:xfrm>
           <a:prstGeom prst="line">
@@ -7867,7 +8023,7 @@
         </p:nvSpPr>
         <p:spPr>
           <a:xfrm>
-            <a:off x="8183880" y="3729228"/>
+            <a:off x="8183880" y="3574288"/>
             <a:ext cx="1737360" cy="640080"/>
           </a:xfrm>
           <a:prstGeom prst="diamond">
@@ -7935,7 +8091,7 @@
         </p:nvSpPr>
         <p:spPr>
           <a:xfrm>
-            <a:off x="10058400" y="3838956"/>
+            <a:off x="10058400" y="3684016"/>
             <a:ext cx="1691640" cy="420624"/>
           </a:xfrm>
           <a:prstGeom prst="rect">
@@ -7960,7 +8116,7 @@
                 <a:ea typeface="Arial" pitchFamily="34" charset="-122"/>
                 <a:cs typeface="Arial" pitchFamily="34" charset="-120"/>
               </a:rPr>
-              <a:t>threshold starts strict, loosens as override-rate data accumulates</a:t>
+              <a:t>starts strict, loosens with data</a:t>
             </a:r>
             <a:endParaRPr lang="en-US" sz="720" dirty="0"/>
           </a:p>
@@ -7974,7 +8130,7 @@
         </p:nvSpPr>
         <p:spPr>
           <a:xfrm flipH="1">
-            <a:off x="7909560" y="4049268"/>
+            <a:off x="7909560" y="3894328"/>
             <a:ext cx="274320" cy="0"/>
           </a:xfrm>
           <a:prstGeom prst="line">
@@ -7998,7 +8154,7 @@
         </p:nvSpPr>
         <p:spPr>
           <a:xfrm>
-            <a:off x="6355080" y="3608641"/>
+            <a:off x="6355080" y="3510661"/>
             <a:ext cx="1645920" cy="182880"/>
           </a:xfrm>
           <a:prstGeom prst="rect">
@@ -8037,12 +8193,12 @@
         </p:nvSpPr>
         <p:spPr>
           <a:xfrm>
-            <a:off x="6446520" y="3828097"/>
-            <a:ext cx="1463040" cy="442341"/>
+            <a:off x="6446520" y="3730117"/>
+            <a:ext cx="1463040" cy="328422"/>
           </a:xfrm>
           <a:prstGeom prst="roundRect">
             <a:avLst>
-              <a:gd name="adj" fmla="val 8269"/>
+              <a:gd name="adj" fmla="val 11137"/>
             </a:avLst>
           </a:prstGeom>
           <a:solidFill>
@@ -8074,7 +8230,7 @@
                 <a:ea typeface="Arial" pitchFamily="34" charset="-122"/>
                 <a:cs typeface="Arial" pitchFamily="34" charset="-120"/>
               </a:rPr>
-              <a:t>Falls back to today's manual queue — never silently wrong</a:t>
+              <a:t>Falls back to today's manual queue</a:t>
             </a:r>
             <a:endParaRPr lang="en-US" sz="780" dirty="0"/>
           </a:p>
@@ -8088,7 +8244,7 @@
         </p:nvSpPr>
         <p:spPr>
           <a:xfrm>
-            <a:off x="9162288" y="4396740"/>
+            <a:off x="9162288" y="4241800"/>
             <a:ext cx="914400" cy="182880"/>
           </a:xfrm>
           <a:prstGeom prst="rect">
@@ -8127,7 +8283,7 @@
         </p:nvSpPr>
         <p:spPr>
           <a:xfrm>
-            <a:off x="9052560" y="4369308"/>
+            <a:off x="9052560" y="4214368"/>
             <a:ext cx="0" cy="411480"/>
           </a:xfrm>
           <a:prstGeom prst="line">
@@ -8151,7 +8307,7 @@
         </p:nvSpPr>
         <p:spPr>
           <a:xfrm>
-            <a:off x="7589520" y="4853940"/>
+            <a:off x="7589520" y="4699000"/>
             <a:ext cx="2926080" cy="201168"/>
           </a:xfrm>
           <a:prstGeom prst="rect">
@@ -8190,7 +8346,7 @@
         </p:nvSpPr>
         <p:spPr>
           <a:xfrm>
-            <a:off x="6400800" y="5146548"/>
+            <a:off x="6400800" y="4991608"/>
             <a:ext cx="5303520" cy="566928"/>
           </a:xfrm>
           <a:prstGeom prst="roundRect">
@@ -8217,7 +8373,7 @@
         </p:nvSpPr>
         <p:spPr>
           <a:xfrm>
-            <a:off x="6537960" y="5146548"/>
+            <a:off x="6537960" y="4991608"/>
             <a:ext cx="5029200" cy="566928"/>
           </a:xfrm>
           <a:prstGeom prst="rect">
@@ -8245,7 +8401,7 @@
                 <a:ea typeface="Arial" pitchFamily="34" charset="-122"/>
                 <a:cs typeface="Arial" pitchFamily="34" charset="-120"/>
               </a:rPr>
-              <a:t>These two agents together replace 3 entry channels, the auto-import failure path, and the entire 1.1 side-track diagram.</a:t>
+              <a:t>These two agents replace 3 entry channels, the auto-import failure path, and the whole 1.1 side track.</a:t>
             </a:r>
             <a:endParaRPr lang="en-US" sz="860" dirty="0"/>
           </a:p>
@@ -8355,7 +8511,7 @@
                 <a:ea typeface="Arial" pitchFamily="34" charset="-122"/>
                 <a:cs typeface="Arial" pitchFamily="34" charset="-120"/>
               </a:rPr>
-              <a:t>Is it complete, linked to the right policy, and not already in the system? None of the three depends on the others</a:t>
+              <a:t>None of the three checks depends on the other two</a:t>
             </a:r>
             <a:endParaRPr lang="en-US" sz="950" dirty="0"/>
           </a:p>
@@ -8403,468 +8559,6 @@
       <p:sp>
         <p:nvSpPr>
           <p:cNvPr id="5" name="Shape 3"/>
-          <p:cNvSpPr/>
-          <p:nvPr/>
-        </p:nvSpPr>
-        <p:spPr>
-          <a:xfrm>
-            <a:off x="365760" y="713232"/>
-            <a:ext cx="137160" cy="137160"/>
-          </a:xfrm>
-          <a:prstGeom prst="roundRect">
-            <a:avLst>
-              <a:gd name="adj" fmla="val 13333"/>
-            </a:avLst>
-          </a:prstGeom>
-          <a:solidFill>
-            <a:srgbClr val="E6F8F7"/>
-          </a:solidFill>
-          <a:ln w="12700">
-            <a:solidFill>
-              <a:srgbClr val="007A82"/>
-            </a:solidFill>
-            <a:prstDash val="solid"/>
-          </a:ln>
-        </p:spPr>
-      </p:sp>
-      <p:sp>
-        <p:nvSpPr>
-          <p:cNvPr id="6" name="Text 4"/>
-          <p:cNvSpPr txBox="1"/>
-          <p:nvPr/>
-        </p:nvSpPr>
-        <p:spPr>
-          <a:xfrm>
-            <a:off x="566928" y="667512"/>
-            <a:ext cx="1325880" cy="228600"/>
-          </a:xfrm>
-          <a:prstGeom prst="rect">
-            <a:avLst/>
-          </a:prstGeom>
-          <a:noFill/>
-          <a:ln/>
-        </p:spPr>
-        <p:txBody>
-          <a:bodyPr wrap="square" lIns="0" tIns="0" rIns="0" bIns="0" rtlCol="0" anchor="ctr"/>
-          <a:lstStyle/>
-          <a:p>
-            <a:pPr indent="0" marL="0">
-              <a:buNone/>
-            </a:pPr>
-            <a:r>
-              <a:rPr lang="en-US" sz="800" dirty="0">
-                <a:solidFill>
-                  <a:srgbClr val="5B6472"/>
-                </a:solidFill>
-                <a:latin typeface="Arial" pitchFamily="34" charset="0"/>
-                <a:ea typeface="Arial" pitchFamily="34" charset="-122"/>
-                <a:cs typeface="Arial" pitchFamily="34" charset="-120"/>
-              </a:rPr>
-              <a:t>Trigger / start</a:t>
-            </a:r>
-            <a:endParaRPr lang="en-US" sz="800" dirty="0"/>
-          </a:p>
-        </p:txBody>
-      </p:sp>
-      <p:sp>
-        <p:nvSpPr>
-          <p:cNvPr id="7" name="Shape 5"/>
-          <p:cNvSpPr/>
-          <p:nvPr/>
-        </p:nvSpPr>
-        <p:spPr>
-          <a:xfrm>
-            <a:off x="1691640" y="713232"/>
-            <a:ext cx="137160" cy="137160"/>
-          </a:xfrm>
-          <a:prstGeom prst="roundRect">
-            <a:avLst>
-              <a:gd name="adj" fmla="val 13333"/>
-            </a:avLst>
-          </a:prstGeom>
-          <a:solidFill>
-            <a:srgbClr val="FFFFFF"/>
-          </a:solidFill>
-          <a:ln w="12700">
-            <a:solidFill>
-              <a:srgbClr val="5B7D80"/>
-            </a:solidFill>
-            <a:prstDash val="solid"/>
-          </a:ln>
-        </p:spPr>
-      </p:sp>
-      <p:sp>
-        <p:nvSpPr>
-          <p:cNvPr id="8" name="Text 6"/>
-          <p:cNvSpPr txBox="1"/>
-          <p:nvPr/>
-        </p:nvSpPr>
-        <p:spPr>
-          <a:xfrm>
-            <a:off x="1892808" y="667512"/>
-            <a:ext cx="1325880" cy="228600"/>
-          </a:xfrm>
-          <a:prstGeom prst="rect">
-            <a:avLst/>
-          </a:prstGeom>
-          <a:noFill/>
-          <a:ln/>
-        </p:spPr>
-        <p:txBody>
-          <a:bodyPr wrap="square" lIns="0" tIns="0" rIns="0" bIns="0" rtlCol="0" anchor="ctr"/>
-          <a:lstStyle/>
-          <a:p>
-            <a:pPr indent="0" marL="0">
-              <a:buNone/>
-            </a:pPr>
-            <a:r>
-              <a:rPr lang="en-US" sz="800" dirty="0">
-                <a:solidFill>
-                  <a:srgbClr val="5B6472"/>
-                </a:solidFill>
-                <a:latin typeface="Arial" pitchFamily="34" charset="0"/>
-                <a:ea typeface="Arial" pitchFamily="34" charset="-122"/>
-                <a:cs typeface="Arial" pitchFamily="34" charset="-120"/>
-              </a:rPr>
-              <a:t>Step / decision</a:t>
-            </a:r>
-            <a:endParaRPr lang="en-US" sz="800" dirty="0"/>
-          </a:p>
-        </p:txBody>
-      </p:sp>
-      <p:sp>
-        <p:nvSpPr>
-          <p:cNvPr id="9" name="Shape 7"/>
-          <p:cNvSpPr/>
-          <p:nvPr/>
-        </p:nvSpPr>
-        <p:spPr>
-          <a:xfrm>
-            <a:off x="3063240" y="713232"/>
-            <a:ext cx="137160" cy="137160"/>
-          </a:xfrm>
-          <a:prstGeom prst="roundRect">
-            <a:avLst>
-              <a:gd name="adj" fmla="val 13333"/>
-            </a:avLst>
-          </a:prstGeom>
-          <a:solidFill>
-            <a:srgbClr val="FCEFD6"/>
-          </a:solidFill>
-          <a:ln w="12700">
-            <a:solidFill>
-              <a:srgbClr val="EF9F27"/>
-            </a:solidFill>
-            <a:prstDash val="solid"/>
-          </a:ln>
-        </p:spPr>
-      </p:sp>
-      <p:sp>
-        <p:nvSpPr>
-          <p:cNvPr id="10" name="Text 8"/>
-          <p:cNvSpPr txBox="1"/>
-          <p:nvPr/>
-        </p:nvSpPr>
-        <p:spPr>
-          <a:xfrm>
-            <a:off x="3264408" y="667512"/>
-            <a:ext cx="1325880" cy="228600"/>
-          </a:xfrm>
-          <a:prstGeom prst="rect">
-            <a:avLst/>
-          </a:prstGeom>
-          <a:noFill/>
-          <a:ln/>
-        </p:spPr>
-        <p:txBody>
-          <a:bodyPr wrap="square" lIns="0" tIns="0" rIns="0" bIns="0" rtlCol="0" anchor="ctr"/>
-          <a:lstStyle/>
-          <a:p>
-            <a:pPr indent="0" marL="0">
-              <a:buNone/>
-            </a:pPr>
-            <a:r>
-              <a:rPr lang="en-US" sz="800" dirty="0">
-                <a:solidFill>
-                  <a:srgbClr val="5B6472"/>
-                </a:solidFill>
-                <a:latin typeface="Arial" pitchFamily="34" charset="0"/>
-                <a:ea typeface="Arial" pitchFamily="34" charset="-122"/>
-                <a:cs typeface="Arial" pitchFamily="34" charset="-120"/>
-              </a:rPr>
-              <a:t>Exception / rework</a:t>
-            </a:r>
-            <a:endParaRPr lang="en-US" sz="800" dirty="0"/>
-          </a:p>
-        </p:txBody>
-      </p:sp>
-      <p:sp>
-        <p:nvSpPr>
-          <p:cNvPr id="11" name="Shape 9"/>
-          <p:cNvSpPr/>
-          <p:nvPr/>
-        </p:nvSpPr>
-        <p:spPr>
-          <a:xfrm>
-            <a:off x="4892040" y="713232"/>
-            <a:ext cx="137160" cy="137160"/>
-          </a:xfrm>
-          <a:prstGeom prst="roundRect">
-            <a:avLst>
-              <a:gd name="adj" fmla="val 13333"/>
-            </a:avLst>
-          </a:prstGeom>
-          <a:solidFill>
-            <a:srgbClr val="EDF7DB"/>
-          </a:solidFill>
-          <a:ln w="12700">
-            <a:solidFill>
-              <a:srgbClr val="6FA01F"/>
-            </a:solidFill>
-            <a:prstDash val="solid"/>
-          </a:ln>
-        </p:spPr>
-      </p:sp>
-      <p:sp>
-        <p:nvSpPr>
-          <p:cNvPr id="12" name="Text 10"/>
-          <p:cNvSpPr txBox="1"/>
-          <p:nvPr/>
-        </p:nvSpPr>
-        <p:spPr>
-          <a:xfrm>
-            <a:off x="5093208" y="667512"/>
-            <a:ext cx="1325880" cy="228600"/>
-          </a:xfrm>
-          <a:prstGeom prst="rect">
-            <a:avLst/>
-          </a:prstGeom>
-          <a:noFill/>
-          <a:ln/>
-        </p:spPr>
-        <p:txBody>
-          <a:bodyPr wrap="square" lIns="0" tIns="0" rIns="0" bIns="0" rtlCol="0" anchor="ctr"/>
-          <a:lstStyle/>
-          <a:p>
-            <a:pPr indent="0" marL="0">
-              <a:buNone/>
-            </a:pPr>
-            <a:r>
-              <a:rPr lang="en-US" sz="800" dirty="0">
-                <a:solidFill>
-                  <a:srgbClr val="5B6472"/>
-                </a:solidFill>
-                <a:latin typeface="Arial" pitchFamily="34" charset="0"/>
-                <a:ea typeface="Arial" pitchFamily="34" charset="-122"/>
-                <a:cs typeface="Arial" pitchFamily="34" charset="-120"/>
-              </a:rPr>
-              <a:t>Exit</a:t>
-            </a:r>
-            <a:endParaRPr lang="en-US" sz="800" dirty="0"/>
-          </a:p>
-        </p:txBody>
-      </p:sp>
-      <p:sp>
-        <p:nvSpPr>
-          <p:cNvPr id="13" name="Shape 11"/>
-          <p:cNvSpPr/>
-          <p:nvPr/>
-        </p:nvSpPr>
-        <p:spPr>
-          <a:xfrm>
-            <a:off x="6309360" y="713232"/>
-            <a:ext cx="137160" cy="137160"/>
-          </a:xfrm>
-          <a:prstGeom prst="roundRect">
-            <a:avLst>
-              <a:gd name="adj" fmla="val 13333"/>
-            </a:avLst>
-          </a:prstGeom>
-          <a:solidFill>
-            <a:srgbClr val="E3EDF6"/>
-          </a:solidFill>
-          <a:ln w="12700">
-            <a:solidFill>
-              <a:srgbClr val="3B6FA0"/>
-            </a:solidFill>
-            <a:prstDash val="solid"/>
-          </a:ln>
-        </p:spPr>
-      </p:sp>
-      <p:sp>
-        <p:nvSpPr>
-          <p:cNvPr id="14" name="Text 12"/>
-          <p:cNvSpPr txBox="1"/>
-          <p:nvPr/>
-        </p:nvSpPr>
-        <p:spPr>
-          <a:xfrm>
-            <a:off x="6510528" y="667512"/>
-            <a:ext cx="1325880" cy="228600"/>
-          </a:xfrm>
-          <a:prstGeom prst="rect">
-            <a:avLst/>
-          </a:prstGeom>
-          <a:noFill/>
-          <a:ln/>
-        </p:spPr>
-        <p:txBody>
-          <a:bodyPr wrap="square" lIns="0" tIns="0" rIns="0" bIns="0" rtlCol="0" anchor="ctr"/>
-          <a:lstStyle/>
-          <a:p>
-            <a:pPr indent="0" marL="0">
-              <a:buNone/>
-            </a:pPr>
-            <a:r>
-              <a:rPr lang="en-US" sz="800" dirty="0">
-                <a:solidFill>
-                  <a:srgbClr val="5B6472"/>
-                </a:solidFill>
-                <a:latin typeface="Arial" pitchFamily="34" charset="0"/>
-                <a:ea typeface="Arial" pitchFamily="34" charset="-122"/>
-                <a:cs typeface="Arial" pitchFamily="34" charset="-120"/>
-              </a:rPr>
-              <a:t>AI agent (LLM call)</a:t>
-            </a:r>
-            <a:endParaRPr lang="en-US" sz="800" dirty="0"/>
-          </a:p>
-        </p:txBody>
-      </p:sp>
-      <p:sp>
-        <p:nvSpPr>
-          <p:cNvPr id="15" name="Shape 13"/>
-          <p:cNvSpPr/>
-          <p:nvPr/>
-        </p:nvSpPr>
-        <p:spPr>
-          <a:xfrm>
-            <a:off x="8092440" y="713232"/>
-            <a:ext cx="137160" cy="137160"/>
-          </a:xfrm>
-          <a:prstGeom prst="roundRect">
-            <a:avLst>
-              <a:gd name="adj" fmla="val 13333"/>
-            </a:avLst>
-          </a:prstGeom>
-          <a:solidFill>
-            <a:srgbClr val="ECEFF3"/>
-          </a:solidFill>
-          <a:ln w="12700">
-            <a:solidFill>
-              <a:srgbClr val="6B7787"/>
-            </a:solidFill>
-            <a:prstDash val="solid"/>
-          </a:ln>
-        </p:spPr>
-      </p:sp>
-      <p:sp>
-        <p:nvSpPr>
-          <p:cNvPr id="16" name="Text 14"/>
-          <p:cNvSpPr txBox="1"/>
-          <p:nvPr/>
-        </p:nvSpPr>
-        <p:spPr>
-          <a:xfrm>
-            <a:off x="8293608" y="667512"/>
-            <a:ext cx="1325880" cy="228600"/>
-          </a:xfrm>
-          <a:prstGeom prst="rect">
-            <a:avLst/>
-          </a:prstGeom>
-          <a:noFill/>
-          <a:ln/>
-        </p:spPr>
-        <p:txBody>
-          <a:bodyPr wrap="square" lIns="0" tIns="0" rIns="0" bIns="0" rtlCol="0" anchor="ctr"/>
-          <a:lstStyle/>
-          <a:p>
-            <a:pPr indent="0" marL="0">
-              <a:buNone/>
-            </a:pPr>
-            <a:r>
-              <a:rPr lang="en-US" sz="800" dirty="0">
-                <a:solidFill>
-                  <a:srgbClr val="5B6472"/>
-                </a:solidFill>
-                <a:latin typeface="Arial" pitchFamily="34" charset="0"/>
-                <a:ea typeface="Arial" pitchFamily="34" charset="-122"/>
-                <a:cs typeface="Arial" pitchFamily="34" charset="-120"/>
-              </a:rPr>
-              <a:t>Rules only, no model</a:t>
-            </a:r>
-            <a:endParaRPr lang="en-US" sz="800" dirty="0"/>
-          </a:p>
-        </p:txBody>
-      </p:sp>
-      <p:sp>
-        <p:nvSpPr>
-          <p:cNvPr id="17" name="Shape 15"/>
-          <p:cNvSpPr/>
-          <p:nvPr/>
-        </p:nvSpPr>
-        <p:spPr>
-          <a:xfrm>
-            <a:off x="9921240" y="713232"/>
-            <a:ext cx="137160" cy="137160"/>
-          </a:xfrm>
-          <a:prstGeom prst="roundRect">
-            <a:avLst>
-              <a:gd name="adj" fmla="val 13333"/>
-            </a:avLst>
-          </a:prstGeom>
-          <a:solidFill>
-            <a:srgbClr val="F1E6ED"/>
-          </a:solidFill>
-          <a:ln w="12700">
-            <a:solidFill>
-              <a:srgbClr val="7A4A66"/>
-            </a:solidFill>
-            <a:prstDash val="solid"/>
-          </a:ln>
-        </p:spPr>
-      </p:sp>
-      <p:sp>
-        <p:nvSpPr>
-          <p:cNvPr id="18" name="Text 16"/>
-          <p:cNvSpPr txBox="1"/>
-          <p:nvPr/>
-        </p:nvSpPr>
-        <p:spPr>
-          <a:xfrm>
-            <a:off x="10122408" y="667512"/>
-            <a:ext cx="1325880" cy="228600"/>
-          </a:xfrm>
-          <a:prstGeom prst="rect">
-            <a:avLst/>
-          </a:prstGeom>
-          <a:noFill/>
-          <a:ln/>
-        </p:spPr>
-        <p:txBody>
-          <a:bodyPr wrap="square" lIns="0" tIns="0" rIns="0" bIns="0" rtlCol="0" anchor="ctr"/>
-          <a:lstStyle/>
-          <a:p>
-            <a:pPr indent="0" marL="0">
-              <a:buNone/>
-            </a:pPr>
-            <a:r>
-              <a:rPr lang="en-US" sz="800" dirty="0">
-                <a:solidFill>
-                  <a:srgbClr val="5B6472"/>
-                </a:solidFill>
-                <a:latin typeface="Arial" pitchFamily="34" charset="0"/>
-                <a:ea typeface="Arial" pitchFamily="34" charset="-122"/>
-                <a:cs typeface="Arial" pitchFamily="34" charset="-120"/>
-              </a:rPr>
-              <a:t>Human checkpoint</a:t>
-            </a:r>
-            <a:endParaRPr lang="en-US" sz="800" dirty="0"/>
-          </a:p>
-        </p:txBody>
-      </p:sp>
-      <p:sp>
-        <p:nvSpPr>
-          <p:cNvPr id="19" name="Shape 17"/>
           <p:cNvSpPr/>
           <p:nvPr/>
         </p:nvSpPr>
@@ -8887,7 +8581,7 @@
       </p:sp>
       <p:sp>
         <p:nvSpPr>
-          <p:cNvPr id="20" name="Text 18"/>
+          <p:cNvPr id="6" name="Text 4"/>
           <p:cNvSpPr txBox="1"/>
           <p:nvPr/>
         </p:nvSpPr>
@@ -8926,7 +8620,7 @@
       </p:sp>
       <p:sp>
         <p:nvSpPr>
-          <p:cNvPr id="21" name="Text 19"/>
+          <p:cNvPr id="7" name="Text 5"/>
           <p:cNvSpPr txBox="1"/>
           <p:nvPr/>
         </p:nvSpPr>
@@ -8971,7 +8665,7 @@
                 <a:ea typeface="Arial" pitchFamily="34" charset="-122"/>
                 <a:cs typeface="Arial" pitchFamily="34" charset="-120"/>
               </a:rPr>
-              <a:t>— one LangGraph state graph · shared claim state carries the audit trail</a:t>
+              <a:t>one shared claim record, one audit trail</a:t>
             </a:r>
             <a:endParaRPr lang="en-US" sz="1150" dirty="0"/>
           </a:p>
@@ -8979,7 +8673,7 @@
       </p:sp>
       <p:sp>
         <p:nvSpPr>
-          <p:cNvPr id="22" name="Text 20"/>
+          <p:cNvPr id="8" name="Text 6"/>
           <p:cNvSpPr txBox="1"/>
           <p:nvPr/>
         </p:nvSpPr>
@@ -9018,7 +8712,7 @@
       </p:sp>
       <p:sp>
         <p:nvSpPr>
-          <p:cNvPr id="23" name="Text 21"/>
+          <p:cNvPr id="9" name="Text 7"/>
           <p:cNvSpPr txBox="1"/>
           <p:nvPr/>
         </p:nvSpPr>
@@ -9057,7 +8751,7 @@
       </p:sp>
       <p:sp>
         <p:nvSpPr>
-          <p:cNvPr id="24" name="Text 22"/>
+          <p:cNvPr id="10" name="Text 8"/>
           <p:cNvSpPr txBox="1"/>
           <p:nvPr/>
         </p:nvSpPr>
@@ -9096,7 +8790,7 @@
       </p:sp>
       <p:sp>
         <p:nvSpPr>
-          <p:cNvPr id="25" name="Shape 23"/>
+          <p:cNvPr id="11" name="Shape 9"/>
           <p:cNvSpPr/>
           <p:nvPr/>
         </p:nvSpPr>
@@ -9120,7 +8814,7 @@
       </p:sp>
       <p:sp>
         <p:nvSpPr>
-          <p:cNvPr id="26" name="Text 24"/>
+          <p:cNvPr id="12" name="Text 10"/>
           <p:cNvSpPr txBox="1"/>
           <p:nvPr/>
         </p:nvSpPr>
@@ -9188,7 +8882,7 @@
       </p:sp>
       <p:sp>
         <p:nvSpPr>
-          <p:cNvPr id="27" name="Shape 25"/>
+          <p:cNvPr id="13" name="Shape 11"/>
           <p:cNvSpPr/>
           <p:nvPr/>
         </p:nvSpPr>
@@ -9212,7 +8906,7 @@
       </p:sp>
       <p:sp>
         <p:nvSpPr>
-          <p:cNvPr id="28" name="Text 26"/>
+          <p:cNvPr id="14" name="Text 12"/>
           <p:cNvSpPr txBox="1"/>
           <p:nvPr/>
         </p:nvSpPr>
@@ -9251,7 +8945,7 @@
       </p:sp>
       <p:sp>
         <p:nvSpPr>
-          <p:cNvPr id="29" name="Text 27"/>
+          <p:cNvPr id="15" name="Text 13"/>
           <p:cNvSpPr txBox="1"/>
           <p:nvPr/>
         </p:nvSpPr>
@@ -9302,7 +8996,7 @@
       </p:sp>
       <p:sp>
         <p:nvSpPr>
-          <p:cNvPr id="30" name="Shape 28"/>
+          <p:cNvPr id="16" name="Shape 14"/>
           <p:cNvSpPr/>
           <p:nvPr/>
         </p:nvSpPr>
@@ -9326,7 +9020,7 @@
       </p:sp>
       <p:sp>
         <p:nvSpPr>
-          <p:cNvPr id="31" name="Text 29"/>
+          <p:cNvPr id="17" name="Text 15"/>
           <p:cNvSpPr txBox="1"/>
           <p:nvPr/>
         </p:nvSpPr>
@@ -9365,7 +9059,7 @@
       </p:sp>
       <p:sp>
         <p:nvSpPr>
-          <p:cNvPr id="32" name="Shape 30"/>
+          <p:cNvPr id="18" name="Shape 16"/>
           <p:cNvSpPr/>
           <p:nvPr/>
         </p:nvSpPr>
@@ -9389,7 +9083,7 @@
       </p:sp>
       <p:sp>
         <p:nvSpPr>
-          <p:cNvPr id="33" name="Text 31"/>
+          <p:cNvPr id="19" name="Text 17"/>
           <p:cNvSpPr txBox="1"/>
           <p:nvPr/>
         </p:nvSpPr>
@@ -9457,7 +9151,7 @@
       </p:sp>
       <p:sp>
         <p:nvSpPr>
-          <p:cNvPr id="34" name="Shape 32"/>
+          <p:cNvPr id="20" name="Shape 18"/>
           <p:cNvSpPr/>
           <p:nvPr/>
         </p:nvSpPr>
@@ -9481,7 +9175,7 @@
       </p:sp>
       <p:sp>
         <p:nvSpPr>
-          <p:cNvPr id="35" name="Text 33"/>
+          <p:cNvPr id="21" name="Text 19"/>
           <p:cNvSpPr txBox="1"/>
           <p:nvPr/>
         </p:nvSpPr>
@@ -9520,7 +9214,7 @@
       </p:sp>
       <p:sp>
         <p:nvSpPr>
-          <p:cNvPr id="36" name="Text 34"/>
+          <p:cNvPr id="22" name="Text 20"/>
           <p:cNvSpPr txBox="1"/>
           <p:nvPr/>
         </p:nvSpPr>
@@ -9571,7 +9265,7 @@
       </p:sp>
       <p:sp>
         <p:nvSpPr>
-          <p:cNvPr id="37" name="Shape 35"/>
+          <p:cNvPr id="23" name="Shape 21"/>
           <p:cNvSpPr/>
           <p:nvPr/>
         </p:nvSpPr>
@@ -9595,7 +9289,7 @@
       </p:sp>
       <p:sp>
         <p:nvSpPr>
-          <p:cNvPr id="38" name="Shape 36"/>
+          <p:cNvPr id="24" name="Shape 22"/>
           <p:cNvSpPr/>
           <p:nvPr/>
         </p:nvSpPr>
@@ -9619,7 +9313,7 @@
       </p:sp>
       <p:sp>
         <p:nvSpPr>
-          <p:cNvPr id="39" name="Text 37"/>
+          <p:cNvPr id="25" name="Text 23"/>
           <p:cNvSpPr txBox="1"/>
           <p:nvPr/>
         </p:nvSpPr>
@@ -9658,7 +9352,7 @@
       </p:sp>
       <p:sp>
         <p:nvSpPr>
-          <p:cNvPr id="40" name="Text 38"/>
+          <p:cNvPr id="26" name="Text 24"/>
           <p:cNvSpPr txBox="1"/>
           <p:nvPr/>
         </p:nvSpPr>
@@ -9709,7 +9403,7 @@
       </p:sp>
       <p:sp>
         <p:nvSpPr>
-          <p:cNvPr id="41" name="Text 39"/>
+          <p:cNvPr id="27" name="Text 25"/>
           <p:cNvSpPr txBox="1"/>
           <p:nvPr/>
         </p:nvSpPr>
@@ -9748,7 +9442,7 @@
       </p:sp>
       <p:sp>
         <p:nvSpPr>
-          <p:cNvPr id="42" name="Shape 40"/>
+          <p:cNvPr id="28" name="Shape 26"/>
           <p:cNvSpPr/>
           <p:nvPr/>
         </p:nvSpPr>
@@ -9772,7 +9466,7 @@
       </p:sp>
       <p:sp>
         <p:nvSpPr>
-          <p:cNvPr id="43" name="Text 41"/>
+          <p:cNvPr id="29" name="Text 27"/>
           <p:cNvSpPr txBox="1"/>
           <p:nvPr/>
         </p:nvSpPr>
@@ -9840,7 +9534,7 @@
       </p:sp>
       <p:sp>
         <p:nvSpPr>
-          <p:cNvPr id="44" name="Shape 42"/>
+          <p:cNvPr id="30" name="Shape 28"/>
           <p:cNvSpPr/>
           <p:nvPr/>
         </p:nvSpPr>
@@ -9864,7 +9558,7 @@
       </p:sp>
       <p:sp>
         <p:nvSpPr>
-          <p:cNvPr id="45" name="Text 43"/>
+          <p:cNvPr id="31" name="Text 29"/>
           <p:cNvSpPr txBox="1"/>
           <p:nvPr/>
         </p:nvSpPr>
@@ -9903,7 +9597,7 @@
       </p:sp>
       <p:sp>
         <p:nvSpPr>
-          <p:cNvPr id="46" name="Text 44"/>
+          <p:cNvPr id="32" name="Text 30"/>
           <p:cNvSpPr txBox="1"/>
           <p:nvPr/>
         </p:nvSpPr>
@@ -9954,7 +9648,7 @@
       </p:sp>
       <p:sp>
         <p:nvSpPr>
-          <p:cNvPr id="47" name="Shape 45"/>
+          <p:cNvPr id="33" name="Shape 31"/>
           <p:cNvSpPr/>
           <p:nvPr/>
         </p:nvSpPr>
@@ -9978,7 +9672,7 @@
       </p:sp>
       <p:sp>
         <p:nvSpPr>
-          <p:cNvPr id="48" name="Text 46"/>
+          <p:cNvPr id="34" name="Text 32"/>
           <p:cNvSpPr txBox="1"/>
           <p:nvPr/>
         </p:nvSpPr>
@@ -10017,7 +9711,7 @@
       </p:sp>
       <p:sp>
         <p:nvSpPr>
-          <p:cNvPr id="49" name="Shape 47"/>
+          <p:cNvPr id="35" name="Shape 33"/>
           <p:cNvSpPr/>
           <p:nvPr/>
         </p:nvSpPr>
@@ -10041,7 +9735,7 @@
       </p:sp>
       <p:sp>
         <p:nvSpPr>
-          <p:cNvPr id="50" name="Text 48"/>
+          <p:cNvPr id="36" name="Text 34"/>
           <p:cNvSpPr txBox="1"/>
           <p:nvPr/>
         </p:nvSpPr>
@@ -10080,7 +9774,7 @@
       </p:sp>
       <p:sp>
         <p:nvSpPr>
-          <p:cNvPr id="51" name="Text 49"/>
+          <p:cNvPr id="37" name="Text 35"/>
           <p:cNvSpPr txBox="1"/>
           <p:nvPr/>
         </p:nvSpPr>
@@ -10119,7 +9813,7 @@
       </p:sp>
       <p:sp>
         <p:nvSpPr>
-          <p:cNvPr id="52" name="Shape 50"/>
+          <p:cNvPr id="38" name="Shape 36"/>
           <p:cNvSpPr/>
           <p:nvPr/>
         </p:nvSpPr>
@@ -10143,7 +9837,7 @@
       </p:sp>
       <p:sp>
         <p:nvSpPr>
-          <p:cNvPr id="53" name="Text 51"/>
+          <p:cNvPr id="39" name="Text 37"/>
           <p:cNvSpPr txBox="1"/>
           <p:nvPr/>
         </p:nvSpPr>
@@ -10186,7 +9880,7 @@
                 <a:ea typeface="Arial" pitchFamily="34" charset="-122"/>
                 <a:cs typeface="Arial" pitchFamily="34" charset="-120"/>
               </a:rPr>
-              <a:t>Validation Node — rules only</a:t>
+              <a:t>Validation Node (rules only)</a:t>
             </a:r>
             <a:endParaRPr lang="en-US" sz="1000" dirty="0"/>
           </a:p>
@@ -10206,15 +9900,35 @@
                 <a:ea typeface="Arial" pitchFamily="34" charset="-122"/>
                 <a:cs typeface="Arial" pitchFamily="34" charset="-120"/>
               </a:rPr>
-              <a:t>CPR dedup · policy in force · completeness — three lookups at once, no model call</a:t>
+              <a:t>CPR dedup · policy in force · completeness</a:t>
             </a:r>
             <a:endParaRPr lang="en-US" sz="1000" dirty="0"/>
           </a:p>
-        </p:txBody>
-      </p:sp>
-      <p:sp>
-        <p:nvSpPr>
-          <p:cNvPr id="54" name="Shape 52"/>
+          <a:p>
+            <a:pPr algn="ctr" indent="0" marL="0">
+              <a:lnSpc>
+                <a:spcPct val="108000"/>
+              </a:lnSpc>
+              <a:buNone/>
+            </a:pPr>
+            <a:r>
+              <a:rPr lang="en-US" sz="1000" b="1" dirty="0">
+                <a:solidFill>
+                  <a:srgbClr val="2A3340"/>
+                </a:solidFill>
+                <a:latin typeface="Arial" pitchFamily="34" charset="0"/>
+                <a:ea typeface="Arial" pitchFamily="34" charset="-122"/>
+                <a:cs typeface="Arial" pitchFamily="34" charset="-120"/>
+              </a:rPr>
+              <a:t>three lookups at once, no model call</a:t>
+            </a:r>
+            <a:endParaRPr lang="en-US" sz="1000" dirty="0"/>
+          </a:p>
+        </p:txBody>
+      </p:sp>
+      <p:sp>
+        <p:nvSpPr>
+          <p:cNvPr id="40" name="Shape 38"/>
           <p:cNvSpPr/>
           <p:nvPr/>
         </p:nvSpPr>
@@ -10238,7 +9952,7 @@
       </p:sp>
       <p:sp>
         <p:nvSpPr>
-          <p:cNvPr id="55" name="Text 53"/>
+          <p:cNvPr id="41" name="Text 39"/>
           <p:cNvSpPr txBox="1"/>
           <p:nvPr/>
         </p:nvSpPr>
@@ -10306,7 +10020,7 @@
       </p:sp>
       <p:sp>
         <p:nvSpPr>
-          <p:cNvPr id="56" name="Shape 54"/>
+          <p:cNvPr id="42" name="Shape 40"/>
           <p:cNvSpPr/>
           <p:nvPr/>
         </p:nvSpPr>
@@ -10330,7 +10044,7 @@
       </p:sp>
       <p:sp>
         <p:nvSpPr>
-          <p:cNvPr id="57" name="Text 55"/>
+          <p:cNvPr id="43" name="Text 41"/>
           <p:cNvSpPr txBox="1"/>
           <p:nvPr/>
         </p:nvSpPr>
@@ -10369,7 +10083,7 @@
       </p:sp>
       <p:sp>
         <p:nvSpPr>
-          <p:cNvPr id="58" name="Text 56"/>
+          <p:cNvPr id="44" name="Text 42"/>
           <p:cNvSpPr txBox="1"/>
           <p:nvPr/>
         </p:nvSpPr>
@@ -10412,15 +10126,35 @@
                 <a:ea typeface="Arial" pitchFamily="34" charset="-122"/>
                 <a:cs typeface="Arial" pitchFamily="34" charset="-120"/>
               </a:rPr>
-              <a:t>Exception Research Agent — gathers CVR / fuzzy-match candidates as evidence</a:t>
+              <a:t>Exception Research Agent</a:t>
             </a:r>
             <a:endParaRPr lang="en-US" sz="760" dirty="0"/>
           </a:p>
-        </p:txBody>
-      </p:sp>
-      <p:sp>
-        <p:nvSpPr>
-          <p:cNvPr id="59" name="Shape 57"/>
+          <a:p>
+            <a:pPr algn="ctr" indent="0" marL="0">
+              <a:lnSpc>
+                <a:spcPct val="108000"/>
+              </a:lnSpc>
+              <a:buNone/>
+            </a:pPr>
+            <a:r>
+              <a:rPr lang="en-US" sz="760" dirty="0">
+                <a:solidFill>
+                  <a:srgbClr val="6B4A10"/>
+                </a:solidFill>
+                <a:latin typeface="Arial" pitchFamily="34" charset="0"/>
+                <a:ea typeface="Arial" pitchFamily="34" charset="-122"/>
+                <a:cs typeface="Arial" pitchFamily="34" charset="-120"/>
+              </a:rPr>
+              <a:t>gathers CVR and fuzzy-match evidence</a:t>
+            </a:r>
+            <a:endParaRPr lang="en-US" sz="760" dirty="0"/>
+          </a:p>
+        </p:txBody>
+      </p:sp>
+      <p:sp>
+        <p:nvSpPr>
+          <p:cNvPr id="45" name="Shape 43"/>
           <p:cNvSpPr/>
           <p:nvPr/>
         </p:nvSpPr>
@@ -10444,18 +10178,18 @@
       </p:sp>
       <p:sp>
         <p:nvSpPr>
-          <p:cNvPr id="60" name="Text 58"/>
+          <p:cNvPr id="46" name="Text 44"/>
           <p:cNvSpPr txBox="1"/>
           <p:nvPr/>
         </p:nvSpPr>
         <p:spPr>
           <a:xfrm>
             <a:off x="10195560" y="3260979"/>
-            <a:ext cx="1463040" cy="433578"/>
+            <a:ext cx="1463040" cy="322580"/>
           </a:xfrm>
           <a:prstGeom prst="roundRect">
             <a:avLst>
-              <a:gd name="adj" fmla="val 8436"/>
+              <a:gd name="adj" fmla="val 11339"/>
             </a:avLst>
           </a:prstGeom>
           <a:solidFill>
@@ -10507,7 +10241,7 @@
                 <a:ea typeface="Arial" pitchFamily="34" charset="-122"/>
                 <a:cs typeface="Arial" pitchFamily="34" charset="-120"/>
               </a:rPr>
-              <a:t>(AI prepares, never decides)</a:t>
+              <a:t>(AI prepares only)</a:t>
             </a:r>
             <a:endParaRPr lang="en-US" sz="760" dirty="0"/>
           </a:p>
@@ -10515,7 +10249,7 @@
       </p:sp>
       <p:sp>
         <p:nvSpPr>
-          <p:cNvPr id="61" name="Text 59"/>
+          <p:cNvPr id="47" name="Text 45"/>
           <p:cNvSpPr txBox="1"/>
           <p:nvPr/>
         </p:nvSpPr>
@@ -10554,7 +10288,7 @@
       </p:sp>
       <p:sp>
         <p:nvSpPr>
-          <p:cNvPr id="62" name="Shape 60"/>
+          <p:cNvPr id="48" name="Shape 46"/>
           <p:cNvSpPr/>
           <p:nvPr/>
         </p:nvSpPr>
@@ -10578,7 +10312,7 @@
       </p:sp>
       <p:sp>
         <p:nvSpPr>
-          <p:cNvPr id="63" name="Text 61"/>
+          <p:cNvPr id="49" name="Text 47"/>
           <p:cNvSpPr txBox="1"/>
           <p:nvPr/>
         </p:nvSpPr>
@@ -10612,75 +10346,6 @@
               <a:t>▼ continues, part 3 · Outcome Drafting Agent</a:t>
             </a:r>
             <a:endParaRPr lang="en-US" sz="830" dirty="0"/>
-          </a:p>
-        </p:txBody>
-      </p:sp>
-      <p:sp>
-        <p:nvSpPr>
-          <p:cNvPr id="64" name="Shape 62"/>
-          <p:cNvSpPr/>
-          <p:nvPr/>
-        </p:nvSpPr>
-        <p:spPr>
-          <a:xfrm>
-            <a:off x="6309360" y="5532120"/>
-            <a:ext cx="3017520" cy="658368"/>
-          </a:xfrm>
-          <a:prstGeom prst="roundRect">
-            <a:avLst>
-              <a:gd name="adj" fmla="val 6944"/>
-            </a:avLst>
-          </a:prstGeom>
-          <a:solidFill>
-            <a:srgbClr val="F7F7F5"/>
-          </a:solidFill>
-          <a:ln w="12700">
-            <a:solidFill>
-              <a:srgbClr val="D7DCE2"/>
-            </a:solidFill>
-            <a:prstDash val="solid"/>
-          </a:ln>
-        </p:spPr>
-      </p:sp>
-      <p:sp>
-        <p:nvSpPr>
-          <p:cNvPr id="65" name="Text 63"/>
-          <p:cNvSpPr txBox="1"/>
-          <p:nvPr/>
-        </p:nvSpPr>
-        <p:spPr>
-          <a:xfrm>
-            <a:off x="6400800" y="5532120"/>
-            <a:ext cx="2834640" cy="658368"/>
-          </a:xfrm>
-          <a:prstGeom prst="rect">
-            <a:avLst/>
-          </a:prstGeom>
-          <a:noFill/>
-          <a:ln/>
-        </p:spPr>
-        <p:txBody>
-          <a:bodyPr wrap="square" lIns="50800" tIns="50800" rIns="50800" bIns="50800" rtlCol="0" anchor="ctr"/>
-          <a:lstStyle/>
-          <a:p>
-            <a:pPr algn="ctr" indent="0" marL="0">
-              <a:lnSpc>
-                <a:spcPct val="120000"/>
-              </a:lnSpc>
-              <a:buNone/>
-            </a:pPr>
-            <a:r>
-              <a:rPr lang="en-US" sz="840" dirty="0">
-                <a:solidFill>
-                  <a:srgbClr val="3A4250"/>
-                </a:solidFill>
-                <a:latin typeface="Arial" pitchFamily="34" charset="0"/>
-                <a:ea typeface="Arial" pitchFamily="34" charset="-122"/>
-                <a:cs typeface="Arial" pitchFamily="34" charset="-120"/>
-              </a:rPr>
-              <a:t>3 sequential gates, each with its own rework loop, become 1 parallel check.</a:t>
-            </a:r>
-            <a:endParaRPr lang="en-US" sz="840" dirty="0"/>
           </a:p>
         </p:txBody>
       </p:sp>
@@ -10788,7 +10453,7 @@
                 <a:ea typeface="Arial" pitchFamily="34" charset="-122"/>
                 <a:cs typeface="Arial" pitchFamily="34" charset="-120"/>
               </a:rPr>
-              <a:t>From a system warning to a closed claim or a fully opened one — nothing that can go against a claimant is automated</a:t>
+              <a:t>Nothing that can go against a claimant is automated</a:t>
             </a:r>
             <a:endParaRPr lang="en-US" sz="950" dirty="0"/>
           </a:p>
@@ -10836,468 +10501,6 @@
       <p:sp>
         <p:nvSpPr>
           <p:cNvPr id="5" name="Shape 3"/>
-          <p:cNvSpPr/>
-          <p:nvPr/>
-        </p:nvSpPr>
-        <p:spPr>
-          <a:xfrm>
-            <a:off x="365760" y="713232"/>
-            <a:ext cx="137160" cy="137160"/>
-          </a:xfrm>
-          <a:prstGeom prst="roundRect">
-            <a:avLst>
-              <a:gd name="adj" fmla="val 13333"/>
-            </a:avLst>
-          </a:prstGeom>
-          <a:solidFill>
-            <a:srgbClr val="E6F8F7"/>
-          </a:solidFill>
-          <a:ln w="12700">
-            <a:solidFill>
-              <a:srgbClr val="007A82"/>
-            </a:solidFill>
-            <a:prstDash val="solid"/>
-          </a:ln>
-        </p:spPr>
-      </p:sp>
-      <p:sp>
-        <p:nvSpPr>
-          <p:cNvPr id="6" name="Text 4"/>
-          <p:cNvSpPr txBox="1"/>
-          <p:nvPr/>
-        </p:nvSpPr>
-        <p:spPr>
-          <a:xfrm>
-            <a:off x="566928" y="667512"/>
-            <a:ext cx="1325880" cy="228600"/>
-          </a:xfrm>
-          <a:prstGeom prst="rect">
-            <a:avLst/>
-          </a:prstGeom>
-          <a:noFill/>
-          <a:ln/>
-        </p:spPr>
-        <p:txBody>
-          <a:bodyPr wrap="square" lIns="0" tIns="0" rIns="0" bIns="0" rtlCol="0" anchor="ctr"/>
-          <a:lstStyle/>
-          <a:p>
-            <a:pPr indent="0" marL="0">
-              <a:buNone/>
-            </a:pPr>
-            <a:r>
-              <a:rPr lang="en-US" sz="800" dirty="0">
-                <a:solidFill>
-                  <a:srgbClr val="5B6472"/>
-                </a:solidFill>
-                <a:latin typeface="Arial" pitchFamily="34" charset="0"/>
-                <a:ea typeface="Arial" pitchFamily="34" charset="-122"/>
-                <a:cs typeface="Arial" pitchFamily="34" charset="-120"/>
-              </a:rPr>
-              <a:t>Trigger / start</a:t>
-            </a:r>
-            <a:endParaRPr lang="en-US" sz="800" dirty="0"/>
-          </a:p>
-        </p:txBody>
-      </p:sp>
-      <p:sp>
-        <p:nvSpPr>
-          <p:cNvPr id="7" name="Shape 5"/>
-          <p:cNvSpPr/>
-          <p:nvPr/>
-        </p:nvSpPr>
-        <p:spPr>
-          <a:xfrm>
-            <a:off x="1691640" y="713232"/>
-            <a:ext cx="137160" cy="137160"/>
-          </a:xfrm>
-          <a:prstGeom prst="roundRect">
-            <a:avLst>
-              <a:gd name="adj" fmla="val 13333"/>
-            </a:avLst>
-          </a:prstGeom>
-          <a:solidFill>
-            <a:srgbClr val="FFFFFF"/>
-          </a:solidFill>
-          <a:ln w="12700">
-            <a:solidFill>
-              <a:srgbClr val="5B7D80"/>
-            </a:solidFill>
-            <a:prstDash val="solid"/>
-          </a:ln>
-        </p:spPr>
-      </p:sp>
-      <p:sp>
-        <p:nvSpPr>
-          <p:cNvPr id="8" name="Text 6"/>
-          <p:cNvSpPr txBox="1"/>
-          <p:nvPr/>
-        </p:nvSpPr>
-        <p:spPr>
-          <a:xfrm>
-            <a:off x="1892808" y="667512"/>
-            <a:ext cx="1325880" cy="228600"/>
-          </a:xfrm>
-          <a:prstGeom prst="rect">
-            <a:avLst/>
-          </a:prstGeom>
-          <a:noFill/>
-          <a:ln/>
-        </p:spPr>
-        <p:txBody>
-          <a:bodyPr wrap="square" lIns="0" tIns="0" rIns="0" bIns="0" rtlCol="0" anchor="ctr"/>
-          <a:lstStyle/>
-          <a:p>
-            <a:pPr indent="0" marL="0">
-              <a:buNone/>
-            </a:pPr>
-            <a:r>
-              <a:rPr lang="en-US" sz="800" dirty="0">
-                <a:solidFill>
-                  <a:srgbClr val="5B6472"/>
-                </a:solidFill>
-                <a:latin typeface="Arial" pitchFamily="34" charset="0"/>
-                <a:ea typeface="Arial" pitchFamily="34" charset="-122"/>
-                <a:cs typeface="Arial" pitchFamily="34" charset="-120"/>
-              </a:rPr>
-              <a:t>Step / decision</a:t>
-            </a:r>
-            <a:endParaRPr lang="en-US" sz="800" dirty="0"/>
-          </a:p>
-        </p:txBody>
-      </p:sp>
-      <p:sp>
-        <p:nvSpPr>
-          <p:cNvPr id="9" name="Shape 7"/>
-          <p:cNvSpPr/>
-          <p:nvPr/>
-        </p:nvSpPr>
-        <p:spPr>
-          <a:xfrm>
-            <a:off x="3063240" y="713232"/>
-            <a:ext cx="137160" cy="137160"/>
-          </a:xfrm>
-          <a:prstGeom prst="roundRect">
-            <a:avLst>
-              <a:gd name="adj" fmla="val 13333"/>
-            </a:avLst>
-          </a:prstGeom>
-          <a:solidFill>
-            <a:srgbClr val="FCEFD6"/>
-          </a:solidFill>
-          <a:ln w="12700">
-            <a:solidFill>
-              <a:srgbClr val="EF9F27"/>
-            </a:solidFill>
-            <a:prstDash val="solid"/>
-          </a:ln>
-        </p:spPr>
-      </p:sp>
-      <p:sp>
-        <p:nvSpPr>
-          <p:cNvPr id="10" name="Text 8"/>
-          <p:cNvSpPr txBox="1"/>
-          <p:nvPr/>
-        </p:nvSpPr>
-        <p:spPr>
-          <a:xfrm>
-            <a:off x="3264408" y="667512"/>
-            <a:ext cx="1325880" cy="228600"/>
-          </a:xfrm>
-          <a:prstGeom prst="rect">
-            <a:avLst/>
-          </a:prstGeom>
-          <a:noFill/>
-          <a:ln/>
-        </p:spPr>
-        <p:txBody>
-          <a:bodyPr wrap="square" lIns="0" tIns="0" rIns="0" bIns="0" rtlCol="0" anchor="ctr"/>
-          <a:lstStyle/>
-          <a:p>
-            <a:pPr indent="0" marL="0">
-              <a:buNone/>
-            </a:pPr>
-            <a:r>
-              <a:rPr lang="en-US" sz="800" dirty="0">
-                <a:solidFill>
-                  <a:srgbClr val="5B6472"/>
-                </a:solidFill>
-                <a:latin typeface="Arial" pitchFamily="34" charset="0"/>
-                <a:ea typeface="Arial" pitchFamily="34" charset="-122"/>
-                <a:cs typeface="Arial" pitchFamily="34" charset="-120"/>
-              </a:rPr>
-              <a:t>Exception / rework</a:t>
-            </a:r>
-            <a:endParaRPr lang="en-US" sz="800" dirty="0"/>
-          </a:p>
-        </p:txBody>
-      </p:sp>
-      <p:sp>
-        <p:nvSpPr>
-          <p:cNvPr id="11" name="Shape 9"/>
-          <p:cNvSpPr/>
-          <p:nvPr/>
-        </p:nvSpPr>
-        <p:spPr>
-          <a:xfrm>
-            <a:off x="4892040" y="713232"/>
-            <a:ext cx="137160" cy="137160"/>
-          </a:xfrm>
-          <a:prstGeom prst="roundRect">
-            <a:avLst>
-              <a:gd name="adj" fmla="val 13333"/>
-            </a:avLst>
-          </a:prstGeom>
-          <a:solidFill>
-            <a:srgbClr val="EDF7DB"/>
-          </a:solidFill>
-          <a:ln w="12700">
-            <a:solidFill>
-              <a:srgbClr val="6FA01F"/>
-            </a:solidFill>
-            <a:prstDash val="solid"/>
-          </a:ln>
-        </p:spPr>
-      </p:sp>
-      <p:sp>
-        <p:nvSpPr>
-          <p:cNvPr id="12" name="Text 10"/>
-          <p:cNvSpPr txBox="1"/>
-          <p:nvPr/>
-        </p:nvSpPr>
-        <p:spPr>
-          <a:xfrm>
-            <a:off x="5093208" y="667512"/>
-            <a:ext cx="1325880" cy="228600"/>
-          </a:xfrm>
-          <a:prstGeom prst="rect">
-            <a:avLst/>
-          </a:prstGeom>
-          <a:noFill/>
-          <a:ln/>
-        </p:spPr>
-        <p:txBody>
-          <a:bodyPr wrap="square" lIns="0" tIns="0" rIns="0" bIns="0" rtlCol="0" anchor="ctr"/>
-          <a:lstStyle/>
-          <a:p>
-            <a:pPr indent="0" marL="0">
-              <a:buNone/>
-            </a:pPr>
-            <a:r>
-              <a:rPr lang="en-US" sz="800" dirty="0">
-                <a:solidFill>
-                  <a:srgbClr val="5B6472"/>
-                </a:solidFill>
-                <a:latin typeface="Arial" pitchFamily="34" charset="0"/>
-                <a:ea typeface="Arial" pitchFamily="34" charset="-122"/>
-                <a:cs typeface="Arial" pitchFamily="34" charset="-120"/>
-              </a:rPr>
-              <a:t>Exit</a:t>
-            </a:r>
-            <a:endParaRPr lang="en-US" sz="800" dirty="0"/>
-          </a:p>
-        </p:txBody>
-      </p:sp>
-      <p:sp>
-        <p:nvSpPr>
-          <p:cNvPr id="13" name="Shape 11"/>
-          <p:cNvSpPr/>
-          <p:nvPr/>
-        </p:nvSpPr>
-        <p:spPr>
-          <a:xfrm>
-            <a:off x="6309360" y="713232"/>
-            <a:ext cx="137160" cy="137160"/>
-          </a:xfrm>
-          <a:prstGeom prst="roundRect">
-            <a:avLst>
-              <a:gd name="adj" fmla="val 13333"/>
-            </a:avLst>
-          </a:prstGeom>
-          <a:solidFill>
-            <a:srgbClr val="E3EDF6"/>
-          </a:solidFill>
-          <a:ln w="12700">
-            <a:solidFill>
-              <a:srgbClr val="3B6FA0"/>
-            </a:solidFill>
-            <a:prstDash val="solid"/>
-          </a:ln>
-        </p:spPr>
-      </p:sp>
-      <p:sp>
-        <p:nvSpPr>
-          <p:cNvPr id="14" name="Text 12"/>
-          <p:cNvSpPr txBox="1"/>
-          <p:nvPr/>
-        </p:nvSpPr>
-        <p:spPr>
-          <a:xfrm>
-            <a:off x="6510528" y="667512"/>
-            <a:ext cx="1325880" cy="228600"/>
-          </a:xfrm>
-          <a:prstGeom prst="rect">
-            <a:avLst/>
-          </a:prstGeom>
-          <a:noFill/>
-          <a:ln/>
-        </p:spPr>
-        <p:txBody>
-          <a:bodyPr wrap="square" lIns="0" tIns="0" rIns="0" bIns="0" rtlCol="0" anchor="ctr"/>
-          <a:lstStyle/>
-          <a:p>
-            <a:pPr indent="0" marL="0">
-              <a:buNone/>
-            </a:pPr>
-            <a:r>
-              <a:rPr lang="en-US" sz="800" dirty="0">
-                <a:solidFill>
-                  <a:srgbClr val="5B6472"/>
-                </a:solidFill>
-                <a:latin typeface="Arial" pitchFamily="34" charset="0"/>
-                <a:ea typeface="Arial" pitchFamily="34" charset="-122"/>
-                <a:cs typeface="Arial" pitchFamily="34" charset="-120"/>
-              </a:rPr>
-              <a:t>AI agent (LLM call)</a:t>
-            </a:r>
-            <a:endParaRPr lang="en-US" sz="800" dirty="0"/>
-          </a:p>
-        </p:txBody>
-      </p:sp>
-      <p:sp>
-        <p:nvSpPr>
-          <p:cNvPr id="15" name="Shape 13"/>
-          <p:cNvSpPr/>
-          <p:nvPr/>
-        </p:nvSpPr>
-        <p:spPr>
-          <a:xfrm>
-            <a:off x="8092440" y="713232"/>
-            <a:ext cx="137160" cy="137160"/>
-          </a:xfrm>
-          <a:prstGeom prst="roundRect">
-            <a:avLst>
-              <a:gd name="adj" fmla="val 13333"/>
-            </a:avLst>
-          </a:prstGeom>
-          <a:solidFill>
-            <a:srgbClr val="ECEFF3"/>
-          </a:solidFill>
-          <a:ln w="12700">
-            <a:solidFill>
-              <a:srgbClr val="6B7787"/>
-            </a:solidFill>
-            <a:prstDash val="solid"/>
-          </a:ln>
-        </p:spPr>
-      </p:sp>
-      <p:sp>
-        <p:nvSpPr>
-          <p:cNvPr id="16" name="Text 14"/>
-          <p:cNvSpPr txBox="1"/>
-          <p:nvPr/>
-        </p:nvSpPr>
-        <p:spPr>
-          <a:xfrm>
-            <a:off x="8293608" y="667512"/>
-            <a:ext cx="1325880" cy="228600"/>
-          </a:xfrm>
-          <a:prstGeom prst="rect">
-            <a:avLst/>
-          </a:prstGeom>
-          <a:noFill/>
-          <a:ln/>
-        </p:spPr>
-        <p:txBody>
-          <a:bodyPr wrap="square" lIns="0" tIns="0" rIns="0" bIns="0" rtlCol="0" anchor="ctr"/>
-          <a:lstStyle/>
-          <a:p>
-            <a:pPr indent="0" marL="0">
-              <a:buNone/>
-            </a:pPr>
-            <a:r>
-              <a:rPr lang="en-US" sz="800" dirty="0">
-                <a:solidFill>
-                  <a:srgbClr val="5B6472"/>
-                </a:solidFill>
-                <a:latin typeface="Arial" pitchFamily="34" charset="0"/>
-                <a:ea typeface="Arial" pitchFamily="34" charset="-122"/>
-                <a:cs typeface="Arial" pitchFamily="34" charset="-120"/>
-              </a:rPr>
-              <a:t>Rules only, no model</a:t>
-            </a:r>
-            <a:endParaRPr lang="en-US" sz="800" dirty="0"/>
-          </a:p>
-        </p:txBody>
-      </p:sp>
-      <p:sp>
-        <p:nvSpPr>
-          <p:cNvPr id="17" name="Shape 15"/>
-          <p:cNvSpPr/>
-          <p:nvPr/>
-        </p:nvSpPr>
-        <p:spPr>
-          <a:xfrm>
-            <a:off x="9921240" y="713232"/>
-            <a:ext cx="137160" cy="137160"/>
-          </a:xfrm>
-          <a:prstGeom prst="roundRect">
-            <a:avLst>
-              <a:gd name="adj" fmla="val 13333"/>
-            </a:avLst>
-          </a:prstGeom>
-          <a:solidFill>
-            <a:srgbClr val="F1E6ED"/>
-          </a:solidFill>
-          <a:ln w="12700">
-            <a:solidFill>
-              <a:srgbClr val="7A4A66"/>
-            </a:solidFill>
-            <a:prstDash val="solid"/>
-          </a:ln>
-        </p:spPr>
-      </p:sp>
-      <p:sp>
-        <p:nvSpPr>
-          <p:cNvPr id="18" name="Text 16"/>
-          <p:cNvSpPr txBox="1"/>
-          <p:nvPr/>
-        </p:nvSpPr>
-        <p:spPr>
-          <a:xfrm>
-            <a:off x="10122408" y="667512"/>
-            <a:ext cx="1325880" cy="228600"/>
-          </a:xfrm>
-          <a:prstGeom prst="rect">
-            <a:avLst/>
-          </a:prstGeom>
-          <a:noFill/>
-          <a:ln/>
-        </p:spPr>
-        <p:txBody>
-          <a:bodyPr wrap="square" lIns="0" tIns="0" rIns="0" bIns="0" rtlCol="0" anchor="ctr"/>
-          <a:lstStyle/>
-          <a:p>
-            <a:pPr indent="0" marL="0">
-              <a:buNone/>
-            </a:pPr>
-            <a:r>
-              <a:rPr lang="en-US" sz="800" dirty="0">
-                <a:solidFill>
-                  <a:srgbClr val="5B6472"/>
-                </a:solidFill>
-                <a:latin typeface="Arial" pitchFamily="34" charset="0"/>
-                <a:ea typeface="Arial" pitchFamily="34" charset="-122"/>
-                <a:cs typeface="Arial" pitchFamily="34" charset="-120"/>
-              </a:rPr>
-              <a:t>Human checkpoint</a:t>
-            </a:r>
-            <a:endParaRPr lang="en-US" sz="800" dirty="0"/>
-          </a:p>
-        </p:txBody>
-      </p:sp>
-      <p:sp>
-        <p:nvSpPr>
-          <p:cNvPr id="19" name="Shape 17"/>
           <p:cNvSpPr/>
           <p:nvPr/>
         </p:nvSpPr>
@@ -11320,7 +10523,7 @@
       </p:sp>
       <p:sp>
         <p:nvSpPr>
-          <p:cNvPr id="20" name="Text 18"/>
+          <p:cNvPr id="6" name="Text 4"/>
           <p:cNvSpPr txBox="1"/>
           <p:nvPr/>
         </p:nvSpPr>
@@ -11359,7 +10562,7 @@
       </p:sp>
       <p:sp>
         <p:nvSpPr>
-          <p:cNvPr id="21" name="Text 19"/>
+          <p:cNvPr id="7" name="Text 5"/>
           <p:cNvSpPr txBox="1"/>
           <p:nvPr/>
         </p:nvSpPr>
@@ -11404,7 +10607,7 @@
                 <a:ea typeface="Arial" pitchFamily="34" charset="-122"/>
                 <a:cs typeface="Arial" pitchFamily="34" charset="-120"/>
               </a:rPr>
-              <a:t>— one LangGraph state graph · shared claim state carries the audit trail</a:t>
+              <a:t>one shared claim record, one audit trail</a:t>
             </a:r>
             <a:endParaRPr lang="en-US" sz="1150" dirty="0"/>
           </a:p>
@@ -11412,7 +10615,7 @@
       </p:sp>
       <p:sp>
         <p:nvSpPr>
-          <p:cNvPr id="22" name="Text 20"/>
+          <p:cNvPr id="8" name="Text 6"/>
           <p:cNvSpPr txBox="1"/>
           <p:nvPr/>
         </p:nvSpPr>
@@ -11451,7 +10654,7 @@
       </p:sp>
       <p:sp>
         <p:nvSpPr>
-          <p:cNvPr id="23" name="Text 21"/>
+          <p:cNvPr id="9" name="Text 7"/>
           <p:cNvSpPr txBox="1"/>
           <p:nvPr/>
         </p:nvSpPr>
@@ -11490,7 +10693,7 @@
       </p:sp>
       <p:sp>
         <p:nvSpPr>
-          <p:cNvPr id="24" name="Text 22"/>
+          <p:cNvPr id="10" name="Text 8"/>
           <p:cNvSpPr txBox="1"/>
           <p:nvPr/>
         </p:nvSpPr>
@@ -11529,7 +10732,7 @@
       </p:sp>
       <p:sp>
         <p:nvSpPr>
-          <p:cNvPr id="25" name="Shape 23"/>
+          <p:cNvPr id="11" name="Shape 9"/>
           <p:cNvSpPr/>
           <p:nvPr/>
         </p:nvSpPr>
@@ -11553,7 +10756,7 @@
       </p:sp>
       <p:sp>
         <p:nvSpPr>
-          <p:cNvPr id="26" name="Text 24"/>
+          <p:cNvPr id="12" name="Text 10"/>
           <p:cNvSpPr txBox="1"/>
           <p:nvPr/>
         </p:nvSpPr>
@@ -11621,7 +10824,7 @@
       </p:sp>
       <p:sp>
         <p:nvSpPr>
-          <p:cNvPr id="27" name="Shape 25"/>
+          <p:cNvPr id="13" name="Shape 11"/>
           <p:cNvSpPr/>
           <p:nvPr/>
         </p:nvSpPr>
@@ -11645,7 +10848,7 @@
       </p:sp>
       <p:sp>
         <p:nvSpPr>
-          <p:cNvPr id="28" name="Text 26"/>
+          <p:cNvPr id="14" name="Text 12"/>
           <p:cNvSpPr txBox="1"/>
           <p:nvPr/>
         </p:nvSpPr>
@@ -11684,7 +10887,7 @@
       </p:sp>
       <p:sp>
         <p:nvSpPr>
-          <p:cNvPr id="29" name="Text 27"/>
+          <p:cNvPr id="15" name="Text 13"/>
           <p:cNvSpPr txBox="1"/>
           <p:nvPr/>
         </p:nvSpPr>
@@ -11735,7 +10938,7 @@
       </p:sp>
       <p:sp>
         <p:nvSpPr>
-          <p:cNvPr id="30" name="Shape 28"/>
+          <p:cNvPr id="16" name="Shape 14"/>
           <p:cNvSpPr/>
           <p:nvPr/>
         </p:nvSpPr>
@@ -11759,7 +10962,7 @@
       </p:sp>
       <p:sp>
         <p:nvSpPr>
-          <p:cNvPr id="31" name="Text 29"/>
+          <p:cNvPr id="17" name="Text 15"/>
           <p:cNvSpPr txBox="1"/>
           <p:nvPr/>
         </p:nvSpPr>
@@ -11798,7 +11001,7 @@
       </p:sp>
       <p:sp>
         <p:nvSpPr>
-          <p:cNvPr id="32" name="Shape 30"/>
+          <p:cNvPr id="18" name="Shape 16"/>
           <p:cNvSpPr/>
           <p:nvPr/>
         </p:nvSpPr>
@@ -11822,7 +11025,7 @@
       </p:sp>
       <p:sp>
         <p:nvSpPr>
-          <p:cNvPr id="33" name="Text 31"/>
+          <p:cNvPr id="19" name="Text 17"/>
           <p:cNvSpPr txBox="1"/>
           <p:nvPr/>
         </p:nvSpPr>
@@ -11870,7 +11073,7 @@
       </p:sp>
       <p:sp>
         <p:nvSpPr>
-          <p:cNvPr id="34" name="Shape 32"/>
+          <p:cNvPr id="20" name="Shape 18"/>
           <p:cNvSpPr/>
           <p:nvPr/>
         </p:nvSpPr>
@@ -11894,13 +11097,13 @@
       </p:sp>
       <p:sp>
         <p:nvSpPr>
-          <p:cNvPr id="35" name="Text 33"/>
-          <p:cNvSpPr txBox="1"/>
-          <p:nvPr/>
-        </p:nvSpPr>
-        <p:spPr>
-          <a:xfrm>
-            <a:off x="411480" y="2728214"/>
+          <p:cNvPr id="21" name="Text 19"/>
+          <p:cNvSpPr txBox="1"/>
+          <p:nvPr/>
+        </p:nvSpPr>
+        <p:spPr>
+          <a:xfrm>
+            <a:off x="411480" y="2672715"/>
             <a:ext cx="1645920" cy="182880"/>
           </a:xfrm>
           <a:prstGeom prst="rect">
@@ -11933,18 +11136,18 @@
       </p:sp>
       <p:sp>
         <p:nvSpPr>
-          <p:cNvPr id="36" name="Text 34"/>
-          <p:cNvSpPr txBox="1"/>
-          <p:nvPr/>
-        </p:nvSpPr>
-        <p:spPr>
-          <a:xfrm>
-            <a:off x="502920" y="2947670"/>
-            <a:ext cx="1463040" cy="322580"/>
+          <p:cNvPr id="22" name="Text 20"/>
+          <p:cNvSpPr txBox="1"/>
+          <p:nvPr/>
+        </p:nvSpPr>
+        <p:spPr>
+          <a:xfrm>
+            <a:off x="502920" y="2892171"/>
+            <a:ext cx="1463040" cy="433578"/>
           </a:xfrm>
           <a:prstGeom prst="roundRect">
             <a:avLst>
-              <a:gd name="adj" fmla="val 11339"/>
+              <a:gd name="adj" fmla="val 8436"/>
             </a:avLst>
           </a:prstGeom>
           <a:solidFill>
@@ -11976,15 +11179,35 @@
                 <a:ea typeface="Arial" pitchFamily="34" charset="-122"/>
                 <a:cs typeface="Arial" pitchFamily="34" charset="-120"/>
               </a:rPr>
-              <a:t>Close at intake — letter, no permanent injury</a:t>
+              <a:t>Close at intake</a:t>
             </a:r>
             <a:endParaRPr lang="en-US" sz="760" dirty="0"/>
           </a:p>
-        </p:txBody>
-      </p:sp>
-      <p:sp>
-        <p:nvSpPr>
-          <p:cNvPr id="37" name="Shape 35"/>
+          <a:p>
+            <a:pPr algn="ctr" indent="0" marL="0">
+              <a:lnSpc>
+                <a:spcPct val="108000"/>
+              </a:lnSpc>
+              <a:buNone/>
+            </a:pPr>
+            <a:r>
+              <a:rPr lang="en-US" sz="760" dirty="0">
+                <a:solidFill>
+                  <a:srgbClr val="33480A"/>
+                </a:solidFill>
+                <a:latin typeface="Arial" pitchFamily="34" charset="0"/>
+                <a:ea typeface="Arial" pitchFamily="34" charset="-122"/>
+                <a:cs typeface="Arial" pitchFamily="34" charset="-120"/>
+              </a:rPr>
+              <a:t>letter, no permanent injury</a:t>
+            </a:r>
+            <a:endParaRPr lang="en-US" sz="760" dirty="0"/>
+          </a:p>
+        </p:txBody>
+      </p:sp>
+      <p:sp>
+        <p:nvSpPr>
+          <p:cNvPr id="23" name="Shape 21"/>
           <p:cNvSpPr/>
           <p:nvPr/>
         </p:nvSpPr>
@@ -12008,7 +11231,7 @@
       </p:sp>
       <p:sp>
         <p:nvSpPr>
-          <p:cNvPr id="38" name="Text 36"/>
+          <p:cNvPr id="24" name="Text 22"/>
           <p:cNvSpPr txBox="1"/>
           <p:nvPr/>
         </p:nvSpPr>
@@ -12047,7 +11270,7 @@
       </p:sp>
       <p:sp>
         <p:nvSpPr>
-          <p:cNvPr id="39" name="Text 37"/>
+          <p:cNvPr id="25" name="Text 23"/>
           <p:cNvSpPr txBox="1"/>
           <p:nvPr/>
         </p:nvSpPr>
@@ -12098,7 +11321,7 @@
       </p:sp>
       <p:sp>
         <p:nvSpPr>
-          <p:cNvPr id="40" name="Shape 38"/>
+          <p:cNvPr id="26" name="Shape 24"/>
           <p:cNvSpPr/>
           <p:nvPr/>
         </p:nvSpPr>
@@ -12125,7 +11348,7 @@
       </p:sp>
       <p:sp>
         <p:nvSpPr>
-          <p:cNvPr id="41" name="Text 39"/>
+          <p:cNvPr id="27" name="Text 25"/>
           <p:cNvSpPr txBox="1"/>
           <p:nvPr/>
         </p:nvSpPr>
@@ -12167,7 +11390,7 @@
       </p:sp>
       <p:sp>
         <p:nvSpPr>
-          <p:cNvPr id="42" name="Text 40"/>
+          <p:cNvPr id="28" name="Text 26"/>
           <p:cNvSpPr txBox="1"/>
           <p:nvPr/>
         </p:nvSpPr>
@@ -12206,7 +11429,7 @@
       </p:sp>
       <p:sp>
         <p:nvSpPr>
-          <p:cNvPr id="43" name="Shape 41"/>
+          <p:cNvPr id="29" name="Shape 27"/>
           <p:cNvSpPr/>
           <p:nvPr/>
         </p:nvSpPr>
@@ -12230,7 +11453,7 @@
       </p:sp>
       <p:sp>
         <p:nvSpPr>
-          <p:cNvPr id="44" name="Text 42"/>
+          <p:cNvPr id="30" name="Text 28"/>
           <p:cNvSpPr txBox="1"/>
           <p:nvPr/>
         </p:nvSpPr>
@@ -12293,15 +11516,35 @@
                 <a:ea typeface="Arial" pitchFamily="34" charset="-122"/>
                 <a:cs typeface="Arial" pitchFamily="34" charset="-120"/>
               </a:rPr>
-              <a:t>drafts the close-out letter, or the full IDB record, with its reasoning attached</a:t>
+              <a:t>drafts the letter or the IDB record,</a:t>
             </a:r>
             <a:endParaRPr lang="en-US" sz="1000" dirty="0"/>
           </a:p>
-        </p:txBody>
-      </p:sp>
-      <p:sp>
-        <p:nvSpPr>
-          <p:cNvPr id="45" name="Shape 43"/>
+          <a:p>
+            <a:pPr algn="ctr" indent="0" marL="0">
+              <a:lnSpc>
+                <a:spcPct val="108000"/>
+              </a:lnSpc>
+              <a:buNone/>
+            </a:pPr>
+            <a:r>
+              <a:rPr lang="en-US" sz="1000" b="1" dirty="0">
+                <a:solidFill>
+                  <a:srgbClr val="1B2430"/>
+                </a:solidFill>
+                <a:latin typeface="Arial" pitchFamily="34" charset="0"/>
+                <a:ea typeface="Arial" pitchFamily="34" charset="-122"/>
+                <a:cs typeface="Arial" pitchFamily="34" charset="-120"/>
+              </a:rPr>
+              <a:t>with its reasoning attached</a:t>
+            </a:r>
+            <a:endParaRPr lang="en-US" sz="1000" dirty="0"/>
+          </a:p>
+        </p:txBody>
+      </p:sp>
+      <p:sp>
+        <p:nvSpPr>
+          <p:cNvPr id="31" name="Shape 29"/>
           <p:cNvSpPr/>
           <p:nvPr/>
         </p:nvSpPr>
@@ -12325,7 +11568,7 @@
       </p:sp>
       <p:sp>
         <p:nvSpPr>
-          <p:cNvPr id="46" name="Text 44"/>
+          <p:cNvPr id="32" name="Text 30"/>
           <p:cNvSpPr txBox="1"/>
           <p:nvPr/>
         </p:nvSpPr>
@@ -12368,15 +11611,35 @@
                 <a:ea typeface="Arial" pitchFamily="34" charset="-122"/>
                 <a:cs typeface="Arial" pitchFamily="34" charset="-120"/>
               </a:rPr>
-              <a:t>Handler approves before anything sends — edit rate is the monitored metric, not model accuracy</a:t>
+              <a:t>Handler approves before anything sends</a:t>
             </a:r>
             <a:endParaRPr lang="en-US" sz="860" dirty="0"/>
           </a:p>
-        </p:txBody>
-      </p:sp>
-      <p:sp>
-        <p:nvSpPr>
-          <p:cNvPr id="47" name="Shape 45"/>
+          <a:p>
+            <a:pPr algn="ctr" indent="0" marL="0">
+              <a:lnSpc>
+                <a:spcPct val="108000"/>
+              </a:lnSpc>
+              <a:buNone/>
+            </a:pPr>
+            <a:r>
+              <a:rPr lang="en-US" sz="860" b="1" dirty="0">
+                <a:solidFill>
+                  <a:srgbClr val="4A2C3B"/>
+                </a:solidFill>
+                <a:latin typeface="Arial" pitchFamily="34" charset="0"/>
+                <a:ea typeface="Arial" pitchFamily="34" charset="-122"/>
+                <a:cs typeface="Arial" pitchFamily="34" charset="-120"/>
+              </a:rPr>
+              <a:t>(we monitor edit rate, not model accuracy)</a:t>
+            </a:r>
+            <a:endParaRPr lang="en-US" sz="860" dirty="0"/>
+          </a:p>
+        </p:txBody>
+      </p:sp>
+      <p:sp>
+        <p:nvSpPr>
+          <p:cNvPr id="33" name="Shape 31"/>
           <p:cNvSpPr/>
           <p:nvPr/>
         </p:nvSpPr>
@@ -12400,7 +11663,7 @@
       </p:sp>
       <p:sp>
         <p:nvSpPr>
-          <p:cNvPr id="48" name="Text 46"/>
+          <p:cNvPr id="34" name="Text 32"/>
           <p:cNvSpPr txBox="1"/>
           <p:nvPr/>
         </p:nvSpPr>
@@ -12468,7 +11731,7 @@
       </p:sp>
       <p:sp>
         <p:nvSpPr>
-          <p:cNvPr id="49" name="Shape 47"/>
+          <p:cNvPr id="35" name="Shape 33"/>
           <p:cNvSpPr/>
           <p:nvPr/>
         </p:nvSpPr>
@@ -12492,13 +11755,13 @@
       </p:sp>
       <p:sp>
         <p:nvSpPr>
-          <p:cNvPr id="50" name="Text 48"/>
-          <p:cNvSpPr txBox="1"/>
-          <p:nvPr/>
-        </p:nvSpPr>
-        <p:spPr>
-          <a:xfrm>
-            <a:off x="6355080" y="2969514"/>
+          <p:cNvPr id="36" name="Text 34"/>
+          <p:cNvSpPr txBox="1"/>
+          <p:nvPr/>
+        </p:nvSpPr>
+        <p:spPr>
+          <a:xfrm>
+            <a:off x="6355080" y="2914015"/>
             <a:ext cx="1645920" cy="182880"/>
           </a:xfrm>
           <a:prstGeom prst="rect">
@@ -12531,18 +11794,18 @@
       </p:sp>
       <p:sp>
         <p:nvSpPr>
-          <p:cNvPr id="51" name="Text 49"/>
-          <p:cNvSpPr txBox="1"/>
-          <p:nvPr/>
-        </p:nvSpPr>
-        <p:spPr>
-          <a:xfrm>
-            <a:off x="6446520" y="3188970"/>
-            <a:ext cx="1463040" cy="322580"/>
+          <p:cNvPr id="37" name="Text 35"/>
+          <p:cNvSpPr txBox="1"/>
+          <p:nvPr/>
+        </p:nvSpPr>
+        <p:spPr>
+          <a:xfrm>
+            <a:off x="6446520" y="3133471"/>
+            <a:ext cx="1463040" cy="433578"/>
           </a:xfrm>
           <a:prstGeom prst="roundRect">
             <a:avLst>
-              <a:gd name="adj" fmla="val 11339"/>
+              <a:gd name="adj" fmla="val 8436"/>
             </a:avLst>
           </a:prstGeom>
           <a:solidFill>
@@ -12574,15 +11837,35 @@
                 <a:ea typeface="Arial" pitchFamily="34" charset="-122"/>
                 <a:cs typeface="Arial" pitchFamily="34" charset="-120"/>
               </a:rPr>
-              <a:t>Close at intake — AI-drafted, handler approved</a:t>
+              <a:t>Close at intake</a:t>
             </a:r>
             <a:endParaRPr lang="en-US" sz="760" dirty="0"/>
           </a:p>
-        </p:txBody>
-      </p:sp>
-      <p:sp>
-        <p:nvSpPr>
-          <p:cNvPr id="52" name="Shape 50"/>
+          <a:p>
+            <a:pPr algn="ctr" indent="0" marL="0">
+              <a:lnSpc>
+                <a:spcPct val="108000"/>
+              </a:lnSpc>
+              <a:buNone/>
+            </a:pPr>
+            <a:r>
+              <a:rPr lang="en-US" sz="760" dirty="0">
+                <a:solidFill>
+                  <a:srgbClr val="33480A"/>
+                </a:solidFill>
+                <a:latin typeface="Arial" pitchFamily="34" charset="0"/>
+                <a:ea typeface="Arial" pitchFamily="34" charset="-122"/>
+                <a:cs typeface="Arial" pitchFamily="34" charset="-120"/>
+              </a:rPr>
+              <a:t>AI-drafted, handler approved</a:t>
+            </a:r>
+            <a:endParaRPr lang="en-US" sz="760" dirty="0"/>
+          </a:p>
+        </p:txBody>
+      </p:sp>
+      <p:sp>
+        <p:nvSpPr>
+          <p:cNvPr id="38" name="Shape 36"/>
           <p:cNvSpPr/>
           <p:nvPr/>
         </p:nvSpPr>
@@ -12606,13 +11889,13 @@
       </p:sp>
       <p:sp>
         <p:nvSpPr>
-          <p:cNvPr id="53" name="Text 51"/>
-          <p:cNvSpPr txBox="1"/>
-          <p:nvPr/>
-        </p:nvSpPr>
-        <p:spPr>
-          <a:xfrm>
-            <a:off x="10195560" y="2969514"/>
+          <p:cNvPr id="39" name="Text 37"/>
+          <p:cNvSpPr txBox="1"/>
+          <p:nvPr/>
+        </p:nvSpPr>
+        <p:spPr>
+          <a:xfrm>
+            <a:off x="10195560" y="2914015"/>
             <a:ext cx="1645920" cy="182880"/>
           </a:xfrm>
           <a:prstGeom prst="rect">
@@ -12645,18 +11928,18 @@
       </p:sp>
       <p:sp>
         <p:nvSpPr>
-          <p:cNvPr id="54" name="Text 52"/>
-          <p:cNvSpPr txBox="1"/>
-          <p:nvPr/>
-        </p:nvSpPr>
-        <p:spPr>
-          <a:xfrm>
-            <a:off x="10195560" y="3188970"/>
-            <a:ext cx="1463040" cy="322580"/>
+          <p:cNvPr id="40" name="Text 38"/>
+          <p:cNvSpPr txBox="1"/>
+          <p:nvPr/>
+        </p:nvSpPr>
+        <p:spPr>
+          <a:xfrm>
+            <a:off x="10195560" y="3133471"/>
+            <a:ext cx="1463040" cy="433578"/>
           </a:xfrm>
           <a:prstGeom prst="roundRect">
             <a:avLst>
-              <a:gd name="adj" fmla="val 11339"/>
+              <a:gd name="adj" fmla="val 8436"/>
             </a:avLst>
           </a:prstGeom>
           <a:solidFill>
@@ -12688,15 +11971,35 @@
                 <a:ea typeface="Arial" pitchFamily="34" charset="-122"/>
                 <a:cs typeface="Arial" pitchFamily="34" charset="-120"/>
               </a:rPr>
-              <a:t>Claim in IDB — runs parallel with Coverage Check</a:t>
+              <a:t>Claim in IDB</a:t>
             </a:r>
             <a:endParaRPr lang="en-US" sz="760" dirty="0"/>
           </a:p>
-        </p:txBody>
-      </p:sp>
-      <p:sp>
-        <p:nvSpPr>
-          <p:cNvPr id="55" name="Shape 53"/>
+          <a:p>
+            <a:pPr algn="ctr" indent="0" marL="0">
+              <a:lnSpc>
+                <a:spcPct val="108000"/>
+              </a:lnSpc>
+              <a:buNone/>
+            </a:pPr>
+            <a:r>
+              <a:rPr lang="en-US" sz="760" dirty="0">
+                <a:solidFill>
+                  <a:srgbClr val="33480A"/>
+                </a:solidFill>
+                <a:latin typeface="Arial" pitchFamily="34" charset="0"/>
+                <a:ea typeface="Arial" pitchFamily="34" charset="-122"/>
+                <a:cs typeface="Arial" pitchFamily="34" charset="-120"/>
+              </a:rPr>
+              <a:t>Coverage Check runs alongside</a:t>
+            </a:r>
+            <a:endParaRPr lang="en-US" sz="760" dirty="0"/>
+          </a:p>
+        </p:txBody>
+      </p:sp>
+      <p:sp>
+        <p:nvSpPr>
+          <p:cNvPr id="41" name="Shape 39"/>
           <p:cNvSpPr/>
           <p:nvPr/>
         </p:nvSpPr>
@@ -12723,7 +12026,7 @@
       </p:sp>
       <p:sp>
         <p:nvSpPr>
-          <p:cNvPr id="56" name="Text 54"/>
+          <p:cNvPr id="42" name="Text 40"/>
           <p:cNvSpPr txBox="1"/>
           <p:nvPr/>
         </p:nvSpPr>
@@ -12845,7 +12148,7 @@
                 <a:ea typeface="Cambria" pitchFamily="34" charset="-122"/>
                 <a:cs typeface="Cambria" pitchFamily="34" charset="-120"/>
               </a:rPr>
-              <a:t>Start where a mistake is cheap — that is what earns the trust the bigger wins depend on</a:t>
+              <a:t>Start where a mistake is cheap. That is what earns the trust the bigger wins need.</a:t>
             </a:r>
             <a:endParaRPr lang="en-US" sz="1400" dirty="0"/>
           </a:p>
@@ -13194,7 +12497,7 @@
                 <a:ea typeface="Arial" pitchFamily="34" charset="-122"/>
                 <a:cs typeface="Arial" pitchFamily="34" charset="-120"/>
               </a:rPr>
-              <a:t>nobody is alerted today — a claim can go missing unseen</a:t>
+              <a:t>nobody is alerted today, so a claim can go missing unseen</a:t>
             </a:r>
             <a:endParaRPr lang="en-US" sz="920" dirty="0"/>
           </a:p>
@@ -13284,7 +12587,7 @@
                 <a:ea typeface="Arial" pitchFamily="34" charset="-122"/>
                 <a:cs typeface="Arial" pitchFamily="34" charset="-120"/>
               </a:rPr>
-              <a:t>one agent plus plain rules — ends the teeth dependency</a:t>
+              <a:t>one agent plus plain rules, ending the teeth dependency</a:t>
             </a:r>
             <a:endParaRPr lang="en-US" sz="920" dirty="0"/>
           </a:p>
@@ -13760,7 +13063,7 @@
                 <a:ea typeface="Arial" pitchFamily="34" charset="-122"/>
                 <a:cs typeface="Arial" pitchFamily="34" charset="-120"/>
               </a:rPr>
-              <a:t>detection first — you cannot fix what nobody reports</a:t>
+              <a:t>detection first, because you cannot fix what nobody reports</a:t>
             </a:r>
             <a:endParaRPr lang="en-US" sz="920" dirty="0"/>
           </a:p>
@@ -14061,7 +13364,7 @@
                 <a:ea typeface="Arial" pitchFamily="34" charset="-122"/>
                 <a:cs typeface="Arial" pitchFamily="34" charset="-120"/>
               </a:rPr>
-              <a:t>Not noticed today (GGW) — so detection comes before retries:</a:t>
+              <a:t>Not noticed today (GGW), so detection comes before retries:</a:t>
             </a:r>
             <a:endParaRPr lang="en-US" sz="780" dirty="0"/>
           </a:p>
@@ -14922,7 +14225,7 @@
                 <a:ea typeface="Arial" pitchFamily="34" charset="-122"/>
                 <a:cs typeface="Arial" pitchFamily="34" charset="-120"/>
               </a:rPr>
-              <a:t>AES rulings and underwriting authority are deliberately absent — those decisions are not ours to make · frequencies from the case study</a:t>
+              <a:t>AES rulings and underwriting authority are deliberately absent. Those decisions are not ours to make.</a:t>
             </a:r>
             <a:endParaRPr lang="en-US" sz="700" dirty="0"/>
           </a:p>
@@ -15071,7 +14374,7 @@
                 <a:ea typeface="Cambria" pitchFamily="34" charset="-122"/>
                 <a:cs typeface="Cambria" pitchFamily="34" charset="-120"/>
               </a:rPr>
-              <a:t>Deployed on the cloud GGW already run, released in three gated steps, never blind</a:t>
+              <a:t>Deployed on the cloud GGW already run, and released in three gated steps</a:t>
             </a:r>
             <a:endParaRPr lang="en-US" sz="1400" dirty="0"/>
           </a:p>
@@ -15265,7 +14568,7 @@
                 <a:ea typeface="Arial" pitchFamily="34" charset="-122"/>
                 <a:cs typeface="Arial" pitchFamily="34" charset="-120"/>
               </a:rPr>
-              <a:t>PostgreSQL  ·  graph checkpoint and audit log in one place — every decision, its inputs and its confidence</a:t>
+              <a:t>PostgreSQL  ·  graph checkpoint and audit log in one place: every decision, its inputs, its confidence</a:t>
             </a:r>
             <a:endParaRPr lang="en-US" sz="900" dirty="0"/>
           </a:p>
@@ -15939,45 +15242,6 @@
         </p:nvSpPr>
         <p:spPr>
           <a:xfrm>
-            <a:off x="365760" y="2249424"/>
-            <a:ext cx="11457432" cy="219456"/>
-          </a:xfrm>
-          <a:prstGeom prst="rect">
-            <a:avLst/>
-          </a:prstGeom>
-          <a:noFill/>
-          <a:ln/>
-        </p:spPr>
-        <p:txBody>
-          <a:bodyPr wrap="square" lIns="0" tIns="0" rIns="0" bIns="0" rtlCol="0" anchor="ctr"/>
-          <a:lstStyle/>
-          <a:p>
-            <a:pPr indent="0" marL="0">
-              <a:buNone/>
-            </a:pPr>
-            <a:r>
-              <a:rPr lang="en-US" sz="820" i="1" dirty="0">
-                <a:solidFill>
-                  <a:srgbClr val="5B6472"/>
-                </a:solidFill>
-                <a:latin typeface="Arial" pitchFamily="34" charset="0"/>
-                <a:ea typeface="Arial" pitchFamily="34" charset="-122"/>
-                <a:cs typeface="Arial" pitchFamily="34" charset="-120"/>
-              </a:rPr>
-              <a:t>Deployed to the cloud GGW already use, with a switch to turn any agent off</a:t>
-            </a:r>
-            <a:endParaRPr lang="en-US" sz="820" dirty="0"/>
-          </a:p>
-        </p:txBody>
-      </p:sp>
-      <p:sp>
-        <p:nvSpPr>
-          <p:cNvPr id="28" name="Text 26"/>
-          <p:cNvSpPr txBox="1"/>
-          <p:nvPr/>
-        </p:nvSpPr>
-        <p:spPr>
-          <a:xfrm>
             <a:off x="365760" y="2688336"/>
             <a:ext cx="3657600" cy="201168"/>
           </a:xfrm>
@@ -16011,7 +15275,7 @@
       </p:sp>
       <p:sp>
         <p:nvSpPr>
-          <p:cNvPr id="29" name="Shape 27"/>
+          <p:cNvPr id="28" name="Shape 26"/>
           <p:cNvSpPr/>
           <p:nvPr/>
         </p:nvSpPr>
@@ -16038,7 +15302,7 @@
       </p:sp>
       <p:sp>
         <p:nvSpPr>
-          <p:cNvPr id="30" name="Text 28"/>
+          <p:cNvPr id="29" name="Text 27"/>
           <p:cNvSpPr txBox="1"/>
           <p:nvPr/>
         </p:nvSpPr>
@@ -16077,7 +15341,7 @@
       </p:sp>
       <p:sp>
         <p:nvSpPr>
-          <p:cNvPr id="31" name="Text 29"/>
+          <p:cNvPr id="30" name="Text 28"/>
           <p:cNvSpPr txBox="1"/>
           <p:nvPr/>
         </p:nvSpPr>
@@ -16111,7 +15375,7 @@
                 <a:ea typeface="Arial" pitchFamily="34" charset="-122"/>
                 <a:cs typeface="Arial" pitchFamily="34" charset="-120"/>
               </a:rPr>
-              <a:t>draft, classify, extract — never decide</a:t>
+              <a:t>draft, classify, extract, but never decide</a:t>
             </a:r>
             <a:endParaRPr lang="en-US" sz="800" dirty="0"/>
           </a:p>
@@ -16119,7 +15383,7 @@
       </p:sp>
       <p:sp>
         <p:nvSpPr>
-          <p:cNvPr id="32" name="Shape 30"/>
+          <p:cNvPr id="31" name="Shape 29"/>
           <p:cNvSpPr/>
           <p:nvPr/>
         </p:nvSpPr>
@@ -16146,7 +15410,7 @@
       </p:sp>
       <p:sp>
         <p:nvSpPr>
-          <p:cNvPr id="33" name="Text 31"/>
+          <p:cNvPr id="32" name="Text 30"/>
           <p:cNvSpPr txBox="1"/>
           <p:nvPr/>
         </p:nvSpPr>
@@ -16185,7 +15449,7 @@
       </p:sp>
       <p:sp>
         <p:nvSpPr>
-          <p:cNvPr id="34" name="Text 32"/>
+          <p:cNvPr id="33" name="Text 31"/>
           <p:cNvSpPr txBox="1"/>
           <p:nvPr/>
         </p:nvSpPr>
@@ -16219,7 +15483,7 @@
                 <a:ea typeface="Arial" pitchFamily="34" charset="-122"/>
                 <a:cs typeface="Arial" pitchFamily="34" charset="-120"/>
               </a:rPr>
-              <a:t>check the record — pass or fail, nothing in between</a:t>
+              <a:t>check the record: pass or fail, nothing in between</a:t>
             </a:r>
             <a:endParaRPr lang="en-US" sz="800" dirty="0"/>
           </a:p>
@@ -16227,7 +15491,7 @@
       </p:sp>
       <p:sp>
         <p:nvSpPr>
-          <p:cNvPr id="35" name="Shape 33"/>
+          <p:cNvPr id="34" name="Shape 32"/>
           <p:cNvSpPr/>
           <p:nvPr/>
         </p:nvSpPr>
@@ -16254,7 +15518,7 @@
       </p:sp>
       <p:sp>
         <p:nvSpPr>
-          <p:cNvPr id="36" name="Text 34"/>
+          <p:cNvPr id="35" name="Text 33"/>
           <p:cNvSpPr txBox="1"/>
           <p:nvPr/>
         </p:nvSpPr>
@@ -16293,7 +15557,7 @@
       </p:sp>
       <p:sp>
         <p:nvSpPr>
-          <p:cNvPr id="37" name="Text 35"/>
+          <p:cNvPr id="36" name="Text 34"/>
           <p:cNvSpPr txBox="1"/>
           <p:nvPr/>
         </p:nvSpPr>
@@ -16335,7 +15599,7 @@
       </p:sp>
       <p:sp>
         <p:nvSpPr>
-          <p:cNvPr id="38" name="Text 36"/>
+          <p:cNvPr id="37" name="Text 35"/>
           <p:cNvSpPr txBox="1"/>
           <p:nvPr/>
         </p:nvSpPr>
@@ -16374,7 +15638,7 @@
       </p:sp>
       <p:sp>
         <p:nvSpPr>
-          <p:cNvPr id="39" name="Shape 37"/>
+          <p:cNvPr id="38" name="Shape 36"/>
           <p:cNvSpPr/>
           <p:nvPr/>
         </p:nvSpPr>
@@ -16401,7 +15665,7 @@
       </p:sp>
       <p:sp>
         <p:nvSpPr>
-          <p:cNvPr id="40" name="Text 38"/>
+          <p:cNvPr id="39" name="Text 37"/>
           <p:cNvSpPr txBox="1"/>
           <p:nvPr/>
         </p:nvSpPr>
@@ -16440,7 +15704,7 @@
       </p:sp>
       <p:sp>
         <p:nvSpPr>
-          <p:cNvPr id="41" name="Text 39"/>
+          <p:cNvPr id="40" name="Text 38"/>
           <p:cNvSpPr txBox="1"/>
           <p:nvPr/>
         </p:nvSpPr>
@@ -16479,7 +15743,7 @@
       </p:sp>
       <p:sp>
         <p:nvSpPr>
-          <p:cNvPr id="42" name="Text 40"/>
+          <p:cNvPr id="41" name="Text 39"/>
           <p:cNvSpPr txBox="1"/>
           <p:nvPr/>
         </p:nvSpPr>
@@ -16521,7 +15785,7 @@
       </p:sp>
       <p:sp>
         <p:nvSpPr>
-          <p:cNvPr id="43" name="Shape 41"/>
+          <p:cNvPr id="42" name="Shape 40"/>
           <p:cNvSpPr/>
           <p:nvPr/>
         </p:nvSpPr>
@@ -16541,7 +15805,7 @@
       </p:sp>
       <p:sp>
         <p:nvSpPr>
-          <p:cNvPr id="44" name="Text 42"/>
+          <p:cNvPr id="43" name="Text 41"/>
           <p:cNvSpPr txBox="1"/>
           <p:nvPr/>
         </p:nvSpPr>
@@ -16583,7 +15847,7 @@
       </p:sp>
       <p:sp>
         <p:nvSpPr>
-          <p:cNvPr id="45" name="Shape 43"/>
+          <p:cNvPr id="44" name="Shape 42"/>
           <p:cNvSpPr/>
           <p:nvPr/>
         </p:nvSpPr>
@@ -16607,7 +15871,7 @@
       </p:sp>
       <p:sp>
         <p:nvSpPr>
-          <p:cNvPr id="46" name="Shape 44"/>
+          <p:cNvPr id="45" name="Shape 43"/>
           <p:cNvSpPr/>
           <p:nvPr/>
         </p:nvSpPr>
@@ -16634,7 +15898,7 @@
       </p:sp>
       <p:sp>
         <p:nvSpPr>
-          <p:cNvPr id="47" name="Text 45"/>
+          <p:cNvPr id="46" name="Text 44"/>
           <p:cNvSpPr txBox="1"/>
           <p:nvPr/>
         </p:nvSpPr>
@@ -16673,7 +15937,7 @@
       </p:sp>
       <p:sp>
         <p:nvSpPr>
-          <p:cNvPr id="48" name="Text 46"/>
+          <p:cNvPr id="47" name="Text 45"/>
           <p:cNvSpPr txBox="1"/>
           <p:nvPr/>
         </p:nvSpPr>
@@ -16712,7 +15976,7 @@
       </p:sp>
       <p:sp>
         <p:nvSpPr>
-          <p:cNvPr id="49" name="Text 47"/>
+          <p:cNvPr id="48" name="Text 46"/>
           <p:cNvSpPr txBox="1"/>
           <p:nvPr/>
         </p:nvSpPr>
@@ -16754,7 +16018,7 @@
       </p:sp>
       <p:sp>
         <p:nvSpPr>
-          <p:cNvPr id="50" name="Shape 48"/>
+          <p:cNvPr id="49" name="Shape 47"/>
           <p:cNvSpPr/>
           <p:nvPr/>
         </p:nvSpPr>
@@ -16774,7 +16038,7 @@
       </p:sp>
       <p:sp>
         <p:nvSpPr>
-          <p:cNvPr id="51" name="Text 49"/>
+          <p:cNvPr id="50" name="Text 48"/>
           <p:cNvSpPr txBox="1"/>
           <p:nvPr/>
         </p:nvSpPr>
@@ -16816,7 +16080,7 @@
       </p:sp>
       <p:sp>
         <p:nvSpPr>
-          <p:cNvPr id="52" name="Shape 50"/>
+          <p:cNvPr id="51" name="Shape 49"/>
           <p:cNvSpPr/>
           <p:nvPr/>
         </p:nvSpPr>
@@ -16840,7 +16104,7 @@
       </p:sp>
       <p:sp>
         <p:nvSpPr>
-          <p:cNvPr id="53" name="Shape 51"/>
+          <p:cNvPr id="52" name="Shape 50"/>
           <p:cNvSpPr/>
           <p:nvPr/>
         </p:nvSpPr>
@@ -16867,7 +16131,7 @@
       </p:sp>
       <p:sp>
         <p:nvSpPr>
-          <p:cNvPr id="54" name="Text 52"/>
+          <p:cNvPr id="53" name="Text 51"/>
           <p:cNvSpPr txBox="1"/>
           <p:nvPr/>
         </p:nvSpPr>
@@ -16906,7 +16170,7 @@
       </p:sp>
       <p:sp>
         <p:nvSpPr>
-          <p:cNvPr id="55" name="Text 53"/>
+          <p:cNvPr id="54" name="Text 52"/>
           <p:cNvSpPr txBox="1"/>
           <p:nvPr/>
         </p:nvSpPr>
@@ -16945,7 +16209,7 @@
       </p:sp>
       <p:sp>
         <p:nvSpPr>
-          <p:cNvPr id="56" name="Text 54"/>
+          <p:cNvPr id="55" name="Text 53"/>
           <p:cNvSpPr txBox="1"/>
           <p:nvPr/>
         </p:nvSpPr>
@@ -16987,7 +16251,7 @@
       </p:sp>
       <p:sp>
         <p:nvSpPr>
-          <p:cNvPr id="57" name="Shape 55"/>
+          <p:cNvPr id="56" name="Shape 54"/>
           <p:cNvSpPr/>
           <p:nvPr/>
         </p:nvSpPr>
@@ -17007,7 +16271,7 @@
       </p:sp>
       <p:sp>
         <p:nvSpPr>
-          <p:cNvPr id="58" name="Text 56"/>
+          <p:cNvPr id="57" name="Text 55"/>
           <p:cNvSpPr txBox="1"/>
           <p:nvPr/>
         </p:nvSpPr>
@@ -17049,7 +16313,7 @@
       </p:sp>
       <p:sp>
         <p:nvSpPr>
-          <p:cNvPr id="59" name="Shape 57"/>
+          <p:cNvPr id="58" name="Shape 56"/>
           <p:cNvSpPr/>
           <p:nvPr/>
         </p:nvSpPr>
@@ -17073,7 +16337,7 @@
       </p:sp>
       <p:sp>
         <p:nvSpPr>
-          <p:cNvPr id="60" name="Shape 58"/>
+          <p:cNvPr id="59" name="Shape 57"/>
           <p:cNvSpPr/>
           <p:nvPr/>
         </p:nvSpPr>
@@ -17100,7 +16364,7 @@
       </p:sp>
       <p:sp>
         <p:nvSpPr>
-          <p:cNvPr id="61" name="Text 59"/>
+          <p:cNvPr id="60" name="Text 58"/>
           <p:cNvSpPr txBox="1"/>
           <p:nvPr/>
         </p:nvSpPr>
@@ -17139,7 +16403,7 @@
       </p:sp>
       <p:sp>
         <p:nvSpPr>
-          <p:cNvPr id="62" name="Text 60"/>
+          <p:cNvPr id="61" name="Text 59"/>
           <p:cNvSpPr txBox="1"/>
           <p:nvPr/>
         </p:nvSpPr>
@@ -17178,7 +16442,7 @@
       </p:sp>
       <p:sp>
         <p:nvSpPr>
-          <p:cNvPr id="63" name="Text 61"/>
+          <p:cNvPr id="62" name="Text 60"/>
           <p:cNvSpPr txBox="1"/>
           <p:nvPr/>
         </p:nvSpPr>
@@ -17220,7 +16484,7 @@
       </p:sp>
       <p:sp>
         <p:nvSpPr>
-          <p:cNvPr id="64" name="Shape 62"/>
+          <p:cNvPr id="63" name="Shape 61"/>
           <p:cNvSpPr/>
           <p:nvPr/>
         </p:nvSpPr>
@@ -17240,7 +16504,7 @@
       </p:sp>
       <p:sp>
         <p:nvSpPr>
-          <p:cNvPr id="65" name="Text 63"/>
+          <p:cNvPr id="64" name="Text 62"/>
           <p:cNvSpPr txBox="1"/>
           <p:nvPr/>
         </p:nvSpPr>
@@ -17282,7 +16546,7 @@
       </p:sp>
       <p:sp>
         <p:nvSpPr>
-          <p:cNvPr id="66" name="Text 64"/>
+          <p:cNvPr id="65" name="Text 63"/>
           <p:cNvSpPr txBox="1"/>
           <p:nvPr/>
         </p:nvSpPr>
@@ -17313,7 +16577,7 @@
                 <a:ea typeface="Arial" pitchFamily="34" charset="-122"/>
                 <a:cs typeface="Arial" pitchFamily="34" charset="-120"/>
               </a:rPr>
-              <a:t>If an agent fails or is unsure, the claim simply falls back to today's manual queue — slower, never wrong.</a:t>
+              <a:t>If an agent fails or is unsure, the claim falls back to today's manual queue. Slower, never wrong.</a:t>
             </a:r>
             <a:endParaRPr lang="en-US" sz="740" dirty="0"/>
           </a:p>
@@ -17321,7 +16585,7 @@
       </p:sp>
       <p:sp>
         <p:nvSpPr>
-          <p:cNvPr id="67" name="Text 65"/>
+          <p:cNvPr id="66" name="Text 64"/>
           <p:cNvSpPr txBox="1"/>
           <p:nvPr/>
         </p:nvSpPr>
@@ -17360,7 +16624,7 @@
       </p:sp>
       <p:sp>
         <p:nvSpPr>
-          <p:cNvPr id="68" name="Text 66"/>
+          <p:cNvPr id="67" name="Text 65"/>
           <p:cNvSpPr txBox="1"/>
           <p:nvPr/>
         </p:nvSpPr>
@@ -19467,7 +18731,7 @@
                 <a:ea typeface="Arial" pitchFamily="34" charset="-122"/>
                 <a:cs typeface="Arial" pitchFamily="34" charset="-120"/>
               </a:rPr>
-              <a:t>We bank 19 min, not the 10.1 the design allows — a conservative three-point estimate, not the best case.</a:t>
+              <a:t>We bank 19 min, not the 10.1 the design allows. Conservative three-point estimate, not the best case.</a:t>
             </a:r>
             <a:endParaRPr lang="en-US" sz="860" dirty="0"/>
           </a:p>
@@ -19509,7 +18773,7 @@
                 <a:ea typeface="Arial" pitchFamily="34" charset="-122"/>
                 <a:cs typeface="Arial" pitchFamily="34" charset="-120"/>
               </a:rPr>
-              <a:t>Basis: 20 claim handlers × 2.5 claims a day, confirmed by GGW (8 Sep 2026) — 52 min back, each, per day.</a:t>
+              <a:t>Basis: 20 claim handlers × 2.5 claims a day, confirmed by GGW (8 Sep 2026). 52 min back, each, per day.</a:t>
             </a:r>
             <a:endParaRPr lang="en-US" sz="860" dirty="0"/>
           </a:p>
@@ -20283,7 +19547,7 @@
                 <a:ea typeface="Arial" pitchFamily="34" charset="-122"/>
                 <a:cs typeface="Arial" pitchFamily="34" charset="-120"/>
               </a:rPr>
-              <a:t>The build is loaded team capacity, not new cash — the AI team is already funded.</a:t>
+              <a:t>The build is loaded team capacity, not new cash. The AI team is already funded.</a:t>
             </a:r>
             <a:endParaRPr lang="en-US" sz="860" dirty="0"/>
           </a:p>
@@ -21179,7 +20443,7 @@
                 <a:ea typeface="Arial" pitchFamily="34" charset="-122"/>
                 <a:cs typeface="Arial" pitchFamily="34" charset="-120"/>
               </a:rPr>
-              <a:t>10.  Upkeep after go-live — 15–20% of build effort a year — ours is 17%.  (Standard maintenance rule of thumb)</a:t>
+              <a:t>10.  Upkeep after go-live — 15–20% of build effort a year, ours is 17%.  (Standard maintenance rule of thumb)</a:t>
             </a:r>
             <a:endParaRPr lang="en-US" sz="1000" dirty="0"/>
           </a:p>
@@ -21488,7 +20752,7 @@
                 <a:ea typeface="Arial" pitchFamily="34" charset="-122"/>
                 <a:cs typeface="Arial" pitchFamily="34" charset="-120"/>
               </a:rPr>
-              <a:t>Still assumptions — not sourced, and the first thing we would test:</a:t>
+              <a:t>Still assumptions, not sourced. The first thing we would test:</a:t>
             </a:r>
             <a:endParaRPr lang="en-US" sz="1000" dirty="0"/>
           </a:p>

--- a/case-study/deck/GGW_FNOL_Redesign.pptx
+++ b/case-study/deck/GGW_FNOL_Redesign.pptx
@@ -1699,7 +1699,7 @@
                 <a:ea typeface="Cambria" pitchFamily="34" charset="-122"/>
                 <a:cs typeface="Cambria" pitchFamily="34" charset="-120"/>
               </a:rPr>
-              <a:t>Redesigning intake gives each of the 20 claim handlers back 52 minutes a day</a:t>
+              <a:t>Redesigning intake gives each claim handler back 52 minutes a day</a:t>
             </a:r>
             <a:endParaRPr lang="en-US" sz="1900" dirty="0"/>
           </a:p>
@@ -1738,7 +1738,7 @@
                 <a:ea typeface="Arial" pitchFamily="34" charset="-122"/>
                 <a:cs typeface="Arial" pitchFamily="34" charset="-120"/>
               </a:rPr>
-              <a:t>17.5 hours a day across the 20 of them, or 2.8 full-time people. Two thirds of that work goes to claims that were always going to close quietly.</a:t>
+              <a:t>17.5 hours a day across the 20 of them, or 2.8 full-time people. Most of it goes to the ~65% of claims that close at intake with no permanent injury.</a:t>
             </a:r>
             <a:endParaRPr lang="en-US" sz="1050" dirty="0"/>
           </a:p>
@@ -2243,7 +2243,7 @@
                 <a:ea typeface="Arial" pitchFamily="34" charset="-122"/>
                 <a:cs typeface="Arial" pitchFamily="34" charset="-120"/>
               </a:rPr>
-              <a:t>The same checks and the same exits, reordered</a:t>
+              <a:t>Every check and every exit kept, run in a new order</a:t>
             </a:r>
             <a:endParaRPr lang="en-US" sz="900" dirty="0"/>
           </a:p>
@@ -2355,7 +2355,7 @@
                 <a:ea typeface="Arial" pitchFamily="34" charset="-122"/>
                 <a:cs typeface="Arial" pitchFamily="34" charset="-120"/>
               </a:rPr>
-              <a:t>52% cut, not the 75% max</a:t>
+              <a:t>21 minutes back on every claim (a 52% cut)</a:t>
             </a:r>
             <a:endParaRPr lang="en-US" sz="860" dirty="0"/>
           </a:p>
@@ -3057,7 +3057,7 @@
                 <a:ea typeface="Arial" pitchFamily="34" charset="-122"/>
                 <a:cs typeface="Arial" pitchFamily="34" charset="-120"/>
               </a:rPr>
-              <a:t>Follows BCG's 10-20-70 rule, adjusted for this process</a:t>
+              <a:t>BCG's 10-20-70, tilted to plumbing: EASY and IDB are the constraint</a:t>
             </a:r>
             <a:endParaRPr lang="en-US" sz="740" dirty="0"/>
           </a:p>
@@ -3165,7 +3165,7 @@
                 <a:ea typeface="Arial" pitchFamily="34" charset="-122"/>
                 <a:cs typeface="Arial" pitchFamily="34" charset="-120"/>
               </a:rPr>
-              <a:t>freed per claim handler, every working day (of 6.4 productive hours)</a:t>
+              <a:t>freed per claim handler per day, out of 6.4 productive hours</a:t>
             </a:r>
             <a:endParaRPr lang="en-US" sz="840" dirty="0"/>
           </a:p>
@@ -3339,7 +3339,7 @@
                 <a:ea typeface="Cambria" pitchFamily="34" charset="-122"/>
                 <a:cs typeface="Cambria" pitchFamily="34" charset="-120"/>
               </a:rPr>
-              <a:t>€153k</a:t>
+              <a:t>€153k a year</a:t>
             </a:r>
             <a:endParaRPr lang="en-US" sz="2000" dirty="0"/>
           </a:p>
@@ -3381,7 +3381,7 @@
                 <a:ea typeface="Arial" pitchFamily="34" charset="-122"/>
                 <a:cs typeface="Arial" pitchFamily="34" charset="-120"/>
               </a:rPr>
-              <a:t>value of that capacity, per year</a:t>
+              <a:t>what the 4,370 freed handler-hours are worth, at €34.92 fully loaded</a:t>
             </a:r>
             <a:endParaRPr lang="en-US" sz="840" dirty="0"/>
           </a:p>
@@ -3504,93 +3504,7 @@
         <p:spPr>
           <a:xfrm>
             <a:off x="457200" y="5047488"/>
-            <a:ext cx="5623560" cy="585216"/>
-          </a:xfrm>
-          <a:prstGeom prst="roundRect">
-            <a:avLst>
-              <a:gd name="adj" fmla="val 9375"/>
-            </a:avLst>
-          </a:prstGeom>
-          <a:solidFill>
-            <a:srgbClr val="FFFFFF"/>
-          </a:solidFill>
-          <a:ln w="12700">
-            <a:solidFill>
-              <a:srgbClr val="D7DCE2"/>
-            </a:solidFill>
-            <a:prstDash val="solid"/>
-          </a:ln>
-        </p:spPr>
-      </p:sp>
-      <p:sp>
-        <p:nvSpPr>
-          <p:cNvPr id="59" name="Text 57"/>
-          <p:cNvSpPr txBox="1"/>
-          <p:nvPr/>
-        </p:nvSpPr>
-        <p:spPr>
-          <a:xfrm>
-            <a:off x="621792" y="5047488"/>
-            <a:ext cx="5303520" cy="585216"/>
-          </a:xfrm>
-          <a:prstGeom prst="rect">
-            <a:avLst/>
-          </a:prstGeom>
-          <a:noFill/>
-          <a:ln/>
-        </p:spPr>
-        <p:txBody>
-          <a:bodyPr wrap="square" lIns="0" tIns="0" rIns="0" bIns="0" rtlCol="0" anchor="ctr"/>
-          <a:lstStyle/>
-          <a:p>
-            <a:pPr indent="0" marL="0">
-              <a:lnSpc>
-                <a:spcPct val="118000"/>
-              </a:lnSpc>
-              <a:buNone/>
-            </a:pPr>
-            <a:r>
-              <a:rPr lang="en-US" sz="850" b="1" dirty="0">
-                <a:solidFill>
-                  <a:srgbClr val="BE185D"/>
-                </a:solidFill>
-                <a:latin typeface="Arial" pitchFamily="34" charset="0"/>
-                <a:ea typeface="Arial" pitchFamily="34" charset="-122"/>
-                <a:cs typeface="Arial" pitchFamily="34" charset="-120"/>
-              </a:rPr>
-              <a:t>“€153k” is capacity, not cash:  </a:t>
-            </a:r>
-            <a:pPr indent="0" marL="0">
-              <a:lnSpc>
-                <a:spcPct val="118000"/>
-              </a:lnSpc>
-              <a:buNone/>
-            </a:pPr>
-            <a:r>
-              <a:rPr lang="en-US" sz="850" dirty="0">
-                <a:solidFill>
-                  <a:srgbClr val="3A3A3A"/>
-                </a:solidFill>
-                <a:latin typeface="Arial" pitchFamily="34" charset="0"/>
-                <a:ea typeface="Arial" pitchFamily="34" charset="-122"/>
-                <a:cs typeface="Arial" pitchFamily="34" charset="-120"/>
-              </a:rPr>
-              <a:t>4,370 handler-hours a year at the loaded rate. It becomes money once those hours go to the backlog.</a:t>
-            </a:r>
-            <a:endParaRPr lang="en-US" sz="850" dirty="0"/>
-          </a:p>
-        </p:txBody>
-      </p:sp>
-      <p:sp>
-        <p:nvSpPr>
-          <p:cNvPr id="60" name="Shape 58"/>
-          <p:cNvSpPr/>
-          <p:nvPr/>
-        </p:nvSpPr>
-        <p:spPr>
-          <a:xfrm>
-            <a:off x="6263640" y="5047488"/>
-            <a:ext cx="5468112" cy="585216"/>
+            <a:ext cx="11274552" cy="585216"/>
           </a:xfrm>
           <a:prstGeom prst="roundRect">
             <a:avLst>
@@ -3610,14 +3524,14 @@
       </p:sp>
       <p:sp>
         <p:nvSpPr>
-          <p:cNvPr id="61" name="Text 59"/>
-          <p:cNvSpPr txBox="1"/>
-          <p:nvPr/>
-        </p:nvSpPr>
-        <p:spPr>
-          <a:xfrm>
-            <a:off x="6428232" y="5047488"/>
-            <a:ext cx="5138928" cy="585216"/>
+          <p:cNvPr id="59" name="Text 57"/>
+          <p:cNvSpPr txBox="1"/>
+          <p:nvPr/>
+        </p:nvSpPr>
+        <p:spPr>
+          <a:xfrm>
+            <a:off x="658368" y="5047488"/>
+            <a:ext cx="10881360" cy="585216"/>
           </a:xfrm>
           <a:prstGeom prst="rect">
             <a:avLst/>
@@ -3636,7 +3550,7 @@
               <a:buNone/>
             </a:pPr>
             <a:r>
-              <a:rPr lang="en-US" sz="850" b="1" dirty="0">
+              <a:rPr lang="en-US" sz="950" b="1" dirty="0">
                 <a:solidFill>
                   <a:srgbClr val="BE185D"/>
                 </a:solidFill>
@@ -3644,7 +3558,7 @@
                 <a:ea typeface="Arial" pitchFamily="34" charset="-122"/>
                 <a:cs typeface="Arial" pitchFamily="34" charset="-120"/>
               </a:rPr>
-              <a:t>So what:  </a:t>
+              <a:t>Recommendation:  </a:t>
             </a:r>
             <a:pPr indent="0" marL="0">
               <a:lnSpc>
@@ -3653,7 +3567,7 @@
               <a:buNone/>
             </a:pPr>
             <a:r>
-              <a:rPr lang="en-US" sz="850" dirty="0">
+              <a:rPr lang="en-US" sz="950" dirty="0">
                 <a:solidFill>
                   <a:srgbClr val="3A2A32"/>
                 </a:solidFill>
@@ -3661,15 +3575,15 @@
                 <a:ea typeface="Arial" pitchFamily="34" charset="-122"/>
                 <a:cs typeface="Arial" pitchFamily="34" charset="-120"/>
               </a:rPr>
-              <a:t>cost isn't the decision. Value covers it several times over. Governance is: a person reviews every call that can go against a claimant.</a:t>
-            </a:r>
-            <a:endParaRPr lang="en-US" sz="850" dirty="0"/>
-          </a:p>
-        </p:txBody>
-      </p:sp>
-      <p:sp>
-        <p:nvSpPr>
-          <p:cNvPr id="62" name="Text 60"/>
+              <a:t>start with the failed imports nobody sees today, then intake. A person approves every decision that can go against a claimant, at every stage.</a:t>
+            </a:r>
+            <a:endParaRPr lang="en-US" sz="950" dirty="0"/>
+          </a:p>
+        </p:txBody>
+      </p:sp>
+      <p:sp>
+        <p:nvSpPr>
+          <p:cNvPr id="60" name="Text 58"/>
           <p:cNvSpPr txBox="1"/>
           <p:nvPr/>
         </p:nvSpPr>
@@ -3708,7 +3622,7 @@
       </p:sp>
       <p:sp>
         <p:nvSpPr>
-          <p:cNvPr id="63" name="Text 61"/>
+          <p:cNvPr id="61" name="Text 59"/>
           <p:cNvSpPr txBox="1"/>
           <p:nvPr/>
         </p:nvSpPr>
@@ -11128,7 +11042,7 @@
                 <a:ea typeface="Arial" pitchFamily="34" charset="-122"/>
                 <a:cs typeface="Arial" pitchFamily="34" charset="-120"/>
               </a:rPr>
-              <a:t>Yes, ~65% (likely more)</a:t>
+              <a:t>Yes, ~65%</a:t>
             </a:r>
             <a:endParaRPr lang="en-US" sz="800" dirty="0"/>
           </a:p>
@@ -13256,7 +13170,7 @@
                 <a:ea typeface="Arial" pitchFamily="34" charset="-122"/>
                 <a:cs typeface="Arial" pitchFamily="34" charset="-120"/>
               </a:rPr>
-              <a:t>~2 claims ever · a checklist beats a model</a:t>
+              <a:t>~2 claims so far (GGW) · a checklist beats a model</a:t>
             </a:r>
             <a:endParaRPr lang="en-US" sz="920" dirty="0"/>
           </a:p>
@@ -14186,7 +14100,7 @@
                 <a:ea typeface="Arial" pitchFamily="34" charset="-122"/>
                 <a:cs typeface="Arial" pitchFamily="34" charset="-120"/>
               </a:rPr>
-              <a:t>20/hour ≠ 1/day</a:t>
+              <a:t>a spike matters, a trickle does not</a:t>
             </a:r>
             <a:endParaRPr lang="en-US" sz="760" dirty="0"/>
           </a:p>
@@ -18731,7 +18645,7 @@
                 <a:ea typeface="Arial" pitchFamily="34" charset="-122"/>
                 <a:cs typeface="Arial" pitchFamily="34" charset="-120"/>
               </a:rPr>
-              <a:t>We bank 19 min, not the 10.1 the design allows. Conservative three-point estimate, not the best case.</a:t>
+              <a:t>We bank 19 min, not the 10.1 the design allows: the business case runs on a three-point estimate of best, likely and worst case.</a:t>
             </a:r>
             <a:endParaRPr lang="en-US" sz="860" dirty="0"/>
           </a:p>

--- a/case-study/deck/GGW_FNOL_Redesign.pptx
+++ b/case-study/deck/GGW_FNOL_Redesign.pptx
@@ -14,9 +14,11 @@
     <p:sldId id="262" r:id="rId8"/>
     <p:sldId id="263" r:id="rId9"/>
     <p:sldId id="264" r:id="rId10"/>
+    <p:sldId id="265" r:id="rId11"/>
+    <p:sldId id="266" r:id="rId12"/>
   </p:sldIdLst>
   <p:notesMasterIdLst>
-    <p:notesMasterId r:id="rId11"/>
+    <p:notesMasterId r:id="rId13"/>
   </p:notesMasterIdLst>
   <p:sldSz cx="12192000" cy="6858000"/>
   <p:notesSz cx="6858000" cy="12192000"/>
@@ -534,6 +536,182 @@
             <a:fld id="{F7021451-1387-4CA6-816F-3879F97B5CBC}" type="slidenum">
               <a:rPr lang="en-US"/>
               <a:t>1</a:t>
+            </a:fld>
+            <a:endParaRPr lang="en-US"/>
+          </a:p>
+        </p:txBody>
+      </p:sp>
+    </p:spTree>
+    <p:extLst>
+      <p:ext uri="{BB962C8B-B14F-4D97-AF65-F5344CB8AC3E}">
+        <p14:creationId xmlns:p14="http://schemas.microsoft.com/office/powerpoint/2010/main" val="1024086991"/>
+      </p:ext>
+    </p:extLst>
+  </p:cSld>
+  <p:clrMapOvr>
+    <a:masterClrMapping/>
+  </p:clrMapOvr>
+</p:notes>
+</file>
+
+<file path=ppt/notesSlides/notesSlide10.xml><?xml version="1.0" encoding="utf-8"?>
+<p:notes xmlns:a="http://schemas.openxmlformats.org/drawingml/2006/main" xmlns:r="http://schemas.openxmlformats.org/officeDocument/2006/relationships" xmlns:p="http://schemas.openxmlformats.org/presentationml/2006/main">
+  <p:cSld>
+    <p:spTree>
+      <p:nvGrpSpPr>
+        <p:cNvPr id="1" name=""/>
+        <p:cNvGrpSpPr/>
+        <p:nvPr/>
+      </p:nvGrpSpPr>
+      <p:grpSpPr>
+        <a:xfrm>
+          <a:off x="0" y="0"/>
+          <a:ext cx="0" cy="0"/>
+          <a:chOff x="0" y="0"/>
+          <a:chExt cx="0" cy="0"/>
+        </a:xfrm>
+      </p:grpSpPr>
+      <p:sp>
+        <p:nvSpPr>
+          <p:cNvPr id="2" name="Slide Image Placeholder 1"/>
+          <p:cNvSpPr>
+            <a:spLocks noGrp="1" noRot="1" noChangeAspect="1"/>
+          </p:cNvSpPr>
+          <p:nvPr>
+            <p:ph type="sldImg"/>
+          </p:nvPr>
+        </p:nvSpPr>
+        <p:spPr/>
+      </p:sp>
+      <p:sp>
+        <p:nvSpPr>
+          <p:cNvPr id="3" name="Notes Placeholder 2"/>
+          <p:cNvSpPr>
+            <a:spLocks noGrp="1"/>
+          </p:cNvSpPr>
+          <p:nvPr>
+            <p:ph type="body" idx="1"/>
+          </p:nvPr>
+        </p:nvSpPr>
+        <p:spPr/>
+        <p:txBody>
+          <a:bodyPr/>
+          <a:lstStyle/>
+          <a:p>
+            <a:r>
+              <a:rPr lang="en-US" dirty="0"/>
+              <a:t/>
+            </a:r>
+            <a:endParaRPr lang="en-US" dirty="0"/>
+          </a:p>
+        </p:txBody>
+      </p:sp>
+      <p:sp>
+        <p:nvSpPr>
+          <p:cNvPr id="4" name="Slide Number Placeholder 3"/>
+          <p:cNvSpPr>
+            <a:spLocks noGrp="1"/>
+          </p:cNvSpPr>
+          <p:nvPr>
+            <p:ph type="sldNum" sz="quarter" idx="10"/>
+          </p:nvPr>
+        </p:nvSpPr>
+        <p:spPr/>
+        <p:txBody>
+          <a:bodyPr/>
+          <a:lstStyle/>
+          <a:p>
+            <a:fld id="{F7021451-1387-4CA6-816F-3879F97B5CBC}" type="slidenum">
+              <a:rPr lang="en-US"/>
+              <a:t>10</a:t>
+            </a:fld>
+            <a:endParaRPr lang="en-US"/>
+          </a:p>
+        </p:txBody>
+      </p:sp>
+    </p:spTree>
+    <p:extLst>
+      <p:ext uri="{BB962C8B-B14F-4D97-AF65-F5344CB8AC3E}">
+        <p14:creationId xmlns:p14="http://schemas.microsoft.com/office/powerpoint/2010/main" val="1024086991"/>
+      </p:ext>
+    </p:extLst>
+  </p:cSld>
+  <p:clrMapOvr>
+    <a:masterClrMapping/>
+  </p:clrMapOvr>
+</p:notes>
+</file>
+
+<file path=ppt/notesSlides/notesSlide11.xml><?xml version="1.0" encoding="utf-8"?>
+<p:notes xmlns:a="http://schemas.openxmlformats.org/drawingml/2006/main" xmlns:r="http://schemas.openxmlformats.org/officeDocument/2006/relationships" xmlns:p="http://schemas.openxmlformats.org/presentationml/2006/main">
+  <p:cSld>
+    <p:spTree>
+      <p:nvGrpSpPr>
+        <p:cNvPr id="1" name=""/>
+        <p:cNvGrpSpPr/>
+        <p:nvPr/>
+      </p:nvGrpSpPr>
+      <p:grpSpPr>
+        <a:xfrm>
+          <a:off x="0" y="0"/>
+          <a:ext cx="0" cy="0"/>
+          <a:chOff x="0" y="0"/>
+          <a:chExt cx="0" cy="0"/>
+        </a:xfrm>
+      </p:grpSpPr>
+      <p:sp>
+        <p:nvSpPr>
+          <p:cNvPr id="2" name="Slide Image Placeholder 1"/>
+          <p:cNvSpPr>
+            <a:spLocks noGrp="1" noRot="1" noChangeAspect="1"/>
+          </p:cNvSpPr>
+          <p:nvPr>
+            <p:ph type="sldImg"/>
+          </p:nvPr>
+        </p:nvSpPr>
+        <p:spPr/>
+      </p:sp>
+      <p:sp>
+        <p:nvSpPr>
+          <p:cNvPr id="3" name="Notes Placeholder 2"/>
+          <p:cNvSpPr>
+            <a:spLocks noGrp="1"/>
+          </p:cNvSpPr>
+          <p:nvPr>
+            <p:ph type="body" idx="1"/>
+          </p:nvPr>
+        </p:nvSpPr>
+        <p:spPr/>
+        <p:txBody>
+          <a:bodyPr/>
+          <a:lstStyle/>
+          <a:p>
+            <a:r>
+              <a:rPr lang="en-US" dirty="0"/>
+              <a:t/>
+            </a:r>
+            <a:endParaRPr lang="en-US" dirty="0"/>
+          </a:p>
+        </p:txBody>
+      </p:sp>
+      <p:sp>
+        <p:nvSpPr>
+          <p:cNvPr id="4" name="Slide Number Placeholder 3"/>
+          <p:cNvSpPr>
+            <a:spLocks noGrp="1"/>
+          </p:cNvSpPr>
+          <p:nvPr>
+            <p:ph type="sldNum" sz="quarter" idx="10"/>
+          </p:nvPr>
+        </p:nvSpPr>
+        <p:spPr/>
+        <p:txBody>
+          <a:bodyPr/>
+          <a:lstStyle/>
+          <a:p>
+            <a:fld id="{F7021451-1387-4CA6-816F-3879F97B5CBC}" type="slidenum">
+              <a:rPr lang="en-US"/>
+              <a:t>11</a:t>
             </a:fld>
             <a:endParaRPr lang="en-US"/>
           </a:p>
@@ -3656,6 +3834,6257 @@
               <a:t>1 / 9</a:t>
             </a:r>
             <a:endParaRPr lang="en-US" sz="800" dirty="0"/>
+          </a:p>
+        </p:txBody>
+      </p:sp>
+    </p:spTree>
+  </p:cSld>
+  <p:clrMapOvr>
+    <a:masterClrMapping/>
+  </p:clrMapOvr>
+</p:sld>
+</file>
+
+<file path=ppt/slides/slide10.xml><?xml version="1.0" encoding="utf-8"?>
+<p:sld xmlns:a="http://schemas.openxmlformats.org/drawingml/2006/main" xmlns:r="http://schemas.openxmlformats.org/officeDocument/2006/relationships" xmlns:p="http://schemas.openxmlformats.org/presentationml/2006/main" show="0">
+  <p:cSld name="Slide 10">
+    <p:bg>
+      <p:bgPr>
+        <a:solidFill>
+          <a:srgbClr val="FFFFFF"/>
+        </a:solidFill>
+      </p:bgPr>
+    </p:bg>
+    <p:spTree>
+      <p:nvGrpSpPr>
+        <p:cNvPr id="1" name=""/>
+        <p:cNvGrpSpPr/>
+        <p:nvPr/>
+      </p:nvGrpSpPr>
+      <p:grpSpPr>
+        <a:xfrm>
+          <a:off x="0" y="0"/>
+          <a:ext cx="0" cy="0"/>
+          <a:chOff x="0" y="0"/>
+          <a:chExt cx="0" cy="0"/>
+        </a:xfrm>
+      </p:grpSpPr>
+      <p:sp>
+        <p:nvSpPr>
+          <p:cNvPr id="2" name="Text 0"/>
+          <p:cNvSpPr txBox="1"/>
+          <p:nvPr/>
+        </p:nvSpPr>
+        <p:spPr>
+          <a:xfrm>
+            <a:off x="365760" y="256032"/>
+            <a:ext cx="10789920" cy="365760"/>
+          </a:xfrm>
+          <a:prstGeom prst="rect">
+            <a:avLst/>
+          </a:prstGeom>
+          <a:noFill/>
+          <a:ln/>
+        </p:spPr>
+        <p:txBody>
+          <a:bodyPr wrap="square" lIns="0" tIns="0" rIns="0" bIns="0" rtlCol="0" anchor="ctr"/>
+          <a:lstStyle/>
+          <a:p>
+            <a:pPr indent="0" marL="0">
+              <a:buNone/>
+            </a:pPr>
+            <a:r>
+              <a:rPr lang="en-US" sz="1600" b="1" dirty="0">
+                <a:solidFill>
+                  <a:srgbClr val="1B2430"/>
+                </a:solidFill>
+                <a:latin typeface="Cambria" pitchFamily="34" charset="0"/>
+                <a:ea typeface="Cambria" pitchFamily="34" charset="-122"/>
+                <a:cs typeface="Cambria" pitchFamily="34" charset="-120"/>
+              </a:rPr>
+              <a:t>Validation is a function, not an agent: three lookups in parallel, no model call</a:t>
+            </a:r>
+            <a:endParaRPr lang="en-US" sz="1600" dirty="0"/>
+          </a:p>
+        </p:txBody>
+      </p:sp>
+      <p:sp>
+        <p:nvSpPr>
+          <p:cNvPr id="3" name="Text 1"/>
+          <p:cNvSpPr txBox="1"/>
+          <p:nvPr/>
+        </p:nvSpPr>
+        <p:spPr>
+          <a:xfrm>
+            <a:off x="9966960" y="146304"/>
+            <a:ext cx="1856232" cy="219456"/>
+          </a:xfrm>
+          <a:prstGeom prst="rect">
+            <a:avLst/>
+          </a:prstGeom>
+          <a:noFill/>
+          <a:ln/>
+        </p:spPr>
+        <p:txBody>
+          <a:bodyPr wrap="square" lIns="0" tIns="0" rIns="0" bIns="0" rtlCol="0" anchor="ctr"/>
+          <a:lstStyle/>
+          <a:p>
+            <a:pPr algn="r" indent="0" marL="0">
+              <a:buNone/>
+            </a:pPr>
+            <a:r>
+              <a:rPr lang="en-US" sz="850" b="1" spc="120" kern="0" dirty="0">
+                <a:solidFill>
+                  <a:srgbClr val="5B6472"/>
+                </a:solidFill>
+                <a:latin typeface="Arial" pitchFamily="34" charset="0"/>
+                <a:ea typeface="Arial" pitchFamily="34" charset="-122"/>
+                <a:cs typeface="Arial" pitchFamily="34" charset="-120"/>
+              </a:rPr>
+              <a:t>BACKUP · IF ASKED</a:t>
+            </a:r>
+            <a:endParaRPr lang="en-US" sz="850" dirty="0"/>
+          </a:p>
+        </p:txBody>
+      </p:sp>
+      <p:sp>
+        <p:nvSpPr>
+          <p:cNvPr id="4" name="Text 2"/>
+          <p:cNvSpPr txBox="1"/>
+          <p:nvPr/>
+        </p:nvSpPr>
+        <p:spPr>
+          <a:xfrm>
+            <a:off x="365760" y="621792"/>
+            <a:ext cx="10789920" cy="237744"/>
+          </a:xfrm>
+          <a:prstGeom prst="rect">
+            <a:avLst/>
+          </a:prstGeom>
+          <a:noFill/>
+          <a:ln/>
+        </p:spPr>
+        <p:txBody>
+          <a:bodyPr wrap="square" lIns="0" tIns="0" rIns="0" bIns="0" rtlCol="0" anchor="ctr"/>
+          <a:lstStyle/>
+          <a:p>
+            <a:pPr indent="0" marL="0">
+              <a:buNone/>
+            </a:pPr>
+            <a:r>
+              <a:rPr lang="en-US" sz="1050" dirty="0">
+                <a:solidFill>
+                  <a:srgbClr val="5B6472"/>
+                </a:solidFill>
+                <a:latin typeface="Arial" pitchFamily="34" charset="0"/>
+                <a:ea typeface="Arial" pitchFamily="34" charset="-122"/>
+                <a:cs typeface="Arial" pitchFamily="34" charset="-120"/>
+              </a:rPr>
+              <a:t>A LangGraph node: typed state in, a partial state update out</a:t>
+            </a:r>
+            <a:endParaRPr lang="en-US" sz="1050" dirty="0"/>
+          </a:p>
+        </p:txBody>
+      </p:sp>
+      <p:sp>
+        <p:nvSpPr>
+          <p:cNvPr id="5" name="Shape 3"/>
+          <p:cNvSpPr/>
+          <p:nvPr/>
+        </p:nvSpPr>
+        <p:spPr>
+          <a:xfrm>
+            <a:off x="365760" y="1005840"/>
+            <a:ext cx="6949440" cy="4160520"/>
+          </a:xfrm>
+          <a:prstGeom prst="roundRect">
+            <a:avLst>
+              <a:gd name="adj" fmla="val 1319"/>
+            </a:avLst>
+          </a:prstGeom>
+          <a:solidFill>
+            <a:srgbClr val="1E1E1E"/>
+          </a:solidFill>
+          <a:ln/>
+        </p:spPr>
+      </p:sp>
+      <p:sp>
+        <p:nvSpPr>
+          <p:cNvPr id="6" name="Text 4"/>
+          <p:cNvSpPr txBox="1"/>
+          <p:nvPr/>
+        </p:nvSpPr>
+        <p:spPr>
+          <a:xfrm>
+            <a:off x="566928" y="1170432"/>
+            <a:ext cx="6547104" cy="3831336"/>
+          </a:xfrm>
+          <a:prstGeom prst="rect">
+            <a:avLst/>
+          </a:prstGeom>
+          <a:noFill/>
+          <a:ln/>
+        </p:spPr>
+        <p:txBody>
+          <a:bodyPr wrap="square" lIns="0" tIns="0" rIns="0" bIns="0" rtlCol="0" anchor="ctr"/>
+          <a:lstStyle/>
+          <a:p>
+            <a:pPr indent="0" marL="0">
+              <a:lnSpc>
+                <a:spcPct val="118000"/>
+              </a:lnSpc>
+              <a:buNone/>
+            </a:pPr>
+            <a:r>
+              <a:rPr lang="en-US" sz="1050" dirty="0">
+                <a:solidFill>
+                  <a:srgbClr val="C586C0"/>
+                </a:solidFill>
+                <a:latin typeface="Consolas" pitchFamily="34" charset="0"/>
+                <a:ea typeface="Consolas" pitchFamily="34" charset="-122"/>
+                <a:cs typeface="Consolas" pitchFamily="34" charset="-120"/>
+              </a:rPr>
+              <a:t>class</a:t>
+            </a:r>
+            <a:pPr indent="0" marL="0">
+              <a:lnSpc>
+                <a:spcPct val="118000"/>
+              </a:lnSpc>
+              <a:buNone/>
+            </a:pPr>
+            <a:r>
+              <a:rPr lang="en-US" sz="1050" dirty="0">
+                <a:solidFill>
+                  <a:srgbClr val="D4D4D4"/>
+                </a:solidFill>
+                <a:latin typeface="Consolas" pitchFamily="34" charset="0"/>
+                <a:ea typeface="Consolas" pitchFamily="34" charset="-122"/>
+                <a:cs typeface="Consolas" pitchFamily="34" charset="-120"/>
+              </a:rPr>
+              <a:t> </a:t>
+            </a:r>
+            <a:pPr indent="0" marL="0">
+              <a:lnSpc>
+                <a:spcPct val="118000"/>
+              </a:lnSpc>
+              <a:buNone/>
+            </a:pPr>
+            <a:r>
+              <a:rPr lang="en-US" sz="1050" dirty="0">
+                <a:solidFill>
+                  <a:srgbClr val="4EC9B0"/>
+                </a:solidFill>
+                <a:latin typeface="Consolas" pitchFamily="34" charset="0"/>
+                <a:ea typeface="Consolas" pitchFamily="34" charset="-122"/>
+                <a:cs typeface="Consolas" pitchFamily="34" charset="-120"/>
+              </a:rPr>
+              <a:t>ClaimState</a:t>
+            </a:r>
+            <a:pPr indent="0" marL="0">
+              <a:lnSpc>
+                <a:spcPct val="118000"/>
+              </a:lnSpc>
+              <a:buNone/>
+            </a:pPr>
+            <a:r>
+              <a:rPr lang="en-US" sz="1050" dirty="0">
+                <a:solidFill>
+                  <a:srgbClr val="D4D4D4"/>
+                </a:solidFill>
+                <a:latin typeface="Consolas" pitchFamily="34" charset="0"/>
+                <a:ea typeface="Consolas" pitchFamily="34" charset="-122"/>
+                <a:cs typeface="Consolas" pitchFamily="34" charset="-120"/>
+              </a:rPr>
+              <a:t>(</a:t>
+            </a:r>
+            <a:pPr indent="0" marL="0">
+              <a:lnSpc>
+                <a:spcPct val="118000"/>
+              </a:lnSpc>
+              <a:buNone/>
+            </a:pPr>
+            <a:r>
+              <a:rPr lang="en-US" sz="1050" dirty="0">
+                <a:solidFill>
+                  <a:srgbClr val="4EC9B0"/>
+                </a:solidFill>
+                <a:latin typeface="Consolas" pitchFamily="34" charset="0"/>
+                <a:ea typeface="Consolas" pitchFamily="34" charset="-122"/>
+                <a:cs typeface="Consolas" pitchFamily="34" charset="-120"/>
+              </a:rPr>
+              <a:t>BaseModel</a:t>
+            </a:r>
+            <a:pPr indent="0" marL="0">
+              <a:lnSpc>
+                <a:spcPct val="118000"/>
+              </a:lnSpc>
+              <a:buNone/>
+            </a:pPr>
+            <a:r>
+              <a:rPr lang="en-US" sz="1050" dirty="0">
+                <a:solidFill>
+                  <a:srgbClr val="D4D4D4"/>
+                </a:solidFill>
+                <a:latin typeface="Consolas" pitchFamily="34" charset="0"/>
+                <a:ea typeface="Consolas" pitchFamily="34" charset="-122"/>
+                <a:cs typeface="Consolas" pitchFamily="34" charset="-120"/>
+              </a:rPr>
+              <a:t>)</a:t>
+            </a:r>
+            <a:pPr indent="0" marL="0">
+              <a:lnSpc>
+                <a:spcPct val="118000"/>
+              </a:lnSpc>
+              <a:buNone/>
+            </a:pPr>
+            <a:r>
+              <a:rPr lang="en-US" sz="1050" dirty="0">
+                <a:solidFill>
+                  <a:srgbClr val="D4D4D4"/>
+                </a:solidFill>
+                <a:latin typeface="Consolas" pitchFamily="34" charset="0"/>
+                <a:ea typeface="Consolas" pitchFamily="34" charset="-122"/>
+                <a:cs typeface="Consolas" pitchFamily="34" charset="-120"/>
+              </a:rPr>
+              <a:t>:
+</a:t>
+            </a:r>
+            <a:pPr indent="0" marL="0">
+              <a:lnSpc>
+                <a:spcPct val="118000"/>
+              </a:lnSpc>
+              <a:buNone/>
+            </a:pPr>
+            <a:r>
+              <a:rPr lang="en-US" sz="1050" dirty="0">
+                <a:solidFill>
+                  <a:srgbClr val="D4D4D4"/>
+                </a:solidFill>
+                <a:latin typeface="Consolas" pitchFamily="34" charset="0"/>
+                <a:ea typeface="Consolas" pitchFamily="34" charset="-122"/>
+                <a:cs typeface="Consolas" pitchFamily="34" charset="-120"/>
+              </a:rPr>
+              <a:t>    </a:t>
+            </a:r>
+            <a:pPr indent="0" marL="0">
+              <a:lnSpc>
+                <a:spcPct val="118000"/>
+              </a:lnSpc>
+              <a:buNone/>
+            </a:pPr>
+            <a:r>
+              <a:rPr lang="en-US" sz="1050" dirty="0">
+                <a:solidFill>
+                  <a:srgbClr val="D4D4D4"/>
+                </a:solidFill>
+                <a:latin typeface="Consolas" pitchFamily="34" charset="0"/>
+                <a:ea typeface="Consolas" pitchFamily="34" charset="-122"/>
+                <a:cs typeface="Consolas" pitchFamily="34" charset="-120"/>
+              </a:rPr>
+              <a:t>cpr</a:t>
+            </a:r>
+            <a:pPr indent="0" marL="0">
+              <a:lnSpc>
+                <a:spcPct val="118000"/>
+              </a:lnSpc>
+              <a:buNone/>
+            </a:pPr>
+            <a:r>
+              <a:rPr lang="en-US" sz="1050" dirty="0">
+                <a:solidFill>
+                  <a:srgbClr val="D4D4D4"/>
+                </a:solidFill>
+                <a:latin typeface="Consolas" pitchFamily="34" charset="0"/>
+                <a:ea typeface="Consolas" pitchFamily="34" charset="-122"/>
+                <a:cs typeface="Consolas" pitchFamily="34" charset="-120"/>
+              </a:rPr>
+              <a:t>:</a:t>
+            </a:r>
+            <a:pPr indent="0" marL="0">
+              <a:lnSpc>
+                <a:spcPct val="118000"/>
+              </a:lnSpc>
+              <a:buNone/>
+            </a:pPr>
+            <a:r>
+              <a:rPr lang="en-US" sz="1050" dirty="0">
+                <a:solidFill>
+                  <a:srgbClr val="D4D4D4"/>
+                </a:solidFill>
+                <a:latin typeface="Consolas" pitchFamily="34" charset="0"/>
+                <a:ea typeface="Consolas" pitchFamily="34" charset="-122"/>
+                <a:cs typeface="Consolas" pitchFamily="34" charset="-120"/>
+              </a:rPr>
+              <a:t> </a:t>
+            </a:r>
+            <a:pPr indent="0" marL="0">
+              <a:lnSpc>
+                <a:spcPct val="118000"/>
+              </a:lnSpc>
+              <a:buNone/>
+            </a:pPr>
+            <a:r>
+              <a:rPr lang="en-US" sz="1050" dirty="0">
+                <a:solidFill>
+                  <a:srgbClr val="4EC9B0"/>
+                </a:solidFill>
+                <a:latin typeface="Consolas" pitchFamily="34" charset="0"/>
+                <a:ea typeface="Consolas" pitchFamily="34" charset="-122"/>
+                <a:cs typeface="Consolas" pitchFamily="34" charset="-120"/>
+              </a:rPr>
+              <a:t>str
+</a:t>
+            </a:r>
+            <a:pPr indent="0" marL="0">
+              <a:lnSpc>
+                <a:spcPct val="118000"/>
+              </a:lnSpc>
+              <a:buNone/>
+            </a:pPr>
+            <a:r>
+              <a:rPr lang="en-US" sz="1050" dirty="0">
+                <a:solidFill>
+                  <a:srgbClr val="D4D4D4"/>
+                </a:solidFill>
+                <a:latin typeface="Consolas" pitchFamily="34" charset="0"/>
+                <a:ea typeface="Consolas" pitchFamily="34" charset="-122"/>
+                <a:cs typeface="Consolas" pitchFamily="34" charset="-120"/>
+              </a:rPr>
+              <a:t>    </a:t>
+            </a:r>
+            <a:pPr indent="0" marL="0">
+              <a:lnSpc>
+                <a:spcPct val="118000"/>
+              </a:lnSpc>
+              <a:buNone/>
+            </a:pPr>
+            <a:r>
+              <a:rPr lang="en-US" sz="1050" dirty="0">
+                <a:solidFill>
+                  <a:srgbClr val="D4D4D4"/>
+                </a:solidFill>
+                <a:latin typeface="Consolas" pitchFamily="34" charset="0"/>
+                <a:ea typeface="Consolas" pitchFamily="34" charset="-122"/>
+                <a:cs typeface="Consolas" pitchFamily="34" charset="-120"/>
+              </a:rPr>
+              <a:t>policy_id</a:t>
+            </a:r>
+            <a:pPr indent="0" marL="0">
+              <a:lnSpc>
+                <a:spcPct val="118000"/>
+              </a:lnSpc>
+              <a:buNone/>
+            </a:pPr>
+            <a:r>
+              <a:rPr lang="en-US" sz="1050" dirty="0">
+                <a:solidFill>
+                  <a:srgbClr val="D4D4D4"/>
+                </a:solidFill>
+                <a:latin typeface="Consolas" pitchFamily="34" charset="0"/>
+                <a:ea typeface="Consolas" pitchFamily="34" charset="-122"/>
+                <a:cs typeface="Consolas" pitchFamily="34" charset="-120"/>
+              </a:rPr>
+              <a:t>:</a:t>
+            </a:r>
+            <a:pPr indent="0" marL="0">
+              <a:lnSpc>
+                <a:spcPct val="118000"/>
+              </a:lnSpc>
+              <a:buNone/>
+            </a:pPr>
+            <a:r>
+              <a:rPr lang="en-US" sz="1050" dirty="0">
+                <a:solidFill>
+                  <a:srgbClr val="D4D4D4"/>
+                </a:solidFill>
+                <a:latin typeface="Consolas" pitchFamily="34" charset="0"/>
+                <a:ea typeface="Consolas" pitchFamily="34" charset="-122"/>
+                <a:cs typeface="Consolas" pitchFamily="34" charset="-120"/>
+              </a:rPr>
+              <a:t> </a:t>
+            </a:r>
+            <a:pPr indent="0" marL="0">
+              <a:lnSpc>
+                <a:spcPct val="118000"/>
+              </a:lnSpc>
+              <a:buNone/>
+            </a:pPr>
+            <a:r>
+              <a:rPr lang="en-US" sz="1050" dirty="0">
+                <a:solidFill>
+                  <a:srgbClr val="4EC9B0"/>
+                </a:solidFill>
+                <a:latin typeface="Consolas" pitchFamily="34" charset="0"/>
+                <a:ea typeface="Consolas" pitchFamily="34" charset="-122"/>
+                <a:cs typeface="Consolas" pitchFamily="34" charset="-120"/>
+              </a:rPr>
+              <a:t>str
+</a:t>
+            </a:r>
+            <a:pPr indent="0" marL="0">
+              <a:lnSpc>
+                <a:spcPct val="118000"/>
+              </a:lnSpc>
+              <a:buNone/>
+            </a:pPr>
+            <a:r>
+              <a:rPr lang="en-US" sz="1050" dirty="0">
+                <a:solidFill>
+                  <a:srgbClr val="D4D4D4"/>
+                </a:solidFill>
+                <a:latin typeface="Consolas" pitchFamily="34" charset="0"/>
+                <a:ea typeface="Consolas" pitchFamily="34" charset="-122"/>
+                <a:cs typeface="Consolas" pitchFamily="34" charset="-120"/>
+              </a:rPr>
+              <a:t>    </a:t>
+            </a:r>
+            <a:pPr indent="0" marL="0">
+              <a:lnSpc>
+                <a:spcPct val="118000"/>
+              </a:lnSpc>
+              <a:buNone/>
+            </a:pPr>
+            <a:r>
+              <a:rPr lang="en-US" sz="1050" dirty="0">
+                <a:solidFill>
+                  <a:srgbClr val="D4D4D4"/>
+                </a:solidFill>
+                <a:latin typeface="Consolas" pitchFamily="34" charset="0"/>
+                <a:ea typeface="Consolas" pitchFamily="34" charset="-122"/>
+                <a:cs typeface="Consolas" pitchFamily="34" charset="-120"/>
+              </a:rPr>
+              <a:t>incident_date</a:t>
+            </a:r>
+            <a:pPr indent="0" marL="0">
+              <a:lnSpc>
+                <a:spcPct val="118000"/>
+              </a:lnSpc>
+              <a:buNone/>
+            </a:pPr>
+            <a:r>
+              <a:rPr lang="en-US" sz="1050" dirty="0">
+                <a:solidFill>
+                  <a:srgbClr val="D4D4D4"/>
+                </a:solidFill>
+                <a:latin typeface="Consolas" pitchFamily="34" charset="0"/>
+                <a:ea typeface="Consolas" pitchFamily="34" charset="-122"/>
+                <a:cs typeface="Consolas" pitchFamily="34" charset="-120"/>
+              </a:rPr>
+              <a:t>:</a:t>
+            </a:r>
+            <a:pPr indent="0" marL="0">
+              <a:lnSpc>
+                <a:spcPct val="118000"/>
+              </a:lnSpc>
+              <a:buNone/>
+            </a:pPr>
+            <a:r>
+              <a:rPr lang="en-US" sz="1050" dirty="0">
+                <a:solidFill>
+                  <a:srgbClr val="D4D4D4"/>
+                </a:solidFill>
+                <a:latin typeface="Consolas" pitchFamily="34" charset="0"/>
+                <a:ea typeface="Consolas" pitchFamily="34" charset="-122"/>
+                <a:cs typeface="Consolas" pitchFamily="34" charset="-120"/>
+              </a:rPr>
+              <a:t> </a:t>
+            </a:r>
+            <a:pPr indent="0" marL="0">
+              <a:lnSpc>
+                <a:spcPct val="118000"/>
+              </a:lnSpc>
+              <a:buNone/>
+            </a:pPr>
+            <a:r>
+              <a:rPr lang="en-US" sz="1050" dirty="0">
+                <a:solidFill>
+                  <a:srgbClr val="4EC9B0"/>
+                </a:solidFill>
+                <a:latin typeface="Consolas" pitchFamily="34" charset="0"/>
+                <a:ea typeface="Consolas" pitchFamily="34" charset="-122"/>
+                <a:cs typeface="Consolas" pitchFamily="34" charset="-120"/>
+              </a:rPr>
+              <a:t>date
+</a:t>
+            </a:r>
+            <a:pPr indent="0" marL="0">
+              <a:lnSpc>
+                <a:spcPct val="118000"/>
+              </a:lnSpc>
+              <a:buNone/>
+            </a:pPr>
+            <a:r>
+              <a:rPr lang="en-US" sz="1050" dirty="0">
+                <a:solidFill>
+                  <a:srgbClr val="D4D4D4"/>
+                </a:solidFill>
+                <a:latin typeface="Consolas" pitchFamily="34" charset="0"/>
+                <a:ea typeface="Consolas" pitchFamily="34" charset="-122"/>
+                <a:cs typeface="Consolas" pitchFamily="34" charset="-120"/>
+              </a:rPr>
+              <a:t>    </a:t>
+            </a:r>
+            <a:pPr indent="0" marL="0">
+              <a:lnSpc>
+                <a:spcPct val="118000"/>
+              </a:lnSpc>
+              <a:buNone/>
+            </a:pPr>
+            <a:r>
+              <a:rPr lang="en-US" sz="1050" dirty="0">
+                <a:solidFill>
+                  <a:srgbClr val="D4D4D4"/>
+                </a:solidFill>
+                <a:latin typeface="Consolas" pitchFamily="34" charset="0"/>
+                <a:ea typeface="Consolas" pitchFamily="34" charset="-122"/>
+                <a:cs typeface="Consolas" pitchFamily="34" charset="-120"/>
+              </a:rPr>
+              <a:t>validation_failed</a:t>
+            </a:r>
+            <a:pPr indent="0" marL="0">
+              <a:lnSpc>
+                <a:spcPct val="118000"/>
+              </a:lnSpc>
+              <a:buNone/>
+            </a:pPr>
+            <a:r>
+              <a:rPr lang="en-US" sz="1050" dirty="0">
+                <a:solidFill>
+                  <a:srgbClr val="D4D4D4"/>
+                </a:solidFill>
+                <a:latin typeface="Consolas" pitchFamily="34" charset="0"/>
+                <a:ea typeface="Consolas" pitchFamily="34" charset="-122"/>
+                <a:cs typeface="Consolas" pitchFamily="34" charset="-120"/>
+              </a:rPr>
+              <a:t>:</a:t>
+            </a:r>
+            <a:pPr indent="0" marL="0">
+              <a:lnSpc>
+                <a:spcPct val="118000"/>
+              </a:lnSpc>
+              <a:buNone/>
+            </a:pPr>
+            <a:r>
+              <a:rPr lang="en-US" sz="1050" dirty="0">
+                <a:solidFill>
+                  <a:srgbClr val="D4D4D4"/>
+                </a:solidFill>
+                <a:latin typeface="Consolas" pitchFamily="34" charset="0"/>
+                <a:ea typeface="Consolas" pitchFamily="34" charset="-122"/>
+                <a:cs typeface="Consolas" pitchFamily="34" charset="-120"/>
+              </a:rPr>
+              <a:t> </a:t>
+            </a:r>
+            <a:pPr indent="0" marL="0">
+              <a:lnSpc>
+                <a:spcPct val="118000"/>
+              </a:lnSpc>
+              <a:buNone/>
+            </a:pPr>
+            <a:r>
+              <a:rPr lang="en-US" sz="1050" dirty="0">
+                <a:solidFill>
+                  <a:srgbClr val="4EC9B0"/>
+                </a:solidFill>
+                <a:latin typeface="Consolas" pitchFamily="34" charset="0"/>
+                <a:ea typeface="Consolas" pitchFamily="34" charset="-122"/>
+                <a:cs typeface="Consolas" pitchFamily="34" charset="-120"/>
+              </a:rPr>
+              <a:t>bool</a:t>
+            </a:r>
+            <a:pPr indent="0" marL="0">
+              <a:lnSpc>
+                <a:spcPct val="118000"/>
+              </a:lnSpc>
+              <a:buNone/>
+            </a:pPr>
+            <a:r>
+              <a:rPr lang="en-US" sz="1050" dirty="0">
+                <a:solidFill>
+                  <a:srgbClr val="D4D4D4"/>
+                </a:solidFill>
+                <a:latin typeface="Consolas" pitchFamily="34" charset="0"/>
+                <a:ea typeface="Consolas" pitchFamily="34" charset="-122"/>
+                <a:cs typeface="Consolas" pitchFamily="34" charset="-120"/>
+              </a:rPr>
+              <a:t> </a:t>
+            </a:r>
+            <a:pPr indent="0" marL="0">
+              <a:lnSpc>
+                <a:spcPct val="118000"/>
+              </a:lnSpc>
+              <a:buNone/>
+            </a:pPr>
+            <a:r>
+              <a:rPr lang="en-US" sz="1050" dirty="0">
+                <a:solidFill>
+                  <a:srgbClr val="D4D4D4"/>
+                </a:solidFill>
+                <a:latin typeface="Consolas" pitchFamily="34" charset="0"/>
+                <a:ea typeface="Consolas" pitchFamily="34" charset="-122"/>
+                <a:cs typeface="Consolas" pitchFamily="34" charset="-120"/>
+              </a:rPr>
+              <a:t>=</a:t>
+            </a:r>
+            <a:pPr indent="0" marL="0">
+              <a:lnSpc>
+                <a:spcPct val="118000"/>
+              </a:lnSpc>
+              <a:buNone/>
+            </a:pPr>
+            <a:r>
+              <a:rPr lang="en-US" sz="1050" dirty="0">
+                <a:solidFill>
+                  <a:srgbClr val="D4D4D4"/>
+                </a:solidFill>
+                <a:latin typeface="Consolas" pitchFamily="34" charset="0"/>
+                <a:ea typeface="Consolas" pitchFamily="34" charset="-122"/>
+                <a:cs typeface="Consolas" pitchFamily="34" charset="-120"/>
+              </a:rPr>
+              <a:t> </a:t>
+            </a:r>
+            <a:pPr indent="0" marL="0">
+              <a:lnSpc>
+                <a:spcPct val="118000"/>
+              </a:lnSpc>
+              <a:buNone/>
+            </a:pPr>
+            <a:r>
+              <a:rPr lang="en-US" sz="1050" dirty="0">
+                <a:solidFill>
+                  <a:srgbClr val="C586C0"/>
+                </a:solidFill>
+                <a:latin typeface="Consolas" pitchFamily="34" charset="0"/>
+                <a:ea typeface="Consolas" pitchFamily="34" charset="-122"/>
+                <a:cs typeface="Consolas" pitchFamily="34" charset="-120"/>
+              </a:rPr>
+              <a:t>False
+</a:t>
+            </a:r>
+            <a:pPr indent="0" marL="0">
+              <a:lnSpc>
+                <a:spcPct val="118000"/>
+              </a:lnSpc>
+              <a:buNone/>
+            </a:pPr>
+            <a:r>
+              <a:rPr lang="en-US" sz="1050" dirty="0">
+                <a:solidFill>
+                  <a:srgbClr val="D4D4D4"/>
+                </a:solidFill>
+                <a:latin typeface="Consolas" pitchFamily="34" charset="0"/>
+                <a:ea typeface="Consolas" pitchFamily="34" charset="-122"/>
+                <a:cs typeface="Consolas" pitchFamily="34" charset="-120"/>
+              </a:rPr>
+              <a:t>    </a:t>
+            </a:r>
+            <a:pPr indent="0" marL="0">
+              <a:lnSpc>
+                <a:spcPct val="118000"/>
+              </a:lnSpc>
+              <a:buNone/>
+            </a:pPr>
+            <a:r>
+              <a:rPr lang="en-US" sz="1050" dirty="0">
+                <a:solidFill>
+                  <a:srgbClr val="D4D4D4"/>
+                </a:solidFill>
+                <a:latin typeface="Consolas" pitchFamily="34" charset="0"/>
+                <a:ea typeface="Consolas" pitchFamily="34" charset="-122"/>
+                <a:cs typeface="Consolas" pitchFamily="34" charset="-120"/>
+              </a:rPr>
+              <a:t>failure_reasons</a:t>
+            </a:r>
+            <a:pPr indent="0" marL="0">
+              <a:lnSpc>
+                <a:spcPct val="118000"/>
+              </a:lnSpc>
+              <a:buNone/>
+            </a:pPr>
+            <a:r>
+              <a:rPr lang="en-US" sz="1050" dirty="0">
+                <a:solidFill>
+                  <a:srgbClr val="D4D4D4"/>
+                </a:solidFill>
+                <a:latin typeface="Consolas" pitchFamily="34" charset="0"/>
+                <a:ea typeface="Consolas" pitchFamily="34" charset="-122"/>
+                <a:cs typeface="Consolas" pitchFamily="34" charset="-120"/>
+              </a:rPr>
+              <a:t>:</a:t>
+            </a:r>
+            <a:pPr indent="0" marL="0">
+              <a:lnSpc>
+                <a:spcPct val="118000"/>
+              </a:lnSpc>
+              <a:buNone/>
+            </a:pPr>
+            <a:r>
+              <a:rPr lang="en-US" sz="1050" dirty="0">
+                <a:solidFill>
+                  <a:srgbClr val="D4D4D4"/>
+                </a:solidFill>
+                <a:latin typeface="Consolas" pitchFamily="34" charset="0"/>
+                <a:ea typeface="Consolas" pitchFamily="34" charset="-122"/>
+                <a:cs typeface="Consolas" pitchFamily="34" charset="-120"/>
+              </a:rPr>
+              <a:t> </a:t>
+            </a:r>
+            <a:pPr indent="0" marL="0">
+              <a:lnSpc>
+                <a:spcPct val="118000"/>
+              </a:lnSpc>
+              <a:buNone/>
+            </a:pPr>
+            <a:r>
+              <a:rPr lang="en-US" sz="1050" dirty="0">
+                <a:solidFill>
+                  <a:srgbClr val="4EC9B0"/>
+                </a:solidFill>
+                <a:latin typeface="Consolas" pitchFamily="34" charset="0"/>
+                <a:ea typeface="Consolas" pitchFamily="34" charset="-122"/>
+                <a:cs typeface="Consolas" pitchFamily="34" charset="-120"/>
+              </a:rPr>
+              <a:t>list</a:t>
+            </a:r>
+            <a:pPr indent="0" marL="0">
+              <a:lnSpc>
+                <a:spcPct val="118000"/>
+              </a:lnSpc>
+              <a:buNone/>
+            </a:pPr>
+            <a:r>
+              <a:rPr lang="en-US" sz="1050" dirty="0">
+                <a:solidFill>
+                  <a:srgbClr val="D4D4D4"/>
+                </a:solidFill>
+                <a:latin typeface="Consolas" pitchFamily="34" charset="0"/>
+                <a:ea typeface="Consolas" pitchFamily="34" charset="-122"/>
+                <a:cs typeface="Consolas" pitchFamily="34" charset="-120"/>
+              </a:rPr>
+              <a:t>[</a:t>
+            </a:r>
+            <a:pPr indent="0" marL="0">
+              <a:lnSpc>
+                <a:spcPct val="118000"/>
+              </a:lnSpc>
+              <a:buNone/>
+            </a:pPr>
+            <a:r>
+              <a:rPr lang="en-US" sz="1050" dirty="0">
+                <a:solidFill>
+                  <a:srgbClr val="4EC9B0"/>
+                </a:solidFill>
+                <a:latin typeface="Consolas" pitchFamily="34" charset="0"/>
+                <a:ea typeface="Consolas" pitchFamily="34" charset="-122"/>
+                <a:cs typeface="Consolas" pitchFamily="34" charset="-120"/>
+              </a:rPr>
+              <a:t>str</a:t>
+            </a:r>
+            <a:pPr indent="0" marL="0">
+              <a:lnSpc>
+                <a:spcPct val="118000"/>
+              </a:lnSpc>
+              <a:buNone/>
+            </a:pPr>
+            <a:r>
+              <a:rPr lang="en-US" sz="1050" dirty="0">
+                <a:solidFill>
+                  <a:srgbClr val="D4D4D4"/>
+                </a:solidFill>
+                <a:latin typeface="Consolas" pitchFamily="34" charset="0"/>
+                <a:ea typeface="Consolas" pitchFamily="34" charset="-122"/>
+                <a:cs typeface="Consolas" pitchFamily="34" charset="-120"/>
+              </a:rPr>
+              <a:t>]</a:t>
+            </a:r>
+            <a:pPr indent="0" marL="0">
+              <a:lnSpc>
+                <a:spcPct val="118000"/>
+              </a:lnSpc>
+              <a:buNone/>
+            </a:pPr>
+            <a:r>
+              <a:rPr lang="en-US" sz="1050" dirty="0">
+                <a:solidFill>
+                  <a:srgbClr val="D4D4D4"/>
+                </a:solidFill>
+                <a:latin typeface="Consolas" pitchFamily="34" charset="0"/>
+                <a:ea typeface="Consolas" pitchFamily="34" charset="-122"/>
+                <a:cs typeface="Consolas" pitchFamily="34" charset="-120"/>
+              </a:rPr>
+              <a:t> </a:t>
+            </a:r>
+            <a:pPr indent="0" marL="0">
+              <a:lnSpc>
+                <a:spcPct val="118000"/>
+              </a:lnSpc>
+              <a:buNone/>
+            </a:pPr>
+            <a:r>
+              <a:rPr lang="en-US" sz="1050" dirty="0">
+                <a:solidFill>
+                  <a:srgbClr val="D4D4D4"/>
+                </a:solidFill>
+                <a:latin typeface="Consolas" pitchFamily="34" charset="0"/>
+                <a:ea typeface="Consolas" pitchFamily="34" charset="-122"/>
+                <a:cs typeface="Consolas" pitchFamily="34" charset="-120"/>
+              </a:rPr>
+              <a:t>=</a:t>
+            </a:r>
+            <a:pPr indent="0" marL="0">
+              <a:lnSpc>
+                <a:spcPct val="118000"/>
+              </a:lnSpc>
+              <a:buNone/>
+            </a:pPr>
+            <a:r>
+              <a:rPr lang="en-US" sz="1050" dirty="0">
+                <a:solidFill>
+                  <a:srgbClr val="D4D4D4"/>
+                </a:solidFill>
+                <a:latin typeface="Consolas" pitchFamily="34" charset="0"/>
+                <a:ea typeface="Consolas" pitchFamily="34" charset="-122"/>
+                <a:cs typeface="Consolas" pitchFamily="34" charset="-120"/>
+              </a:rPr>
+              <a:t> </a:t>
+            </a:r>
+            <a:pPr indent="0" marL="0">
+              <a:lnSpc>
+                <a:spcPct val="118000"/>
+              </a:lnSpc>
+              <a:buNone/>
+            </a:pPr>
+            <a:r>
+              <a:rPr lang="en-US" sz="1050" dirty="0">
+                <a:solidFill>
+                  <a:srgbClr val="D4D4D4"/>
+                </a:solidFill>
+                <a:latin typeface="Consolas" pitchFamily="34" charset="0"/>
+                <a:ea typeface="Consolas" pitchFamily="34" charset="-122"/>
+                <a:cs typeface="Consolas" pitchFamily="34" charset="-120"/>
+              </a:rPr>
+              <a:t>[</a:t>
+            </a:r>
+            <a:pPr indent="0" marL="0">
+              <a:lnSpc>
+                <a:spcPct val="118000"/>
+              </a:lnSpc>
+              <a:buNone/>
+            </a:pPr>
+            <a:r>
+              <a:rPr lang="en-US" sz="1050" dirty="0">
+                <a:solidFill>
+                  <a:srgbClr val="D4D4D4"/>
+                </a:solidFill>
+                <a:latin typeface="Consolas" pitchFamily="34" charset="0"/>
+                <a:ea typeface="Consolas" pitchFamily="34" charset="-122"/>
+                <a:cs typeface="Consolas" pitchFamily="34" charset="-120"/>
+              </a:rPr>
+              <a:t>]
+</a:t>
+            </a:r>
+            <a:pPr indent="0" marL="0">
+              <a:lnSpc>
+                <a:spcPct val="118000"/>
+              </a:lnSpc>
+              <a:buNone/>
+            </a:pPr>
+            <a:r>
+              <a:rPr lang="en-US" sz="1050" dirty="0">
+                <a:solidFill>
+                  <a:srgbClr val="D4D4D4"/>
+                </a:solidFill>
+                <a:latin typeface="Consolas" pitchFamily="34" charset="0"/>
+                <a:ea typeface="Consolas" pitchFamily="34" charset="-122"/>
+                <a:cs typeface="Consolas" pitchFamily="34" charset="-120"/>
+              </a:rPr>
+              <a:t>
+</a:t>
+            </a:r>
+            <a:pPr indent="0" marL="0">
+              <a:lnSpc>
+                <a:spcPct val="118000"/>
+              </a:lnSpc>
+              <a:buNone/>
+            </a:pPr>
+            <a:r>
+              <a:rPr lang="en-US" sz="1050" dirty="0">
+                <a:solidFill>
+                  <a:srgbClr val="C586C0"/>
+                </a:solidFill>
+                <a:latin typeface="Consolas" pitchFamily="34" charset="0"/>
+                <a:ea typeface="Consolas" pitchFamily="34" charset="-122"/>
+                <a:cs typeface="Consolas" pitchFamily="34" charset="-120"/>
+              </a:rPr>
+              <a:t>def</a:t>
+            </a:r>
+            <a:pPr indent="0" marL="0">
+              <a:lnSpc>
+                <a:spcPct val="118000"/>
+              </a:lnSpc>
+              <a:buNone/>
+            </a:pPr>
+            <a:r>
+              <a:rPr lang="en-US" sz="1050" dirty="0">
+                <a:solidFill>
+                  <a:srgbClr val="D4D4D4"/>
+                </a:solidFill>
+                <a:latin typeface="Consolas" pitchFamily="34" charset="0"/>
+                <a:ea typeface="Consolas" pitchFamily="34" charset="-122"/>
+                <a:cs typeface="Consolas" pitchFamily="34" charset="-120"/>
+              </a:rPr>
+              <a:t> </a:t>
+            </a:r>
+            <a:pPr indent="0" marL="0">
+              <a:lnSpc>
+                <a:spcPct val="118000"/>
+              </a:lnSpc>
+              <a:buNone/>
+            </a:pPr>
+            <a:r>
+              <a:rPr lang="en-US" sz="1050" dirty="0">
+                <a:solidFill>
+                  <a:srgbClr val="DCDCAA"/>
+                </a:solidFill>
+                <a:latin typeface="Consolas" pitchFamily="34" charset="0"/>
+                <a:ea typeface="Consolas" pitchFamily="34" charset="-122"/>
+                <a:cs typeface="Consolas" pitchFamily="34" charset="-120"/>
+              </a:rPr>
+              <a:t>validate_claim</a:t>
+            </a:r>
+            <a:pPr indent="0" marL="0">
+              <a:lnSpc>
+                <a:spcPct val="118000"/>
+              </a:lnSpc>
+              <a:buNone/>
+            </a:pPr>
+            <a:r>
+              <a:rPr lang="en-US" sz="1050" dirty="0">
+                <a:solidFill>
+                  <a:srgbClr val="D4D4D4"/>
+                </a:solidFill>
+                <a:latin typeface="Consolas" pitchFamily="34" charset="0"/>
+                <a:ea typeface="Consolas" pitchFamily="34" charset="-122"/>
+                <a:cs typeface="Consolas" pitchFamily="34" charset="-120"/>
+              </a:rPr>
+              <a:t>(</a:t>
+            </a:r>
+            <a:pPr indent="0" marL="0">
+              <a:lnSpc>
+                <a:spcPct val="118000"/>
+              </a:lnSpc>
+              <a:buNone/>
+            </a:pPr>
+            <a:r>
+              <a:rPr lang="en-US" sz="1050" dirty="0">
+                <a:solidFill>
+                  <a:srgbClr val="D4D4D4"/>
+                </a:solidFill>
+                <a:latin typeface="Consolas" pitchFamily="34" charset="0"/>
+                <a:ea typeface="Consolas" pitchFamily="34" charset="-122"/>
+                <a:cs typeface="Consolas" pitchFamily="34" charset="-120"/>
+              </a:rPr>
+              <a:t>state</a:t>
+            </a:r>
+            <a:pPr indent="0" marL="0">
+              <a:lnSpc>
+                <a:spcPct val="118000"/>
+              </a:lnSpc>
+              <a:buNone/>
+            </a:pPr>
+            <a:r>
+              <a:rPr lang="en-US" sz="1050" dirty="0">
+                <a:solidFill>
+                  <a:srgbClr val="D4D4D4"/>
+                </a:solidFill>
+                <a:latin typeface="Consolas" pitchFamily="34" charset="0"/>
+                <a:ea typeface="Consolas" pitchFamily="34" charset="-122"/>
+                <a:cs typeface="Consolas" pitchFamily="34" charset="-120"/>
+              </a:rPr>
+              <a:t>:</a:t>
+            </a:r>
+            <a:pPr indent="0" marL="0">
+              <a:lnSpc>
+                <a:spcPct val="118000"/>
+              </a:lnSpc>
+              <a:buNone/>
+            </a:pPr>
+            <a:r>
+              <a:rPr lang="en-US" sz="1050" dirty="0">
+                <a:solidFill>
+                  <a:srgbClr val="D4D4D4"/>
+                </a:solidFill>
+                <a:latin typeface="Consolas" pitchFamily="34" charset="0"/>
+                <a:ea typeface="Consolas" pitchFamily="34" charset="-122"/>
+                <a:cs typeface="Consolas" pitchFamily="34" charset="-120"/>
+              </a:rPr>
+              <a:t> </a:t>
+            </a:r>
+            <a:pPr indent="0" marL="0">
+              <a:lnSpc>
+                <a:spcPct val="118000"/>
+              </a:lnSpc>
+              <a:buNone/>
+            </a:pPr>
+            <a:r>
+              <a:rPr lang="en-US" sz="1050" dirty="0">
+                <a:solidFill>
+                  <a:srgbClr val="D4D4D4"/>
+                </a:solidFill>
+                <a:latin typeface="Consolas" pitchFamily="34" charset="0"/>
+                <a:ea typeface="Consolas" pitchFamily="34" charset="-122"/>
+                <a:cs typeface="Consolas" pitchFamily="34" charset="-120"/>
+              </a:rPr>
+              <a:t>ClaimState</a:t>
+            </a:r>
+            <a:pPr indent="0" marL="0">
+              <a:lnSpc>
+                <a:spcPct val="118000"/>
+              </a:lnSpc>
+              <a:buNone/>
+            </a:pPr>
+            <a:r>
+              <a:rPr lang="en-US" sz="1050" dirty="0">
+                <a:solidFill>
+                  <a:srgbClr val="D4D4D4"/>
+                </a:solidFill>
+                <a:latin typeface="Consolas" pitchFamily="34" charset="0"/>
+                <a:ea typeface="Consolas" pitchFamily="34" charset="-122"/>
+                <a:cs typeface="Consolas" pitchFamily="34" charset="-120"/>
+              </a:rPr>
+              <a:t>)</a:t>
+            </a:r>
+            <a:pPr indent="0" marL="0">
+              <a:lnSpc>
+                <a:spcPct val="118000"/>
+              </a:lnSpc>
+              <a:buNone/>
+            </a:pPr>
+            <a:r>
+              <a:rPr lang="en-US" sz="1050" dirty="0">
+                <a:solidFill>
+                  <a:srgbClr val="D4D4D4"/>
+                </a:solidFill>
+                <a:latin typeface="Consolas" pitchFamily="34" charset="0"/>
+                <a:ea typeface="Consolas" pitchFamily="34" charset="-122"/>
+                <a:cs typeface="Consolas" pitchFamily="34" charset="-120"/>
+              </a:rPr>
+              <a:t> </a:t>
+            </a:r>
+            <a:pPr indent="0" marL="0">
+              <a:lnSpc>
+                <a:spcPct val="118000"/>
+              </a:lnSpc>
+              <a:buNone/>
+            </a:pPr>
+            <a:r>
+              <a:rPr lang="en-US" sz="1050" dirty="0">
+                <a:solidFill>
+                  <a:srgbClr val="D4D4D4"/>
+                </a:solidFill>
+                <a:latin typeface="Consolas" pitchFamily="34" charset="0"/>
+                <a:ea typeface="Consolas" pitchFamily="34" charset="-122"/>
+                <a:cs typeface="Consolas" pitchFamily="34" charset="-120"/>
+              </a:rPr>
+              <a:t>-</a:t>
+            </a:r>
+            <a:pPr indent="0" marL="0">
+              <a:lnSpc>
+                <a:spcPct val="118000"/>
+              </a:lnSpc>
+              <a:buNone/>
+            </a:pPr>
+            <a:r>
+              <a:rPr lang="en-US" sz="1050" dirty="0">
+                <a:solidFill>
+                  <a:srgbClr val="D4D4D4"/>
+                </a:solidFill>
+                <a:latin typeface="Consolas" pitchFamily="34" charset="0"/>
+                <a:ea typeface="Consolas" pitchFamily="34" charset="-122"/>
+                <a:cs typeface="Consolas" pitchFamily="34" charset="-120"/>
+              </a:rPr>
+              <a:t>&gt;</a:t>
+            </a:r>
+            <a:pPr indent="0" marL="0">
+              <a:lnSpc>
+                <a:spcPct val="118000"/>
+              </a:lnSpc>
+              <a:buNone/>
+            </a:pPr>
+            <a:r>
+              <a:rPr lang="en-US" sz="1050" dirty="0">
+                <a:solidFill>
+                  <a:srgbClr val="D4D4D4"/>
+                </a:solidFill>
+                <a:latin typeface="Consolas" pitchFamily="34" charset="0"/>
+                <a:ea typeface="Consolas" pitchFamily="34" charset="-122"/>
+                <a:cs typeface="Consolas" pitchFamily="34" charset="-120"/>
+              </a:rPr>
+              <a:t> </a:t>
+            </a:r>
+            <a:pPr indent="0" marL="0">
+              <a:lnSpc>
+                <a:spcPct val="118000"/>
+              </a:lnSpc>
+              <a:buNone/>
+            </a:pPr>
+            <a:r>
+              <a:rPr lang="en-US" sz="1050" dirty="0">
+                <a:solidFill>
+                  <a:srgbClr val="4EC9B0"/>
+                </a:solidFill>
+                <a:latin typeface="Consolas" pitchFamily="34" charset="0"/>
+                <a:ea typeface="Consolas" pitchFamily="34" charset="-122"/>
+                <a:cs typeface="Consolas" pitchFamily="34" charset="-120"/>
+              </a:rPr>
+              <a:t>dict</a:t>
+            </a:r>
+            <a:pPr indent="0" marL="0">
+              <a:lnSpc>
+                <a:spcPct val="118000"/>
+              </a:lnSpc>
+              <a:buNone/>
+            </a:pPr>
+            <a:r>
+              <a:rPr lang="en-US" sz="1050" dirty="0">
+                <a:solidFill>
+                  <a:srgbClr val="D4D4D4"/>
+                </a:solidFill>
+                <a:latin typeface="Consolas" pitchFamily="34" charset="0"/>
+                <a:ea typeface="Consolas" pitchFamily="34" charset="-122"/>
+                <a:cs typeface="Consolas" pitchFamily="34" charset="-120"/>
+              </a:rPr>
+              <a:t>:
+</a:t>
+            </a:r>
+            <a:pPr indent="0" marL="0">
+              <a:lnSpc>
+                <a:spcPct val="118000"/>
+              </a:lnSpc>
+              <a:buNone/>
+            </a:pPr>
+            <a:r>
+              <a:rPr lang="en-US" sz="1050" dirty="0">
+                <a:solidFill>
+                  <a:srgbClr val="D4D4D4"/>
+                </a:solidFill>
+                <a:latin typeface="Consolas" pitchFamily="34" charset="0"/>
+                <a:ea typeface="Consolas" pitchFamily="34" charset="-122"/>
+                <a:cs typeface="Consolas" pitchFamily="34" charset="-120"/>
+              </a:rPr>
+              <a:t>    </a:t>
+            </a:r>
+            <a:pPr indent="0" marL="0">
+              <a:lnSpc>
+                <a:spcPct val="118000"/>
+              </a:lnSpc>
+              <a:buNone/>
+            </a:pPr>
+            <a:r>
+              <a:rPr lang="en-US" sz="1050" dirty="0">
+                <a:solidFill>
+                  <a:srgbClr val="D4D4D4"/>
+                </a:solidFill>
+                <a:latin typeface="Consolas" pitchFamily="34" charset="0"/>
+                <a:ea typeface="Consolas" pitchFamily="34" charset="-122"/>
+                <a:cs typeface="Consolas" pitchFamily="34" charset="-120"/>
+              </a:rPr>
+              <a:t>checks</a:t>
+            </a:r>
+            <a:pPr indent="0" marL="0">
+              <a:lnSpc>
+                <a:spcPct val="118000"/>
+              </a:lnSpc>
+              <a:buNone/>
+            </a:pPr>
+            <a:r>
+              <a:rPr lang="en-US" sz="1050" dirty="0">
+                <a:solidFill>
+                  <a:srgbClr val="D4D4D4"/>
+                </a:solidFill>
+                <a:latin typeface="Consolas" pitchFamily="34" charset="0"/>
+                <a:ea typeface="Consolas" pitchFamily="34" charset="-122"/>
+                <a:cs typeface="Consolas" pitchFamily="34" charset="-120"/>
+              </a:rPr>
+              <a:t> </a:t>
+            </a:r>
+            <a:pPr indent="0" marL="0">
+              <a:lnSpc>
+                <a:spcPct val="118000"/>
+              </a:lnSpc>
+              <a:buNone/>
+            </a:pPr>
+            <a:r>
+              <a:rPr lang="en-US" sz="1050" dirty="0">
+                <a:solidFill>
+                  <a:srgbClr val="D4D4D4"/>
+                </a:solidFill>
+                <a:latin typeface="Consolas" pitchFamily="34" charset="0"/>
+                <a:ea typeface="Consolas" pitchFamily="34" charset="-122"/>
+                <a:cs typeface="Consolas" pitchFamily="34" charset="-120"/>
+              </a:rPr>
+              <a:t>=</a:t>
+            </a:r>
+            <a:pPr indent="0" marL="0">
+              <a:lnSpc>
+                <a:spcPct val="118000"/>
+              </a:lnSpc>
+              <a:buNone/>
+            </a:pPr>
+            <a:r>
+              <a:rPr lang="en-US" sz="1050" dirty="0">
+                <a:solidFill>
+                  <a:srgbClr val="D4D4D4"/>
+                </a:solidFill>
+                <a:latin typeface="Consolas" pitchFamily="34" charset="0"/>
+                <a:ea typeface="Consolas" pitchFamily="34" charset="-122"/>
+                <a:cs typeface="Consolas" pitchFamily="34" charset="-120"/>
+              </a:rPr>
+              <a:t> </a:t>
+            </a:r>
+            <a:pPr indent="0" marL="0">
+              <a:lnSpc>
+                <a:spcPct val="118000"/>
+              </a:lnSpc>
+              <a:buNone/>
+            </a:pPr>
+            <a:r>
+              <a:rPr lang="en-US" sz="1050" dirty="0">
+                <a:solidFill>
+                  <a:srgbClr val="D4D4D4"/>
+                </a:solidFill>
+                <a:latin typeface="Consolas" pitchFamily="34" charset="0"/>
+                <a:ea typeface="Consolas" pitchFamily="34" charset="-122"/>
+                <a:cs typeface="Consolas" pitchFamily="34" charset="-120"/>
+              </a:rPr>
+              <a:t>[
+</a:t>
+            </a:r>
+            <a:pPr indent="0" marL="0">
+              <a:lnSpc>
+                <a:spcPct val="118000"/>
+              </a:lnSpc>
+              <a:buNone/>
+            </a:pPr>
+            <a:r>
+              <a:rPr lang="en-US" sz="1050" dirty="0">
+                <a:solidFill>
+                  <a:srgbClr val="D4D4D4"/>
+                </a:solidFill>
+                <a:latin typeface="Consolas" pitchFamily="34" charset="0"/>
+                <a:ea typeface="Consolas" pitchFamily="34" charset="-122"/>
+                <a:cs typeface="Consolas" pitchFamily="34" charset="-120"/>
+              </a:rPr>
+              <a:t>        </a:t>
+            </a:r>
+            <a:pPr indent="0" marL="0">
+              <a:lnSpc>
+                <a:spcPct val="118000"/>
+              </a:lnSpc>
+              <a:buNone/>
+            </a:pPr>
+            <a:r>
+              <a:rPr lang="en-US" sz="1050" dirty="0">
+                <a:solidFill>
+                  <a:srgbClr val="D4D4D4"/>
+                </a:solidFill>
+                <a:latin typeface="Consolas" pitchFamily="34" charset="0"/>
+                <a:ea typeface="Consolas" pitchFamily="34" charset="-122"/>
+                <a:cs typeface="Consolas" pitchFamily="34" charset="-120"/>
+              </a:rPr>
+              <a:t>check_cpr_policy_match</a:t>
+            </a:r>
+            <a:pPr indent="0" marL="0">
+              <a:lnSpc>
+                <a:spcPct val="118000"/>
+              </a:lnSpc>
+              <a:buNone/>
+            </a:pPr>
+            <a:r>
+              <a:rPr lang="en-US" sz="1050" dirty="0">
+                <a:solidFill>
+                  <a:srgbClr val="D4D4D4"/>
+                </a:solidFill>
+                <a:latin typeface="Consolas" pitchFamily="34" charset="0"/>
+                <a:ea typeface="Consolas" pitchFamily="34" charset="-122"/>
+                <a:cs typeface="Consolas" pitchFamily="34" charset="-120"/>
+              </a:rPr>
+              <a:t>(</a:t>
+            </a:r>
+            <a:pPr indent="0" marL="0">
+              <a:lnSpc>
+                <a:spcPct val="118000"/>
+              </a:lnSpc>
+              <a:buNone/>
+            </a:pPr>
+            <a:r>
+              <a:rPr lang="en-US" sz="1050" dirty="0">
+                <a:solidFill>
+                  <a:srgbClr val="D4D4D4"/>
+                </a:solidFill>
+                <a:latin typeface="Consolas" pitchFamily="34" charset="0"/>
+                <a:ea typeface="Consolas" pitchFamily="34" charset="-122"/>
+                <a:cs typeface="Consolas" pitchFamily="34" charset="-120"/>
+              </a:rPr>
+              <a:t>state</a:t>
+            </a:r>
+            <a:pPr indent="0" marL="0">
+              <a:lnSpc>
+                <a:spcPct val="118000"/>
+              </a:lnSpc>
+              <a:buNone/>
+            </a:pPr>
+            <a:r>
+              <a:rPr lang="en-US" sz="1050" dirty="0">
+                <a:solidFill>
+                  <a:srgbClr val="D4D4D4"/>
+                </a:solidFill>
+                <a:latin typeface="Consolas" pitchFamily="34" charset="0"/>
+                <a:ea typeface="Consolas" pitchFamily="34" charset="-122"/>
+                <a:cs typeface="Consolas" pitchFamily="34" charset="-120"/>
+              </a:rPr>
+              <a:t>)</a:t>
+            </a:r>
+            <a:pPr indent="0" marL="0">
+              <a:lnSpc>
+                <a:spcPct val="118000"/>
+              </a:lnSpc>
+              <a:buNone/>
+            </a:pPr>
+            <a:r>
+              <a:rPr lang="en-US" sz="1050" dirty="0">
+                <a:solidFill>
+                  <a:srgbClr val="D4D4D4"/>
+                </a:solidFill>
+                <a:latin typeface="Consolas" pitchFamily="34" charset="0"/>
+                <a:ea typeface="Consolas" pitchFamily="34" charset="-122"/>
+                <a:cs typeface="Consolas" pitchFamily="34" charset="-120"/>
+              </a:rPr>
+              <a:t>,
+</a:t>
+            </a:r>
+            <a:pPr indent="0" marL="0">
+              <a:lnSpc>
+                <a:spcPct val="118000"/>
+              </a:lnSpc>
+              <a:buNone/>
+            </a:pPr>
+            <a:r>
+              <a:rPr lang="en-US" sz="1050" dirty="0">
+                <a:solidFill>
+                  <a:srgbClr val="D4D4D4"/>
+                </a:solidFill>
+                <a:latin typeface="Consolas" pitchFamily="34" charset="0"/>
+                <a:ea typeface="Consolas" pitchFamily="34" charset="-122"/>
+                <a:cs typeface="Consolas" pitchFamily="34" charset="-120"/>
+              </a:rPr>
+              <a:t>        </a:t>
+            </a:r>
+            <a:pPr indent="0" marL="0">
+              <a:lnSpc>
+                <a:spcPct val="118000"/>
+              </a:lnSpc>
+              <a:buNone/>
+            </a:pPr>
+            <a:r>
+              <a:rPr lang="en-US" sz="1050" dirty="0">
+                <a:solidFill>
+                  <a:srgbClr val="D4D4D4"/>
+                </a:solidFill>
+                <a:latin typeface="Consolas" pitchFamily="34" charset="0"/>
+                <a:ea typeface="Consolas" pitchFamily="34" charset="-122"/>
+                <a:cs typeface="Consolas" pitchFamily="34" charset="-120"/>
+              </a:rPr>
+              <a:t>check_policy_in_force</a:t>
+            </a:r>
+            <a:pPr indent="0" marL="0">
+              <a:lnSpc>
+                <a:spcPct val="118000"/>
+              </a:lnSpc>
+              <a:buNone/>
+            </a:pPr>
+            <a:r>
+              <a:rPr lang="en-US" sz="1050" dirty="0">
+                <a:solidFill>
+                  <a:srgbClr val="D4D4D4"/>
+                </a:solidFill>
+                <a:latin typeface="Consolas" pitchFamily="34" charset="0"/>
+                <a:ea typeface="Consolas" pitchFamily="34" charset="-122"/>
+                <a:cs typeface="Consolas" pitchFamily="34" charset="-120"/>
+              </a:rPr>
+              <a:t>(</a:t>
+            </a:r>
+            <a:pPr indent="0" marL="0">
+              <a:lnSpc>
+                <a:spcPct val="118000"/>
+              </a:lnSpc>
+              <a:buNone/>
+            </a:pPr>
+            <a:r>
+              <a:rPr lang="en-US" sz="1050" dirty="0">
+                <a:solidFill>
+                  <a:srgbClr val="D4D4D4"/>
+                </a:solidFill>
+                <a:latin typeface="Consolas" pitchFamily="34" charset="0"/>
+                <a:ea typeface="Consolas" pitchFamily="34" charset="-122"/>
+                <a:cs typeface="Consolas" pitchFamily="34" charset="-120"/>
+              </a:rPr>
+              <a:t>state</a:t>
+            </a:r>
+            <a:pPr indent="0" marL="0">
+              <a:lnSpc>
+                <a:spcPct val="118000"/>
+              </a:lnSpc>
+              <a:buNone/>
+            </a:pPr>
+            <a:r>
+              <a:rPr lang="en-US" sz="1050" dirty="0">
+                <a:solidFill>
+                  <a:srgbClr val="D4D4D4"/>
+                </a:solidFill>
+                <a:latin typeface="Consolas" pitchFamily="34" charset="0"/>
+                <a:ea typeface="Consolas" pitchFamily="34" charset="-122"/>
+                <a:cs typeface="Consolas" pitchFamily="34" charset="-120"/>
+              </a:rPr>
+              <a:t>)</a:t>
+            </a:r>
+            <a:pPr indent="0" marL="0">
+              <a:lnSpc>
+                <a:spcPct val="118000"/>
+              </a:lnSpc>
+              <a:buNone/>
+            </a:pPr>
+            <a:r>
+              <a:rPr lang="en-US" sz="1050" dirty="0">
+                <a:solidFill>
+                  <a:srgbClr val="D4D4D4"/>
+                </a:solidFill>
+                <a:latin typeface="Consolas" pitchFamily="34" charset="0"/>
+                <a:ea typeface="Consolas" pitchFamily="34" charset="-122"/>
+                <a:cs typeface="Consolas" pitchFamily="34" charset="-120"/>
+              </a:rPr>
+              <a:t>,
+</a:t>
+            </a:r>
+            <a:pPr indent="0" marL="0">
+              <a:lnSpc>
+                <a:spcPct val="118000"/>
+              </a:lnSpc>
+              <a:buNone/>
+            </a:pPr>
+            <a:r>
+              <a:rPr lang="en-US" sz="1050" dirty="0">
+                <a:solidFill>
+                  <a:srgbClr val="D4D4D4"/>
+                </a:solidFill>
+                <a:latin typeface="Consolas" pitchFamily="34" charset="0"/>
+                <a:ea typeface="Consolas" pitchFamily="34" charset="-122"/>
+                <a:cs typeface="Consolas" pitchFamily="34" charset="-120"/>
+              </a:rPr>
+              <a:t>        </a:t>
+            </a:r>
+            <a:pPr indent="0" marL="0">
+              <a:lnSpc>
+                <a:spcPct val="118000"/>
+              </a:lnSpc>
+              <a:buNone/>
+            </a:pPr>
+            <a:r>
+              <a:rPr lang="en-US" sz="1050" dirty="0">
+                <a:solidFill>
+                  <a:srgbClr val="D4D4D4"/>
+                </a:solidFill>
+                <a:latin typeface="Consolas" pitchFamily="34" charset="0"/>
+                <a:ea typeface="Consolas" pitchFamily="34" charset="-122"/>
+                <a:cs typeface="Consolas" pitchFamily="34" charset="-120"/>
+              </a:rPr>
+              <a:t>check_duplicate</a:t>
+            </a:r>
+            <a:pPr indent="0" marL="0">
+              <a:lnSpc>
+                <a:spcPct val="118000"/>
+              </a:lnSpc>
+              <a:buNone/>
+            </a:pPr>
+            <a:r>
+              <a:rPr lang="en-US" sz="1050" dirty="0">
+                <a:solidFill>
+                  <a:srgbClr val="D4D4D4"/>
+                </a:solidFill>
+                <a:latin typeface="Consolas" pitchFamily="34" charset="0"/>
+                <a:ea typeface="Consolas" pitchFamily="34" charset="-122"/>
+                <a:cs typeface="Consolas" pitchFamily="34" charset="-120"/>
+              </a:rPr>
+              <a:t>(</a:t>
+            </a:r>
+            <a:pPr indent="0" marL="0">
+              <a:lnSpc>
+                <a:spcPct val="118000"/>
+              </a:lnSpc>
+              <a:buNone/>
+            </a:pPr>
+            <a:r>
+              <a:rPr lang="en-US" sz="1050" dirty="0">
+                <a:solidFill>
+                  <a:srgbClr val="D4D4D4"/>
+                </a:solidFill>
+                <a:latin typeface="Consolas" pitchFamily="34" charset="0"/>
+                <a:ea typeface="Consolas" pitchFamily="34" charset="-122"/>
+                <a:cs typeface="Consolas" pitchFamily="34" charset="-120"/>
+              </a:rPr>
+              <a:t>state</a:t>
+            </a:r>
+            <a:pPr indent="0" marL="0">
+              <a:lnSpc>
+                <a:spcPct val="118000"/>
+              </a:lnSpc>
+              <a:buNone/>
+            </a:pPr>
+            <a:r>
+              <a:rPr lang="en-US" sz="1050" dirty="0">
+                <a:solidFill>
+                  <a:srgbClr val="D4D4D4"/>
+                </a:solidFill>
+                <a:latin typeface="Consolas" pitchFamily="34" charset="0"/>
+                <a:ea typeface="Consolas" pitchFamily="34" charset="-122"/>
+                <a:cs typeface="Consolas" pitchFamily="34" charset="-120"/>
+              </a:rPr>
+              <a:t>)</a:t>
+            </a:r>
+            <a:pPr indent="0" marL="0">
+              <a:lnSpc>
+                <a:spcPct val="118000"/>
+              </a:lnSpc>
+              <a:buNone/>
+            </a:pPr>
+            <a:r>
+              <a:rPr lang="en-US" sz="1050" dirty="0">
+                <a:solidFill>
+                  <a:srgbClr val="D4D4D4"/>
+                </a:solidFill>
+                <a:latin typeface="Consolas" pitchFamily="34" charset="0"/>
+                <a:ea typeface="Consolas" pitchFamily="34" charset="-122"/>
+                <a:cs typeface="Consolas" pitchFamily="34" charset="-120"/>
+              </a:rPr>
+              <a:t>,
+</a:t>
+            </a:r>
+            <a:pPr indent="0" marL="0">
+              <a:lnSpc>
+                <a:spcPct val="118000"/>
+              </a:lnSpc>
+              <a:buNone/>
+            </a:pPr>
+            <a:r>
+              <a:rPr lang="en-US" sz="1050" dirty="0">
+                <a:solidFill>
+                  <a:srgbClr val="D4D4D4"/>
+                </a:solidFill>
+                <a:latin typeface="Consolas" pitchFamily="34" charset="0"/>
+                <a:ea typeface="Consolas" pitchFamily="34" charset="-122"/>
+                <a:cs typeface="Consolas" pitchFamily="34" charset="-120"/>
+              </a:rPr>
+              <a:t>    </a:t>
+            </a:r>
+            <a:pPr indent="0" marL="0">
+              <a:lnSpc>
+                <a:spcPct val="118000"/>
+              </a:lnSpc>
+              <a:buNone/>
+            </a:pPr>
+            <a:r>
+              <a:rPr lang="en-US" sz="1050" dirty="0">
+                <a:solidFill>
+                  <a:srgbClr val="D4D4D4"/>
+                </a:solidFill>
+                <a:latin typeface="Consolas" pitchFamily="34" charset="0"/>
+                <a:ea typeface="Consolas" pitchFamily="34" charset="-122"/>
+                <a:cs typeface="Consolas" pitchFamily="34" charset="-120"/>
+              </a:rPr>
+              <a:t>]
+</a:t>
+            </a:r>
+            <a:pPr indent="0" marL="0">
+              <a:lnSpc>
+                <a:spcPct val="118000"/>
+              </a:lnSpc>
+              <a:buNone/>
+            </a:pPr>
+            <a:r>
+              <a:rPr lang="en-US" sz="1050" dirty="0">
+                <a:solidFill>
+                  <a:srgbClr val="D4D4D4"/>
+                </a:solidFill>
+                <a:latin typeface="Consolas" pitchFamily="34" charset="0"/>
+                <a:ea typeface="Consolas" pitchFamily="34" charset="-122"/>
+                <a:cs typeface="Consolas" pitchFamily="34" charset="-120"/>
+              </a:rPr>
+              <a:t>    </a:t>
+            </a:r>
+            <a:pPr indent="0" marL="0">
+              <a:lnSpc>
+                <a:spcPct val="118000"/>
+              </a:lnSpc>
+              <a:buNone/>
+            </a:pPr>
+            <a:r>
+              <a:rPr lang="en-US" sz="1050" dirty="0">
+                <a:solidFill>
+                  <a:srgbClr val="D4D4D4"/>
+                </a:solidFill>
+                <a:latin typeface="Consolas" pitchFamily="34" charset="0"/>
+                <a:ea typeface="Consolas" pitchFamily="34" charset="-122"/>
+                <a:cs typeface="Consolas" pitchFamily="34" charset="-120"/>
+              </a:rPr>
+              <a:t>failed</a:t>
+            </a:r>
+            <a:pPr indent="0" marL="0">
+              <a:lnSpc>
+                <a:spcPct val="118000"/>
+              </a:lnSpc>
+              <a:buNone/>
+            </a:pPr>
+            <a:r>
+              <a:rPr lang="en-US" sz="1050" dirty="0">
+                <a:solidFill>
+                  <a:srgbClr val="D4D4D4"/>
+                </a:solidFill>
+                <a:latin typeface="Consolas" pitchFamily="34" charset="0"/>
+                <a:ea typeface="Consolas" pitchFamily="34" charset="-122"/>
+                <a:cs typeface="Consolas" pitchFamily="34" charset="-120"/>
+              </a:rPr>
+              <a:t> </a:t>
+            </a:r>
+            <a:pPr indent="0" marL="0">
+              <a:lnSpc>
+                <a:spcPct val="118000"/>
+              </a:lnSpc>
+              <a:buNone/>
+            </a:pPr>
+            <a:r>
+              <a:rPr lang="en-US" sz="1050" dirty="0">
+                <a:solidFill>
+                  <a:srgbClr val="D4D4D4"/>
+                </a:solidFill>
+                <a:latin typeface="Consolas" pitchFamily="34" charset="0"/>
+                <a:ea typeface="Consolas" pitchFamily="34" charset="-122"/>
+                <a:cs typeface="Consolas" pitchFamily="34" charset="-120"/>
+              </a:rPr>
+              <a:t>=</a:t>
+            </a:r>
+            <a:pPr indent="0" marL="0">
+              <a:lnSpc>
+                <a:spcPct val="118000"/>
+              </a:lnSpc>
+              <a:buNone/>
+            </a:pPr>
+            <a:r>
+              <a:rPr lang="en-US" sz="1050" dirty="0">
+                <a:solidFill>
+                  <a:srgbClr val="D4D4D4"/>
+                </a:solidFill>
+                <a:latin typeface="Consolas" pitchFamily="34" charset="0"/>
+                <a:ea typeface="Consolas" pitchFamily="34" charset="-122"/>
+                <a:cs typeface="Consolas" pitchFamily="34" charset="-120"/>
+              </a:rPr>
+              <a:t> </a:t>
+            </a:r>
+            <a:pPr indent="0" marL="0">
+              <a:lnSpc>
+                <a:spcPct val="118000"/>
+              </a:lnSpc>
+              <a:buNone/>
+            </a:pPr>
+            <a:r>
+              <a:rPr lang="en-US" sz="1050" dirty="0">
+                <a:solidFill>
+                  <a:srgbClr val="D4D4D4"/>
+                </a:solidFill>
+                <a:latin typeface="Consolas" pitchFamily="34" charset="0"/>
+                <a:ea typeface="Consolas" pitchFamily="34" charset="-122"/>
+                <a:cs typeface="Consolas" pitchFamily="34" charset="-120"/>
+              </a:rPr>
+              <a:t>[</a:t>
+            </a:r>
+            <a:pPr indent="0" marL="0">
+              <a:lnSpc>
+                <a:spcPct val="118000"/>
+              </a:lnSpc>
+              <a:buNone/>
+            </a:pPr>
+            <a:r>
+              <a:rPr lang="en-US" sz="1050" dirty="0">
+                <a:solidFill>
+                  <a:srgbClr val="D4D4D4"/>
+                </a:solidFill>
+                <a:latin typeface="Consolas" pitchFamily="34" charset="0"/>
+                <a:ea typeface="Consolas" pitchFamily="34" charset="-122"/>
+                <a:cs typeface="Consolas" pitchFamily="34" charset="-120"/>
+              </a:rPr>
+              <a:t>c</a:t>
+            </a:r>
+            <a:pPr indent="0" marL="0">
+              <a:lnSpc>
+                <a:spcPct val="118000"/>
+              </a:lnSpc>
+              <a:buNone/>
+            </a:pPr>
+            <a:r>
+              <a:rPr lang="en-US" sz="1050" dirty="0">
+                <a:solidFill>
+                  <a:srgbClr val="D4D4D4"/>
+                </a:solidFill>
+                <a:latin typeface="Consolas" pitchFamily="34" charset="0"/>
+                <a:ea typeface="Consolas" pitchFamily="34" charset="-122"/>
+                <a:cs typeface="Consolas" pitchFamily="34" charset="-120"/>
+              </a:rPr>
+              <a:t> </a:t>
+            </a:r>
+            <a:pPr indent="0" marL="0">
+              <a:lnSpc>
+                <a:spcPct val="118000"/>
+              </a:lnSpc>
+              <a:buNone/>
+            </a:pPr>
+            <a:r>
+              <a:rPr lang="en-US" sz="1050" dirty="0">
+                <a:solidFill>
+                  <a:srgbClr val="C586C0"/>
+                </a:solidFill>
+                <a:latin typeface="Consolas" pitchFamily="34" charset="0"/>
+                <a:ea typeface="Consolas" pitchFamily="34" charset="-122"/>
+                <a:cs typeface="Consolas" pitchFamily="34" charset="-120"/>
+              </a:rPr>
+              <a:t>for</a:t>
+            </a:r>
+            <a:pPr indent="0" marL="0">
+              <a:lnSpc>
+                <a:spcPct val="118000"/>
+              </a:lnSpc>
+              <a:buNone/>
+            </a:pPr>
+            <a:r>
+              <a:rPr lang="en-US" sz="1050" dirty="0">
+                <a:solidFill>
+                  <a:srgbClr val="D4D4D4"/>
+                </a:solidFill>
+                <a:latin typeface="Consolas" pitchFamily="34" charset="0"/>
+                <a:ea typeface="Consolas" pitchFamily="34" charset="-122"/>
+                <a:cs typeface="Consolas" pitchFamily="34" charset="-120"/>
+              </a:rPr>
+              <a:t> </a:t>
+            </a:r>
+            <a:pPr indent="0" marL="0">
+              <a:lnSpc>
+                <a:spcPct val="118000"/>
+              </a:lnSpc>
+              <a:buNone/>
+            </a:pPr>
+            <a:r>
+              <a:rPr lang="en-US" sz="1050" dirty="0">
+                <a:solidFill>
+                  <a:srgbClr val="D4D4D4"/>
+                </a:solidFill>
+                <a:latin typeface="Consolas" pitchFamily="34" charset="0"/>
+                <a:ea typeface="Consolas" pitchFamily="34" charset="-122"/>
+                <a:cs typeface="Consolas" pitchFamily="34" charset="-120"/>
+              </a:rPr>
+              <a:t>c</a:t>
+            </a:r>
+            <a:pPr indent="0" marL="0">
+              <a:lnSpc>
+                <a:spcPct val="118000"/>
+              </a:lnSpc>
+              <a:buNone/>
+            </a:pPr>
+            <a:r>
+              <a:rPr lang="en-US" sz="1050" dirty="0">
+                <a:solidFill>
+                  <a:srgbClr val="D4D4D4"/>
+                </a:solidFill>
+                <a:latin typeface="Consolas" pitchFamily="34" charset="0"/>
+                <a:ea typeface="Consolas" pitchFamily="34" charset="-122"/>
+                <a:cs typeface="Consolas" pitchFamily="34" charset="-120"/>
+              </a:rPr>
+              <a:t> </a:t>
+            </a:r>
+            <a:pPr indent="0" marL="0">
+              <a:lnSpc>
+                <a:spcPct val="118000"/>
+              </a:lnSpc>
+              <a:buNone/>
+            </a:pPr>
+            <a:r>
+              <a:rPr lang="en-US" sz="1050" dirty="0">
+                <a:solidFill>
+                  <a:srgbClr val="C586C0"/>
+                </a:solidFill>
+                <a:latin typeface="Consolas" pitchFamily="34" charset="0"/>
+                <a:ea typeface="Consolas" pitchFamily="34" charset="-122"/>
+                <a:cs typeface="Consolas" pitchFamily="34" charset="-120"/>
+              </a:rPr>
+              <a:t>in</a:t>
+            </a:r>
+            <a:pPr indent="0" marL="0">
+              <a:lnSpc>
+                <a:spcPct val="118000"/>
+              </a:lnSpc>
+              <a:buNone/>
+            </a:pPr>
+            <a:r>
+              <a:rPr lang="en-US" sz="1050" dirty="0">
+                <a:solidFill>
+                  <a:srgbClr val="D4D4D4"/>
+                </a:solidFill>
+                <a:latin typeface="Consolas" pitchFamily="34" charset="0"/>
+                <a:ea typeface="Consolas" pitchFamily="34" charset="-122"/>
+                <a:cs typeface="Consolas" pitchFamily="34" charset="-120"/>
+              </a:rPr>
+              <a:t> </a:t>
+            </a:r>
+            <a:pPr indent="0" marL="0">
+              <a:lnSpc>
+                <a:spcPct val="118000"/>
+              </a:lnSpc>
+              <a:buNone/>
+            </a:pPr>
+            <a:r>
+              <a:rPr lang="en-US" sz="1050" dirty="0">
+                <a:solidFill>
+                  <a:srgbClr val="D4D4D4"/>
+                </a:solidFill>
+                <a:latin typeface="Consolas" pitchFamily="34" charset="0"/>
+                <a:ea typeface="Consolas" pitchFamily="34" charset="-122"/>
+                <a:cs typeface="Consolas" pitchFamily="34" charset="-120"/>
+              </a:rPr>
+              <a:t>checks</a:t>
+            </a:r>
+            <a:pPr indent="0" marL="0">
+              <a:lnSpc>
+                <a:spcPct val="118000"/>
+              </a:lnSpc>
+              <a:buNone/>
+            </a:pPr>
+            <a:r>
+              <a:rPr lang="en-US" sz="1050" dirty="0">
+                <a:solidFill>
+                  <a:srgbClr val="D4D4D4"/>
+                </a:solidFill>
+                <a:latin typeface="Consolas" pitchFamily="34" charset="0"/>
+                <a:ea typeface="Consolas" pitchFamily="34" charset="-122"/>
+                <a:cs typeface="Consolas" pitchFamily="34" charset="-120"/>
+              </a:rPr>
+              <a:t> </a:t>
+            </a:r>
+            <a:pPr indent="0" marL="0">
+              <a:lnSpc>
+                <a:spcPct val="118000"/>
+              </a:lnSpc>
+              <a:buNone/>
+            </a:pPr>
+            <a:r>
+              <a:rPr lang="en-US" sz="1050" dirty="0">
+                <a:solidFill>
+                  <a:srgbClr val="C586C0"/>
+                </a:solidFill>
+                <a:latin typeface="Consolas" pitchFamily="34" charset="0"/>
+                <a:ea typeface="Consolas" pitchFamily="34" charset="-122"/>
+                <a:cs typeface="Consolas" pitchFamily="34" charset="-120"/>
+              </a:rPr>
+              <a:t>if</a:t>
+            </a:r>
+            <a:pPr indent="0" marL="0">
+              <a:lnSpc>
+                <a:spcPct val="118000"/>
+              </a:lnSpc>
+              <a:buNone/>
+            </a:pPr>
+            <a:r>
+              <a:rPr lang="en-US" sz="1050" dirty="0">
+                <a:solidFill>
+                  <a:srgbClr val="D4D4D4"/>
+                </a:solidFill>
+                <a:latin typeface="Consolas" pitchFamily="34" charset="0"/>
+                <a:ea typeface="Consolas" pitchFamily="34" charset="-122"/>
+                <a:cs typeface="Consolas" pitchFamily="34" charset="-120"/>
+              </a:rPr>
+              <a:t> </a:t>
+            </a:r>
+            <a:pPr indent="0" marL="0">
+              <a:lnSpc>
+                <a:spcPct val="118000"/>
+              </a:lnSpc>
+              <a:buNone/>
+            </a:pPr>
+            <a:r>
+              <a:rPr lang="en-US" sz="1050" dirty="0">
+                <a:solidFill>
+                  <a:srgbClr val="C586C0"/>
+                </a:solidFill>
+                <a:latin typeface="Consolas" pitchFamily="34" charset="0"/>
+                <a:ea typeface="Consolas" pitchFamily="34" charset="-122"/>
+                <a:cs typeface="Consolas" pitchFamily="34" charset="-120"/>
+              </a:rPr>
+              <a:t>not</a:t>
+            </a:r>
+            <a:pPr indent="0" marL="0">
+              <a:lnSpc>
+                <a:spcPct val="118000"/>
+              </a:lnSpc>
+              <a:buNone/>
+            </a:pPr>
+            <a:r>
+              <a:rPr lang="en-US" sz="1050" dirty="0">
+                <a:solidFill>
+                  <a:srgbClr val="D4D4D4"/>
+                </a:solidFill>
+                <a:latin typeface="Consolas" pitchFamily="34" charset="0"/>
+                <a:ea typeface="Consolas" pitchFamily="34" charset="-122"/>
+                <a:cs typeface="Consolas" pitchFamily="34" charset="-120"/>
+              </a:rPr>
+              <a:t> </a:t>
+            </a:r>
+            <a:pPr indent="0" marL="0">
+              <a:lnSpc>
+                <a:spcPct val="118000"/>
+              </a:lnSpc>
+              <a:buNone/>
+            </a:pPr>
+            <a:r>
+              <a:rPr lang="en-US" sz="1050" dirty="0">
+                <a:solidFill>
+                  <a:srgbClr val="D4D4D4"/>
+                </a:solidFill>
+                <a:latin typeface="Consolas" pitchFamily="34" charset="0"/>
+                <a:ea typeface="Consolas" pitchFamily="34" charset="-122"/>
+                <a:cs typeface="Consolas" pitchFamily="34" charset="-120"/>
+              </a:rPr>
+              <a:t>c</a:t>
+            </a:r>
+            <a:pPr indent="0" marL="0">
+              <a:lnSpc>
+                <a:spcPct val="118000"/>
+              </a:lnSpc>
+              <a:buNone/>
+            </a:pPr>
+            <a:r>
+              <a:rPr lang="en-US" sz="1050" dirty="0">
+                <a:solidFill>
+                  <a:srgbClr val="D4D4D4"/>
+                </a:solidFill>
+                <a:latin typeface="Consolas" pitchFamily="34" charset="0"/>
+                <a:ea typeface="Consolas" pitchFamily="34" charset="-122"/>
+                <a:cs typeface="Consolas" pitchFamily="34" charset="-120"/>
+              </a:rPr>
+              <a:t>.</a:t>
+            </a:r>
+            <a:pPr indent="0" marL="0">
+              <a:lnSpc>
+                <a:spcPct val="118000"/>
+              </a:lnSpc>
+              <a:buNone/>
+            </a:pPr>
+            <a:r>
+              <a:rPr lang="en-US" sz="1050" dirty="0">
+                <a:solidFill>
+                  <a:srgbClr val="D4D4D4"/>
+                </a:solidFill>
+                <a:latin typeface="Consolas" pitchFamily="34" charset="0"/>
+                <a:ea typeface="Consolas" pitchFamily="34" charset="-122"/>
+                <a:cs typeface="Consolas" pitchFamily="34" charset="-120"/>
+              </a:rPr>
+              <a:t>passed</a:t>
+            </a:r>
+            <a:pPr indent="0" marL="0">
+              <a:lnSpc>
+                <a:spcPct val="118000"/>
+              </a:lnSpc>
+              <a:buNone/>
+            </a:pPr>
+            <a:r>
+              <a:rPr lang="en-US" sz="1050" dirty="0">
+                <a:solidFill>
+                  <a:srgbClr val="D4D4D4"/>
+                </a:solidFill>
+                <a:latin typeface="Consolas" pitchFamily="34" charset="0"/>
+                <a:ea typeface="Consolas" pitchFamily="34" charset="-122"/>
+                <a:cs typeface="Consolas" pitchFamily="34" charset="-120"/>
+              </a:rPr>
+              <a:t>]
+</a:t>
+            </a:r>
+            <a:pPr indent="0" marL="0">
+              <a:lnSpc>
+                <a:spcPct val="118000"/>
+              </a:lnSpc>
+              <a:buNone/>
+            </a:pPr>
+            <a:r>
+              <a:rPr lang="en-US" sz="1050" dirty="0">
+                <a:solidFill>
+                  <a:srgbClr val="D4D4D4"/>
+                </a:solidFill>
+                <a:latin typeface="Consolas" pitchFamily="34" charset="0"/>
+                <a:ea typeface="Consolas" pitchFamily="34" charset="-122"/>
+                <a:cs typeface="Consolas" pitchFamily="34" charset="-120"/>
+              </a:rPr>
+              <a:t>    </a:t>
+            </a:r>
+            <a:pPr indent="0" marL="0">
+              <a:lnSpc>
+                <a:spcPct val="118000"/>
+              </a:lnSpc>
+              <a:buNone/>
+            </a:pPr>
+            <a:r>
+              <a:rPr lang="en-US" sz="1050" dirty="0">
+                <a:solidFill>
+                  <a:srgbClr val="C586C0"/>
+                </a:solidFill>
+                <a:latin typeface="Consolas" pitchFamily="34" charset="0"/>
+                <a:ea typeface="Consolas" pitchFamily="34" charset="-122"/>
+                <a:cs typeface="Consolas" pitchFamily="34" charset="-120"/>
+              </a:rPr>
+              <a:t>return</a:t>
+            </a:r>
+            <a:pPr indent="0" marL="0">
+              <a:lnSpc>
+                <a:spcPct val="118000"/>
+              </a:lnSpc>
+              <a:buNone/>
+            </a:pPr>
+            <a:r>
+              <a:rPr lang="en-US" sz="1050" dirty="0">
+                <a:solidFill>
+                  <a:srgbClr val="D4D4D4"/>
+                </a:solidFill>
+                <a:latin typeface="Consolas" pitchFamily="34" charset="0"/>
+                <a:ea typeface="Consolas" pitchFamily="34" charset="-122"/>
+                <a:cs typeface="Consolas" pitchFamily="34" charset="-120"/>
+              </a:rPr>
+              <a:t> </a:t>
+            </a:r>
+            <a:pPr indent="0" marL="0">
+              <a:lnSpc>
+                <a:spcPct val="118000"/>
+              </a:lnSpc>
+              <a:buNone/>
+            </a:pPr>
+            <a:r>
+              <a:rPr lang="en-US" sz="1050" dirty="0">
+                <a:solidFill>
+                  <a:srgbClr val="D4D4D4"/>
+                </a:solidFill>
+                <a:latin typeface="Consolas" pitchFamily="34" charset="0"/>
+                <a:ea typeface="Consolas" pitchFamily="34" charset="-122"/>
+                <a:cs typeface="Consolas" pitchFamily="34" charset="-120"/>
+              </a:rPr>
+              <a:t>{
+</a:t>
+            </a:r>
+            <a:pPr indent="0" marL="0">
+              <a:lnSpc>
+                <a:spcPct val="118000"/>
+              </a:lnSpc>
+              <a:buNone/>
+            </a:pPr>
+            <a:r>
+              <a:rPr lang="en-US" sz="1050" dirty="0">
+                <a:solidFill>
+                  <a:srgbClr val="D4D4D4"/>
+                </a:solidFill>
+                <a:latin typeface="Consolas" pitchFamily="34" charset="0"/>
+                <a:ea typeface="Consolas" pitchFamily="34" charset="-122"/>
+                <a:cs typeface="Consolas" pitchFamily="34" charset="-120"/>
+              </a:rPr>
+              <a:t>        </a:t>
+            </a:r>
+            <a:pPr indent="0" marL="0">
+              <a:lnSpc>
+                <a:spcPct val="118000"/>
+              </a:lnSpc>
+              <a:buNone/>
+            </a:pPr>
+            <a:r>
+              <a:rPr lang="en-US" sz="1050" dirty="0">
+                <a:solidFill>
+                  <a:srgbClr val="CE9178"/>
+                </a:solidFill>
+                <a:latin typeface="Consolas" pitchFamily="34" charset="0"/>
+                <a:ea typeface="Consolas" pitchFamily="34" charset="-122"/>
+                <a:cs typeface="Consolas" pitchFamily="34" charset="-120"/>
+              </a:rPr>
+              <a:t>"validation_failed"</a:t>
+            </a:r>
+            <a:pPr indent="0" marL="0">
+              <a:lnSpc>
+                <a:spcPct val="118000"/>
+              </a:lnSpc>
+              <a:buNone/>
+            </a:pPr>
+            <a:r>
+              <a:rPr lang="en-US" sz="1050" dirty="0">
+                <a:solidFill>
+                  <a:srgbClr val="D4D4D4"/>
+                </a:solidFill>
+                <a:latin typeface="Consolas" pitchFamily="34" charset="0"/>
+                <a:ea typeface="Consolas" pitchFamily="34" charset="-122"/>
+                <a:cs typeface="Consolas" pitchFamily="34" charset="-120"/>
+              </a:rPr>
+              <a:t>:</a:t>
+            </a:r>
+            <a:pPr indent="0" marL="0">
+              <a:lnSpc>
+                <a:spcPct val="118000"/>
+              </a:lnSpc>
+              <a:buNone/>
+            </a:pPr>
+            <a:r>
+              <a:rPr lang="en-US" sz="1050" dirty="0">
+                <a:solidFill>
+                  <a:srgbClr val="D4D4D4"/>
+                </a:solidFill>
+                <a:latin typeface="Consolas" pitchFamily="34" charset="0"/>
+                <a:ea typeface="Consolas" pitchFamily="34" charset="-122"/>
+                <a:cs typeface="Consolas" pitchFamily="34" charset="-120"/>
+              </a:rPr>
+              <a:t> </a:t>
+            </a:r>
+            <a:pPr indent="0" marL="0">
+              <a:lnSpc>
+                <a:spcPct val="118000"/>
+              </a:lnSpc>
+              <a:buNone/>
+            </a:pPr>
+            <a:r>
+              <a:rPr lang="en-US" sz="1050" dirty="0">
+                <a:solidFill>
+                  <a:srgbClr val="4EC9B0"/>
+                </a:solidFill>
+                <a:latin typeface="Consolas" pitchFamily="34" charset="0"/>
+                <a:ea typeface="Consolas" pitchFamily="34" charset="-122"/>
+                <a:cs typeface="Consolas" pitchFamily="34" charset="-120"/>
+              </a:rPr>
+              <a:t>bool</a:t>
+            </a:r>
+            <a:pPr indent="0" marL="0">
+              <a:lnSpc>
+                <a:spcPct val="118000"/>
+              </a:lnSpc>
+              <a:buNone/>
+            </a:pPr>
+            <a:r>
+              <a:rPr lang="en-US" sz="1050" dirty="0">
+                <a:solidFill>
+                  <a:srgbClr val="D4D4D4"/>
+                </a:solidFill>
+                <a:latin typeface="Consolas" pitchFamily="34" charset="0"/>
+                <a:ea typeface="Consolas" pitchFamily="34" charset="-122"/>
+                <a:cs typeface="Consolas" pitchFamily="34" charset="-120"/>
+              </a:rPr>
+              <a:t>(</a:t>
+            </a:r>
+            <a:pPr indent="0" marL="0">
+              <a:lnSpc>
+                <a:spcPct val="118000"/>
+              </a:lnSpc>
+              <a:buNone/>
+            </a:pPr>
+            <a:r>
+              <a:rPr lang="en-US" sz="1050" dirty="0">
+                <a:solidFill>
+                  <a:srgbClr val="D4D4D4"/>
+                </a:solidFill>
+                <a:latin typeface="Consolas" pitchFamily="34" charset="0"/>
+                <a:ea typeface="Consolas" pitchFamily="34" charset="-122"/>
+                <a:cs typeface="Consolas" pitchFamily="34" charset="-120"/>
+              </a:rPr>
+              <a:t>failed</a:t>
+            </a:r>
+            <a:pPr indent="0" marL="0">
+              <a:lnSpc>
+                <a:spcPct val="118000"/>
+              </a:lnSpc>
+              <a:buNone/>
+            </a:pPr>
+            <a:r>
+              <a:rPr lang="en-US" sz="1050" dirty="0">
+                <a:solidFill>
+                  <a:srgbClr val="D4D4D4"/>
+                </a:solidFill>
+                <a:latin typeface="Consolas" pitchFamily="34" charset="0"/>
+                <a:ea typeface="Consolas" pitchFamily="34" charset="-122"/>
+                <a:cs typeface="Consolas" pitchFamily="34" charset="-120"/>
+              </a:rPr>
+              <a:t>)</a:t>
+            </a:r>
+            <a:pPr indent="0" marL="0">
+              <a:lnSpc>
+                <a:spcPct val="118000"/>
+              </a:lnSpc>
+              <a:buNone/>
+            </a:pPr>
+            <a:r>
+              <a:rPr lang="en-US" sz="1050" dirty="0">
+                <a:solidFill>
+                  <a:srgbClr val="D4D4D4"/>
+                </a:solidFill>
+                <a:latin typeface="Consolas" pitchFamily="34" charset="0"/>
+                <a:ea typeface="Consolas" pitchFamily="34" charset="-122"/>
+                <a:cs typeface="Consolas" pitchFamily="34" charset="-120"/>
+              </a:rPr>
+              <a:t>,
+</a:t>
+            </a:r>
+            <a:pPr indent="0" marL="0">
+              <a:lnSpc>
+                <a:spcPct val="118000"/>
+              </a:lnSpc>
+              <a:buNone/>
+            </a:pPr>
+            <a:r>
+              <a:rPr lang="en-US" sz="1050" dirty="0">
+                <a:solidFill>
+                  <a:srgbClr val="D4D4D4"/>
+                </a:solidFill>
+                <a:latin typeface="Consolas" pitchFamily="34" charset="0"/>
+                <a:ea typeface="Consolas" pitchFamily="34" charset="-122"/>
+                <a:cs typeface="Consolas" pitchFamily="34" charset="-120"/>
+              </a:rPr>
+              <a:t>        </a:t>
+            </a:r>
+            <a:pPr indent="0" marL="0">
+              <a:lnSpc>
+                <a:spcPct val="118000"/>
+              </a:lnSpc>
+              <a:buNone/>
+            </a:pPr>
+            <a:r>
+              <a:rPr lang="en-US" sz="1050" dirty="0">
+                <a:solidFill>
+                  <a:srgbClr val="CE9178"/>
+                </a:solidFill>
+                <a:latin typeface="Consolas" pitchFamily="34" charset="0"/>
+                <a:ea typeface="Consolas" pitchFamily="34" charset="-122"/>
+                <a:cs typeface="Consolas" pitchFamily="34" charset="-120"/>
+              </a:rPr>
+              <a:t>"failure_reasons"</a:t>
+            </a:r>
+            <a:pPr indent="0" marL="0">
+              <a:lnSpc>
+                <a:spcPct val="118000"/>
+              </a:lnSpc>
+              <a:buNone/>
+            </a:pPr>
+            <a:r>
+              <a:rPr lang="en-US" sz="1050" dirty="0">
+                <a:solidFill>
+                  <a:srgbClr val="D4D4D4"/>
+                </a:solidFill>
+                <a:latin typeface="Consolas" pitchFamily="34" charset="0"/>
+                <a:ea typeface="Consolas" pitchFamily="34" charset="-122"/>
+                <a:cs typeface="Consolas" pitchFamily="34" charset="-120"/>
+              </a:rPr>
+              <a:t>:</a:t>
+            </a:r>
+            <a:pPr indent="0" marL="0">
+              <a:lnSpc>
+                <a:spcPct val="118000"/>
+              </a:lnSpc>
+              <a:buNone/>
+            </a:pPr>
+            <a:r>
+              <a:rPr lang="en-US" sz="1050" dirty="0">
+                <a:solidFill>
+                  <a:srgbClr val="D4D4D4"/>
+                </a:solidFill>
+                <a:latin typeface="Consolas" pitchFamily="34" charset="0"/>
+                <a:ea typeface="Consolas" pitchFamily="34" charset="-122"/>
+                <a:cs typeface="Consolas" pitchFamily="34" charset="-120"/>
+              </a:rPr>
+              <a:t> </a:t>
+            </a:r>
+            <a:pPr indent="0" marL="0">
+              <a:lnSpc>
+                <a:spcPct val="118000"/>
+              </a:lnSpc>
+              <a:buNone/>
+            </a:pPr>
+            <a:r>
+              <a:rPr lang="en-US" sz="1050" dirty="0">
+                <a:solidFill>
+                  <a:srgbClr val="D4D4D4"/>
+                </a:solidFill>
+                <a:latin typeface="Consolas" pitchFamily="34" charset="0"/>
+                <a:ea typeface="Consolas" pitchFamily="34" charset="-122"/>
+                <a:cs typeface="Consolas" pitchFamily="34" charset="-120"/>
+              </a:rPr>
+              <a:t>[</a:t>
+            </a:r>
+            <a:pPr indent="0" marL="0">
+              <a:lnSpc>
+                <a:spcPct val="118000"/>
+              </a:lnSpc>
+              <a:buNone/>
+            </a:pPr>
+            <a:r>
+              <a:rPr lang="en-US" sz="1050" dirty="0">
+                <a:solidFill>
+                  <a:srgbClr val="D4D4D4"/>
+                </a:solidFill>
+                <a:latin typeface="Consolas" pitchFamily="34" charset="0"/>
+                <a:ea typeface="Consolas" pitchFamily="34" charset="-122"/>
+                <a:cs typeface="Consolas" pitchFamily="34" charset="-120"/>
+              </a:rPr>
+              <a:t>c</a:t>
+            </a:r>
+            <a:pPr indent="0" marL="0">
+              <a:lnSpc>
+                <a:spcPct val="118000"/>
+              </a:lnSpc>
+              <a:buNone/>
+            </a:pPr>
+            <a:r>
+              <a:rPr lang="en-US" sz="1050" dirty="0">
+                <a:solidFill>
+                  <a:srgbClr val="D4D4D4"/>
+                </a:solidFill>
+                <a:latin typeface="Consolas" pitchFamily="34" charset="0"/>
+                <a:ea typeface="Consolas" pitchFamily="34" charset="-122"/>
+                <a:cs typeface="Consolas" pitchFamily="34" charset="-120"/>
+              </a:rPr>
+              <a:t>.</a:t>
+            </a:r>
+            <a:pPr indent="0" marL="0">
+              <a:lnSpc>
+                <a:spcPct val="118000"/>
+              </a:lnSpc>
+              <a:buNone/>
+            </a:pPr>
+            <a:r>
+              <a:rPr lang="en-US" sz="1050" dirty="0">
+                <a:solidFill>
+                  <a:srgbClr val="D4D4D4"/>
+                </a:solidFill>
+                <a:latin typeface="Consolas" pitchFamily="34" charset="0"/>
+                <a:ea typeface="Consolas" pitchFamily="34" charset="-122"/>
+                <a:cs typeface="Consolas" pitchFamily="34" charset="-120"/>
+              </a:rPr>
+              <a:t>reason</a:t>
+            </a:r>
+            <a:pPr indent="0" marL="0">
+              <a:lnSpc>
+                <a:spcPct val="118000"/>
+              </a:lnSpc>
+              <a:buNone/>
+            </a:pPr>
+            <a:r>
+              <a:rPr lang="en-US" sz="1050" dirty="0">
+                <a:solidFill>
+                  <a:srgbClr val="D4D4D4"/>
+                </a:solidFill>
+                <a:latin typeface="Consolas" pitchFamily="34" charset="0"/>
+                <a:ea typeface="Consolas" pitchFamily="34" charset="-122"/>
+                <a:cs typeface="Consolas" pitchFamily="34" charset="-120"/>
+              </a:rPr>
+              <a:t> </a:t>
+            </a:r>
+            <a:pPr indent="0" marL="0">
+              <a:lnSpc>
+                <a:spcPct val="118000"/>
+              </a:lnSpc>
+              <a:buNone/>
+            </a:pPr>
+            <a:r>
+              <a:rPr lang="en-US" sz="1050" dirty="0">
+                <a:solidFill>
+                  <a:srgbClr val="C586C0"/>
+                </a:solidFill>
+                <a:latin typeface="Consolas" pitchFamily="34" charset="0"/>
+                <a:ea typeface="Consolas" pitchFamily="34" charset="-122"/>
+                <a:cs typeface="Consolas" pitchFamily="34" charset="-120"/>
+              </a:rPr>
+              <a:t>for</a:t>
+            </a:r>
+            <a:pPr indent="0" marL="0">
+              <a:lnSpc>
+                <a:spcPct val="118000"/>
+              </a:lnSpc>
+              <a:buNone/>
+            </a:pPr>
+            <a:r>
+              <a:rPr lang="en-US" sz="1050" dirty="0">
+                <a:solidFill>
+                  <a:srgbClr val="D4D4D4"/>
+                </a:solidFill>
+                <a:latin typeface="Consolas" pitchFamily="34" charset="0"/>
+                <a:ea typeface="Consolas" pitchFamily="34" charset="-122"/>
+                <a:cs typeface="Consolas" pitchFamily="34" charset="-120"/>
+              </a:rPr>
+              <a:t> </a:t>
+            </a:r>
+            <a:pPr indent="0" marL="0">
+              <a:lnSpc>
+                <a:spcPct val="118000"/>
+              </a:lnSpc>
+              <a:buNone/>
+            </a:pPr>
+            <a:r>
+              <a:rPr lang="en-US" sz="1050" dirty="0">
+                <a:solidFill>
+                  <a:srgbClr val="D4D4D4"/>
+                </a:solidFill>
+                <a:latin typeface="Consolas" pitchFamily="34" charset="0"/>
+                <a:ea typeface="Consolas" pitchFamily="34" charset="-122"/>
+                <a:cs typeface="Consolas" pitchFamily="34" charset="-120"/>
+              </a:rPr>
+              <a:t>c</a:t>
+            </a:r>
+            <a:pPr indent="0" marL="0">
+              <a:lnSpc>
+                <a:spcPct val="118000"/>
+              </a:lnSpc>
+              <a:buNone/>
+            </a:pPr>
+            <a:r>
+              <a:rPr lang="en-US" sz="1050" dirty="0">
+                <a:solidFill>
+                  <a:srgbClr val="D4D4D4"/>
+                </a:solidFill>
+                <a:latin typeface="Consolas" pitchFamily="34" charset="0"/>
+                <a:ea typeface="Consolas" pitchFamily="34" charset="-122"/>
+                <a:cs typeface="Consolas" pitchFamily="34" charset="-120"/>
+              </a:rPr>
+              <a:t> </a:t>
+            </a:r>
+            <a:pPr indent="0" marL="0">
+              <a:lnSpc>
+                <a:spcPct val="118000"/>
+              </a:lnSpc>
+              <a:buNone/>
+            </a:pPr>
+            <a:r>
+              <a:rPr lang="en-US" sz="1050" dirty="0">
+                <a:solidFill>
+                  <a:srgbClr val="C586C0"/>
+                </a:solidFill>
+                <a:latin typeface="Consolas" pitchFamily="34" charset="0"/>
+                <a:ea typeface="Consolas" pitchFamily="34" charset="-122"/>
+                <a:cs typeface="Consolas" pitchFamily="34" charset="-120"/>
+              </a:rPr>
+              <a:t>in</a:t>
+            </a:r>
+            <a:pPr indent="0" marL="0">
+              <a:lnSpc>
+                <a:spcPct val="118000"/>
+              </a:lnSpc>
+              <a:buNone/>
+            </a:pPr>
+            <a:r>
+              <a:rPr lang="en-US" sz="1050" dirty="0">
+                <a:solidFill>
+                  <a:srgbClr val="D4D4D4"/>
+                </a:solidFill>
+                <a:latin typeface="Consolas" pitchFamily="34" charset="0"/>
+                <a:ea typeface="Consolas" pitchFamily="34" charset="-122"/>
+                <a:cs typeface="Consolas" pitchFamily="34" charset="-120"/>
+              </a:rPr>
+              <a:t> </a:t>
+            </a:r>
+            <a:pPr indent="0" marL="0">
+              <a:lnSpc>
+                <a:spcPct val="118000"/>
+              </a:lnSpc>
+              <a:buNone/>
+            </a:pPr>
+            <a:r>
+              <a:rPr lang="en-US" sz="1050" dirty="0">
+                <a:solidFill>
+                  <a:srgbClr val="D4D4D4"/>
+                </a:solidFill>
+                <a:latin typeface="Consolas" pitchFamily="34" charset="0"/>
+                <a:ea typeface="Consolas" pitchFamily="34" charset="-122"/>
+                <a:cs typeface="Consolas" pitchFamily="34" charset="-120"/>
+              </a:rPr>
+              <a:t>failed</a:t>
+            </a:r>
+            <a:pPr indent="0" marL="0">
+              <a:lnSpc>
+                <a:spcPct val="118000"/>
+              </a:lnSpc>
+              <a:buNone/>
+            </a:pPr>
+            <a:r>
+              <a:rPr lang="en-US" sz="1050" dirty="0">
+                <a:solidFill>
+                  <a:srgbClr val="D4D4D4"/>
+                </a:solidFill>
+                <a:latin typeface="Consolas" pitchFamily="34" charset="0"/>
+                <a:ea typeface="Consolas" pitchFamily="34" charset="-122"/>
+                <a:cs typeface="Consolas" pitchFamily="34" charset="-120"/>
+              </a:rPr>
+              <a:t>]</a:t>
+            </a:r>
+            <a:pPr indent="0" marL="0">
+              <a:lnSpc>
+                <a:spcPct val="118000"/>
+              </a:lnSpc>
+              <a:buNone/>
+            </a:pPr>
+            <a:r>
+              <a:rPr lang="en-US" sz="1050" dirty="0">
+                <a:solidFill>
+                  <a:srgbClr val="D4D4D4"/>
+                </a:solidFill>
+                <a:latin typeface="Consolas" pitchFamily="34" charset="0"/>
+                <a:ea typeface="Consolas" pitchFamily="34" charset="-122"/>
+                <a:cs typeface="Consolas" pitchFamily="34" charset="-120"/>
+              </a:rPr>
+              <a:t>,
+</a:t>
+            </a:r>
+            <a:pPr indent="0" marL="0">
+              <a:lnSpc>
+                <a:spcPct val="118000"/>
+              </a:lnSpc>
+              <a:buNone/>
+            </a:pPr>
+            <a:r>
+              <a:rPr lang="en-US" sz="1050" dirty="0">
+                <a:solidFill>
+                  <a:srgbClr val="D4D4D4"/>
+                </a:solidFill>
+                <a:latin typeface="Consolas" pitchFamily="34" charset="0"/>
+                <a:ea typeface="Consolas" pitchFamily="34" charset="-122"/>
+                <a:cs typeface="Consolas" pitchFamily="34" charset="-120"/>
+              </a:rPr>
+              <a:t>    </a:t>
+            </a:r>
+            <a:pPr indent="0" marL="0">
+              <a:lnSpc>
+                <a:spcPct val="118000"/>
+              </a:lnSpc>
+              <a:buNone/>
+            </a:pPr>
+            <a:r>
+              <a:rPr lang="en-US" sz="1050" dirty="0">
+                <a:solidFill>
+                  <a:srgbClr val="D4D4D4"/>
+                </a:solidFill>
+                <a:latin typeface="Consolas" pitchFamily="34" charset="0"/>
+                <a:ea typeface="Consolas" pitchFamily="34" charset="-122"/>
+                <a:cs typeface="Consolas" pitchFamily="34" charset="-120"/>
+              </a:rPr>
+              <a:t>}
+</a:t>
+            </a:r>
+            <a:pPr indent="0" marL="0">
+              <a:lnSpc>
+                <a:spcPct val="118000"/>
+              </a:lnSpc>
+              <a:buNone/>
+            </a:pPr>
+            <a:r>
+              <a:rPr lang="en-US" sz="1050" dirty="0">
+                <a:solidFill>
+                  <a:srgbClr val="D4D4D4"/>
+                </a:solidFill>
+                <a:latin typeface="Consolas" pitchFamily="34" charset="0"/>
+                <a:ea typeface="Consolas" pitchFamily="34" charset="-122"/>
+                <a:cs typeface="Consolas" pitchFamily="34" charset="-120"/>
+              </a:rPr>
+              <a:t>
+</a:t>
+            </a:r>
+            <a:pPr indent="0" marL="0">
+              <a:lnSpc>
+                <a:spcPct val="118000"/>
+              </a:lnSpc>
+              <a:buNone/>
+            </a:pPr>
+            <a:r>
+              <a:rPr lang="en-US" sz="1050" dirty="0">
+                <a:solidFill>
+                  <a:srgbClr val="D4D4D4"/>
+                </a:solidFill>
+                <a:latin typeface="Consolas" pitchFamily="34" charset="0"/>
+                <a:ea typeface="Consolas" pitchFamily="34" charset="-122"/>
+                <a:cs typeface="Consolas" pitchFamily="34" charset="-120"/>
+              </a:rPr>
+              <a:t>graph</a:t>
+            </a:r>
+            <a:pPr indent="0" marL="0">
+              <a:lnSpc>
+                <a:spcPct val="118000"/>
+              </a:lnSpc>
+              <a:buNone/>
+            </a:pPr>
+            <a:r>
+              <a:rPr lang="en-US" sz="1050" dirty="0">
+                <a:solidFill>
+                  <a:srgbClr val="D4D4D4"/>
+                </a:solidFill>
+                <a:latin typeface="Consolas" pitchFamily="34" charset="0"/>
+                <a:ea typeface="Consolas" pitchFamily="34" charset="-122"/>
+                <a:cs typeface="Consolas" pitchFamily="34" charset="-120"/>
+              </a:rPr>
+              <a:t>.</a:t>
+            </a:r>
+            <a:pPr indent="0" marL="0">
+              <a:lnSpc>
+                <a:spcPct val="118000"/>
+              </a:lnSpc>
+              <a:buNone/>
+            </a:pPr>
+            <a:r>
+              <a:rPr lang="en-US" sz="1050" dirty="0">
+                <a:solidFill>
+                  <a:srgbClr val="D4D4D4"/>
+                </a:solidFill>
+                <a:latin typeface="Consolas" pitchFamily="34" charset="0"/>
+                <a:ea typeface="Consolas" pitchFamily="34" charset="-122"/>
+                <a:cs typeface="Consolas" pitchFamily="34" charset="-120"/>
+              </a:rPr>
+              <a:t>add_node</a:t>
+            </a:r>
+            <a:pPr indent="0" marL="0">
+              <a:lnSpc>
+                <a:spcPct val="118000"/>
+              </a:lnSpc>
+              <a:buNone/>
+            </a:pPr>
+            <a:r>
+              <a:rPr lang="en-US" sz="1050" dirty="0">
+                <a:solidFill>
+                  <a:srgbClr val="D4D4D4"/>
+                </a:solidFill>
+                <a:latin typeface="Consolas" pitchFamily="34" charset="0"/>
+                <a:ea typeface="Consolas" pitchFamily="34" charset="-122"/>
+                <a:cs typeface="Consolas" pitchFamily="34" charset="-120"/>
+              </a:rPr>
+              <a:t>(</a:t>
+            </a:r>
+            <a:pPr indent="0" marL="0">
+              <a:lnSpc>
+                <a:spcPct val="118000"/>
+              </a:lnSpc>
+              <a:buNone/>
+            </a:pPr>
+            <a:r>
+              <a:rPr lang="en-US" sz="1050" dirty="0">
+                <a:solidFill>
+                  <a:srgbClr val="CE9178"/>
+                </a:solidFill>
+                <a:latin typeface="Consolas" pitchFamily="34" charset="0"/>
+                <a:ea typeface="Consolas" pitchFamily="34" charset="-122"/>
+                <a:cs typeface="Consolas" pitchFamily="34" charset="-120"/>
+              </a:rPr>
+              <a:t>"validate"</a:t>
+            </a:r>
+            <a:pPr indent="0" marL="0">
+              <a:lnSpc>
+                <a:spcPct val="118000"/>
+              </a:lnSpc>
+              <a:buNone/>
+            </a:pPr>
+            <a:r>
+              <a:rPr lang="en-US" sz="1050" dirty="0">
+                <a:solidFill>
+                  <a:srgbClr val="D4D4D4"/>
+                </a:solidFill>
+                <a:latin typeface="Consolas" pitchFamily="34" charset="0"/>
+                <a:ea typeface="Consolas" pitchFamily="34" charset="-122"/>
+                <a:cs typeface="Consolas" pitchFamily="34" charset="-120"/>
+              </a:rPr>
+              <a:t>,</a:t>
+            </a:r>
+            <a:pPr indent="0" marL="0">
+              <a:lnSpc>
+                <a:spcPct val="118000"/>
+              </a:lnSpc>
+              <a:buNone/>
+            </a:pPr>
+            <a:r>
+              <a:rPr lang="en-US" sz="1050" dirty="0">
+                <a:solidFill>
+                  <a:srgbClr val="D4D4D4"/>
+                </a:solidFill>
+                <a:latin typeface="Consolas" pitchFamily="34" charset="0"/>
+                <a:ea typeface="Consolas" pitchFamily="34" charset="-122"/>
+                <a:cs typeface="Consolas" pitchFamily="34" charset="-120"/>
+              </a:rPr>
+              <a:t> </a:t>
+            </a:r>
+            <a:pPr indent="0" marL="0">
+              <a:lnSpc>
+                <a:spcPct val="118000"/>
+              </a:lnSpc>
+              <a:buNone/>
+            </a:pPr>
+            <a:r>
+              <a:rPr lang="en-US" sz="1050" dirty="0">
+                <a:solidFill>
+                  <a:srgbClr val="D4D4D4"/>
+                </a:solidFill>
+                <a:latin typeface="Consolas" pitchFamily="34" charset="0"/>
+                <a:ea typeface="Consolas" pitchFamily="34" charset="-122"/>
+                <a:cs typeface="Consolas" pitchFamily="34" charset="-120"/>
+              </a:rPr>
+              <a:t>validate_claim</a:t>
+            </a:r>
+            <a:pPr indent="0" marL="0">
+              <a:lnSpc>
+                <a:spcPct val="118000"/>
+              </a:lnSpc>
+              <a:buNone/>
+            </a:pPr>
+            <a:r>
+              <a:rPr lang="en-US" sz="1050" dirty="0">
+                <a:solidFill>
+                  <a:srgbClr val="D4D4D4"/>
+                </a:solidFill>
+                <a:latin typeface="Consolas" pitchFamily="34" charset="0"/>
+                <a:ea typeface="Consolas" pitchFamily="34" charset="-122"/>
+                <a:cs typeface="Consolas" pitchFamily="34" charset="-120"/>
+              </a:rPr>
+              <a:t>)
+</a:t>
+            </a:r>
+            <a:pPr indent="0" marL="0">
+              <a:lnSpc>
+                <a:spcPct val="118000"/>
+              </a:lnSpc>
+              <a:buNone/>
+            </a:pPr>
+            <a:r>
+              <a:rPr lang="en-US" sz="1050" dirty="0">
+                <a:solidFill>
+                  <a:srgbClr val="D4D4D4"/>
+                </a:solidFill>
+                <a:latin typeface="Consolas" pitchFamily="34" charset="0"/>
+                <a:ea typeface="Consolas" pitchFamily="34" charset="-122"/>
+                <a:cs typeface="Consolas" pitchFamily="34" charset="-120"/>
+              </a:rPr>
+              <a:t>graph</a:t>
+            </a:r>
+            <a:pPr indent="0" marL="0">
+              <a:lnSpc>
+                <a:spcPct val="118000"/>
+              </a:lnSpc>
+              <a:buNone/>
+            </a:pPr>
+            <a:r>
+              <a:rPr lang="en-US" sz="1050" dirty="0">
+                <a:solidFill>
+                  <a:srgbClr val="D4D4D4"/>
+                </a:solidFill>
+                <a:latin typeface="Consolas" pitchFamily="34" charset="0"/>
+                <a:ea typeface="Consolas" pitchFamily="34" charset="-122"/>
+                <a:cs typeface="Consolas" pitchFamily="34" charset="-120"/>
+              </a:rPr>
+              <a:t>.</a:t>
+            </a:r>
+            <a:pPr indent="0" marL="0">
+              <a:lnSpc>
+                <a:spcPct val="118000"/>
+              </a:lnSpc>
+              <a:buNone/>
+            </a:pPr>
+            <a:r>
+              <a:rPr lang="en-US" sz="1050" dirty="0">
+                <a:solidFill>
+                  <a:srgbClr val="D4D4D4"/>
+                </a:solidFill>
+                <a:latin typeface="Consolas" pitchFamily="34" charset="0"/>
+                <a:ea typeface="Consolas" pitchFamily="34" charset="-122"/>
+                <a:cs typeface="Consolas" pitchFamily="34" charset="-120"/>
+              </a:rPr>
+              <a:t>add_conditional_edges</a:t>
+            </a:r>
+            <a:pPr indent="0" marL="0">
+              <a:lnSpc>
+                <a:spcPct val="118000"/>
+              </a:lnSpc>
+              <a:buNone/>
+            </a:pPr>
+            <a:r>
+              <a:rPr lang="en-US" sz="1050" dirty="0">
+                <a:solidFill>
+                  <a:srgbClr val="D4D4D4"/>
+                </a:solidFill>
+                <a:latin typeface="Consolas" pitchFamily="34" charset="0"/>
+                <a:ea typeface="Consolas" pitchFamily="34" charset="-122"/>
+                <a:cs typeface="Consolas" pitchFamily="34" charset="-120"/>
+              </a:rPr>
+              <a:t>(
+</a:t>
+            </a:r>
+            <a:pPr indent="0" marL="0">
+              <a:lnSpc>
+                <a:spcPct val="118000"/>
+              </a:lnSpc>
+              <a:buNone/>
+            </a:pPr>
+            <a:r>
+              <a:rPr lang="en-US" sz="1050" dirty="0">
+                <a:solidFill>
+                  <a:srgbClr val="D4D4D4"/>
+                </a:solidFill>
+                <a:latin typeface="Consolas" pitchFamily="34" charset="0"/>
+                <a:ea typeface="Consolas" pitchFamily="34" charset="-122"/>
+                <a:cs typeface="Consolas" pitchFamily="34" charset="-120"/>
+              </a:rPr>
+              <a:t>    </a:t>
+            </a:r>
+            <a:pPr indent="0" marL="0">
+              <a:lnSpc>
+                <a:spcPct val="118000"/>
+              </a:lnSpc>
+              <a:buNone/>
+            </a:pPr>
+            <a:r>
+              <a:rPr lang="en-US" sz="1050" dirty="0">
+                <a:solidFill>
+                  <a:srgbClr val="CE9178"/>
+                </a:solidFill>
+                <a:latin typeface="Consolas" pitchFamily="34" charset="0"/>
+                <a:ea typeface="Consolas" pitchFamily="34" charset="-122"/>
+                <a:cs typeface="Consolas" pitchFamily="34" charset="-120"/>
+              </a:rPr>
+              <a:t>"validate"</a:t>
+            </a:r>
+            <a:pPr indent="0" marL="0">
+              <a:lnSpc>
+                <a:spcPct val="118000"/>
+              </a:lnSpc>
+              <a:buNone/>
+            </a:pPr>
+            <a:r>
+              <a:rPr lang="en-US" sz="1050" dirty="0">
+                <a:solidFill>
+                  <a:srgbClr val="D4D4D4"/>
+                </a:solidFill>
+                <a:latin typeface="Consolas" pitchFamily="34" charset="0"/>
+                <a:ea typeface="Consolas" pitchFamily="34" charset="-122"/>
+                <a:cs typeface="Consolas" pitchFamily="34" charset="-120"/>
+              </a:rPr>
+              <a:t>,
+</a:t>
+            </a:r>
+            <a:pPr indent="0" marL="0">
+              <a:lnSpc>
+                <a:spcPct val="118000"/>
+              </a:lnSpc>
+              <a:buNone/>
+            </a:pPr>
+            <a:r>
+              <a:rPr lang="en-US" sz="1050" dirty="0">
+                <a:solidFill>
+                  <a:srgbClr val="D4D4D4"/>
+                </a:solidFill>
+                <a:latin typeface="Consolas" pitchFamily="34" charset="0"/>
+                <a:ea typeface="Consolas" pitchFamily="34" charset="-122"/>
+                <a:cs typeface="Consolas" pitchFamily="34" charset="-120"/>
+              </a:rPr>
+              <a:t>    </a:t>
+            </a:r>
+            <a:pPr indent="0" marL="0">
+              <a:lnSpc>
+                <a:spcPct val="118000"/>
+              </a:lnSpc>
+              <a:buNone/>
+            </a:pPr>
+            <a:r>
+              <a:rPr lang="en-US" sz="1050" dirty="0">
+                <a:solidFill>
+                  <a:srgbClr val="C586C0"/>
+                </a:solidFill>
+                <a:latin typeface="Consolas" pitchFamily="34" charset="0"/>
+                <a:ea typeface="Consolas" pitchFamily="34" charset="-122"/>
+                <a:cs typeface="Consolas" pitchFamily="34" charset="-120"/>
+              </a:rPr>
+              <a:t>lambda</a:t>
+            </a:r>
+            <a:pPr indent="0" marL="0">
+              <a:lnSpc>
+                <a:spcPct val="118000"/>
+              </a:lnSpc>
+              <a:buNone/>
+            </a:pPr>
+            <a:r>
+              <a:rPr lang="en-US" sz="1050" dirty="0">
+                <a:solidFill>
+                  <a:srgbClr val="D4D4D4"/>
+                </a:solidFill>
+                <a:latin typeface="Consolas" pitchFamily="34" charset="0"/>
+                <a:ea typeface="Consolas" pitchFamily="34" charset="-122"/>
+                <a:cs typeface="Consolas" pitchFamily="34" charset="-120"/>
+              </a:rPr>
+              <a:t> </a:t>
+            </a:r>
+            <a:pPr indent="0" marL="0">
+              <a:lnSpc>
+                <a:spcPct val="118000"/>
+              </a:lnSpc>
+              <a:buNone/>
+            </a:pPr>
+            <a:r>
+              <a:rPr lang="en-US" sz="1050" dirty="0">
+                <a:solidFill>
+                  <a:srgbClr val="D4D4D4"/>
+                </a:solidFill>
+                <a:latin typeface="Consolas" pitchFamily="34" charset="0"/>
+                <a:ea typeface="Consolas" pitchFamily="34" charset="-122"/>
+                <a:cs typeface="Consolas" pitchFamily="34" charset="-120"/>
+              </a:rPr>
+              <a:t>s</a:t>
+            </a:r>
+            <a:pPr indent="0" marL="0">
+              <a:lnSpc>
+                <a:spcPct val="118000"/>
+              </a:lnSpc>
+              <a:buNone/>
+            </a:pPr>
+            <a:r>
+              <a:rPr lang="en-US" sz="1050" dirty="0">
+                <a:solidFill>
+                  <a:srgbClr val="D4D4D4"/>
+                </a:solidFill>
+                <a:latin typeface="Consolas" pitchFamily="34" charset="0"/>
+                <a:ea typeface="Consolas" pitchFamily="34" charset="-122"/>
+                <a:cs typeface="Consolas" pitchFamily="34" charset="-120"/>
+              </a:rPr>
+              <a:t>:</a:t>
+            </a:r>
+            <a:pPr indent="0" marL="0">
+              <a:lnSpc>
+                <a:spcPct val="118000"/>
+              </a:lnSpc>
+              <a:buNone/>
+            </a:pPr>
+            <a:r>
+              <a:rPr lang="en-US" sz="1050" dirty="0">
+                <a:solidFill>
+                  <a:srgbClr val="D4D4D4"/>
+                </a:solidFill>
+                <a:latin typeface="Consolas" pitchFamily="34" charset="0"/>
+                <a:ea typeface="Consolas" pitchFamily="34" charset="-122"/>
+                <a:cs typeface="Consolas" pitchFamily="34" charset="-120"/>
+              </a:rPr>
+              <a:t> </a:t>
+            </a:r>
+            <a:pPr indent="0" marL="0">
+              <a:lnSpc>
+                <a:spcPct val="118000"/>
+              </a:lnSpc>
+              <a:buNone/>
+            </a:pPr>
+            <a:r>
+              <a:rPr lang="en-US" sz="1050" dirty="0">
+                <a:solidFill>
+                  <a:srgbClr val="CE9178"/>
+                </a:solidFill>
+                <a:latin typeface="Consolas" pitchFamily="34" charset="0"/>
+                <a:ea typeface="Consolas" pitchFamily="34" charset="-122"/>
+                <a:cs typeface="Consolas" pitchFamily="34" charset="-120"/>
+              </a:rPr>
+              <a:t>"exception_research"</a:t>
+            </a:r>
+            <a:pPr indent="0" marL="0">
+              <a:lnSpc>
+                <a:spcPct val="118000"/>
+              </a:lnSpc>
+              <a:buNone/>
+            </a:pPr>
+            <a:r>
+              <a:rPr lang="en-US" sz="1050" dirty="0">
+                <a:solidFill>
+                  <a:srgbClr val="D4D4D4"/>
+                </a:solidFill>
+                <a:latin typeface="Consolas" pitchFamily="34" charset="0"/>
+                <a:ea typeface="Consolas" pitchFamily="34" charset="-122"/>
+                <a:cs typeface="Consolas" pitchFamily="34" charset="-120"/>
+              </a:rPr>
+              <a:t> </a:t>
+            </a:r>
+            <a:pPr indent="0" marL="0">
+              <a:lnSpc>
+                <a:spcPct val="118000"/>
+              </a:lnSpc>
+              <a:buNone/>
+            </a:pPr>
+            <a:r>
+              <a:rPr lang="en-US" sz="1050" dirty="0">
+                <a:solidFill>
+                  <a:srgbClr val="C586C0"/>
+                </a:solidFill>
+                <a:latin typeface="Consolas" pitchFamily="34" charset="0"/>
+                <a:ea typeface="Consolas" pitchFamily="34" charset="-122"/>
+                <a:cs typeface="Consolas" pitchFamily="34" charset="-120"/>
+              </a:rPr>
+              <a:t>if</a:t>
+            </a:r>
+            <a:pPr indent="0" marL="0">
+              <a:lnSpc>
+                <a:spcPct val="118000"/>
+              </a:lnSpc>
+              <a:buNone/>
+            </a:pPr>
+            <a:r>
+              <a:rPr lang="en-US" sz="1050" dirty="0">
+                <a:solidFill>
+                  <a:srgbClr val="D4D4D4"/>
+                </a:solidFill>
+                <a:latin typeface="Consolas" pitchFamily="34" charset="0"/>
+                <a:ea typeface="Consolas" pitchFamily="34" charset="-122"/>
+                <a:cs typeface="Consolas" pitchFamily="34" charset="-120"/>
+              </a:rPr>
+              <a:t> </a:t>
+            </a:r>
+            <a:pPr indent="0" marL="0">
+              <a:lnSpc>
+                <a:spcPct val="118000"/>
+              </a:lnSpc>
+              <a:buNone/>
+            </a:pPr>
+            <a:r>
+              <a:rPr lang="en-US" sz="1050" dirty="0">
+                <a:solidFill>
+                  <a:srgbClr val="D4D4D4"/>
+                </a:solidFill>
+                <a:latin typeface="Consolas" pitchFamily="34" charset="0"/>
+                <a:ea typeface="Consolas" pitchFamily="34" charset="-122"/>
+                <a:cs typeface="Consolas" pitchFamily="34" charset="-120"/>
+              </a:rPr>
+              <a:t>s</a:t>
+            </a:r>
+            <a:pPr indent="0" marL="0">
+              <a:lnSpc>
+                <a:spcPct val="118000"/>
+              </a:lnSpc>
+              <a:buNone/>
+            </a:pPr>
+            <a:r>
+              <a:rPr lang="en-US" sz="1050" dirty="0">
+                <a:solidFill>
+                  <a:srgbClr val="D4D4D4"/>
+                </a:solidFill>
+                <a:latin typeface="Consolas" pitchFamily="34" charset="0"/>
+                <a:ea typeface="Consolas" pitchFamily="34" charset="-122"/>
+                <a:cs typeface="Consolas" pitchFamily="34" charset="-120"/>
+              </a:rPr>
+              <a:t>.</a:t>
+            </a:r>
+            <a:pPr indent="0" marL="0">
+              <a:lnSpc>
+                <a:spcPct val="118000"/>
+              </a:lnSpc>
+              <a:buNone/>
+            </a:pPr>
+            <a:r>
+              <a:rPr lang="en-US" sz="1050" dirty="0">
+                <a:solidFill>
+                  <a:srgbClr val="D4D4D4"/>
+                </a:solidFill>
+                <a:latin typeface="Consolas" pitchFamily="34" charset="0"/>
+                <a:ea typeface="Consolas" pitchFamily="34" charset="-122"/>
+                <a:cs typeface="Consolas" pitchFamily="34" charset="-120"/>
+              </a:rPr>
+              <a:t>validation_failed
+</a:t>
+            </a:r>
+            <a:pPr indent="0" marL="0">
+              <a:lnSpc>
+                <a:spcPct val="118000"/>
+              </a:lnSpc>
+              <a:buNone/>
+            </a:pPr>
+            <a:r>
+              <a:rPr lang="en-US" sz="1050" dirty="0">
+                <a:solidFill>
+                  <a:srgbClr val="D4D4D4"/>
+                </a:solidFill>
+                <a:latin typeface="Consolas" pitchFamily="34" charset="0"/>
+                <a:ea typeface="Consolas" pitchFamily="34" charset="-122"/>
+                <a:cs typeface="Consolas" pitchFamily="34" charset="-120"/>
+              </a:rPr>
+              <a:t>              </a:t>
+            </a:r>
+            <a:pPr indent="0" marL="0">
+              <a:lnSpc>
+                <a:spcPct val="118000"/>
+              </a:lnSpc>
+              <a:buNone/>
+            </a:pPr>
+            <a:r>
+              <a:rPr lang="en-US" sz="1050" dirty="0">
+                <a:solidFill>
+                  <a:srgbClr val="C586C0"/>
+                </a:solidFill>
+                <a:latin typeface="Consolas" pitchFamily="34" charset="0"/>
+                <a:ea typeface="Consolas" pitchFamily="34" charset="-122"/>
+                <a:cs typeface="Consolas" pitchFamily="34" charset="-120"/>
+              </a:rPr>
+              <a:t>else</a:t>
+            </a:r>
+            <a:pPr indent="0" marL="0">
+              <a:lnSpc>
+                <a:spcPct val="118000"/>
+              </a:lnSpc>
+              <a:buNone/>
+            </a:pPr>
+            <a:r>
+              <a:rPr lang="en-US" sz="1050" dirty="0">
+                <a:solidFill>
+                  <a:srgbClr val="D4D4D4"/>
+                </a:solidFill>
+                <a:latin typeface="Consolas" pitchFamily="34" charset="0"/>
+                <a:ea typeface="Consolas" pitchFamily="34" charset="-122"/>
+                <a:cs typeface="Consolas" pitchFamily="34" charset="-120"/>
+              </a:rPr>
+              <a:t> </a:t>
+            </a:r>
+            <a:pPr indent="0" marL="0">
+              <a:lnSpc>
+                <a:spcPct val="118000"/>
+              </a:lnSpc>
+              <a:buNone/>
+            </a:pPr>
+            <a:r>
+              <a:rPr lang="en-US" sz="1050" dirty="0">
+                <a:solidFill>
+                  <a:srgbClr val="CE9178"/>
+                </a:solidFill>
+                <a:latin typeface="Consolas" pitchFamily="34" charset="0"/>
+                <a:ea typeface="Consolas" pitchFamily="34" charset="-122"/>
+                <a:cs typeface="Consolas" pitchFamily="34" charset="-120"/>
+              </a:rPr>
+              <a:t>"coverage_check"</a:t>
+            </a:r>
+            <a:pPr indent="0" marL="0">
+              <a:lnSpc>
+                <a:spcPct val="118000"/>
+              </a:lnSpc>
+              <a:buNone/>
+            </a:pPr>
+            <a:r>
+              <a:rPr lang="en-US" sz="1050" dirty="0">
+                <a:solidFill>
+                  <a:srgbClr val="D4D4D4"/>
+                </a:solidFill>
+                <a:latin typeface="Consolas" pitchFamily="34" charset="0"/>
+                <a:ea typeface="Consolas" pitchFamily="34" charset="-122"/>
+                <a:cs typeface="Consolas" pitchFamily="34" charset="-120"/>
+              </a:rPr>
+              <a:t>,
+</a:t>
+            </a:r>
+            <a:pPr indent="0" marL="0">
+              <a:lnSpc>
+                <a:spcPct val="118000"/>
+              </a:lnSpc>
+              <a:buNone/>
+            </a:pPr>
+            <a:r>
+              <a:rPr lang="en-US" sz="1050" dirty="0">
+                <a:solidFill>
+                  <a:srgbClr val="D4D4D4"/>
+                </a:solidFill>
+                <a:latin typeface="Consolas" pitchFamily="34" charset="0"/>
+                <a:ea typeface="Consolas" pitchFamily="34" charset="-122"/>
+                <a:cs typeface="Consolas" pitchFamily="34" charset="-120"/>
+              </a:rPr>
+              <a:t>)
+</a:t>
+            </a:r>
+            <a:endParaRPr lang="en-US" sz="1050" dirty="0"/>
+          </a:p>
+        </p:txBody>
+      </p:sp>
+      <p:sp>
+        <p:nvSpPr>
+          <p:cNvPr id="7" name="Text 5"/>
+          <p:cNvSpPr txBox="1"/>
+          <p:nvPr/>
+        </p:nvSpPr>
+        <p:spPr>
+          <a:xfrm>
+            <a:off x="7543800" y="1005840"/>
+            <a:ext cx="4279392" cy="219456"/>
+          </a:xfrm>
+          <a:prstGeom prst="rect">
+            <a:avLst/>
+          </a:prstGeom>
+          <a:noFill/>
+          <a:ln/>
+        </p:spPr>
+        <p:txBody>
+          <a:bodyPr wrap="square" lIns="0" tIns="0" rIns="0" bIns="0" rtlCol="0" anchor="ctr"/>
+          <a:lstStyle/>
+          <a:p>
+            <a:pPr indent="0" marL="0">
+              <a:buNone/>
+            </a:pPr>
+            <a:r>
+              <a:rPr lang="en-US" sz="950" b="1" spc="100" kern="0" dirty="0">
+                <a:solidFill>
+                  <a:srgbClr val="6B7787"/>
+                </a:solidFill>
+                <a:latin typeface="Arial" pitchFamily="34" charset="0"/>
+                <a:ea typeface="Arial" pitchFamily="34" charset="-122"/>
+                <a:cs typeface="Arial" pitchFamily="34" charset="-120"/>
+              </a:rPr>
+              <a:t>WHY NOT AN AGENT</a:t>
+            </a:r>
+            <a:endParaRPr lang="en-US" sz="950" dirty="0"/>
+          </a:p>
+        </p:txBody>
+      </p:sp>
+      <p:sp>
+        <p:nvSpPr>
+          <p:cNvPr id="8" name="Shape 6"/>
+          <p:cNvSpPr/>
+          <p:nvPr/>
+        </p:nvSpPr>
+        <p:spPr>
+          <a:xfrm>
+            <a:off x="7543800" y="1380744"/>
+            <a:ext cx="64008" cy="64008"/>
+          </a:xfrm>
+          <a:prstGeom prst="ellipse">
+            <a:avLst/>
+          </a:prstGeom>
+          <a:solidFill>
+            <a:srgbClr val="6B7787"/>
+          </a:solidFill>
+          <a:ln/>
+        </p:spPr>
+      </p:sp>
+      <p:sp>
+        <p:nvSpPr>
+          <p:cNvPr id="9" name="Text 7"/>
+          <p:cNvSpPr txBox="1"/>
+          <p:nvPr/>
+        </p:nvSpPr>
+        <p:spPr>
+          <a:xfrm>
+            <a:off x="7699248" y="1316736"/>
+            <a:ext cx="4069080" cy="432816"/>
+          </a:xfrm>
+          <a:prstGeom prst="rect">
+            <a:avLst/>
+          </a:prstGeom>
+          <a:noFill/>
+          <a:ln/>
+        </p:spPr>
+        <p:txBody>
+          <a:bodyPr wrap="square" lIns="0" tIns="0" rIns="0" bIns="0" rtlCol="0" anchor="ctr"/>
+          <a:lstStyle/>
+          <a:p>
+            <a:pPr indent="0" marL="0">
+              <a:lnSpc>
+                <a:spcPct val="120000"/>
+              </a:lnSpc>
+              <a:buNone/>
+            </a:pPr>
+            <a:r>
+              <a:rPr lang="en-US" sz="1000" dirty="0">
+                <a:solidFill>
+                  <a:srgbClr val="2A3340"/>
+                </a:solidFill>
+                <a:latin typeface="Arial" pitchFamily="34" charset="0"/>
+                <a:ea typeface="Arial" pitchFamily="34" charset="-122"/>
+                <a:cs typeface="Arial" pitchFamily="34" charset="-120"/>
+              </a:rPr>
+              <a:t>No prompt, no completion call: three pure lookups</a:t>
+            </a:r>
+            <a:endParaRPr lang="en-US" sz="1000" dirty="0"/>
+          </a:p>
+          <a:p>
+            <a:pPr indent="0" marL="0">
+              <a:lnSpc>
+                <a:spcPct val="120000"/>
+              </a:lnSpc>
+              <a:buNone/>
+            </a:pPr>
+            <a:r>
+              <a:rPr lang="en-US" sz="1000" dirty="0">
+                <a:solidFill>
+                  <a:srgbClr val="2A3340"/>
+                </a:solidFill>
+                <a:latin typeface="Arial" pitchFamily="34" charset="0"/>
+                <a:ea typeface="Arial" pitchFamily="34" charset="-122"/>
+                <a:cs typeface="Arial" pitchFamily="34" charset="-120"/>
+              </a:rPr>
+              <a:t>against the CPR/CVR register, policy admin, and IDB.</a:t>
+            </a:r>
+            <a:endParaRPr lang="en-US" sz="1000" dirty="0"/>
+          </a:p>
+        </p:txBody>
+      </p:sp>
+      <p:sp>
+        <p:nvSpPr>
+          <p:cNvPr id="10" name="Shape 8"/>
+          <p:cNvSpPr/>
+          <p:nvPr/>
+        </p:nvSpPr>
+        <p:spPr>
+          <a:xfrm>
+            <a:off x="7543800" y="1996440"/>
+            <a:ext cx="64008" cy="64008"/>
+          </a:xfrm>
+          <a:prstGeom prst="ellipse">
+            <a:avLst/>
+          </a:prstGeom>
+          <a:solidFill>
+            <a:srgbClr val="6B7787"/>
+          </a:solidFill>
+          <a:ln/>
+        </p:spPr>
+      </p:sp>
+      <p:sp>
+        <p:nvSpPr>
+          <p:cNvPr id="11" name="Text 9"/>
+          <p:cNvSpPr txBox="1"/>
+          <p:nvPr/>
+        </p:nvSpPr>
+        <p:spPr>
+          <a:xfrm>
+            <a:off x="7699248" y="1932432"/>
+            <a:ext cx="4069080" cy="432816"/>
+          </a:xfrm>
+          <a:prstGeom prst="rect">
+            <a:avLst/>
+          </a:prstGeom>
+          <a:noFill/>
+          <a:ln/>
+        </p:spPr>
+        <p:txBody>
+          <a:bodyPr wrap="square" lIns="0" tIns="0" rIns="0" bIns="0" rtlCol="0" anchor="ctr"/>
+          <a:lstStyle/>
+          <a:p>
+            <a:pPr indent="0" marL="0">
+              <a:lnSpc>
+                <a:spcPct val="120000"/>
+              </a:lnSpc>
+              <a:buNone/>
+            </a:pPr>
+            <a:r>
+              <a:rPr lang="en-US" sz="1000" dirty="0">
+                <a:solidFill>
+                  <a:srgbClr val="2A3340"/>
+                </a:solidFill>
+                <a:latin typeface="Arial" pitchFamily="34" charset="0"/>
+                <a:ea typeface="Arial" pitchFamily="34" charset="-122"/>
+                <a:cs typeface="Arial" pitchFamily="34" charset="-120"/>
+              </a:rPr>
+              <a:t>Runs in milliseconds and costs nothing to run; same input</a:t>
+            </a:r>
+            <a:endParaRPr lang="en-US" sz="1000" dirty="0"/>
+          </a:p>
+          <a:p>
+            <a:pPr indent="0" marL="0">
+              <a:lnSpc>
+                <a:spcPct val="120000"/>
+              </a:lnSpc>
+              <a:buNone/>
+            </a:pPr>
+            <a:r>
+              <a:rPr lang="en-US" sz="1000" dirty="0">
+                <a:solidFill>
+                  <a:srgbClr val="2A3340"/>
+                </a:solidFill>
+                <a:latin typeface="Arial" pitchFamily="34" charset="0"/>
+                <a:ea typeface="Arial" pitchFamily="34" charset="-122"/>
+                <a:cs typeface="Arial" pitchFamily="34" charset="-120"/>
+              </a:rPr>
+              <a:t>always gives the same output.</a:t>
+            </a:r>
+            <a:endParaRPr lang="en-US" sz="1000" dirty="0"/>
+          </a:p>
+        </p:txBody>
+      </p:sp>
+      <p:sp>
+        <p:nvSpPr>
+          <p:cNvPr id="12" name="Shape 10"/>
+          <p:cNvSpPr/>
+          <p:nvPr/>
+        </p:nvSpPr>
+        <p:spPr>
+          <a:xfrm>
+            <a:off x="7543800" y="2612136"/>
+            <a:ext cx="64008" cy="64008"/>
+          </a:xfrm>
+          <a:prstGeom prst="ellipse">
+            <a:avLst/>
+          </a:prstGeom>
+          <a:solidFill>
+            <a:srgbClr val="6B7787"/>
+          </a:solidFill>
+          <a:ln/>
+        </p:spPr>
+      </p:sp>
+      <p:sp>
+        <p:nvSpPr>
+          <p:cNvPr id="13" name="Text 11"/>
+          <p:cNvSpPr txBox="1"/>
+          <p:nvPr/>
+        </p:nvSpPr>
+        <p:spPr>
+          <a:xfrm>
+            <a:off x="7699248" y="2548128"/>
+            <a:ext cx="4069080" cy="432816"/>
+          </a:xfrm>
+          <a:prstGeom prst="rect">
+            <a:avLst/>
+          </a:prstGeom>
+          <a:noFill/>
+          <a:ln/>
+        </p:spPr>
+        <p:txBody>
+          <a:bodyPr wrap="square" lIns="0" tIns="0" rIns="0" bIns="0" rtlCol="0" anchor="ctr"/>
+          <a:lstStyle/>
+          <a:p>
+            <a:pPr indent="0" marL="0">
+              <a:lnSpc>
+                <a:spcPct val="120000"/>
+              </a:lnSpc>
+              <a:buNone/>
+            </a:pPr>
+            <a:r>
+              <a:rPr lang="en-US" sz="1000" dirty="0">
+                <a:solidFill>
+                  <a:srgbClr val="2A3340"/>
+                </a:solidFill>
+                <a:latin typeface="Arial" pitchFamily="34" charset="0"/>
+                <a:ea typeface="Arial" pitchFamily="34" charset="-122"/>
+                <a:cs typeface="Arial" pitchFamily="34" charset="-120"/>
+              </a:rPr>
+              <a:t>Unit-tested like any other function, not evaluated</a:t>
+            </a:r>
+            <a:endParaRPr lang="en-US" sz="1000" dirty="0"/>
+          </a:p>
+          <a:p>
+            <a:pPr indent="0" marL="0">
+              <a:lnSpc>
+                <a:spcPct val="120000"/>
+              </a:lnSpc>
+              <a:buNone/>
+            </a:pPr>
+            <a:r>
+              <a:rPr lang="en-US" sz="1000" dirty="0">
+                <a:solidFill>
+                  <a:srgbClr val="2A3340"/>
+                </a:solidFill>
+                <a:latin typeface="Arial" pitchFamily="34" charset="0"/>
+                <a:ea typeface="Arial" pitchFamily="34" charset="-122"/>
+                <a:cs typeface="Arial" pitchFamily="34" charset="-120"/>
+              </a:rPr>
+              <a:t>like a prompt.</a:t>
+            </a:r>
+            <a:endParaRPr lang="en-US" sz="1000" dirty="0"/>
+          </a:p>
+        </p:txBody>
+      </p:sp>
+      <p:sp>
+        <p:nvSpPr>
+          <p:cNvPr id="14" name="Shape 12"/>
+          <p:cNvSpPr/>
+          <p:nvPr/>
+        </p:nvSpPr>
+        <p:spPr>
+          <a:xfrm>
+            <a:off x="7543800" y="3227832"/>
+            <a:ext cx="64008" cy="64008"/>
+          </a:xfrm>
+          <a:prstGeom prst="ellipse">
+            <a:avLst/>
+          </a:prstGeom>
+          <a:solidFill>
+            <a:srgbClr val="6B7787"/>
+          </a:solidFill>
+          <a:ln/>
+        </p:spPr>
+      </p:sp>
+      <p:sp>
+        <p:nvSpPr>
+          <p:cNvPr id="15" name="Text 13"/>
+          <p:cNvSpPr txBox="1"/>
+          <p:nvPr/>
+        </p:nvSpPr>
+        <p:spPr>
+          <a:xfrm>
+            <a:off x="7699248" y="3163824"/>
+            <a:ext cx="4069080" cy="432816"/>
+          </a:xfrm>
+          <a:prstGeom prst="rect">
+            <a:avLst/>
+          </a:prstGeom>
+          <a:noFill/>
+          <a:ln/>
+        </p:spPr>
+        <p:txBody>
+          <a:bodyPr wrap="square" lIns="0" tIns="0" rIns="0" bIns="0" rtlCol="0" anchor="ctr"/>
+          <a:lstStyle/>
+          <a:p>
+            <a:pPr indent="0" marL="0">
+              <a:lnSpc>
+                <a:spcPct val="120000"/>
+              </a:lnSpc>
+              <a:buNone/>
+            </a:pPr>
+            <a:r>
+              <a:rPr lang="en-US" sz="1000" dirty="0">
+                <a:solidFill>
+                  <a:srgbClr val="2A3340"/>
+                </a:solidFill>
+                <a:latin typeface="Arial" pitchFamily="34" charset="0"/>
+                <a:ea typeface="Arial" pitchFamily="34" charset="-122"/>
+                <a:cs typeface="Arial" pitchFamily="34" charset="-120"/>
+              </a:rPr>
+              <a:t>Checkpointed in Postgres: a claim put on hold resumes</a:t>
+            </a:r>
+            <a:endParaRPr lang="en-US" sz="1000" dirty="0"/>
+          </a:p>
+          <a:p>
+            <a:pPr indent="0" marL="0">
+              <a:lnSpc>
+                <a:spcPct val="120000"/>
+              </a:lnSpc>
+              <a:buNone/>
+            </a:pPr>
+            <a:r>
+              <a:rPr lang="en-US" sz="1000" dirty="0">
+                <a:solidFill>
+                  <a:srgbClr val="2A3340"/>
+                </a:solidFill>
+                <a:latin typeface="Arial" pitchFamily="34" charset="0"/>
+                <a:ea typeface="Arial" pitchFamily="34" charset="-122"/>
+                <a:cs typeface="Arial" pitchFamily="34" charset="-120"/>
+              </a:rPr>
+              <a:t>exactly where it left off.</a:t>
+            </a:r>
+            <a:endParaRPr lang="en-US" sz="1000" dirty="0"/>
+          </a:p>
+        </p:txBody>
+      </p:sp>
+      <p:sp>
+        <p:nvSpPr>
+          <p:cNvPr id="16" name="Shape 14"/>
+          <p:cNvSpPr/>
+          <p:nvPr/>
+        </p:nvSpPr>
+        <p:spPr>
+          <a:xfrm>
+            <a:off x="7543800" y="3977640"/>
+            <a:ext cx="4279392" cy="1188720"/>
+          </a:xfrm>
+          <a:prstGeom prst="roundRect">
+            <a:avLst>
+              <a:gd name="adj" fmla="val 4615"/>
+            </a:avLst>
+          </a:prstGeom>
+          <a:solidFill>
+            <a:srgbClr val="ECEFF3"/>
+          </a:solidFill>
+          <a:ln w="12700">
+            <a:solidFill>
+              <a:srgbClr val="6B7787"/>
+            </a:solidFill>
+            <a:prstDash val="solid"/>
+          </a:ln>
+        </p:spPr>
+      </p:sp>
+      <p:sp>
+        <p:nvSpPr>
+          <p:cNvPr id="17" name="Text 15"/>
+          <p:cNvSpPr txBox="1"/>
+          <p:nvPr/>
+        </p:nvSpPr>
+        <p:spPr>
+          <a:xfrm>
+            <a:off x="7708392" y="3977640"/>
+            <a:ext cx="3950208" cy="1188720"/>
+          </a:xfrm>
+          <a:prstGeom prst="rect">
+            <a:avLst/>
+          </a:prstGeom>
+          <a:noFill/>
+          <a:ln/>
+        </p:spPr>
+        <p:txBody>
+          <a:bodyPr wrap="square" lIns="0" tIns="0" rIns="0" bIns="0" rtlCol="0" anchor="ctr"/>
+          <a:lstStyle/>
+          <a:p>
+            <a:pPr indent="0" marL="0">
+              <a:lnSpc>
+                <a:spcPct val="120000"/>
+              </a:lnSpc>
+              <a:buNone/>
+            </a:pPr>
+            <a:r>
+              <a:rPr lang="en-US" sz="1000" b="1" dirty="0">
+                <a:solidFill>
+                  <a:srgbClr val="6B7787"/>
+                </a:solidFill>
+                <a:latin typeface="Arial" pitchFamily="34" charset="0"/>
+                <a:ea typeface="Arial" pitchFamily="34" charset="-122"/>
+                <a:cs typeface="Arial" pitchFamily="34" charset="-120"/>
+              </a:rPr>
+              <a:t>So what:  </a:t>
+            </a:r>
+            <a:pPr indent="0" marL="0">
+              <a:lnSpc>
+                <a:spcPct val="120000"/>
+              </a:lnSpc>
+              <a:buNone/>
+            </a:pPr>
+            <a:r>
+              <a:rPr lang="en-US" sz="1000" dirty="0">
+                <a:solidFill>
+                  <a:srgbClr val="2A3340"/>
+                </a:solidFill>
+                <a:latin typeface="Arial" pitchFamily="34" charset="0"/>
+                <a:ea typeface="Arial" pitchFamily="34" charset="-122"/>
+                <a:cs typeface="Arial" pitchFamily="34" charset="-120"/>
+              </a:rPr>
+              <a:t>only the failure path calls a model, Exception Research, and only for the ~20% of claims that need judgement. Everything deterministic stays deterministic.</a:t>
+            </a:r>
+            <a:endParaRPr lang="en-US" sz="1000" dirty="0"/>
+          </a:p>
+        </p:txBody>
+      </p:sp>
+    </p:spTree>
+  </p:cSld>
+  <p:clrMapOvr>
+    <a:masterClrMapping/>
+  </p:clrMapOvr>
+</p:sld>
+</file>
+
+<file path=ppt/slides/slide11.xml><?xml version="1.0" encoding="utf-8"?>
+<p:sld xmlns:a="http://schemas.openxmlformats.org/drawingml/2006/main" xmlns:r="http://schemas.openxmlformats.org/officeDocument/2006/relationships" xmlns:p="http://schemas.openxmlformats.org/presentationml/2006/main" show="0">
+  <p:cSld name="Slide 11">
+    <p:bg>
+      <p:bgPr>
+        <a:solidFill>
+          <a:srgbClr val="FFFFFF"/>
+        </a:solidFill>
+      </p:bgPr>
+    </p:bg>
+    <p:spTree>
+      <p:nvGrpSpPr>
+        <p:cNvPr id="1" name=""/>
+        <p:cNvGrpSpPr/>
+        <p:nvPr/>
+      </p:nvGrpSpPr>
+      <p:grpSpPr>
+        <a:xfrm>
+          <a:off x="0" y="0"/>
+          <a:ext cx="0" cy="0"/>
+          <a:chOff x="0" y="0"/>
+          <a:chExt cx="0" cy="0"/>
+        </a:xfrm>
+      </p:grpSpPr>
+      <p:sp>
+        <p:nvSpPr>
+          <p:cNvPr id="2" name="Text 0"/>
+          <p:cNvSpPr txBox="1"/>
+          <p:nvPr/>
+        </p:nvSpPr>
+        <p:spPr>
+          <a:xfrm>
+            <a:off x="365760" y="256032"/>
+            <a:ext cx="10058400" cy="365760"/>
+          </a:xfrm>
+          <a:prstGeom prst="rect">
+            <a:avLst/>
+          </a:prstGeom>
+          <a:noFill/>
+          <a:ln/>
+        </p:spPr>
+        <p:txBody>
+          <a:bodyPr wrap="square" lIns="0" tIns="0" rIns="0" bIns="0" rtlCol="0" anchor="ctr"/>
+          <a:lstStyle/>
+          <a:p>
+            <a:pPr indent="0" marL="0">
+              <a:buNone/>
+            </a:pPr>
+            <a:r>
+              <a:rPr lang="en-US" sz="1600" b="1" dirty="0">
+                <a:solidFill>
+                  <a:srgbClr val="1B2430"/>
+                </a:solidFill>
+                <a:latin typeface="Cambria" pitchFamily="34" charset="0"/>
+                <a:ea typeface="Cambria" pitchFamily="34" charset="-122"/>
+                <a:cs typeface="Cambria" pitchFamily="34" charset="-120"/>
+              </a:rPr>
+              <a:t>Extraction Agent: one call returns a typed schema, not free text</a:t>
+            </a:r>
+            <a:endParaRPr lang="en-US" sz="1600" dirty="0"/>
+          </a:p>
+        </p:txBody>
+      </p:sp>
+      <p:sp>
+        <p:nvSpPr>
+          <p:cNvPr id="3" name="Text 1"/>
+          <p:cNvSpPr txBox="1"/>
+          <p:nvPr/>
+        </p:nvSpPr>
+        <p:spPr>
+          <a:xfrm>
+            <a:off x="9966960" y="146304"/>
+            <a:ext cx="1856232" cy="219456"/>
+          </a:xfrm>
+          <a:prstGeom prst="rect">
+            <a:avLst/>
+          </a:prstGeom>
+          <a:noFill/>
+          <a:ln/>
+        </p:spPr>
+        <p:txBody>
+          <a:bodyPr wrap="square" lIns="0" tIns="0" rIns="0" bIns="0" rtlCol="0" anchor="ctr"/>
+          <a:lstStyle/>
+          <a:p>
+            <a:pPr algn="r" indent="0" marL="0">
+              <a:buNone/>
+            </a:pPr>
+            <a:r>
+              <a:rPr lang="en-US" sz="850" b="1" spc="120" kern="0" dirty="0">
+                <a:solidFill>
+                  <a:srgbClr val="5B6472"/>
+                </a:solidFill>
+                <a:latin typeface="Arial" pitchFamily="34" charset="0"/>
+                <a:ea typeface="Arial" pitchFamily="34" charset="-122"/>
+                <a:cs typeface="Arial" pitchFamily="34" charset="-120"/>
+              </a:rPr>
+              <a:t>BACKUP · IF ASKED</a:t>
+            </a:r>
+            <a:endParaRPr lang="en-US" sz="850" dirty="0"/>
+          </a:p>
+        </p:txBody>
+      </p:sp>
+      <p:sp>
+        <p:nvSpPr>
+          <p:cNvPr id="4" name="Text 2"/>
+          <p:cNvSpPr txBox="1"/>
+          <p:nvPr/>
+        </p:nvSpPr>
+        <p:spPr>
+          <a:xfrm>
+            <a:off x="365760" y="621792"/>
+            <a:ext cx="10789920" cy="237744"/>
+          </a:xfrm>
+          <a:prstGeom prst="rect">
+            <a:avLst/>
+          </a:prstGeom>
+          <a:noFill/>
+          <a:ln/>
+        </p:spPr>
+        <p:txBody>
+          <a:bodyPr wrap="square" lIns="0" tIns="0" rIns="0" bIns="0" rtlCol="0" anchor="ctr"/>
+          <a:lstStyle/>
+          <a:p>
+            <a:pPr indent="0" marL="0">
+              <a:buNone/>
+            </a:pPr>
+            <a:r>
+              <a:rPr lang="en-US" sz="1050" dirty="0">
+                <a:solidFill>
+                  <a:srgbClr val="5B6472"/>
+                </a:solidFill>
+                <a:latin typeface="Arial" pitchFamily="34" charset="0"/>
+                <a:ea typeface="Arial" pitchFamily="34" charset="-122"/>
+                <a:cs typeface="Arial" pitchFamily="34" charset="-120"/>
+              </a:rPr>
+              <a:t>Structured output: the schema is a Pydantic model, so a missing field is null, never a guess</a:t>
+            </a:r>
+            <a:endParaRPr lang="en-US" sz="1050" dirty="0"/>
+          </a:p>
+        </p:txBody>
+      </p:sp>
+      <p:sp>
+        <p:nvSpPr>
+          <p:cNvPr id="5" name="Shape 3"/>
+          <p:cNvSpPr/>
+          <p:nvPr/>
+        </p:nvSpPr>
+        <p:spPr>
+          <a:xfrm>
+            <a:off x="365760" y="1005840"/>
+            <a:ext cx="11457432" cy="5074920"/>
+          </a:xfrm>
+          <a:prstGeom prst="roundRect">
+            <a:avLst>
+              <a:gd name="adj" fmla="val 1081"/>
+            </a:avLst>
+          </a:prstGeom>
+          <a:solidFill>
+            <a:srgbClr val="1E1E1E"/>
+          </a:solidFill>
+          <a:ln/>
+        </p:spPr>
+      </p:sp>
+      <p:sp>
+        <p:nvSpPr>
+          <p:cNvPr id="6" name="Text 4"/>
+          <p:cNvSpPr txBox="1"/>
+          <p:nvPr/>
+        </p:nvSpPr>
+        <p:spPr>
+          <a:xfrm>
+            <a:off x="566928" y="1170432"/>
+            <a:ext cx="11055096" cy="4745736"/>
+          </a:xfrm>
+          <a:prstGeom prst="rect">
+            <a:avLst/>
+          </a:prstGeom>
+          <a:noFill/>
+          <a:ln/>
+        </p:spPr>
+        <p:txBody>
+          <a:bodyPr wrap="square" lIns="0" tIns="0" rIns="0" bIns="0" rtlCol="0" anchor="ctr"/>
+          <a:lstStyle/>
+          <a:p>
+            <a:pPr indent="0" marL="0">
+              <a:lnSpc>
+                <a:spcPct val="118000"/>
+              </a:lnSpc>
+              <a:buNone/>
+            </a:pPr>
+            <a:r>
+              <a:rPr lang="en-US" sz="1100" dirty="0">
+                <a:solidFill>
+                  <a:srgbClr val="C586C0"/>
+                </a:solidFill>
+                <a:latin typeface="Consolas" pitchFamily="34" charset="0"/>
+                <a:ea typeface="Consolas" pitchFamily="34" charset="-122"/>
+                <a:cs typeface="Consolas" pitchFamily="34" charset="-120"/>
+              </a:rPr>
+              <a:t>class</a:t>
+            </a:r>
+            <a:pPr indent="0" marL="0">
+              <a:lnSpc>
+                <a:spcPct val="118000"/>
+              </a:lnSpc>
+              <a:buNone/>
+            </a:pPr>
+            <a:r>
+              <a:rPr lang="en-US" sz="1100" dirty="0">
+                <a:solidFill>
+                  <a:srgbClr val="D4D4D4"/>
+                </a:solidFill>
+                <a:latin typeface="Consolas" pitchFamily="34" charset="0"/>
+                <a:ea typeface="Consolas" pitchFamily="34" charset="-122"/>
+                <a:cs typeface="Consolas" pitchFamily="34" charset="-120"/>
+              </a:rPr>
+              <a:t> </a:t>
+            </a:r>
+            <a:pPr indent="0" marL="0">
+              <a:lnSpc>
+                <a:spcPct val="118000"/>
+              </a:lnSpc>
+              <a:buNone/>
+            </a:pPr>
+            <a:r>
+              <a:rPr lang="en-US" sz="1100" dirty="0">
+                <a:solidFill>
+                  <a:srgbClr val="4EC9B0"/>
+                </a:solidFill>
+                <a:latin typeface="Consolas" pitchFamily="34" charset="0"/>
+                <a:ea typeface="Consolas" pitchFamily="34" charset="-122"/>
+                <a:cs typeface="Consolas" pitchFamily="34" charset="-120"/>
+              </a:rPr>
+              <a:t>ExtractedClaim</a:t>
+            </a:r>
+            <a:pPr indent="0" marL="0">
+              <a:lnSpc>
+                <a:spcPct val="118000"/>
+              </a:lnSpc>
+              <a:buNone/>
+            </a:pPr>
+            <a:r>
+              <a:rPr lang="en-US" sz="1100" dirty="0">
+                <a:solidFill>
+                  <a:srgbClr val="D4D4D4"/>
+                </a:solidFill>
+                <a:latin typeface="Consolas" pitchFamily="34" charset="0"/>
+                <a:ea typeface="Consolas" pitchFamily="34" charset="-122"/>
+                <a:cs typeface="Consolas" pitchFamily="34" charset="-120"/>
+              </a:rPr>
+              <a:t>(</a:t>
+            </a:r>
+            <a:pPr indent="0" marL="0">
+              <a:lnSpc>
+                <a:spcPct val="118000"/>
+              </a:lnSpc>
+              <a:buNone/>
+            </a:pPr>
+            <a:r>
+              <a:rPr lang="en-US" sz="1100" dirty="0">
+                <a:solidFill>
+                  <a:srgbClr val="4EC9B0"/>
+                </a:solidFill>
+                <a:latin typeface="Consolas" pitchFamily="34" charset="0"/>
+                <a:ea typeface="Consolas" pitchFamily="34" charset="-122"/>
+                <a:cs typeface="Consolas" pitchFamily="34" charset="-120"/>
+              </a:rPr>
+              <a:t>BaseModel</a:t>
+            </a:r>
+            <a:pPr indent="0" marL="0">
+              <a:lnSpc>
+                <a:spcPct val="118000"/>
+              </a:lnSpc>
+              <a:buNone/>
+            </a:pPr>
+            <a:r>
+              <a:rPr lang="en-US" sz="1100" dirty="0">
+                <a:solidFill>
+                  <a:srgbClr val="D4D4D4"/>
+                </a:solidFill>
+                <a:latin typeface="Consolas" pitchFamily="34" charset="0"/>
+                <a:ea typeface="Consolas" pitchFamily="34" charset="-122"/>
+                <a:cs typeface="Consolas" pitchFamily="34" charset="-120"/>
+              </a:rPr>
+              <a:t>)</a:t>
+            </a:r>
+            <a:pPr indent="0" marL="0">
+              <a:lnSpc>
+                <a:spcPct val="118000"/>
+              </a:lnSpc>
+              <a:buNone/>
+            </a:pPr>
+            <a:r>
+              <a:rPr lang="en-US" sz="1100" dirty="0">
+                <a:solidFill>
+                  <a:srgbClr val="D4D4D4"/>
+                </a:solidFill>
+                <a:latin typeface="Consolas" pitchFamily="34" charset="0"/>
+                <a:ea typeface="Consolas" pitchFamily="34" charset="-122"/>
+                <a:cs typeface="Consolas" pitchFamily="34" charset="-120"/>
+              </a:rPr>
+              <a:t>:
+</a:t>
+            </a:r>
+            <a:pPr indent="0" marL="0">
+              <a:lnSpc>
+                <a:spcPct val="118000"/>
+              </a:lnSpc>
+              <a:buNone/>
+            </a:pPr>
+            <a:r>
+              <a:rPr lang="en-US" sz="1100" dirty="0">
+                <a:solidFill>
+                  <a:srgbClr val="D4D4D4"/>
+                </a:solidFill>
+                <a:latin typeface="Consolas" pitchFamily="34" charset="0"/>
+                <a:ea typeface="Consolas" pitchFamily="34" charset="-122"/>
+                <a:cs typeface="Consolas" pitchFamily="34" charset="-120"/>
+              </a:rPr>
+              <a:t>    </a:t>
+            </a:r>
+            <a:pPr indent="0" marL="0">
+              <a:lnSpc>
+                <a:spcPct val="118000"/>
+              </a:lnSpc>
+              <a:buNone/>
+            </a:pPr>
+            <a:r>
+              <a:rPr lang="en-US" sz="1100" dirty="0">
+                <a:solidFill>
+                  <a:srgbClr val="D4D4D4"/>
+                </a:solidFill>
+                <a:latin typeface="Consolas" pitchFamily="34" charset="0"/>
+                <a:ea typeface="Consolas" pitchFamily="34" charset="-122"/>
+                <a:cs typeface="Consolas" pitchFamily="34" charset="-120"/>
+              </a:rPr>
+              <a:t>cpr</a:t>
+            </a:r>
+            <a:pPr indent="0" marL="0">
+              <a:lnSpc>
+                <a:spcPct val="118000"/>
+              </a:lnSpc>
+              <a:buNone/>
+            </a:pPr>
+            <a:r>
+              <a:rPr lang="en-US" sz="1100" dirty="0">
+                <a:solidFill>
+                  <a:srgbClr val="D4D4D4"/>
+                </a:solidFill>
+                <a:latin typeface="Consolas" pitchFamily="34" charset="0"/>
+                <a:ea typeface="Consolas" pitchFamily="34" charset="-122"/>
+                <a:cs typeface="Consolas" pitchFamily="34" charset="-120"/>
+              </a:rPr>
+              <a:t>:</a:t>
+            </a:r>
+            <a:pPr indent="0" marL="0">
+              <a:lnSpc>
+                <a:spcPct val="118000"/>
+              </a:lnSpc>
+              <a:buNone/>
+            </a:pPr>
+            <a:r>
+              <a:rPr lang="en-US" sz="1100" dirty="0">
+                <a:solidFill>
+                  <a:srgbClr val="D4D4D4"/>
+                </a:solidFill>
+                <a:latin typeface="Consolas" pitchFamily="34" charset="0"/>
+                <a:ea typeface="Consolas" pitchFamily="34" charset="-122"/>
+                <a:cs typeface="Consolas" pitchFamily="34" charset="-120"/>
+              </a:rPr>
+              <a:t> </a:t>
+            </a:r>
+            <a:pPr indent="0" marL="0">
+              <a:lnSpc>
+                <a:spcPct val="118000"/>
+              </a:lnSpc>
+              <a:buNone/>
+            </a:pPr>
+            <a:r>
+              <a:rPr lang="en-US" sz="1100" dirty="0">
+                <a:solidFill>
+                  <a:srgbClr val="4EC9B0"/>
+                </a:solidFill>
+                <a:latin typeface="Consolas" pitchFamily="34" charset="0"/>
+                <a:ea typeface="Consolas" pitchFamily="34" charset="-122"/>
+                <a:cs typeface="Consolas" pitchFamily="34" charset="-120"/>
+              </a:rPr>
+              <a:t>str</a:t>
+            </a:r>
+            <a:pPr indent="0" marL="0">
+              <a:lnSpc>
+                <a:spcPct val="118000"/>
+              </a:lnSpc>
+              <a:buNone/>
+            </a:pPr>
+            <a:r>
+              <a:rPr lang="en-US" sz="1100" dirty="0">
+                <a:solidFill>
+                  <a:srgbClr val="D4D4D4"/>
+                </a:solidFill>
+                <a:latin typeface="Consolas" pitchFamily="34" charset="0"/>
+                <a:ea typeface="Consolas" pitchFamily="34" charset="-122"/>
+                <a:cs typeface="Consolas" pitchFamily="34" charset="-120"/>
+              </a:rPr>
+              <a:t> </a:t>
+            </a:r>
+            <a:pPr indent="0" marL="0">
+              <a:lnSpc>
+                <a:spcPct val="118000"/>
+              </a:lnSpc>
+              <a:buNone/>
+            </a:pPr>
+            <a:r>
+              <a:rPr lang="en-US" sz="1100" dirty="0">
+                <a:solidFill>
+                  <a:srgbClr val="D4D4D4"/>
+                </a:solidFill>
+                <a:latin typeface="Consolas" pitchFamily="34" charset="0"/>
+                <a:ea typeface="Consolas" pitchFamily="34" charset="-122"/>
+                <a:cs typeface="Consolas" pitchFamily="34" charset="-120"/>
+              </a:rPr>
+              <a:t>|</a:t>
+            </a:r>
+            <a:pPr indent="0" marL="0">
+              <a:lnSpc>
+                <a:spcPct val="118000"/>
+              </a:lnSpc>
+              <a:buNone/>
+            </a:pPr>
+            <a:r>
+              <a:rPr lang="en-US" sz="1100" dirty="0">
+                <a:solidFill>
+                  <a:srgbClr val="D4D4D4"/>
+                </a:solidFill>
+                <a:latin typeface="Consolas" pitchFamily="34" charset="0"/>
+                <a:ea typeface="Consolas" pitchFamily="34" charset="-122"/>
+                <a:cs typeface="Consolas" pitchFamily="34" charset="-120"/>
+              </a:rPr>
+              <a:t> </a:t>
+            </a:r>
+            <a:pPr indent="0" marL="0">
+              <a:lnSpc>
+                <a:spcPct val="118000"/>
+              </a:lnSpc>
+              <a:buNone/>
+            </a:pPr>
+            <a:r>
+              <a:rPr lang="en-US" sz="1100" dirty="0">
+                <a:solidFill>
+                  <a:srgbClr val="C586C0"/>
+                </a:solidFill>
+                <a:latin typeface="Consolas" pitchFamily="34" charset="0"/>
+                <a:ea typeface="Consolas" pitchFamily="34" charset="-122"/>
+                <a:cs typeface="Consolas" pitchFamily="34" charset="-120"/>
+              </a:rPr>
+              <a:t>None
+</a:t>
+            </a:r>
+            <a:pPr indent="0" marL="0">
+              <a:lnSpc>
+                <a:spcPct val="118000"/>
+              </a:lnSpc>
+              <a:buNone/>
+            </a:pPr>
+            <a:r>
+              <a:rPr lang="en-US" sz="1100" dirty="0">
+                <a:solidFill>
+                  <a:srgbClr val="D4D4D4"/>
+                </a:solidFill>
+                <a:latin typeface="Consolas" pitchFamily="34" charset="0"/>
+                <a:ea typeface="Consolas" pitchFamily="34" charset="-122"/>
+                <a:cs typeface="Consolas" pitchFamily="34" charset="-120"/>
+              </a:rPr>
+              <a:t>    </a:t>
+            </a:r>
+            <a:pPr indent="0" marL="0">
+              <a:lnSpc>
+                <a:spcPct val="118000"/>
+              </a:lnSpc>
+              <a:buNone/>
+            </a:pPr>
+            <a:r>
+              <a:rPr lang="en-US" sz="1100" dirty="0">
+                <a:solidFill>
+                  <a:srgbClr val="D4D4D4"/>
+                </a:solidFill>
+                <a:latin typeface="Consolas" pitchFamily="34" charset="0"/>
+                <a:ea typeface="Consolas" pitchFamily="34" charset="-122"/>
+                <a:cs typeface="Consolas" pitchFamily="34" charset="-120"/>
+              </a:rPr>
+              <a:t>employer</a:t>
+            </a:r>
+            <a:pPr indent="0" marL="0">
+              <a:lnSpc>
+                <a:spcPct val="118000"/>
+              </a:lnSpc>
+              <a:buNone/>
+            </a:pPr>
+            <a:r>
+              <a:rPr lang="en-US" sz="1100" dirty="0">
+                <a:solidFill>
+                  <a:srgbClr val="D4D4D4"/>
+                </a:solidFill>
+                <a:latin typeface="Consolas" pitchFamily="34" charset="0"/>
+                <a:ea typeface="Consolas" pitchFamily="34" charset="-122"/>
+                <a:cs typeface="Consolas" pitchFamily="34" charset="-120"/>
+              </a:rPr>
+              <a:t>:</a:t>
+            </a:r>
+            <a:pPr indent="0" marL="0">
+              <a:lnSpc>
+                <a:spcPct val="118000"/>
+              </a:lnSpc>
+              <a:buNone/>
+            </a:pPr>
+            <a:r>
+              <a:rPr lang="en-US" sz="1100" dirty="0">
+                <a:solidFill>
+                  <a:srgbClr val="D4D4D4"/>
+                </a:solidFill>
+                <a:latin typeface="Consolas" pitchFamily="34" charset="0"/>
+                <a:ea typeface="Consolas" pitchFamily="34" charset="-122"/>
+                <a:cs typeface="Consolas" pitchFamily="34" charset="-120"/>
+              </a:rPr>
+              <a:t> </a:t>
+            </a:r>
+            <a:pPr indent="0" marL="0">
+              <a:lnSpc>
+                <a:spcPct val="118000"/>
+              </a:lnSpc>
+              <a:buNone/>
+            </a:pPr>
+            <a:r>
+              <a:rPr lang="en-US" sz="1100" dirty="0">
+                <a:solidFill>
+                  <a:srgbClr val="4EC9B0"/>
+                </a:solidFill>
+                <a:latin typeface="Consolas" pitchFamily="34" charset="0"/>
+                <a:ea typeface="Consolas" pitchFamily="34" charset="-122"/>
+                <a:cs typeface="Consolas" pitchFamily="34" charset="-120"/>
+              </a:rPr>
+              <a:t>str
+</a:t>
+            </a:r>
+            <a:pPr indent="0" marL="0">
+              <a:lnSpc>
+                <a:spcPct val="118000"/>
+              </a:lnSpc>
+              <a:buNone/>
+            </a:pPr>
+            <a:r>
+              <a:rPr lang="en-US" sz="1100" dirty="0">
+                <a:solidFill>
+                  <a:srgbClr val="D4D4D4"/>
+                </a:solidFill>
+                <a:latin typeface="Consolas" pitchFamily="34" charset="0"/>
+                <a:ea typeface="Consolas" pitchFamily="34" charset="-122"/>
+                <a:cs typeface="Consolas" pitchFamily="34" charset="-120"/>
+              </a:rPr>
+              <a:t>    </a:t>
+            </a:r>
+            <a:pPr indent="0" marL="0">
+              <a:lnSpc>
+                <a:spcPct val="118000"/>
+              </a:lnSpc>
+              <a:buNone/>
+            </a:pPr>
+            <a:r>
+              <a:rPr lang="en-US" sz="1100" dirty="0">
+                <a:solidFill>
+                  <a:srgbClr val="D4D4D4"/>
+                </a:solidFill>
+                <a:latin typeface="Consolas" pitchFamily="34" charset="0"/>
+                <a:ea typeface="Consolas" pitchFamily="34" charset="-122"/>
+                <a:cs typeface="Consolas" pitchFamily="34" charset="-120"/>
+              </a:rPr>
+              <a:t>incident_date</a:t>
+            </a:r>
+            <a:pPr indent="0" marL="0">
+              <a:lnSpc>
+                <a:spcPct val="118000"/>
+              </a:lnSpc>
+              <a:buNone/>
+            </a:pPr>
+            <a:r>
+              <a:rPr lang="en-US" sz="1100" dirty="0">
+                <a:solidFill>
+                  <a:srgbClr val="D4D4D4"/>
+                </a:solidFill>
+                <a:latin typeface="Consolas" pitchFamily="34" charset="0"/>
+                <a:ea typeface="Consolas" pitchFamily="34" charset="-122"/>
+                <a:cs typeface="Consolas" pitchFamily="34" charset="-120"/>
+              </a:rPr>
+              <a:t>:</a:t>
+            </a:r>
+            <a:pPr indent="0" marL="0">
+              <a:lnSpc>
+                <a:spcPct val="118000"/>
+              </a:lnSpc>
+              <a:buNone/>
+            </a:pPr>
+            <a:r>
+              <a:rPr lang="en-US" sz="1100" dirty="0">
+                <a:solidFill>
+                  <a:srgbClr val="D4D4D4"/>
+                </a:solidFill>
+                <a:latin typeface="Consolas" pitchFamily="34" charset="0"/>
+                <a:ea typeface="Consolas" pitchFamily="34" charset="-122"/>
+                <a:cs typeface="Consolas" pitchFamily="34" charset="-120"/>
+              </a:rPr>
+              <a:t> </a:t>
+            </a:r>
+            <a:pPr indent="0" marL="0">
+              <a:lnSpc>
+                <a:spcPct val="118000"/>
+              </a:lnSpc>
+              <a:buNone/>
+            </a:pPr>
+            <a:r>
+              <a:rPr lang="en-US" sz="1100" dirty="0">
+                <a:solidFill>
+                  <a:srgbClr val="4EC9B0"/>
+                </a:solidFill>
+                <a:latin typeface="Consolas" pitchFamily="34" charset="0"/>
+                <a:ea typeface="Consolas" pitchFamily="34" charset="-122"/>
+                <a:cs typeface="Consolas" pitchFamily="34" charset="-120"/>
+              </a:rPr>
+              <a:t>date
+</a:t>
+            </a:r>
+            <a:pPr indent="0" marL="0">
+              <a:lnSpc>
+                <a:spcPct val="118000"/>
+              </a:lnSpc>
+              <a:buNone/>
+            </a:pPr>
+            <a:r>
+              <a:rPr lang="en-US" sz="1100" dirty="0">
+                <a:solidFill>
+                  <a:srgbClr val="D4D4D4"/>
+                </a:solidFill>
+                <a:latin typeface="Consolas" pitchFamily="34" charset="0"/>
+                <a:ea typeface="Consolas" pitchFamily="34" charset="-122"/>
+                <a:cs typeface="Consolas" pitchFamily="34" charset="-120"/>
+              </a:rPr>
+              <a:t>    </a:t>
+            </a:r>
+            <a:pPr indent="0" marL="0">
+              <a:lnSpc>
+                <a:spcPct val="118000"/>
+              </a:lnSpc>
+              <a:buNone/>
+            </a:pPr>
+            <a:r>
+              <a:rPr lang="en-US" sz="1100" dirty="0">
+                <a:solidFill>
+                  <a:srgbClr val="D4D4D4"/>
+                </a:solidFill>
+                <a:latin typeface="Consolas" pitchFamily="34" charset="0"/>
+                <a:ea typeface="Consolas" pitchFamily="34" charset="-122"/>
+                <a:cs typeface="Consolas" pitchFamily="34" charset="-120"/>
+              </a:rPr>
+              <a:t>body_part</a:t>
+            </a:r>
+            <a:pPr indent="0" marL="0">
+              <a:lnSpc>
+                <a:spcPct val="118000"/>
+              </a:lnSpc>
+              <a:buNone/>
+            </a:pPr>
+            <a:r>
+              <a:rPr lang="en-US" sz="1100" dirty="0">
+                <a:solidFill>
+                  <a:srgbClr val="D4D4D4"/>
+                </a:solidFill>
+                <a:latin typeface="Consolas" pitchFamily="34" charset="0"/>
+                <a:ea typeface="Consolas" pitchFamily="34" charset="-122"/>
+                <a:cs typeface="Consolas" pitchFamily="34" charset="-120"/>
+              </a:rPr>
+              <a:t>:</a:t>
+            </a:r>
+            <a:pPr indent="0" marL="0">
+              <a:lnSpc>
+                <a:spcPct val="118000"/>
+              </a:lnSpc>
+              <a:buNone/>
+            </a:pPr>
+            <a:r>
+              <a:rPr lang="en-US" sz="1100" dirty="0">
+                <a:solidFill>
+                  <a:srgbClr val="D4D4D4"/>
+                </a:solidFill>
+                <a:latin typeface="Consolas" pitchFamily="34" charset="0"/>
+                <a:ea typeface="Consolas" pitchFamily="34" charset="-122"/>
+                <a:cs typeface="Consolas" pitchFamily="34" charset="-120"/>
+              </a:rPr>
+              <a:t> </a:t>
+            </a:r>
+            <a:pPr indent="0" marL="0">
+              <a:lnSpc>
+                <a:spcPct val="118000"/>
+              </a:lnSpc>
+              <a:buNone/>
+            </a:pPr>
+            <a:r>
+              <a:rPr lang="en-US" sz="1100" dirty="0">
+                <a:solidFill>
+                  <a:srgbClr val="4EC9B0"/>
+                </a:solidFill>
+                <a:latin typeface="Consolas" pitchFamily="34" charset="0"/>
+                <a:ea typeface="Consolas" pitchFamily="34" charset="-122"/>
+                <a:cs typeface="Consolas" pitchFamily="34" charset="-120"/>
+              </a:rPr>
+              <a:t>str
+</a:t>
+            </a:r>
+            <a:pPr indent="0" marL="0">
+              <a:lnSpc>
+                <a:spcPct val="118000"/>
+              </a:lnSpc>
+              <a:buNone/>
+            </a:pPr>
+            <a:r>
+              <a:rPr lang="en-US" sz="1100" dirty="0">
+                <a:solidFill>
+                  <a:srgbClr val="D4D4D4"/>
+                </a:solidFill>
+                <a:latin typeface="Consolas" pitchFamily="34" charset="0"/>
+                <a:ea typeface="Consolas" pitchFamily="34" charset="-122"/>
+                <a:cs typeface="Consolas" pitchFamily="34" charset="-120"/>
+              </a:rPr>
+              <a:t>    </a:t>
+            </a:r>
+            <a:pPr indent="0" marL="0">
+              <a:lnSpc>
+                <a:spcPct val="118000"/>
+              </a:lnSpc>
+              <a:buNone/>
+            </a:pPr>
+            <a:r>
+              <a:rPr lang="en-US" sz="1100" dirty="0">
+                <a:solidFill>
+                  <a:srgbClr val="D4D4D4"/>
+                </a:solidFill>
+                <a:latin typeface="Consolas" pitchFamily="34" charset="0"/>
+                <a:ea typeface="Consolas" pitchFamily="34" charset="-122"/>
+                <a:cs typeface="Consolas" pitchFamily="34" charset="-120"/>
+              </a:rPr>
+              <a:t>confidence</a:t>
+            </a:r>
+            <a:pPr indent="0" marL="0">
+              <a:lnSpc>
+                <a:spcPct val="118000"/>
+              </a:lnSpc>
+              <a:buNone/>
+            </a:pPr>
+            <a:r>
+              <a:rPr lang="en-US" sz="1100" dirty="0">
+                <a:solidFill>
+                  <a:srgbClr val="D4D4D4"/>
+                </a:solidFill>
+                <a:latin typeface="Consolas" pitchFamily="34" charset="0"/>
+                <a:ea typeface="Consolas" pitchFamily="34" charset="-122"/>
+                <a:cs typeface="Consolas" pitchFamily="34" charset="-120"/>
+              </a:rPr>
+              <a:t>:</a:t>
+            </a:r>
+            <a:pPr indent="0" marL="0">
+              <a:lnSpc>
+                <a:spcPct val="118000"/>
+              </a:lnSpc>
+              <a:buNone/>
+            </a:pPr>
+            <a:r>
+              <a:rPr lang="en-US" sz="1100" dirty="0">
+                <a:solidFill>
+                  <a:srgbClr val="D4D4D4"/>
+                </a:solidFill>
+                <a:latin typeface="Consolas" pitchFamily="34" charset="0"/>
+                <a:ea typeface="Consolas" pitchFamily="34" charset="-122"/>
+                <a:cs typeface="Consolas" pitchFamily="34" charset="-120"/>
+              </a:rPr>
+              <a:t> </a:t>
+            </a:r>
+            <a:pPr indent="0" marL="0">
+              <a:lnSpc>
+                <a:spcPct val="118000"/>
+              </a:lnSpc>
+              <a:buNone/>
+            </a:pPr>
+            <a:r>
+              <a:rPr lang="en-US" sz="1100" dirty="0">
+                <a:solidFill>
+                  <a:srgbClr val="4EC9B0"/>
+                </a:solidFill>
+                <a:latin typeface="Consolas" pitchFamily="34" charset="0"/>
+                <a:ea typeface="Consolas" pitchFamily="34" charset="-122"/>
+                <a:cs typeface="Consolas" pitchFamily="34" charset="-120"/>
+              </a:rPr>
+              <a:t>float
+</a:t>
+            </a:r>
+            <a:pPr indent="0" marL="0">
+              <a:lnSpc>
+                <a:spcPct val="118000"/>
+              </a:lnSpc>
+              <a:buNone/>
+            </a:pPr>
+            <a:r>
+              <a:rPr lang="en-US" sz="1100" dirty="0">
+                <a:solidFill>
+                  <a:srgbClr val="D4D4D4"/>
+                </a:solidFill>
+                <a:latin typeface="Consolas" pitchFamily="34" charset="0"/>
+                <a:ea typeface="Consolas" pitchFamily="34" charset="-122"/>
+                <a:cs typeface="Consolas" pitchFamily="34" charset="-120"/>
+              </a:rPr>
+              <a:t>
+</a:t>
+            </a:r>
+            <a:pPr indent="0" marL="0">
+              <a:lnSpc>
+                <a:spcPct val="118000"/>
+              </a:lnSpc>
+              <a:buNone/>
+            </a:pPr>
+            <a:r>
+              <a:rPr lang="en-US" sz="1100" dirty="0">
+                <a:solidFill>
+                  <a:srgbClr val="D4D4D4"/>
+                </a:solidFill>
+                <a:latin typeface="Consolas" pitchFamily="34" charset="0"/>
+                <a:ea typeface="Consolas" pitchFamily="34" charset="-122"/>
+                <a:cs typeface="Consolas" pitchFamily="34" charset="-120"/>
+              </a:rPr>
+              <a:t>EXTRACTION_PROMPT</a:t>
+            </a:r>
+            <a:pPr indent="0" marL="0">
+              <a:lnSpc>
+                <a:spcPct val="118000"/>
+              </a:lnSpc>
+              <a:buNone/>
+            </a:pPr>
+            <a:r>
+              <a:rPr lang="en-US" sz="1100" dirty="0">
+                <a:solidFill>
+                  <a:srgbClr val="D4D4D4"/>
+                </a:solidFill>
+                <a:latin typeface="Consolas" pitchFamily="34" charset="0"/>
+                <a:ea typeface="Consolas" pitchFamily="34" charset="-122"/>
+                <a:cs typeface="Consolas" pitchFamily="34" charset="-120"/>
+              </a:rPr>
+              <a:t> </a:t>
+            </a:r>
+            <a:pPr indent="0" marL="0">
+              <a:lnSpc>
+                <a:spcPct val="118000"/>
+              </a:lnSpc>
+              <a:buNone/>
+            </a:pPr>
+            <a:r>
+              <a:rPr lang="en-US" sz="1100" dirty="0">
+                <a:solidFill>
+                  <a:srgbClr val="D4D4D4"/>
+                </a:solidFill>
+                <a:latin typeface="Consolas" pitchFamily="34" charset="0"/>
+                <a:ea typeface="Consolas" pitchFamily="34" charset="-122"/>
+                <a:cs typeface="Consolas" pitchFamily="34" charset="-120"/>
+              </a:rPr>
+              <a:t>=</a:t>
+            </a:r>
+            <a:pPr indent="0" marL="0">
+              <a:lnSpc>
+                <a:spcPct val="118000"/>
+              </a:lnSpc>
+              <a:buNone/>
+            </a:pPr>
+            <a:r>
+              <a:rPr lang="en-US" sz="1100" dirty="0">
+                <a:solidFill>
+                  <a:srgbClr val="D4D4D4"/>
+                </a:solidFill>
+                <a:latin typeface="Consolas" pitchFamily="34" charset="0"/>
+                <a:ea typeface="Consolas" pitchFamily="34" charset="-122"/>
+                <a:cs typeface="Consolas" pitchFamily="34" charset="-120"/>
+              </a:rPr>
+              <a:t> </a:t>
+            </a:r>
+            <a:pPr indent="0" marL="0">
+              <a:lnSpc>
+                <a:spcPct val="118000"/>
+              </a:lnSpc>
+              <a:buNone/>
+            </a:pPr>
+            <a:r>
+              <a:rPr lang="en-US" sz="1100" dirty="0">
+                <a:solidFill>
+                  <a:srgbClr val="D4D4D4"/>
+                </a:solidFill>
+                <a:latin typeface="Consolas" pitchFamily="34" charset="0"/>
+                <a:ea typeface="Consolas" pitchFamily="34" charset="-122"/>
+                <a:cs typeface="Consolas" pitchFamily="34" charset="-120"/>
+              </a:rPr>
+              <a:t>(
+</a:t>
+            </a:r>
+            <a:pPr indent="0" marL="0">
+              <a:lnSpc>
+                <a:spcPct val="118000"/>
+              </a:lnSpc>
+              <a:buNone/>
+            </a:pPr>
+            <a:r>
+              <a:rPr lang="en-US" sz="1100" dirty="0">
+                <a:solidFill>
+                  <a:srgbClr val="D4D4D4"/>
+                </a:solidFill>
+                <a:latin typeface="Consolas" pitchFamily="34" charset="0"/>
+                <a:ea typeface="Consolas" pitchFamily="34" charset="-122"/>
+                <a:cs typeface="Consolas" pitchFamily="34" charset="-120"/>
+              </a:rPr>
+              <a:t>    </a:t>
+            </a:r>
+            <a:pPr indent="0" marL="0">
+              <a:lnSpc>
+                <a:spcPct val="118000"/>
+              </a:lnSpc>
+              <a:buNone/>
+            </a:pPr>
+            <a:r>
+              <a:rPr lang="en-US" sz="1100" dirty="0">
+                <a:solidFill>
+                  <a:srgbClr val="CE9178"/>
+                </a:solidFill>
+                <a:latin typeface="Consolas" pitchFamily="34" charset="0"/>
+                <a:ea typeface="Consolas" pitchFamily="34" charset="-122"/>
+                <a:cs typeface="Consolas" pitchFamily="34" charset="-120"/>
+              </a:rPr>
+              <a:t>"Extract the fields below. Use null for "
+</a:t>
+            </a:r>
+            <a:pPr indent="0" marL="0">
+              <a:lnSpc>
+                <a:spcPct val="118000"/>
+              </a:lnSpc>
+              <a:buNone/>
+            </a:pPr>
+            <a:r>
+              <a:rPr lang="en-US" sz="1100" dirty="0">
+                <a:solidFill>
+                  <a:srgbClr val="D4D4D4"/>
+                </a:solidFill>
+                <a:latin typeface="Consolas" pitchFamily="34" charset="0"/>
+                <a:ea typeface="Consolas" pitchFamily="34" charset="-122"/>
+                <a:cs typeface="Consolas" pitchFamily="34" charset="-120"/>
+              </a:rPr>
+              <a:t>    </a:t>
+            </a:r>
+            <a:pPr indent="0" marL="0">
+              <a:lnSpc>
+                <a:spcPct val="118000"/>
+              </a:lnSpc>
+              <a:buNone/>
+            </a:pPr>
+            <a:r>
+              <a:rPr lang="en-US" sz="1100" dirty="0">
+                <a:solidFill>
+                  <a:srgbClr val="CE9178"/>
+                </a:solidFill>
+                <a:latin typeface="Consolas" pitchFamily="34" charset="0"/>
+                <a:ea typeface="Consolas" pitchFamily="34" charset="-122"/>
+                <a:cs typeface="Consolas" pitchFamily="34" charset="-120"/>
+              </a:rPr>
+              <a:t>"anything not stated; never invent a value."
+</a:t>
+            </a:r>
+            <a:pPr indent="0" marL="0">
+              <a:lnSpc>
+                <a:spcPct val="118000"/>
+              </a:lnSpc>
+              <a:buNone/>
+            </a:pPr>
+            <a:r>
+              <a:rPr lang="en-US" sz="1100" dirty="0">
+                <a:solidFill>
+                  <a:srgbClr val="D4D4D4"/>
+                </a:solidFill>
+                <a:latin typeface="Consolas" pitchFamily="34" charset="0"/>
+                <a:ea typeface="Consolas" pitchFamily="34" charset="-122"/>
+                <a:cs typeface="Consolas" pitchFamily="34" charset="-120"/>
+              </a:rPr>
+              <a:t>)
+</a:t>
+            </a:r>
+            <a:pPr indent="0" marL="0">
+              <a:lnSpc>
+                <a:spcPct val="118000"/>
+              </a:lnSpc>
+              <a:buNone/>
+            </a:pPr>
+            <a:r>
+              <a:rPr lang="en-US" sz="1100" dirty="0">
+                <a:solidFill>
+                  <a:srgbClr val="D4D4D4"/>
+                </a:solidFill>
+                <a:latin typeface="Consolas" pitchFamily="34" charset="0"/>
+                <a:ea typeface="Consolas" pitchFamily="34" charset="-122"/>
+                <a:cs typeface="Consolas" pitchFamily="34" charset="-120"/>
+              </a:rPr>
+              <a:t>
+</a:t>
+            </a:r>
+            <a:pPr indent="0" marL="0">
+              <a:lnSpc>
+                <a:spcPct val="118000"/>
+              </a:lnSpc>
+              <a:buNone/>
+            </a:pPr>
+            <a:r>
+              <a:rPr lang="en-US" sz="1100" dirty="0">
+                <a:solidFill>
+                  <a:srgbClr val="C586C0"/>
+                </a:solidFill>
+                <a:latin typeface="Consolas" pitchFamily="34" charset="0"/>
+                <a:ea typeface="Consolas" pitchFamily="34" charset="-122"/>
+                <a:cs typeface="Consolas" pitchFamily="34" charset="-120"/>
+              </a:rPr>
+              <a:t>def</a:t>
+            </a:r>
+            <a:pPr indent="0" marL="0">
+              <a:lnSpc>
+                <a:spcPct val="118000"/>
+              </a:lnSpc>
+              <a:buNone/>
+            </a:pPr>
+            <a:r>
+              <a:rPr lang="en-US" sz="1100" dirty="0">
+                <a:solidFill>
+                  <a:srgbClr val="D4D4D4"/>
+                </a:solidFill>
+                <a:latin typeface="Consolas" pitchFamily="34" charset="0"/>
+                <a:ea typeface="Consolas" pitchFamily="34" charset="-122"/>
+                <a:cs typeface="Consolas" pitchFamily="34" charset="-120"/>
+              </a:rPr>
+              <a:t> </a:t>
+            </a:r>
+            <a:pPr indent="0" marL="0">
+              <a:lnSpc>
+                <a:spcPct val="118000"/>
+              </a:lnSpc>
+              <a:buNone/>
+            </a:pPr>
+            <a:r>
+              <a:rPr lang="en-US" sz="1100" dirty="0">
+                <a:solidFill>
+                  <a:srgbClr val="DCDCAA"/>
+                </a:solidFill>
+                <a:latin typeface="Consolas" pitchFamily="34" charset="0"/>
+                <a:ea typeface="Consolas" pitchFamily="34" charset="-122"/>
+                <a:cs typeface="Consolas" pitchFamily="34" charset="-120"/>
+              </a:rPr>
+              <a:t>extract_claim</a:t>
+            </a:r>
+            <a:pPr indent="0" marL="0">
+              <a:lnSpc>
+                <a:spcPct val="118000"/>
+              </a:lnSpc>
+              <a:buNone/>
+            </a:pPr>
+            <a:r>
+              <a:rPr lang="en-US" sz="1100" dirty="0">
+                <a:solidFill>
+                  <a:srgbClr val="D4D4D4"/>
+                </a:solidFill>
+                <a:latin typeface="Consolas" pitchFamily="34" charset="0"/>
+                <a:ea typeface="Consolas" pitchFamily="34" charset="-122"/>
+                <a:cs typeface="Consolas" pitchFamily="34" charset="-120"/>
+              </a:rPr>
+              <a:t>(</a:t>
+            </a:r>
+            <a:pPr indent="0" marL="0">
+              <a:lnSpc>
+                <a:spcPct val="118000"/>
+              </a:lnSpc>
+              <a:buNone/>
+            </a:pPr>
+            <a:r>
+              <a:rPr lang="en-US" sz="1100" dirty="0">
+                <a:solidFill>
+                  <a:srgbClr val="D4D4D4"/>
+                </a:solidFill>
+                <a:latin typeface="Consolas" pitchFamily="34" charset="0"/>
+                <a:ea typeface="Consolas" pitchFamily="34" charset="-122"/>
+                <a:cs typeface="Consolas" pitchFamily="34" charset="-120"/>
+              </a:rPr>
+              <a:t>state</a:t>
+            </a:r>
+            <a:pPr indent="0" marL="0">
+              <a:lnSpc>
+                <a:spcPct val="118000"/>
+              </a:lnSpc>
+              <a:buNone/>
+            </a:pPr>
+            <a:r>
+              <a:rPr lang="en-US" sz="1100" dirty="0">
+                <a:solidFill>
+                  <a:srgbClr val="D4D4D4"/>
+                </a:solidFill>
+                <a:latin typeface="Consolas" pitchFamily="34" charset="0"/>
+                <a:ea typeface="Consolas" pitchFamily="34" charset="-122"/>
+                <a:cs typeface="Consolas" pitchFamily="34" charset="-120"/>
+              </a:rPr>
+              <a:t>:</a:t>
+            </a:r>
+            <a:pPr indent="0" marL="0">
+              <a:lnSpc>
+                <a:spcPct val="118000"/>
+              </a:lnSpc>
+              <a:buNone/>
+            </a:pPr>
+            <a:r>
+              <a:rPr lang="en-US" sz="1100" dirty="0">
+                <a:solidFill>
+                  <a:srgbClr val="D4D4D4"/>
+                </a:solidFill>
+                <a:latin typeface="Consolas" pitchFamily="34" charset="0"/>
+                <a:ea typeface="Consolas" pitchFamily="34" charset="-122"/>
+                <a:cs typeface="Consolas" pitchFamily="34" charset="-120"/>
+              </a:rPr>
+              <a:t> </a:t>
+            </a:r>
+            <a:pPr indent="0" marL="0">
+              <a:lnSpc>
+                <a:spcPct val="118000"/>
+              </a:lnSpc>
+              <a:buNone/>
+            </a:pPr>
+            <a:r>
+              <a:rPr lang="en-US" sz="1100" dirty="0">
+                <a:solidFill>
+                  <a:srgbClr val="D4D4D4"/>
+                </a:solidFill>
+                <a:latin typeface="Consolas" pitchFamily="34" charset="0"/>
+                <a:ea typeface="Consolas" pitchFamily="34" charset="-122"/>
+                <a:cs typeface="Consolas" pitchFamily="34" charset="-120"/>
+              </a:rPr>
+              <a:t>ClaimState</a:t>
+            </a:r>
+            <a:pPr indent="0" marL="0">
+              <a:lnSpc>
+                <a:spcPct val="118000"/>
+              </a:lnSpc>
+              <a:buNone/>
+            </a:pPr>
+            <a:r>
+              <a:rPr lang="en-US" sz="1100" dirty="0">
+                <a:solidFill>
+                  <a:srgbClr val="D4D4D4"/>
+                </a:solidFill>
+                <a:latin typeface="Consolas" pitchFamily="34" charset="0"/>
+                <a:ea typeface="Consolas" pitchFamily="34" charset="-122"/>
+                <a:cs typeface="Consolas" pitchFamily="34" charset="-120"/>
+              </a:rPr>
+              <a:t>)</a:t>
+            </a:r>
+            <a:pPr indent="0" marL="0">
+              <a:lnSpc>
+                <a:spcPct val="118000"/>
+              </a:lnSpc>
+              <a:buNone/>
+            </a:pPr>
+            <a:r>
+              <a:rPr lang="en-US" sz="1100" dirty="0">
+                <a:solidFill>
+                  <a:srgbClr val="D4D4D4"/>
+                </a:solidFill>
+                <a:latin typeface="Consolas" pitchFamily="34" charset="0"/>
+                <a:ea typeface="Consolas" pitchFamily="34" charset="-122"/>
+                <a:cs typeface="Consolas" pitchFamily="34" charset="-120"/>
+              </a:rPr>
+              <a:t> </a:t>
+            </a:r>
+            <a:pPr indent="0" marL="0">
+              <a:lnSpc>
+                <a:spcPct val="118000"/>
+              </a:lnSpc>
+              <a:buNone/>
+            </a:pPr>
+            <a:r>
+              <a:rPr lang="en-US" sz="1100" dirty="0">
+                <a:solidFill>
+                  <a:srgbClr val="D4D4D4"/>
+                </a:solidFill>
+                <a:latin typeface="Consolas" pitchFamily="34" charset="0"/>
+                <a:ea typeface="Consolas" pitchFamily="34" charset="-122"/>
+                <a:cs typeface="Consolas" pitchFamily="34" charset="-120"/>
+              </a:rPr>
+              <a:t>-</a:t>
+            </a:r>
+            <a:pPr indent="0" marL="0">
+              <a:lnSpc>
+                <a:spcPct val="118000"/>
+              </a:lnSpc>
+              <a:buNone/>
+            </a:pPr>
+            <a:r>
+              <a:rPr lang="en-US" sz="1100" dirty="0">
+                <a:solidFill>
+                  <a:srgbClr val="D4D4D4"/>
+                </a:solidFill>
+                <a:latin typeface="Consolas" pitchFamily="34" charset="0"/>
+                <a:ea typeface="Consolas" pitchFamily="34" charset="-122"/>
+                <a:cs typeface="Consolas" pitchFamily="34" charset="-120"/>
+              </a:rPr>
+              <a:t>&gt;</a:t>
+            </a:r>
+            <a:pPr indent="0" marL="0">
+              <a:lnSpc>
+                <a:spcPct val="118000"/>
+              </a:lnSpc>
+              <a:buNone/>
+            </a:pPr>
+            <a:r>
+              <a:rPr lang="en-US" sz="1100" dirty="0">
+                <a:solidFill>
+                  <a:srgbClr val="D4D4D4"/>
+                </a:solidFill>
+                <a:latin typeface="Consolas" pitchFamily="34" charset="0"/>
+                <a:ea typeface="Consolas" pitchFamily="34" charset="-122"/>
+                <a:cs typeface="Consolas" pitchFamily="34" charset="-120"/>
+              </a:rPr>
+              <a:t> </a:t>
+            </a:r>
+            <a:pPr indent="0" marL="0">
+              <a:lnSpc>
+                <a:spcPct val="118000"/>
+              </a:lnSpc>
+              <a:buNone/>
+            </a:pPr>
+            <a:r>
+              <a:rPr lang="en-US" sz="1100" dirty="0">
+                <a:solidFill>
+                  <a:srgbClr val="4EC9B0"/>
+                </a:solidFill>
+                <a:latin typeface="Consolas" pitchFamily="34" charset="0"/>
+                <a:ea typeface="Consolas" pitchFamily="34" charset="-122"/>
+                <a:cs typeface="Consolas" pitchFamily="34" charset="-120"/>
+              </a:rPr>
+              <a:t>dict</a:t>
+            </a:r>
+            <a:pPr indent="0" marL="0">
+              <a:lnSpc>
+                <a:spcPct val="118000"/>
+              </a:lnSpc>
+              <a:buNone/>
+            </a:pPr>
+            <a:r>
+              <a:rPr lang="en-US" sz="1100" dirty="0">
+                <a:solidFill>
+                  <a:srgbClr val="D4D4D4"/>
+                </a:solidFill>
+                <a:latin typeface="Consolas" pitchFamily="34" charset="0"/>
+                <a:ea typeface="Consolas" pitchFamily="34" charset="-122"/>
+                <a:cs typeface="Consolas" pitchFamily="34" charset="-120"/>
+              </a:rPr>
+              <a:t>:
+</a:t>
+            </a:r>
+            <a:pPr indent="0" marL="0">
+              <a:lnSpc>
+                <a:spcPct val="118000"/>
+              </a:lnSpc>
+              <a:buNone/>
+            </a:pPr>
+            <a:r>
+              <a:rPr lang="en-US" sz="1100" dirty="0">
+                <a:solidFill>
+                  <a:srgbClr val="D4D4D4"/>
+                </a:solidFill>
+                <a:latin typeface="Consolas" pitchFamily="34" charset="0"/>
+                <a:ea typeface="Consolas" pitchFamily="34" charset="-122"/>
+                <a:cs typeface="Consolas" pitchFamily="34" charset="-120"/>
+              </a:rPr>
+              <a:t>    </a:t>
+            </a:r>
+            <a:pPr indent="0" marL="0">
+              <a:lnSpc>
+                <a:spcPct val="118000"/>
+              </a:lnSpc>
+              <a:buNone/>
+            </a:pPr>
+            <a:r>
+              <a:rPr lang="en-US" sz="1100" dirty="0">
+                <a:solidFill>
+                  <a:srgbClr val="D4D4D4"/>
+                </a:solidFill>
+                <a:latin typeface="Consolas" pitchFamily="34" charset="0"/>
+                <a:ea typeface="Consolas" pitchFamily="34" charset="-122"/>
+                <a:cs typeface="Consolas" pitchFamily="34" charset="-120"/>
+              </a:rPr>
+              <a:t>result</a:t>
+            </a:r>
+            <a:pPr indent="0" marL="0">
+              <a:lnSpc>
+                <a:spcPct val="118000"/>
+              </a:lnSpc>
+              <a:buNone/>
+            </a:pPr>
+            <a:r>
+              <a:rPr lang="en-US" sz="1100" dirty="0">
+                <a:solidFill>
+                  <a:srgbClr val="D4D4D4"/>
+                </a:solidFill>
+                <a:latin typeface="Consolas" pitchFamily="34" charset="0"/>
+                <a:ea typeface="Consolas" pitchFamily="34" charset="-122"/>
+                <a:cs typeface="Consolas" pitchFamily="34" charset="-120"/>
+              </a:rPr>
+              <a:t> </a:t>
+            </a:r>
+            <a:pPr indent="0" marL="0">
+              <a:lnSpc>
+                <a:spcPct val="118000"/>
+              </a:lnSpc>
+              <a:buNone/>
+            </a:pPr>
+            <a:r>
+              <a:rPr lang="en-US" sz="1100" dirty="0">
+                <a:solidFill>
+                  <a:srgbClr val="D4D4D4"/>
+                </a:solidFill>
+                <a:latin typeface="Consolas" pitchFamily="34" charset="0"/>
+                <a:ea typeface="Consolas" pitchFamily="34" charset="-122"/>
+                <a:cs typeface="Consolas" pitchFamily="34" charset="-120"/>
+              </a:rPr>
+              <a:t>=</a:t>
+            </a:r>
+            <a:pPr indent="0" marL="0">
+              <a:lnSpc>
+                <a:spcPct val="118000"/>
+              </a:lnSpc>
+              <a:buNone/>
+            </a:pPr>
+            <a:r>
+              <a:rPr lang="en-US" sz="1100" dirty="0">
+                <a:solidFill>
+                  <a:srgbClr val="D4D4D4"/>
+                </a:solidFill>
+                <a:latin typeface="Consolas" pitchFamily="34" charset="0"/>
+                <a:ea typeface="Consolas" pitchFamily="34" charset="-122"/>
+                <a:cs typeface="Consolas" pitchFamily="34" charset="-120"/>
+              </a:rPr>
+              <a:t> </a:t>
+            </a:r>
+            <a:pPr indent="0" marL="0">
+              <a:lnSpc>
+                <a:spcPct val="118000"/>
+              </a:lnSpc>
+              <a:buNone/>
+            </a:pPr>
+            <a:r>
+              <a:rPr lang="en-US" sz="1100" dirty="0">
+                <a:solidFill>
+                  <a:srgbClr val="D4D4D4"/>
+                </a:solidFill>
+                <a:latin typeface="Consolas" pitchFamily="34" charset="0"/>
+                <a:ea typeface="Consolas" pitchFamily="34" charset="-122"/>
+                <a:cs typeface="Consolas" pitchFamily="34" charset="-120"/>
+              </a:rPr>
+              <a:t>llm</a:t>
+            </a:r>
+            <a:pPr indent="0" marL="0">
+              <a:lnSpc>
+                <a:spcPct val="118000"/>
+              </a:lnSpc>
+              <a:buNone/>
+            </a:pPr>
+            <a:r>
+              <a:rPr lang="en-US" sz="1100" dirty="0">
+                <a:solidFill>
+                  <a:srgbClr val="D4D4D4"/>
+                </a:solidFill>
+                <a:latin typeface="Consolas" pitchFamily="34" charset="0"/>
+                <a:ea typeface="Consolas" pitchFamily="34" charset="-122"/>
+                <a:cs typeface="Consolas" pitchFamily="34" charset="-120"/>
+              </a:rPr>
+              <a:t>.</a:t>
+            </a:r>
+            <a:pPr indent="0" marL="0">
+              <a:lnSpc>
+                <a:spcPct val="118000"/>
+              </a:lnSpc>
+              <a:buNone/>
+            </a:pPr>
+            <a:r>
+              <a:rPr lang="en-US" sz="1100" dirty="0">
+                <a:solidFill>
+                  <a:srgbClr val="D4D4D4"/>
+                </a:solidFill>
+                <a:latin typeface="Consolas" pitchFamily="34" charset="0"/>
+                <a:ea typeface="Consolas" pitchFamily="34" charset="-122"/>
+                <a:cs typeface="Consolas" pitchFamily="34" charset="-120"/>
+              </a:rPr>
+              <a:t>with_structured_output</a:t>
+            </a:r>
+            <a:pPr indent="0" marL="0">
+              <a:lnSpc>
+                <a:spcPct val="118000"/>
+              </a:lnSpc>
+              <a:buNone/>
+            </a:pPr>
+            <a:r>
+              <a:rPr lang="en-US" sz="1100" dirty="0">
+                <a:solidFill>
+                  <a:srgbClr val="D4D4D4"/>
+                </a:solidFill>
+                <a:latin typeface="Consolas" pitchFamily="34" charset="0"/>
+                <a:ea typeface="Consolas" pitchFamily="34" charset="-122"/>
+                <a:cs typeface="Consolas" pitchFamily="34" charset="-120"/>
+              </a:rPr>
+              <a:t>(
+</a:t>
+            </a:r>
+            <a:pPr indent="0" marL="0">
+              <a:lnSpc>
+                <a:spcPct val="118000"/>
+              </a:lnSpc>
+              <a:buNone/>
+            </a:pPr>
+            <a:r>
+              <a:rPr lang="en-US" sz="1100" dirty="0">
+                <a:solidFill>
+                  <a:srgbClr val="D4D4D4"/>
+                </a:solidFill>
+                <a:latin typeface="Consolas" pitchFamily="34" charset="0"/>
+                <a:ea typeface="Consolas" pitchFamily="34" charset="-122"/>
+                <a:cs typeface="Consolas" pitchFamily="34" charset="-120"/>
+              </a:rPr>
+              <a:t>        </a:t>
+            </a:r>
+            <a:pPr indent="0" marL="0">
+              <a:lnSpc>
+                <a:spcPct val="118000"/>
+              </a:lnSpc>
+              <a:buNone/>
+            </a:pPr>
+            <a:r>
+              <a:rPr lang="en-US" sz="1100" dirty="0">
+                <a:solidFill>
+                  <a:srgbClr val="D4D4D4"/>
+                </a:solidFill>
+                <a:latin typeface="Consolas" pitchFamily="34" charset="0"/>
+                <a:ea typeface="Consolas" pitchFamily="34" charset="-122"/>
+                <a:cs typeface="Consolas" pitchFamily="34" charset="-120"/>
+              </a:rPr>
+              <a:t>ExtractedClaim
+</a:t>
+            </a:r>
+            <a:pPr indent="0" marL="0">
+              <a:lnSpc>
+                <a:spcPct val="118000"/>
+              </a:lnSpc>
+              <a:buNone/>
+            </a:pPr>
+            <a:r>
+              <a:rPr lang="en-US" sz="1100" dirty="0">
+                <a:solidFill>
+                  <a:srgbClr val="D4D4D4"/>
+                </a:solidFill>
+                <a:latin typeface="Consolas" pitchFamily="34" charset="0"/>
+                <a:ea typeface="Consolas" pitchFamily="34" charset="-122"/>
+                <a:cs typeface="Consolas" pitchFamily="34" charset="-120"/>
+              </a:rPr>
+              <a:t>    </a:t>
+            </a:r>
+            <a:pPr indent="0" marL="0">
+              <a:lnSpc>
+                <a:spcPct val="118000"/>
+              </a:lnSpc>
+              <a:buNone/>
+            </a:pPr>
+            <a:r>
+              <a:rPr lang="en-US" sz="1100" dirty="0">
+                <a:solidFill>
+                  <a:srgbClr val="D4D4D4"/>
+                </a:solidFill>
+                <a:latin typeface="Consolas" pitchFamily="34" charset="0"/>
+                <a:ea typeface="Consolas" pitchFamily="34" charset="-122"/>
+                <a:cs typeface="Consolas" pitchFamily="34" charset="-120"/>
+              </a:rPr>
+              <a:t>)</a:t>
+            </a:r>
+            <a:pPr indent="0" marL="0">
+              <a:lnSpc>
+                <a:spcPct val="118000"/>
+              </a:lnSpc>
+              <a:buNone/>
+            </a:pPr>
+            <a:r>
+              <a:rPr lang="en-US" sz="1100" dirty="0">
+                <a:solidFill>
+                  <a:srgbClr val="D4D4D4"/>
+                </a:solidFill>
+                <a:latin typeface="Consolas" pitchFamily="34" charset="0"/>
+                <a:ea typeface="Consolas" pitchFamily="34" charset="-122"/>
+                <a:cs typeface="Consolas" pitchFamily="34" charset="-120"/>
+              </a:rPr>
+              <a:t>.</a:t>
+            </a:r>
+            <a:pPr indent="0" marL="0">
+              <a:lnSpc>
+                <a:spcPct val="118000"/>
+              </a:lnSpc>
+              <a:buNone/>
+            </a:pPr>
+            <a:r>
+              <a:rPr lang="en-US" sz="1100" dirty="0">
+                <a:solidFill>
+                  <a:srgbClr val="D4D4D4"/>
+                </a:solidFill>
+                <a:latin typeface="Consolas" pitchFamily="34" charset="0"/>
+                <a:ea typeface="Consolas" pitchFamily="34" charset="-122"/>
+                <a:cs typeface="Consolas" pitchFamily="34" charset="-120"/>
+              </a:rPr>
+              <a:t>invoke</a:t>
+            </a:r>
+            <a:pPr indent="0" marL="0">
+              <a:lnSpc>
+                <a:spcPct val="118000"/>
+              </a:lnSpc>
+              <a:buNone/>
+            </a:pPr>
+            <a:r>
+              <a:rPr lang="en-US" sz="1100" dirty="0">
+                <a:solidFill>
+                  <a:srgbClr val="D4D4D4"/>
+                </a:solidFill>
+                <a:latin typeface="Consolas" pitchFamily="34" charset="0"/>
+                <a:ea typeface="Consolas" pitchFamily="34" charset="-122"/>
+                <a:cs typeface="Consolas" pitchFamily="34" charset="-120"/>
+              </a:rPr>
+              <a:t>(</a:t>
+            </a:r>
+            <a:pPr indent="0" marL="0">
+              <a:lnSpc>
+                <a:spcPct val="118000"/>
+              </a:lnSpc>
+              <a:buNone/>
+            </a:pPr>
+            <a:r>
+              <a:rPr lang="en-US" sz="1100" dirty="0">
+                <a:solidFill>
+                  <a:srgbClr val="D4D4D4"/>
+                </a:solidFill>
+                <a:latin typeface="Consolas" pitchFamily="34" charset="0"/>
+                <a:ea typeface="Consolas" pitchFamily="34" charset="-122"/>
+                <a:cs typeface="Consolas" pitchFamily="34" charset="-120"/>
+              </a:rPr>
+              <a:t>[
+</a:t>
+            </a:r>
+            <a:pPr indent="0" marL="0">
+              <a:lnSpc>
+                <a:spcPct val="118000"/>
+              </a:lnSpc>
+              <a:buNone/>
+            </a:pPr>
+            <a:r>
+              <a:rPr lang="en-US" sz="1100" dirty="0">
+                <a:solidFill>
+                  <a:srgbClr val="D4D4D4"/>
+                </a:solidFill>
+                <a:latin typeface="Consolas" pitchFamily="34" charset="0"/>
+                <a:ea typeface="Consolas" pitchFamily="34" charset="-122"/>
+                <a:cs typeface="Consolas" pitchFamily="34" charset="-120"/>
+              </a:rPr>
+              <a:t>        </a:t>
+            </a:r>
+            <a:pPr indent="0" marL="0">
+              <a:lnSpc>
+                <a:spcPct val="118000"/>
+              </a:lnSpc>
+              <a:buNone/>
+            </a:pPr>
+            <a:r>
+              <a:rPr lang="en-US" sz="1100" dirty="0">
+                <a:solidFill>
+                  <a:srgbClr val="D4D4D4"/>
+                </a:solidFill>
+                <a:latin typeface="Consolas" pitchFamily="34" charset="0"/>
+                <a:ea typeface="Consolas" pitchFamily="34" charset="-122"/>
+                <a:cs typeface="Consolas" pitchFamily="34" charset="-120"/>
+              </a:rPr>
+              <a:t>SystemMessage</a:t>
+            </a:r>
+            <a:pPr indent="0" marL="0">
+              <a:lnSpc>
+                <a:spcPct val="118000"/>
+              </a:lnSpc>
+              <a:buNone/>
+            </a:pPr>
+            <a:r>
+              <a:rPr lang="en-US" sz="1100" dirty="0">
+                <a:solidFill>
+                  <a:srgbClr val="D4D4D4"/>
+                </a:solidFill>
+                <a:latin typeface="Consolas" pitchFamily="34" charset="0"/>
+                <a:ea typeface="Consolas" pitchFamily="34" charset="-122"/>
+                <a:cs typeface="Consolas" pitchFamily="34" charset="-120"/>
+              </a:rPr>
+              <a:t>(</a:t>
+            </a:r>
+            <a:pPr indent="0" marL="0">
+              <a:lnSpc>
+                <a:spcPct val="118000"/>
+              </a:lnSpc>
+              <a:buNone/>
+            </a:pPr>
+            <a:r>
+              <a:rPr lang="en-US" sz="1100" dirty="0">
+                <a:solidFill>
+                  <a:srgbClr val="D4D4D4"/>
+                </a:solidFill>
+                <a:latin typeface="Consolas" pitchFamily="34" charset="0"/>
+                <a:ea typeface="Consolas" pitchFamily="34" charset="-122"/>
+                <a:cs typeface="Consolas" pitchFamily="34" charset="-120"/>
+              </a:rPr>
+              <a:t>EXTRACTION_PROMPT</a:t>
+            </a:r>
+            <a:pPr indent="0" marL="0">
+              <a:lnSpc>
+                <a:spcPct val="118000"/>
+              </a:lnSpc>
+              <a:buNone/>
+            </a:pPr>
+            <a:r>
+              <a:rPr lang="en-US" sz="1100" dirty="0">
+                <a:solidFill>
+                  <a:srgbClr val="D4D4D4"/>
+                </a:solidFill>
+                <a:latin typeface="Consolas" pitchFamily="34" charset="0"/>
+                <a:ea typeface="Consolas" pitchFamily="34" charset="-122"/>
+                <a:cs typeface="Consolas" pitchFamily="34" charset="-120"/>
+              </a:rPr>
+              <a:t>)</a:t>
+            </a:r>
+            <a:pPr indent="0" marL="0">
+              <a:lnSpc>
+                <a:spcPct val="118000"/>
+              </a:lnSpc>
+              <a:buNone/>
+            </a:pPr>
+            <a:r>
+              <a:rPr lang="en-US" sz="1100" dirty="0">
+                <a:solidFill>
+                  <a:srgbClr val="D4D4D4"/>
+                </a:solidFill>
+                <a:latin typeface="Consolas" pitchFamily="34" charset="0"/>
+                <a:ea typeface="Consolas" pitchFamily="34" charset="-122"/>
+                <a:cs typeface="Consolas" pitchFamily="34" charset="-120"/>
+              </a:rPr>
+              <a:t>,
+</a:t>
+            </a:r>
+            <a:pPr indent="0" marL="0">
+              <a:lnSpc>
+                <a:spcPct val="118000"/>
+              </a:lnSpc>
+              <a:buNone/>
+            </a:pPr>
+            <a:r>
+              <a:rPr lang="en-US" sz="1100" dirty="0">
+                <a:solidFill>
+                  <a:srgbClr val="D4D4D4"/>
+                </a:solidFill>
+                <a:latin typeface="Consolas" pitchFamily="34" charset="0"/>
+                <a:ea typeface="Consolas" pitchFamily="34" charset="-122"/>
+                <a:cs typeface="Consolas" pitchFamily="34" charset="-120"/>
+              </a:rPr>
+              <a:t>        </a:t>
+            </a:r>
+            <a:pPr indent="0" marL="0">
+              <a:lnSpc>
+                <a:spcPct val="118000"/>
+              </a:lnSpc>
+              <a:buNone/>
+            </a:pPr>
+            <a:r>
+              <a:rPr lang="en-US" sz="1100" dirty="0">
+                <a:solidFill>
+                  <a:srgbClr val="D4D4D4"/>
+                </a:solidFill>
+                <a:latin typeface="Consolas" pitchFamily="34" charset="0"/>
+                <a:ea typeface="Consolas" pitchFamily="34" charset="-122"/>
+                <a:cs typeface="Consolas" pitchFamily="34" charset="-120"/>
+              </a:rPr>
+              <a:t>HumanMessage</a:t>
+            </a:r>
+            <a:pPr indent="0" marL="0">
+              <a:lnSpc>
+                <a:spcPct val="118000"/>
+              </a:lnSpc>
+              <a:buNone/>
+            </a:pPr>
+            <a:r>
+              <a:rPr lang="en-US" sz="1100" dirty="0">
+                <a:solidFill>
+                  <a:srgbClr val="D4D4D4"/>
+                </a:solidFill>
+                <a:latin typeface="Consolas" pitchFamily="34" charset="0"/>
+                <a:ea typeface="Consolas" pitchFamily="34" charset="-122"/>
+                <a:cs typeface="Consolas" pitchFamily="34" charset="-120"/>
+              </a:rPr>
+              <a:t>(</a:t>
+            </a:r>
+            <a:pPr indent="0" marL="0">
+              <a:lnSpc>
+                <a:spcPct val="118000"/>
+              </a:lnSpc>
+              <a:buNone/>
+            </a:pPr>
+            <a:r>
+              <a:rPr lang="en-US" sz="1100" dirty="0">
+                <a:solidFill>
+                  <a:srgbClr val="D4D4D4"/>
+                </a:solidFill>
+                <a:latin typeface="Consolas" pitchFamily="34" charset="0"/>
+                <a:ea typeface="Consolas" pitchFamily="34" charset="-122"/>
+                <a:cs typeface="Consolas" pitchFamily="34" charset="-120"/>
+              </a:rPr>
+              <a:t>state</a:t>
+            </a:r>
+            <a:pPr indent="0" marL="0">
+              <a:lnSpc>
+                <a:spcPct val="118000"/>
+              </a:lnSpc>
+              <a:buNone/>
+            </a:pPr>
+            <a:r>
+              <a:rPr lang="en-US" sz="1100" dirty="0">
+                <a:solidFill>
+                  <a:srgbClr val="D4D4D4"/>
+                </a:solidFill>
+                <a:latin typeface="Consolas" pitchFamily="34" charset="0"/>
+                <a:ea typeface="Consolas" pitchFamily="34" charset="-122"/>
+                <a:cs typeface="Consolas" pitchFamily="34" charset="-120"/>
+              </a:rPr>
+              <a:t>.</a:t>
+            </a:r>
+            <a:pPr indent="0" marL="0">
+              <a:lnSpc>
+                <a:spcPct val="118000"/>
+              </a:lnSpc>
+              <a:buNone/>
+            </a:pPr>
+            <a:r>
+              <a:rPr lang="en-US" sz="1100" dirty="0">
+                <a:solidFill>
+                  <a:srgbClr val="D4D4D4"/>
+                </a:solidFill>
+                <a:latin typeface="Consolas" pitchFamily="34" charset="0"/>
+                <a:ea typeface="Consolas" pitchFamily="34" charset="-122"/>
+                <a:cs typeface="Consolas" pitchFamily="34" charset="-120"/>
+              </a:rPr>
+              <a:t>raw_report</a:t>
+            </a:r>
+            <a:pPr indent="0" marL="0">
+              <a:lnSpc>
+                <a:spcPct val="118000"/>
+              </a:lnSpc>
+              <a:buNone/>
+            </a:pPr>
+            <a:r>
+              <a:rPr lang="en-US" sz="1100" dirty="0">
+                <a:solidFill>
+                  <a:srgbClr val="D4D4D4"/>
+                </a:solidFill>
+                <a:latin typeface="Consolas" pitchFamily="34" charset="0"/>
+                <a:ea typeface="Consolas" pitchFamily="34" charset="-122"/>
+                <a:cs typeface="Consolas" pitchFamily="34" charset="-120"/>
+              </a:rPr>
+              <a:t>)</a:t>
+            </a:r>
+            <a:pPr indent="0" marL="0">
+              <a:lnSpc>
+                <a:spcPct val="118000"/>
+              </a:lnSpc>
+              <a:buNone/>
+            </a:pPr>
+            <a:r>
+              <a:rPr lang="en-US" sz="1100" dirty="0">
+                <a:solidFill>
+                  <a:srgbClr val="D4D4D4"/>
+                </a:solidFill>
+                <a:latin typeface="Consolas" pitchFamily="34" charset="0"/>
+                <a:ea typeface="Consolas" pitchFamily="34" charset="-122"/>
+                <a:cs typeface="Consolas" pitchFamily="34" charset="-120"/>
+              </a:rPr>
+              <a:t>,
+</a:t>
+            </a:r>
+            <a:pPr indent="0" marL="0">
+              <a:lnSpc>
+                <a:spcPct val="118000"/>
+              </a:lnSpc>
+              <a:buNone/>
+            </a:pPr>
+            <a:r>
+              <a:rPr lang="en-US" sz="1100" dirty="0">
+                <a:solidFill>
+                  <a:srgbClr val="D4D4D4"/>
+                </a:solidFill>
+                <a:latin typeface="Consolas" pitchFamily="34" charset="0"/>
+                <a:ea typeface="Consolas" pitchFamily="34" charset="-122"/>
+                <a:cs typeface="Consolas" pitchFamily="34" charset="-120"/>
+              </a:rPr>
+              <a:t>    </a:t>
+            </a:r>
+            <a:pPr indent="0" marL="0">
+              <a:lnSpc>
+                <a:spcPct val="118000"/>
+              </a:lnSpc>
+              <a:buNone/>
+            </a:pPr>
+            <a:r>
+              <a:rPr lang="en-US" sz="1100" dirty="0">
+                <a:solidFill>
+                  <a:srgbClr val="D4D4D4"/>
+                </a:solidFill>
+                <a:latin typeface="Consolas" pitchFamily="34" charset="0"/>
+                <a:ea typeface="Consolas" pitchFamily="34" charset="-122"/>
+                <a:cs typeface="Consolas" pitchFamily="34" charset="-120"/>
+              </a:rPr>
+              <a:t>]</a:t>
+            </a:r>
+            <a:pPr indent="0" marL="0">
+              <a:lnSpc>
+                <a:spcPct val="118000"/>
+              </a:lnSpc>
+              <a:buNone/>
+            </a:pPr>
+            <a:r>
+              <a:rPr lang="en-US" sz="1100" dirty="0">
+                <a:solidFill>
+                  <a:srgbClr val="D4D4D4"/>
+                </a:solidFill>
+                <a:latin typeface="Consolas" pitchFamily="34" charset="0"/>
+                <a:ea typeface="Consolas" pitchFamily="34" charset="-122"/>
+                <a:cs typeface="Consolas" pitchFamily="34" charset="-120"/>
+              </a:rPr>
+              <a:t>)
+</a:t>
+            </a:r>
+            <a:pPr indent="0" marL="0">
+              <a:lnSpc>
+                <a:spcPct val="118000"/>
+              </a:lnSpc>
+              <a:buNone/>
+            </a:pPr>
+            <a:r>
+              <a:rPr lang="en-US" sz="1100" dirty="0">
+                <a:solidFill>
+                  <a:srgbClr val="D4D4D4"/>
+                </a:solidFill>
+                <a:latin typeface="Consolas" pitchFamily="34" charset="0"/>
+                <a:ea typeface="Consolas" pitchFamily="34" charset="-122"/>
+                <a:cs typeface="Consolas" pitchFamily="34" charset="-120"/>
+              </a:rPr>
+              <a:t>    </a:t>
+            </a:r>
+            <a:pPr indent="0" marL="0">
+              <a:lnSpc>
+                <a:spcPct val="118000"/>
+              </a:lnSpc>
+              <a:buNone/>
+            </a:pPr>
+            <a:r>
+              <a:rPr lang="en-US" sz="1100" dirty="0">
+                <a:solidFill>
+                  <a:srgbClr val="C586C0"/>
+                </a:solidFill>
+                <a:latin typeface="Consolas" pitchFamily="34" charset="0"/>
+                <a:ea typeface="Consolas" pitchFamily="34" charset="-122"/>
+                <a:cs typeface="Consolas" pitchFamily="34" charset="-120"/>
+              </a:rPr>
+              <a:t>return</a:t>
+            </a:r>
+            <a:pPr indent="0" marL="0">
+              <a:lnSpc>
+                <a:spcPct val="118000"/>
+              </a:lnSpc>
+              <a:buNone/>
+            </a:pPr>
+            <a:r>
+              <a:rPr lang="en-US" sz="1100" dirty="0">
+                <a:solidFill>
+                  <a:srgbClr val="D4D4D4"/>
+                </a:solidFill>
+                <a:latin typeface="Consolas" pitchFamily="34" charset="0"/>
+                <a:ea typeface="Consolas" pitchFamily="34" charset="-122"/>
+                <a:cs typeface="Consolas" pitchFamily="34" charset="-120"/>
+              </a:rPr>
+              <a:t> </a:t>
+            </a:r>
+            <a:pPr indent="0" marL="0">
+              <a:lnSpc>
+                <a:spcPct val="118000"/>
+              </a:lnSpc>
+              <a:buNone/>
+            </a:pPr>
+            <a:r>
+              <a:rPr lang="en-US" sz="1100" dirty="0">
+                <a:solidFill>
+                  <a:srgbClr val="D4D4D4"/>
+                </a:solidFill>
+                <a:latin typeface="Consolas" pitchFamily="34" charset="0"/>
+                <a:ea typeface="Consolas" pitchFamily="34" charset="-122"/>
+                <a:cs typeface="Consolas" pitchFamily="34" charset="-120"/>
+              </a:rPr>
+              <a:t>{
+</a:t>
+            </a:r>
+            <a:pPr indent="0" marL="0">
+              <a:lnSpc>
+                <a:spcPct val="118000"/>
+              </a:lnSpc>
+              <a:buNone/>
+            </a:pPr>
+            <a:r>
+              <a:rPr lang="en-US" sz="1100" dirty="0">
+                <a:solidFill>
+                  <a:srgbClr val="D4D4D4"/>
+                </a:solidFill>
+                <a:latin typeface="Consolas" pitchFamily="34" charset="0"/>
+                <a:ea typeface="Consolas" pitchFamily="34" charset="-122"/>
+                <a:cs typeface="Consolas" pitchFamily="34" charset="-120"/>
+              </a:rPr>
+              <a:t>        </a:t>
+            </a:r>
+            <a:pPr indent="0" marL="0">
+              <a:lnSpc>
+                <a:spcPct val="118000"/>
+              </a:lnSpc>
+              <a:buNone/>
+            </a:pPr>
+            <a:r>
+              <a:rPr lang="en-US" sz="1100" dirty="0">
+                <a:solidFill>
+                  <a:srgbClr val="CE9178"/>
+                </a:solidFill>
+                <a:latin typeface="Consolas" pitchFamily="34" charset="0"/>
+                <a:ea typeface="Consolas" pitchFamily="34" charset="-122"/>
+                <a:cs typeface="Consolas" pitchFamily="34" charset="-120"/>
+              </a:rPr>
+              <a:t>"extracted"</a:t>
+            </a:r>
+            <a:pPr indent="0" marL="0">
+              <a:lnSpc>
+                <a:spcPct val="118000"/>
+              </a:lnSpc>
+              <a:buNone/>
+            </a:pPr>
+            <a:r>
+              <a:rPr lang="en-US" sz="1100" dirty="0">
+                <a:solidFill>
+                  <a:srgbClr val="D4D4D4"/>
+                </a:solidFill>
+                <a:latin typeface="Consolas" pitchFamily="34" charset="0"/>
+                <a:ea typeface="Consolas" pitchFamily="34" charset="-122"/>
+                <a:cs typeface="Consolas" pitchFamily="34" charset="-120"/>
+              </a:rPr>
+              <a:t>:</a:t>
+            </a:r>
+            <a:pPr indent="0" marL="0">
+              <a:lnSpc>
+                <a:spcPct val="118000"/>
+              </a:lnSpc>
+              <a:buNone/>
+            </a:pPr>
+            <a:r>
+              <a:rPr lang="en-US" sz="1100" dirty="0">
+                <a:solidFill>
+                  <a:srgbClr val="D4D4D4"/>
+                </a:solidFill>
+                <a:latin typeface="Consolas" pitchFamily="34" charset="0"/>
+                <a:ea typeface="Consolas" pitchFamily="34" charset="-122"/>
+                <a:cs typeface="Consolas" pitchFamily="34" charset="-120"/>
+              </a:rPr>
+              <a:t> </a:t>
+            </a:r>
+            <a:pPr indent="0" marL="0">
+              <a:lnSpc>
+                <a:spcPct val="118000"/>
+              </a:lnSpc>
+              <a:buNone/>
+            </a:pPr>
+            <a:r>
+              <a:rPr lang="en-US" sz="1100" dirty="0">
+                <a:solidFill>
+                  <a:srgbClr val="D4D4D4"/>
+                </a:solidFill>
+                <a:latin typeface="Consolas" pitchFamily="34" charset="0"/>
+                <a:ea typeface="Consolas" pitchFamily="34" charset="-122"/>
+                <a:cs typeface="Consolas" pitchFamily="34" charset="-120"/>
+              </a:rPr>
+              <a:t>result</a:t>
+            </a:r>
+            <a:pPr indent="0" marL="0">
+              <a:lnSpc>
+                <a:spcPct val="118000"/>
+              </a:lnSpc>
+              <a:buNone/>
+            </a:pPr>
+            <a:r>
+              <a:rPr lang="en-US" sz="1100" dirty="0">
+                <a:solidFill>
+                  <a:srgbClr val="D4D4D4"/>
+                </a:solidFill>
+                <a:latin typeface="Consolas" pitchFamily="34" charset="0"/>
+                <a:ea typeface="Consolas" pitchFamily="34" charset="-122"/>
+                <a:cs typeface="Consolas" pitchFamily="34" charset="-120"/>
+              </a:rPr>
+              <a:t>,
+</a:t>
+            </a:r>
+            <a:pPr indent="0" marL="0">
+              <a:lnSpc>
+                <a:spcPct val="118000"/>
+              </a:lnSpc>
+              <a:buNone/>
+            </a:pPr>
+            <a:r>
+              <a:rPr lang="en-US" sz="1100" dirty="0">
+                <a:solidFill>
+                  <a:srgbClr val="D4D4D4"/>
+                </a:solidFill>
+                <a:latin typeface="Consolas" pitchFamily="34" charset="0"/>
+                <a:ea typeface="Consolas" pitchFamily="34" charset="-122"/>
+                <a:cs typeface="Consolas" pitchFamily="34" charset="-120"/>
+              </a:rPr>
+              <a:t>        </a:t>
+            </a:r>
+            <a:pPr indent="0" marL="0">
+              <a:lnSpc>
+                <a:spcPct val="118000"/>
+              </a:lnSpc>
+              <a:buNone/>
+            </a:pPr>
+            <a:r>
+              <a:rPr lang="en-US" sz="1100" dirty="0">
+                <a:solidFill>
+                  <a:srgbClr val="CE9178"/>
+                </a:solidFill>
+                <a:latin typeface="Consolas" pitchFamily="34" charset="0"/>
+                <a:ea typeface="Consolas" pitchFamily="34" charset="-122"/>
+                <a:cs typeface="Consolas" pitchFamily="34" charset="-120"/>
+              </a:rPr>
+              <a:t>"confidence"</a:t>
+            </a:r>
+            <a:pPr indent="0" marL="0">
+              <a:lnSpc>
+                <a:spcPct val="118000"/>
+              </a:lnSpc>
+              <a:buNone/>
+            </a:pPr>
+            <a:r>
+              <a:rPr lang="en-US" sz="1100" dirty="0">
+                <a:solidFill>
+                  <a:srgbClr val="D4D4D4"/>
+                </a:solidFill>
+                <a:latin typeface="Consolas" pitchFamily="34" charset="0"/>
+                <a:ea typeface="Consolas" pitchFamily="34" charset="-122"/>
+                <a:cs typeface="Consolas" pitchFamily="34" charset="-120"/>
+              </a:rPr>
+              <a:t>:</a:t>
+            </a:r>
+            <a:pPr indent="0" marL="0">
+              <a:lnSpc>
+                <a:spcPct val="118000"/>
+              </a:lnSpc>
+              <a:buNone/>
+            </a:pPr>
+            <a:r>
+              <a:rPr lang="en-US" sz="1100" dirty="0">
+                <a:solidFill>
+                  <a:srgbClr val="D4D4D4"/>
+                </a:solidFill>
+                <a:latin typeface="Consolas" pitchFamily="34" charset="0"/>
+                <a:ea typeface="Consolas" pitchFamily="34" charset="-122"/>
+                <a:cs typeface="Consolas" pitchFamily="34" charset="-120"/>
+              </a:rPr>
+              <a:t> </a:t>
+            </a:r>
+            <a:pPr indent="0" marL="0">
+              <a:lnSpc>
+                <a:spcPct val="118000"/>
+              </a:lnSpc>
+              <a:buNone/>
+            </a:pPr>
+            <a:r>
+              <a:rPr lang="en-US" sz="1100" dirty="0">
+                <a:solidFill>
+                  <a:srgbClr val="D4D4D4"/>
+                </a:solidFill>
+                <a:latin typeface="Consolas" pitchFamily="34" charset="0"/>
+                <a:ea typeface="Consolas" pitchFamily="34" charset="-122"/>
+                <a:cs typeface="Consolas" pitchFamily="34" charset="-120"/>
+              </a:rPr>
+              <a:t>result</a:t>
+            </a:r>
+            <a:pPr indent="0" marL="0">
+              <a:lnSpc>
+                <a:spcPct val="118000"/>
+              </a:lnSpc>
+              <a:buNone/>
+            </a:pPr>
+            <a:r>
+              <a:rPr lang="en-US" sz="1100" dirty="0">
+                <a:solidFill>
+                  <a:srgbClr val="D4D4D4"/>
+                </a:solidFill>
+                <a:latin typeface="Consolas" pitchFamily="34" charset="0"/>
+                <a:ea typeface="Consolas" pitchFamily="34" charset="-122"/>
+                <a:cs typeface="Consolas" pitchFamily="34" charset="-120"/>
+              </a:rPr>
+              <a:t>.</a:t>
+            </a:r>
+            <a:pPr indent="0" marL="0">
+              <a:lnSpc>
+                <a:spcPct val="118000"/>
+              </a:lnSpc>
+              <a:buNone/>
+            </a:pPr>
+            <a:r>
+              <a:rPr lang="en-US" sz="1100" dirty="0">
+                <a:solidFill>
+                  <a:srgbClr val="D4D4D4"/>
+                </a:solidFill>
+                <a:latin typeface="Consolas" pitchFamily="34" charset="0"/>
+                <a:ea typeface="Consolas" pitchFamily="34" charset="-122"/>
+                <a:cs typeface="Consolas" pitchFamily="34" charset="-120"/>
+              </a:rPr>
+              <a:t>confidence</a:t>
+            </a:r>
+            <a:pPr indent="0" marL="0">
+              <a:lnSpc>
+                <a:spcPct val="118000"/>
+              </a:lnSpc>
+              <a:buNone/>
+            </a:pPr>
+            <a:r>
+              <a:rPr lang="en-US" sz="1100" dirty="0">
+                <a:solidFill>
+                  <a:srgbClr val="D4D4D4"/>
+                </a:solidFill>
+                <a:latin typeface="Consolas" pitchFamily="34" charset="0"/>
+                <a:ea typeface="Consolas" pitchFamily="34" charset="-122"/>
+                <a:cs typeface="Consolas" pitchFamily="34" charset="-120"/>
+              </a:rPr>
+              <a:t>,
+</a:t>
+            </a:r>
+            <a:pPr indent="0" marL="0">
+              <a:lnSpc>
+                <a:spcPct val="118000"/>
+              </a:lnSpc>
+              <a:buNone/>
+            </a:pPr>
+            <a:r>
+              <a:rPr lang="en-US" sz="1100" dirty="0">
+                <a:solidFill>
+                  <a:srgbClr val="D4D4D4"/>
+                </a:solidFill>
+                <a:latin typeface="Consolas" pitchFamily="34" charset="0"/>
+                <a:ea typeface="Consolas" pitchFamily="34" charset="-122"/>
+                <a:cs typeface="Consolas" pitchFamily="34" charset="-120"/>
+              </a:rPr>
+              <a:t>    </a:t>
+            </a:r>
+            <a:pPr indent="0" marL="0">
+              <a:lnSpc>
+                <a:spcPct val="118000"/>
+              </a:lnSpc>
+              <a:buNone/>
+            </a:pPr>
+            <a:r>
+              <a:rPr lang="en-US" sz="1100" dirty="0">
+                <a:solidFill>
+                  <a:srgbClr val="D4D4D4"/>
+                </a:solidFill>
+                <a:latin typeface="Consolas" pitchFamily="34" charset="0"/>
+                <a:ea typeface="Consolas" pitchFamily="34" charset="-122"/>
+                <a:cs typeface="Consolas" pitchFamily="34" charset="-120"/>
+              </a:rPr>
+              <a:t>}
+</a:t>
+            </a:r>
+            <a:pPr indent="0" marL="0">
+              <a:lnSpc>
+                <a:spcPct val="118000"/>
+              </a:lnSpc>
+              <a:buNone/>
+            </a:pPr>
+            <a:r>
+              <a:rPr lang="en-US" sz="1100" dirty="0">
+                <a:solidFill>
+                  <a:srgbClr val="D4D4D4"/>
+                </a:solidFill>
+                <a:latin typeface="Consolas" pitchFamily="34" charset="0"/>
+                <a:ea typeface="Consolas" pitchFamily="34" charset="-122"/>
+                <a:cs typeface="Consolas" pitchFamily="34" charset="-120"/>
+              </a:rPr>
+              <a:t>
+</a:t>
+            </a:r>
+            <a:pPr indent="0" marL="0">
+              <a:lnSpc>
+                <a:spcPct val="118000"/>
+              </a:lnSpc>
+              <a:buNone/>
+            </a:pPr>
+            <a:r>
+              <a:rPr lang="en-US" sz="1100" dirty="0">
+                <a:solidFill>
+                  <a:srgbClr val="D4D4D4"/>
+                </a:solidFill>
+                <a:latin typeface="Consolas" pitchFamily="34" charset="0"/>
+                <a:ea typeface="Consolas" pitchFamily="34" charset="-122"/>
+                <a:cs typeface="Consolas" pitchFamily="34" charset="-120"/>
+              </a:rPr>
+              <a:t>graph</a:t>
+            </a:r>
+            <a:pPr indent="0" marL="0">
+              <a:lnSpc>
+                <a:spcPct val="118000"/>
+              </a:lnSpc>
+              <a:buNone/>
+            </a:pPr>
+            <a:r>
+              <a:rPr lang="en-US" sz="1100" dirty="0">
+                <a:solidFill>
+                  <a:srgbClr val="D4D4D4"/>
+                </a:solidFill>
+                <a:latin typeface="Consolas" pitchFamily="34" charset="0"/>
+                <a:ea typeface="Consolas" pitchFamily="34" charset="-122"/>
+                <a:cs typeface="Consolas" pitchFamily="34" charset="-120"/>
+              </a:rPr>
+              <a:t>.</a:t>
+            </a:r>
+            <a:pPr indent="0" marL="0">
+              <a:lnSpc>
+                <a:spcPct val="118000"/>
+              </a:lnSpc>
+              <a:buNone/>
+            </a:pPr>
+            <a:r>
+              <a:rPr lang="en-US" sz="1100" dirty="0">
+                <a:solidFill>
+                  <a:srgbClr val="D4D4D4"/>
+                </a:solidFill>
+                <a:latin typeface="Consolas" pitchFamily="34" charset="0"/>
+                <a:ea typeface="Consolas" pitchFamily="34" charset="-122"/>
+                <a:cs typeface="Consolas" pitchFamily="34" charset="-120"/>
+              </a:rPr>
+              <a:t>add_node</a:t>
+            </a:r>
+            <a:pPr indent="0" marL="0">
+              <a:lnSpc>
+                <a:spcPct val="118000"/>
+              </a:lnSpc>
+              <a:buNone/>
+            </a:pPr>
+            <a:r>
+              <a:rPr lang="en-US" sz="1100" dirty="0">
+                <a:solidFill>
+                  <a:srgbClr val="D4D4D4"/>
+                </a:solidFill>
+                <a:latin typeface="Consolas" pitchFamily="34" charset="0"/>
+                <a:ea typeface="Consolas" pitchFamily="34" charset="-122"/>
+                <a:cs typeface="Consolas" pitchFamily="34" charset="-120"/>
+              </a:rPr>
+              <a:t>(</a:t>
+            </a:r>
+            <a:pPr indent="0" marL="0">
+              <a:lnSpc>
+                <a:spcPct val="118000"/>
+              </a:lnSpc>
+              <a:buNone/>
+            </a:pPr>
+            <a:r>
+              <a:rPr lang="en-US" sz="1100" dirty="0">
+                <a:solidFill>
+                  <a:srgbClr val="CE9178"/>
+                </a:solidFill>
+                <a:latin typeface="Consolas" pitchFamily="34" charset="0"/>
+                <a:ea typeface="Consolas" pitchFamily="34" charset="-122"/>
+                <a:cs typeface="Consolas" pitchFamily="34" charset="-120"/>
+              </a:rPr>
+              <a:t>"extract"</a:t>
+            </a:r>
+            <a:pPr indent="0" marL="0">
+              <a:lnSpc>
+                <a:spcPct val="118000"/>
+              </a:lnSpc>
+              <a:buNone/>
+            </a:pPr>
+            <a:r>
+              <a:rPr lang="en-US" sz="1100" dirty="0">
+                <a:solidFill>
+                  <a:srgbClr val="D4D4D4"/>
+                </a:solidFill>
+                <a:latin typeface="Consolas" pitchFamily="34" charset="0"/>
+                <a:ea typeface="Consolas" pitchFamily="34" charset="-122"/>
+                <a:cs typeface="Consolas" pitchFamily="34" charset="-120"/>
+              </a:rPr>
+              <a:t>,</a:t>
+            </a:r>
+            <a:pPr indent="0" marL="0">
+              <a:lnSpc>
+                <a:spcPct val="118000"/>
+              </a:lnSpc>
+              <a:buNone/>
+            </a:pPr>
+            <a:r>
+              <a:rPr lang="en-US" sz="1100" dirty="0">
+                <a:solidFill>
+                  <a:srgbClr val="D4D4D4"/>
+                </a:solidFill>
+                <a:latin typeface="Consolas" pitchFamily="34" charset="0"/>
+                <a:ea typeface="Consolas" pitchFamily="34" charset="-122"/>
+                <a:cs typeface="Consolas" pitchFamily="34" charset="-120"/>
+              </a:rPr>
+              <a:t> </a:t>
+            </a:r>
+            <a:pPr indent="0" marL="0">
+              <a:lnSpc>
+                <a:spcPct val="118000"/>
+              </a:lnSpc>
+              <a:buNone/>
+            </a:pPr>
+            <a:r>
+              <a:rPr lang="en-US" sz="1100" dirty="0">
+                <a:solidFill>
+                  <a:srgbClr val="D4D4D4"/>
+                </a:solidFill>
+                <a:latin typeface="Consolas" pitchFamily="34" charset="0"/>
+                <a:ea typeface="Consolas" pitchFamily="34" charset="-122"/>
+                <a:cs typeface="Consolas" pitchFamily="34" charset="-120"/>
+              </a:rPr>
+              <a:t>extract_claim</a:t>
+            </a:r>
+            <a:pPr indent="0" marL="0">
+              <a:lnSpc>
+                <a:spcPct val="118000"/>
+              </a:lnSpc>
+              <a:buNone/>
+            </a:pPr>
+            <a:r>
+              <a:rPr lang="en-US" sz="1100" dirty="0">
+                <a:solidFill>
+                  <a:srgbClr val="D4D4D4"/>
+                </a:solidFill>
+                <a:latin typeface="Consolas" pitchFamily="34" charset="0"/>
+                <a:ea typeface="Consolas" pitchFamily="34" charset="-122"/>
+                <a:cs typeface="Consolas" pitchFamily="34" charset="-120"/>
+              </a:rPr>
+              <a:t>)
+</a:t>
+            </a:r>
+            <a:pPr indent="0" marL="0">
+              <a:lnSpc>
+                <a:spcPct val="118000"/>
+              </a:lnSpc>
+              <a:buNone/>
+            </a:pPr>
+            <a:r>
+              <a:rPr lang="en-US" sz="1100" dirty="0">
+                <a:solidFill>
+                  <a:srgbClr val="D4D4D4"/>
+                </a:solidFill>
+                <a:latin typeface="Consolas" pitchFamily="34" charset="0"/>
+                <a:ea typeface="Consolas" pitchFamily="34" charset="-122"/>
+                <a:cs typeface="Consolas" pitchFamily="34" charset="-120"/>
+              </a:rPr>
+              <a:t>graph</a:t>
+            </a:r>
+            <a:pPr indent="0" marL="0">
+              <a:lnSpc>
+                <a:spcPct val="118000"/>
+              </a:lnSpc>
+              <a:buNone/>
+            </a:pPr>
+            <a:r>
+              <a:rPr lang="en-US" sz="1100" dirty="0">
+                <a:solidFill>
+                  <a:srgbClr val="D4D4D4"/>
+                </a:solidFill>
+                <a:latin typeface="Consolas" pitchFamily="34" charset="0"/>
+                <a:ea typeface="Consolas" pitchFamily="34" charset="-122"/>
+                <a:cs typeface="Consolas" pitchFamily="34" charset="-120"/>
+              </a:rPr>
+              <a:t>.</a:t>
+            </a:r>
+            <a:pPr indent="0" marL="0">
+              <a:lnSpc>
+                <a:spcPct val="118000"/>
+              </a:lnSpc>
+              <a:buNone/>
+            </a:pPr>
+            <a:r>
+              <a:rPr lang="en-US" sz="1100" dirty="0">
+                <a:solidFill>
+                  <a:srgbClr val="D4D4D4"/>
+                </a:solidFill>
+                <a:latin typeface="Consolas" pitchFamily="34" charset="0"/>
+                <a:ea typeface="Consolas" pitchFamily="34" charset="-122"/>
+                <a:cs typeface="Consolas" pitchFamily="34" charset="-120"/>
+              </a:rPr>
+              <a:t>add_edge</a:t>
+            </a:r>
+            <a:pPr indent="0" marL="0">
+              <a:lnSpc>
+                <a:spcPct val="118000"/>
+              </a:lnSpc>
+              <a:buNone/>
+            </a:pPr>
+            <a:r>
+              <a:rPr lang="en-US" sz="1100" dirty="0">
+                <a:solidFill>
+                  <a:srgbClr val="D4D4D4"/>
+                </a:solidFill>
+                <a:latin typeface="Consolas" pitchFamily="34" charset="0"/>
+                <a:ea typeface="Consolas" pitchFamily="34" charset="-122"/>
+                <a:cs typeface="Consolas" pitchFamily="34" charset="-120"/>
+              </a:rPr>
+              <a:t>(</a:t>
+            </a:r>
+            <a:pPr indent="0" marL="0">
+              <a:lnSpc>
+                <a:spcPct val="118000"/>
+              </a:lnSpc>
+              <a:buNone/>
+            </a:pPr>
+            <a:r>
+              <a:rPr lang="en-US" sz="1100" dirty="0">
+                <a:solidFill>
+                  <a:srgbClr val="CE9178"/>
+                </a:solidFill>
+                <a:latin typeface="Consolas" pitchFamily="34" charset="0"/>
+                <a:ea typeface="Consolas" pitchFamily="34" charset="-122"/>
+                <a:cs typeface="Consolas" pitchFamily="34" charset="-120"/>
+              </a:rPr>
+              <a:t>"extract"</a:t>
+            </a:r>
+            <a:pPr indent="0" marL="0">
+              <a:lnSpc>
+                <a:spcPct val="118000"/>
+              </a:lnSpc>
+              <a:buNone/>
+            </a:pPr>
+            <a:r>
+              <a:rPr lang="en-US" sz="1100" dirty="0">
+                <a:solidFill>
+                  <a:srgbClr val="D4D4D4"/>
+                </a:solidFill>
+                <a:latin typeface="Consolas" pitchFamily="34" charset="0"/>
+                <a:ea typeface="Consolas" pitchFamily="34" charset="-122"/>
+                <a:cs typeface="Consolas" pitchFamily="34" charset="-120"/>
+              </a:rPr>
+              <a:t>,</a:t>
+            </a:r>
+            <a:pPr indent="0" marL="0">
+              <a:lnSpc>
+                <a:spcPct val="118000"/>
+              </a:lnSpc>
+              <a:buNone/>
+            </a:pPr>
+            <a:r>
+              <a:rPr lang="en-US" sz="1100" dirty="0">
+                <a:solidFill>
+                  <a:srgbClr val="D4D4D4"/>
+                </a:solidFill>
+                <a:latin typeface="Consolas" pitchFamily="34" charset="0"/>
+                <a:ea typeface="Consolas" pitchFamily="34" charset="-122"/>
+                <a:cs typeface="Consolas" pitchFamily="34" charset="-120"/>
+              </a:rPr>
+              <a:t> </a:t>
+            </a:r>
+            <a:pPr indent="0" marL="0">
+              <a:lnSpc>
+                <a:spcPct val="118000"/>
+              </a:lnSpc>
+              <a:buNone/>
+            </a:pPr>
+            <a:r>
+              <a:rPr lang="en-US" sz="1100" dirty="0">
+                <a:solidFill>
+                  <a:srgbClr val="CE9178"/>
+                </a:solidFill>
+                <a:latin typeface="Consolas" pitchFamily="34" charset="0"/>
+                <a:ea typeface="Consolas" pitchFamily="34" charset="-122"/>
+                <a:cs typeface="Consolas" pitchFamily="34" charset="-120"/>
+              </a:rPr>
+              <a:t>"classify"</a:t>
+            </a:r>
+            <a:pPr indent="0" marL="0">
+              <a:lnSpc>
+                <a:spcPct val="118000"/>
+              </a:lnSpc>
+              <a:buNone/>
+            </a:pPr>
+            <a:r>
+              <a:rPr lang="en-US" sz="1100" dirty="0">
+                <a:solidFill>
+                  <a:srgbClr val="D4D4D4"/>
+                </a:solidFill>
+                <a:latin typeface="Consolas" pitchFamily="34" charset="0"/>
+                <a:ea typeface="Consolas" pitchFamily="34" charset="-122"/>
+                <a:cs typeface="Consolas" pitchFamily="34" charset="-120"/>
+              </a:rPr>
+              <a:t>)
+</a:t>
+            </a:r>
+            <a:endParaRPr lang="en-US" sz="1100" dirty="0"/>
           </a:p>
         </p:txBody>
       </p:sp>

--- a/case-study/deck/GGW_FNOL_Redesign.pptx
+++ b/case-study/deck/GGW_FNOL_Redesign.pptx
@@ -25089,7 +25089,7 @@
         <p:spPr>
           <a:xfrm>
             <a:off x="365760" y="4224528"/>
-            <a:ext cx="5650992" cy="274320"/>
+            <a:ext cx="5650992" cy="384048"/>
           </a:xfrm>
           <a:prstGeom prst="rect">
             <a:avLst/>
@@ -25116,7 +25116,7 @@
                 <a:ea typeface="Arial" pitchFamily="34" charset="-122"/>
                 <a:cs typeface="Arial" pitchFamily="34" charset="-120"/>
               </a:rPr>
-              <a:t>Basis: 20 claim handlers × 2.5 claims a day, confirmed by GGW (8 Sep 2026). 52 min back, each, per day.</a:t>
+              <a:t>Basis: 2.5 first reports a day per handler, the same before and after, that's inbound volume, not a capacity cap. What changes is the time each takes: 100 minutes a day, then 48. Confirmed by GGW (8 Sep 2026).</a:t>
             </a:r>
             <a:endParaRPr lang="en-US" sz="860" dirty="0"/>
           </a:p>

--- a/case-study/deck/GGW_FNOL_Redesign.pptx
+++ b/case-study/deck/GGW_FNOL_Redesign.pptx
@@ -25089,7 +25089,7 @@
         <p:spPr>
           <a:xfrm>
             <a:off x="365760" y="4224528"/>
-            <a:ext cx="5650992" cy="384048"/>
+            <a:ext cx="5650992" cy="512064"/>
           </a:xfrm>
           <a:prstGeom prst="rect">
             <a:avLst/>
@@ -25116,7 +25116,7 @@
                 <a:ea typeface="Arial" pitchFamily="34" charset="-122"/>
                 <a:cs typeface="Arial" pitchFamily="34" charset="-120"/>
               </a:rPr>
-              <a:t>Basis: 2.5 first reports a day per handler, the same before and after, that's inbound volume, not a capacity cap. What changes is the time each takes: 100 minutes a day, then 48. Confirmed by GGW (8 Sep 2026).</a:t>
+              <a:t>Basis: 2.5 first reports a day per handler (50 ÷ 20, both confirmed by GGW), the same before and after, that's inbound volume, not a capacity cap. At 40 min each, that's 100 minutes of an 8-hour shift today (~21%), 48 after (~10%). The rest of the day is the rest of the job: claims already open, not new intake.</a:t>
             </a:r>
             <a:endParaRPr lang="en-US" sz="860" dirty="0"/>
           </a:p>

--- a/case-study/deck/GGW_FNOL_Redesign.pptx
+++ b/case-study/deck/GGW_FNOL_Redesign.pptx
@@ -25116,7 +25116,7 @@
                 <a:ea typeface="Arial" pitchFamily="34" charset="-122"/>
                 <a:cs typeface="Arial" pitchFamily="34" charset="-120"/>
               </a:rPr>
-              <a:t>Basis: 2.5 first reports a day per handler (50 ÷ 20, both confirmed by GGW), the same before and after, that's inbound volume, not a capacity cap. At 40 min each, that's 100 minutes of an 8-hour shift today (~21%), 48 after (~10%). The rest of the day is the rest of the job: claims already open, not new intake.</a:t>
+              <a:t>Basis: at 40 minutes a claim, today's standard time, an 8-hour shift holds capacity for 12 claims; at 19 (the banked, most-likely estimate), capacity is ~25, roughly double. That's a ceiling, not the 52 minutes freed above, which is actual time freed on today's claim volume. Confirmed by GGW (8 Sep 2026).</a:t>
             </a:r>
             <a:endParaRPr lang="en-US" sz="860" dirty="0"/>
           </a:p>

--- a/case-study/deck/GGW_FNOL_Redesign.pptx
+++ b/case-study/deck/GGW_FNOL_Redesign.pptx
@@ -19995,7 +19995,7 @@
         </p:nvSpPr>
         <p:spPr>
           <a:xfrm>
-            <a:off x="9390888" y="2679192"/>
+            <a:off x="9390888" y="2665476"/>
             <a:ext cx="274320" cy="274320"/>
           </a:xfrm>
           <a:prstGeom prst="ellipse">
@@ -20015,7 +20015,7 @@
         </p:nvSpPr>
         <p:spPr>
           <a:xfrm>
-            <a:off x="9390888" y="2679192"/>
+            <a:off x="9390888" y="2665476"/>
             <a:ext cx="274320" cy="274320"/>
           </a:xfrm>
           <a:prstGeom prst="rect">
@@ -20054,7 +20054,7 @@
         </p:nvSpPr>
         <p:spPr>
           <a:xfrm>
-            <a:off x="9738360" y="2660904"/>
+            <a:off x="9738360" y="2647188"/>
             <a:ext cx="1883664" cy="173736"/>
           </a:xfrm>
           <a:prstGeom prst="rect">
@@ -20093,7 +20093,7 @@
         </p:nvSpPr>
         <p:spPr>
           <a:xfrm>
-            <a:off x="9738360" y="2825496"/>
+            <a:off x="9738360" y="2811780"/>
             <a:ext cx="1883664" cy="164592"/>
           </a:xfrm>
           <a:prstGeom prst="rect">
@@ -20132,7 +20132,7 @@
         </p:nvSpPr>
         <p:spPr>
           <a:xfrm>
-            <a:off x="9390888" y="3168396"/>
+            <a:off x="9390888" y="3166567"/>
             <a:ext cx="274320" cy="274320"/>
           </a:xfrm>
           <a:prstGeom prst="ellipse">
@@ -20152,7 +20152,7 @@
         </p:nvSpPr>
         <p:spPr>
           <a:xfrm>
-            <a:off x="9390888" y="3168396"/>
+            <a:off x="9390888" y="3166567"/>
             <a:ext cx="274320" cy="274320"/>
           </a:xfrm>
           <a:prstGeom prst="rect">
@@ -20191,7 +20191,7 @@
         </p:nvSpPr>
         <p:spPr>
           <a:xfrm>
-            <a:off x="9738360" y="3150108"/>
+            <a:off x="9738360" y="3148279"/>
             <a:ext cx="1883664" cy="173736"/>
           </a:xfrm>
           <a:prstGeom prst="rect">
@@ -20230,7 +20230,7 @@
         </p:nvSpPr>
         <p:spPr>
           <a:xfrm>
-            <a:off x="9738360" y="3314700"/>
+            <a:off x="9738360" y="3312871"/>
             <a:ext cx="1883664" cy="164592"/>
           </a:xfrm>
           <a:prstGeom prst="rect">
@@ -20269,7 +20269,7 @@
         </p:nvSpPr>
         <p:spPr>
           <a:xfrm>
-            <a:off x="9390888" y="3657600"/>
+            <a:off x="9390888" y="3643884"/>
             <a:ext cx="274320" cy="274320"/>
           </a:xfrm>
           <a:prstGeom prst="ellipse">
@@ -20289,7 +20289,7 @@
         </p:nvSpPr>
         <p:spPr>
           <a:xfrm>
-            <a:off x="9390888" y="3657600"/>
+            <a:off x="9390888" y="3643884"/>
             <a:ext cx="274320" cy="274320"/>
           </a:xfrm>
           <a:prstGeom prst="rect">
@@ -20328,7 +20328,7 @@
         </p:nvSpPr>
         <p:spPr>
           <a:xfrm>
-            <a:off x="9738360" y="3639312"/>
+            <a:off x="9738360" y="3625596"/>
             <a:ext cx="1883664" cy="173736"/>
           </a:xfrm>
           <a:prstGeom prst="rect">
@@ -20367,7 +20367,7 @@
         </p:nvSpPr>
         <p:spPr>
           <a:xfrm>
-            <a:off x="9738360" y="3803904"/>
+            <a:off x="9738360" y="3790188"/>
             <a:ext cx="1883664" cy="164592"/>
           </a:xfrm>
           <a:prstGeom prst="rect">
@@ -20406,7 +20406,7 @@
         </p:nvSpPr>
         <p:spPr>
           <a:xfrm>
-            <a:off x="9390888" y="4146804"/>
+            <a:off x="9390888" y="4142232"/>
             <a:ext cx="274320" cy="274320"/>
           </a:xfrm>
           <a:prstGeom prst="ellipse">
@@ -20426,7 +20426,7 @@
         </p:nvSpPr>
         <p:spPr>
           <a:xfrm>
-            <a:off x="9390888" y="4146804"/>
+            <a:off x="9390888" y="4142232"/>
             <a:ext cx="274320" cy="274320"/>
           </a:xfrm>
           <a:prstGeom prst="rect">
@@ -20465,7 +20465,7 @@
         </p:nvSpPr>
         <p:spPr>
           <a:xfrm>
-            <a:off x="9738360" y="4128516"/>
+            <a:off x="9738360" y="4123944"/>
             <a:ext cx="1883664" cy="173736"/>
           </a:xfrm>
           <a:prstGeom prst="rect">
@@ -20504,7 +20504,7 @@
         </p:nvSpPr>
         <p:spPr>
           <a:xfrm>
-            <a:off x="9738360" y="4293108"/>
+            <a:off x="9738360" y="4288536"/>
             <a:ext cx="1883664" cy="164592"/>
           </a:xfrm>
           <a:prstGeom prst="rect">
@@ -20965,7 +20965,7 @@
         <p:spPr>
           <a:xfrm>
             <a:off x="365760" y="1682496"/>
-            <a:ext cx="1126744" cy="457200"/>
+            <a:ext cx="897706" cy="457200"/>
           </a:xfrm>
           <a:prstGeom prst="roundRect">
             <a:avLst>
@@ -20992,7 +20992,7 @@
         <p:spPr>
           <a:xfrm>
             <a:off x="402336" y="1682496"/>
-            <a:ext cx="1053592" cy="457200"/>
+            <a:ext cx="824554" cy="457200"/>
           </a:xfrm>
           <a:prstGeom prst="rect">
             <a:avLst/>
@@ -21033,8 +21033,8 @@
         </p:nvSpPr>
         <p:spPr>
           <a:xfrm>
-            <a:off x="1657096" y="1682496"/>
-            <a:ext cx="1126744" cy="457200"/>
+            <a:off x="1409770" y="1682496"/>
+            <a:ext cx="1020353" cy="457200"/>
           </a:xfrm>
           <a:prstGeom prst="roundRect">
             <a:avLst>
@@ -21060,8 +21060,8 @@
         </p:nvSpPr>
         <p:spPr>
           <a:xfrm>
-            <a:off x="1693672" y="1682496"/>
-            <a:ext cx="1053592" cy="457200"/>
+            <a:off x="1446346" y="1682496"/>
+            <a:ext cx="947201" cy="457200"/>
           </a:xfrm>
           <a:prstGeom prst="rect">
             <a:avLst/>
@@ -21102,8 +21102,8 @@
         </p:nvSpPr>
         <p:spPr>
           <a:xfrm>
-            <a:off x="2948432" y="1682496"/>
-            <a:ext cx="1126744" cy="457200"/>
+            <a:off x="2576428" y="1682496"/>
+            <a:ext cx="959030" cy="457200"/>
           </a:xfrm>
           <a:prstGeom prst="roundRect">
             <a:avLst>
@@ -21129,8 +21129,8 @@
         </p:nvSpPr>
         <p:spPr>
           <a:xfrm>
-            <a:off x="2985008" y="1682496"/>
-            <a:ext cx="1053592" cy="457200"/>
+            <a:off x="2613004" y="1682496"/>
+            <a:ext cx="885878" cy="457200"/>
           </a:xfrm>
           <a:prstGeom prst="rect">
             <a:avLst/>
@@ -21171,8 +21171,8 @@
         </p:nvSpPr>
         <p:spPr>
           <a:xfrm>
-            <a:off x="4239768" y="1682496"/>
-            <a:ext cx="1126744" cy="457200"/>
+            <a:off x="3681761" y="1682496"/>
+            <a:ext cx="1081677" cy="457200"/>
           </a:xfrm>
           <a:prstGeom prst="roundRect">
             <a:avLst>
@@ -21198,8 +21198,8 @@
         </p:nvSpPr>
         <p:spPr>
           <a:xfrm>
-            <a:off x="4276344" y="1682496"/>
-            <a:ext cx="1053592" cy="457200"/>
+            <a:off x="3718337" y="1682496"/>
+            <a:ext cx="1008525" cy="457200"/>
           </a:xfrm>
           <a:prstGeom prst="rect">
             <a:avLst/>
@@ -21240,8 +21240,8 @@
         </p:nvSpPr>
         <p:spPr>
           <a:xfrm>
-            <a:off x="5531104" y="1682496"/>
-            <a:ext cx="1126744" cy="457200"/>
+            <a:off x="4909742" y="1682496"/>
+            <a:ext cx="1143000" cy="457200"/>
           </a:xfrm>
           <a:prstGeom prst="roundRect">
             <a:avLst>
@@ -21267,8 +21267,8 @@
         </p:nvSpPr>
         <p:spPr>
           <a:xfrm>
-            <a:off x="5567680" y="1682496"/>
-            <a:ext cx="1053592" cy="457200"/>
+            <a:off x="4946318" y="1682496"/>
+            <a:ext cx="1069848" cy="457200"/>
           </a:xfrm>
           <a:prstGeom prst="rect">
             <a:avLst/>
@@ -21309,8 +21309,8 @@
         </p:nvSpPr>
         <p:spPr>
           <a:xfrm>
-            <a:off x="6822440" y="1682496"/>
-            <a:ext cx="1126744" cy="457200"/>
+            <a:off x="6199046" y="1682496"/>
+            <a:ext cx="1326970" cy="457200"/>
           </a:xfrm>
           <a:prstGeom prst="roundRect">
             <a:avLst>
@@ -21336,8 +21336,8 @@
         </p:nvSpPr>
         <p:spPr>
           <a:xfrm>
-            <a:off x="6859016" y="1682496"/>
-            <a:ext cx="1053592" cy="457200"/>
+            <a:off x="6235622" y="1682496"/>
+            <a:ext cx="1253818" cy="457200"/>
           </a:xfrm>
           <a:prstGeom prst="rect">
             <a:avLst/>
@@ -21378,8 +21378,8 @@
         </p:nvSpPr>
         <p:spPr>
           <a:xfrm>
-            <a:off x="8113776" y="1682496"/>
-            <a:ext cx="1126744" cy="457200"/>
+            <a:off x="7672320" y="1682496"/>
+            <a:ext cx="1449617" cy="457200"/>
           </a:xfrm>
           <a:prstGeom prst="roundRect">
             <a:avLst>
@@ -21405,8 +21405,8 @@
         </p:nvSpPr>
         <p:spPr>
           <a:xfrm>
-            <a:off x="8150352" y="1682496"/>
-            <a:ext cx="1053592" cy="457200"/>
+            <a:off x="7708896" y="1682496"/>
+            <a:ext cx="1376465" cy="457200"/>
           </a:xfrm>
           <a:prstGeom prst="rect">
             <a:avLst/>
@@ -21447,8 +21447,8 @@
         </p:nvSpPr>
         <p:spPr>
           <a:xfrm>
-            <a:off x="9405112" y="1682496"/>
-            <a:ext cx="1126744" cy="457200"/>
+            <a:off x="9268241" y="1682496"/>
+            <a:ext cx="1204323" cy="457200"/>
           </a:xfrm>
           <a:prstGeom prst="roundRect">
             <a:avLst>
@@ -21474,8 +21474,8 @@
         </p:nvSpPr>
         <p:spPr>
           <a:xfrm>
-            <a:off x="9441688" y="1682496"/>
-            <a:ext cx="1053592" cy="457200"/>
+            <a:off x="9304817" y="1682496"/>
+            <a:ext cx="1131171" cy="457200"/>
           </a:xfrm>
           <a:prstGeom prst="rect">
             <a:avLst/>
@@ -21516,8 +21516,8 @@
         </p:nvSpPr>
         <p:spPr>
           <a:xfrm>
-            <a:off x="10696448" y="1682496"/>
-            <a:ext cx="1126744" cy="457200"/>
+            <a:off x="10618869" y="1682496"/>
+            <a:ext cx="1204323" cy="457200"/>
           </a:xfrm>
           <a:prstGeom prst="roundRect">
             <a:avLst>
@@ -21543,8 +21543,8 @@
         </p:nvSpPr>
         <p:spPr>
           <a:xfrm>
-            <a:off x="10733024" y="1682496"/>
-            <a:ext cx="1053592" cy="457200"/>
+            <a:off x="10655445" y="1682496"/>
+            <a:ext cx="1131171" cy="457200"/>
           </a:xfrm>
           <a:prstGeom prst="rect">
             <a:avLst/>
@@ -21625,7 +21625,7 @@
         <p:spPr>
           <a:xfrm>
             <a:off x="365760" y="2962656"/>
-            <a:ext cx="3697224" cy="420624"/>
+            <a:ext cx="3440811" cy="420624"/>
           </a:xfrm>
           <a:prstGeom prst="roundRect">
             <a:avLst>
@@ -21652,7 +21652,7 @@
         <p:spPr>
           <a:xfrm>
             <a:off x="493776" y="2962656"/>
-            <a:ext cx="1554480" cy="420624"/>
+            <a:ext cx="1060704" cy="420624"/>
           </a:xfrm>
           <a:prstGeom prst="rect">
             <a:avLst/>
@@ -21690,8 +21690,8 @@
         </p:nvSpPr>
         <p:spPr>
           <a:xfrm>
-            <a:off x="2057400" y="2962656"/>
-            <a:ext cx="1914144" cy="420624"/>
+            <a:off x="1609344" y="2962656"/>
+            <a:ext cx="2105787" cy="420624"/>
           </a:xfrm>
           <a:prstGeom prst="rect">
             <a:avLst/>
@@ -21732,8 +21732,8 @@
         </p:nvSpPr>
         <p:spPr>
           <a:xfrm>
-            <a:off x="4245864" y="2962656"/>
-            <a:ext cx="3697224" cy="420624"/>
+            <a:off x="3989451" y="2962656"/>
+            <a:ext cx="4028955" cy="420624"/>
           </a:xfrm>
           <a:prstGeom prst="roundRect">
             <a:avLst>
@@ -21759,7 +21759,7 @@
         </p:nvSpPr>
         <p:spPr>
           <a:xfrm>
-            <a:off x="4373880" y="2962656"/>
+            <a:off x="4117467" y="2962656"/>
             <a:ext cx="1554480" cy="420624"/>
           </a:xfrm>
           <a:prstGeom prst="rect">
@@ -21798,8 +21798,8 @@
         </p:nvSpPr>
         <p:spPr>
           <a:xfrm>
-            <a:off x="5937504" y="2962656"/>
-            <a:ext cx="1914144" cy="420624"/>
+            <a:off x="5726811" y="2962656"/>
+            <a:ext cx="2200155" cy="420624"/>
           </a:xfrm>
           <a:prstGeom prst="rect">
             <a:avLst/>
@@ -21840,8 +21840,8 @@
         </p:nvSpPr>
         <p:spPr>
           <a:xfrm>
-            <a:off x="8125968" y="2962656"/>
-            <a:ext cx="3697224" cy="420624"/>
+            <a:off x="8201286" y="2962656"/>
+            <a:ext cx="3621906" cy="420624"/>
           </a:xfrm>
           <a:prstGeom prst="roundRect">
             <a:avLst>
@@ -21867,8 +21867,8 @@
         </p:nvSpPr>
         <p:spPr>
           <a:xfrm>
-            <a:off x="8253984" y="2962656"/>
-            <a:ext cx="1554480" cy="420624"/>
+            <a:off x="8329302" y="2962656"/>
+            <a:ext cx="978408" cy="420624"/>
           </a:xfrm>
           <a:prstGeom prst="rect">
             <a:avLst/>
@@ -21906,8 +21906,8 @@
         </p:nvSpPr>
         <p:spPr>
           <a:xfrm>
-            <a:off x="9817608" y="2962656"/>
-            <a:ext cx="1914144" cy="420624"/>
+            <a:off x="9362574" y="2962656"/>
+            <a:ext cx="2369178" cy="420624"/>
           </a:xfrm>
           <a:prstGeom prst="rect">
             <a:avLst/>
@@ -22934,6 +22934,884 @@
         </p:nvSpPr>
         <p:spPr>
           <a:xfrm>
+            <a:off x="365760" y="5138928"/>
+            <a:ext cx="2743200" cy="182880"/>
+          </a:xfrm>
+          <a:prstGeom prst="rect">
+            <a:avLst/>
+          </a:prstGeom>
+          <a:noFill/>
+          <a:ln/>
+        </p:spPr>
+        <p:txBody>
+          <a:bodyPr wrap="square" lIns="0" tIns="0" rIns="0" bIns="0" rtlCol="0" anchor="ctr"/>
+          <a:lstStyle/>
+          <a:p>
+            <a:pPr indent="0" marL="0">
+              <a:buNone/>
+            </a:pPr>
+            <a:r>
+              <a:rPr lang="en-US" sz="950" b="1" spc="90" kern="0" dirty="0">
+                <a:solidFill>
+                  <a:srgbClr val="0891B2"/>
+                </a:solidFill>
+                <a:latin typeface="Arial" pitchFamily="34" charset="0"/>
+                <a:ea typeface="Arial" pitchFamily="34" charset="-122"/>
+                <a:cs typeface="Arial" pitchFamily="34" charset="-120"/>
+              </a:rPr>
+              <a:t>THE GRAPH</a:t>
+            </a:r>
+            <a:endParaRPr lang="en-US" sz="950" dirty="0"/>
+          </a:p>
+        </p:txBody>
+      </p:sp>
+      <p:sp>
+        <p:nvSpPr>
+          <p:cNvPr id="67" name="Shape 65"/>
+          <p:cNvSpPr/>
+          <p:nvPr/>
+        </p:nvSpPr>
+        <p:spPr>
+          <a:xfrm>
+            <a:off x="365760" y="5358384"/>
+            <a:ext cx="457200" cy="310896"/>
+          </a:xfrm>
+          <a:prstGeom prst="roundRect">
+            <a:avLst>
+              <a:gd name="adj" fmla="val 50000"/>
+            </a:avLst>
+          </a:prstGeom>
+          <a:solidFill>
+            <a:srgbClr val="1B2430"/>
+          </a:solidFill>
+          <a:ln/>
+        </p:spPr>
+      </p:sp>
+      <p:sp>
+        <p:nvSpPr>
+          <p:cNvPr id="68" name="Text 66"/>
+          <p:cNvSpPr txBox="1"/>
+          <p:nvPr/>
+        </p:nvSpPr>
+        <p:spPr>
+          <a:xfrm>
+            <a:off x="365760" y="5358384"/>
+            <a:ext cx="457200" cy="310896"/>
+          </a:xfrm>
+          <a:prstGeom prst="rect">
+            <a:avLst/>
+          </a:prstGeom>
+          <a:noFill/>
+          <a:ln/>
+        </p:spPr>
+        <p:txBody>
+          <a:bodyPr wrap="square" lIns="0" tIns="0" rIns="0" bIns="0" rtlCol="0" anchor="ctr"/>
+          <a:lstStyle/>
+          <a:p>
+            <a:pPr algn="ctr" indent="0" marL="0">
+              <a:buNone/>
+            </a:pPr>
+            <a:r>
+              <a:rPr lang="en-US" sz="700" b="1" dirty="0">
+                <a:solidFill>
+                  <a:srgbClr val="FFFFFF"/>
+                </a:solidFill>
+                <a:latin typeface="Arial" pitchFamily="34" charset="0"/>
+                <a:ea typeface="Arial" pitchFamily="34" charset="-122"/>
+                <a:cs typeface="Arial" pitchFamily="34" charset="-120"/>
+              </a:rPr>
+              <a:t>start</a:t>
+            </a:r>
+            <a:endParaRPr lang="en-US" sz="700" dirty="0"/>
+          </a:p>
+        </p:txBody>
+      </p:sp>
+      <p:sp>
+        <p:nvSpPr>
+          <p:cNvPr id="69" name="Shape 67"/>
+          <p:cNvSpPr/>
+          <p:nvPr/>
+        </p:nvSpPr>
+        <p:spPr>
+          <a:xfrm>
+            <a:off x="960120" y="5358384"/>
+            <a:ext cx="1051560" cy="310896"/>
+          </a:xfrm>
+          <a:prstGeom prst="roundRect">
+            <a:avLst>
+              <a:gd name="adj" fmla="val 50000"/>
+            </a:avLst>
+          </a:prstGeom>
+          <a:solidFill>
+            <a:srgbClr val="E3EDF6"/>
+          </a:solidFill>
+          <a:ln w="13970">
+            <a:solidFill>
+              <a:srgbClr val="3B6FA0"/>
+            </a:solidFill>
+            <a:prstDash val="solid"/>
+          </a:ln>
+        </p:spPr>
+      </p:sp>
+      <p:sp>
+        <p:nvSpPr>
+          <p:cNvPr id="70" name="Text 68"/>
+          <p:cNvSpPr txBox="1"/>
+          <p:nvPr/>
+        </p:nvSpPr>
+        <p:spPr>
+          <a:xfrm>
+            <a:off x="960120" y="5358384"/>
+            <a:ext cx="1051560" cy="310896"/>
+          </a:xfrm>
+          <a:prstGeom prst="rect">
+            <a:avLst/>
+          </a:prstGeom>
+          <a:noFill/>
+          <a:ln/>
+        </p:spPr>
+        <p:txBody>
+          <a:bodyPr wrap="square" lIns="0" tIns="0" rIns="0" bIns="0" rtlCol="0" anchor="ctr"/>
+          <a:lstStyle/>
+          <a:p>
+            <a:pPr algn="ctr" indent="0" marL="0">
+              <a:buNone/>
+            </a:pPr>
+            <a:r>
+              <a:rPr lang="en-US" sz="760" b="1" dirty="0">
+                <a:solidFill>
+                  <a:srgbClr val="1B2430"/>
+                </a:solidFill>
+                <a:latin typeface="Consolas" pitchFamily="34" charset="0"/>
+                <a:ea typeface="Consolas" pitchFamily="34" charset="-122"/>
+                <a:cs typeface="Consolas" pitchFamily="34" charset="-120"/>
+              </a:rPr>
+              <a:t>extract</a:t>
+            </a:r>
+            <a:endParaRPr lang="en-US" sz="760" dirty="0"/>
+          </a:p>
+        </p:txBody>
+      </p:sp>
+      <p:sp>
+        <p:nvSpPr>
+          <p:cNvPr id="71" name="Shape 69"/>
+          <p:cNvSpPr/>
+          <p:nvPr/>
+        </p:nvSpPr>
+        <p:spPr>
+          <a:xfrm>
+            <a:off x="2148840" y="5358384"/>
+            <a:ext cx="1143000" cy="310896"/>
+          </a:xfrm>
+          <a:prstGeom prst="roundRect">
+            <a:avLst>
+              <a:gd name="adj" fmla="val 50000"/>
+            </a:avLst>
+          </a:prstGeom>
+          <a:solidFill>
+            <a:srgbClr val="E3EDF6"/>
+          </a:solidFill>
+          <a:ln w="13970">
+            <a:solidFill>
+              <a:srgbClr val="3B6FA0"/>
+            </a:solidFill>
+            <a:prstDash val="solid"/>
+          </a:ln>
+        </p:spPr>
+      </p:sp>
+      <p:sp>
+        <p:nvSpPr>
+          <p:cNvPr id="72" name="Text 70"/>
+          <p:cNvSpPr txBox="1"/>
+          <p:nvPr/>
+        </p:nvSpPr>
+        <p:spPr>
+          <a:xfrm>
+            <a:off x="2148840" y="5358384"/>
+            <a:ext cx="1143000" cy="310896"/>
+          </a:xfrm>
+          <a:prstGeom prst="rect">
+            <a:avLst/>
+          </a:prstGeom>
+          <a:noFill/>
+          <a:ln/>
+        </p:spPr>
+        <p:txBody>
+          <a:bodyPr wrap="square" lIns="0" tIns="0" rIns="0" bIns="0" rtlCol="0" anchor="ctr"/>
+          <a:lstStyle/>
+          <a:p>
+            <a:pPr algn="ctr" indent="0" marL="0">
+              <a:buNone/>
+            </a:pPr>
+            <a:r>
+              <a:rPr lang="en-US" sz="760" b="1" dirty="0">
+                <a:solidFill>
+                  <a:srgbClr val="1B2430"/>
+                </a:solidFill>
+                <a:latin typeface="Consolas" pitchFamily="34" charset="0"/>
+                <a:ea typeface="Consolas" pitchFamily="34" charset="-122"/>
+                <a:cs typeface="Consolas" pitchFamily="34" charset="-120"/>
+              </a:rPr>
+              <a:t>classify</a:t>
+            </a:r>
+            <a:endParaRPr lang="en-US" sz="760" dirty="0"/>
+          </a:p>
+        </p:txBody>
+      </p:sp>
+      <p:sp>
+        <p:nvSpPr>
+          <p:cNvPr id="73" name="Shape 71"/>
+          <p:cNvSpPr/>
+          <p:nvPr/>
+        </p:nvSpPr>
+        <p:spPr>
+          <a:xfrm>
+            <a:off x="3429000" y="5358384"/>
+            <a:ext cx="1051560" cy="310896"/>
+          </a:xfrm>
+          <a:prstGeom prst="roundRect">
+            <a:avLst>
+              <a:gd name="adj" fmla="val 50000"/>
+            </a:avLst>
+          </a:prstGeom>
+          <a:solidFill>
+            <a:srgbClr val="ECEFF3"/>
+          </a:solidFill>
+          <a:ln w="13970">
+            <a:solidFill>
+              <a:srgbClr val="6B7787"/>
+            </a:solidFill>
+            <a:prstDash val="solid"/>
+          </a:ln>
+        </p:spPr>
+      </p:sp>
+      <p:sp>
+        <p:nvSpPr>
+          <p:cNvPr id="74" name="Text 72"/>
+          <p:cNvSpPr txBox="1"/>
+          <p:nvPr/>
+        </p:nvSpPr>
+        <p:spPr>
+          <a:xfrm>
+            <a:off x="3429000" y="5358384"/>
+            <a:ext cx="1051560" cy="310896"/>
+          </a:xfrm>
+          <a:prstGeom prst="rect">
+            <a:avLst/>
+          </a:prstGeom>
+          <a:noFill/>
+          <a:ln/>
+        </p:spPr>
+        <p:txBody>
+          <a:bodyPr wrap="square" lIns="0" tIns="0" rIns="0" bIns="0" rtlCol="0" anchor="ctr"/>
+          <a:lstStyle/>
+          <a:p>
+            <a:pPr algn="ctr" indent="0" marL="0">
+              <a:buNone/>
+            </a:pPr>
+            <a:r>
+              <a:rPr lang="en-US" sz="760" b="1" dirty="0">
+                <a:solidFill>
+                  <a:srgbClr val="2A3340"/>
+                </a:solidFill>
+                <a:latin typeface="Consolas" pitchFamily="34" charset="0"/>
+                <a:ea typeface="Consolas" pitchFamily="34" charset="-122"/>
+                <a:cs typeface="Consolas" pitchFamily="34" charset="-120"/>
+              </a:rPr>
+              <a:t>validate</a:t>
+            </a:r>
+            <a:endParaRPr lang="en-US" sz="760" dirty="0"/>
+          </a:p>
+        </p:txBody>
+      </p:sp>
+      <p:sp>
+        <p:nvSpPr>
+          <p:cNvPr id="75" name="Shape 73"/>
+          <p:cNvSpPr/>
+          <p:nvPr/>
+        </p:nvSpPr>
+        <p:spPr>
+          <a:xfrm>
+            <a:off x="4617720" y="5358384"/>
+            <a:ext cx="1417320" cy="310896"/>
+          </a:xfrm>
+          <a:prstGeom prst="roundRect">
+            <a:avLst>
+              <a:gd name="adj" fmla="val 50000"/>
+            </a:avLst>
+          </a:prstGeom>
+          <a:solidFill>
+            <a:srgbClr val="ECEFF3"/>
+          </a:solidFill>
+          <a:ln w="13970">
+            <a:solidFill>
+              <a:srgbClr val="6B7787"/>
+            </a:solidFill>
+            <a:prstDash val="solid"/>
+          </a:ln>
+        </p:spPr>
+      </p:sp>
+      <p:sp>
+        <p:nvSpPr>
+          <p:cNvPr id="76" name="Text 74"/>
+          <p:cNvSpPr txBox="1"/>
+          <p:nvPr/>
+        </p:nvSpPr>
+        <p:spPr>
+          <a:xfrm>
+            <a:off x="4617720" y="5358384"/>
+            <a:ext cx="1417320" cy="310896"/>
+          </a:xfrm>
+          <a:prstGeom prst="rect">
+            <a:avLst/>
+          </a:prstGeom>
+          <a:noFill/>
+          <a:ln/>
+        </p:spPr>
+        <p:txBody>
+          <a:bodyPr wrap="square" lIns="0" tIns="0" rIns="0" bIns="0" rtlCol="0" anchor="ctr"/>
+          <a:lstStyle/>
+          <a:p>
+            <a:pPr algn="ctr" indent="0" marL="0">
+              <a:buNone/>
+            </a:pPr>
+            <a:r>
+              <a:rPr lang="en-US" sz="760" b="1" dirty="0">
+                <a:solidFill>
+                  <a:srgbClr val="2A3340"/>
+                </a:solidFill>
+                <a:latin typeface="Consolas" pitchFamily="34" charset="0"/>
+                <a:ea typeface="Consolas" pitchFamily="34" charset="-122"/>
+                <a:cs typeface="Consolas" pitchFamily="34" charset="-120"/>
+              </a:rPr>
+              <a:t>coverage_check</a:t>
+            </a:r>
+            <a:endParaRPr lang="en-US" sz="760" dirty="0"/>
+          </a:p>
+        </p:txBody>
+      </p:sp>
+      <p:sp>
+        <p:nvSpPr>
+          <p:cNvPr id="77" name="Shape 75"/>
+          <p:cNvSpPr/>
+          <p:nvPr/>
+        </p:nvSpPr>
+        <p:spPr>
+          <a:xfrm>
+            <a:off x="6172200" y="5358384"/>
+            <a:ext cx="914400" cy="310896"/>
+          </a:xfrm>
+          <a:prstGeom prst="roundRect">
+            <a:avLst>
+              <a:gd name="adj" fmla="val 50000"/>
+            </a:avLst>
+          </a:prstGeom>
+          <a:solidFill>
+            <a:srgbClr val="E3EDF6"/>
+          </a:solidFill>
+          <a:ln w="13970">
+            <a:solidFill>
+              <a:srgbClr val="3B6FA0"/>
+            </a:solidFill>
+            <a:prstDash val="solid"/>
+          </a:ln>
+        </p:spPr>
+      </p:sp>
+      <p:sp>
+        <p:nvSpPr>
+          <p:cNvPr id="78" name="Text 76"/>
+          <p:cNvSpPr txBox="1"/>
+          <p:nvPr/>
+        </p:nvSpPr>
+        <p:spPr>
+          <a:xfrm>
+            <a:off x="6172200" y="5358384"/>
+            <a:ext cx="914400" cy="310896"/>
+          </a:xfrm>
+          <a:prstGeom prst="rect">
+            <a:avLst/>
+          </a:prstGeom>
+          <a:noFill/>
+          <a:ln/>
+        </p:spPr>
+        <p:txBody>
+          <a:bodyPr wrap="square" lIns="0" tIns="0" rIns="0" bIns="0" rtlCol="0" anchor="ctr"/>
+          <a:lstStyle/>
+          <a:p>
+            <a:pPr algn="ctr" indent="0" marL="0">
+              <a:buNone/>
+            </a:pPr>
+            <a:r>
+              <a:rPr lang="en-US" sz="760" b="1" dirty="0">
+                <a:solidFill>
+                  <a:srgbClr val="1B2430"/>
+                </a:solidFill>
+                <a:latin typeface="Consolas" pitchFamily="34" charset="0"/>
+                <a:ea typeface="Consolas" pitchFamily="34" charset="-122"/>
+                <a:cs typeface="Consolas" pitchFamily="34" charset="-120"/>
+              </a:rPr>
+              <a:t>draft</a:t>
+            </a:r>
+            <a:endParaRPr lang="en-US" sz="760" dirty="0"/>
+          </a:p>
+        </p:txBody>
+      </p:sp>
+      <p:sp>
+        <p:nvSpPr>
+          <p:cNvPr id="79" name="Shape 77"/>
+          <p:cNvSpPr/>
+          <p:nvPr/>
+        </p:nvSpPr>
+        <p:spPr>
+          <a:xfrm>
+            <a:off x="7223760" y="5358384"/>
+            <a:ext cx="1097280" cy="310896"/>
+          </a:xfrm>
+          <a:prstGeom prst="roundRect">
+            <a:avLst>
+              <a:gd name="adj" fmla="val 50000"/>
+            </a:avLst>
+          </a:prstGeom>
+          <a:solidFill>
+            <a:srgbClr val="F1E6ED"/>
+          </a:solidFill>
+          <a:ln w="13970">
+            <a:solidFill>
+              <a:srgbClr val="7A4A66"/>
+            </a:solidFill>
+            <a:prstDash val="solid"/>
+          </a:ln>
+        </p:spPr>
+      </p:sp>
+      <p:sp>
+        <p:nvSpPr>
+          <p:cNvPr id="80" name="Text 78"/>
+          <p:cNvSpPr txBox="1"/>
+          <p:nvPr/>
+        </p:nvSpPr>
+        <p:spPr>
+          <a:xfrm>
+            <a:off x="7223760" y="5358384"/>
+            <a:ext cx="1097280" cy="310896"/>
+          </a:xfrm>
+          <a:prstGeom prst="rect">
+            <a:avLst/>
+          </a:prstGeom>
+          <a:noFill/>
+          <a:ln/>
+        </p:spPr>
+        <p:txBody>
+          <a:bodyPr wrap="square" lIns="0" tIns="0" rIns="0" bIns="0" rtlCol="0" anchor="ctr"/>
+          <a:lstStyle/>
+          <a:p>
+            <a:pPr algn="ctr" indent="0" marL="0">
+              <a:buNone/>
+            </a:pPr>
+            <a:r>
+              <a:rPr lang="en-US" sz="760" b="1" dirty="0">
+                <a:solidFill>
+                  <a:srgbClr val="4A2C3B"/>
+                </a:solidFill>
+                <a:latin typeface="Consolas" pitchFamily="34" charset="0"/>
+                <a:ea typeface="Consolas" pitchFamily="34" charset="-122"/>
+                <a:cs typeface="Consolas" pitchFamily="34" charset="-120"/>
+              </a:rPr>
+              <a:t>approve</a:t>
+            </a:r>
+            <a:endParaRPr lang="en-US" sz="760" dirty="0"/>
+          </a:p>
+        </p:txBody>
+      </p:sp>
+      <p:sp>
+        <p:nvSpPr>
+          <p:cNvPr id="81" name="Shape 79"/>
+          <p:cNvSpPr/>
+          <p:nvPr/>
+        </p:nvSpPr>
+        <p:spPr>
+          <a:xfrm>
+            <a:off x="8458200" y="5358384"/>
+            <a:ext cx="457200" cy="310896"/>
+          </a:xfrm>
+          <a:prstGeom prst="roundRect">
+            <a:avLst>
+              <a:gd name="adj" fmla="val 50000"/>
+            </a:avLst>
+          </a:prstGeom>
+          <a:solidFill>
+            <a:srgbClr val="1B2430"/>
+          </a:solidFill>
+          <a:ln/>
+        </p:spPr>
+      </p:sp>
+      <p:sp>
+        <p:nvSpPr>
+          <p:cNvPr id="82" name="Text 80"/>
+          <p:cNvSpPr txBox="1"/>
+          <p:nvPr/>
+        </p:nvSpPr>
+        <p:spPr>
+          <a:xfrm>
+            <a:off x="8458200" y="5358384"/>
+            <a:ext cx="457200" cy="310896"/>
+          </a:xfrm>
+          <a:prstGeom prst="rect">
+            <a:avLst/>
+          </a:prstGeom>
+          <a:noFill/>
+          <a:ln/>
+        </p:spPr>
+        <p:txBody>
+          <a:bodyPr wrap="square" lIns="0" tIns="0" rIns="0" bIns="0" rtlCol="0" anchor="ctr"/>
+          <a:lstStyle/>
+          <a:p>
+            <a:pPr algn="ctr" indent="0" marL="0">
+              <a:buNone/>
+            </a:pPr>
+            <a:r>
+              <a:rPr lang="en-US" sz="700" b="1" dirty="0">
+                <a:solidFill>
+                  <a:srgbClr val="FFFFFF"/>
+                </a:solidFill>
+                <a:latin typeface="Arial" pitchFamily="34" charset="0"/>
+                <a:ea typeface="Arial" pitchFamily="34" charset="-122"/>
+                <a:cs typeface="Arial" pitchFamily="34" charset="-120"/>
+              </a:rPr>
+              <a:t>end</a:t>
+            </a:r>
+            <a:endParaRPr lang="en-US" sz="700" dirty="0"/>
+          </a:p>
+        </p:txBody>
+      </p:sp>
+      <p:sp>
+        <p:nvSpPr>
+          <p:cNvPr id="83" name="Shape 81"/>
+          <p:cNvSpPr/>
+          <p:nvPr/>
+        </p:nvSpPr>
+        <p:spPr>
+          <a:xfrm>
+            <a:off x="822960" y="5513832"/>
+            <a:ext cx="137160" cy="0"/>
+          </a:xfrm>
+          <a:prstGeom prst="line">
+            <a:avLst/>
+          </a:prstGeom>
+          <a:noFill/>
+          <a:ln w="12700">
+            <a:solidFill>
+              <a:srgbClr val="5B7D80"/>
+            </a:solidFill>
+            <a:prstDash val="solid"/>
+            <a:tailEnd type="triangle"/>
+          </a:ln>
+        </p:spPr>
+      </p:sp>
+      <p:sp>
+        <p:nvSpPr>
+          <p:cNvPr id="84" name="Shape 82"/>
+          <p:cNvSpPr/>
+          <p:nvPr/>
+        </p:nvSpPr>
+        <p:spPr>
+          <a:xfrm>
+            <a:off x="2011680" y="5513832"/>
+            <a:ext cx="137160" cy="0"/>
+          </a:xfrm>
+          <a:prstGeom prst="line">
+            <a:avLst/>
+          </a:prstGeom>
+          <a:noFill/>
+          <a:ln w="12700">
+            <a:solidFill>
+              <a:srgbClr val="5B7D80"/>
+            </a:solidFill>
+            <a:prstDash val="solid"/>
+            <a:tailEnd type="triangle"/>
+          </a:ln>
+        </p:spPr>
+      </p:sp>
+      <p:sp>
+        <p:nvSpPr>
+          <p:cNvPr id="85" name="Shape 83"/>
+          <p:cNvSpPr/>
+          <p:nvPr/>
+        </p:nvSpPr>
+        <p:spPr>
+          <a:xfrm>
+            <a:off x="3291840" y="5513832"/>
+            <a:ext cx="137160" cy="0"/>
+          </a:xfrm>
+          <a:prstGeom prst="line">
+            <a:avLst/>
+          </a:prstGeom>
+          <a:noFill/>
+          <a:ln w="12700">
+            <a:solidFill>
+              <a:srgbClr val="5B7D80"/>
+            </a:solidFill>
+            <a:prstDash val="solid"/>
+            <a:tailEnd type="triangle"/>
+          </a:ln>
+        </p:spPr>
+      </p:sp>
+      <p:sp>
+        <p:nvSpPr>
+          <p:cNvPr id="86" name="Shape 84"/>
+          <p:cNvSpPr/>
+          <p:nvPr/>
+        </p:nvSpPr>
+        <p:spPr>
+          <a:xfrm>
+            <a:off x="4480560" y="5513832"/>
+            <a:ext cx="137160" cy="0"/>
+          </a:xfrm>
+          <a:prstGeom prst="line">
+            <a:avLst/>
+          </a:prstGeom>
+          <a:noFill/>
+          <a:ln w="12700">
+            <a:solidFill>
+              <a:srgbClr val="5B7D80"/>
+            </a:solidFill>
+            <a:prstDash val="solid"/>
+            <a:tailEnd type="triangle"/>
+          </a:ln>
+        </p:spPr>
+      </p:sp>
+      <p:sp>
+        <p:nvSpPr>
+          <p:cNvPr id="87" name="Shape 85"/>
+          <p:cNvSpPr/>
+          <p:nvPr/>
+        </p:nvSpPr>
+        <p:spPr>
+          <a:xfrm>
+            <a:off x="6035040" y="5513832"/>
+            <a:ext cx="137160" cy="0"/>
+          </a:xfrm>
+          <a:prstGeom prst="line">
+            <a:avLst/>
+          </a:prstGeom>
+          <a:noFill/>
+          <a:ln w="12700">
+            <a:solidFill>
+              <a:srgbClr val="5B7D80"/>
+            </a:solidFill>
+            <a:prstDash val="solid"/>
+            <a:tailEnd type="triangle"/>
+          </a:ln>
+        </p:spPr>
+      </p:sp>
+      <p:sp>
+        <p:nvSpPr>
+          <p:cNvPr id="88" name="Shape 86"/>
+          <p:cNvSpPr/>
+          <p:nvPr/>
+        </p:nvSpPr>
+        <p:spPr>
+          <a:xfrm>
+            <a:off x="7086600" y="5513832"/>
+            <a:ext cx="137160" cy="0"/>
+          </a:xfrm>
+          <a:prstGeom prst="line">
+            <a:avLst/>
+          </a:prstGeom>
+          <a:noFill/>
+          <a:ln w="12700">
+            <a:solidFill>
+              <a:srgbClr val="5B7D80"/>
+            </a:solidFill>
+            <a:prstDash val="solid"/>
+            <a:tailEnd type="triangle"/>
+          </a:ln>
+        </p:spPr>
+      </p:sp>
+      <p:sp>
+        <p:nvSpPr>
+          <p:cNvPr id="89" name="Shape 87"/>
+          <p:cNvSpPr/>
+          <p:nvPr/>
+        </p:nvSpPr>
+        <p:spPr>
+          <a:xfrm>
+            <a:off x="8321040" y="5513832"/>
+            <a:ext cx="137160" cy="0"/>
+          </a:xfrm>
+          <a:prstGeom prst="line">
+            <a:avLst/>
+          </a:prstGeom>
+          <a:noFill/>
+          <a:ln w="12700">
+            <a:solidFill>
+              <a:srgbClr val="5B7D80"/>
+            </a:solidFill>
+            <a:prstDash val="solid"/>
+            <a:tailEnd type="triangle"/>
+          </a:ln>
+        </p:spPr>
+      </p:sp>
+      <p:sp>
+        <p:nvSpPr>
+          <p:cNvPr id="90" name="Shape 88"/>
+          <p:cNvSpPr/>
+          <p:nvPr/>
+        </p:nvSpPr>
+        <p:spPr>
+          <a:xfrm>
+            <a:off x="3817620" y="5815584"/>
+            <a:ext cx="1600200" cy="310896"/>
+          </a:xfrm>
+          <a:prstGeom prst="roundRect">
+            <a:avLst>
+              <a:gd name="adj" fmla="val 50000"/>
+            </a:avLst>
+          </a:prstGeom>
+          <a:solidFill>
+            <a:srgbClr val="FCEFD6"/>
+          </a:solidFill>
+          <a:ln w="13970">
+            <a:solidFill>
+              <a:srgbClr val="EF9F27"/>
+            </a:solidFill>
+            <a:prstDash val="dash"/>
+          </a:ln>
+        </p:spPr>
+      </p:sp>
+      <p:sp>
+        <p:nvSpPr>
+          <p:cNvPr id="91" name="Text 89"/>
+          <p:cNvSpPr txBox="1"/>
+          <p:nvPr/>
+        </p:nvSpPr>
+        <p:spPr>
+          <a:xfrm>
+            <a:off x="3817620" y="5815584"/>
+            <a:ext cx="1600200" cy="310896"/>
+          </a:xfrm>
+          <a:prstGeom prst="rect">
+            <a:avLst/>
+          </a:prstGeom>
+          <a:noFill/>
+          <a:ln/>
+        </p:spPr>
+        <p:txBody>
+          <a:bodyPr wrap="square" lIns="0" tIns="0" rIns="0" bIns="0" rtlCol="0" anchor="ctr"/>
+          <a:lstStyle/>
+          <a:p>
+            <a:pPr algn="ctr" indent="0" marL="0">
+              <a:buNone/>
+            </a:pPr>
+            <a:r>
+              <a:rPr lang="en-US" sz="760" b="1" dirty="0">
+                <a:solidFill>
+                  <a:srgbClr val="6B4A10"/>
+                </a:solidFill>
+                <a:latin typeface="Consolas" pitchFamily="34" charset="0"/>
+                <a:ea typeface="Consolas" pitchFamily="34" charset="-122"/>
+                <a:cs typeface="Consolas" pitchFamily="34" charset="-120"/>
+              </a:rPr>
+              <a:t>exception_research</a:t>
+            </a:r>
+            <a:endParaRPr lang="en-US" sz="760" dirty="0"/>
+          </a:p>
+        </p:txBody>
+      </p:sp>
+      <p:sp>
+        <p:nvSpPr>
+          <p:cNvPr id="92" name="Shape 90"/>
+          <p:cNvSpPr/>
+          <p:nvPr/>
+        </p:nvSpPr>
+        <p:spPr>
+          <a:xfrm>
+            <a:off x="3954780" y="5669280"/>
+            <a:ext cx="662940" cy="146304"/>
+          </a:xfrm>
+          <a:prstGeom prst="line">
+            <a:avLst/>
+          </a:prstGeom>
+          <a:noFill/>
+          <a:ln w="12700">
+            <a:solidFill>
+              <a:srgbClr val="5B7D80"/>
+            </a:solidFill>
+            <a:prstDash val="dash"/>
+            <a:tailEnd type="triangle"/>
+          </a:ln>
+        </p:spPr>
+      </p:sp>
+      <p:sp>
+        <p:nvSpPr>
+          <p:cNvPr id="93" name="Shape 91"/>
+          <p:cNvSpPr/>
+          <p:nvPr/>
+        </p:nvSpPr>
+        <p:spPr>
+          <a:xfrm flipV="1">
+            <a:off x="5417820" y="5669280"/>
+            <a:ext cx="1211580" cy="301752"/>
+          </a:xfrm>
+          <a:prstGeom prst="line">
+            <a:avLst/>
+          </a:prstGeom>
+          <a:noFill/>
+          <a:ln w="12700">
+            <a:solidFill>
+              <a:srgbClr val="5B7D80"/>
+            </a:solidFill>
+            <a:prstDash val="dash"/>
+            <a:tailEnd type="triangle"/>
+          </a:ln>
+        </p:spPr>
+      </p:sp>
+      <p:sp>
+        <p:nvSpPr>
+          <p:cNvPr id="94" name="Text 92"/>
+          <p:cNvSpPr txBox="1"/>
+          <p:nvPr/>
+        </p:nvSpPr>
+        <p:spPr>
+          <a:xfrm>
+            <a:off x="3451860" y="5797296"/>
+            <a:ext cx="731520" cy="182880"/>
+          </a:xfrm>
+          <a:prstGeom prst="rect">
+            <a:avLst/>
+          </a:prstGeom>
+          <a:noFill/>
+          <a:ln/>
+        </p:spPr>
+        <p:txBody>
+          <a:bodyPr wrap="square" lIns="0" tIns="0" rIns="0" bIns="0" rtlCol="0" anchor="ctr"/>
+          <a:lstStyle/>
+          <a:p>
+            <a:pPr algn="r" indent="0" marL="0">
+              <a:buNone/>
+            </a:pPr>
+            <a:r>
+              <a:rPr lang="en-US" sz="700" i="1" dirty="0">
+                <a:solidFill>
+                  <a:srgbClr val="5B6472"/>
+                </a:solidFill>
+                <a:latin typeface="Arial" pitchFamily="34" charset="0"/>
+                <a:ea typeface="Arial" pitchFamily="34" charset="-122"/>
+                <a:cs typeface="Arial" pitchFamily="34" charset="-120"/>
+              </a:rPr>
+              <a:t>~20%</a:t>
+            </a:r>
+            <a:endParaRPr lang="en-US" sz="700" dirty="0"/>
+          </a:p>
+        </p:txBody>
+      </p:sp>
+      <p:sp>
+        <p:nvSpPr>
+          <p:cNvPr id="95" name="Text 93"/>
+          <p:cNvSpPr txBox="1"/>
+          <p:nvPr/>
+        </p:nvSpPr>
+        <p:spPr>
+          <a:xfrm>
             <a:off x="365760" y="6601968"/>
             <a:ext cx="5486400" cy="219456"/>
           </a:xfrm>
@@ -22967,7 +23845,7 @@
       </p:sp>
       <p:sp>
         <p:nvSpPr>
-          <p:cNvPr id="67" name="Text 65"/>
+          <p:cNvPr id="96" name="Text 94"/>
           <p:cNvSpPr txBox="1"/>
           <p:nvPr/>
         </p:nvSpPr>
@@ -26176,7 +27054,7 @@
         </p:nvSpPr>
         <p:spPr>
           <a:xfrm>
-            <a:off x="365760" y="1271016"/>
+            <a:off x="365760" y="1261872"/>
             <a:ext cx="11457432" cy="274320"/>
           </a:xfrm>
           <a:prstGeom prst="rect">
@@ -26218,7 +27096,7 @@
         </p:nvSpPr>
         <p:spPr>
           <a:xfrm>
-            <a:off x="365760" y="1577340"/>
+            <a:off x="365760" y="1575511"/>
             <a:ext cx="8778240" cy="274320"/>
           </a:xfrm>
           <a:prstGeom prst="rect">
@@ -26262,7 +27140,7 @@
         </p:nvSpPr>
         <p:spPr>
           <a:xfrm>
-            <a:off x="9189720" y="1577340"/>
+            <a:off x="9189720" y="1575511"/>
             <a:ext cx="2633472" cy="274320"/>
           </a:xfrm>
           <a:prstGeom prst="rect">
@@ -26308,7 +27186,7 @@
         </p:nvSpPr>
         <p:spPr>
           <a:xfrm>
-            <a:off x="365760" y="1883664"/>
+            <a:off x="365760" y="1876349"/>
             <a:ext cx="8778240" cy="274320"/>
           </a:xfrm>
           <a:prstGeom prst="rect">
@@ -26352,7 +27230,7 @@
         </p:nvSpPr>
         <p:spPr>
           <a:xfrm>
-            <a:off x="9189720" y="1883664"/>
+            <a:off x="9189720" y="1876349"/>
             <a:ext cx="2633472" cy="274320"/>
           </a:xfrm>
           <a:prstGeom prst="rect">
@@ -26398,7 +27276,7 @@
         </p:nvSpPr>
         <p:spPr>
           <a:xfrm>
-            <a:off x="365760" y="2189988"/>
+            <a:off x="365760" y="2191817"/>
             <a:ext cx="8778240" cy="274320"/>
           </a:xfrm>
           <a:prstGeom prst="rect">
@@ -26442,7 +27320,7 @@
         </p:nvSpPr>
         <p:spPr>
           <a:xfrm>
-            <a:off x="9189720" y="2189988"/>
+            <a:off x="9189720" y="2191817"/>
             <a:ext cx="2633472" cy="274320"/>
           </a:xfrm>
           <a:prstGeom prst="rect">
@@ -26488,7 +27366,7 @@
         </p:nvSpPr>
         <p:spPr>
           <a:xfrm>
-            <a:off x="365760" y="2496312"/>
+            <a:off x="365760" y="2489911"/>
             <a:ext cx="8778240" cy="274320"/>
           </a:xfrm>
           <a:prstGeom prst="rect">
@@ -26532,7 +27410,7 @@
         </p:nvSpPr>
         <p:spPr>
           <a:xfrm>
-            <a:off x="9189720" y="2496312"/>
+            <a:off x="9189720" y="2489911"/>
             <a:ext cx="2633472" cy="274320"/>
           </a:xfrm>
           <a:prstGeom prst="rect">
@@ -26578,7 +27456,7 @@
         </p:nvSpPr>
         <p:spPr>
           <a:xfrm>
-            <a:off x="365760" y="2802636"/>
+            <a:off x="365760" y="2801722"/>
             <a:ext cx="8778240" cy="274320"/>
           </a:xfrm>
           <a:prstGeom prst="rect">
@@ -26622,7 +27500,7 @@
         </p:nvSpPr>
         <p:spPr>
           <a:xfrm>
-            <a:off x="9189720" y="2802636"/>
+            <a:off x="9189720" y="2801722"/>
             <a:ext cx="2633472" cy="274320"/>
           </a:xfrm>
           <a:prstGeom prst="rect">
@@ -26668,7 +27546,7 @@
         </p:nvSpPr>
         <p:spPr>
           <a:xfrm>
-            <a:off x="365760" y="3108960"/>
+            <a:off x="365760" y="3097987"/>
             <a:ext cx="8778240" cy="274320"/>
           </a:xfrm>
           <a:prstGeom prst="rect">
@@ -26712,7 +27590,7 @@
         </p:nvSpPr>
         <p:spPr>
           <a:xfrm>
-            <a:off x="9189720" y="3108960"/>
+            <a:off x="9189720" y="3097987"/>
             <a:ext cx="2633472" cy="274320"/>
           </a:xfrm>
           <a:prstGeom prst="rect">
@@ -26758,7 +27636,7 @@
         </p:nvSpPr>
         <p:spPr>
           <a:xfrm>
-            <a:off x="365760" y="3415284"/>
+            <a:off x="365760" y="3410712"/>
             <a:ext cx="11457432" cy="274320"/>
           </a:xfrm>
           <a:prstGeom prst="rect">
@@ -26800,7 +27678,7 @@
         </p:nvSpPr>
         <p:spPr>
           <a:xfrm>
-            <a:off x="365760" y="3721608"/>
+            <a:off x="365760" y="3712464"/>
             <a:ext cx="8778240" cy="274320"/>
           </a:xfrm>
           <a:prstGeom prst="rect">
@@ -26844,7 +27722,7 @@
         </p:nvSpPr>
         <p:spPr>
           <a:xfrm>
-            <a:off x="9189720" y="3721608"/>
+            <a:off x="9189720" y="3712464"/>
             <a:ext cx="2633472" cy="274320"/>
           </a:xfrm>
           <a:prstGeom prst="rect">
@@ -26890,7 +27768,7 @@
         </p:nvSpPr>
         <p:spPr>
           <a:xfrm>
-            <a:off x="365760" y="4027932"/>
+            <a:off x="365760" y="4027018"/>
             <a:ext cx="8778240" cy="274320"/>
           </a:xfrm>
           <a:prstGeom prst="rect">
@@ -26934,7 +27812,7 @@
         </p:nvSpPr>
         <p:spPr>
           <a:xfrm>
-            <a:off x="9189720" y="4027932"/>
+            <a:off x="9189720" y="4027018"/>
             <a:ext cx="2633472" cy="274320"/>
           </a:xfrm>
           <a:prstGeom prst="rect">
@@ -26980,7 +27858,7 @@
         </p:nvSpPr>
         <p:spPr>
           <a:xfrm>
-            <a:off x="365760" y="4334256"/>
+            <a:off x="365760" y="4326026"/>
             <a:ext cx="8778240" cy="274320"/>
           </a:xfrm>
           <a:prstGeom prst="rect">
@@ -27024,7 +27902,7 @@
         </p:nvSpPr>
         <p:spPr>
           <a:xfrm>
-            <a:off x="9189720" y="4334256"/>
+            <a:off x="9189720" y="4326026"/>
             <a:ext cx="2633472" cy="274320"/>
           </a:xfrm>
           <a:prstGeom prst="rect">
@@ -27070,7 +27948,7 @@
         </p:nvSpPr>
         <p:spPr>
           <a:xfrm>
-            <a:off x="365760" y="4732020"/>
+            <a:off x="365760" y="4727448"/>
             <a:ext cx="11457432" cy="201168"/>
           </a:xfrm>
           <a:prstGeom prst="rect">
@@ -27109,7 +27987,7 @@
         </p:nvSpPr>
         <p:spPr>
           <a:xfrm>
-            <a:off x="365760" y="4988052"/>
+            <a:off x="365760" y="4983480"/>
             <a:ext cx="11457432" cy="548640"/>
           </a:xfrm>
           <a:prstGeom prst="rect">

--- a/case-study/deck/GGW_FNOL_Redesign.pptx
+++ b/case-study/deck/GGW_FNOL_Redesign.pptx
@@ -1877,7 +1877,7 @@
                 <a:ea typeface="Cambria" pitchFamily="34" charset="-122"/>
                 <a:cs typeface="Cambria" pitchFamily="34" charset="-120"/>
               </a:rPr>
-              <a:t>Redesigning intake gives each claim handler back 52 minutes a day</a:t>
+              <a:t>Redesigning intake roughly doubles a claim handler's daily capacity</a:t>
             </a:r>
             <a:endParaRPr lang="en-US" sz="1900" dirty="0"/>
           </a:p>
@@ -1916,7 +1916,7 @@
                 <a:ea typeface="Arial" pitchFamily="34" charset="-122"/>
                 <a:cs typeface="Arial" pitchFamily="34" charset="-120"/>
               </a:rPr>
-              <a:t>17.5 hours a day across the 20 of them, or 2.8 full-time people. Most of it goes to the ~65% of claims that close at intake with no permanent injury.</a:t>
+              <a:t>Each claim drops from 40 to 19 minutes. Same 20 handlers, same shift: that's a capacity ceiling, not confirmed extra demand.</a:t>
             </a:r>
             <a:endParaRPr lang="en-US" sz="1050" dirty="0"/>
           </a:p>

--- a/case-study/deck/GGW_FNOL_Redesign.pptx
+++ b/case-study/deck/GGW_FNOL_Redesign.pptx
@@ -16,9 +16,10 @@
     <p:sldId id="264" r:id="rId10"/>
     <p:sldId id="265" r:id="rId11"/>
     <p:sldId id="266" r:id="rId12"/>
+    <p:sldId id="267" r:id="rId13"/>
   </p:sldIdLst>
   <p:notesMasterIdLst>
-    <p:notesMasterId r:id="rId13"/>
+    <p:notesMasterId r:id="rId14"/>
   </p:notesMasterIdLst>
   <p:sldSz cx="12192000" cy="6858000"/>
   <p:notesSz cx="6858000" cy="12192000"/>
@@ -712,6 +713,94 @@
             <a:fld id="{F7021451-1387-4CA6-816F-3879F97B5CBC}" type="slidenum">
               <a:rPr lang="en-US"/>
               <a:t>11</a:t>
+            </a:fld>
+            <a:endParaRPr lang="en-US"/>
+          </a:p>
+        </p:txBody>
+      </p:sp>
+    </p:spTree>
+    <p:extLst>
+      <p:ext uri="{BB962C8B-B14F-4D97-AF65-F5344CB8AC3E}">
+        <p14:creationId xmlns:p14="http://schemas.microsoft.com/office/powerpoint/2010/main" val="1024086991"/>
+      </p:ext>
+    </p:extLst>
+  </p:cSld>
+  <p:clrMapOvr>
+    <a:masterClrMapping/>
+  </p:clrMapOvr>
+</p:notes>
+</file>
+
+<file path=ppt/notesSlides/notesSlide12.xml><?xml version="1.0" encoding="utf-8"?>
+<p:notes xmlns:a="http://schemas.openxmlformats.org/drawingml/2006/main" xmlns:r="http://schemas.openxmlformats.org/officeDocument/2006/relationships" xmlns:p="http://schemas.openxmlformats.org/presentationml/2006/main">
+  <p:cSld>
+    <p:spTree>
+      <p:nvGrpSpPr>
+        <p:cNvPr id="1" name=""/>
+        <p:cNvGrpSpPr/>
+        <p:nvPr/>
+      </p:nvGrpSpPr>
+      <p:grpSpPr>
+        <a:xfrm>
+          <a:off x="0" y="0"/>
+          <a:ext cx="0" cy="0"/>
+          <a:chOff x="0" y="0"/>
+          <a:chExt cx="0" cy="0"/>
+        </a:xfrm>
+      </p:grpSpPr>
+      <p:sp>
+        <p:nvSpPr>
+          <p:cNvPr id="2" name="Slide Image Placeholder 1"/>
+          <p:cNvSpPr>
+            <a:spLocks noGrp="1" noRot="1" noChangeAspect="1"/>
+          </p:cNvSpPr>
+          <p:nvPr>
+            <p:ph type="sldImg"/>
+          </p:nvPr>
+        </p:nvSpPr>
+        <p:spPr/>
+      </p:sp>
+      <p:sp>
+        <p:nvSpPr>
+          <p:cNvPr id="3" name="Notes Placeholder 2"/>
+          <p:cNvSpPr>
+            <a:spLocks noGrp="1"/>
+          </p:cNvSpPr>
+          <p:nvPr>
+            <p:ph type="body" idx="1"/>
+          </p:nvPr>
+        </p:nvSpPr>
+        <p:spPr/>
+        <p:txBody>
+          <a:bodyPr/>
+          <a:lstStyle/>
+          <a:p>
+            <a:r>
+              <a:rPr lang="en-US" dirty="0"/>
+              <a:t/>
+            </a:r>
+            <a:endParaRPr lang="en-US" dirty="0"/>
+          </a:p>
+        </p:txBody>
+      </p:sp>
+      <p:sp>
+        <p:nvSpPr>
+          <p:cNvPr id="4" name="Slide Number Placeholder 3"/>
+          <p:cNvSpPr>
+            <a:spLocks noGrp="1"/>
+          </p:cNvSpPr>
+          <p:nvPr>
+            <p:ph type="sldNum" sz="quarter" idx="10"/>
+          </p:nvPr>
+        </p:nvSpPr>
+        <p:spPr/>
+        <p:txBody>
+          <a:bodyPr/>
+          <a:lstStyle/>
+          <a:p>
+            <a:fld id="{F7021451-1387-4CA6-816F-3879F97B5CBC}" type="slidenum">
+              <a:rPr lang="en-US"/>
+              <a:t>12</a:t>
             </a:fld>
             <a:endParaRPr lang="en-US"/>
           </a:p>
@@ -3846,7 +3935,7 @@
 </file>
 
 <file path=ppt/slides/slide10.xml><?xml version="1.0" encoding="utf-8"?>
-<p:sld xmlns:a="http://schemas.openxmlformats.org/drawingml/2006/main" xmlns:r="http://schemas.openxmlformats.org/officeDocument/2006/relationships" xmlns:p="http://schemas.openxmlformats.org/presentationml/2006/main" show="0">
+<p:sld xmlns:a="http://schemas.openxmlformats.org/drawingml/2006/main" xmlns:r="http://schemas.openxmlformats.org/officeDocument/2006/relationships" xmlns:p="http://schemas.openxmlformats.org/presentationml/2006/main">
   <p:cSld name="Slide 10">
     <p:bg>
       <p:bgPr>
@@ -7563,7 +7652,7 @@
 </file>
 
 <file path=ppt/slides/slide11.xml><?xml version="1.0" encoding="utf-8"?>
-<p:sld xmlns:a="http://schemas.openxmlformats.org/drawingml/2006/main" xmlns:r="http://schemas.openxmlformats.org/officeDocument/2006/relationships" xmlns:p="http://schemas.openxmlformats.org/presentationml/2006/main" show="0">
+<p:sld xmlns:a="http://schemas.openxmlformats.org/drawingml/2006/main" xmlns:r="http://schemas.openxmlformats.org/officeDocument/2006/relationships" xmlns:p="http://schemas.openxmlformats.org/presentationml/2006/main">
   <p:cSld name="Slide 11">
     <p:bg>
       <p:bgPr>
@@ -10085,6 +10174,1710 @@
 </a:t>
             </a:r>
             <a:endParaRPr lang="en-US" sz="1100" dirty="0"/>
+          </a:p>
+        </p:txBody>
+      </p:sp>
+    </p:spTree>
+  </p:cSld>
+  <p:clrMapOvr>
+    <a:masterClrMapping/>
+  </p:clrMapOvr>
+</p:sld>
+</file>
+
+<file path=ppt/slides/slide12.xml><?xml version="1.0" encoding="utf-8"?>
+<p:sld xmlns:a="http://schemas.openxmlformats.org/drawingml/2006/main" xmlns:r="http://schemas.openxmlformats.org/officeDocument/2006/relationships" xmlns:p="http://schemas.openxmlformats.org/presentationml/2006/main">
+  <p:cSld name="Slide 12">
+    <p:bg>
+      <p:bgPr>
+        <a:solidFill>
+          <a:srgbClr val="FFFFFF"/>
+        </a:solidFill>
+      </p:bgPr>
+    </p:bg>
+    <p:spTree>
+      <p:nvGrpSpPr>
+        <p:cNvPr id="1" name=""/>
+        <p:cNvGrpSpPr/>
+        <p:nvPr/>
+      </p:nvGrpSpPr>
+      <p:grpSpPr>
+        <a:xfrm>
+          <a:off x="0" y="0"/>
+          <a:ext cx="0" cy="0"/>
+          <a:chOff x="0" y="0"/>
+          <a:chExt cx="0" cy="0"/>
+        </a:xfrm>
+      </p:grpSpPr>
+      <p:sp>
+        <p:nvSpPr>
+          <p:cNvPr id="2" name="Text 0"/>
+          <p:cNvSpPr txBox="1"/>
+          <p:nvPr/>
+        </p:nvSpPr>
+        <p:spPr>
+          <a:xfrm>
+            <a:off x="365760" y="118872"/>
+            <a:ext cx="8138160" cy="310896"/>
+          </a:xfrm>
+          <a:prstGeom prst="rect">
+            <a:avLst/>
+          </a:prstGeom>
+          <a:noFill/>
+          <a:ln/>
+        </p:spPr>
+        <p:txBody>
+          <a:bodyPr wrap="square" lIns="0" tIns="0" rIns="0" bIns="0" rtlCol="0" anchor="ctr"/>
+          <a:lstStyle/>
+          <a:p>
+            <a:pPr indent="0" marL="0">
+              <a:buNone/>
+            </a:pPr>
+            <a:r>
+              <a:rPr lang="en-US" sz="1400" b="1" dirty="0">
+                <a:solidFill>
+                  <a:srgbClr val="1B2430"/>
+                </a:solidFill>
+                <a:latin typeface="Cambria" pitchFamily="34" charset="0"/>
+                <a:ea typeface="Cambria" pitchFamily="34" charset="-122"/>
+                <a:cs typeface="Cambria" pitchFamily="34" charset="-120"/>
+              </a:rPr>
+              <a:t>Coverage Check: the same rules-first pattern as Validation, reused</a:t>
+            </a:r>
+            <a:endParaRPr lang="en-US" sz="1400" dirty="0"/>
+          </a:p>
+        </p:txBody>
+      </p:sp>
+      <p:sp>
+        <p:nvSpPr>
+          <p:cNvPr id="3" name="Text 1"/>
+          <p:cNvSpPr txBox="1"/>
+          <p:nvPr/>
+        </p:nvSpPr>
+        <p:spPr>
+          <a:xfrm>
+            <a:off x="365760" y="402336"/>
+            <a:ext cx="8778240" cy="237744"/>
+          </a:xfrm>
+          <a:prstGeom prst="rect">
+            <a:avLst/>
+          </a:prstGeom>
+          <a:noFill/>
+          <a:ln/>
+        </p:spPr>
+        <p:txBody>
+          <a:bodyPr wrap="square" lIns="0" tIns="0" rIns="0" bIns="0" rtlCol="0" anchor="ctr"/>
+          <a:lstStyle/>
+          <a:p>
+            <a:pPr indent="0" marL="0">
+              <a:buNone/>
+            </a:pPr>
+            <a:r>
+              <a:rPr lang="en-US" sz="950" dirty="0">
+                <a:solidFill>
+                  <a:srgbClr val="5B6472"/>
+                </a:solidFill>
+                <a:latin typeface="Arial" pitchFamily="34" charset="0"/>
+                <a:ea typeface="Arial" pitchFamily="34" charset="-122"/>
+                <a:cs typeface="Arial" pitchFamily="34" charset="-120"/>
+              </a:rPr>
+              <a:t>The brief's second workflow, redesigned the same way: one shared claim record, no separate hand-off</a:t>
+            </a:r>
+            <a:endParaRPr lang="en-US" sz="950" dirty="0"/>
+          </a:p>
+        </p:txBody>
+      </p:sp>
+      <p:sp>
+        <p:nvSpPr>
+          <p:cNvPr id="4" name="Text 2"/>
+          <p:cNvSpPr txBox="1"/>
+          <p:nvPr/>
+        </p:nvSpPr>
+        <p:spPr>
+          <a:xfrm>
+            <a:off x="9509760" y="146304"/>
+            <a:ext cx="2313432" cy="274320"/>
+          </a:xfrm>
+          <a:prstGeom prst="rect">
+            <a:avLst/>
+          </a:prstGeom>
+          <a:noFill/>
+          <a:ln/>
+        </p:spPr>
+        <p:txBody>
+          <a:bodyPr wrap="square" lIns="0" tIns="0" rIns="0" bIns="0" rtlCol="0" anchor="ctr"/>
+          <a:lstStyle/>
+          <a:p>
+            <a:pPr algn="r" indent="0" marL="0">
+              <a:buNone/>
+            </a:pPr>
+            <a:r>
+              <a:rPr lang="en-US" sz="950" b="1" spc="140" kern="0" dirty="0">
+                <a:solidFill>
+                  <a:srgbClr val="5B6472"/>
+                </a:solidFill>
+                <a:latin typeface="Arial" pitchFamily="34" charset="0"/>
+                <a:ea typeface="Arial" pitchFamily="34" charset="-122"/>
+                <a:cs typeface="Arial" pitchFamily="34" charset="-120"/>
+              </a:rPr>
+              <a:t>BACKUP · IF ASKED</a:t>
+            </a:r>
+            <a:endParaRPr lang="en-US" sz="950" dirty="0"/>
+          </a:p>
+        </p:txBody>
+      </p:sp>
+      <p:sp>
+        <p:nvSpPr>
+          <p:cNvPr id="5" name="Shape 3"/>
+          <p:cNvSpPr/>
+          <p:nvPr/>
+        </p:nvSpPr>
+        <p:spPr>
+          <a:xfrm>
+            <a:off x="6062472" y="1024128"/>
+            <a:ext cx="0" cy="5440680"/>
+          </a:xfrm>
+          <a:prstGeom prst="line">
+            <a:avLst/>
+          </a:prstGeom>
+          <a:noFill/>
+          <a:ln w="9525">
+            <a:solidFill>
+              <a:srgbClr val="D7DCE2"/>
+            </a:solidFill>
+            <a:prstDash val="solid"/>
+          </a:ln>
+        </p:spPr>
+      </p:sp>
+      <p:sp>
+        <p:nvSpPr>
+          <p:cNvPr id="6" name="Text 4"/>
+          <p:cNvSpPr txBox="1"/>
+          <p:nvPr/>
+        </p:nvSpPr>
+        <p:spPr>
+          <a:xfrm>
+            <a:off x="365760" y="1005840"/>
+            <a:ext cx="5486400" cy="237744"/>
+          </a:xfrm>
+          <a:prstGeom prst="rect">
+            <a:avLst/>
+          </a:prstGeom>
+          <a:noFill/>
+          <a:ln/>
+        </p:spPr>
+        <p:txBody>
+          <a:bodyPr wrap="square" lIns="0" tIns="0" rIns="0" bIns="0" rtlCol="0" anchor="ctr"/>
+          <a:lstStyle/>
+          <a:p>
+            <a:pPr indent="0" marL="0">
+              <a:buNone/>
+            </a:pPr>
+            <a:r>
+              <a:rPr lang="en-US" sz="1150" b="1" dirty="0">
+                <a:solidFill>
+                  <a:srgbClr val="5B6472"/>
+                </a:solidFill>
+                <a:latin typeface="Arial" pitchFamily="34" charset="0"/>
+                <a:ea typeface="Arial" pitchFamily="34" charset="-122"/>
+                <a:cs typeface="Arial" pitchFamily="34" charset="-120"/>
+              </a:rPr>
+              <a:t>TODAY</a:t>
+            </a:r>
+            <a:endParaRPr lang="en-US" sz="1150" dirty="0"/>
+          </a:p>
+        </p:txBody>
+      </p:sp>
+      <p:sp>
+        <p:nvSpPr>
+          <p:cNvPr id="7" name="Text 5"/>
+          <p:cNvSpPr txBox="1"/>
+          <p:nvPr/>
+        </p:nvSpPr>
+        <p:spPr>
+          <a:xfrm>
+            <a:off x="6309360" y="1005840"/>
+            <a:ext cx="5486400" cy="237744"/>
+          </a:xfrm>
+          <a:prstGeom prst="rect">
+            <a:avLst/>
+          </a:prstGeom>
+          <a:noFill/>
+          <a:ln/>
+        </p:spPr>
+        <p:txBody>
+          <a:bodyPr wrap="square" lIns="0" tIns="0" rIns="0" bIns="0" rtlCol="0" anchor="ctr"/>
+          <a:lstStyle/>
+          <a:p>
+            <a:pPr indent="0" marL="0">
+              <a:buNone/>
+            </a:pPr>
+            <a:r>
+              <a:rPr lang="en-US" sz="1150" b="1" dirty="0">
+                <a:solidFill>
+                  <a:srgbClr val="3B6FA0"/>
+                </a:solidFill>
+                <a:latin typeface="Arial" pitchFamily="34" charset="0"/>
+                <a:ea typeface="Arial" pitchFamily="34" charset="-122"/>
+                <a:cs typeface="Arial" pitchFamily="34" charset="-120"/>
+              </a:rPr>
+              <a:t>AI-NATIVE  </a:t>
+            </a:r>
+            <a:pPr indent="0" marL="0">
+              <a:buNone/>
+            </a:pPr>
+            <a:r>
+              <a:rPr lang="en-US" sz="850" i="1" dirty="0">
+                <a:solidFill>
+                  <a:srgbClr val="5B6472"/>
+                </a:solidFill>
+                <a:latin typeface="Arial" pitchFamily="34" charset="0"/>
+                <a:ea typeface="Arial" pitchFamily="34" charset="-122"/>
+                <a:cs typeface="Arial" pitchFamily="34" charset="-120"/>
+              </a:rPr>
+              <a:t>one shared claim record, one audit trail</a:t>
+            </a:r>
+            <a:endParaRPr lang="en-US" sz="1150" dirty="0"/>
+          </a:p>
+        </p:txBody>
+      </p:sp>
+      <p:sp>
+        <p:nvSpPr>
+          <p:cNvPr id="8" name="Text 6"/>
+          <p:cNvSpPr txBox="1"/>
+          <p:nvPr/>
+        </p:nvSpPr>
+        <p:spPr>
+          <a:xfrm>
+            <a:off x="1005840" y="1417320"/>
+            <a:ext cx="4206240" cy="378079"/>
+          </a:xfrm>
+          <a:prstGeom prst="roundRect">
+            <a:avLst>
+              <a:gd name="adj" fmla="val 9674"/>
+            </a:avLst>
+          </a:prstGeom>
+          <a:solidFill>
+            <a:srgbClr val="E6F8F7"/>
+          </a:solidFill>
+          <a:ln w="15875">
+            <a:solidFill>
+              <a:srgbClr val="007A82"/>
+            </a:solidFill>
+            <a:prstDash val="solid"/>
+          </a:ln>
+        </p:spPr>
+        <p:txBody>
+          <a:bodyPr wrap="square" lIns="38100" tIns="38100" rIns="38100" bIns="38100" rtlCol="0" anchor="ctr"/>
+          <a:lstStyle/>
+          <a:p>
+            <a:pPr algn="ctr" indent="0" marL="0">
+              <a:lnSpc>
+                <a:spcPct val="108000"/>
+              </a:lnSpc>
+              <a:buNone/>
+            </a:pPr>
+            <a:r>
+              <a:rPr lang="en-US" sz="950" dirty="0">
+                <a:solidFill>
+                  <a:srgbClr val="00373A"/>
+                </a:solidFill>
+                <a:latin typeface="Arial" pitchFamily="34" charset="0"/>
+                <a:ea typeface="Arial" pitchFamily="34" charset="-122"/>
+                <a:cs typeface="Arial" pitchFamily="34" charset="-120"/>
+              </a:rPr>
+              <a:t>Claim passes intake</a:t>
+            </a:r>
+            <a:endParaRPr lang="en-US" sz="950" dirty="0"/>
+          </a:p>
+          <a:p>
+            <a:pPr algn="ctr" indent="0" marL="0">
+              <a:lnSpc>
+                <a:spcPct val="108000"/>
+              </a:lnSpc>
+              <a:buNone/>
+            </a:pPr>
+            <a:r>
+              <a:rPr lang="en-US" sz="950" dirty="0">
+                <a:solidFill>
+                  <a:srgbClr val="00373A"/>
+                </a:solidFill>
+                <a:latin typeface="Arial" pitchFamily="34" charset="0"/>
+                <a:ea typeface="Arial" pitchFamily="34" charset="-122"/>
+                <a:cs typeface="Arial" pitchFamily="34" charset="-120"/>
+              </a:rPr>
+              <a:t>(continued from FNOL)</a:t>
+            </a:r>
+            <a:endParaRPr lang="en-US" sz="950" dirty="0"/>
+          </a:p>
+        </p:txBody>
+      </p:sp>
+      <p:sp>
+        <p:nvSpPr>
+          <p:cNvPr id="9" name="Shape 7"/>
+          <p:cNvSpPr/>
+          <p:nvPr/>
+        </p:nvSpPr>
+        <p:spPr>
+          <a:xfrm>
+            <a:off x="3108960" y="1783080"/>
+            <a:ext cx="0" cy="365760"/>
+          </a:xfrm>
+          <a:prstGeom prst="line">
+            <a:avLst/>
+          </a:prstGeom>
+          <a:noFill/>
+          <a:ln w="12700">
+            <a:solidFill>
+              <a:srgbClr val="5B7D80"/>
+            </a:solidFill>
+            <a:prstDash val="solid"/>
+            <a:tailEnd type="triangle"/>
+          </a:ln>
+        </p:spPr>
+      </p:sp>
+      <p:sp>
+        <p:nvSpPr>
+          <p:cNvPr id="10" name="Text 8"/>
+          <p:cNvSpPr txBox="1"/>
+          <p:nvPr/>
+        </p:nvSpPr>
+        <p:spPr>
+          <a:xfrm>
+            <a:off x="2240280" y="2148840"/>
+            <a:ext cx="1737360" cy="640080"/>
+          </a:xfrm>
+          <a:prstGeom prst="diamond">
+            <a:avLst/>
+          </a:prstGeom>
+          <a:solidFill>
+            <a:srgbClr val="FFFFFF"/>
+          </a:solidFill>
+          <a:ln w="15875">
+            <a:solidFill>
+              <a:srgbClr val="5B7D80"/>
+            </a:solidFill>
+          </a:ln>
+        </p:spPr>
+        <p:txBody>
+          <a:bodyPr wrap="square" lIns="0" tIns="0" rIns="0" bIns="0" rtlCol="0" anchor="ctr"/>
+          <a:lstStyle/>
+          <a:p>
+            <a:pPr algn="ctr" indent="0" marL="0">
+              <a:lnSpc>
+                <a:spcPct val="100000"/>
+              </a:lnSpc>
+              <a:buNone/>
+            </a:pPr>
+            <a:r>
+              <a:rPr lang="en-US" sz="950" b="1" dirty="0">
+                <a:solidFill>
+                  <a:srgbClr val="243038"/>
+                </a:solidFill>
+                <a:latin typeface="Arial" pitchFamily="34" charset="0"/>
+                <a:ea typeface="Arial" pitchFamily="34" charset="-122"/>
+                <a:cs typeface="Arial" pitchFamily="34" charset="-120"/>
+              </a:rPr>
+              <a:t>Valid policy</a:t>
+            </a:r>
+            <a:endParaRPr lang="en-US" sz="950" dirty="0"/>
+          </a:p>
+          <a:p>
+            <a:pPr algn="ctr" indent="0" marL="0">
+              <a:lnSpc>
+                <a:spcPct val="100000"/>
+              </a:lnSpc>
+              <a:buNone/>
+            </a:pPr>
+            <a:r>
+              <a:rPr lang="en-US" sz="950" b="1" dirty="0">
+                <a:solidFill>
+                  <a:srgbClr val="243038"/>
+                </a:solidFill>
+                <a:latin typeface="Arial" pitchFamily="34" charset="0"/>
+                <a:ea typeface="Arial" pitchFamily="34" charset="-122"/>
+                <a:cs typeface="Arial" pitchFamily="34" charset="-120"/>
+              </a:rPr>
+              <a:t>period?</a:t>
+            </a:r>
+            <a:endParaRPr lang="en-US" sz="950" dirty="0"/>
+          </a:p>
+        </p:txBody>
+      </p:sp>
+      <p:sp>
+        <p:nvSpPr>
+          <p:cNvPr id="11" name="Shape 9"/>
+          <p:cNvSpPr/>
+          <p:nvPr/>
+        </p:nvSpPr>
+        <p:spPr>
+          <a:xfrm>
+            <a:off x="3977640" y="2468880"/>
+            <a:ext cx="274320" cy="0"/>
+          </a:xfrm>
+          <a:prstGeom prst="line">
+            <a:avLst/>
+          </a:prstGeom>
+          <a:noFill/>
+          <a:ln w="12700">
+            <a:solidFill>
+              <a:srgbClr val="5B7D80"/>
+            </a:solidFill>
+            <a:prstDash val="solid"/>
+            <a:tailEnd type="triangle"/>
+          </a:ln>
+        </p:spPr>
+      </p:sp>
+      <p:sp>
+        <p:nvSpPr>
+          <p:cNvPr id="12" name="Text 10"/>
+          <p:cNvSpPr txBox="1"/>
+          <p:nvPr/>
+        </p:nvSpPr>
+        <p:spPr>
+          <a:xfrm>
+            <a:off x="4251960" y="2085213"/>
+            <a:ext cx="1645920" cy="182880"/>
+          </a:xfrm>
+          <a:prstGeom prst="rect">
+            <a:avLst/>
+          </a:prstGeom>
+          <a:noFill/>
+          <a:ln/>
+        </p:spPr>
+        <p:txBody>
+          <a:bodyPr wrap="square" lIns="0" tIns="0" rIns="0" bIns="0" rtlCol="0" anchor="ctr"/>
+          <a:lstStyle/>
+          <a:p>
+            <a:pPr algn="l" indent="0" marL="0">
+              <a:buNone/>
+            </a:pPr>
+            <a:r>
+              <a:rPr lang="en-US" sz="800" i="1" dirty="0">
+                <a:solidFill>
+                  <a:srgbClr val="5B6472"/>
+                </a:solidFill>
+                <a:latin typeface="Arial" pitchFamily="34" charset="0"/>
+                <a:ea typeface="Arial" pitchFamily="34" charset="-122"/>
+                <a:cs typeface="Arial" pitchFamily="34" charset="-120"/>
+              </a:rPr>
+              <a:t>Yes, no warning</a:t>
+            </a:r>
+            <a:endParaRPr lang="en-US" sz="800" dirty="0"/>
+          </a:p>
+        </p:txBody>
+      </p:sp>
+      <p:sp>
+        <p:nvSpPr>
+          <p:cNvPr id="13" name="Text 11"/>
+          <p:cNvSpPr txBox="1"/>
+          <p:nvPr/>
+        </p:nvSpPr>
+        <p:spPr>
+          <a:xfrm>
+            <a:off x="4251960" y="2304669"/>
+            <a:ext cx="1463040" cy="328422"/>
+          </a:xfrm>
+          <a:prstGeom prst="roundRect">
+            <a:avLst>
+              <a:gd name="adj" fmla="val 11137"/>
+            </a:avLst>
+          </a:prstGeom>
+          <a:solidFill>
+            <a:srgbClr val="EDF7DB"/>
+          </a:solidFill>
+          <a:ln w="15875">
+            <a:solidFill>
+              <a:srgbClr val="6FA01F"/>
+            </a:solidFill>
+            <a:prstDash val="solid"/>
+          </a:ln>
+        </p:spPr>
+        <p:txBody>
+          <a:bodyPr wrap="square" lIns="38100" tIns="38100" rIns="38100" bIns="38100" rtlCol="0" anchor="ctr"/>
+          <a:lstStyle/>
+          <a:p>
+            <a:pPr algn="ctr" indent="0" marL="0">
+              <a:lnSpc>
+                <a:spcPct val="108000"/>
+              </a:lnSpc>
+              <a:buNone/>
+            </a:pPr>
+            <a:r>
+              <a:rPr lang="en-US" sz="780" dirty="0">
+                <a:solidFill>
+                  <a:srgbClr val="33480A"/>
+                </a:solidFill>
+                <a:latin typeface="Arial" pitchFamily="34" charset="0"/>
+                <a:ea typeface="Arial" pitchFamily="34" charset="-122"/>
+                <a:cs typeface="Arial" pitchFamily="34" charset="-120"/>
+              </a:rPr>
+              <a:t>Coverage confirmed,</a:t>
+            </a:r>
+            <a:endParaRPr lang="en-US" sz="780" dirty="0"/>
+          </a:p>
+          <a:p>
+            <a:pPr algn="ctr" indent="0" marL="0">
+              <a:lnSpc>
+                <a:spcPct val="108000"/>
+              </a:lnSpc>
+              <a:buNone/>
+            </a:pPr>
+            <a:r>
+              <a:rPr lang="en-US" sz="780" dirty="0">
+                <a:solidFill>
+                  <a:srgbClr val="33480A"/>
+                </a:solidFill>
+                <a:latin typeface="Arial" pitchFamily="34" charset="0"/>
+                <a:ea typeface="Arial" pitchFamily="34" charset="-122"/>
+                <a:cs typeface="Arial" pitchFamily="34" charset="-120"/>
+              </a:rPr>
+              <a:t>proceed (usually quick)</a:t>
+            </a:r>
+            <a:endParaRPr lang="en-US" sz="780" dirty="0"/>
+          </a:p>
+        </p:txBody>
+      </p:sp>
+      <p:sp>
+        <p:nvSpPr>
+          <p:cNvPr id="14" name="Shape 12"/>
+          <p:cNvSpPr/>
+          <p:nvPr/>
+        </p:nvSpPr>
+        <p:spPr>
+          <a:xfrm>
+            <a:off x="3108960" y="2788920"/>
+            <a:ext cx="0" cy="411480"/>
+          </a:xfrm>
+          <a:prstGeom prst="line">
+            <a:avLst/>
+          </a:prstGeom>
+          <a:noFill/>
+          <a:ln w="12700">
+            <a:solidFill>
+              <a:srgbClr val="5B7D80"/>
+            </a:solidFill>
+            <a:prstDash val="solid"/>
+            <a:tailEnd type="triangle"/>
+          </a:ln>
+        </p:spPr>
+      </p:sp>
+      <p:sp>
+        <p:nvSpPr>
+          <p:cNvPr id="15" name="Text 13"/>
+          <p:cNvSpPr txBox="1"/>
+          <p:nvPr/>
+        </p:nvSpPr>
+        <p:spPr>
+          <a:xfrm>
+            <a:off x="2240280" y="3200400"/>
+            <a:ext cx="1737360" cy="640080"/>
+          </a:xfrm>
+          <a:prstGeom prst="diamond">
+            <a:avLst/>
+          </a:prstGeom>
+          <a:solidFill>
+            <a:srgbClr val="FFFFFF"/>
+          </a:solidFill>
+          <a:ln w="15875">
+            <a:solidFill>
+              <a:srgbClr val="5B7D80"/>
+            </a:solidFill>
+          </a:ln>
+        </p:spPr>
+        <p:txBody>
+          <a:bodyPr wrap="square" lIns="0" tIns="0" rIns="0" bIns="0" rtlCol="0" anchor="ctr"/>
+          <a:lstStyle/>
+          <a:p>
+            <a:pPr algn="ctr" indent="0" marL="0">
+              <a:lnSpc>
+                <a:spcPct val="100000"/>
+              </a:lnSpc>
+              <a:buNone/>
+            </a:pPr>
+            <a:r>
+              <a:rPr lang="en-US" sz="950" b="1" dirty="0">
+                <a:solidFill>
+                  <a:srgbClr val="243038"/>
+                </a:solidFill>
+                <a:latin typeface="Arial" pitchFamily="34" charset="0"/>
+                <a:ea typeface="Arial" pitchFamily="34" charset="-122"/>
+                <a:cs typeface="Arial" pitchFamily="34" charset="-120"/>
+              </a:rPr>
+              <a:t>Why no</a:t>
+            </a:r>
+            <a:endParaRPr lang="en-US" sz="950" dirty="0"/>
+          </a:p>
+          <a:p>
+            <a:pPr algn="ctr" indent="0" marL="0">
+              <a:lnSpc>
+                <a:spcPct val="100000"/>
+              </a:lnSpc>
+              <a:buNone/>
+            </a:pPr>
+            <a:r>
+              <a:rPr lang="en-US" sz="950" b="1" dirty="0">
+                <a:solidFill>
+                  <a:srgbClr val="243038"/>
+                </a:solidFill>
+                <a:latin typeface="Arial" pitchFamily="34" charset="0"/>
+                <a:ea typeface="Arial" pitchFamily="34" charset="-122"/>
+                <a:cs typeface="Arial" pitchFamily="34" charset="-120"/>
+              </a:rPr>
+              <a:t>coverage?</a:t>
+            </a:r>
+            <a:endParaRPr lang="en-US" sz="950" dirty="0"/>
+          </a:p>
+        </p:txBody>
+      </p:sp>
+      <p:sp>
+        <p:nvSpPr>
+          <p:cNvPr id="16" name="Shape 14"/>
+          <p:cNvSpPr/>
+          <p:nvPr/>
+        </p:nvSpPr>
+        <p:spPr>
+          <a:xfrm flipH="1">
+            <a:off x="1965960" y="3520440"/>
+            <a:ext cx="274320" cy="0"/>
+          </a:xfrm>
+          <a:prstGeom prst="line">
+            <a:avLst/>
+          </a:prstGeom>
+          <a:noFill/>
+          <a:ln w="12700">
+            <a:solidFill>
+              <a:srgbClr val="5B7D80"/>
+            </a:solidFill>
+            <a:prstDash val="solid"/>
+            <a:tailEnd type="triangle"/>
+          </a:ln>
+        </p:spPr>
+      </p:sp>
+      <p:sp>
+        <p:nvSpPr>
+          <p:cNvPr id="17" name="Text 15"/>
+          <p:cNvSpPr txBox="1"/>
+          <p:nvPr/>
+        </p:nvSpPr>
+        <p:spPr>
+          <a:xfrm>
+            <a:off x="411480" y="3195193"/>
+            <a:ext cx="1645920" cy="182880"/>
+          </a:xfrm>
+          <a:prstGeom prst="rect">
+            <a:avLst/>
+          </a:prstGeom>
+          <a:noFill/>
+          <a:ln/>
+        </p:spPr>
+        <p:txBody>
+          <a:bodyPr wrap="square" lIns="0" tIns="0" rIns="0" bIns="0" rtlCol="0" anchor="ctr"/>
+          <a:lstStyle/>
+          <a:p>
+            <a:pPr algn="r" indent="0" marL="0">
+              <a:buNone/>
+            </a:pPr>
+            <a:r>
+              <a:rPr lang="en-US" sz="800" i="1" dirty="0">
+                <a:solidFill>
+                  <a:srgbClr val="5B6472"/>
+                </a:solidFill>
+                <a:latin typeface="Arial" pitchFamily="34" charset="0"/>
+                <a:ea typeface="Arial" pitchFamily="34" charset="-122"/>
+                <a:cs typeface="Arial" pitchFamily="34" charset="-120"/>
+              </a:rPr>
+              <a:t>Self-employed · group/branch · name mismatch</a:t>
+            </a:r>
+            <a:endParaRPr lang="en-US" sz="800" dirty="0"/>
+          </a:p>
+        </p:txBody>
+      </p:sp>
+      <p:sp>
+        <p:nvSpPr>
+          <p:cNvPr id="18" name="Text 16"/>
+          <p:cNvSpPr txBox="1"/>
+          <p:nvPr/>
+        </p:nvSpPr>
+        <p:spPr>
+          <a:xfrm>
+            <a:off x="502920" y="3414649"/>
+            <a:ext cx="1463040" cy="211582"/>
+          </a:xfrm>
+          <a:prstGeom prst="roundRect">
+            <a:avLst>
+              <a:gd name="adj" fmla="val 17287"/>
+            </a:avLst>
+          </a:prstGeom>
+          <a:solidFill>
+            <a:srgbClr val="FCEFD6"/>
+          </a:solidFill>
+          <a:ln w="15875">
+            <a:solidFill>
+              <a:srgbClr val="EF9F27"/>
+            </a:solidFill>
+            <a:prstDash val="solid"/>
+          </a:ln>
+        </p:spPr>
+        <p:txBody>
+          <a:bodyPr wrap="square" lIns="38100" tIns="38100" rIns="38100" bIns="38100" rtlCol="0" anchor="ctr"/>
+          <a:lstStyle/>
+          <a:p>
+            <a:pPr algn="ctr" indent="0" marL="0">
+              <a:lnSpc>
+                <a:spcPct val="108000"/>
+              </a:lnSpc>
+              <a:buNone/>
+            </a:pPr>
+            <a:r>
+              <a:rPr lang="en-US" sz="760" dirty="0">
+                <a:solidFill>
+                  <a:srgbClr val="6B4A10"/>
+                </a:solidFill>
+                <a:latin typeface="Arial" pitchFamily="34" charset="0"/>
+                <a:ea typeface="Arial" pitchFamily="34" charset="-122"/>
+                <a:cs typeface="Arial" pitchFamily="34" charset="-120"/>
+              </a:rPr>
+              <a:t>Ask underwriting</a:t>
+            </a:r>
+            <a:endParaRPr lang="en-US" sz="760" dirty="0"/>
+          </a:p>
+        </p:txBody>
+      </p:sp>
+      <p:sp>
+        <p:nvSpPr>
+          <p:cNvPr id="19" name="Shape 17"/>
+          <p:cNvSpPr/>
+          <p:nvPr/>
+        </p:nvSpPr>
+        <p:spPr>
+          <a:xfrm>
+            <a:off x="3977640" y="3520440"/>
+            <a:ext cx="274320" cy="0"/>
+          </a:xfrm>
+          <a:prstGeom prst="line">
+            <a:avLst/>
+          </a:prstGeom>
+          <a:noFill/>
+          <a:ln w="12700">
+            <a:solidFill>
+              <a:srgbClr val="5B7D80"/>
+            </a:solidFill>
+            <a:prstDash val="solid"/>
+            <a:tailEnd type="triangle"/>
+          </a:ln>
+        </p:spPr>
+      </p:sp>
+      <p:sp>
+        <p:nvSpPr>
+          <p:cNvPr id="20" name="Text 18"/>
+          <p:cNvSpPr txBox="1"/>
+          <p:nvPr/>
+        </p:nvSpPr>
+        <p:spPr>
+          <a:xfrm>
+            <a:off x="4251960" y="3136773"/>
+            <a:ext cx="1645920" cy="182880"/>
+          </a:xfrm>
+          <a:prstGeom prst="rect">
+            <a:avLst/>
+          </a:prstGeom>
+          <a:noFill/>
+          <a:ln/>
+        </p:spPr>
+        <p:txBody>
+          <a:bodyPr wrap="square" lIns="0" tIns="0" rIns="0" bIns="0" rtlCol="0" anchor="ctr"/>
+          <a:lstStyle/>
+          <a:p>
+            <a:pPr algn="l" indent="0" marL="0">
+              <a:buNone/>
+            </a:pPr>
+            <a:r>
+              <a:rPr lang="en-US" sz="800" i="1" dirty="0">
+                <a:solidFill>
+                  <a:srgbClr val="5B6472"/>
+                </a:solidFill>
+                <a:latin typeface="Arial" pitchFamily="34" charset="0"/>
+                <a:ea typeface="Arial" pitchFamily="34" charset="-122"/>
+                <a:cs typeface="Arial" pitchFamily="34" charset="-120"/>
+              </a:rPr>
+              <a:t>Valid follow-up policy</a:t>
+            </a:r>
+            <a:endParaRPr lang="en-US" sz="800" dirty="0"/>
+          </a:p>
+        </p:txBody>
+      </p:sp>
+      <p:sp>
+        <p:nvSpPr>
+          <p:cNvPr id="21" name="Text 19"/>
+          <p:cNvSpPr txBox="1"/>
+          <p:nvPr/>
+        </p:nvSpPr>
+        <p:spPr>
+          <a:xfrm>
+            <a:off x="4251960" y="3356229"/>
+            <a:ext cx="1463040" cy="328422"/>
+          </a:xfrm>
+          <a:prstGeom prst="roundRect">
+            <a:avLst>
+              <a:gd name="adj" fmla="val 11137"/>
+            </a:avLst>
+          </a:prstGeom>
+          <a:solidFill>
+            <a:srgbClr val="FCEFD6"/>
+          </a:solidFill>
+          <a:ln w="15875">
+            <a:solidFill>
+              <a:srgbClr val="EF9F27"/>
+            </a:solidFill>
+            <a:prstDash val="solid"/>
+          </a:ln>
+        </p:spPr>
+        <p:txBody>
+          <a:bodyPr wrap="square" lIns="38100" tIns="38100" rIns="38100" bIns="38100" rtlCol="0" anchor="ctr"/>
+          <a:lstStyle/>
+          <a:p>
+            <a:pPr algn="ctr" indent="0" marL="0">
+              <a:lnSpc>
+                <a:spcPct val="108000"/>
+              </a:lnSpc>
+              <a:buNone/>
+            </a:pPr>
+            <a:r>
+              <a:rPr lang="en-US" sz="780" dirty="0">
+                <a:solidFill>
+                  <a:srgbClr val="6B4A10"/>
+                </a:solidFill>
+                <a:latin typeface="Arial" pitchFamily="34" charset="0"/>
+                <a:ea typeface="Arial" pitchFamily="34" charset="-122"/>
+                <a:cs typeface="Arial" pitchFamily="34" charset="-120"/>
+              </a:rPr>
+              <a:t>Reattach to</a:t>
+            </a:r>
+            <a:endParaRPr lang="en-US" sz="780" dirty="0"/>
+          </a:p>
+          <a:p>
+            <a:pPr algn="ctr" indent="0" marL="0">
+              <a:lnSpc>
+                <a:spcPct val="108000"/>
+              </a:lnSpc>
+              <a:buNone/>
+            </a:pPr>
+            <a:r>
+              <a:rPr lang="en-US" sz="780" dirty="0">
+                <a:solidFill>
+                  <a:srgbClr val="6B4A10"/>
+                </a:solidFill>
+                <a:latin typeface="Arial" pitchFamily="34" charset="0"/>
+                <a:ea typeface="Arial" pitchFamily="34" charset="-122"/>
+                <a:cs typeface="Arial" pitchFamily="34" charset="-120"/>
+              </a:rPr>
+              <a:t>follow-up policy</a:t>
+            </a:r>
+            <a:endParaRPr lang="en-US" sz="780" dirty="0"/>
+          </a:p>
+        </p:txBody>
+      </p:sp>
+      <p:sp>
+        <p:nvSpPr>
+          <p:cNvPr id="22" name="Shape 20"/>
+          <p:cNvSpPr/>
+          <p:nvPr/>
+        </p:nvSpPr>
+        <p:spPr>
+          <a:xfrm>
+            <a:off x="3108960" y="3840480"/>
+            <a:ext cx="0" cy="411480"/>
+          </a:xfrm>
+          <a:prstGeom prst="line">
+            <a:avLst/>
+          </a:prstGeom>
+          <a:noFill/>
+          <a:ln w="12700">
+            <a:solidFill>
+              <a:srgbClr val="5B7D80"/>
+            </a:solidFill>
+            <a:prstDash val="solid"/>
+            <a:tailEnd type="triangle"/>
+          </a:ln>
+        </p:spPr>
+      </p:sp>
+      <p:sp>
+        <p:nvSpPr>
+          <p:cNvPr id="23" name="Text 21"/>
+          <p:cNvSpPr txBox="1"/>
+          <p:nvPr/>
+        </p:nvSpPr>
+        <p:spPr>
+          <a:xfrm>
+            <a:off x="1005840" y="4251960"/>
+            <a:ext cx="4206240" cy="348869"/>
+          </a:xfrm>
+          <a:prstGeom prst="roundRect">
+            <a:avLst>
+              <a:gd name="adj" fmla="val 10484"/>
+            </a:avLst>
+          </a:prstGeom>
+          <a:solidFill>
+            <a:srgbClr val="EDF7DB"/>
+          </a:solidFill>
+          <a:ln w="15875">
+            <a:solidFill>
+              <a:srgbClr val="6FA01F"/>
+            </a:solidFill>
+            <a:prstDash val="solid"/>
+          </a:ln>
+        </p:spPr>
+        <p:txBody>
+          <a:bodyPr wrap="square" lIns="38100" tIns="38100" rIns="38100" bIns="38100" rtlCol="0" anchor="ctr"/>
+          <a:lstStyle/>
+          <a:p>
+            <a:pPr algn="ctr" indent="0" marL="0">
+              <a:lnSpc>
+                <a:spcPct val="108000"/>
+              </a:lnSpc>
+              <a:buNone/>
+            </a:pPr>
+            <a:r>
+              <a:rPr lang="en-US" sz="850" dirty="0">
+                <a:solidFill>
+                  <a:srgbClr val="33480A"/>
+                </a:solidFill>
+                <a:latin typeface="Arial" pitchFamily="34" charset="0"/>
+                <a:ea typeface="Arial" pitchFamily="34" charset="-122"/>
+                <a:cs typeface="Arial" pitchFamily="34" charset="-120"/>
+              </a:rPr>
+              <a:t>Back to employer:</a:t>
+            </a:r>
+            <a:endParaRPr lang="en-US" sz="850" dirty="0"/>
+          </a:p>
+          <a:p>
+            <a:pPr algn="ctr" indent="0" marL="0">
+              <a:lnSpc>
+                <a:spcPct val="108000"/>
+              </a:lnSpc>
+              <a:buNone/>
+            </a:pPr>
+            <a:r>
+              <a:rPr lang="en-US" sz="850" dirty="0">
+                <a:solidFill>
+                  <a:srgbClr val="33480A"/>
+                </a:solidFill>
+                <a:latin typeface="Arial" pitchFamily="34" charset="0"/>
+                <a:ea typeface="Arial" pitchFamily="34" charset="-122"/>
+                <a:cs typeface="Arial" pitchFamily="34" charset="-120"/>
+              </a:rPr>
+              <a:t>file with correct insurer</a:t>
+            </a:r>
+            <a:endParaRPr lang="en-US" sz="850" dirty="0"/>
+          </a:p>
+        </p:txBody>
+      </p:sp>
+      <p:sp>
+        <p:nvSpPr>
+          <p:cNvPr id="24" name="Text 22"/>
+          <p:cNvSpPr txBox="1"/>
+          <p:nvPr/>
+        </p:nvSpPr>
+        <p:spPr>
+          <a:xfrm>
+            <a:off x="3218688" y="3986784"/>
+            <a:ext cx="2194560" cy="182880"/>
+          </a:xfrm>
+          <a:prstGeom prst="rect">
+            <a:avLst/>
+          </a:prstGeom>
+          <a:noFill/>
+          <a:ln/>
+        </p:spPr>
+        <p:txBody>
+          <a:bodyPr wrap="square" lIns="0" tIns="0" rIns="0" bIns="0" rtlCol="0" anchor="ctr"/>
+          <a:lstStyle/>
+          <a:p>
+            <a:pPr algn="l" indent="0" marL="0">
+              <a:buNone/>
+            </a:pPr>
+            <a:r>
+              <a:rPr lang="en-US" sz="740" i="1" dirty="0">
+                <a:solidFill>
+                  <a:srgbClr val="5B6472"/>
+                </a:solidFill>
+                <a:latin typeface="Arial" pitchFamily="34" charset="0"/>
+                <a:ea typeface="Arial" pitchFamily="34" charset="-122"/>
+                <a:cs typeface="Arial" pitchFamily="34" charset="-120"/>
+              </a:rPr>
+              <a:t>Wrong, expired, or none</a:t>
+            </a:r>
+            <a:endParaRPr lang="en-US" sz="740" dirty="0"/>
+          </a:p>
+        </p:txBody>
+      </p:sp>
+      <p:sp>
+        <p:nvSpPr>
+          <p:cNvPr id="25" name="Text 23"/>
+          <p:cNvSpPr txBox="1"/>
+          <p:nvPr/>
+        </p:nvSpPr>
+        <p:spPr>
+          <a:xfrm>
+            <a:off x="1005840" y="4892040"/>
+            <a:ext cx="4206240" cy="502920"/>
+          </a:xfrm>
+          <a:prstGeom prst="rect">
+            <a:avLst/>
+          </a:prstGeom>
+          <a:noFill/>
+          <a:ln/>
+        </p:spPr>
+        <p:txBody>
+          <a:bodyPr wrap="square" lIns="0" tIns="0" rIns="0" bIns="0" rtlCol="0" anchor="ctr"/>
+          <a:lstStyle/>
+          <a:p>
+            <a:pPr indent="0" marL="0">
+              <a:lnSpc>
+                <a:spcPct val="120000"/>
+              </a:lnSpc>
+              <a:buNone/>
+            </a:pPr>
+            <a:r>
+              <a:rPr lang="en-US" sz="800" i="1" dirty="0">
+                <a:solidFill>
+                  <a:srgbClr val="5B6472"/>
+                </a:solidFill>
+                <a:latin typeface="Arial" pitchFamily="34" charset="0"/>
+                <a:ea typeface="Arial" pitchFamily="34" charset="-122"/>
+                <a:cs typeface="Arial" pitchFamily="34" charset="-120"/>
+              </a:rPr>
+              <a:t>Underwriting resolves the exception before the claim can proceed. Most are expected to clear once the underwriting area is mapped (GGW).</a:t>
+            </a:r>
+            <a:endParaRPr lang="en-US" sz="800" dirty="0"/>
+          </a:p>
+        </p:txBody>
+      </p:sp>
+      <p:sp>
+        <p:nvSpPr>
+          <p:cNvPr id="26" name="Text 24"/>
+          <p:cNvSpPr txBox="1"/>
+          <p:nvPr/>
+        </p:nvSpPr>
+        <p:spPr>
+          <a:xfrm>
+            <a:off x="6583680" y="1417320"/>
+            <a:ext cx="4937760" cy="477393"/>
+          </a:xfrm>
+          <a:prstGeom prst="roundRect">
+            <a:avLst>
+              <a:gd name="adj" fmla="val 7662"/>
+            </a:avLst>
+          </a:prstGeom>
+          <a:solidFill>
+            <a:srgbClr val="ECEFF3"/>
+          </a:solidFill>
+          <a:ln w="15875">
+            <a:solidFill>
+              <a:srgbClr val="6B7787"/>
+            </a:solidFill>
+            <a:prstDash val="solid"/>
+          </a:ln>
+        </p:spPr>
+        <p:txBody>
+          <a:bodyPr wrap="square" lIns="38100" tIns="38100" rIns="38100" bIns="38100" rtlCol="0" anchor="ctr"/>
+          <a:lstStyle/>
+          <a:p>
+            <a:pPr algn="ctr" indent="0" marL="0">
+              <a:lnSpc>
+                <a:spcPct val="108000"/>
+              </a:lnSpc>
+              <a:buNone/>
+            </a:pPr>
+            <a:r>
+              <a:rPr lang="en-US" sz="860" b="1" dirty="0">
+                <a:solidFill>
+                  <a:srgbClr val="2A3340"/>
+                </a:solidFill>
+                <a:latin typeface="Arial" pitchFamily="34" charset="0"/>
+                <a:ea typeface="Arial" pitchFamily="34" charset="-122"/>
+                <a:cs typeface="Arial" pitchFamily="34" charset="-120"/>
+              </a:rPr>
+              <a:t>Coverage Check Node (rules only)</a:t>
+            </a:r>
+            <a:endParaRPr lang="en-US" sz="860" dirty="0"/>
+          </a:p>
+          <a:p>
+            <a:pPr algn="ctr" indent="0" marL="0">
+              <a:lnSpc>
+                <a:spcPct val="108000"/>
+              </a:lnSpc>
+              <a:buNone/>
+            </a:pPr>
+            <a:r>
+              <a:rPr lang="en-US" sz="860" b="1" dirty="0">
+                <a:solidFill>
+                  <a:srgbClr val="2A3340"/>
+                </a:solidFill>
+                <a:latin typeface="Arial" pitchFamily="34" charset="0"/>
+                <a:ea typeface="Arial" pitchFamily="34" charset="-122"/>
+                <a:cs typeface="Arial" pitchFamily="34" charset="-120"/>
+              </a:rPr>
+              <a:t>date in force · self-employed cover · employer/policy match</a:t>
+            </a:r>
+            <a:endParaRPr lang="en-US" sz="860" dirty="0"/>
+          </a:p>
+          <a:p>
+            <a:pPr algn="ctr" indent="0" marL="0">
+              <a:lnSpc>
+                <a:spcPct val="108000"/>
+              </a:lnSpc>
+              <a:buNone/>
+            </a:pPr>
+            <a:r>
+              <a:rPr lang="en-US" sz="860" b="1" dirty="0">
+                <a:solidFill>
+                  <a:srgbClr val="2A3340"/>
+                </a:solidFill>
+                <a:latin typeface="Arial" pitchFamily="34" charset="0"/>
+                <a:ea typeface="Arial" pitchFamily="34" charset="-122"/>
+                <a:cs typeface="Arial" pitchFamily="34" charset="-120"/>
+              </a:rPr>
+              <a:t>same pattern as Validation, applied to coverage</a:t>
+            </a:r>
+            <a:endParaRPr lang="en-US" sz="860" dirty="0"/>
+          </a:p>
+        </p:txBody>
+      </p:sp>
+      <p:sp>
+        <p:nvSpPr>
+          <p:cNvPr id="27" name="Shape 25"/>
+          <p:cNvSpPr/>
+          <p:nvPr/>
+        </p:nvSpPr>
+        <p:spPr>
+          <a:xfrm>
+            <a:off x="9052560" y="1894713"/>
+            <a:ext cx="0" cy="320040"/>
+          </a:xfrm>
+          <a:prstGeom prst="line">
+            <a:avLst/>
+          </a:prstGeom>
+          <a:noFill/>
+          <a:ln w="12700">
+            <a:solidFill>
+              <a:srgbClr val="5B7D80"/>
+            </a:solidFill>
+            <a:prstDash val="solid"/>
+            <a:tailEnd type="triangle"/>
+          </a:ln>
+        </p:spPr>
+      </p:sp>
+      <p:sp>
+        <p:nvSpPr>
+          <p:cNvPr id="28" name="Text 26"/>
+          <p:cNvSpPr txBox="1"/>
+          <p:nvPr/>
+        </p:nvSpPr>
+        <p:spPr>
+          <a:xfrm>
+            <a:off x="8183880" y="2214753"/>
+            <a:ext cx="1737360" cy="640080"/>
+          </a:xfrm>
+          <a:prstGeom prst="diamond">
+            <a:avLst/>
+          </a:prstGeom>
+          <a:solidFill>
+            <a:srgbClr val="FFFFFF"/>
+          </a:solidFill>
+          <a:ln w="15875">
+            <a:solidFill>
+              <a:srgbClr val="5B7D80"/>
+            </a:solidFill>
+          </a:ln>
+        </p:spPr>
+        <p:txBody>
+          <a:bodyPr wrap="square" lIns="0" tIns="0" rIns="0" bIns="0" rtlCol="0" anchor="ctr"/>
+          <a:lstStyle/>
+          <a:p>
+            <a:pPr algn="ctr" indent="0" marL="0">
+              <a:lnSpc>
+                <a:spcPct val="100000"/>
+              </a:lnSpc>
+              <a:buNone/>
+            </a:pPr>
+            <a:r>
+              <a:rPr lang="en-US" sz="950" b="1" dirty="0">
+                <a:solidFill>
+                  <a:srgbClr val="243038"/>
+                </a:solidFill>
+                <a:latin typeface="Arial" pitchFamily="34" charset="0"/>
+                <a:ea typeface="Arial" pitchFamily="34" charset="-122"/>
+                <a:cs typeface="Arial" pitchFamily="34" charset="-120"/>
+              </a:rPr>
+              <a:t>Any check</a:t>
+            </a:r>
+            <a:endParaRPr lang="en-US" sz="950" dirty="0"/>
+          </a:p>
+          <a:p>
+            <a:pPr algn="ctr" indent="0" marL="0">
+              <a:lnSpc>
+                <a:spcPct val="100000"/>
+              </a:lnSpc>
+              <a:buNone/>
+            </a:pPr>
+            <a:r>
+              <a:rPr lang="en-US" sz="950" b="1" dirty="0">
+                <a:solidFill>
+                  <a:srgbClr val="243038"/>
+                </a:solidFill>
+                <a:latin typeface="Arial" pitchFamily="34" charset="0"/>
+                <a:ea typeface="Arial" pitchFamily="34" charset="-122"/>
+                <a:cs typeface="Arial" pitchFamily="34" charset="-120"/>
+              </a:rPr>
+              <a:t>failed?</a:t>
+            </a:r>
+            <a:endParaRPr lang="en-US" sz="950" dirty="0"/>
+          </a:p>
+        </p:txBody>
+      </p:sp>
+      <p:sp>
+        <p:nvSpPr>
+          <p:cNvPr id="29" name="Shape 27"/>
+          <p:cNvSpPr/>
+          <p:nvPr/>
+        </p:nvSpPr>
+        <p:spPr>
+          <a:xfrm>
+            <a:off x="9921240" y="2534793"/>
+            <a:ext cx="274320" cy="0"/>
+          </a:xfrm>
+          <a:prstGeom prst="line">
+            <a:avLst/>
+          </a:prstGeom>
+          <a:noFill/>
+          <a:ln w="12700">
+            <a:solidFill>
+              <a:srgbClr val="5B7D80"/>
+            </a:solidFill>
+            <a:prstDash val="solid"/>
+            <a:tailEnd type="triangle"/>
+          </a:ln>
+        </p:spPr>
+      </p:sp>
+      <p:sp>
+        <p:nvSpPr>
+          <p:cNvPr id="30" name="Text 28"/>
+          <p:cNvSpPr txBox="1"/>
+          <p:nvPr/>
+        </p:nvSpPr>
+        <p:spPr>
+          <a:xfrm>
+            <a:off x="10195560" y="2102930"/>
+            <a:ext cx="1783080" cy="182880"/>
+          </a:xfrm>
+          <a:prstGeom prst="rect">
+            <a:avLst/>
+          </a:prstGeom>
+          <a:noFill/>
+          <a:ln/>
+        </p:spPr>
+        <p:txBody>
+          <a:bodyPr wrap="square" lIns="0" tIns="0" rIns="0" bIns="0" rtlCol="0" anchor="ctr"/>
+          <a:lstStyle/>
+          <a:p>
+            <a:pPr algn="l" indent="0" marL="0">
+              <a:buNone/>
+            </a:pPr>
+            <a:r>
+              <a:rPr lang="en-US" sz="800" i="1" dirty="0">
+                <a:solidFill>
+                  <a:srgbClr val="5B6472"/>
+                </a:solidFill>
+                <a:latin typeface="Arial" pitchFamily="34" charset="0"/>
+                <a:ea typeface="Arial" pitchFamily="34" charset="-122"/>
+                <a:cs typeface="Arial" pitchFamily="34" charset="-120"/>
+              </a:rPr>
+              <a:t>No</a:t>
+            </a:r>
+            <a:endParaRPr lang="en-US" sz="800" dirty="0"/>
+          </a:p>
+        </p:txBody>
+      </p:sp>
+      <p:sp>
+        <p:nvSpPr>
+          <p:cNvPr id="31" name="Text 29"/>
+          <p:cNvSpPr txBox="1"/>
+          <p:nvPr/>
+        </p:nvSpPr>
+        <p:spPr>
+          <a:xfrm>
+            <a:off x="10195560" y="2322386"/>
+            <a:ext cx="1600200" cy="424815"/>
+          </a:xfrm>
+          <a:prstGeom prst="roundRect">
+            <a:avLst>
+              <a:gd name="adj" fmla="val 8610"/>
+            </a:avLst>
+          </a:prstGeom>
+          <a:solidFill>
+            <a:srgbClr val="EDF7DB"/>
+          </a:solidFill>
+          <a:ln w="15875">
+            <a:solidFill>
+              <a:srgbClr val="6FA01F"/>
+            </a:solidFill>
+            <a:prstDash val="solid"/>
+          </a:ln>
+        </p:spPr>
+        <p:txBody>
+          <a:bodyPr wrap="square" lIns="38100" tIns="38100" rIns="38100" bIns="38100" rtlCol="0" anchor="ctr"/>
+          <a:lstStyle/>
+          <a:p>
+            <a:pPr algn="ctr" indent="0" marL="0">
+              <a:lnSpc>
+                <a:spcPct val="108000"/>
+              </a:lnSpc>
+              <a:buNone/>
+            </a:pPr>
+            <a:r>
+              <a:rPr lang="en-US" sz="740" dirty="0">
+                <a:solidFill>
+                  <a:srgbClr val="33480A"/>
+                </a:solidFill>
+                <a:latin typeface="Arial" pitchFamily="34" charset="0"/>
+                <a:ea typeface="Arial" pitchFamily="34" charset="-122"/>
+                <a:cs typeface="Arial" pitchFamily="34" charset="-120"/>
+              </a:rPr>
+              <a:t>Coverage confirmed, proceed</a:t>
+            </a:r>
+            <a:endParaRPr lang="en-US" sz="740" dirty="0"/>
+          </a:p>
+          <a:p>
+            <a:pPr algn="ctr" indent="0" marL="0">
+              <a:lnSpc>
+                <a:spcPct val="108000"/>
+              </a:lnSpc>
+              <a:buNone/>
+            </a:pPr>
+            <a:r>
+              <a:rPr lang="en-US" sz="740" dirty="0">
+                <a:solidFill>
+                  <a:srgbClr val="33480A"/>
+                </a:solidFill>
+                <a:latin typeface="Arial" pitchFamily="34" charset="0"/>
+                <a:ea typeface="Arial" pitchFamily="34" charset="-122"/>
+                <a:cs typeface="Arial" pitchFamily="34" charset="-120"/>
+              </a:rPr>
+              <a:t>(policy reattached automatically)</a:t>
+            </a:r>
+            <a:endParaRPr lang="en-US" sz="740" dirty="0"/>
+          </a:p>
+        </p:txBody>
+      </p:sp>
+      <p:sp>
+        <p:nvSpPr>
+          <p:cNvPr id="32" name="Shape 30"/>
+          <p:cNvSpPr/>
+          <p:nvPr/>
+        </p:nvSpPr>
+        <p:spPr>
+          <a:xfrm flipH="1">
+            <a:off x="7909560" y="2534793"/>
+            <a:ext cx="274320" cy="0"/>
+          </a:xfrm>
+          <a:prstGeom prst="line">
+            <a:avLst/>
+          </a:prstGeom>
+          <a:noFill/>
+          <a:ln w="12700">
+            <a:solidFill>
+              <a:srgbClr val="5B7D80"/>
+            </a:solidFill>
+            <a:prstDash val="solid"/>
+            <a:tailEnd type="triangle"/>
+          </a:ln>
+        </p:spPr>
+      </p:sp>
+      <p:sp>
+        <p:nvSpPr>
+          <p:cNvPr id="33" name="Text 31"/>
+          <p:cNvSpPr txBox="1"/>
+          <p:nvPr/>
+        </p:nvSpPr>
+        <p:spPr>
+          <a:xfrm>
+            <a:off x="6355080" y="2151126"/>
+            <a:ext cx="1645920" cy="182880"/>
+          </a:xfrm>
+          <a:prstGeom prst="rect">
+            <a:avLst/>
+          </a:prstGeom>
+          <a:noFill/>
+          <a:ln/>
+        </p:spPr>
+        <p:txBody>
+          <a:bodyPr wrap="square" lIns="0" tIns="0" rIns="0" bIns="0" rtlCol="0" anchor="ctr"/>
+          <a:lstStyle/>
+          <a:p>
+            <a:pPr algn="r" indent="0" marL="0">
+              <a:buNone/>
+            </a:pPr>
+            <a:r>
+              <a:rPr lang="en-US" sz="800" i="1" dirty="0">
+                <a:solidFill>
+                  <a:srgbClr val="5B6472"/>
+                </a:solidFill>
+                <a:latin typeface="Arial" pitchFamily="34" charset="0"/>
+                <a:ea typeface="Arial" pitchFamily="34" charset="-122"/>
+                <a:cs typeface="Arial" pitchFamily="34" charset="-120"/>
+              </a:rPr>
+              <a:t>Yes, no valid policy</a:t>
+            </a:r>
+            <a:endParaRPr lang="en-US" sz="800" dirty="0"/>
+          </a:p>
+        </p:txBody>
+      </p:sp>
+      <p:sp>
+        <p:nvSpPr>
+          <p:cNvPr id="34" name="Text 32"/>
+          <p:cNvSpPr txBox="1"/>
+          <p:nvPr/>
+        </p:nvSpPr>
+        <p:spPr>
+          <a:xfrm>
+            <a:off x="6446520" y="2370582"/>
+            <a:ext cx="1463040" cy="328422"/>
+          </a:xfrm>
+          <a:prstGeom prst="roundRect">
+            <a:avLst>
+              <a:gd name="adj" fmla="val 11137"/>
+            </a:avLst>
+          </a:prstGeom>
+          <a:solidFill>
+            <a:srgbClr val="EDF7DB"/>
+          </a:solidFill>
+          <a:ln w="15875">
+            <a:solidFill>
+              <a:srgbClr val="6FA01F"/>
+            </a:solidFill>
+            <a:prstDash val="solid"/>
+          </a:ln>
+        </p:spPr>
+        <p:txBody>
+          <a:bodyPr wrap="square" lIns="38100" tIns="38100" rIns="38100" bIns="38100" rtlCol="0" anchor="ctr"/>
+          <a:lstStyle/>
+          <a:p>
+            <a:pPr algn="ctr" indent="0" marL="0">
+              <a:lnSpc>
+                <a:spcPct val="108000"/>
+              </a:lnSpc>
+              <a:buNone/>
+            </a:pPr>
+            <a:r>
+              <a:rPr lang="en-US" sz="780" dirty="0">
+                <a:solidFill>
+                  <a:srgbClr val="33480A"/>
+                </a:solidFill>
+                <a:latin typeface="Arial" pitchFamily="34" charset="0"/>
+                <a:ea typeface="Arial" pitchFamily="34" charset="-122"/>
+                <a:cs typeface="Arial" pitchFamily="34" charset="-120"/>
+              </a:rPr>
+              <a:t>Back to employer:</a:t>
+            </a:r>
+            <a:endParaRPr lang="en-US" sz="780" dirty="0"/>
+          </a:p>
+          <a:p>
+            <a:pPr algn="ctr" indent="0" marL="0">
+              <a:lnSpc>
+                <a:spcPct val="108000"/>
+              </a:lnSpc>
+              <a:buNone/>
+            </a:pPr>
+            <a:r>
+              <a:rPr lang="en-US" sz="780" dirty="0">
+                <a:solidFill>
+                  <a:srgbClr val="33480A"/>
+                </a:solidFill>
+                <a:latin typeface="Arial" pitchFamily="34" charset="0"/>
+                <a:ea typeface="Arial" pitchFamily="34" charset="-122"/>
+                <a:cs typeface="Arial" pitchFamily="34" charset="-120"/>
+              </a:rPr>
+              <a:t>file with correct insurer</a:t>
+            </a:r>
+            <a:endParaRPr lang="en-US" sz="780" dirty="0"/>
+          </a:p>
+        </p:txBody>
+      </p:sp>
+      <p:sp>
+        <p:nvSpPr>
+          <p:cNvPr id="35" name="Shape 33"/>
+          <p:cNvSpPr/>
+          <p:nvPr/>
+        </p:nvSpPr>
+        <p:spPr>
+          <a:xfrm>
+            <a:off x="9052560" y="2854833"/>
+            <a:ext cx="0" cy="411480"/>
+          </a:xfrm>
+          <a:prstGeom prst="line">
+            <a:avLst/>
+          </a:prstGeom>
+          <a:noFill/>
+          <a:ln w="12700">
+            <a:solidFill>
+              <a:srgbClr val="5B7D80"/>
+            </a:solidFill>
+            <a:prstDash val="solid"/>
+            <a:tailEnd type="triangle"/>
+          </a:ln>
+        </p:spPr>
+      </p:sp>
+      <p:sp>
+        <p:nvSpPr>
+          <p:cNvPr id="36" name="Text 34"/>
+          <p:cNvSpPr txBox="1"/>
+          <p:nvPr/>
+        </p:nvSpPr>
+        <p:spPr>
+          <a:xfrm>
+            <a:off x="6583680" y="3266313"/>
+            <a:ext cx="4937760" cy="363474"/>
+          </a:xfrm>
+          <a:prstGeom prst="roundRect">
+            <a:avLst>
+              <a:gd name="adj" fmla="val 10063"/>
+            </a:avLst>
+          </a:prstGeom>
+          <a:solidFill>
+            <a:srgbClr val="F1E6ED"/>
+          </a:solidFill>
+          <a:ln w="15875">
+            <a:solidFill>
+              <a:srgbClr val="7A4A66"/>
+            </a:solidFill>
+            <a:prstDash val="solid"/>
+          </a:ln>
+        </p:spPr>
+        <p:txBody>
+          <a:bodyPr wrap="square" lIns="38100" tIns="38100" rIns="38100" bIns="38100" rtlCol="0" anchor="ctr"/>
+          <a:lstStyle/>
+          <a:p>
+            <a:pPr algn="ctr" indent="0" marL="0">
+              <a:lnSpc>
+                <a:spcPct val="108000"/>
+              </a:lnSpc>
+              <a:buNone/>
+            </a:pPr>
+            <a:r>
+              <a:rPr lang="en-US" sz="900" b="1" dirty="0">
+                <a:solidFill>
+                  <a:srgbClr val="4A2C3B"/>
+                </a:solidFill>
+                <a:latin typeface="Arial" pitchFamily="34" charset="0"/>
+                <a:ea typeface="Arial" pitchFamily="34" charset="-122"/>
+                <a:cs typeface="Arial" pitchFamily="34" charset="-120"/>
+              </a:rPr>
+              <a:t>Underwriting decides</a:t>
+            </a:r>
+            <a:endParaRPr lang="en-US" sz="900" dirty="0"/>
+          </a:p>
+          <a:p>
+            <a:pPr algn="ctr" indent="0" marL="0">
+              <a:lnSpc>
+                <a:spcPct val="108000"/>
+              </a:lnSpc>
+              <a:buNone/>
+            </a:pPr>
+            <a:r>
+              <a:rPr lang="en-US" sz="900" b="1" dirty="0">
+                <a:solidFill>
+                  <a:srgbClr val="4A2C3B"/>
+                </a:solidFill>
+                <a:latin typeface="Arial" pitchFamily="34" charset="0"/>
+                <a:ea typeface="Arial" pitchFamily="34" charset="-122"/>
+                <a:cs typeface="Arial" pitchFamily="34" charset="-120"/>
+              </a:rPr>
+              <a:t>(AI prepares the evidence)</a:t>
+            </a:r>
+            <a:endParaRPr lang="en-US" sz="900" dirty="0"/>
+          </a:p>
+        </p:txBody>
+      </p:sp>
+      <p:sp>
+        <p:nvSpPr>
+          <p:cNvPr id="37" name="Text 35"/>
+          <p:cNvSpPr txBox="1"/>
+          <p:nvPr/>
+        </p:nvSpPr>
+        <p:spPr>
+          <a:xfrm>
+            <a:off x="9162288" y="2927985"/>
+            <a:ext cx="2377440" cy="310896"/>
+          </a:xfrm>
+          <a:prstGeom prst="rect">
+            <a:avLst/>
+          </a:prstGeom>
+          <a:noFill/>
+          <a:ln/>
+        </p:spPr>
+        <p:txBody>
+          <a:bodyPr wrap="square" lIns="0" tIns="0" rIns="0" bIns="0" rtlCol="0" anchor="ctr"/>
+          <a:lstStyle/>
+          <a:p>
+            <a:pPr algn="l" indent="0" marL="0">
+              <a:buNone/>
+            </a:pPr>
+            <a:r>
+              <a:rPr lang="en-US" sz="720" i="1" dirty="0">
+                <a:solidFill>
+                  <a:srgbClr val="5B6472"/>
+                </a:solidFill>
+                <a:latin typeface="Arial" pitchFamily="34" charset="0"/>
+                <a:ea typeface="Arial" pitchFamily="34" charset="-122"/>
+                <a:cs typeface="Arial" pitchFamily="34" charset="-120"/>
+              </a:rPr>
+              <a:t>Yes, ambiguous: self-employed, group/branch, name mismatch</a:t>
+            </a:r>
+            <a:endParaRPr lang="en-US" sz="720" dirty="0"/>
+          </a:p>
+        </p:txBody>
+      </p:sp>
+      <p:sp>
+        <p:nvSpPr>
+          <p:cNvPr id="38" name="Text 36"/>
+          <p:cNvSpPr txBox="1"/>
+          <p:nvPr/>
+        </p:nvSpPr>
+        <p:spPr>
+          <a:xfrm>
+            <a:off x="6583680" y="3906393"/>
+            <a:ext cx="4937760" cy="457200"/>
+          </a:xfrm>
+          <a:prstGeom prst="rect">
+            <a:avLst/>
+          </a:prstGeom>
+          <a:noFill/>
+          <a:ln/>
+        </p:spPr>
+        <p:txBody>
+          <a:bodyPr wrap="square" lIns="0" tIns="0" rIns="0" bIns="0" rtlCol="0" anchor="ctr"/>
+          <a:lstStyle/>
+          <a:p>
+            <a:pPr indent="0" marL="0">
+              <a:lnSpc>
+                <a:spcPct val="120000"/>
+              </a:lnSpc>
+              <a:buNone/>
+            </a:pPr>
+            <a:r>
+              <a:rPr lang="en-US" sz="800" i="1" dirty="0">
+                <a:solidFill>
+                  <a:srgbClr val="5B6472"/>
+                </a:solidFill>
+                <a:latin typeface="Arial" pitchFamily="34" charset="0"/>
+                <a:ea typeface="Arial" pitchFamily="34" charset="-122"/>
+                <a:cs typeface="Arial" pitchFamily="34" charset="-120"/>
+              </a:rPr>
+              <a:t>Same shape as slide 4's Validation: one rules node resolves what it can, a person only sees what's genuinely ambiguous.</a:t>
+            </a:r>
+            <a:endParaRPr lang="en-US" sz="800" dirty="0"/>
           </a:p>
         </p:txBody>
       </p:sp>

--- a/case-study/deck/GGW_FNOL_Redesign.pptx
+++ b/case-study/deck/GGW_FNOL_Redesign.pptx
@@ -3935,7 +3935,7 @@
 </file>
 
 <file path=ppt/slides/slide10.xml><?xml version="1.0" encoding="utf-8"?>
-<p:sld xmlns:a="http://schemas.openxmlformats.org/drawingml/2006/main" xmlns:r="http://schemas.openxmlformats.org/officeDocument/2006/relationships" xmlns:p="http://schemas.openxmlformats.org/presentationml/2006/main">
+<p:sld xmlns:a="http://schemas.openxmlformats.org/drawingml/2006/main" xmlns:r="http://schemas.openxmlformats.org/officeDocument/2006/relationships" xmlns:p="http://schemas.openxmlformats.org/presentationml/2006/main" show="0">
   <p:cSld name="Slide 10">
     <p:bg>
       <p:bgPr>
@@ -7652,7 +7652,7 @@
 </file>
 
 <file path=ppt/slides/slide11.xml><?xml version="1.0" encoding="utf-8"?>
-<p:sld xmlns:a="http://schemas.openxmlformats.org/drawingml/2006/main" xmlns:r="http://schemas.openxmlformats.org/officeDocument/2006/relationships" xmlns:p="http://schemas.openxmlformats.org/presentationml/2006/main">
+<p:sld xmlns:a="http://schemas.openxmlformats.org/drawingml/2006/main" xmlns:r="http://schemas.openxmlformats.org/officeDocument/2006/relationships" xmlns:p="http://schemas.openxmlformats.org/presentationml/2006/main" show="0">
   <p:cSld name="Slide 11">
     <p:bg>
       <p:bgPr>
@@ -10186,7 +10186,7 @@
 </file>
 
 <file path=ppt/slides/slide12.xml><?xml version="1.0" encoding="utf-8"?>
-<p:sld xmlns:a="http://schemas.openxmlformats.org/drawingml/2006/main" xmlns:r="http://schemas.openxmlformats.org/officeDocument/2006/relationships" xmlns:p="http://schemas.openxmlformats.org/presentationml/2006/main">
+<p:sld xmlns:a="http://schemas.openxmlformats.org/drawingml/2006/main" xmlns:r="http://schemas.openxmlformats.org/officeDocument/2006/relationships" xmlns:p="http://schemas.openxmlformats.org/presentationml/2006/main" show="0">
   <p:cSld name="Slide 12">
     <p:bg>
       <p:bgPr>
@@ -20401,7 +20401,7 @@
                 <a:ea typeface="Arial" pitchFamily="34" charset="-122"/>
                 <a:cs typeface="Arial" pitchFamily="34" charset="-120"/>
               </a:rPr>
-              <a:t>HOW OFTEN IT HAPPENS  →</a:t>
+              <a:t>HOW OFTEN IT FIRES  →</a:t>
             </a:r>
             <a:endParaRPr lang="en-US" sz="800" dirty="0"/>
           </a:p>
@@ -20416,7 +20416,7 @@
         <p:spPr>
           <a:xfrm>
             <a:off x="1051560" y="5577840"/>
-            <a:ext cx="7863840" cy="219456"/>
+            <a:ext cx="10424160" cy="219456"/>
           </a:xfrm>
           <a:prstGeom prst="rect">
             <a:avLst/>
@@ -20455,7 +20455,7 @@
         <p:spPr>
           <a:xfrm>
             <a:off x="1051560" y="914400"/>
-            <a:ext cx="3931920" cy="2286000"/>
+            <a:ext cx="5212080" cy="2286000"/>
           </a:xfrm>
           <a:prstGeom prst="rect">
             <a:avLst/>
@@ -20480,7 +20480,7 @@
         <p:spPr>
           <a:xfrm>
             <a:off x="1234440" y="1060704"/>
-            <a:ext cx="3566160" cy="237744"/>
+            <a:ext cx="4846320" cy="237744"/>
           </a:xfrm>
           <a:prstGeom prst="rect">
             <a:avLst/>
@@ -20519,7 +20519,7 @@
         <p:spPr>
           <a:xfrm>
             <a:off x="1234440" y="1298448"/>
-            <a:ext cx="3566160" cy="219456"/>
+            <a:ext cx="4846320" cy="219456"/>
           </a:xfrm>
           <a:prstGeom prst="rect">
             <a:avLst/>
@@ -20543,7 +20543,7 @@
                 <a:ea typeface="Arial" pitchFamily="34" charset="-122"/>
                 <a:cs typeface="Arial" pitchFamily="34" charset="-120"/>
               </a:rPr>
-              <a:t>cheap to get wrong, happens constantly</a:t>
+              <a:t>runs on every claim, makes no decision</a:t>
             </a:r>
             <a:endParaRPr lang="en-US" sz="800" dirty="0"/>
           </a:p>
@@ -20558,7 +20558,7 @@
         <p:spPr>
           <a:xfrm>
             <a:off x="1280160" y="1627632"/>
-            <a:ext cx="3474720" cy="566928"/>
+            <a:ext cx="4754880" cy="566928"/>
           </a:xfrm>
           <a:prstGeom prst="roundRect">
             <a:avLst>
@@ -20585,7 +20585,7 @@
         <p:spPr>
           <a:xfrm>
             <a:off x="1417320" y="1627632"/>
-            <a:ext cx="3200400" cy="566928"/>
+            <a:ext cx="4480560" cy="566928"/>
           </a:xfrm>
           <a:prstGeom prst="rect">
             <a:avLst/>
@@ -20612,7 +20612,7 @@
                 <a:ea typeface="Arial" pitchFamily="34" charset="-122"/>
                 <a:cs typeface="Arial" pitchFamily="34" charset="-120"/>
               </a:rPr>
-              <a:t>Detect failed EASY → IDB imports
+              <a:t>Extraction + Classification Agents
 </a:t>
             </a:r>
             <a:endParaRPr lang="en-US" sz="920" dirty="0"/>
@@ -20633,7 +20633,7 @@
                 <a:ea typeface="Arial" pitchFamily="34" charset="-122"/>
                 <a:cs typeface="Arial" pitchFamily="34" charset="-120"/>
               </a:rPr>
-              <a:t>nobody is alerted today, so a claim can go missing unseen</a:t>
+              <a:t>structured fields, claim type, confidence score, every claim</a:t>
             </a:r>
             <a:endParaRPr lang="en-US" sz="920" dirty="0"/>
           </a:p>
@@ -20648,7 +20648,7 @@
         <p:spPr>
           <a:xfrm>
             <a:off x="1280160" y="2322576"/>
-            <a:ext cx="3474720" cy="566928"/>
+            <a:ext cx="4754880" cy="566928"/>
           </a:xfrm>
           <a:prstGeom prst="roundRect">
             <a:avLst>
@@ -20675,7 +20675,7 @@
         <p:spPr>
           <a:xfrm>
             <a:off x="1417320" y="2322576"/>
-            <a:ext cx="3200400" cy="566928"/>
+            <a:ext cx="4480560" cy="566928"/>
           </a:xfrm>
           <a:prstGeom prst="rect">
             <a:avLst/>
@@ -20702,7 +20702,7 @@
                 <a:ea typeface="Arial" pitchFamily="34" charset="-122"/>
                 <a:cs typeface="Arial" pitchFamily="34" charset="-120"/>
               </a:rPr>
-              <a:t>Read, classify, check CPR and policy
+              <a:t>Validation + Coverage Check
 </a:t>
             </a:r>
             <a:endParaRPr lang="en-US" sz="920" dirty="0"/>
@@ -20723,7 +20723,7 @@
                 <a:ea typeface="Arial" pitchFamily="34" charset="-122"/>
                 <a:cs typeface="Arial" pitchFamily="34" charset="-120"/>
               </a:rPr>
-              <a:t>one agent plus plain rules, ending the teeth dependency</a:t>
+              <a:t>rules only: CPR, policy, dates, a failed import is caught automatically</a:t>
             </a:r>
             <a:endParaRPr lang="en-US" sz="920" dirty="0"/>
           </a:p>
@@ -20737,8 +20737,8 @@
         </p:nvSpPr>
         <p:spPr>
           <a:xfrm>
-            <a:off x="4983480" y="914400"/>
-            <a:ext cx="3931920" cy="2286000"/>
+            <a:off x="6263640" y="914400"/>
+            <a:ext cx="5212080" cy="2286000"/>
           </a:xfrm>
           <a:prstGeom prst="rect">
             <a:avLst/>
@@ -20762,8 +20762,8 @@
         </p:nvSpPr>
         <p:spPr>
           <a:xfrm>
-            <a:off x="5166360" y="1060704"/>
-            <a:ext cx="3566160" cy="237744"/>
+            <a:off x="6446520" y="1060704"/>
+            <a:ext cx="4846320" cy="237744"/>
           </a:xfrm>
           <a:prstGeom prst="rect">
             <a:avLst/>
@@ -20801,8 +20801,8 @@
         </p:nvSpPr>
         <p:spPr>
           <a:xfrm>
-            <a:off x="5166360" y="1298448"/>
-            <a:ext cx="3566160" cy="219456"/>
+            <a:off x="6446520" y="1298448"/>
+            <a:ext cx="4846320" cy="219456"/>
           </a:xfrm>
           <a:prstGeom prst="rect">
             <a:avLst/>
@@ -20840,8 +20840,8 @@
         </p:nvSpPr>
         <p:spPr>
           <a:xfrm>
-            <a:off x="5212080" y="1627632"/>
-            <a:ext cx="3474720" cy="566928"/>
+            <a:off x="6492240" y="1627632"/>
+            <a:ext cx="4754880" cy="566928"/>
           </a:xfrm>
           <a:prstGeom prst="roundRect">
             <a:avLst>
@@ -20867,8 +20867,8 @@
         </p:nvSpPr>
         <p:spPr>
           <a:xfrm>
-            <a:off x="5349240" y="1627632"/>
-            <a:ext cx="3200400" cy="566928"/>
+            <a:off x="6629400" y="1627632"/>
+            <a:ext cx="4480560" cy="566928"/>
           </a:xfrm>
           <a:prstGeom prst="rect">
             <a:avLst/>
@@ -20895,7 +20895,7 @@
                 <a:ea typeface="Arial" pitchFamily="34" charset="-122"/>
                 <a:cs typeface="Arial" pitchFamily="34" charset="-120"/>
               </a:rPr>
-              <a:t>Draft the close-out letter
+              <a:t>Outcome Drafting Agent
 </a:t>
             </a:r>
             <a:endParaRPr lang="en-US" sz="920" dirty="0"/>
@@ -20916,7 +20916,7 @@
                 <a:ea typeface="Arial" pitchFamily="34" charset="-122"/>
                 <a:cs typeface="Arial" pitchFamily="34" charset="-120"/>
               </a:rPr>
-              <a:t>~65% of claims · a handler still approves</a:t>
+              <a:t>~65% of claims, writes the close-out letter, a handler still approves</a:t>
             </a:r>
             <a:endParaRPr lang="en-US" sz="920" dirty="0"/>
           </a:p>
@@ -20930,8 +20930,8 @@
         </p:nvSpPr>
         <p:spPr>
           <a:xfrm>
-            <a:off x="5212080" y="2322576"/>
-            <a:ext cx="3474720" cy="566928"/>
+            <a:off x="6492240" y="2322576"/>
+            <a:ext cx="4754880" cy="566928"/>
           </a:xfrm>
           <a:prstGeom prst="roundRect">
             <a:avLst>
@@ -20957,8 +20957,8 @@
         </p:nvSpPr>
         <p:spPr>
           <a:xfrm>
-            <a:off x="5349240" y="2322576"/>
-            <a:ext cx="3200400" cy="566928"/>
+            <a:off x="6629400" y="2322576"/>
+            <a:ext cx="4480560" cy="566928"/>
           </a:xfrm>
           <a:prstGeom prst="rect">
             <a:avLst/>
@@ -20985,7 +20985,7 @@
                 <a:ea typeface="Arial" pitchFamily="34" charset="-122"/>
                 <a:cs typeface="Arial" pitchFamily="34" charset="-120"/>
               </a:rPr>
-              <a:t>Read AES secure mail
+              <a:t>Exception Research Agent
 </a:t>
             </a:r>
             <a:endParaRPr lang="en-US" sz="920" dirty="0"/>
@@ -21006,7 +21006,7 @@
                 <a:ea typeface="Arial" pitchFamily="34" charset="-122"/>
                 <a:cs typeface="Arial" pitchFamily="34" charset="-120"/>
               </a:rPr>
-              <a:t>the only channel with no automation today</a:t>
+              <a:t>fires on the ~20% flagged, gathers evidence for a person to decide</a:t>
             </a:r>
             <a:endParaRPr lang="en-US" sz="920" dirty="0"/>
           </a:p>
@@ -21021,7 +21021,7 @@
         <p:spPr>
           <a:xfrm>
             <a:off x="1051560" y="3200400"/>
-            <a:ext cx="3931920" cy="2286000"/>
+            <a:ext cx="5212080" cy="2286000"/>
           </a:xfrm>
           <a:prstGeom prst="rect">
             <a:avLst/>
@@ -21046,7 +21046,7 @@
         <p:spPr>
           <a:xfrm>
             <a:off x="1234440" y="3346704"/>
-            <a:ext cx="3566160" cy="237744"/>
+            <a:ext cx="4846320" cy="237744"/>
           </a:xfrm>
           <a:prstGeom prst="rect">
             <a:avLst/>
@@ -21070,7 +21070,7 @@
                 <a:ea typeface="Arial" pitchFamily="34" charset="-122"/>
                 <a:cs typeface="Arial" pitchFamily="34" charset="-120"/>
               </a:rPr>
-              <a:t>THEN FIX THE IMPORT ITSELF</a:t>
+              <a:t>EXTEND THE PATTERN</a:t>
             </a:r>
             <a:endParaRPr lang="en-US" sz="1000" dirty="0"/>
           </a:p>
@@ -21085,7 +21085,7 @@
         <p:spPr>
           <a:xfrm>
             <a:off x="1234440" y="3584448"/>
-            <a:ext cx="3566160" cy="219456"/>
+            <a:ext cx="4846320" cy="219456"/>
           </a:xfrm>
           <a:prstGeom prst="rect">
             <a:avLst/>
@@ -21109,7 +21109,7 @@
                 <a:ea typeface="Arial" pitchFamily="34" charset="-122"/>
                 <a:cs typeface="Arial" pitchFamily="34" charset="-120"/>
               </a:rPr>
-              <a:t>an IT defect, once you can see it</a:t>
+              <a:t>rarer, but the same shape works</a:t>
             </a:r>
             <a:endParaRPr lang="en-US" sz="800" dirty="0"/>
           </a:p>
@@ -21124,7 +21124,7 @@
         <p:spPr>
           <a:xfrm>
             <a:off x="1280160" y="3913632"/>
-            <a:ext cx="3474720" cy="566928"/>
+            <a:ext cx="4754880" cy="566928"/>
           </a:xfrm>
           <a:prstGeom prst="roundRect">
             <a:avLst>
@@ -21151,7 +21151,7 @@
         <p:spPr>
           <a:xfrm>
             <a:off x="1417320" y="3913632"/>
-            <a:ext cx="3200400" cy="566928"/>
+            <a:ext cx="4480560" cy="566928"/>
           </a:xfrm>
           <a:prstGeom prst="rect">
             <a:avLst/>
@@ -21178,7 +21178,7 @@
                 <a:ea typeface="Arial" pitchFamily="34" charset="-122"/>
                 <a:cs typeface="Arial" pitchFamily="34" charset="-120"/>
               </a:rPr>
-              <a:t>Retry, park and replay
+              <a:t>Underwriting decision support
 </a:t>
             </a:r>
             <a:endParaRPr lang="en-US" sz="920" dirty="0"/>
@@ -21199,7 +21199,7 @@
                 <a:ea typeface="Arial" pitchFamily="34" charset="-122"/>
                 <a:cs typeface="Arial" pitchFamily="34" charset="-120"/>
               </a:rPr>
-              <a:t>detection first, because you cannot fix what nobody reports</a:t>
+              <a:t>AI prepares the evidence only: self-employed, group/branch, name mismatch</a:t>
             </a:r>
             <a:endParaRPr lang="en-US" sz="920" dirty="0"/>
           </a:p>
@@ -21213,8 +21213,8 @@
         </p:nvSpPr>
         <p:spPr>
           <a:xfrm>
-            <a:off x="4983480" y="3200400"/>
-            <a:ext cx="3931920" cy="2286000"/>
+            <a:off x="6263640" y="3200400"/>
+            <a:ext cx="5212080" cy="2286000"/>
           </a:xfrm>
           <a:prstGeom prst="rect">
             <a:avLst/>
@@ -21238,8 +21238,8 @@
         </p:nvSpPr>
         <p:spPr>
           <a:xfrm>
-            <a:off x="5166360" y="3346704"/>
-            <a:ext cx="3566160" cy="237744"/>
+            <a:off x="6446520" y="3346704"/>
+            <a:ext cx="4846320" cy="237744"/>
           </a:xfrm>
           <a:prstGeom prst="rect">
             <a:avLst/>
@@ -21277,8 +21277,8 @@
         </p:nvSpPr>
         <p:spPr>
           <a:xfrm>
-            <a:off x="5166360" y="3584448"/>
-            <a:ext cx="3566160" cy="219456"/>
+            <a:off x="6446520" y="3584448"/>
+            <a:ext cx="4846320" cy="219456"/>
           </a:xfrm>
           <a:prstGeom prst="rect">
             <a:avLst/>
@@ -21316,8 +21316,8 @@
         </p:nvSpPr>
         <p:spPr>
           <a:xfrm>
-            <a:off x="5212080" y="3913632"/>
-            <a:ext cx="3474720" cy="566928"/>
+            <a:off x="6492240" y="3913632"/>
+            <a:ext cx="4754880" cy="566928"/>
           </a:xfrm>
           <a:prstGeom prst="roundRect">
             <a:avLst>
@@ -21343,8 +21343,8 @@
         </p:nvSpPr>
         <p:spPr>
           <a:xfrm>
-            <a:off x="5349240" y="3913632"/>
-            <a:ext cx="3200400" cy="566928"/>
+            <a:off x="6629400" y="3913632"/>
+            <a:ext cx="4480560" cy="566928"/>
           </a:xfrm>
           <a:prstGeom prst="rect">
             <a:avLst/>
@@ -21400,937 +21400,7 @@
       </p:sp>
       <p:sp>
         <p:nvSpPr>
-          <p:cNvPr id="31" name="Shape 29"/>
-          <p:cNvSpPr/>
-          <p:nvPr/>
-        </p:nvSpPr>
-        <p:spPr>
-          <a:xfrm>
-            <a:off x="9189720" y="914400"/>
-            <a:ext cx="2633472" cy="4572000"/>
-          </a:xfrm>
-          <a:prstGeom prst="roundRect">
-            <a:avLst>
-              <a:gd name="adj" fmla="val 2083"/>
-            </a:avLst>
-          </a:prstGeom>
-          <a:solidFill>
-            <a:srgbClr val="EDECFB"/>
-          </a:solidFill>
-          <a:ln w="16510">
-            <a:solidFill>
-              <a:srgbClr val="4338CA"/>
-            </a:solidFill>
-            <a:prstDash val="solid"/>
-          </a:ln>
-        </p:spPr>
-      </p:sp>
-      <p:sp>
-        <p:nvSpPr>
-          <p:cNvPr id="32" name="Text 30"/>
-          <p:cNvSpPr txBox="1"/>
-          <p:nvPr/>
-        </p:nvSpPr>
-        <p:spPr>
-          <a:xfrm>
-            <a:off x="9390888" y="1060704"/>
-            <a:ext cx="2231136" cy="219456"/>
-          </a:xfrm>
-          <a:prstGeom prst="rect">
-            <a:avLst/>
-          </a:prstGeom>
-          <a:noFill/>
-          <a:ln/>
-        </p:spPr>
-        <p:txBody>
-          <a:bodyPr wrap="square" lIns="0" tIns="0" rIns="0" bIns="0" rtlCol="0" anchor="ctr"/>
-          <a:lstStyle/>
-          <a:p>
-            <a:pPr indent="0" marL="0">
-              <a:buNone/>
-            </a:pPr>
-            <a:r>
-              <a:rPr lang="en-US" sz="900" b="1" spc="70" kern="0" dirty="0">
-                <a:solidFill>
-                  <a:srgbClr val="4338CA"/>
-                </a:solidFill>
-                <a:latin typeface="Arial" pitchFamily="34" charset="0"/>
-                <a:ea typeface="Arial" pitchFamily="34" charset="-122"/>
-                <a:cs typeface="Arial" pitchFamily="34" charset="-120"/>
-              </a:rPr>
-              <a:t>THE IMPORT FAILURES</a:t>
-            </a:r>
-            <a:endParaRPr lang="en-US" sz="900" dirty="0"/>
-          </a:p>
-        </p:txBody>
-      </p:sp>
-      <p:sp>
-        <p:nvSpPr>
-          <p:cNvPr id="33" name="Text 31"/>
-          <p:cNvSpPr txBox="1"/>
-          <p:nvPr/>
-        </p:nvSpPr>
-        <p:spPr>
-          <a:xfrm>
-            <a:off x="9390888" y="1298448"/>
-            <a:ext cx="2231136" cy="310896"/>
-          </a:xfrm>
-          <a:prstGeom prst="rect">
-            <a:avLst/>
-          </a:prstGeom>
-          <a:noFill/>
-          <a:ln/>
-        </p:spPr>
-        <p:txBody>
-          <a:bodyPr wrap="square" lIns="0" tIns="0" rIns="0" bIns="0" rtlCol="0" anchor="ctr"/>
-          <a:lstStyle/>
-          <a:p>
-            <a:pPr indent="0" marL="0">
-              <a:lnSpc>
-                <a:spcPct val="115000"/>
-              </a:lnSpc>
-              <a:buNone/>
-            </a:pPr>
-            <a:r>
-              <a:rPr lang="en-US" sz="780" i="1" dirty="0">
-                <a:solidFill>
-                  <a:srgbClr val="4A4A5E"/>
-                </a:solidFill>
-                <a:latin typeface="Arial" pitchFamily="34" charset="0"/>
-                <a:ea typeface="Arial" pitchFamily="34" charset="-122"/>
-                <a:cs typeface="Arial" pitchFamily="34" charset="-120"/>
-              </a:rPr>
-              <a:t>Not noticed today (GGW), so detection comes before retries:</a:t>
-            </a:r>
-            <a:endParaRPr lang="en-US" sz="780" dirty="0"/>
-          </a:p>
-        </p:txBody>
-      </p:sp>
-      <p:sp>
-        <p:nvSpPr>
-          <p:cNvPr id="34" name="Shape 32"/>
-          <p:cNvSpPr/>
-          <p:nvPr/>
-        </p:nvSpPr>
-        <p:spPr>
-          <a:xfrm>
-            <a:off x="9390888" y="1700784"/>
-            <a:ext cx="274320" cy="274320"/>
-          </a:xfrm>
-          <a:prstGeom prst="ellipse">
-            <a:avLst/>
-          </a:prstGeom>
-          <a:solidFill>
-            <a:srgbClr val="4338CA"/>
-          </a:solidFill>
-          <a:ln/>
-        </p:spPr>
-      </p:sp>
-      <p:sp>
-        <p:nvSpPr>
-          <p:cNvPr id="35" name="Text 33"/>
-          <p:cNvSpPr txBox="1"/>
-          <p:nvPr/>
-        </p:nvSpPr>
-        <p:spPr>
-          <a:xfrm>
-            <a:off x="9390888" y="1700784"/>
-            <a:ext cx="274320" cy="274320"/>
-          </a:xfrm>
-          <a:prstGeom prst="rect">
-            <a:avLst/>
-          </a:prstGeom>
-          <a:noFill/>
-          <a:ln/>
-        </p:spPr>
-        <p:txBody>
-          <a:bodyPr wrap="square" lIns="0" tIns="0" rIns="0" bIns="0" rtlCol="0" anchor="ctr"/>
-          <a:lstStyle/>
-          <a:p>
-            <a:pPr algn="ctr" indent="0" marL="0">
-              <a:buNone/>
-            </a:pPr>
-            <a:r>
-              <a:rPr lang="en-US" sz="950" b="1" dirty="0">
-                <a:solidFill>
-                  <a:srgbClr val="FFFFFF"/>
-                </a:solidFill>
-                <a:latin typeface="Arial" pitchFamily="34" charset="0"/>
-                <a:ea typeface="Arial" pitchFamily="34" charset="-122"/>
-                <a:cs typeface="Arial" pitchFamily="34" charset="-120"/>
-              </a:rPr>
-              <a:t>1</a:t>
-            </a:r>
-            <a:endParaRPr lang="en-US" sz="950" dirty="0"/>
-          </a:p>
-        </p:txBody>
-      </p:sp>
-      <p:sp>
-        <p:nvSpPr>
-          <p:cNvPr id="36" name="Text 34"/>
-          <p:cNvSpPr txBox="1"/>
-          <p:nvPr/>
-        </p:nvSpPr>
-        <p:spPr>
-          <a:xfrm>
-            <a:off x="9738360" y="1682496"/>
-            <a:ext cx="1883664" cy="173736"/>
-          </a:xfrm>
-          <a:prstGeom prst="rect">
-            <a:avLst/>
-          </a:prstGeom>
-          <a:noFill/>
-          <a:ln/>
-        </p:spPr>
-        <p:txBody>
-          <a:bodyPr wrap="square" lIns="0" tIns="0" rIns="0" bIns="0" rtlCol="0" anchor="ctr"/>
-          <a:lstStyle/>
-          <a:p>
-            <a:pPr indent="0" marL="0">
-              <a:buNone/>
-            </a:pPr>
-            <a:r>
-              <a:rPr lang="en-US" sz="880" b="1" dirty="0">
-                <a:solidFill>
-                  <a:srgbClr val="2A2A3E"/>
-                </a:solidFill>
-                <a:latin typeface="Arial" pitchFamily="34" charset="0"/>
-                <a:ea typeface="Arial" pitchFamily="34" charset="-122"/>
-                <a:cs typeface="Arial" pitchFamily="34" charset="-120"/>
-              </a:rPr>
-              <a:t>Count what should arrive</a:t>
-            </a:r>
-            <a:endParaRPr lang="en-US" sz="880" dirty="0"/>
-          </a:p>
-        </p:txBody>
-      </p:sp>
-      <p:sp>
-        <p:nvSpPr>
-          <p:cNvPr id="37" name="Text 35"/>
-          <p:cNvSpPr txBox="1"/>
-          <p:nvPr/>
-        </p:nvSpPr>
-        <p:spPr>
-          <a:xfrm>
-            <a:off x="9738360" y="1847088"/>
-            <a:ext cx="1883664" cy="164592"/>
-          </a:xfrm>
-          <a:prstGeom prst="rect">
-            <a:avLst/>
-          </a:prstGeom>
-          <a:noFill/>
-          <a:ln/>
-        </p:spPr>
-        <p:txBody>
-          <a:bodyPr wrap="square" lIns="0" tIns="0" rIns="0" bIns="0" rtlCol="0" anchor="ctr"/>
-          <a:lstStyle/>
-          <a:p>
-            <a:pPr indent="0" marL="0">
-              <a:buNone/>
-            </a:pPr>
-            <a:r>
-              <a:rPr lang="en-US" sz="760" dirty="0">
-                <a:solidFill>
-                  <a:srgbClr val="6A6A7E"/>
-                </a:solidFill>
-                <a:latin typeface="Arial" pitchFamily="34" charset="0"/>
-                <a:ea typeface="Arial" pitchFamily="34" charset="-122"/>
-                <a:cs typeface="Arial" pitchFamily="34" charset="-120"/>
-              </a:rPr>
-              <a:t>daily reconciliation catches gaps</a:t>
-            </a:r>
-            <a:endParaRPr lang="en-US" sz="760" dirty="0"/>
-          </a:p>
-        </p:txBody>
-      </p:sp>
-      <p:sp>
-        <p:nvSpPr>
-          <p:cNvPr id="38" name="Shape 36"/>
-          <p:cNvSpPr/>
-          <p:nvPr/>
-        </p:nvSpPr>
-        <p:spPr>
-          <a:xfrm>
-            <a:off x="9390888" y="2189988"/>
-            <a:ext cx="274320" cy="274320"/>
-          </a:xfrm>
-          <a:prstGeom prst="ellipse">
-            <a:avLst/>
-          </a:prstGeom>
-          <a:solidFill>
-            <a:srgbClr val="4338CA"/>
-          </a:solidFill>
-          <a:ln/>
-        </p:spPr>
-      </p:sp>
-      <p:sp>
-        <p:nvSpPr>
-          <p:cNvPr id="39" name="Text 37"/>
-          <p:cNvSpPr txBox="1"/>
-          <p:nvPr/>
-        </p:nvSpPr>
-        <p:spPr>
-          <a:xfrm>
-            <a:off x="9390888" y="2189988"/>
-            <a:ext cx="274320" cy="274320"/>
-          </a:xfrm>
-          <a:prstGeom prst="rect">
-            <a:avLst/>
-          </a:prstGeom>
-          <a:noFill/>
-          <a:ln/>
-        </p:spPr>
-        <p:txBody>
-          <a:bodyPr wrap="square" lIns="0" tIns="0" rIns="0" bIns="0" rtlCol="0" anchor="ctr"/>
-          <a:lstStyle/>
-          <a:p>
-            <a:pPr algn="ctr" indent="0" marL="0">
-              <a:buNone/>
-            </a:pPr>
-            <a:r>
-              <a:rPr lang="en-US" sz="950" b="1" dirty="0">
-                <a:solidFill>
-                  <a:srgbClr val="FFFFFF"/>
-                </a:solidFill>
-                <a:latin typeface="Arial" pitchFamily="34" charset="0"/>
-                <a:ea typeface="Arial" pitchFamily="34" charset="-122"/>
-                <a:cs typeface="Arial" pitchFamily="34" charset="-120"/>
-              </a:rPr>
-              <a:t>2</a:t>
-            </a:r>
-            <a:endParaRPr lang="en-US" sz="950" dirty="0"/>
-          </a:p>
-        </p:txBody>
-      </p:sp>
-      <p:sp>
-        <p:nvSpPr>
-          <p:cNvPr id="40" name="Text 38"/>
-          <p:cNvSpPr txBox="1"/>
-          <p:nvPr/>
-        </p:nvSpPr>
-        <p:spPr>
-          <a:xfrm>
-            <a:off x="9738360" y="2171700"/>
-            <a:ext cx="1883664" cy="173736"/>
-          </a:xfrm>
-          <a:prstGeom prst="rect">
-            <a:avLst/>
-          </a:prstGeom>
-          <a:noFill/>
-          <a:ln/>
-        </p:spPr>
-        <p:txBody>
-          <a:bodyPr wrap="square" lIns="0" tIns="0" rIns="0" bIns="0" rtlCol="0" anchor="ctr"/>
-          <a:lstStyle/>
-          <a:p>
-            <a:pPr indent="0" marL="0">
-              <a:buNone/>
-            </a:pPr>
-            <a:r>
-              <a:rPr lang="en-US" sz="880" b="1" dirty="0">
-                <a:solidFill>
-                  <a:srgbClr val="2A2A3E"/>
-                </a:solidFill>
-                <a:latin typeface="Arial" pitchFamily="34" charset="0"/>
-                <a:ea typeface="Arial" pitchFamily="34" charset="-122"/>
-                <a:cs typeface="Arial" pitchFamily="34" charset="-120"/>
-              </a:rPr>
-              <a:t>Sort the failure</a:t>
-            </a:r>
-            <a:endParaRPr lang="en-US" sz="880" dirty="0"/>
-          </a:p>
-        </p:txBody>
-      </p:sp>
-      <p:sp>
-        <p:nvSpPr>
-          <p:cNvPr id="41" name="Text 39"/>
-          <p:cNvSpPr txBox="1"/>
-          <p:nvPr/>
-        </p:nvSpPr>
-        <p:spPr>
-          <a:xfrm>
-            <a:off x="9738360" y="2336292"/>
-            <a:ext cx="1883664" cy="164592"/>
-          </a:xfrm>
-          <a:prstGeom prst="rect">
-            <a:avLst/>
-          </a:prstGeom>
-          <a:noFill/>
-          <a:ln/>
-        </p:spPr>
-        <p:txBody>
-          <a:bodyPr wrap="square" lIns="0" tIns="0" rIns="0" bIns="0" rtlCol="0" anchor="ctr"/>
-          <a:lstStyle/>
-          <a:p>
-            <a:pPr indent="0" marL="0">
-              <a:buNone/>
-            </a:pPr>
-            <a:r>
-              <a:rPr lang="en-US" sz="760" dirty="0">
-                <a:solidFill>
-                  <a:srgbClr val="6A6A7E"/>
-                </a:solidFill>
-                <a:latin typeface="Arial" pitchFamily="34" charset="0"/>
-                <a:ea typeface="Arial" pitchFamily="34" charset="-122"/>
-                <a:cs typeface="Arial" pitchFamily="34" charset="-120"/>
-              </a:rPr>
-              <a:t>timeout vs. missing field</a:t>
-            </a:r>
-            <a:endParaRPr lang="en-US" sz="760" dirty="0"/>
-          </a:p>
-        </p:txBody>
-      </p:sp>
-      <p:sp>
-        <p:nvSpPr>
-          <p:cNvPr id="42" name="Shape 40"/>
-          <p:cNvSpPr/>
-          <p:nvPr/>
-        </p:nvSpPr>
-        <p:spPr>
-          <a:xfrm>
-            <a:off x="9390888" y="2665476"/>
-            <a:ext cx="274320" cy="274320"/>
-          </a:xfrm>
-          <a:prstGeom prst="ellipse">
-            <a:avLst/>
-          </a:prstGeom>
-          <a:solidFill>
-            <a:srgbClr val="4338CA"/>
-          </a:solidFill>
-          <a:ln/>
-        </p:spPr>
-      </p:sp>
-      <p:sp>
-        <p:nvSpPr>
-          <p:cNvPr id="43" name="Text 41"/>
-          <p:cNvSpPr txBox="1"/>
-          <p:nvPr/>
-        </p:nvSpPr>
-        <p:spPr>
-          <a:xfrm>
-            <a:off x="9390888" y="2665476"/>
-            <a:ext cx="274320" cy="274320"/>
-          </a:xfrm>
-          <a:prstGeom prst="rect">
-            <a:avLst/>
-          </a:prstGeom>
-          <a:noFill/>
-          <a:ln/>
-        </p:spPr>
-        <p:txBody>
-          <a:bodyPr wrap="square" lIns="0" tIns="0" rIns="0" bIns="0" rtlCol="0" anchor="ctr"/>
-          <a:lstStyle/>
-          <a:p>
-            <a:pPr algn="ctr" indent="0" marL="0">
-              <a:buNone/>
-            </a:pPr>
-            <a:r>
-              <a:rPr lang="en-US" sz="950" b="1" dirty="0">
-                <a:solidFill>
-                  <a:srgbClr val="FFFFFF"/>
-                </a:solidFill>
-                <a:latin typeface="Arial" pitchFamily="34" charset="0"/>
-                <a:ea typeface="Arial" pitchFamily="34" charset="-122"/>
-                <a:cs typeface="Arial" pitchFamily="34" charset="-120"/>
-              </a:rPr>
-              <a:t>3</a:t>
-            </a:r>
-            <a:endParaRPr lang="en-US" sz="950" dirty="0"/>
-          </a:p>
-        </p:txBody>
-      </p:sp>
-      <p:sp>
-        <p:nvSpPr>
-          <p:cNvPr id="44" name="Text 42"/>
-          <p:cNvSpPr txBox="1"/>
-          <p:nvPr/>
-        </p:nvSpPr>
-        <p:spPr>
-          <a:xfrm>
-            <a:off x="9738360" y="2647188"/>
-            <a:ext cx="1883664" cy="173736"/>
-          </a:xfrm>
-          <a:prstGeom prst="rect">
-            <a:avLst/>
-          </a:prstGeom>
-          <a:noFill/>
-          <a:ln/>
-        </p:spPr>
-        <p:txBody>
-          <a:bodyPr wrap="square" lIns="0" tIns="0" rIns="0" bIns="0" rtlCol="0" anchor="ctr"/>
-          <a:lstStyle/>
-          <a:p>
-            <a:pPr indent="0" marL="0">
-              <a:buNone/>
-            </a:pPr>
-            <a:r>
-              <a:rPr lang="en-US" sz="880" b="1" dirty="0">
-                <a:solidFill>
-                  <a:srgbClr val="2A2A3E"/>
-                </a:solidFill>
-                <a:latin typeface="Arial" pitchFamily="34" charset="0"/>
-                <a:ea typeface="Arial" pitchFamily="34" charset="-122"/>
-                <a:cs typeface="Arial" pitchFamily="34" charset="-120"/>
-              </a:rPr>
-              <a:t>Retry with backoff</a:t>
-            </a:r>
-            <a:endParaRPr lang="en-US" sz="880" dirty="0"/>
-          </a:p>
-        </p:txBody>
-      </p:sp>
-      <p:sp>
-        <p:nvSpPr>
-          <p:cNvPr id="45" name="Text 43"/>
-          <p:cNvSpPr txBox="1"/>
-          <p:nvPr/>
-        </p:nvSpPr>
-        <p:spPr>
-          <a:xfrm>
-            <a:off x="9738360" y="2811780"/>
-            <a:ext cx="1883664" cy="164592"/>
-          </a:xfrm>
-          <a:prstGeom prst="rect">
-            <a:avLst/>
-          </a:prstGeom>
-          <a:noFill/>
-          <a:ln/>
-        </p:spPr>
-        <p:txBody>
-          <a:bodyPr wrap="square" lIns="0" tIns="0" rIns="0" bIns="0" rtlCol="0" anchor="ctr"/>
-          <a:lstStyle/>
-          <a:p>
-            <a:pPr indent="0" marL="0">
-              <a:buNone/>
-            </a:pPr>
-            <a:r>
-              <a:rPr lang="en-US" sz="760" dirty="0">
-                <a:solidFill>
-                  <a:srgbClr val="6A6A7E"/>
-                </a:solidFill>
-                <a:latin typeface="Arial" pitchFamily="34" charset="0"/>
-                <a:ea typeface="Arial" pitchFamily="34" charset="-122"/>
-                <a:cs typeface="Arial" pitchFamily="34" charset="-120"/>
-              </a:rPr>
-              <a:t>1s, 2s, 4s + jitter</a:t>
-            </a:r>
-            <a:endParaRPr lang="en-US" sz="760" dirty="0"/>
-          </a:p>
-        </p:txBody>
-      </p:sp>
-      <p:sp>
-        <p:nvSpPr>
-          <p:cNvPr id="46" name="Shape 44"/>
-          <p:cNvSpPr/>
-          <p:nvPr/>
-        </p:nvSpPr>
-        <p:spPr>
-          <a:xfrm>
-            <a:off x="9390888" y="3166567"/>
-            <a:ext cx="274320" cy="274320"/>
-          </a:xfrm>
-          <a:prstGeom prst="ellipse">
-            <a:avLst/>
-          </a:prstGeom>
-          <a:solidFill>
-            <a:srgbClr val="4338CA"/>
-          </a:solidFill>
-          <a:ln/>
-        </p:spPr>
-      </p:sp>
-      <p:sp>
-        <p:nvSpPr>
-          <p:cNvPr id="47" name="Text 45"/>
-          <p:cNvSpPr txBox="1"/>
-          <p:nvPr/>
-        </p:nvSpPr>
-        <p:spPr>
-          <a:xfrm>
-            <a:off x="9390888" y="3166567"/>
-            <a:ext cx="274320" cy="274320"/>
-          </a:xfrm>
-          <a:prstGeom prst="rect">
-            <a:avLst/>
-          </a:prstGeom>
-          <a:noFill/>
-          <a:ln/>
-        </p:spPr>
-        <p:txBody>
-          <a:bodyPr wrap="square" lIns="0" tIns="0" rIns="0" bIns="0" rtlCol="0" anchor="ctr"/>
-          <a:lstStyle/>
-          <a:p>
-            <a:pPr algn="ctr" indent="0" marL="0">
-              <a:buNone/>
-            </a:pPr>
-            <a:r>
-              <a:rPr lang="en-US" sz="950" b="1" dirty="0">
-                <a:solidFill>
-                  <a:srgbClr val="FFFFFF"/>
-                </a:solidFill>
-                <a:latin typeface="Arial" pitchFamily="34" charset="0"/>
-                <a:ea typeface="Arial" pitchFamily="34" charset="-122"/>
-                <a:cs typeface="Arial" pitchFamily="34" charset="-120"/>
-              </a:rPr>
-              <a:t>4</a:t>
-            </a:r>
-            <a:endParaRPr lang="en-US" sz="950" dirty="0"/>
-          </a:p>
-        </p:txBody>
-      </p:sp>
-      <p:sp>
-        <p:nvSpPr>
-          <p:cNvPr id="48" name="Text 46"/>
-          <p:cNvSpPr txBox="1"/>
-          <p:nvPr/>
-        </p:nvSpPr>
-        <p:spPr>
-          <a:xfrm>
-            <a:off x="9738360" y="3148279"/>
-            <a:ext cx="1883664" cy="173736"/>
-          </a:xfrm>
-          <a:prstGeom prst="rect">
-            <a:avLst/>
-          </a:prstGeom>
-          <a:noFill/>
-          <a:ln/>
-        </p:spPr>
-        <p:txBody>
-          <a:bodyPr wrap="square" lIns="0" tIns="0" rIns="0" bIns="0" rtlCol="0" anchor="ctr"/>
-          <a:lstStyle/>
-          <a:p>
-            <a:pPr indent="0" marL="0">
-              <a:buNone/>
-            </a:pPr>
-            <a:r>
-              <a:rPr lang="en-US" sz="880" b="1" dirty="0">
-                <a:solidFill>
-                  <a:srgbClr val="2A2A3E"/>
-                </a:solidFill>
-                <a:latin typeface="Arial" pitchFamily="34" charset="0"/>
-                <a:ea typeface="Arial" pitchFamily="34" charset="-122"/>
-                <a:cs typeface="Arial" pitchFamily="34" charset="-120"/>
-              </a:rPr>
-              <a:t>One key per claim</a:t>
-            </a:r>
-            <a:endParaRPr lang="en-US" sz="880" dirty="0"/>
-          </a:p>
-        </p:txBody>
-      </p:sp>
-      <p:sp>
-        <p:nvSpPr>
-          <p:cNvPr id="49" name="Text 47"/>
-          <p:cNvSpPr txBox="1"/>
-          <p:nvPr/>
-        </p:nvSpPr>
-        <p:spPr>
-          <a:xfrm>
-            <a:off x="9738360" y="3312871"/>
-            <a:ext cx="1883664" cy="164592"/>
-          </a:xfrm>
-          <a:prstGeom prst="rect">
-            <a:avLst/>
-          </a:prstGeom>
-          <a:noFill/>
-          <a:ln/>
-        </p:spPr>
-        <p:txBody>
-          <a:bodyPr wrap="square" lIns="0" tIns="0" rIns="0" bIns="0" rtlCol="0" anchor="ctr"/>
-          <a:lstStyle/>
-          <a:p>
-            <a:pPr indent="0" marL="0">
-              <a:buNone/>
-            </a:pPr>
-            <a:r>
-              <a:rPr lang="en-US" sz="760" dirty="0">
-                <a:solidFill>
-                  <a:srgbClr val="6A6A7E"/>
-                </a:solidFill>
-                <a:latin typeface="Arial" pitchFamily="34" charset="0"/>
-                <a:ea typeface="Arial" pitchFamily="34" charset="-122"/>
-                <a:cs typeface="Arial" pitchFamily="34" charset="-120"/>
-              </a:rPr>
-              <a:t>no duplicate replays</a:t>
-            </a:r>
-            <a:endParaRPr lang="en-US" sz="760" dirty="0"/>
-          </a:p>
-        </p:txBody>
-      </p:sp>
-      <p:sp>
-        <p:nvSpPr>
-          <p:cNvPr id="50" name="Shape 48"/>
-          <p:cNvSpPr/>
-          <p:nvPr/>
-        </p:nvSpPr>
-        <p:spPr>
-          <a:xfrm>
-            <a:off x="9390888" y="3643884"/>
-            <a:ext cx="274320" cy="274320"/>
-          </a:xfrm>
-          <a:prstGeom prst="ellipse">
-            <a:avLst/>
-          </a:prstGeom>
-          <a:solidFill>
-            <a:srgbClr val="4338CA"/>
-          </a:solidFill>
-          <a:ln/>
-        </p:spPr>
-      </p:sp>
-      <p:sp>
-        <p:nvSpPr>
-          <p:cNvPr id="51" name="Text 49"/>
-          <p:cNvSpPr txBox="1"/>
-          <p:nvPr/>
-        </p:nvSpPr>
-        <p:spPr>
-          <a:xfrm>
-            <a:off x="9390888" y="3643884"/>
-            <a:ext cx="274320" cy="274320"/>
-          </a:xfrm>
-          <a:prstGeom prst="rect">
-            <a:avLst/>
-          </a:prstGeom>
-          <a:noFill/>
-          <a:ln/>
-        </p:spPr>
-        <p:txBody>
-          <a:bodyPr wrap="square" lIns="0" tIns="0" rIns="0" bIns="0" rtlCol="0" anchor="ctr"/>
-          <a:lstStyle/>
-          <a:p>
-            <a:pPr algn="ctr" indent="0" marL="0">
-              <a:buNone/>
-            </a:pPr>
-            <a:r>
-              <a:rPr lang="en-US" sz="950" b="1" dirty="0">
-                <a:solidFill>
-                  <a:srgbClr val="FFFFFF"/>
-                </a:solidFill>
-                <a:latin typeface="Arial" pitchFamily="34" charset="0"/>
-                <a:ea typeface="Arial" pitchFamily="34" charset="-122"/>
-                <a:cs typeface="Arial" pitchFamily="34" charset="-120"/>
-              </a:rPr>
-              <a:t>5</a:t>
-            </a:r>
-            <a:endParaRPr lang="en-US" sz="950" dirty="0"/>
-          </a:p>
-        </p:txBody>
-      </p:sp>
-      <p:sp>
-        <p:nvSpPr>
-          <p:cNvPr id="52" name="Text 50"/>
-          <p:cNvSpPr txBox="1"/>
-          <p:nvPr/>
-        </p:nvSpPr>
-        <p:spPr>
-          <a:xfrm>
-            <a:off x="9738360" y="3625596"/>
-            <a:ext cx="1883664" cy="173736"/>
-          </a:xfrm>
-          <a:prstGeom prst="rect">
-            <a:avLst/>
-          </a:prstGeom>
-          <a:noFill/>
-          <a:ln/>
-        </p:spPr>
-        <p:txBody>
-          <a:bodyPr wrap="square" lIns="0" tIns="0" rIns="0" bIns="0" rtlCol="0" anchor="ctr"/>
-          <a:lstStyle/>
-          <a:p>
-            <a:pPr indent="0" marL="0">
-              <a:buNone/>
-            </a:pPr>
-            <a:r>
-              <a:rPr lang="en-US" sz="880" b="1" dirty="0">
-                <a:solidFill>
-                  <a:srgbClr val="2A2A3E"/>
-                </a:solidFill>
-                <a:latin typeface="Arial" pitchFamily="34" charset="0"/>
-                <a:ea typeface="Arial" pitchFamily="34" charset="-122"/>
-                <a:cs typeface="Arial" pitchFamily="34" charset="-120"/>
-              </a:rPr>
-              <a:t>Park, don't drop</a:t>
-            </a:r>
-            <a:endParaRPr lang="en-US" sz="880" dirty="0"/>
-          </a:p>
-        </p:txBody>
-      </p:sp>
-      <p:sp>
-        <p:nvSpPr>
-          <p:cNvPr id="53" name="Text 51"/>
-          <p:cNvSpPr txBox="1"/>
-          <p:nvPr/>
-        </p:nvSpPr>
-        <p:spPr>
-          <a:xfrm>
-            <a:off x="9738360" y="3790188"/>
-            <a:ext cx="1883664" cy="164592"/>
-          </a:xfrm>
-          <a:prstGeom prst="rect">
-            <a:avLst/>
-          </a:prstGeom>
-          <a:noFill/>
-          <a:ln/>
-        </p:spPr>
-        <p:txBody>
-          <a:bodyPr wrap="square" lIns="0" tIns="0" rIns="0" bIns="0" rtlCol="0" anchor="ctr"/>
-          <a:lstStyle/>
-          <a:p>
-            <a:pPr indent="0" marL="0">
-              <a:buNone/>
-            </a:pPr>
-            <a:r>
-              <a:rPr lang="en-US" sz="760" dirty="0">
-                <a:solidFill>
-                  <a:srgbClr val="6A6A7E"/>
-                </a:solidFill>
-                <a:latin typeface="Arial" pitchFamily="34" charset="0"/>
-                <a:ea typeface="Arial" pitchFamily="34" charset="-122"/>
-                <a:cs typeface="Arial" pitchFamily="34" charset="-120"/>
-              </a:rPr>
-              <a:t>holding queue for review</a:t>
-            </a:r>
-            <a:endParaRPr lang="en-US" sz="760" dirty="0"/>
-          </a:p>
-        </p:txBody>
-      </p:sp>
-      <p:sp>
-        <p:nvSpPr>
-          <p:cNvPr id="54" name="Shape 52"/>
-          <p:cNvSpPr/>
-          <p:nvPr/>
-        </p:nvSpPr>
-        <p:spPr>
-          <a:xfrm>
-            <a:off x="9390888" y="4142232"/>
-            <a:ext cx="274320" cy="274320"/>
-          </a:xfrm>
-          <a:prstGeom prst="ellipse">
-            <a:avLst/>
-          </a:prstGeom>
-          <a:solidFill>
-            <a:srgbClr val="4338CA"/>
-          </a:solidFill>
-          <a:ln/>
-        </p:spPr>
-      </p:sp>
-      <p:sp>
-        <p:nvSpPr>
-          <p:cNvPr id="55" name="Text 53"/>
-          <p:cNvSpPr txBox="1"/>
-          <p:nvPr/>
-        </p:nvSpPr>
-        <p:spPr>
-          <a:xfrm>
-            <a:off x="9390888" y="4142232"/>
-            <a:ext cx="274320" cy="274320"/>
-          </a:xfrm>
-          <a:prstGeom prst="rect">
-            <a:avLst/>
-          </a:prstGeom>
-          <a:noFill/>
-          <a:ln/>
-        </p:spPr>
-        <p:txBody>
-          <a:bodyPr wrap="square" lIns="0" tIns="0" rIns="0" bIns="0" rtlCol="0" anchor="ctr"/>
-          <a:lstStyle/>
-          <a:p>
-            <a:pPr algn="ctr" indent="0" marL="0">
-              <a:buNone/>
-            </a:pPr>
-            <a:r>
-              <a:rPr lang="en-US" sz="950" b="1" dirty="0">
-                <a:solidFill>
-                  <a:srgbClr val="FFFFFF"/>
-                </a:solidFill>
-                <a:latin typeface="Arial" pitchFamily="34" charset="0"/>
-                <a:ea typeface="Arial" pitchFamily="34" charset="-122"/>
-                <a:cs typeface="Arial" pitchFamily="34" charset="-120"/>
-              </a:rPr>
-              <a:t>6</a:t>
-            </a:r>
-            <a:endParaRPr lang="en-US" sz="950" dirty="0"/>
-          </a:p>
-        </p:txBody>
-      </p:sp>
-      <p:sp>
-        <p:nvSpPr>
-          <p:cNvPr id="56" name="Text 54"/>
-          <p:cNvSpPr txBox="1"/>
-          <p:nvPr/>
-        </p:nvSpPr>
-        <p:spPr>
-          <a:xfrm>
-            <a:off x="9738360" y="4123944"/>
-            <a:ext cx="1883664" cy="173736"/>
-          </a:xfrm>
-          <a:prstGeom prst="rect">
-            <a:avLst/>
-          </a:prstGeom>
-          <a:noFill/>
-          <a:ln/>
-        </p:spPr>
-        <p:txBody>
-          <a:bodyPr wrap="square" lIns="0" tIns="0" rIns="0" bIns="0" rtlCol="0" anchor="ctr"/>
-          <a:lstStyle/>
-          <a:p>
-            <a:pPr indent="0" marL="0">
-              <a:buNone/>
-            </a:pPr>
-            <a:r>
-              <a:rPr lang="en-US" sz="880" b="1" dirty="0">
-                <a:solidFill>
-                  <a:srgbClr val="2A2A3E"/>
-                </a:solidFill>
-                <a:latin typeface="Arial" pitchFamily="34" charset="0"/>
-                <a:ea typeface="Arial" pitchFamily="34" charset="-122"/>
-                <a:cs typeface="Arial" pitchFamily="34" charset="-120"/>
-              </a:rPr>
-              <a:t>Alert on the rate</a:t>
-            </a:r>
-            <a:endParaRPr lang="en-US" sz="880" dirty="0"/>
-          </a:p>
-        </p:txBody>
-      </p:sp>
-      <p:sp>
-        <p:nvSpPr>
-          <p:cNvPr id="57" name="Text 55"/>
-          <p:cNvSpPr txBox="1"/>
-          <p:nvPr/>
-        </p:nvSpPr>
-        <p:spPr>
-          <a:xfrm>
-            <a:off x="9738360" y="4288536"/>
-            <a:ext cx="1883664" cy="164592"/>
-          </a:xfrm>
-          <a:prstGeom prst="rect">
-            <a:avLst/>
-          </a:prstGeom>
-          <a:noFill/>
-          <a:ln/>
-        </p:spPr>
-        <p:txBody>
-          <a:bodyPr wrap="square" lIns="0" tIns="0" rIns="0" bIns="0" rtlCol="0" anchor="ctr"/>
-          <a:lstStyle/>
-          <a:p>
-            <a:pPr indent="0" marL="0">
-              <a:buNone/>
-            </a:pPr>
-            <a:r>
-              <a:rPr lang="en-US" sz="760" dirty="0">
-                <a:solidFill>
-                  <a:srgbClr val="6A6A7E"/>
-                </a:solidFill>
-                <a:latin typeface="Arial" pitchFamily="34" charset="0"/>
-                <a:ea typeface="Arial" pitchFamily="34" charset="-122"/>
-                <a:cs typeface="Arial" pitchFamily="34" charset="-120"/>
-              </a:rPr>
-              <a:t>a spike matters, a trickle does not</a:t>
-            </a:r>
-            <a:endParaRPr lang="en-US" sz="760" dirty="0"/>
-          </a:p>
-        </p:txBody>
-      </p:sp>
-      <p:sp>
-        <p:nvSpPr>
-          <p:cNvPr id="58" name="Text 56"/>
+          <p:cNvPr id="31" name="Text 29"/>
           <p:cNvSpPr txBox="1"/>
           <p:nvPr/>
         </p:nvSpPr>
@@ -22369,7 +21439,7 @@
       </p:sp>
       <p:sp>
         <p:nvSpPr>
-          <p:cNvPr id="59" name="Text 57"/>
+          <p:cNvPr id="32" name="Text 30"/>
           <p:cNvSpPr txBox="1"/>
           <p:nvPr/>
         </p:nvSpPr>
@@ -22408,7 +21478,7 @@
       </p:sp>
       <p:sp>
         <p:nvSpPr>
-          <p:cNvPr id="60" name="Text 58"/>
+          <p:cNvPr id="33" name="Text 31"/>
           <p:cNvSpPr txBox="1"/>
           <p:nvPr/>
         </p:nvSpPr>

--- a/case-study/deck/GGW_FNOL_Redesign.pptx
+++ b/case-study/deck/GGW_FNOL_Redesign.pptx
@@ -26830,7 +26830,7 @@
         <p:spPr>
           <a:xfrm>
             <a:off x="365760" y="4224528"/>
-            <a:ext cx="5650992" cy="512064"/>
+            <a:ext cx="5650992" cy="384048"/>
           </a:xfrm>
           <a:prstGeom prst="rect">
             <a:avLst/>
@@ -26857,7 +26857,7 @@
                 <a:ea typeface="Arial" pitchFamily="34" charset="-122"/>
                 <a:cs typeface="Arial" pitchFamily="34" charset="-120"/>
               </a:rPr>
-              <a:t>Basis: at 40 minutes a claim, today's standard time, an 8-hour shift holds capacity for 12 claims; at 19 (the banked, most-likely estimate), capacity is ~25, roughly double. That's a ceiling, not the 52 minutes freed above, which is actual time freed on today's claim volume. Confirmed by GGW (8 Sep 2026).</a:t>
+              <a:t>Basis: at 40 minutes a claim, an 8-hour shift holds capacity for 12; at 19, roughly 25. A ceiling, not the 52 minutes freed above. Confirmed by GGW (8 Sep 2026).</a:t>
             </a:r>
             <a:endParaRPr lang="en-US" sz="860" dirty="0"/>
           </a:p>

--- a/case-study/deck/GGW_FNOL_Redesign.pptx
+++ b/case-study/deck/GGW_FNOL_Redesign.pptx
@@ -3432,7 +3432,7 @@
                 <a:ea typeface="Arial" pitchFamily="34" charset="-122"/>
                 <a:cs typeface="Arial" pitchFamily="34" charset="-120"/>
               </a:rPr>
-              <a:t>freed per claim handler per day, out of 6.4 productive hours</a:t>
+              <a:t>freed per claim handler per day, out of 6.0 productive hours</a:t>
             </a:r>
             <a:endParaRPr lang="en-US" sz="840" dirty="0"/>
           </a:p>
@@ -3540,7 +3540,7 @@
                 <a:ea typeface="Arial" pitchFamily="34" charset="-122"/>
                 <a:cs typeface="Arial" pitchFamily="34" charset="-120"/>
               </a:rPr>
-              <a:t>across the 20 claim handlers, or 2.8 full-time people</a:t>
+              <a:t>across the 20 claim handlers, or 2.9 full-time people</a:t>
             </a:r>
             <a:endParaRPr lang="en-US" sz="840" dirty="0"/>
           </a:p>
@@ -3606,7 +3606,7 @@
                 <a:ea typeface="Cambria" pitchFamily="34" charset="-122"/>
                 <a:cs typeface="Cambria" pitchFamily="34" charset="-120"/>
               </a:rPr>
-              <a:t>€153k a year</a:t>
+              <a:t>€162k a year</a:t>
             </a:r>
             <a:endParaRPr lang="en-US" sz="2000" dirty="0"/>
           </a:p>
@@ -3648,7 +3648,7 @@
                 <a:ea typeface="Arial" pitchFamily="34" charset="-122"/>
                 <a:cs typeface="Arial" pitchFamily="34" charset="-120"/>
               </a:rPr>
-              <a:t>what the 4,370 freed handler-hours are worth, at €34.92 fully loaded</a:t>
+              <a:t>what the 4,370 freed handler-hours are worth, at €36.98 fully loaded</a:t>
             </a:r>
             <a:endParaRPr lang="en-US" sz="840" dirty="0"/>
           </a:p>
@@ -3714,7 +3714,7 @@
                 <a:ea typeface="Cambria" pitchFamily="34" charset="-122"/>
                 <a:cs typeface="Cambria" pitchFamily="34" charset="-120"/>
               </a:rPr>
-              <a:t>14 mths</a:t>
+              <a:t>13 mths</a:t>
             </a:r>
             <a:endParaRPr lang="en-US" sz="2000" dirty="0"/>
           </a:p>
@@ -24810,7 +24810,7 @@
                 <a:ea typeface="Cambria" pitchFamily="34" charset="-122"/>
                 <a:cs typeface="Cambria" pitchFamily="34" charset="-120"/>
               </a:rPr>
-              <a:t>Every minute is observed, and the redesign pays for itself in 14 months</a:t>
+              <a:t>Every minute is observed, and the redesign pays for itself in 13 months</a:t>
             </a:r>
             <a:endParaRPr lang="en-US" sz="1400" dirty="0"/>
           </a:p>
@@ -26857,7 +26857,7 @@
                 <a:ea typeface="Arial" pitchFamily="34" charset="-122"/>
                 <a:cs typeface="Arial" pitchFamily="34" charset="-120"/>
               </a:rPr>
-              <a:t>Basis: at 40 minutes a claim, an 8-hour shift holds capacity for 12; at 19, roughly 25. A ceiling, not the 52 minutes freed above. Confirmed by GGW (8 Sep 2026).</a:t>
+              <a:t>Basis: a 6-hour day holds capacity for 9 claims at 40 min each, ~19 claims at 19 min each. A ceiling, not the 52 minutes freed above. Confirmed by GGW (8 Sep 2026).</a:t>
             </a:r>
             <a:endParaRPr lang="en-US" sz="860" dirty="0"/>
           </a:p>
@@ -27040,7 +27040,7 @@
                 <a:ea typeface="Arial" pitchFamily="34" charset="-122"/>
                 <a:cs typeface="Arial" pitchFamily="34" charset="-120"/>
               </a:rPr>
-              <a:t>4,370 handler-h · 2.8 FTE</a:t>
+              <a:t>4,370 handler-h · 2.9 FTE</a:t>
             </a:r>
             <a:endParaRPr lang="en-US" sz="950" dirty="0"/>
           </a:p>
@@ -27079,7 +27079,7 @@
                 <a:ea typeface="Arial" pitchFamily="34" charset="-122"/>
                 <a:cs typeface="Arial" pitchFamily="34" charset="-120"/>
               </a:rPr>
-              <a:t>Worth, at €34.92 per handler-hour</a:t>
+              <a:t>Worth, at €36.98 per handler-hour</a:t>
             </a:r>
             <a:endParaRPr lang="en-US" sz="950" dirty="0"/>
           </a:p>
@@ -27118,7 +27118,7 @@
                 <a:ea typeface="Arial" pitchFamily="34" charset="-122"/>
                 <a:cs typeface="Arial" pitchFamily="34" charset="-120"/>
               </a:rPr>
-              <a:t>€152,600</a:t>
+              <a:t>€161,600</a:t>
             </a:r>
             <a:endParaRPr lang="en-US" sz="950" dirty="0"/>
           </a:p>
@@ -27352,7 +27352,7 @@
                 <a:ea typeface="Arial" pitchFamily="34" charset="-122"/>
                 <a:cs typeface="Arial" pitchFamily="34" charset="-120"/>
               </a:rPr>
-              <a:t>€125,800</a:t>
+              <a:t>€134,800</a:t>
             </a:r>
             <a:endParaRPr lang="en-US" sz="950" dirty="0"/>
           </a:p>
@@ -27547,7 +27547,7 @@
                 <a:ea typeface="Arial" pitchFamily="34" charset="-122"/>
                 <a:cs typeface="Arial" pitchFamily="34" charset="-120"/>
               </a:rPr>
-              <a:t>14 months</a:t>
+              <a:t>13 months</a:t>
             </a:r>
             <a:endParaRPr lang="en-US" sz="950" dirty="0"/>
           </a:p>

--- a/case-study/deck/GGW_FNOL_Redesign.pptx
+++ b/case-study/deck/GGW_FNOL_Redesign.pptx
@@ -3390,7 +3390,7 @@
                 <a:ea typeface="Cambria" pitchFamily="34" charset="-122"/>
                 <a:cs typeface="Cambria" pitchFamily="34" charset="-120"/>
               </a:rPr>
-              <a:t>52 min</a:t>
+              <a:t>9 → 19</a:t>
             </a:r>
             <a:endParaRPr lang="en-US" sz="2000" dirty="0"/>
           </a:p>
@@ -3432,7 +3432,7 @@
                 <a:ea typeface="Arial" pitchFamily="34" charset="-122"/>
                 <a:cs typeface="Arial" pitchFamily="34" charset="-120"/>
               </a:rPr>
-              <a:t>freed per claim handler per day, out of 6.0 productive hours</a:t>
+              <a:t>claims/day capacity per handler, a 6-hour day (ceiling, not added demand)</a:t>
             </a:r>
             <a:endParaRPr lang="en-US" sz="840" dirty="0"/>
           </a:p>
@@ -26857,7 +26857,7 @@
                 <a:ea typeface="Arial" pitchFamily="34" charset="-122"/>
                 <a:cs typeface="Arial" pitchFamily="34" charset="-120"/>
               </a:rPr>
-              <a:t>Basis: a 6-hour day holds capacity for 9 claims at 40 min each, ~19 claims at 19 min each. A ceiling, not the 52 minutes freed above. Confirmed by GGW (8 Sep 2026).</a:t>
+              <a:t>Basis: a 6-hour day holds capacity for 9 claims at 40 min each, ~19 at 19 min each. A ceiling: 50 claims/day actually arrive, not 180. Confirmed by GGW (8 Sep 2026).</a:t>
             </a:r>
             <a:endParaRPr lang="en-US" sz="860" dirty="0"/>
           </a:p>
